--- a/docs/진행공유_요구사항자동화.pptx
+++ b/docs/진행공유_요구사항자동화.pptx
@@ -15,9 +15,10 @@
     <p:sldId id="263" r:id="rId9"/>
     <p:sldId id="264" r:id="rId10"/>
     <p:sldId id="265" r:id="rId11"/>
+    <p:sldId id="266" r:id="rId12"/>
   </p:sldIdLst>
   <p:notesMasterIdLst>
-    <p:notesMasterId r:id="rId12"/>
+    <p:notesMasterId r:id="rId13"/>
   </p:notesMasterIdLst>
   <p:sldSz cx="12191695" cy="6858000"/>
   <p:notesSz cx="6858000" cy="12191695"/>
@@ -623,6 +624,94 @@
             <a:fld id="{F7021451-1387-4CA6-816F-3879F97B5CBC}" type="slidenum">
               <a:rPr lang="en-US"/>
               <a:t>10</a:t>
+            </a:fld>
+            <a:endParaRPr lang="en-US"/>
+          </a:p>
+        </p:txBody>
+      </p:sp>
+    </p:spTree>
+    <p:extLst>
+      <p:ext uri="{BB962C8B-B14F-4D97-AF65-F5344CB8AC3E}">
+        <p14:creationId xmlns:p14="http://schemas.microsoft.com/office/powerpoint/2010/main" val="1024086991"/>
+      </p:ext>
+    </p:extLst>
+  </p:cSld>
+  <p:clrMapOvr>
+    <a:masterClrMapping/>
+  </p:clrMapOvr>
+</p:notes>
+</file>
+
+<file path=ppt/notesSlides/notesSlide11.xml><?xml version="1.0" encoding="utf-8"?>
+<p:notes xmlns:a="http://schemas.openxmlformats.org/drawingml/2006/main" xmlns:r="http://schemas.openxmlformats.org/officeDocument/2006/relationships" xmlns:p="http://schemas.openxmlformats.org/presentationml/2006/main">
+  <p:cSld>
+    <p:spTree>
+      <p:nvGrpSpPr>
+        <p:cNvPr id="1" name=""/>
+        <p:cNvGrpSpPr/>
+        <p:nvPr/>
+      </p:nvGrpSpPr>
+      <p:grpSpPr>
+        <a:xfrm>
+          <a:off x="0" y="0"/>
+          <a:ext cx="0" cy="0"/>
+          <a:chOff x="0" y="0"/>
+          <a:chExt cx="0" cy="0"/>
+        </a:xfrm>
+      </p:grpSpPr>
+      <p:sp>
+        <p:nvSpPr>
+          <p:cNvPr id="2" name="Slide Image Placeholder 1"/>
+          <p:cNvSpPr>
+            <a:spLocks noGrp="1" noRot="1" noChangeAspect="1"/>
+          </p:cNvSpPr>
+          <p:nvPr>
+            <p:ph type="sldImg"/>
+          </p:nvPr>
+        </p:nvSpPr>
+        <p:spPr/>
+      </p:sp>
+      <p:sp>
+        <p:nvSpPr>
+          <p:cNvPr id="3" name="Notes Placeholder 2"/>
+          <p:cNvSpPr>
+            <a:spLocks noGrp="1"/>
+          </p:cNvSpPr>
+          <p:nvPr>
+            <p:ph type="body" idx="1"/>
+          </p:nvPr>
+        </p:nvSpPr>
+        <p:spPr/>
+        <p:txBody>
+          <a:bodyPr/>
+          <a:lstStyle/>
+          <a:p>
+            <a:r>
+              <a:rPr lang="en-US" dirty="0"/>
+              <a:t/>
+            </a:r>
+            <a:endParaRPr lang="en-US" dirty="0"/>
+          </a:p>
+        </p:txBody>
+      </p:sp>
+      <p:sp>
+        <p:nvSpPr>
+          <p:cNvPr id="4" name="Slide Number Placeholder 3"/>
+          <p:cNvSpPr>
+            <a:spLocks noGrp="1"/>
+          </p:cNvSpPr>
+          <p:nvPr>
+            <p:ph type="sldNum" sz="quarter" idx="10"/>
+          </p:nvPr>
+        </p:nvSpPr>
+        <p:spPr/>
+        <p:txBody>
+          <a:bodyPr/>
+          <a:lstStyle/>
+          <a:p>
+            <a:fld id="{F7021451-1387-4CA6-816F-3879F97B5CBC}" type="slidenum">
+              <a:rPr lang="en-US"/>
+              <a:t>11</a:t>
             </a:fld>
             <a:endParaRPr lang="en-US"/>
           </a:p>
@@ -1684,7 +1773,7 @@
         </p:nvSpPr>
         <p:spPr>
           <a:xfrm>
-            <a:off x="0" y="5394960"/>
+            <a:off x="0" y="5349240"/>
             <a:ext cx="12191695" cy="54864"/>
           </a:xfrm>
           <a:prstGeom prst="rect">
@@ -1821,7 +1910,7 @@
         </p:nvSpPr>
         <p:spPr>
           <a:xfrm>
-            <a:off x="822960" y="5669280"/>
+            <a:off x="822960" y="5623560"/>
             <a:ext cx="10058400" cy="914400"/>
           </a:xfrm>
           <a:prstGeom prst="rect">
@@ -1849,7 +1938,7 @@
                 <a:ea typeface="맑은 고딕" pitchFamily="34" charset="-122"/>
                 <a:cs typeface="맑은 고딕" pitchFamily="34" charset="-120"/>
               </a:rPr>
-              <a:t>AI 모호성 검출 · 해결 데모까지 구현 / 테스트 완료</a:t>
+              <a:t>모호성 검출·해결 데모까지 구현 / 테스트 완료</a:t>
             </a:r>
             <a:endParaRPr lang="en-US" sz="1500" dirty="0"/>
           </a:p>
@@ -1880,7 +1969,7 @@
         </p:nvSpPr>
         <p:spPr>
           <a:xfrm>
-            <a:off x="9509760" y="5989320"/>
+            <a:off x="9509760" y="5943600"/>
             <a:ext cx="2194560" cy="365760"/>
           </a:xfrm>
           <a:prstGeom prst="rect">
@@ -1922,6 +2011,566 @@
 <file path=ppt/slides/slide10.xml><?xml version="1.0" encoding="utf-8"?>
 <p:sld xmlns:a="http://schemas.openxmlformats.org/drawingml/2006/main" xmlns:r="http://schemas.openxmlformats.org/officeDocument/2006/relationships" xmlns:p="http://schemas.openxmlformats.org/presentationml/2006/main">
   <p:cSld name="Slide 10">
+    <p:bg>
+      <p:bgPr>
+        <a:solidFill>
+          <a:srgbClr val="F5F7FA"/>
+        </a:solidFill>
+      </p:bgPr>
+    </p:bg>
+    <p:spTree>
+      <p:nvGrpSpPr>
+        <p:cNvPr id="1" name=""/>
+        <p:cNvGrpSpPr/>
+        <p:nvPr/>
+      </p:nvGrpSpPr>
+      <p:grpSpPr>
+        <a:xfrm>
+          <a:off x="0" y="0"/>
+          <a:ext cx="0" cy="0"/>
+          <a:chOff x="0" y="0"/>
+          <a:chExt cx="0" cy="0"/>
+        </a:xfrm>
+      </p:grpSpPr>
+      <p:sp>
+        <p:nvSpPr>
+          <p:cNvPr id="2" name="Text 0"/>
+          <p:cNvSpPr/>
+          <p:nvPr/>
+        </p:nvSpPr>
+        <p:spPr>
+          <a:xfrm>
+            <a:off x="566928" y="201168"/>
+            <a:ext cx="8229600" cy="274320"/>
+          </a:xfrm>
+          <a:prstGeom prst="rect">
+            <a:avLst/>
+          </a:prstGeom>
+          <a:noFill/>
+          <a:ln/>
+        </p:spPr>
+        <p:txBody>
+          <a:bodyPr wrap="square" rtlCol="0" anchor="ctr"/>
+          <a:lstStyle/>
+          <a:p>
+            <a:pPr indent="0" marL="0">
+              <a:buNone/>
+            </a:pPr>
+            <a:r>
+              <a:rPr lang="en-US" sz="1200" b="1" spc="200" kern="0" dirty="0">
+                <a:solidFill>
+                  <a:srgbClr val="C67F17"/>
+                </a:solidFill>
+                <a:latin typeface="맑은 고딕" pitchFamily="34" charset="0"/>
+                <a:ea typeface="맑은 고딕" pitchFamily="34" charset="-122"/>
+                <a:cs typeface="맑은 고딕" pitchFamily="34" charset="-120"/>
+              </a:rPr>
+              <a:t>ISSUE</a:t>
+            </a:r>
+            <a:endParaRPr lang="en-US" sz="1200" dirty="0"/>
+          </a:p>
+        </p:txBody>
+      </p:sp>
+      <p:sp>
+        <p:nvSpPr>
+          <p:cNvPr id="3" name="Text 1"/>
+          <p:cNvSpPr/>
+          <p:nvPr/>
+        </p:nvSpPr>
+        <p:spPr>
+          <a:xfrm>
+            <a:off x="548640" y="457200"/>
+            <a:ext cx="10424160" cy="658368"/>
+          </a:xfrm>
+          <a:prstGeom prst="rect">
+            <a:avLst/>
+          </a:prstGeom>
+          <a:noFill/>
+          <a:ln/>
+        </p:spPr>
+        <p:txBody>
+          <a:bodyPr wrap="square" rtlCol="0" anchor="ctr"/>
+          <a:lstStyle/>
+          <a:p>
+            <a:pPr indent="0" marL="0">
+              <a:buNone/>
+            </a:pPr>
+            <a:r>
+              <a:rPr lang="en-US" sz="2800" b="1" dirty="0">
+                <a:solidFill>
+                  <a:srgbClr val="1B2A4A"/>
+                </a:solidFill>
+                <a:latin typeface="맑은 고딕" pitchFamily="34" charset="0"/>
+                <a:ea typeface="맑은 고딕" pitchFamily="34" charset="-122"/>
+                <a:cs typeface="맑은 고딕" pitchFamily="34" charset="-120"/>
+              </a:rPr>
+              <a:t>발견된 이슈 &amp; 해결 방향</a:t>
+            </a:r>
+            <a:endParaRPr lang="en-US" sz="2800" dirty="0"/>
+          </a:p>
+        </p:txBody>
+      </p:sp>
+      <p:sp>
+        <p:nvSpPr>
+          <p:cNvPr id="4" name="Text 2"/>
+          <p:cNvSpPr/>
+          <p:nvPr/>
+        </p:nvSpPr>
+        <p:spPr>
+          <a:xfrm>
+            <a:off x="11109960" y="457200"/>
+            <a:ext cx="685800" cy="658368"/>
+          </a:xfrm>
+          <a:prstGeom prst="rect">
+            <a:avLst/>
+          </a:prstGeom>
+          <a:noFill/>
+          <a:ln/>
+        </p:spPr>
+        <p:txBody>
+          <a:bodyPr wrap="square" rtlCol="0" anchor="ctr"/>
+          <a:lstStyle/>
+          <a:p>
+            <a:pPr algn="r" indent="0" marL="0">
+              <a:buNone/>
+            </a:pPr>
+            <a:r>
+              <a:rPr lang="en-US" sz="1900" b="1" dirty="0">
+                <a:solidFill>
+                  <a:srgbClr val="C67F17"/>
+                </a:solidFill>
+                <a:latin typeface="맑은 고딕" pitchFamily="34" charset="0"/>
+                <a:ea typeface="맑은 고딕" pitchFamily="34" charset="-122"/>
+                <a:cs typeface="맑은 고딕" pitchFamily="34" charset="-120"/>
+              </a:rPr>
+              <a:t>10</a:t>
+            </a:r>
+            <a:endParaRPr lang="en-US" sz="1900" dirty="0"/>
+          </a:p>
+        </p:txBody>
+      </p:sp>
+      <p:sp>
+        <p:nvSpPr>
+          <p:cNvPr id="5" name="Shape 3"/>
+          <p:cNvSpPr/>
+          <p:nvPr/>
+        </p:nvSpPr>
+        <p:spPr>
+          <a:xfrm>
+            <a:off x="566928" y="1417320"/>
+            <a:ext cx="11064240" cy="1828800"/>
+          </a:xfrm>
+          <a:prstGeom prst="roundRect">
+            <a:avLst>
+              <a:gd name="adj" fmla="val 4000"/>
+            </a:avLst>
+          </a:prstGeom>
+          <a:solidFill>
+            <a:srgbClr val="FBEDEC"/>
+          </a:solidFill>
+          <a:ln w="12700">
+            <a:solidFill>
+              <a:srgbClr val="DCE3EB"/>
+            </a:solidFill>
+            <a:prstDash val="solid"/>
+          </a:ln>
+          <a:effectLst>
+            <a:outerShdw sx="100000" sy="100000" kx="0" ky="0" algn="bl" rotWithShape="0" blurRad="76200" dist="25400" dir="5400000">
+              <a:srgbClr val="B9C3CE">
+                <a:alpha val="35000"/>
+              </a:srgbClr>
+            </a:outerShdw>
+          </a:effectLst>
+        </p:spPr>
+      </p:sp>
+      <p:sp>
+        <p:nvSpPr>
+          <p:cNvPr id="6" name="Text 4"/>
+          <p:cNvSpPr/>
+          <p:nvPr/>
+        </p:nvSpPr>
+        <p:spPr>
+          <a:xfrm>
+            <a:off x="868680" y="1600200"/>
+            <a:ext cx="10515600" cy="457200"/>
+          </a:xfrm>
+          <a:prstGeom prst="rect">
+            <a:avLst/>
+          </a:prstGeom>
+          <a:noFill/>
+          <a:ln/>
+        </p:spPr>
+        <p:txBody>
+          <a:bodyPr wrap="square" rtlCol="0" anchor="ctr"/>
+          <a:lstStyle/>
+          <a:p>
+            <a:pPr indent="0" marL="0">
+              <a:buNone/>
+            </a:pPr>
+            <a:r>
+              <a:rPr lang="en-US" sz="1800" b="1" dirty="0">
+                <a:solidFill>
+                  <a:srgbClr val="C0503F"/>
+                </a:solidFill>
+                <a:latin typeface="맑은 고딕" pitchFamily="34" charset="0"/>
+                <a:ea typeface="맑은 고딕" pitchFamily="34" charset="-122"/>
+                <a:cs typeface="맑은 고딕" pitchFamily="34" charset="-120"/>
+              </a:rPr>
+              <a:t>★  실제 명세서 docx 파싱 실패  —  "file is not a zip file"</a:t>
+            </a:r>
+            <a:endParaRPr lang="en-US" sz="1800" dirty="0"/>
+          </a:p>
+        </p:txBody>
+      </p:sp>
+      <p:sp>
+        <p:nvSpPr>
+          <p:cNvPr id="7" name="Text 5"/>
+          <p:cNvSpPr/>
+          <p:nvPr/>
+        </p:nvSpPr>
+        <p:spPr>
+          <a:xfrm>
+            <a:off x="868680" y="2103120"/>
+            <a:ext cx="10515600" cy="1005840"/>
+          </a:xfrm>
+          <a:prstGeom prst="rect">
+            <a:avLst/>
+          </a:prstGeom>
+          <a:noFill/>
+          <a:ln/>
+        </p:spPr>
+        <p:txBody>
+          <a:bodyPr wrap="square" rtlCol="0" anchor="t"/>
+          <a:lstStyle/>
+          <a:p>
+            <a:pPr marL="177800" indent="-177800">
+              <a:spcAft>
+                <a:spcPts val="800"/>
+              </a:spcAft>
+              <a:buSzPct val="100000"/>
+              <a:buChar char="•"/>
+            </a:pPr>
+            <a:r>
+              <a:rPr lang="en-US" sz="1500" dirty="0">
+                <a:solidFill>
+                  <a:srgbClr val="5A3A36"/>
+                </a:solidFill>
+                <a:latin typeface="맑은 고딕" pitchFamily="34" charset="0"/>
+                <a:ea typeface="맑은 고딕" pitchFamily="34" charset="-122"/>
+                <a:cs typeface="맑은 고딕" pitchFamily="34" charset="-120"/>
+              </a:rPr>
+              <a:t>원인 추정: 문서보안(DRM)·암호 또는 한글(hwp)·구버전(.doc) → raw 파일이 zip 아님 (Word에선 열려도)</a:t>
+            </a:r>
+            <a:endParaRPr lang="en-US" sz="1500" dirty="0"/>
+          </a:p>
+          <a:p>
+            <a:pPr marL="177800" indent="-177800">
+              <a:spcAft>
+                <a:spcPts val="800"/>
+              </a:spcAft>
+              <a:buSzPct val="100000"/>
+              <a:buChar char="•"/>
+            </a:pPr>
+            <a:r>
+              <a:rPr lang="en-US" sz="1500" dirty="0">
+                <a:solidFill>
+                  <a:srgbClr val="2A8A57"/>
+                </a:solidFill>
+                <a:latin typeface="맑은 고딕" pitchFamily="34" charset="0"/>
+                <a:ea typeface="맑은 고딕" pitchFamily="34" charset="-122"/>
+                <a:cs typeface="맑은 고딕" pitchFamily="34" charset="-120"/>
+              </a:rPr>
+              <a:t>해결방향: 실제 파일 시그니처 확인 중 / 보안 해제 사본 테스트 / hwp면 hwp 파싱 지원 검토</a:t>
+            </a:r>
+            <a:endParaRPr lang="en-US" sz="1500" dirty="0"/>
+          </a:p>
+        </p:txBody>
+      </p:sp>
+      <p:sp>
+        <p:nvSpPr>
+          <p:cNvPr id="8" name="Shape 6"/>
+          <p:cNvSpPr/>
+          <p:nvPr/>
+        </p:nvSpPr>
+        <p:spPr>
+          <a:xfrm>
+            <a:off x="566928" y="3429000"/>
+            <a:ext cx="5440680" cy="2148840"/>
+          </a:xfrm>
+          <a:prstGeom prst="roundRect">
+            <a:avLst>
+              <a:gd name="adj" fmla="val 3404"/>
+            </a:avLst>
+          </a:prstGeom>
+          <a:solidFill>
+            <a:srgbClr val="FFFFFF"/>
+          </a:solidFill>
+          <a:ln w="12700">
+            <a:solidFill>
+              <a:srgbClr val="DCE3EB"/>
+            </a:solidFill>
+            <a:prstDash val="solid"/>
+          </a:ln>
+          <a:effectLst>
+            <a:outerShdw sx="100000" sy="100000" kx="0" ky="0" algn="bl" rotWithShape="0" blurRad="76200" dist="25400" dir="5400000">
+              <a:srgbClr val="B9C3CE">
+                <a:alpha val="35000"/>
+              </a:srgbClr>
+            </a:outerShdw>
+          </a:effectLst>
+        </p:spPr>
+      </p:sp>
+      <p:sp>
+        <p:nvSpPr>
+          <p:cNvPr id="9" name="Text 7"/>
+          <p:cNvSpPr/>
+          <p:nvPr/>
+        </p:nvSpPr>
+        <p:spPr>
+          <a:xfrm>
+            <a:off x="822960" y="3611880"/>
+            <a:ext cx="4937760" cy="457200"/>
+          </a:xfrm>
+          <a:prstGeom prst="rect">
+            <a:avLst/>
+          </a:prstGeom>
+          <a:noFill/>
+          <a:ln/>
+        </p:spPr>
+        <p:txBody>
+          <a:bodyPr wrap="square" rtlCol="0" anchor="ctr"/>
+          <a:lstStyle/>
+          <a:p>
+            <a:pPr indent="0" marL="0">
+              <a:buNone/>
+            </a:pPr>
+            <a:r>
+              <a:rPr lang="en-US" sz="1700" b="1" dirty="0">
+                <a:solidFill>
+                  <a:srgbClr val="C67F17"/>
+                </a:solidFill>
+                <a:latin typeface="맑은 고딕" pitchFamily="34" charset="0"/>
+                <a:ea typeface="맑은 고딕" pitchFamily="34" charset="-122"/>
+                <a:cs typeface="맑은 고딕" pitchFamily="34" charset="-120"/>
+              </a:rPr>
+              <a:t>모호성 과검출</a:t>
+            </a:r>
+            <a:endParaRPr lang="en-US" sz="1700" dirty="0"/>
+          </a:p>
+        </p:txBody>
+      </p:sp>
+      <p:sp>
+        <p:nvSpPr>
+          <p:cNvPr id="10" name="Text 8"/>
+          <p:cNvSpPr/>
+          <p:nvPr/>
+        </p:nvSpPr>
+        <p:spPr>
+          <a:xfrm>
+            <a:off x="868680" y="4114800"/>
+            <a:ext cx="4846320" cy="1280160"/>
+          </a:xfrm>
+          <a:prstGeom prst="rect">
+            <a:avLst/>
+          </a:prstGeom>
+          <a:noFill/>
+          <a:ln/>
+        </p:spPr>
+        <p:txBody>
+          <a:bodyPr wrap="square" rtlCol="0" anchor="t"/>
+          <a:lstStyle/>
+          <a:p>
+            <a:pPr marL="177800" indent="-177800">
+              <a:spcAft>
+                <a:spcPts val="800"/>
+              </a:spcAft>
+              <a:buSzPct val="100000"/>
+              <a:buChar char="•"/>
+            </a:pPr>
+            <a:r>
+              <a:rPr lang="en-US" sz="1500" dirty="0">
+                <a:solidFill>
+                  <a:srgbClr val="1F2733"/>
+                </a:solidFill>
+                <a:latin typeface="맑은 고딕" pitchFamily="34" charset="0"/>
+                <a:ea typeface="맑은 고딕" pitchFamily="34" charset="-122"/>
+                <a:cs typeface="맑은 고딕" pitchFamily="34" charset="-120"/>
+              </a:rPr>
+              <a:t>사소한 표현까지 잡는 경향</a:t>
+            </a:r>
+            <a:endParaRPr lang="en-US" sz="1500" dirty="0"/>
+          </a:p>
+          <a:p>
+            <a:pPr marL="177800" indent="-177800">
+              <a:spcAft>
+                <a:spcPts val="800"/>
+              </a:spcAft>
+              <a:buSzPct val="100000"/>
+              <a:buChar char="•"/>
+            </a:pPr>
+            <a:r>
+              <a:rPr lang="en-US" sz="1500" dirty="0">
+                <a:solidFill>
+                  <a:srgbClr val="1F2733"/>
+                </a:solidFill>
+                <a:latin typeface="맑은 고딕" pitchFamily="34" charset="0"/>
+                <a:ea typeface="맑은 고딕" pitchFamily="34" charset="-122"/>
+                <a:cs typeface="맑은 고딕" pitchFamily="34" charset="-120"/>
+              </a:rPr>
+              <a:t>→ 도메인 지식·기준 프롬프트 정교화로 완화</a:t>
+            </a:r>
+            <a:endParaRPr lang="en-US" sz="1500" dirty="0"/>
+          </a:p>
+        </p:txBody>
+      </p:sp>
+      <p:sp>
+        <p:nvSpPr>
+          <p:cNvPr id="11" name="Shape 9"/>
+          <p:cNvSpPr/>
+          <p:nvPr/>
+        </p:nvSpPr>
+        <p:spPr>
+          <a:xfrm>
+            <a:off x="6199632" y="3429000"/>
+            <a:ext cx="5440680" cy="2148840"/>
+          </a:xfrm>
+          <a:prstGeom prst="roundRect">
+            <a:avLst>
+              <a:gd name="adj" fmla="val 3404"/>
+            </a:avLst>
+          </a:prstGeom>
+          <a:solidFill>
+            <a:srgbClr val="FFFFFF"/>
+          </a:solidFill>
+          <a:ln w="12700">
+            <a:solidFill>
+              <a:srgbClr val="DCE3EB"/>
+            </a:solidFill>
+            <a:prstDash val="solid"/>
+          </a:ln>
+          <a:effectLst>
+            <a:outerShdw sx="100000" sy="100000" kx="0" ky="0" algn="bl" rotWithShape="0" blurRad="76200" dist="25400" dir="5400000">
+              <a:srgbClr val="B9C3CE">
+                <a:alpha val="35000"/>
+              </a:srgbClr>
+            </a:outerShdw>
+          </a:effectLst>
+        </p:spPr>
+      </p:sp>
+      <p:sp>
+        <p:nvSpPr>
+          <p:cNvPr id="12" name="Text 10"/>
+          <p:cNvSpPr/>
+          <p:nvPr/>
+        </p:nvSpPr>
+        <p:spPr>
+          <a:xfrm>
+            <a:off x="6446520" y="3611880"/>
+            <a:ext cx="4937760" cy="457200"/>
+          </a:xfrm>
+          <a:prstGeom prst="rect">
+            <a:avLst/>
+          </a:prstGeom>
+          <a:noFill/>
+          <a:ln/>
+        </p:spPr>
+        <p:txBody>
+          <a:bodyPr wrap="square" rtlCol="0" anchor="ctr"/>
+          <a:lstStyle/>
+          <a:p>
+            <a:pPr indent="0" marL="0">
+              <a:buNone/>
+            </a:pPr>
+            <a:r>
+              <a:rPr lang="en-US" sz="1700" b="1" dirty="0">
+                <a:solidFill>
+                  <a:srgbClr val="24395F"/>
+                </a:solidFill>
+                <a:latin typeface="맑은 고딕" pitchFamily="34" charset="0"/>
+                <a:ea typeface="맑은 고딕" pitchFamily="34" charset="-122"/>
+                <a:cs typeface="맑은 고딕" pitchFamily="34" charset="-120"/>
+              </a:rPr>
+              <a:t>다음 단계</a:t>
+            </a:r>
+            <a:endParaRPr lang="en-US" sz="1700" dirty="0"/>
+          </a:p>
+        </p:txBody>
+      </p:sp>
+      <p:sp>
+        <p:nvSpPr>
+          <p:cNvPr id="13" name="Text 11"/>
+          <p:cNvSpPr/>
+          <p:nvPr/>
+        </p:nvSpPr>
+        <p:spPr>
+          <a:xfrm>
+            <a:off x="6492240" y="4114800"/>
+            <a:ext cx="4846320" cy="1280160"/>
+          </a:xfrm>
+          <a:prstGeom prst="rect">
+            <a:avLst/>
+          </a:prstGeom>
+          <a:noFill/>
+          <a:ln/>
+        </p:spPr>
+        <p:txBody>
+          <a:bodyPr wrap="square" rtlCol="0" anchor="t"/>
+          <a:lstStyle/>
+          <a:p>
+            <a:pPr marL="177800" indent="-177800">
+              <a:spcAft>
+                <a:spcPts val="800"/>
+              </a:spcAft>
+              <a:buSzPct val="100000"/>
+              <a:buChar char="•"/>
+            </a:pPr>
+            <a:r>
+              <a:rPr lang="en-US" sz="1500" dirty="0">
+                <a:solidFill>
+                  <a:srgbClr val="1F2733"/>
+                </a:solidFill>
+                <a:latin typeface="맑은 고딕" pitchFamily="34" charset="0"/>
+                <a:ea typeface="맑은 고딕" pitchFamily="34" charset="-122"/>
+                <a:cs typeface="맑은 고딕" pitchFamily="34" charset="-120"/>
+              </a:rPr>
+              <a:t>docx(→hwp) 입력 문제 해결 우선</a:t>
+            </a:r>
+            <a:endParaRPr lang="en-US" sz="1500" dirty="0"/>
+          </a:p>
+          <a:p>
+            <a:pPr marL="177800" indent="-177800">
+              <a:spcAft>
+                <a:spcPts val="800"/>
+              </a:spcAft>
+              <a:buSzPct val="100000"/>
+              <a:buChar char="•"/>
+            </a:pPr>
+            <a:r>
+              <a:rPr lang="en-US" sz="1500" dirty="0">
+                <a:solidFill>
+                  <a:srgbClr val="1F2733"/>
+                </a:solidFill>
+                <a:latin typeface="맑은 고딕" pitchFamily="34" charset="0"/>
+                <a:ea typeface="맑은 고딕" pitchFamily="34" charset="-122"/>
+                <a:cs typeface="맑은 고딕" pitchFamily="34" charset="-120"/>
+              </a:rPr>
+              <a:t>기능 도출·DB 동기화·백엔드 확장 구현</a:t>
+            </a:r>
+            <a:endParaRPr lang="en-US" sz="1500" dirty="0"/>
+          </a:p>
+        </p:txBody>
+      </p:sp>
+    </p:spTree>
+  </p:cSld>
+  <p:clrMapOvr>
+    <a:masterClrMapping/>
+  </p:clrMapOvr>
+</p:sld>
+</file>
+
+<file path=ppt/slides/slide11.xml><?xml version="1.0" encoding="utf-8"?>
+<p:sld xmlns:a="http://schemas.openxmlformats.org/drawingml/2006/main" xmlns:r="http://schemas.openxmlformats.org/officeDocument/2006/relationships" xmlns:p="http://schemas.openxmlformats.org/presentationml/2006/main">
+  <p:cSld name="Slide 11">
     <p:bg>
       <p:bgPr>
         <a:solidFill>
@@ -2030,7 +2679,7 @@
               <a:buNone/>
             </a:pPr>
             <a:r>
-              <a:rPr lang="en-US" sz="2700" b="1" dirty="0">
+              <a:rPr lang="en-US" sz="2600" b="1" dirty="0">
                 <a:solidFill>
                   <a:srgbClr val="FFFFFF"/>
                 </a:solidFill>
@@ -2040,7 +2689,7 @@
               </a:rPr>
               <a:t>모호성 검출·해결 데모까지 구현 완료,</a:t>
             </a:r>
-            <a:endParaRPr lang="en-US" sz="2700" dirty="0"/>
+            <a:endParaRPr lang="en-US" sz="2600" dirty="0"/>
           </a:p>
           <a:p>
             <a:pPr indent="0" marL="0">
@@ -2050,7 +2699,7 @@
               <a:buNone/>
             </a:pPr>
             <a:r>
-              <a:rPr lang="en-US" sz="2700" b="1" dirty="0">
+              <a:rPr lang="en-US" sz="2600" b="1" dirty="0">
                 <a:solidFill>
                   <a:srgbClr val="FFFFFF"/>
                 </a:solidFill>
@@ -2060,7 +2709,7 @@
               </a:rPr>
               <a:t>docx 문서보안 이슈만 풀면 실제 명세서 투입 가능</a:t>
             </a:r>
-            <a:endParaRPr lang="en-US" sz="2700" dirty="0"/>
+            <a:endParaRPr lang="en-US" sz="2600" dirty="0"/>
           </a:p>
         </p:txBody>
       </p:sp>
@@ -2073,7 +2722,7 @@
         <p:spPr>
           <a:xfrm>
             <a:off x="822960" y="3657600"/>
-            <a:ext cx="10515600" cy="2286000"/>
+            <a:ext cx="10515600" cy="2103120"/>
           </a:xfrm>
           <a:prstGeom prst="rect">
             <a:avLst/>
@@ -2087,7 +2736,7 @@
           <a:p>
             <a:pPr marL="177800" indent="-177800">
               <a:spcAft>
-                <a:spcPts val="900"/>
+                <a:spcPts val="800"/>
               </a:spcAft>
               <a:buSzPct val="100000"/>
               <a:buChar char="•"/>
@@ -2101,14 +2750,14 @@
                 <a:ea typeface="맑은 고딕" pitchFamily="34" charset="-122"/>
                 <a:cs typeface="맑은 고딕" pitchFamily="34" charset="-120"/>
               </a:rPr>
-              <a:t>구현·테스트: 모호성 해결 웹 데모, docx 업로드 파싱</a:t>
+              <a:t>구현·테스트: 모호성 해결 웹 데모 (docx 업로드 → 검출 → 해결)</a:t>
             </a:r>
             <a:endParaRPr lang="en-US" sz="1500" dirty="0"/>
           </a:p>
           <a:p>
             <a:pPr marL="177800" indent="-177800">
               <a:spcAft>
-                <a:spcPts val="900"/>
+                <a:spcPts val="800"/>
               </a:spcAft>
               <a:buSzPct val="100000"/>
               <a:buChar char="•"/>
@@ -2122,14 +2771,14 @@
                 <a:ea typeface="맑은 고딕" pitchFamily="34" charset="-122"/>
                 <a:cs typeface="맑은 고딕" pitchFamily="34" charset="-120"/>
               </a:rPr>
-              <a:t>이슈: 실제 docx(DRM/hwp) 파싱 — 해결 방향 논의 필요</a:t>
+              <a:t>설계: 기능 도출(UI·APP 명세), DB 스키마 동기화(pull)</a:t>
             </a:r>
             <a:endParaRPr lang="en-US" sz="1500" dirty="0"/>
           </a:p>
           <a:p>
             <a:pPr marL="177800" indent="-177800">
               <a:spcAft>
-                <a:spcPts val="900"/>
+                <a:spcPts val="800"/>
               </a:spcAft>
               <a:buSzPct val="100000"/>
               <a:buChar char="•"/>
@@ -2143,7 +2792,7 @@
                 <a:ea typeface="맑은 고딕" pitchFamily="34" charset="-122"/>
                 <a:cs typeface="맑은 고딕" pitchFamily="34" charset="-120"/>
               </a:rPr>
-              <a:t>다음: 입력 형식 해결 후 기능 도출·백엔드 확장</a:t>
+              <a:t>이슈: 실제 docx(DRM/hwp) 파싱 — 해결 방향 논의 필요</a:t>
             </a:r>
             <a:endParaRPr lang="en-US" sz="1500" dirty="0"/>
           </a:p>
@@ -2228,8 +2877,8 @@
         </p:nvSpPr>
         <p:spPr>
           <a:xfrm>
-            <a:off x="566928" y="182880"/>
-            <a:ext cx="7315200" cy="274320"/>
+            <a:off x="566928" y="201168"/>
+            <a:ext cx="8229600" cy="274320"/>
           </a:xfrm>
           <a:prstGeom prst="rect">
             <a:avLst/>
@@ -2267,8 +2916,8 @@
         </p:nvSpPr>
         <p:spPr>
           <a:xfrm>
-            <a:off x="548640" y="384048"/>
-            <a:ext cx="10424160" cy="640080"/>
+            <a:off x="548640" y="457200"/>
+            <a:ext cx="10424160" cy="658368"/>
           </a:xfrm>
           <a:prstGeom prst="rect">
             <a:avLst/>
@@ -2280,11 +2929,11 @@
           <a:bodyPr wrap="square" rtlCol="0" anchor="ctr"/>
           <a:lstStyle/>
           <a:p>
-            <a:pPr algn="l" indent="0" marL="0">
+            <a:pPr indent="0" marL="0">
               <a:buNone/>
             </a:pPr>
             <a:r>
-              <a:rPr lang="en-US" sz="3000" b="1" dirty="0">
+              <a:rPr lang="en-US" sz="2800" b="1" dirty="0">
                 <a:solidFill>
                   <a:srgbClr val="1B2A4A"/>
                 </a:solidFill>
@@ -2294,7 +2943,7 @@
               </a:rPr>
               <a:t>무엇을 만드나 — 핵심 기능 3가지</a:t>
             </a:r>
-            <a:endParaRPr lang="en-US" sz="3000" dirty="0"/>
+            <a:endParaRPr lang="en-US" sz="2800" dirty="0"/>
           </a:p>
         </p:txBody>
       </p:sp>
@@ -2306,8 +2955,8 @@
         </p:nvSpPr>
         <p:spPr>
           <a:xfrm>
-            <a:off x="11155680" y="384048"/>
-            <a:ext cx="640080" cy="640080"/>
+            <a:off x="11109960" y="457200"/>
+            <a:ext cx="685800" cy="658368"/>
           </a:xfrm>
           <a:prstGeom prst="rect">
             <a:avLst/>
@@ -2323,7 +2972,7 @@
               <a:buNone/>
             </a:pPr>
             <a:r>
-              <a:rPr lang="en-US" sz="2000" b="1" dirty="0">
+              <a:rPr lang="en-US" sz="1900" b="1" dirty="0">
                 <a:solidFill>
                   <a:srgbClr val="C67F17"/>
                 </a:solidFill>
@@ -2333,7 +2982,7 @@
               </a:rPr>
               <a:t>02</a:t>
             </a:r>
-            <a:endParaRPr lang="en-US" sz="2000" dirty="0"/>
+            <a:endParaRPr lang="en-US" sz="1900" dirty="0"/>
           </a:p>
         </p:txBody>
       </p:sp>
@@ -2345,7 +2994,7 @@
         </p:nvSpPr>
         <p:spPr>
           <a:xfrm>
-            <a:off x="566928" y="1170432"/>
+            <a:off x="566928" y="1234440"/>
             <a:ext cx="11064240" cy="457200"/>
           </a:xfrm>
           <a:prstGeom prst="rect">
@@ -2384,8 +3033,8 @@
         </p:nvSpPr>
         <p:spPr>
           <a:xfrm>
-            <a:off x="566928" y="1920240"/>
-            <a:ext cx="3520440" cy="3566160"/>
+            <a:off x="566928" y="1965960"/>
+            <a:ext cx="3520440" cy="3520440"/>
           </a:xfrm>
           <a:prstGeom prst="roundRect">
             <a:avLst>
@@ -2418,7 +3067,7 @@
         </p:nvSpPr>
         <p:spPr>
           <a:xfrm>
-            <a:off x="886968" y="2240280"/>
+            <a:off x="886968" y="2286000"/>
             <a:ext cx="640080" cy="640080"/>
           </a:xfrm>
           <a:prstGeom prst="ellipse">
@@ -2438,7 +3087,7 @@
         </p:nvSpPr>
         <p:spPr>
           <a:xfrm>
-            <a:off x="886968" y="2240280"/>
+            <a:off x="886968" y="2286000"/>
             <a:ext cx="640080" cy="640080"/>
           </a:xfrm>
           <a:prstGeom prst="rect">
@@ -2477,7 +3126,7 @@
         </p:nvSpPr>
         <p:spPr>
           <a:xfrm>
-            <a:off x="1664208" y="2286000"/>
+            <a:off x="1664208" y="2331720"/>
             <a:ext cx="2286000" cy="548640"/>
           </a:xfrm>
           <a:prstGeom prst="rect">
@@ -2516,7 +3165,7 @@
         </p:nvSpPr>
         <p:spPr>
           <a:xfrm>
-            <a:off x="886968" y="3200400"/>
+            <a:off x="886968" y="3246120"/>
             <a:ext cx="2926080" cy="1920240"/>
           </a:xfrm>
           <a:prstGeom prst="rect">
@@ -2531,7 +3180,7 @@
           <a:p>
             <a:pPr indent="0" marL="0">
               <a:lnSpc>
-                <a:spcPct val="115000"/>
+                <a:spcPct val="118000"/>
               </a:lnSpc>
               <a:buNone/>
             </a:pPr>
@@ -2544,7 +3193,7 @@
                 <a:ea typeface="맑은 고딕" pitchFamily="34" charset="-122"/>
                 <a:cs typeface="맑은 고딕" pitchFamily="34" charset="-120"/>
               </a:rPr>
-              <a:t>명세서에서 모호한 조항을 유형별로 검출하고, 합의를 거쳐 해석을 확정</a:t>
+              <a:t>docx 명세서에서 모호한 조항을 유형별로 검출하고, 합의를 거쳐 해석을 확정</a:t>
             </a:r>
             <a:endParaRPr lang="en-US" sz="1450" dirty="0"/>
           </a:p>
@@ -2558,8 +3207,8 @@
         </p:nvSpPr>
         <p:spPr>
           <a:xfrm>
-            <a:off x="4334256" y="1920240"/>
-            <a:ext cx="3520440" cy="3566160"/>
+            <a:off x="4334256" y="1965960"/>
+            <a:ext cx="3520440" cy="3520440"/>
           </a:xfrm>
           <a:prstGeom prst="roundRect">
             <a:avLst>
@@ -2592,7 +3241,7 @@
         </p:nvSpPr>
         <p:spPr>
           <a:xfrm>
-            <a:off x="4654296" y="2240280"/>
+            <a:off x="4654296" y="2286000"/>
             <a:ext cx="640080" cy="640080"/>
           </a:xfrm>
           <a:prstGeom prst="ellipse">
@@ -2612,7 +3261,7 @@
         </p:nvSpPr>
         <p:spPr>
           <a:xfrm>
-            <a:off x="4654296" y="2240280"/>
+            <a:off x="4654296" y="2286000"/>
             <a:ext cx="640080" cy="640080"/>
           </a:xfrm>
           <a:prstGeom prst="rect">
@@ -2651,7 +3300,7 @@
         </p:nvSpPr>
         <p:spPr>
           <a:xfrm>
-            <a:off x="5431536" y="2286000"/>
+            <a:off x="5431536" y="2331720"/>
             <a:ext cx="2286000" cy="548640"/>
           </a:xfrm>
           <a:prstGeom prst="rect">
@@ -2690,7 +3339,7 @@
         </p:nvSpPr>
         <p:spPr>
           <a:xfrm>
-            <a:off x="4654296" y="3200400"/>
+            <a:off x="4654296" y="3246120"/>
             <a:ext cx="2926080" cy="1920240"/>
           </a:xfrm>
           <a:prstGeom prst="rect">
@@ -2705,7 +3354,7 @@
           <a:p>
             <a:pPr indent="0" marL="0">
               <a:lnSpc>
-                <a:spcPct val="115000"/>
+                <a:spcPct val="118000"/>
               </a:lnSpc>
               <a:buNone/>
             </a:pPr>
@@ -2718,7 +3367,7 @@
                 <a:ea typeface="맑은 고딕" pitchFamily="34" charset="-122"/>
                 <a:cs typeface="맑은 고딕" pitchFamily="34" charset="-120"/>
               </a:rPr>
-              <a:t>확정된 요구사항을 실제 개발 단위 '기능'으로 분해 (UI · APP 명세)</a:t>
+              <a:t>확정된 요구사항을 개발 단위 '기능'으로 분해 → UI·APP 기능명세로 파생</a:t>
             </a:r>
             <a:endParaRPr lang="en-US" sz="1450" dirty="0"/>
           </a:p>
@@ -2732,8 +3381,8 @@
         </p:nvSpPr>
         <p:spPr>
           <a:xfrm>
-            <a:off x="8101584" y="1920240"/>
-            <a:ext cx="3520440" cy="3566160"/>
+            <a:off x="8101584" y="1965960"/>
+            <a:ext cx="3520440" cy="3520440"/>
           </a:xfrm>
           <a:prstGeom prst="roundRect">
             <a:avLst>
@@ -2766,7 +3415,7 @@
         </p:nvSpPr>
         <p:spPr>
           <a:xfrm>
-            <a:off x="8421624" y="2240280"/>
+            <a:off x="8421624" y="2286000"/>
             <a:ext cx="640080" cy="640080"/>
           </a:xfrm>
           <a:prstGeom prst="ellipse">
@@ -2786,7 +3435,7 @@
         </p:nvSpPr>
         <p:spPr>
           <a:xfrm>
-            <a:off x="8421624" y="2240280"/>
+            <a:off x="8421624" y="2286000"/>
             <a:ext cx="640080" cy="640080"/>
           </a:xfrm>
           <a:prstGeom prst="rect">
@@ -2825,7 +3474,7 @@
         </p:nvSpPr>
         <p:spPr>
           <a:xfrm>
-            <a:off x="9198864" y="2286000"/>
+            <a:off x="9198864" y="2331720"/>
             <a:ext cx="2286000" cy="548640"/>
           </a:xfrm>
           <a:prstGeom prst="rect">
@@ -2864,7 +3513,7 @@
         </p:nvSpPr>
         <p:spPr>
           <a:xfrm>
-            <a:off x="8421624" y="3200400"/>
+            <a:off x="8421624" y="3246120"/>
             <a:ext cx="2926080" cy="1920240"/>
           </a:xfrm>
           <a:prstGeom prst="rect">
@@ -2879,7 +3528,7 @@
           <a:p>
             <a:pPr indent="0" marL="0">
               <a:lnSpc>
-                <a:spcPct val="115000"/>
+                <a:spcPct val="118000"/>
               </a:lnSpc>
               <a:buNone/>
             </a:pPr>
@@ -2892,7 +3541,7 @@
                 <a:ea typeface="맑은 고딕" pitchFamily="34" charset="-122"/>
                 <a:cs typeface="맑은 고딕" pitchFamily="34" charset="-120"/>
               </a:rPr>
-              <a:t>테이블/컬럼/권한 변경을 등록·알림해 모두가 최신 DB 스키마 공유</a:t>
+              <a:t>최종 스키마 변경을 감지·알림하고, 클릭으로 개인 스키마에 동기화(pull)</a:t>
             </a:r>
             <a:endParaRPr lang="en-US" sz="1450" dirty="0"/>
           </a:p>
@@ -2931,7 +3580,7 @@
                 <a:ea typeface="맑은 고딕" pitchFamily="34" charset="-122"/>
                 <a:cs typeface="맑은 고딕" pitchFamily="34" charset="-120"/>
               </a:rPr>
-              <a:t>이번 공유: 핵심기능 ① 모호성 해결 위주로 구현·테스트, ③ DB 변경관리는 설계안까지</a:t>
+              <a:t>이번 공유: ① 모호성 해결은 구현·테스트 완료, ②·③은 설계 단계</a:t>
             </a:r>
             <a:endParaRPr lang="en-US" sz="1400" dirty="0"/>
           </a:p>
@@ -2977,8 +3626,8 @@
         </p:nvSpPr>
         <p:spPr>
           <a:xfrm>
-            <a:off x="566928" y="182880"/>
-            <a:ext cx="7315200" cy="274320"/>
+            <a:off x="566928" y="201168"/>
+            <a:ext cx="8229600" cy="274320"/>
           </a:xfrm>
           <a:prstGeom prst="rect">
             <a:avLst/>
@@ -3016,8 +3665,8 @@
         </p:nvSpPr>
         <p:spPr>
           <a:xfrm>
-            <a:off x="548640" y="384048"/>
-            <a:ext cx="10424160" cy="640080"/>
+            <a:off x="548640" y="457200"/>
+            <a:ext cx="10424160" cy="658368"/>
           </a:xfrm>
           <a:prstGeom prst="rect">
             <a:avLst/>
@@ -3029,11 +3678,11 @@
           <a:bodyPr wrap="square" rtlCol="0" anchor="ctr"/>
           <a:lstStyle/>
           <a:p>
-            <a:pPr algn="l" indent="0" marL="0">
+            <a:pPr indent="0" marL="0">
               <a:buNone/>
             </a:pPr>
             <a:r>
-              <a:rPr lang="en-US" sz="3000" b="1" dirty="0">
+              <a:rPr lang="en-US" sz="2800" b="1" dirty="0">
                 <a:solidFill>
                   <a:srgbClr val="1B2A4A"/>
                 </a:solidFill>
@@ -3041,9 +3690,9 @@
                 <a:ea typeface="맑은 고딕" pitchFamily="34" charset="-122"/>
                 <a:cs typeface="맑은 고딕" pitchFamily="34" charset="-120"/>
               </a:rPr>
-              <a:t>시스템 구성</a:t>
-            </a:r>
-            <a:endParaRPr lang="en-US" sz="3000" dirty="0"/>
+              <a:t>시스템 아키텍처</a:t>
+            </a:r>
+            <a:endParaRPr lang="en-US" sz="2800" dirty="0"/>
           </a:p>
         </p:txBody>
       </p:sp>
@@ -3055,8 +3704,8 @@
         </p:nvSpPr>
         <p:spPr>
           <a:xfrm>
-            <a:off x="11155680" y="384048"/>
-            <a:ext cx="640080" cy="640080"/>
+            <a:off x="11109960" y="457200"/>
+            <a:ext cx="685800" cy="658368"/>
           </a:xfrm>
           <a:prstGeom prst="rect">
             <a:avLst/>
@@ -3072,7 +3721,7 @@
               <a:buNone/>
             </a:pPr>
             <a:r>
-              <a:rPr lang="en-US" sz="2000" b="1" dirty="0">
+              <a:rPr lang="en-US" sz="1900" b="1" dirty="0">
                 <a:solidFill>
                   <a:srgbClr val="C67F17"/>
                 </a:solidFill>
@@ -3082,54 +3731,44 @@
               </a:rPr>
               <a:t>03</a:t>
             </a:r>
-            <a:endParaRPr lang="en-US" sz="2000" dirty="0"/>
-          </a:p>
-        </p:txBody>
-      </p:sp>
-      <p:sp>
-        <p:nvSpPr>
-          <p:cNvPr id="5" name="Shape 3"/>
-          <p:cNvSpPr/>
-          <p:nvPr/>
-        </p:nvSpPr>
-        <p:spPr>
-          <a:xfrm>
-            <a:off x="914400" y="1737360"/>
-            <a:ext cx="2926080" cy="1371600"/>
-          </a:xfrm>
-          <a:prstGeom prst="roundRect">
-            <a:avLst>
-              <a:gd name="adj" fmla="val 5333"/>
-            </a:avLst>
-          </a:prstGeom>
-          <a:solidFill>
-            <a:srgbClr val="FFFFFF"/>
-          </a:solidFill>
-          <a:ln w="12700">
-            <a:solidFill>
-              <a:srgbClr val="DCE3EB"/>
-            </a:solidFill>
-            <a:prstDash val="solid"/>
-          </a:ln>
-          <a:effectLst>
-            <a:outerShdw sx="100000" sy="100000" kx="0" ky="0" algn="bl" rotWithShape="0" blurRad="76200" dist="25400" dir="5400000">
-              <a:srgbClr val="B9C3CE">
-                <a:alpha val="35000"/>
-              </a:srgbClr>
-            </a:outerShdw>
-          </a:effectLst>
-        </p:spPr>
-      </p:sp>
-      <p:sp>
-        <p:nvSpPr>
-          <p:cNvPr id="6" name="Text 4"/>
-          <p:cNvSpPr/>
-          <p:nvPr/>
-        </p:nvSpPr>
-        <p:spPr>
-          <a:xfrm>
-            <a:off x="914400" y="1874520"/>
-            <a:ext cx="2926080" cy="548640"/>
+            <a:endParaRPr lang="en-US" sz="1900" dirty="0"/>
+          </a:p>
+        </p:txBody>
+      </p:sp>
+      <p:pic>
+        <p:nvPicPr>
+          <p:cNvPr id="5" name="Image 0" descr="/home/user/semes-superrookie/docs/img/design-arch.png">    </p:cNvPr>
+          <p:cNvPicPr>
+            <a:picLocks noChangeAspect="1"/>
+          </p:cNvPicPr>
+          <p:nvPr/>
+        </p:nvPicPr>
+        <p:blipFill>
+          <a:blip r:embed="rId1"/>
+          <a:stretch>
+            <a:fillRect/>
+          </a:stretch>
+        </p:blipFill>
+        <p:spPr>
+          <a:xfrm>
+            <a:off x="457200" y="1884426"/>
+            <a:ext cx="11292840" cy="3272028"/>
+          </a:xfrm>
+          <a:prstGeom prst="rect">
+            <a:avLst/>
+          </a:prstGeom>
+        </p:spPr>
+      </p:pic>
+      <p:sp>
+        <p:nvSpPr>
+          <p:cNvPr id="6" name="Text 3"/>
+          <p:cNvSpPr/>
+          <p:nvPr/>
+        </p:nvSpPr>
+        <p:spPr>
+          <a:xfrm>
+            <a:off x="566928" y="5989320"/>
+            <a:ext cx="11064240" cy="365760"/>
           </a:xfrm>
           <a:prstGeom prst="rect">
             <a:avLst/>
@@ -3141,50 +3780,11 @@
           <a:bodyPr wrap="square" rtlCol="0" anchor="ctr"/>
           <a:lstStyle/>
           <a:p>
-            <a:pPr algn="ctr" indent="0" marL="0">
+            <a:pPr indent="0" marL="0">
               <a:buNone/>
             </a:pPr>
             <a:r>
-              <a:rPr lang="en-US" sz="2200" b="1" dirty="0">
-                <a:solidFill>
-                  <a:srgbClr val="2C7A8C"/>
-                </a:solidFill>
-                <a:latin typeface="맑은 고딕" pitchFamily="34" charset="0"/>
-                <a:ea typeface="맑은 고딕" pitchFamily="34" charset="-122"/>
-                <a:cs typeface="맑은 고딕" pitchFamily="34" charset="-120"/>
-              </a:rPr>
-              <a:t>React</a:t>
-            </a:r>
-            <a:endParaRPr lang="en-US" sz="2200" dirty="0"/>
-          </a:p>
-        </p:txBody>
-      </p:sp>
-      <p:sp>
-        <p:nvSpPr>
-          <p:cNvPr id="7" name="Text 5"/>
-          <p:cNvSpPr/>
-          <p:nvPr/>
-        </p:nvSpPr>
-        <p:spPr>
-          <a:xfrm>
-            <a:off x="914400" y="2468880"/>
-            <a:ext cx="2926080" cy="457200"/>
-          </a:xfrm>
-          <a:prstGeom prst="rect">
-            <a:avLst/>
-          </a:prstGeom>
-          <a:noFill/>
-          <a:ln/>
-        </p:spPr>
-        <p:txBody>
-          <a:bodyPr wrap="square" rtlCol="0" anchor="ctr"/>
-          <a:lstStyle/>
-          <a:p>
-            <a:pPr algn="ctr" indent="0" marL="0">
-              <a:buNone/>
-            </a:pPr>
-            <a:r>
-              <a:rPr lang="en-US" sz="1400" dirty="0">
+              <a:rPr lang="en-US" sz="1300" i="1" dirty="0">
                 <a:solidFill>
                   <a:srgbClr val="63707E"/>
                 </a:solidFill>
@@ -3192,451 +3792,9 @@
                 <a:ea typeface="맑은 고딕" pitchFamily="34" charset="-122"/>
                 <a:cs typeface="맑은 고딕" pitchFamily="34" charset="-120"/>
               </a:rPr>
-              <a:t>프론트엔드</a:t>
-            </a:r>
-            <a:endParaRPr lang="en-US" sz="1400" dirty="0"/>
-          </a:p>
-        </p:txBody>
-      </p:sp>
-      <p:sp>
-        <p:nvSpPr>
-          <p:cNvPr id="8" name="Text 6"/>
-          <p:cNvSpPr/>
-          <p:nvPr/>
-        </p:nvSpPr>
-        <p:spPr>
-          <a:xfrm>
-            <a:off x="3840480" y="1737360"/>
-            <a:ext cx="731520" cy="1371600"/>
-          </a:xfrm>
-          <a:prstGeom prst="rect">
-            <a:avLst/>
-          </a:prstGeom>
-          <a:noFill/>
-          <a:ln/>
-        </p:spPr>
-        <p:txBody>
-          <a:bodyPr wrap="square" rtlCol="0" anchor="ctr"/>
-          <a:lstStyle/>
-          <a:p>
-            <a:pPr algn="ctr" indent="0" marL="0">
-              <a:buNone/>
-            </a:pPr>
-            <a:r>
-              <a:rPr lang="en-US" sz="3000" b="1" dirty="0">
-                <a:solidFill>
-                  <a:srgbClr val="9AA6B2"/>
-                </a:solidFill>
-                <a:latin typeface="맑은 고딕" pitchFamily="34" charset="0"/>
-                <a:ea typeface="맑은 고딕" pitchFamily="34" charset="-122"/>
-                <a:cs typeface="맑은 고딕" pitchFamily="34" charset="-120"/>
-              </a:rPr>
-              <a:t>→</a:t>
-            </a:r>
-            <a:endParaRPr lang="en-US" sz="3000" dirty="0"/>
-          </a:p>
-        </p:txBody>
-      </p:sp>
-      <p:sp>
-        <p:nvSpPr>
-          <p:cNvPr id="9" name="Shape 7"/>
-          <p:cNvSpPr/>
-          <p:nvPr/>
-        </p:nvSpPr>
-        <p:spPr>
-          <a:xfrm>
-            <a:off x="4572000" y="1737360"/>
-            <a:ext cx="2926080" cy="1371600"/>
-          </a:xfrm>
-          <a:prstGeom prst="roundRect">
-            <a:avLst>
-              <a:gd name="adj" fmla="val 5333"/>
-            </a:avLst>
-          </a:prstGeom>
-          <a:solidFill>
-            <a:srgbClr val="FFFFFF"/>
-          </a:solidFill>
-          <a:ln w="12700">
-            <a:solidFill>
-              <a:srgbClr val="DCE3EB"/>
-            </a:solidFill>
-            <a:prstDash val="solid"/>
-          </a:ln>
-          <a:effectLst>
-            <a:outerShdw sx="100000" sy="100000" kx="0" ky="0" algn="bl" rotWithShape="0" blurRad="76200" dist="25400" dir="5400000">
-              <a:srgbClr val="B9C3CE">
-                <a:alpha val="35000"/>
-              </a:srgbClr>
-            </a:outerShdw>
-          </a:effectLst>
-        </p:spPr>
-      </p:sp>
-      <p:sp>
-        <p:nvSpPr>
-          <p:cNvPr id="10" name="Text 8"/>
-          <p:cNvSpPr/>
-          <p:nvPr/>
-        </p:nvSpPr>
-        <p:spPr>
-          <a:xfrm>
-            <a:off x="4572000" y="1874520"/>
-            <a:ext cx="2926080" cy="548640"/>
-          </a:xfrm>
-          <a:prstGeom prst="rect">
-            <a:avLst/>
-          </a:prstGeom>
-          <a:noFill/>
-          <a:ln/>
-        </p:spPr>
-        <p:txBody>
-          <a:bodyPr wrap="square" rtlCol="0" anchor="ctr"/>
-          <a:lstStyle/>
-          <a:p>
-            <a:pPr algn="ctr" indent="0" marL="0">
-              <a:buNone/>
-            </a:pPr>
-            <a:r>
-              <a:rPr lang="en-US" sz="2200" b="1" dirty="0">
-                <a:solidFill>
-                  <a:srgbClr val="24395F"/>
-                </a:solidFill>
-                <a:latin typeface="맑은 고딕" pitchFamily="34" charset="0"/>
-                <a:ea typeface="맑은 고딕" pitchFamily="34" charset="-122"/>
-                <a:cs typeface="맑은 고딕" pitchFamily="34" charset="-120"/>
-              </a:rPr>
-              <a:t>FastAPI</a:t>
-            </a:r>
-            <a:endParaRPr lang="en-US" sz="2200" dirty="0"/>
-          </a:p>
-        </p:txBody>
-      </p:sp>
-      <p:sp>
-        <p:nvSpPr>
-          <p:cNvPr id="11" name="Text 9"/>
-          <p:cNvSpPr/>
-          <p:nvPr/>
-        </p:nvSpPr>
-        <p:spPr>
-          <a:xfrm>
-            <a:off x="4572000" y="2468880"/>
-            <a:ext cx="2926080" cy="457200"/>
-          </a:xfrm>
-          <a:prstGeom prst="rect">
-            <a:avLst/>
-          </a:prstGeom>
-          <a:noFill/>
-          <a:ln/>
-        </p:spPr>
-        <p:txBody>
-          <a:bodyPr wrap="square" rtlCol="0" anchor="ctr"/>
-          <a:lstStyle/>
-          <a:p>
-            <a:pPr algn="ctr" indent="0" marL="0">
-              <a:buNone/>
-            </a:pPr>
-            <a:r>
-              <a:rPr lang="en-US" sz="1400" dirty="0">
-                <a:solidFill>
-                  <a:srgbClr val="63707E"/>
-                </a:solidFill>
-                <a:latin typeface="맑은 고딕" pitchFamily="34" charset="0"/>
-                <a:ea typeface="맑은 고딕" pitchFamily="34" charset="-122"/>
-                <a:cs typeface="맑은 고딕" pitchFamily="34" charset="-120"/>
-              </a:rPr>
-              <a:t>백엔드 (API)</a:t>
-            </a:r>
-            <a:endParaRPr lang="en-US" sz="1400" dirty="0"/>
-          </a:p>
-        </p:txBody>
-      </p:sp>
-      <p:sp>
-        <p:nvSpPr>
-          <p:cNvPr id="12" name="Text 10"/>
-          <p:cNvSpPr/>
-          <p:nvPr/>
-        </p:nvSpPr>
-        <p:spPr>
-          <a:xfrm>
-            <a:off x="7498080" y="1737360"/>
-            <a:ext cx="731520" cy="1371600"/>
-          </a:xfrm>
-          <a:prstGeom prst="rect">
-            <a:avLst/>
-          </a:prstGeom>
-          <a:noFill/>
-          <a:ln/>
-        </p:spPr>
-        <p:txBody>
-          <a:bodyPr wrap="square" rtlCol="0" anchor="ctr"/>
-          <a:lstStyle/>
-          <a:p>
-            <a:pPr algn="ctr" indent="0" marL="0">
-              <a:buNone/>
-            </a:pPr>
-            <a:r>
-              <a:rPr lang="en-US" sz="3000" b="1" dirty="0">
-                <a:solidFill>
-                  <a:srgbClr val="9AA6B2"/>
-                </a:solidFill>
-                <a:latin typeface="맑은 고딕" pitchFamily="34" charset="0"/>
-                <a:ea typeface="맑은 고딕" pitchFamily="34" charset="-122"/>
-                <a:cs typeface="맑은 고딕" pitchFamily="34" charset="-120"/>
-              </a:rPr>
-              <a:t>→</a:t>
-            </a:r>
-            <a:endParaRPr lang="en-US" sz="3000" dirty="0"/>
-          </a:p>
-        </p:txBody>
-      </p:sp>
-      <p:sp>
-        <p:nvSpPr>
-          <p:cNvPr id="13" name="Shape 11"/>
-          <p:cNvSpPr/>
-          <p:nvPr/>
-        </p:nvSpPr>
-        <p:spPr>
-          <a:xfrm>
-            <a:off x="8229600" y="1737360"/>
-            <a:ext cx="2926080" cy="1371600"/>
-          </a:xfrm>
-          <a:prstGeom prst="roundRect">
-            <a:avLst>
-              <a:gd name="adj" fmla="val 5333"/>
-            </a:avLst>
-          </a:prstGeom>
-          <a:solidFill>
-            <a:srgbClr val="FFFFFF"/>
-          </a:solidFill>
-          <a:ln w="12700">
-            <a:solidFill>
-              <a:srgbClr val="DCE3EB"/>
-            </a:solidFill>
-            <a:prstDash val="solid"/>
-          </a:ln>
-          <a:effectLst>
-            <a:outerShdw sx="100000" sy="100000" kx="0" ky="0" algn="bl" rotWithShape="0" blurRad="76200" dist="25400" dir="5400000">
-              <a:srgbClr val="B9C3CE">
-                <a:alpha val="35000"/>
-              </a:srgbClr>
-            </a:outerShdw>
-          </a:effectLst>
-        </p:spPr>
-      </p:sp>
-      <p:sp>
-        <p:nvSpPr>
-          <p:cNvPr id="14" name="Text 12"/>
-          <p:cNvSpPr/>
-          <p:nvPr/>
-        </p:nvSpPr>
-        <p:spPr>
-          <a:xfrm>
-            <a:off x="8229600" y="1874520"/>
-            <a:ext cx="2926080" cy="548640"/>
-          </a:xfrm>
-          <a:prstGeom prst="rect">
-            <a:avLst/>
-          </a:prstGeom>
-          <a:noFill/>
-          <a:ln/>
-        </p:spPr>
-        <p:txBody>
-          <a:bodyPr wrap="square" rtlCol="0" anchor="ctr"/>
-          <a:lstStyle/>
-          <a:p>
-            <a:pPr algn="ctr" indent="0" marL="0">
-              <a:buNone/>
-            </a:pPr>
-            <a:r>
-              <a:rPr lang="en-US" sz="2200" b="1" dirty="0">
-                <a:solidFill>
-                  <a:srgbClr val="C67F17"/>
-                </a:solidFill>
-                <a:latin typeface="맑은 고딕" pitchFamily="34" charset="0"/>
-                <a:ea typeface="맑은 고딕" pitchFamily="34" charset="-122"/>
-                <a:cs typeface="맑은 고딕" pitchFamily="34" charset="-120"/>
-              </a:rPr>
-              <a:t>로컬 LLM</a:t>
-            </a:r>
-            <a:endParaRPr lang="en-US" sz="2200" dirty="0"/>
-          </a:p>
-        </p:txBody>
-      </p:sp>
-      <p:sp>
-        <p:nvSpPr>
-          <p:cNvPr id="15" name="Text 13"/>
-          <p:cNvSpPr/>
-          <p:nvPr/>
-        </p:nvSpPr>
-        <p:spPr>
-          <a:xfrm>
-            <a:off x="8229600" y="2468880"/>
-            <a:ext cx="2926080" cy="457200"/>
-          </a:xfrm>
-          <a:prstGeom prst="rect">
-            <a:avLst/>
-          </a:prstGeom>
-          <a:noFill/>
-          <a:ln/>
-        </p:spPr>
-        <p:txBody>
-          <a:bodyPr wrap="square" rtlCol="0" anchor="ctr"/>
-          <a:lstStyle/>
-          <a:p>
-            <a:pPr algn="ctr" indent="0" marL="0">
-              <a:buNone/>
-            </a:pPr>
-            <a:r>
-              <a:rPr lang="en-US" sz="1400" dirty="0">
-                <a:solidFill>
-                  <a:srgbClr val="63707E"/>
-                </a:solidFill>
-                <a:latin typeface="맑은 고딕" pitchFamily="34" charset="0"/>
-                <a:ea typeface="맑은 고딕" pitchFamily="34" charset="-122"/>
-                <a:cs typeface="맑은 고딕" pitchFamily="34" charset="-120"/>
-              </a:rPr>
-              <a:t>Qwen3-8B (Ollama)</a:t>
-            </a:r>
-            <a:endParaRPr lang="en-US" sz="1400" dirty="0"/>
-          </a:p>
-        </p:txBody>
-      </p:sp>
-      <p:sp>
-        <p:nvSpPr>
-          <p:cNvPr id="16" name="Shape 14"/>
-          <p:cNvSpPr/>
-          <p:nvPr/>
-        </p:nvSpPr>
-        <p:spPr>
-          <a:xfrm>
-            <a:off x="914400" y="3611880"/>
-            <a:ext cx="10332720" cy="1965960"/>
-          </a:xfrm>
-          <a:prstGeom prst="roundRect">
-            <a:avLst>
-              <a:gd name="adj" fmla="val 3721"/>
-            </a:avLst>
-          </a:prstGeom>
-          <a:solidFill>
-            <a:srgbClr val="FFFFFF"/>
-          </a:solidFill>
-          <a:ln w="12700">
-            <a:solidFill>
-              <a:srgbClr val="DCE3EB"/>
-            </a:solidFill>
-            <a:prstDash val="solid"/>
-          </a:ln>
-          <a:effectLst>
-            <a:outerShdw sx="100000" sy="100000" kx="0" ky="0" algn="bl" rotWithShape="0" blurRad="76200" dist="25400" dir="5400000">
-              <a:srgbClr val="B9C3CE">
-                <a:alpha val="35000"/>
-              </a:srgbClr>
-            </a:outerShdw>
-          </a:effectLst>
-        </p:spPr>
-      </p:sp>
-      <p:sp>
-        <p:nvSpPr>
-          <p:cNvPr id="17" name="Text 15"/>
-          <p:cNvSpPr/>
-          <p:nvPr/>
-        </p:nvSpPr>
-        <p:spPr>
-          <a:xfrm>
-            <a:off x="1234440" y="3794760"/>
-            <a:ext cx="9784080" cy="1645920"/>
-          </a:xfrm>
-          <a:prstGeom prst="rect">
-            <a:avLst/>
-          </a:prstGeom>
-          <a:noFill/>
-          <a:ln/>
-        </p:spPr>
-        <p:txBody>
-          <a:bodyPr wrap="square" rtlCol="0" anchor="t"/>
-          <a:lstStyle/>
-          <a:p>
-            <a:pPr marL="177800" indent="-177800">
-              <a:spcAft>
-                <a:spcPts val="900"/>
-              </a:spcAft>
-              <a:buSzPct val="100000"/>
-              <a:buChar char="•"/>
-            </a:pPr>
-            <a:r>
-              <a:rPr lang="en-US" sz="1500" b="1" dirty="0">
-                <a:solidFill>
-                  <a:srgbClr val="1F2733"/>
-                </a:solidFill>
-                <a:latin typeface="맑은 고딕" pitchFamily="34" charset="0"/>
-                <a:ea typeface="맑은 고딕" pitchFamily="34" charset="-122"/>
-                <a:cs typeface="맑은 고딕" pitchFamily="34" charset="-120"/>
-              </a:rPr>
-              <a:t>폐쇄망 + 반출 차단 → 외부 AI(Claude·GPT) 사용 불가 (데이터 반출 금지)</a:t>
-            </a:r>
-            <a:endParaRPr lang="en-US" sz="1500" dirty="0"/>
-          </a:p>
-          <a:p>
-            <a:pPr marL="177800" indent="-177800">
-              <a:spcAft>
-                <a:spcPts val="900"/>
-              </a:spcAft>
-              <a:buSzPct val="100000"/>
-              <a:buChar char="•"/>
-            </a:pPr>
-            <a:r>
-              <a:rPr lang="en-US" sz="1500" dirty="0">
-                <a:solidFill>
-                  <a:srgbClr val="3C4855"/>
-                </a:solidFill>
-                <a:latin typeface="맑은 고딕" pitchFamily="34" charset="0"/>
-                <a:ea typeface="맑은 고딕" pitchFamily="34" charset="-122"/>
-                <a:cs typeface="맑은 고딕" pitchFamily="34" charset="-120"/>
-              </a:rPr>
-              <a:t>→ 사내 워크스테이션에 오픈소스 모델을 로컬 서빙</a:t>
-            </a:r>
-            <a:endParaRPr lang="en-US" sz="1500" dirty="0"/>
-          </a:p>
-          <a:p>
-            <a:pPr marL="177800" indent="-177800">
-              <a:spcAft>
-                <a:spcPts val="900"/>
-              </a:spcAft>
-              <a:buSzPct val="100000"/>
-              <a:buChar char="•"/>
-            </a:pPr>
-            <a:r>
-              <a:rPr lang="en-US" sz="1500" dirty="0">
-                <a:solidFill>
-                  <a:srgbClr val="3C4855"/>
-                </a:solidFill>
-                <a:latin typeface="맑은 고딕" pitchFamily="34" charset="0"/>
-                <a:ea typeface="맑은 고딕" pitchFamily="34" charset="-122"/>
-                <a:cs typeface="맑은 고딕" pitchFamily="34" charset="-120"/>
-              </a:rPr>
-              <a:t>환경: Quadro P4000 (VRAM 8GB) · Xeon 8코어 · RAM 32GB</a:t>
-            </a:r>
-            <a:endParaRPr lang="en-US" sz="1500" dirty="0"/>
-          </a:p>
-          <a:p>
-            <a:pPr marL="177800" indent="-177800">
-              <a:spcAft>
-                <a:spcPts val="900"/>
-              </a:spcAft>
-              <a:buSzPct val="100000"/>
-              <a:buChar char="•"/>
-            </a:pPr>
-            <a:r>
-              <a:rPr lang="en-US" sz="1500" dirty="0">
-                <a:solidFill>
-                  <a:srgbClr val="3C4855"/>
-                </a:solidFill>
-                <a:latin typeface="맑은 고딕" pitchFamily="34" charset="0"/>
-                <a:ea typeface="맑은 고딕" pitchFamily="34" charset="-122"/>
-                <a:cs typeface="맑은 고딕" pitchFamily="34" charset="-120"/>
-              </a:rPr>
-              <a:t>모델: Qwen3-8B (Q5 양자화, GGUF) — 8GB VRAM에 통째로 적재</a:t>
-            </a:r>
-            <a:endParaRPr lang="en-US" sz="1500" dirty="0"/>
+              <a:t>전 구성요소는 사내 폐쇄망 안에서 동작 · AI 추론 상세는 다음 장</a:t>
+            </a:r>
+            <a:endParaRPr lang="en-US" sz="1300" dirty="0"/>
           </a:p>
         </p:txBody>
       </p:sp>
@@ -3680,8 +3838,8 @@
         </p:nvSpPr>
         <p:spPr>
           <a:xfrm>
-            <a:off x="566928" y="182880"/>
-            <a:ext cx="7315200" cy="274320"/>
+            <a:off x="566928" y="201168"/>
+            <a:ext cx="8229600" cy="274320"/>
           </a:xfrm>
           <a:prstGeom prst="rect">
             <a:avLst/>
@@ -3719,8 +3877,8 @@
         </p:nvSpPr>
         <p:spPr>
           <a:xfrm>
-            <a:off x="548640" y="384048"/>
-            <a:ext cx="10424160" cy="640080"/>
+            <a:off x="548640" y="457200"/>
+            <a:ext cx="10424160" cy="658368"/>
           </a:xfrm>
           <a:prstGeom prst="rect">
             <a:avLst/>
@@ -3732,11 +3890,11 @@
           <a:bodyPr wrap="square" rtlCol="0" anchor="ctr"/>
           <a:lstStyle/>
           <a:p>
-            <a:pPr algn="l" indent="0" marL="0">
+            <a:pPr indent="0" marL="0">
               <a:buNone/>
             </a:pPr>
             <a:r>
-              <a:rPr lang="en-US" sz="3000" b="1" dirty="0">
+              <a:rPr lang="en-US" sz="2800" b="1" dirty="0">
                 <a:solidFill>
                   <a:srgbClr val="1B2A4A"/>
                 </a:solidFill>
@@ -3744,9 +3902,9 @@
                 <a:ea typeface="맑은 고딕" pitchFamily="34" charset="-122"/>
                 <a:cs typeface="맑은 고딕" pitchFamily="34" charset="-120"/>
               </a:rPr>
-              <a:t>AI는 어떻게 개발했나</a:t>
-            </a:r>
-            <a:endParaRPr lang="en-US" sz="3000" dirty="0"/>
+              <a:t>AI 추론 — 2가지 (비교)</a:t>
+            </a:r>
+            <a:endParaRPr lang="en-US" sz="2800" dirty="0"/>
           </a:p>
         </p:txBody>
       </p:sp>
@@ -3758,8 +3916,8 @@
         </p:nvSpPr>
         <p:spPr>
           <a:xfrm>
-            <a:off x="11155680" y="384048"/>
-            <a:ext cx="640080" cy="640080"/>
+            <a:off x="11109960" y="457200"/>
+            <a:ext cx="685800" cy="658368"/>
           </a:xfrm>
           <a:prstGeom prst="rect">
             <a:avLst/>
@@ -3775,7 +3933,7 @@
               <a:buNone/>
             </a:pPr>
             <a:r>
-              <a:rPr lang="en-US" sz="2000" b="1" dirty="0">
+              <a:rPr lang="en-US" sz="1900" b="1" dirty="0">
                 <a:solidFill>
                   <a:srgbClr val="C67F17"/>
                 </a:solidFill>
@@ -3785,20 +3943,93 @@
               </a:rPr>
               <a:t>04</a:t>
             </a:r>
-            <a:endParaRPr lang="en-US" sz="2000" dirty="0"/>
-          </a:p>
-        </p:txBody>
-      </p:sp>
-      <p:sp>
-        <p:nvSpPr>
-          <p:cNvPr id="5" name="Text 3"/>
-          <p:cNvSpPr/>
-          <p:nvPr/>
-        </p:nvSpPr>
-        <p:spPr>
-          <a:xfrm>
-            <a:off x="566928" y="1554480"/>
-            <a:ext cx="6675120" cy="3931920"/>
+            <a:endParaRPr lang="en-US" sz="1900" dirty="0"/>
+          </a:p>
+        </p:txBody>
+      </p:sp>
+      <p:sp>
+        <p:nvSpPr>
+          <p:cNvPr id="5" name="Shape 3"/>
+          <p:cNvSpPr/>
+          <p:nvPr/>
+        </p:nvSpPr>
+        <p:spPr>
+          <a:xfrm>
+            <a:off x="566928" y="1371600"/>
+            <a:ext cx="5440680" cy="2697480"/>
+          </a:xfrm>
+          <a:prstGeom prst="roundRect">
+            <a:avLst>
+              <a:gd name="adj" fmla="val 2712"/>
+            </a:avLst>
+          </a:prstGeom>
+          <a:solidFill>
+            <a:srgbClr val="FFFFFF"/>
+          </a:solidFill>
+          <a:ln w="12700">
+            <a:solidFill>
+              <a:srgbClr val="DCE3EB"/>
+            </a:solidFill>
+            <a:prstDash val="solid"/>
+          </a:ln>
+          <a:effectLst>
+            <a:outerShdw sx="100000" sy="100000" kx="0" ky="0" algn="bl" rotWithShape="0" blurRad="76200" dist="25400" dir="5400000">
+              <a:srgbClr val="B9C3CE">
+                <a:alpha val="35000"/>
+              </a:srgbClr>
+            </a:outerShdw>
+          </a:effectLst>
+        </p:spPr>
+      </p:sp>
+      <p:sp>
+        <p:nvSpPr>
+          <p:cNvPr id="6" name="Text 4"/>
+          <p:cNvSpPr/>
+          <p:nvPr/>
+        </p:nvSpPr>
+        <p:spPr>
+          <a:xfrm>
+            <a:off x="822960" y="1572768"/>
+            <a:ext cx="4937760" cy="457200"/>
+          </a:xfrm>
+          <a:prstGeom prst="rect">
+            <a:avLst/>
+          </a:prstGeom>
+          <a:noFill/>
+          <a:ln/>
+        </p:spPr>
+        <p:txBody>
+          <a:bodyPr wrap="square" rtlCol="0" anchor="ctr"/>
+          <a:lstStyle/>
+          <a:p>
+            <a:pPr indent="0" marL="0">
+              <a:buNone/>
+            </a:pPr>
+            <a:r>
+              <a:rPr lang="en-US" sz="1800" b="1" dirty="0">
+                <a:solidFill>
+                  <a:srgbClr val="C67F17"/>
+                </a:solidFill>
+                <a:latin typeface="맑은 고딕" pitchFamily="34" charset="0"/>
+                <a:ea typeface="맑은 고딕" pitchFamily="34" charset="-122"/>
+                <a:cs typeface="맑은 고딕" pitchFamily="34" charset="-120"/>
+              </a:rPr>
+              <a:t>① Qwen3-8B  (주력)</a:t>
+            </a:r>
+            <a:endParaRPr lang="en-US" sz="1800" dirty="0"/>
+          </a:p>
+        </p:txBody>
+      </p:sp>
+      <p:sp>
+        <p:nvSpPr>
+          <p:cNvPr id="7" name="Text 5"/>
+          <p:cNvSpPr/>
+          <p:nvPr/>
+        </p:nvSpPr>
+        <p:spPr>
+          <a:xfrm>
+            <a:off x="868680" y="2103120"/>
+            <a:ext cx="4846320" cy="1828800"/>
           </a:xfrm>
           <a:prstGeom prst="rect">
             <a:avLst/>
@@ -3812,13 +4043,13 @@
           <a:p>
             <a:pPr marL="177800" indent="-177800">
               <a:spcAft>
-                <a:spcPts val="900"/>
+                <a:spcPts val="800"/>
               </a:spcAft>
               <a:buSzPct val="100000"/>
               <a:buChar char="•"/>
             </a:pPr>
             <a:r>
-              <a:rPr lang="en-US" sz="1500" b="1" dirty="0">
+              <a:rPr lang="en-US" sz="1500" dirty="0">
                 <a:solidFill>
                   <a:srgbClr val="1F2733"/>
                 </a:solidFill>
@@ -3826,14 +4057,14 @@
                 <a:ea typeface="맑은 고딕" pitchFamily="34" charset="-122"/>
                 <a:cs typeface="맑은 고딕" pitchFamily="34" charset="-120"/>
               </a:rPr>
-              <a:t>오픈소스 LLM(Qwen3-8B)을 Ollama로 로컬 서빙 — 다운받아 바로 사용</a:t>
+              <a:t>오픈소스 LLM, Ollama로 로컬 서빙</a:t>
             </a:r>
             <a:endParaRPr lang="en-US" sz="1500" dirty="0"/>
           </a:p>
           <a:p>
             <a:pPr marL="177800" indent="-177800">
               <a:spcAft>
-                <a:spcPts val="900"/>
+                <a:spcPts val="800"/>
               </a:spcAft>
               <a:buSzPct val="100000"/>
               <a:buChar char="•"/>
@@ -3847,14 +4078,14 @@
                 <a:ea typeface="맑은 고딕" pitchFamily="34" charset="-122"/>
                 <a:cs typeface="맑은 고딕" pitchFamily="34" charset="-120"/>
               </a:rPr>
-              <a:t>학습(파인튜닝) 없이 프롬프트 기반으로 구현</a:t>
+              <a:t>워크스테이션 GPU(P4000 8GB)에서 구동</a:t>
             </a:r>
             <a:endParaRPr lang="en-US" sz="1500" dirty="0"/>
           </a:p>
           <a:p>
             <a:pPr marL="177800" indent="-177800">
               <a:spcAft>
-                <a:spcPts val="900"/>
+                <a:spcPts val="800"/>
               </a:spcAft>
               <a:buSzPct val="100000"/>
               <a:buChar char="•"/>
@@ -3868,14 +4099,109 @@
                 <a:ea typeface="맑은 고딕" pitchFamily="34" charset="-122"/>
                 <a:cs typeface="맑은 고딕" pitchFamily="34" charset="-120"/>
               </a:rPr>
-              <a:t>프롬프트에 모호성 유형 분류 + 도메인 용어집(AMR·LOAD·UNLOAD 등) 반영</a:t>
+              <a:t>다운받아 바로 사용 · 반출 없음</a:t>
             </a:r>
             <a:endParaRPr lang="en-US" sz="1500" dirty="0"/>
           </a:p>
+        </p:txBody>
+      </p:sp>
+      <p:sp>
+        <p:nvSpPr>
+          <p:cNvPr id="8" name="Shape 6"/>
+          <p:cNvSpPr/>
+          <p:nvPr/>
+        </p:nvSpPr>
+        <p:spPr>
+          <a:xfrm>
+            <a:off x="6199632" y="1371600"/>
+            <a:ext cx="5440680" cy="2697480"/>
+          </a:xfrm>
+          <a:prstGeom prst="roundRect">
+            <a:avLst>
+              <a:gd name="adj" fmla="val 2712"/>
+            </a:avLst>
+          </a:prstGeom>
+          <a:solidFill>
+            <a:srgbClr val="FDF7EE"/>
+          </a:solidFill>
+          <a:ln w="12700">
+            <a:solidFill>
+              <a:srgbClr val="DCE3EB"/>
+            </a:solidFill>
+            <a:prstDash val="solid"/>
+          </a:ln>
+          <a:effectLst>
+            <a:outerShdw sx="100000" sy="100000" kx="0" ky="0" algn="bl" rotWithShape="0" blurRad="76200" dist="25400" dir="5400000">
+              <a:srgbClr val="B9C3CE">
+                <a:alpha val="35000"/>
+              </a:srgbClr>
+            </a:outerShdw>
+          </a:effectLst>
+        </p:spPr>
+      </p:sp>
+      <p:sp>
+        <p:nvSpPr>
+          <p:cNvPr id="9" name="Text 7"/>
+          <p:cNvSpPr/>
+          <p:nvPr/>
+        </p:nvSpPr>
+        <p:spPr>
+          <a:xfrm>
+            <a:off x="6446520" y="1572768"/>
+            <a:ext cx="4937760" cy="457200"/>
+          </a:xfrm>
+          <a:prstGeom prst="rect">
+            <a:avLst/>
+          </a:prstGeom>
+          <a:noFill/>
+          <a:ln/>
+        </p:spPr>
+        <p:txBody>
+          <a:bodyPr wrap="square" rtlCol="0" anchor="ctr"/>
+          <a:lstStyle/>
+          <a:p>
+            <a:pPr indent="0" marL="0">
+              <a:buNone/>
+            </a:pPr>
+            <a:r>
+              <a:rPr lang="en-US" sz="1800" b="1" dirty="0">
+                <a:solidFill>
+                  <a:srgbClr val="2C7A8C"/>
+                </a:solidFill>
+                <a:latin typeface="맑은 고딕" pitchFamily="34" charset="0"/>
+                <a:ea typeface="맑은 고딕" pitchFamily="34" charset="-122"/>
+                <a:cs typeface="맑은 고딕" pitchFamily="34" charset="-120"/>
+              </a:rPr>
+              <a:t>② 사내 playground  (비교용)</a:t>
+            </a:r>
+            <a:endParaRPr lang="en-US" sz="1800" dirty="0"/>
+          </a:p>
+        </p:txBody>
+      </p:sp>
+      <p:sp>
+        <p:nvSpPr>
+          <p:cNvPr id="10" name="Text 8"/>
+          <p:cNvSpPr/>
+          <p:nvPr/>
+        </p:nvSpPr>
+        <p:spPr>
+          <a:xfrm>
+            <a:off x="6492240" y="2103120"/>
+            <a:ext cx="4846320" cy="1828800"/>
+          </a:xfrm>
+          <a:prstGeom prst="rect">
+            <a:avLst/>
+          </a:prstGeom>
+          <a:noFill/>
+          <a:ln/>
+        </p:spPr>
+        <p:txBody>
+          <a:bodyPr wrap="square" rtlCol="0" anchor="t"/>
+          <a:lstStyle/>
           <a:p>
             <a:pPr marL="177800" indent="-177800">
               <a:spcAft>
-                <a:spcPts val="900"/>
+                <a:spcPts val="800"/>
               </a:spcAft>
               <a:buSzPct val="100000"/>
               <a:buChar char="•"/>
@@ -3889,14 +4215,14 @@
                 <a:ea typeface="맑은 고딕" pitchFamily="34" charset="-122"/>
                 <a:cs typeface="맑은 고딕" pitchFamily="34" charset="-120"/>
               </a:rPr>
-              <a:t>모호 조항에 '이렇게 쓰라'는 재작성 예시(suggestion)까지 출력</a:t>
+              <a:t>사내 AI를 API로 호출</a:t>
             </a:r>
             <a:endParaRPr lang="en-US" sz="1500" dirty="0"/>
           </a:p>
           <a:p>
             <a:pPr marL="177800" indent="-177800">
               <a:spcAft>
-                <a:spcPts val="900"/>
+                <a:spcPts val="800"/>
               </a:spcAft>
               <a:buSzPct val="100000"/>
               <a:buChar char="•"/>
@@ -3910,26 +4236,184 @@
                 <a:ea typeface="맑은 고딕" pitchFamily="34" charset="-122"/>
                 <a:cs typeface="맑은 고딕" pitchFamily="34" charset="-120"/>
               </a:rPr>
-              <a:t>결과는 항상 '초안' — 담당자가 검토·수정하는 원칙</a:t>
+              <a:t>사내 서비스라 반출 문제 없음</a:t>
             </a:r>
             <a:endParaRPr lang="en-US" sz="1500" dirty="0"/>
           </a:p>
-        </p:txBody>
-      </p:sp>
-      <p:sp>
-        <p:nvSpPr>
-          <p:cNvPr id="6" name="Shape 4"/>
-          <p:cNvSpPr/>
-          <p:nvPr/>
-        </p:nvSpPr>
-        <p:spPr>
-          <a:xfrm>
-            <a:off x="7589520" y="1737360"/>
-            <a:ext cx="4023360" cy="3200400"/>
+          <a:p>
+            <a:pPr marL="177800" indent="-177800">
+              <a:spcAft>
+                <a:spcPts val="800"/>
+              </a:spcAft>
+              <a:buSzPct val="100000"/>
+              <a:buChar char="•"/>
+            </a:pPr>
+            <a:r>
+              <a:rPr lang="en-US" sz="1500" dirty="0">
+                <a:solidFill>
+                  <a:srgbClr val="1F2733"/>
+                </a:solidFill>
+                <a:latin typeface="맑은 고딕" pitchFamily="34" charset="0"/>
+                <a:ea typeface="맑은 고딕" pitchFamily="34" charset="-122"/>
+                <a:cs typeface="맑은 고딕" pitchFamily="34" charset="-120"/>
+              </a:rPr>
+              <a:t>Qwen3-8B와 정확도·속도 비교 목적</a:t>
+            </a:r>
+            <a:endParaRPr lang="en-US" sz="1500" dirty="0"/>
+          </a:p>
+        </p:txBody>
+      </p:sp>
+      <p:sp>
+        <p:nvSpPr>
+          <p:cNvPr id="11" name="Shape 9"/>
+          <p:cNvSpPr/>
+          <p:nvPr/>
+        </p:nvSpPr>
+        <p:spPr>
+          <a:xfrm>
+            <a:off x="566928" y="4251960"/>
+            <a:ext cx="7406640" cy="1965960"/>
           </a:xfrm>
           <a:prstGeom prst="roundRect">
             <a:avLst>
-              <a:gd name="adj" fmla="val 2286"/>
+              <a:gd name="adj" fmla="val 3721"/>
+            </a:avLst>
+          </a:prstGeom>
+          <a:solidFill>
+            <a:srgbClr val="FFFFFF"/>
+          </a:solidFill>
+          <a:ln w="12700">
+            <a:solidFill>
+              <a:srgbClr val="DCE3EB"/>
+            </a:solidFill>
+            <a:prstDash val="solid"/>
+          </a:ln>
+          <a:effectLst>
+            <a:outerShdw sx="100000" sy="100000" kx="0" ky="0" algn="bl" rotWithShape="0" blurRad="76200" dist="25400" dir="5400000">
+              <a:srgbClr val="B9C3CE">
+                <a:alpha val="35000"/>
+              </a:srgbClr>
+            </a:outerShdw>
+          </a:effectLst>
+        </p:spPr>
+      </p:sp>
+      <p:sp>
+        <p:nvSpPr>
+          <p:cNvPr id="12" name="Text 10"/>
+          <p:cNvSpPr/>
+          <p:nvPr/>
+        </p:nvSpPr>
+        <p:spPr>
+          <a:xfrm>
+            <a:off x="822960" y="4389120"/>
+            <a:ext cx="4572000" cy="365760"/>
+          </a:xfrm>
+          <a:prstGeom prst="rect">
+            <a:avLst/>
+          </a:prstGeom>
+          <a:noFill/>
+          <a:ln/>
+        </p:spPr>
+        <p:txBody>
+          <a:bodyPr wrap="square" rtlCol="0" anchor="ctr"/>
+          <a:lstStyle/>
+          <a:p>
+            <a:pPr indent="0" marL="0">
+              <a:buNone/>
+            </a:pPr>
+            <a:r>
+              <a:rPr lang="en-US" sz="1500" b="1" dirty="0">
+                <a:solidFill>
+                  <a:srgbClr val="24395F"/>
+                </a:solidFill>
+                <a:latin typeface="맑은 고딕" pitchFamily="34" charset="0"/>
+                <a:ea typeface="맑은 고딕" pitchFamily="34" charset="-122"/>
+                <a:cs typeface="맑은 고딕" pitchFamily="34" charset="-120"/>
+              </a:rPr>
+              <a:t>개발 방법</a:t>
+            </a:r>
+            <a:endParaRPr lang="en-US" sz="1500" dirty="0"/>
+          </a:p>
+        </p:txBody>
+      </p:sp>
+      <p:sp>
+        <p:nvSpPr>
+          <p:cNvPr id="13" name="Text 11"/>
+          <p:cNvSpPr/>
+          <p:nvPr/>
+        </p:nvSpPr>
+        <p:spPr>
+          <a:xfrm>
+            <a:off x="868680" y="4800600"/>
+            <a:ext cx="6858000" cy="1280160"/>
+          </a:xfrm>
+          <a:prstGeom prst="rect">
+            <a:avLst/>
+          </a:prstGeom>
+          <a:noFill/>
+          <a:ln/>
+        </p:spPr>
+        <p:txBody>
+          <a:bodyPr wrap="square" rtlCol="0" anchor="t"/>
+          <a:lstStyle/>
+          <a:p>
+            <a:pPr marL="177800" indent="-177800">
+              <a:spcAft>
+                <a:spcPts val="800"/>
+              </a:spcAft>
+              <a:buSzPct val="100000"/>
+              <a:buChar char="•"/>
+            </a:pPr>
+            <a:r>
+              <a:rPr lang="en-US" sz="1500" dirty="0">
+                <a:solidFill>
+                  <a:srgbClr val="1F2733"/>
+                </a:solidFill>
+                <a:latin typeface="맑은 고딕" pitchFamily="34" charset="0"/>
+                <a:ea typeface="맑은 고딕" pitchFamily="34" charset="-122"/>
+                <a:cs typeface="맑은 고딕" pitchFamily="34" charset="-120"/>
+              </a:rPr>
+              <a:t>학습(파인튜닝) 없이 프롬프트 기반</a:t>
+            </a:r>
+            <a:endParaRPr lang="en-US" sz="1500" dirty="0"/>
+          </a:p>
+          <a:p>
+            <a:pPr marL="177800" indent="-177800">
+              <a:spcAft>
+                <a:spcPts val="800"/>
+              </a:spcAft>
+              <a:buSzPct val="100000"/>
+              <a:buChar char="•"/>
+            </a:pPr>
+            <a:r>
+              <a:rPr lang="en-US" sz="1500" dirty="0">
+                <a:solidFill>
+                  <a:srgbClr val="1F2733"/>
+                </a:solidFill>
+                <a:latin typeface="맑은 고딕" pitchFamily="34" charset="0"/>
+                <a:ea typeface="맑은 고딕" pitchFamily="34" charset="-122"/>
+                <a:cs typeface="맑은 고딕" pitchFamily="34" charset="-120"/>
+              </a:rPr>
+              <a:t>프롬프트에 도메인 용어집(AMR·LOAD·UNLOAD 등) + '이렇게 쓰라' 재작성 예시 반영</a:t>
+            </a:r>
+            <a:endParaRPr lang="en-US" sz="1500" dirty="0"/>
+          </a:p>
+        </p:txBody>
+      </p:sp>
+      <p:sp>
+        <p:nvSpPr>
+          <p:cNvPr id="14" name="Shape 12"/>
+          <p:cNvSpPr/>
+          <p:nvPr/>
+        </p:nvSpPr>
+        <p:spPr>
+          <a:xfrm>
+            <a:off x="8138160" y="4251960"/>
+            <a:ext cx="3493008" cy="1965960"/>
+          </a:xfrm>
+          <a:prstGeom prst="roundRect">
+            <a:avLst>
+              <a:gd name="adj" fmla="val 3721"/>
             </a:avLst>
           </a:prstGeom>
           <a:solidFill>
@@ -3952,14 +4436,14 @@
       </p:sp>
       <p:sp>
         <p:nvSpPr>
-          <p:cNvPr id="7" name="Text 5"/>
-          <p:cNvSpPr/>
-          <p:nvPr/>
-        </p:nvSpPr>
-        <p:spPr>
-          <a:xfrm>
-            <a:off x="7589520" y="2057400"/>
-            <a:ext cx="4023360" cy="457200"/>
+          <p:cNvPr id="15" name="Text 13"/>
+          <p:cNvSpPr/>
+          <p:nvPr/>
+        </p:nvSpPr>
+        <p:spPr>
+          <a:xfrm>
+            <a:off x="8138160" y="4434840"/>
+            <a:ext cx="3493008" cy="365760"/>
           </a:xfrm>
           <a:prstGeom prst="rect">
             <a:avLst/>
@@ -3975,7 +4459,7 @@
               <a:buNone/>
             </a:pPr>
             <a:r>
-              <a:rPr lang="en-US" sz="1700" dirty="0">
+              <a:rPr lang="en-US" sz="1500" dirty="0">
                 <a:solidFill>
                   <a:srgbClr val="CADCFC"/>
                 </a:solidFill>
@@ -3985,20 +4469,20 @@
               </a:rPr>
               <a:t>추론 시간</a:t>
             </a:r>
-            <a:endParaRPr lang="en-US" sz="1700" dirty="0"/>
-          </a:p>
-        </p:txBody>
-      </p:sp>
-      <p:sp>
-        <p:nvSpPr>
-          <p:cNvPr id="8" name="Text 6"/>
-          <p:cNvSpPr/>
-          <p:nvPr/>
-        </p:nvSpPr>
-        <p:spPr>
-          <a:xfrm>
-            <a:off x="7589520" y="2560320"/>
-            <a:ext cx="4023360" cy="1097280"/>
+            <a:endParaRPr lang="en-US" sz="1500" dirty="0"/>
+          </a:p>
+        </p:txBody>
+      </p:sp>
+      <p:sp>
+        <p:nvSpPr>
+          <p:cNvPr id="16" name="Text 14"/>
+          <p:cNvSpPr/>
+          <p:nvPr/>
+        </p:nvSpPr>
+        <p:spPr>
+          <a:xfrm>
+            <a:off x="8138160" y="4754880"/>
+            <a:ext cx="3493008" cy="822960"/>
           </a:xfrm>
           <a:prstGeom prst="rect">
             <a:avLst/>
@@ -4014,7 +4498,7 @@
               <a:buNone/>
             </a:pPr>
             <a:r>
-              <a:rPr lang="en-US" sz="5200" b="1" dirty="0">
+              <a:rPr lang="en-US" sz="4000" b="1" dirty="0">
                 <a:solidFill>
                   <a:srgbClr val="FFFFFF"/>
                 </a:solidFill>
@@ -4024,20 +4508,20 @@
               </a:rPr>
               <a:t>약 2~3초</a:t>
             </a:r>
-            <a:endParaRPr lang="en-US" sz="5200" dirty="0"/>
-          </a:p>
-        </p:txBody>
-      </p:sp>
-      <p:sp>
-        <p:nvSpPr>
-          <p:cNvPr id="9" name="Text 7"/>
-          <p:cNvSpPr/>
-          <p:nvPr/>
-        </p:nvSpPr>
-        <p:spPr>
-          <a:xfrm>
-            <a:off x="7589520" y="3703320"/>
-            <a:ext cx="4023360" cy="457200"/>
+            <a:endParaRPr lang="en-US" sz="4000" dirty="0"/>
+          </a:p>
+        </p:txBody>
+      </p:sp>
+      <p:sp>
+        <p:nvSpPr>
+          <p:cNvPr id="17" name="Text 15"/>
+          <p:cNvSpPr/>
+          <p:nvPr/>
+        </p:nvSpPr>
+        <p:spPr>
+          <a:xfrm>
+            <a:off x="8138160" y="5623560"/>
+            <a:ext cx="3493008" cy="365760"/>
           </a:xfrm>
           <a:prstGeom prst="rect">
             <a:avLst/>
@@ -4053,7 +4537,7 @@
               <a:buNone/>
             </a:pPr>
             <a:r>
-              <a:rPr lang="en-US" sz="1500" dirty="0">
+              <a:rPr lang="en-US" sz="1300" dirty="0">
                 <a:solidFill>
                   <a:srgbClr val="AEBFDA"/>
                 </a:solidFill>
@@ -4063,46 +4547,7 @@
               </a:rPr>
               <a:t>기능(조항) 1건당</a:t>
             </a:r>
-            <a:endParaRPr lang="en-US" sz="1500" dirty="0"/>
-          </a:p>
-        </p:txBody>
-      </p:sp>
-      <p:sp>
-        <p:nvSpPr>
-          <p:cNvPr id="10" name="Text 8"/>
-          <p:cNvSpPr/>
-          <p:nvPr/>
-        </p:nvSpPr>
-        <p:spPr>
-          <a:xfrm>
-            <a:off x="7589520" y="4206240"/>
-            <a:ext cx="4023360" cy="640080"/>
-          </a:xfrm>
-          <a:prstGeom prst="rect">
-            <a:avLst/>
-          </a:prstGeom>
-          <a:noFill/>
-          <a:ln/>
-        </p:spPr>
-        <p:txBody>
-          <a:bodyPr wrap="square" rtlCol="0" anchor="ctr"/>
-          <a:lstStyle/>
-          <a:p>
-            <a:pPr algn="ctr" indent="0" marL="0">
-              <a:buNone/>
-            </a:pPr>
-            <a:r>
-              <a:rPr lang="en-US" sz="1200" i="1" dirty="0">
-                <a:solidFill>
-                  <a:srgbClr val="8FA3C6"/>
-                </a:solidFill>
-                <a:latin typeface="맑은 고딕" pitchFamily="34" charset="0"/>
-                <a:ea typeface="맑은 고딕" pitchFamily="34" charset="-122"/>
-                <a:cs typeface="맑은 고딕" pitchFamily="34" charset="-120"/>
-              </a:rPr>
-              <a:t>* 첫 호출은 모델 적재(콜드로드)로 더 걸림 — 이후 정상</a:t>
-            </a:r>
-            <a:endParaRPr lang="en-US" sz="1200" dirty="0"/>
+            <a:endParaRPr lang="en-US" sz="1300" dirty="0"/>
           </a:p>
         </p:txBody>
       </p:sp>
@@ -4146,8 +4591,8 @@
         </p:nvSpPr>
         <p:spPr>
           <a:xfrm>
-            <a:off x="566928" y="182880"/>
-            <a:ext cx="7315200" cy="274320"/>
+            <a:off x="566928" y="201168"/>
+            <a:ext cx="8229600" cy="274320"/>
           </a:xfrm>
           <a:prstGeom prst="rect">
             <a:avLst/>
@@ -4171,7 +4616,7 @@
                 <a:ea typeface="맑은 고딕" pitchFamily="34" charset="-122"/>
                 <a:cs typeface="맑은 고딕" pitchFamily="34" charset="-120"/>
               </a:rPr>
-              <a:t>핵심기능 ① · 데모</a:t>
+              <a:t>핵심기능 ① · 프로세스</a:t>
             </a:r>
             <a:endParaRPr lang="en-US" sz="1200" dirty="0"/>
           </a:p>
@@ -4185,8 +4630,8 @@
         </p:nvSpPr>
         <p:spPr>
           <a:xfrm>
-            <a:off x="548640" y="384048"/>
-            <a:ext cx="10424160" cy="640080"/>
+            <a:off x="548640" y="457200"/>
+            <a:ext cx="10424160" cy="658368"/>
           </a:xfrm>
           <a:prstGeom prst="rect">
             <a:avLst/>
@@ -4198,11 +4643,11 @@
           <a:bodyPr wrap="square" rtlCol="0" anchor="ctr"/>
           <a:lstStyle/>
           <a:p>
-            <a:pPr algn="l" indent="0" marL="0">
+            <a:pPr indent="0" marL="0">
               <a:buNone/>
             </a:pPr>
             <a:r>
-              <a:rPr lang="en-US" sz="3000" b="1" dirty="0">
+              <a:rPr lang="en-US" sz="2800" b="1" dirty="0">
                 <a:solidFill>
                   <a:srgbClr val="1B2A4A"/>
                 </a:solidFill>
@@ -4210,9 +4655,9 @@
                 <a:ea typeface="맑은 고딕" pitchFamily="34" charset="-122"/>
                 <a:cs typeface="맑은 고딕" pitchFamily="34" charset="-120"/>
               </a:rPr>
-              <a:t>모호성 해결 — 이렇게 구현·테스트했다</a:t>
-            </a:r>
-            <a:endParaRPr lang="en-US" sz="3000" dirty="0"/>
+              <a:t>모호성 해결 — docx 업로드부터 해결까지 (하나의 프로세스)</a:t>
+            </a:r>
+            <a:endParaRPr lang="en-US" sz="2800" dirty="0"/>
           </a:p>
         </p:txBody>
       </p:sp>
@@ -4224,8 +4669,8 @@
         </p:nvSpPr>
         <p:spPr>
           <a:xfrm>
-            <a:off x="11155680" y="384048"/>
-            <a:ext cx="640080" cy="640080"/>
+            <a:off x="11109960" y="457200"/>
+            <a:ext cx="685800" cy="658368"/>
           </a:xfrm>
           <a:prstGeom prst="rect">
             <a:avLst/>
@@ -4241,7 +4686,7 @@
               <a:buNone/>
             </a:pPr>
             <a:r>
-              <a:rPr lang="en-US" sz="2000" b="1" dirty="0">
+              <a:rPr lang="en-US" sz="1900" b="1" dirty="0">
                 <a:solidFill>
                   <a:srgbClr val="C67F17"/>
                 </a:solidFill>
@@ -4251,13 +4696,13 @@
               </a:rPr>
               <a:t>05</a:t>
             </a:r>
-            <a:endParaRPr lang="en-US" sz="2000" dirty="0"/>
+            <a:endParaRPr lang="en-US" sz="1900" dirty="0"/>
           </a:p>
         </p:txBody>
       </p:sp>
       <p:pic>
         <p:nvPicPr>
-          <p:cNvPr id="5" name="Image 0" descr="/home/user/semes-superrookie/docs/img/demo-ambiguity-react.png">    </p:cNvPr>
+          <p:cNvPr id="5" name="Image 0" descr="/home/user/semes-superrookie/docs/img/design-fig1.png">    </p:cNvPr>
           <p:cNvPicPr>
             <a:picLocks noChangeAspect="1"/>
           </p:cNvPicPr>
@@ -4265,13 +4710,14 @@
         </p:nvPicPr>
         <p:blipFill>
           <a:blip r:embed="rId1"/>
-          <a:srcRect l="0" r="0" t="0" b="0"/>
-          <a:stretch/>
+          <a:stretch>
+            <a:fillRect/>
+          </a:stretch>
         </p:blipFill>
         <p:spPr>
           <a:xfrm>
-            <a:off x="7471289" y="1234440"/>
-            <a:ext cx="4076943" cy="5120640"/>
+            <a:off x="1393597" y="1280160"/>
+            <a:ext cx="9420045" cy="4160520"/>
           </a:xfrm>
           <a:prstGeom prst="rect">
             <a:avLst/>
@@ -4286,162 +4732,8 @@
         </p:nvSpPr>
         <p:spPr>
           <a:xfrm>
-            <a:off x="566928" y="1554480"/>
-            <a:ext cx="6126480" cy="3657600"/>
-          </a:xfrm>
-          <a:prstGeom prst="rect">
-            <a:avLst/>
-          </a:prstGeom>
-          <a:noFill/>
-          <a:ln/>
-        </p:spPr>
-        <p:txBody>
-          <a:bodyPr wrap="square" rtlCol="0" anchor="t"/>
-          <a:lstStyle/>
-          <a:p>
-            <a:pPr marL="177800" indent="-177800">
-              <a:spcAft>
-                <a:spcPts val="900"/>
-              </a:spcAft>
-              <a:buSzPct val="100000"/>
-              <a:buChar char="•"/>
-            </a:pPr>
-            <a:r>
-              <a:rPr lang="en-US" sz="1500" b="1" dirty="0">
-                <a:solidFill>
-                  <a:srgbClr val="C67F17"/>
-                </a:solidFill>
-                <a:latin typeface="맑은 고딕" pitchFamily="34" charset="0"/>
-                <a:ea typeface="맑은 고딕" pitchFamily="34" charset="-122"/>
-                <a:cs typeface="맑은 고딕" pitchFamily="34" charset="-120"/>
-              </a:rPr>
-              <a:t>요구사항 입력 → 조항별 모호성 검출</a:t>
-            </a:r>
-            <a:endParaRPr lang="en-US" sz="1500" dirty="0"/>
-          </a:p>
-          <a:p>
-            <a:pPr marL="177800" indent="-177800">
-              <a:spcAft>
-                <a:spcPts val="1200"/>
-              </a:spcAft>
-              <a:buSzPct val="100000"/>
-              <a:buChar char="•"/>
-            </a:pPr>
-            <a:r>
-              <a:rPr lang="en-US" sz="1500" dirty="0">
-                <a:solidFill>
-                  <a:srgbClr val="1F2733"/>
-                </a:solidFill>
-                <a:latin typeface="맑은 고딕" pitchFamily="34" charset="0"/>
-                <a:ea typeface="맑은 고딕" pitchFamily="34" charset="-122"/>
-                <a:cs typeface="맑은 고딕" pitchFamily="34" charset="-120"/>
-              </a:rPr>
-              <a:t>유형 · 사유 · 재작성 예시까지 표시</a:t>
-            </a:r>
-            <a:endParaRPr lang="en-US" sz="1500" dirty="0"/>
-          </a:p>
-          <a:p>
-            <a:pPr marL="177800" indent="-177800">
-              <a:spcAft>
-                <a:spcPts val="900"/>
-              </a:spcAft>
-              <a:buSzPct val="100000"/>
-              <a:buChar char="•"/>
-            </a:pPr>
-            <a:r>
-              <a:rPr lang="en-US" sz="1500" b="1" dirty="0">
-                <a:solidFill>
-                  <a:srgbClr val="C67F17"/>
-                </a:solidFill>
-                <a:latin typeface="맑은 고딕" pitchFamily="34" charset="0"/>
-                <a:ea typeface="맑은 고딕" pitchFamily="34" charset="-122"/>
-                <a:cs typeface="맑은 고딕" pitchFamily="34" charset="-120"/>
-              </a:rPr>
-              <a:t>해결하기 / 넘어가기 선택</a:t>
-            </a:r>
-            <a:endParaRPr lang="en-US" sz="1500" dirty="0"/>
-          </a:p>
-          <a:p>
-            <a:pPr marL="177800" indent="-177800">
-              <a:spcAft>
-                <a:spcPts val="1200"/>
-              </a:spcAft>
-              <a:buSzPct val="100000"/>
-              <a:buChar char="•"/>
-            </a:pPr>
-            <a:r>
-              <a:rPr lang="en-US" sz="1500" dirty="0">
-                <a:solidFill>
-                  <a:srgbClr val="1F2733"/>
-                </a:solidFill>
-                <a:latin typeface="맑은 고딕" pitchFamily="34" charset="0"/>
-                <a:ea typeface="맑은 고딕" pitchFamily="34" charset="-122"/>
-                <a:cs typeface="맑은 고딕" pitchFamily="34" charset="-120"/>
-              </a:rPr>
-              <a:t>확정 시 '해결 전 / 후' 비교로 전환</a:t>
-            </a:r>
-            <a:endParaRPr lang="en-US" sz="1500" dirty="0"/>
-          </a:p>
-          <a:p>
-            <a:pPr marL="177800" indent="-177800">
-              <a:spcAft>
-                <a:spcPts val="900"/>
-              </a:spcAft>
-              <a:buSzPct val="100000"/>
-              <a:buChar char="•"/>
-            </a:pPr>
-            <a:r>
-              <a:rPr lang="en-US" sz="1500" dirty="0">
-                <a:solidFill>
-                  <a:srgbClr val="3C4855"/>
-                </a:solidFill>
-                <a:latin typeface="맑은 고딕" pitchFamily="34" charset="0"/>
-                <a:ea typeface="맑은 고딕" pitchFamily="34" charset="-122"/>
-                <a:cs typeface="맑은 고딕" pitchFamily="34" charset="-120"/>
-              </a:rPr>
-              <a:t>React + FastAPI + 로컬 LLM로 실제 동작</a:t>
-            </a:r>
-            <a:endParaRPr lang="en-US" sz="1500" dirty="0"/>
-          </a:p>
-        </p:txBody>
-      </p:sp>
-      <p:sp>
-        <p:nvSpPr>
-          <p:cNvPr id="7" name="Shape 4"/>
-          <p:cNvSpPr/>
-          <p:nvPr/>
-        </p:nvSpPr>
-        <p:spPr>
-          <a:xfrm>
-            <a:off x="566928" y="5074920"/>
-            <a:ext cx="2743200" cy="502920"/>
-          </a:xfrm>
-          <a:prstGeom prst="roundRect">
-            <a:avLst>
-              <a:gd name="adj" fmla="val 18182"/>
-            </a:avLst>
-          </a:prstGeom>
-          <a:solidFill>
-            <a:srgbClr val="DDF0E4"/>
-          </a:solidFill>
-          <a:ln w="12700">
-            <a:solidFill>
-              <a:srgbClr val="2A8A57"/>
-            </a:solidFill>
-            <a:prstDash val="solid"/>
-          </a:ln>
-        </p:spPr>
-      </p:sp>
-      <p:sp>
-        <p:nvSpPr>
-          <p:cNvPr id="8" name="Text 5"/>
-          <p:cNvSpPr/>
-          <p:nvPr/>
-        </p:nvSpPr>
-        <p:spPr>
-          <a:xfrm>
-            <a:off x="566928" y="5074920"/>
-            <a:ext cx="2743200" cy="502920"/>
+            <a:off x="566928" y="5943600"/>
+            <a:ext cx="11064240" cy="457200"/>
           </a:xfrm>
           <a:prstGeom prst="rect">
             <a:avLst/>
@@ -4457,17 +4749,17 @@
               <a:buNone/>
             </a:pPr>
             <a:r>
-              <a:rPr lang="en-US" sz="1500" b="1" dirty="0">
-                <a:solidFill>
-                  <a:srgbClr val="2A8A57"/>
-                </a:solidFill>
-                <a:latin typeface="맑은 고딕" pitchFamily="34" charset="0"/>
-                <a:ea typeface="맑은 고딕" pitchFamily="34" charset="-122"/>
-                <a:cs typeface="맑은 고딕" pitchFamily="34" charset="-120"/>
-              </a:rPr>
-              <a:t>✔  테스트 완료</a:t>
-            </a:r>
-            <a:endParaRPr lang="en-US" sz="1500" dirty="0"/>
+              <a:rPr lang="en-US" sz="1350" b="1" dirty="0">
+                <a:solidFill>
+                  <a:srgbClr val="24395F"/>
+                </a:solidFill>
+                <a:latin typeface="맑은 고딕" pitchFamily="34" charset="0"/>
+                <a:ea typeface="맑은 고딕" pitchFamily="34" charset="-122"/>
+                <a:cs typeface="맑은 고딕" pitchFamily="34" charset="-120"/>
+              </a:rPr>
+              <a:t>① docx 업로드·파싱  →  ② 조항별 모호성 검출(유형·근거·재작성 예시)  →  ③ 해결(해석 입력)/넘어가기  →  ④ 해결 전·후 비교</a:t>
+            </a:r>
+            <a:endParaRPr lang="en-US" sz="1350" dirty="0"/>
           </a:p>
         </p:txBody>
       </p:sp>
@@ -4511,8 +4803,8 @@
         </p:nvSpPr>
         <p:spPr>
           <a:xfrm>
-            <a:off x="566928" y="182880"/>
-            <a:ext cx="7315200" cy="274320"/>
+            <a:off x="566928" y="201168"/>
+            <a:ext cx="8229600" cy="274320"/>
           </a:xfrm>
           <a:prstGeom prst="rect">
             <a:avLst/>
@@ -4536,7 +4828,7 @@
                 <a:ea typeface="맑은 고딕" pitchFamily="34" charset="-122"/>
                 <a:cs typeface="맑은 고딕" pitchFamily="34" charset="-120"/>
               </a:rPr>
-              <a:t>테스트</a:t>
+              <a:t>핵심기능 ① · 구현/테스트</a:t>
             </a:r>
             <a:endParaRPr lang="en-US" sz="1200" dirty="0"/>
           </a:p>
@@ -4550,8 +4842,8 @@
         </p:nvSpPr>
         <p:spPr>
           <a:xfrm>
-            <a:off x="548640" y="384048"/>
-            <a:ext cx="10424160" cy="640080"/>
+            <a:off x="548640" y="457200"/>
+            <a:ext cx="10424160" cy="658368"/>
           </a:xfrm>
           <a:prstGeom prst="rect">
             <a:avLst/>
@@ -4563,11 +4855,11 @@
           <a:bodyPr wrap="square" rtlCol="0" anchor="ctr"/>
           <a:lstStyle/>
           <a:p>
-            <a:pPr algn="l" indent="0" marL="0">
+            <a:pPr indent="0" marL="0">
               <a:buNone/>
             </a:pPr>
             <a:r>
-              <a:rPr lang="en-US" sz="3000" b="1" dirty="0">
+              <a:rPr lang="en-US" sz="2800" b="1" dirty="0">
                 <a:solidFill>
                   <a:srgbClr val="1B2A4A"/>
                 </a:solidFill>
@@ -4575,9 +4867,9 @@
                 <a:ea typeface="맑은 고딕" pitchFamily="34" charset="-122"/>
                 <a:cs typeface="맑은 고딕" pitchFamily="34" charset="-120"/>
               </a:rPr>
-              <a:t>docx 업로드 · 파싱 테스트</a:t>
-            </a:r>
-            <a:endParaRPr lang="en-US" sz="3000" dirty="0"/>
+              <a:t>실제로 이렇게 구현·테스트했다</a:t>
+            </a:r>
+            <a:endParaRPr lang="en-US" sz="2800" dirty="0"/>
           </a:p>
         </p:txBody>
       </p:sp>
@@ -4589,8 +4881,8 @@
         </p:nvSpPr>
         <p:spPr>
           <a:xfrm>
-            <a:off x="11155680" y="384048"/>
-            <a:ext cx="640080" cy="640080"/>
+            <a:off x="11109960" y="457200"/>
+            <a:ext cx="685800" cy="658368"/>
           </a:xfrm>
           <a:prstGeom prst="rect">
             <a:avLst/>
@@ -4606,7 +4898,7 @@
               <a:buNone/>
             </a:pPr>
             <a:r>
-              <a:rPr lang="en-US" sz="2000" b="1" dirty="0">
+              <a:rPr lang="en-US" sz="1900" b="1" dirty="0">
                 <a:solidFill>
                   <a:srgbClr val="C67F17"/>
                 </a:solidFill>
@@ -4616,13 +4908,13 @@
               </a:rPr>
               <a:t>06</a:t>
             </a:r>
-            <a:endParaRPr lang="en-US" sz="2000" dirty="0"/>
+            <a:endParaRPr lang="en-US" sz="1900" dirty="0"/>
           </a:p>
         </p:txBody>
       </p:sp>
       <p:pic>
         <p:nvPicPr>
-          <p:cNvPr id="5" name="Image 0" descr="/home/user/semes-superrookie/docs/img/demo-docx-upload.png">    </p:cNvPr>
+          <p:cNvPr id="5" name="Image 0" descr="/home/user/semes-superrookie/docs/img/demo-ambiguity-react.png">    </p:cNvPr>
           <p:cNvPicPr>
             <a:picLocks noChangeAspect="1"/>
           </p:cNvPicPr>
@@ -4630,13 +4922,14 @@
         </p:nvPicPr>
         <p:blipFill>
           <a:blip r:embed="rId1"/>
-          <a:srcRect l="0" r="0" t="0" b="0"/>
-          <a:stretch/>
+          <a:stretch>
+            <a:fillRect/>
+          </a:stretch>
         </p:blipFill>
         <p:spPr>
           <a:xfrm>
-            <a:off x="6949440" y="1371600"/>
-            <a:ext cx="4754880" cy="4754880"/>
+            <a:off x="7443769" y="1280160"/>
+            <a:ext cx="4040541" cy="5074920"/>
           </a:xfrm>
           <a:prstGeom prst="rect">
             <a:avLst/>
@@ -4651,8 +4944,8 @@
         </p:nvSpPr>
         <p:spPr>
           <a:xfrm>
-            <a:off x="566928" y="1554480"/>
-            <a:ext cx="6126480" cy="3474720"/>
+            <a:off x="566928" y="1508760"/>
+            <a:ext cx="6217920" cy="3200400"/>
           </a:xfrm>
           <a:prstGeom prst="rect">
             <a:avLst/>
@@ -4666,7 +4959,7 @@
           <a:p>
             <a:pPr marL="177800" indent="-177800">
               <a:spcAft>
-                <a:spcPts val="900"/>
+                <a:spcPts val="800"/>
               </a:spcAft>
               <a:buSzPct val="100000"/>
               <a:buChar char="•"/>
@@ -4674,20 +4967,20 @@
             <a:r>
               <a:rPr lang="en-US" sz="1500" b="1" dirty="0">
                 <a:solidFill>
-                  <a:srgbClr val="2C7A8C"/>
-                </a:solidFill>
-                <a:latin typeface="맑은 고딕" pitchFamily="34" charset="0"/>
-                <a:ea typeface="맑은 고딕" pitchFamily="34" charset="-122"/>
-                <a:cs typeface="맑은 고딕" pitchFamily="34" charset="-120"/>
-              </a:rPr>
-              <a:t>명세서 파일을 웹에 업로드</a:t>
+                  <a:srgbClr val="C67F17"/>
+                </a:solidFill>
+                <a:latin typeface="맑은 고딕" pitchFamily="34" charset="0"/>
+                <a:ea typeface="맑은 고딕" pitchFamily="34" charset="-122"/>
+                <a:cs typeface="맑은 고딕" pitchFamily="34" charset="-120"/>
+              </a:rPr>
+              <a:t>docx 업로드 → 문단·표 파싱 (같은 프로세스의 앞단)</a:t>
             </a:r>
             <a:endParaRPr lang="en-US" sz="1500" dirty="0"/>
           </a:p>
           <a:p>
             <a:pPr marL="177800" indent="-177800">
               <a:spcAft>
-                <a:spcPts val="1200"/>
+                <a:spcPts val="1100"/>
               </a:spcAft>
               <a:buSzPct val="100000"/>
               <a:buChar char="•"/>
@@ -4701,35 +4994,35 @@
                 <a:ea typeface="맑은 고딕" pitchFamily="34" charset="-122"/>
                 <a:cs typeface="맑은 고딕" pitchFamily="34" charset="-120"/>
               </a:rPr>
-              <a:t>문단 · 표를 파싱해 그대로 표시</a:t>
+              <a:t>조항별로 모호 유형·근거·재작성 예시 표시</a:t>
             </a:r>
             <a:endParaRPr lang="en-US" sz="1500" dirty="0"/>
           </a:p>
           <a:p>
             <a:pPr marL="177800" indent="-177800">
               <a:spcAft>
-                <a:spcPts val="900"/>
+                <a:spcPts val="800"/>
               </a:spcAft>
               <a:buSzPct val="100000"/>
               <a:buChar char="•"/>
             </a:pPr>
             <a:r>
-              <a:rPr lang="en-US" sz="1500" dirty="0">
-                <a:solidFill>
-                  <a:srgbClr val="1F2733"/>
-                </a:solidFill>
-                <a:latin typeface="맑은 고딕" pitchFamily="34" charset="0"/>
-                <a:ea typeface="맑은 고딕" pitchFamily="34" charset="-122"/>
-                <a:cs typeface="맑은 고딕" pitchFamily="34" charset="-120"/>
-              </a:rPr>
-              <a:t>정상 docx는 파싱 성공 확인</a:t>
+              <a:rPr lang="en-US" sz="1500" b="1" dirty="0">
+                <a:solidFill>
+                  <a:srgbClr val="C67F17"/>
+                </a:solidFill>
+                <a:latin typeface="맑은 고딕" pitchFamily="34" charset="0"/>
+                <a:ea typeface="맑은 고딕" pitchFamily="34" charset="-122"/>
+                <a:cs typeface="맑은 고딕" pitchFamily="34" charset="-120"/>
+              </a:rPr>
+              <a:t>해결하기(해석 입력) / 넘어가기 선택</a:t>
             </a:r>
             <a:endParaRPr lang="en-US" sz="1500" dirty="0"/>
           </a:p>
           <a:p>
             <a:pPr marL="177800" indent="-177800">
               <a:spcAft>
-                <a:spcPts val="900"/>
+                <a:spcPts val="1100"/>
               </a:spcAft>
               <a:buSzPct val="100000"/>
               <a:buChar char="•"/>
@@ -4737,13 +5030,34 @@
             <a:r>
               <a:rPr lang="en-US" sz="1500" dirty="0">
                 <a:solidFill>
+                  <a:srgbClr val="1F2733"/>
+                </a:solidFill>
+                <a:latin typeface="맑은 고딕" pitchFamily="34" charset="0"/>
+                <a:ea typeface="맑은 고딕" pitchFamily="34" charset="-122"/>
+                <a:cs typeface="맑은 고딕" pitchFamily="34" charset="-120"/>
+              </a:rPr>
+              <a:t>확정 시 '해결 전 / 후' 비교로 전환</a:t>
+            </a:r>
+            <a:endParaRPr lang="en-US" sz="1500" dirty="0"/>
+          </a:p>
+          <a:p>
+            <a:pPr marL="177800" indent="-177800">
+              <a:spcAft>
+                <a:spcPts val="800"/>
+              </a:spcAft>
+              <a:buSzPct val="100000"/>
+              <a:buChar char="•"/>
+            </a:pPr>
+            <a:r>
+              <a:rPr lang="en-US" sz="1500" dirty="0">
+                <a:solidFill>
                   <a:srgbClr val="3C4855"/>
                 </a:solidFill>
                 <a:latin typeface="맑은 고딕" pitchFamily="34" charset="0"/>
                 <a:ea typeface="맑은 고딕" pitchFamily="34" charset="-122"/>
                 <a:cs typeface="맑은 고딕" pitchFamily="34" charset="-120"/>
               </a:rPr>
-              <a:t>실제 명세서가 조항 단위로 잘 쪼개지는지 확인용</a:t>
+              <a:t>React + FastAPI + 로컬 LLM으로 실제 동작</a:t>
             </a:r>
             <a:endParaRPr lang="en-US" sz="1500" dirty="0"/>
           </a:p>
@@ -4757,12 +5071,12 @@
         </p:nvSpPr>
         <p:spPr>
           <a:xfrm>
-            <a:off x="566928" y="5074920"/>
-            <a:ext cx="2743200" cy="502920"/>
+            <a:off x="566928" y="4892040"/>
+            <a:ext cx="2651760" cy="475488"/>
           </a:xfrm>
           <a:prstGeom prst="roundRect">
             <a:avLst>
-              <a:gd name="adj" fmla="val 18182"/>
+              <a:gd name="adj" fmla="val 19231"/>
             </a:avLst>
           </a:prstGeom>
           <a:solidFill>
@@ -4784,8 +5098,8 @@
         </p:nvSpPr>
         <p:spPr>
           <a:xfrm>
-            <a:off x="566928" y="5074920"/>
-            <a:ext cx="2743200" cy="502920"/>
+            <a:off x="566928" y="4892040"/>
+            <a:ext cx="2651760" cy="475488"/>
           </a:xfrm>
           <a:prstGeom prst="rect">
             <a:avLst/>
@@ -4801,7 +5115,7 @@
               <a:buNone/>
             </a:pPr>
             <a:r>
-              <a:rPr lang="en-US" sz="1500" b="1" dirty="0">
+              <a:rPr lang="en-US" sz="1400" b="1" dirty="0">
                 <a:solidFill>
                   <a:srgbClr val="2A8A57"/>
                 </a:solidFill>
@@ -4811,7 +5125,70 @@
               </a:rPr>
               <a:t>✔  테스트 완료</a:t>
             </a:r>
-            <a:endParaRPr lang="en-US" sz="1500" dirty="0"/>
+            <a:endParaRPr lang="en-US" sz="1400" dirty="0"/>
+          </a:p>
+        </p:txBody>
+      </p:sp>
+      <p:pic>
+        <p:nvPicPr>
+          <p:cNvPr id="9" name="Image 1" descr="/home/user/semes-superrookie/docs/img/demo-docx-upload.png">    </p:cNvPr>
+          <p:cNvPicPr>
+            <a:picLocks noChangeAspect="1"/>
+          </p:cNvPicPr>
+          <p:nvPr/>
+        </p:nvPicPr>
+        <p:blipFill>
+          <a:blip r:embed="rId2"/>
+          <a:stretch>
+            <a:fillRect/>
+          </a:stretch>
+        </p:blipFill>
+        <p:spPr>
+          <a:xfrm>
+            <a:off x="566928" y="5440680"/>
+            <a:ext cx="1005840" cy="1005840"/>
+          </a:xfrm>
+          <a:prstGeom prst="rect">
+            <a:avLst/>
+          </a:prstGeom>
+        </p:spPr>
+      </p:pic>
+      <p:sp>
+        <p:nvSpPr>
+          <p:cNvPr id="10" name="Text 6"/>
+          <p:cNvSpPr/>
+          <p:nvPr/>
+        </p:nvSpPr>
+        <p:spPr>
+          <a:xfrm>
+            <a:off x="1737360" y="5715000"/>
+            <a:ext cx="4114800" cy="365760"/>
+          </a:xfrm>
+          <a:prstGeom prst="rect">
+            <a:avLst/>
+          </a:prstGeom>
+          <a:noFill/>
+          <a:ln/>
+        </p:spPr>
+        <p:txBody>
+          <a:bodyPr wrap="square" rtlCol="0" anchor="ctr"/>
+          <a:lstStyle/>
+          <a:p>
+            <a:pPr indent="0" marL="0">
+              <a:buNone/>
+            </a:pPr>
+            <a:r>
+              <a:rPr lang="en-US" sz="1200" i="1" dirty="0">
+                <a:solidFill>
+                  <a:srgbClr val="63707E"/>
+                </a:solidFill>
+                <a:latin typeface="맑은 고딕" pitchFamily="34" charset="0"/>
+                <a:ea typeface="맑은 고딕" pitchFamily="34" charset="-122"/>
+                <a:cs typeface="맑은 고딕" pitchFamily="34" charset="-120"/>
+              </a:rPr>
+              <a:t>docx 업로드·파싱 화면</a:t>
+            </a:r>
+            <a:endParaRPr lang="en-US" sz="1200" dirty="0"/>
           </a:p>
         </p:txBody>
       </p:sp>
@@ -4855,8 +5232,8 @@
         </p:nvSpPr>
         <p:spPr>
           <a:xfrm>
-            <a:off x="566928" y="182880"/>
-            <a:ext cx="7315200" cy="274320"/>
+            <a:off x="566928" y="201168"/>
+            <a:ext cx="8229600" cy="274320"/>
           </a:xfrm>
           <a:prstGeom prst="rect">
             <a:avLst/>
@@ -4880,7 +5257,7 @@
                 <a:ea typeface="맑은 고딕" pitchFamily="34" charset="-122"/>
                 <a:cs typeface="맑은 고딕" pitchFamily="34" charset="-120"/>
               </a:rPr>
-              <a:t>핵심기능 ③ · 설계</a:t>
+              <a:t>핵심기능 ② · 설계</a:t>
             </a:r>
             <a:endParaRPr lang="en-US" sz="1200" dirty="0"/>
           </a:p>
@@ -4894,8 +5271,8 @@
         </p:nvSpPr>
         <p:spPr>
           <a:xfrm>
-            <a:off x="548640" y="384048"/>
-            <a:ext cx="10424160" cy="640080"/>
+            <a:off x="548640" y="457200"/>
+            <a:ext cx="10424160" cy="658368"/>
           </a:xfrm>
           <a:prstGeom prst="rect">
             <a:avLst/>
@@ -4907,11 +5284,11 @@
           <a:bodyPr wrap="square" rtlCol="0" anchor="ctr"/>
           <a:lstStyle/>
           <a:p>
-            <a:pPr algn="l" indent="0" marL="0">
+            <a:pPr indent="0" marL="0">
               <a:buNone/>
             </a:pPr>
             <a:r>
-              <a:rPr lang="en-US" sz="3000" b="1" dirty="0">
+              <a:rPr lang="en-US" sz="2800" b="1" dirty="0">
                 <a:solidFill>
                   <a:srgbClr val="1B2A4A"/>
                 </a:solidFill>
@@ -4919,9 +5296,9 @@
                 <a:ea typeface="맑은 고딕" pitchFamily="34" charset="-122"/>
                 <a:cs typeface="맑은 고딕" pitchFamily="34" charset="-120"/>
               </a:rPr>
-              <a:t>DB 변경 관리 · 알림</a:t>
-            </a:r>
-            <a:endParaRPr lang="en-US" sz="3000" dirty="0"/>
+              <a:t>기능 요구사항 도출 — 하나의 기능 → UI·APP 명세</a:t>
+            </a:r>
+            <a:endParaRPr lang="en-US" sz="2800" dirty="0"/>
           </a:p>
         </p:txBody>
       </p:sp>
@@ -4933,8 +5310,8 @@
         </p:nvSpPr>
         <p:spPr>
           <a:xfrm>
-            <a:off x="11155680" y="384048"/>
-            <a:ext cx="640080" cy="640080"/>
+            <a:off x="11109960" y="457200"/>
+            <a:ext cx="685800" cy="658368"/>
           </a:xfrm>
           <a:prstGeom prst="rect">
             <a:avLst/>
@@ -4950,7 +5327,7 @@
               <a:buNone/>
             </a:pPr>
             <a:r>
-              <a:rPr lang="en-US" sz="2000" b="1" dirty="0">
+              <a:rPr lang="en-US" sz="1900" b="1" dirty="0">
                 <a:solidFill>
                   <a:srgbClr val="C67F17"/>
                 </a:solidFill>
@@ -4960,20 +5337,44 @@
               </a:rPr>
               <a:t>07</a:t>
             </a:r>
-            <a:endParaRPr lang="en-US" sz="2000" dirty="0"/>
-          </a:p>
-        </p:txBody>
-      </p:sp>
-      <p:sp>
-        <p:nvSpPr>
-          <p:cNvPr id="5" name="Text 3"/>
-          <p:cNvSpPr/>
-          <p:nvPr/>
-        </p:nvSpPr>
-        <p:spPr>
-          <a:xfrm>
-            <a:off x="566928" y="1417320"/>
-            <a:ext cx="10972800" cy="1554480"/>
+            <a:endParaRPr lang="en-US" sz="1900" dirty="0"/>
+          </a:p>
+        </p:txBody>
+      </p:sp>
+      <p:pic>
+        <p:nvPicPr>
+          <p:cNvPr id="5" name="Image 0" descr="/home/user/semes-superrookie/docs/img/design-fig2.png">    </p:cNvPr>
+          <p:cNvPicPr>
+            <a:picLocks noChangeAspect="1"/>
+          </p:cNvPicPr>
+          <p:nvPr/>
+        </p:nvPicPr>
+        <p:blipFill>
+          <a:blip r:embed="rId1"/>
+          <a:stretch>
+            <a:fillRect/>
+          </a:stretch>
+        </p:blipFill>
+        <p:spPr>
+          <a:xfrm>
+            <a:off x="1064481" y="1234440"/>
+            <a:ext cx="10078278" cy="3566160"/>
+          </a:xfrm>
+          <a:prstGeom prst="rect">
+            <a:avLst/>
+          </a:prstGeom>
+        </p:spPr>
+      </p:pic>
+      <p:sp>
+        <p:nvSpPr>
+          <p:cNvPr id="6" name="Text 3"/>
+          <p:cNvSpPr/>
+          <p:nvPr/>
+        </p:nvSpPr>
+        <p:spPr>
+          <a:xfrm>
+            <a:off x="640080" y="5029200"/>
+            <a:ext cx="10972800" cy="1280160"/>
           </a:xfrm>
           <a:prstGeom prst="rect">
             <a:avLst/>
@@ -4987,7 +5388,7 @@
           <a:p>
             <a:pPr marL="177800" indent="-177800">
               <a:spcAft>
-                <a:spcPts val="900"/>
+                <a:spcPts val="800"/>
               </a:spcAft>
               <a:buSzPct val="100000"/>
               <a:buChar char="•"/>
@@ -5001,14 +5402,14 @@
                 <a:ea typeface="맑은 고딕" pitchFamily="34" charset="-122"/>
                 <a:cs typeface="맑은 고딕" pitchFamily="34" charset="-120"/>
               </a:rPr>
-              <a:t>담당자가 DB 변경(테이블·컬럼·권한)을 등록</a:t>
+              <a:t>확정 요구사항 → 개발 단위 '기능(FEAT)'으로 분해</a:t>
             </a:r>
             <a:endParaRPr lang="en-US" sz="1500" dirty="0"/>
           </a:p>
           <a:p>
             <a:pPr marL="177800" indent="-177800">
               <a:spcAft>
-                <a:spcPts val="900"/>
+                <a:spcPts val="800"/>
               </a:spcAft>
               <a:buSzPct val="100000"/>
               <a:buChar char="•"/>
@@ -5022,14 +5423,14 @@
                 <a:ea typeface="맑은 고딕" pitchFamily="34" charset="-122"/>
                 <a:cs typeface="맑은 고딕" pitchFamily="34" charset="-120"/>
               </a:rPr>
-              <a:t>→ 팀원에게 알림 → 모두가 최신 스키마 공유</a:t>
+              <a:t>AI가 UI / APP(backend) 구분 → 하나의 기능에서 여러 UI·APP 기능명세 파생</a:t>
             </a:r>
             <a:endParaRPr lang="en-US" sz="1500" dirty="0"/>
           </a:p>
           <a:p>
             <a:pPr marL="177800" indent="-177800">
               <a:spcAft>
-                <a:spcPts val="900"/>
+                <a:spcPts val="800"/>
               </a:spcAft>
               <a:buSzPct val="100000"/>
               <a:buChar char="•"/>
@@ -5043,56 +5444,12 @@
                 <a:ea typeface="맑은 고딕" pitchFamily="34" charset="-122"/>
                 <a:cs typeface="맑은 고딕" pitchFamily="34" charset="-120"/>
               </a:rPr>
-              <a:t>'각자 다른 스키마로 인한 누락' 문제 해결</a:t>
+              <a:t>APP은 8개 모듈별로 관리(NATS 메시지), 상세에서 통신방식·subject·입출력 편집 가능</a:t>
             </a:r>
             <a:endParaRPr lang="en-US" sz="1500" dirty="0"/>
           </a:p>
-          <a:p>
-            <a:pPr marL="177800" indent="-177800">
-              <a:spcAft>
-                <a:spcPts val="900"/>
-              </a:spcAft>
-              <a:buSzPct val="100000"/>
-              <a:buChar char="•"/>
-            </a:pPr>
-            <a:r>
-              <a:rPr lang="en-US" sz="1500" b="1" dirty="0">
-                <a:solidFill>
-                  <a:srgbClr val="63707E"/>
-                </a:solidFill>
-                <a:latin typeface="맑은 고딕" pitchFamily="34" charset="0"/>
-                <a:ea typeface="맑은 고딕" pitchFamily="34" charset="-122"/>
-                <a:cs typeface="맑은 고딕" pitchFamily="34" charset="-120"/>
-              </a:rPr>
-              <a:t>테스트는 불필요해 미실시 — 화면/설계안 단계</a:t>
-            </a:r>
-            <a:endParaRPr lang="en-US" sz="1500" dirty="0"/>
-          </a:p>
-        </p:txBody>
-      </p:sp>
-      <p:pic>
-        <p:nvPicPr>
-          <p:cNvPr id="6" name="Image 0" descr="/home/user/semes-superrookie/docs/img/design-fig3.png">    </p:cNvPr>
-          <p:cNvPicPr>
-            <a:picLocks noChangeAspect="1"/>
-          </p:cNvPicPr>
-          <p:nvPr/>
-        </p:nvPicPr>
-        <p:blipFill>
-          <a:blip r:embed="rId1"/>
-          <a:srcRect l="0" r="0" t="0" b="0"/>
-          <a:stretch/>
-        </p:blipFill>
-        <p:spPr>
-          <a:xfrm>
-            <a:off x="1113609" y="2880360"/>
-            <a:ext cx="9934303" cy="3566160"/>
-          </a:xfrm>
-          <a:prstGeom prst="rect">
-            <a:avLst/>
-          </a:prstGeom>
-        </p:spPr>
-      </p:pic>
+        </p:txBody>
+      </p:sp>
     </p:spTree>
   </p:cSld>
   <p:clrMapOvr>
@@ -5133,8 +5490,8 @@
         </p:nvSpPr>
         <p:spPr>
           <a:xfrm>
-            <a:off x="566928" y="182880"/>
-            <a:ext cx="7315200" cy="274320"/>
+            <a:off x="566928" y="201168"/>
+            <a:ext cx="8229600" cy="274320"/>
           </a:xfrm>
           <a:prstGeom prst="rect">
             <a:avLst/>
@@ -5158,7 +5515,7 @@
                 <a:ea typeface="맑은 고딕" pitchFamily="34" charset="-122"/>
                 <a:cs typeface="맑은 고딕" pitchFamily="34" charset="-120"/>
               </a:rPr>
-              <a:t>FRONTEND</a:t>
+              <a:t>핵심기능 ③ · 설계</a:t>
             </a:r>
             <a:endParaRPr lang="en-US" sz="1200" dirty="0"/>
           </a:p>
@@ -5172,8 +5529,8 @@
         </p:nvSpPr>
         <p:spPr>
           <a:xfrm>
-            <a:off x="548640" y="384048"/>
-            <a:ext cx="10424160" cy="640080"/>
+            <a:off x="548640" y="457200"/>
+            <a:ext cx="10424160" cy="658368"/>
           </a:xfrm>
           <a:prstGeom prst="rect">
             <a:avLst/>
@@ -5185,11 +5542,11 @@
           <a:bodyPr wrap="square" rtlCol="0" anchor="ctr"/>
           <a:lstStyle/>
           <a:p>
-            <a:pPr algn="l" indent="0" marL="0">
+            <a:pPr indent="0" marL="0">
               <a:buNone/>
             </a:pPr>
             <a:r>
-              <a:rPr lang="en-US" sz="3000" b="1" dirty="0">
+              <a:rPr lang="en-US" sz="2800" b="1" dirty="0">
                 <a:solidFill>
                   <a:srgbClr val="1B2A4A"/>
                 </a:solidFill>
@@ -5197,9 +5554,9 @@
                 <a:ea typeface="맑은 고딕" pitchFamily="34" charset="-122"/>
                 <a:cs typeface="맑은 고딕" pitchFamily="34" charset="-120"/>
               </a:rPr>
-              <a:t>프론트엔드 — React 선택 이유 &amp; 이슈</a:t>
-            </a:r>
-            <a:endParaRPr lang="en-US" sz="3000" dirty="0"/>
+              <a:t>DB 변경 관리 — 최종 → 개인 스키마 동기화(pull)</a:t>
+            </a:r>
+            <a:endParaRPr lang="en-US" sz="2800" dirty="0"/>
           </a:p>
         </p:txBody>
       </p:sp>
@@ -5211,8 +5568,8 @@
         </p:nvSpPr>
         <p:spPr>
           <a:xfrm>
-            <a:off x="11155680" y="384048"/>
-            <a:ext cx="640080" cy="640080"/>
+            <a:off x="11109960" y="457200"/>
+            <a:ext cx="685800" cy="658368"/>
           </a:xfrm>
           <a:prstGeom prst="rect">
             <a:avLst/>
@@ -5228,7 +5585,7 @@
               <a:buNone/>
             </a:pPr>
             <a:r>
-              <a:rPr lang="en-US" sz="2000" b="1" dirty="0">
+              <a:rPr lang="en-US" sz="1900" b="1" dirty="0">
                 <a:solidFill>
                   <a:srgbClr val="C67F17"/>
                 </a:solidFill>
@@ -5238,93 +5595,20 @@
               </a:rPr>
               <a:t>08</a:t>
             </a:r>
-            <a:endParaRPr lang="en-US" sz="2000" dirty="0"/>
-          </a:p>
-        </p:txBody>
-      </p:sp>
-      <p:sp>
-        <p:nvSpPr>
-          <p:cNvPr id="5" name="Shape 3"/>
-          <p:cNvSpPr/>
-          <p:nvPr/>
-        </p:nvSpPr>
-        <p:spPr>
-          <a:xfrm>
-            <a:off x="566928" y="1554480"/>
-            <a:ext cx="5486400" cy="3931920"/>
-          </a:xfrm>
-          <a:prstGeom prst="roundRect">
-            <a:avLst>
-              <a:gd name="adj" fmla="val 1860"/>
-            </a:avLst>
-          </a:prstGeom>
-          <a:solidFill>
-            <a:srgbClr val="FFFFFF"/>
-          </a:solidFill>
-          <a:ln w="12700">
-            <a:solidFill>
-              <a:srgbClr val="DCE3EB"/>
-            </a:solidFill>
-            <a:prstDash val="solid"/>
-          </a:ln>
-          <a:effectLst>
-            <a:outerShdw sx="100000" sy="100000" kx="0" ky="0" algn="bl" rotWithShape="0" blurRad="76200" dist="25400" dir="5400000">
-              <a:srgbClr val="B9C3CE">
-                <a:alpha val="35000"/>
-              </a:srgbClr>
-            </a:outerShdw>
-          </a:effectLst>
-        </p:spPr>
-      </p:sp>
-      <p:sp>
-        <p:nvSpPr>
-          <p:cNvPr id="6" name="Text 4"/>
-          <p:cNvSpPr/>
-          <p:nvPr/>
-        </p:nvSpPr>
-        <p:spPr>
-          <a:xfrm>
-            <a:off x="822960" y="1737360"/>
-            <a:ext cx="5029200" cy="457200"/>
-          </a:xfrm>
-          <a:prstGeom prst="rect">
-            <a:avLst/>
-          </a:prstGeom>
-          <a:noFill/>
-          <a:ln/>
-        </p:spPr>
-        <p:txBody>
-          <a:bodyPr wrap="square" rtlCol="0" anchor="ctr"/>
-          <a:lstStyle/>
-          <a:p>
-            <a:pPr indent="0" marL="0">
-              <a:buNone/>
-            </a:pPr>
-            <a:r>
-              <a:rPr lang="en-US" sz="1900" b="1" dirty="0">
-                <a:solidFill>
-                  <a:srgbClr val="2C7A8C"/>
-                </a:solidFill>
-                <a:latin typeface="맑은 고딕" pitchFamily="34" charset="0"/>
-                <a:ea typeface="맑은 고딕" pitchFamily="34" charset="-122"/>
-                <a:cs typeface="맑은 고딕" pitchFamily="34" charset="-120"/>
-              </a:rPr>
-              <a:t>장점</a:t>
-            </a:r>
             <a:endParaRPr lang="en-US" sz="1900" dirty="0"/>
           </a:p>
         </p:txBody>
       </p:sp>
       <p:sp>
         <p:nvSpPr>
-          <p:cNvPr id="7" name="Text 5"/>
-          <p:cNvSpPr/>
-          <p:nvPr/>
-        </p:nvSpPr>
-        <p:spPr>
-          <a:xfrm>
-            <a:off x="868680" y="2286000"/>
-            <a:ext cx="4937760" cy="2926080"/>
+          <p:cNvPr id="5" name="Text 3"/>
+          <p:cNvSpPr/>
+          <p:nvPr/>
+        </p:nvSpPr>
+        <p:spPr>
+          <a:xfrm>
+            <a:off x="566928" y="1234440"/>
+            <a:ext cx="11064240" cy="1554480"/>
           </a:xfrm>
           <a:prstGeom prst="rect">
             <a:avLst/>
@@ -5338,13 +5622,13 @@
           <a:p>
             <a:pPr marL="177800" indent="-177800">
               <a:spcAft>
-                <a:spcPts val="900"/>
+                <a:spcPts val="800"/>
               </a:spcAft>
               <a:buSzPct val="100000"/>
               <a:buChar char="•"/>
             </a:pPr>
             <a:r>
-              <a:rPr lang="en-US" sz="1500" dirty="0">
+              <a:rPr lang="en-US" sz="1500" b="1" dirty="0">
                 <a:solidFill>
                   <a:srgbClr val="1F2733"/>
                 </a:solidFill>
@@ -5352,14 +5636,14 @@
                 <a:ea typeface="맑은 고딕" pitchFamily="34" charset="-122"/>
                 <a:cs typeface="맑은 고딕" pitchFamily="34" charset="-120"/>
               </a:rPr>
-              <a:t>컴포넌트 기반 → 화면 재사용·유지보수 쉬움</a:t>
+              <a:t>개인 스키마(개발·테스트) vs 최종 스키마(고객 배포 기준) — 모두 최종에 맞춰야 함</a:t>
             </a:r>
             <a:endParaRPr lang="en-US" sz="1500" dirty="0"/>
           </a:p>
           <a:p>
             <a:pPr marL="177800" indent="-177800">
               <a:spcAft>
-                <a:spcPts val="900"/>
+                <a:spcPts val="800"/>
               </a:spcAft>
               <a:buSzPct val="100000"/>
               <a:buChar char="•"/>
@@ -5373,14 +5657,14 @@
                 <a:ea typeface="맑은 고딕" pitchFamily="34" charset="-122"/>
                 <a:cs typeface="맑은 고딕" pitchFamily="34" charset="-120"/>
               </a:rPr>
-              <a:t>상태관리로 검출·해결 상태 즉시 반영 (인터랙티브)</a:t>
+              <a:t>최종이 바뀌면 변경점 감지·알림 → 클릭 한 번으로 내 스키마에 pull (git 모델)</a:t>
             </a:r>
             <a:endParaRPr lang="en-US" sz="1500" dirty="0"/>
           </a:p>
           <a:p>
             <a:pPr marL="177800" indent="-177800">
               <a:spcAft>
-                <a:spcPts val="900"/>
+                <a:spcPts val="800"/>
               </a:spcAft>
               <a:buSzPct val="100000"/>
               <a:buChar char="•"/>
@@ -5388,197 +5672,42 @@
             <a:r>
               <a:rPr lang="en-US" sz="1500" dirty="0">
                 <a:solidFill>
-                  <a:srgbClr val="1F2733"/>
-                </a:solidFill>
-                <a:latin typeface="맑은 고딕" pitchFamily="34" charset="0"/>
-                <a:ea typeface="맑은 고딕" pitchFamily="34" charset="-122"/>
-                <a:cs typeface="맑은 고딕" pitchFamily="34" charset="-120"/>
-              </a:rPr>
-              <a:t>표준·생태계 넓음, 설계서 기술스택과 일치</a:t>
+                  <a:srgbClr val="3C4855"/>
+                </a:solidFill>
+                <a:latin typeface="맑은 고딕" pitchFamily="34" charset="0"/>
+                <a:ea typeface="맑은 고딕" pitchFamily="34" charset="-122"/>
+                <a:cs typeface="맑은 고딕" pitchFamily="34" charset="-120"/>
+              </a:rPr>
+              <a:t>추가(컬럼·행)는 즉시 안전 적용 / 삭제·타입변경은 확인 후 적용 (데이터 손실 방지)</a:t>
             </a:r>
             <a:endParaRPr lang="en-US" sz="1500" dirty="0"/>
           </a:p>
         </p:txBody>
       </p:sp>
-      <p:sp>
-        <p:nvSpPr>
-          <p:cNvPr id="8" name="Shape 6"/>
-          <p:cNvSpPr/>
-          <p:nvPr/>
-        </p:nvSpPr>
-        <p:spPr>
-          <a:xfrm>
-            <a:off x="6309360" y="1554480"/>
-            <a:ext cx="5303520" cy="3931920"/>
-          </a:xfrm>
-          <a:prstGeom prst="roundRect">
-            <a:avLst>
-              <a:gd name="adj" fmla="val 1860"/>
-            </a:avLst>
-          </a:prstGeom>
-          <a:solidFill>
-            <a:srgbClr val="FDF4E7"/>
-          </a:solidFill>
-          <a:ln w="12700">
-            <a:solidFill>
-              <a:srgbClr val="DCE3EB"/>
-            </a:solidFill>
-            <a:prstDash val="solid"/>
-          </a:ln>
-          <a:effectLst>
-            <a:outerShdw sx="100000" sy="100000" kx="0" ky="0" algn="bl" rotWithShape="0" blurRad="76200" dist="25400" dir="5400000">
-              <a:srgbClr val="B9C3CE">
-                <a:alpha val="35000"/>
-              </a:srgbClr>
-            </a:outerShdw>
-          </a:effectLst>
-        </p:spPr>
-      </p:sp>
-      <p:sp>
-        <p:nvSpPr>
-          <p:cNvPr id="9" name="Text 7"/>
-          <p:cNvSpPr/>
-          <p:nvPr/>
-        </p:nvSpPr>
-        <p:spPr>
-          <a:xfrm>
-            <a:off x="6583680" y="1737360"/>
-            <a:ext cx="4846320" cy="457200"/>
-          </a:xfrm>
-          <a:prstGeom prst="rect">
-            <a:avLst/>
-          </a:prstGeom>
-          <a:noFill/>
-          <a:ln/>
-        </p:spPr>
-        <p:txBody>
-          <a:bodyPr wrap="square" rtlCol="0" anchor="ctr"/>
-          <a:lstStyle/>
-          <a:p>
-            <a:pPr indent="0" marL="0">
-              <a:buNone/>
-            </a:pPr>
-            <a:r>
-              <a:rPr lang="en-US" sz="1900" b="1" dirty="0">
-                <a:solidFill>
-                  <a:srgbClr val="C67F17"/>
-                </a:solidFill>
-                <a:latin typeface="맑은 고딕" pitchFamily="34" charset="0"/>
-                <a:ea typeface="맑은 고딕" pitchFamily="34" charset="-122"/>
-                <a:cs typeface="맑은 고딕" pitchFamily="34" charset="-120"/>
-              </a:rPr>
-              <a:t>이슈 (고민)</a:t>
-            </a:r>
-            <a:endParaRPr lang="en-US" sz="1900" dirty="0"/>
-          </a:p>
-        </p:txBody>
-      </p:sp>
-      <p:sp>
-        <p:nvSpPr>
-          <p:cNvPr id="10" name="Text 8"/>
-          <p:cNvSpPr/>
-          <p:nvPr/>
-        </p:nvSpPr>
-        <p:spPr>
-          <a:xfrm>
-            <a:off x="6583680" y="2286000"/>
-            <a:ext cx="4754880" cy="2926080"/>
-          </a:xfrm>
-          <a:prstGeom prst="rect">
-            <a:avLst/>
-          </a:prstGeom>
-          <a:noFill/>
-          <a:ln/>
-        </p:spPr>
-        <p:txBody>
-          <a:bodyPr wrap="square" rtlCol="0" anchor="t"/>
-          <a:lstStyle/>
-          <a:p>
-            <a:pPr marL="177800" indent="-177800">
-              <a:spcAft>
-                <a:spcPts val="900"/>
-              </a:spcAft>
-              <a:buSzPct val="100000"/>
-              <a:buChar char="•"/>
-            </a:pPr>
-            <a:r>
-              <a:rPr lang="en-US" sz="1500" b="1" dirty="0">
-                <a:solidFill>
-                  <a:srgbClr val="1F2733"/>
-                </a:solidFill>
-                <a:latin typeface="맑은 고딕" pitchFamily="34" charset="0"/>
-                <a:ea typeface="맑은 고딕" pitchFamily="34" charset="-122"/>
-                <a:cs typeface="맑은 고딕" pitchFamily="34" charset="-120"/>
-              </a:rPr>
-              <a:t>빌드에 필요한 npm install이 사내 프록시 인증서로 막힘</a:t>
-            </a:r>
-            <a:endParaRPr lang="en-US" sz="1500" dirty="0"/>
-          </a:p>
-          <a:p>
-            <a:pPr marL="177800" indent="-177800">
-              <a:spcAft>
-                <a:spcPts val="900"/>
-              </a:spcAft>
-              <a:buSzPct val="100000"/>
-              <a:buChar char="•"/>
-            </a:pPr>
-            <a:r>
-              <a:rPr lang="en-US" sz="1300" dirty="0">
-                <a:solidFill>
-                  <a:srgbClr val="63707E"/>
-                </a:solidFill>
-                <a:latin typeface="맑은 고딕" pitchFamily="34" charset="0"/>
-                <a:ea typeface="맑은 고딕" pitchFamily="34" charset="-122"/>
-                <a:cs typeface="맑은 고딕" pitchFamily="34" charset="-120"/>
-              </a:rPr>
-              <a:t>( UNABLE_TO_VERIFY_LEAF_SIGNATURE )</a:t>
-            </a:r>
-            <a:endParaRPr lang="en-US" sz="1500" dirty="0"/>
-          </a:p>
-          <a:p>
-            <a:pPr marL="177800" indent="-177800">
-              <a:spcAft>
-                <a:spcPts val="1200"/>
-              </a:spcAft>
-              <a:buSzPct val="100000"/>
-              <a:buChar char="•"/>
-            </a:pPr>
-            <a:r>
-              <a:rPr lang="en-US" sz="1500" dirty="0">
-                <a:solidFill>
-                  <a:srgbClr val="1F2733"/>
-                </a:solidFill>
-                <a:latin typeface="맑은 고딕" pitchFamily="34" charset="0"/>
-                <a:ea typeface="맑은 고딕" pitchFamily="34" charset="-122"/>
-                <a:cs typeface="맑은 고딕" pitchFamily="34" charset="-120"/>
-              </a:rPr>
-              <a:t>보안이라 함부로 설정 변경도 어려움</a:t>
-            </a:r>
-            <a:endParaRPr lang="en-US" sz="1500" dirty="0"/>
-          </a:p>
-          <a:p>
-            <a:pPr marL="177800" indent="-177800">
-              <a:spcAft>
-                <a:spcPts val="900"/>
-              </a:spcAft>
-              <a:buSzPct val="100000"/>
-              <a:buChar char="•"/>
-            </a:pPr>
-            <a:r>
-              <a:rPr lang="en-US" sz="1500" dirty="0">
-                <a:solidFill>
-                  <a:srgbClr val="2A8A57"/>
-                </a:solidFill>
-                <a:latin typeface="맑은 고딕" pitchFamily="34" charset="0"/>
-                <a:ea typeface="맑은 고딕" pitchFamily="34" charset="-122"/>
-                <a:cs typeface="맑은 고딕" pitchFamily="34" charset="-120"/>
-              </a:rPr>
-              <a:t>임시 대응: 미리 빌드한 결과물(dist)만 넣어 실행 → npm 없이 구동</a:t>
-            </a:r>
-            <a:endParaRPr lang="en-US" sz="1500" dirty="0"/>
-          </a:p>
-        </p:txBody>
-      </p:sp>
+      <p:pic>
+        <p:nvPicPr>
+          <p:cNvPr id="6" name="Image 0" descr="/home/user/semes-superrookie/docs/img/design-fig4.png">    </p:cNvPr>
+          <p:cNvPicPr>
+            <a:picLocks noChangeAspect="1"/>
+          </p:cNvPicPr>
+          <p:nvPr/>
+        </p:nvPicPr>
+        <p:blipFill>
+          <a:blip r:embed="rId1"/>
+          <a:stretch>
+            <a:fillRect/>
+          </a:stretch>
+        </p:blipFill>
+        <p:spPr>
+          <a:xfrm>
+            <a:off x="640080" y="2899381"/>
+            <a:ext cx="10927080" cy="3208079"/>
+          </a:xfrm>
+          <a:prstGeom prst="rect">
+            <a:avLst/>
+          </a:prstGeom>
+        </p:spPr>
+      </p:pic>
     </p:spTree>
   </p:cSld>
   <p:clrMapOvr>
@@ -5619,8 +5748,8 @@
         </p:nvSpPr>
         <p:spPr>
           <a:xfrm>
-            <a:off x="566928" y="182880"/>
-            <a:ext cx="7315200" cy="274320"/>
+            <a:off x="566928" y="201168"/>
+            <a:ext cx="8229600" cy="274320"/>
           </a:xfrm>
           <a:prstGeom prst="rect">
             <a:avLst/>
@@ -5644,7 +5773,7 @@
                 <a:ea typeface="맑은 고딕" pitchFamily="34" charset="-122"/>
                 <a:cs typeface="맑은 고딕" pitchFamily="34" charset="-120"/>
               </a:rPr>
-              <a:t>ISSUE</a:t>
+              <a:t>FRONTEND</a:t>
             </a:r>
             <a:endParaRPr lang="en-US" sz="1200" dirty="0"/>
           </a:p>
@@ -5658,8 +5787,8 @@
         </p:nvSpPr>
         <p:spPr>
           <a:xfrm>
-            <a:off x="548640" y="384048"/>
-            <a:ext cx="10424160" cy="640080"/>
+            <a:off x="548640" y="457200"/>
+            <a:ext cx="10424160" cy="658368"/>
           </a:xfrm>
           <a:prstGeom prst="rect">
             <a:avLst/>
@@ -5671,11 +5800,11 @@
           <a:bodyPr wrap="square" rtlCol="0" anchor="ctr"/>
           <a:lstStyle/>
           <a:p>
-            <a:pPr algn="l" indent="0" marL="0">
+            <a:pPr indent="0" marL="0">
               <a:buNone/>
             </a:pPr>
             <a:r>
-              <a:rPr lang="en-US" sz="3000" b="1" dirty="0">
+              <a:rPr lang="en-US" sz="2800" b="1" dirty="0">
                 <a:solidFill>
                   <a:srgbClr val="1B2A4A"/>
                 </a:solidFill>
@@ -5683,9 +5812,9 @@
                 <a:ea typeface="맑은 고딕" pitchFamily="34" charset="-122"/>
                 <a:cs typeface="맑은 고딕" pitchFamily="34" charset="-120"/>
               </a:rPr>
-              <a:t>발견된 이슈 &amp; 해결 방향</a:t>
-            </a:r>
-            <a:endParaRPr lang="en-US" sz="3000" dirty="0"/>
+              <a:t>프론트엔드 — React 선택 이유 &amp; 이슈</a:t>
+            </a:r>
+            <a:endParaRPr lang="en-US" sz="2800" dirty="0"/>
           </a:p>
         </p:txBody>
       </p:sp>
@@ -5697,8 +5826,8 @@
         </p:nvSpPr>
         <p:spPr>
           <a:xfrm>
-            <a:off x="11155680" y="384048"/>
-            <a:ext cx="640080" cy="640080"/>
+            <a:off x="11109960" y="457200"/>
+            <a:ext cx="685800" cy="658368"/>
           </a:xfrm>
           <a:prstGeom prst="rect">
             <a:avLst/>
@@ -5714,7 +5843,7 @@
               <a:buNone/>
             </a:pPr>
             <a:r>
-              <a:rPr lang="en-US" sz="2000" b="1" dirty="0">
+              <a:rPr lang="en-US" sz="1900" b="1" dirty="0">
                 <a:solidFill>
                   <a:srgbClr val="C67F17"/>
                 </a:solidFill>
@@ -5724,7 +5853,7 @@
               </a:rPr>
               <a:t>09</a:t>
             </a:r>
-            <a:endParaRPr lang="en-US" sz="2000" dirty="0"/>
+            <a:endParaRPr lang="en-US" sz="1900" dirty="0"/>
           </a:p>
         </p:txBody>
       </p:sp>
@@ -5737,148 +5866,11 @@
         <p:spPr>
           <a:xfrm>
             <a:off x="566928" y="1463040"/>
-            <a:ext cx="11064240" cy="1828800"/>
+            <a:ext cx="5486400" cy="4114800"/>
           </a:xfrm>
           <a:prstGeom prst="roundRect">
             <a:avLst>
-              <a:gd name="adj" fmla="val 4000"/>
-            </a:avLst>
-          </a:prstGeom>
-          <a:solidFill>
-            <a:srgbClr val="FBEDEC"/>
-          </a:solidFill>
-          <a:ln w="12700">
-            <a:solidFill>
-              <a:srgbClr val="DCE3EB"/>
-            </a:solidFill>
-            <a:prstDash val="solid"/>
-          </a:ln>
-          <a:effectLst>
-            <a:outerShdw sx="100000" sy="100000" kx="0" ky="0" algn="bl" rotWithShape="0" blurRad="76200" dist="25400" dir="5400000">
-              <a:srgbClr val="B9C3CE">
-                <a:alpha val="35000"/>
-              </a:srgbClr>
-            </a:outerShdw>
-          </a:effectLst>
-        </p:spPr>
-      </p:sp>
-      <p:sp>
-        <p:nvSpPr>
-          <p:cNvPr id="6" name="Text 4"/>
-          <p:cNvSpPr/>
-          <p:nvPr/>
-        </p:nvSpPr>
-        <p:spPr>
-          <a:xfrm>
-            <a:off x="868680" y="1645920"/>
-            <a:ext cx="10515600" cy="457200"/>
-          </a:xfrm>
-          <a:prstGeom prst="rect">
-            <a:avLst/>
-          </a:prstGeom>
-          <a:noFill/>
-          <a:ln/>
-        </p:spPr>
-        <p:txBody>
-          <a:bodyPr wrap="square" rtlCol="0" anchor="ctr"/>
-          <a:lstStyle/>
-          <a:p>
-            <a:pPr indent="0" marL="0">
-              <a:buNone/>
-            </a:pPr>
-            <a:r>
-              <a:rPr lang="en-US" sz="1800" b="1" dirty="0">
-                <a:solidFill>
-                  <a:srgbClr val="C0503F"/>
-                </a:solidFill>
-                <a:latin typeface="맑은 고딕" pitchFamily="34" charset="0"/>
-                <a:ea typeface="맑은 고딕" pitchFamily="34" charset="-122"/>
-                <a:cs typeface="맑은 고딕" pitchFamily="34" charset="-120"/>
-              </a:rPr>
-              <a:t>★  실제 명세서 docx 파싱 실패  —  "file is not a zip file"</a:t>
-            </a:r>
-            <a:endParaRPr lang="en-US" sz="1800" dirty="0"/>
-          </a:p>
-        </p:txBody>
-      </p:sp>
-      <p:sp>
-        <p:nvSpPr>
-          <p:cNvPr id="7" name="Text 5"/>
-          <p:cNvSpPr/>
-          <p:nvPr/>
-        </p:nvSpPr>
-        <p:spPr>
-          <a:xfrm>
-            <a:off x="868680" y="2148840"/>
-            <a:ext cx="10515600" cy="1005840"/>
-          </a:xfrm>
-          <a:prstGeom prst="rect">
-            <a:avLst/>
-          </a:prstGeom>
-          <a:noFill/>
-          <a:ln/>
-        </p:spPr>
-        <p:txBody>
-          <a:bodyPr wrap="square" rtlCol="0" anchor="t"/>
-          <a:lstStyle/>
-          <a:p>
-            <a:pPr marL="177800" indent="-177800">
-              <a:spcAft>
-                <a:spcPts val="900"/>
-              </a:spcAft>
-              <a:buSzPct val="100000"/>
-              <a:buChar char="•"/>
-            </a:pPr>
-            <a:r>
-              <a:rPr lang="en-US" sz="1500" dirty="0">
-                <a:solidFill>
-                  <a:srgbClr val="5A3A36"/>
-                </a:solidFill>
-                <a:latin typeface="맑은 고딕" pitchFamily="34" charset="0"/>
-                <a:ea typeface="맑은 고딕" pitchFamily="34" charset="-122"/>
-                <a:cs typeface="맑은 고딕" pitchFamily="34" charset="-120"/>
-              </a:rPr>
-              <a:t>원인 추정: 문서보안(DRM)·암호 또는 한글(hwp)·구버전(.doc) → raw 파일이 zip 아님 (Word에선 열려도)</a:t>
-            </a:r>
-            <a:endParaRPr lang="en-US" sz="1500" dirty="0"/>
-          </a:p>
-          <a:p>
-            <a:pPr marL="177800" indent="-177800">
-              <a:spcAft>
-                <a:spcPts val="900"/>
-              </a:spcAft>
-              <a:buSzPct val="100000"/>
-              <a:buChar char="•"/>
-            </a:pPr>
-            <a:r>
-              <a:rPr lang="en-US" sz="1500" dirty="0">
-                <a:solidFill>
-                  <a:srgbClr val="2A8A57"/>
-                </a:solidFill>
-                <a:latin typeface="맑은 고딕" pitchFamily="34" charset="0"/>
-                <a:ea typeface="맑은 고딕" pitchFamily="34" charset="-122"/>
-                <a:cs typeface="맑은 고딕" pitchFamily="34" charset="-120"/>
-              </a:rPr>
-              <a:t>해결방향: 실제 파일 시그니처 확인 중 / 보안 해제 사본 테스트 / hwp면 hwp 파싱 지원 검토</a:t>
-            </a:r>
-            <a:endParaRPr lang="en-US" sz="1500" dirty="0"/>
-          </a:p>
-        </p:txBody>
-      </p:sp>
-      <p:sp>
-        <p:nvSpPr>
-          <p:cNvPr id="8" name="Shape 6"/>
-          <p:cNvSpPr/>
-          <p:nvPr/>
-        </p:nvSpPr>
-        <p:spPr>
-          <a:xfrm>
-            <a:off x="566928" y="3474720"/>
-            <a:ext cx="5440680" cy="2103120"/>
-          </a:xfrm>
-          <a:prstGeom prst="roundRect">
-            <a:avLst>
-              <a:gd name="adj" fmla="val 3478"/>
+              <a:gd name="adj" fmla="val 1778"/>
             </a:avLst>
           </a:prstGeom>
           <a:solidFill>
@@ -5901,14 +5893,14 @@
       </p:sp>
       <p:sp>
         <p:nvSpPr>
-          <p:cNvPr id="9" name="Text 7"/>
-          <p:cNvSpPr/>
-          <p:nvPr/>
-        </p:nvSpPr>
-        <p:spPr>
-          <a:xfrm>
-            <a:off x="822960" y="3657600"/>
-            <a:ext cx="4937760" cy="457200"/>
+          <p:cNvPr id="6" name="Text 4"/>
+          <p:cNvSpPr/>
+          <p:nvPr/>
+        </p:nvSpPr>
+        <p:spPr>
+          <a:xfrm>
+            <a:off x="822960" y="1645920"/>
+            <a:ext cx="5029200" cy="457200"/>
           </a:xfrm>
           <a:prstGeom prst="rect">
             <a:avLst/>
@@ -5924,30 +5916,30 @@
               <a:buNone/>
             </a:pPr>
             <a:r>
-              <a:rPr lang="en-US" sz="1700" b="1" dirty="0">
-                <a:solidFill>
-                  <a:srgbClr val="C67F17"/>
-                </a:solidFill>
-                <a:latin typeface="맑은 고딕" pitchFamily="34" charset="0"/>
-                <a:ea typeface="맑은 고딕" pitchFamily="34" charset="-122"/>
-                <a:cs typeface="맑은 고딕" pitchFamily="34" charset="-120"/>
-              </a:rPr>
-              <a:t>모호성 과검출</a:t>
-            </a:r>
-            <a:endParaRPr lang="en-US" sz="1700" dirty="0"/>
-          </a:p>
-        </p:txBody>
-      </p:sp>
-      <p:sp>
-        <p:nvSpPr>
-          <p:cNvPr id="10" name="Text 8"/>
-          <p:cNvSpPr/>
-          <p:nvPr/>
-        </p:nvSpPr>
-        <p:spPr>
-          <a:xfrm>
-            <a:off x="868680" y="4160520"/>
-            <a:ext cx="4846320" cy="1280160"/>
+              <a:rPr lang="en-US" sz="1900" b="1" dirty="0">
+                <a:solidFill>
+                  <a:srgbClr val="2C7A8C"/>
+                </a:solidFill>
+                <a:latin typeface="맑은 고딕" pitchFamily="34" charset="0"/>
+                <a:ea typeface="맑은 고딕" pitchFamily="34" charset="-122"/>
+                <a:cs typeface="맑은 고딕" pitchFamily="34" charset="-120"/>
+              </a:rPr>
+              <a:t>장점</a:t>
+            </a:r>
+            <a:endParaRPr lang="en-US" sz="1900" dirty="0"/>
+          </a:p>
+        </p:txBody>
+      </p:sp>
+      <p:sp>
+        <p:nvSpPr>
+          <p:cNvPr id="7" name="Text 5"/>
+          <p:cNvSpPr/>
+          <p:nvPr/>
+        </p:nvSpPr>
+        <p:spPr>
+          <a:xfrm>
+            <a:off x="868680" y="2194560"/>
+            <a:ext cx="4937760" cy="3108960"/>
           </a:xfrm>
           <a:prstGeom prst="rect">
             <a:avLst/>
@@ -5961,7 +5953,7 @@
           <a:p>
             <a:pPr marL="177800" indent="-177800">
               <a:spcAft>
-                <a:spcPts val="900"/>
+                <a:spcPts val="800"/>
               </a:spcAft>
               <a:buSzPct val="100000"/>
               <a:buChar char="•"/>
@@ -5975,14 +5967,14 @@
                 <a:ea typeface="맑은 고딕" pitchFamily="34" charset="-122"/>
                 <a:cs typeface="맑은 고딕" pitchFamily="34" charset="-120"/>
               </a:rPr>
-              <a:t>사소한 표현까지 잡는 경향</a:t>
+              <a:t>컴포넌트 기반 → 화면 재사용·유지보수 쉬움</a:t>
             </a:r>
             <a:endParaRPr lang="en-US" sz="1500" dirty="0"/>
           </a:p>
           <a:p>
             <a:pPr marL="177800" indent="-177800">
               <a:spcAft>
-                <a:spcPts val="900"/>
+                <a:spcPts val="800"/>
               </a:spcAft>
               <a:buSzPct val="100000"/>
               <a:buChar char="•"/>
@@ -5996,30 +5988,51 @@
                 <a:ea typeface="맑은 고딕" pitchFamily="34" charset="-122"/>
                 <a:cs typeface="맑은 고딕" pitchFamily="34" charset="-120"/>
               </a:rPr>
-              <a:t>→ 도메인 지식·기준 프롬프트 정교화로 완화</a:t>
+              <a:t>상태관리로 검출·해결 상태 즉시 반영 (인터랙티브)</a:t>
             </a:r>
             <a:endParaRPr lang="en-US" sz="1500" dirty="0"/>
           </a:p>
-        </p:txBody>
-      </p:sp>
-      <p:sp>
-        <p:nvSpPr>
-          <p:cNvPr id="11" name="Shape 9"/>
-          <p:cNvSpPr/>
-          <p:nvPr/>
-        </p:nvSpPr>
-        <p:spPr>
-          <a:xfrm>
-            <a:off x="6199632" y="3474720"/>
-            <a:ext cx="5440680" cy="2103120"/>
+          <a:p>
+            <a:pPr marL="177800" indent="-177800">
+              <a:spcAft>
+                <a:spcPts val="800"/>
+              </a:spcAft>
+              <a:buSzPct val="100000"/>
+              <a:buChar char="•"/>
+            </a:pPr>
+            <a:r>
+              <a:rPr lang="en-US" sz="1500" dirty="0">
+                <a:solidFill>
+                  <a:srgbClr val="1F2733"/>
+                </a:solidFill>
+                <a:latin typeface="맑은 고딕" pitchFamily="34" charset="0"/>
+                <a:ea typeface="맑은 고딕" pitchFamily="34" charset="-122"/>
+                <a:cs typeface="맑은 고딕" pitchFamily="34" charset="-120"/>
+              </a:rPr>
+              <a:t>표준·생태계 넓음, 설계서 기술스택과 일치</a:t>
+            </a:r>
+            <a:endParaRPr lang="en-US" sz="1500" dirty="0"/>
+          </a:p>
+        </p:txBody>
+      </p:sp>
+      <p:sp>
+        <p:nvSpPr>
+          <p:cNvPr id="8" name="Shape 6"/>
+          <p:cNvSpPr/>
+          <p:nvPr/>
+        </p:nvSpPr>
+        <p:spPr>
+          <a:xfrm>
+            <a:off x="6309360" y="1463040"/>
+            <a:ext cx="5330952" cy="4114800"/>
           </a:xfrm>
           <a:prstGeom prst="roundRect">
             <a:avLst>
-              <a:gd name="adj" fmla="val 3478"/>
+              <a:gd name="adj" fmla="val 1778"/>
             </a:avLst>
           </a:prstGeom>
           <a:solidFill>
-            <a:srgbClr val="FFFFFF"/>
+            <a:srgbClr val="FDF4E7"/>
           </a:solidFill>
           <a:ln w="12700">
             <a:solidFill>
@@ -6038,14 +6051,14 @@
       </p:sp>
       <p:sp>
         <p:nvSpPr>
-          <p:cNvPr id="12" name="Text 10"/>
-          <p:cNvSpPr/>
-          <p:nvPr/>
-        </p:nvSpPr>
-        <p:spPr>
-          <a:xfrm>
-            <a:off x="6446520" y="3657600"/>
-            <a:ext cx="4937760" cy="457200"/>
+          <p:cNvPr id="9" name="Text 7"/>
+          <p:cNvSpPr/>
+          <p:nvPr/>
+        </p:nvSpPr>
+        <p:spPr>
+          <a:xfrm>
+            <a:off x="6583680" y="1645920"/>
+            <a:ext cx="4846320" cy="457200"/>
           </a:xfrm>
           <a:prstGeom prst="rect">
             <a:avLst/>
@@ -6061,30 +6074,30 @@
               <a:buNone/>
             </a:pPr>
             <a:r>
-              <a:rPr lang="en-US" sz="1700" b="1" dirty="0">
-                <a:solidFill>
-                  <a:srgbClr val="24395F"/>
-                </a:solidFill>
-                <a:latin typeface="맑은 고딕" pitchFamily="34" charset="0"/>
-                <a:ea typeface="맑은 고딕" pitchFamily="34" charset="-122"/>
-                <a:cs typeface="맑은 고딕" pitchFamily="34" charset="-120"/>
-              </a:rPr>
-              <a:t>다음 단계</a:t>
-            </a:r>
-            <a:endParaRPr lang="en-US" sz="1700" dirty="0"/>
-          </a:p>
-        </p:txBody>
-      </p:sp>
-      <p:sp>
-        <p:nvSpPr>
-          <p:cNvPr id="13" name="Text 11"/>
-          <p:cNvSpPr/>
-          <p:nvPr/>
-        </p:nvSpPr>
-        <p:spPr>
-          <a:xfrm>
-            <a:off x="6492240" y="4160520"/>
-            <a:ext cx="4846320" cy="1280160"/>
+              <a:rPr lang="en-US" sz="1900" b="1" dirty="0">
+                <a:solidFill>
+                  <a:srgbClr val="C67F17"/>
+                </a:solidFill>
+                <a:latin typeface="맑은 고딕" pitchFamily="34" charset="0"/>
+                <a:ea typeface="맑은 고딕" pitchFamily="34" charset="-122"/>
+                <a:cs typeface="맑은 고딕" pitchFamily="34" charset="-120"/>
+              </a:rPr>
+              <a:t>이슈 (고민)</a:t>
+            </a:r>
+            <a:endParaRPr lang="en-US" sz="1900" dirty="0"/>
+          </a:p>
+        </p:txBody>
+      </p:sp>
+      <p:sp>
+        <p:nvSpPr>
+          <p:cNvPr id="10" name="Text 8"/>
+          <p:cNvSpPr/>
+          <p:nvPr/>
+        </p:nvSpPr>
+        <p:spPr>
+          <a:xfrm>
+            <a:off x="6583680" y="2194560"/>
+            <a:ext cx="4754880" cy="3108960"/>
           </a:xfrm>
           <a:prstGeom prst="rect">
             <a:avLst/>
@@ -6098,13 +6111,13 @@
           <a:p>
             <a:pPr marL="177800" indent="-177800">
               <a:spcAft>
-                <a:spcPts val="900"/>
+                <a:spcPts val="800"/>
               </a:spcAft>
               <a:buSzPct val="100000"/>
               <a:buChar char="•"/>
             </a:pPr>
             <a:r>
-              <a:rPr lang="en-US" sz="1500" dirty="0">
+              <a:rPr lang="en-US" sz="1500" b="1" dirty="0">
                 <a:solidFill>
                   <a:srgbClr val="1F2733"/>
                 </a:solidFill>
@@ -6112,19 +6125,40 @@
                 <a:ea typeface="맑은 고딕" pitchFamily="34" charset="-122"/>
                 <a:cs typeface="맑은 고딕" pitchFamily="34" charset="-120"/>
               </a:rPr>
-              <a:t>docx(→hwp) 입력 문제 해결 우선</a:t>
+              <a:t>빌드에 필요한 npm install이 사내 프록시 인증서로 막힘</a:t>
             </a:r>
             <a:endParaRPr lang="en-US" sz="1500" dirty="0"/>
           </a:p>
           <a:p>
             <a:pPr marL="177800" indent="-177800">
               <a:spcAft>
-                <a:spcPts val="900"/>
+                <a:spcPts val="800"/>
               </a:spcAft>
               <a:buSzPct val="100000"/>
               <a:buChar char="•"/>
             </a:pPr>
             <a:r>
+              <a:rPr lang="en-US" sz="1300" dirty="0">
+                <a:solidFill>
+                  <a:srgbClr val="63707E"/>
+                </a:solidFill>
+                <a:latin typeface="맑은 고딕" pitchFamily="34" charset="0"/>
+                <a:ea typeface="맑은 고딕" pitchFamily="34" charset="-122"/>
+                <a:cs typeface="맑은 고딕" pitchFamily="34" charset="-120"/>
+              </a:rPr>
+              <a:t>( UNABLE_TO_VERIFY_LEAF_SIGNATURE )</a:t>
+            </a:r>
+            <a:endParaRPr lang="en-US" sz="1500" dirty="0"/>
+          </a:p>
+          <a:p>
+            <a:pPr marL="177800" indent="-177800">
+              <a:spcAft>
+                <a:spcPts val="1200"/>
+              </a:spcAft>
+              <a:buSzPct val="100000"/>
+              <a:buChar char="•"/>
+            </a:pPr>
+            <a:r>
               <a:rPr lang="en-US" sz="1500" dirty="0">
                 <a:solidFill>
                   <a:srgbClr val="1F2733"/>
@@ -6133,7 +6167,28 @@
                 <a:ea typeface="맑은 고딕" pitchFamily="34" charset="-122"/>
                 <a:cs typeface="맑은 고딕" pitchFamily="34" charset="-120"/>
               </a:rPr>
-              <a:t>데이터모델·백엔드 확장, 기능 도출부 구현</a:t>
+              <a:t>보안이라 함부로 설정 변경도 어려움</a:t>
+            </a:r>
+            <a:endParaRPr lang="en-US" sz="1500" dirty="0"/>
+          </a:p>
+          <a:p>
+            <a:pPr marL="177800" indent="-177800">
+              <a:spcAft>
+                <a:spcPts val="800"/>
+              </a:spcAft>
+              <a:buSzPct val="100000"/>
+              <a:buChar char="•"/>
+            </a:pPr>
+            <a:r>
+              <a:rPr lang="en-US" sz="1500" dirty="0">
+                <a:solidFill>
+                  <a:srgbClr val="2A8A57"/>
+                </a:solidFill>
+                <a:latin typeface="맑은 고딕" pitchFamily="34" charset="0"/>
+                <a:ea typeface="맑은 고딕" pitchFamily="34" charset="-122"/>
+                <a:cs typeface="맑은 고딕" pitchFamily="34" charset="-120"/>
+              </a:rPr>
+              <a:t>임시 대응: 미리 빌드한 결과물(dist)만 넣어 실행 → npm 없이 구동</a:t>
             </a:r>
             <a:endParaRPr lang="en-US" sz="1500" dirty="0"/>
           </a:p>

--- a/docs/진행공유_요구사항자동화.pptx
+++ b/docs/진행공유_요구사항자동화.pptx
@@ -16,9 +16,10 @@
     <p:sldId id="264" r:id="rId10"/>
     <p:sldId id="265" r:id="rId11"/>
     <p:sldId id="266" r:id="rId12"/>
+    <p:sldId id="267" r:id="rId13"/>
   </p:sldIdLst>
   <p:notesMasterIdLst>
-    <p:notesMasterId r:id="rId13"/>
+    <p:notesMasterId r:id="rId14"/>
   </p:notesMasterIdLst>
   <p:sldSz cx="12191695" cy="6858000"/>
   <p:notesSz cx="6858000" cy="12191695"/>
@@ -712,6 +713,94 @@
             <a:fld id="{F7021451-1387-4CA6-816F-3879F97B5CBC}" type="slidenum">
               <a:rPr lang="en-US"/>
               <a:t>11</a:t>
+            </a:fld>
+            <a:endParaRPr lang="en-US"/>
+          </a:p>
+        </p:txBody>
+      </p:sp>
+    </p:spTree>
+    <p:extLst>
+      <p:ext uri="{BB962C8B-B14F-4D97-AF65-F5344CB8AC3E}">
+        <p14:creationId xmlns:p14="http://schemas.microsoft.com/office/powerpoint/2010/main" val="1024086991"/>
+      </p:ext>
+    </p:extLst>
+  </p:cSld>
+  <p:clrMapOvr>
+    <a:masterClrMapping/>
+  </p:clrMapOvr>
+</p:notes>
+</file>
+
+<file path=ppt/notesSlides/notesSlide12.xml><?xml version="1.0" encoding="utf-8"?>
+<p:notes xmlns:a="http://schemas.openxmlformats.org/drawingml/2006/main" xmlns:r="http://schemas.openxmlformats.org/officeDocument/2006/relationships" xmlns:p="http://schemas.openxmlformats.org/presentationml/2006/main">
+  <p:cSld>
+    <p:spTree>
+      <p:nvGrpSpPr>
+        <p:cNvPr id="1" name=""/>
+        <p:cNvGrpSpPr/>
+        <p:nvPr/>
+      </p:nvGrpSpPr>
+      <p:grpSpPr>
+        <a:xfrm>
+          <a:off x="0" y="0"/>
+          <a:ext cx="0" cy="0"/>
+          <a:chOff x="0" y="0"/>
+          <a:chExt cx="0" cy="0"/>
+        </a:xfrm>
+      </p:grpSpPr>
+      <p:sp>
+        <p:nvSpPr>
+          <p:cNvPr id="2" name="Slide Image Placeholder 1"/>
+          <p:cNvSpPr>
+            <a:spLocks noGrp="1" noRot="1" noChangeAspect="1"/>
+          </p:cNvSpPr>
+          <p:nvPr>
+            <p:ph type="sldImg"/>
+          </p:nvPr>
+        </p:nvSpPr>
+        <p:spPr/>
+      </p:sp>
+      <p:sp>
+        <p:nvSpPr>
+          <p:cNvPr id="3" name="Notes Placeholder 2"/>
+          <p:cNvSpPr>
+            <a:spLocks noGrp="1"/>
+          </p:cNvSpPr>
+          <p:nvPr>
+            <p:ph type="body" idx="1"/>
+          </p:nvPr>
+        </p:nvSpPr>
+        <p:spPr/>
+        <p:txBody>
+          <a:bodyPr/>
+          <a:lstStyle/>
+          <a:p>
+            <a:r>
+              <a:rPr lang="en-US" dirty="0"/>
+              <a:t/>
+            </a:r>
+            <a:endParaRPr lang="en-US" dirty="0"/>
+          </a:p>
+        </p:txBody>
+      </p:sp>
+      <p:sp>
+        <p:nvSpPr>
+          <p:cNvPr id="4" name="Slide Number Placeholder 3"/>
+          <p:cNvSpPr>
+            <a:spLocks noGrp="1"/>
+          </p:cNvSpPr>
+          <p:nvPr>
+            <p:ph type="sldNum" sz="quarter" idx="10"/>
+          </p:nvPr>
+        </p:nvSpPr>
+        <p:spPr/>
+        <p:txBody>
+          <a:bodyPr/>
+          <a:lstStyle/>
+          <a:p>
+            <a:fld id="{F7021451-1387-4CA6-816F-3879F97B5CBC}" type="slidenum">
+              <a:rPr lang="en-US"/>
+              <a:t>12</a:t>
             </a:fld>
             <a:endParaRPr lang="en-US"/>
           </a:p>
@@ -2065,7 +2154,7 @@
                 <a:ea typeface="맑은 고딕" pitchFamily="34" charset="-122"/>
                 <a:cs typeface="맑은 고딕" pitchFamily="34" charset="-120"/>
               </a:rPr>
-              <a:t>ISSUE</a:t>
+              <a:t>FRONTEND</a:t>
             </a:r>
             <a:endParaRPr lang="en-US" sz="1200" dirty="0"/>
           </a:p>
@@ -2104,7 +2193,7 @@
                 <a:ea typeface="맑은 고딕" pitchFamily="34" charset="-122"/>
                 <a:cs typeface="맑은 고딕" pitchFamily="34" charset="-120"/>
               </a:rPr>
-              <a:t>발견된 이슈 &amp; 해결 방향</a:t>
+              <a:t>프론트엔드 — React 선택 이유 &amp; 이슈</a:t>
             </a:r>
             <a:endParaRPr lang="en-US" sz="2800" dirty="0"/>
           </a:p>
@@ -2144,6 +2233,492 @@
                 <a:cs typeface="맑은 고딕" pitchFamily="34" charset="-120"/>
               </a:rPr>
               <a:t>10</a:t>
+            </a:r>
+            <a:endParaRPr lang="en-US" sz="1900" dirty="0"/>
+          </a:p>
+        </p:txBody>
+      </p:sp>
+      <p:sp>
+        <p:nvSpPr>
+          <p:cNvPr id="5" name="Shape 3"/>
+          <p:cNvSpPr/>
+          <p:nvPr/>
+        </p:nvSpPr>
+        <p:spPr>
+          <a:xfrm>
+            <a:off x="566928" y="1463040"/>
+            <a:ext cx="5486400" cy="4114800"/>
+          </a:xfrm>
+          <a:prstGeom prst="roundRect">
+            <a:avLst>
+              <a:gd name="adj" fmla="val 1778"/>
+            </a:avLst>
+          </a:prstGeom>
+          <a:solidFill>
+            <a:srgbClr val="FFFFFF"/>
+          </a:solidFill>
+          <a:ln w="12700">
+            <a:solidFill>
+              <a:srgbClr val="DCE3EB"/>
+            </a:solidFill>
+            <a:prstDash val="solid"/>
+          </a:ln>
+          <a:effectLst>
+            <a:outerShdw sx="100000" sy="100000" kx="0" ky="0" algn="bl" rotWithShape="0" blurRad="76200" dist="25400" dir="5400000">
+              <a:srgbClr val="B9C3CE">
+                <a:alpha val="35000"/>
+              </a:srgbClr>
+            </a:outerShdw>
+          </a:effectLst>
+        </p:spPr>
+      </p:sp>
+      <p:sp>
+        <p:nvSpPr>
+          <p:cNvPr id="6" name="Text 4"/>
+          <p:cNvSpPr/>
+          <p:nvPr/>
+        </p:nvSpPr>
+        <p:spPr>
+          <a:xfrm>
+            <a:off x="822960" y="1645920"/>
+            <a:ext cx="5029200" cy="457200"/>
+          </a:xfrm>
+          <a:prstGeom prst="rect">
+            <a:avLst/>
+          </a:prstGeom>
+          <a:noFill/>
+          <a:ln/>
+        </p:spPr>
+        <p:txBody>
+          <a:bodyPr wrap="square" rtlCol="0" anchor="ctr"/>
+          <a:lstStyle/>
+          <a:p>
+            <a:pPr indent="0" marL="0">
+              <a:buNone/>
+            </a:pPr>
+            <a:r>
+              <a:rPr lang="en-US" sz="1900" b="1" dirty="0">
+                <a:solidFill>
+                  <a:srgbClr val="2C7A8C"/>
+                </a:solidFill>
+                <a:latin typeface="맑은 고딕" pitchFamily="34" charset="0"/>
+                <a:ea typeface="맑은 고딕" pitchFamily="34" charset="-122"/>
+                <a:cs typeface="맑은 고딕" pitchFamily="34" charset="-120"/>
+              </a:rPr>
+              <a:t>장점</a:t>
+            </a:r>
+            <a:endParaRPr lang="en-US" sz="1900" dirty="0"/>
+          </a:p>
+        </p:txBody>
+      </p:sp>
+      <p:sp>
+        <p:nvSpPr>
+          <p:cNvPr id="7" name="Text 5"/>
+          <p:cNvSpPr/>
+          <p:nvPr/>
+        </p:nvSpPr>
+        <p:spPr>
+          <a:xfrm>
+            <a:off x="868680" y="2194560"/>
+            <a:ext cx="4937760" cy="3108960"/>
+          </a:xfrm>
+          <a:prstGeom prst="rect">
+            <a:avLst/>
+          </a:prstGeom>
+          <a:noFill/>
+          <a:ln/>
+        </p:spPr>
+        <p:txBody>
+          <a:bodyPr wrap="square" rtlCol="0" anchor="t"/>
+          <a:lstStyle/>
+          <a:p>
+            <a:pPr marL="177800" indent="-177800">
+              <a:spcAft>
+                <a:spcPts val="800"/>
+              </a:spcAft>
+              <a:buSzPct val="100000"/>
+              <a:buChar char="•"/>
+            </a:pPr>
+            <a:r>
+              <a:rPr lang="en-US" sz="1500" dirty="0">
+                <a:solidFill>
+                  <a:srgbClr val="1F2733"/>
+                </a:solidFill>
+                <a:latin typeface="맑은 고딕" pitchFamily="34" charset="0"/>
+                <a:ea typeface="맑은 고딕" pitchFamily="34" charset="-122"/>
+                <a:cs typeface="맑은 고딕" pitchFamily="34" charset="-120"/>
+              </a:rPr>
+              <a:t>컴포넌트 기반 → 화면 재사용·유지보수 쉬움</a:t>
+            </a:r>
+            <a:endParaRPr lang="en-US" sz="1500" dirty="0"/>
+          </a:p>
+          <a:p>
+            <a:pPr marL="177800" indent="-177800">
+              <a:spcAft>
+                <a:spcPts val="800"/>
+              </a:spcAft>
+              <a:buSzPct val="100000"/>
+              <a:buChar char="•"/>
+            </a:pPr>
+            <a:r>
+              <a:rPr lang="en-US" sz="1500" dirty="0">
+                <a:solidFill>
+                  <a:srgbClr val="1F2733"/>
+                </a:solidFill>
+                <a:latin typeface="맑은 고딕" pitchFamily="34" charset="0"/>
+                <a:ea typeface="맑은 고딕" pitchFamily="34" charset="-122"/>
+                <a:cs typeface="맑은 고딕" pitchFamily="34" charset="-120"/>
+              </a:rPr>
+              <a:t>상태관리로 검출·해결 상태 즉시 반영 (인터랙티브)</a:t>
+            </a:r>
+            <a:endParaRPr lang="en-US" sz="1500" dirty="0"/>
+          </a:p>
+          <a:p>
+            <a:pPr marL="177800" indent="-177800">
+              <a:spcAft>
+                <a:spcPts val="800"/>
+              </a:spcAft>
+              <a:buSzPct val="100000"/>
+              <a:buChar char="•"/>
+            </a:pPr>
+            <a:r>
+              <a:rPr lang="en-US" sz="1500" dirty="0">
+                <a:solidFill>
+                  <a:srgbClr val="1F2733"/>
+                </a:solidFill>
+                <a:latin typeface="맑은 고딕" pitchFamily="34" charset="0"/>
+                <a:ea typeface="맑은 고딕" pitchFamily="34" charset="-122"/>
+                <a:cs typeface="맑은 고딕" pitchFamily="34" charset="-120"/>
+              </a:rPr>
+              <a:t>표준·생태계 넓음, 설계서 기술스택과 일치</a:t>
+            </a:r>
+            <a:endParaRPr lang="en-US" sz="1500" dirty="0"/>
+          </a:p>
+        </p:txBody>
+      </p:sp>
+      <p:sp>
+        <p:nvSpPr>
+          <p:cNvPr id="8" name="Shape 6"/>
+          <p:cNvSpPr/>
+          <p:nvPr/>
+        </p:nvSpPr>
+        <p:spPr>
+          <a:xfrm>
+            <a:off x="6309360" y="1463040"/>
+            <a:ext cx="5330952" cy="4114800"/>
+          </a:xfrm>
+          <a:prstGeom prst="roundRect">
+            <a:avLst>
+              <a:gd name="adj" fmla="val 1778"/>
+            </a:avLst>
+          </a:prstGeom>
+          <a:solidFill>
+            <a:srgbClr val="FDF4E7"/>
+          </a:solidFill>
+          <a:ln w="12700">
+            <a:solidFill>
+              <a:srgbClr val="DCE3EB"/>
+            </a:solidFill>
+            <a:prstDash val="solid"/>
+          </a:ln>
+          <a:effectLst>
+            <a:outerShdw sx="100000" sy="100000" kx="0" ky="0" algn="bl" rotWithShape="0" blurRad="76200" dist="25400" dir="5400000">
+              <a:srgbClr val="B9C3CE">
+                <a:alpha val="35000"/>
+              </a:srgbClr>
+            </a:outerShdw>
+          </a:effectLst>
+        </p:spPr>
+      </p:sp>
+      <p:sp>
+        <p:nvSpPr>
+          <p:cNvPr id="9" name="Text 7"/>
+          <p:cNvSpPr/>
+          <p:nvPr/>
+        </p:nvSpPr>
+        <p:spPr>
+          <a:xfrm>
+            <a:off x="6583680" y="1645920"/>
+            <a:ext cx="4846320" cy="457200"/>
+          </a:xfrm>
+          <a:prstGeom prst="rect">
+            <a:avLst/>
+          </a:prstGeom>
+          <a:noFill/>
+          <a:ln/>
+        </p:spPr>
+        <p:txBody>
+          <a:bodyPr wrap="square" rtlCol="0" anchor="ctr"/>
+          <a:lstStyle/>
+          <a:p>
+            <a:pPr indent="0" marL="0">
+              <a:buNone/>
+            </a:pPr>
+            <a:r>
+              <a:rPr lang="en-US" sz="1900" b="1" dirty="0">
+                <a:solidFill>
+                  <a:srgbClr val="C67F17"/>
+                </a:solidFill>
+                <a:latin typeface="맑은 고딕" pitchFamily="34" charset="0"/>
+                <a:ea typeface="맑은 고딕" pitchFamily="34" charset="-122"/>
+                <a:cs typeface="맑은 고딕" pitchFamily="34" charset="-120"/>
+              </a:rPr>
+              <a:t>이슈 (고민)</a:t>
+            </a:r>
+            <a:endParaRPr lang="en-US" sz="1900" dirty="0"/>
+          </a:p>
+        </p:txBody>
+      </p:sp>
+      <p:sp>
+        <p:nvSpPr>
+          <p:cNvPr id="10" name="Text 8"/>
+          <p:cNvSpPr/>
+          <p:nvPr/>
+        </p:nvSpPr>
+        <p:spPr>
+          <a:xfrm>
+            <a:off x="6583680" y="2194560"/>
+            <a:ext cx="4754880" cy="3108960"/>
+          </a:xfrm>
+          <a:prstGeom prst="rect">
+            <a:avLst/>
+          </a:prstGeom>
+          <a:noFill/>
+          <a:ln/>
+        </p:spPr>
+        <p:txBody>
+          <a:bodyPr wrap="square" rtlCol="0" anchor="t"/>
+          <a:lstStyle/>
+          <a:p>
+            <a:pPr marL="177800" indent="-177800">
+              <a:spcAft>
+                <a:spcPts val="800"/>
+              </a:spcAft>
+              <a:buSzPct val="100000"/>
+              <a:buChar char="•"/>
+            </a:pPr>
+            <a:r>
+              <a:rPr lang="en-US" sz="1500" b="1" dirty="0">
+                <a:solidFill>
+                  <a:srgbClr val="1F2733"/>
+                </a:solidFill>
+                <a:latin typeface="맑은 고딕" pitchFamily="34" charset="0"/>
+                <a:ea typeface="맑은 고딕" pitchFamily="34" charset="-122"/>
+                <a:cs typeface="맑은 고딕" pitchFamily="34" charset="-120"/>
+              </a:rPr>
+              <a:t>빌드에 필요한 npm install이 사내 프록시 인증서로 막힘</a:t>
+            </a:r>
+            <a:endParaRPr lang="en-US" sz="1500" dirty="0"/>
+          </a:p>
+          <a:p>
+            <a:pPr marL="177800" indent="-177800">
+              <a:spcAft>
+                <a:spcPts val="800"/>
+              </a:spcAft>
+              <a:buSzPct val="100000"/>
+              <a:buChar char="•"/>
+            </a:pPr>
+            <a:r>
+              <a:rPr lang="en-US" sz="1300" dirty="0">
+                <a:solidFill>
+                  <a:srgbClr val="63707E"/>
+                </a:solidFill>
+                <a:latin typeface="맑은 고딕" pitchFamily="34" charset="0"/>
+                <a:ea typeface="맑은 고딕" pitchFamily="34" charset="-122"/>
+                <a:cs typeface="맑은 고딕" pitchFamily="34" charset="-120"/>
+              </a:rPr>
+              <a:t>( UNABLE_TO_VERIFY_LEAF_SIGNATURE )</a:t>
+            </a:r>
+            <a:endParaRPr lang="en-US" sz="1500" dirty="0"/>
+          </a:p>
+          <a:p>
+            <a:pPr marL="177800" indent="-177800">
+              <a:spcAft>
+                <a:spcPts val="1200"/>
+              </a:spcAft>
+              <a:buSzPct val="100000"/>
+              <a:buChar char="•"/>
+            </a:pPr>
+            <a:r>
+              <a:rPr lang="en-US" sz="1500" dirty="0">
+                <a:solidFill>
+                  <a:srgbClr val="1F2733"/>
+                </a:solidFill>
+                <a:latin typeface="맑은 고딕" pitchFamily="34" charset="0"/>
+                <a:ea typeface="맑은 고딕" pitchFamily="34" charset="-122"/>
+                <a:cs typeface="맑은 고딕" pitchFamily="34" charset="-120"/>
+              </a:rPr>
+              <a:t>보안이라 함부로 설정 변경도 어려움</a:t>
+            </a:r>
+            <a:endParaRPr lang="en-US" sz="1500" dirty="0"/>
+          </a:p>
+          <a:p>
+            <a:pPr marL="177800" indent="-177800">
+              <a:spcAft>
+                <a:spcPts val="800"/>
+              </a:spcAft>
+              <a:buSzPct val="100000"/>
+              <a:buChar char="•"/>
+            </a:pPr>
+            <a:r>
+              <a:rPr lang="en-US" sz="1500" dirty="0">
+                <a:solidFill>
+                  <a:srgbClr val="2A8A57"/>
+                </a:solidFill>
+                <a:latin typeface="맑은 고딕" pitchFamily="34" charset="0"/>
+                <a:ea typeface="맑은 고딕" pitchFamily="34" charset="-122"/>
+                <a:cs typeface="맑은 고딕" pitchFamily="34" charset="-120"/>
+              </a:rPr>
+              <a:t>임시 대응: 미리 빌드한 결과물(dist)만 넣어 실행 → npm 없이 구동</a:t>
+            </a:r>
+            <a:endParaRPr lang="en-US" sz="1500" dirty="0"/>
+          </a:p>
+        </p:txBody>
+      </p:sp>
+    </p:spTree>
+  </p:cSld>
+  <p:clrMapOvr>
+    <a:masterClrMapping/>
+  </p:clrMapOvr>
+</p:sld>
+</file>
+
+<file path=ppt/slides/slide11.xml><?xml version="1.0" encoding="utf-8"?>
+<p:sld xmlns:a="http://schemas.openxmlformats.org/drawingml/2006/main" xmlns:r="http://schemas.openxmlformats.org/officeDocument/2006/relationships" xmlns:p="http://schemas.openxmlformats.org/presentationml/2006/main">
+  <p:cSld name="Slide 11">
+    <p:bg>
+      <p:bgPr>
+        <a:solidFill>
+          <a:srgbClr val="F5F7FA"/>
+        </a:solidFill>
+      </p:bgPr>
+    </p:bg>
+    <p:spTree>
+      <p:nvGrpSpPr>
+        <p:cNvPr id="1" name=""/>
+        <p:cNvGrpSpPr/>
+        <p:nvPr/>
+      </p:nvGrpSpPr>
+      <p:grpSpPr>
+        <a:xfrm>
+          <a:off x="0" y="0"/>
+          <a:ext cx="0" cy="0"/>
+          <a:chOff x="0" y="0"/>
+          <a:chExt cx="0" cy="0"/>
+        </a:xfrm>
+      </p:grpSpPr>
+      <p:sp>
+        <p:nvSpPr>
+          <p:cNvPr id="2" name="Text 0"/>
+          <p:cNvSpPr/>
+          <p:nvPr/>
+        </p:nvSpPr>
+        <p:spPr>
+          <a:xfrm>
+            <a:off x="566928" y="201168"/>
+            <a:ext cx="8229600" cy="274320"/>
+          </a:xfrm>
+          <a:prstGeom prst="rect">
+            <a:avLst/>
+          </a:prstGeom>
+          <a:noFill/>
+          <a:ln/>
+        </p:spPr>
+        <p:txBody>
+          <a:bodyPr wrap="square" rtlCol="0" anchor="ctr"/>
+          <a:lstStyle/>
+          <a:p>
+            <a:pPr indent="0" marL="0">
+              <a:buNone/>
+            </a:pPr>
+            <a:r>
+              <a:rPr lang="en-US" sz="1200" b="1" spc="200" kern="0" dirty="0">
+                <a:solidFill>
+                  <a:srgbClr val="C67F17"/>
+                </a:solidFill>
+                <a:latin typeface="맑은 고딕" pitchFamily="34" charset="0"/>
+                <a:ea typeface="맑은 고딕" pitchFamily="34" charset="-122"/>
+                <a:cs typeface="맑은 고딕" pitchFamily="34" charset="-120"/>
+              </a:rPr>
+              <a:t>ISSUE</a:t>
+            </a:r>
+            <a:endParaRPr lang="en-US" sz="1200" dirty="0"/>
+          </a:p>
+        </p:txBody>
+      </p:sp>
+      <p:sp>
+        <p:nvSpPr>
+          <p:cNvPr id="3" name="Text 1"/>
+          <p:cNvSpPr/>
+          <p:nvPr/>
+        </p:nvSpPr>
+        <p:spPr>
+          <a:xfrm>
+            <a:off x="548640" y="457200"/>
+            <a:ext cx="10424160" cy="658368"/>
+          </a:xfrm>
+          <a:prstGeom prst="rect">
+            <a:avLst/>
+          </a:prstGeom>
+          <a:noFill/>
+          <a:ln/>
+        </p:spPr>
+        <p:txBody>
+          <a:bodyPr wrap="square" rtlCol="0" anchor="ctr"/>
+          <a:lstStyle/>
+          <a:p>
+            <a:pPr indent="0" marL="0">
+              <a:buNone/>
+            </a:pPr>
+            <a:r>
+              <a:rPr lang="en-US" sz="2800" b="1" dirty="0">
+                <a:solidFill>
+                  <a:srgbClr val="1B2A4A"/>
+                </a:solidFill>
+                <a:latin typeface="맑은 고딕" pitchFamily="34" charset="0"/>
+                <a:ea typeface="맑은 고딕" pitchFamily="34" charset="-122"/>
+                <a:cs typeface="맑은 고딕" pitchFamily="34" charset="-120"/>
+              </a:rPr>
+              <a:t>발견된 이슈 &amp; 해결 방향</a:t>
+            </a:r>
+            <a:endParaRPr lang="en-US" sz="2800" dirty="0"/>
+          </a:p>
+        </p:txBody>
+      </p:sp>
+      <p:sp>
+        <p:nvSpPr>
+          <p:cNvPr id="4" name="Text 2"/>
+          <p:cNvSpPr/>
+          <p:nvPr/>
+        </p:nvSpPr>
+        <p:spPr>
+          <a:xfrm>
+            <a:off x="11109960" y="457200"/>
+            <a:ext cx="685800" cy="658368"/>
+          </a:xfrm>
+          <a:prstGeom prst="rect">
+            <a:avLst/>
+          </a:prstGeom>
+          <a:noFill/>
+          <a:ln/>
+        </p:spPr>
+        <p:txBody>
+          <a:bodyPr wrap="square" rtlCol="0" anchor="ctr"/>
+          <a:lstStyle/>
+          <a:p>
+            <a:pPr algn="r" indent="0" marL="0">
+              <a:buNone/>
+            </a:pPr>
+            <a:r>
+              <a:rPr lang="en-US" sz="1900" b="1" dirty="0">
+                <a:solidFill>
+                  <a:srgbClr val="C67F17"/>
+                </a:solidFill>
+                <a:latin typeface="맑은 고딕" pitchFamily="34" charset="0"/>
+                <a:ea typeface="맑은 고딕" pitchFamily="34" charset="-122"/>
+                <a:cs typeface="맑은 고딕" pitchFamily="34" charset="-120"/>
+              </a:rPr>
+              <a:t>11</a:t>
             </a:r>
             <a:endParaRPr lang="en-US" sz="1900" dirty="0"/>
           </a:p>
@@ -2568,9 +3143,9 @@
 </p:sld>
 </file>
 
-<file path=ppt/slides/slide11.xml><?xml version="1.0" encoding="utf-8"?>
+<file path=ppt/slides/slide12.xml><?xml version="1.0" encoding="utf-8"?>
 <p:sld xmlns:a="http://schemas.openxmlformats.org/drawingml/2006/main" xmlns:r="http://schemas.openxmlformats.org/officeDocument/2006/relationships" xmlns:p="http://schemas.openxmlformats.org/presentationml/2006/main">
-  <p:cSld name="Slide 11">
+  <p:cSld name="Slide 12">
     <p:bg>
       <p:bgPr>
         <a:solidFill>
@@ -2902,7 +3477,7 @@
                 <a:ea typeface="맑은 고딕" pitchFamily="34" charset="-122"/>
                 <a:cs typeface="맑은 고딕" pitchFamily="34" charset="-120"/>
               </a:rPr>
-              <a:t>OVERVIEW</a:t>
+              <a:t>WHY · 배경</a:t>
             </a:r>
             <a:endParaRPr lang="en-US" sz="1200" dirty="0"/>
           </a:p>
@@ -2941,7 +3516,7 @@
                 <a:ea typeface="맑은 고딕" pitchFamily="34" charset="-122"/>
                 <a:cs typeface="맑은 고딕" pitchFamily="34" charset="-120"/>
               </a:rPr>
-              <a:t>무엇을 만드나 — 핵심 기능 3가지</a:t>
+              <a:t>왜 필요한가 — 이 프로젝트가 푸는 문제</a:t>
             </a:r>
             <a:endParaRPr lang="en-US" sz="2800" dirty="0"/>
           </a:p>
@@ -2988,57 +3563,18 @@
       </p:sp>
       <p:sp>
         <p:nvSpPr>
-          <p:cNvPr id="5" name="Text 3"/>
-          <p:cNvSpPr/>
-          <p:nvPr/>
-        </p:nvSpPr>
-        <p:spPr>
-          <a:xfrm>
-            <a:off x="566928" y="1234440"/>
-            <a:ext cx="11064240" cy="457200"/>
-          </a:xfrm>
-          <a:prstGeom prst="rect">
-            <a:avLst/>
-          </a:prstGeom>
-          <a:noFill/>
-          <a:ln/>
-        </p:spPr>
-        <p:txBody>
-          <a:bodyPr wrap="square" rtlCol="0" anchor="ctr"/>
-          <a:lstStyle/>
-          <a:p>
-            <a:pPr indent="0" marL="0">
-              <a:buNone/>
-            </a:pPr>
-            <a:r>
-              <a:rPr lang="en-US" sz="1500" dirty="0">
-                <a:solidFill>
-                  <a:srgbClr val="63707E"/>
-                </a:solidFill>
-                <a:latin typeface="맑은 고딕" pitchFamily="34" charset="0"/>
-                <a:ea typeface="맑은 고딕" pitchFamily="34" charset="-122"/>
-                <a:cs typeface="맑은 고딕" pitchFamily="34" charset="-120"/>
-              </a:rPr>
-              <a:t>고객(삼성전자) 요구사항 명세서에 모호한 표현이 많아 부서마다 해석이 갈린다. 이를 자동화로 잡아준다.</a:t>
-            </a:r>
-            <a:endParaRPr lang="en-US" sz="1500" dirty="0"/>
-          </a:p>
-        </p:txBody>
-      </p:sp>
-      <p:sp>
-        <p:nvSpPr>
-          <p:cNvPr id="6" name="Shape 4"/>
-          <p:cNvSpPr/>
-          <p:nvPr/>
-        </p:nvSpPr>
-        <p:spPr>
-          <a:xfrm>
-            <a:off x="566928" y="1965960"/>
-            <a:ext cx="3520440" cy="3520440"/>
+          <p:cNvPr id="5" name="Shape 3"/>
+          <p:cNvSpPr/>
+          <p:nvPr/>
+        </p:nvSpPr>
+        <p:spPr>
+          <a:xfrm>
+            <a:off x="566928" y="1371600"/>
+            <a:ext cx="11064240" cy="1417320"/>
           </a:xfrm>
           <a:prstGeom prst="roundRect">
             <a:avLst>
-              <a:gd name="adj" fmla="val 2078"/>
+              <a:gd name="adj" fmla="val 5161"/>
             </a:avLst>
           </a:prstGeom>
           <a:solidFill>
@@ -3061,13 +3597,13 @@
       </p:sp>
       <p:sp>
         <p:nvSpPr>
-          <p:cNvPr id="7" name="Shape 5"/>
-          <p:cNvSpPr/>
-          <p:nvPr/>
-        </p:nvSpPr>
-        <p:spPr>
-          <a:xfrm>
-            <a:off x="886968" y="2286000"/>
+          <p:cNvPr id="6" name="Shape 4"/>
+          <p:cNvSpPr/>
+          <p:nvPr/>
+        </p:nvSpPr>
+        <p:spPr>
+          <a:xfrm>
+            <a:off x="868680" y="1755648"/>
             <a:ext cx="640080" cy="640080"/>
           </a:xfrm>
           <a:prstGeom prst="ellipse">
@@ -3081,14 +3617,53 @@
       </p:sp>
       <p:sp>
         <p:nvSpPr>
+          <p:cNvPr id="7" name="Text 5"/>
+          <p:cNvSpPr/>
+          <p:nvPr/>
+        </p:nvSpPr>
+        <p:spPr>
+          <a:xfrm>
+            <a:off x="868680" y="1755648"/>
+            <a:ext cx="640080" cy="640080"/>
+          </a:xfrm>
+          <a:prstGeom prst="rect">
+            <a:avLst/>
+          </a:prstGeom>
+          <a:noFill/>
+          <a:ln/>
+        </p:spPr>
+        <p:txBody>
+          <a:bodyPr wrap="square" rtlCol="0" anchor="ctr"/>
+          <a:lstStyle/>
+          <a:p>
+            <a:pPr algn="ctr" indent="0" marL="0">
+              <a:buNone/>
+            </a:pPr>
+            <a:r>
+              <a:rPr lang="en-US" sz="1500" b="1" dirty="0">
+                <a:solidFill>
+                  <a:srgbClr val="FFFFFF"/>
+                </a:solidFill>
+                <a:latin typeface="맑은 고딕" pitchFamily="34" charset="0"/>
+                <a:ea typeface="맑은 고딕" pitchFamily="34" charset="-122"/>
+                <a:cs typeface="맑은 고딕" pitchFamily="34" charset="-120"/>
+              </a:rPr>
+              <a:t>1</a:t>
+            </a:r>
+            <a:endParaRPr lang="en-US" sz="1500" dirty="0"/>
+          </a:p>
+        </p:txBody>
+      </p:sp>
+      <p:sp>
+        <p:nvSpPr>
           <p:cNvPr id="8" name="Text 6"/>
           <p:cNvSpPr/>
           <p:nvPr/>
         </p:nvSpPr>
         <p:spPr>
           <a:xfrm>
-            <a:off x="886968" y="2286000"/>
-            <a:ext cx="640080" cy="640080"/>
+            <a:off x="1783080" y="1517904"/>
+            <a:ext cx="6949440" cy="457200"/>
           </a:xfrm>
           <a:prstGeom prst="rect">
             <a:avLst/>
@@ -3100,21 +3675,21 @@
           <a:bodyPr wrap="square" rtlCol="0" anchor="ctr"/>
           <a:lstStyle/>
           <a:p>
-            <a:pPr algn="ctr" indent="0" marL="0">
-              <a:buNone/>
-            </a:pPr>
-            <a:r>
-              <a:rPr lang="en-US" sz="1500" b="1" dirty="0">
-                <a:solidFill>
-                  <a:srgbClr val="FFFFFF"/>
-                </a:solidFill>
-                <a:latin typeface="맑은 고딕" pitchFamily="34" charset="0"/>
-                <a:ea typeface="맑은 고딕" pitchFamily="34" charset="-122"/>
-                <a:cs typeface="맑은 고딕" pitchFamily="34" charset="-120"/>
-              </a:rPr>
-              <a:t>1</a:t>
-            </a:r>
-            <a:endParaRPr lang="en-US" sz="1500" dirty="0"/>
+            <a:pPr indent="0" marL="0">
+              <a:buNone/>
+            </a:pPr>
+            <a:r>
+              <a:rPr lang="en-US" sz="1800" b="1" dirty="0">
+                <a:solidFill>
+                  <a:srgbClr val="1F2733"/>
+                </a:solidFill>
+                <a:latin typeface="맑은 고딕" pitchFamily="34" charset="0"/>
+                <a:ea typeface="맑은 고딕" pitchFamily="34" charset="-122"/>
+                <a:cs typeface="맑은 고딕" pitchFamily="34" charset="-120"/>
+              </a:rPr>
+              <a:t>고객 요구사항의 모호한 표현</a:t>
+            </a:r>
+            <a:endParaRPr lang="en-US" sz="1800" dirty="0"/>
           </a:p>
         </p:txBody>
       </p:sp>
@@ -3126,47 +3701,8 @@
         </p:nvSpPr>
         <p:spPr>
           <a:xfrm>
-            <a:off x="1664208" y="2331720"/>
-            <a:ext cx="2286000" cy="548640"/>
-          </a:xfrm>
-          <a:prstGeom prst="rect">
-            <a:avLst/>
-          </a:prstGeom>
-          <a:noFill/>
-          <a:ln/>
-        </p:spPr>
-        <p:txBody>
-          <a:bodyPr wrap="square" rtlCol="0" anchor="ctr"/>
-          <a:lstStyle/>
-          <a:p>
-            <a:pPr indent="0" marL="0">
-              <a:buNone/>
-            </a:pPr>
-            <a:r>
-              <a:rPr lang="en-US" sz="1900" b="1" dirty="0">
-                <a:solidFill>
-                  <a:srgbClr val="1F2733"/>
-                </a:solidFill>
-                <a:latin typeface="맑은 고딕" pitchFamily="34" charset="0"/>
-                <a:ea typeface="맑은 고딕" pitchFamily="34" charset="-122"/>
-                <a:cs typeface="맑은 고딕" pitchFamily="34" charset="-120"/>
-              </a:rPr>
-              <a:t>모호성 해결</a:t>
-            </a:r>
-            <a:endParaRPr lang="en-US" sz="1900" dirty="0"/>
-          </a:p>
-        </p:txBody>
-      </p:sp>
-      <p:sp>
-        <p:nvSpPr>
-          <p:cNvPr id="10" name="Text 8"/>
-          <p:cNvSpPr/>
-          <p:nvPr/>
-        </p:nvSpPr>
-        <p:spPr>
-          <a:xfrm>
-            <a:off x="886968" y="3246120"/>
-            <a:ext cx="2926080" cy="1920240"/>
+            <a:off x="1783080" y="1975104"/>
+            <a:ext cx="6995160" cy="749808"/>
           </a:xfrm>
           <a:prstGeom prst="rect">
             <a:avLst/>
@@ -3180,12 +3716,12 @@
           <a:p>
             <a:pPr indent="0" marL="0">
               <a:lnSpc>
-                <a:spcPct val="118000"/>
+                <a:spcPct val="110000"/>
               </a:lnSpc>
               <a:buNone/>
             </a:pPr>
             <a:r>
-              <a:rPr lang="en-US" sz="1450" dirty="0">
+              <a:rPr lang="en-US" sz="1350" dirty="0">
                 <a:solidFill>
                   <a:srgbClr val="3C4855"/>
                 </a:solidFill>
@@ -3193,26 +3729,92 @@
                 <a:ea typeface="맑은 고딕" pitchFamily="34" charset="-122"/>
                 <a:cs typeface="맑은 고딕" pitchFamily="34" charset="-120"/>
               </a:rPr>
-              <a:t>docx 명세서에서 모호한 조항을 유형별로 검출하고, 합의를 거쳐 해석을 확정</a:t>
-            </a:r>
-            <a:endParaRPr lang="en-US" sz="1450" dirty="0"/>
-          </a:p>
-        </p:txBody>
-      </p:sp>
-      <p:sp>
-        <p:nvSpPr>
-          <p:cNvPr id="11" name="Shape 9"/>
-          <p:cNvSpPr/>
-          <p:nvPr/>
-        </p:nvSpPr>
-        <p:spPr>
-          <a:xfrm>
-            <a:off x="4334256" y="1965960"/>
-            <a:ext cx="3520440" cy="3520440"/>
+              <a:t>삼성전자 명세서에 모호·다의적 표현이 많아, 고객사 ↔ 세메스(우리) 사이에 해석이 갈리고 정의해야 할 항목이 많다. → 재작업·분쟁 소지</a:t>
+            </a:r>
+            <a:endParaRPr lang="en-US" sz="1350" dirty="0"/>
+          </a:p>
+        </p:txBody>
+      </p:sp>
+      <p:sp>
+        <p:nvSpPr>
+          <p:cNvPr id="10" name="Shape 8"/>
+          <p:cNvSpPr/>
+          <p:nvPr/>
+        </p:nvSpPr>
+        <p:spPr>
+          <a:xfrm>
+            <a:off x="9098280" y="1828800"/>
+            <a:ext cx="2240280" cy="502920"/>
           </a:xfrm>
           <a:prstGeom prst="roundRect">
             <a:avLst>
-              <a:gd name="adj" fmla="val 2078"/>
+              <a:gd name="adj" fmla="val 18182"/>
+            </a:avLst>
+          </a:prstGeom>
+          <a:solidFill>
+            <a:srgbClr val="EEF3F8"/>
+          </a:solidFill>
+          <a:ln w="12700">
+            <a:solidFill>
+              <a:srgbClr val="C67F17"/>
+            </a:solidFill>
+            <a:prstDash val="solid"/>
+          </a:ln>
+        </p:spPr>
+      </p:sp>
+      <p:sp>
+        <p:nvSpPr>
+          <p:cNvPr id="11" name="Text 9"/>
+          <p:cNvSpPr/>
+          <p:nvPr/>
+        </p:nvSpPr>
+        <p:spPr>
+          <a:xfrm>
+            <a:off x="9098280" y="1828800"/>
+            <a:ext cx="2240280" cy="502920"/>
+          </a:xfrm>
+          <a:prstGeom prst="rect">
+            <a:avLst/>
+          </a:prstGeom>
+          <a:noFill/>
+          <a:ln/>
+        </p:spPr>
+        <p:txBody>
+          <a:bodyPr wrap="square" rtlCol="0" anchor="ctr"/>
+          <a:lstStyle/>
+          <a:p>
+            <a:pPr algn="ctr" indent="0" marL="0">
+              <a:buNone/>
+            </a:pPr>
+            <a:r>
+              <a:rPr lang="en-US" sz="1200" b="1" dirty="0">
+                <a:solidFill>
+                  <a:srgbClr val="C67F17"/>
+                </a:solidFill>
+                <a:latin typeface="맑은 고딕" pitchFamily="34" charset="0"/>
+                <a:ea typeface="맑은 고딕" pitchFamily="34" charset="-122"/>
+                <a:cs typeface="맑은 고딕" pitchFamily="34" charset="-120"/>
+              </a:rPr>
+              <a:t>→ 기능 ① 모호성 해결</a:t>
+            </a:r>
+            <a:endParaRPr lang="en-US" sz="1200" dirty="0"/>
+          </a:p>
+        </p:txBody>
+      </p:sp>
+      <p:sp>
+        <p:nvSpPr>
+          <p:cNvPr id="12" name="Shape 10"/>
+          <p:cNvSpPr/>
+          <p:nvPr/>
+        </p:nvSpPr>
+        <p:spPr>
+          <a:xfrm>
+            <a:off x="566928" y="2944368"/>
+            <a:ext cx="11064240" cy="1417320"/>
+          </a:xfrm>
+          <a:prstGeom prst="roundRect">
+            <a:avLst>
+              <a:gd name="adj" fmla="val 5161"/>
             </a:avLst>
           </a:prstGeom>
           <a:solidFill>
@@ -3235,13 +3837,13 @@
       </p:sp>
       <p:sp>
         <p:nvSpPr>
-          <p:cNvPr id="12" name="Shape 10"/>
-          <p:cNvSpPr/>
-          <p:nvPr/>
-        </p:nvSpPr>
-        <p:spPr>
-          <a:xfrm>
-            <a:off x="4654296" y="2286000"/>
+          <p:cNvPr id="13" name="Shape 11"/>
+          <p:cNvSpPr/>
+          <p:nvPr/>
+        </p:nvSpPr>
+        <p:spPr>
+          <a:xfrm>
+            <a:off x="868680" y="3328416"/>
             <a:ext cx="640080" cy="640080"/>
           </a:xfrm>
           <a:prstGeom prst="ellipse">
@@ -3255,13 +3857,13 @@
       </p:sp>
       <p:sp>
         <p:nvSpPr>
-          <p:cNvPr id="13" name="Text 11"/>
-          <p:cNvSpPr/>
-          <p:nvPr/>
-        </p:nvSpPr>
-        <p:spPr>
-          <a:xfrm>
-            <a:off x="4654296" y="2286000"/>
+          <p:cNvPr id="14" name="Text 12"/>
+          <p:cNvSpPr/>
+          <p:nvPr/>
+        </p:nvSpPr>
+        <p:spPr>
+          <a:xfrm>
+            <a:off x="868680" y="3328416"/>
             <a:ext cx="640080" cy="640080"/>
           </a:xfrm>
           <a:prstGeom prst="rect">
@@ -3294,14 +3896,14 @@
       </p:sp>
       <p:sp>
         <p:nvSpPr>
-          <p:cNvPr id="14" name="Text 12"/>
-          <p:cNvSpPr/>
-          <p:nvPr/>
-        </p:nvSpPr>
-        <p:spPr>
-          <a:xfrm>
-            <a:off x="5431536" y="2331720"/>
-            <a:ext cx="2286000" cy="548640"/>
+          <p:cNvPr id="15" name="Text 13"/>
+          <p:cNvSpPr/>
+          <p:nvPr/>
+        </p:nvSpPr>
+        <p:spPr>
+          <a:xfrm>
+            <a:off x="1783080" y="3090672"/>
+            <a:ext cx="6949440" cy="457200"/>
           </a:xfrm>
           <a:prstGeom prst="rect">
             <a:avLst/>
@@ -3317,7 +3919,7 @@
               <a:buNone/>
             </a:pPr>
             <a:r>
-              <a:rPr lang="en-US" sz="1900" b="1" dirty="0">
+              <a:rPr lang="en-US" sz="1800" b="1" dirty="0">
                 <a:solidFill>
                   <a:srgbClr val="1F2733"/>
                 </a:solidFill>
@@ -3325,22 +3927,22 @@
                 <a:ea typeface="맑은 고딕" pitchFamily="34" charset="-122"/>
                 <a:cs typeface="맑은 고딕" pitchFamily="34" charset="-120"/>
               </a:rPr>
-              <a:t>기능 요구사항 도출</a:t>
-            </a:r>
-            <a:endParaRPr lang="en-US" sz="1900" dirty="0"/>
-          </a:p>
-        </p:txBody>
-      </p:sp>
-      <p:sp>
-        <p:nvSpPr>
-          <p:cNvPr id="15" name="Text 13"/>
-          <p:cNvSpPr/>
-          <p:nvPr/>
-        </p:nvSpPr>
-        <p:spPr>
-          <a:xfrm>
-            <a:off x="4654296" y="3246120"/>
-            <a:ext cx="2926080" cy="1920240"/>
+              <a:t>개발·협업 과정의 문서화가 수작업</a:t>
+            </a:r>
+            <a:endParaRPr lang="en-US" sz="1800" dirty="0"/>
+          </a:p>
+        </p:txBody>
+      </p:sp>
+      <p:sp>
+        <p:nvSpPr>
+          <p:cNvPr id="16" name="Text 14"/>
+          <p:cNvSpPr/>
+          <p:nvPr/>
+        </p:nvSpPr>
+        <p:spPr>
+          <a:xfrm>
+            <a:off x="1783080" y="3547872"/>
+            <a:ext cx="6995160" cy="749808"/>
           </a:xfrm>
           <a:prstGeom prst="rect">
             <a:avLst/>
@@ -3354,12 +3956,12 @@
           <a:p>
             <a:pPr indent="0" marL="0">
               <a:lnSpc>
-                <a:spcPct val="118000"/>
+                <a:spcPct val="110000"/>
               </a:lnSpc>
               <a:buNone/>
             </a:pPr>
             <a:r>
-              <a:rPr lang="en-US" sz="1450" dirty="0">
+              <a:rPr lang="en-US" sz="1350" dirty="0">
                 <a:solidFill>
                   <a:srgbClr val="3C4855"/>
                 </a:solidFill>
@@ -3367,26 +3969,92 @@
                 <a:ea typeface="맑은 고딕" pitchFamily="34" charset="-122"/>
                 <a:cs typeface="맑은 고딕" pitchFamily="34" charset="-120"/>
               </a:rPr>
-              <a:t>확정된 요구사항을 개발 단위 '기능'으로 분해 → UI·APP 기능명세로 파생</a:t>
-            </a:r>
-            <a:endParaRPr lang="en-US" sz="1450" dirty="0"/>
-          </a:p>
-        </p:txBody>
-      </p:sp>
-      <p:sp>
-        <p:nvSpPr>
-          <p:cNvPr id="16" name="Shape 14"/>
-          <p:cNvSpPr/>
-          <p:nvPr/>
-        </p:nvSpPr>
-        <p:spPr>
-          <a:xfrm>
-            <a:off x="8101584" y="1965960"/>
-            <a:ext cx="3520440" cy="3520440"/>
+              <a:t>요구사항에서 어떤 기능을 개발했고 지금 어떤 상태인지 추적·문서화가 전부 수작업. → 개발을 자동화하고 문서화까지 자동으로 해주는 도구가 필요</a:t>
+            </a:r>
+            <a:endParaRPr lang="en-US" sz="1350" dirty="0"/>
+          </a:p>
+        </p:txBody>
+      </p:sp>
+      <p:sp>
+        <p:nvSpPr>
+          <p:cNvPr id="17" name="Shape 15"/>
+          <p:cNvSpPr/>
+          <p:nvPr/>
+        </p:nvSpPr>
+        <p:spPr>
+          <a:xfrm>
+            <a:off x="9098280" y="3401568"/>
+            <a:ext cx="2240280" cy="502920"/>
           </a:xfrm>
           <a:prstGeom prst="roundRect">
             <a:avLst>
-              <a:gd name="adj" fmla="val 2078"/>
+              <a:gd name="adj" fmla="val 18182"/>
+            </a:avLst>
+          </a:prstGeom>
+          <a:solidFill>
+            <a:srgbClr val="EEF3F8"/>
+          </a:solidFill>
+          <a:ln w="12700">
+            <a:solidFill>
+              <a:srgbClr val="2C7A8C"/>
+            </a:solidFill>
+            <a:prstDash val="solid"/>
+          </a:ln>
+        </p:spPr>
+      </p:sp>
+      <p:sp>
+        <p:nvSpPr>
+          <p:cNvPr id="18" name="Text 16"/>
+          <p:cNvSpPr/>
+          <p:nvPr/>
+        </p:nvSpPr>
+        <p:spPr>
+          <a:xfrm>
+            <a:off x="9098280" y="3401568"/>
+            <a:ext cx="2240280" cy="502920"/>
+          </a:xfrm>
+          <a:prstGeom prst="rect">
+            <a:avLst/>
+          </a:prstGeom>
+          <a:noFill/>
+          <a:ln/>
+        </p:spPr>
+        <p:txBody>
+          <a:bodyPr wrap="square" rtlCol="0" anchor="ctr"/>
+          <a:lstStyle/>
+          <a:p>
+            <a:pPr algn="ctr" indent="0" marL="0">
+              <a:buNone/>
+            </a:pPr>
+            <a:r>
+              <a:rPr lang="en-US" sz="1200" b="1" dirty="0">
+                <a:solidFill>
+                  <a:srgbClr val="2C7A8C"/>
+                </a:solidFill>
+                <a:latin typeface="맑은 고딕" pitchFamily="34" charset="0"/>
+                <a:ea typeface="맑은 고딕" pitchFamily="34" charset="-122"/>
+                <a:cs typeface="맑은 고딕" pitchFamily="34" charset="-120"/>
+              </a:rPr>
+              <a:t>→ 기능 ② 기능 도출</a:t>
+            </a:r>
+            <a:endParaRPr lang="en-US" sz="1200" dirty="0"/>
+          </a:p>
+        </p:txBody>
+      </p:sp>
+      <p:sp>
+        <p:nvSpPr>
+          <p:cNvPr id="19" name="Shape 17"/>
+          <p:cNvSpPr/>
+          <p:nvPr/>
+        </p:nvSpPr>
+        <p:spPr>
+          <a:xfrm>
+            <a:off x="566928" y="4517136"/>
+            <a:ext cx="11064240" cy="1417320"/>
+          </a:xfrm>
+          <a:prstGeom prst="roundRect">
+            <a:avLst>
+              <a:gd name="adj" fmla="val 5161"/>
             </a:avLst>
           </a:prstGeom>
           <a:solidFill>
@@ -3409,13 +4077,13 @@
       </p:sp>
       <p:sp>
         <p:nvSpPr>
-          <p:cNvPr id="17" name="Shape 15"/>
-          <p:cNvSpPr/>
-          <p:nvPr/>
-        </p:nvSpPr>
-        <p:spPr>
-          <a:xfrm>
-            <a:off x="8421624" y="2286000"/>
+          <p:cNvPr id="20" name="Shape 18"/>
+          <p:cNvSpPr/>
+          <p:nvPr/>
+        </p:nvSpPr>
+        <p:spPr>
+          <a:xfrm>
+            <a:off x="868680" y="4901184"/>
             <a:ext cx="640080" cy="640080"/>
           </a:xfrm>
           <a:prstGeom prst="ellipse">
@@ -3429,13 +4097,13 @@
       </p:sp>
       <p:sp>
         <p:nvSpPr>
-          <p:cNvPr id="18" name="Text 16"/>
-          <p:cNvSpPr/>
-          <p:nvPr/>
-        </p:nvSpPr>
-        <p:spPr>
-          <a:xfrm>
-            <a:off x="8421624" y="2286000"/>
+          <p:cNvPr id="21" name="Text 19"/>
+          <p:cNvSpPr/>
+          <p:nvPr/>
+        </p:nvSpPr>
+        <p:spPr>
+          <a:xfrm>
+            <a:off x="868680" y="4901184"/>
             <a:ext cx="640080" cy="640080"/>
           </a:xfrm>
           <a:prstGeom prst="rect">
@@ -3468,14 +4136,14 @@
       </p:sp>
       <p:sp>
         <p:nvSpPr>
-          <p:cNvPr id="19" name="Text 17"/>
-          <p:cNvSpPr/>
-          <p:nvPr/>
-        </p:nvSpPr>
-        <p:spPr>
-          <a:xfrm>
-            <a:off x="9198864" y="2331720"/>
-            <a:ext cx="2286000" cy="548640"/>
+          <p:cNvPr id="22" name="Text 20"/>
+          <p:cNvSpPr/>
+          <p:nvPr/>
+        </p:nvSpPr>
+        <p:spPr>
+          <a:xfrm>
+            <a:off x="1783080" y="4663440"/>
+            <a:ext cx="6949440" cy="457200"/>
           </a:xfrm>
           <a:prstGeom prst="rect">
             <a:avLst/>
@@ -3491,7 +4159,7 @@
               <a:buNone/>
             </a:pPr>
             <a:r>
-              <a:rPr lang="en-US" sz="1900" b="1" dirty="0">
+              <a:rPr lang="en-US" sz="1800" b="1" dirty="0">
                 <a:solidFill>
                   <a:srgbClr val="1F2733"/>
                 </a:solidFill>
@@ -3499,22 +4167,22 @@
                 <a:ea typeface="맑은 고딕" pitchFamily="34" charset="-122"/>
                 <a:cs typeface="맑은 고딕" pitchFamily="34" charset="-120"/>
               </a:rPr>
-              <a:t>DB 변경 관리</a:t>
-            </a:r>
-            <a:endParaRPr lang="en-US" sz="1900" dirty="0"/>
-          </a:p>
-        </p:txBody>
-      </p:sp>
-      <p:sp>
-        <p:nvSpPr>
-          <p:cNvPr id="20" name="Text 18"/>
-          <p:cNvSpPr/>
-          <p:nvPr/>
-        </p:nvSpPr>
-        <p:spPr>
-          <a:xfrm>
-            <a:off x="8421624" y="3246120"/>
-            <a:ext cx="2926080" cy="1920240"/>
+              <a:t>테스트마다 제각각인 DB 스키마</a:t>
+            </a:r>
+            <a:endParaRPr lang="en-US" sz="1800" dirty="0"/>
+          </a:p>
+        </p:txBody>
+      </p:sp>
+      <p:sp>
+        <p:nvSpPr>
+          <p:cNvPr id="23" name="Text 21"/>
+          <p:cNvSpPr/>
+          <p:nvPr/>
+        </p:nvSpPr>
+        <p:spPr>
+          <a:xfrm>
+            <a:off x="1783080" y="5120640"/>
+            <a:ext cx="6995160" cy="749808"/>
           </a:xfrm>
           <a:prstGeom prst="rect">
             <a:avLst/>
@@ -3528,12 +4196,12 @@
           <a:p>
             <a:pPr indent="0" marL="0">
               <a:lnSpc>
-                <a:spcPct val="118000"/>
+                <a:spcPct val="110000"/>
               </a:lnSpc>
               <a:buNone/>
             </a:pPr>
             <a:r>
-              <a:rPr lang="en-US" sz="1450" dirty="0">
+              <a:rPr lang="en-US" sz="1350" dirty="0">
                 <a:solidFill>
                   <a:srgbClr val="3C4855"/>
                 </a:solidFill>
@@ -3541,22 +4209,49 @@
                 <a:ea typeface="맑은 고딕" pitchFamily="34" charset="-122"/>
                 <a:cs typeface="맑은 고딕" pitchFamily="34" charset="-120"/>
               </a:rPr>
-              <a:t>최종 스키마 변경을 감지·알림하고, 클릭으로 개인 스키마에 동기화(pull)</a:t>
-            </a:r>
-            <a:endParaRPr lang="en-US" sz="1450" dirty="0"/>
-          </a:p>
-        </p:txBody>
-      </p:sp>
-      <p:sp>
-        <p:nvSpPr>
-          <p:cNvPr id="21" name="Text 19"/>
-          <p:cNvSpPr/>
-          <p:nvPr/>
-        </p:nvSpPr>
-        <p:spPr>
-          <a:xfrm>
-            <a:off x="566928" y="5806440"/>
-            <a:ext cx="11064240" cy="457200"/>
+              <a:t>각자 다른 DB를 만들어 테스트해, 배포 시 어떤 스키마·최신본으로 가져갈지 불명확하고 누락도 잦다. → 최신 스키마를 간편히 보고 동기화할 수단이 필요</a:t>
+            </a:r>
+            <a:endParaRPr lang="en-US" sz="1350" dirty="0"/>
+          </a:p>
+        </p:txBody>
+      </p:sp>
+      <p:sp>
+        <p:nvSpPr>
+          <p:cNvPr id="24" name="Shape 22"/>
+          <p:cNvSpPr/>
+          <p:nvPr/>
+        </p:nvSpPr>
+        <p:spPr>
+          <a:xfrm>
+            <a:off x="9098280" y="4974336"/>
+            <a:ext cx="2240280" cy="502920"/>
+          </a:xfrm>
+          <a:prstGeom prst="roundRect">
+            <a:avLst>
+              <a:gd name="adj" fmla="val 18182"/>
+            </a:avLst>
+          </a:prstGeom>
+          <a:solidFill>
+            <a:srgbClr val="EEF3F8"/>
+          </a:solidFill>
+          <a:ln w="12700">
+            <a:solidFill>
+              <a:srgbClr val="2A8A57"/>
+            </a:solidFill>
+            <a:prstDash val="solid"/>
+          </a:ln>
+        </p:spPr>
+      </p:sp>
+      <p:sp>
+        <p:nvSpPr>
+          <p:cNvPr id="25" name="Text 23"/>
+          <p:cNvSpPr/>
+          <p:nvPr/>
+        </p:nvSpPr>
+        <p:spPr>
+          <a:xfrm>
+            <a:off x="9098280" y="4974336"/>
+            <a:ext cx="2240280" cy="502920"/>
           </a:xfrm>
           <a:prstGeom prst="rect">
             <a:avLst/>
@@ -3568,21 +4263,21 @@
           <a:bodyPr wrap="square" rtlCol="0" anchor="ctr"/>
           <a:lstStyle/>
           <a:p>
-            <a:pPr indent="0" marL="0">
-              <a:buNone/>
-            </a:pPr>
-            <a:r>
-              <a:rPr lang="en-US" sz="1400" i="1" dirty="0">
-                <a:solidFill>
-                  <a:srgbClr val="2C7A8C"/>
-                </a:solidFill>
-                <a:latin typeface="맑은 고딕" pitchFamily="34" charset="0"/>
-                <a:ea typeface="맑은 고딕" pitchFamily="34" charset="-122"/>
-                <a:cs typeface="맑은 고딕" pitchFamily="34" charset="-120"/>
-              </a:rPr>
-              <a:t>이번 공유: ① 모호성 해결은 구현·테스트 완료, ②·③은 설계 단계</a:t>
-            </a:r>
-            <a:endParaRPr lang="en-US" sz="1400" dirty="0"/>
+            <a:pPr algn="ctr" indent="0" marL="0">
+              <a:buNone/>
+            </a:pPr>
+            <a:r>
+              <a:rPr lang="en-US" sz="1200" b="1" dirty="0">
+                <a:solidFill>
+                  <a:srgbClr val="2A8A57"/>
+                </a:solidFill>
+                <a:latin typeface="맑은 고딕" pitchFamily="34" charset="0"/>
+                <a:ea typeface="맑은 고딕" pitchFamily="34" charset="-122"/>
+                <a:cs typeface="맑은 고딕" pitchFamily="34" charset="-120"/>
+              </a:rPr>
+              <a:t>→ 기능 ③ DB 변경관리</a:t>
+            </a:r>
+            <a:endParaRPr lang="en-US" sz="1200" dirty="0"/>
           </a:p>
         </p:txBody>
       </p:sp>
@@ -3651,7 +4346,7 @@
                 <a:ea typeface="맑은 고딕" pitchFamily="34" charset="-122"/>
                 <a:cs typeface="맑은 고딕" pitchFamily="34" charset="-120"/>
               </a:rPr>
-              <a:t>ARCHITECTURE</a:t>
+              <a:t>OVERVIEW</a:t>
             </a:r>
             <a:endParaRPr lang="en-US" sz="1200" dirty="0"/>
           </a:p>
@@ -3690,7 +4385,7 @@
                 <a:ea typeface="맑은 고딕" pitchFamily="34" charset="-122"/>
                 <a:cs typeface="맑은 고딕" pitchFamily="34" charset="-120"/>
               </a:rPr>
-              <a:t>시스템 아키텍처</a:t>
+              <a:t>무엇을 만드나 — 핵심 기능 3가지</a:t>
             </a:r>
             <a:endParaRPr lang="en-US" sz="2800" dirty="0"/>
           </a:p>
@@ -3735,40 +4430,16 @@
           </a:p>
         </p:txBody>
       </p:sp>
-      <p:pic>
-        <p:nvPicPr>
-          <p:cNvPr id="5" name="Image 0" descr="/home/user/semes-superrookie/docs/img/design-arch.png">    </p:cNvPr>
-          <p:cNvPicPr>
-            <a:picLocks noChangeAspect="1"/>
-          </p:cNvPicPr>
-          <p:nvPr/>
-        </p:nvPicPr>
-        <p:blipFill>
-          <a:blip r:embed="rId1"/>
-          <a:stretch>
-            <a:fillRect/>
-          </a:stretch>
-        </p:blipFill>
-        <p:spPr>
-          <a:xfrm>
-            <a:off x="457200" y="1884426"/>
-            <a:ext cx="11292840" cy="3272028"/>
-          </a:xfrm>
-          <a:prstGeom prst="rect">
-            <a:avLst/>
-          </a:prstGeom>
-        </p:spPr>
-      </p:pic>
-      <p:sp>
-        <p:nvSpPr>
-          <p:cNvPr id="6" name="Text 3"/>
-          <p:cNvSpPr/>
-          <p:nvPr/>
-        </p:nvSpPr>
-        <p:spPr>
-          <a:xfrm>
-            <a:off x="566928" y="5989320"/>
-            <a:ext cx="11064240" cy="365760"/>
+      <p:sp>
+        <p:nvSpPr>
+          <p:cNvPr id="5" name="Text 3"/>
+          <p:cNvSpPr/>
+          <p:nvPr/>
+        </p:nvSpPr>
+        <p:spPr>
+          <a:xfrm>
+            <a:off x="566928" y="1234440"/>
+            <a:ext cx="11064240" cy="457200"/>
           </a:xfrm>
           <a:prstGeom prst="rect">
             <a:avLst/>
@@ -3784,7 +4455,7 @@
               <a:buNone/>
             </a:pPr>
             <a:r>
-              <a:rPr lang="en-US" sz="1300" i="1" dirty="0">
+              <a:rPr lang="en-US" sz="1500" dirty="0">
                 <a:solidFill>
                   <a:srgbClr val="63707E"/>
                 </a:solidFill>
@@ -3792,9 +4463,570 @@
                 <a:ea typeface="맑은 고딕" pitchFamily="34" charset="-122"/>
                 <a:cs typeface="맑은 고딕" pitchFamily="34" charset="-120"/>
               </a:rPr>
-              <a:t>전 구성요소는 사내 폐쇄망 안에서 동작 · AI 추론 상세는 다음 장</a:t>
-            </a:r>
-            <a:endParaRPr lang="en-US" sz="1300" dirty="0"/>
+              <a:t>앞의 세 가지 문제를 아래 3개 핵심 기능으로 자동화한다.</a:t>
+            </a:r>
+            <a:endParaRPr lang="en-US" sz="1500" dirty="0"/>
+          </a:p>
+        </p:txBody>
+      </p:sp>
+      <p:sp>
+        <p:nvSpPr>
+          <p:cNvPr id="6" name="Shape 4"/>
+          <p:cNvSpPr/>
+          <p:nvPr/>
+        </p:nvSpPr>
+        <p:spPr>
+          <a:xfrm>
+            <a:off x="566928" y="1965960"/>
+            <a:ext cx="3520440" cy="3520440"/>
+          </a:xfrm>
+          <a:prstGeom prst="roundRect">
+            <a:avLst>
+              <a:gd name="adj" fmla="val 2078"/>
+            </a:avLst>
+          </a:prstGeom>
+          <a:solidFill>
+            <a:srgbClr val="FFFFFF"/>
+          </a:solidFill>
+          <a:ln w="12700">
+            <a:solidFill>
+              <a:srgbClr val="DCE3EB"/>
+            </a:solidFill>
+            <a:prstDash val="solid"/>
+          </a:ln>
+          <a:effectLst>
+            <a:outerShdw sx="100000" sy="100000" kx="0" ky="0" algn="bl" rotWithShape="0" blurRad="76200" dist="25400" dir="5400000">
+              <a:srgbClr val="B9C3CE">
+                <a:alpha val="35000"/>
+              </a:srgbClr>
+            </a:outerShdw>
+          </a:effectLst>
+        </p:spPr>
+      </p:sp>
+      <p:sp>
+        <p:nvSpPr>
+          <p:cNvPr id="7" name="Shape 5"/>
+          <p:cNvSpPr/>
+          <p:nvPr/>
+        </p:nvSpPr>
+        <p:spPr>
+          <a:xfrm>
+            <a:off x="886968" y="2286000"/>
+            <a:ext cx="640080" cy="640080"/>
+          </a:xfrm>
+          <a:prstGeom prst="ellipse">
+            <a:avLst/>
+          </a:prstGeom>
+          <a:solidFill>
+            <a:srgbClr val="C67F17"/>
+          </a:solidFill>
+          <a:ln/>
+        </p:spPr>
+      </p:sp>
+      <p:sp>
+        <p:nvSpPr>
+          <p:cNvPr id="8" name="Text 6"/>
+          <p:cNvSpPr/>
+          <p:nvPr/>
+        </p:nvSpPr>
+        <p:spPr>
+          <a:xfrm>
+            <a:off x="886968" y="2286000"/>
+            <a:ext cx="640080" cy="640080"/>
+          </a:xfrm>
+          <a:prstGeom prst="rect">
+            <a:avLst/>
+          </a:prstGeom>
+          <a:noFill/>
+          <a:ln/>
+        </p:spPr>
+        <p:txBody>
+          <a:bodyPr wrap="square" rtlCol="0" anchor="ctr"/>
+          <a:lstStyle/>
+          <a:p>
+            <a:pPr algn="ctr" indent="0" marL="0">
+              <a:buNone/>
+            </a:pPr>
+            <a:r>
+              <a:rPr lang="en-US" sz="1500" b="1" dirty="0">
+                <a:solidFill>
+                  <a:srgbClr val="FFFFFF"/>
+                </a:solidFill>
+                <a:latin typeface="맑은 고딕" pitchFamily="34" charset="0"/>
+                <a:ea typeface="맑은 고딕" pitchFamily="34" charset="-122"/>
+                <a:cs typeface="맑은 고딕" pitchFamily="34" charset="-120"/>
+              </a:rPr>
+              <a:t>1</a:t>
+            </a:r>
+            <a:endParaRPr lang="en-US" sz="1500" dirty="0"/>
+          </a:p>
+        </p:txBody>
+      </p:sp>
+      <p:sp>
+        <p:nvSpPr>
+          <p:cNvPr id="9" name="Text 7"/>
+          <p:cNvSpPr/>
+          <p:nvPr/>
+        </p:nvSpPr>
+        <p:spPr>
+          <a:xfrm>
+            <a:off x="1664208" y="2331720"/>
+            <a:ext cx="2286000" cy="548640"/>
+          </a:xfrm>
+          <a:prstGeom prst="rect">
+            <a:avLst/>
+          </a:prstGeom>
+          <a:noFill/>
+          <a:ln/>
+        </p:spPr>
+        <p:txBody>
+          <a:bodyPr wrap="square" rtlCol="0" anchor="ctr"/>
+          <a:lstStyle/>
+          <a:p>
+            <a:pPr indent="0" marL="0">
+              <a:buNone/>
+            </a:pPr>
+            <a:r>
+              <a:rPr lang="en-US" sz="1900" b="1" dirty="0">
+                <a:solidFill>
+                  <a:srgbClr val="1F2733"/>
+                </a:solidFill>
+                <a:latin typeface="맑은 고딕" pitchFamily="34" charset="0"/>
+                <a:ea typeface="맑은 고딕" pitchFamily="34" charset="-122"/>
+                <a:cs typeface="맑은 고딕" pitchFamily="34" charset="-120"/>
+              </a:rPr>
+              <a:t>모호성 해결</a:t>
+            </a:r>
+            <a:endParaRPr lang="en-US" sz="1900" dirty="0"/>
+          </a:p>
+        </p:txBody>
+      </p:sp>
+      <p:sp>
+        <p:nvSpPr>
+          <p:cNvPr id="10" name="Text 8"/>
+          <p:cNvSpPr/>
+          <p:nvPr/>
+        </p:nvSpPr>
+        <p:spPr>
+          <a:xfrm>
+            <a:off x="886968" y="3246120"/>
+            <a:ext cx="2926080" cy="1920240"/>
+          </a:xfrm>
+          <a:prstGeom prst="rect">
+            <a:avLst/>
+          </a:prstGeom>
+          <a:noFill/>
+          <a:ln/>
+        </p:spPr>
+        <p:txBody>
+          <a:bodyPr wrap="square" rtlCol="0" anchor="t"/>
+          <a:lstStyle/>
+          <a:p>
+            <a:pPr indent="0" marL="0">
+              <a:lnSpc>
+                <a:spcPct val="118000"/>
+              </a:lnSpc>
+              <a:buNone/>
+            </a:pPr>
+            <a:r>
+              <a:rPr lang="en-US" sz="1450" dirty="0">
+                <a:solidFill>
+                  <a:srgbClr val="3C4855"/>
+                </a:solidFill>
+                <a:latin typeface="맑은 고딕" pitchFamily="34" charset="0"/>
+                <a:ea typeface="맑은 고딕" pitchFamily="34" charset="-122"/>
+                <a:cs typeface="맑은 고딕" pitchFamily="34" charset="-120"/>
+              </a:rPr>
+              <a:t>docx 명세서에서 모호한 조항을 유형별로 검출하고, 합의를 거쳐 해석을 확정</a:t>
+            </a:r>
+            <a:endParaRPr lang="en-US" sz="1450" dirty="0"/>
+          </a:p>
+        </p:txBody>
+      </p:sp>
+      <p:sp>
+        <p:nvSpPr>
+          <p:cNvPr id="11" name="Shape 9"/>
+          <p:cNvSpPr/>
+          <p:nvPr/>
+        </p:nvSpPr>
+        <p:spPr>
+          <a:xfrm>
+            <a:off x="4334256" y="1965960"/>
+            <a:ext cx="3520440" cy="3520440"/>
+          </a:xfrm>
+          <a:prstGeom prst="roundRect">
+            <a:avLst>
+              <a:gd name="adj" fmla="val 2078"/>
+            </a:avLst>
+          </a:prstGeom>
+          <a:solidFill>
+            <a:srgbClr val="FFFFFF"/>
+          </a:solidFill>
+          <a:ln w="12700">
+            <a:solidFill>
+              <a:srgbClr val="DCE3EB"/>
+            </a:solidFill>
+            <a:prstDash val="solid"/>
+          </a:ln>
+          <a:effectLst>
+            <a:outerShdw sx="100000" sy="100000" kx="0" ky="0" algn="bl" rotWithShape="0" blurRad="76200" dist="25400" dir="5400000">
+              <a:srgbClr val="B9C3CE">
+                <a:alpha val="35000"/>
+              </a:srgbClr>
+            </a:outerShdw>
+          </a:effectLst>
+        </p:spPr>
+      </p:sp>
+      <p:sp>
+        <p:nvSpPr>
+          <p:cNvPr id="12" name="Shape 10"/>
+          <p:cNvSpPr/>
+          <p:nvPr/>
+        </p:nvSpPr>
+        <p:spPr>
+          <a:xfrm>
+            <a:off x="4654296" y="2286000"/>
+            <a:ext cx="640080" cy="640080"/>
+          </a:xfrm>
+          <a:prstGeom prst="ellipse">
+            <a:avLst/>
+          </a:prstGeom>
+          <a:solidFill>
+            <a:srgbClr val="2C7A8C"/>
+          </a:solidFill>
+          <a:ln/>
+        </p:spPr>
+      </p:sp>
+      <p:sp>
+        <p:nvSpPr>
+          <p:cNvPr id="13" name="Text 11"/>
+          <p:cNvSpPr/>
+          <p:nvPr/>
+        </p:nvSpPr>
+        <p:spPr>
+          <a:xfrm>
+            <a:off x="4654296" y="2286000"/>
+            <a:ext cx="640080" cy="640080"/>
+          </a:xfrm>
+          <a:prstGeom prst="rect">
+            <a:avLst/>
+          </a:prstGeom>
+          <a:noFill/>
+          <a:ln/>
+        </p:spPr>
+        <p:txBody>
+          <a:bodyPr wrap="square" rtlCol="0" anchor="ctr"/>
+          <a:lstStyle/>
+          <a:p>
+            <a:pPr algn="ctr" indent="0" marL="0">
+              <a:buNone/>
+            </a:pPr>
+            <a:r>
+              <a:rPr lang="en-US" sz="1500" b="1" dirty="0">
+                <a:solidFill>
+                  <a:srgbClr val="FFFFFF"/>
+                </a:solidFill>
+                <a:latin typeface="맑은 고딕" pitchFamily="34" charset="0"/>
+                <a:ea typeface="맑은 고딕" pitchFamily="34" charset="-122"/>
+                <a:cs typeface="맑은 고딕" pitchFamily="34" charset="-120"/>
+              </a:rPr>
+              <a:t>2</a:t>
+            </a:r>
+            <a:endParaRPr lang="en-US" sz="1500" dirty="0"/>
+          </a:p>
+        </p:txBody>
+      </p:sp>
+      <p:sp>
+        <p:nvSpPr>
+          <p:cNvPr id="14" name="Text 12"/>
+          <p:cNvSpPr/>
+          <p:nvPr/>
+        </p:nvSpPr>
+        <p:spPr>
+          <a:xfrm>
+            <a:off x="5431536" y="2331720"/>
+            <a:ext cx="2286000" cy="548640"/>
+          </a:xfrm>
+          <a:prstGeom prst="rect">
+            <a:avLst/>
+          </a:prstGeom>
+          <a:noFill/>
+          <a:ln/>
+        </p:spPr>
+        <p:txBody>
+          <a:bodyPr wrap="square" rtlCol="0" anchor="ctr"/>
+          <a:lstStyle/>
+          <a:p>
+            <a:pPr indent="0" marL="0">
+              <a:buNone/>
+            </a:pPr>
+            <a:r>
+              <a:rPr lang="en-US" sz="1900" b="1" dirty="0">
+                <a:solidFill>
+                  <a:srgbClr val="1F2733"/>
+                </a:solidFill>
+                <a:latin typeface="맑은 고딕" pitchFamily="34" charset="0"/>
+                <a:ea typeface="맑은 고딕" pitchFamily="34" charset="-122"/>
+                <a:cs typeface="맑은 고딕" pitchFamily="34" charset="-120"/>
+              </a:rPr>
+              <a:t>기능 요구사항 도출</a:t>
+            </a:r>
+            <a:endParaRPr lang="en-US" sz="1900" dirty="0"/>
+          </a:p>
+        </p:txBody>
+      </p:sp>
+      <p:sp>
+        <p:nvSpPr>
+          <p:cNvPr id="15" name="Text 13"/>
+          <p:cNvSpPr/>
+          <p:nvPr/>
+        </p:nvSpPr>
+        <p:spPr>
+          <a:xfrm>
+            <a:off x="4654296" y="3246120"/>
+            <a:ext cx="2926080" cy="1920240"/>
+          </a:xfrm>
+          <a:prstGeom prst="rect">
+            <a:avLst/>
+          </a:prstGeom>
+          <a:noFill/>
+          <a:ln/>
+        </p:spPr>
+        <p:txBody>
+          <a:bodyPr wrap="square" rtlCol="0" anchor="t"/>
+          <a:lstStyle/>
+          <a:p>
+            <a:pPr indent="0" marL="0">
+              <a:lnSpc>
+                <a:spcPct val="118000"/>
+              </a:lnSpc>
+              <a:buNone/>
+            </a:pPr>
+            <a:r>
+              <a:rPr lang="en-US" sz="1450" dirty="0">
+                <a:solidFill>
+                  <a:srgbClr val="3C4855"/>
+                </a:solidFill>
+                <a:latin typeface="맑은 고딕" pitchFamily="34" charset="0"/>
+                <a:ea typeface="맑은 고딕" pitchFamily="34" charset="-122"/>
+                <a:cs typeface="맑은 고딕" pitchFamily="34" charset="-120"/>
+              </a:rPr>
+              <a:t>확정된 요구사항을 개발 단위 '기능'으로 분해 → UI·APP 기능명세로 파생</a:t>
+            </a:r>
+            <a:endParaRPr lang="en-US" sz="1450" dirty="0"/>
+          </a:p>
+        </p:txBody>
+      </p:sp>
+      <p:sp>
+        <p:nvSpPr>
+          <p:cNvPr id="16" name="Shape 14"/>
+          <p:cNvSpPr/>
+          <p:nvPr/>
+        </p:nvSpPr>
+        <p:spPr>
+          <a:xfrm>
+            <a:off x="8101584" y="1965960"/>
+            <a:ext cx="3520440" cy="3520440"/>
+          </a:xfrm>
+          <a:prstGeom prst="roundRect">
+            <a:avLst>
+              <a:gd name="adj" fmla="val 2078"/>
+            </a:avLst>
+          </a:prstGeom>
+          <a:solidFill>
+            <a:srgbClr val="FFFFFF"/>
+          </a:solidFill>
+          <a:ln w="12700">
+            <a:solidFill>
+              <a:srgbClr val="DCE3EB"/>
+            </a:solidFill>
+            <a:prstDash val="solid"/>
+          </a:ln>
+          <a:effectLst>
+            <a:outerShdw sx="100000" sy="100000" kx="0" ky="0" algn="bl" rotWithShape="0" blurRad="76200" dist="25400" dir="5400000">
+              <a:srgbClr val="B9C3CE">
+                <a:alpha val="35000"/>
+              </a:srgbClr>
+            </a:outerShdw>
+          </a:effectLst>
+        </p:spPr>
+      </p:sp>
+      <p:sp>
+        <p:nvSpPr>
+          <p:cNvPr id="17" name="Shape 15"/>
+          <p:cNvSpPr/>
+          <p:nvPr/>
+        </p:nvSpPr>
+        <p:spPr>
+          <a:xfrm>
+            <a:off x="8421624" y="2286000"/>
+            <a:ext cx="640080" cy="640080"/>
+          </a:xfrm>
+          <a:prstGeom prst="ellipse">
+            <a:avLst/>
+          </a:prstGeom>
+          <a:solidFill>
+            <a:srgbClr val="2A8A57"/>
+          </a:solidFill>
+          <a:ln/>
+        </p:spPr>
+      </p:sp>
+      <p:sp>
+        <p:nvSpPr>
+          <p:cNvPr id="18" name="Text 16"/>
+          <p:cNvSpPr/>
+          <p:nvPr/>
+        </p:nvSpPr>
+        <p:spPr>
+          <a:xfrm>
+            <a:off x="8421624" y="2286000"/>
+            <a:ext cx="640080" cy="640080"/>
+          </a:xfrm>
+          <a:prstGeom prst="rect">
+            <a:avLst/>
+          </a:prstGeom>
+          <a:noFill/>
+          <a:ln/>
+        </p:spPr>
+        <p:txBody>
+          <a:bodyPr wrap="square" rtlCol="0" anchor="ctr"/>
+          <a:lstStyle/>
+          <a:p>
+            <a:pPr algn="ctr" indent="0" marL="0">
+              <a:buNone/>
+            </a:pPr>
+            <a:r>
+              <a:rPr lang="en-US" sz="1500" b="1" dirty="0">
+                <a:solidFill>
+                  <a:srgbClr val="FFFFFF"/>
+                </a:solidFill>
+                <a:latin typeface="맑은 고딕" pitchFamily="34" charset="0"/>
+                <a:ea typeface="맑은 고딕" pitchFamily="34" charset="-122"/>
+                <a:cs typeface="맑은 고딕" pitchFamily="34" charset="-120"/>
+              </a:rPr>
+              <a:t>3</a:t>
+            </a:r>
+            <a:endParaRPr lang="en-US" sz="1500" dirty="0"/>
+          </a:p>
+        </p:txBody>
+      </p:sp>
+      <p:sp>
+        <p:nvSpPr>
+          <p:cNvPr id="19" name="Text 17"/>
+          <p:cNvSpPr/>
+          <p:nvPr/>
+        </p:nvSpPr>
+        <p:spPr>
+          <a:xfrm>
+            <a:off x="9198864" y="2331720"/>
+            <a:ext cx="2286000" cy="548640"/>
+          </a:xfrm>
+          <a:prstGeom prst="rect">
+            <a:avLst/>
+          </a:prstGeom>
+          <a:noFill/>
+          <a:ln/>
+        </p:spPr>
+        <p:txBody>
+          <a:bodyPr wrap="square" rtlCol="0" anchor="ctr"/>
+          <a:lstStyle/>
+          <a:p>
+            <a:pPr indent="0" marL="0">
+              <a:buNone/>
+            </a:pPr>
+            <a:r>
+              <a:rPr lang="en-US" sz="1900" b="1" dirty="0">
+                <a:solidFill>
+                  <a:srgbClr val="1F2733"/>
+                </a:solidFill>
+                <a:latin typeface="맑은 고딕" pitchFamily="34" charset="0"/>
+                <a:ea typeface="맑은 고딕" pitchFamily="34" charset="-122"/>
+                <a:cs typeface="맑은 고딕" pitchFamily="34" charset="-120"/>
+              </a:rPr>
+              <a:t>DB 변경 관리</a:t>
+            </a:r>
+            <a:endParaRPr lang="en-US" sz="1900" dirty="0"/>
+          </a:p>
+        </p:txBody>
+      </p:sp>
+      <p:sp>
+        <p:nvSpPr>
+          <p:cNvPr id="20" name="Text 18"/>
+          <p:cNvSpPr/>
+          <p:nvPr/>
+        </p:nvSpPr>
+        <p:spPr>
+          <a:xfrm>
+            <a:off x="8421624" y="3246120"/>
+            <a:ext cx="2926080" cy="1920240"/>
+          </a:xfrm>
+          <a:prstGeom prst="rect">
+            <a:avLst/>
+          </a:prstGeom>
+          <a:noFill/>
+          <a:ln/>
+        </p:spPr>
+        <p:txBody>
+          <a:bodyPr wrap="square" rtlCol="0" anchor="t"/>
+          <a:lstStyle/>
+          <a:p>
+            <a:pPr indent="0" marL="0">
+              <a:lnSpc>
+                <a:spcPct val="118000"/>
+              </a:lnSpc>
+              <a:buNone/>
+            </a:pPr>
+            <a:r>
+              <a:rPr lang="en-US" sz="1450" dirty="0">
+                <a:solidFill>
+                  <a:srgbClr val="3C4855"/>
+                </a:solidFill>
+                <a:latin typeface="맑은 고딕" pitchFamily="34" charset="0"/>
+                <a:ea typeface="맑은 고딕" pitchFamily="34" charset="-122"/>
+                <a:cs typeface="맑은 고딕" pitchFamily="34" charset="-120"/>
+              </a:rPr>
+              <a:t>최종 스키마 변경을 감지·알림하고, 클릭으로 개인 스키마에 동기화(pull)</a:t>
+            </a:r>
+            <a:endParaRPr lang="en-US" sz="1450" dirty="0"/>
+          </a:p>
+        </p:txBody>
+      </p:sp>
+      <p:sp>
+        <p:nvSpPr>
+          <p:cNvPr id="21" name="Text 19"/>
+          <p:cNvSpPr/>
+          <p:nvPr/>
+        </p:nvSpPr>
+        <p:spPr>
+          <a:xfrm>
+            <a:off x="566928" y="5806440"/>
+            <a:ext cx="11064240" cy="457200"/>
+          </a:xfrm>
+          <a:prstGeom prst="rect">
+            <a:avLst/>
+          </a:prstGeom>
+          <a:noFill/>
+          <a:ln/>
+        </p:spPr>
+        <p:txBody>
+          <a:bodyPr wrap="square" rtlCol="0" anchor="ctr"/>
+          <a:lstStyle/>
+          <a:p>
+            <a:pPr indent="0" marL="0">
+              <a:buNone/>
+            </a:pPr>
+            <a:r>
+              <a:rPr lang="en-US" sz="1400" i="1" dirty="0">
+                <a:solidFill>
+                  <a:srgbClr val="2C7A8C"/>
+                </a:solidFill>
+                <a:latin typeface="맑은 고딕" pitchFamily="34" charset="0"/>
+                <a:ea typeface="맑은 고딕" pitchFamily="34" charset="-122"/>
+                <a:cs typeface="맑은 고딕" pitchFamily="34" charset="-120"/>
+              </a:rPr>
+              <a:t>이번 공유: ① 모호성 해결은 구현·테스트 완료, ②·③은 설계 단계</a:t>
+            </a:r>
+            <a:endParaRPr lang="en-US" sz="1400" dirty="0"/>
           </a:p>
         </p:txBody>
       </p:sp>
@@ -3863,7 +5095,7 @@
                 <a:ea typeface="맑은 고딕" pitchFamily="34" charset="-122"/>
                 <a:cs typeface="맑은 고딕" pitchFamily="34" charset="-120"/>
               </a:rPr>
-              <a:t>AI</a:t>
+              <a:t>ARCHITECTURE</a:t>
             </a:r>
             <a:endParaRPr lang="en-US" sz="1200" dirty="0"/>
           </a:p>
@@ -3902,7 +5134,7 @@
                 <a:ea typeface="맑은 고딕" pitchFamily="34" charset="-122"/>
                 <a:cs typeface="맑은 고딕" pitchFamily="34" charset="-120"/>
               </a:rPr>
-              <a:t>AI 추론 — 2가지 (비교)</a:t>
+              <a:t>시스템 아키텍처</a:t>
             </a:r>
             <a:endParaRPr lang="en-US" sz="2800" dirty="0"/>
           </a:p>
@@ -3947,50 +5179,40 @@
           </a:p>
         </p:txBody>
       </p:sp>
-      <p:sp>
-        <p:nvSpPr>
-          <p:cNvPr id="5" name="Shape 3"/>
-          <p:cNvSpPr/>
-          <p:nvPr/>
-        </p:nvSpPr>
-        <p:spPr>
-          <a:xfrm>
-            <a:off x="566928" y="1371600"/>
-            <a:ext cx="5440680" cy="2697480"/>
-          </a:xfrm>
-          <a:prstGeom prst="roundRect">
-            <a:avLst>
-              <a:gd name="adj" fmla="val 2712"/>
-            </a:avLst>
-          </a:prstGeom>
-          <a:solidFill>
-            <a:srgbClr val="FFFFFF"/>
-          </a:solidFill>
-          <a:ln w="12700">
-            <a:solidFill>
-              <a:srgbClr val="DCE3EB"/>
-            </a:solidFill>
-            <a:prstDash val="solid"/>
-          </a:ln>
-          <a:effectLst>
-            <a:outerShdw sx="100000" sy="100000" kx="0" ky="0" algn="bl" rotWithShape="0" blurRad="76200" dist="25400" dir="5400000">
-              <a:srgbClr val="B9C3CE">
-                <a:alpha val="35000"/>
-              </a:srgbClr>
-            </a:outerShdw>
-          </a:effectLst>
-        </p:spPr>
-      </p:sp>
-      <p:sp>
-        <p:nvSpPr>
-          <p:cNvPr id="6" name="Text 4"/>
-          <p:cNvSpPr/>
-          <p:nvPr/>
-        </p:nvSpPr>
-        <p:spPr>
-          <a:xfrm>
-            <a:off x="822960" y="1572768"/>
-            <a:ext cx="4937760" cy="457200"/>
+      <p:pic>
+        <p:nvPicPr>
+          <p:cNvPr id="5" name="Image 0" descr="/home/user/semes-superrookie/docs/img/design-arch.png">    </p:cNvPr>
+          <p:cNvPicPr>
+            <a:picLocks noChangeAspect="1"/>
+          </p:cNvPicPr>
+          <p:nvPr/>
+        </p:nvPicPr>
+        <p:blipFill>
+          <a:blip r:embed="rId1"/>
+          <a:stretch>
+            <a:fillRect/>
+          </a:stretch>
+        </p:blipFill>
+        <p:spPr>
+          <a:xfrm>
+            <a:off x="457200" y="1884426"/>
+            <a:ext cx="11292840" cy="3272028"/>
+          </a:xfrm>
+          <a:prstGeom prst="rect">
+            <a:avLst/>
+          </a:prstGeom>
+        </p:spPr>
+      </p:pic>
+      <p:sp>
+        <p:nvSpPr>
+          <p:cNvPr id="6" name="Text 3"/>
+          <p:cNvSpPr/>
+          <p:nvPr/>
+        </p:nvSpPr>
+        <p:spPr>
+          <a:xfrm>
+            <a:off x="566928" y="5989320"/>
+            <a:ext cx="11064240" cy="365760"/>
           </a:xfrm>
           <a:prstGeom prst="rect">
             <a:avLst/>
@@ -4006,546 +5228,15 @@
               <a:buNone/>
             </a:pPr>
             <a:r>
-              <a:rPr lang="en-US" sz="1800" b="1" dirty="0">
-                <a:solidFill>
-                  <a:srgbClr val="C67F17"/>
-                </a:solidFill>
-                <a:latin typeface="맑은 고딕" pitchFamily="34" charset="0"/>
-                <a:ea typeface="맑은 고딕" pitchFamily="34" charset="-122"/>
-                <a:cs typeface="맑은 고딕" pitchFamily="34" charset="-120"/>
-              </a:rPr>
-              <a:t>① Qwen3-8B  (주력)</a:t>
-            </a:r>
-            <a:endParaRPr lang="en-US" sz="1800" dirty="0"/>
-          </a:p>
-        </p:txBody>
-      </p:sp>
-      <p:sp>
-        <p:nvSpPr>
-          <p:cNvPr id="7" name="Text 5"/>
-          <p:cNvSpPr/>
-          <p:nvPr/>
-        </p:nvSpPr>
-        <p:spPr>
-          <a:xfrm>
-            <a:off x="868680" y="2103120"/>
-            <a:ext cx="4846320" cy="1828800"/>
-          </a:xfrm>
-          <a:prstGeom prst="rect">
-            <a:avLst/>
-          </a:prstGeom>
-          <a:noFill/>
-          <a:ln/>
-        </p:spPr>
-        <p:txBody>
-          <a:bodyPr wrap="square" rtlCol="0" anchor="t"/>
-          <a:lstStyle/>
-          <a:p>
-            <a:pPr marL="177800" indent="-177800">
-              <a:spcAft>
-                <a:spcPts val="800"/>
-              </a:spcAft>
-              <a:buSzPct val="100000"/>
-              <a:buChar char="•"/>
-            </a:pPr>
-            <a:r>
-              <a:rPr lang="en-US" sz="1500" dirty="0">
-                <a:solidFill>
-                  <a:srgbClr val="1F2733"/>
-                </a:solidFill>
-                <a:latin typeface="맑은 고딕" pitchFamily="34" charset="0"/>
-                <a:ea typeface="맑은 고딕" pitchFamily="34" charset="-122"/>
-                <a:cs typeface="맑은 고딕" pitchFamily="34" charset="-120"/>
-              </a:rPr>
-              <a:t>오픈소스 LLM, Ollama로 로컬 서빙</a:t>
-            </a:r>
-            <a:endParaRPr lang="en-US" sz="1500" dirty="0"/>
-          </a:p>
-          <a:p>
-            <a:pPr marL="177800" indent="-177800">
-              <a:spcAft>
-                <a:spcPts val="800"/>
-              </a:spcAft>
-              <a:buSzPct val="100000"/>
-              <a:buChar char="•"/>
-            </a:pPr>
-            <a:r>
-              <a:rPr lang="en-US" sz="1500" dirty="0">
-                <a:solidFill>
-                  <a:srgbClr val="1F2733"/>
-                </a:solidFill>
-                <a:latin typeface="맑은 고딕" pitchFamily="34" charset="0"/>
-                <a:ea typeface="맑은 고딕" pitchFamily="34" charset="-122"/>
-                <a:cs typeface="맑은 고딕" pitchFamily="34" charset="-120"/>
-              </a:rPr>
-              <a:t>워크스테이션 GPU(P4000 8GB)에서 구동</a:t>
-            </a:r>
-            <a:endParaRPr lang="en-US" sz="1500" dirty="0"/>
-          </a:p>
-          <a:p>
-            <a:pPr marL="177800" indent="-177800">
-              <a:spcAft>
-                <a:spcPts val="800"/>
-              </a:spcAft>
-              <a:buSzPct val="100000"/>
-              <a:buChar char="•"/>
-            </a:pPr>
-            <a:r>
-              <a:rPr lang="en-US" sz="1500" dirty="0">
-                <a:solidFill>
-                  <a:srgbClr val="1F2733"/>
-                </a:solidFill>
-                <a:latin typeface="맑은 고딕" pitchFamily="34" charset="0"/>
-                <a:ea typeface="맑은 고딕" pitchFamily="34" charset="-122"/>
-                <a:cs typeface="맑은 고딕" pitchFamily="34" charset="-120"/>
-              </a:rPr>
-              <a:t>다운받아 바로 사용 · 반출 없음</a:t>
-            </a:r>
-            <a:endParaRPr lang="en-US" sz="1500" dirty="0"/>
-          </a:p>
-        </p:txBody>
-      </p:sp>
-      <p:sp>
-        <p:nvSpPr>
-          <p:cNvPr id="8" name="Shape 6"/>
-          <p:cNvSpPr/>
-          <p:nvPr/>
-        </p:nvSpPr>
-        <p:spPr>
-          <a:xfrm>
-            <a:off x="6199632" y="1371600"/>
-            <a:ext cx="5440680" cy="2697480"/>
-          </a:xfrm>
-          <a:prstGeom prst="roundRect">
-            <a:avLst>
-              <a:gd name="adj" fmla="val 2712"/>
-            </a:avLst>
-          </a:prstGeom>
-          <a:solidFill>
-            <a:srgbClr val="FDF7EE"/>
-          </a:solidFill>
-          <a:ln w="12700">
-            <a:solidFill>
-              <a:srgbClr val="DCE3EB"/>
-            </a:solidFill>
-            <a:prstDash val="solid"/>
-          </a:ln>
-          <a:effectLst>
-            <a:outerShdw sx="100000" sy="100000" kx="0" ky="0" algn="bl" rotWithShape="0" blurRad="76200" dist="25400" dir="5400000">
-              <a:srgbClr val="B9C3CE">
-                <a:alpha val="35000"/>
-              </a:srgbClr>
-            </a:outerShdw>
-          </a:effectLst>
-        </p:spPr>
-      </p:sp>
-      <p:sp>
-        <p:nvSpPr>
-          <p:cNvPr id="9" name="Text 7"/>
-          <p:cNvSpPr/>
-          <p:nvPr/>
-        </p:nvSpPr>
-        <p:spPr>
-          <a:xfrm>
-            <a:off x="6446520" y="1572768"/>
-            <a:ext cx="4937760" cy="457200"/>
-          </a:xfrm>
-          <a:prstGeom prst="rect">
-            <a:avLst/>
-          </a:prstGeom>
-          <a:noFill/>
-          <a:ln/>
-        </p:spPr>
-        <p:txBody>
-          <a:bodyPr wrap="square" rtlCol="0" anchor="ctr"/>
-          <a:lstStyle/>
-          <a:p>
-            <a:pPr indent="0" marL="0">
-              <a:buNone/>
-            </a:pPr>
-            <a:r>
-              <a:rPr lang="en-US" sz="1800" b="1" dirty="0">
-                <a:solidFill>
-                  <a:srgbClr val="2C7A8C"/>
-                </a:solidFill>
-                <a:latin typeface="맑은 고딕" pitchFamily="34" charset="0"/>
-                <a:ea typeface="맑은 고딕" pitchFamily="34" charset="-122"/>
-                <a:cs typeface="맑은 고딕" pitchFamily="34" charset="-120"/>
-              </a:rPr>
-              <a:t>② 사내 playground  (비교용)</a:t>
-            </a:r>
-            <a:endParaRPr lang="en-US" sz="1800" dirty="0"/>
-          </a:p>
-        </p:txBody>
-      </p:sp>
-      <p:sp>
-        <p:nvSpPr>
-          <p:cNvPr id="10" name="Text 8"/>
-          <p:cNvSpPr/>
-          <p:nvPr/>
-        </p:nvSpPr>
-        <p:spPr>
-          <a:xfrm>
-            <a:off x="6492240" y="2103120"/>
-            <a:ext cx="4846320" cy="1828800"/>
-          </a:xfrm>
-          <a:prstGeom prst="rect">
-            <a:avLst/>
-          </a:prstGeom>
-          <a:noFill/>
-          <a:ln/>
-        </p:spPr>
-        <p:txBody>
-          <a:bodyPr wrap="square" rtlCol="0" anchor="t"/>
-          <a:lstStyle/>
-          <a:p>
-            <a:pPr marL="177800" indent="-177800">
-              <a:spcAft>
-                <a:spcPts val="800"/>
-              </a:spcAft>
-              <a:buSzPct val="100000"/>
-              <a:buChar char="•"/>
-            </a:pPr>
-            <a:r>
-              <a:rPr lang="en-US" sz="1500" dirty="0">
-                <a:solidFill>
-                  <a:srgbClr val="1F2733"/>
-                </a:solidFill>
-                <a:latin typeface="맑은 고딕" pitchFamily="34" charset="0"/>
-                <a:ea typeface="맑은 고딕" pitchFamily="34" charset="-122"/>
-                <a:cs typeface="맑은 고딕" pitchFamily="34" charset="-120"/>
-              </a:rPr>
-              <a:t>사내 AI를 API로 호출</a:t>
-            </a:r>
-            <a:endParaRPr lang="en-US" sz="1500" dirty="0"/>
-          </a:p>
-          <a:p>
-            <a:pPr marL="177800" indent="-177800">
-              <a:spcAft>
-                <a:spcPts val="800"/>
-              </a:spcAft>
-              <a:buSzPct val="100000"/>
-              <a:buChar char="•"/>
-            </a:pPr>
-            <a:r>
-              <a:rPr lang="en-US" sz="1500" dirty="0">
-                <a:solidFill>
-                  <a:srgbClr val="1F2733"/>
-                </a:solidFill>
-                <a:latin typeface="맑은 고딕" pitchFamily="34" charset="0"/>
-                <a:ea typeface="맑은 고딕" pitchFamily="34" charset="-122"/>
-                <a:cs typeface="맑은 고딕" pitchFamily="34" charset="-120"/>
-              </a:rPr>
-              <a:t>사내 서비스라 반출 문제 없음</a:t>
-            </a:r>
-            <a:endParaRPr lang="en-US" sz="1500" dirty="0"/>
-          </a:p>
-          <a:p>
-            <a:pPr marL="177800" indent="-177800">
-              <a:spcAft>
-                <a:spcPts val="800"/>
-              </a:spcAft>
-              <a:buSzPct val="100000"/>
-              <a:buChar char="•"/>
-            </a:pPr>
-            <a:r>
-              <a:rPr lang="en-US" sz="1500" dirty="0">
-                <a:solidFill>
-                  <a:srgbClr val="1F2733"/>
-                </a:solidFill>
-                <a:latin typeface="맑은 고딕" pitchFamily="34" charset="0"/>
-                <a:ea typeface="맑은 고딕" pitchFamily="34" charset="-122"/>
-                <a:cs typeface="맑은 고딕" pitchFamily="34" charset="-120"/>
-              </a:rPr>
-              <a:t>Qwen3-8B와 정확도·속도 비교 목적</a:t>
-            </a:r>
-            <a:endParaRPr lang="en-US" sz="1500" dirty="0"/>
-          </a:p>
-        </p:txBody>
-      </p:sp>
-      <p:sp>
-        <p:nvSpPr>
-          <p:cNvPr id="11" name="Shape 9"/>
-          <p:cNvSpPr/>
-          <p:nvPr/>
-        </p:nvSpPr>
-        <p:spPr>
-          <a:xfrm>
-            <a:off x="566928" y="4251960"/>
-            <a:ext cx="7406640" cy="1965960"/>
-          </a:xfrm>
-          <a:prstGeom prst="roundRect">
-            <a:avLst>
-              <a:gd name="adj" fmla="val 3721"/>
-            </a:avLst>
-          </a:prstGeom>
-          <a:solidFill>
-            <a:srgbClr val="FFFFFF"/>
-          </a:solidFill>
-          <a:ln w="12700">
-            <a:solidFill>
-              <a:srgbClr val="DCE3EB"/>
-            </a:solidFill>
-            <a:prstDash val="solid"/>
-          </a:ln>
-          <a:effectLst>
-            <a:outerShdw sx="100000" sy="100000" kx="0" ky="0" algn="bl" rotWithShape="0" blurRad="76200" dist="25400" dir="5400000">
-              <a:srgbClr val="B9C3CE">
-                <a:alpha val="35000"/>
-              </a:srgbClr>
-            </a:outerShdw>
-          </a:effectLst>
-        </p:spPr>
-      </p:sp>
-      <p:sp>
-        <p:nvSpPr>
-          <p:cNvPr id="12" name="Text 10"/>
-          <p:cNvSpPr/>
-          <p:nvPr/>
-        </p:nvSpPr>
-        <p:spPr>
-          <a:xfrm>
-            <a:off x="822960" y="4389120"/>
-            <a:ext cx="4572000" cy="365760"/>
-          </a:xfrm>
-          <a:prstGeom prst="rect">
-            <a:avLst/>
-          </a:prstGeom>
-          <a:noFill/>
-          <a:ln/>
-        </p:spPr>
-        <p:txBody>
-          <a:bodyPr wrap="square" rtlCol="0" anchor="ctr"/>
-          <a:lstStyle/>
-          <a:p>
-            <a:pPr indent="0" marL="0">
-              <a:buNone/>
-            </a:pPr>
-            <a:r>
-              <a:rPr lang="en-US" sz="1500" b="1" dirty="0">
-                <a:solidFill>
-                  <a:srgbClr val="24395F"/>
-                </a:solidFill>
-                <a:latin typeface="맑은 고딕" pitchFamily="34" charset="0"/>
-                <a:ea typeface="맑은 고딕" pitchFamily="34" charset="-122"/>
-                <a:cs typeface="맑은 고딕" pitchFamily="34" charset="-120"/>
-              </a:rPr>
-              <a:t>개발 방법</a:t>
-            </a:r>
-            <a:endParaRPr lang="en-US" sz="1500" dirty="0"/>
-          </a:p>
-        </p:txBody>
-      </p:sp>
-      <p:sp>
-        <p:nvSpPr>
-          <p:cNvPr id="13" name="Text 11"/>
-          <p:cNvSpPr/>
-          <p:nvPr/>
-        </p:nvSpPr>
-        <p:spPr>
-          <a:xfrm>
-            <a:off x="868680" y="4800600"/>
-            <a:ext cx="6858000" cy="1280160"/>
-          </a:xfrm>
-          <a:prstGeom prst="rect">
-            <a:avLst/>
-          </a:prstGeom>
-          <a:noFill/>
-          <a:ln/>
-        </p:spPr>
-        <p:txBody>
-          <a:bodyPr wrap="square" rtlCol="0" anchor="t"/>
-          <a:lstStyle/>
-          <a:p>
-            <a:pPr marL="177800" indent="-177800">
-              <a:spcAft>
-                <a:spcPts val="800"/>
-              </a:spcAft>
-              <a:buSzPct val="100000"/>
-              <a:buChar char="•"/>
-            </a:pPr>
-            <a:r>
-              <a:rPr lang="en-US" sz="1500" dirty="0">
-                <a:solidFill>
-                  <a:srgbClr val="1F2733"/>
-                </a:solidFill>
-                <a:latin typeface="맑은 고딕" pitchFamily="34" charset="0"/>
-                <a:ea typeface="맑은 고딕" pitchFamily="34" charset="-122"/>
-                <a:cs typeface="맑은 고딕" pitchFamily="34" charset="-120"/>
-              </a:rPr>
-              <a:t>학습(파인튜닝) 없이 프롬프트 기반</a:t>
-            </a:r>
-            <a:endParaRPr lang="en-US" sz="1500" dirty="0"/>
-          </a:p>
-          <a:p>
-            <a:pPr marL="177800" indent="-177800">
-              <a:spcAft>
-                <a:spcPts val="800"/>
-              </a:spcAft>
-              <a:buSzPct val="100000"/>
-              <a:buChar char="•"/>
-            </a:pPr>
-            <a:r>
-              <a:rPr lang="en-US" sz="1500" dirty="0">
-                <a:solidFill>
-                  <a:srgbClr val="1F2733"/>
-                </a:solidFill>
-                <a:latin typeface="맑은 고딕" pitchFamily="34" charset="0"/>
-                <a:ea typeface="맑은 고딕" pitchFamily="34" charset="-122"/>
-                <a:cs typeface="맑은 고딕" pitchFamily="34" charset="-120"/>
-              </a:rPr>
-              <a:t>프롬프트에 도메인 용어집(AMR·LOAD·UNLOAD 등) + '이렇게 쓰라' 재작성 예시 반영</a:t>
-            </a:r>
-            <a:endParaRPr lang="en-US" sz="1500" dirty="0"/>
-          </a:p>
-        </p:txBody>
-      </p:sp>
-      <p:sp>
-        <p:nvSpPr>
-          <p:cNvPr id="14" name="Shape 12"/>
-          <p:cNvSpPr/>
-          <p:nvPr/>
-        </p:nvSpPr>
-        <p:spPr>
-          <a:xfrm>
-            <a:off x="8138160" y="4251960"/>
-            <a:ext cx="3493008" cy="1965960"/>
-          </a:xfrm>
-          <a:prstGeom prst="roundRect">
-            <a:avLst>
-              <a:gd name="adj" fmla="val 3721"/>
-            </a:avLst>
-          </a:prstGeom>
-          <a:solidFill>
-            <a:srgbClr val="1B2A4A"/>
-          </a:solidFill>
-          <a:ln w="12700">
-            <a:solidFill>
-              <a:srgbClr val="DCE3EB"/>
-            </a:solidFill>
-            <a:prstDash val="solid"/>
-          </a:ln>
-          <a:effectLst>
-            <a:outerShdw sx="100000" sy="100000" kx="0" ky="0" algn="bl" rotWithShape="0" blurRad="76200" dist="25400" dir="5400000">
-              <a:srgbClr val="B9C3CE">
-                <a:alpha val="35000"/>
-              </a:srgbClr>
-            </a:outerShdw>
-          </a:effectLst>
-        </p:spPr>
-      </p:sp>
-      <p:sp>
-        <p:nvSpPr>
-          <p:cNvPr id="15" name="Text 13"/>
-          <p:cNvSpPr/>
-          <p:nvPr/>
-        </p:nvSpPr>
-        <p:spPr>
-          <a:xfrm>
-            <a:off x="8138160" y="4434840"/>
-            <a:ext cx="3493008" cy="365760"/>
-          </a:xfrm>
-          <a:prstGeom prst="rect">
-            <a:avLst/>
-          </a:prstGeom>
-          <a:noFill/>
-          <a:ln/>
-        </p:spPr>
-        <p:txBody>
-          <a:bodyPr wrap="square" rtlCol="0" anchor="ctr"/>
-          <a:lstStyle/>
-          <a:p>
-            <a:pPr algn="ctr" indent="0" marL="0">
-              <a:buNone/>
-            </a:pPr>
-            <a:r>
-              <a:rPr lang="en-US" sz="1500" dirty="0">
-                <a:solidFill>
-                  <a:srgbClr val="CADCFC"/>
-                </a:solidFill>
-                <a:latin typeface="맑은 고딕" pitchFamily="34" charset="0"/>
-                <a:ea typeface="맑은 고딕" pitchFamily="34" charset="-122"/>
-                <a:cs typeface="맑은 고딕" pitchFamily="34" charset="-120"/>
-              </a:rPr>
-              <a:t>추론 시간</a:t>
-            </a:r>
-            <a:endParaRPr lang="en-US" sz="1500" dirty="0"/>
-          </a:p>
-        </p:txBody>
-      </p:sp>
-      <p:sp>
-        <p:nvSpPr>
-          <p:cNvPr id="16" name="Text 14"/>
-          <p:cNvSpPr/>
-          <p:nvPr/>
-        </p:nvSpPr>
-        <p:spPr>
-          <a:xfrm>
-            <a:off x="8138160" y="4754880"/>
-            <a:ext cx="3493008" cy="822960"/>
-          </a:xfrm>
-          <a:prstGeom prst="rect">
-            <a:avLst/>
-          </a:prstGeom>
-          <a:noFill/>
-          <a:ln/>
-        </p:spPr>
-        <p:txBody>
-          <a:bodyPr wrap="square" rtlCol="0" anchor="ctr"/>
-          <a:lstStyle/>
-          <a:p>
-            <a:pPr algn="ctr" indent="0" marL="0">
-              <a:buNone/>
-            </a:pPr>
-            <a:r>
-              <a:rPr lang="en-US" sz="4000" b="1" dirty="0">
-                <a:solidFill>
-                  <a:srgbClr val="FFFFFF"/>
-                </a:solidFill>
-                <a:latin typeface="맑은 고딕" pitchFamily="34" charset="0"/>
-                <a:ea typeface="맑은 고딕" pitchFamily="34" charset="-122"/>
-                <a:cs typeface="맑은 고딕" pitchFamily="34" charset="-120"/>
-              </a:rPr>
-              <a:t>약 2~3초</a:t>
-            </a:r>
-            <a:endParaRPr lang="en-US" sz="4000" dirty="0"/>
-          </a:p>
-        </p:txBody>
-      </p:sp>
-      <p:sp>
-        <p:nvSpPr>
-          <p:cNvPr id="17" name="Text 15"/>
-          <p:cNvSpPr/>
-          <p:nvPr/>
-        </p:nvSpPr>
-        <p:spPr>
-          <a:xfrm>
-            <a:off x="8138160" y="5623560"/>
-            <a:ext cx="3493008" cy="365760"/>
-          </a:xfrm>
-          <a:prstGeom prst="rect">
-            <a:avLst/>
-          </a:prstGeom>
-          <a:noFill/>
-          <a:ln/>
-        </p:spPr>
-        <p:txBody>
-          <a:bodyPr wrap="square" rtlCol="0" anchor="ctr"/>
-          <a:lstStyle/>
-          <a:p>
-            <a:pPr algn="ctr" indent="0" marL="0">
-              <a:buNone/>
-            </a:pPr>
-            <a:r>
-              <a:rPr lang="en-US" sz="1300" dirty="0">
-                <a:solidFill>
-                  <a:srgbClr val="AEBFDA"/>
-                </a:solidFill>
-                <a:latin typeface="맑은 고딕" pitchFamily="34" charset="0"/>
-                <a:ea typeface="맑은 고딕" pitchFamily="34" charset="-122"/>
-                <a:cs typeface="맑은 고딕" pitchFamily="34" charset="-120"/>
-              </a:rPr>
-              <a:t>기능(조항) 1건당</a:t>
+              <a:rPr lang="en-US" sz="1300" i="1" dirty="0">
+                <a:solidFill>
+                  <a:srgbClr val="63707E"/>
+                </a:solidFill>
+                <a:latin typeface="맑은 고딕" pitchFamily="34" charset="0"/>
+                <a:ea typeface="맑은 고딕" pitchFamily="34" charset="-122"/>
+                <a:cs typeface="맑은 고딕" pitchFamily="34" charset="-120"/>
+              </a:rPr>
+              <a:t>전 구성요소는 사내 폐쇄망 안에서 동작 · AI 추론 상세는 다음 장</a:t>
             </a:r>
             <a:endParaRPr lang="en-US" sz="1300" dirty="0"/>
           </a:p>
@@ -4616,7 +5307,7 @@
                 <a:ea typeface="맑은 고딕" pitchFamily="34" charset="-122"/>
                 <a:cs typeface="맑은 고딕" pitchFamily="34" charset="-120"/>
               </a:rPr>
-              <a:t>핵심기능 ① · 프로세스</a:t>
+              <a:t>AI</a:t>
             </a:r>
             <a:endParaRPr lang="en-US" sz="1200" dirty="0"/>
           </a:p>
@@ -4655,7 +5346,7 @@
                 <a:ea typeface="맑은 고딕" pitchFamily="34" charset="-122"/>
                 <a:cs typeface="맑은 고딕" pitchFamily="34" charset="-120"/>
               </a:rPr>
-              <a:t>모호성 해결 — docx 업로드부터 해결까지 (하나의 프로세스)</a:t>
+              <a:t>AI 추론 — 2가지 (비교)</a:t>
             </a:r>
             <a:endParaRPr lang="en-US" sz="2800" dirty="0"/>
           </a:p>
@@ -4700,40 +5391,50 @@
           </a:p>
         </p:txBody>
       </p:sp>
-      <p:pic>
-        <p:nvPicPr>
-          <p:cNvPr id="5" name="Image 0" descr="/home/user/semes-superrookie/docs/img/design-fig1.png">    </p:cNvPr>
-          <p:cNvPicPr>
-            <a:picLocks noChangeAspect="1"/>
-          </p:cNvPicPr>
-          <p:nvPr/>
-        </p:nvPicPr>
-        <p:blipFill>
-          <a:blip r:embed="rId1"/>
-          <a:stretch>
-            <a:fillRect/>
-          </a:stretch>
-        </p:blipFill>
-        <p:spPr>
-          <a:xfrm>
-            <a:off x="1393597" y="1280160"/>
-            <a:ext cx="9420045" cy="4160520"/>
-          </a:xfrm>
-          <a:prstGeom prst="rect">
-            <a:avLst/>
-          </a:prstGeom>
-        </p:spPr>
-      </p:pic>
-      <p:sp>
-        <p:nvSpPr>
-          <p:cNvPr id="6" name="Text 3"/>
-          <p:cNvSpPr/>
-          <p:nvPr/>
-        </p:nvSpPr>
-        <p:spPr>
-          <a:xfrm>
-            <a:off x="566928" y="5943600"/>
-            <a:ext cx="11064240" cy="457200"/>
+      <p:sp>
+        <p:nvSpPr>
+          <p:cNvPr id="5" name="Shape 3"/>
+          <p:cNvSpPr/>
+          <p:nvPr/>
+        </p:nvSpPr>
+        <p:spPr>
+          <a:xfrm>
+            <a:off x="566928" y="1371600"/>
+            <a:ext cx="5440680" cy="2697480"/>
+          </a:xfrm>
+          <a:prstGeom prst="roundRect">
+            <a:avLst>
+              <a:gd name="adj" fmla="val 2712"/>
+            </a:avLst>
+          </a:prstGeom>
+          <a:solidFill>
+            <a:srgbClr val="FFFFFF"/>
+          </a:solidFill>
+          <a:ln w="12700">
+            <a:solidFill>
+              <a:srgbClr val="DCE3EB"/>
+            </a:solidFill>
+            <a:prstDash val="solid"/>
+          </a:ln>
+          <a:effectLst>
+            <a:outerShdw sx="100000" sy="100000" kx="0" ky="0" algn="bl" rotWithShape="0" blurRad="76200" dist="25400" dir="5400000">
+              <a:srgbClr val="B9C3CE">
+                <a:alpha val="35000"/>
+              </a:srgbClr>
+            </a:outerShdw>
+          </a:effectLst>
+        </p:spPr>
+      </p:sp>
+      <p:sp>
+        <p:nvSpPr>
+          <p:cNvPr id="6" name="Text 4"/>
+          <p:cNvSpPr/>
+          <p:nvPr/>
+        </p:nvSpPr>
+        <p:spPr>
+          <a:xfrm>
+            <a:off x="822960" y="1572768"/>
+            <a:ext cx="4937760" cy="457200"/>
           </a:xfrm>
           <a:prstGeom prst="rect">
             <a:avLst/>
@@ -4745,21 +5446,552 @@
           <a:bodyPr wrap="square" rtlCol="0" anchor="ctr"/>
           <a:lstStyle/>
           <a:p>
+            <a:pPr indent="0" marL="0">
+              <a:buNone/>
+            </a:pPr>
+            <a:r>
+              <a:rPr lang="en-US" sz="1800" b="1" dirty="0">
+                <a:solidFill>
+                  <a:srgbClr val="C67F17"/>
+                </a:solidFill>
+                <a:latin typeface="맑은 고딕" pitchFamily="34" charset="0"/>
+                <a:ea typeface="맑은 고딕" pitchFamily="34" charset="-122"/>
+                <a:cs typeface="맑은 고딕" pitchFamily="34" charset="-120"/>
+              </a:rPr>
+              <a:t>① Qwen3-8B  (주력)</a:t>
+            </a:r>
+            <a:endParaRPr lang="en-US" sz="1800" dirty="0"/>
+          </a:p>
+        </p:txBody>
+      </p:sp>
+      <p:sp>
+        <p:nvSpPr>
+          <p:cNvPr id="7" name="Text 5"/>
+          <p:cNvSpPr/>
+          <p:nvPr/>
+        </p:nvSpPr>
+        <p:spPr>
+          <a:xfrm>
+            <a:off x="868680" y="2103120"/>
+            <a:ext cx="4846320" cy="1828800"/>
+          </a:xfrm>
+          <a:prstGeom prst="rect">
+            <a:avLst/>
+          </a:prstGeom>
+          <a:noFill/>
+          <a:ln/>
+        </p:spPr>
+        <p:txBody>
+          <a:bodyPr wrap="square" rtlCol="0" anchor="t"/>
+          <a:lstStyle/>
+          <a:p>
+            <a:pPr marL="177800" indent="-177800">
+              <a:spcAft>
+                <a:spcPts val="800"/>
+              </a:spcAft>
+              <a:buSzPct val="100000"/>
+              <a:buChar char="•"/>
+            </a:pPr>
+            <a:r>
+              <a:rPr lang="en-US" sz="1500" dirty="0">
+                <a:solidFill>
+                  <a:srgbClr val="1F2733"/>
+                </a:solidFill>
+                <a:latin typeface="맑은 고딕" pitchFamily="34" charset="0"/>
+                <a:ea typeface="맑은 고딕" pitchFamily="34" charset="-122"/>
+                <a:cs typeface="맑은 고딕" pitchFamily="34" charset="-120"/>
+              </a:rPr>
+              <a:t>오픈소스 LLM, Ollama로 로컬 서빙</a:t>
+            </a:r>
+            <a:endParaRPr lang="en-US" sz="1500" dirty="0"/>
+          </a:p>
+          <a:p>
+            <a:pPr marL="177800" indent="-177800">
+              <a:spcAft>
+                <a:spcPts val="800"/>
+              </a:spcAft>
+              <a:buSzPct val="100000"/>
+              <a:buChar char="•"/>
+            </a:pPr>
+            <a:r>
+              <a:rPr lang="en-US" sz="1500" dirty="0">
+                <a:solidFill>
+                  <a:srgbClr val="1F2733"/>
+                </a:solidFill>
+                <a:latin typeface="맑은 고딕" pitchFamily="34" charset="0"/>
+                <a:ea typeface="맑은 고딕" pitchFamily="34" charset="-122"/>
+                <a:cs typeface="맑은 고딕" pitchFamily="34" charset="-120"/>
+              </a:rPr>
+              <a:t>워크스테이션 GPU(P4000 8GB)에서 구동</a:t>
+            </a:r>
+            <a:endParaRPr lang="en-US" sz="1500" dirty="0"/>
+          </a:p>
+          <a:p>
+            <a:pPr marL="177800" indent="-177800">
+              <a:spcAft>
+                <a:spcPts val="800"/>
+              </a:spcAft>
+              <a:buSzPct val="100000"/>
+              <a:buChar char="•"/>
+            </a:pPr>
+            <a:r>
+              <a:rPr lang="en-US" sz="1500" dirty="0">
+                <a:solidFill>
+                  <a:srgbClr val="1F2733"/>
+                </a:solidFill>
+                <a:latin typeface="맑은 고딕" pitchFamily="34" charset="0"/>
+                <a:ea typeface="맑은 고딕" pitchFamily="34" charset="-122"/>
+                <a:cs typeface="맑은 고딕" pitchFamily="34" charset="-120"/>
+              </a:rPr>
+              <a:t>다운받아 바로 사용 · 반출 없음</a:t>
+            </a:r>
+            <a:endParaRPr lang="en-US" sz="1500" dirty="0"/>
+          </a:p>
+        </p:txBody>
+      </p:sp>
+      <p:sp>
+        <p:nvSpPr>
+          <p:cNvPr id="8" name="Shape 6"/>
+          <p:cNvSpPr/>
+          <p:nvPr/>
+        </p:nvSpPr>
+        <p:spPr>
+          <a:xfrm>
+            <a:off x="6199632" y="1371600"/>
+            <a:ext cx="5440680" cy="2697480"/>
+          </a:xfrm>
+          <a:prstGeom prst="roundRect">
+            <a:avLst>
+              <a:gd name="adj" fmla="val 2712"/>
+            </a:avLst>
+          </a:prstGeom>
+          <a:solidFill>
+            <a:srgbClr val="FDF7EE"/>
+          </a:solidFill>
+          <a:ln w="12700">
+            <a:solidFill>
+              <a:srgbClr val="DCE3EB"/>
+            </a:solidFill>
+            <a:prstDash val="solid"/>
+          </a:ln>
+          <a:effectLst>
+            <a:outerShdw sx="100000" sy="100000" kx="0" ky="0" algn="bl" rotWithShape="0" blurRad="76200" dist="25400" dir="5400000">
+              <a:srgbClr val="B9C3CE">
+                <a:alpha val="35000"/>
+              </a:srgbClr>
+            </a:outerShdw>
+          </a:effectLst>
+        </p:spPr>
+      </p:sp>
+      <p:sp>
+        <p:nvSpPr>
+          <p:cNvPr id="9" name="Text 7"/>
+          <p:cNvSpPr/>
+          <p:nvPr/>
+        </p:nvSpPr>
+        <p:spPr>
+          <a:xfrm>
+            <a:off x="6446520" y="1572768"/>
+            <a:ext cx="4937760" cy="457200"/>
+          </a:xfrm>
+          <a:prstGeom prst="rect">
+            <a:avLst/>
+          </a:prstGeom>
+          <a:noFill/>
+          <a:ln/>
+        </p:spPr>
+        <p:txBody>
+          <a:bodyPr wrap="square" rtlCol="0" anchor="ctr"/>
+          <a:lstStyle/>
+          <a:p>
+            <a:pPr indent="0" marL="0">
+              <a:buNone/>
+            </a:pPr>
+            <a:r>
+              <a:rPr lang="en-US" sz="1800" b="1" dirty="0">
+                <a:solidFill>
+                  <a:srgbClr val="2C7A8C"/>
+                </a:solidFill>
+                <a:latin typeface="맑은 고딕" pitchFamily="34" charset="0"/>
+                <a:ea typeface="맑은 고딕" pitchFamily="34" charset="-122"/>
+                <a:cs typeface="맑은 고딕" pitchFamily="34" charset="-120"/>
+              </a:rPr>
+              <a:t>② 사내 playground  (비교용)</a:t>
+            </a:r>
+            <a:endParaRPr lang="en-US" sz="1800" dirty="0"/>
+          </a:p>
+        </p:txBody>
+      </p:sp>
+      <p:sp>
+        <p:nvSpPr>
+          <p:cNvPr id="10" name="Text 8"/>
+          <p:cNvSpPr/>
+          <p:nvPr/>
+        </p:nvSpPr>
+        <p:spPr>
+          <a:xfrm>
+            <a:off x="6492240" y="2103120"/>
+            <a:ext cx="4846320" cy="1828800"/>
+          </a:xfrm>
+          <a:prstGeom prst="rect">
+            <a:avLst/>
+          </a:prstGeom>
+          <a:noFill/>
+          <a:ln/>
+        </p:spPr>
+        <p:txBody>
+          <a:bodyPr wrap="square" rtlCol="0" anchor="t"/>
+          <a:lstStyle/>
+          <a:p>
+            <a:pPr marL="177800" indent="-177800">
+              <a:spcAft>
+                <a:spcPts val="800"/>
+              </a:spcAft>
+              <a:buSzPct val="100000"/>
+              <a:buChar char="•"/>
+            </a:pPr>
+            <a:r>
+              <a:rPr lang="en-US" sz="1500" dirty="0">
+                <a:solidFill>
+                  <a:srgbClr val="1F2733"/>
+                </a:solidFill>
+                <a:latin typeface="맑은 고딕" pitchFamily="34" charset="0"/>
+                <a:ea typeface="맑은 고딕" pitchFamily="34" charset="-122"/>
+                <a:cs typeface="맑은 고딕" pitchFamily="34" charset="-120"/>
+              </a:rPr>
+              <a:t>사내 AI를 API로 호출</a:t>
+            </a:r>
+            <a:endParaRPr lang="en-US" sz="1500" dirty="0"/>
+          </a:p>
+          <a:p>
+            <a:pPr marL="177800" indent="-177800">
+              <a:spcAft>
+                <a:spcPts val="800"/>
+              </a:spcAft>
+              <a:buSzPct val="100000"/>
+              <a:buChar char="•"/>
+            </a:pPr>
+            <a:r>
+              <a:rPr lang="en-US" sz="1500" dirty="0">
+                <a:solidFill>
+                  <a:srgbClr val="1F2733"/>
+                </a:solidFill>
+                <a:latin typeface="맑은 고딕" pitchFamily="34" charset="0"/>
+                <a:ea typeface="맑은 고딕" pitchFamily="34" charset="-122"/>
+                <a:cs typeface="맑은 고딕" pitchFamily="34" charset="-120"/>
+              </a:rPr>
+              <a:t>사내 서비스라 반출 문제 없음</a:t>
+            </a:r>
+            <a:endParaRPr lang="en-US" sz="1500" dirty="0"/>
+          </a:p>
+          <a:p>
+            <a:pPr marL="177800" indent="-177800">
+              <a:spcAft>
+                <a:spcPts val="800"/>
+              </a:spcAft>
+              <a:buSzPct val="100000"/>
+              <a:buChar char="•"/>
+            </a:pPr>
+            <a:r>
+              <a:rPr lang="en-US" sz="1500" dirty="0">
+                <a:solidFill>
+                  <a:srgbClr val="1F2733"/>
+                </a:solidFill>
+                <a:latin typeface="맑은 고딕" pitchFamily="34" charset="0"/>
+                <a:ea typeface="맑은 고딕" pitchFamily="34" charset="-122"/>
+                <a:cs typeface="맑은 고딕" pitchFamily="34" charset="-120"/>
+              </a:rPr>
+              <a:t>Qwen3-8B와 정확도·속도 비교 목적</a:t>
+            </a:r>
+            <a:endParaRPr lang="en-US" sz="1500" dirty="0"/>
+          </a:p>
+        </p:txBody>
+      </p:sp>
+      <p:sp>
+        <p:nvSpPr>
+          <p:cNvPr id="11" name="Shape 9"/>
+          <p:cNvSpPr/>
+          <p:nvPr/>
+        </p:nvSpPr>
+        <p:spPr>
+          <a:xfrm>
+            <a:off x="566928" y="4251960"/>
+            <a:ext cx="7406640" cy="1965960"/>
+          </a:xfrm>
+          <a:prstGeom prst="roundRect">
+            <a:avLst>
+              <a:gd name="adj" fmla="val 3721"/>
+            </a:avLst>
+          </a:prstGeom>
+          <a:solidFill>
+            <a:srgbClr val="FFFFFF"/>
+          </a:solidFill>
+          <a:ln w="12700">
+            <a:solidFill>
+              <a:srgbClr val="DCE3EB"/>
+            </a:solidFill>
+            <a:prstDash val="solid"/>
+          </a:ln>
+          <a:effectLst>
+            <a:outerShdw sx="100000" sy="100000" kx="0" ky="0" algn="bl" rotWithShape="0" blurRad="76200" dist="25400" dir="5400000">
+              <a:srgbClr val="B9C3CE">
+                <a:alpha val="35000"/>
+              </a:srgbClr>
+            </a:outerShdw>
+          </a:effectLst>
+        </p:spPr>
+      </p:sp>
+      <p:sp>
+        <p:nvSpPr>
+          <p:cNvPr id="12" name="Text 10"/>
+          <p:cNvSpPr/>
+          <p:nvPr/>
+        </p:nvSpPr>
+        <p:spPr>
+          <a:xfrm>
+            <a:off x="822960" y="4389120"/>
+            <a:ext cx="4572000" cy="365760"/>
+          </a:xfrm>
+          <a:prstGeom prst="rect">
+            <a:avLst/>
+          </a:prstGeom>
+          <a:noFill/>
+          <a:ln/>
+        </p:spPr>
+        <p:txBody>
+          <a:bodyPr wrap="square" rtlCol="0" anchor="ctr"/>
+          <a:lstStyle/>
+          <a:p>
+            <a:pPr indent="0" marL="0">
+              <a:buNone/>
+            </a:pPr>
+            <a:r>
+              <a:rPr lang="en-US" sz="1500" b="1" dirty="0">
+                <a:solidFill>
+                  <a:srgbClr val="24395F"/>
+                </a:solidFill>
+                <a:latin typeface="맑은 고딕" pitchFamily="34" charset="0"/>
+                <a:ea typeface="맑은 고딕" pitchFamily="34" charset="-122"/>
+                <a:cs typeface="맑은 고딕" pitchFamily="34" charset="-120"/>
+              </a:rPr>
+              <a:t>개발 방법</a:t>
+            </a:r>
+            <a:endParaRPr lang="en-US" sz="1500" dirty="0"/>
+          </a:p>
+        </p:txBody>
+      </p:sp>
+      <p:sp>
+        <p:nvSpPr>
+          <p:cNvPr id="13" name="Text 11"/>
+          <p:cNvSpPr/>
+          <p:nvPr/>
+        </p:nvSpPr>
+        <p:spPr>
+          <a:xfrm>
+            <a:off x="868680" y="4800600"/>
+            <a:ext cx="6858000" cy="1280160"/>
+          </a:xfrm>
+          <a:prstGeom prst="rect">
+            <a:avLst/>
+          </a:prstGeom>
+          <a:noFill/>
+          <a:ln/>
+        </p:spPr>
+        <p:txBody>
+          <a:bodyPr wrap="square" rtlCol="0" anchor="t"/>
+          <a:lstStyle/>
+          <a:p>
+            <a:pPr marL="177800" indent="-177800">
+              <a:spcAft>
+                <a:spcPts val="800"/>
+              </a:spcAft>
+              <a:buSzPct val="100000"/>
+              <a:buChar char="•"/>
+            </a:pPr>
+            <a:r>
+              <a:rPr lang="en-US" sz="1500" dirty="0">
+                <a:solidFill>
+                  <a:srgbClr val="1F2733"/>
+                </a:solidFill>
+                <a:latin typeface="맑은 고딕" pitchFamily="34" charset="0"/>
+                <a:ea typeface="맑은 고딕" pitchFamily="34" charset="-122"/>
+                <a:cs typeface="맑은 고딕" pitchFamily="34" charset="-120"/>
+              </a:rPr>
+              <a:t>학습(파인튜닝) 없이 프롬프트 기반</a:t>
+            </a:r>
+            <a:endParaRPr lang="en-US" sz="1500" dirty="0"/>
+          </a:p>
+          <a:p>
+            <a:pPr marL="177800" indent="-177800">
+              <a:spcAft>
+                <a:spcPts val="800"/>
+              </a:spcAft>
+              <a:buSzPct val="100000"/>
+              <a:buChar char="•"/>
+            </a:pPr>
+            <a:r>
+              <a:rPr lang="en-US" sz="1500" dirty="0">
+                <a:solidFill>
+                  <a:srgbClr val="1F2733"/>
+                </a:solidFill>
+                <a:latin typeface="맑은 고딕" pitchFamily="34" charset="0"/>
+                <a:ea typeface="맑은 고딕" pitchFamily="34" charset="-122"/>
+                <a:cs typeface="맑은 고딕" pitchFamily="34" charset="-120"/>
+              </a:rPr>
+              <a:t>프롬프트에 도메인 용어집(AMR·LOAD·UNLOAD 등) + '이렇게 쓰라' 재작성 예시 반영</a:t>
+            </a:r>
+            <a:endParaRPr lang="en-US" sz="1500" dirty="0"/>
+          </a:p>
+        </p:txBody>
+      </p:sp>
+      <p:sp>
+        <p:nvSpPr>
+          <p:cNvPr id="14" name="Shape 12"/>
+          <p:cNvSpPr/>
+          <p:nvPr/>
+        </p:nvSpPr>
+        <p:spPr>
+          <a:xfrm>
+            <a:off x="8138160" y="4251960"/>
+            <a:ext cx="3493008" cy="1965960"/>
+          </a:xfrm>
+          <a:prstGeom prst="roundRect">
+            <a:avLst>
+              <a:gd name="adj" fmla="val 3721"/>
+            </a:avLst>
+          </a:prstGeom>
+          <a:solidFill>
+            <a:srgbClr val="1B2A4A"/>
+          </a:solidFill>
+          <a:ln w="12700">
+            <a:solidFill>
+              <a:srgbClr val="DCE3EB"/>
+            </a:solidFill>
+            <a:prstDash val="solid"/>
+          </a:ln>
+          <a:effectLst>
+            <a:outerShdw sx="100000" sy="100000" kx="0" ky="0" algn="bl" rotWithShape="0" blurRad="76200" dist="25400" dir="5400000">
+              <a:srgbClr val="B9C3CE">
+                <a:alpha val="35000"/>
+              </a:srgbClr>
+            </a:outerShdw>
+          </a:effectLst>
+        </p:spPr>
+      </p:sp>
+      <p:sp>
+        <p:nvSpPr>
+          <p:cNvPr id="15" name="Text 13"/>
+          <p:cNvSpPr/>
+          <p:nvPr/>
+        </p:nvSpPr>
+        <p:spPr>
+          <a:xfrm>
+            <a:off x="8138160" y="4434840"/>
+            <a:ext cx="3493008" cy="365760"/>
+          </a:xfrm>
+          <a:prstGeom prst="rect">
+            <a:avLst/>
+          </a:prstGeom>
+          <a:noFill/>
+          <a:ln/>
+        </p:spPr>
+        <p:txBody>
+          <a:bodyPr wrap="square" rtlCol="0" anchor="ctr"/>
+          <a:lstStyle/>
+          <a:p>
             <a:pPr algn="ctr" indent="0" marL="0">
               <a:buNone/>
             </a:pPr>
             <a:r>
-              <a:rPr lang="en-US" sz="1350" b="1" dirty="0">
-                <a:solidFill>
-                  <a:srgbClr val="24395F"/>
-                </a:solidFill>
-                <a:latin typeface="맑은 고딕" pitchFamily="34" charset="0"/>
-                <a:ea typeface="맑은 고딕" pitchFamily="34" charset="-122"/>
-                <a:cs typeface="맑은 고딕" pitchFamily="34" charset="-120"/>
-              </a:rPr>
-              <a:t>① docx 업로드·파싱  →  ② 조항별 모호성 검출(유형·근거·재작성 예시)  →  ③ 해결(해석 입력)/넘어가기  →  ④ 해결 전·후 비교</a:t>
-            </a:r>
-            <a:endParaRPr lang="en-US" sz="1350" dirty="0"/>
+              <a:rPr lang="en-US" sz="1500" dirty="0">
+                <a:solidFill>
+                  <a:srgbClr val="CADCFC"/>
+                </a:solidFill>
+                <a:latin typeface="맑은 고딕" pitchFamily="34" charset="0"/>
+                <a:ea typeface="맑은 고딕" pitchFamily="34" charset="-122"/>
+                <a:cs typeface="맑은 고딕" pitchFamily="34" charset="-120"/>
+              </a:rPr>
+              <a:t>추론 시간</a:t>
+            </a:r>
+            <a:endParaRPr lang="en-US" sz="1500" dirty="0"/>
+          </a:p>
+        </p:txBody>
+      </p:sp>
+      <p:sp>
+        <p:nvSpPr>
+          <p:cNvPr id="16" name="Text 14"/>
+          <p:cNvSpPr/>
+          <p:nvPr/>
+        </p:nvSpPr>
+        <p:spPr>
+          <a:xfrm>
+            <a:off x="8138160" y="4754880"/>
+            <a:ext cx="3493008" cy="822960"/>
+          </a:xfrm>
+          <a:prstGeom prst="rect">
+            <a:avLst/>
+          </a:prstGeom>
+          <a:noFill/>
+          <a:ln/>
+        </p:spPr>
+        <p:txBody>
+          <a:bodyPr wrap="square" rtlCol="0" anchor="ctr"/>
+          <a:lstStyle/>
+          <a:p>
+            <a:pPr algn="ctr" indent="0" marL="0">
+              <a:buNone/>
+            </a:pPr>
+            <a:r>
+              <a:rPr lang="en-US" sz="4000" b="1" dirty="0">
+                <a:solidFill>
+                  <a:srgbClr val="FFFFFF"/>
+                </a:solidFill>
+                <a:latin typeface="맑은 고딕" pitchFamily="34" charset="0"/>
+                <a:ea typeface="맑은 고딕" pitchFamily="34" charset="-122"/>
+                <a:cs typeface="맑은 고딕" pitchFamily="34" charset="-120"/>
+              </a:rPr>
+              <a:t>약 2~3초</a:t>
+            </a:r>
+            <a:endParaRPr lang="en-US" sz="4000" dirty="0"/>
+          </a:p>
+        </p:txBody>
+      </p:sp>
+      <p:sp>
+        <p:nvSpPr>
+          <p:cNvPr id="17" name="Text 15"/>
+          <p:cNvSpPr/>
+          <p:nvPr/>
+        </p:nvSpPr>
+        <p:spPr>
+          <a:xfrm>
+            <a:off x="8138160" y="5623560"/>
+            <a:ext cx="3493008" cy="365760"/>
+          </a:xfrm>
+          <a:prstGeom prst="rect">
+            <a:avLst/>
+          </a:prstGeom>
+          <a:noFill/>
+          <a:ln/>
+        </p:spPr>
+        <p:txBody>
+          <a:bodyPr wrap="square" rtlCol="0" anchor="ctr"/>
+          <a:lstStyle/>
+          <a:p>
+            <a:pPr algn="ctr" indent="0" marL="0">
+              <a:buNone/>
+            </a:pPr>
+            <a:r>
+              <a:rPr lang="en-US" sz="1300" dirty="0">
+                <a:solidFill>
+                  <a:srgbClr val="AEBFDA"/>
+                </a:solidFill>
+                <a:latin typeface="맑은 고딕" pitchFamily="34" charset="0"/>
+                <a:ea typeface="맑은 고딕" pitchFamily="34" charset="-122"/>
+                <a:cs typeface="맑은 고딕" pitchFamily="34" charset="-120"/>
+              </a:rPr>
+              <a:t>기능(조항) 1건당</a:t>
+            </a:r>
+            <a:endParaRPr lang="en-US" sz="1300" dirty="0"/>
           </a:p>
         </p:txBody>
       </p:sp>
@@ -4828,7 +6060,7 @@
                 <a:ea typeface="맑은 고딕" pitchFamily="34" charset="-122"/>
                 <a:cs typeface="맑은 고딕" pitchFamily="34" charset="-120"/>
               </a:rPr>
-              <a:t>핵심기능 ① · 구현/테스트</a:t>
+              <a:t>핵심기능 ① · 프로세스</a:t>
             </a:r>
             <a:endParaRPr lang="en-US" sz="1200" dirty="0"/>
           </a:p>
@@ -4867,7 +6099,7 @@
                 <a:ea typeface="맑은 고딕" pitchFamily="34" charset="-122"/>
                 <a:cs typeface="맑은 고딕" pitchFamily="34" charset="-120"/>
               </a:rPr>
-              <a:t>실제로 이렇게 구현·테스트했다</a:t>
+              <a:t>모호성 해결 — docx 업로드부터 해결까지 (하나의 프로세스)</a:t>
             </a:r>
             <a:endParaRPr lang="en-US" sz="2800" dirty="0"/>
           </a:p>
@@ -4914,7 +6146,7 @@
       </p:sp>
       <p:pic>
         <p:nvPicPr>
-          <p:cNvPr id="5" name="Image 0" descr="/home/user/semes-superrookie/docs/img/demo-ambiguity-react.png">    </p:cNvPr>
+          <p:cNvPr id="5" name="Image 0" descr="/home/user/semes-superrookie/docs/img/design-fig1.png">    </p:cNvPr>
           <p:cNvPicPr>
             <a:picLocks noChangeAspect="1"/>
           </p:cNvPicPr>
@@ -4928,8 +6160,8 @@
         </p:blipFill>
         <p:spPr>
           <a:xfrm>
-            <a:off x="7443769" y="1280160"/>
-            <a:ext cx="4040541" cy="5074920"/>
+            <a:off x="1393597" y="1280160"/>
+            <a:ext cx="9420045" cy="4160520"/>
           </a:xfrm>
           <a:prstGeom prst="rect">
             <a:avLst/>
@@ -4944,162 +6176,8 @@
         </p:nvSpPr>
         <p:spPr>
           <a:xfrm>
-            <a:off x="566928" y="1508760"/>
-            <a:ext cx="6217920" cy="3200400"/>
-          </a:xfrm>
-          <a:prstGeom prst="rect">
-            <a:avLst/>
-          </a:prstGeom>
-          <a:noFill/>
-          <a:ln/>
-        </p:spPr>
-        <p:txBody>
-          <a:bodyPr wrap="square" rtlCol="0" anchor="t"/>
-          <a:lstStyle/>
-          <a:p>
-            <a:pPr marL="177800" indent="-177800">
-              <a:spcAft>
-                <a:spcPts val="800"/>
-              </a:spcAft>
-              <a:buSzPct val="100000"/>
-              <a:buChar char="•"/>
-            </a:pPr>
-            <a:r>
-              <a:rPr lang="en-US" sz="1500" b="1" dirty="0">
-                <a:solidFill>
-                  <a:srgbClr val="C67F17"/>
-                </a:solidFill>
-                <a:latin typeface="맑은 고딕" pitchFamily="34" charset="0"/>
-                <a:ea typeface="맑은 고딕" pitchFamily="34" charset="-122"/>
-                <a:cs typeface="맑은 고딕" pitchFamily="34" charset="-120"/>
-              </a:rPr>
-              <a:t>docx 업로드 → 문단·표 파싱 (같은 프로세스의 앞단)</a:t>
-            </a:r>
-            <a:endParaRPr lang="en-US" sz="1500" dirty="0"/>
-          </a:p>
-          <a:p>
-            <a:pPr marL="177800" indent="-177800">
-              <a:spcAft>
-                <a:spcPts val="1100"/>
-              </a:spcAft>
-              <a:buSzPct val="100000"/>
-              <a:buChar char="•"/>
-            </a:pPr>
-            <a:r>
-              <a:rPr lang="en-US" sz="1500" dirty="0">
-                <a:solidFill>
-                  <a:srgbClr val="1F2733"/>
-                </a:solidFill>
-                <a:latin typeface="맑은 고딕" pitchFamily="34" charset="0"/>
-                <a:ea typeface="맑은 고딕" pitchFamily="34" charset="-122"/>
-                <a:cs typeface="맑은 고딕" pitchFamily="34" charset="-120"/>
-              </a:rPr>
-              <a:t>조항별로 모호 유형·근거·재작성 예시 표시</a:t>
-            </a:r>
-            <a:endParaRPr lang="en-US" sz="1500" dirty="0"/>
-          </a:p>
-          <a:p>
-            <a:pPr marL="177800" indent="-177800">
-              <a:spcAft>
-                <a:spcPts val="800"/>
-              </a:spcAft>
-              <a:buSzPct val="100000"/>
-              <a:buChar char="•"/>
-            </a:pPr>
-            <a:r>
-              <a:rPr lang="en-US" sz="1500" b="1" dirty="0">
-                <a:solidFill>
-                  <a:srgbClr val="C67F17"/>
-                </a:solidFill>
-                <a:latin typeface="맑은 고딕" pitchFamily="34" charset="0"/>
-                <a:ea typeface="맑은 고딕" pitchFamily="34" charset="-122"/>
-                <a:cs typeface="맑은 고딕" pitchFamily="34" charset="-120"/>
-              </a:rPr>
-              <a:t>해결하기(해석 입력) / 넘어가기 선택</a:t>
-            </a:r>
-            <a:endParaRPr lang="en-US" sz="1500" dirty="0"/>
-          </a:p>
-          <a:p>
-            <a:pPr marL="177800" indent="-177800">
-              <a:spcAft>
-                <a:spcPts val="1100"/>
-              </a:spcAft>
-              <a:buSzPct val="100000"/>
-              <a:buChar char="•"/>
-            </a:pPr>
-            <a:r>
-              <a:rPr lang="en-US" sz="1500" dirty="0">
-                <a:solidFill>
-                  <a:srgbClr val="1F2733"/>
-                </a:solidFill>
-                <a:latin typeface="맑은 고딕" pitchFamily="34" charset="0"/>
-                <a:ea typeface="맑은 고딕" pitchFamily="34" charset="-122"/>
-                <a:cs typeface="맑은 고딕" pitchFamily="34" charset="-120"/>
-              </a:rPr>
-              <a:t>확정 시 '해결 전 / 후' 비교로 전환</a:t>
-            </a:r>
-            <a:endParaRPr lang="en-US" sz="1500" dirty="0"/>
-          </a:p>
-          <a:p>
-            <a:pPr marL="177800" indent="-177800">
-              <a:spcAft>
-                <a:spcPts val="800"/>
-              </a:spcAft>
-              <a:buSzPct val="100000"/>
-              <a:buChar char="•"/>
-            </a:pPr>
-            <a:r>
-              <a:rPr lang="en-US" sz="1500" dirty="0">
-                <a:solidFill>
-                  <a:srgbClr val="3C4855"/>
-                </a:solidFill>
-                <a:latin typeface="맑은 고딕" pitchFamily="34" charset="0"/>
-                <a:ea typeface="맑은 고딕" pitchFamily="34" charset="-122"/>
-                <a:cs typeface="맑은 고딕" pitchFamily="34" charset="-120"/>
-              </a:rPr>
-              <a:t>React + FastAPI + 로컬 LLM으로 실제 동작</a:t>
-            </a:r>
-            <a:endParaRPr lang="en-US" sz="1500" dirty="0"/>
-          </a:p>
-        </p:txBody>
-      </p:sp>
-      <p:sp>
-        <p:nvSpPr>
-          <p:cNvPr id="7" name="Shape 4"/>
-          <p:cNvSpPr/>
-          <p:nvPr/>
-        </p:nvSpPr>
-        <p:spPr>
-          <a:xfrm>
-            <a:off x="566928" y="4892040"/>
-            <a:ext cx="2651760" cy="475488"/>
-          </a:xfrm>
-          <a:prstGeom prst="roundRect">
-            <a:avLst>
-              <a:gd name="adj" fmla="val 19231"/>
-            </a:avLst>
-          </a:prstGeom>
-          <a:solidFill>
-            <a:srgbClr val="DDF0E4"/>
-          </a:solidFill>
-          <a:ln w="12700">
-            <a:solidFill>
-              <a:srgbClr val="2A8A57"/>
-            </a:solidFill>
-            <a:prstDash val="solid"/>
-          </a:ln>
-        </p:spPr>
-      </p:sp>
-      <p:sp>
-        <p:nvSpPr>
-          <p:cNvPr id="8" name="Text 5"/>
-          <p:cNvSpPr/>
-          <p:nvPr/>
-        </p:nvSpPr>
-        <p:spPr>
-          <a:xfrm>
-            <a:off x="566928" y="4892040"/>
-            <a:ext cx="2651760" cy="475488"/>
+            <a:off x="566928" y="5943600"/>
+            <a:ext cx="11064240" cy="457200"/>
           </a:xfrm>
           <a:prstGeom prst="rect">
             <a:avLst/>
@@ -5115,80 +6193,17 @@
               <a:buNone/>
             </a:pPr>
             <a:r>
-              <a:rPr lang="en-US" sz="1400" b="1" dirty="0">
-                <a:solidFill>
-                  <a:srgbClr val="2A8A57"/>
-                </a:solidFill>
-                <a:latin typeface="맑은 고딕" pitchFamily="34" charset="0"/>
-                <a:ea typeface="맑은 고딕" pitchFamily="34" charset="-122"/>
-                <a:cs typeface="맑은 고딕" pitchFamily="34" charset="-120"/>
-              </a:rPr>
-              <a:t>✔  테스트 완료</a:t>
-            </a:r>
-            <a:endParaRPr lang="en-US" sz="1400" dirty="0"/>
-          </a:p>
-        </p:txBody>
-      </p:sp>
-      <p:pic>
-        <p:nvPicPr>
-          <p:cNvPr id="9" name="Image 1" descr="/home/user/semes-superrookie/docs/img/demo-docx-upload.png">    </p:cNvPr>
-          <p:cNvPicPr>
-            <a:picLocks noChangeAspect="1"/>
-          </p:cNvPicPr>
-          <p:nvPr/>
-        </p:nvPicPr>
-        <p:blipFill>
-          <a:blip r:embed="rId2"/>
-          <a:stretch>
-            <a:fillRect/>
-          </a:stretch>
-        </p:blipFill>
-        <p:spPr>
-          <a:xfrm>
-            <a:off x="566928" y="5440680"/>
-            <a:ext cx="1005840" cy="1005840"/>
-          </a:xfrm>
-          <a:prstGeom prst="rect">
-            <a:avLst/>
-          </a:prstGeom>
-        </p:spPr>
-      </p:pic>
-      <p:sp>
-        <p:nvSpPr>
-          <p:cNvPr id="10" name="Text 6"/>
-          <p:cNvSpPr/>
-          <p:nvPr/>
-        </p:nvSpPr>
-        <p:spPr>
-          <a:xfrm>
-            <a:off x="1737360" y="5715000"/>
-            <a:ext cx="4114800" cy="365760"/>
-          </a:xfrm>
-          <a:prstGeom prst="rect">
-            <a:avLst/>
-          </a:prstGeom>
-          <a:noFill/>
-          <a:ln/>
-        </p:spPr>
-        <p:txBody>
-          <a:bodyPr wrap="square" rtlCol="0" anchor="ctr"/>
-          <a:lstStyle/>
-          <a:p>
-            <a:pPr indent="0" marL="0">
-              <a:buNone/>
-            </a:pPr>
-            <a:r>
-              <a:rPr lang="en-US" sz="1200" i="1" dirty="0">
-                <a:solidFill>
-                  <a:srgbClr val="63707E"/>
-                </a:solidFill>
-                <a:latin typeface="맑은 고딕" pitchFamily="34" charset="0"/>
-                <a:ea typeface="맑은 고딕" pitchFamily="34" charset="-122"/>
-                <a:cs typeface="맑은 고딕" pitchFamily="34" charset="-120"/>
-              </a:rPr>
-              <a:t>docx 업로드·파싱 화면</a:t>
-            </a:r>
-            <a:endParaRPr lang="en-US" sz="1200" dirty="0"/>
+              <a:rPr lang="en-US" sz="1350" b="1" dirty="0">
+                <a:solidFill>
+                  <a:srgbClr val="24395F"/>
+                </a:solidFill>
+                <a:latin typeface="맑은 고딕" pitchFamily="34" charset="0"/>
+                <a:ea typeface="맑은 고딕" pitchFamily="34" charset="-122"/>
+                <a:cs typeface="맑은 고딕" pitchFamily="34" charset="-120"/>
+              </a:rPr>
+              <a:t>① docx 업로드·파싱  →  ② 조항별 모호성 검출(유형·근거·재작성 예시)  →  ③ 해결(해석 입력)/넘어가기  →  ④ 해결 전·후 비교</a:t>
+            </a:r>
+            <a:endParaRPr lang="en-US" sz="1350" dirty="0"/>
           </a:p>
         </p:txBody>
       </p:sp>
@@ -5257,7 +6272,7 @@
                 <a:ea typeface="맑은 고딕" pitchFamily="34" charset="-122"/>
                 <a:cs typeface="맑은 고딕" pitchFamily="34" charset="-120"/>
               </a:rPr>
-              <a:t>핵심기능 ② · 설계</a:t>
+              <a:t>핵심기능 ① · 구현/테스트</a:t>
             </a:r>
             <a:endParaRPr lang="en-US" sz="1200" dirty="0"/>
           </a:p>
@@ -5296,7 +6311,7 @@
                 <a:ea typeface="맑은 고딕" pitchFamily="34" charset="-122"/>
                 <a:cs typeface="맑은 고딕" pitchFamily="34" charset="-120"/>
               </a:rPr>
-              <a:t>기능 요구사항 도출 — 하나의 기능 → UI·APP 명세</a:t>
+              <a:t>실제로 이렇게 구현·테스트했다</a:t>
             </a:r>
             <a:endParaRPr lang="en-US" sz="2800" dirty="0"/>
           </a:p>
@@ -5343,7 +6358,7 @@
       </p:sp>
       <p:pic>
         <p:nvPicPr>
-          <p:cNvPr id="5" name="Image 0" descr="/home/user/semes-superrookie/docs/img/design-fig2.png">    </p:cNvPr>
+          <p:cNvPr id="5" name="Image 0" descr="/home/user/semes-superrookie/docs/img/demo-ambiguity-react.png">    </p:cNvPr>
           <p:cNvPicPr>
             <a:picLocks noChangeAspect="1"/>
           </p:cNvPicPr>
@@ -5357,8 +6372,8 @@
         </p:blipFill>
         <p:spPr>
           <a:xfrm>
-            <a:off x="1064481" y="1234440"/>
-            <a:ext cx="10078278" cy="3566160"/>
+            <a:off x="7443769" y="1280160"/>
+            <a:ext cx="4040541" cy="5074920"/>
           </a:xfrm>
           <a:prstGeom prst="rect">
             <a:avLst/>
@@ -5373,8 +6388,8 @@
         </p:nvSpPr>
         <p:spPr>
           <a:xfrm>
-            <a:off x="640080" y="5029200"/>
-            <a:ext cx="10972800" cy="1280160"/>
+            <a:off x="566928" y="1508760"/>
+            <a:ext cx="6217920" cy="3200400"/>
           </a:xfrm>
           <a:prstGeom prst="rect">
             <a:avLst/>
@@ -5394,6 +6409,27 @@
               <a:buChar char="•"/>
             </a:pPr>
             <a:r>
+              <a:rPr lang="en-US" sz="1500" b="1" dirty="0">
+                <a:solidFill>
+                  <a:srgbClr val="C67F17"/>
+                </a:solidFill>
+                <a:latin typeface="맑은 고딕" pitchFamily="34" charset="0"/>
+                <a:ea typeface="맑은 고딕" pitchFamily="34" charset="-122"/>
+                <a:cs typeface="맑은 고딕" pitchFamily="34" charset="-120"/>
+              </a:rPr>
+              <a:t>docx 업로드 → 문단·표 파싱 (같은 프로세스의 앞단)</a:t>
+            </a:r>
+            <a:endParaRPr lang="en-US" sz="1500" dirty="0"/>
+          </a:p>
+          <a:p>
+            <a:pPr marL="177800" indent="-177800">
+              <a:spcAft>
+                <a:spcPts val="1100"/>
+              </a:spcAft>
+              <a:buSzPct val="100000"/>
+              <a:buChar char="•"/>
+            </a:pPr>
+            <a:r>
               <a:rPr lang="en-US" sz="1500" dirty="0">
                 <a:solidFill>
                   <a:srgbClr val="1F2733"/>
@@ -5402,7 +6438,7 @@
                 <a:ea typeface="맑은 고딕" pitchFamily="34" charset="-122"/>
                 <a:cs typeface="맑은 고딕" pitchFamily="34" charset="-120"/>
               </a:rPr>
-              <a:t>확정 요구사항 → 개발 단위 '기능(FEAT)'으로 분해</a:t>
+              <a:t>조항별로 모호 유형·근거·재작성 예시 표시</a:t>
             </a:r>
             <a:endParaRPr lang="en-US" sz="1500" dirty="0"/>
           </a:p>
@@ -5415,6 +6451,27 @@
               <a:buChar char="•"/>
             </a:pPr>
             <a:r>
+              <a:rPr lang="en-US" sz="1500" b="1" dirty="0">
+                <a:solidFill>
+                  <a:srgbClr val="C67F17"/>
+                </a:solidFill>
+                <a:latin typeface="맑은 고딕" pitchFamily="34" charset="0"/>
+                <a:ea typeface="맑은 고딕" pitchFamily="34" charset="-122"/>
+                <a:cs typeface="맑은 고딕" pitchFamily="34" charset="-120"/>
+              </a:rPr>
+              <a:t>해결하기(해석 입력) / 넘어가기 선택</a:t>
+            </a:r>
+            <a:endParaRPr lang="en-US" sz="1500" dirty="0"/>
+          </a:p>
+          <a:p>
+            <a:pPr marL="177800" indent="-177800">
+              <a:spcAft>
+                <a:spcPts val="1100"/>
+              </a:spcAft>
+              <a:buSzPct val="100000"/>
+              <a:buChar char="•"/>
+            </a:pPr>
+            <a:r>
               <a:rPr lang="en-US" sz="1500" dirty="0">
                 <a:solidFill>
                   <a:srgbClr val="1F2733"/>
@@ -5423,7 +6480,7 @@
                 <a:ea typeface="맑은 고딕" pitchFamily="34" charset="-122"/>
                 <a:cs typeface="맑은 고딕" pitchFamily="34" charset="-120"/>
               </a:rPr>
-              <a:t>AI가 UI / APP(backend) 구분 → 하나의 기능에서 여러 UI·APP 기능명세 파생</a:t>
+              <a:t>확정 시 '해결 전 / 후' 비교로 전환</a:t>
             </a:r>
             <a:endParaRPr lang="en-US" sz="1500" dirty="0"/>
           </a:p>
@@ -5444,9 +6501,138 @@
                 <a:ea typeface="맑은 고딕" pitchFamily="34" charset="-122"/>
                 <a:cs typeface="맑은 고딕" pitchFamily="34" charset="-120"/>
               </a:rPr>
-              <a:t>APP은 8개 모듈별로 관리(NATS 메시지), 상세에서 통신방식·subject·입출력 편집 가능</a:t>
+              <a:t>React + FastAPI + 로컬 LLM으로 실제 동작</a:t>
             </a:r>
             <a:endParaRPr lang="en-US" sz="1500" dirty="0"/>
+          </a:p>
+        </p:txBody>
+      </p:sp>
+      <p:sp>
+        <p:nvSpPr>
+          <p:cNvPr id="7" name="Shape 4"/>
+          <p:cNvSpPr/>
+          <p:nvPr/>
+        </p:nvSpPr>
+        <p:spPr>
+          <a:xfrm>
+            <a:off x="566928" y="4892040"/>
+            <a:ext cx="2651760" cy="475488"/>
+          </a:xfrm>
+          <a:prstGeom prst="roundRect">
+            <a:avLst>
+              <a:gd name="adj" fmla="val 19231"/>
+            </a:avLst>
+          </a:prstGeom>
+          <a:solidFill>
+            <a:srgbClr val="DDF0E4"/>
+          </a:solidFill>
+          <a:ln w="12700">
+            <a:solidFill>
+              <a:srgbClr val="2A8A57"/>
+            </a:solidFill>
+            <a:prstDash val="solid"/>
+          </a:ln>
+        </p:spPr>
+      </p:sp>
+      <p:sp>
+        <p:nvSpPr>
+          <p:cNvPr id="8" name="Text 5"/>
+          <p:cNvSpPr/>
+          <p:nvPr/>
+        </p:nvSpPr>
+        <p:spPr>
+          <a:xfrm>
+            <a:off x="566928" y="4892040"/>
+            <a:ext cx="2651760" cy="475488"/>
+          </a:xfrm>
+          <a:prstGeom prst="rect">
+            <a:avLst/>
+          </a:prstGeom>
+          <a:noFill/>
+          <a:ln/>
+        </p:spPr>
+        <p:txBody>
+          <a:bodyPr wrap="square" rtlCol="0" anchor="ctr"/>
+          <a:lstStyle/>
+          <a:p>
+            <a:pPr algn="ctr" indent="0" marL="0">
+              <a:buNone/>
+            </a:pPr>
+            <a:r>
+              <a:rPr lang="en-US" sz="1400" b="1" dirty="0">
+                <a:solidFill>
+                  <a:srgbClr val="2A8A57"/>
+                </a:solidFill>
+                <a:latin typeface="맑은 고딕" pitchFamily="34" charset="0"/>
+                <a:ea typeface="맑은 고딕" pitchFamily="34" charset="-122"/>
+                <a:cs typeface="맑은 고딕" pitchFamily="34" charset="-120"/>
+              </a:rPr>
+              <a:t>✔  테스트 완료</a:t>
+            </a:r>
+            <a:endParaRPr lang="en-US" sz="1400" dirty="0"/>
+          </a:p>
+        </p:txBody>
+      </p:sp>
+      <p:pic>
+        <p:nvPicPr>
+          <p:cNvPr id="9" name="Image 1" descr="/home/user/semes-superrookie/docs/img/demo-docx-upload.png">    </p:cNvPr>
+          <p:cNvPicPr>
+            <a:picLocks noChangeAspect="1"/>
+          </p:cNvPicPr>
+          <p:nvPr/>
+        </p:nvPicPr>
+        <p:blipFill>
+          <a:blip r:embed="rId2"/>
+          <a:stretch>
+            <a:fillRect/>
+          </a:stretch>
+        </p:blipFill>
+        <p:spPr>
+          <a:xfrm>
+            <a:off x="566928" y="5440680"/>
+            <a:ext cx="1005840" cy="1005840"/>
+          </a:xfrm>
+          <a:prstGeom prst="rect">
+            <a:avLst/>
+          </a:prstGeom>
+        </p:spPr>
+      </p:pic>
+      <p:sp>
+        <p:nvSpPr>
+          <p:cNvPr id="10" name="Text 6"/>
+          <p:cNvSpPr/>
+          <p:nvPr/>
+        </p:nvSpPr>
+        <p:spPr>
+          <a:xfrm>
+            <a:off x="1737360" y="5715000"/>
+            <a:ext cx="4114800" cy="365760"/>
+          </a:xfrm>
+          <a:prstGeom prst="rect">
+            <a:avLst/>
+          </a:prstGeom>
+          <a:noFill/>
+          <a:ln/>
+        </p:spPr>
+        <p:txBody>
+          <a:bodyPr wrap="square" rtlCol="0" anchor="ctr"/>
+          <a:lstStyle/>
+          <a:p>
+            <a:pPr indent="0" marL="0">
+              <a:buNone/>
+            </a:pPr>
+            <a:r>
+              <a:rPr lang="en-US" sz="1200" i="1" dirty="0">
+                <a:solidFill>
+                  <a:srgbClr val="63707E"/>
+                </a:solidFill>
+                <a:latin typeface="맑은 고딕" pitchFamily="34" charset="0"/>
+                <a:ea typeface="맑은 고딕" pitchFamily="34" charset="-122"/>
+                <a:cs typeface="맑은 고딕" pitchFamily="34" charset="-120"/>
+              </a:rPr>
+              <a:t>docx 업로드·파싱 화면</a:t>
+            </a:r>
+            <a:endParaRPr lang="en-US" sz="1200" dirty="0"/>
           </a:p>
         </p:txBody>
       </p:sp>
@@ -5515,7 +6701,7 @@
                 <a:ea typeface="맑은 고딕" pitchFamily="34" charset="-122"/>
                 <a:cs typeface="맑은 고딕" pitchFamily="34" charset="-120"/>
               </a:rPr>
-              <a:t>핵심기능 ③ · 설계</a:t>
+              <a:t>핵심기능 ② · 설계</a:t>
             </a:r>
             <a:endParaRPr lang="en-US" sz="1200" dirty="0"/>
           </a:p>
@@ -5554,7 +6740,7 @@
                 <a:ea typeface="맑은 고딕" pitchFamily="34" charset="-122"/>
                 <a:cs typeface="맑은 고딕" pitchFamily="34" charset="-120"/>
               </a:rPr>
-              <a:t>DB 변경 관리 — 최종 → 개인 스키마 동기화(pull)</a:t>
+              <a:t>기능 요구사항 도출 — 하나의 기능 → UI·APP 명세</a:t>
             </a:r>
             <a:endParaRPr lang="en-US" sz="2800" dirty="0"/>
           </a:p>
@@ -5599,94 +6785,9 @@
           </a:p>
         </p:txBody>
       </p:sp>
-      <p:sp>
-        <p:nvSpPr>
-          <p:cNvPr id="5" name="Text 3"/>
-          <p:cNvSpPr/>
-          <p:nvPr/>
-        </p:nvSpPr>
-        <p:spPr>
-          <a:xfrm>
-            <a:off x="566928" y="1234440"/>
-            <a:ext cx="11064240" cy="1554480"/>
-          </a:xfrm>
-          <a:prstGeom prst="rect">
-            <a:avLst/>
-          </a:prstGeom>
-          <a:noFill/>
-          <a:ln/>
-        </p:spPr>
-        <p:txBody>
-          <a:bodyPr wrap="square" rtlCol="0" anchor="t"/>
-          <a:lstStyle/>
-          <a:p>
-            <a:pPr marL="177800" indent="-177800">
-              <a:spcAft>
-                <a:spcPts val="800"/>
-              </a:spcAft>
-              <a:buSzPct val="100000"/>
-              <a:buChar char="•"/>
-            </a:pPr>
-            <a:r>
-              <a:rPr lang="en-US" sz="1500" b="1" dirty="0">
-                <a:solidFill>
-                  <a:srgbClr val="1F2733"/>
-                </a:solidFill>
-                <a:latin typeface="맑은 고딕" pitchFamily="34" charset="0"/>
-                <a:ea typeface="맑은 고딕" pitchFamily="34" charset="-122"/>
-                <a:cs typeface="맑은 고딕" pitchFamily="34" charset="-120"/>
-              </a:rPr>
-              <a:t>개인 스키마(개발·테스트) vs 최종 스키마(고객 배포 기준) — 모두 최종에 맞춰야 함</a:t>
-            </a:r>
-            <a:endParaRPr lang="en-US" sz="1500" dirty="0"/>
-          </a:p>
-          <a:p>
-            <a:pPr marL="177800" indent="-177800">
-              <a:spcAft>
-                <a:spcPts val="800"/>
-              </a:spcAft>
-              <a:buSzPct val="100000"/>
-              <a:buChar char="•"/>
-            </a:pPr>
-            <a:r>
-              <a:rPr lang="en-US" sz="1500" dirty="0">
-                <a:solidFill>
-                  <a:srgbClr val="1F2733"/>
-                </a:solidFill>
-                <a:latin typeface="맑은 고딕" pitchFamily="34" charset="0"/>
-                <a:ea typeface="맑은 고딕" pitchFamily="34" charset="-122"/>
-                <a:cs typeface="맑은 고딕" pitchFamily="34" charset="-120"/>
-              </a:rPr>
-              <a:t>최종이 바뀌면 변경점 감지·알림 → 클릭 한 번으로 내 스키마에 pull (git 모델)</a:t>
-            </a:r>
-            <a:endParaRPr lang="en-US" sz="1500" dirty="0"/>
-          </a:p>
-          <a:p>
-            <a:pPr marL="177800" indent="-177800">
-              <a:spcAft>
-                <a:spcPts val="800"/>
-              </a:spcAft>
-              <a:buSzPct val="100000"/>
-              <a:buChar char="•"/>
-            </a:pPr>
-            <a:r>
-              <a:rPr lang="en-US" sz="1500" dirty="0">
-                <a:solidFill>
-                  <a:srgbClr val="3C4855"/>
-                </a:solidFill>
-                <a:latin typeface="맑은 고딕" pitchFamily="34" charset="0"/>
-                <a:ea typeface="맑은 고딕" pitchFamily="34" charset="-122"/>
-                <a:cs typeface="맑은 고딕" pitchFamily="34" charset="-120"/>
-              </a:rPr>
-              <a:t>추가(컬럼·행)는 즉시 안전 적용 / 삭제·타입변경은 확인 후 적용 (데이터 손실 방지)</a:t>
-            </a:r>
-            <a:endParaRPr lang="en-US" sz="1500" dirty="0"/>
-          </a:p>
-        </p:txBody>
-      </p:sp>
       <p:pic>
         <p:nvPicPr>
-          <p:cNvPr id="6" name="Image 0" descr="/home/user/semes-superrookie/docs/img/design-fig4.png">    </p:cNvPr>
+          <p:cNvPr id="5" name="Image 0" descr="/home/user/semes-superrookie/docs/img/design-fig2.png">    </p:cNvPr>
           <p:cNvPicPr>
             <a:picLocks noChangeAspect="1"/>
           </p:cNvPicPr>
@@ -5700,14 +6801,99 @@
         </p:blipFill>
         <p:spPr>
           <a:xfrm>
-            <a:off x="640080" y="2899381"/>
-            <a:ext cx="10927080" cy="3208079"/>
+            <a:off x="1064481" y="1234440"/>
+            <a:ext cx="10078278" cy="3566160"/>
           </a:xfrm>
           <a:prstGeom prst="rect">
             <a:avLst/>
           </a:prstGeom>
         </p:spPr>
       </p:pic>
+      <p:sp>
+        <p:nvSpPr>
+          <p:cNvPr id="6" name="Text 3"/>
+          <p:cNvSpPr/>
+          <p:nvPr/>
+        </p:nvSpPr>
+        <p:spPr>
+          <a:xfrm>
+            <a:off x="640080" y="5029200"/>
+            <a:ext cx="10972800" cy="1280160"/>
+          </a:xfrm>
+          <a:prstGeom prst="rect">
+            <a:avLst/>
+          </a:prstGeom>
+          <a:noFill/>
+          <a:ln/>
+        </p:spPr>
+        <p:txBody>
+          <a:bodyPr wrap="square" rtlCol="0" anchor="t"/>
+          <a:lstStyle/>
+          <a:p>
+            <a:pPr marL="177800" indent="-177800">
+              <a:spcAft>
+                <a:spcPts val="800"/>
+              </a:spcAft>
+              <a:buSzPct val="100000"/>
+              <a:buChar char="•"/>
+            </a:pPr>
+            <a:r>
+              <a:rPr lang="en-US" sz="1500" dirty="0">
+                <a:solidFill>
+                  <a:srgbClr val="1F2733"/>
+                </a:solidFill>
+                <a:latin typeface="맑은 고딕" pitchFamily="34" charset="0"/>
+                <a:ea typeface="맑은 고딕" pitchFamily="34" charset="-122"/>
+                <a:cs typeface="맑은 고딕" pitchFamily="34" charset="-120"/>
+              </a:rPr>
+              <a:t>확정 요구사항 → 개발 단위 '기능(FEAT)'으로 분해</a:t>
+            </a:r>
+            <a:endParaRPr lang="en-US" sz="1500" dirty="0"/>
+          </a:p>
+          <a:p>
+            <a:pPr marL="177800" indent="-177800">
+              <a:spcAft>
+                <a:spcPts val="800"/>
+              </a:spcAft>
+              <a:buSzPct val="100000"/>
+              <a:buChar char="•"/>
+            </a:pPr>
+            <a:r>
+              <a:rPr lang="en-US" sz="1500" dirty="0">
+                <a:solidFill>
+                  <a:srgbClr val="1F2733"/>
+                </a:solidFill>
+                <a:latin typeface="맑은 고딕" pitchFamily="34" charset="0"/>
+                <a:ea typeface="맑은 고딕" pitchFamily="34" charset="-122"/>
+                <a:cs typeface="맑은 고딕" pitchFamily="34" charset="-120"/>
+              </a:rPr>
+              <a:t>AI가 UI / APP(backend) 구분 → 하나의 기능에서 여러 UI·APP 기능명세 파생</a:t>
+            </a:r>
+            <a:endParaRPr lang="en-US" sz="1500" dirty="0"/>
+          </a:p>
+          <a:p>
+            <a:pPr marL="177800" indent="-177800">
+              <a:spcAft>
+                <a:spcPts val="800"/>
+              </a:spcAft>
+              <a:buSzPct val="100000"/>
+              <a:buChar char="•"/>
+            </a:pPr>
+            <a:r>
+              <a:rPr lang="en-US" sz="1500" dirty="0">
+                <a:solidFill>
+                  <a:srgbClr val="3C4855"/>
+                </a:solidFill>
+                <a:latin typeface="맑은 고딕" pitchFamily="34" charset="0"/>
+                <a:ea typeface="맑은 고딕" pitchFamily="34" charset="-122"/>
+                <a:cs typeface="맑은 고딕" pitchFamily="34" charset="-120"/>
+              </a:rPr>
+              <a:t>APP은 8개 모듈별로 관리(NATS 메시지), 상세에서 통신방식·subject·입출력 편집 가능</a:t>
+            </a:r>
+            <a:endParaRPr lang="en-US" sz="1500" dirty="0"/>
+          </a:p>
+        </p:txBody>
+      </p:sp>
     </p:spTree>
   </p:cSld>
   <p:clrMapOvr>
@@ -5773,7 +6959,7 @@
                 <a:ea typeface="맑은 고딕" pitchFamily="34" charset="-122"/>
                 <a:cs typeface="맑은 고딕" pitchFamily="34" charset="-120"/>
               </a:rPr>
-              <a:t>FRONTEND</a:t>
+              <a:t>핵심기능 ③ · 설계</a:t>
             </a:r>
             <a:endParaRPr lang="en-US" sz="1200" dirty="0"/>
           </a:p>
@@ -5812,7 +6998,7 @@
                 <a:ea typeface="맑은 고딕" pitchFamily="34" charset="-122"/>
                 <a:cs typeface="맑은 고딕" pitchFamily="34" charset="-120"/>
               </a:rPr>
-              <a:t>프론트엔드 — React 선택 이유 &amp; 이슈</a:t>
+              <a:t>DB 변경 관리 — 최종 → 개인 스키마 동기화(pull)</a:t>
             </a:r>
             <a:endParaRPr lang="en-US" sz="2800" dirty="0"/>
           </a:p>
@@ -5859,87 +7045,14 @@
       </p:sp>
       <p:sp>
         <p:nvSpPr>
-          <p:cNvPr id="5" name="Shape 3"/>
-          <p:cNvSpPr/>
-          <p:nvPr/>
-        </p:nvSpPr>
-        <p:spPr>
-          <a:xfrm>
-            <a:off x="566928" y="1463040"/>
-            <a:ext cx="5486400" cy="4114800"/>
-          </a:xfrm>
-          <a:prstGeom prst="roundRect">
-            <a:avLst>
-              <a:gd name="adj" fmla="val 1778"/>
-            </a:avLst>
-          </a:prstGeom>
-          <a:solidFill>
-            <a:srgbClr val="FFFFFF"/>
-          </a:solidFill>
-          <a:ln w="12700">
-            <a:solidFill>
-              <a:srgbClr val="DCE3EB"/>
-            </a:solidFill>
-            <a:prstDash val="solid"/>
-          </a:ln>
-          <a:effectLst>
-            <a:outerShdw sx="100000" sy="100000" kx="0" ky="0" algn="bl" rotWithShape="0" blurRad="76200" dist="25400" dir="5400000">
-              <a:srgbClr val="B9C3CE">
-                <a:alpha val="35000"/>
-              </a:srgbClr>
-            </a:outerShdw>
-          </a:effectLst>
-        </p:spPr>
-      </p:sp>
-      <p:sp>
-        <p:nvSpPr>
-          <p:cNvPr id="6" name="Text 4"/>
-          <p:cNvSpPr/>
-          <p:nvPr/>
-        </p:nvSpPr>
-        <p:spPr>
-          <a:xfrm>
-            <a:off x="822960" y="1645920"/>
-            <a:ext cx="5029200" cy="457200"/>
-          </a:xfrm>
-          <a:prstGeom prst="rect">
-            <a:avLst/>
-          </a:prstGeom>
-          <a:noFill/>
-          <a:ln/>
-        </p:spPr>
-        <p:txBody>
-          <a:bodyPr wrap="square" rtlCol="0" anchor="ctr"/>
-          <a:lstStyle/>
-          <a:p>
-            <a:pPr indent="0" marL="0">
-              <a:buNone/>
-            </a:pPr>
-            <a:r>
-              <a:rPr lang="en-US" sz="1900" b="1" dirty="0">
-                <a:solidFill>
-                  <a:srgbClr val="2C7A8C"/>
-                </a:solidFill>
-                <a:latin typeface="맑은 고딕" pitchFamily="34" charset="0"/>
-                <a:ea typeface="맑은 고딕" pitchFamily="34" charset="-122"/>
-                <a:cs typeface="맑은 고딕" pitchFamily="34" charset="-120"/>
-              </a:rPr>
-              <a:t>장점</a:t>
-            </a:r>
-            <a:endParaRPr lang="en-US" sz="1900" dirty="0"/>
-          </a:p>
-        </p:txBody>
-      </p:sp>
-      <p:sp>
-        <p:nvSpPr>
-          <p:cNvPr id="7" name="Text 5"/>
-          <p:cNvSpPr/>
-          <p:nvPr/>
-        </p:nvSpPr>
-        <p:spPr>
-          <a:xfrm>
-            <a:off x="868680" y="2194560"/>
-            <a:ext cx="4937760" cy="3108960"/>
+          <p:cNvPr id="5" name="Text 3"/>
+          <p:cNvSpPr/>
+          <p:nvPr/>
+        </p:nvSpPr>
+        <p:spPr>
+          <a:xfrm>
+            <a:off x="566928" y="1234440"/>
+            <a:ext cx="11064240" cy="1554480"/>
           </a:xfrm>
           <a:prstGeom prst="rect">
             <a:avLst/>
@@ -5959,7 +7072,7 @@
               <a:buChar char="•"/>
             </a:pPr>
             <a:r>
-              <a:rPr lang="en-US" sz="1500" dirty="0">
+              <a:rPr lang="en-US" sz="1500" b="1" dirty="0">
                 <a:solidFill>
                   <a:srgbClr val="1F2733"/>
                 </a:solidFill>
@@ -5967,7 +7080,7 @@
                 <a:ea typeface="맑은 고딕" pitchFamily="34" charset="-122"/>
                 <a:cs typeface="맑은 고딕" pitchFamily="34" charset="-120"/>
               </a:rPr>
-              <a:t>컴포넌트 기반 → 화면 재사용·유지보수 쉬움</a:t>
+              <a:t>개인 스키마(개발·테스트) vs 최종 스키마(고객 배포 기준) — 모두 최종에 맞춰야 함</a:t>
             </a:r>
             <a:endParaRPr lang="en-US" sz="1500" dirty="0"/>
           </a:p>
@@ -5988,7 +7101,7 @@
                 <a:ea typeface="맑은 고딕" pitchFamily="34" charset="-122"/>
                 <a:cs typeface="맑은 고딕" pitchFamily="34" charset="-120"/>
               </a:rPr>
-              <a:t>상태관리로 검출·해결 상태 즉시 반영 (인터랙티브)</a:t>
+              <a:t>최종이 바뀌면 변경점 감지·알림 → 클릭 한 번으로 내 스키마에 pull (git 모델)</a:t>
             </a:r>
             <a:endParaRPr lang="en-US" sz="1500" dirty="0"/>
           </a:p>
@@ -6003,197 +7116,42 @@
             <a:r>
               <a:rPr lang="en-US" sz="1500" dirty="0">
                 <a:solidFill>
-                  <a:srgbClr val="1F2733"/>
-                </a:solidFill>
-                <a:latin typeface="맑은 고딕" pitchFamily="34" charset="0"/>
-                <a:ea typeface="맑은 고딕" pitchFamily="34" charset="-122"/>
-                <a:cs typeface="맑은 고딕" pitchFamily="34" charset="-120"/>
-              </a:rPr>
-              <a:t>표준·생태계 넓음, 설계서 기술스택과 일치</a:t>
+                  <a:srgbClr val="3C4855"/>
+                </a:solidFill>
+                <a:latin typeface="맑은 고딕" pitchFamily="34" charset="0"/>
+                <a:ea typeface="맑은 고딕" pitchFamily="34" charset="-122"/>
+                <a:cs typeface="맑은 고딕" pitchFamily="34" charset="-120"/>
+              </a:rPr>
+              <a:t>추가(컬럼·행)는 즉시 안전 적용 / 삭제·타입변경은 확인 후 적용 (데이터 손실 방지)</a:t>
             </a:r>
             <a:endParaRPr lang="en-US" sz="1500" dirty="0"/>
           </a:p>
         </p:txBody>
       </p:sp>
-      <p:sp>
-        <p:nvSpPr>
-          <p:cNvPr id="8" name="Shape 6"/>
-          <p:cNvSpPr/>
-          <p:nvPr/>
-        </p:nvSpPr>
-        <p:spPr>
-          <a:xfrm>
-            <a:off x="6309360" y="1463040"/>
-            <a:ext cx="5330952" cy="4114800"/>
-          </a:xfrm>
-          <a:prstGeom prst="roundRect">
-            <a:avLst>
-              <a:gd name="adj" fmla="val 1778"/>
-            </a:avLst>
-          </a:prstGeom>
-          <a:solidFill>
-            <a:srgbClr val="FDF4E7"/>
-          </a:solidFill>
-          <a:ln w="12700">
-            <a:solidFill>
-              <a:srgbClr val="DCE3EB"/>
-            </a:solidFill>
-            <a:prstDash val="solid"/>
-          </a:ln>
-          <a:effectLst>
-            <a:outerShdw sx="100000" sy="100000" kx="0" ky="0" algn="bl" rotWithShape="0" blurRad="76200" dist="25400" dir="5400000">
-              <a:srgbClr val="B9C3CE">
-                <a:alpha val="35000"/>
-              </a:srgbClr>
-            </a:outerShdw>
-          </a:effectLst>
-        </p:spPr>
-      </p:sp>
-      <p:sp>
-        <p:nvSpPr>
-          <p:cNvPr id="9" name="Text 7"/>
-          <p:cNvSpPr/>
-          <p:nvPr/>
-        </p:nvSpPr>
-        <p:spPr>
-          <a:xfrm>
-            <a:off x="6583680" y="1645920"/>
-            <a:ext cx="4846320" cy="457200"/>
-          </a:xfrm>
-          <a:prstGeom prst="rect">
-            <a:avLst/>
-          </a:prstGeom>
-          <a:noFill/>
-          <a:ln/>
-        </p:spPr>
-        <p:txBody>
-          <a:bodyPr wrap="square" rtlCol="0" anchor="ctr"/>
-          <a:lstStyle/>
-          <a:p>
-            <a:pPr indent="0" marL="0">
-              <a:buNone/>
-            </a:pPr>
-            <a:r>
-              <a:rPr lang="en-US" sz="1900" b="1" dirty="0">
-                <a:solidFill>
-                  <a:srgbClr val="C67F17"/>
-                </a:solidFill>
-                <a:latin typeface="맑은 고딕" pitchFamily="34" charset="0"/>
-                <a:ea typeface="맑은 고딕" pitchFamily="34" charset="-122"/>
-                <a:cs typeface="맑은 고딕" pitchFamily="34" charset="-120"/>
-              </a:rPr>
-              <a:t>이슈 (고민)</a:t>
-            </a:r>
-            <a:endParaRPr lang="en-US" sz="1900" dirty="0"/>
-          </a:p>
-        </p:txBody>
-      </p:sp>
-      <p:sp>
-        <p:nvSpPr>
-          <p:cNvPr id="10" name="Text 8"/>
-          <p:cNvSpPr/>
-          <p:nvPr/>
-        </p:nvSpPr>
-        <p:spPr>
-          <a:xfrm>
-            <a:off x="6583680" y="2194560"/>
-            <a:ext cx="4754880" cy="3108960"/>
-          </a:xfrm>
-          <a:prstGeom prst="rect">
-            <a:avLst/>
-          </a:prstGeom>
-          <a:noFill/>
-          <a:ln/>
-        </p:spPr>
-        <p:txBody>
-          <a:bodyPr wrap="square" rtlCol="0" anchor="t"/>
-          <a:lstStyle/>
-          <a:p>
-            <a:pPr marL="177800" indent="-177800">
-              <a:spcAft>
-                <a:spcPts val="800"/>
-              </a:spcAft>
-              <a:buSzPct val="100000"/>
-              <a:buChar char="•"/>
-            </a:pPr>
-            <a:r>
-              <a:rPr lang="en-US" sz="1500" b="1" dirty="0">
-                <a:solidFill>
-                  <a:srgbClr val="1F2733"/>
-                </a:solidFill>
-                <a:latin typeface="맑은 고딕" pitchFamily="34" charset="0"/>
-                <a:ea typeface="맑은 고딕" pitchFamily="34" charset="-122"/>
-                <a:cs typeface="맑은 고딕" pitchFamily="34" charset="-120"/>
-              </a:rPr>
-              <a:t>빌드에 필요한 npm install이 사내 프록시 인증서로 막힘</a:t>
-            </a:r>
-            <a:endParaRPr lang="en-US" sz="1500" dirty="0"/>
-          </a:p>
-          <a:p>
-            <a:pPr marL="177800" indent="-177800">
-              <a:spcAft>
-                <a:spcPts val="800"/>
-              </a:spcAft>
-              <a:buSzPct val="100000"/>
-              <a:buChar char="•"/>
-            </a:pPr>
-            <a:r>
-              <a:rPr lang="en-US" sz="1300" dirty="0">
-                <a:solidFill>
-                  <a:srgbClr val="63707E"/>
-                </a:solidFill>
-                <a:latin typeface="맑은 고딕" pitchFamily="34" charset="0"/>
-                <a:ea typeface="맑은 고딕" pitchFamily="34" charset="-122"/>
-                <a:cs typeface="맑은 고딕" pitchFamily="34" charset="-120"/>
-              </a:rPr>
-              <a:t>( UNABLE_TO_VERIFY_LEAF_SIGNATURE )</a:t>
-            </a:r>
-            <a:endParaRPr lang="en-US" sz="1500" dirty="0"/>
-          </a:p>
-          <a:p>
-            <a:pPr marL="177800" indent="-177800">
-              <a:spcAft>
-                <a:spcPts val="1200"/>
-              </a:spcAft>
-              <a:buSzPct val="100000"/>
-              <a:buChar char="•"/>
-            </a:pPr>
-            <a:r>
-              <a:rPr lang="en-US" sz="1500" dirty="0">
-                <a:solidFill>
-                  <a:srgbClr val="1F2733"/>
-                </a:solidFill>
-                <a:latin typeface="맑은 고딕" pitchFamily="34" charset="0"/>
-                <a:ea typeface="맑은 고딕" pitchFamily="34" charset="-122"/>
-                <a:cs typeface="맑은 고딕" pitchFamily="34" charset="-120"/>
-              </a:rPr>
-              <a:t>보안이라 함부로 설정 변경도 어려움</a:t>
-            </a:r>
-            <a:endParaRPr lang="en-US" sz="1500" dirty="0"/>
-          </a:p>
-          <a:p>
-            <a:pPr marL="177800" indent="-177800">
-              <a:spcAft>
-                <a:spcPts val="800"/>
-              </a:spcAft>
-              <a:buSzPct val="100000"/>
-              <a:buChar char="•"/>
-            </a:pPr>
-            <a:r>
-              <a:rPr lang="en-US" sz="1500" dirty="0">
-                <a:solidFill>
-                  <a:srgbClr val="2A8A57"/>
-                </a:solidFill>
-                <a:latin typeface="맑은 고딕" pitchFamily="34" charset="0"/>
-                <a:ea typeface="맑은 고딕" pitchFamily="34" charset="-122"/>
-                <a:cs typeface="맑은 고딕" pitchFamily="34" charset="-120"/>
-              </a:rPr>
-              <a:t>임시 대응: 미리 빌드한 결과물(dist)만 넣어 실행 → npm 없이 구동</a:t>
-            </a:r>
-            <a:endParaRPr lang="en-US" sz="1500" dirty="0"/>
-          </a:p>
-        </p:txBody>
-      </p:sp>
+      <p:pic>
+        <p:nvPicPr>
+          <p:cNvPr id="6" name="Image 0" descr="/home/user/semes-superrookie/docs/img/design-fig4.png">    </p:cNvPr>
+          <p:cNvPicPr>
+            <a:picLocks noChangeAspect="1"/>
+          </p:cNvPicPr>
+          <p:nvPr/>
+        </p:nvPicPr>
+        <p:blipFill>
+          <a:blip r:embed="rId1"/>
+          <a:stretch>
+            <a:fillRect/>
+          </a:stretch>
+        </p:blipFill>
+        <p:spPr>
+          <a:xfrm>
+            <a:off x="640080" y="2899381"/>
+            <a:ext cx="10927080" cy="3208079"/>
+          </a:xfrm>
+          <a:prstGeom prst="rect">
+            <a:avLst/>
+          </a:prstGeom>
+        </p:spPr>
+      </p:pic>
     </p:spTree>
   </p:cSld>
   <p:clrMapOvr>

--- a/docs/진행공유_요구사항자동화.pptx
+++ b/docs/진행공유_요구사항자동화.pptx
@@ -15,9 +15,11 @@
     <p:sldId id="263" r:id="rId9"/>
     <p:sldId id="264" r:id="rId10"/>
     <p:sldId id="265" r:id="rId11"/>
+    <p:sldId id="266" r:id="rId12"/>
+    <p:sldId id="267" r:id="rId13"/>
   </p:sldIdLst>
   <p:notesMasterIdLst>
-    <p:notesMasterId r:id="rId12"/>
+    <p:notesMasterId r:id="rId14"/>
   </p:notesMasterIdLst>
   <p:sldSz cx="12192000" cy="6858000"/>
   <p:notesSz cx="6858000" cy="12192000"/>
@@ -623,6 +625,182 @@
             <a:fld id="{F7021451-1387-4CA6-816F-3879F97B5CBC}" type="slidenum">
               <a:rPr lang="en-US"/>
               <a:t>10</a:t>
+            </a:fld>
+            <a:endParaRPr lang="en-US"/>
+          </a:p>
+        </p:txBody>
+      </p:sp>
+    </p:spTree>
+    <p:extLst>
+      <p:ext uri="{BB962C8B-B14F-4D97-AF65-F5344CB8AC3E}">
+        <p14:creationId xmlns:p14="http://schemas.microsoft.com/office/powerpoint/2010/main" val="1024086991"/>
+      </p:ext>
+    </p:extLst>
+  </p:cSld>
+  <p:clrMapOvr>
+    <a:masterClrMapping/>
+  </p:clrMapOvr>
+</p:notes>
+</file>
+
+<file path=ppt/notesSlides/notesSlide11.xml><?xml version="1.0" encoding="utf-8"?>
+<p:notes xmlns:a="http://schemas.openxmlformats.org/drawingml/2006/main" xmlns:r="http://schemas.openxmlformats.org/officeDocument/2006/relationships" xmlns:p="http://schemas.openxmlformats.org/presentationml/2006/main">
+  <p:cSld>
+    <p:spTree>
+      <p:nvGrpSpPr>
+        <p:cNvPr id="1" name=""/>
+        <p:cNvGrpSpPr/>
+        <p:nvPr/>
+      </p:nvGrpSpPr>
+      <p:grpSpPr>
+        <a:xfrm>
+          <a:off x="0" y="0"/>
+          <a:ext cx="0" cy="0"/>
+          <a:chOff x="0" y="0"/>
+          <a:chExt cx="0" cy="0"/>
+        </a:xfrm>
+      </p:grpSpPr>
+      <p:sp>
+        <p:nvSpPr>
+          <p:cNvPr id="2" name="Slide Image Placeholder 1"/>
+          <p:cNvSpPr>
+            <a:spLocks noGrp="1" noRot="1" noChangeAspect="1"/>
+          </p:cNvSpPr>
+          <p:nvPr>
+            <p:ph type="sldImg"/>
+          </p:nvPr>
+        </p:nvSpPr>
+        <p:spPr/>
+      </p:sp>
+      <p:sp>
+        <p:nvSpPr>
+          <p:cNvPr id="3" name="Notes Placeholder 2"/>
+          <p:cNvSpPr>
+            <a:spLocks noGrp="1"/>
+          </p:cNvSpPr>
+          <p:nvPr>
+            <p:ph type="body" idx="1"/>
+          </p:nvPr>
+        </p:nvSpPr>
+        <p:spPr/>
+        <p:txBody>
+          <a:bodyPr/>
+          <a:lstStyle/>
+          <a:p>
+            <a:r>
+              <a:rPr lang="en-US" dirty="0"/>
+              <a:t/>
+            </a:r>
+            <a:endParaRPr lang="en-US" dirty="0"/>
+          </a:p>
+        </p:txBody>
+      </p:sp>
+      <p:sp>
+        <p:nvSpPr>
+          <p:cNvPr id="4" name="Slide Number Placeholder 3"/>
+          <p:cNvSpPr>
+            <a:spLocks noGrp="1"/>
+          </p:cNvSpPr>
+          <p:nvPr>
+            <p:ph type="sldNum" sz="quarter" idx="10"/>
+          </p:nvPr>
+        </p:nvSpPr>
+        <p:spPr/>
+        <p:txBody>
+          <a:bodyPr/>
+          <a:lstStyle/>
+          <a:p>
+            <a:fld id="{F7021451-1387-4CA6-816F-3879F97B5CBC}" type="slidenum">
+              <a:rPr lang="en-US"/>
+              <a:t>11</a:t>
+            </a:fld>
+            <a:endParaRPr lang="en-US"/>
+          </a:p>
+        </p:txBody>
+      </p:sp>
+    </p:spTree>
+    <p:extLst>
+      <p:ext uri="{BB962C8B-B14F-4D97-AF65-F5344CB8AC3E}">
+        <p14:creationId xmlns:p14="http://schemas.microsoft.com/office/powerpoint/2010/main" val="1024086991"/>
+      </p:ext>
+    </p:extLst>
+  </p:cSld>
+  <p:clrMapOvr>
+    <a:masterClrMapping/>
+  </p:clrMapOvr>
+</p:notes>
+</file>
+
+<file path=ppt/notesSlides/notesSlide12.xml><?xml version="1.0" encoding="utf-8"?>
+<p:notes xmlns:a="http://schemas.openxmlformats.org/drawingml/2006/main" xmlns:r="http://schemas.openxmlformats.org/officeDocument/2006/relationships" xmlns:p="http://schemas.openxmlformats.org/presentationml/2006/main">
+  <p:cSld>
+    <p:spTree>
+      <p:nvGrpSpPr>
+        <p:cNvPr id="1" name=""/>
+        <p:cNvGrpSpPr/>
+        <p:nvPr/>
+      </p:nvGrpSpPr>
+      <p:grpSpPr>
+        <a:xfrm>
+          <a:off x="0" y="0"/>
+          <a:ext cx="0" cy="0"/>
+          <a:chOff x="0" y="0"/>
+          <a:chExt cx="0" cy="0"/>
+        </a:xfrm>
+      </p:grpSpPr>
+      <p:sp>
+        <p:nvSpPr>
+          <p:cNvPr id="2" name="Slide Image Placeholder 1"/>
+          <p:cNvSpPr>
+            <a:spLocks noGrp="1" noRot="1" noChangeAspect="1"/>
+          </p:cNvSpPr>
+          <p:nvPr>
+            <p:ph type="sldImg"/>
+          </p:nvPr>
+        </p:nvSpPr>
+        <p:spPr/>
+      </p:sp>
+      <p:sp>
+        <p:nvSpPr>
+          <p:cNvPr id="3" name="Notes Placeholder 2"/>
+          <p:cNvSpPr>
+            <a:spLocks noGrp="1"/>
+          </p:cNvSpPr>
+          <p:nvPr>
+            <p:ph type="body" idx="1"/>
+          </p:nvPr>
+        </p:nvSpPr>
+        <p:spPr/>
+        <p:txBody>
+          <a:bodyPr/>
+          <a:lstStyle/>
+          <a:p>
+            <a:r>
+              <a:rPr lang="en-US" dirty="0"/>
+              <a:t/>
+            </a:r>
+            <a:endParaRPr lang="en-US" dirty="0"/>
+          </a:p>
+        </p:txBody>
+      </p:sp>
+      <p:sp>
+        <p:nvSpPr>
+          <p:cNvPr id="4" name="Slide Number Placeholder 3"/>
+          <p:cNvSpPr>
+            <a:spLocks noGrp="1"/>
+          </p:cNvSpPr>
+          <p:nvPr>
+            <p:ph type="sldNum" sz="quarter" idx="10"/>
+          </p:nvPr>
+        </p:nvSpPr>
+        <p:spPr/>
+        <p:txBody>
+          <a:bodyPr/>
+          <a:lstStyle/>
+          <a:p>
+            <a:fld id="{F7021451-1387-4CA6-816F-3879F97B5CBC}" type="slidenum">
+              <a:rPr lang="en-US"/>
+              <a:t>12</a:t>
             </a:fld>
             <a:endParaRPr lang="en-US"/>
           </a:p>
@@ -1962,6 +2140,1149 @@
                 <a:ea typeface="맑은 고딕" pitchFamily="34" charset="-122"/>
                 <a:cs typeface="맑은 고딕" pitchFamily="34" charset="-120"/>
               </a:rPr>
+              <a:t>AI</a:t>
+            </a:r>
+            <a:endParaRPr lang="en-US" sz="1200" dirty="0"/>
+          </a:p>
+        </p:txBody>
+      </p:sp>
+      <p:sp>
+        <p:nvSpPr>
+          <p:cNvPr id="3" name="Text 1"/>
+          <p:cNvSpPr/>
+          <p:nvPr/>
+        </p:nvSpPr>
+        <p:spPr>
+          <a:xfrm>
+            <a:off x="566928" y="749808"/>
+            <a:ext cx="10515600" cy="640080"/>
+          </a:xfrm>
+          <a:prstGeom prst="rect">
+            <a:avLst/>
+          </a:prstGeom>
+          <a:noFill/>
+          <a:ln/>
+        </p:spPr>
+        <p:txBody>
+          <a:bodyPr wrap="square" lIns="0" tIns="0" rIns="0" bIns="0" rtlCol="0" anchor="ctr"/>
+          <a:lstStyle/>
+          <a:p>
+            <a:pPr indent="0" marL="0">
+              <a:buNone/>
+            </a:pPr>
+            <a:r>
+              <a:rPr lang="en-US" sz="3000" b="1" dirty="0">
+                <a:solidFill>
+                  <a:srgbClr val="1F2937"/>
+                </a:solidFill>
+                <a:latin typeface="맑은 고딕" pitchFamily="34" charset="0"/>
+                <a:ea typeface="맑은 고딕" pitchFamily="34" charset="-122"/>
+                <a:cs typeface="맑은 고딕" pitchFamily="34" charset="-120"/>
+              </a:rPr>
+              <a:t>AI — 두 엔진 비교</a:t>
+            </a:r>
+            <a:endParaRPr lang="en-US" sz="3000" dirty="0"/>
+          </a:p>
+        </p:txBody>
+      </p:sp>
+      <p:sp>
+        <p:nvSpPr>
+          <p:cNvPr id="4" name="Shape 2"/>
+          <p:cNvSpPr/>
+          <p:nvPr/>
+        </p:nvSpPr>
+        <p:spPr>
+          <a:xfrm>
+            <a:off x="566928" y="1783080"/>
+            <a:ext cx="5440680" cy="2697480"/>
+          </a:xfrm>
+          <a:prstGeom prst="roundRect">
+            <a:avLst>
+              <a:gd name="adj" fmla="val 3390"/>
+            </a:avLst>
+          </a:prstGeom>
+          <a:solidFill>
+            <a:srgbClr val="EEF2FF"/>
+          </a:solidFill>
+          <a:ln w="12700">
+            <a:solidFill>
+              <a:srgbClr val="C7D2FE"/>
+            </a:solidFill>
+            <a:prstDash val="solid"/>
+          </a:ln>
+        </p:spPr>
+      </p:sp>
+      <p:sp>
+        <p:nvSpPr>
+          <p:cNvPr id="5" name="Text 3"/>
+          <p:cNvSpPr/>
+          <p:nvPr/>
+        </p:nvSpPr>
+        <p:spPr>
+          <a:xfrm>
+            <a:off x="886968" y="2011680"/>
+            <a:ext cx="4846320" cy="457200"/>
+          </a:xfrm>
+          <a:prstGeom prst="rect">
+            <a:avLst/>
+          </a:prstGeom>
+          <a:noFill/>
+          <a:ln/>
+        </p:spPr>
+        <p:txBody>
+          <a:bodyPr wrap="square" lIns="0" tIns="0" rIns="0" bIns="0" rtlCol="0" anchor="ctr"/>
+          <a:lstStyle/>
+          <a:p>
+            <a:pPr indent="0" marL="0">
+              <a:buNone/>
+            </a:pPr>
+            <a:r>
+              <a:rPr lang="en-US" sz="1900" b="1" dirty="0">
+                <a:solidFill>
+                  <a:srgbClr val="6366F1"/>
+                </a:solidFill>
+                <a:latin typeface="맑은 고딕" pitchFamily="34" charset="0"/>
+                <a:ea typeface="맑은 고딕" pitchFamily="34" charset="-122"/>
+                <a:cs typeface="맑은 고딕" pitchFamily="34" charset="-120"/>
+              </a:rPr>
+              <a:t>로컬 Qwen3-8B</a:t>
+            </a:r>
+            <a:endParaRPr lang="en-US" sz="1900" dirty="0"/>
+          </a:p>
+        </p:txBody>
+      </p:sp>
+      <p:sp>
+        <p:nvSpPr>
+          <p:cNvPr id="6" name="Text 4"/>
+          <p:cNvSpPr/>
+          <p:nvPr/>
+        </p:nvSpPr>
+        <p:spPr>
+          <a:xfrm>
+            <a:off x="932688" y="2606040"/>
+            <a:ext cx="4754880" cy="1737360"/>
+          </a:xfrm>
+          <a:prstGeom prst="rect">
+            <a:avLst/>
+          </a:prstGeom>
+          <a:noFill/>
+          <a:ln/>
+        </p:spPr>
+        <p:txBody>
+          <a:bodyPr wrap="square" lIns="0" tIns="0" rIns="0" bIns="0" rtlCol="0" anchor="ctr"/>
+          <a:lstStyle/>
+          <a:p>
+            <a:pPr marL="342900" indent="-342900">
+              <a:spcAft>
+                <a:spcPts val="700"/>
+              </a:spcAft>
+              <a:buSzPct val="100000"/>
+              <a:buChar char="•"/>
+            </a:pPr>
+            <a:r>
+              <a:rPr lang="en-US" sz="1300" dirty="0">
+                <a:solidFill>
+                  <a:srgbClr val="1F2937"/>
+                </a:solidFill>
+                <a:latin typeface="맑은 고딕" pitchFamily="34" charset="0"/>
+                <a:ea typeface="맑은 고딕" pitchFamily="34" charset="-122"/>
+                <a:cs typeface="맑은 고딕" pitchFamily="34" charset="-120"/>
+              </a:rPr>
+              <a:t>내 워크스테이션(P4000 8GB)에서 직접</a:t>
+            </a:r>
+            <a:endParaRPr lang="en-US" sz="1300" dirty="0"/>
+          </a:p>
+          <a:p>
+            <a:pPr marL="342900" indent="-342900">
+              <a:spcAft>
+                <a:spcPts val="700"/>
+              </a:spcAft>
+              <a:buSzPct val="100000"/>
+              <a:buChar char="•"/>
+            </a:pPr>
+            <a:r>
+              <a:rPr lang="en-US" sz="1300" dirty="0">
+                <a:solidFill>
+                  <a:srgbClr val="1F2937"/>
+                </a:solidFill>
+                <a:latin typeface="맑은 고딕" pitchFamily="34" charset="0"/>
+                <a:ea typeface="맑은 고딕" pitchFamily="34" charset="-122"/>
+                <a:cs typeface="맑은 고딕" pitchFamily="34" charset="-120"/>
+              </a:rPr>
+              <a:t>8B 모델 · GGUF 양자화 Q5_K_M(≈5.85GB)</a:t>
+            </a:r>
+            <a:endParaRPr lang="en-US" sz="1300" dirty="0"/>
+          </a:p>
+          <a:p>
+            <a:pPr marL="342900" indent="-342900">
+              <a:spcAft>
+                <a:spcPts val="700"/>
+              </a:spcAft>
+              <a:buSzPct val="100000"/>
+              <a:buChar char="•"/>
+            </a:pPr>
+            <a:r>
+              <a:rPr lang="en-US" sz="1300" dirty="0">
+                <a:solidFill>
+                  <a:srgbClr val="1F2937"/>
+                </a:solidFill>
+                <a:latin typeface="맑은 고딕" pitchFamily="34" charset="0"/>
+                <a:ea typeface="맑은 고딕" pitchFamily="34" charset="-122"/>
+                <a:cs typeface="맑은 고딕" pitchFamily="34" charset="-120"/>
+              </a:rPr>
+              <a:t>오프라인 자립 · 한국어 강점</a:t>
+            </a:r>
+            <a:endParaRPr lang="en-US" sz="1300" dirty="0"/>
+          </a:p>
+        </p:txBody>
+      </p:sp>
+      <p:sp>
+        <p:nvSpPr>
+          <p:cNvPr id="7" name="Shape 5"/>
+          <p:cNvSpPr/>
+          <p:nvPr/>
+        </p:nvSpPr>
+        <p:spPr>
+          <a:xfrm>
+            <a:off x="6327648" y="1783080"/>
+            <a:ext cx="5440680" cy="2697480"/>
+          </a:xfrm>
+          <a:prstGeom prst="roundRect">
+            <a:avLst>
+              <a:gd name="adj" fmla="val 3390"/>
+            </a:avLst>
+          </a:prstGeom>
+          <a:solidFill>
+            <a:srgbClr val="F5F3FF"/>
+          </a:solidFill>
+          <a:ln w="12700">
+            <a:solidFill>
+              <a:srgbClr val="DDD6FE"/>
+            </a:solidFill>
+            <a:prstDash val="solid"/>
+          </a:ln>
+        </p:spPr>
+      </p:sp>
+      <p:sp>
+        <p:nvSpPr>
+          <p:cNvPr id="8" name="Text 6"/>
+          <p:cNvSpPr/>
+          <p:nvPr/>
+        </p:nvSpPr>
+        <p:spPr>
+          <a:xfrm>
+            <a:off x="6647688" y="2011680"/>
+            <a:ext cx="4846320" cy="457200"/>
+          </a:xfrm>
+          <a:prstGeom prst="rect">
+            <a:avLst/>
+          </a:prstGeom>
+          <a:noFill/>
+          <a:ln/>
+        </p:spPr>
+        <p:txBody>
+          <a:bodyPr wrap="square" lIns="0" tIns="0" rIns="0" bIns="0" rtlCol="0" anchor="ctr"/>
+          <a:lstStyle/>
+          <a:p>
+            <a:pPr indent="0" marL="0">
+              <a:buNone/>
+            </a:pPr>
+            <a:r>
+              <a:rPr lang="en-US" sz="1900" b="1" dirty="0">
+                <a:solidFill>
+                  <a:srgbClr val="8B5CF6"/>
+                </a:solidFill>
+                <a:latin typeface="맑은 고딕" pitchFamily="34" charset="0"/>
+                <a:ea typeface="맑은 고딕" pitchFamily="34" charset="-122"/>
+                <a:cs typeface="맑은 고딕" pitchFamily="34" charset="-120"/>
+              </a:rPr>
+              <a:t>사내 GPT-OSS-120B</a:t>
+            </a:r>
+            <a:endParaRPr lang="en-US" sz="1900" dirty="0"/>
+          </a:p>
+        </p:txBody>
+      </p:sp>
+      <p:sp>
+        <p:nvSpPr>
+          <p:cNvPr id="9" name="Text 7"/>
+          <p:cNvSpPr/>
+          <p:nvPr/>
+        </p:nvSpPr>
+        <p:spPr>
+          <a:xfrm>
+            <a:off x="6693408" y="2606040"/>
+            <a:ext cx="4754880" cy="1737360"/>
+          </a:xfrm>
+          <a:prstGeom prst="rect">
+            <a:avLst/>
+          </a:prstGeom>
+          <a:noFill/>
+          <a:ln/>
+        </p:spPr>
+        <p:txBody>
+          <a:bodyPr wrap="square" lIns="0" tIns="0" rIns="0" bIns="0" rtlCol="0" anchor="ctr"/>
+          <a:lstStyle/>
+          <a:p>
+            <a:pPr marL="342900" indent="-342900">
+              <a:spcAft>
+                <a:spcPts val="700"/>
+              </a:spcAft>
+              <a:buSzPct val="100000"/>
+              <a:buChar char="•"/>
+            </a:pPr>
+            <a:r>
+              <a:rPr lang="en-US" sz="1300" dirty="0">
+                <a:solidFill>
+                  <a:srgbClr val="1F2937"/>
+                </a:solidFill>
+                <a:latin typeface="맑은 고딕" pitchFamily="34" charset="0"/>
+                <a:ea typeface="맑은 고딕" pitchFamily="34" charset="-122"/>
+                <a:cs typeface="맑은 고딕" pitchFamily="34" charset="-120"/>
+              </a:rPr>
+              <a:t>사내 LLM API 서비스(OpenAI 호환)</a:t>
+            </a:r>
+            <a:endParaRPr lang="en-US" sz="1300" dirty="0"/>
+          </a:p>
+          <a:p>
+            <a:pPr marL="342900" indent="-342900">
+              <a:spcAft>
+                <a:spcPts val="700"/>
+              </a:spcAft>
+              <a:buSzPct val="100000"/>
+              <a:buChar char="•"/>
+            </a:pPr>
+            <a:r>
+              <a:rPr lang="en-US" sz="1300" dirty="0">
+                <a:solidFill>
+                  <a:srgbClr val="1F2937"/>
+                </a:solidFill>
+                <a:latin typeface="맑은 고딕" pitchFamily="34" charset="0"/>
+                <a:ea typeface="맑은 고딕" pitchFamily="34" charset="-122"/>
+                <a:cs typeface="맑은 고딕" pitchFamily="34" charset="-120"/>
+              </a:rPr>
+              <a:t>훨씬 큰 모델 → 어려운 판단 정확도 유리</a:t>
+            </a:r>
+            <a:endParaRPr lang="en-US" sz="1300" dirty="0"/>
+          </a:p>
+          <a:p>
+            <a:pPr marL="342900" indent="-342900">
+              <a:spcAft>
+                <a:spcPts val="700"/>
+              </a:spcAft>
+              <a:buSzPct val="100000"/>
+              <a:buChar char="•"/>
+            </a:pPr>
+            <a:r>
+              <a:rPr lang="en-US" sz="1300" dirty="0">
+                <a:solidFill>
+                  <a:srgbClr val="1F2937"/>
+                </a:solidFill>
+                <a:latin typeface="맑은 고딕" pitchFamily="34" charset="0"/>
+                <a:ea typeface="맑은 고딕" pitchFamily="34" charset="-122"/>
+                <a:cs typeface="맑은 고딕" pitchFamily="34" charset="-120"/>
+              </a:rPr>
+              <a:t>공용 서버 의존</a:t>
+            </a:r>
+            <a:endParaRPr lang="en-US" sz="1300" dirty="0"/>
+          </a:p>
+        </p:txBody>
+      </p:sp>
+      <p:sp>
+        <p:nvSpPr>
+          <p:cNvPr id="10" name="Shape 8"/>
+          <p:cNvSpPr/>
+          <p:nvPr/>
+        </p:nvSpPr>
+        <p:spPr>
+          <a:xfrm>
+            <a:off x="566928" y="4709160"/>
+            <a:ext cx="11064240" cy="1463040"/>
+          </a:xfrm>
+          <a:prstGeom prst="roundRect">
+            <a:avLst>
+              <a:gd name="adj" fmla="val 6250"/>
+            </a:avLst>
+          </a:prstGeom>
+          <a:solidFill>
+            <a:srgbClr val="1E1B4B"/>
+          </a:solidFill>
+          <a:ln/>
+          <a:effectLst>
+            <a:outerShdw sx="100000" sy="100000" kx="0" ky="0" algn="bl" rotWithShape="0" blurRad="127000" dist="50800" dir="5400000">
+              <a:srgbClr val="1E1B4B">
+                <a:alpha val="18000"/>
+              </a:srgbClr>
+            </a:outerShdw>
+          </a:effectLst>
+        </p:spPr>
+      </p:sp>
+      <p:sp>
+        <p:nvSpPr>
+          <p:cNvPr id="11" name="Text 9"/>
+          <p:cNvSpPr/>
+          <p:nvPr/>
+        </p:nvSpPr>
+        <p:spPr>
+          <a:xfrm>
+            <a:off x="886968" y="4892040"/>
+            <a:ext cx="10424160" cy="457200"/>
+          </a:xfrm>
+          <a:prstGeom prst="rect">
+            <a:avLst/>
+          </a:prstGeom>
+          <a:noFill/>
+          <a:ln/>
+        </p:spPr>
+        <p:txBody>
+          <a:bodyPr wrap="square" lIns="0" tIns="0" rIns="0" bIns="0" rtlCol="0" anchor="ctr"/>
+          <a:lstStyle/>
+          <a:p>
+            <a:pPr indent="0" marL="0">
+              <a:buNone/>
+            </a:pPr>
+            <a:r>
+              <a:rPr lang="en-US" sz="1350" b="1" dirty="0">
+                <a:solidFill>
+                  <a:srgbClr val="FFFFFF"/>
+                </a:solidFill>
+                <a:latin typeface="맑은 고딕" pitchFamily="34" charset="0"/>
+                <a:ea typeface="맑은 고딕" pitchFamily="34" charset="-122"/>
+                <a:cs typeface="맑은 고딕" pitchFamily="34" charset="-120"/>
+              </a:rPr>
+              <a:t>응답 시간은 둘 다 3~5초로 비슷</a:t>
+            </a:r>
+            <a:pPr indent="0" marL="0">
+              <a:buNone/>
+            </a:pPr>
+            <a:r>
+              <a:rPr lang="en-US" sz="1350" dirty="0">
+                <a:solidFill>
+                  <a:srgbClr val="C7D2FE"/>
+                </a:solidFill>
+                <a:latin typeface="맑은 고딕" pitchFamily="34" charset="0"/>
+                <a:ea typeface="맑은 고딕" pitchFamily="34" charset="-122"/>
+                <a:cs typeface="맑은 고딕" pitchFamily="34" charset="-120"/>
+              </a:rPr>
+              <a:t> → 속도가 아니라 정확도·자립성으로 선택. 동일 요구사항 세트로 실측 후 확정.</a:t>
+            </a:r>
+            <a:endParaRPr lang="en-US" sz="1350" dirty="0"/>
+          </a:p>
+        </p:txBody>
+      </p:sp>
+      <p:sp>
+        <p:nvSpPr>
+          <p:cNvPr id="12" name="Text 10"/>
+          <p:cNvSpPr/>
+          <p:nvPr/>
+        </p:nvSpPr>
+        <p:spPr>
+          <a:xfrm>
+            <a:off x="886968" y="5440680"/>
+            <a:ext cx="10424160" cy="640080"/>
+          </a:xfrm>
+          <a:prstGeom prst="rect">
+            <a:avLst/>
+          </a:prstGeom>
+          <a:noFill/>
+          <a:ln/>
+        </p:spPr>
+        <p:txBody>
+          <a:bodyPr wrap="square" lIns="0" tIns="0" rIns="0" bIns="0" rtlCol="0" anchor="ctr"/>
+          <a:lstStyle/>
+          <a:p>
+            <a:pPr indent="0" marL="0">
+              <a:lnSpc>
+                <a:spcPct val="105000"/>
+              </a:lnSpc>
+              <a:buNone/>
+            </a:pPr>
+            <a:r>
+              <a:rPr lang="en-US" sz="1250" b="1" dirty="0">
+                <a:solidFill>
+                  <a:srgbClr val="A5B4FC"/>
+                </a:solidFill>
+                <a:latin typeface="맑은 고딕" pitchFamily="34" charset="0"/>
+                <a:ea typeface="맑은 고딕" pitchFamily="34" charset="-122"/>
+                <a:cs typeface="맑은 고딕" pitchFamily="34" charset="-120"/>
+              </a:rPr>
+              <a:t>양자화란?</a:t>
+            </a:r>
+            <a:pPr indent="0" marL="0">
+              <a:lnSpc>
+                <a:spcPct val="105000"/>
+              </a:lnSpc>
+              <a:buNone/>
+            </a:pPr>
+            <a:r>
+              <a:rPr lang="en-US" sz="1250" dirty="0">
+                <a:solidFill>
+                  <a:srgbClr val="C7D2FE"/>
+                </a:solidFill>
+                <a:latin typeface="맑은 고딕" pitchFamily="34" charset="0"/>
+                <a:ea typeface="맑은 고딕" pitchFamily="34" charset="-122"/>
+                <a:cs typeface="맑은 고딕" pitchFamily="34" charset="-120"/>
+              </a:rPr>
+              <a:t>  사진을 JPG로 압축하듯 용량↓·품질 소폭↓. 8B 원본(≈16GB)은 8GB GPU에 못 올라가 5.85GB로 압축해 사용.</a:t>
+            </a:r>
+            <a:endParaRPr lang="en-US" sz="1250" dirty="0"/>
+          </a:p>
+        </p:txBody>
+      </p:sp>
+    </p:spTree>
+  </p:cSld>
+  <p:clrMapOvr>
+    <a:masterClrMapping/>
+  </p:clrMapOvr>
+</p:sld>
+</file>
+
+<file path=ppt/slides/slide11.xml><?xml version="1.0" encoding="utf-8"?>
+<p:sld xmlns:a="http://schemas.openxmlformats.org/drawingml/2006/main" xmlns:r="http://schemas.openxmlformats.org/officeDocument/2006/relationships" xmlns:p="http://schemas.openxmlformats.org/presentationml/2006/main">
+  <p:cSld name="Slide 11">
+    <p:bg>
+      <p:bgPr>
+        <a:solidFill>
+          <a:srgbClr val="1E1B4B"/>
+        </a:solidFill>
+      </p:bgPr>
+    </p:bg>
+    <p:spTree>
+      <p:nvGrpSpPr>
+        <p:cNvPr id="1" name=""/>
+        <p:cNvGrpSpPr/>
+        <p:nvPr/>
+      </p:nvGrpSpPr>
+      <p:grpSpPr>
+        <a:xfrm>
+          <a:off x="0" y="0"/>
+          <a:ext cx="0" cy="0"/>
+          <a:chOff x="0" y="0"/>
+          <a:chExt cx="0" cy="0"/>
+        </a:xfrm>
+      </p:grpSpPr>
+      <p:sp>
+        <p:nvSpPr>
+          <p:cNvPr id="2" name="Text 0"/>
+          <p:cNvSpPr/>
+          <p:nvPr/>
+        </p:nvSpPr>
+        <p:spPr>
+          <a:xfrm>
+            <a:off x="566928" y="502920"/>
+            <a:ext cx="10058400" cy="274320"/>
+          </a:xfrm>
+          <a:prstGeom prst="rect">
+            <a:avLst/>
+          </a:prstGeom>
+          <a:noFill/>
+          <a:ln/>
+        </p:spPr>
+        <p:txBody>
+          <a:bodyPr wrap="square" lIns="0" tIns="0" rIns="0" bIns="0" rtlCol="0" anchor="ctr"/>
+          <a:lstStyle/>
+          <a:p>
+            <a:pPr indent="0" marL="0">
+              <a:buNone/>
+            </a:pPr>
+            <a:r>
+              <a:rPr lang="en-US" sz="1200" b="1" spc="100" kern="0" dirty="0">
+                <a:solidFill>
+                  <a:srgbClr val="A5B4FC"/>
+                </a:solidFill>
+                <a:latin typeface="맑은 고딕" pitchFamily="34" charset="0"/>
+                <a:ea typeface="맑은 고딕" pitchFamily="34" charset="-122"/>
+                <a:cs typeface="맑은 고딕" pitchFamily="34" charset="-120"/>
+              </a:rPr>
+              <a:t>기대 효과</a:t>
+            </a:r>
+            <a:endParaRPr lang="en-US" sz="1200" dirty="0"/>
+          </a:p>
+        </p:txBody>
+      </p:sp>
+      <p:sp>
+        <p:nvSpPr>
+          <p:cNvPr id="3" name="Text 1"/>
+          <p:cNvSpPr/>
+          <p:nvPr/>
+        </p:nvSpPr>
+        <p:spPr>
+          <a:xfrm>
+            <a:off x="566928" y="804672"/>
+            <a:ext cx="10515600" cy="640080"/>
+          </a:xfrm>
+          <a:prstGeom prst="rect">
+            <a:avLst/>
+          </a:prstGeom>
+          <a:noFill/>
+          <a:ln/>
+        </p:spPr>
+        <p:txBody>
+          <a:bodyPr wrap="square" lIns="0" tIns="0" rIns="0" bIns="0" rtlCol="0" anchor="ctr"/>
+          <a:lstStyle/>
+          <a:p>
+            <a:pPr indent="0" marL="0">
+              <a:buNone/>
+            </a:pPr>
+            <a:r>
+              <a:rPr lang="en-US" sz="3000" b="1" dirty="0">
+                <a:solidFill>
+                  <a:srgbClr val="FFFFFF"/>
+                </a:solidFill>
+                <a:latin typeface="맑은 고딕" pitchFamily="34" charset="0"/>
+                <a:ea typeface="맑은 고딕" pitchFamily="34" charset="-122"/>
+                <a:cs typeface="맑은 고딕" pitchFamily="34" charset="-120"/>
+              </a:rPr>
+              <a:t>수작업 문서화 공수를 크게 줄인다</a:t>
+            </a:r>
+            <a:endParaRPr lang="en-US" sz="3000" dirty="0"/>
+          </a:p>
+        </p:txBody>
+      </p:sp>
+      <p:sp>
+        <p:nvSpPr>
+          <p:cNvPr id="4" name="Shape 2"/>
+          <p:cNvSpPr/>
+          <p:nvPr/>
+        </p:nvSpPr>
+        <p:spPr>
+          <a:xfrm>
+            <a:off x="566928" y="1920240"/>
+            <a:ext cx="3529584" cy="3200400"/>
+          </a:xfrm>
+          <a:prstGeom prst="roundRect">
+            <a:avLst>
+              <a:gd name="adj" fmla="val 2857"/>
+            </a:avLst>
+          </a:prstGeom>
+          <a:solidFill>
+            <a:srgbClr val="312E81"/>
+          </a:solidFill>
+          <a:ln w="12700">
+            <a:solidFill>
+              <a:srgbClr val="4338CA"/>
+            </a:solidFill>
+            <a:prstDash val="solid"/>
+          </a:ln>
+        </p:spPr>
+      </p:sp>
+      <p:sp>
+        <p:nvSpPr>
+          <p:cNvPr id="5" name="Text 3"/>
+          <p:cNvSpPr/>
+          <p:nvPr/>
+        </p:nvSpPr>
+        <p:spPr>
+          <a:xfrm>
+            <a:off x="841248" y="2331720"/>
+            <a:ext cx="2980944" cy="548640"/>
+          </a:xfrm>
+          <a:prstGeom prst="rect">
+            <a:avLst/>
+          </a:prstGeom>
+          <a:noFill/>
+          <a:ln/>
+        </p:spPr>
+        <p:txBody>
+          <a:bodyPr wrap="square" lIns="0" tIns="0" rIns="0" bIns="0" rtlCol="0" anchor="ctr"/>
+          <a:lstStyle/>
+          <a:p>
+            <a:pPr indent="0" marL="0">
+              <a:buNone/>
+            </a:pPr>
+            <a:r>
+              <a:rPr lang="en-US" sz="2000" b="1" dirty="0">
+                <a:solidFill>
+                  <a:srgbClr val="C7D2FE"/>
+                </a:solidFill>
+                <a:latin typeface="맑은 고딕" pitchFamily="34" charset="0"/>
+                <a:ea typeface="맑은 고딕" pitchFamily="34" charset="-122"/>
+                <a:cs typeface="맑은 고딕" pitchFamily="34" charset="-120"/>
+              </a:rPr>
+              <a:t>약 2시간</a:t>
+            </a:r>
+            <a:endParaRPr lang="en-US" sz="2000" dirty="0"/>
+          </a:p>
+        </p:txBody>
+      </p:sp>
+      <p:sp>
+        <p:nvSpPr>
+          <p:cNvPr id="6" name="Text 4"/>
+          <p:cNvSpPr/>
+          <p:nvPr/>
+        </p:nvSpPr>
+        <p:spPr>
+          <a:xfrm>
+            <a:off x="841248" y="2926080"/>
+            <a:ext cx="2980944" cy="822960"/>
+          </a:xfrm>
+          <a:prstGeom prst="rect">
+            <a:avLst/>
+          </a:prstGeom>
+          <a:noFill/>
+          <a:ln/>
+        </p:spPr>
+        <p:txBody>
+          <a:bodyPr wrap="square" lIns="0" tIns="0" rIns="0" bIns="0" rtlCol="0" anchor="ctr"/>
+          <a:lstStyle/>
+          <a:p>
+            <a:pPr indent="0" marL="0">
+              <a:buNone/>
+            </a:pPr>
+            <a:r>
+              <a:rPr lang="en-US" sz="3200" b="1" dirty="0">
+                <a:solidFill>
+                  <a:srgbClr val="FFFFFF"/>
+                </a:solidFill>
+                <a:latin typeface="맑은 고딕" pitchFamily="34" charset="0"/>
+                <a:ea typeface="맑은 고딕" pitchFamily="34" charset="-122"/>
+                <a:cs typeface="맑은 고딕" pitchFamily="34" charset="-120"/>
+              </a:rPr>
+              <a:t>→ 약 10초</a:t>
+            </a:r>
+            <a:endParaRPr lang="en-US" sz="3200" dirty="0"/>
+          </a:p>
+        </p:txBody>
+      </p:sp>
+      <p:sp>
+        <p:nvSpPr>
+          <p:cNvPr id="7" name="Text 5"/>
+          <p:cNvSpPr/>
+          <p:nvPr/>
+        </p:nvSpPr>
+        <p:spPr>
+          <a:xfrm>
+            <a:off x="841248" y="4114800"/>
+            <a:ext cx="2980944" cy="822960"/>
+          </a:xfrm>
+          <a:prstGeom prst="rect">
+            <a:avLst/>
+          </a:prstGeom>
+          <a:noFill/>
+          <a:ln/>
+        </p:spPr>
+        <p:txBody>
+          <a:bodyPr wrap="square" lIns="0" tIns="0" rIns="0" bIns="0" rtlCol="0" anchor="ctr"/>
+          <a:lstStyle/>
+          <a:p>
+            <a:pPr indent="0" marL="0">
+              <a:lnSpc>
+                <a:spcPct val="110000"/>
+              </a:lnSpc>
+              <a:buNone/>
+            </a:pPr>
+            <a:r>
+              <a:rPr lang="en-US" sz="1300" dirty="0">
+                <a:solidFill>
+                  <a:srgbClr val="A5B4FC"/>
+                </a:solidFill>
+                <a:latin typeface="맑은 고딕" pitchFamily="34" charset="0"/>
+                <a:ea typeface="맑은 고딕" pitchFamily="34" charset="-122"/>
+                <a:cs typeface="맑은 고딕" pitchFamily="34" charset="-120"/>
+              </a:rPr>
+              <a:t>요구사항 1건의 문서·티켓 초안 작성</a:t>
+            </a:r>
+            <a:endParaRPr lang="en-US" sz="1300" dirty="0"/>
+          </a:p>
+        </p:txBody>
+      </p:sp>
+      <p:sp>
+        <p:nvSpPr>
+          <p:cNvPr id="8" name="Shape 6"/>
+          <p:cNvSpPr/>
+          <p:nvPr/>
+        </p:nvSpPr>
+        <p:spPr>
+          <a:xfrm>
+            <a:off x="4407408" y="1920240"/>
+            <a:ext cx="3529584" cy="3200400"/>
+          </a:xfrm>
+          <a:prstGeom prst="roundRect">
+            <a:avLst>
+              <a:gd name="adj" fmla="val 2857"/>
+            </a:avLst>
+          </a:prstGeom>
+          <a:solidFill>
+            <a:srgbClr val="312E81"/>
+          </a:solidFill>
+          <a:ln w="12700">
+            <a:solidFill>
+              <a:srgbClr val="4338CA"/>
+            </a:solidFill>
+            <a:prstDash val="solid"/>
+          </a:ln>
+        </p:spPr>
+      </p:sp>
+      <p:sp>
+        <p:nvSpPr>
+          <p:cNvPr id="9" name="Text 7"/>
+          <p:cNvSpPr/>
+          <p:nvPr/>
+        </p:nvSpPr>
+        <p:spPr>
+          <a:xfrm>
+            <a:off x="4681728" y="2331720"/>
+            <a:ext cx="2980944" cy="548640"/>
+          </a:xfrm>
+          <a:prstGeom prst="rect">
+            <a:avLst/>
+          </a:prstGeom>
+          <a:noFill/>
+          <a:ln/>
+        </p:spPr>
+        <p:txBody>
+          <a:bodyPr wrap="square" lIns="0" tIns="0" rIns="0" bIns="0" rtlCol="0" anchor="ctr"/>
+          <a:lstStyle/>
+          <a:p>
+            <a:pPr indent="0" marL="0">
+              <a:buNone/>
+            </a:pPr>
+            <a:r>
+              <a:rPr lang="en-US" sz="2000" b="1" dirty="0">
+                <a:solidFill>
+                  <a:srgbClr val="C7D2FE"/>
+                </a:solidFill>
+                <a:latin typeface="맑은 고딕" pitchFamily="34" charset="0"/>
+                <a:ea typeface="맑은 고딕" pitchFamily="34" charset="-122"/>
+                <a:cs typeface="맑은 고딕" pitchFamily="34" charset="-120"/>
+              </a:rPr>
+              <a:t>수동 확인</a:t>
+            </a:r>
+            <a:endParaRPr lang="en-US" sz="2000" dirty="0"/>
+          </a:p>
+        </p:txBody>
+      </p:sp>
+      <p:sp>
+        <p:nvSpPr>
+          <p:cNvPr id="10" name="Text 8"/>
+          <p:cNvSpPr/>
+          <p:nvPr/>
+        </p:nvSpPr>
+        <p:spPr>
+          <a:xfrm>
+            <a:off x="4681728" y="2926080"/>
+            <a:ext cx="2980944" cy="822960"/>
+          </a:xfrm>
+          <a:prstGeom prst="rect">
+            <a:avLst/>
+          </a:prstGeom>
+          <a:noFill/>
+          <a:ln/>
+        </p:spPr>
+        <p:txBody>
+          <a:bodyPr wrap="square" lIns="0" tIns="0" rIns="0" bIns="0" rtlCol="0" anchor="ctr"/>
+          <a:lstStyle/>
+          <a:p>
+            <a:pPr indent="0" marL="0">
+              <a:buNone/>
+            </a:pPr>
+            <a:r>
+              <a:rPr lang="en-US" sz="3200" b="1" dirty="0">
+                <a:solidFill>
+                  <a:srgbClr val="FFFFFF"/>
+                </a:solidFill>
+                <a:latin typeface="맑은 고딕" pitchFamily="34" charset="0"/>
+                <a:ea typeface="맑은 고딕" pitchFamily="34" charset="-122"/>
+                <a:cs typeface="맑은 고딕" pitchFamily="34" charset="-120"/>
+              </a:rPr>
+              <a:t>→ 자동 표시</a:t>
+            </a:r>
+            <a:endParaRPr lang="en-US" sz="3200" dirty="0"/>
+          </a:p>
+        </p:txBody>
+      </p:sp>
+      <p:sp>
+        <p:nvSpPr>
+          <p:cNvPr id="11" name="Text 9"/>
+          <p:cNvSpPr/>
+          <p:nvPr/>
+        </p:nvSpPr>
+        <p:spPr>
+          <a:xfrm>
+            <a:off x="4681728" y="4114800"/>
+            <a:ext cx="2980944" cy="822960"/>
+          </a:xfrm>
+          <a:prstGeom prst="rect">
+            <a:avLst/>
+          </a:prstGeom>
+          <a:noFill/>
+          <a:ln/>
+        </p:spPr>
+        <p:txBody>
+          <a:bodyPr wrap="square" lIns="0" tIns="0" rIns="0" bIns="0" rtlCol="0" anchor="ctr"/>
+          <a:lstStyle/>
+          <a:p>
+            <a:pPr indent="0" marL="0">
+              <a:lnSpc>
+                <a:spcPct val="110000"/>
+              </a:lnSpc>
+              <a:buNone/>
+            </a:pPr>
+            <a:r>
+              <a:rPr lang="en-US" sz="1300" dirty="0">
+                <a:solidFill>
+                  <a:srgbClr val="A5B4FC"/>
+                </a:solidFill>
+                <a:latin typeface="맑은 고딕" pitchFamily="34" charset="0"/>
+                <a:ea typeface="맑은 고딕" pitchFamily="34" charset="-122"/>
+                <a:cs typeface="맑은 고딕" pitchFamily="34" charset="-120"/>
+              </a:rPr>
+              <a:t>요구사항 변경 시 영향받는 문서 파악</a:t>
+            </a:r>
+            <a:endParaRPr lang="en-US" sz="1300" dirty="0"/>
+          </a:p>
+        </p:txBody>
+      </p:sp>
+      <p:sp>
+        <p:nvSpPr>
+          <p:cNvPr id="12" name="Shape 10"/>
+          <p:cNvSpPr/>
+          <p:nvPr/>
+        </p:nvSpPr>
+        <p:spPr>
+          <a:xfrm>
+            <a:off x="8247888" y="1920240"/>
+            <a:ext cx="3529584" cy="3200400"/>
+          </a:xfrm>
+          <a:prstGeom prst="roundRect">
+            <a:avLst>
+              <a:gd name="adj" fmla="val 2857"/>
+            </a:avLst>
+          </a:prstGeom>
+          <a:solidFill>
+            <a:srgbClr val="312E81"/>
+          </a:solidFill>
+          <a:ln w="12700">
+            <a:solidFill>
+              <a:srgbClr val="4338CA"/>
+            </a:solidFill>
+            <a:prstDash val="solid"/>
+          </a:ln>
+        </p:spPr>
+      </p:sp>
+      <p:sp>
+        <p:nvSpPr>
+          <p:cNvPr id="13" name="Text 11"/>
+          <p:cNvSpPr/>
+          <p:nvPr/>
+        </p:nvSpPr>
+        <p:spPr>
+          <a:xfrm>
+            <a:off x="8522208" y="2331720"/>
+            <a:ext cx="2980944" cy="548640"/>
+          </a:xfrm>
+          <a:prstGeom prst="rect">
+            <a:avLst/>
+          </a:prstGeom>
+          <a:noFill/>
+          <a:ln/>
+        </p:spPr>
+        <p:txBody>
+          <a:bodyPr wrap="square" lIns="0" tIns="0" rIns="0" bIns="0" rtlCol="0" anchor="ctr"/>
+          <a:lstStyle/>
+          <a:p>
+            <a:pPr indent="0" marL="0">
+              <a:buNone/>
+            </a:pPr>
+            <a:r>
+              <a:rPr lang="en-US" sz="2000" b="1" dirty="0">
+                <a:solidFill>
+                  <a:srgbClr val="C7D2FE"/>
+                </a:solidFill>
+                <a:latin typeface="맑은 고딕" pitchFamily="34" charset="0"/>
+                <a:ea typeface="맑은 고딕" pitchFamily="34" charset="-122"/>
+                <a:cs typeface="맑은 고딕" pitchFamily="34" charset="-120"/>
+              </a:rPr>
+              <a:t>개발 중 발견</a:t>
+            </a:r>
+            <a:endParaRPr lang="en-US" sz="2000" dirty="0"/>
+          </a:p>
+        </p:txBody>
+      </p:sp>
+      <p:sp>
+        <p:nvSpPr>
+          <p:cNvPr id="14" name="Text 12"/>
+          <p:cNvSpPr/>
+          <p:nvPr/>
+        </p:nvSpPr>
+        <p:spPr>
+          <a:xfrm>
+            <a:off x="8522208" y="2926080"/>
+            <a:ext cx="2980944" cy="822960"/>
+          </a:xfrm>
+          <a:prstGeom prst="rect">
+            <a:avLst/>
+          </a:prstGeom>
+          <a:noFill/>
+          <a:ln/>
+        </p:spPr>
+        <p:txBody>
+          <a:bodyPr wrap="square" lIns="0" tIns="0" rIns="0" bIns="0" rtlCol="0" anchor="ctr"/>
+          <a:lstStyle/>
+          <a:p>
+            <a:pPr indent="0" marL="0">
+              <a:buNone/>
+            </a:pPr>
+            <a:r>
+              <a:rPr lang="en-US" sz="3200" b="1" dirty="0">
+                <a:solidFill>
+                  <a:srgbClr val="FFFFFF"/>
+                </a:solidFill>
+                <a:latin typeface="맑은 고딕" pitchFamily="34" charset="0"/>
+                <a:ea typeface="맑은 고딕" pitchFamily="34" charset="-122"/>
+                <a:cs typeface="맑은 고딕" pitchFamily="34" charset="-120"/>
+              </a:rPr>
+              <a:t>→ 착수 전 발견</a:t>
+            </a:r>
+            <a:endParaRPr lang="en-US" sz="3200" dirty="0"/>
+          </a:p>
+        </p:txBody>
+      </p:sp>
+      <p:sp>
+        <p:nvSpPr>
+          <p:cNvPr id="15" name="Text 13"/>
+          <p:cNvSpPr/>
+          <p:nvPr/>
+        </p:nvSpPr>
+        <p:spPr>
+          <a:xfrm>
+            <a:off x="8522208" y="4114800"/>
+            <a:ext cx="2980944" cy="822960"/>
+          </a:xfrm>
+          <a:prstGeom prst="rect">
+            <a:avLst/>
+          </a:prstGeom>
+          <a:noFill/>
+          <a:ln/>
+        </p:spPr>
+        <p:txBody>
+          <a:bodyPr wrap="square" lIns="0" tIns="0" rIns="0" bIns="0" rtlCol="0" anchor="ctr"/>
+          <a:lstStyle/>
+          <a:p>
+            <a:pPr indent="0" marL="0">
+              <a:lnSpc>
+                <a:spcPct val="110000"/>
+              </a:lnSpc>
+              <a:buNone/>
+            </a:pPr>
+            <a:r>
+              <a:rPr lang="en-US" sz="1300" dirty="0">
+                <a:solidFill>
+                  <a:srgbClr val="A5B4FC"/>
+                </a:solidFill>
+                <a:latin typeface="맑은 고딕" pitchFamily="34" charset="0"/>
+                <a:ea typeface="맑은 고딕" pitchFamily="34" charset="-122"/>
+                <a:cs typeface="맑은 고딕" pitchFamily="34" charset="-120"/>
+              </a:rPr>
+              <a:t>불명확·상충으로 인한 재작업</a:t>
+            </a:r>
+            <a:endParaRPr lang="en-US" sz="1300" dirty="0"/>
+          </a:p>
+        </p:txBody>
+      </p:sp>
+      <p:sp>
+        <p:nvSpPr>
+          <p:cNvPr id="16" name="Text 14"/>
+          <p:cNvSpPr/>
+          <p:nvPr/>
+        </p:nvSpPr>
+        <p:spPr>
+          <a:xfrm>
+            <a:off x="566928" y="5852160"/>
+            <a:ext cx="10058400" cy="365760"/>
+          </a:xfrm>
+          <a:prstGeom prst="rect">
+            <a:avLst/>
+          </a:prstGeom>
+          <a:noFill/>
+          <a:ln/>
+        </p:spPr>
+        <p:txBody>
+          <a:bodyPr wrap="square" lIns="0" tIns="0" rIns="0" bIns="0" rtlCol="0" anchor="ctr"/>
+          <a:lstStyle/>
+          <a:p>
+            <a:pPr indent="0" marL="0">
+              <a:buNone/>
+            </a:pPr>
+            <a:r>
+              <a:rPr lang="en-US" sz="1200" i="1" dirty="0">
+                <a:solidFill>
+                  <a:srgbClr val="818CF8"/>
+                </a:solidFill>
+                <a:latin typeface="맑은 고딕" pitchFamily="34" charset="0"/>
+                <a:ea typeface="맑은 고딕" pitchFamily="34" charset="-122"/>
+                <a:cs typeface="맑은 고딕" pitchFamily="34" charset="-120"/>
+              </a:rPr>
+              <a:t>※ 목표/예시 수치 — 실측으로 확정</a:t>
+            </a:r>
+            <a:endParaRPr lang="en-US" sz="1200" dirty="0"/>
+          </a:p>
+        </p:txBody>
+      </p:sp>
+    </p:spTree>
+  </p:cSld>
+  <p:clrMapOvr>
+    <a:masterClrMapping/>
+  </p:clrMapOvr>
+</p:sld>
+</file>
+
+<file path=ppt/slides/slide12.xml><?xml version="1.0" encoding="utf-8"?>
+<p:sld xmlns:a="http://schemas.openxmlformats.org/drawingml/2006/main" xmlns:r="http://schemas.openxmlformats.org/officeDocument/2006/relationships" xmlns:p="http://schemas.openxmlformats.org/presentationml/2006/main">
+  <p:cSld name="Slide 12">
+    <p:bg>
+      <p:bgPr>
+        <a:solidFill>
+          <a:srgbClr val="FFFFFF"/>
+        </a:solidFill>
+      </p:bgPr>
+    </p:bg>
+    <p:spTree>
+      <p:nvGrpSpPr>
+        <p:cNvPr id="1" name=""/>
+        <p:cNvGrpSpPr/>
+        <p:nvPr/>
+      </p:nvGrpSpPr>
+      <p:grpSpPr>
+        <a:xfrm>
+          <a:off x="0" y="0"/>
+          <a:ext cx="0" cy="0"/>
+          <a:chOff x="0" y="0"/>
+          <a:chExt cx="0" cy="0"/>
+        </a:xfrm>
+      </p:grpSpPr>
+      <p:sp>
+        <p:nvSpPr>
+          <p:cNvPr id="2" name="Text 0"/>
+          <p:cNvSpPr/>
+          <p:nvPr/>
+        </p:nvSpPr>
+        <p:spPr>
+          <a:xfrm>
+            <a:off x="566928" y="457200"/>
+            <a:ext cx="10058400" cy="274320"/>
+          </a:xfrm>
+          <a:prstGeom prst="rect">
+            <a:avLst/>
+          </a:prstGeom>
+          <a:noFill/>
+          <a:ln/>
+        </p:spPr>
+        <p:txBody>
+          <a:bodyPr wrap="square" lIns="0" tIns="0" rIns="0" bIns="0" rtlCol="0" anchor="ctr"/>
+          <a:lstStyle/>
+          <a:p>
+            <a:pPr indent="0" marL="0">
+              <a:buNone/>
+            </a:pPr>
+            <a:r>
+              <a:rPr lang="en-US" sz="1200" b="1" spc="100" kern="0" dirty="0">
+                <a:solidFill>
+                  <a:srgbClr val="6366F1"/>
+                </a:solidFill>
+                <a:latin typeface="맑은 고딕" pitchFamily="34" charset="0"/>
+                <a:ea typeface="맑은 고딕" pitchFamily="34" charset="-122"/>
+                <a:cs typeface="맑은 고딕" pitchFamily="34" charset="-120"/>
+              </a:rPr>
               <a:t>정리</a:t>
             </a:r>
             <a:endParaRPr lang="en-US" sz="1200" dirty="0"/>
@@ -2480,7 +3801,7 @@
                 <a:ea typeface="맑은 고딕" pitchFamily="34" charset="-122"/>
                 <a:cs typeface="맑은 고딕" pitchFamily="34" charset="-120"/>
               </a:rPr>
-              <a:t>왜 필요한가 — 만들 문서가 너무 많다</a:t>
+              <a:t>왜 필요한가 — 세 가지 문제</a:t>
             </a:r>
             <a:endParaRPr lang="en-US" sz="3000" dirty="0"/>
           </a:p>
@@ -2494,8 +3815,8 @@
         </p:nvSpPr>
         <p:spPr>
           <a:xfrm>
-            <a:off x="566928" y="1600200"/>
-            <a:ext cx="457200" cy="457200"/>
+            <a:off x="566928" y="1920240"/>
+            <a:ext cx="502920" cy="502920"/>
           </a:xfrm>
           <a:prstGeom prst="ellipse">
             <a:avLst/>
@@ -2513,7 +3834,7 @@
               <a:buNone/>
             </a:pPr>
             <a:r>
-              <a:rPr lang="en-US" sz="1600" b="1" dirty="0">
+              <a:rPr lang="en-US" sz="1800" b="1" dirty="0">
                 <a:solidFill>
                   <a:srgbClr val="6366F1"/>
                 </a:solidFill>
@@ -2523,7 +3844,7 @@
               </a:rPr>
               <a:t>1</a:t>
             </a:r>
-            <a:endParaRPr lang="en-US" sz="1600" dirty="0"/>
+            <a:endParaRPr lang="en-US" sz="1800" dirty="0"/>
           </a:p>
         </p:txBody>
       </p:sp>
@@ -2535,8 +3856,8 @@
         </p:nvSpPr>
         <p:spPr>
           <a:xfrm>
-            <a:off x="1161288" y="1545336"/>
-            <a:ext cx="5577840" cy="685800"/>
+            <a:off x="1225296" y="1865376"/>
+            <a:ext cx="5669280" cy="914400"/>
           </a:xfrm>
           <a:prstGeom prst="rect">
             <a:avLst/>
@@ -2550,12 +3871,12 @@
           <a:p>
             <a:pPr algn="l" indent="0" marL="0">
               <a:lnSpc>
-                <a:spcPct val="102000"/>
+                <a:spcPct val="104000"/>
               </a:lnSpc>
               <a:buNone/>
             </a:pPr>
             <a:r>
-              <a:rPr lang="en-US" sz="1600" b="1" dirty="0">
+              <a:rPr lang="en-US" sz="1800" b="1" dirty="0">
                 <a:solidFill>
                   <a:srgbClr val="1F2937"/>
                 </a:solidFill>
@@ -2563,17 +3884,17 @@
                 <a:ea typeface="맑은 고딕" pitchFamily="34" charset="-122"/>
                 <a:cs typeface="맑은 고딕" pitchFamily="34" charset="-120"/>
               </a:rPr>
-              <a:t>문서 작성량 과다
+              <a:t>불명확한 표현
 </a:t>
             </a:r>
             <a:pPr algn="l" indent="0" marL="0">
               <a:lnSpc>
-                <a:spcPct val="102000"/>
+                <a:spcPct val="104000"/>
               </a:lnSpc>
               <a:buNone/>
             </a:pPr>
             <a:r>
-              <a:rPr lang="en-US" sz="1250" dirty="0">
+              <a:rPr lang="en-US" sz="1300" dirty="0">
                 <a:solidFill>
                   <a:srgbClr val="6B7280"/>
                 </a:solidFill>
@@ -2581,9 +3902,9 @@
                 <a:ea typeface="맑은 고딕" pitchFamily="34" charset="-122"/>
                 <a:cs typeface="맑은 고딕" pitchFamily="34" charset="-120"/>
               </a:rPr>
-              <a:t>기능 하나에 SWVOC·기능요구사항·상세설계·티켓 등 여러 문서를 매번 수작업으로 작성</a:t>
-            </a:r>
-            <a:endParaRPr lang="en-US" sz="1600" dirty="0"/>
+              <a:t>요구사항에 해석이 갈리거나 추가 정의가 필요한 문장이 섞여 있음 (부서·회사 간 해석 차이)</a:t>
+            </a:r>
+            <a:endParaRPr lang="en-US" sz="1800" dirty="0"/>
           </a:p>
         </p:txBody>
       </p:sp>
@@ -2595,8 +3916,8 @@
         </p:nvSpPr>
         <p:spPr>
           <a:xfrm>
-            <a:off x="566928" y="2624328"/>
-            <a:ext cx="457200" cy="457200"/>
+            <a:off x="566928" y="3218688"/>
+            <a:ext cx="502920" cy="502920"/>
           </a:xfrm>
           <a:prstGeom prst="ellipse">
             <a:avLst/>
@@ -2614,7 +3935,7 @@
               <a:buNone/>
             </a:pPr>
             <a:r>
-              <a:rPr lang="en-US" sz="1600" b="1" dirty="0">
+              <a:rPr lang="en-US" sz="1800" b="1" dirty="0">
                 <a:solidFill>
                   <a:srgbClr val="6366F1"/>
                 </a:solidFill>
@@ -2624,7 +3945,7 @@
               </a:rPr>
               <a:t>2</a:t>
             </a:r>
-            <a:endParaRPr lang="en-US" sz="1600" dirty="0"/>
+            <a:endParaRPr lang="en-US" sz="1800" dirty="0"/>
           </a:p>
         </p:txBody>
       </p:sp>
@@ -2636,8 +3957,8 @@
         </p:nvSpPr>
         <p:spPr>
           <a:xfrm>
-            <a:off x="1161288" y="2569464"/>
-            <a:ext cx="5577840" cy="685800"/>
+            <a:off x="1225296" y="3163824"/>
+            <a:ext cx="5669280" cy="914400"/>
           </a:xfrm>
           <a:prstGeom prst="rect">
             <a:avLst/>
@@ -2651,12 +3972,12 @@
           <a:p>
             <a:pPr algn="l" indent="0" marL="0">
               <a:lnSpc>
-                <a:spcPct val="102000"/>
+                <a:spcPct val="104000"/>
               </a:lnSpc>
               <a:buNone/>
             </a:pPr>
             <a:r>
-              <a:rPr lang="en-US" sz="1600" b="1" dirty="0">
+              <a:rPr lang="en-US" sz="1800" b="1" dirty="0">
                 <a:solidFill>
                   <a:srgbClr val="1F2937"/>
                 </a:solidFill>
@@ -2664,17 +3985,17 @@
                 <a:ea typeface="맑은 고딕" pitchFamily="34" charset="-122"/>
                 <a:cs typeface="맑은 고딕" pitchFamily="34" charset="-120"/>
               </a:rPr>
-              <a:t>해석 차이
+              <a:t>문서 작업량 과다
 </a:t>
             </a:r>
             <a:pPr algn="l" indent="0" marL="0">
               <a:lnSpc>
-                <a:spcPct val="102000"/>
+                <a:spcPct val="104000"/>
               </a:lnSpc>
               <a:buNone/>
             </a:pPr>
             <a:r>
-              <a:rPr lang="en-US" sz="1250" dirty="0">
+              <a:rPr lang="en-US" sz="1300" dirty="0">
                 <a:solidFill>
                   <a:srgbClr val="6B7280"/>
                 </a:solidFill>
@@ -2682,9 +4003,9 @@
                 <a:ea typeface="맑은 고딕" pitchFamily="34" charset="-122"/>
                 <a:cs typeface="맑은 고딕" pitchFamily="34" charset="-120"/>
               </a:rPr>
-              <a:t>고객(삼성전자)과 우리(세메스)가 같은 문장을 서로 다르게 해석</a:t>
-            </a:r>
-            <a:endParaRPr lang="en-US" sz="1600" dirty="0"/>
+              <a:t>요구사항마다 기능·비기능·티켓을 전부 만들어야 해 시간이 너무 많이 듦</a:t>
+            </a:r>
+            <a:endParaRPr lang="en-US" sz="1800" dirty="0"/>
           </a:p>
         </p:txBody>
       </p:sp>
@@ -2696,8 +4017,8 @@
         </p:nvSpPr>
         <p:spPr>
           <a:xfrm>
-            <a:off x="566928" y="3648456"/>
-            <a:ext cx="457200" cy="457200"/>
+            <a:off x="566928" y="4517136"/>
+            <a:ext cx="502920" cy="502920"/>
           </a:xfrm>
           <a:prstGeom prst="ellipse">
             <a:avLst/>
@@ -2715,7 +4036,7 @@
               <a:buNone/>
             </a:pPr>
             <a:r>
-              <a:rPr lang="en-US" sz="1600" b="1" dirty="0">
+              <a:rPr lang="en-US" sz="1800" b="1" dirty="0">
                 <a:solidFill>
                   <a:srgbClr val="6366F1"/>
                 </a:solidFill>
@@ -2725,7 +4046,7 @@
               </a:rPr>
               <a:t>3</a:t>
             </a:r>
-            <a:endParaRPr lang="en-US" sz="1600" dirty="0"/>
+            <a:endParaRPr lang="en-US" sz="1800" dirty="0"/>
           </a:p>
         </p:txBody>
       </p:sp>
@@ -2737,8 +4058,8 @@
         </p:nvSpPr>
         <p:spPr>
           <a:xfrm>
-            <a:off x="1161288" y="3593592"/>
-            <a:ext cx="5577840" cy="685800"/>
+            <a:off x="1225296" y="4462272"/>
+            <a:ext cx="5669280" cy="914400"/>
           </a:xfrm>
           <a:prstGeom prst="rect">
             <a:avLst/>
@@ -2752,12 +4073,12 @@
           <a:p>
             <a:pPr algn="l" indent="0" marL="0">
               <a:lnSpc>
-                <a:spcPct val="102000"/>
+                <a:spcPct val="104000"/>
               </a:lnSpc>
               <a:buNone/>
             </a:pPr>
             <a:r>
-              <a:rPr lang="en-US" sz="1600" b="1" dirty="0">
+              <a:rPr lang="en-US" sz="1800" b="1" dirty="0">
                 <a:solidFill>
                   <a:srgbClr val="1F2937"/>
                 </a:solidFill>
@@ -2765,17 +4086,17 @@
                 <a:ea typeface="맑은 고딕" pitchFamily="34" charset="-122"/>
                 <a:cs typeface="맑은 고딕" pitchFamily="34" charset="-120"/>
               </a:rPr>
-              <a:t>요구 상충
+              <a:t>변경 추적 어려움
 </a:t>
             </a:r>
             <a:pPr algn="l" indent="0" marL="0">
               <a:lnSpc>
-                <a:spcPct val="102000"/>
+                <a:spcPct val="104000"/>
               </a:lnSpc>
               <a:buNone/>
             </a:pPr>
             <a:r>
-              <a:rPr lang="en-US" sz="1250" dirty="0">
+              <a:rPr lang="en-US" sz="1300" dirty="0">
                 <a:solidFill>
                   <a:srgbClr val="6B7280"/>
                 </a:solidFill>
@@ -2783,116 +4104,15 @@
                 <a:ea typeface="맑은 고딕" pitchFamily="34" charset="-122"/>
                 <a:cs typeface="맑은 고딕" pitchFamily="34" charset="-120"/>
               </a:rPr>
-              <a:t>요구사항끼리 서로 어긋나는데 개발 도중·후에야 발견</a:t>
-            </a:r>
-            <a:endParaRPr lang="en-US" sz="1600" dirty="0"/>
-          </a:p>
-        </p:txBody>
-      </p:sp>
-      <p:sp>
-        <p:nvSpPr>
-          <p:cNvPr id="10" name="Text 8"/>
-          <p:cNvSpPr/>
-          <p:nvPr/>
-        </p:nvSpPr>
-        <p:spPr>
-          <a:xfrm>
-            <a:off x="566928" y="4672584"/>
-            <a:ext cx="457200" cy="457200"/>
-          </a:xfrm>
-          <a:prstGeom prst="ellipse">
-            <a:avLst/>
-          </a:prstGeom>
-          <a:solidFill>
-            <a:srgbClr val="EEF2FF"/>
-          </a:solidFill>
-          <a:ln/>
-        </p:spPr>
-        <p:txBody>
-          <a:bodyPr wrap="square" lIns="0" tIns="0" rIns="0" bIns="0" rtlCol="0" anchor="ctr"/>
-          <a:lstStyle/>
-          <a:p>
-            <a:pPr algn="ctr" indent="0" marL="0">
-              <a:buNone/>
-            </a:pPr>
-            <a:r>
-              <a:rPr lang="en-US" sz="1600" b="1" dirty="0">
-                <a:solidFill>
-                  <a:srgbClr val="6366F1"/>
-                </a:solidFill>
-                <a:latin typeface="맑은 고딕" pitchFamily="34" charset="0"/>
-                <a:ea typeface="맑은 고딕" pitchFamily="34" charset="-122"/>
-                <a:cs typeface="맑은 고딕" pitchFamily="34" charset="-120"/>
-              </a:rPr>
-              <a:t>4</a:t>
-            </a:r>
-            <a:endParaRPr lang="en-US" sz="1600" dirty="0"/>
-          </a:p>
-        </p:txBody>
-      </p:sp>
-      <p:sp>
-        <p:nvSpPr>
-          <p:cNvPr id="11" name="Text 9"/>
-          <p:cNvSpPr/>
-          <p:nvPr/>
-        </p:nvSpPr>
-        <p:spPr>
-          <a:xfrm>
-            <a:off x="1161288" y="4617720"/>
-            <a:ext cx="5577840" cy="685800"/>
-          </a:xfrm>
-          <a:prstGeom prst="rect">
-            <a:avLst/>
-          </a:prstGeom>
-          <a:noFill/>
-          <a:ln/>
-        </p:spPr>
-        <p:txBody>
-          <a:bodyPr wrap="square" lIns="0" tIns="0" rIns="0" bIns="0" rtlCol="0" anchor="ctr"/>
-          <a:lstStyle/>
-          <a:p>
-            <a:pPr algn="l" indent="0" marL="0">
-              <a:lnSpc>
-                <a:spcPct val="102000"/>
-              </a:lnSpc>
-              <a:buNone/>
-            </a:pPr>
-            <a:r>
-              <a:rPr lang="en-US" sz="1600" b="1" dirty="0">
-                <a:solidFill>
-                  <a:srgbClr val="1F2937"/>
-                </a:solidFill>
-                <a:latin typeface="맑은 고딕" pitchFamily="34" charset="0"/>
-                <a:ea typeface="맑은 고딕" pitchFamily="34" charset="-122"/>
-                <a:cs typeface="맑은 고딕" pitchFamily="34" charset="-120"/>
-              </a:rPr>
-              <a:t>변경 추적 어려움
-</a:t>
-            </a:r>
-            <a:pPr algn="l" indent="0" marL="0">
-              <a:lnSpc>
-                <a:spcPct val="102000"/>
-              </a:lnSpc>
-              <a:buNone/>
-            </a:pPr>
-            <a:r>
-              <a:rPr lang="en-US" sz="1250" dirty="0">
-                <a:solidFill>
-                  <a:srgbClr val="6B7280"/>
-                </a:solidFill>
-                <a:latin typeface="맑은 고딕" pitchFamily="34" charset="0"/>
-                <a:ea typeface="맑은 고딕" pitchFamily="34" charset="-122"/>
-                <a:cs typeface="맑은 고딕" pitchFamily="34" charset="-120"/>
-              </a:rPr>
-              <a:t>요구사항이 바뀌면 어떤 문서가 영향받는지 일일이 확인해야 함</a:t>
-            </a:r>
-            <a:endParaRPr lang="en-US" sz="1600" dirty="0"/>
-          </a:p>
-        </p:txBody>
-      </p:sp>
-      <p:sp>
-        <p:nvSpPr>
-          <p:cNvPr id="12" name="Shape 10"/>
+              <a:t>요구사항이 바뀔 때마다 영향받는 문서를 일일이 확인해야 함</a:t>
+            </a:r>
+            <a:endParaRPr lang="en-US" sz="1800" dirty="0"/>
+          </a:p>
+        </p:txBody>
+      </p:sp>
+      <p:sp>
+        <p:nvSpPr>
+          <p:cNvPr id="10" name="Shape 8"/>
           <p:cNvSpPr/>
           <p:nvPr/>
         </p:nvSpPr>
@@ -2921,7 +4141,7 @@
       </p:sp>
       <p:sp>
         <p:nvSpPr>
-          <p:cNvPr id="13" name="Text 11"/>
+          <p:cNvPr id="11" name="Text 9"/>
           <p:cNvSpPr/>
           <p:nvPr/>
         </p:nvSpPr>
@@ -2960,7 +4180,7 @@
       </p:sp>
       <p:sp>
         <p:nvSpPr>
-          <p:cNvPr id="14" name="Text 12"/>
+          <p:cNvPr id="12" name="Text 10"/>
           <p:cNvSpPr/>
           <p:nvPr/>
         </p:nvSpPr>
@@ -2999,7 +4219,7 @@
       </p:sp>
       <p:sp>
         <p:nvSpPr>
-          <p:cNvPr id="15" name="Text 13"/>
+          <p:cNvPr id="13" name="Text 11"/>
           <p:cNvSpPr/>
           <p:nvPr/>
         </p:nvSpPr>
@@ -3081,7 +4301,7 @@
       </p:sp>
       <p:sp>
         <p:nvSpPr>
-          <p:cNvPr id="16" name="Text 14"/>
+          <p:cNvPr id="14" name="Text 12"/>
           <p:cNvSpPr/>
           <p:nvPr/>
         </p:nvSpPr>
@@ -3112,7 +4332,7 @@
                 <a:ea typeface="맑은 고딕" pitchFamily="34" charset="-122"/>
                 <a:cs typeface="맑은 고딕" pitchFamily="34" charset="-120"/>
               </a:rPr>
-              <a:t>착수 전에 모호·상충까지 잡아 재작업을 줄인다</a:t>
+              <a:t>착수 전에 불명확·상충까지 잡아 재작업을 줄인다</a:t>
             </a:r>
             <a:endParaRPr lang="en-US" sz="1250" dirty="0"/>
           </a:p>
@@ -3417,7 +4637,7 @@
                 <a:ea typeface="맑은 고딕" pitchFamily="34" charset="-122"/>
                 <a:cs typeface="맑은 고딕" pitchFamily="34" charset="-120"/>
               </a:rPr>
-              <a:t>모호한 표현 + 상충되는 요구를 검출하고 명확화</a:t>
+              <a:t>불명확한 표현 + 상충되는 요구를 검출하고 명확화</a:t>
             </a:r>
             <a:endParaRPr lang="en-US" sz="1300" dirty="0"/>
           </a:p>
@@ -4435,7 +5655,7 @@
                 <a:ea typeface="맑은 고딕" pitchFamily="34" charset="-122"/>
                 <a:cs typeface="맑은 고딕" pitchFamily="34" charset="-120"/>
               </a:rPr>
-              <a:t>모호한 표현 검출
+              <a:t>불명확한 표현 검출
 </a:t>
             </a:r>
             <a:pPr indent="0" marL="0">
@@ -4453,7 +5673,7 @@
                 <a:ea typeface="맑은 고딕" pitchFamily="34" charset="-122"/>
                 <a:cs typeface="맑은 고딕" pitchFamily="34" charset="-120"/>
               </a:rPr>
-              <a:t>수치·기준·주체·조건이 빠져 해석이 갈리는 표현을 유형·근거와 함께 검출 (7가지 유형)</a:t>
+              <a:t>수치·기준·주체·조건이 빠져 해석이 갈리거나 정의가 필요한 표현을 유형·근거와 함께 검출 (7가지 유형)</a:t>
             </a:r>
             <a:endParaRPr lang="en-US" sz="1550" dirty="0"/>
           </a:p>
@@ -4685,7 +5905,7 @@
                 <a:ea typeface="맑은 고딕" pitchFamily="34" charset="-122"/>
                 <a:cs typeface="맑은 고딕" pitchFamily="34" charset="-120"/>
               </a:rPr>
-              <a:t>실제 동작 화면 — 요구사항 1건(내용+비고)에서 모호 지점 검출</a:t>
+              <a:t>실제 동작 화면 — 요구사항 1건(내용+비고)에서 불명확 지점 검출</a:t>
             </a:r>
             <a:endParaRPr lang="en-US" sz="1100" dirty="0"/>
           </a:p>
@@ -5582,6 +6802,45 @@
           </a:p>
         </p:txBody>
       </p:sp>
+      <p:sp>
+        <p:nvSpPr>
+          <p:cNvPr id="21" name="Text 19"/>
+          <p:cNvSpPr/>
+          <p:nvPr/>
+        </p:nvSpPr>
+        <p:spPr>
+          <a:xfrm>
+            <a:off x="566928" y="6035040"/>
+            <a:ext cx="10972800" cy="320040"/>
+          </a:xfrm>
+          <a:prstGeom prst="rect">
+            <a:avLst/>
+          </a:prstGeom>
+          <a:noFill/>
+          <a:ln/>
+        </p:spPr>
+        <p:txBody>
+          <a:bodyPr wrap="square" lIns="0" tIns="0" rIns="0" bIns="0" rtlCol="0" anchor="ctr"/>
+          <a:lstStyle/>
+          <a:p>
+            <a:pPr indent="0" marL="0">
+              <a:buNone/>
+            </a:pPr>
+            <a:r>
+              <a:rPr lang="en-US" sz="1250" b="1" i="1" dirty="0">
+                <a:solidFill>
+                  <a:srgbClr val="6366F1"/>
+                </a:solidFill>
+                <a:latin typeface="맑은 고딕" pitchFamily="34" charset="0"/>
+                <a:ea typeface="맑은 고딕" pitchFamily="34" charset="-122"/>
+                <a:cs typeface="맑은 고딕" pitchFamily="34" charset="-120"/>
+              </a:rPr>
+              <a:t>→ 다음 장: req-tf-01 하나에서 실제로 도출한 예시</a:t>
+            </a:r>
+            <a:endParaRPr lang="en-US" sz="1250" dirty="0"/>
+          </a:p>
+        </p:txBody>
+      </p:sp>
     </p:spTree>
   </p:cSld>
   <p:clrMapOvr>
@@ -5647,7 +6906,7 @@
                 <a:ea typeface="맑은 고딕" pitchFamily="34" charset="-122"/>
                 <a:cs typeface="맑은 고딕" pitchFamily="34" charset="-120"/>
               </a:rPr>
-              <a:t>핵심 기능 3</a:t>
+              <a:t>핵심 기능 2 · 도출 예시 ①</a:t>
             </a:r>
             <a:endParaRPr lang="en-US" sz="1200" dirty="0"/>
           </a:p>
@@ -5686,31 +6945,51 @@
                 <a:ea typeface="맑은 고딕" pitchFamily="34" charset="-122"/>
                 <a:cs typeface="맑은 고딕" pitchFamily="34" charset="-120"/>
               </a:rPr>
-              <a:t>문서 추적성</a:t>
+              <a:t>요구사항 하나 → 기능 · 비기능 요구사항</a:t>
             </a:r>
             <a:endParaRPr lang="en-US" sz="3000" dirty="0"/>
           </a:p>
         </p:txBody>
       </p:sp>
-      <p:sp>
-        <p:nvSpPr>
-          <p:cNvPr id="4" name="Text 2"/>
-          <p:cNvSpPr/>
-          <p:nvPr/>
-        </p:nvSpPr>
-        <p:spPr>
-          <a:xfrm>
-            <a:off x="10424160" y="822960"/>
-            <a:ext cx="1737360" cy="310896"/>
-          </a:xfrm>
-          <a:prstGeom prst="roundRect">
-            <a:avLst>
-              <a:gd name="adj" fmla="val 47059"/>
-            </a:avLst>
-          </a:prstGeom>
-          <a:solidFill>
-            <a:srgbClr val="FEF3C7"/>
-          </a:solidFill>
+      <p:pic>
+        <p:nvPicPr>
+          <p:cNvPr id="4" name="Image 0" descr="/home/user/semes-superrookie/docs/img/ppt-derive-1.png">    </p:cNvPr>
+          <p:cNvPicPr>
+            <a:picLocks noChangeAspect="1"/>
+          </p:cNvPicPr>
+          <p:nvPr/>
+        </p:nvPicPr>
+        <p:blipFill>
+          <a:blip r:embed="rId1"/>
+          <a:stretch>
+            <a:fillRect/>
+          </a:stretch>
+        </p:blipFill>
+        <p:spPr>
+          <a:xfrm>
+            <a:off x="836676" y="1828800"/>
+            <a:ext cx="10515600" cy="3927348"/>
+          </a:xfrm>
+          <a:prstGeom prst="rect">
+            <a:avLst/>
+          </a:prstGeom>
+        </p:spPr>
+      </p:pic>
+      <p:sp>
+        <p:nvSpPr>
+          <p:cNvPr id="5" name="Text 2"/>
+          <p:cNvSpPr/>
+          <p:nvPr/>
+        </p:nvSpPr>
+        <p:spPr>
+          <a:xfrm>
+            <a:off x="566928" y="5943600"/>
+            <a:ext cx="11064240" cy="365760"/>
+          </a:xfrm>
+          <a:prstGeom prst="rect">
+            <a:avLst/>
+          </a:prstGeom>
+          <a:noFill/>
           <a:ln/>
         </p:spPr>
         <p:txBody>
@@ -5721,163 +7000,7 @@
               <a:buNone/>
             </a:pPr>
             <a:r>
-              <a:rPr lang="en-US" sz="1100" b="1" dirty="0">
-                <a:solidFill>
-                  <a:srgbClr val="B45309"/>
-                </a:solidFill>
-                <a:latin typeface="맑은 고딕" pitchFamily="34" charset="0"/>
-                <a:ea typeface="맑은 고딕" pitchFamily="34" charset="-122"/>
-                <a:cs typeface="맑은 고딕" pitchFamily="34" charset="-120"/>
-              </a:rPr>
-              <a:t>개발 예정</a:t>
-            </a:r>
-            <a:endParaRPr lang="en-US" sz="1100" dirty="0"/>
-          </a:p>
-        </p:txBody>
-      </p:sp>
-      <p:sp>
-        <p:nvSpPr>
-          <p:cNvPr id="5" name="Shape 3"/>
-          <p:cNvSpPr/>
-          <p:nvPr/>
-        </p:nvSpPr>
-        <p:spPr>
-          <a:xfrm>
-            <a:off x="566928" y="1874520"/>
-            <a:ext cx="11064240" cy="1097280"/>
-          </a:xfrm>
-          <a:prstGeom prst="roundRect">
-            <a:avLst>
-              <a:gd name="adj" fmla="val 6667"/>
-            </a:avLst>
-          </a:prstGeom>
-          <a:solidFill>
-            <a:srgbClr val="FFFFFF"/>
-          </a:solidFill>
-          <a:ln w="12700">
-            <a:solidFill>
-              <a:srgbClr val="E5E7EB"/>
-            </a:solidFill>
-            <a:prstDash val="solid"/>
-          </a:ln>
-          <a:effectLst>
-            <a:outerShdw sx="100000" sy="100000" kx="0" ky="0" algn="bl" rotWithShape="0" blurRad="127000" dist="50800" dir="5400000">
-              <a:srgbClr val="1E1B4B">
-                <a:alpha val="18000"/>
-              </a:srgbClr>
-            </a:outerShdw>
-          </a:effectLst>
-        </p:spPr>
-      </p:sp>
-      <p:sp>
-        <p:nvSpPr>
-          <p:cNvPr id="6" name="Text 4"/>
-          <p:cNvSpPr/>
-          <p:nvPr/>
-        </p:nvSpPr>
-        <p:spPr>
-          <a:xfrm>
-            <a:off x="822960" y="2167128"/>
-            <a:ext cx="512064" cy="512064"/>
-          </a:xfrm>
-          <a:prstGeom prst="ellipse">
-            <a:avLst/>
-          </a:prstGeom>
-          <a:solidFill>
-            <a:srgbClr val="8B5CF6"/>
-          </a:solidFill>
-          <a:ln/>
-        </p:spPr>
-        <p:txBody>
-          <a:bodyPr wrap="square" lIns="0" tIns="0" rIns="0" bIns="0" rtlCol="0" anchor="ctr"/>
-          <a:lstStyle/>
-          <a:p>
-            <a:pPr algn="ctr" indent="0" marL="0">
-              <a:buNone/>
-            </a:pPr>
-            <a:r>
-              <a:rPr lang="en-US" sz="1800" b="1" dirty="0">
-                <a:solidFill>
-                  <a:srgbClr val="FFFFFF"/>
-                </a:solidFill>
-                <a:latin typeface="맑은 고딕" pitchFamily="34" charset="0"/>
-                <a:ea typeface="맑은 고딕" pitchFamily="34" charset="-122"/>
-                <a:cs typeface="맑은 고딕" pitchFamily="34" charset="-120"/>
-              </a:rPr>
-              <a:t>1</a:t>
-            </a:r>
-            <a:endParaRPr lang="en-US" sz="1800" dirty="0"/>
-          </a:p>
-        </p:txBody>
-      </p:sp>
-      <p:sp>
-        <p:nvSpPr>
-          <p:cNvPr id="7" name="Text 5"/>
-          <p:cNvSpPr/>
-          <p:nvPr/>
-        </p:nvSpPr>
-        <p:spPr>
-          <a:xfrm>
-            <a:off x="1527048" y="2039112"/>
-            <a:ext cx="2926080" cy="731520"/>
-          </a:xfrm>
-          <a:prstGeom prst="rect">
-            <a:avLst/>
-          </a:prstGeom>
-          <a:noFill/>
-          <a:ln/>
-        </p:spPr>
-        <p:txBody>
-          <a:bodyPr wrap="square" lIns="0" tIns="0" rIns="0" bIns="0" rtlCol="0" anchor="ctr"/>
-          <a:lstStyle/>
-          <a:p>
-            <a:pPr indent="0" marL="0">
-              <a:buNone/>
-            </a:pPr>
-            <a:r>
-              <a:rPr lang="en-US" sz="1700" b="1" dirty="0">
-                <a:solidFill>
-                  <a:srgbClr val="1F2937"/>
-                </a:solidFill>
-                <a:latin typeface="맑은 고딕" pitchFamily="34" charset="0"/>
-                <a:ea typeface="맑은 고딕" pitchFamily="34" charset="-122"/>
-                <a:cs typeface="맑은 고딕" pitchFamily="34" charset="-120"/>
-              </a:rPr>
-              <a:t>연결 조회</a:t>
-            </a:r>
-            <a:endParaRPr lang="en-US" sz="1700" dirty="0"/>
-          </a:p>
-        </p:txBody>
-      </p:sp>
-      <p:sp>
-        <p:nvSpPr>
-          <p:cNvPr id="8" name="Text 6"/>
-          <p:cNvSpPr/>
-          <p:nvPr/>
-        </p:nvSpPr>
-        <p:spPr>
-          <a:xfrm>
-            <a:off x="4498848" y="2039112"/>
-            <a:ext cx="6858000" cy="777240"/>
-          </a:xfrm>
-          <a:prstGeom prst="rect">
-            <a:avLst/>
-          </a:prstGeom>
-          <a:noFill/>
-          <a:ln/>
-        </p:spPr>
-        <p:txBody>
-          <a:bodyPr wrap="square" lIns="0" tIns="0" rIns="0" bIns="0" rtlCol="0" anchor="ctr"/>
-          <a:lstStyle/>
-          <a:p>
-            <a:pPr indent="0" marL="0">
-              <a:lnSpc>
-                <a:spcPct val="105000"/>
-              </a:lnSpc>
-              <a:buNone/>
-            </a:pPr>
-            <a:r>
-              <a:rPr lang="en-US" sz="1300" dirty="0">
+              <a:rPr lang="en-US" sz="1250" dirty="0">
                 <a:solidFill>
                   <a:srgbClr val="6B7280"/>
                 </a:solidFill>
@@ -5885,360 +7008,9 @@
                 <a:ea typeface="맑은 고딕" pitchFamily="34" charset="-122"/>
                 <a:cs typeface="맑은 고딕" pitchFamily="34" charset="-120"/>
               </a:rPr>
-              <a:t>요구사항 1건에 연결된 기능요구사항·비기능요구사항·티켓을 한눈에 조회 (양방향)</a:t>
-            </a:r>
-            <a:endParaRPr lang="en-US" sz="1300" dirty="0"/>
-          </a:p>
-        </p:txBody>
-      </p:sp>
-      <p:sp>
-        <p:nvSpPr>
-          <p:cNvPr id="9" name="Shape 7"/>
-          <p:cNvSpPr/>
-          <p:nvPr/>
-        </p:nvSpPr>
-        <p:spPr>
-          <a:xfrm>
-            <a:off x="566928" y="3154680"/>
-            <a:ext cx="11064240" cy="1097280"/>
-          </a:xfrm>
-          <a:prstGeom prst="roundRect">
-            <a:avLst>
-              <a:gd name="adj" fmla="val 6667"/>
-            </a:avLst>
-          </a:prstGeom>
-          <a:solidFill>
-            <a:srgbClr val="FFFFFF"/>
-          </a:solidFill>
-          <a:ln w="12700">
-            <a:solidFill>
-              <a:srgbClr val="E5E7EB"/>
-            </a:solidFill>
-            <a:prstDash val="solid"/>
-          </a:ln>
-          <a:effectLst>
-            <a:outerShdw sx="100000" sy="100000" kx="0" ky="0" algn="bl" rotWithShape="0" blurRad="127000" dist="50800" dir="5400000">
-              <a:srgbClr val="1E1B4B">
-                <a:alpha val="18000"/>
-              </a:srgbClr>
-            </a:outerShdw>
-          </a:effectLst>
-        </p:spPr>
-      </p:sp>
-      <p:sp>
-        <p:nvSpPr>
-          <p:cNvPr id="10" name="Text 8"/>
-          <p:cNvSpPr/>
-          <p:nvPr/>
-        </p:nvSpPr>
-        <p:spPr>
-          <a:xfrm>
-            <a:off x="822960" y="3447288"/>
-            <a:ext cx="512064" cy="512064"/>
-          </a:xfrm>
-          <a:prstGeom prst="ellipse">
-            <a:avLst/>
-          </a:prstGeom>
-          <a:solidFill>
-            <a:srgbClr val="8B5CF6"/>
-          </a:solidFill>
-          <a:ln/>
-        </p:spPr>
-        <p:txBody>
-          <a:bodyPr wrap="square" lIns="0" tIns="0" rIns="0" bIns="0" rtlCol="0" anchor="ctr"/>
-          <a:lstStyle/>
-          <a:p>
-            <a:pPr algn="ctr" indent="0" marL="0">
-              <a:buNone/>
-            </a:pPr>
-            <a:r>
-              <a:rPr lang="en-US" sz="1800" b="1" dirty="0">
-                <a:solidFill>
-                  <a:srgbClr val="FFFFFF"/>
-                </a:solidFill>
-                <a:latin typeface="맑은 고딕" pitchFamily="34" charset="0"/>
-                <a:ea typeface="맑은 고딕" pitchFamily="34" charset="-122"/>
-                <a:cs typeface="맑은 고딕" pitchFamily="34" charset="-120"/>
-              </a:rPr>
-              <a:t>2</a:t>
-            </a:r>
-            <a:endParaRPr lang="en-US" sz="1800" dirty="0"/>
-          </a:p>
-        </p:txBody>
-      </p:sp>
-      <p:sp>
-        <p:nvSpPr>
-          <p:cNvPr id="11" name="Text 9"/>
-          <p:cNvSpPr/>
-          <p:nvPr/>
-        </p:nvSpPr>
-        <p:spPr>
-          <a:xfrm>
-            <a:off x="1527048" y="3319272"/>
-            <a:ext cx="2926080" cy="731520"/>
-          </a:xfrm>
-          <a:prstGeom prst="rect">
-            <a:avLst/>
-          </a:prstGeom>
-          <a:noFill/>
-          <a:ln/>
-        </p:spPr>
-        <p:txBody>
-          <a:bodyPr wrap="square" lIns="0" tIns="0" rIns="0" bIns="0" rtlCol="0" anchor="ctr"/>
-          <a:lstStyle/>
-          <a:p>
-            <a:pPr indent="0" marL="0">
-              <a:buNone/>
-            </a:pPr>
-            <a:r>
-              <a:rPr lang="en-US" sz="1700" b="1" dirty="0">
-                <a:solidFill>
-                  <a:srgbClr val="1F2937"/>
-                </a:solidFill>
-                <a:latin typeface="맑은 고딕" pitchFamily="34" charset="0"/>
-                <a:ea typeface="맑은 고딕" pitchFamily="34" charset="-122"/>
-                <a:cs typeface="맑은 고딕" pitchFamily="34" charset="-120"/>
-              </a:rPr>
-              <a:t>변경 영향 분석</a:t>
-            </a:r>
-            <a:endParaRPr lang="en-US" sz="1700" dirty="0"/>
-          </a:p>
-        </p:txBody>
-      </p:sp>
-      <p:sp>
-        <p:nvSpPr>
-          <p:cNvPr id="12" name="Text 10"/>
-          <p:cNvSpPr/>
-          <p:nvPr/>
-        </p:nvSpPr>
-        <p:spPr>
-          <a:xfrm>
-            <a:off x="4498848" y="3319272"/>
-            <a:ext cx="6858000" cy="777240"/>
-          </a:xfrm>
-          <a:prstGeom prst="rect">
-            <a:avLst/>
-          </a:prstGeom>
-          <a:noFill/>
-          <a:ln/>
-        </p:spPr>
-        <p:txBody>
-          <a:bodyPr wrap="square" lIns="0" tIns="0" rIns="0" bIns="0" rtlCol="0" anchor="ctr"/>
-          <a:lstStyle/>
-          <a:p>
-            <a:pPr indent="0" marL="0">
-              <a:lnSpc>
-                <a:spcPct val="105000"/>
-              </a:lnSpc>
-              <a:buNone/>
-            </a:pPr>
-            <a:r>
-              <a:rPr lang="en-US" sz="1300" dirty="0">
-                <a:solidFill>
-                  <a:srgbClr val="6B7280"/>
-                </a:solidFill>
-                <a:latin typeface="맑은 고딕" pitchFamily="34" charset="0"/>
-                <a:ea typeface="맑은 고딕" pitchFamily="34" charset="-122"/>
-                <a:cs typeface="맑은 고딕" pitchFamily="34" charset="-120"/>
-              </a:rPr>
-              <a:t>요구사항이 수정되면 영향받는 문서·티켓을 자동으로 표시 → 누락 방지</a:t>
-            </a:r>
-            <a:endParaRPr lang="en-US" sz="1300" dirty="0"/>
-          </a:p>
-        </p:txBody>
-      </p:sp>
-      <p:sp>
-        <p:nvSpPr>
-          <p:cNvPr id="13" name="Shape 11"/>
-          <p:cNvSpPr/>
-          <p:nvPr/>
-        </p:nvSpPr>
-        <p:spPr>
-          <a:xfrm>
-            <a:off x="566928" y="4434840"/>
-            <a:ext cx="11064240" cy="1097280"/>
-          </a:xfrm>
-          <a:prstGeom prst="roundRect">
-            <a:avLst>
-              <a:gd name="adj" fmla="val 6667"/>
-            </a:avLst>
-          </a:prstGeom>
-          <a:solidFill>
-            <a:srgbClr val="EEF2FF"/>
-          </a:solidFill>
-          <a:ln w="12700">
-            <a:solidFill>
-              <a:srgbClr val="E5E7EB"/>
-            </a:solidFill>
-            <a:prstDash val="solid"/>
-          </a:ln>
-          <a:effectLst>
-            <a:outerShdw sx="100000" sy="100000" kx="0" ky="0" algn="bl" rotWithShape="0" blurRad="127000" dist="50800" dir="5400000">
-              <a:srgbClr val="1E1B4B">
-                <a:alpha val="18000"/>
-              </a:srgbClr>
-            </a:outerShdw>
-          </a:effectLst>
-        </p:spPr>
-      </p:sp>
-      <p:sp>
-        <p:nvSpPr>
-          <p:cNvPr id="14" name="Text 12"/>
-          <p:cNvSpPr/>
-          <p:nvPr/>
-        </p:nvSpPr>
-        <p:spPr>
-          <a:xfrm>
-            <a:off x="822960" y="4727448"/>
-            <a:ext cx="512064" cy="512064"/>
-          </a:xfrm>
-          <a:prstGeom prst="ellipse">
-            <a:avLst/>
-          </a:prstGeom>
-          <a:solidFill>
-            <a:srgbClr val="8B5CF6"/>
-          </a:solidFill>
-          <a:ln/>
-        </p:spPr>
-        <p:txBody>
-          <a:bodyPr wrap="square" lIns="0" tIns="0" rIns="0" bIns="0" rtlCol="0" anchor="ctr"/>
-          <a:lstStyle/>
-          <a:p>
-            <a:pPr algn="ctr" indent="0" marL="0">
-              <a:buNone/>
-            </a:pPr>
-            <a:r>
-              <a:rPr lang="en-US" sz="1800" b="1" dirty="0">
-                <a:solidFill>
-                  <a:srgbClr val="FFFFFF"/>
-                </a:solidFill>
-                <a:latin typeface="맑은 고딕" pitchFamily="34" charset="0"/>
-                <a:ea typeface="맑은 고딕" pitchFamily="34" charset="-122"/>
-                <a:cs typeface="맑은 고딕" pitchFamily="34" charset="-120"/>
-              </a:rPr>
-              <a:t>3</a:t>
-            </a:r>
-            <a:endParaRPr lang="en-US" sz="1800" dirty="0"/>
-          </a:p>
-        </p:txBody>
-      </p:sp>
-      <p:sp>
-        <p:nvSpPr>
-          <p:cNvPr id="15" name="Text 13"/>
-          <p:cNvSpPr/>
-          <p:nvPr/>
-        </p:nvSpPr>
-        <p:spPr>
-          <a:xfrm>
-            <a:off x="1527048" y="4599432"/>
-            <a:ext cx="2926080" cy="731520"/>
-          </a:xfrm>
-          <a:prstGeom prst="rect">
-            <a:avLst/>
-          </a:prstGeom>
-          <a:noFill/>
-          <a:ln/>
-        </p:spPr>
-        <p:txBody>
-          <a:bodyPr wrap="square" lIns="0" tIns="0" rIns="0" bIns="0" rtlCol="0" anchor="ctr"/>
-          <a:lstStyle/>
-          <a:p>
-            <a:pPr indent="0" marL="0">
-              <a:buNone/>
-            </a:pPr>
-            <a:r>
-              <a:rPr lang="en-US" sz="1700" b="1" dirty="0">
-                <a:solidFill>
-                  <a:srgbClr val="1F2937"/>
-                </a:solidFill>
-                <a:latin typeface="맑은 고딕" pitchFamily="34" charset="0"/>
-                <a:ea typeface="맑은 고딕" pitchFamily="34" charset="-122"/>
-                <a:cs typeface="맑은 고딕" pitchFamily="34" charset="-120"/>
-              </a:rPr>
-              <a:t>진행상황 / 개발완료</a:t>
-            </a:r>
-            <a:endParaRPr lang="en-US" sz="1700" dirty="0"/>
-          </a:p>
-        </p:txBody>
-      </p:sp>
-      <p:sp>
-        <p:nvSpPr>
-          <p:cNvPr id="16" name="Text 14"/>
-          <p:cNvSpPr/>
-          <p:nvPr/>
-        </p:nvSpPr>
-        <p:spPr>
-          <a:xfrm>
-            <a:off x="4498848" y="4599432"/>
-            <a:ext cx="6858000" cy="777240"/>
-          </a:xfrm>
-          <a:prstGeom prst="rect">
-            <a:avLst/>
-          </a:prstGeom>
-          <a:noFill/>
-          <a:ln/>
-        </p:spPr>
-        <p:txBody>
-          <a:bodyPr wrap="square" lIns="0" tIns="0" rIns="0" bIns="0" rtlCol="0" anchor="ctr"/>
-          <a:lstStyle/>
-          <a:p>
-            <a:pPr indent="0" marL="0">
-              <a:lnSpc>
-                <a:spcPct val="105000"/>
-              </a:lnSpc>
-              <a:buNone/>
-            </a:pPr>
-            <a:r>
-              <a:rPr lang="en-US" sz="1300" dirty="0">
-                <a:solidFill>
-                  <a:srgbClr val="6B7280"/>
-                </a:solidFill>
-                <a:latin typeface="맑은 고딕" pitchFamily="34" charset="0"/>
-                <a:ea typeface="맑은 고딕" pitchFamily="34" charset="-122"/>
-                <a:cs typeface="맑은 고딕" pitchFamily="34" charset="-120"/>
-              </a:rPr>
-              <a:t>요구사항·티켓의 상태(작성중·검토·개발중·완료)와 진행률을 한눈에</a:t>
-            </a:r>
-            <a:endParaRPr lang="en-US" sz="1300" dirty="0"/>
-          </a:p>
-        </p:txBody>
-      </p:sp>
-      <p:sp>
-        <p:nvSpPr>
-          <p:cNvPr id="17" name="Text 15"/>
-          <p:cNvSpPr/>
-          <p:nvPr/>
-        </p:nvSpPr>
-        <p:spPr>
-          <a:xfrm>
-            <a:off x="566928" y="5943600"/>
-            <a:ext cx="10972800" cy="365760"/>
-          </a:xfrm>
-          <a:prstGeom prst="rect">
-            <a:avLst/>
-          </a:prstGeom>
-          <a:noFill/>
-          <a:ln/>
-        </p:spPr>
-        <p:txBody>
-          <a:bodyPr wrap="square" lIns="0" tIns="0" rIns="0" bIns="0" rtlCol="0" anchor="ctr"/>
-          <a:lstStyle/>
-          <a:p>
-            <a:pPr indent="0" marL="0">
-              <a:buNone/>
-            </a:pPr>
-            <a:r>
-              <a:rPr lang="en-US" sz="1200" i="1" dirty="0">
-                <a:solidFill>
-                  <a:srgbClr val="6B7280"/>
-                </a:solidFill>
-                <a:latin typeface="맑은 고딕" pitchFamily="34" charset="0"/>
-                <a:ea typeface="맑은 고딕" pitchFamily="34" charset="-122"/>
-                <a:cs typeface="맑은 고딕" pitchFamily="34" charset="-120"/>
-              </a:rPr>
-              <a:t>※ 기존 “DB 변경관리”를 대체 — 컨셉(고객 요구사항 기반 문서화)에 맞춰 재정의</a:t>
-            </a:r>
-            <a:endParaRPr lang="en-US" sz="1200" dirty="0"/>
+              <a:t>req-tf-01(신규 태스크 생성) 한 건에서 기능요구사항 6건 · 비기능요구사항 5건을 자동 도출 (AI 초안)</a:t>
+            </a:r>
+            <a:endParaRPr lang="en-US" sz="1250" dirty="0"/>
           </a:p>
         </p:txBody>
       </p:sp>
@@ -6307,7 +7079,7 @@
                 <a:ea typeface="맑은 고딕" pitchFamily="34" charset="-122"/>
                 <a:cs typeface="맑은 고딕" pitchFamily="34" charset="-120"/>
               </a:rPr>
-              <a:t>AI</a:t>
+              <a:t>핵심 기능 2 · 도출 예시 ②</a:t>
             </a:r>
             <a:endParaRPr lang="en-US" sz="1200" dirty="0"/>
           </a:p>
@@ -6346,452 +7118,72 @@
                 <a:ea typeface="맑은 고딕" pitchFamily="34" charset="-122"/>
                 <a:cs typeface="맑은 고딕" pitchFamily="34" charset="-120"/>
               </a:rPr>
-              <a:t>AI — 두 엔진 비교</a:t>
+              <a:t>요구사항 하나 → Jira 티켓 4종</a:t>
             </a:r>
             <a:endParaRPr lang="en-US" sz="3000" dirty="0"/>
           </a:p>
         </p:txBody>
       </p:sp>
-      <p:sp>
-        <p:nvSpPr>
-          <p:cNvPr id="4" name="Shape 2"/>
-          <p:cNvSpPr/>
-          <p:nvPr/>
-        </p:nvSpPr>
-        <p:spPr>
-          <a:xfrm>
-            <a:off x="566928" y="1783080"/>
-            <a:ext cx="5440680" cy="2697480"/>
-          </a:xfrm>
-          <a:prstGeom prst="roundRect">
-            <a:avLst>
-              <a:gd name="adj" fmla="val 3390"/>
-            </a:avLst>
-          </a:prstGeom>
-          <a:solidFill>
-            <a:srgbClr val="EEF2FF"/>
-          </a:solidFill>
-          <a:ln w="12700">
-            <a:solidFill>
-              <a:srgbClr val="C7D2FE"/>
-            </a:solidFill>
-            <a:prstDash val="solid"/>
-          </a:ln>
-        </p:spPr>
-      </p:sp>
-      <p:sp>
-        <p:nvSpPr>
-          <p:cNvPr id="5" name="Text 3"/>
-          <p:cNvSpPr/>
-          <p:nvPr/>
-        </p:nvSpPr>
-        <p:spPr>
-          <a:xfrm>
-            <a:off x="886968" y="2011680"/>
-            <a:ext cx="4846320" cy="457200"/>
-          </a:xfrm>
-          <a:prstGeom prst="rect">
-            <a:avLst/>
-          </a:prstGeom>
-          <a:noFill/>
-          <a:ln/>
-        </p:spPr>
-        <p:txBody>
-          <a:bodyPr wrap="square" lIns="0" tIns="0" rIns="0" bIns="0" rtlCol="0" anchor="ctr"/>
-          <a:lstStyle/>
-          <a:p>
-            <a:pPr indent="0" marL="0">
-              <a:buNone/>
-            </a:pPr>
-            <a:r>
-              <a:rPr lang="en-US" sz="1900" b="1" dirty="0">
-                <a:solidFill>
-                  <a:srgbClr val="6366F1"/>
-                </a:solidFill>
-                <a:latin typeface="맑은 고딕" pitchFamily="34" charset="0"/>
-                <a:ea typeface="맑은 고딕" pitchFamily="34" charset="-122"/>
-                <a:cs typeface="맑은 고딕" pitchFamily="34" charset="-120"/>
-              </a:rPr>
-              <a:t>로컬 Qwen3-8B</a:t>
-            </a:r>
-            <a:endParaRPr lang="en-US" sz="1900" dirty="0"/>
-          </a:p>
-        </p:txBody>
-      </p:sp>
-      <p:sp>
-        <p:nvSpPr>
-          <p:cNvPr id="6" name="Text 4"/>
-          <p:cNvSpPr/>
-          <p:nvPr/>
-        </p:nvSpPr>
-        <p:spPr>
-          <a:xfrm>
-            <a:off x="932688" y="2606040"/>
-            <a:ext cx="4754880" cy="1737360"/>
-          </a:xfrm>
-          <a:prstGeom prst="rect">
-            <a:avLst/>
-          </a:prstGeom>
-          <a:noFill/>
-          <a:ln/>
-        </p:spPr>
-        <p:txBody>
-          <a:bodyPr wrap="square" lIns="0" tIns="0" rIns="0" bIns="0" rtlCol="0" anchor="ctr"/>
-          <a:lstStyle/>
-          <a:p>
-            <a:pPr marL="342900" indent="-342900">
-              <a:spcAft>
-                <a:spcPts val="700"/>
-              </a:spcAft>
-              <a:buSzPct val="100000"/>
-              <a:buChar char="•"/>
-            </a:pPr>
-            <a:r>
-              <a:rPr lang="en-US" sz="1300" dirty="0">
-                <a:solidFill>
-                  <a:srgbClr val="1F2937"/>
-                </a:solidFill>
-                <a:latin typeface="맑은 고딕" pitchFamily="34" charset="0"/>
-                <a:ea typeface="맑은 고딕" pitchFamily="34" charset="-122"/>
-                <a:cs typeface="맑은 고딕" pitchFamily="34" charset="-120"/>
-              </a:rPr>
-              <a:t>내 워크스테이션(P4000 8GB)에서 직접</a:t>
-            </a:r>
-            <a:endParaRPr lang="en-US" sz="1300" dirty="0"/>
-          </a:p>
-          <a:p>
-            <a:pPr marL="342900" indent="-342900">
-              <a:spcAft>
-                <a:spcPts val="700"/>
-              </a:spcAft>
-              <a:buSzPct val="100000"/>
-              <a:buChar char="•"/>
-            </a:pPr>
-            <a:r>
-              <a:rPr lang="en-US" sz="1300" dirty="0">
-                <a:solidFill>
-                  <a:srgbClr val="1F2937"/>
-                </a:solidFill>
-                <a:latin typeface="맑은 고딕" pitchFamily="34" charset="0"/>
-                <a:ea typeface="맑은 고딕" pitchFamily="34" charset="-122"/>
-                <a:cs typeface="맑은 고딕" pitchFamily="34" charset="-120"/>
-              </a:rPr>
-              <a:t>8B 모델 · GGUF 양자화 Q5_K_M(≈5.85GB)</a:t>
-            </a:r>
-            <a:endParaRPr lang="en-US" sz="1300" dirty="0"/>
-          </a:p>
-          <a:p>
-            <a:pPr marL="342900" indent="-342900">
-              <a:spcAft>
-                <a:spcPts val="700"/>
-              </a:spcAft>
-              <a:buSzPct val="100000"/>
-              <a:buChar char="•"/>
-            </a:pPr>
-            <a:r>
-              <a:rPr lang="en-US" sz="1300" dirty="0">
-                <a:solidFill>
-                  <a:srgbClr val="1F2937"/>
-                </a:solidFill>
-                <a:latin typeface="맑은 고딕" pitchFamily="34" charset="0"/>
-                <a:ea typeface="맑은 고딕" pitchFamily="34" charset="-122"/>
-                <a:cs typeface="맑은 고딕" pitchFamily="34" charset="-120"/>
-              </a:rPr>
-              <a:t>오프라인 자립 · 한국어 강점</a:t>
-            </a:r>
-            <a:endParaRPr lang="en-US" sz="1300" dirty="0"/>
-          </a:p>
-        </p:txBody>
-      </p:sp>
-      <p:sp>
-        <p:nvSpPr>
-          <p:cNvPr id="7" name="Shape 5"/>
-          <p:cNvSpPr/>
-          <p:nvPr/>
-        </p:nvSpPr>
-        <p:spPr>
-          <a:xfrm>
-            <a:off x="6327648" y="1783080"/>
-            <a:ext cx="5440680" cy="2697480"/>
-          </a:xfrm>
-          <a:prstGeom prst="roundRect">
-            <a:avLst>
-              <a:gd name="adj" fmla="val 3390"/>
-            </a:avLst>
-          </a:prstGeom>
-          <a:solidFill>
-            <a:srgbClr val="F5F3FF"/>
-          </a:solidFill>
-          <a:ln w="12700">
-            <a:solidFill>
-              <a:srgbClr val="DDD6FE"/>
-            </a:solidFill>
-            <a:prstDash val="solid"/>
-          </a:ln>
-        </p:spPr>
-      </p:sp>
-      <p:sp>
-        <p:nvSpPr>
-          <p:cNvPr id="8" name="Text 6"/>
-          <p:cNvSpPr/>
-          <p:nvPr/>
-        </p:nvSpPr>
-        <p:spPr>
-          <a:xfrm>
-            <a:off x="6647688" y="2011680"/>
-            <a:ext cx="4846320" cy="457200"/>
-          </a:xfrm>
-          <a:prstGeom prst="rect">
-            <a:avLst/>
-          </a:prstGeom>
-          <a:noFill/>
-          <a:ln/>
-        </p:spPr>
-        <p:txBody>
-          <a:bodyPr wrap="square" lIns="0" tIns="0" rIns="0" bIns="0" rtlCol="0" anchor="ctr"/>
-          <a:lstStyle/>
-          <a:p>
-            <a:pPr indent="0" marL="0">
-              <a:buNone/>
-            </a:pPr>
-            <a:r>
-              <a:rPr lang="en-US" sz="1900" b="1" dirty="0">
-                <a:solidFill>
-                  <a:srgbClr val="8B5CF6"/>
-                </a:solidFill>
-                <a:latin typeface="맑은 고딕" pitchFamily="34" charset="0"/>
-                <a:ea typeface="맑은 고딕" pitchFamily="34" charset="-122"/>
-                <a:cs typeface="맑은 고딕" pitchFamily="34" charset="-120"/>
-              </a:rPr>
-              <a:t>사내 GPT-OSS-120B</a:t>
-            </a:r>
-            <a:endParaRPr lang="en-US" sz="1900" dirty="0"/>
-          </a:p>
-        </p:txBody>
-      </p:sp>
-      <p:sp>
-        <p:nvSpPr>
-          <p:cNvPr id="9" name="Text 7"/>
-          <p:cNvSpPr/>
-          <p:nvPr/>
-        </p:nvSpPr>
-        <p:spPr>
-          <a:xfrm>
-            <a:off x="6693408" y="2606040"/>
-            <a:ext cx="4754880" cy="1737360"/>
-          </a:xfrm>
-          <a:prstGeom prst="rect">
-            <a:avLst/>
-          </a:prstGeom>
-          <a:noFill/>
-          <a:ln/>
-        </p:spPr>
-        <p:txBody>
-          <a:bodyPr wrap="square" lIns="0" tIns="0" rIns="0" bIns="0" rtlCol="0" anchor="ctr"/>
-          <a:lstStyle/>
-          <a:p>
-            <a:pPr marL="342900" indent="-342900">
-              <a:spcAft>
-                <a:spcPts val="700"/>
-              </a:spcAft>
-              <a:buSzPct val="100000"/>
-              <a:buChar char="•"/>
-            </a:pPr>
-            <a:r>
-              <a:rPr lang="en-US" sz="1300" dirty="0">
-                <a:solidFill>
-                  <a:srgbClr val="1F2937"/>
-                </a:solidFill>
-                <a:latin typeface="맑은 고딕" pitchFamily="34" charset="0"/>
-                <a:ea typeface="맑은 고딕" pitchFamily="34" charset="-122"/>
-                <a:cs typeface="맑은 고딕" pitchFamily="34" charset="-120"/>
-              </a:rPr>
-              <a:t>사내 LLM API 서비스(OpenAI 호환)</a:t>
-            </a:r>
-            <a:endParaRPr lang="en-US" sz="1300" dirty="0"/>
-          </a:p>
-          <a:p>
-            <a:pPr marL="342900" indent="-342900">
-              <a:spcAft>
-                <a:spcPts val="700"/>
-              </a:spcAft>
-              <a:buSzPct val="100000"/>
-              <a:buChar char="•"/>
-            </a:pPr>
-            <a:r>
-              <a:rPr lang="en-US" sz="1300" dirty="0">
-                <a:solidFill>
-                  <a:srgbClr val="1F2937"/>
-                </a:solidFill>
-                <a:latin typeface="맑은 고딕" pitchFamily="34" charset="0"/>
-                <a:ea typeface="맑은 고딕" pitchFamily="34" charset="-122"/>
-                <a:cs typeface="맑은 고딕" pitchFamily="34" charset="-120"/>
-              </a:rPr>
-              <a:t>훨씬 큰 모델 → 어려운 판단 정확도 유리</a:t>
-            </a:r>
-            <a:endParaRPr lang="en-US" sz="1300" dirty="0"/>
-          </a:p>
-          <a:p>
-            <a:pPr marL="342900" indent="-342900">
-              <a:spcAft>
-                <a:spcPts val="700"/>
-              </a:spcAft>
-              <a:buSzPct val="100000"/>
-              <a:buChar char="•"/>
-            </a:pPr>
-            <a:r>
-              <a:rPr lang="en-US" sz="1300" dirty="0">
-                <a:solidFill>
-                  <a:srgbClr val="1F2937"/>
-                </a:solidFill>
-                <a:latin typeface="맑은 고딕" pitchFamily="34" charset="0"/>
-                <a:ea typeface="맑은 고딕" pitchFamily="34" charset="-122"/>
-                <a:cs typeface="맑은 고딕" pitchFamily="34" charset="-120"/>
-              </a:rPr>
-              <a:t>공용 서버 의존</a:t>
-            </a:r>
-            <a:endParaRPr lang="en-US" sz="1300" dirty="0"/>
-          </a:p>
-        </p:txBody>
-      </p:sp>
-      <p:sp>
-        <p:nvSpPr>
-          <p:cNvPr id="10" name="Shape 8"/>
-          <p:cNvSpPr/>
-          <p:nvPr/>
-        </p:nvSpPr>
-        <p:spPr>
-          <a:xfrm>
-            <a:off x="566928" y="4709160"/>
-            <a:ext cx="11064240" cy="1463040"/>
-          </a:xfrm>
-          <a:prstGeom prst="roundRect">
-            <a:avLst>
-              <a:gd name="adj" fmla="val 6250"/>
-            </a:avLst>
-          </a:prstGeom>
-          <a:solidFill>
-            <a:srgbClr val="1E1B4B"/>
-          </a:solidFill>
-          <a:ln/>
-          <a:effectLst>
-            <a:outerShdw sx="100000" sy="100000" kx="0" ky="0" algn="bl" rotWithShape="0" blurRad="127000" dist="50800" dir="5400000">
-              <a:srgbClr val="1E1B4B">
-                <a:alpha val="18000"/>
-              </a:srgbClr>
-            </a:outerShdw>
-          </a:effectLst>
-        </p:spPr>
-      </p:sp>
-      <p:sp>
-        <p:nvSpPr>
-          <p:cNvPr id="11" name="Text 9"/>
-          <p:cNvSpPr/>
-          <p:nvPr/>
-        </p:nvSpPr>
-        <p:spPr>
-          <a:xfrm>
-            <a:off x="886968" y="4892040"/>
-            <a:ext cx="10424160" cy="457200"/>
-          </a:xfrm>
-          <a:prstGeom prst="rect">
-            <a:avLst/>
-          </a:prstGeom>
-          <a:noFill/>
-          <a:ln/>
-        </p:spPr>
-        <p:txBody>
-          <a:bodyPr wrap="square" lIns="0" tIns="0" rIns="0" bIns="0" rtlCol="0" anchor="ctr"/>
-          <a:lstStyle/>
-          <a:p>
-            <a:pPr indent="0" marL="0">
-              <a:buNone/>
-            </a:pPr>
-            <a:r>
-              <a:rPr lang="en-US" sz="1350" b="1" dirty="0">
-                <a:solidFill>
-                  <a:srgbClr val="FFFFFF"/>
-                </a:solidFill>
-                <a:latin typeface="맑은 고딕" pitchFamily="34" charset="0"/>
-                <a:ea typeface="맑은 고딕" pitchFamily="34" charset="-122"/>
-                <a:cs typeface="맑은 고딕" pitchFamily="34" charset="-120"/>
-              </a:rPr>
-              <a:t>응답 시간은 둘 다 3~5초로 비슷</a:t>
-            </a:r>
-            <a:pPr indent="0" marL="0">
-              <a:buNone/>
-            </a:pPr>
-            <a:r>
-              <a:rPr lang="en-US" sz="1350" dirty="0">
-                <a:solidFill>
-                  <a:srgbClr val="C7D2FE"/>
-                </a:solidFill>
-                <a:latin typeface="맑은 고딕" pitchFamily="34" charset="0"/>
-                <a:ea typeface="맑은 고딕" pitchFamily="34" charset="-122"/>
-                <a:cs typeface="맑은 고딕" pitchFamily="34" charset="-120"/>
-              </a:rPr>
-              <a:t> → 속도가 아니라 정확도·자립성으로 선택. 동일 요구사항 세트로 실측 후 확정.</a:t>
-            </a:r>
-            <a:endParaRPr lang="en-US" sz="1350" dirty="0"/>
-          </a:p>
-        </p:txBody>
-      </p:sp>
-      <p:sp>
-        <p:nvSpPr>
-          <p:cNvPr id="12" name="Text 10"/>
-          <p:cNvSpPr/>
-          <p:nvPr/>
-        </p:nvSpPr>
-        <p:spPr>
-          <a:xfrm>
-            <a:off x="886968" y="5440680"/>
-            <a:ext cx="10424160" cy="640080"/>
-          </a:xfrm>
-          <a:prstGeom prst="rect">
-            <a:avLst/>
-          </a:prstGeom>
-          <a:noFill/>
-          <a:ln/>
-        </p:spPr>
-        <p:txBody>
-          <a:bodyPr wrap="square" lIns="0" tIns="0" rIns="0" bIns="0" rtlCol="0" anchor="ctr"/>
-          <a:lstStyle/>
-          <a:p>
-            <a:pPr indent="0" marL="0">
-              <a:lnSpc>
-                <a:spcPct val="105000"/>
-              </a:lnSpc>
-              <a:buNone/>
-            </a:pPr>
-            <a:r>
-              <a:rPr lang="en-US" sz="1250" b="1" dirty="0">
-                <a:solidFill>
-                  <a:srgbClr val="A5B4FC"/>
-                </a:solidFill>
-                <a:latin typeface="맑은 고딕" pitchFamily="34" charset="0"/>
-                <a:ea typeface="맑은 고딕" pitchFamily="34" charset="-122"/>
-                <a:cs typeface="맑은 고딕" pitchFamily="34" charset="-120"/>
-              </a:rPr>
-              <a:t>양자화란?</a:t>
-            </a:r>
-            <a:pPr indent="0" marL="0">
-              <a:lnSpc>
-                <a:spcPct val="105000"/>
-              </a:lnSpc>
-              <a:buNone/>
-            </a:pPr>
-            <a:r>
-              <a:rPr lang="en-US" sz="1250" dirty="0">
-                <a:solidFill>
-                  <a:srgbClr val="C7D2FE"/>
-                </a:solidFill>
-                <a:latin typeface="맑은 고딕" pitchFamily="34" charset="0"/>
-                <a:ea typeface="맑은 고딕" pitchFamily="34" charset="-122"/>
-                <a:cs typeface="맑은 고딕" pitchFamily="34" charset="-120"/>
-              </a:rPr>
-              <a:t>  사진을 JPG로 압축하듯 용량↓·품질 소폭↓. 8B 원본(≈16GB)은 8GB GPU에 못 올라가 5.85GB로 압축해 사용.</a:t>
-            </a:r>
-            <a:endParaRPr lang="en-US" sz="1250" dirty="0"/>
+      <p:pic>
+        <p:nvPicPr>
+          <p:cNvPr id="4" name="Image 0" descr="/home/user/semes-superrookie/docs/img/ppt-derive-2.png">    </p:cNvPr>
+          <p:cNvPicPr>
+            <a:picLocks noChangeAspect="1"/>
+          </p:cNvPicPr>
+          <p:nvPr/>
+        </p:nvPicPr>
+        <p:blipFill>
+          <a:blip r:embed="rId1"/>
+          <a:stretch>
+            <a:fillRect/>
+          </a:stretch>
+        </p:blipFill>
+        <p:spPr>
+          <a:xfrm>
+            <a:off x="836676" y="1691640"/>
+            <a:ext cx="10515600" cy="4453128"/>
+          </a:xfrm>
+          <a:prstGeom prst="rect">
+            <a:avLst/>
+          </a:prstGeom>
+        </p:spPr>
+      </p:pic>
+      <p:sp>
+        <p:nvSpPr>
+          <p:cNvPr id="5" name="Text 2"/>
+          <p:cNvSpPr/>
+          <p:nvPr/>
+        </p:nvSpPr>
+        <p:spPr>
+          <a:xfrm>
+            <a:off x="566928" y="6263640"/>
+            <a:ext cx="11064240" cy="365760"/>
+          </a:xfrm>
+          <a:prstGeom prst="rect">
+            <a:avLst/>
+          </a:prstGeom>
+          <a:noFill/>
+          <a:ln/>
+        </p:spPr>
+        <p:txBody>
+          <a:bodyPr wrap="square" lIns="0" tIns="0" rIns="0" bIns="0" rtlCol="0" anchor="ctr"/>
+          <a:lstStyle/>
+          <a:p>
+            <a:pPr algn="ctr" indent="0" marL="0">
+              <a:buNone/>
+            </a:pPr>
+            <a:r>
+              <a:rPr lang="en-US" sz="1200" dirty="0">
+                <a:solidFill>
+                  <a:srgbClr val="6B7280"/>
+                </a:solidFill>
+                <a:latin typeface="맑은 고딕" pitchFamily="34" charset="0"/>
+                <a:ea typeface="맑은 고딕" pitchFamily="34" charset="-122"/>
+                <a:cs typeface="맑은 고딕" pitchFamily="34" charset="-120"/>
+              </a:rPr>
+              <a:t>정해진 양식(템플릿)+사전 프롬프트로 4종 이슈 초안 생성 · Detail Design은 시퀀스 다이어그램까지 자동</a:t>
+            </a:r>
+            <a:endParaRPr lang="en-US" sz="1200" dirty="0"/>
           </a:p>
         </p:txBody>
       </p:sp>
@@ -6809,7 +7201,7 @@
     <p:bg>
       <p:bgPr>
         <a:solidFill>
-          <a:srgbClr val="1E1B4B"/>
+          <a:srgbClr val="FFFFFF"/>
         </a:solidFill>
       </p:bgPr>
     </p:bg>
@@ -6835,7 +7227,7 @@
         </p:nvSpPr>
         <p:spPr>
           <a:xfrm>
-            <a:off x="566928" y="502920"/>
+            <a:off x="566928" y="457200"/>
             <a:ext cx="10058400" cy="274320"/>
           </a:xfrm>
           <a:prstGeom prst="rect">
@@ -6854,13 +7246,13 @@
             <a:r>
               <a:rPr lang="en-US" sz="1200" b="1" spc="100" kern="0" dirty="0">
                 <a:solidFill>
-                  <a:srgbClr val="A5B4FC"/>
-                </a:solidFill>
-                <a:latin typeface="맑은 고딕" pitchFamily="34" charset="0"/>
-                <a:ea typeface="맑은 고딕" pitchFamily="34" charset="-122"/>
-                <a:cs typeface="맑은 고딕" pitchFamily="34" charset="-120"/>
-              </a:rPr>
-              <a:t>기대 효과</a:t>
+                  <a:srgbClr val="6366F1"/>
+                </a:solidFill>
+                <a:latin typeface="맑은 고딕" pitchFamily="34" charset="0"/>
+                <a:ea typeface="맑은 고딕" pitchFamily="34" charset="-122"/>
+                <a:cs typeface="맑은 고딕" pitchFamily="34" charset="-120"/>
+              </a:rPr>
+              <a:t>핵심 기능 3</a:t>
             </a:r>
             <a:endParaRPr lang="en-US" sz="1200" dirty="0"/>
           </a:p>
@@ -6874,7 +7266,7 @@
         </p:nvSpPr>
         <p:spPr>
           <a:xfrm>
-            <a:off x="566928" y="804672"/>
+            <a:off x="566928" y="749808"/>
             <a:ext cx="10515600" cy="640080"/>
           </a:xfrm>
           <a:prstGeom prst="rect">
@@ -6893,13 +7285,13 @@
             <a:r>
               <a:rPr lang="en-US" sz="3000" b="1" dirty="0">
                 <a:solidFill>
-                  <a:srgbClr val="FFFFFF"/>
-                </a:solidFill>
-                <a:latin typeface="맑은 고딕" pitchFamily="34" charset="0"/>
-                <a:ea typeface="맑은 고딕" pitchFamily="34" charset="-122"/>
-                <a:cs typeface="맑은 고딕" pitchFamily="34" charset="-120"/>
-              </a:rPr>
-              <a:t>수작업 문서화 공수를 크게 줄인다</a:t>
+                  <a:srgbClr val="1F2937"/>
+                </a:solidFill>
+                <a:latin typeface="맑은 고딕" pitchFamily="34" charset="0"/>
+                <a:ea typeface="맑은 고딕" pitchFamily="34" charset="-122"/>
+                <a:cs typeface="맑은 고딕" pitchFamily="34" charset="-120"/>
+              </a:rPr>
+              <a:t>문서 추적성</a:t>
             </a:r>
             <a:endParaRPr lang="en-US" sz="3000" dirty="0"/>
           </a:p>
@@ -6907,69 +7299,80 @@
       </p:sp>
       <p:sp>
         <p:nvSpPr>
-          <p:cNvPr id="4" name="Shape 2"/>
-          <p:cNvSpPr/>
-          <p:nvPr/>
-        </p:nvSpPr>
-        <p:spPr>
-          <a:xfrm>
-            <a:off x="566928" y="1920240"/>
-            <a:ext cx="3529584" cy="3200400"/>
+          <p:cNvPr id="4" name="Text 2"/>
+          <p:cNvSpPr/>
+          <p:nvPr/>
+        </p:nvSpPr>
+        <p:spPr>
+          <a:xfrm>
+            <a:off x="10424160" y="822960"/>
+            <a:ext cx="1737360" cy="310896"/>
           </a:xfrm>
           <a:prstGeom prst="roundRect">
             <a:avLst>
-              <a:gd name="adj" fmla="val 2857"/>
+              <a:gd name="adj" fmla="val 47059"/>
             </a:avLst>
           </a:prstGeom>
           <a:solidFill>
-            <a:srgbClr val="312E81"/>
+            <a:srgbClr val="FEF3C7"/>
+          </a:solidFill>
+          <a:ln/>
+        </p:spPr>
+        <p:txBody>
+          <a:bodyPr wrap="square" lIns="0" tIns="0" rIns="0" bIns="0" rtlCol="0" anchor="ctr"/>
+          <a:lstStyle/>
+          <a:p>
+            <a:pPr algn="ctr" indent="0" marL="0">
+              <a:buNone/>
+            </a:pPr>
+            <a:r>
+              <a:rPr lang="en-US" sz="1100" b="1" dirty="0">
+                <a:solidFill>
+                  <a:srgbClr val="B45309"/>
+                </a:solidFill>
+                <a:latin typeface="맑은 고딕" pitchFamily="34" charset="0"/>
+                <a:ea typeface="맑은 고딕" pitchFamily="34" charset="-122"/>
+                <a:cs typeface="맑은 고딕" pitchFamily="34" charset="-120"/>
+              </a:rPr>
+              <a:t>개발 예정</a:t>
+            </a:r>
+            <a:endParaRPr lang="en-US" sz="1100" dirty="0"/>
+          </a:p>
+        </p:txBody>
+      </p:sp>
+      <p:sp>
+        <p:nvSpPr>
+          <p:cNvPr id="5" name="Shape 3"/>
+          <p:cNvSpPr/>
+          <p:nvPr/>
+        </p:nvSpPr>
+        <p:spPr>
+          <a:xfrm>
+            <a:off x="566928" y="1874520"/>
+            <a:ext cx="11064240" cy="1097280"/>
+          </a:xfrm>
+          <a:prstGeom prst="roundRect">
+            <a:avLst>
+              <a:gd name="adj" fmla="val 6667"/>
+            </a:avLst>
+          </a:prstGeom>
+          <a:solidFill>
+            <a:srgbClr val="FFFFFF"/>
           </a:solidFill>
           <a:ln w="12700">
             <a:solidFill>
-              <a:srgbClr val="4338CA"/>
+              <a:srgbClr val="E5E7EB"/>
             </a:solidFill>
             <a:prstDash val="solid"/>
           </a:ln>
-        </p:spPr>
-      </p:sp>
-      <p:sp>
-        <p:nvSpPr>
-          <p:cNvPr id="5" name="Text 3"/>
-          <p:cNvSpPr/>
-          <p:nvPr/>
-        </p:nvSpPr>
-        <p:spPr>
-          <a:xfrm>
-            <a:off x="841248" y="2331720"/>
-            <a:ext cx="2980944" cy="548640"/>
-          </a:xfrm>
-          <a:prstGeom prst="rect">
-            <a:avLst/>
-          </a:prstGeom>
-          <a:noFill/>
-          <a:ln/>
-        </p:spPr>
-        <p:txBody>
-          <a:bodyPr wrap="square" lIns="0" tIns="0" rIns="0" bIns="0" rtlCol="0" anchor="ctr"/>
-          <a:lstStyle/>
-          <a:p>
-            <a:pPr indent="0" marL="0">
-              <a:buNone/>
-            </a:pPr>
-            <a:r>
-              <a:rPr lang="en-US" sz="2000" b="1" dirty="0">
-                <a:solidFill>
-                  <a:srgbClr val="C7D2FE"/>
-                </a:solidFill>
-                <a:latin typeface="맑은 고딕" pitchFamily="34" charset="0"/>
-                <a:ea typeface="맑은 고딕" pitchFamily="34" charset="-122"/>
-                <a:cs typeface="맑은 고딕" pitchFamily="34" charset="-120"/>
-              </a:rPr>
-              <a:t>약 2시간</a:t>
-            </a:r>
-            <a:endParaRPr lang="en-US" sz="2000" dirty="0"/>
-          </a:p>
-        </p:txBody>
+          <a:effectLst>
+            <a:outerShdw sx="100000" sy="100000" kx="0" ky="0" algn="bl" rotWithShape="0" blurRad="127000" dist="50800" dir="5400000">
+              <a:srgbClr val="1E1B4B">
+                <a:alpha val="18000"/>
+              </a:srgbClr>
+            </a:outerShdw>
+          </a:effectLst>
+        </p:spPr>
       </p:sp>
       <p:sp>
         <p:nvSpPr>
@@ -6979,24 +7382,26 @@
         </p:nvSpPr>
         <p:spPr>
           <a:xfrm>
-            <a:off x="841248" y="2926080"/>
-            <a:ext cx="2980944" cy="822960"/>
-          </a:xfrm>
-          <a:prstGeom prst="rect">
-            <a:avLst/>
-          </a:prstGeom>
-          <a:noFill/>
-          <a:ln/>
-        </p:spPr>
-        <p:txBody>
-          <a:bodyPr wrap="square" lIns="0" tIns="0" rIns="0" bIns="0" rtlCol="0" anchor="ctr"/>
-          <a:lstStyle/>
-          <a:p>
-            <a:pPr indent="0" marL="0">
-              <a:buNone/>
-            </a:pPr>
-            <a:r>
-              <a:rPr lang="en-US" sz="3200" b="1" dirty="0">
+            <a:off x="822960" y="2167128"/>
+            <a:ext cx="512064" cy="512064"/>
+          </a:xfrm>
+          <a:prstGeom prst="ellipse">
+            <a:avLst/>
+          </a:prstGeom>
+          <a:solidFill>
+            <a:srgbClr val="8B5CF6"/>
+          </a:solidFill>
+          <a:ln/>
+        </p:spPr>
+        <p:txBody>
+          <a:bodyPr wrap="square" lIns="0" tIns="0" rIns="0" bIns="0" rtlCol="0" anchor="ctr"/>
+          <a:lstStyle/>
+          <a:p>
+            <a:pPr algn="ctr" indent="0" marL="0">
+              <a:buNone/>
+            </a:pPr>
+            <a:r>
+              <a:rPr lang="en-US" sz="1800" b="1" dirty="0">
                 <a:solidFill>
                   <a:srgbClr val="FFFFFF"/>
                 </a:solidFill>
@@ -7004,9 +7409,9 @@
                 <a:ea typeface="맑은 고딕" pitchFamily="34" charset="-122"/>
                 <a:cs typeface="맑은 고딕" pitchFamily="34" charset="-120"/>
               </a:rPr>
-              <a:t>→ 약 10초</a:t>
-            </a:r>
-            <a:endParaRPr lang="en-US" sz="3200" dirty="0"/>
+              <a:t>1</a:t>
+            </a:r>
+            <a:endParaRPr lang="en-US" sz="1800" dirty="0"/>
           </a:p>
         </p:txBody>
       </p:sp>
@@ -7018,8 +7423,47 @@
         </p:nvSpPr>
         <p:spPr>
           <a:xfrm>
-            <a:off x="841248" y="4114800"/>
-            <a:ext cx="2980944" cy="822960"/>
+            <a:off x="1527048" y="2039112"/>
+            <a:ext cx="2926080" cy="731520"/>
+          </a:xfrm>
+          <a:prstGeom prst="rect">
+            <a:avLst/>
+          </a:prstGeom>
+          <a:noFill/>
+          <a:ln/>
+        </p:spPr>
+        <p:txBody>
+          <a:bodyPr wrap="square" lIns="0" tIns="0" rIns="0" bIns="0" rtlCol="0" anchor="ctr"/>
+          <a:lstStyle/>
+          <a:p>
+            <a:pPr indent="0" marL="0">
+              <a:buNone/>
+            </a:pPr>
+            <a:r>
+              <a:rPr lang="en-US" sz="1700" b="1" dirty="0">
+                <a:solidFill>
+                  <a:srgbClr val="1F2937"/>
+                </a:solidFill>
+                <a:latin typeface="맑은 고딕" pitchFamily="34" charset="0"/>
+                <a:ea typeface="맑은 고딕" pitchFamily="34" charset="-122"/>
+                <a:cs typeface="맑은 고딕" pitchFamily="34" charset="-120"/>
+              </a:rPr>
+              <a:t>연결 조회</a:t>
+            </a:r>
+            <a:endParaRPr lang="en-US" sz="1700" dirty="0"/>
+          </a:p>
+        </p:txBody>
+      </p:sp>
+      <p:sp>
+        <p:nvSpPr>
+          <p:cNvPr id="8" name="Text 6"/>
+          <p:cNvSpPr/>
+          <p:nvPr/>
+        </p:nvSpPr>
+        <p:spPr>
+          <a:xfrm>
+            <a:off x="4498848" y="2039112"/>
+            <a:ext cx="6858000" cy="777240"/>
           </a:xfrm>
           <a:prstGeom prst="rect">
             <a:avLst/>
@@ -7033,20 +7477,20 @@
           <a:p>
             <a:pPr indent="0" marL="0">
               <a:lnSpc>
-                <a:spcPct val="110000"/>
+                <a:spcPct val="105000"/>
               </a:lnSpc>
               <a:buNone/>
             </a:pPr>
             <a:r>
               <a:rPr lang="en-US" sz="1300" dirty="0">
                 <a:solidFill>
-                  <a:srgbClr val="A5B4FC"/>
-                </a:solidFill>
-                <a:latin typeface="맑은 고딕" pitchFamily="34" charset="0"/>
-                <a:ea typeface="맑은 고딕" pitchFamily="34" charset="-122"/>
-                <a:cs typeface="맑은 고딕" pitchFamily="34" charset="-120"/>
-              </a:rPr>
-              <a:t>요구사항 1건의 문서·티켓 초안 작성</a:t>
+                  <a:srgbClr val="6B7280"/>
+                </a:solidFill>
+                <a:latin typeface="맑은 고딕" pitchFamily="34" charset="0"/>
+                <a:ea typeface="맑은 고딕" pitchFamily="34" charset="-122"/>
+                <a:cs typeface="맑은 고딕" pitchFamily="34" charset="-120"/>
+              </a:rPr>
+              <a:t>요구사항 1건에 연결된 기능요구사항·비기능요구사항·티켓을 한눈에 조회 (양방향)</a:t>
             </a:r>
             <a:endParaRPr lang="en-US" sz="1300" dirty="0"/>
           </a:p>
@@ -7054,69 +7498,37 @@
       </p:sp>
       <p:sp>
         <p:nvSpPr>
-          <p:cNvPr id="8" name="Shape 6"/>
-          <p:cNvSpPr/>
-          <p:nvPr/>
-        </p:nvSpPr>
-        <p:spPr>
-          <a:xfrm>
-            <a:off x="4407408" y="1920240"/>
-            <a:ext cx="3529584" cy="3200400"/>
+          <p:cNvPr id="9" name="Shape 7"/>
+          <p:cNvSpPr/>
+          <p:nvPr/>
+        </p:nvSpPr>
+        <p:spPr>
+          <a:xfrm>
+            <a:off x="566928" y="3154680"/>
+            <a:ext cx="11064240" cy="1097280"/>
           </a:xfrm>
           <a:prstGeom prst="roundRect">
             <a:avLst>
-              <a:gd name="adj" fmla="val 2857"/>
+              <a:gd name="adj" fmla="val 6667"/>
             </a:avLst>
           </a:prstGeom>
           <a:solidFill>
-            <a:srgbClr val="312E81"/>
+            <a:srgbClr val="FFFFFF"/>
           </a:solidFill>
           <a:ln w="12700">
             <a:solidFill>
-              <a:srgbClr val="4338CA"/>
+              <a:srgbClr val="E5E7EB"/>
             </a:solidFill>
             <a:prstDash val="solid"/>
           </a:ln>
-        </p:spPr>
-      </p:sp>
-      <p:sp>
-        <p:nvSpPr>
-          <p:cNvPr id="9" name="Text 7"/>
-          <p:cNvSpPr/>
-          <p:nvPr/>
-        </p:nvSpPr>
-        <p:spPr>
-          <a:xfrm>
-            <a:off x="4681728" y="2331720"/>
-            <a:ext cx="2980944" cy="548640"/>
-          </a:xfrm>
-          <a:prstGeom prst="rect">
-            <a:avLst/>
-          </a:prstGeom>
-          <a:noFill/>
-          <a:ln/>
-        </p:spPr>
-        <p:txBody>
-          <a:bodyPr wrap="square" lIns="0" tIns="0" rIns="0" bIns="0" rtlCol="0" anchor="ctr"/>
-          <a:lstStyle/>
-          <a:p>
-            <a:pPr indent="0" marL="0">
-              <a:buNone/>
-            </a:pPr>
-            <a:r>
-              <a:rPr lang="en-US" sz="2000" b="1" dirty="0">
-                <a:solidFill>
-                  <a:srgbClr val="C7D2FE"/>
-                </a:solidFill>
-                <a:latin typeface="맑은 고딕" pitchFamily="34" charset="0"/>
-                <a:ea typeface="맑은 고딕" pitchFamily="34" charset="-122"/>
-                <a:cs typeface="맑은 고딕" pitchFamily="34" charset="-120"/>
-              </a:rPr>
-              <a:t>수동 확인</a:t>
-            </a:r>
-            <a:endParaRPr lang="en-US" sz="2000" dirty="0"/>
-          </a:p>
-        </p:txBody>
+          <a:effectLst>
+            <a:outerShdw sx="100000" sy="100000" kx="0" ky="0" algn="bl" rotWithShape="0" blurRad="127000" dist="50800" dir="5400000">
+              <a:srgbClr val="1E1B4B">
+                <a:alpha val="18000"/>
+              </a:srgbClr>
+            </a:outerShdw>
+          </a:effectLst>
+        </p:spPr>
       </p:sp>
       <p:sp>
         <p:nvSpPr>
@@ -7126,24 +7538,26 @@
         </p:nvSpPr>
         <p:spPr>
           <a:xfrm>
-            <a:off x="4681728" y="2926080"/>
-            <a:ext cx="2980944" cy="822960"/>
-          </a:xfrm>
-          <a:prstGeom prst="rect">
-            <a:avLst/>
-          </a:prstGeom>
-          <a:noFill/>
-          <a:ln/>
-        </p:spPr>
-        <p:txBody>
-          <a:bodyPr wrap="square" lIns="0" tIns="0" rIns="0" bIns="0" rtlCol="0" anchor="ctr"/>
-          <a:lstStyle/>
-          <a:p>
-            <a:pPr indent="0" marL="0">
-              <a:buNone/>
-            </a:pPr>
-            <a:r>
-              <a:rPr lang="en-US" sz="3200" b="1" dirty="0">
+            <a:off x="822960" y="3447288"/>
+            <a:ext cx="512064" cy="512064"/>
+          </a:xfrm>
+          <a:prstGeom prst="ellipse">
+            <a:avLst/>
+          </a:prstGeom>
+          <a:solidFill>
+            <a:srgbClr val="8B5CF6"/>
+          </a:solidFill>
+          <a:ln/>
+        </p:spPr>
+        <p:txBody>
+          <a:bodyPr wrap="square" lIns="0" tIns="0" rIns="0" bIns="0" rtlCol="0" anchor="ctr"/>
+          <a:lstStyle/>
+          <a:p>
+            <a:pPr algn="ctr" indent="0" marL="0">
+              <a:buNone/>
+            </a:pPr>
+            <a:r>
+              <a:rPr lang="en-US" sz="1800" b="1" dirty="0">
                 <a:solidFill>
                   <a:srgbClr val="FFFFFF"/>
                 </a:solidFill>
@@ -7151,9 +7565,9 @@
                 <a:ea typeface="맑은 고딕" pitchFamily="34" charset="-122"/>
                 <a:cs typeface="맑은 고딕" pitchFamily="34" charset="-120"/>
               </a:rPr>
-              <a:t>→ 자동 표시</a:t>
-            </a:r>
-            <a:endParaRPr lang="en-US" sz="3200" dirty="0"/>
+              <a:t>2</a:t>
+            </a:r>
+            <a:endParaRPr lang="en-US" sz="1800" dirty="0"/>
           </a:p>
         </p:txBody>
       </p:sp>
@@ -7165,8 +7579,47 @@
         </p:nvSpPr>
         <p:spPr>
           <a:xfrm>
-            <a:off x="4681728" y="4114800"/>
-            <a:ext cx="2980944" cy="822960"/>
+            <a:off x="1527048" y="3319272"/>
+            <a:ext cx="2926080" cy="731520"/>
+          </a:xfrm>
+          <a:prstGeom prst="rect">
+            <a:avLst/>
+          </a:prstGeom>
+          <a:noFill/>
+          <a:ln/>
+        </p:spPr>
+        <p:txBody>
+          <a:bodyPr wrap="square" lIns="0" tIns="0" rIns="0" bIns="0" rtlCol="0" anchor="ctr"/>
+          <a:lstStyle/>
+          <a:p>
+            <a:pPr indent="0" marL="0">
+              <a:buNone/>
+            </a:pPr>
+            <a:r>
+              <a:rPr lang="en-US" sz="1700" b="1" dirty="0">
+                <a:solidFill>
+                  <a:srgbClr val="1F2937"/>
+                </a:solidFill>
+                <a:latin typeface="맑은 고딕" pitchFamily="34" charset="0"/>
+                <a:ea typeface="맑은 고딕" pitchFamily="34" charset="-122"/>
+                <a:cs typeface="맑은 고딕" pitchFamily="34" charset="-120"/>
+              </a:rPr>
+              <a:t>변경 영향 분석</a:t>
+            </a:r>
+            <a:endParaRPr lang="en-US" sz="1700" dirty="0"/>
+          </a:p>
+        </p:txBody>
+      </p:sp>
+      <p:sp>
+        <p:nvSpPr>
+          <p:cNvPr id="12" name="Text 10"/>
+          <p:cNvSpPr/>
+          <p:nvPr/>
+        </p:nvSpPr>
+        <p:spPr>
+          <a:xfrm>
+            <a:off x="4498848" y="3319272"/>
+            <a:ext cx="6858000" cy="777240"/>
           </a:xfrm>
           <a:prstGeom prst="rect">
             <a:avLst/>
@@ -7180,20 +7633,20 @@
           <a:p>
             <a:pPr indent="0" marL="0">
               <a:lnSpc>
-                <a:spcPct val="110000"/>
+                <a:spcPct val="105000"/>
               </a:lnSpc>
               <a:buNone/>
             </a:pPr>
             <a:r>
               <a:rPr lang="en-US" sz="1300" dirty="0">
                 <a:solidFill>
-                  <a:srgbClr val="A5B4FC"/>
-                </a:solidFill>
-                <a:latin typeface="맑은 고딕" pitchFamily="34" charset="0"/>
-                <a:ea typeface="맑은 고딕" pitchFamily="34" charset="-122"/>
-                <a:cs typeface="맑은 고딕" pitchFamily="34" charset="-120"/>
-              </a:rPr>
-              <a:t>요구사항 변경 시 영향받는 문서 파악</a:t>
+                  <a:srgbClr val="6B7280"/>
+                </a:solidFill>
+                <a:latin typeface="맑은 고딕" pitchFamily="34" charset="0"/>
+                <a:ea typeface="맑은 고딕" pitchFamily="34" charset="-122"/>
+                <a:cs typeface="맑은 고딕" pitchFamily="34" charset="-120"/>
+              </a:rPr>
+              <a:t>요구사항이 수정되면 영향받는 문서·티켓을 자동으로 표시 → 누락 방지</a:t>
             </a:r>
             <a:endParaRPr lang="en-US" sz="1300" dirty="0"/>
           </a:p>
@@ -7201,69 +7654,37 @@
       </p:sp>
       <p:sp>
         <p:nvSpPr>
-          <p:cNvPr id="12" name="Shape 10"/>
-          <p:cNvSpPr/>
-          <p:nvPr/>
-        </p:nvSpPr>
-        <p:spPr>
-          <a:xfrm>
-            <a:off x="8247888" y="1920240"/>
-            <a:ext cx="3529584" cy="3200400"/>
+          <p:cNvPr id="13" name="Shape 11"/>
+          <p:cNvSpPr/>
+          <p:nvPr/>
+        </p:nvSpPr>
+        <p:spPr>
+          <a:xfrm>
+            <a:off x="566928" y="4434840"/>
+            <a:ext cx="11064240" cy="1097280"/>
           </a:xfrm>
           <a:prstGeom prst="roundRect">
             <a:avLst>
-              <a:gd name="adj" fmla="val 2857"/>
+              <a:gd name="adj" fmla="val 6667"/>
             </a:avLst>
           </a:prstGeom>
           <a:solidFill>
-            <a:srgbClr val="312E81"/>
+            <a:srgbClr val="EEF2FF"/>
           </a:solidFill>
           <a:ln w="12700">
             <a:solidFill>
-              <a:srgbClr val="4338CA"/>
+              <a:srgbClr val="E5E7EB"/>
             </a:solidFill>
             <a:prstDash val="solid"/>
           </a:ln>
-        </p:spPr>
-      </p:sp>
-      <p:sp>
-        <p:nvSpPr>
-          <p:cNvPr id="13" name="Text 11"/>
-          <p:cNvSpPr/>
-          <p:nvPr/>
-        </p:nvSpPr>
-        <p:spPr>
-          <a:xfrm>
-            <a:off x="8522208" y="2331720"/>
-            <a:ext cx="2980944" cy="548640"/>
-          </a:xfrm>
-          <a:prstGeom prst="rect">
-            <a:avLst/>
-          </a:prstGeom>
-          <a:noFill/>
-          <a:ln/>
-        </p:spPr>
-        <p:txBody>
-          <a:bodyPr wrap="square" lIns="0" tIns="0" rIns="0" bIns="0" rtlCol="0" anchor="ctr"/>
-          <a:lstStyle/>
-          <a:p>
-            <a:pPr indent="0" marL="0">
-              <a:buNone/>
-            </a:pPr>
-            <a:r>
-              <a:rPr lang="en-US" sz="2000" b="1" dirty="0">
-                <a:solidFill>
-                  <a:srgbClr val="C7D2FE"/>
-                </a:solidFill>
-                <a:latin typeface="맑은 고딕" pitchFamily="34" charset="0"/>
-                <a:ea typeface="맑은 고딕" pitchFamily="34" charset="-122"/>
-                <a:cs typeface="맑은 고딕" pitchFamily="34" charset="-120"/>
-              </a:rPr>
-              <a:t>개발 중 발견</a:t>
-            </a:r>
-            <a:endParaRPr lang="en-US" sz="2000" dirty="0"/>
-          </a:p>
-        </p:txBody>
+          <a:effectLst>
+            <a:outerShdw sx="100000" sy="100000" kx="0" ky="0" algn="bl" rotWithShape="0" blurRad="127000" dist="50800" dir="5400000">
+              <a:srgbClr val="1E1B4B">
+                <a:alpha val="18000"/>
+              </a:srgbClr>
+            </a:outerShdw>
+          </a:effectLst>
+        </p:spPr>
       </p:sp>
       <p:sp>
         <p:nvSpPr>
@@ -7273,24 +7694,26 @@
         </p:nvSpPr>
         <p:spPr>
           <a:xfrm>
-            <a:off x="8522208" y="2926080"/>
-            <a:ext cx="2980944" cy="822960"/>
-          </a:xfrm>
-          <a:prstGeom prst="rect">
-            <a:avLst/>
-          </a:prstGeom>
-          <a:noFill/>
-          <a:ln/>
-        </p:spPr>
-        <p:txBody>
-          <a:bodyPr wrap="square" lIns="0" tIns="0" rIns="0" bIns="0" rtlCol="0" anchor="ctr"/>
-          <a:lstStyle/>
-          <a:p>
-            <a:pPr indent="0" marL="0">
-              <a:buNone/>
-            </a:pPr>
-            <a:r>
-              <a:rPr lang="en-US" sz="3200" b="1" dirty="0">
+            <a:off x="822960" y="4727448"/>
+            <a:ext cx="512064" cy="512064"/>
+          </a:xfrm>
+          <a:prstGeom prst="ellipse">
+            <a:avLst/>
+          </a:prstGeom>
+          <a:solidFill>
+            <a:srgbClr val="8B5CF6"/>
+          </a:solidFill>
+          <a:ln/>
+        </p:spPr>
+        <p:txBody>
+          <a:bodyPr wrap="square" lIns="0" tIns="0" rIns="0" bIns="0" rtlCol="0" anchor="ctr"/>
+          <a:lstStyle/>
+          <a:p>
+            <a:pPr algn="ctr" indent="0" marL="0">
+              <a:buNone/>
+            </a:pPr>
+            <a:r>
+              <a:rPr lang="en-US" sz="1800" b="1" dirty="0">
                 <a:solidFill>
                   <a:srgbClr val="FFFFFF"/>
                 </a:solidFill>
@@ -7298,9 +7721,9 @@
                 <a:ea typeface="맑은 고딕" pitchFamily="34" charset="-122"/>
                 <a:cs typeface="맑은 고딕" pitchFamily="34" charset="-120"/>
               </a:rPr>
-              <a:t>→ 착수 전 발견</a:t>
-            </a:r>
-            <a:endParaRPr lang="en-US" sz="3200" dirty="0"/>
+              <a:t>3</a:t>
+            </a:r>
+            <a:endParaRPr lang="en-US" sz="1800" dirty="0"/>
           </a:p>
         </p:txBody>
       </p:sp>
@@ -7312,8 +7735,47 @@
         </p:nvSpPr>
         <p:spPr>
           <a:xfrm>
-            <a:off x="8522208" y="4114800"/>
-            <a:ext cx="2980944" cy="822960"/>
+            <a:off x="1527048" y="4599432"/>
+            <a:ext cx="2926080" cy="731520"/>
+          </a:xfrm>
+          <a:prstGeom prst="rect">
+            <a:avLst/>
+          </a:prstGeom>
+          <a:noFill/>
+          <a:ln/>
+        </p:spPr>
+        <p:txBody>
+          <a:bodyPr wrap="square" lIns="0" tIns="0" rIns="0" bIns="0" rtlCol="0" anchor="ctr"/>
+          <a:lstStyle/>
+          <a:p>
+            <a:pPr indent="0" marL="0">
+              <a:buNone/>
+            </a:pPr>
+            <a:r>
+              <a:rPr lang="en-US" sz="1700" b="1" dirty="0">
+                <a:solidFill>
+                  <a:srgbClr val="1F2937"/>
+                </a:solidFill>
+                <a:latin typeface="맑은 고딕" pitchFamily="34" charset="0"/>
+                <a:ea typeface="맑은 고딕" pitchFamily="34" charset="-122"/>
+                <a:cs typeface="맑은 고딕" pitchFamily="34" charset="-120"/>
+              </a:rPr>
+              <a:t>진행상황 / 개발완료</a:t>
+            </a:r>
+            <a:endParaRPr lang="en-US" sz="1700" dirty="0"/>
+          </a:p>
+        </p:txBody>
+      </p:sp>
+      <p:sp>
+        <p:nvSpPr>
+          <p:cNvPr id="16" name="Text 14"/>
+          <p:cNvSpPr/>
+          <p:nvPr/>
+        </p:nvSpPr>
+        <p:spPr>
+          <a:xfrm>
+            <a:off x="4498848" y="4599432"/>
+            <a:ext cx="6858000" cy="777240"/>
           </a:xfrm>
           <a:prstGeom prst="rect">
             <a:avLst/>
@@ -7327,20 +7789,20 @@
           <a:p>
             <a:pPr indent="0" marL="0">
               <a:lnSpc>
-                <a:spcPct val="110000"/>
+                <a:spcPct val="105000"/>
               </a:lnSpc>
               <a:buNone/>
             </a:pPr>
             <a:r>
               <a:rPr lang="en-US" sz="1300" dirty="0">
                 <a:solidFill>
-                  <a:srgbClr val="A5B4FC"/>
-                </a:solidFill>
-                <a:latin typeface="맑은 고딕" pitchFamily="34" charset="0"/>
-                <a:ea typeface="맑은 고딕" pitchFamily="34" charset="-122"/>
-                <a:cs typeface="맑은 고딕" pitchFamily="34" charset="-120"/>
-              </a:rPr>
-              <a:t>모호·상충으로 인한 재작업</a:t>
+                  <a:srgbClr val="6B7280"/>
+                </a:solidFill>
+                <a:latin typeface="맑은 고딕" pitchFamily="34" charset="0"/>
+                <a:ea typeface="맑은 고딕" pitchFamily="34" charset="-122"/>
+                <a:cs typeface="맑은 고딕" pitchFamily="34" charset="-120"/>
+              </a:rPr>
+              <a:t>요구사항·티켓의 상태(작성중·검토·개발중·완료)와 진행률을 한눈에</a:t>
             </a:r>
             <a:endParaRPr lang="en-US" sz="1300" dirty="0"/>
           </a:p>
@@ -7348,14 +7810,14 @@
       </p:sp>
       <p:sp>
         <p:nvSpPr>
-          <p:cNvPr id="16" name="Text 14"/>
-          <p:cNvSpPr/>
-          <p:nvPr/>
-        </p:nvSpPr>
-        <p:spPr>
-          <a:xfrm>
-            <a:off x="566928" y="5852160"/>
-            <a:ext cx="10058400" cy="365760"/>
+          <p:cNvPr id="17" name="Text 15"/>
+          <p:cNvSpPr/>
+          <p:nvPr/>
+        </p:nvSpPr>
+        <p:spPr>
+          <a:xfrm>
+            <a:off x="566928" y="5943600"/>
+            <a:ext cx="10972800" cy="365760"/>
           </a:xfrm>
           <a:prstGeom prst="rect">
             <a:avLst/>
@@ -7373,13 +7835,13 @@
             <a:r>
               <a:rPr lang="en-US" sz="1200" i="1" dirty="0">
                 <a:solidFill>
-                  <a:srgbClr val="818CF8"/>
-                </a:solidFill>
-                <a:latin typeface="맑은 고딕" pitchFamily="34" charset="0"/>
-                <a:ea typeface="맑은 고딕" pitchFamily="34" charset="-122"/>
-                <a:cs typeface="맑은 고딕" pitchFamily="34" charset="-120"/>
-              </a:rPr>
-              <a:t>※ 목표/예시 수치 — 실측으로 확정</a:t>
+                  <a:srgbClr val="6B7280"/>
+                </a:solidFill>
+                <a:latin typeface="맑은 고딕" pitchFamily="34" charset="0"/>
+                <a:ea typeface="맑은 고딕" pitchFamily="34" charset="-122"/>
+                <a:cs typeface="맑은 고딕" pitchFamily="34" charset="-120"/>
+              </a:rPr>
+              <a:t>※ 기존 “DB 변경관리”를 대체 — 컨셉(고객 요구사항 기반 문서화)에 맞춰 재정의</a:t>
             </a:r>
             <a:endParaRPr lang="en-US" sz="1200" dirty="0"/>
           </a:p>

--- a/docs/진행공유_요구사항자동화.pptx
+++ b/docs/진행공유_요구사항자동화.pptx
@@ -3884,7 +3884,7 @@
                 <a:ea typeface="맑은 고딕" pitchFamily="34" charset="-122"/>
                 <a:cs typeface="맑은 고딕" pitchFamily="34" charset="-120"/>
               </a:rPr>
-              <a:t>불명확한 표현
+              <a:t>고객 요구사항의 불명확한 표현
 </a:t>
             </a:r>
             <a:pPr algn="l" indent="0" marL="0">
@@ -3902,7 +3902,7 @@
                 <a:ea typeface="맑은 고딕" pitchFamily="34" charset="-122"/>
                 <a:cs typeface="맑은 고딕" pitchFamily="34" charset="-120"/>
               </a:rPr>
-              <a:t>요구사항에 해석이 갈리거나 추가 정의가 필요한 문장이 섞여 있음 (부서·회사 간 해석 차이)</a:t>
+              <a:t>요구사항 명세서에 고객사와 세메스가 다르게 해석하거나, 추가 정의가 필요한 문장이 많다</a:t>
             </a:r>
             <a:endParaRPr lang="en-US" sz="1800" dirty="0"/>
           </a:p>
@@ -4003,7 +4003,7 @@
                 <a:ea typeface="맑은 고딕" pitchFamily="34" charset="-122"/>
                 <a:cs typeface="맑은 고딕" pitchFamily="34" charset="-120"/>
               </a:rPr>
-              <a:t>요구사항마다 기능·비기능·티켓을 전부 만들어야 해 시간이 너무 많이 듦</a:t>
+              <a:t>요구사항마다 기능·비기능 요구사항과 Jira 이슈를 개발자가 일일이 작성 → 공수가 크게 든다</a:t>
             </a:r>
             <a:endParaRPr lang="en-US" sz="1800" dirty="0"/>
           </a:p>
@@ -4104,7 +4104,7 @@
                 <a:ea typeface="맑은 고딕" pitchFamily="34" charset="-122"/>
                 <a:cs typeface="맑은 고딕" pitchFamily="34" charset="-120"/>
               </a:rPr>
-              <a:t>요구사항이 바뀔 때마다 영향받는 문서를 일일이 확인해야 함</a:t>
+              <a:t>요구사항이 변경될 때마다 영향받는 기능·문서를 일일이 찾아 확인·수정해야 한다</a:t>
             </a:r>
             <a:endParaRPr lang="en-US" sz="1800" dirty="0"/>
           </a:p>
@@ -4637,7 +4637,7 @@
                 <a:ea typeface="맑은 고딕" pitchFamily="34" charset="-122"/>
                 <a:cs typeface="맑은 고딕" pitchFamily="34" charset="-120"/>
               </a:rPr>
-              <a:t>불명확한 표현 + 상충되는 요구를 검출하고 명확화</a:t>
+              <a:t>불명확·상충되는 요구를 LLM이 검출·제안하고, 개발자가 고객과 협의해 확정·관리</a:t>
             </a:r>
             <a:endParaRPr lang="en-US" sz="1300" dirty="0"/>
           </a:p>
@@ -4875,7 +4875,7 @@
                 <a:ea typeface="맑은 고딕" pitchFamily="34" charset="-122"/>
                 <a:cs typeface="맑은 고딕" pitchFamily="34" charset="-120"/>
               </a:rPr>
-              <a:t>SWVOC·기능요구사항·상세설계·티켓 초안을 양식대로 생성</a:t>
+              <a:t>기능·비기능 요구사항과 SWVOC·상세설계·티켓 등 초안을 자동 생성</a:t>
             </a:r>
             <a:endParaRPr lang="en-US" sz="1300" dirty="0"/>
           </a:p>
@@ -5113,7 +5113,7 @@
                 <a:ea typeface="맑은 고딕" pitchFamily="34" charset="-122"/>
                 <a:cs typeface="맑은 고딕" pitchFamily="34" charset="-120"/>
               </a:rPr>
-              <a:t>요구사항↔산출물 연결·변경 영향·진행상황 관리</a:t>
+              <a:t>요구사항별 연결 산출물을 한눈에 — 영향 범위·진행상황까지 관리</a:t>
             </a:r>
             <a:endParaRPr lang="en-US" sz="1300" dirty="0"/>
           </a:p>
@@ -5655,7 +5655,7 @@
                 <a:ea typeface="맑은 고딕" pitchFamily="34" charset="-122"/>
                 <a:cs typeface="맑은 고딕" pitchFamily="34" charset="-120"/>
               </a:rPr>
-              <a:t>불명확한 표현 검출
+              <a:t>LLM이 검출 · 제안
 </a:t>
             </a:r>
             <a:pPr indent="0" marL="0">
@@ -5673,7 +5673,7 @@
                 <a:ea typeface="맑은 고딕" pitchFamily="34" charset="-122"/>
                 <a:cs typeface="맑은 고딕" pitchFamily="34" charset="-120"/>
               </a:rPr>
-              <a:t>수치·기준·주체·조건이 빠져 해석이 갈리거나 정의가 필요한 표현을 유형·근거와 함께 검출 (7가지 유형)</a:t>
+              <a:t>고객사↔세메스 해석이 갈리거나 정의가 필요한 표현(7유형)과 상충되는 요구를 검출하고, 올바른 방향을 제안</a:t>
             </a:r>
             <a:endParaRPr lang="en-US" sz="1550" dirty="0"/>
           </a:p>
@@ -5740,7 +5740,7 @@
                 <a:ea typeface="맑은 고딕" pitchFamily="34" charset="-122"/>
                 <a:cs typeface="맑은 고딕" pitchFamily="34" charset="-120"/>
               </a:rPr>
-              <a:t>상충되는 요구 검출
+              <a:t>개발자가 협의
 </a:t>
             </a:r>
             <a:pPr indent="0" marL="0">
@@ -5758,7 +5758,7 @@
                 <a:ea typeface="맑은 고딕" pitchFamily="34" charset="-122"/>
                 <a:cs typeface="맑은 고딕" pitchFamily="34" charset="-120"/>
               </a:rPr>
-              <a:t>요구사항끼리의 모순 탐지 — 예) req1 “우선순위 낮은 순” ↔ req4 “시간 순서” 상반</a:t>
+              <a:t>LLM 제안을 근거로 고객사에 제안·협의 — 예) req1 “우선순위 낮은 순” ↔ req4 “시간 순서” 상충 해소</a:t>
             </a:r>
             <a:endParaRPr lang="en-US" sz="1550" dirty="0"/>
           </a:p>
@@ -5825,7 +5825,7 @@
                 <a:ea typeface="맑은 고딕" pitchFamily="34" charset="-122"/>
                 <a:cs typeface="맑은 고딕" pitchFamily="34" charset="-120"/>
               </a:rPr>
-              <a:t>명확화 (해석 확정)
+              <a:t>확정 → 관리
 </a:t>
             </a:r>
             <a:pPr indent="0" marL="0">
@@ -5843,7 +5843,7 @@
                 <a:ea typeface="맑은 고딕" pitchFamily="34" charset="-122"/>
                 <a:cs typeface="맑은 고딕" pitchFamily="34" charset="-120"/>
               </a:rPr>
-              <a:t>확정 해석 입력·잠금 + 해결 전/후 비교로 무엇이 명확해졌는지 확인</a:t>
+              <a:t>명확해진 해석을 입력해 확정·잠금하고 요구사항을 관리 (해결 전/후 비교로 확인)</a:t>
             </a:r>
             <a:endParaRPr lang="en-US" sz="1550" dirty="0"/>
           </a:p>

--- a/docs/진행공유_요구사항자동화.pptx
+++ b/docs/진행공유_요구사항자동화.pptx
@@ -17,9 +17,10 @@
     <p:sldId id="265" r:id="rId11"/>
     <p:sldId id="266" r:id="rId12"/>
     <p:sldId id="267" r:id="rId13"/>
+    <p:sldId id="268" r:id="rId14"/>
   </p:sldIdLst>
   <p:notesMasterIdLst>
-    <p:notesMasterId r:id="rId14"/>
+    <p:notesMasterId r:id="rId15"/>
   </p:notesMasterIdLst>
   <p:sldSz cx="12192000" cy="6858000"/>
   <p:notesSz cx="6858000" cy="12192000"/>
@@ -801,6 +802,94 @@
             <a:fld id="{F7021451-1387-4CA6-816F-3879F97B5CBC}" type="slidenum">
               <a:rPr lang="en-US"/>
               <a:t>12</a:t>
+            </a:fld>
+            <a:endParaRPr lang="en-US"/>
+          </a:p>
+        </p:txBody>
+      </p:sp>
+    </p:spTree>
+    <p:extLst>
+      <p:ext uri="{BB962C8B-B14F-4D97-AF65-F5344CB8AC3E}">
+        <p14:creationId xmlns:p14="http://schemas.microsoft.com/office/powerpoint/2010/main" val="1024086991"/>
+      </p:ext>
+    </p:extLst>
+  </p:cSld>
+  <p:clrMapOvr>
+    <a:masterClrMapping/>
+  </p:clrMapOvr>
+</p:notes>
+</file>
+
+<file path=ppt/notesSlides/notesSlide13.xml><?xml version="1.0" encoding="utf-8"?>
+<p:notes xmlns:a="http://schemas.openxmlformats.org/drawingml/2006/main" xmlns:r="http://schemas.openxmlformats.org/officeDocument/2006/relationships" xmlns:p="http://schemas.openxmlformats.org/presentationml/2006/main">
+  <p:cSld>
+    <p:spTree>
+      <p:nvGrpSpPr>
+        <p:cNvPr id="1" name=""/>
+        <p:cNvGrpSpPr/>
+        <p:nvPr/>
+      </p:nvGrpSpPr>
+      <p:grpSpPr>
+        <a:xfrm>
+          <a:off x="0" y="0"/>
+          <a:ext cx="0" cy="0"/>
+          <a:chOff x="0" y="0"/>
+          <a:chExt cx="0" cy="0"/>
+        </a:xfrm>
+      </p:grpSpPr>
+      <p:sp>
+        <p:nvSpPr>
+          <p:cNvPr id="2" name="Slide Image Placeholder 1"/>
+          <p:cNvSpPr>
+            <a:spLocks noGrp="1" noRot="1" noChangeAspect="1"/>
+          </p:cNvSpPr>
+          <p:nvPr>
+            <p:ph type="sldImg"/>
+          </p:nvPr>
+        </p:nvSpPr>
+        <p:spPr/>
+      </p:sp>
+      <p:sp>
+        <p:nvSpPr>
+          <p:cNvPr id="3" name="Notes Placeholder 2"/>
+          <p:cNvSpPr>
+            <a:spLocks noGrp="1"/>
+          </p:cNvSpPr>
+          <p:nvPr>
+            <p:ph type="body" idx="1"/>
+          </p:nvPr>
+        </p:nvSpPr>
+        <p:spPr/>
+        <p:txBody>
+          <a:bodyPr/>
+          <a:lstStyle/>
+          <a:p>
+            <a:r>
+              <a:rPr lang="en-US" dirty="0"/>
+              <a:t/>
+            </a:r>
+            <a:endParaRPr lang="en-US" dirty="0"/>
+          </a:p>
+        </p:txBody>
+      </p:sp>
+      <p:sp>
+        <p:nvSpPr>
+          <p:cNvPr id="4" name="Slide Number Placeholder 3"/>
+          <p:cNvSpPr>
+            <a:spLocks noGrp="1"/>
+          </p:cNvSpPr>
+          <p:nvPr>
+            <p:ph type="sldNum" sz="quarter" idx="10"/>
+          </p:nvPr>
+        </p:nvSpPr>
+        <p:spPr/>
+        <p:txBody>
+          <a:bodyPr/>
+          <a:lstStyle/>
+          <a:p>
+            <a:fld id="{F7021451-1387-4CA6-816F-3879F97B5CBC}" type="slidenum">
+              <a:rPr lang="en-US"/>
+              <a:t>13</a:t>
             </a:fld>
             <a:endParaRPr lang="en-US"/>
           </a:p>
@@ -2140,7 +2229,7 @@
                 <a:ea typeface="맑은 고딕" pitchFamily="34" charset="-122"/>
                 <a:cs typeface="맑은 고딕" pitchFamily="34" charset="-120"/>
               </a:rPr>
-              <a:t>AI</a:t>
+              <a:t>핵심 기능 3</a:t>
             </a:r>
             <a:endParaRPr lang="en-US" sz="1200" dirty="0"/>
           </a:p>
@@ -2179,7 +2268,7 @@
                 <a:ea typeface="맑은 고딕" pitchFamily="34" charset="-122"/>
                 <a:cs typeface="맑은 고딕" pitchFamily="34" charset="-120"/>
               </a:rPr>
-              <a:t>AI — 두 엔진 비교</a:t>
+              <a:t>문서 추적성</a:t>
             </a:r>
             <a:endParaRPr lang="en-US" sz="3000" dirty="0"/>
           </a:p>
@@ -2187,326 +2276,72 @@
       </p:sp>
       <p:sp>
         <p:nvSpPr>
-          <p:cNvPr id="4" name="Shape 2"/>
-          <p:cNvSpPr/>
-          <p:nvPr/>
-        </p:nvSpPr>
-        <p:spPr>
-          <a:xfrm>
-            <a:off x="566928" y="1783080"/>
-            <a:ext cx="5440680" cy="2697480"/>
+          <p:cNvPr id="4" name="Text 2"/>
+          <p:cNvSpPr/>
+          <p:nvPr/>
+        </p:nvSpPr>
+        <p:spPr>
+          <a:xfrm>
+            <a:off x="10424160" y="822960"/>
+            <a:ext cx="1737360" cy="310896"/>
           </a:xfrm>
           <a:prstGeom prst="roundRect">
             <a:avLst>
-              <a:gd name="adj" fmla="val 3390"/>
+              <a:gd name="adj" fmla="val 47059"/>
             </a:avLst>
           </a:prstGeom>
           <a:solidFill>
-            <a:srgbClr val="EEF2FF"/>
+            <a:srgbClr val="FEF3C7"/>
+          </a:solidFill>
+          <a:ln/>
+        </p:spPr>
+        <p:txBody>
+          <a:bodyPr wrap="square" lIns="0" tIns="0" rIns="0" bIns="0" rtlCol="0" anchor="ctr"/>
+          <a:lstStyle/>
+          <a:p>
+            <a:pPr algn="ctr" indent="0" marL="0">
+              <a:buNone/>
+            </a:pPr>
+            <a:r>
+              <a:rPr lang="en-US" sz="1100" b="1" dirty="0">
+                <a:solidFill>
+                  <a:srgbClr val="B45309"/>
+                </a:solidFill>
+                <a:latin typeface="맑은 고딕" pitchFamily="34" charset="0"/>
+                <a:ea typeface="맑은 고딕" pitchFamily="34" charset="-122"/>
+                <a:cs typeface="맑은 고딕" pitchFamily="34" charset="-120"/>
+              </a:rPr>
+              <a:t>개발 예정</a:t>
+            </a:r>
+            <a:endParaRPr lang="en-US" sz="1100" dirty="0"/>
+          </a:p>
+        </p:txBody>
+      </p:sp>
+      <p:sp>
+        <p:nvSpPr>
+          <p:cNvPr id="5" name="Shape 3"/>
+          <p:cNvSpPr/>
+          <p:nvPr/>
+        </p:nvSpPr>
+        <p:spPr>
+          <a:xfrm>
+            <a:off x="566928" y="1874520"/>
+            <a:ext cx="11064240" cy="1097280"/>
+          </a:xfrm>
+          <a:prstGeom prst="roundRect">
+            <a:avLst>
+              <a:gd name="adj" fmla="val 6667"/>
+            </a:avLst>
+          </a:prstGeom>
+          <a:solidFill>
+            <a:srgbClr val="FFFFFF"/>
           </a:solidFill>
           <a:ln w="12700">
             <a:solidFill>
-              <a:srgbClr val="C7D2FE"/>
+              <a:srgbClr val="E5E7EB"/>
             </a:solidFill>
             <a:prstDash val="solid"/>
           </a:ln>
-        </p:spPr>
-      </p:sp>
-      <p:sp>
-        <p:nvSpPr>
-          <p:cNvPr id="5" name="Text 3"/>
-          <p:cNvSpPr/>
-          <p:nvPr/>
-        </p:nvSpPr>
-        <p:spPr>
-          <a:xfrm>
-            <a:off x="886968" y="2011680"/>
-            <a:ext cx="4846320" cy="457200"/>
-          </a:xfrm>
-          <a:prstGeom prst="rect">
-            <a:avLst/>
-          </a:prstGeom>
-          <a:noFill/>
-          <a:ln/>
-        </p:spPr>
-        <p:txBody>
-          <a:bodyPr wrap="square" lIns="0" tIns="0" rIns="0" bIns="0" rtlCol="0" anchor="ctr"/>
-          <a:lstStyle/>
-          <a:p>
-            <a:pPr indent="0" marL="0">
-              <a:buNone/>
-            </a:pPr>
-            <a:r>
-              <a:rPr lang="en-US" sz="1900" b="1" dirty="0">
-                <a:solidFill>
-                  <a:srgbClr val="6366F1"/>
-                </a:solidFill>
-                <a:latin typeface="맑은 고딕" pitchFamily="34" charset="0"/>
-                <a:ea typeface="맑은 고딕" pitchFamily="34" charset="-122"/>
-                <a:cs typeface="맑은 고딕" pitchFamily="34" charset="-120"/>
-              </a:rPr>
-              <a:t>로컬 Qwen3-8B</a:t>
-            </a:r>
-            <a:endParaRPr lang="en-US" sz="1900" dirty="0"/>
-          </a:p>
-        </p:txBody>
-      </p:sp>
-      <p:sp>
-        <p:nvSpPr>
-          <p:cNvPr id="6" name="Text 4"/>
-          <p:cNvSpPr/>
-          <p:nvPr/>
-        </p:nvSpPr>
-        <p:spPr>
-          <a:xfrm>
-            <a:off x="932688" y="2606040"/>
-            <a:ext cx="4754880" cy="1737360"/>
-          </a:xfrm>
-          <a:prstGeom prst="rect">
-            <a:avLst/>
-          </a:prstGeom>
-          <a:noFill/>
-          <a:ln/>
-        </p:spPr>
-        <p:txBody>
-          <a:bodyPr wrap="square" lIns="0" tIns="0" rIns="0" bIns="0" rtlCol="0" anchor="ctr"/>
-          <a:lstStyle/>
-          <a:p>
-            <a:pPr marL="342900" indent="-342900">
-              <a:spcAft>
-                <a:spcPts val="700"/>
-              </a:spcAft>
-              <a:buSzPct val="100000"/>
-              <a:buChar char="•"/>
-            </a:pPr>
-            <a:r>
-              <a:rPr lang="en-US" sz="1300" dirty="0">
-                <a:solidFill>
-                  <a:srgbClr val="1F2937"/>
-                </a:solidFill>
-                <a:latin typeface="맑은 고딕" pitchFamily="34" charset="0"/>
-                <a:ea typeface="맑은 고딕" pitchFamily="34" charset="-122"/>
-                <a:cs typeface="맑은 고딕" pitchFamily="34" charset="-120"/>
-              </a:rPr>
-              <a:t>내 워크스테이션(P4000 8GB)에서 직접</a:t>
-            </a:r>
-            <a:endParaRPr lang="en-US" sz="1300" dirty="0"/>
-          </a:p>
-          <a:p>
-            <a:pPr marL="342900" indent="-342900">
-              <a:spcAft>
-                <a:spcPts val="700"/>
-              </a:spcAft>
-              <a:buSzPct val="100000"/>
-              <a:buChar char="•"/>
-            </a:pPr>
-            <a:r>
-              <a:rPr lang="en-US" sz="1300" dirty="0">
-                <a:solidFill>
-                  <a:srgbClr val="1F2937"/>
-                </a:solidFill>
-                <a:latin typeface="맑은 고딕" pitchFamily="34" charset="0"/>
-                <a:ea typeface="맑은 고딕" pitchFamily="34" charset="-122"/>
-                <a:cs typeface="맑은 고딕" pitchFamily="34" charset="-120"/>
-              </a:rPr>
-              <a:t>8B 모델 · GGUF 양자화 Q5_K_M(≈5.85GB)</a:t>
-            </a:r>
-            <a:endParaRPr lang="en-US" sz="1300" dirty="0"/>
-          </a:p>
-          <a:p>
-            <a:pPr marL="342900" indent="-342900">
-              <a:spcAft>
-                <a:spcPts val="700"/>
-              </a:spcAft>
-              <a:buSzPct val="100000"/>
-              <a:buChar char="•"/>
-            </a:pPr>
-            <a:r>
-              <a:rPr lang="en-US" sz="1300" dirty="0">
-                <a:solidFill>
-                  <a:srgbClr val="1F2937"/>
-                </a:solidFill>
-                <a:latin typeface="맑은 고딕" pitchFamily="34" charset="0"/>
-                <a:ea typeface="맑은 고딕" pitchFamily="34" charset="-122"/>
-                <a:cs typeface="맑은 고딕" pitchFamily="34" charset="-120"/>
-              </a:rPr>
-              <a:t>오프라인 자립 · 한국어 강점</a:t>
-            </a:r>
-            <a:endParaRPr lang="en-US" sz="1300" dirty="0"/>
-          </a:p>
-        </p:txBody>
-      </p:sp>
-      <p:sp>
-        <p:nvSpPr>
-          <p:cNvPr id="7" name="Shape 5"/>
-          <p:cNvSpPr/>
-          <p:nvPr/>
-        </p:nvSpPr>
-        <p:spPr>
-          <a:xfrm>
-            <a:off x="6327648" y="1783080"/>
-            <a:ext cx="5440680" cy="2697480"/>
-          </a:xfrm>
-          <a:prstGeom prst="roundRect">
-            <a:avLst>
-              <a:gd name="adj" fmla="val 3390"/>
-            </a:avLst>
-          </a:prstGeom>
-          <a:solidFill>
-            <a:srgbClr val="F5F3FF"/>
-          </a:solidFill>
-          <a:ln w="12700">
-            <a:solidFill>
-              <a:srgbClr val="DDD6FE"/>
-            </a:solidFill>
-            <a:prstDash val="solid"/>
-          </a:ln>
-        </p:spPr>
-      </p:sp>
-      <p:sp>
-        <p:nvSpPr>
-          <p:cNvPr id="8" name="Text 6"/>
-          <p:cNvSpPr/>
-          <p:nvPr/>
-        </p:nvSpPr>
-        <p:spPr>
-          <a:xfrm>
-            <a:off x="6647688" y="2011680"/>
-            <a:ext cx="4846320" cy="457200"/>
-          </a:xfrm>
-          <a:prstGeom prst="rect">
-            <a:avLst/>
-          </a:prstGeom>
-          <a:noFill/>
-          <a:ln/>
-        </p:spPr>
-        <p:txBody>
-          <a:bodyPr wrap="square" lIns="0" tIns="0" rIns="0" bIns="0" rtlCol="0" anchor="ctr"/>
-          <a:lstStyle/>
-          <a:p>
-            <a:pPr indent="0" marL="0">
-              <a:buNone/>
-            </a:pPr>
-            <a:r>
-              <a:rPr lang="en-US" sz="1900" b="1" dirty="0">
-                <a:solidFill>
-                  <a:srgbClr val="8B5CF6"/>
-                </a:solidFill>
-                <a:latin typeface="맑은 고딕" pitchFamily="34" charset="0"/>
-                <a:ea typeface="맑은 고딕" pitchFamily="34" charset="-122"/>
-                <a:cs typeface="맑은 고딕" pitchFamily="34" charset="-120"/>
-              </a:rPr>
-              <a:t>사내 GPT-OSS-120B</a:t>
-            </a:r>
-            <a:endParaRPr lang="en-US" sz="1900" dirty="0"/>
-          </a:p>
-        </p:txBody>
-      </p:sp>
-      <p:sp>
-        <p:nvSpPr>
-          <p:cNvPr id="9" name="Text 7"/>
-          <p:cNvSpPr/>
-          <p:nvPr/>
-        </p:nvSpPr>
-        <p:spPr>
-          <a:xfrm>
-            <a:off x="6693408" y="2606040"/>
-            <a:ext cx="4754880" cy="1737360"/>
-          </a:xfrm>
-          <a:prstGeom prst="rect">
-            <a:avLst/>
-          </a:prstGeom>
-          <a:noFill/>
-          <a:ln/>
-        </p:spPr>
-        <p:txBody>
-          <a:bodyPr wrap="square" lIns="0" tIns="0" rIns="0" bIns="0" rtlCol="0" anchor="ctr"/>
-          <a:lstStyle/>
-          <a:p>
-            <a:pPr marL="342900" indent="-342900">
-              <a:spcAft>
-                <a:spcPts val="700"/>
-              </a:spcAft>
-              <a:buSzPct val="100000"/>
-              <a:buChar char="•"/>
-            </a:pPr>
-            <a:r>
-              <a:rPr lang="en-US" sz="1300" dirty="0">
-                <a:solidFill>
-                  <a:srgbClr val="1F2937"/>
-                </a:solidFill>
-                <a:latin typeface="맑은 고딕" pitchFamily="34" charset="0"/>
-                <a:ea typeface="맑은 고딕" pitchFamily="34" charset="-122"/>
-                <a:cs typeface="맑은 고딕" pitchFamily="34" charset="-120"/>
-              </a:rPr>
-              <a:t>사내 LLM API 서비스(OpenAI 호환)</a:t>
-            </a:r>
-            <a:endParaRPr lang="en-US" sz="1300" dirty="0"/>
-          </a:p>
-          <a:p>
-            <a:pPr marL="342900" indent="-342900">
-              <a:spcAft>
-                <a:spcPts val="700"/>
-              </a:spcAft>
-              <a:buSzPct val="100000"/>
-              <a:buChar char="•"/>
-            </a:pPr>
-            <a:r>
-              <a:rPr lang="en-US" sz="1300" dirty="0">
-                <a:solidFill>
-                  <a:srgbClr val="1F2937"/>
-                </a:solidFill>
-                <a:latin typeface="맑은 고딕" pitchFamily="34" charset="0"/>
-                <a:ea typeface="맑은 고딕" pitchFamily="34" charset="-122"/>
-                <a:cs typeface="맑은 고딕" pitchFamily="34" charset="-120"/>
-              </a:rPr>
-              <a:t>훨씬 큰 모델 → 어려운 판단 정확도 유리</a:t>
-            </a:r>
-            <a:endParaRPr lang="en-US" sz="1300" dirty="0"/>
-          </a:p>
-          <a:p>
-            <a:pPr marL="342900" indent="-342900">
-              <a:spcAft>
-                <a:spcPts val="700"/>
-              </a:spcAft>
-              <a:buSzPct val="100000"/>
-              <a:buChar char="•"/>
-            </a:pPr>
-            <a:r>
-              <a:rPr lang="en-US" sz="1300" dirty="0">
-                <a:solidFill>
-                  <a:srgbClr val="1F2937"/>
-                </a:solidFill>
-                <a:latin typeface="맑은 고딕" pitchFamily="34" charset="0"/>
-                <a:ea typeface="맑은 고딕" pitchFamily="34" charset="-122"/>
-                <a:cs typeface="맑은 고딕" pitchFamily="34" charset="-120"/>
-              </a:rPr>
-              <a:t>공용 서버 의존</a:t>
-            </a:r>
-            <a:endParaRPr lang="en-US" sz="1300" dirty="0"/>
-          </a:p>
-        </p:txBody>
-      </p:sp>
-      <p:sp>
-        <p:nvSpPr>
-          <p:cNvPr id="10" name="Shape 8"/>
-          <p:cNvSpPr/>
-          <p:nvPr/>
-        </p:nvSpPr>
-        <p:spPr>
-          <a:xfrm>
-            <a:off x="566928" y="4709160"/>
-            <a:ext cx="11064240" cy="1463040"/>
-          </a:xfrm>
-          <a:prstGeom prst="roundRect">
-            <a:avLst>
-              <a:gd name="adj" fmla="val 6250"/>
-            </a:avLst>
-          </a:prstGeom>
-          <a:solidFill>
-            <a:srgbClr val="1E1B4B"/>
-          </a:solidFill>
-          <a:ln/>
           <a:effectLst>
             <a:outerShdw sx="100000" sy="100000" kx="0" ky="0" algn="bl" rotWithShape="0" blurRad="127000" dist="50800" dir="5400000">
               <a:srgbClr val="1E1B4B">
@@ -2518,14 +2353,55 @@
       </p:sp>
       <p:sp>
         <p:nvSpPr>
-          <p:cNvPr id="11" name="Text 9"/>
-          <p:cNvSpPr/>
-          <p:nvPr/>
-        </p:nvSpPr>
-        <p:spPr>
-          <a:xfrm>
-            <a:off x="886968" y="4892040"/>
-            <a:ext cx="10424160" cy="457200"/>
+          <p:cNvPr id="6" name="Text 4"/>
+          <p:cNvSpPr/>
+          <p:nvPr/>
+        </p:nvSpPr>
+        <p:spPr>
+          <a:xfrm>
+            <a:off x="822960" y="2167128"/>
+            <a:ext cx="512064" cy="512064"/>
+          </a:xfrm>
+          <a:prstGeom prst="ellipse">
+            <a:avLst/>
+          </a:prstGeom>
+          <a:solidFill>
+            <a:srgbClr val="8B5CF6"/>
+          </a:solidFill>
+          <a:ln/>
+        </p:spPr>
+        <p:txBody>
+          <a:bodyPr wrap="square" lIns="0" tIns="0" rIns="0" bIns="0" rtlCol="0" anchor="ctr"/>
+          <a:lstStyle/>
+          <a:p>
+            <a:pPr algn="ctr" indent="0" marL="0">
+              <a:buNone/>
+            </a:pPr>
+            <a:r>
+              <a:rPr lang="en-US" sz="1800" b="1" dirty="0">
+                <a:solidFill>
+                  <a:srgbClr val="FFFFFF"/>
+                </a:solidFill>
+                <a:latin typeface="맑은 고딕" pitchFamily="34" charset="0"/>
+                <a:ea typeface="맑은 고딕" pitchFamily="34" charset="-122"/>
+                <a:cs typeface="맑은 고딕" pitchFamily="34" charset="-120"/>
+              </a:rPr>
+              <a:t>1</a:t>
+            </a:r>
+            <a:endParaRPr lang="en-US" sz="1800" dirty="0"/>
+          </a:p>
+        </p:txBody>
+      </p:sp>
+      <p:sp>
+        <p:nvSpPr>
+          <p:cNvPr id="7" name="Text 5"/>
+          <p:cNvSpPr/>
+          <p:nvPr/>
+        </p:nvSpPr>
+        <p:spPr>
+          <a:xfrm>
+            <a:off x="1527048" y="2039112"/>
+            <a:ext cx="2926080" cy="731520"/>
           </a:xfrm>
           <a:prstGeom prst="rect">
             <a:avLst/>
@@ -2541,44 +2417,30 @@
               <a:buNone/>
             </a:pPr>
             <a:r>
-              <a:rPr lang="en-US" sz="1350" b="1" dirty="0">
-                <a:solidFill>
-                  <a:srgbClr val="FFFFFF"/>
-                </a:solidFill>
-                <a:latin typeface="맑은 고딕" pitchFamily="34" charset="0"/>
-                <a:ea typeface="맑은 고딕" pitchFamily="34" charset="-122"/>
-                <a:cs typeface="맑은 고딕" pitchFamily="34" charset="-120"/>
-              </a:rPr>
-              <a:t>응답 시간은 둘 다 3~5초로 비슷</a:t>
-            </a:r>
-            <a:pPr indent="0" marL="0">
-              <a:buNone/>
-            </a:pPr>
-            <a:r>
-              <a:rPr lang="en-US" sz="1350" dirty="0">
-                <a:solidFill>
-                  <a:srgbClr val="C7D2FE"/>
-                </a:solidFill>
-                <a:latin typeface="맑은 고딕" pitchFamily="34" charset="0"/>
-                <a:ea typeface="맑은 고딕" pitchFamily="34" charset="-122"/>
-                <a:cs typeface="맑은 고딕" pitchFamily="34" charset="-120"/>
-              </a:rPr>
-              <a:t> → 속도가 아니라 정확도·자립성으로 선택. 동일 요구사항 세트로 실측 후 확정.</a:t>
-            </a:r>
-            <a:endParaRPr lang="en-US" sz="1350" dirty="0"/>
-          </a:p>
-        </p:txBody>
-      </p:sp>
-      <p:sp>
-        <p:nvSpPr>
-          <p:cNvPr id="12" name="Text 10"/>
-          <p:cNvSpPr/>
-          <p:nvPr/>
-        </p:nvSpPr>
-        <p:spPr>
-          <a:xfrm>
-            <a:off x="886968" y="5440680"/>
-            <a:ext cx="10424160" cy="640080"/>
+              <a:rPr lang="en-US" sz="1700" b="1" dirty="0">
+                <a:solidFill>
+                  <a:srgbClr val="1F2937"/>
+                </a:solidFill>
+                <a:latin typeface="맑은 고딕" pitchFamily="34" charset="0"/>
+                <a:ea typeface="맑은 고딕" pitchFamily="34" charset="-122"/>
+                <a:cs typeface="맑은 고딕" pitchFamily="34" charset="-120"/>
+              </a:rPr>
+              <a:t>연결 조회</a:t>
+            </a:r>
+            <a:endParaRPr lang="en-US" sz="1700" dirty="0"/>
+          </a:p>
+        </p:txBody>
+      </p:sp>
+      <p:sp>
+        <p:nvSpPr>
+          <p:cNvPr id="8" name="Text 6"/>
+          <p:cNvSpPr/>
+          <p:nvPr/>
+        </p:nvSpPr>
+        <p:spPr>
+          <a:xfrm>
+            <a:off x="4498848" y="2039112"/>
+            <a:ext cx="6858000" cy="777240"/>
           </a:xfrm>
           <a:prstGeom prst="rect">
             <a:avLst/>
@@ -2597,16 +2459,155 @@
               <a:buNone/>
             </a:pPr>
             <a:r>
-              <a:rPr lang="en-US" sz="1250" b="1" dirty="0">
-                <a:solidFill>
-                  <a:srgbClr val="A5B4FC"/>
-                </a:solidFill>
-                <a:latin typeface="맑은 고딕" pitchFamily="34" charset="0"/>
-                <a:ea typeface="맑은 고딕" pitchFamily="34" charset="-122"/>
-                <a:cs typeface="맑은 고딕" pitchFamily="34" charset="-120"/>
-              </a:rPr>
-              <a:t>양자화란?</a:t>
-            </a:r>
+              <a:rPr lang="en-US" sz="1300" dirty="0">
+                <a:solidFill>
+                  <a:srgbClr val="6B7280"/>
+                </a:solidFill>
+                <a:latin typeface="맑은 고딕" pitchFamily="34" charset="0"/>
+                <a:ea typeface="맑은 고딕" pitchFamily="34" charset="-122"/>
+                <a:cs typeface="맑은 고딕" pitchFamily="34" charset="-120"/>
+              </a:rPr>
+              <a:t>요구사항 1건에 연결된 기능요구사항·비기능요구사항·티켓을 한눈에 조회 (양방향)</a:t>
+            </a:r>
+            <a:endParaRPr lang="en-US" sz="1300" dirty="0"/>
+          </a:p>
+        </p:txBody>
+      </p:sp>
+      <p:sp>
+        <p:nvSpPr>
+          <p:cNvPr id="9" name="Shape 7"/>
+          <p:cNvSpPr/>
+          <p:nvPr/>
+        </p:nvSpPr>
+        <p:spPr>
+          <a:xfrm>
+            <a:off x="566928" y="3154680"/>
+            <a:ext cx="11064240" cy="1097280"/>
+          </a:xfrm>
+          <a:prstGeom prst="roundRect">
+            <a:avLst>
+              <a:gd name="adj" fmla="val 6667"/>
+            </a:avLst>
+          </a:prstGeom>
+          <a:solidFill>
+            <a:srgbClr val="FFFFFF"/>
+          </a:solidFill>
+          <a:ln w="12700">
+            <a:solidFill>
+              <a:srgbClr val="E5E7EB"/>
+            </a:solidFill>
+            <a:prstDash val="solid"/>
+          </a:ln>
+          <a:effectLst>
+            <a:outerShdw sx="100000" sy="100000" kx="0" ky="0" algn="bl" rotWithShape="0" blurRad="127000" dist="50800" dir="5400000">
+              <a:srgbClr val="1E1B4B">
+                <a:alpha val="18000"/>
+              </a:srgbClr>
+            </a:outerShdw>
+          </a:effectLst>
+        </p:spPr>
+      </p:sp>
+      <p:sp>
+        <p:nvSpPr>
+          <p:cNvPr id="10" name="Text 8"/>
+          <p:cNvSpPr/>
+          <p:nvPr/>
+        </p:nvSpPr>
+        <p:spPr>
+          <a:xfrm>
+            <a:off x="822960" y="3447288"/>
+            <a:ext cx="512064" cy="512064"/>
+          </a:xfrm>
+          <a:prstGeom prst="ellipse">
+            <a:avLst/>
+          </a:prstGeom>
+          <a:solidFill>
+            <a:srgbClr val="8B5CF6"/>
+          </a:solidFill>
+          <a:ln/>
+        </p:spPr>
+        <p:txBody>
+          <a:bodyPr wrap="square" lIns="0" tIns="0" rIns="0" bIns="0" rtlCol="0" anchor="ctr"/>
+          <a:lstStyle/>
+          <a:p>
+            <a:pPr algn="ctr" indent="0" marL="0">
+              <a:buNone/>
+            </a:pPr>
+            <a:r>
+              <a:rPr lang="en-US" sz="1800" b="1" dirty="0">
+                <a:solidFill>
+                  <a:srgbClr val="FFFFFF"/>
+                </a:solidFill>
+                <a:latin typeface="맑은 고딕" pitchFamily="34" charset="0"/>
+                <a:ea typeface="맑은 고딕" pitchFamily="34" charset="-122"/>
+                <a:cs typeface="맑은 고딕" pitchFamily="34" charset="-120"/>
+              </a:rPr>
+              <a:t>2</a:t>
+            </a:r>
+            <a:endParaRPr lang="en-US" sz="1800" dirty="0"/>
+          </a:p>
+        </p:txBody>
+      </p:sp>
+      <p:sp>
+        <p:nvSpPr>
+          <p:cNvPr id="11" name="Text 9"/>
+          <p:cNvSpPr/>
+          <p:nvPr/>
+        </p:nvSpPr>
+        <p:spPr>
+          <a:xfrm>
+            <a:off x="1527048" y="3319272"/>
+            <a:ext cx="2926080" cy="731520"/>
+          </a:xfrm>
+          <a:prstGeom prst="rect">
+            <a:avLst/>
+          </a:prstGeom>
+          <a:noFill/>
+          <a:ln/>
+        </p:spPr>
+        <p:txBody>
+          <a:bodyPr wrap="square" lIns="0" tIns="0" rIns="0" bIns="0" rtlCol="0" anchor="ctr"/>
+          <a:lstStyle/>
+          <a:p>
+            <a:pPr indent="0" marL="0">
+              <a:buNone/>
+            </a:pPr>
+            <a:r>
+              <a:rPr lang="en-US" sz="1700" b="1" dirty="0">
+                <a:solidFill>
+                  <a:srgbClr val="1F2937"/>
+                </a:solidFill>
+                <a:latin typeface="맑은 고딕" pitchFamily="34" charset="0"/>
+                <a:ea typeface="맑은 고딕" pitchFamily="34" charset="-122"/>
+                <a:cs typeface="맑은 고딕" pitchFamily="34" charset="-120"/>
+              </a:rPr>
+              <a:t>변경 영향 분석</a:t>
+            </a:r>
+            <a:endParaRPr lang="en-US" sz="1700" dirty="0"/>
+          </a:p>
+        </p:txBody>
+      </p:sp>
+      <p:sp>
+        <p:nvSpPr>
+          <p:cNvPr id="12" name="Text 10"/>
+          <p:cNvSpPr/>
+          <p:nvPr/>
+        </p:nvSpPr>
+        <p:spPr>
+          <a:xfrm>
+            <a:off x="4498848" y="3319272"/>
+            <a:ext cx="6858000" cy="777240"/>
+          </a:xfrm>
+          <a:prstGeom prst="rect">
+            <a:avLst/>
+          </a:prstGeom>
+          <a:noFill/>
+          <a:ln/>
+        </p:spPr>
+        <p:txBody>
+          <a:bodyPr wrap="square" lIns="0" tIns="0" rIns="0" bIns="0" rtlCol="0" anchor="ctr"/>
+          <a:lstStyle/>
+          <a:p>
             <a:pPr indent="0" marL="0">
               <a:lnSpc>
                 <a:spcPct val="105000"/>
@@ -2614,17 +2615,212 @@
               <a:buNone/>
             </a:pPr>
             <a:r>
-              <a:rPr lang="en-US" sz="1250" dirty="0">
-                <a:solidFill>
-                  <a:srgbClr val="C7D2FE"/>
-                </a:solidFill>
-                <a:latin typeface="맑은 고딕" pitchFamily="34" charset="0"/>
-                <a:ea typeface="맑은 고딕" pitchFamily="34" charset="-122"/>
-                <a:cs typeface="맑은 고딕" pitchFamily="34" charset="-120"/>
-              </a:rPr>
-              <a:t>  사진을 JPG로 압축하듯 용량↓·품질 소폭↓. 8B 원본(≈16GB)은 8GB GPU에 못 올라가 5.85GB로 압축해 사용.</a:t>
-            </a:r>
-            <a:endParaRPr lang="en-US" sz="1250" dirty="0"/>
+              <a:rPr lang="en-US" sz="1300" dirty="0">
+                <a:solidFill>
+                  <a:srgbClr val="6B7280"/>
+                </a:solidFill>
+                <a:latin typeface="맑은 고딕" pitchFamily="34" charset="0"/>
+                <a:ea typeface="맑은 고딕" pitchFamily="34" charset="-122"/>
+                <a:cs typeface="맑은 고딕" pitchFamily="34" charset="-120"/>
+              </a:rPr>
+              <a:t>요구사항이 수정되면 영향받는 문서·티켓을 자동으로 표시 → 누락 방지</a:t>
+            </a:r>
+            <a:endParaRPr lang="en-US" sz="1300" dirty="0"/>
+          </a:p>
+        </p:txBody>
+      </p:sp>
+      <p:sp>
+        <p:nvSpPr>
+          <p:cNvPr id="13" name="Shape 11"/>
+          <p:cNvSpPr/>
+          <p:nvPr/>
+        </p:nvSpPr>
+        <p:spPr>
+          <a:xfrm>
+            <a:off x="566928" y="4434840"/>
+            <a:ext cx="11064240" cy="1097280"/>
+          </a:xfrm>
+          <a:prstGeom prst="roundRect">
+            <a:avLst>
+              <a:gd name="adj" fmla="val 6667"/>
+            </a:avLst>
+          </a:prstGeom>
+          <a:solidFill>
+            <a:srgbClr val="EEF2FF"/>
+          </a:solidFill>
+          <a:ln w="12700">
+            <a:solidFill>
+              <a:srgbClr val="E5E7EB"/>
+            </a:solidFill>
+            <a:prstDash val="solid"/>
+          </a:ln>
+          <a:effectLst>
+            <a:outerShdw sx="100000" sy="100000" kx="0" ky="0" algn="bl" rotWithShape="0" blurRad="127000" dist="50800" dir="5400000">
+              <a:srgbClr val="1E1B4B">
+                <a:alpha val="18000"/>
+              </a:srgbClr>
+            </a:outerShdw>
+          </a:effectLst>
+        </p:spPr>
+      </p:sp>
+      <p:sp>
+        <p:nvSpPr>
+          <p:cNvPr id="14" name="Text 12"/>
+          <p:cNvSpPr/>
+          <p:nvPr/>
+        </p:nvSpPr>
+        <p:spPr>
+          <a:xfrm>
+            <a:off x="822960" y="4727448"/>
+            <a:ext cx="512064" cy="512064"/>
+          </a:xfrm>
+          <a:prstGeom prst="ellipse">
+            <a:avLst/>
+          </a:prstGeom>
+          <a:solidFill>
+            <a:srgbClr val="8B5CF6"/>
+          </a:solidFill>
+          <a:ln/>
+        </p:spPr>
+        <p:txBody>
+          <a:bodyPr wrap="square" lIns="0" tIns="0" rIns="0" bIns="0" rtlCol="0" anchor="ctr"/>
+          <a:lstStyle/>
+          <a:p>
+            <a:pPr algn="ctr" indent="0" marL="0">
+              <a:buNone/>
+            </a:pPr>
+            <a:r>
+              <a:rPr lang="en-US" sz="1800" b="1" dirty="0">
+                <a:solidFill>
+                  <a:srgbClr val="FFFFFF"/>
+                </a:solidFill>
+                <a:latin typeface="맑은 고딕" pitchFamily="34" charset="0"/>
+                <a:ea typeface="맑은 고딕" pitchFamily="34" charset="-122"/>
+                <a:cs typeface="맑은 고딕" pitchFamily="34" charset="-120"/>
+              </a:rPr>
+              <a:t>3</a:t>
+            </a:r>
+            <a:endParaRPr lang="en-US" sz="1800" dirty="0"/>
+          </a:p>
+        </p:txBody>
+      </p:sp>
+      <p:sp>
+        <p:nvSpPr>
+          <p:cNvPr id="15" name="Text 13"/>
+          <p:cNvSpPr/>
+          <p:nvPr/>
+        </p:nvSpPr>
+        <p:spPr>
+          <a:xfrm>
+            <a:off x="1527048" y="4599432"/>
+            <a:ext cx="2926080" cy="731520"/>
+          </a:xfrm>
+          <a:prstGeom prst="rect">
+            <a:avLst/>
+          </a:prstGeom>
+          <a:noFill/>
+          <a:ln/>
+        </p:spPr>
+        <p:txBody>
+          <a:bodyPr wrap="square" lIns="0" tIns="0" rIns="0" bIns="0" rtlCol="0" anchor="ctr"/>
+          <a:lstStyle/>
+          <a:p>
+            <a:pPr indent="0" marL="0">
+              <a:buNone/>
+            </a:pPr>
+            <a:r>
+              <a:rPr lang="en-US" sz="1700" b="1" dirty="0">
+                <a:solidFill>
+                  <a:srgbClr val="1F2937"/>
+                </a:solidFill>
+                <a:latin typeface="맑은 고딕" pitchFamily="34" charset="0"/>
+                <a:ea typeface="맑은 고딕" pitchFamily="34" charset="-122"/>
+                <a:cs typeface="맑은 고딕" pitchFamily="34" charset="-120"/>
+              </a:rPr>
+              <a:t>진행상황 / 개발완료</a:t>
+            </a:r>
+            <a:endParaRPr lang="en-US" sz="1700" dirty="0"/>
+          </a:p>
+        </p:txBody>
+      </p:sp>
+      <p:sp>
+        <p:nvSpPr>
+          <p:cNvPr id="16" name="Text 14"/>
+          <p:cNvSpPr/>
+          <p:nvPr/>
+        </p:nvSpPr>
+        <p:spPr>
+          <a:xfrm>
+            <a:off x="4498848" y="4599432"/>
+            <a:ext cx="6858000" cy="777240"/>
+          </a:xfrm>
+          <a:prstGeom prst="rect">
+            <a:avLst/>
+          </a:prstGeom>
+          <a:noFill/>
+          <a:ln/>
+        </p:spPr>
+        <p:txBody>
+          <a:bodyPr wrap="square" lIns="0" tIns="0" rIns="0" bIns="0" rtlCol="0" anchor="ctr"/>
+          <a:lstStyle/>
+          <a:p>
+            <a:pPr indent="0" marL="0">
+              <a:lnSpc>
+                <a:spcPct val="105000"/>
+              </a:lnSpc>
+              <a:buNone/>
+            </a:pPr>
+            <a:r>
+              <a:rPr lang="en-US" sz="1300" dirty="0">
+                <a:solidFill>
+                  <a:srgbClr val="6B7280"/>
+                </a:solidFill>
+                <a:latin typeface="맑은 고딕" pitchFamily="34" charset="0"/>
+                <a:ea typeface="맑은 고딕" pitchFamily="34" charset="-122"/>
+                <a:cs typeface="맑은 고딕" pitchFamily="34" charset="-120"/>
+              </a:rPr>
+              <a:t>요구사항·티켓의 상태(작성중·검토·개발중·완료)와 진행률을 한눈에</a:t>
+            </a:r>
+            <a:endParaRPr lang="en-US" sz="1300" dirty="0"/>
+          </a:p>
+        </p:txBody>
+      </p:sp>
+      <p:sp>
+        <p:nvSpPr>
+          <p:cNvPr id="17" name="Text 15"/>
+          <p:cNvSpPr/>
+          <p:nvPr/>
+        </p:nvSpPr>
+        <p:spPr>
+          <a:xfrm>
+            <a:off x="566928" y="5943600"/>
+            <a:ext cx="10972800" cy="365760"/>
+          </a:xfrm>
+          <a:prstGeom prst="rect">
+            <a:avLst/>
+          </a:prstGeom>
+          <a:noFill/>
+          <a:ln/>
+        </p:spPr>
+        <p:txBody>
+          <a:bodyPr wrap="square" lIns="0" tIns="0" rIns="0" bIns="0" rtlCol="0" anchor="ctr"/>
+          <a:lstStyle/>
+          <a:p>
+            <a:pPr indent="0" marL="0">
+              <a:buNone/>
+            </a:pPr>
+            <a:r>
+              <a:rPr lang="en-US" sz="1200" i="1" dirty="0">
+                <a:solidFill>
+                  <a:srgbClr val="6B7280"/>
+                </a:solidFill>
+                <a:latin typeface="맑은 고딕" pitchFamily="34" charset="0"/>
+                <a:ea typeface="맑은 고딕" pitchFamily="34" charset="-122"/>
+                <a:cs typeface="맑은 고딕" pitchFamily="34" charset="-120"/>
+              </a:rPr>
+              <a:t>※ 기존 “DB 변경관리”를 대체 — 컨셉(고객 요구사항 기반 문서화)에 맞춰 재정의</a:t>
+            </a:r>
+            <a:endParaRPr lang="en-US" sz="1200" dirty="0"/>
           </a:p>
         </p:txBody>
       </p:sp>
@@ -2639,6 +2835,559 @@
 <file path=ppt/slides/slide11.xml><?xml version="1.0" encoding="utf-8"?>
 <p:sld xmlns:a="http://schemas.openxmlformats.org/drawingml/2006/main" xmlns:r="http://schemas.openxmlformats.org/officeDocument/2006/relationships" xmlns:p="http://schemas.openxmlformats.org/presentationml/2006/main">
   <p:cSld name="Slide 11">
+    <p:bg>
+      <p:bgPr>
+        <a:solidFill>
+          <a:srgbClr val="FFFFFF"/>
+        </a:solidFill>
+      </p:bgPr>
+    </p:bg>
+    <p:spTree>
+      <p:nvGrpSpPr>
+        <p:cNvPr id="1" name=""/>
+        <p:cNvGrpSpPr/>
+        <p:nvPr/>
+      </p:nvGrpSpPr>
+      <p:grpSpPr>
+        <a:xfrm>
+          <a:off x="0" y="0"/>
+          <a:ext cx="0" cy="0"/>
+          <a:chOff x="0" y="0"/>
+          <a:chExt cx="0" cy="0"/>
+        </a:xfrm>
+      </p:grpSpPr>
+      <p:sp>
+        <p:nvSpPr>
+          <p:cNvPr id="2" name="Text 0"/>
+          <p:cNvSpPr/>
+          <p:nvPr/>
+        </p:nvSpPr>
+        <p:spPr>
+          <a:xfrm>
+            <a:off x="566928" y="457200"/>
+            <a:ext cx="10058400" cy="274320"/>
+          </a:xfrm>
+          <a:prstGeom prst="rect">
+            <a:avLst/>
+          </a:prstGeom>
+          <a:noFill/>
+          <a:ln/>
+        </p:spPr>
+        <p:txBody>
+          <a:bodyPr wrap="square" lIns="0" tIns="0" rIns="0" bIns="0" rtlCol="0" anchor="ctr"/>
+          <a:lstStyle/>
+          <a:p>
+            <a:pPr indent="0" marL="0">
+              <a:buNone/>
+            </a:pPr>
+            <a:r>
+              <a:rPr lang="en-US" sz="1200" b="1" spc="100" kern="0" dirty="0">
+                <a:solidFill>
+                  <a:srgbClr val="6366F1"/>
+                </a:solidFill>
+                <a:latin typeface="맑은 고딕" pitchFamily="34" charset="0"/>
+                <a:ea typeface="맑은 고딕" pitchFamily="34" charset="-122"/>
+                <a:cs typeface="맑은 고딕" pitchFamily="34" charset="-120"/>
+              </a:rPr>
+              <a:t>AI</a:t>
+            </a:r>
+            <a:endParaRPr lang="en-US" sz="1200" dirty="0"/>
+          </a:p>
+        </p:txBody>
+      </p:sp>
+      <p:sp>
+        <p:nvSpPr>
+          <p:cNvPr id="3" name="Text 1"/>
+          <p:cNvSpPr/>
+          <p:nvPr/>
+        </p:nvSpPr>
+        <p:spPr>
+          <a:xfrm>
+            <a:off x="566928" y="749808"/>
+            <a:ext cx="10515600" cy="640080"/>
+          </a:xfrm>
+          <a:prstGeom prst="rect">
+            <a:avLst/>
+          </a:prstGeom>
+          <a:noFill/>
+          <a:ln/>
+        </p:spPr>
+        <p:txBody>
+          <a:bodyPr wrap="square" lIns="0" tIns="0" rIns="0" bIns="0" rtlCol="0" anchor="ctr"/>
+          <a:lstStyle/>
+          <a:p>
+            <a:pPr indent="0" marL="0">
+              <a:buNone/>
+            </a:pPr>
+            <a:r>
+              <a:rPr lang="en-US" sz="3000" b="1" dirty="0">
+                <a:solidFill>
+                  <a:srgbClr val="1F2937"/>
+                </a:solidFill>
+                <a:latin typeface="맑은 고딕" pitchFamily="34" charset="0"/>
+                <a:ea typeface="맑은 고딕" pitchFamily="34" charset="-122"/>
+                <a:cs typeface="맑은 고딕" pitchFamily="34" charset="-120"/>
+              </a:rPr>
+              <a:t>AI — 두 엔진 비교</a:t>
+            </a:r>
+            <a:endParaRPr lang="en-US" sz="3000" dirty="0"/>
+          </a:p>
+        </p:txBody>
+      </p:sp>
+      <p:sp>
+        <p:nvSpPr>
+          <p:cNvPr id="4" name="Shape 2"/>
+          <p:cNvSpPr/>
+          <p:nvPr/>
+        </p:nvSpPr>
+        <p:spPr>
+          <a:xfrm>
+            <a:off x="566928" y="1783080"/>
+            <a:ext cx="5440680" cy="2697480"/>
+          </a:xfrm>
+          <a:prstGeom prst="roundRect">
+            <a:avLst>
+              <a:gd name="adj" fmla="val 3390"/>
+            </a:avLst>
+          </a:prstGeom>
+          <a:solidFill>
+            <a:srgbClr val="EEF2FF"/>
+          </a:solidFill>
+          <a:ln w="12700">
+            <a:solidFill>
+              <a:srgbClr val="C7D2FE"/>
+            </a:solidFill>
+            <a:prstDash val="solid"/>
+          </a:ln>
+        </p:spPr>
+      </p:sp>
+      <p:sp>
+        <p:nvSpPr>
+          <p:cNvPr id="5" name="Text 3"/>
+          <p:cNvSpPr/>
+          <p:nvPr/>
+        </p:nvSpPr>
+        <p:spPr>
+          <a:xfrm>
+            <a:off x="886968" y="2011680"/>
+            <a:ext cx="4846320" cy="457200"/>
+          </a:xfrm>
+          <a:prstGeom prst="rect">
+            <a:avLst/>
+          </a:prstGeom>
+          <a:noFill/>
+          <a:ln/>
+        </p:spPr>
+        <p:txBody>
+          <a:bodyPr wrap="square" lIns="0" tIns="0" rIns="0" bIns="0" rtlCol="0" anchor="ctr"/>
+          <a:lstStyle/>
+          <a:p>
+            <a:pPr indent="0" marL="0">
+              <a:buNone/>
+            </a:pPr>
+            <a:r>
+              <a:rPr lang="en-US" sz="1900" b="1" dirty="0">
+                <a:solidFill>
+                  <a:srgbClr val="6366F1"/>
+                </a:solidFill>
+                <a:latin typeface="맑은 고딕" pitchFamily="34" charset="0"/>
+                <a:ea typeface="맑은 고딕" pitchFamily="34" charset="-122"/>
+                <a:cs typeface="맑은 고딕" pitchFamily="34" charset="-120"/>
+              </a:rPr>
+              <a:t>로컬 Qwen3-8B</a:t>
+            </a:r>
+            <a:endParaRPr lang="en-US" sz="1900" dirty="0"/>
+          </a:p>
+        </p:txBody>
+      </p:sp>
+      <p:sp>
+        <p:nvSpPr>
+          <p:cNvPr id="6" name="Text 4"/>
+          <p:cNvSpPr/>
+          <p:nvPr/>
+        </p:nvSpPr>
+        <p:spPr>
+          <a:xfrm>
+            <a:off x="932688" y="2606040"/>
+            <a:ext cx="4754880" cy="1737360"/>
+          </a:xfrm>
+          <a:prstGeom prst="rect">
+            <a:avLst/>
+          </a:prstGeom>
+          <a:noFill/>
+          <a:ln/>
+        </p:spPr>
+        <p:txBody>
+          <a:bodyPr wrap="square" lIns="0" tIns="0" rIns="0" bIns="0" rtlCol="0" anchor="ctr"/>
+          <a:lstStyle/>
+          <a:p>
+            <a:pPr marL="342900" indent="-342900">
+              <a:spcAft>
+                <a:spcPts val="700"/>
+              </a:spcAft>
+              <a:buSzPct val="100000"/>
+              <a:buChar char="•"/>
+            </a:pPr>
+            <a:r>
+              <a:rPr lang="en-US" sz="1300" dirty="0">
+                <a:solidFill>
+                  <a:srgbClr val="1F2937"/>
+                </a:solidFill>
+                <a:latin typeface="맑은 고딕" pitchFamily="34" charset="0"/>
+                <a:ea typeface="맑은 고딕" pitchFamily="34" charset="-122"/>
+                <a:cs typeface="맑은 고딕" pitchFamily="34" charset="-120"/>
+              </a:rPr>
+              <a:t>내 워크스테이션(P4000 8GB)에서 직접</a:t>
+            </a:r>
+            <a:endParaRPr lang="en-US" sz="1300" dirty="0"/>
+          </a:p>
+          <a:p>
+            <a:pPr marL="342900" indent="-342900">
+              <a:spcAft>
+                <a:spcPts val="700"/>
+              </a:spcAft>
+              <a:buSzPct val="100000"/>
+              <a:buChar char="•"/>
+            </a:pPr>
+            <a:r>
+              <a:rPr lang="en-US" sz="1300" dirty="0">
+                <a:solidFill>
+                  <a:srgbClr val="1F2937"/>
+                </a:solidFill>
+                <a:latin typeface="맑은 고딕" pitchFamily="34" charset="0"/>
+                <a:ea typeface="맑은 고딕" pitchFamily="34" charset="-122"/>
+                <a:cs typeface="맑은 고딕" pitchFamily="34" charset="-120"/>
+              </a:rPr>
+              <a:t>8B 모델 · GGUF 양자화 Q5_K_M(≈5.85GB)</a:t>
+            </a:r>
+            <a:endParaRPr lang="en-US" sz="1300" dirty="0"/>
+          </a:p>
+          <a:p>
+            <a:pPr marL="342900" indent="-342900">
+              <a:spcAft>
+                <a:spcPts val="700"/>
+              </a:spcAft>
+              <a:buSzPct val="100000"/>
+              <a:buChar char="•"/>
+            </a:pPr>
+            <a:r>
+              <a:rPr lang="en-US" sz="1300" dirty="0">
+                <a:solidFill>
+                  <a:srgbClr val="1F2937"/>
+                </a:solidFill>
+                <a:latin typeface="맑은 고딕" pitchFamily="34" charset="0"/>
+                <a:ea typeface="맑은 고딕" pitchFamily="34" charset="-122"/>
+                <a:cs typeface="맑은 고딕" pitchFamily="34" charset="-120"/>
+              </a:rPr>
+              <a:t>오프라인 자립 · 한국어 강점</a:t>
+            </a:r>
+            <a:endParaRPr lang="en-US" sz="1300" dirty="0"/>
+          </a:p>
+        </p:txBody>
+      </p:sp>
+      <p:sp>
+        <p:nvSpPr>
+          <p:cNvPr id="7" name="Shape 5"/>
+          <p:cNvSpPr/>
+          <p:nvPr/>
+        </p:nvSpPr>
+        <p:spPr>
+          <a:xfrm>
+            <a:off x="6327648" y="1783080"/>
+            <a:ext cx="5440680" cy="2697480"/>
+          </a:xfrm>
+          <a:prstGeom prst="roundRect">
+            <a:avLst>
+              <a:gd name="adj" fmla="val 3390"/>
+            </a:avLst>
+          </a:prstGeom>
+          <a:solidFill>
+            <a:srgbClr val="F5F3FF"/>
+          </a:solidFill>
+          <a:ln w="12700">
+            <a:solidFill>
+              <a:srgbClr val="DDD6FE"/>
+            </a:solidFill>
+            <a:prstDash val="solid"/>
+          </a:ln>
+        </p:spPr>
+      </p:sp>
+      <p:sp>
+        <p:nvSpPr>
+          <p:cNvPr id="8" name="Text 6"/>
+          <p:cNvSpPr/>
+          <p:nvPr/>
+        </p:nvSpPr>
+        <p:spPr>
+          <a:xfrm>
+            <a:off x="6647688" y="2011680"/>
+            <a:ext cx="4846320" cy="457200"/>
+          </a:xfrm>
+          <a:prstGeom prst="rect">
+            <a:avLst/>
+          </a:prstGeom>
+          <a:noFill/>
+          <a:ln/>
+        </p:spPr>
+        <p:txBody>
+          <a:bodyPr wrap="square" lIns="0" tIns="0" rIns="0" bIns="0" rtlCol="0" anchor="ctr"/>
+          <a:lstStyle/>
+          <a:p>
+            <a:pPr indent="0" marL="0">
+              <a:buNone/>
+            </a:pPr>
+            <a:r>
+              <a:rPr lang="en-US" sz="1900" b="1" dirty="0">
+                <a:solidFill>
+                  <a:srgbClr val="8B5CF6"/>
+                </a:solidFill>
+                <a:latin typeface="맑은 고딕" pitchFamily="34" charset="0"/>
+                <a:ea typeface="맑은 고딕" pitchFamily="34" charset="-122"/>
+                <a:cs typeface="맑은 고딕" pitchFamily="34" charset="-120"/>
+              </a:rPr>
+              <a:t>사내 GPT-OSS-120B</a:t>
+            </a:r>
+            <a:endParaRPr lang="en-US" sz="1900" dirty="0"/>
+          </a:p>
+        </p:txBody>
+      </p:sp>
+      <p:sp>
+        <p:nvSpPr>
+          <p:cNvPr id="9" name="Text 7"/>
+          <p:cNvSpPr/>
+          <p:nvPr/>
+        </p:nvSpPr>
+        <p:spPr>
+          <a:xfrm>
+            <a:off x="6693408" y="2606040"/>
+            <a:ext cx="4754880" cy="1737360"/>
+          </a:xfrm>
+          <a:prstGeom prst="rect">
+            <a:avLst/>
+          </a:prstGeom>
+          <a:noFill/>
+          <a:ln/>
+        </p:spPr>
+        <p:txBody>
+          <a:bodyPr wrap="square" lIns="0" tIns="0" rIns="0" bIns="0" rtlCol="0" anchor="ctr"/>
+          <a:lstStyle/>
+          <a:p>
+            <a:pPr marL="342900" indent="-342900">
+              <a:spcAft>
+                <a:spcPts val="700"/>
+              </a:spcAft>
+              <a:buSzPct val="100000"/>
+              <a:buChar char="•"/>
+            </a:pPr>
+            <a:r>
+              <a:rPr lang="en-US" sz="1300" dirty="0">
+                <a:solidFill>
+                  <a:srgbClr val="1F2937"/>
+                </a:solidFill>
+                <a:latin typeface="맑은 고딕" pitchFamily="34" charset="0"/>
+                <a:ea typeface="맑은 고딕" pitchFamily="34" charset="-122"/>
+                <a:cs typeface="맑은 고딕" pitchFamily="34" charset="-120"/>
+              </a:rPr>
+              <a:t>사내 LLM API 서비스(OpenAI 호환)</a:t>
+            </a:r>
+            <a:endParaRPr lang="en-US" sz="1300" dirty="0"/>
+          </a:p>
+          <a:p>
+            <a:pPr marL="342900" indent="-342900">
+              <a:spcAft>
+                <a:spcPts val="700"/>
+              </a:spcAft>
+              <a:buSzPct val="100000"/>
+              <a:buChar char="•"/>
+            </a:pPr>
+            <a:r>
+              <a:rPr lang="en-US" sz="1300" dirty="0">
+                <a:solidFill>
+                  <a:srgbClr val="1F2937"/>
+                </a:solidFill>
+                <a:latin typeface="맑은 고딕" pitchFamily="34" charset="0"/>
+                <a:ea typeface="맑은 고딕" pitchFamily="34" charset="-122"/>
+                <a:cs typeface="맑은 고딕" pitchFamily="34" charset="-120"/>
+              </a:rPr>
+              <a:t>훨씬 큰 모델 → 어려운 판단 정확도 유리</a:t>
+            </a:r>
+            <a:endParaRPr lang="en-US" sz="1300" dirty="0"/>
+          </a:p>
+          <a:p>
+            <a:pPr marL="342900" indent="-342900">
+              <a:spcAft>
+                <a:spcPts val="700"/>
+              </a:spcAft>
+              <a:buSzPct val="100000"/>
+              <a:buChar char="•"/>
+            </a:pPr>
+            <a:r>
+              <a:rPr lang="en-US" sz="1300" dirty="0">
+                <a:solidFill>
+                  <a:srgbClr val="1F2937"/>
+                </a:solidFill>
+                <a:latin typeface="맑은 고딕" pitchFamily="34" charset="0"/>
+                <a:ea typeface="맑은 고딕" pitchFamily="34" charset="-122"/>
+                <a:cs typeface="맑은 고딕" pitchFamily="34" charset="-120"/>
+              </a:rPr>
+              <a:t>공용 서버 의존</a:t>
+            </a:r>
+            <a:endParaRPr lang="en-US" sz="1300" dirty="0"/>
+          </a:p>
+        </p:txBody>
+      </p:sp>
+      <p:sp>
+        <p:nvSpPr>
+          <p:cNvPr id="10" name="Shape 8"/>
+          <p:cNvSpPr/>
+          <p:nvPr/>
+        </p:nvSpPr>
+        <p:spPr>
+          <a:xfrm>
+            <a:off x="566928" y="4709160"/>
+            <a:ext cx="11064240" cy="1463040"/>
+          </a:xfrm>
+          <a:prstGeom prst="roundRect">
+            <a:avLst>
+              <a:gd name="adj" fmla="val 6250"/>
+            </a:avLst>
+          </a:prstGeom>
+          <a:solidFill>
+            <a:srgbClr val="1E1B4B"/>
+          </a:solidFill>
+          <a:ln/>
+          <a:effectLst>
+            <a:outerShdw sx="100000" sy="100000" kx="0" ky="0" algn="bl" rotWithShape="0" blurRad="127000" dist="50800" dir="5400000">
+              <a:srgbClr val="1E1B4B">
+                <a:alpha val="18000"/>
+              </a:srgbClr>
+            </a:outerShdw>
+          </a:effectLst>
+        </p:spPr>
+      </p:sp>
+      <p:sp>
+        <p:nvSpPr>
+          <p:cNvPr id="11" name="Text 9"/>
+          <p:cNvSpPr/>
+          <p:nvPr/>
+        </p:nvSpPr>
+        <p:spPr>
+          <a:xfrm>
+            <a:off x="886968" y="4892040"/>
+            <a:ext cx="10424160" cy="457200"/>
+          </a:xfrm>
+          <a:prstGeom prst="rect">
+            <a:avLst/>
+          </a:prstGeom>
+          <a:noFill/>
+          <a:ln/>
+        </p:spPr>
+        <p:txBody>
+          <a:bodyPr wrap="square" lIns="0" tIns="0" rIns="0" bIns="0" rtlCol="0" anchor="ctr"/>
+          <a:lstStyle/>
+          <a:p>
+            <a:pPr indent="0" marL="0">
+              <a:buNone/>
+            </a:pPr>
+            <a:r>
+              <a:rPr lang="en-US" sz="1350" b="1" dirty="0">
+                <a:solidFill>
+                  <a:srgbClr val="FFFFFF"/>
+                </a:solidFill>
+                <a:latin typeface="맑은 고딕" pitchFamily="34" charset="0"/>
+                <a:ea typeface="맑은 고딕" pitchFamily="34" charset="-122"/>
+                <a:cs typeface="맑은 고딕" pitchFamily="34" charset="-120"/>
+              </a:rPr>
+              <a:t>응답 시간은 둘 다 3~5초로 비슷</a:t>
+            </a:r>
+            <a:pPr indent="0" marL="0">
+              <a:buNone/>
+            </a:pPr>
+            <a:r>
+              <a:rPr lang="en-US" sz="1350" dirty="0">
+                <a:solidFill>
+                  <a:srgbClr val="C7D2FE"/>
+                </a:solidFill>
+                <a:latin typeface="맑은 고딕" pitchFamily="34" charset="0"/>
+                <a:ea typeface="맑은 고딕" pitchFamily="34" charset="-122"/>
+                <a:cs typeface="맑은 고딕" pitchFamily="34" charset="-120"/>
+              </a:rPr>
+              <a:t> → 속도가 아니라 정확도·자립성으로 선택. 동일 요구사항 세트로 실측 후 확정.</a:t>
+            </a:r>
+            <a:endParaRPr lang="en-US" sz="1350" dirty="0"/>
+          </a:p>
+        </p:txBody>
+      </p:sp>
+      <p:sp>
+        <p:nvSpPr>
+          <p:cNvPr id="12" name="Text 10"/>
+          <p:cNvSpPr/>
+          <p:nvPr/>
+        </p:nvSpPr>
+        <p:spPr>
+          <a:xfrm>
+            <a:off x="886968" y="5440680"/>
+            <a:ext cx="10424160" cy="640080"/>
+          </a:xfrm>
+          <a:prstGeom prst="rect">
+            <a:avLst/>
+          </a:prstGeom>
+          <a:noFill/>
+          <a:ln/>
+        </p:spPr>
+        <p:txBody>
+          <a:bodyPr wrap="square" lIns="0" tIns="0" rIns="0" bIns="0" rtlCol="0" anchor="ctr"/>
+          <a:lstStyle/>
+          <a:p>
+            <a:pPr indent="0" marL="0">
+              <a:lnSpc>
+                <a:spcPct val="105000"/>
+              </a:lnSpc>
+              <a:buNone/>
+            </a:pPr>
+            <a:r>
+              <a:rPr lang="en-US" sz="1250" b="1" dirty="0">
+                <a:solidFill>
+                  <a:srgbClr val="A5B4FC"/>
+                </a:solidFill>
+                <a:latin typeface="맑은 고딕" pitchFamily="34" charset="0"/>
+                <a:ea typeface="맑은 고딕" pitchFamily="34" charset="-122"/>
+                <a:cs typeface="맑은 고딕" pitchFamily="34" charset="-120"/>
+              </a:rPr>
+              <a:t>양자화란?</a:t>
+            </a:r>
+            <a:pPr indent="0" marL="0">
+              <a:lnSpc>
+                <a:spcPct val="105000"/>
+              </a:lnSpc>
+              <a:buNone/>
+            </a:pPr>
+            <a:r>
+              <a:rPr lang="en-US" sz="1250" dirty="0">
+                <a:solidFill>
+                  <a:srgbClr val="C7D2FE"/>
+                </a:solidFill>
+                <a:latin typeface="맑은 고딕" pitchFamily="34" charset="0"/>
+                <a:ea typeface="맑은 고딕" pitchFamily="34" charset="-122"/>
+                <a:cs typeface="맑은 고딕" pitchFamily="34" charset="-120"/>
+              </a:rPr>
+              <a:t>  사진을 JPG로 압축하듯 용량↓·품질 소폭↓. 8B 원본(≈16GB)은 8GB GPU에 못 올라가 5.85GB로 압축해 사용.</a:t>
+            </a:r>
+            <a:endParaRPr lang="en-US" sz="1250" dirty="0"/>
+          </a:p>
+        </p:txBody>
+      </p:sp>
+    </p:spTree>
+  </p:cSld>
+  <p:clrMapOvr>
+    <a:masterClrMapping/>
+  </p:clrMapOvr>
+</p:sld>
+</file>
+
+<file path=ppt/slides/slide12.xml><?xml version="1.0" encoding="utf-8"?>
+<p:sld xmlns:a="http://schemas.openxmlformats.org/drawingml/2006/main" xmlns:r="http://schemas.openxmlformats.org/officeDocument/2006/relationships" xmlns:p="http://schemas.openxmlformats.org/presentationml/2006/main">
+  <p:cSld name="Slide 12">
     <p:bg>
       <p:bgPr>
         <a:solidFill>
@@ -3226,9 +3975,9 @@
 </p:sld>
 </file>
 
-<file path=ppt/slides/slide12.xml><?xml version="1.0" encoding="utf-8"?>
+<file path=ppt/slides/slide13.xml><?xml version="1.0" encoding="utf-8"?>
 <p:sld xmlns:a="http://schemas.openxmlformats.org/drawingml/2006/main" xmlns:r="http://schemas.openxmlformats.org/officeDocument/2006/relationships" xmlns:p="http://schemas.openxmlformats.org/presentationml/2006/main">
-  <p:cSld name="Slide 12">
+  <p:cSld name="Slide 13">
     <p:bg>
       <p:bgPr>
         <a:solidFill>
@@ -5506,7 +6255,7 @@
                 <a:ea typeface="맑은 고딕" pitchFamily="34" charset="-122"/>
                 <a:cs typeface="맑은 고딕" pitchFamily="34" charset="-120"/>
               </a:rPr>
-              <a:t>핵심 기능 1</a:t>
+              <a:t>핵심 기능 1 · 요구사항 검토 ①</a:t>
             </a:r>
             <a:endParaRPr lang="en-US" sz="1200" dirty="0"/>
           </a:p>
@@ -5545,7 +6294,7 @@
                 <a:ea typeface="맑은 고딕" pitchFamily="34" charset="-122"/>
                 <a:cs typeface="맑은 고딕" pitchFamily="34" charset="-120"/>
               </a:rPr>
-              <a:t>요구사항 검토</a:t>
+              <a:t>불명확·상충 검출 &amp; AI 제안</a:t>
             </a:r>
             <a:endParaRPr lang="en-US" sz="3000" dirty="0"/>
           </a:p>
@@ -5594,264 +6343,9 @@
           </a:p>
         </p:txBody>
       </p:sp>
-      <p:sp>
-        <p:nvSpPr>
-          <p:cNvPr id="5" name="Shape 3"/>
-          <p:cNvSpPr/>
-          <p:nvPr/>
-        </p:nvSpPr>
-        <p:spPr>
-          <a:xfrm>
-            <a:off x="566928" y="1828800"/>
-            <a:ext cx="146304" cy="146304"/>
-          </a:xfrm>
-          <a:prstGeom prst="ellipse">
-            <a:avLst/>
-          </a:prstGeom>
-          <a:solidFill>
-            <a:srgbClr val="6366F1"/>
-          </a:solidFill>
-          <a:ln w="12700">
-            <a:solidFill>
-              <a:srgbClr val="6366F1"/>
-            </a:solidFill>
-            <a:prstDash val="solid"/>
-          </a:ln>
-        </p:spPr>
-      </p:sp>
-      <p:sp>
-        <p:nvSpPr>
-          <p:cNvPr id="6" name="Text 4"/>
-          <p:cNvSpPr/>
-          <p:nvPr/>
-        </p:nvSpPr>
-        <p:spPr>
-          <a:xfrm>
-            <a:off x="859536" y="1709928"/>
-            <a:ext cx="5212080" cy="1005840"/>
-          </a:xfrm>
-          <a:prstGeom prst="rect">
-            <a:avLst/>
-          </a:prstGeom>
-          <a:noFill/>
-          <a:ln/>
-        </p:spPr>
-        <p:txBody>
-          <a:bodyPr wrap="square" lIns="0" tIns="0" rIns="0" bIns="0" rtlCol="0" anchor="ctr"/>
-          <a:lstStyle/>
-          <a:p>
-            <a:pPr indent="0" marL="0">
-              <a:lnSpc>
-                <a:spcPct val="105000"/>
-              </a:lnSpc>
-              <a:buNone/>
-            </a:pPr>
-            <a:r>
-              <a:rPr lang="en-US" sz="1550" b="1" dirty="0">
-                <a:solidFill>
-                  <a:srgbClr val="1F2937"/>
-                </a:solidFill>
-                <a:latin typeface="맑은 고딕" pitchFamily="34" charset="0"/>
-                <a:ea typeface="맑은 고딕" pitchFamily="34" charset="-122"/>
-                <a:cs typeface="맑은 고딕" pitchFamily="34" charset="-120"/>
-              </a:rPr>
-              <a:t>LLM이 검출 · 제안
-</a:t>
-            </a:r>
-            <a:pPr indent="0" marL="0">
-              <a:lnSpc>
-                <a:spcPct val="105000"/>
-              </a:lnSpc>
-              <a:buNone/>
-            </a:pPr>
-            <a:r>
-              <a:rPr lang="en-US" sz="1250" dirty="0">
-                <a:solidFill>
-                  <a:srgbClr val="6B7280"/>
-                </a:solidFill>
-                <a:latin typeface="맑은 고딕" pitchFamily="34" charset="0"/>
-                <a:ea typeface="맑은 고딕" pitchFamily="34" charset="-122"/>
-                <a:cs typeface="맑은 고딕" pitchFamily="34" charset="-120"/>
-              </a:rPr>
-              <a:t>고객사↔세메스 해석이 갈리거나 정의가 필요한 표현(7유형)과 상충되는 요구를 검출하고, 올바른 방향을 제안</a:t>
-            </a:r>
-            <a:endParaRPr lang="en-US" sz="1550" dirty="0"/>
-          </a:p>
-        </p:txBody>
-      </p:sp>
-      <p:sp>
-        <p:nvSpPr>
-          <p:cNvPr id="7" name="Shape 5"/>
-          <p:cNvSpPr/>
-          <p:nvPr/>
-        </p:nvSpPr>
-        <p:spPr>
-          <a:xfrm>
-            <a:off x="566928" y="3063240"/>
-            <a:ext cx="146304" cy="146304"/>
-          </a:xfrm>
-          <a:prstGeom prst="ellipse">
-            <a:avLst/>
-          </a:prstGeom>
-          <a:solidFill>
-            <a:srgbClr val="6366F1"/>
-          </a:solidFill>
-          <a:ln w="12700">
-            <a:solidFill>
-              <a:srgbClr val="6366F1"/>
-            </a:solidFill>
-            <a:prstDash val="solid"/>
-          </a:ln>
-        </p:spPr>
-      </p:sp>
-      <p:sp>
-        <p:nvSpPr>
-          <p:cNvPr id="8" name="Text 6"/>
-          <p:cNvSpPr/>
-          <p:nvPr/>
-        </p:nvSpPr>
-        <p:spPr>
-          <a:xfrm>
-            <a:off x="859536" y="2944368"/>
-            <a:ext cx="5212080" cy="1005840"/>
-          </a:xfrm>
-          <a:prstGeom prst="rect">
-            <a:avLst/>
-          </a:prstGeom>
-          <a:noFill/>
-          <a:ln/>
-        </p:spPr>
-        <p:txBody>
-          <a:bodyPr wrap="square" lIns="0" tIns="0" rIns="0" bIns="0" rtlCol="0" anchor="ctr"/>
-          <a:lstStyle/>
-          <a:p>
-            <a:pPr indent="0" marL="0">
-              <a:lnSpc>
-                <a:spcPct val="105000"/>
-              </a:lnSpc>
-              <a:buNone/>
-            </a:pPr>
-            <a:r>
-              <a:rPr lang="en-US" sz="1550" b="1" dirty="0">
-                <a:solidFill>
-                  <a:srgbClr val="1F2937"/>
-                </a:solidFill>
-                <a:latin typeface="맑은 고딕" pitchFamily="34" charset="0"/>
-                <a:ea typeface="맑은 고딕" pitchFamily="34" charset="-122"/>
-                <a:cs typeface="맑은 고딕" pitchFamily="34" charset="-120"/>
-              </a:rPr>
-              <a:t>개발자가 협의
-</a:t>
-            </a:r>
-            <a:pPr indent="0" marL="0">
-              <a:lnSpc>
-                <a:spcPct val="105000"/>
-              </a:lnSpc>
-              <a:buNone/>
-            </a:pPr>
-            <a:r>
-              <a:rPr lang="en-US" sz="1250" dirty="0">
-                <a:solidFill>
-                  <a:srgbClr val="6B7280"/>
-                </a:solidFill>
-                <a:latin typeface="맑은 고딕" pitchFamily="34" charset="0"/>
-                <a:ea typeface="맑은 고딕" pitchFamily="34" charset="-122"/>
-                <a:cs typeface="맑은 고딕" pitchFamily="34" charset="-120"/>
-              </a:rPr>
-              <a:t>LLM 제안을 근거로 고객사에 제안·협의 — 예) req1 “우선순위 낮은 순” ↔ req4 “시간 순서” 상충 해소</a:t>
-            </a:r>
-            <a:endParaRPr lang="en-US" sz="1550" dirty="0"/>
-          </a:p>
-        </p:txBody>
-      </p:sp>
-      <p:sp>
-        <p:nvSpPr>
-          <p:cNvPr id="9" name="Shape 7"/>
-          <p:cNvSpPr/>
-          <p:nvPr/>
-        </p:nvSpPr>
-        <p:spPr>
-          <a:xfrm>
-            <a:off x="566928" y="4297680"/>
-            <a:ext cx="146304" cy="146304"/>
-          </a:xfrm>
-          <a:prstGeom prst="ellipse">
-            <a:avLst/>
-          </a:prstGeom>
-          <a:solidFill>
-            <a:srgbClr val="6366F1"/>
-          </a:solidFill>
-          <a:ln w="12700">
-            <a:solidFill>
-              <a:srgbClr val="6366F1"/>
-            </a:solidFill>
-            <a:prstDash val="solid"/>
-          </a:ln>
-        </p:spPr>
-      </p:sp>
-      <p:sp>
-        <p:nvSpPr>
-          <p:cNvPr id="10" name="Text 8"/>
-          <p:cNvSpPr/>
-          <p:nvPr/>
-        </p:nvSpPr>
-        <p:spPr>
-          <a:xfrm>
-            <a:off x="859536" y="4178808"/>
-            <a:ext cx="5212080" cy="1005840"/>
-          </a:xfrm>
-          <a:prstGeom prst="rect">
-            <a:avLst/>
-          </a:prstGeom>
-          <a:noFill/>
-          <a:ln/>
-        </p:spPr>
-        <p:txBody>
-          <a:bodyPr wrap="square" lIns="0" tIns="0" rIns="0" bIns="0" rtlCol="0" anchor="ctr"/>
-          <a:lstStyle/>
-          <a:p>
-            <a:pPr indent="0" marL="0">
-              <a:lnSpc>
-                <a:spcPct val="105000"/>
-              </a:lnSpc>
-              <a:buNone/>
-            </a:pPr>
-            <a:r>
-              <a:rPr lang="en-US" sz="1550" b="1" dirty="0">
-                <a:solidFill>
-                  <a:srgbClr val="1F2937"/>
-                </a:solidFill>
-                <a:latin typeface="맑은 고딕" pitchFamily="34" charset="0"/>
-                <a:ea typeface="맑은 고딕" pitchFamily="34" charset="-122"/>
-                <a:cs typeface="맑은 고딕" pitchFamily="34" charset="-120"/>
-              </a:rPr>
-              <a:t>확정 → 관리
-</a:t>
-            </a:r>
-            <a:pPr indent="0" marL="0">
-              <a:lnSpc>
-                <a:spcPct val="105000"/>
-              </a:lnSpc>
-              <a:buNone/>
-            </a:pPr>
-            <a:r>
-              <a:rPr lang="en-US" sz="1250" dirty="0">
-                <a:solidFill>
-                  <a:srgbClr val="6B7280"/>
-                </a:solidFill>
-                <a:latin typeface="맑은 고딕" pitchFamily="34" charset="0"/>
-                <a:ea typeface="맑은 고딕" pitchFamily="34" charset="-122"/>
-                <a:cs typeface="맑은 고딕" pitchFamily="34" charset="-120"/>
-              </a:rPr>
-              <a:t>명확해진 해석을 입력해 확정·잠금하고 요구사항을 관리 (해결 전/후 비교로 확인)</a:t>
-            </a:r>
-            <a:endParaRPr lang="en-US" sz="1550" dirty="0"/>
-          </a:p>
-        </p:txBody>
-      </p:sp>
       <p:pic>
         <p:nvPicPr>
-          <p:cNvPr id="11" name="Image 0" descr="/home/user/semes-superrookie/docs/img/ppt-review.png">    </p:cNvPr>
+          <p:cNvPr id="5" name="Image 0" descr="/home/user/semes-superrookie/docs/img/ppt-review-1.png">    </p:cNvPr>
           <p:cNvPicPr>
             <a:picLocks noChangeAspect="1"/>
           </p:cNvPicPr>
@@ -5859,13 +6353,14 @@
         </p:nvPicPr>
         <p:blipFill>
           <a:blip r:embed="rId1"/>
-          <a:srcRect l="0" r="0" t="0" b="0"/>
-          <a:stretch/>
+          <a:stretch>
+            <a:fillRect/>
+          </a:stretch>
         </p:blipFill>
         <p:spPr>
           <a:xfrm>
-            <a:off x="6172200" y="1554480"/>
-            <a:ext cx="5486400" cy="4114800"/>
+            <a:off x="608076" y="1737360"/>
+            <a:ext cx="10972800" cy="4056278"/>
           </a:xfrm>
           <a:prstGeom prst="rect">
             <a:avLst/>
@@ -5874,14 +6369,14 @@
       </p:pic>
       <p:sp>
         <p:nvSpPr>
-          <p:cNvPr id="12" name="Text 9"/>
-          <p:cNvSpPr/>
-          <p:nvPr/>
-        </p:nvSpPr>
-        <p:spPr>
-          <a:xfrm>
-            <a:off x="6172200" y="5742432"/>
-            <a:ext cx="5486400" cy="320040"/>
+          <p:cNvPr id="6" name="Text 3"/>
+          <p:cNvSpPr/>
+          <p:nvPr/>
+        </p:nvSpPr>
+        <p:spPr>
+          <a:xfrm>
+            <a:off x="566928" y="5943600"/>
+            <a:ext cx="11064240" cy="365760"/>
           </a:xfrm>
           <a:prstGeom prst="rect">
             <a:avLst/>
@@ -5897,7 +6392,7 @@
               <a:buNone/>
             </a:pPr>
             <a:r>
-              <a:rPr lang="en-US" sz="1100" i="1" dirty="0">
+              <a:rPr lang="en-US" sz="1250" dirty="0">
                 <a:solidFill>
                   <a:srgbClr val="6B7280"/>
                 </a:solidFill>
@@ -5905,9 +6400,9 @@
                 <a:ea typeface="맑은 고딕" pitchFamily="34" charset="-122"/>
                 <a:cs typeface="맑은 고딕" pitchFamily="34" charset="-120"/>
               </a:rPr>
-              <a:t>실제 동작 화면 — 요구사항 1건(내용+비고)에서 불명확 지점 검출</a:t>
-            </a:r>
-            <a:endParaRPr lang="en-US" sz="1100" dirty="0"/>
+              <a:t>AI가 무엇이·왜 문제인지 검출하고, “이렇게 쓰면 명확”을 제안한다 (불명확한 표현 + 상충되는 요구)</a:t>
+            </a:r>
+            <a:endParaRPr lang="en-US" sz="1250" dirty="0"/>
           </a:p>
         </p:txBody>
       </p:sp>
@@ -5976,7 +6471,7 @@
                 <a:ea typeface="맑은 고딕" pitchFamily="34" charset="-122"/>
                 <a:cs typeface="맑은 고딕" pitchFamily="34" charset="-120"/>
               </a:rPr>
-              <a:t>핵심 기능 2</a:t>
+              <a:t>핵심 기능 1 · 요구사항 검토 ②</a:t>
             </a:r>
             <a:endParaRPr lang="en-US" sz="1200" dirty="0"/>
           </a:p>
@@ -6015,7 +6510,7 @@
                 <a:ea typeface="맑은 고딕" pitchFamily="34" charset="-122"/>
                 <a:cs typeface="맑은 고딕" pitchFamily="34" charset="-120"/>
               </a:rPr>
-              <a:t>문서·티켓 자동 생성</a:t>
+              <a:t>제안 → 협의 → 확정 (Before / After)</a:t>
             </a:r>
             <a:endParaRPr lang="en-US" sz="3000" dirty="0"/>
           </a:p>
@@ -6029,7 +6524,7 @@
         </p:nvSpPr>
         <p:spPr>
           <a:xfrm>
-            <a:off x="10424160" y="822960"/>
+            <a:off x="9875520" y="822960"/>
             <a:ext cx="1737360" cy="310896"/>
           </a:xfrm>
           <a:prstGeom prst="roundRect">
@@ -6038,7 +6533,7 @@
             </a:avLst>
           </a:prstGeom>
           <a:solidFill>
-            <a:srgbClr val="FEF3C7"/>
+            <a:srgbClr val="D1FAE5"/>
           </a:solidFill>
           <a:ln/>
         </p:spPr>
@@ -6052,101 +6547,57 @@
             <a:r>
               <a:rPr lang="en-US" sz="1100" b="1" dirty="0">
                 <a:solidFill>
-                  <a:srgbClr val="B45309"/>
-                </a:solidFill>
-                <a:latin typeface="맑은 고딕" pitchFamily="34" charset="0"/>
-                <a:ea typeface="맑은 고딕" pitchFamily="34" charset="-122"/>
-                <a:cs typeface="맑은 고딕" pitchFamily="34" charset="-120"/>
-              </a:rPr>
-              <a:t>개발 예정</a:t>
+                  <a:srgbClr val="059669"/>
+                </a:solidFill>
+                <a:latin typeface="맑은 고딕" pitchFamily="34" charset="0"/>
+                <a:ea typeface="맑은 고딕" pitchFamily="34" charset="-122"/>
+                <a:cs typeface="맑은 고딕" pitchFamily="34" charset="-120"/>
+              </a:rPr>
+              <a:t>완료 · 테스트됨</a:t>
             </a:r>
             <a:endParaRPr lang="en-US" sz="1100" dirty="0"/>
           </a:p>
         </p:txBody>
       </p:sp>
-      <p:sp>
-        <p:nvSpPr>
-          <p:cNvPr id="5" name="Text 3"/>
-          <p:cNvSpPr/>
-          <p:nvPr/>
-        </p:nvSpPr>
-        <p:spPr>
-          <a:xfrm>
-            <a:off x="566928" y="1783080"/>
-            <a:ext cx="5486400" cy="365760"/>
-          </a:xfrm>
-          <a:prstGeom prst="rect">
-            <a:avLst/>
-          </a:prstGeom>
-          <a:noFill/>
-          <a:ln/>
-        </p:spPr>
-        <p:txBody>
-          <a:bodyPr wrap="square" lIns="0" tIns="0" rIns="0" bIns="0" rtlCol="0" anchor="ctr"/>
-          <a:lstStyle/>
-          <a:p>
-            <a:pPr indent="0" marL="0">
-              <a:buNone/>
-            </a:pPr>
-            <a:r>
-              <a:rPr lang="en-US" sz="1500" b="1" dirty="0">
-                <a:solidFill>
-                  <a:srgbClr val="1F2937"/>
-                </a:solidFill>
-                <a:latin typeface="맑은 고딕" pitchFamily="34" charset="0"/>
-                <a:ea typeface="맑은 고딕" pitchFamily="34" charset="-122"/>
-                <a:cs typeface="맑은 고딕" pitchFamily="34" charset="-120"/>
-              </a:rPr>
-              <a:t>기능 하나 = Jira 이슈 4종 (+ 비기능요구사항)</a:t>
-            </a:r>
-            <a:endParaRPr lang="en-US" sz="1500" dirty="0"/>
-          </a:p>
-        </p:txBody>
-      </p:sp>
-      <p:sp>
-        <p:nvSpPr>
-          <p:cNvPr id="6" name="Shape 4"/>
-          <p:cNvSpPr/>
-          <p:nvPr/>
-        </p:nvSpPr>
-        <p:spPr>
-          <a:xfrm>
-            <a:off x="566928" y="2286000"/>
-            <a:ext cx="5486400" cy="713232"/>
-          </a:xfrm>
-          <a:prstGeom prst="roundRect">
-            <a:avLst>
-              <a:gd name="adj" fmla="val 7692"/>
-            </a:avLst>
-          </a:prstGeom>
-          <a:solidFill>
-            <a:srgbClr val="EEF2FF"/>
-          </a:solidFill>
-          <a:ln w="12700">
-            <a:solidFill>
-              <a:srgbClr val="C7D2FE"/>
-            </a:solidFill>
-            <a:prstDash val="solid"/>
-          </a:ln>
-        </p:spPr>
-      </p:sp>
-      <p:sp>
-        <p:nvSpPr>
-          <p:cNvPr id="7" name="Text 5"/>
-          <p:cNvSpPr/>
-          <p:nvPr/>
-        </p:nvSpPr>
-        <p:spPr>
-          <a:xfrm>
-            <a:off x="713232" y="2414016"/>
-            <a:ext cx="457200" cy="457200"/>
-          </a:xfrm>
-          <a:prstGeom prst="ellipse">
-            <a:avLst/>
-          </a:prstGeom>
-          <a:solidFill>
-            <a:srgbClr val="6366F1"/>
-          </a:solidFill>
+      <p:pic>
+        <p:nvPicPr>
+          <p:cNvPr id="5" name="Image 0" descr="/home/user/semes-superrookie/docs/img/ppt-review-2.png">    </p:cNvPr>
+          <p:cNvPicPr>
+            <a:picLocks noChangeAspect="1"/>
+          </p:cNvPicPr>
+          <p:nvPr/>
+        </p:nvPicPr>
+        <p:blipFill>
+          <a:blip r:embed="rId1"/>
+          <a:stretch>
+            <a:fillRect/>
+          </a:stretch>
+        </p:blipFill>
+        <p:spPr>
+          <a:xfrm>
+            <a:off x="608076" y="1737360"/>
+            <a:ext cx="10972800" cy="3981298"/>
+          </a:xfrm>
+          <a:prstGeom prst="rect">
+            <a:avLst/>
+          </a:prstGeom>
+        </p:spPr>
+      </p:pic>
+      <p:sp>
+        <p:nvSpPr>
+          <p:cNvPr id="6" name="Text 3"/>
+          <p:cNvSpPr/>
+          <p:nvPr/>
+        </p:nvSpPr>
+        <p:spPr>
+          <a:xfrm>
+            <a:off x="566928" y="5943600"/>
+            <a:ext cx="11064240" cy="365760"/>
+          </a:xfrm>
+          <a:prstGeom prst="rect">
+            <a:avLst/>
+          </a:prstGeom>
+          <a:noFill/>
           <a:ln/>
         </p:spPr>
         <p:txBody>
@@ -6157,60 +6608,7 @@
               <a:buNone/>
             </a:pPr>
             <a:r>
-              <a:rPr lang="en-US" sz="1500" b="1" dirty="0">
-                <a:solidFill>
-                  <a:srgbClr val="FFFFFF"/>
-                </a:solidFill>
-                <a:latin typeface="맑은 고딕" pitchFamily="34" charset="0"/>
-                <a:ea typeface="맑은 고딕" pitchFamily="34" charset="-122"/>
-                <a:cs typeface="맑은 고딕" pitchFamily="34" charset="-120"/>
-              </a:rPr>
-              <a:t>1</a:t>
-            </a:r>
-            <a:endParaRPr lang="en-US" sz="1500" dirty="0"/>
-          </a:p>
-        </p:txBody>
-      </p:sp>
-      <p:sp>
-        <p:nvSpPr>
-          <p:cNvPr id="8" name="Text 6"/>
-          <p:cNvSpPr/>
-          <p:nvPr/>
-        </p:nvSpPr>
-        <p:spPr>
-          <a:xfrm>
-            <a:off x="1298448" y="2304288"/>
-            <a:ext cx="4617720" cy="676656"/>
-          </a:xfrm>
-          <a:prstGeom prst="rect">
-            <a:avLst/>
-          </a:prstGeom>
-          <a:noFill/>
-          <a:ln/>
-        </p:spPr>
-        <p:txBody>
-          <a:bodyPr wrap="square" lIns="0" tIns="0" rIns="0" bIns="0" rtlCol="0" anchor="ctr"/>
-          <a:lstStyle/>
-          <a:p>
-            <a:pPr indent="0" marL="0">
-              <a:buNone/>
-            </a:pPr>
-            <a:r>
-              <a:rPr lang="en-US" sz="1350" b="1" dirty="0">
-                <a:solidFill>
-                  <a:srgbClr val="1F2937"/>
-                </a:solidFill>
-                <a:latin typeface="맑은 고딕" pitchFamily="34" charset="0"/>
-                <a:ea typeface="맑은 고딕" pitchFamily="34" charset="-122"/>
-                <a:cs typeface="맑은 고딕" pitchFamily="34" charset="-120"/>
-              </a:rPr>
-              <a:t>티켓 (기능요구사항)   </a:t>
-            </a:r>
-            <a:pPr indent="0" marL="0">
-              <a:buNone/>
-            </a:pPr>
-            <a:r>
-              <a:rPr lang="en-US" sz="1150" dirty="0">
+              <a:rPr lang="en-US" sz="1250" dirty="0">
                 <a:solidFill>
                   <a:srgbClr val="6B7280"/>
                 </a:solidFill>
@@ -6218,624 +6616,7 @@
                 <a:ea typeface="맑은 고딕" pitchFamily="34" charset="-122"/>
                 <a:cs typeface="맑은 고딕" pitchFamily="34" charset="-120"/>
               </a:rPr>
-              <a:t>개발 단위가 되는 메인 티켓</a:t>
-            </a:r>
-            <a:endParaRPr lang="en-US" sz="1350" dirty="0"/>
-          </a:p>
-        </p:txBody>
-      </p:sp>
-      <p:sp>
-        <p:nvSpPr>
-          <p:cNvPr id="9" name="Shape 7"/>
-          <p:cNvSpPr/>
-          <p:nvPr/>
-        </p:nvSpPr>
-        <p:spPr>
-          <a:xfrm>
-            <a:off x="566928" y="3108960"/>
-            <a:ext cx="5486400" cy="713232"/>
-          </a:xfrm>
-          <a:prstGeom prst="roundRect">
-            <a:avLst>
-              <a:gd name="adj" fmla="val 7692"/>
-            </a:avLst>
-          </a:prstGeom>
-          <a:solidFill>
-            <a:srgbClr val="EEF2FF"/>
-          </a:solidFill>
-          <a:ln w="12700">
-            <a:solidFill>
-              <a:srgbClr val="C7D2FE"/>
-            </a:solidFill>
-            <a:prstDash val="solid"/>
-          </a:ln>
-        </p:spPr>
-      </p:sp>
-      <p:sp>
-        <p:nvSpPr>
-          <p:cNvPr id="10" name="Text 8"/>
-          <p:cNvSpPr/>
-          <p:nvPr/>
-        </p:nvSpPr>
-        <p:spPr>
-          <a:xfrm>
-            <a:off x="713232" y="3236976"/>
-            <a:ext cx="457200" cy="457200"/>
-          </a:xfrm>
-          <a:prstGeom prst="ellipse">
-            <a:avLst/>
-          </a:prstGeom>
-          <a:solidFill>
-            <a:srgbClr val="6366F1"/>
-          </a:solidFill>
-          <a:ln/>
-        </p:spPr>
-        <p:txBody>
-          <a:bodyPr wrap="square" lIns="0" tIns="0" rIns="0" bIns="0" rtlCol="0" anchor="ctr"/>
-          <a:lstStyle/>
-          <a:p>
-            <a:pPr algn="ctr" indent="0" marL="0">
-              <a:buNone/>
-            </a:pPr>
-            <a:r>
-              <a:rPr lang="en-US" sz="1500" b="1" dirty="0">
-                <a:solidFill>
-                  <a:srgbClr val="FFFFFF"/>
-                </a:solidFill>
-                <a:latin typeface="맑은 고딕" pitchFamily="34" charset="0"/>
-                <a:ea typeface="맑은 고딕" pitchFamily="34" charset="-122"/>
-                <a:cs typeface="맑은 고딕" pitchFamily="34" charset="-120"/>
-              </a:rPr>
-              <a:t>2</a:t>
-            </a:r>
-            <a:endParaRPr lang="en-US" sz="1500" dirty="0"/>
-          </a:p>
-        </p:txBody>
-      </p:sp>
-      <p:sp>
-        <p:nvSpPr>
-          <p:cNvPr id="11" name="Text 9"/>
-          <p:cNvSpPr/>
-          <p:nvPr/>
-        </p:nvSpPr>
-        <p:spPr>
-          <a:xfrm>
-            <a:off x="1298448" y="3127248"/>
-            <a:ext cx="4617720" cy="676656"/>
-          </a:xfrm>
-          <a:prstGeom prst="rect">
-            <a:avLst/>
-          </a:prstGeom>
-          <a:noFill/>
-          <a:ln/>
-        </p:spPr>
-        <p:txBody>
-          <a:bodyPr wrap="square" lIns="0" tIns="0" rIns="0" bIns="0" rtlCol="0" anchor="ctr"/>
-          <a:lstStyle/>
-          <a:p>
-            <a:pPr indent="0" marL="0">
-              <a:buNone/>
-            </a:pPr>
-            <a:r>
-              <a:rPr lang="en-US" sz="1350" b="1" dirty="0">
-                <a:solidFill>
-                  <a:srgbClr val="1F2937"/>
-                </a:solidFill>
-                <a:latin typeface="맑은 고딕" pitchFamily="34" charset="0"/>
-                <a:ea typeface="맑은 고딕" pitchFamily="34" charset="-122"/>
-                <a:cs typeface="맑은 고딕" pitchFamily="34" charset="-120"/>
-              </a:rPr>
-              <a:t>SWVOC (고객요구사항)   </a:t>
-            </a:r>
-            <a:pPr indent="0" marL="0">
-              <a:buNone/>
-            </a:pPr>
-            <a:r>
-              <a:rPr lang="en-US" sz="1150" dirty="0">
-                <a:solidFill>
-                  <a:srgbClr val="6B7280"/>
-                </a:solidFill>
-                <a:latin typeface="맑은 고딕" pitchFamily="34" charset="0"/>
-                <a:ea typeface="맑은 고딕" pitchFamily="34" charset="-122"/>
-                <a:cs typeface="맑은 고딕" pitchFamily="34" charset="-120"/>
-              </a:rPr>
-              <a:t>고객 요구사항 원문·정리</a:t>
-            </a:r>
-            <a:endParaRPr lang="en-US" sz="1350" dirty="0"/>
-          </a:p>
-        </p:txBody>
-      </p:sp>
-      <p:sp>
-        <p:nvSpPr>
-          <p:cNvPr id="12" name="Shape 10"/>
-          <p:cNvSpPr/>
-          <p:nvPr/>
-        </p:nvSpPr>
-        <p:spPr>
-          <a:xfrm>
-            <a:off x="566928" y="3931920"/>
-            <a:ext cx="5486400" cy="713232"/>
-          </a:xfrm>
-          <a:prstGeom prst="roundRect">
-            <a:avLst>
-              <a:gd name="adj" fmla="val 7692"/>
-            </a:avLst>
-          </a:prstGeom>
-          <a:solidFill>
-            <a:srgbClr val="EEF2FF"/>
-          </a:solidFill>
-          <a:ln w="12700">
-            <a:solidFill>
-              <a:srgbClr val="C7D2FE"/>
-            </a:solidFill>
-            <a:prstDash val="solid"/>
-          </a:ln>
-        </p:spPr>
-      </p:sp>
-      <p:sp>
-        <p:nvSpPr>
-          <p:cNvPr id="13" name="Text 11"/>
-          <p:cNvSpPr/>
-          <p:nvPr/>
-        </p:nvSpPr>
-        <p:spPr>
-          <a:xfrm>
-            <a:off x="713232" y="4059936"/>
-            <a:ext cx="457200" cy="457200"/>
-          </a:xfrm>
-          <a:prstGeom prst="ellipse">
-            <a:avLst/>
-          </a:prstGeom>
-          <a:solidFill>
-            <a:srgbClr val="6366F1"/>
-          </a:solidFill>
-          <a:ln/>
-        </p:spPr>
-        <p:txBody>
-          <a:bodyPr wrap="square" lIns="0" tIns="0" rIns="0" bIns="0" rtlCol="0" anchor="ctr"/>
-          <a:lstStyle/>
-          <a:p>
-            <a:pPr algn="ctr" indent="0" marL="0">
-              <a:buNone/>
-            </a:pPr>
-            <a:r>
-              <a:rPr lang="en-US" sz="1500" b="1" dirty="0">
-                <a:solidFill>
-                  <a:srgbClr val="FFFFFF"/>
-                </a:solidFill>
-                <a:latin typeface="맑은 고딕" pitchFamily="34" charset="0"/>
-                <a:ea typeface="맑은 고딕" pitchFamily="34" charset="-122"/>
-                <a:cs typeface="맑은 고딕" pitchFamily="34" charset="-120"/>
-              </a:rPr>
-              <a:t>3</a:t>
-            </a:r>
-            <a:endParaRPr lang="en-US" sz="1500" dirty="0"/>
-          </a:p>
-        </p:txBody>
-      </p:sp>
-      <p:sp>
-        <p:nvSpPr>
-          <p:cNvPr id="14" name="Text 12"/>
-          <p:cNvSpPr/>
-          <p:nvPr/>
-        </p:nvSpPr>
-        <p:spPr>
-          <a:xfrm>
-            <a:off x="1298448" y="3950208"/>
-            <a:ext cx="4617720" cy="676656"/>
-          </a:xfrm>
-          <a:prstGeom prst="rect">
-            <a:avLst/>
-          </a:prstGeom>
-          <a:noFill/>
-          <a:ln/>
-        </p:spPr>
-        <p:txBody>
-          <a:bodyPr wrap="square" lIns="0" tIns="0" rIns="0" bIns="0" rtlCol="0" anchor="ctr"/>
-          <a:lstStyle/>
-          <a:p>
-            <a:pPr indent="0" marL="0">
-              <a:buNone/>
-            </a:pPr>
-            <a:r>
-              <a:rPr lang="en-US" sz="1350" b="1" dirty="0">
-                <a:solidFill>
-                  <a:srgbClr val="1F2937"/>
-                </a:solidFill>
-                <a:latin typeface="맑은 고딕" pitchFamily="34" charset="0"/>
-                <a:ea typeface="맑은 고딕" pitchFamily="34" charset="-122"/>
-                <a:cs typeface="맑은 고딕" pitchFamily="34" charset="-120"/>
-              </a:rPr>
-              <a:t>Function Requirement   </a:t>
-            </a:r>
-            <a:pPr indent="0" marL="0">
-              <a:buNone/>
-            </a:pPr>
-            <a:r>
-              <a:rPr lang="en-US" sz="1150" dirty="0">
-                <a:solidFill>
-                  <a:srgbClr val="6B7280"/>
-                </a:solidFill>
-                <a:latin typeface="맑은 고딕" pitchFamily="34" charset="0"/>
-                <a:ea typeface="맑은 고딕" pitchFamily="34" charset="-122"/>
-                <a:cs typeface="맑은 고딕" pitchFamily="34" charset="-120"/>
-              </a:rPr>
-              <a:t>기능 요구사항 상세</a:t>
-            </a:r>
-            <a:endParaRPr lang="en-US" sz="1350" dirty="0"/>
-          </a:p>
-        </p:txBody>
-      </p:sp>
-      <p:sp>
-        <p:nvSpPr>
-          <p:cNvPr id="15" name="Shape 13"/>
-          <p:cNvSpPr/>
-          <p:nvPr/>
-        </p:nvSpPr>
-        <p:spPr>
-          <a:xfrm>
-            <a:off x="566928" y="4754880"/>
-            <a:ext cx="5486400" cy="713232"/>
-          </a:xfrm>
-          <a:prstGeom prst="roundRect">
-            <a:avLst>
-              <a:gd name="adj" fmla="val 7692"/>
-            </a:avLst>
-          </a:prstGeom>
-          <a:solidFill>
-            <a:srgbClr val="EEF2FF"/>
-          </a:solidFill>
-          <a:ln w="12700">
-            <a:solidFill>
-              <a:srgbClr val="C7D2FE"/>
-            </a:solidFill>
-            <a:prstDash val="solid"/>
-          </a:ln>
-        </p:spPr>
-      </p:sp>
-      <p:sp>
-        <p:nvSpPr>
-          <p:cNvPr id="16" name="Text 14"/>
-          <p:cNvSpPr/>
-          <p:nvPr/>
-        </p:nvSpPr>
-        <p:spPr>
-          <a:xfrm>
-            <a:off x="713232" y="4882896"/>
-            <a:ext cx="457200" cy="457200"/>
-          </a:xfrm>
-          <a:prstGeom prst="ellipse">
-            <a:avLst/>
-          </a:prstGeom>
-          <a:solidFill>
-            <a:srgbClr val="6366F1"/>
-          </a:solidFill>
-          <a:ln/>
-        </p:spPr>
-        <p:txBody>
-          <a:bodyPr wrap="square" lIns="0" tIns="0" rIns="0" bIns="0" rtlCol="0" anchor="ctr"/>
-          <a:lstStyle/>
-          <a:p>
-            <a:pPr algn="ctr" indent="0" marL="0">
-              <a:buNone/>
-            </a:pPr>
-            <a:r>
-              <a:rPr lang="en-US" sz="1500" b="1" dirty="0">
-                <a:solidFill>
-                  <a:srgbClr val="FFFFFF"/>
-                </a:solidFill>
-                <a:latin typeface="맑은 고딕" pitchFamily="34" charset="0"/>
-                <a:ea typeface="맑은 고딕" pitchFamily="34" charset="-122"/>
-                <a:cs typeface="맑은 고딕" pitchFamily="34" charset="-120"/>
-              </a:rPr>
-              <a:t>4</a:t>
-            </a:r>
-            <a:endParaRPr lang="en-US" sz="1500" dirty="0"/>
-          </a:p>
-        </p:txBody>
-      </p:sp>
-      <p:sp>
-        <p:nvSpPr>
-          <p:cNvPr id="17" name="Text 15"/>
-          <p:cNvSpPr/>
-          <p:nvPr/>
-        </p:nvSpPr>
-        <p:spPr>
-          <a:xfrm>
-            <a:off x="1298448" y="4773168"/>
-            <a:ext cx="4617720" cy="676656"/>
-          </a:xfrm>
-          <a:prstGeom prst="rect">
-            <a:avLst/>
-          </a:prstGeom>
-          <a:noFill/>
-          <a:ln/>
-        </p:spPr>
-        <p:txBody>
-          <a:bodyPr wrap="square" lIns="0" tIns="0" rIns="0" bIns="0" rtlCol="0" anchor="ctr"/>
-          <a:lstStyle/>
-          <a:p>
-            <a:pPr indent="0" marL="0">
-              <a:buNone/>
-            </a:pPr>
-            <a:r>
-              <a:rPr lang="en-US" sz="1350" b="1" dirty="0">
-                <a:solidFill>
-                  <a:srgbClr val="1F2937"/>
-                </a:solidFill>
-                <a:latin typeface="맑은 고딕" pitchFamily="34" charset="0"/>
-                <a:ea typeface="맑은 고딕" pitchFamily="34" charset="-122"/>
-                <a:cs typeface="맑은 고딕" pitchFamily="34" charset="-120"/>
-              </a:rPr>
-              <a:t>Detail Design   </a:t>
-            </a:r>
-            <a:pPr indent="0" marL="0">
-              <a:buNone/>
-            </a:pPr>
-            <a:r>
-              <a:rPr lang="en-US" sz="1150" dirty="0">
-                <a:solidFill>
-                  <a:srgbClr val="6B7280"/>
-                </a:solidFill>
-                <a:latin typeface="맑은 고딕" pitchFamily="34" charset="0"/>
-                <a:ea typeface="맑은 고딕" pitchFamily="34" charset="-122"/>
-                <a:cs typeface="맑은 고딕" pitchFamily="34" charset="-120"/>
-              </a:rPr>
-              <a:t>상세설계 — 시퀀스 다이어그램 등</a:t>
-            </a:r>
-            <a:endParaRPr lang="en-US" sz="1350" dirty="0"/>
-          </a:p>
-        </p:txBody>
-      </p:sp>
-      <p:sp>
-        <p:nvSpPr>
-          <p:cNvPr id="18" name="Shape 16"/>
-          <p:cNvSpPr/>
-          <p:nvPr/>
-        </p:nvSpPr>
-        <p:spPr>
-          <a:xfrm>
-            <a:off x="6537960" y="1783080"/>
-            <a:ext cx="5074920" cy="4160520"/>
-          </a:xfrm>
-          <a:prstGeom prst="roundRect">
-            <a:avLst>
-              <a:gd name="adj" fmla="val 2198"/>
-            </a:avLst>
-          </a:prstGeom>
-          <a:solidFill>
-            <a:srgbClr val="FFFFFF"/>
-          </a:solidFill>
-          <a:ln w="12700">
-            <a:solidFill>
-              <a:srgbClr val="E5E7EB"/>
-            </a:solidFill>
-            <a:prstDash val="solid"/>
-          </a:ln>
-          <a:effectLst>
-            <a:outerShdw sx="100000" sy="100000" kx="0" ky="0" algn="bl" rotWithShape="0" blurRad="127000" dist="50800" dir="5400000">
-              <a:srgbClr val="1E1B4B">
-                <a:alpha val="18000"/>
-              </a:srgbClr>
-            </a:outerShdw>
-          </a:effectLst>
-        </p:spPr>
-      </p:sp>
-      <p:sp>
-        <p:nvSpPr>
-          <p:cNvPr id="19" name="Text 17"/>
-          <p:cNvSpPr/>
-          <p:nvPr/>
-        </p:nvSpPr>
-        <p:spPr>
-          <a:xfrm>
-            <a:off x="6812280" y="2011680"/>
-            <a:ext cx="4572000" cy="365760"/>
-          </a:xfrm>
-          <a:prstGeom prst="rect">
-            <a:avLst/>
-          </a:prstGeom>
-          <a:noFill/>
-          <a:ln/>
-        </p:spPr>
-        <p:txBody>
-          <a:bodyPr wrap="square" lIns="0" tIns="0" rIns="0" bIns="0" rtlCol="0" anchor="ctr"/>
-          <a:lstStyle/>
-          <a:p>
-            <a:pPr indent="0" marL="0">
-              <a:buNone/>
-            </a:pPr>
-            <a:r>
-              <a:rPr lang="en-US" sz="1500" b="1" dirty="0">
-                <a:solidFill>
-                  <a:srgbClr val="8B5CF6"/>
-                </a:solidFill>
-                <a:latin typeface="맑은 고딕" pitchFamily="34" charset="0"/>
-                <a:ea typeface="맑은 고딕" pitchFamily="34" charset="-122"/>
-                <a:cs typeface="맑은 고딕" pitchFamily="34" charset="-120"/>
-              </a:rPr>
-              <a:t>어떻게 생성하나</a:t>
-            </a:r>
-            <a:endParaRPr lang="en-US" sz="1500" dirty="0"/>
-          </a:p>
-        </p:txBody>
-      </p:sp>
-      <p:sp>
-        <p:nvSpPr>
-          <p:cNvPr id="20" name="Text 18"/>
-          <p:cNvSpPr/>
-          <p:nvPr/>
-        </p:nvSpPr>
-        <p:spPr>
-          <a:xfrm>
-            <a:off x="6858000" y="2468880"/>
-            <a:ext cx="4572000" cy="3291840"/>
-          </a:xfrm>
-          <a:prstGeom prst="rect">
-            <a:avLst/>
-          </a:prstGeom>
-          <a:noFill/>
-          <a:ln/>
-        </p:spPr>
-        <p:txBody>
-          <a:bodyPr wrap="square" lIns="0" tIns="0" rIns="0" bIns="0" rtlCol="0" anchor="t"/>
-          <a:lstStyle/>
-          <a:p>
-            <a:pPr marL="342900" indent="-342900">
-              <a:spcAft>
-                <a:spcPts val="400"/>
-              </a:spcAft>
-              <a:buSzPct val="100000"/>
-              <a:buChar char="•"/>
-            </a:pPr>
-            <a:r>
-              <a:rPr lang="en-US" sz="1350" b="1" dirty="0">
-                <a:solidFill>
-                  <a:srgbClr val="1F2937"/>
-                </a:solidFill>
-                <a:latin typeface="맑은 고딕" pitchFamily="34" charset="0"/>
-                <a:ea typeface="맑은 고딕" pitchFamily="34" charset="-122"/>
-                <a:cs typeface="맑은 고딕" pitchFamily="34" charset="-120"/>
-              </a:rPr>
-              <a:t>정해진 양식(템플릿) 고정</a:t>
-            </a:r>
-            <a:endParaRPr lang="en-US" sz="1350" dirty="0"/>
-          </a:p>
-          <a:p>
-            <a:pPr lvl="1" indent="0" marL="0">
-              <a:spcAft>
-                <a:spcPts val="1000"/>
-              </a:spcAft>
-              <a:buNone/>
-            </a:pPr>
-            <a:r>
-              <a:rPr lang="en-US" sz="1200" dirty="0">
-                <a:solidFill>
-                  <a:srgbClr val="6B7280"/>
-                </a:solidFill>
-                <a:latin typeface="맑은 고딕" pitchFamily="34" charset="0"/>
-                <a:ea typeface="맑은 고딕" pitchFamily="34" charset="-122"/>
-                <a:cs typeface="맑은 고딕" pitchFamily="34" charset="-120"/>
-              </a:rPr>
-              <a:t>각 산출물의 필드·구조를 템플릿으로 미리 정의</a:t>
-            </a:r>
-            <a:endParaRPr lang="en-US" sz="1350" dirty="0"/>
-          </a:p>
-          <a:p>
-            <a:pPr marL="342900" indent="-342900">
-              <a:spcAft>
-                <a:spcPts val="400"/>
-              </a:spcAft>
-              <a:buSzPct val="100000"/>
-              <a:buChar char="•"/>
-            </a:pPr>
-            <a:r>
-              <a:rPr lang="en-US" sz="1350" b="1" dirty="0">
-                <a:solidFill>
-                  <a:srgbClr val="1F2937"/>
-                </a:solidFill>
-                <a:latin typeface="맑은 고딕" pitchFamily="34" charset="0"/>
-                <a:ea typeface="맑은 고딕" pitchFamily="34" charset="-122"/>
-                <a:cs typeface="맑은 고딕" pitchFamily="34" charset="-120"/>
-              </a:rPr>
-              <a:t>산출물 유형별 프롬프트 사전 작성</a:t>
-            </a:r>
-            <a:endParaRPr lang="en-US" sz="1350" dirty="0"/>
-          </a:p>
-          <a:p>
-            <a:pPr lvl="1" indent="0" marL="0">
-              <a:spcAft>
-                <a:spcPts val="1000"/>
-              </a:spcAft>
-              <a:buNone/>
-            </a:pPr>
-            <a:r>
-              <a:rPr lang="en-US" sz="1200" dirty="0">
-                <a:solidFill>
-                  <a:srgbClr val="6B7280"/>
-                </a:solidFill>
-                <a:latin typeface="맑은 고딕" pitchFamily="34" charset="0"/>
-                <a:ea typeface="맑은 고딕" pitchFamily="34" charset="-122"/>
-                <a:cs typeface="맑은 고딕" pitchFamily="34" charset="-120"/>
-              </a:rPr>
-              <a:t>예) Detail Design → 시퀀스 다이어그램 자동 생성</a:t>
-            </a:r>
-            <a:endParaRPr lang="en-US" sz="1350" dirty="0"/>
-          </a:p>
-          <a:p>
-            <a:pPr marL="342900" indent="-342900">
-              <a:spcAft>
-                <a:spcPts val="400"/>
-              </a:spcAft>
-              <a:buSzPct val="100000"/>
-              <a:buChar char="•"/>
-            </a:pPr>
-            <a:r>
-              <a:rPr lang="en-US" sz="1350" b="1" dirty="0">
-                <a:solidFill>
-                  <a:srgbClr val="1F2937"/>
-                </a:solidFill>
-                <a:latin typeface="맑은 고딕" pitchFamily="34" charset="0"/>
-                <a:ea typeface="맑은 고딕" pitchFamily="34" charset="-122"/>
-                <a:cs typeface="맑은 고딕" pitchFamily="34" charset="-120"/>
-              </a:rPr>
-              <a:t>AI 결과는 항상 “초안”</a:t>
-            </a:r>
-            <a:endParaRPr lang="en-US" sz="1350" dirty="0"/>
-          </a:p>
-          <a:p>
-            <a:pPr lvl="1" indent="0" marL="0">
-              <a:buNone/>
-            </a:pPr>
-            <a:r>
-              <a:rPr lang="en-US" sz="1200" dirty="0">
-                <a:solidFill>
-                  <a:srgbClr val="6B7280"/>
-                </a:solidFill>
-                <a:latin typeface="맑은 고딕" pitchFamily="34" charset="0"/>
-                <a:ea typeface="맑은 고딕" pitchFamily="34" charset="-122"/>
-                <a:cs typeface="맑은 고딕" pitchFamily="34" charset="-120"/>
-              </a:rPr>
-              <a:t>담당자가 틀 위에서 편집·추가·삭제</a:t>
-            </a:r>
-            <a:endParaRPr lang="en-US" sz="1350" dirty="0"/>
-          </a:p>
-        </p:txBody>
-      </p:sp>
-      <p:sp>
-        <p:nvSpPr>
-          <p:cNvPr id="21" name="Text 19"/>
-          <p:cNvSpPr/>
-          <p:nvPr/>
-        </p:nvSpPr>
-        <p:spPr>
-          <a:xfrm>
-            <a:off x="566928" y="6035040"/>
-            <a:ext cx="10972800" cy="320040"/>
-          </a:xfrm>
-          <a:prstGeom prst="rect">
-            <a:avLst/>
-          </a:prstGeom>
-          <a:noFill/>
-          <a:ln/>
-        </p:spPr>
-        <p:txBody>
-          <a:bodyPr wrap="square" lIns="0" tIns="0" rIns="0" bIns="0" rtlCol="0" anchor="ctr"/>
-          <a:lstStyle/>
-          <a:p>
-            <a:pPr indent="0" marL="0">
-              <a:buNone/>
-            </a:pPr>
-            <a:r>
-              <a:rPr lang="en-US" sz="1250" b="1" i="1" dirty="0">
-                <a:solidFill>
-                  <a:srgbClr val="6366F1"/>
-                </a:solidFill>
-                <a:latin typeface="맑은 고딕" pitchFamily="34" charset="0"/>
-                <a:ea typeface="맑은 고딕" pitchFamily="34" charset="-122"/>
-                <a:cs typeface="맑은 고딕" pitchFamily="34" charset="-120"/>
-              </a:rPr>
-              <a:t>→ 다음 장: req-tf-01 하나에서 실제로 도출한 예시</a:t>
+              <a:t>개발자가 AI 제안을 근거로 고객사와 협의·확정하고, 이전 요구사항과 비교해 관리한다</a:t>
             </a:r>
             <a:endParaRPr lang="en-US" sz="1250" dirty="0"/>
           </a:p>
@@ -6906,7 +6687,7 @@
                 <a:ea typeface="맑은 고딕" pitchFamily="34" charset="-122"/>
                 <a:cs typeface="맑은 고딕" pitchFamily="34" charset="-120"/>
               </a:rPr>
-              <a:t>핵심 기능 2 · 도출 예시 ①</a:t>
+              <a:t>핵심 기능 2</a:t>
             </a:r>
             <a:endParaRPr lang="en-US" sz="1200" dirty="0"/>
           </a:p>
@@ -6945,51 +6726,31 @@
                 <a:ea typeface="맑은 고딕" pitchFamily="34" charset="-122"/>
                 <a:cs typeface="맑은 고딕" pitchFamily="34" charset="-120"/>
               </a:rPr>
-              <a:t>요구사항 하나 → 기능 · 비기능 요구사항</a:t>
+              <a:t>문서·티켓 자동 생성</a:t>
             </a:r>
             <a:endParaRPr lang="en-US" sz="3000" dirty="0"/>
           </a:p>
         </p:txBody>
       </p:sp>
-      <p:pic>
-        <p:nvPicPr>
-          <p:cNvPr id="4" name="Image 0" descr="/home/user/semes-superrookie/docs/img/ppt-derive-1.png">    </p:cNvPr>
-          <p:cNvPicPr>
-            <a:picLocks noChangeAspect="1"/>
-          </p:cNvPicPr>
-          <p:nvPr/>
-        </p:nvPicPr>
-        <p:blipFill>
-          <a:blip r:embed="rId1"/>
-          <a:stretch>
-            <a:fillRect/>
-          </a:stretch>
-        </p:blipFill>
-        <p:spPr>
-          <a:xfrm>
-            <a:off x="836676" y="1828800"/>
-            <a:ext cx="10515600" cy="3927348"/>
-          </a:xfrm>
-          <a:prstGeom prst="rect">
-            <a:avLst/>
-          </a:prstGeom>
-        </p:spPr>
-      </p:pic>
-      <p:sp>
-        <p:nvSpPr>
-          <p:cNvPr id="5" name="Text 2"/>
-          <p:cNvSpPr/>
-          <p:nvPr/>
-        </p:nvSpPr>
-        <p:spPr>
-          <a:xfrm>
-            <a:off x="566928" y="5943600"/>
-            <a:ext cx="11064240" cy="365760"/>
-          </a:xfrm>
-          <a:prstGeom prst="rect">
-            <a:avLst/>
-          </a:prstGeom>
-          <a:noFill/>
+      <p:sp>
+        <p:nvSpPr>
+          <p:cNvPr id="4" name="Text 2"/>
+          <p:cNvSpPr/>
+          <p:nvPr/>
+        </p:nvSpPr>
+        <p:spPr>
+          <a:xfrm>
+            <a:off x="10424160" y="822960"/>
+            <a:ext cx="1737360" cy="310896"/>
+          </a:xfrm>
+          <a:prstGeom prst="roundRect">
+            <a:avLst>
+              <a:gd name="adj" fmla="val 47059"/>
+            </a:avLst>
+          </a:prstGeom>
+          <a:solidFill>
+            <a:srgbClr val="FEF3C7"/>
+          </a:solidFill>
           <a:ln/>
         </p:spPr>
         <p:txBody>
@@ -7000,7 +6761,167 @@
               <a:buNone/>
             </a:pPr>
             <a:r>
-              <a:rPr lang="en-US" sz="1250" dirty="0">
+              <a:rPr lang="en-US" sz="1100" b="1" dirty="0">
+                <a:solidFill>
+                  <a:srgbClr val="B45309"/>
+                </a:solidFill>
+                <a:latin typeface="맑은 고딕" pitchFamily="34" charset="0"/>
+                <a:ea typeface="맑은 고딕" pitchFamily="34" charset="-122"/>
+                <a:cs typeface="맑은 고딕" pitchFamily="34" charset="-120"/>
+              </a:rPr>
+              <a:t>개발 예정</a:t>
+            </a:r>
+            <a:endParaRPr lang="en-US" sz="1100" dirty="0"/>
+          </a:p>
+        </p:txBody>
+      </p:sp>
+      <p:sp>
+        <p:nvSpPr>
+          <p:cNvPr id="5" name="Text 3"/>
+          <p:cNvSpPr/>
+          <p:nvPr/>
+        </p:nvSpPr>
+        <p:spPr>
+          <a:xfrm>
+            <a:off x="566928" y="1783080"/>
+            <a:ext cx="5486400" cy="365760"/>
+          </a:xfrm>
+          <a:prstGeom prst="rect">
+            <a:avLst/>
+          </a:prstGeom>
+          <a:noFill/>
+          <a:ln/>
+        </p:spPr>
+        <p:txBody>
+          <a:bodyPr wrap="square" lIns="0" tIns="0" rIns="0" bIns="0" rtlCol="0" anchor="ctr"/>
+          <a:lstStyle/>
+          <a:p>
+            <a:pPr indent="0" marL="0">
+              <a:buNone/>
+            </a:pPr>
+            <a:r>
+              <a:rPr lang="en-US" sz="1500" b="1" dirty="0">
+                <a:solidFill>
+                  <a:srgbClr val="1F2937"/>
+                </a:solidFill>
+                <a:latin typeface="맑은 고딕" pitchFamily="34" charset="0"/>
+                <a:ea typeface="맑은 고딕" pitchFamily="34" charset="-122"/>
+                <a:cs typeface="맑은 고딕" pitchFamily="34" charset="-120"/>
+              </a:rPr>
+              <a:t>기능 하나 = Jira 이슈 4종 (+ 비기능요구사항)</a:t>
+            </a:r>
+            <a:endParaRPr lang="en-US" sz="1500" dirty="0"/>
+          </a:p>
+        </p:txBody>
+      </p:sp>
+      <p:sp>
+        <p:nvSpPr>
+          <p:cNvPr id="6" name="Shape 4"/>
+          <p:cNvSpPr/>
+          <p:nvPr/>
+        </p:nvSpPr>
+        <p:spPr>
+          <a:xfrm>
+            <a:off x="566928" y="2286000"/>
+            <a:ext cx="5486400" cy="713232"/>
+          </a:xfrm>
+          <a:prstGeom prst="roundRect">
+            <a:avLst>
+              <a:gd name="adj" fmla="val 7692"/>
+            </a:avLst>
+          </a:prstGeom>
+          <a:solidFill>
+            <a:srgbClr val="EEF2FF"/>
+          </a:solidFill>
+          <a:ln w="12700">
+            <a:solidFill>
+              <a:srgbClr val="C7D2FE"/>
+            </a:solidFill>
+            <a:prstDash val="solid"/>
+          </a:ln>
+        </p:spPr>
+      </p:sp>
+      <p:sp>
+        <p:nvSpPr>
+          <p:cNvPr id="7" name="Text 5"/>
+          <p:cNvSpPr/>
+          <p:nvPr/>
+        </p:nvSpPr>
+        <p:spPr>
+          <a:xfrm>
+            <a:off x="713232" y="2414016"/>
+            <a:ext cx="457200" cy="457200"/>
+          </a:xfrm>
+          <a:prstGeom prst="ellipse">
+            <a:avLst/>
+          </a:prstGeom>
+          <a:solidFill>
+            <a:srgbClr val="6366F1"/>
+          </a:solidFill>
+          <a:ln/>
+        </p:spPr>
+        <p:txBody>
+          <a:bodyPr wrap="square" lIns="0" tIns="0" rIns="0" bIns="0" rtlCol="0" anchor="ctr"/>
+          <a:lstStyle/>
+          <a:p>
+            <a:pPr algn="ctr" indent="0" marL="0">
+              <a:buNone/>
+            </a:pPr>
+            <a:r>
+              <a:rPr lang="en-US" sz="1500" b="1" dirty="0">
+                <a:solidFill>
+                  <a:srgbClr val="FFFFFF"/>
+                </a:solidFill>
+                <a:latin typeface="맑은 고딕" pitchFamily="34" charset="0"/>
+                <a:ea typeface="맑은 고딕" pitchFamily="34" charset="-122"/>
+                <a:cs typeface="맑은 고딕" pitchFamily="34" charset="-120"/>
+              </a:rPr>
+              <a:t>1</a:t>
+            </a:r>
+            <a:endParaRPr lang="en-US" sz="1500" dirty="0"/>
+          </a:p>
+        </p:txBody>
+      </p:sp>
+      <p:sp>
+        <p:nvSpPr>
+          <p:cNvPr id="8" name="Text 6"/>
+          <p:cNvSpPr/>
+          <p:nvPr/>
+        </p:nvSpPr>
+        <p:spPr>
+          <a:xfrm>
+            <a:off x="1298448" y="2304288"/>
+            <a:ext cx="4617720" cy="676656"/>
+          </a:xfrm>
+          <a:prstGeom prst="rect">
+            <a:avLst/>
+          </a:prstGeom>
+          <a:noFill/>
+          <a:ln/>
+        </p:spPr>
+        <p:txBody>
+          <a:bodyPr wrap="square" lIns="0" tIns="0" rIns="0" bIns="0" rtlCol="0" anchor="ctr"/>
+          <a:lstStyle/>
+          <a:p>
+            <a:pPr indent="0" marL="0">
+              <a:buNone/>
+            </a:pPr>
+            <a:r>
+              <a:rPr lang="en-US" sz="1350" b="1" dirty="0">
+                <a:solidFill>
+                  <a:srgbClr val="1F2937"/>
+                </a:solidFill>
+                <a:latin typeface="맑은 고딕" pitchFamily="34" charset="0"/>
+                <a:ea typeface="맑은 고딕" pitchFamily="34" charset="-122"/>
+                <a:cs typeface="맑은 고딕" pitchFamily="34" charset="-120"/>
+              </a:rPr>
+              <a:t>티켓 (기능요구사항)   </a:t>
+            </a:r>
+            <a:pPr indent="0" marL="0">
+              <a:buNone/>
+            </a:pPr>
+            <a:r>
+              <a:rPr lang="en-US" sz="1150" dirty="0">
                 <a:solidFill>
                   <a:srgbClr val="6B7280"/>
                 </a:solidFill>
@@ -7008,7 +6929,624 @@
                 <a:ea typeface="맑은 고딕" pitchFamily="34" charset="-122"/>
                 <a:cs typeface="맑은 고딕" pitchFamily="34" charset="-120"/>
               </a:rPr>
-              <a:t>req-tf-01(신규 태스크 생성) 한 건에서 기능요구사항 6건 · 비기능요구사항 5건을 자동 도출 (AI 초안)</a:t>
+              <a:t>개발 단위가 되는 메인 티켓</a:t>
+            </a:r>
+            <a:endParaRPr lang="en-US" sz="1350" dirty="0"/>
+          </a:p>
+        </p:txBody>
+      </p:sp>
+      <p:sp>
+        <p:nvSpPr>
+          <p:cNvPr id="9" name="Shape 7"/>
+          <p:cNvSpPr/>
+          <p:nvPr/>
+        </p:nvSpPr>
+        <p:spPr>
+          <a:xfrm>
+            <a:off x="566928" y="3108960"/>
+            <a:ext cx="5486400" cy="713232"/>
+          </a:xfrm>
+          <a:prstGeom prst="roundRect">
+            <a:avLst>
+              <a:gd name="adj" fmla="val 7692"/>
+            </a:avLst>
+          </a:prstGeom>
+          <a:solidFill>
+            <a:srgbClr val="EEF2FF"/>
+          </a:solidFill>
+          <a:ln w="12700">
+            <a:solidFill>
+              <a:srgbClr val="C7D2FE"/>
+            </a:solidFill>
+            <a:prstDash val="solid"/>
+          </a:ln>
+        </p:spPr>
+      </p:sp>
+      <p:sp>
+        <p:nvSpPr>
+          <p:cNvPr id="10" name="Text 8"/>
+          <p:cNvSpPr/>
+          <p:nvPr/>
+        </p:nvSpPr>
+        <p:spPr>
+          <a:xfrm>
+            <a:off x="713232" y="3236976"/>
+            <a:ext cx="457200" cy="457200"/>
+          </a:xfrm>
+          <a:prstGeom prst="ellipse">
+            <a:avLst/>
+          </a:prstGeom>
+          <a:solidFill>
+            <a:srgbClr val="6366F1"/>
+          </a:solidFill>
+          <a:ln/>
+        </p:spPr>
+        <p:txBody>
+          <a:bodyPr wrap="square" lIns="0" tIns="0" rIns="0" bIns="0" rtlCol="0" anchor="ctr"/>
+          <a:lstStyle/>
+          <a:p>
+            <a:pPr algn="ctr" indent="0" marL="0">
+              <a:buNone/>
+            </a:pPr>
+            <a:r>
+              <a:rPr lang="en-US" sz="1500" b="1" dirty="0">
+                <a:solidFill>
+                  <a:srgbClr val="FFFFFF"/>
+                </a:solidFill>
+                <a:latin typeface="맑은 고딕" pitchFamily="34" charset="0"/>
+                <a:ea typeface="맑은 고딕" pitchFamily="34" charset="-122"/>
+                <a:cs typeface="맑은 고딕" pitchFamily="34" charset="-120"/>
+              </a:rPr>
+              <a:t>2</a:t>
+            </a:r>
+            <a:endParaRPr lang="en-US" sz="1500" dirty="0"/>
+          </a:p>
+        </p:txBody>
+      </p:sp>
+      <p:sp>
+        <p:nvSpPr>
+          <p:cNvPr id="11" name="Text 9"/>
+          <p:cNvSpPr/>
+          <p:nvPr/>
+        </p:nvSpPr>
+        <p:spPr>
+          <a:xfrm>
+            <a:off x="1298448" y="3127248"/>
+            <a:ext cx="4617720" cy="676656"/>
+          </a:xfrm>
+          <a:prstGeom prst="rect">
+            <a:avLst/>
+          </a:prstGeom>
+          <a:noFill/>
+          <a:ln/>
+        </p:spPr>
+        <p:txBody>
+          <a:bodyPr wrap="square" lIns="0" tIns="0" rIns="0" bIns="0" rtlCol="0" anchor="ctr"/>
+          <a:lstStyle/>
+          <a:p>
+            <a:pPr indent="0" marL="0">
+              <a:buNone/>
+            </a:pPr>
+            <a:r>
+              <a:rPr lang="en-US" sz="1350" b="1" dirty="0">
+                <a:solidFill>
+                  <a:srgbClr val="1F2937"/>
+                </a:solidFill>
+                <a:latin typeface="맑은 고딕" pitchFamily="34" charset="0"/>
+                <a:ea typeface="맑은 고딕" pitchFamily="34" charset="-122"/>
+                <a:cs typeface="맑은 고딕" pitchFamily="34" charset="-120"/>
+              </a:rPr>
+              <a:t>SWVOC (고객요구사항)   </a:t>
+            </a:r>
+            <a:pPr indent="0" marL="0">
+              <a:buNone/>
+            </a:pPr>
+            <a:r>
+              <a:rPr lang="en-US" sz="1150" dirty="0">
+                <a:solidFill>
+                  <a:srgbClr val="6B7280"/>
+                </a:solidFill>
+                <a:latin typeface="맑은 고딕" pitchFamily="34" charset="0"/>
+                <a:ea typeface="맑은 고딕" pitchFamily="34" charset="-122"/>
+                <a:cs typeface="맑은 고딕" pitchFamily="34" charset="-120"/>
+              </a:rPr>
+              <a:t>고객 요구사항 원문·정리</a:t>
+            </a:r>
+            <a:endParaRPr lang="en-US" sz="1350" dirty="0"/>
+          </a:p>
+        </p:txBody>
+      </p:sp>
+      <p:sp>
+        <p:nvSpPr>
+          <p:cNvPr id="12" name="Shape 10"/>
+          <p:cNvSpPr/>
+          <p:nvPr/>
+        </p:nvSpPr>
+        <p:spPr>
+          <a:xfrm>
+            <a:off x="566928" y="3931920"/>
+            <a:ext cx="5486400" cy="713232"/>
+          </a:xfrm>
+          <a:prstGeom prst="roundRect">
+            <a:avLst>
+              <a:gd name="adj" fmla="val 7692"/>
+            </a:avLst>
+          </a:prstGeom>
+          <a:solidFill>
+            <a:srgbClr val="EEF2FF"/>
+          </a:solidFill>
+          <a:ln w="12700">
+            <a:solidFill>
+              <a:srgbClr val="C7D2FE"/>
+            </a:solidFill>
+            <a:prstDash val="solid"/>
+          </a:ln>
+        </p:spPr>
+      </p:sp>
+      <p:sp>
+        <p:nvSpPr>
+          <p:cNvPr id="13" name="Text 11"/>
+          <p:cNvSpPr/>
+          <p:nvPr/>
+        </p:nvSpPr>
+        <p:spPr>
+          <a:xfrm>
+            <a:off x="713232" y="4059936"/>
+            <a:ext cx="457200" cy="457200"/>
+          </a:xfrm>
+          <a:prstGeom prst="ellipse">
+            <a:avLst/>
+          </a:prstGeom>
+          <a:solidFill>
+            <a:srgbClr val="6366F1"/>
+          </a:solidFill>
+          <a:ln/>
+        </p:spPr>
+        <p:txBody>
+          <a:bodyPr wrap="square" lIns="0" tIns="0" rIns="0" bIns="0" rtlCol="0" anchor="ctr"/>
+          <a:lstStyle/>
+          <a:p>
+            <a:pPr algn="ctr" indent="0" marL="0">
+              <a:buNone/>
+            </a:pPr>
+            <a:r>
+              <a:rPr lang="en-US" sz="1500" b="1" dirty="0">
+                <a:solidFill>
+                  <a:srgbClr val="FFFFFF"/>
+                </a:solidFill>
+                <a:latin typeface="맑은 고딕" pitchFamily="34" charset="0"/>
+                <a:ea typeface="맑은 고딕" pitchFamily="34" charset="-122"/>
+                <a:cs typeface="맑은 고딕" pitchFamily="34" charset="-120"/>
+              </a:rPr>
+              <a:t>3</a:t>
+            </a:r>
+            <a:endParaRPr lang="en-US" sz="1500" dirty="0"/>
+          </a:p>
+        </p:txBody>
+      </p:sp>
+      <p:sp>
+        <p:nvSpPr>
+          <p:cNvPr id="14" name="Text 12"/>
+          <p:cNvSpPr/>
+          <p:nvPr/>
+        </p:nvSpPr>
+        <p:spPr>
+          <a:xfrm>
+            <a:off x="1298448" y="3950208"/>
+            <a:ext cx="4617720" cy="676656"/>
+          </a:xfrm>
+          <a:prstGeom prst="rect">
+            <a:avLst/>
+          </a:prstGeom>
+          <a:noFill/>
+          <a:ln/>
+        </p:spPr>
+        <p:txBody>
+          <a:bodyPr wrap="square" lIns="0" tIns="0" rIns="0" bIns="0" rtlCol="0" anchor="ctr"/>
+          <a:lstStyle/>
+          <a:p>
+            <a:pPr indent="0" marL="0">
+              <a:buNone/>
+            </a:pPr>
+            <a:r>
+              <a:rPr lang="en-US" sz="1350" b="1" dirty="0">
+                <a:solidFill>
+                  <a:srgbClr val="1F2937"/>
+                </a:solidFill>
+                <a:latin typeface="맑은 고딕" pitchFamily="34" charset="0"/>
+                <a:ea typeface="맑은 고딕" pitchFamily="34" charset="-122"/>
+                <a:cs typeface="맑은 고딕" pitchFamily="34" charset="-120"/>
+              </a:rPr>
+              <a:t>Function Requirement   </a:t>
+            </a:r>
+            <a:pPr indent="0" marL="0">
+              <a:buNone/>
+            </a:pPr>
+            <a:r>
+              <a:rPr lang="en-US" sz="1150" dirty="0">
+                <a:solidFill>
+                  <a:srgbClr val="6B7280"/>
+                </a:solidFill>
+                <a:latin typeface="맑은 고딕" pitchFamily="34" charset="0"/>
+                <a:ea typeface="맑은 고딕" pitchFamily="34" charset="-122"/>
+                <a:cs typeface="맑은 고딕" pitchFamily="34" charset="-120"/>
+              </a:rPr>
+              <a:t>기능 요구사항 상세</a:t>
+            </a:r>
+            <a:endParaRPr lang="en-US" sz="1350" dirty="0"/>
+          </a:p>
+        </p:txBody>
+      </p:sp>
+      <p:sp>
+        <p:nvSpPr>
+          <p:cNvPr id="15" name="Shape 13"/>
+          <p:cNvSpPr/>
+          <p:nvPr/>
+        </p:nvSpPr>
+        <p:spPr>
+          <a:xfrm>
+            <a:off x="566928" y="4754880"/>
+            <a:ext cx="5486400" cy="713232"/>
+          </a:xfrm>
+          <a:prstGeom prst="roundRect">
+            <a:avLst>
+              <a:gd name="adj" fmla="val 7692"/>
+            </a:avLst>
+          </a:prstGeom>
+          <a:solidFill>
+            <a:srgbClr val="EEF2FF"/>
+          </a:solidFill>
+          <a:ln w="12700">
+            <a:solidFill>
+              <a:srgbClr val="C7D2FE"/>
+            </a:solidFill>
+            <a:prstDash val="solid"/>
+          </a:ln>
+        </p:spPr>
+      </p:sp>
+      <p:sp>
+        <p:nvSpPr>
+          <p:cNvPr id="16" name="Text 14"/>
+          <p:cNvSpPr/>
+          <p:nvPr/>
+        </p:nvSpPr>
+        <p:spPr>
+          <a:xfrm>
+            <a:off x="713232" y="4882896"/>
+            <a:ext cx="457200" cy="457200"/>
+          </a:xfrm>
+          <a:prstGeom prst="ellipse">
+            <a:avLst/>
+          </a:prstGeom>
+          <a:solidFill>
+            <a:srgbClr val="6366F1"/>
+          </a:solidFill>
+          <a:ln/>
+        </p:spPr>
+        <p:txBody>
+          <a:bodyPr wrap="square" lIns="0" tIns="0" rIns="0" bIns="0" rtlCol="0" anchor="ctr"/>
+          <a:lstStyle/>
+          <a:p>
+            <a:pPr algn="ctr" indent="0" marL="0">
+              <a:buNone/>
+            </a:pPr>
+            <a:r>
+              <a:rPr lang="en-US" sz="1500" b="1" dirty="0">
+                <a:solidFill>
+                  <a:srgbClr val="FFFFFF"/>
+                </a:solidFill>
+                <a:latin typeface="맑은 고딕" pitchFamily="34" charset="0"/>
+                <a:ea typeface="맑은 고딕" pitchFamily="34" charset="-122"/>
+                <a:cs typeface="맑은 고딕" pitchFamily="34" charset="-120"/>
+              </a:rPr>
+              <a:t>4</a:t>
+            </a:r>
+            <a:endParaRPr lang="en-US" sz="1500" dirty="0"/>
+          </a:p>
+        </p:txBody>
+      </p:sp>
+      <p:sp>
+        <p:nvSpPr>
+          <p:cNvPr id="17" name="Text 15"/>
+          <p:cNvSpPr/>
+          <p:nvPr/>
+        </p:nvSpPr>
+        <p:spPr>
+          <a:xfrm>
+            <a:off x="1298448" y="4773168"/>
+            <a:ext cx="4617720" cy="676656"/>
+          </a:xfrm>
+          <a:prstGeom prst="rect">
+            <a:avLst/>
+          </a:prstGeom>
+          <a:noFill/>
+          <a:ln/>
+        </p:spPr>
+        <p:txBody>
+          <a:bodyPr wrap="square" lIns="0" tIns="0" rIns="0" bIns="0" rtlCol="0" anchor="ctr"/>
+          <a:lstStyle/>
+          <a:p>
+            <a:pPr indent="0" marL="0">
+              <a:buNone/>
+            </a:pPr>
+            <a:r>
+              <a:rPr lang="en-US" sz="1350" b="1" dirty="0">
+                <a:solidFill>
+                  <a:srgbClr val="1F2937"/>
+                </a:solidFill>
+                <a:latin typeface="맑은 고딕" pitchFamily="34" charset="0"/>
+                <a:ea typeface="맑은 고딕" pitchFamily="34" charset="-122"/>
+                <a:cs typeface="맑은 고딕" pitchFamily="34" charset="-120"/>
+              </a:rPr>
+              <a:t>Detail Design   </a:t>
+            </a:r>
+            <a:pPr indent="0" marL="0">
+              <a:buNone/>
+            </a:pPr>
+            <a:r>
+              <a:rPr lang="en-US" sz="1150" dirty="0">
+                <a:solidFill>
+                  <a:srgbClr val="6B7280"/>
+                </a:solidFill>
+                <a:latin typeface="맑은 고딕" pitchFamily="34" charset="0"/>
+                <a:ea typeface="맑은 고딕" pitchFamily="34" charset="-122"/>
+                <a:cs typeface="맑은 고딕" pitchFamily="34" charset="-120"/>
+              </a:rPr>
+              <a:t>상세설계 — 시퀀스 다이어그램 등</a:t>
+            </a:r>
+            <a:endParaRPr lang="en-US" sz="1350" dirty="0"/>
+          </a:p>
+        </p:txBody>
+      </p:sp>
+      <p:sp>
+        <p:nvSpPr>
+          <p:cNvPr id="18" name="Shape 16"/>
+          <p:cNvSpPr/>
+          <p:nvPr/>
+        </p:nvSpPr>
+        <p:spPr>
+          <a:xfrm>
+            <a:off x="6537960" y="1783080"/>
+            <a:ext cx="5074920" cy="4160520"/>
+          </a:xfrm>
+          <a:prstGeom prst="roundRect">
+            <a:avLst>
+              <a:gd name="adj" fmla="val 2198"/>
+            </a:avLst>
+          </a:prstGeom>
+          <a:solidFill>
+            <a:srgbClr val="FFFFFF"/>
+          </a:solidFill>
+          <a:ln w="12700">
+            <a:solidFill>
+              <a:srgbClr val="E5E7EB"/>
+            </a:solidFill>
+            <a:prstDash val="solid"/>
+          </a:ln>
+          <a:effectLst>
+            <a:outerShdw sx="100000" sy="100000" kx="0" ky="0" algn="bl" rotWithShape="0" blurRad="127000" dist="50800" dir="5400000">
+              <a:srgbClr val="1E1B4B">
+                <a:alpha val="18000"/>
+              </a:srgbClr>
+            </a:outerShdw>
+          </a:effectLst>
+        </p:spPr>
+      </p:sp>
+      <p:sp>
+        <p:nvSpPr>
+          <p:cNvPr id="19" name="Text 17"/>
+          <p:cNvSpPr/>
+          <p:nvPr/>
+        </p:nvSpPr>
+        <p:spPr>
+          <a:xfrm>
+            <a:off x="6812280" y="2011680"/>
+            <a:ext cx="4572000" cy="365760"/>
+          </a:xfrm>
+          <a:prstGeom prst="rect">
+            <a:avLst/>
+          </a:prstGeom>
+          <a:noFill/>
+          <a:ln/>
+        </p:spPr>
+        <p:txBody>
+          <a:bodyPr wrap="square" lIns="0" tIns="0" rIns="0" bIns="0" rtlCol="0" anchor="ctr"/>
+          <a:lstStyle/>
+          <a:p>
+            <a:pPr indent="0" marL="0">
+              <a:buNone/>
+            </a:pPr>
+            <a:r>
+              <a:rPr lang="en-US" sz="1500" b="1" dirty="0">
+                <a:solidFill>
+                  <a:srgbClr val="8B5CF6"/>
+                </a:solidFill>
+                <a:latin typeface="맑은 고딕" pitchFamily="34" charset="0"/>
+                <a:ea typeface="맑은 고딕" pitchFamily="34" charset="-122"/>
+                <a:cs typeface="맑은 고딕" pitchFamily="34" charset="-120"/>
+              </a:rPr>
+              <a:t>어떻게 생성하나</a:t>
+            </a:r>
+            <a:endParaRPr lang="en-US" sz="1500" dirty="0"/>
+          </a:p>
+        </p:txBody>
+      </p:sp>
+      <p:sp>
+        <p:nvSpPr>
+          <p:cNvPr id="20" name="Text 18"/>
+          <p:cNvSpPr/>
+          <p:nvPr/>
+        </p:nvSpPr>
+        <p:spPr>
+          <a:xfrm>
+            <a:off x="6858000" y="2468880"/>
+            <a:ext cx="4572000" cy="3291840"/>
+          </a:xfrm>
+          <a:prstGeom prst="rect">
+            <a:avLst/>
+          </a:prstGeom>
+          <a:noFill/>
+          <a:ln/>
+        </p:spPr>
+        <p:txBody>
+          <a:bodyPr wrap="square" lIns="0" tIns="0" rIns="0" bIns="0" rtlCol="0" anchor="t"/>
+          <a:lstStyle/>
+          <a:p>
+            <a:pPr marL="342900" indent="-342900">
+              <a:spcAft>
+                <a:spcPts val="400"/>
+              </a:spcAft>
+              <a:buSzPct val="100000"/>
+              <a:buChar char="•"/>
+            </a:pPr>
+            <a:r>
+              <a:rPr lang="en-US" sz="1350" b="1" dirty="0">
+                <a:solidFill>
+                  <a:srgbClr val="1F2937"/>
+                </a:solidFill>
+                <a:latin typeface="맑은 고딕" pitchFamily="34" charset="0"/>
+                <a:ea typeface="맑은 고딕" pitchFamily="34" charset="-122"/>
+                <a:cs typeface="맑은 고딕" pitchFamily="34" charset="-120"/>
+              </a:rPr>
+              <a:t>정해진 양식(템플릿) 고정</a:t>
+            </a:r>
+            <a:endParaRPr lang="en-US" sz="1350" dirty="0"/>
+          </a:p>
+          <a:p>
+            <a:pPr lvl="1" indent="0" marL="0">
+              <a:spcAft>
+                <a:spcPts val="1000"/>
+              </a:spcAft>
+              <a:buNone/>
+            </a:pPr>
+            <a:r>
+              <a:rPr lang="en-US" sz="1200" dirty="0">
+                <a:solidFill>
+                  <a:srgbClr val="6B7280"/>
+                </a:solidFill>
+                <a:latin typeface="맑은 고딕" pitchFamily="34" charset="0"/>
+                <a:ea typeface="맑은 고딕" pitchFamily="34" charset="-122"/>
+                <a:cs typeface="맑은 고딕" pitchFamily="34" charset="-120"/>
+              </a:rPr>
+              <a:t>각 산출물의 필드·구조를 템플릿으로 미리 정의</a:t>
+            </a:r>
+            <a:endParaRPr lang="en-US" sz="1350" dirty="0"/>
+          </a:p>
+          <a:p>
+            <a:pPr marL="342900" indent="-342900">
+              <a:spcAft>
+                <a:spcPts val="400"/>
+              </a:spcAft>
+              <a:buSzPct val="100000"/>
+              <a:buChar char="•"/>
+            </a:pPr>
+            <a:r>
+              <a:rPr lang="en-US" sz="1350" b="1" dirty="0">
+                <a:solidFill>
+                  <a:srgbClr val="1F2937"/>
+                </a:solidFill>
+                <a:latin typeface="맑은 고딕" pitchFamily="34" charset="0"/>
+                <a:ea typeface="맑은 고딕" pitchFamily="34" charset="-122"/>
+                <a:cs typeface="맑은 고딕" pitchFamily="34" charset="-120"/>
+              </a:rPr>
+              <a:t>산출물 유형별 프롬프트 사전 작성</a:t>
+            </a:r>
+            <a:endParaRPr lang="en-US" sz="1350" dirty="0"/>
+          </a:p>
+          <a:p>
+            <a:pPr lvl="1" indent="0" marL="0">
+              <a:spcAft>
+                <a:spcPts val="1000"/>
+              </a:spcAft>
+              <a:buNone/>
+            </a:pPr>
+            <a:r>
+              <a:rPr lang="en-US" sz="1200" dirty="0">
+                <a:solidFill>
+                  <a:srgbClr val="6B7280"/>
+                </a:solidFill>
+                <a:latin typeface="맑은 고딕" pitchFamily="34" charset="0"/>
+                <a:ea typeface="맑은 고딕" pitchFamily="34" charset="-122"/>
+                <a:cs typeface="맑은 고딕" pitchFamily="34" charset="-120"/>
+              </a:rPr>
+              <a:t>예) Detail Design → 시퀀스 다이어그램 자동 생성</a:t>
+            </a:r>
+            <a:endParaRPr lang="en-US" sz="1350" dirty="0"/>
+          </a:p>
+          <a:p>
+            <a:pPr marL="342900" indent="-342900">
+              <a:spcAft>
+                <a:spcPts val="400"/>
+              </a:spcAft>
+              <a:buSzPct val="100000"/>
+              <a:buChar char="•"/>
+            </a:pPr>
+            <a:r>
+              <a:rPr lang="en-US" sz="1350" b="1" dirty="0">
+                <a:solidFill>
+                  <a:srgbClr val="1F2937"/>
+                </a:solidFill>
+                <a:latin typeface="맑은 고딕" pitchFamily="34" charset="0"/>
+                <a:ea typeface="맑은 고딕" pitchFamily="34" charset="-122"/>
+                <a:cs typeface="맑은 고딕" pitchFamily="34" charset="-120"/>
+              </a:rPr>
+              <a:t>AI 결과는 항상 “초안”</a:t>
+            </a:r>
+            <a:endParaRPr lang="en-US" sz="1350" dirty="0"/>
+          </a:p>
+          <a:p>
+            <a:pPr lvl="1" indent="0" marL="0">
+              <a:buNone/>
+            </a:pPr>
+            <a:r>
+              <a:rPr lang="en-US" sz="1200" dirty="0">
+                <a:solidFill>
+                  <a:srgbClr val="6B7280"/>
+                </a:solidFill>
+                <a:latin typeface="맑은 고딕" pitchFamily="34" charset="0"/>
+                <a:ea typeface="맑은 고딕" pitchFamily="34" charset="-122"/>
+                <a:cs typeface="맑은 고딕" pitchFamily="34" charset="-120"/>
+              </a:rPr>
+              <a:t>담당자가 틀 위에서 편집·추가·삭제</a:t>
+            </a:r>
+            <a:endParaRPr lang="en-US" sz="1350" dirty="0"/>
+          </a:p>
+        </p:txBody>
+      </p:sp>
+      <p:sp>
+        <p:nvSpPr>
+          <p:cNvPr id="21" name="Text 19"/>
+          <p:cNvSpPr/>
+          <p:nvPr/>
+        </p:nvSpPr>
+        <p:spPr>
+          <a:xfrm>
+            <a:off x="566928" y="6035040"/>
+            <a:ext cx="10972800" cy="320040"/>
+          </a:xfrm>
+          <a:prstGeom prst="rect">
+            <a:avLst/>
+          </a:prstGeom>
+          <a:noFill/>
+          <a:ln/>
+        </p:spPr>
+        <p:txBody>
+          <a:bodyPr wrap="square" lIns="0" tIns="0" rIns="0" bIns="0" rtlCol="0" anchor="ctr"/>
+          <a:lstStyle/>
+          <a:p>
+            <a:pPr indent="0" marL="0">
+              <a:buNone/>
+            </a:pPr>
+            <a:r>
+              <a:rPr lang="en-US" sz="1250" b="1" i="1" dirty="0">
+                <a:solidFill>
+                  <a:srgbClr val="6366F1"/>
+                </a:solidFill>
+                <a:latin typeface="맑은 고딕" pitchFamily="34" charset="0"/>
+                <a:ea typeface="맑은 고딕" pitchFamily="34" charset="-122"/>
+                <a:cs typeface="맑은 고딕" pitchFamily="34" charset="-120"/>
+              </a:rPr>
+              <a:t>→ 다음 장: req-tf-01 하나에서 실제로 도출한 예시</a:t>
             </a:r>
             <a:endParaRPr lang="en-US" sz="1250" dirty="0"/>
           </a:p>
@@ -7079,7 +7617,7 @@
                 <a:ea typeface="맑은 고딕" pitchFamily="34" charset="-122"/>
                 <a:cs typeface="맑은 고딕" pitchFamily="34" charset="-120"/>
               </a:rPr>
-              <a:t>핵심 기능 2 · 도출 예시 ②</a:t>
+              <a:t>핵심 기능 2 · 도출 예시 ①</a:t>
             </a:r>
             <a:endParaRPr lang="en-US" sz="1200" dirty="0"/>
           </a:p>
@@ -7118,7 +7656,7 @@
                 <a:ea typeface="맑은 고딕" pitchFamily="34" charset="-122"/>
                 <a:cs typeface="맑은 고딕" pitchFamily="34" charset="-120"/>
               </a:rPr>
-              <a:t>요구사항 하나 → Jira 티켓 4종</a:t>
+              <a:t>요구사항 하나 → 기능 · 비기능 요구사항</a:t>
             </a:r>
             <a:endParaRPr lang="en-US" sz="3000" dirty="0"/>
           </a:p>
@@ -7126,7 +7664,7 @@
       </p:sp>
       <p:pic>
         <p:nvPicPr>
-          <p:cNvPr id="4" name="Image 0" descr="/home/user/semes-superrookie/docs/img/ppt-derive-2.png">    </p:cNvPr>
+          <p:cNvPr id="4" name="Image 0" descr="/home/user/semes-superrookie/docs/img/ppt-derive-1.png">    </p:cNvPr>
           <p:cNvPicPr>
             <a:picLocks noChangeAspect="1"/>
           </p:cNvPicPr>
@@ -7140,8 +7678,8 @@
         </p:blipFill>
         <p:spPr>
           <a:xfrm>
-            <a:off x="836676" y="1691640"/>
-            <a:ext cx="10515600" cy="4453128"/>
+            <a:off x="836676" y="1828800"/>
+            <a:ext cx="10515600" cy="3927348"/>
           </a:xfrm>
           <a:prstGeom prst="rect">
             <a:avLst/>
@@ -7156,7 +7694,7 @@
         </p:nvSpPr>
         <p:spPr>
           <a:xfrm>
-            <a:off x="566928" y="6263640"/>
+            <a:off x="566928" y="5943600"/>
             <a:ext cx="11064240" cy="365760"/>
           </a:xfrm>
           <a:prstGeom prst="rect">
@@ -7173,7 +7711,7 @@
               <a:buNone/>
             </a:pPr>
             <a:r>
-              <a:rPr lang="en-US" sz="1200" dirty="0">
+              <a:rPr lang="en-US" sz="1250" dirty="0">
                 <a:solidFill>
                   <a:srgbClr val="6B7280"/>
                 </a:solidFill>
@@ -7181,9 +7719,9 @@
                 <a:ea typeface="맑은 고딕" pitchFamily="34" charset="-122"/>
                 <a:cs typeface="맑은 고딕" pitchFamily="34" charset="-120"/>
               </a:rPr>
-              <a:t>정해진 양식(템플릿)+사전 프롬프트로 4종 이슈 초안 생성 · Detail Design은 시퀀스 다이어그램까지 자동</a:t>
-            </a:r>
-            <a:endParaRPr lang="en-US" sz="1200" dirty="0"/>
+              <a:t>req-tf-01(신규 태스크 생성) 한 건에서 기능요구사항 6건 · 비기능요구사항 5건을 자동 도출 (AI 초안)</a:t>
+            </a:r>
+            <a:endParaRPr lang="en-US" sz="1250" dirty="0"/>
           </a:p>
         </p:txBody>
       </p:sp>
@@ -7252,7 +7790,7 @@
                 <a:ea typeface="맑은 고딕" pitchFamily="34" charset="-122"/>
                 <a:cs typeface="맑은 고딕" pitchFamily="34" charset="-120"/>
               </a:rPr>
-              <a:t>핵심 기능 3</a:t>
+              <a:t>핵심 기능 2 · 도출 예시 ②</a:t>
             </a:r>
             <a:endParaRPr lang="en-US" sz="1200" dirty="0"/>
           </a:p>
@@ -7291,31 +7829,51 @@
                 <a:ea typeface="맑은 고딕" pitchFamily="34" charset="-122"/>
                 <a:cs typeface="맑은 고딕" pitchFamily="34" charset="-120"/>
               </a:rPr>
-              <a:t>문서 추적성</a:t>
+              <a:t>요구사항 하나 → Jira 티켓 4종</a:t>
             </a:r>
             <a:endParaRPr lang="en-US" sz="3000" dirty="0"/>
           </a:p>
         </p:txBody>
       </p:sp>
-      <p:sp>
-        <p:nvSpPr>
-          <p:cNvPr id="4" name="Text 2"/>
-          <p:cNvSpPr/>
-          <p:nvPr/>
-        </p:nvSpPr>
-        <p:spPr>
-          <a:xfrm>
-            <a:off x="10424160" y="822960"/>
-            <a:ext cx="1737360" cy="310896"/>
-          </a:xfrm>
-          <a:prstGeom prst="roundRect">
-            <a:avLst>
-              <a:gd name="adj" fmla="val 47059"/>
-            </a:avLst>
-          </a:prstGeom>
-          <a:solidFill>
-            <a:srgbClr val="FEF3C7"/>
-          </a:solidFill>
+      <p:pic>
+        <p:nvPicPr>
+          <p:cNvPr id="4" name="Image 0" descr="/home/user/semes-superrookie/docs/img/ppt-derive-2.png">    </p:cNvPr>
+          <p:cNvPicPr>
+            <a:picLocks noChangeAspect="1"/>
+          </p:cNvPicPr>
+          <p:nvPr/>
+        </p:nvPicPr>
+        <p:blipFill>
+          <a:blip r:embed="rId1"/>
+          <a:stretch>
+            <a:fillRect/>
+          </a:stretch>
+        </p:blipFill>
+        <p:spPr>
+          <a:xfrm>
+            <a:off x="836676" y="1691640"/>
+            <a:ext cx="10515600" cy="4453128"/>
+          </a:xfrm>
+          <a:prstGeom prst="rect">
+            <a:avLst/>
+          </a:prstGeom>
+        </p:spPr>
+      </p:pic>
+      <p:sp>
+        <p:nvSpPr>
+          <p:cNvPr id="5" name="Text 2"/>
+          <p:cNvSpPr/>
+          <p:nvPr/>
+        </p:nvSpPr>
+        <p:spPr>
+          <a:xfrm>
+            <a:off x="566928" y="6263640"/>
+            <a:ext cx="11064240" cy="365760"/>
+          </a:xfrm>
+          <a:prstGeom prst="rect">
+            <a:avLst/>
+          </a:prstGeom>
+          <a:noFill/>
           <a:ln/>
         </p:spPr>
         <p:txBody>
@@ -7326,163 +7884,7 @@
               <a:buNone/>
             </a:pPr>
             <a:r>
-              <a:rPr lang="en-US" sz="1100" b="1" dirty="0">
-                <a:solidFill>
-                  <a:srgbClr val="B45309"/>
-                </a:solidFill>
-                <a:latin typeface="맑은 고딕" pitchFamily="34" charset="0"/>
-                <a:ea typeface="맑은 고딕" pitchFamily="34" charset="-122"/>
-                <a:cs typeface="맑은 고딕" pitchFamily="34" charset="-120"/>
-              </a:rPr>
-              <a:t>개발 예정</a:t>
-            </a:r>
-            <a:endParaRPr lang="en-US" sz="1100" dirty="0"/>
-          </a:p>
-        </p:txBody>
-      </p:sp>
-      <p:sp>
-        <p:nvSpPr>
-          <p:cNvPr id="5" name="Shape 3"/>
-          <p:cNvSpPr/>
-          <p:nvPr/>
-        </p:nvSpPr>
-        <p:spPr>
-          <a:xfrm>
-            <a:off x="566928" y="1874520"/>
-            <a:ext cx="11064240" cy="1097280"/>
-          </a:xfrm>
-          <a:prstGeom prst="roundRect">
-            <a:avLst>
-              <a:gd name="adj" fmla="val 6667"/>
-            </a:avLst>
-          </a:prstGeom>
-          <a:solidFill>
-            <a:srgbClr val="FFFFFF"/>
-          </a:solidFill>
-          <a:ln w="12700">
-            <a:solidFill>
-              <a:srgbClr val="E5E7EB"/>
-            </a:solidFill>
-            <a:prstDash val="solid"/>
-          </a:ln>
-          <a:effectLst>
-            <a:outerShdw sx="100000" sy="100000" kx="0" ky="0" algn="bl" rotWithShape="0" blurRad="127000" dist="50800" dir="5400000">
-              <a:srgbClr val="1E1B4B">
-                <a:alpha val="18000"/>
-              </a:srgbClr>
-            </a:outerShdw>
-          </a:effectLst>
-        </p:spPr>
-      </p:sp>
-      <p:sp>
-        <p:nvSpPr>
-          <p:cNvPr id="6" name="Text 4"/>
-          <p:cNvSpPr/>
-          <p:nvPr/>
-        </p:nvSpPr>
-        <p:spPr>
-          <a:xfrm>
-            <a:off x="822960" y="2167128"/>
-            <a:ext cx="512064" cy="512064"/>
-          </a:xfrm>
-          <a:prstGeom prst="ellipse">
-            <a:avLst/>
-          </a:prstGeom>
-          <a:solidFill>
-            <a:srgbClr val="8B5CF6"/>
-          </a:solidFill>
-          <a:ln/>
-        </p:spPr>
-        <p:txBody>
-          <a:bodyPr wrap="square" lIns="0" tIns="0" rIns="0" bIns="0" rtlCol="0" anchor="ctr"/>
-          <a:lstStyle/>
-          <a:p>
-            <a:pPr algn="ctr" indent="0" marL="0">
-              <a:buNone/>
-            </a:pPr>
-            <a:r>
-              <a:rPr lang="en-US" sz="1800" b="1" dirty="0">
-                <a:solidFill>
-                  <a:srgbClr val="FFFFFF"/>
-                </a:solidFill>
-                <a:latin typeface="맑은 고딕" pitchFamily="34" charset="0"/>
-                <a:ea typeface="맑은 고딕" pitchFamily="34" charset="-122"/>
-                <a:cs typeface="맑은 고딕" pitchFamily="34" charset="-120"/>
-              </a:rPr>
-              <a:t>1</a:t>
-            </a:r>
-            <a:endParaRPr lang="en-US" sz="1800" dirty="0"/>
-          </a:p>
-        </p:txBody>
-      </p:sp>
-      <p:sp>
-        <p:nvSpPr>
-          <p:cNvPr id="7" name="Text 5"/>
-          <p:cNvSpPr/>
-          <p:nvPr/>
-        </p:nvSpPr>
-        <p:spPr>
-          <a:xfrm>
-            <a:off x="1527048" y="2039112"/>
-            <a:ext cx="2926080" cy="731520"/>
-          </a:xfrm>
-          <a:prstGeom prst="rect">
-            <a:avLst/>
-          </a:prstGeom>
-          <a:noFill/>
-          <a:ln/>
-        </p:spPr>
-        <p:txBody>
-          <a:bodyPr wrap="square" lIns="0" tIns="0" rIns="0" bIns="0" rtlCol="0" anchor="ctr"/>
-          <a:lstStyle/>
-          <a:p>
-            <a:pPr indent="0" marL="0">
-              <a:buNone/>
-            </a:pPr>
-            <a:r>
-              <a:rPr lang="en-US" sz="1700" b="1" dirty="0">
-                <a:solidFill>
-                  <a:srgbClr val="1F2937"/>
-                </a:solidFill>
-                <a:latin typeface="맑은 고딕" pitchFamily="34" charset="0"/>
-                <a:ea typeface="맑은 고딕" pitchFamily="34" charset="-122"/>
-                <a:cs typeface="맑은 고딕" pitchFamily="34" charset="-120"/>
-              </a:rPr>
-              <a:t>연결 조회</a:t>
-            </a:r>
-            <a:endParaRPr lang="en-US" sz="1700" dirty="0"/>
-          </a:p>
-        </p:txBody>
-      </p:sp>
-      <p:sp>
-        <p:nvSpPr>
-          <p:cNvPr id="8" name="Text 6"/>
-          <p:cNvSpPr/>
-          <p:nvPr/>
-        </p:nvSpPr>
-        <p:spPr>
-          <a:xfrm>
-            <a:off x="4498848" y="2039112"/>
-            <a:ext cx="6858000" cy="777240"/>
-          </a:xfrm>
-          <a:prstGeom prst="rect">
-            <a:avLst/>
-          </a:prstGeom>
-          <a:noFill/>
-          <a:ln/>
-        </p:spPr>
-        <p:txBody>
-          <a:bodyPr wrap="square" lIns="0" tIns="0" rIns="0" bIns="0" rtlCol="0" anchor="ctr"/>
-          <a:lstStyle/>
-          <a:p>
-            <a:pPr indent="0" marL="0">
-              <a:lnSpc>
-                <a:spcPct val="105000"/>
-              </a:lnSpc>
-              <a:buNone/>
-            </a:pPr>
-            <a:r>
-              <a:rPr lang="en-US" sz="1300" dirty="0">
+              <a:rPr lang="en-US" sz="1200" dirty="0">
                 <a:solidFill>
                   <a:srgbClr val="6B7280"/>
                 </a:solidFill>
@@ -7490,358 +7892,7 @@
                 <a:ea typeface="맑은 고딕" pitchFamily="34" charset="-122"/>
                 <a:cs typeface="맑은 고딕" pitchFamily="34" charset="-120"/>
               </a:rPr>
-              <a:t>요구사항 1건에 연결된 기능요구사항·비기능요구사항·티켓을 한눈에 조회 (양방향)</a:t>
-            </a:r>
-            <a:endParaRPr lang="en-US" sz="1300" dirty="0"/>
-          </a:p>
-        </p:txBody>
-      </p:sp>
-      <p:sp>
-        <p:nvSpPr>
-          <p:cNvPr id="9" name="Shape 7"/>
-          <p:cNvSpPr/>
-          <p:nvPr/>
-        </p:nvSpPr>
-        <p:spPr>
-          <a:xfrm>
-            <a:off x="566928" y="3154680"/>
-            <a:ext cx="11064240" cy="1097280"/>
-          </a:xfrm>
-          <a:prstGeom prst="roundRect">
-            <a:avLst>
-              <a:gd name="adj" fmla="val 6667"/>
-            </a:avLst>
-          </a:prstGeom>
-          <a:solidFill>
-            <a:srgbClr val="FFFFFF"/>
-          </a:solidFill>
-          <a:ln w="12700">
-            <a:solidFill>
-              <a:srgbClr val="E5E7EB"/>
-            </a:solidFill>
-            <a:prstDash val="solid"/>
-          </a:ln>
-          <a:effectLst>
-            <a:outerShdw sx="100000" sy="100000" kx="0" ky="0" algn="bl" rotWithShape="0" blurRad="127000" dist="50800" dir="5400000">
-              <a:srgbClr val="1E1B4B">
-                <a:alpha val="18000"/>
-              </a:srgbClr>
-            </a:outerShdw>
-          </a:effectLst>
-        </p:spPr>
-      </p:sp>
-      <p:sp>
-        <p:nvSpPr>
-          <p:cNvPr id="10" name="Text 8"/>
-          <p:cNvSpPr/>
-          <p:nvPr/>
-        </p:nvSpPr>
-        <p:spPr>
-          <a:xfrm>
-            <a:off x="822960" y="3447288"/>
-            <a:ext cx="512064" cy="512064"/>
-          </a:xfrm>
-          <a:prstGeom prst="ellipse">
-            <a:avLst/>
-          </a:prstGeom>
-          <a:solidFill>
-            <a:srgbClr val="8B5CF6"/>
-          </a:solidFill>
-          <a:ln/>
-        </p:spPr>
-        <p:txBody>
-          <a:bodyPr wrap="square" lIns="0" tIns="0" rIns="0" bIns="0" rtlCol="0" anchor="ctr"/>
-          <a:lstStyle/>
-          <a:p>
-            <a:pPr algn="ctr" indent="0" marL="0">
-              <a:buNone/>
-            </a:pPr>
-            <a:r>
-              <a:rPr lang="en-US" sz="1800" b="1" dirty="0">
-                <a:solidFill>
-                  <a:srgbClr val="FFFFFF"/>
-                </a:solidFill>
-                <a:latin typeface="맑은 고딕" pitchFamily="34" charset="0"/>
-                <a:ea typeface="맑은 고딕" pitchFamily="34" charset="-122"/>
-                <a:cs typeface="맑은 고딕" pitchFamily="34" charset="-120"/>
-              </a:rPr>
-              <a:t>2</a:t>
-            </a:r>
-            <a:endParaRPr lang="en-US" sz="1800" dirty="0"/>
-          </a:p>
-        </p:txBody>
-      </p:sp>
-      <p:sp>
-        <p:nvSpPr>
-          <p:cNvPr id="11" name="Text 9"/>
-          <p:cNvSpPr/>
-          <p:nvPr/>
-        </p:nvSpPr>
-        <p:spPr>
-          <a:xfrm>
-            <a:off x="1527048" y="3319272"/>
-            <a:ext cx="2926080" cy="731520"/>
-          </a:xfrm>
-          <a:prstGeom prst="rect">
-            <a:avLst/>
-          </a:prstGeom>
-          <a:noFill/>
-          <a:ln/>
-        </p:spPr>
-        <p:txBody>
-          <a:bodyPr wrap="square" lIns="0" tIns="0" rIns="0" bIns="0" rtlCol="0" anchor="ctr"/>
-          <a:lstStyle/>
-          <a:p>
-            <a:pPr indent="0" marL="0">
-              <a:buNone/>
-            </a:pPr>
-            <a:r>
-              <a:rPr lang="en-US" sz="1700" b="1" dirty="0">
-                <a:solidFill>
-                  <a:srgbClr val="1F2937"/>
-                </a:solidFill>
-                <a:latin typeface="맑은 고딕" pitchFamily="34" charset="0"/>
-                <a:ea typeface="맑은 고딕" pitchFamily="34" charset="-122"/>
-                <a:cs typeface="맑은 고딕" pitchFamily="34" charset="-120"/>
-              </a:rPr>
-              <a:t>변경 영향 분석</a:t>
-            </a:r>
-            <a:endParaRPr lang="en-US" sz="1700" dirty="0"/>
-          </a:p>
-        </p:txBody>
-      </p:sp>
-      <p:sp>
-        <p:nvSpPr>
-          <p:cNvPr id="12" name="Text 10"/>
-          <p:cNvSpPr/>
-          <p:nvPr/>
-        </p:nvSpPr>
-        <p:spPr>
-          <a:xfrm>
-            <a:off x="4498848" y="3319272"/>
-            <a:ext cx="6858000" cy="777240"/>
-          </a:xfrm>
-          <a:prstGeom prst="rect">
-            <a:avLst/>
-          </a:prstGeom>
-          <a:noFill/>
-          <a:ln/>
-        </p:spPr>
-        <p:txBody>
-          <a:bodyPr wrap="square" lIns="0" tIns="0" rIns="0" bIns="0" rtlCol="0" anchor="ctr"/>
-          <a:lstStyle/>
-          <a:p>
-            <a:pPr indent="0" marL="0">
-              <a:lnSpc>
-                <a:spcPct val="105000"/>
-              </a:lnSpc>
-              <a:buNone/>
-            </a:pPr>
-            <a:r>
-              <a:rPr lang="en-US" sz="1300" dirty="0">
-                <a:solidFill>
-                  <a:srgbClr val="6B7280"/>
-                </a:solidFill>
-                <a:latin typeface="맑은 고딕" pitchFamily="34" charset="0"/>
-                <a:ea typeface="맑은 고딕" pitchFamily="34" charset="-122"/>
-                <a:cs typeface="맑은 고딕" pitchFamily="34" charset="-120"/>
-              </a:rPr>
-              <a:t>요구사항이 수정되면 영향받는 문서·티켓을 자동으로 표시 → 누락 방지</a:t>
-            </a:r>
-            <a:endParaRPr lang="en-US" sz="1300" dirty="0"/>
-          </a:p>
-        </p:txBody>
-      </p:sp>
-      <p:sp>
-        <p:nvSpPr>
-          <p:cNvPr id="13" name="Shape 11"/>
-          <p:cNvSpPr/>
-          <p:nvPr/>
-        </p:nvSpPr>
-        <p:spPr>
-          <a:xfrm>
-            <a:off x="566928" y="4434840"/>
-            <a:ext cx="11064240" cy="1097280"/>
-          </a:xfrm>
-          <a:prstGeom prst="roundRect">
-            <a:avLst>
-              <a:gd name="adj" fmla="val 6667"/>
-            </a:avLst>
-          </a:prstGeom>
-          <a:solidFill>
-            <a:srgbClr val="EEF2FF"/>
-          </a:solidFill>
-          <a:ln w="12700">
-            <a:solidFill>
-              <a:srgbClr val="E5E7EB"/>
-            </a:solidFill>
-            <a:prstDash val="solid"/>
-          </a:ln>
-          <a:effectLst>
-            <a:outerShdw sx="100000" sy="100000" kx="0" ky="0" algn="bl" rotWithShape="0" blurRad="127000" dist="50800" dir="5400000">
-              <a:srgbClr val="1E1B4B">
-                <a:alpha val="18000"/>
-              </a:srgbClr>
-            </a:outerShdw>
-          </a:effectLst>
-        </p:spPr>
-      </p:sp>
-      <p:sp>
-        <p:nvSpPr>
-          <p:cNvPr id="14" name="Text 12"/>
-          <p:cNvSpPr/>
-          <p:nvPr/>
-        </p:nvSpPr>
-        <p:spPr>
-          <a:xfrm>
-            <a:off x="822960" y="4727448"/>
-            <a:ext cx="512064" cy="512064"/>
-          </a:xfrm>
-          <a:prstGeom prst="ellipse">
-            <a:avLst/>
-          </a:prstGeom>
-          <a:solidFill>
-            <a:srgbClr val="8B5CF6"/>
-          </a:solidFill>
-          <a:ln/>
-        </p:spPr>
-        <p:txBody>
-          <a:bodyPr wrap="square" lIns="0" tIns="0" rIns="0" bIns="0" rtlCol="0" anchor="ctr"/>
-          <a:lstStyle/>
-          <a:p>
-            <a:pPr algn="ctr" indent="0" marL="0">
-              <a:buNone/>
-            </a:pPr>
-            <a:r>
-              <a:rPr lang="en-US" sz="1800" b="1" dirty="0">
-                <a:solidFill>
-                  <a:srgbClr val="FFFFFF"/>
-                </a:solidFill>
-                <a:latin typeface="맑은 고딕" pitchFamily="34" charset="0"/>
-                <a:ea typeface="맑은 고딕" pitchFamily="34" charset="-122"/>
-                <a:cs typeface="맑은 고딕" pitchFamily="34" charset="-120"/>
-              </a:rPr>
-              <a:t>3</a:t>
-            </a:r>
-            <a:endParaRPr lang="en-US" sz="1800" dirty="0"/>
-          </a:p>
-        </p:txBody>
-      </p:sp>
-      <p:sp>
-        <p:nvSpPr>
-          <p:cNvPr id="15" name="Text 13"/>
-          <p:cNvSpPr/>
-          <p:nvPr/>
-        </p:nvSpPr>
-        <p:spPr>
-          <a:xfrm>
-            <a:off x="1527048" y="4599432"/>
-            <a:ext cx="2926080" cy="731520"/>
-          </a:xfrm>
-          <a:prstGeom prst="rect">
-            <a:avLst/>
-          </a:prstGeom>
-          <a:noFill/>
-          <a:ln/>
-        </p:spPr>
-        <p:txBody>
-          <a:bodyPr wrap="square" lIns="0" tIns="0" rIns="0" bIns="0" rtlCol="0" anchor="ctr"/>
-          <a:lstStyle/>
-          <a:p>
-            <a:pPr indent="0" marL="0">
-              <a:buNone/>
-            </a:pPr>
-            <a:r>
-              <a:rPr lang="en-US" sz="1700" b="1" dirty="0">
-                <a:solidFill>
-                  <a:srgbClr val="1F2937"/>
-                </a:solidFill>
-                <a:latin typeface="맑은 고딕" pitchFamily="34" charset="0"/>
-                <a:ea typeface="맑은 고딕" pitchFamily="34" charset="-122"/>
-                <a:cs typeface="맑은 고딕" pitchFamily="34" charset="-120"/>
-              </a:rPr>
-              <a:t>진행상황 / 개발완료</a:t>
-            </a:r>
-            <a:endParaRPr lang="en-US" sz="1700" dirty="0"/>
-          </a:p>
-        </p:txBody>
-      </p:sp>
-      <p:sp>
-        <p:nvSpPr>
-          <p:cNvPr id="16" name="Text 14"/>
-          <p:cNvSpPr/>
-          <p:nvPr/>
-        </p:nvSpPr>
-        <p:spPr>
-          <a:xfrm>
-            <a:off x="4498848" y="4599432"/>
-            <a:ext cx="6858000" cy="777240"/>
-          </a:xfrm>
-          <a:prstGeom prst="rect">
-            <a:avLst/>
-          </a:prstGeom>
-          <a:noFill/>
-          <a:ln/>
-        </p:spPr>
-        <p:txBody>
-          <a:bodyPr wrap="square" lIns="0" tIns="0" rIns="0" bIns="0" rtlCol="0" anchor="ctr"/>
-          <a:lstStyle/>
-          <a:p>
-            <a:pPr indent="0" marL="0">
-              <a:lnSpc>
-                <a:spcPct val="105000"/>
-              </a:lnSpc>
-              <a:buNone/>
-            </a:pPr>
-            <a:r>
-              <a:rPr lang="en-US" sz="1300" dirty="0">
-                <a:solidFill>
-                  <a:srgbClr val="6B7280"/>
-                </a:solidFill>
-                <a:latin typeface="맑은 고딕" pitchFamily="34" charset="0"/>
-                <a:ea typeface="맑은 고딕" pitchFamily="34" charset="-122"/>
-                <a:cs typeface="맑은 고딕" pitchFamily="34" charset="-120"/>
-              </a:rPr>
-              <a:t>요구사항·티켓의 상태(작성중·검토·개발중·완료)와 진행률을 한눈에</a:t>
-            </a:r>
-            <a:endParaRPr lang="en-US" sz="1300" dirty="0"/>
-          </a:p>
-        </p:txBody>
-      </p:sp>
-      <p:sp>
-        <p:nvSpPr>
-          <p:cNvPr id="17" name="Text 15"/>
-          <p:cNvSpPr/>
-          <p:nvPr/>
-        </p:nvSpPr>
-        <p:spPr>
-          <a:xfrm>
-            <a:off x="566928" y="5943600"/>
-            <a:ext cx="10972800" cy="365760"/>
-          </a:xfrm>
-          <a:prstGeom prst="rect">
-            <a:avLst/>
-          </a:prstGeom>
-          <a:noFill/>
-          <a:ln/>
-        </p:spPr>
-        <p:txBody>
-          <a:bodyPr wrap="square" lIns="0" tIns="0" rIns="0" bIns="0" rtlCol="0" anchor="ctr"/>
-          <a:lstStyle/>
-          <a:p>
-            <a:pPr indent="0" marL="0">
-              <a:buNone/>
-            </a:pPr>
-            <a:r>
-              <a:rPr lang="en-US" sz="1200" i="1" dirty="0">
-                <a:solidFill>
-                  <a:srgbClr val="6B7280"/>
-                </a:solidFill>
-                <a:latin typeface="맑은 고딕" pitchFamily="34" charset="0"/>
-                <a:ea typeface="맑은 고딕" pitchFamily="34" charset="-122"/>
-                <a:cs typeface="맑은 고딕" pitchFamily="34" charset="-120"/>
-              </a:rPr>
-              <a:t>※ 기존 “DB 변경관리”를 대체 — 컨셉(고객 요구사항 기반 문서화)에 맞춰 재정의</a:t>
+              <a:t>정해진 양식(템플릿)+사전 프롬프트로 4종 이슈 초안 생성 · Detail Design은 시퀀스 다이어그램까지 자동</a:t>
             </a:r>
             <a:endParaRPr lang="en-US" sz="1200" dirty="0"/>
           </a:p>

--- a/docs/진행공유_요구사항자동화.pptx
+++ b/docs/진행공유_요구사항자동화.pptx
@@ -18,9 +18,11 @@
     <p:sldId id="266" r:id="rId12"/>
     <p:sldId id="267" r:id="rId13"/>
     <p:sldId id="268" r:id="rId14"/>
+    <p:sldId id="269" r:id="rId15"/>
+    <p:sldId id="270" r:id="rId16"/>
   </p:sldIdLst>
   <p:notesMasterIdLst>
-    <p:notesMasterId r:id="rId15"/>
+    <p:notesMasterId r:id="rId17"/>
   </p:notesMasterIdLst>
   <p:sldSz cx="12192000" cy="6858000"/>
   <p:notesSz cx="6858000" cy="12192000"/>
@@ -890,6 +892,182 @@
             <a:fld id="{F7021451-1387-4CA6-816F-3879F97B5CBC}" type="slidenum">
               <a:rPr lang="en-US"/>
               <a:t>13</a:t>
+            </a:fld>
+            <a:endParaRPr lang="en-US"/>
+          </a:p>
+        </p:txBody>
+      </p:sp>
+    </p:spTree>
+    <p:extLst>
+      <p:ext uri="{BB962C8B-B14F-4D97-AF65-F5344CB8AC3E}">
+        <p14:creationId xmlns:p14="http://schemas.microsoft.com/office/powerpoint/2010/main" val="1024086991"/>
+      </p:ext>
+    </p:extLst>
+  </p:cSld>
+  <p:clrMapOvr>
+    <a:masterClrMapping/>
+  </p:clrMapOvr>
+</p:notes>
+</file>
+
+<file path=ppt/notesSlides/notesSlide14.xml><?xml version="1.0" encoding="utf-8"?>
+<p:notes xmlns:a="http://schemas.openxmlformats.org/drawingml/2006/main" xmlns:r="http://schemas.openxmlformats.org/officeDocument/2006/relationships" xmlns:p="http://schemas.openxmlformats.org/presentationml/2006/main">
+  <p:cSld>
+    <p:spTree>
+      <p:nvGrpSpPr>
+        <p:cNvPr id="1" name=""/>
+        <p:cNvGrpSpPr/>
+        <p:nvPr/>
+      </p:nvGrpSpPr>
+      <p:grpSpPr>
+        <a:xfrm>
+          <a:off x="0" y="0"/>
+          <a:ext cx="0" cy="0"/>
+          <a:chOff x="0" y="0"/>
+          <a:chExt cx="0" cy="0"/>
+        </a:xfrm>
+      </p:grpSpPr>
+      <p:sp>
+        <p:nvSpPr>
+          <p:cNvPr id="2" name="Slide Image Placeholder 1"/>
+          <p:cNvSpPr>
+            <a:spLocks noGrp="1" noRot="1" noChangeAspect="1"/>
+          </p:cNvSpPr>
+          <p:nvPr>
+            <p:ph type="sldImg"/>
+          </p:nvPr>
+        </p:nvSpPr>
+        <p:spPr/>
+      </p:sp>
+      <p:sp>
+        <p:nvSpPr>
+          <p:cNvPr id="3" name="Notes Placeholder 2"/>
+          <p:cNvSpPr>
+            <a:spLocks noGrp="1"/>
+          </p:cNvSpPr>
+          <p:nvPr>
+            <p:ph type="body" idx="1"/>
+          </p:nvPr>
+        </p:nvSpPr>
+        <p:spPr/>
+        <p:txBody>
+          <a:bodyPr/>
+          <a:lstStyle/>
+          <a:p>
+            <a:r>
+              <a:rPr lang="en-US" dirty="0"/>
+              <a:t/>
+            </a:r>
+            <a:endParaRPr lang="en-US" dirty="0"/>
+          </a:p>
+        </p:txBody>
+      </p:sp>
+      <p:sp>
+        <p:nvSpPr>
+          <p:cNvPr id="4" name="Slide Number Placeholder 3"/>
+          <p:cNvSpPr>
+            <a:spLocks noGrp="1"/>
+          </p:cNvSpPr>
+          <p:nvPr>
+            <p:ph type="sldNum" sz="quarter" idx="10"/>
+          </p:nvPr>
+        </p:nvSpPr>
+        <p:spPr/>
+        <p:txBody>
+          <a:bodyPr/>
+          <a:lstStyle/>
+          <a:p>
+            <a:fld id="{F7021451-1387-4CA6-816F-3879F97B5CBC}" type="slidenum">
+              <a:rPr lang="en-US"/>
+              <a:t>14</a:t>
+            </a:fld>
+            <a:endParaRPr lang="en-US"/>
+          </a:p>
+        </p:txBody>
+      </p:sp>
+    </p:spTree>
+    <p:extLst>
+      <p:ext uri="{BB962C8B-B14F-4D97-AF65-F5344CB8AC3E}">
+        <p14:creationId xmlns:p14="http://schemas.microsoft.com/office/powerpoint/2010/main" val="1024086991"/>
+      </p:ext>
+    </p:extLst>
+  </p:cSld>
+  <p:clrMapOvr>
+    <a:masterClrMapping/>
+  </p:clrMapOvr>
+</p:notes>
+</file>
+
+<file path=ppt/notesSlides/notesSlide15.xml><?xml version="1.0" encoding="utf-8"?>
+<p:notes xmlns:a="http://schemas.openxmlformats.org/drawingml/2006/main" xmlns:r="http://schemas.openxmlformats.org/officeDocument/2006/relationships" xmlns:p="http://schemas.openxmlformats.org/presentationml/2006/main">
+  <p:cSld>
+    <p:spTree>
+      <p:nvGrpSpPr>
+        <p:cNvPr id="1" name=""/>
+        <p:cNvGrpSpPr/>
+        <p:nvPr/>
+      </p:nvGrpSpPr>
+      <p:grpSpPr>
+        <a:xfrm>
+          <a:off x="0" y="0"/>
+          <a:ext cx="0" cy="0"/>
+          <a:chOff x="0" y="0"/>
+          <a:chExt cx="0" cy="0"/>
+        </a:xfrm>
+      </p:grpSpPr>
+      <p:sp>
+        <p:nvSpPr>
+          <p:cNvPr id="2" name="Slide Image Placeholder 1"/>
+          <p:cNvSpPr>
+            <a:spLocks noGrp="1" noRot="1" noChangeAspect="1"/>
+          </p:cNvSpPr>
+          <p:nvPr>
+            <p:ph type="sldImg"/>
+          </p:nvPr>
+        </p:nvSpPr>
+        <p:spPr/>
+      </p:sp>
+      <p:sp>
+        <p:nvSpPr>
+          <p:cNvPr id="3" name="Notes Placeholder 2"/>
+          <p:cNvSpPr>
+            <a:spLocks noGrp="1"/>
+          </p:cNvSpPr>
+          <p:nvPr>
+            <p:ph type="body" idx="1"/>
+          </p:nvPr>
+        </p:nvSpPr>
+        <p:spPr/>
+        <p:txBody>
+          <a:bodyPr/>
+          <a:lstStyle/>
+          <a:p>
+            <a:r>
+              <a:rPr lang="en-US" dirty="0"/>
+              <a:t/>
+            </a:r>
+            <a:endParaRPr lang="en-US" dirty="0"/>
+          </a:p>
+        </p:txBody>
+      </p:sp>
+      <p:sp>
+        <p:nvSpPr>
+          <p:cNvPr id="4" name="Slide Number Placeholder 3"/>
+          <p:cNvSpPr>
+            <a:spLocks noGrp="1"/>
+          </p:cNvSpPr>
+          <p:nvPr>
+            <p:ph type="sldNum" sz="quarter" idx="10"/>
+          </p:nvPr>
+        </p:nvSpPr>
+        <p:spPr/>
+        <p:txBody>
+          <a:bodyPr/>
+          <a:lstStyle/>
+          <a:p>
+            <a:fld id="{F7021451-1387-4CA6-816F-3879F97B5CBC}" type="slidenum">
+              <a:rPr lang="en-US"/>
+              <a:t>15</a:t>
             </a:fld>
             <a:endParaRPr lang="en-US"/>
           </a:p>
@@ -2229,7 +2407,7 @@
                 <a:ea typeface="맑은 고딕" pitchFamily="34" charset="-122"/>
                 <a:cs typeface="맑은 고딕" pitchFamily="34" charset="-120"/>
               </a:rPr>
-              <a:t>핵심 기능 3</a:t>
+              <a:t>핵심 기능 2 · 도출 예시 ①</a:t>
             </a:r>
             <a:endParaRPr lang="en-US" sz="1200" dirty="0"/>
           </a:p>
@@ -2268,31 +2446,51 @@
                 <a:ea typeface="맑은 고딕" pitchFamily="34" charset="-122"/>
                 <a:cs typeface="맑은 고딕" pitchFamily="34" charset="-120"/>
               </a:rPr>
-              <a:t>문서 추적성</a:t>
+              <a:t>요구사항 하나 → 기능 · 비기능 요구사항</a:t>
             </a:r>
             <a:endParaRPr lang="en-US" sz="3000" dirty="0"/>
           </a:p>
         </p:txBody>
       </p:sp>
-      <p:sp>
-        <p:nvSpPr>
-          <p:cNvPr id="4" name="Text 2"/>
-          <p:cNvSpPr/>
-          <p:nvPr/>
-        </p:nvSpPr>
-        <p:spPr>
-          <a:xfrm>
-            <a:off x="10424160" y="822960"/>
-            <a:ext cx="1737360" cy="310896"/>
-          </a:xfrm>
-          <a:prstGeom prst="roundRect">
-            <a:avLst>
-              <a:gd name="adj" fmla="val 47059"/>
-            </a:avLst>
-          </a:prstGeom>
-          <a:solidFill>
-            <a:srgbClr val="FEF3C7"/>
-          </a:solidFill>
+      <p:pic>
+        <p:nvPicPr>
+          <p:cNvPr id="4" name="Image 0" descr="/home/user/semes-superrookie/docs/img/ppt-derive-1.png">    </p:cNvPr>
+          <p:cNvPicPr>
+            <a:picLocks noChangeAspect="1"/>
+          </p:cNvPicPr>
+          <p:nvPr/>
+        </p:nvPicPr>
+        <p:blipFill>
+          <a:blip r:embed="rId1"/>
+          <a:stretch>
+            <a:fillRect/>
+          </a:stretch>
+        </p:blipFill>
+        <p:spPr>
+          <a:xfrm>
+            <a:off x="836676" y="1828800"/>
+            <a:ext cx="10515600" cy="3927348"/>
+          </a:xfrm>
+          <a:prstGeom prst="rect">
+            <a:avLst/>
+          </a:prstGeom>
+        </p:spPr>
+      </p:pic>
+      <p:sp>
+        <p:nvSpPr>
+          <p:cNvPr id="5" name="Text 2"/>
+          <p:cNvSpPr/>
+          <p:nvPr/>
+        </p:nvSpPr>
+        <p:spPr>
+          <a:xfrm>
+            <a:off x="566928" y="5943600"/>
+            <a:ext cx="11064240" cy="365760"/>
+          </a:xfrm>
+          <a:prstGeom prst="rect">
+            <a:avLst/>
+          </a:prstGeom>
+          <a:noFill/>
           <a:ln/>
         </p:spPr>
         <p:txBody>
@@ -2303,163 +2501,7 @@
               <a:buNone/>
             </a:pPr>
             <a:r>
-              <a:rPr lang="en-US" sz="1100" b="1" dirty="0">
-                <a:solidFill>
-                  <a:srgbClr val="B45309"/>
-                </a:solidFill>
-                <a:latin typeface="맑은 고딕" pitchFamily="34" charset="0"/>
-                <a:ea typeface="맑은 고딕" pitchFamily="34" charset="-122"/>
-                <a:cs typeface="맑은 고딕" pitchFamily="34" charset="-120"/>
-              </a:rPr>
-              <a:t>개발 예정</a:t>
-            </a:r>
-            <a:endParaRPr lang="en-US" sz="1100" dirty="0"/>
-          </a:p>
-        </p:txBody>
-      </p:sp>
-      <p:sp>
-        <p:nvSpPr>
-          <p:cNvPr id="5" name="Shape 3"/>
-          <p:cNvSpPr/>
-          <p:nvPr/>
-        </p:nvSpPr>
-        <p:spPr>
-          <a:xfrm>
-            <a:off x="566928" y="1874520"/>
-            <a:ext cx="11064240" cy="1097280"/>
-          </a:xfrm>
-          <a:prstGeom prst="roundRect">
-            <a:avLst>
-              <a:gd name="adj" fmla="val 6667"/>
-            </a:avLst>
-          </a:prstGeom>
-          <a:solidFill>
-            <a:srgbClr val="FFFFFF"/>
-          </a:solidFill>
-          <a:ln w="12700">
-            <a:solidFill>
-              <a:srgbClr val="E5E7EB"/>
-            </a:solidFill>
-            <a:prstDash val="solid"/>
-          </a:ln>
-          <a:effectLst>
-            <a:outerShdw sx="100000" sy="100000" kx="0" ky="0" algn="bl" rotWithShape="0" blurRad="127000" dist="50800" dir="5400000">
-              <a:srgbClr val="1E1B4B">
-                <a:alpha val="18000"/>
-              </a:srgbClr>
-            </a:outerShdw>
-          </a:effectLst>
-        </p:spPr>
-      </p:sp>
-      <p:sp>
-        <p:nvSpPr>
-          <p:cNvPr id="6" name="Text 4"/>
-          <p:cNvSpPr/>
-          <p:nvPr/>
-        </p:nvSpPr>
-        <p:spPr>
-          <a:xfrm>
-            <a:off x="822960" y="2167128"/>
-            <a:ext cx="512064" cy="512064"/>
-          </a:xfrm>
-          <a:prstGeom prst="ellipse">
-            <a:avLst/>
-          </a:prstGeom>
-          <a:solidFill>
-            <a:srgbClr val="8B5CF6"/>
-          </a:solidFill>
-          <a:ln/>
-        </p:spPr>
-        <p:txBody>
-          <a:bodyPr wrap="square" lIns="0" tIns="0" rIns="0" bIns="0" rtlCol="0" anchor="ctr"/>
-          <a:lstStyle/>
-          <a:p>
-            <a:pPr algn="ctr" indent="0" marL="0">
-              <a:buNone/>
-            </a:pPr>
-            <a:r>
-              <a:rPr lang="en-US" sz="1800" b="1" dirty="0">
-                <a:solidFill>
-                  <a:srgbClr val="FFFFFF"/>
-                </a:solidFill>
-                <a:latin typeface="맑은 고딕" pitchFamily="34" charset="0"/>
-                <a:ea typeface="맑은 고딕" pitchFamily="34" charset="-122"/>
-                <a:cs typeface="맑은 고딕" pitchFamily="34" charset="-120"/>
-              </a:rPr>
-              <a:t>1</a:t>
-            </a:r>
-            <a:endParaRPr lang="en-US" sz="1800" dirty="0"/>
-          </a:p>
-        </p:txBody>
-      </p:sp>
-      <p:sp>
-        <p:nvSpPr>
-          <p:cNvPr id="7" name="Text 5"/>
-          <p:cNvSpPr/>
-          <p:nvPr/>
-        </p:nvSpPr>
-        <p:spPr>
-          <a:xfrm>
-            <a:off x="1527048" y="2039112"/>
-            <a:ext cx="2926080" cy="731520"/>
-          </a:xfrm>
-          <a:prstGeom prst="rect">
-            <a:avLst/>
-          </a:prstGeom>
-          <a:noFill/>
-          <a:ln/>
-        </p:spPr>
-        <p:txBody>
-          <a:bodyPr wrap="square" lIns="0" tIns="0" rIns="0" bIns="0" rtlCol="0" anchor="ctr"/>
-          <a:lstStyle/>
-          <a:p>
-            <a:pPr indent="0" marL="0">
-              <a:buNone/>
-            </a:pPr>
-            <a:r>
-              <a:rPr lang="en-US" sz="1700" b="1" dirty="0">
-                <a:solidFill>
-                  <a:srgbClr val="1F2937"/>
-                </a:solidFill>
-                <a:latin typeface="맑은 고딕" pitchFamily="34" charset="0"/>
-                <a:ea typeface="맑은 고딕" pitchFamily="34" charset="-122"/>
-                <a:cs typeface="맑은 고딕" pitchFamily="34" charset="-120"/>
-              </a:rPr>
-              <a:t>연결 조회</a:t>
-            </a:r>
-            <a:endParaRPr lang="en-US" sz="1700" dirty="0"/>
-          </a:p>
-        </p:txBody>
-      </p:sp>
-      <p:sp>
-        <p:nvSpPr>
-          <p:cNvPr id="8" name="Text 6"/>
-          <p:cNvSpPr/>
-          <p:nvPr/>
-        </p:nvSpPr>
-        <p:spPr>
-          <a:xfrm>
-            <a:off x="4498848" y="2039112"/>
-            <a:ext cx="6858000" cy="777240"/>
-          </a:xfrm>
-          <a:prstGeom prst="rect">
-            <a:avLst/>
-          </a:prstGeom>
-          <a:noFill/>
-          <a:ln/>
-        </p:spPr>
-        <p:txBody>
-          <a:bodyPr wrap="square" lIns="0" tIns="0" rIns="0" bIns="0" rtlCol="0" anchor="ctr"/>
-          <a:lstStyle/>
-          <a:p>
-            <a:pPr indent="0" marL="0">
-              <a:lnSpc>
-                <a:spcPct val="105000"/>
-              </a:lnSpc>
-              <a:buNone/>
-            </a:pPr>
-            <a:r>
-              <a:rPr lang="en-US" sz="1300" dirty="0">
+              <a:rPr lang="en-US" sz="1250" dirty="0">
                 <a:solidFill>
                   <a:srgbClr val="6B7280"/>
                 </a:solidFill>
@@ -2467,360 +2509,9 @@
                 <a:ea typeface="맑은 고딕" pitchFamily="34" charset="-122"/>
                 <a:cs typeface="맑은 고딕" pitchFamily="34" charset="-120"/>
               </a:rPr>
-              <a:t>요구사항 1건에 연결된 기능요구사항·비기능요구사항·티켓을 한눈에 조회 (양방향)</a:t>
-            </a:r>
-            <a:endParaRPr lang="en-US" sz="1300" dirty="0"/>
-          </a:p>
-        </p:txBody>
-      </p:sp>
-      <p:sp>
-        <p:nvSpPr>
-          <p:cNvPr id="9" name="Shape 7"/>
-          <p:cNvSpPr/>
-          <p:nvPr/>
-        </p:nvSpPr>
-        <p:spPr>
-          <a:xfrm>
-            <a:off x="566928" y="3154680"/>
-            <a:ext cx="11064240" cy="1097280"/>
-          </a:xfrm>
-          <a:prstGeom prst="roundRect">
-            <a:avLst>
-              <a:gd name="adj" fmla="val 6667"/>
-            </a:avLst>
-          </a:prstGeom>
-          <a:solidFill>
-            <a:srgbClr val="FFFFFF"/>
-          </a:solidFill>
-          <a:ln w="12700">
-            <a:solidFill>
-              <a:srgbClr val="E5E7EB"/>
-            </a:solidFill>
-            <a:prstDash val="solid"/>
-          </a:ln>
-          <a:effectLst>
-            <a:outerShdw sx="100000" sy="100000" kx="0" ky="0" algn="bl" rotWithShape="0" blurRad="127000" dist="50800" dir="5400000">
-              <a:srgbClr val="1E1B4B">
-                <a:alpha val="18000"/>
-              </a:srgbClr>
-            </a:outerShdw>
-          </a:effectLst>
-        </p:spPr>
-      </p:sp>
-      <p:sp>
-        <p:nvSpPr>
-          <p:cNvPr id="10" name="Text 8"/>
-          <p:cNvSpPr/>
-          <p:nvPr/>
-        </p:nvSpPr>
-        <p:spPr>
-          <a:xfrm>
-            <a:off x="822960" y="3447288"/>
-            <a:ext cx="512064" cy="512064"/>
-          </a:xfrm>
-          <a:prstGeom prst="ellipse">
-            <a:avLst/>
-          </a:prstGeom>
-          <a:solidFill>
-            <a:srgbClr val="8B5CF6"/>
-          </a:solidFill>
-          <a:ln/>
-        </p:spPr>
-        <p:txBody>
-          <a:bodyPr wrap="square" lIns="0" tIns="0" rIns="0" bIns="0" rtlCol="0" anchor="ctr"/>
-          <a:lstStyle/>
-          <a:p>
-            <a:pPr algn="ctr" indent="0" marL="0">
-              <a:buNone/>
-            </a:pPr>
-            <a:r>
-              <a:rPr lang="en-US" sz="1800" b="1" dirty="0">
-                <a:solidFill>
-                  <a:srgbClr val="FFFFFF"/>
-                </a:solidFill>
-                <a:latin typeface="맑은 고딕" pitchFamily="34" charset="0"/>
-                <a:ea typeface="맑은 고딕" pitchFamily="34" charset="-122"/>
-                <a:cs typeface="맑은 고딕" pitchFamily="34" charset="-120"/>
-              </a:rPr>
-              <a:t>2</a:t>
-            </a:r>
-            <a:endParaRPr lang="en-US" sz="1800" dirty="0"/>
-          </a:p>
-        </p:txBody>
-      </p:sp>
-      <p:sp>
-        <p:nvSpPr>
-          <p:cNvPr id="11" name="Text 9"/>
-          <p:cNvSpPr/>
-          <p:nvPr/>
-        </p:nvSpPr>
-        <p:spPr>
-          <a:xfrm>
-            <a:off x="1527048" y="3319272"/>
-            <a:ext cx="2926080" cy="731520"/>
-          </a:xfrm>
-          <a:prstGeom prst="rect">
-            <a:avLst/>
-          </a:prstGeom>
-          <a:noFill/>
-          <a:ln/>
-        </p:spPr>
-        <p:txBody>
-          <a:bodyPr wrap="square" lIns="0" tIns="0" rIns="0" bIns="0" rtlCol="0" anchor="ctr"/>
-          <a:lstStyle/>
-          <a:p>
-            <a:pPr indent="0" marL="0">
-              <a:buNone/>
-            </a:pPr>
-            <a:r>
-              <a:rPr lang="en-US" sz="1700" b="1" dirty="0">
-                <a:solidFill>
-                  <a:srgbClr val="1F2937"/>
-                </a:solidFill>
-                <a:latin typeface="맑은 고딕" pitchFamily="34" charset="0"/>
-                <a:ea typeface="맑은 고딕" pitchFamily="34" charset="-122"/>
-                <a:cs typeface="맑은 고딕" pitchFamily="34" charset="-120"/>
-              </a:rPr>
-              <a:t>변경 영향 분석</a:t>
-            </a:r>
-            <a:endParaRPr lang="en-US" sz="1700" dirty="0"/>
-          </a:p>
-        </p:txBody>
-      </p:sp>
-      <p:sp>
-        <p:nvSpPr>
-          <p:cNvPr id="12" name="Text 10"/>
-          <p:cNvSpPr/>
-          <p:nvPr/>
-        </p:nvSpPr>
-        <p:spPr>
-          <a:xfrm>
-            <a:off x="4498848" y="3319272"/>
-            <a:ext cx="6858000" cy="777240"/>
-          </a:xfrm>
-          <a:prstGeom prst="rect">
-            <a:avLst/>
-          </a:prstGeom>
-          <a:noFill/>
-          <a:ln/>
-        </p:spPr>
-        <p:txBody>
-          <a:bodyPr wrap="square" lIns="0" tIns="0" rIns="0" bIns="0" rtlCol="0" anchor="ctr"/>
-          <a:lstStyle/>
-          <a:p>
-            <a:pPr indent="0" marL="0">
-              <a:lnSpc>
-                <a:spcPct val="105000"/>
-              </a:lnSpc>
-              <a:buNone/>
-            </a:pPr>
-            <a:r>
-              <a:rPr lang="en-US" sz="1300" dirty="0">
-                <a:solidFill>
-                  <a:srgbClr val="6B7280"/>
-                </a:solidFill>
-                <a:latin typeface="맑은 고딕" pitchFamily="34" charset="0"/>
-                <a:ea typeface="맑은 고딕" pitchFamily="34" charset="-122"/>
-                <a:cs typeface="맑은 고딕" pitchFamily="34" charset="-120"/>
-              </a:rPr>
-              <a:t>요구사항이 수정되면 영향받는 문서·티켓을 자동으로 표시 → 누락 방지</a:t>
-            </a:r>
-            <a:endParaRPr lang="en-US" sz="1300" dirty="0"/>
-          </a:p>
-        </p:txBody>
-      </p:sp>
-      <p:sp>
-        <p:nvSpPr>
-          <p:cNvPr id="13" name="Shape 11"/>
-          <p:cNvSpPr/>
-          <p:nvPr/>
-        </p:nvSpPr>
-        <p:spPr>
-          <a:xfrm>
-            <a:off x="566928" y="4434840"/>
-            <a:ext cx="11064240" cy="1097280"/>
-          </a:xfrm>
-          <a:prstGeom prst="roundRect">
-            <a:avLst>
-              <a:gd name="adj" fmla="val 6667"/>
-            </a:avLst>
-          </a:prstGeom>
-          <a:solidFill>
-            <a:srgbClr val="EEF2FF"/>
-          </a:solidFill>
-          <a:ln w="12700">
-            <a:solidFill>
-              <a:srgbClr val="E5E7EB"/>
-            </a:solidFill>
-            <a:prstDash val="solid"/>
-          </a:ln>
-          <a:effectLst>
-            <a:outerShdw sx="100000" sy="100000" kx="0" ky="0" algn="bl" rotWithShape="0" blurRad="127000" dist="50800" dir="5400000">
-              <a:srgbClr val="1E1B4B">
-                <a:alpha val="18000"/>
-              </a:srgbClr>
-            </a:outerShdw>
-          </a:effectLst>
-        </p:spPr>
-      </p:sp>
-      <p:sp>
-        <p:nvSpPr>
-          <p:cNvPr id="14" name="Text 12"/>
-          <p:cNvSpPr/>
-          <p:nvPr/>
-        </p:nvSpPr>
-        <p:spPr>
-          <a:xfrm>
-            <a:off x="822960" y="4727448"/>
-            <a:ext cx="512064" cy="512064"/>
-          </a:xfrm>
-          <a:prstGeom prst="ellipse">
-            <a:avLst/>
-          </a:prstGeom>
-          <a:solidFill>
-            <a:srgbClr val="8B5CF6"/>
-          </a:solidFill>
-          <a:ln/>
-        </p:spPr>
-        <p:txBody>
-          <a:bodyPr wrap="square" lIns="0" tIns="0" rIns="0" bIns="0" rtlCol="0" anchor="ctr"/>
-          <a:lstStyle/>
-          <a:p>
-            <a:pPr algn="ctr" indent="0" marL="0">
-              <a:buNone/>
-            </a:pPr>
-            <a:r>
-              <a:rPr lang="en-US" sz="1800" b="1" dirty="0">
-                <a:solidFill>
-                  <a:srgbClr val="FFFFFF"/>
-                </a:solidFill>
-                <a:latin typeface="맑은 고딕" pitchFamily="34" charset="0"/>
-                <a:ea typeface="맑은 고딕" pitchFamily="34" charset="-122"/>
-                <a:cs typeface="맑은 고딕" pitchFamily="34" charset="-120"/>
-              </a:rPr>
-              <a:t>3</a:t>
-            </a:r>
-            <a:endParaRPr lang="en-US" sz="1800" dirty="0"/>
-          </a:p>
-        </p:txBody>
-      </p:sp>
-      <p:sp>
-        <p:nvSpPr>
-          <p:cNvPr id="15" name="Text 13"/>
-          <p:cNvSpPr/>
-          <p:nvPr/>
-        </p:nvSpPr>
-        <p:spPr>
-          <a:xfrm>
-            <a:off x="1527048" y="4599432"/>
-            <a:ext cx="2926080" cy="731520"/>
-          </a:xfrm>
-          <a:prstGeom prst="rect">
-            <a:avLst/>
-          </a:prstGeom>
-          <a:noFill/>
-          <a:ln/>
-        </p:spPr>
-        <p:txBody>
-          <a:bodyPr wrap="square" lIns="0" tIns="0" rIns="0" bIns="0" rtlCol="0" anchor="ctr"/>
-          <a:lstStyle/>
-          <a:p>
-            <a:pPr indent="0" marL="0">
-              <a:buNone/>
-            </a:pPr>
-            <a:r>
-              <a:rPr lang="en-US" sz="1700" b="1" dirty="0">
-                <a:solidFill>
-                  <a:srgbClr val="1F2937"/>
-                </a:solidFill>
-                <a:latin typeface="맑은 고딕" pitchFamily="34" charset="0"/>
-                <a:ea typeface="맑은 고딕" pitchFamily="34" charset="-122"/>
-                <a:cs typeface="맑은 고딕" pitchFamily="34" charset="-120"/>
-              </a:rPr>
-              <a:t>진행상황 / 개발완료</a:t>
-            </a:r>
-            <a:endParaRPr lang="en-US" sz="1700" dirty="0"/>
-          </a:p>
-        </p:txBody>
-      </p:sp>
-      <p:sp>
-        <p:nvSpPr>
-          <p:cNvPr id="16" name="Text 14"/>
-          <p:cNvSpPr/>
-          <p:nvPr/>
-        </p:nvSpPr>
-        <p:spPr>
-          <a:xfrm>
-            <a:off x="4498848" y="4599432"/>
-            <a:ext cx="6858000" cy="777240"/>
-          </a:xfrm>
-          <a:prstGeom prst="rect">
-            <a:avLst/>
-          </a:prstGeom>
-          <a:noFill/>
-          <a:ln/>
-        </p:spPr>
-        <p:txBody>
-          <a:bodyPr wrap="square" lIns="0" tIns="0" rIns="0" bIns="0" rtlCol="0" anchor="ctr"/>
-          <a:lstStyle/>
-          <a:p>
-            <a:pPr indent="0" marL="0">
-              <a:lnSpc>
-                <a:spcPct val="105000"/>
-              </a:lnSpc>
-              <a:buNone/>
-            </a:pPr>
-            <a:r>
-              <a:rPr lang="en-US" sz="1300" dirty="0">
-                <a:solidFill>
-                  <a:srgbClr val="6B7280"/>
-                </a:solidFill>
-                <a:latin typeface="맑은 고딕" pitchFamily="34" charset="0"/>
-                <a:ea typeface="맑은 고딕" pitchFamily="34" charset="-122"/>
-                <a:cs typeface="맑은 고딕" pitchFamily="34" charset="-120"/>
-              </a:rPr>
-              <a:t>요구사항·티켓의 상태(작성중·검토·개발중·완료)와 진행률을 한눈에</a:t>
-            </a:r>
-            <a:endParaRPr lang="en-US" sz="1300" dirty="0"/>
-          </a:p>
-        </p:txBody>
-      </p:sp>
-      <p:sp>
-        <p:nvSpPr>
-          <p:cNvPr id="17" name="Text 15"/>
-          <p:cNvSpPr/>
-          <p:nvPr/>
-        </p:nvSpPr>
-        <p:spPr>
-          <a:xfrm>
-            <a:off x="566928" y="5943600"/>
-            <a:ext cx="10972800" cy="365760"/>
-          </a:xfrm>
-          <a:prstGeom prst="rect">
-            <a:avLst/>
-          </a:prstGeom>
-          <a:noFill/>
-          <a:ln/>
-        </p:spPr>
-        <p:txBody>
-          <a:bodyPr wrap="square" lIns="0" tIns="0" rIns="0" bIns="0" rtlCol="0" anchor="ctr"/>
-          <a:lstStyle/>
-          <a:p>
-            <a:pPr indent="0" marL="0">
-              <a:buNone/>
-            </a:pPr>
-            <a:r>
-              <a:rPr lang="en-US" sz="1200" i="1" dirty="0">
-                <a:solidFill>
-                  <a:srgbClr val="6B7280"/>
-                </a:solidFill>
-                <a:latin typeface="맑은 고딕" pitchFamily="34" charset="0"/>
-                <a:ea typeface="맑은 고딕" pitchFamily="34" charset="-122"/>
-                <a:cs typeface="맑은 고딕" pitchFamily="34" charset="-120"/>
-              </a:rPr>
-              <a:t>※ 기존 “DB 변경관리”를 대체 — 컨셉(고객 요구사항 기반 문서화)에 맞춰 재정의</a:t>
-            </a:r>
-            <a:endParaRPr lang="en-US" sz="1200" dirty="0"/>
+              <a:t>req-tf-01(신규 태스크 생성) 한 건에서 기능요구사항 6건 · 비기능요구사항 5건을 자동 도출 (AI 초안)</a:t>
+            </a:r>
+            <a:endParaRPr lang="en-US" sz="1250" dirty="0"/>
           </a:p>
         </p:txBody>
       </p:sp>
@@ -2889,7 +2580,7 @@
                 <a:ea typeface="맑은 고딕" pitchFamily="34" charset="-122"/>
                 <a:cs typeface="맑은 고딕" pitchFamily="34" charset="-120"/>
               </a:rPr>
-              <a:t>AI</a:t>
+              <a:t>핵심 기능 2 · 도출 예시 ②</a:t>
             </a:r>
             <a:endParaRPr lang="en-US" sz="1200" dirty="0"/>
           </a:p>
@@ -2928,452 +2619,72 @@
                 <a:ea typeface="맑은 고딕" pitchFamily="34" charset="-122"/>
                 <a:cs typeface="맑은 고딕" pitchFamily="34" charset="-120"/>
               </a:rPr>
-              <a:t>AI — 두 엔진 비교</a:t>
+              <a:t>요구사항 하나 → Jira 티켓 4종</a:t>
             </a:r>
             <a:endParaRPr lang="en-US" sz="3000" dirty="0"/>
           </a:p>
         </p:txBody>
       </p:sp>
-      <p:sp>
-        <p:nvSpPr>
-          <p:cNvPr id="4" name="Shape 2"/>
-          <p:cNvSpPr/>
-          <p:nvPr/>
-        </p:nvSpPr>
-        <p:spPr>
-          <a:xfrm>
-            <a:off x="566928" y="1783080"/>
-            <a:ext cx="5440680" cy="2697480"/>
-          </a:xfrm>
-          <a:prstGeom prst="roundRect">
-            <a:avLst>
-              <a:gd name="adj" fmla="val 3390"/>
-            </a:avLst>
-          </a:prstGeom>
-          <a:solidFill>
-            <a:srgbClr val="EEF2FF"/>
-          </a:solidFill>
-          <a:ln w="12700">
-            <a:solidFill>
-              <a:srgbClr val="C7D2FE"/>
-            </a:solidFill>
-            <a:prstDash val="solid"/>
-          </a:ln>
-        </p:spPr>
-      </p:sp>
-      <p:sp>
-        <p:nvSpPr>
-          <p:cNvPr id="5" name="Text 3"/>
-          <p:cNvSpPr/>
-          <p:nvPr/>
-        </p:nvSpPr>
-        <p:spPr>
-          <a:xfrm>
-            <a:off x="886968" y="2011680"/>
-            <a:ext cx="4846320" cy="457200"/>
-          </a:xfrm>
-          <a:prstGeom prst="rect">
-            <a:avLst/>
-          </a:prstGeom>
-          <a:noFill/>
-          <a:ln/>
-        </p:spPr>
-        <p:txBody>
-          <a:bodyPr wrap="square" lIns="0" tIns="0" rIns="0" bIns="0" rtlCol="0" anchor="ctr"/>
-          <a:lstStyle/>
-          <a:p>
-            <a:pPr indent="0" marL="0">
-              <a:buNone/>
-            </a:pPr>
-            <a:r>
-              <a:rPr lang="en-US" sz="1900" b="1" dirty="0">
-                <a:solidFill>
-                  <a:srgbClr val="6366F1"/>
-                </a:solidFill>
-                <a:latin typeface="맑은 고딕" pitchFamily="34" charset="0"/>
-                <a:ea typeface="맑은 고딕" pitchFamily="34" charset="-122"/>
-                <a:cs typeface="맑은 고딕" pitchFamily="34" charset="-120"/>
-              </a:rPr>
-              <a:t>로컬 Qwen3-8B</a:t>
-            </a:r>
-            <a:endParaRPr lang="en-US" sz="1900" dirty="0"/>
-          </a:p>
-        </p:txBody>
-      </p:sp>
-      <p:sp>
-        <p:nvSpPr>
-          <p:cNvPr id="6" name="Text 4"/>
-          <p:cNvSpPr/>
-          <p:nvPr/>
-        </p:nvSpPr>
-        <p:spPr>
-          <a:xfrm>
-            <a:off x="932688" y="2606040"/>
-            <a:ext cx="4754880" cy="1737360"/>
-          </a:xfrm>
-          <a:prstGeom prst="rect">
-            <a:avLst/>
-          </a:prstGeom>
-          <a:noFill/>
-          <a:ln/>
-        </p:spPr>
-        <p:txBody>
-          <a:bodyPr wrap="square" lIns="0" tIns="0" rIns="0" bIns="0" rtlCol="0" anchor="ctr"/>
-          <a:lstStyle/>
-          <a:p>
-            <a:pPr marL="342900" indent="-342900">
-              <a:spcAft>
-                <a:spcPts val="700"/>
-              </a:spcAft>
-              <a:buSzPct val="100000"/>
-              <a:buChar char="•"/>
-            </a:pPr>
-            <a:r>
-              <a:rPr lang="en-US" sz="1300" dirty="0">
-                <a:solidFill>
-                  <a:srgbClr val="1F2937"/>
-                </a:solidFill>
-                <a:latin typeface="맑은 고딕" pitchFamily="34" charset="0"/>
-                <a:ea typeface="맑은 고딕" pitchFamily="34" charset="-122"/>
-                <a:cs typeface="맑은 고딕" pitchFamily="34" charset="-120"/>
-              </a:rPr>
-              <a:t>내 워크스테이션(P4000 8GB)에서 직접</a:t>
-            </a:r>
-            <a:endParaRPr lang="en-US" sz="1300" dirty="0"/>
-          </a:p>
-          <a:p>
-            <a:pPr marL="342900" indent="-342900">
-              <a:spcAft>
-                <a:spcPts val="700"/>
-              </a:spcAft>
-              <a:buSzPct val="100000"/>
-              <a:buChar char="•"/>
-            </a:pPr>
-            <a:r>
-              <a:rPr lang="en-US" sz="1300" dirty="0">
-                <a:solidFill>
-                  <a:srgbClr val="1F2937"/>
-                </a:solidFill>
-                <a:latin typeface="맑은 고딕" pitchFamily="34" charset="0"/>
-                <a:ea typeface="맑은 고딕" pitchFamily="34" charset="-122"/>
-                <a:cs typeface="맑은 고딕" pitchFamily="34" charset="-120"/>
-              </a:rPr>
-              <a:t>8B 모델 · GGUF 양자화 Q5_K_M(≈5.85GB)</a:t>
-            </a:r>
-            <a:endParaRPr lang="en-US" sz="1300" dirty="0"/>
-          </a:p>
-          <a:p>
-            <a:pPr marL="342900" indent="-342900">
-              <a:spcAft>
-                <a:spcPts val="700"/>
-              </a:spcAft>
-              <a:buSzPct val="100000"/>
-              <a:buChar char="•"/>
-            </a:pPr>
-            <a:r>
-              <a:rPr lang="en-US" sz="1300" dirty="0">
-                <a:solidFill>
-                  <a:srgbClr val="1F2937"/>
-                </a:solidFill>
-                <a:latin typeface="맑은 고딕" pitchFamily="34" charset="0"/>
-                <a:ea typeface="맑은 고딕" pitchFamily="34" charset="-122"/>
-                <a:cs typeface="맑은 고딕" pitchFamily="34" charset="-120"/>
-              </a:rPr>
-              <a:t>오프라인 자립 · 한국어 강점</a:t>
-            </a:r>
-            <a:endParaRPr lang="en-US" sz="1300" dirty="0"/>
-          </a:p>
-        </p:txBody>
-      </p:sp>
-      <p:sp>
-        <p:nvSpPr>
-          <p:cNvPr id="7" name="Shape 5"/>
-          <p:cNvSpPr/>
-          <p:nvPr/>
-        </p:nvSpPr>
-        <p:spPr>
-          <a:xfrm>
-            <a:off x="6327648" y="1783080"/>
-            <a:ext cx="5440680" cy="2697480"/>
-          </a:xfrm>
-          <a:prstGeom prst="roundRect">
-            <a:avLst>
-              <a:gd name="adj" fmla="val 3390"/>
-            </a:avLst>
-          </a:prstGeom>
-          <a:solidFill>
-            <a:srgbClr val="F5F3FF"/>
-          </a:solidFill>
-          <a:ln w="12700">
-            <a:solidFill>
-              <a:srgbClr val="DDD6FE"/>
-            </a:solidFill>
-            <a:prstDash val="solid"/>
-          </a:ln>
-        </p:spPr>
-      </p:sp>
-      <p:sp>
-        <p:nvSpPr>
-          <p:cNvPr id="8" name="Text 6"/>
-          <p:cNvSpPr/>
-          <p:nvPr/>
-        </p:nvSpPr>
-        <p:spPr>
-          <a:xfrm>
-            <a:off x="6647688" y="2011680"/>
-            <a:ext cx="4846320" cy="457200"/>
-          </a:xfrm>
-          <a:prstGeom prst="rect">
-            <a:avLst/>
-          </a:prstGeom>
-          <a:noFill/>
-          <a:ln/>
-        </p:spPr>
-        <p:txBody>
-          <a:bodyPr wrap="square" lIns="0" tIns="0" rIns="0" bIns="0" rtlCol="0" anchor="ctr"/>
-          <a:lstStyle/>
-          <a:p>
-            <a:pPr indent="0" marL="0">
-              <a:buNone/>
-            </a:pPr>
-            <a:r>
-              <a:rPr lang="en-US" sz="1900" b="1" dirty="0">
-                <a:solidFill>
-                  <a:srgbClr val="8B5CF6"/>
-                </a:solidFill>
-                <a:latin typeface="맑은 고딕" pitchFamily="34" charset="0"/>
-                <a:ea typeface="맑은 고딕" pitchFamily="34" charset="-122"/>
-                <a:cs typeface="맑은 고딕" pitchFamily="34" charset="-120"/>
-              </a:rPr>
-              <a:t>사내 GPT-OSS-120B</a:t>
-            </a:r>
-            <a:endParaRPr lang="en-US" sz="1900" dirty="0"/>
-          </a:p>
-        </p:txBody>
-      </p:sp>
-      <p:sp>
-        <p:nvSpPr>
-          <p:cNvPr id="9" name="Text 7"/>
-          <p:cNvSpPr/>
-          <p:nvPr/>
-        </p:nvSpPr>
-        <p:spPr>
-          <a:xfrm>
-            <a:off x="6693408" y="2606040"/>
-            <a:ext cx="4754880" cy="1737360"/>
-          </a:xfrm>
-          <a:prstGeom prst="rect">
-            <a:avLst/>
-          </a:prstGeom>
-          <a:noFill/>
-          <a:ln/>
-        </p:spPr>
-        <p:txBody>
-          <a:bodyPr wrap="square" lIns="0" tIns="0" rIns="0" bIns="0" rtlCol="0" anchor="ctr"/>
-          <a:lstStyle/>
-          <a:p>
-            <a:pPr marL="342900" indent="-342900">
-              <a:spcAft>
-                <a:spcPts val="700"/>
-              </a:spcAft>
-              <a:buSzPct val="100000"/>
-              <a:buChar char="•"/>
-            </a:pPr>
-            <a:r>
-              <a:rPr lang="en-US" sz="1300" dirty="0">
-                <a:solidFill>
-                  <a:srgbClr val="1F2937"/>
-                </a:solidFill>
-                <a:latin typeface="맑은 고딕" pitchFamily="34" charset="0"/>
-                <a:ea typeface="맑은 고딕" pitchFamily="34" charset="-122"/>
-                <a:cs typeface="맑은 고딕" pitchFamily="34" charset="-120"/>
-              </a:rPr>
-              <a:t>사내 LLM API 서비스(OpenAI 호환)</a:t>
-            </a:r>
-            <a:endParaRPr lang="en-US" sz="1300" dirty="0"/>
-          </a:p>
-          <a:p>
-            <a:pPr marL="342900" indent="-342900">
-              <a:spcAft>
-                <a:spcPts val="700"/>
-              </a:spcAft>
-              <a:buSzPct val="100000"/>
-              <a:buChar char="•"/>
-            </a:pPr>
-            <a:r>
-              <a:rPr lang="en-US" sz="1300" dirty="0">
-                <a:solidFill>
-                  <a:srgbClr val="1F2937"/>
-                </a:solidFill>
-                <a:latin typeface="맑은 고딕" pitchFamily="34" charset="0"/>
-                <a:ea typeface="맑은 고딕" pitchFamily="34" charset="-122"/>
-                <a:cs typeface="맑은 고딕" pitchFamily="34" charset="-120"/>
-              </a:rPr>
-              <a:t>훨씬 큰 모델 → 어려운 판단 정확도 유리</a:t>
-            </a:r>
-            <a:endParaRPr lang="en-US" sz="1300" dirty="0"/>
-          </a:p>
-          <a:p>
-            <a:pPr marL="342900" indent="-342900">
-              <a:spcAft>
-                <a:spcPts val="700"/>
-              </a:spcAft>
-              <a:buSzPct val="100000"/>
-              <a:buChar char="•"/>
-            </a:pPr>
-            <a:r>
-              <a:rPr lang="en-US" sz="1300" dirty="0">
-                <a:solidFill>
-                  <a:srgbClr val="1F2937"/>
-                </a:solidFill>
-                <a:latin typeface="맑은 고딕" pitchFamily="34" charset="0"/>
-                <a:ea typeface="맑은 고딕" pitchFamily="34" charset="-122"/>
-                <a:cs typeface="맑은 고딕" pitchFamily="34" charset="-120"/>
-              </a:rPr>
-              <a:t>공용 서버 의존</a:t>
-            </a:r>
-            <a:endParaRPr lang="en-US" sz="1300" dirty="0"/>
-          </a:p>
-        </p:txBody>
-      </p:sp>
-      <p:sp>
-        <p:nvSpPr>
-          <p:cNvPr id="10" name="Shape 8"/>
-          <p:cNvSpPr/>
-          <p:nvPr/>
-        </p:nvSpPr>
-        <p:spPr>
-          <a:xfrm>
-            <a:off x="566928" y="4709160"/>
-            <a:ext cx="11064240" cy="1463040"/>
-          </a:xfrm>
-          <a:prstGeom prst="roundRect">
-            <a:avLst>
-              <a:gd name="adj" fmla="val 6250"/>
-            </a:avLst>
-          </a:prstGeom>
-          <a:solidFill>
-            <a:srgbClr val="1E1B4B"/>
-          </a:solidFill>
-          <a:ln/>
-          <a:effectLst>
-            <a:outerShdw sx="100000" sy="100000" kx="0" ky="0" algn="bl" rotWithShape="0" blurRad="127000" dist="50800" dir="5400000">
-              <a:srgbClr val="1E1B4B">
-                <a:alpha val="18000"/>
-              </a:srgbClr>
-            </a:outerShdw>
-          </a:effectLst>
-        </p:spPr>
-      </p:sp>
-      <p:sp>
-        <p:nvSpPr>
-          <p:cNvPr id="11" name="Text 9"/>
-          <p:cNvSpPr/>
-          <p:nvPr/>
-        </p:nvSpPr>
-        <p:spPr>
-          <a:xfrm>
-            <a:off x="886968" y="4892040"/>
-            <a:ext cx="10424160" cy="457200"/>
-          </a:xfrm>
-          <a:prstGeom prst="rect">
-            <a:avLst/>
-          </a:prstGeom>
-          <a:noFill/>
-          <a:ln/>
-        </p:spPr>
-        <p:txBody>
-          <a:bodyPr wrap="square" lIns="0" tIns="0" rIns="0" bIns="0" rtlCol="0" anchor="ctr"/>
-          <a:lstStyle/>
-          <a:p>
-            <a:pPr indent="0" marL="0">
-              <a:buNone/>
-            </a:pPr>
-            <a:r>
-              <a:rPr lang="en-US" sz="1350" b="1" dirty="0">
-                <a:solidFill>
-                  <a:srgbClr val="FFFFFF"/>
-                </a:solidFill>
-                <a:latin typeface="맑은 고딕" pitchFamily="34" charset="0"/>
-                <a:ea typeface="맑은 고딕" pitchFamily="34" charset="-122"/>
-                <a:cs typeface="맑은 고딕" pitchFamily="34" charset="-120"/>
-              </a:rPr>
-              <a:t>응답 시간은 둘 다 3~5초로 비슷</a:t>
-            </a:r>
-            <a:pPr indent="0" marL="0">
-              <a:buNone/>
-            </a:pPr>
-            <a:r>
-              <a:rPr lang="en-US" sz="1350" dirty="0">
-                <a:solidFill>
-                  <a:srgbClr val="C7D2FE"/>
-                </a:solidFill>
-                <a:latin typeface="맑은 고딕" pitchFamily="34" charset="0"/>
-                <a:ea typeface="맑은 고딕" pitchFamily="34" charset="-122"/>
-                <a:cs typeface="맑은 고딕" pitchFamily="34" charset="-120"/>
-              </a:rPr>
-              <a:t> → 속도가 아니라 정확도·자립성으로 선택. 동일 요구사항 세트로 실측 후 확정.</a:t>
-            </a:r>
-            <a:endParaRPr lang="en-US" sz="1350" dirty="0"/>
-          </a:p>
-        </p:txBody>
-      </p:sp>
-      <p:sp>
-        <p:nvSpPr>
-          <p:cNvPr id="12" name="Text 10"/>
-          <p:cNvSpPr/>
-          <p:nvPr/>
-        </p:nvSpPr>
-        <p:spPr>
-          <a:xfrm>
-            <a:off x="886968" y="5440680"/>
-            <a:ext cx="10424160" cy="640080"/>
-          </a:xfrm>
-          <a:prstGeom prst="rect">
-            <a:avLst/>
-          </a:prstGeom>
-          <a:noFill/>
-          <a:ln/>
-        </p:spPr>
-        <p:txBody>
-          <a:bodyPr wrap="square" lIns="0" tIns="0" rIns="0" bIns="0" rtlCol="0" anchor="ctr"/>
-          <a:lstStyle/>
-          <a:p>
-            <a:pPr indent="0" marL="0">
-              <a:lnSpc>
-                <a:spcPct val="105000"/>
-              </a:lnSpc>
-              <a:buNone/>
-            </a:pPr>
-            <a:r>
-              <a:rPr lang="en-US" sz="1250" b="1" dirty="0">
-                <a:solidFill>
-                  <a:srgbClr val="A5B4FC"/>
-                </a:solidFill>
-                <a:latin typeface="맑은 고딕" pitchFamily="34" charset="0"/>
-                <a:ea typeface="맑은 고딕" pitchFamily="34" charset="-122"/>
-                <a:cs typeface="맑은 고딕" pitchFamily="34" charset="-120"/>
-              </a:rPr>
-              <a:t>양자화란?</a:t>
-            </a:r>
-            <a:pPr indent="0" marL="0">
-              <a:lnSpc>
-                <a:spcPct val="105000"/>
-              </a:lnSpc>
-              <a:buNone/>
-            </a:pPr>
-            <a:r>
-              <a:rPr lang="en-US" sz="1250" dirty="0">
-                <a:solidFill>
-                  <a:srgbClr val="C7D2FE"/>
-                </a:solidFill>
-                <a:latin typeface="맑은 고딕" pitchFamily="34" charset="0"/>
-                <a:ea typeface="맑은 고딕" pitchFamily="34" charset="-122"/>
-                <a:cs typeface="맑은 고딕" pitchFamily="34" charset="-120"/>
-              </a:rPr>
-              <a:t>  사진을 JPG로 압축하듯 용량↓·품질 소폭↓. 8B 원본(≈16GB)은 8GB GPU에 못 올라가 5.85GB로 압축해 사용.</a:t>
-            </a:r>
-            <a:endParaRPr lang="en-US" sz="1250" dirty="0"/>
+      <p:pic>
+        <p:nvPicPr>
+          <p:cNvPr id="4" name="Image 0" descr="/home/user/semes-superrookie/docs/img/ppt-derive-2.png">    </p:cNvPr>
+          <p:cNvPicPr>
+            <a:picLocks noChangeAspect="1"/>
+          </p:cNvPicPr>
+          <p:nvPr/>
+        </p:nvPicPr>
+        <p:blipFill>
+          <a:blip r:embed="rId1"/>
+          <a:stretch>
+            <a:fillRect/>
+          </a:stretch>
+        </p:blipFill>
+        <p:spPr>
+          <a:xfrm>
+            <a:off x="836676" y="1691640"/>
+            <a:ext cx="10515600" cy="4453128"/>
+          </a:xfrm>
+          <a:prstGeom prst="rect">
+            <a:avLst/>
+          </a:prstGeom>
+        </p:spPr>
+      </p:pic>
+      <p:sp>
+        <p:nvSpPr>
+          <p:cNvPr id="5" name="Text 2"/>
+          <p:cNvSpPr/>
+          <p:nvPr/>
+        </p:nvSpPr>
+        <p:spPr>
+          <a:xfrm>
+            <a:off x="566928" y="6263640"/>
+            <a:ext cx="11064240" cy="365760"/>
+          </a:xfrm>
+          <a:prstGeom prst="rect">
+            <a:avLst/>
+          </a:prstGeom>
+          <a:noFill/>
+          <a:ln/>
+        </p:spPr>
+        <p:txBody>
+          <a:bodyPr wrap="square" lIns="0" tIns="0" rIns="0" bIns="0" rtlCol="0" anchor="ctr"/>
+          <a:lstStyle/>
+          <a:p>
+            <a:pPr algn="ctr" indent="0" marL="0">
+              <a:buNone/>
+            </a:pPr>
+            <a:r>
+              <a:rPr lang="en-US" sz="1200" dirty="0">
+                <a:solidFill>
+                  <a:srgbClr val="6B7280"/>
+                </a:solidFill>
+                <a:latin typeface="맑은 고딕" pitchFamily="34" charset="0"/>
+                <a:ea typeface="맑은 고딕" pitchFamily="34" charset="-122"/>
+                <a:cs typeface="맑은 고딕" pitchFamily="34" charset="-120"/>
+              </a:rPr>
+              <a:t>정해진 양식(템플릿)+사전 프롬프트로 4종 이슈 초안 생성 · Detail Design은 시퀀스 다이어그램까지 자동</a:t>
+            </a:r>
+            <a:endParaRPr lang="en-US" sz="1200" dirty="0"/>
           </a:p>
         </p:txBody>
       </p:sp>
@@ -3391,7 +2702,7 @@
     <p:bg>
       <p:bgPr>
         <a:solidFill>
-          <a:srgbClr val="1E1B4B"/>
+          <a:srgbClr val="FFFFFF"/>
         </a:solidFill>
       </p:bgPr>
     </p:bg>
@@ -3417,7 +2728,7 @@
         </p:nvSpPr>
         <p:spPr>
           <a:xfrm>
-            <a:off x="566928" y="502920"/>
+            <a:off x="566928" y="457200"/>
             <a:ext cx="10058400" cy="274320"/>
           </a:xfrm>
           <a:prstGeom prst="rect">
@@ -3436,13 +2747,13 @@
             <a:r>
               <a:rPr lang="en-US" sz="1200" b="1" spc="100" kern="0" dirty="0">
                 <a:solidFill>
-                  <a:srgbClr val="A5B4FC"/>
-                </a:solidFill>
-                <a:latin typeface="맑은 고딕" pitchFamily="34" charset="0"/>
-                <a:ea typeface="맑은 고딕" pitchFamily="34" charset="-122"/>
-                <a:cs typeface="맑은 고딕" pitchFamily="34" charset="-120"/>
-              </a:rPr>
-              <a:t>기대 효과</a:t>
+                  <a:srgbClr val="6366F1"/>
+                </a:solidFill>
+                <a:latin typeface="맑은 고딕" pitchFamily="34" charset="0"/>
+                <a:ea typeface="맑은 고딕" pitchFamily="34" charset="-122"/>
+                <a:cs typeface="맑은 고딕" pitchFamily="34" charset="-120"/>
+              </a:rPr>
+              <a:t>핵심 기능 3</a:t>
             </a:r>
             <a:endParaRPr lang="en-US" sz="1200" dirty="0"/>
           </a:p>
@@ -3456,7 +2767,7 @@
         </p:nvSpPr>
         <p:spPr>
           <a:xfrm>
-            <a:off x="566928" y="804672"/>
+            <a:off x="566928" y="749808"/>
             <a:ext cx="10515600" cy="640080"/>
           </a:xfrm>
           <a:prstGeom prst="rect">
@@ -3475,13 +2786,13 @@
             <a:r>
               <a:rPr lang="en-US" sz="3000" b="1" dirty="0">
                 <a:solidFill>
-                  <a:srgbClr val="FFFFFF"/>
-                </a:solidFill>
-                <a:latin typeface="맑은 고딕" pitchFamily="34" charset="0"/>
-                <a:ea typeface="맑은 고딕" pitchFamily="34" charset="-122"/>
-                <a:cs typeface="맑은 고딕" pitchFamily="34" charset="-120"/>
-              </a:rPr>
-              <a:t>수작업 문서화 공수를 크게 줄인다</a:t>
+                  <a:srgbClr val="1F2937"/>
+                </a:solidFill>
+                <a:latin typeface="맑은 고딕" pitchFamily="34" charset="0"/>
+                <a:ea typeface="맑은 고딕" pitchFamily="34" charset="-122"/>
+                <a:cs typeface="맑은 고딕" pitchFamily="34" charset="-120"/>
+              </a:rPr>
+              <a:t>문서 추적성</a:t>
             </a:r>
             <a:endParaRPr lang="en-US" sz="3000" dirty="0"/>
           </a:p>
@@ -3489,41 +2800,132 @@
       </p:sp>
       <p:sp>
         <p:nvSpPr>
-          <p:cNvPr id="4" name="Shape 2"/>
-          <p:cNvSpPr/>
-          <p:nvPr/>
-        </p:nvSpPr>
-        <p:spPr>
-          <a:xfrm>
-            <a:off x="566928" y="1920240"/>
-            <a:ext cx="3529584" cy="3200400"/>
+          <p:cNvPr id="4" name="Text 2"/>
+          <p:cNvSpPr/>
+          <p:nvPr/>
+        </p:nvSpPr>
+        <p:spPr>
+          <a:xfrm>
+            <a:off x="10424160" y="822960"/>
+            <a:ext cx="1737360" cy="310896"/>
           </a:xfrm>
           <a:prstGeom prst="roundRect">
             <a:avLst>
-              <a:gd name="adj" fmla="val 2857"/>
+              <a:gd name="adj" fmla="val 47059"/>
             </a:avLst>
           </a:prstGeom>
           <a:solidFill>
-            <a:srgbClr val="312E81"/>
+            <a:srgbClr val="FEF3C7"/>
+          </a:solidFill>
+          <a:ln/>
+        </p:spPr>
+        <p:txBody>
+          <a:bodyPr wrap="square" lIns="0" tIns="0" rIns="0" bIns="0" rtlCol="0" anchor="ctr"/>
+          <a:lstStyle/>
+          <a:p>
+            <a:pPr algn="ctr" indent="0" marL="0">
+              <a:buNone/>
+            </a:pPr>
+            <a:r>
+              <a:rPr lang="en-US" sz="1100" b="1" dirty="0">
+                <a:solidFill>
+                  <a:srgbClr val="B45309"/>
+                </a:solidFill>
+                <a:latin typeface="맑은 고딕" pitchFamily="34" charset="0"/>
+                <a:ea typeface="맑은 고딕" pitchFamily="34" charset="-122"/>
+                <a:cs typeface="맑은 고딕" pitchFamily="34" charset="-120"/>
+              </a:rPr>
+              <a:t>개발 예정</a:t>
+            </a:r>
+            <a:endParaRPr lang="en-US" sz="1100" dirty="0"/>
+          </a:p>
+        </p:txBody>
+      </p:sp>
+      <p:sp>
+        <p:nvSpPr>
+          <p:cNvPr id="5" name="Shape 3"/>
+          <p:cNvSpPr/>
+          <p:nvPr/>
+        </p:nvSpPr>
+        <p:spPr>
+          <a:xfrm>
+            <a:off x="566928" y="1874520"/>
+            <a:ext cx="11064240" cy="1097280"/>
+          </a:xfrm>
+          <a:prstGeom prst="roundRect">
+            <a:avLst>
+              <a:gd name="adj" fmla="val 6667"/>
+            </a:avLst>
+          </a:prstGeom>
+          <a:solidFill>
+            <a:srgbClr val="FFFFFF"/>
           </a:solidFill>
           <a:ln w="12700">
             <a:solidFill>
-              <a:srgbClr val="4338CA"/>
+              <a:srgbClr val="E5E7EB"/>
             </a:solidFill>
             <a:prstDash val="solid"/>
           </a:ln>
-        </p:spPr>
-      </p:sp>
-      <p:sp>
-        <p:nvSpPr>
-          <p:cNvPr id="5" name="Text 3"/>
-          <p:cNvSpPr/>
-          <p:nvPr/>
-        </p:nvSpPr>
-        <p:spPr>
-          <a:xfrm>
-            <a:off x="841248" y="2331720"/>
-            <a:ext cx="2980944" cy="548640"/>
+          <a:effectLst>
+            <a:outerShdw sx="100000" sy="100000" kx="0" ky="0" algn="bl" rotWithShape="0" blurRad="127000" dist="50800" dir="5400000">
+              <a:srgbClr val="1E1B4B">
+                <a:alpha val="18000"/>
+              </a:srgbClr>
+            </a:outerShdw>
+          </a:effectLst>
+        </p:spPr>
+      </p:sp>
+      <p:sp>
+        <p:nvSpPr>
+          <p:cNvPr id="6" name="Text 4"/>
+          <p:cNvSpPr/>
+          <p:nvPr/>
+        </p:nvSpPr>
+        <p:spPr>
+          <a:xfrm>
+            <a:off x="822960" y="2167128"/>
+            <a:ext cx="512064" cy="512064"/>
+          </a:xfrm>
+          <a:prstGeom prst="ellipse">
+            <a:avLst/>
+          </a:prstGeom>
+          <a:solidFill>
+            <a:srgbClr val="8B5CF6"/>
+          </a:solidFill>
+          <a:ln/>
+        </p:spPr>
+        <p:txBody>
+          <a:bodyPr wrap="square" lIns="0" tIns="0" rIns="0" bIns="0" rtlCol="0" anchor="ctr"/>
+          <a:lstStyle/>
+          <a:p>
+            <a:pPr algn="ctr" indent="0" marL="0">
+              <a:buNone/>
+            </a:pPr>
+            <a:r>
+              <a:rPr lang="en-US" sz="1800" b="1" dirty="0">
+                <a:solidFill>
+                  <a:srgbClr val="FFFFFF"/>
+                </a:solidFill>
+                <a:latin typeface="맑은 고딕" pitchFamily="34" charset="0"/>
+                <a:ea typeface="맑은 고딕" pitchFamily="34" charset="-122"/>
+                <a:cs typeface="맑은 고딕" pitchFamily="34" charset="-120"/>
+              </a:rPr>
+              <a:t>1</a:t>
+            </a:r>
+            <a:endParaRPr lang="en-US" sz="1800" dirty="0"/>
+          </a:p>
+        </p:txBody>
+      </p:sp>
+      <p:sp>
+        <p:nvSpPr>
+          <p:cNvPr id="7" name="Text 5"/>
+          <p:cNvSpPr/>
+          <p:nvPr/>
+        </p:nvSpPr>
+        <p:spPr>
+          <a:xfrm>
+            <a:off x="1527048" y="2039112"/>
+            <a:ext cx="2926080" cy="731520"/>
           </a:xfrm>
           <a:prstGeom prst="rect">
             <a:avLst/>
@@ -3539,69 +2941,30 @@
               <a:buNone/>
             </a:pPr>
             <a:r>
-              <a:rPr lang="en-US" sz="2000" b="1" dirty="0">
-                <a:solidFill>
-                  <a:srgbClr val="C7D2FE"/>
-                </a:solidFill>
-                <a:latin typeface="맑은 고딕" pitchFamily="34" charset="0"/>
-                <a:ea typeface="맑은 고딕" pitchFamily="34" charset="-122"/>
-                <a:cs typeface="맑은 고딕" pitchFamily="34" charset="-120"/>
-              </a:rPr>
-              <a:t>약 2시간</a:t>
-            </a:r>
-            <a:endParaRPr lang="en-US" sz="2000" dirty="0"/>
-          </a:p>
-        </p:txBody>
-      </p:sp>
-      <p:sp>
-        <p:nvSpPr>
-          <p:cNvPr id="6" name="Text 4"/>
-          <p:cNvSpPr/>
-          <p:nvPr/>
-        </p:nvSpPr>
-        <p:spPr>
-          <a:xfrm>
-            <a:off x="841248" y="2926080"/>
-            <a:ext cx="2980944" cy="822960"/>
-          </a:xfrm>
-          <a:prstGeom prst="rect">
-            <a:avLst/>
-          </a:prstGeom>
-          <a:noFill/>
-          <a:ln/>
-        </p:spPr>
-        <p:txBody>
-          <a:bodyPr wrap="square" lIns="0" tIns="0" rIns="0" bIns="0" rtlCol="0" anchor="ctr"/>
-          <a:lstStyle/>
-          <a:p>
-            <a:pPr indent="0" marL="0">
-              <a:buNone/>
-            </a:pPr>
-            <a:r>
-              <a:rPr lang="en-US" sz="3200" b="1" dirty="0">
-                <a:solidFill>
-                  <a:srgbClr val="FFFFFF"/>
-                </a:solidFill>
-                <a:latin typeface="맑은 고딕" pitchFamily="34" charset="0"/>
-                <a:ea typeface="맑은 고딕" pitchFamily="34" charset="-122"/>
-                <a:cs typeface="맑은 고딕" pitchFamily="34" charset="-120"/>
-              </a:rPr>
-              <a:t>→ 약 10초</a:t>
-            </a:r>
-            <a:endParaRPr lang="en-US" sz="3200" dirty="0"/>
-          </a:p>
-        </p:txBody>
-      </p:sp>
-      <p:sp>
-        <p:nvSpPr>
-          <p:cNvPr id="7" name="Text 5"/>
-          <p:cNvSpPr/>
-          <p:nvPr/>
-        </p:nvSpPr>
-        <p:spPr>
-          <a:xfrm>
-            <a:off x="841248" y="4114800"/>
-            <a:ext cx="2980944" cy="822960"/>
+              <a:rPr lang="en-US" sz="1700" b="1" dirty="0">
+                <a:solidFill>
+                  <a:srgbClr val="1F2937"/>
+                </a:solidFill>
+                <a:latin typeface="맑은 고딕" pitchFamily="34" charset="0"/>
+                <a:ea typeface="맑은 고딕" pitchFamily="34" charset="-122"/>
+                <a:cs typeface="맑은 고딕" pitchFamily="34" charset="-120"/>
+              </a:rPr>
+              <a:t>연결 조회</a:t>
+            </a:r>
+            <a:endParaRPr lang="en-US" sz="1700" dirty="0"/>
+          </a:p>
+        </p:txBody>
+      </p:sp>
+      <p:sp>
+        <p:nvSpPr>
+          <p:cNvPr id="8" name="Text 6"/>
+          <p:cNvSpPr/>
+          <p:nvPr/>
+        </p:nvSpPr>
+        <p:spPr>
+          <a:xfrm>
+            <a:off x="4498848" y="2039112"/>
+            <a:ext cx="6858000" cy="777240"/>
           </a:xfrm>
           <a:prstGeom prst="rect">
             <a:avLst/>
@@ -3615,20 +2978,20 @@
           <a:p>
             <a:pPr indent="0" marL="0">
               <a:lnSpc>
-                <a:spcPct val="110000"/>
+                <a:spcPct val="105000"/>
               </a:lnSpc>
               <a:buNone/>
             </a:pPr>
             <a:r>
               <a:rPr lang="en-US" sz="1300" dirty="0">
                 <a:solidFill>
-                  <a:srgbClr val="A5B4FC"/>
-                </a:solidFill>
-                <a:latin typeface="맑은 고딕" pitchFamily="34" charset="0"/>
-                <a:ea typeface="맑은 고딕" pitchFamily="34" charset="-122"/>
-                <a:cs typeface="맑은 고딕" pitchFamily="34" charset="-120"/>
-              </a:rPr>
-              <a:t>요구사항 1건의 문서·티켓 초안 작성</a:t>
+                  <a:srgbClr val="6B7280"/>
+                </a:solidFill>
+                <a:latin typeface="맑은 고딕" pitchFamily="34" charset="0"/>
+                <a:ea typeface="맑은 고딕" pitchFamily="34" charset="-122"/>
+                <a:cs typeface="맑은 고딕" pitchFamily="34" charset="-120"/>
+              </a:rPr>
+              <a:t>요구사항 1건에 연결된 기능요구사항·비기능요구사항·티켓을 한눈에 조회 (양방향)</a:t>
             </a:r>
             <a:endParaRPr lang="en-US" sz="1300" dirty="0"/>
           </a:p>
@@ -3636,41 +2999,89 @@
       </p:sp>
       <p:sp>
         <p:nvSpPr>
-          <p:cNvPr id="8" name="Shape 6"/>
-          <p:cNvSpPr/>
-          <p:nvPr/>
-        </p:nvSpPr>
-        <p:spPr>
-          <a:xfrm>
-            <a:off x="4407408" y="1920240"/>
-            <a:ext cx="3529584" cy="3200400"/>
+          <p:cNvPr id="9" name="Shape 7"/>
+          <p:cNvSpPr/>
+          <p:nvPr/>
+        </p:nvSpPr>
+        <p:spPr>
+          <a:xfrm>
+            <a:off x="566928" y="3154680"/>
+            <a:ext cx="11064240" cy="1097280"/>
           </a:xfrm>
           <a:prstGeom prst="roundRect">
             <a:avLst>
-              <a:gd name="adj" fmla="val 2857"/>
+              <a:gd name="adj" fmla="val 6667"/>
             </a:avLst>
           </a:prstGeom>
           <a:solidFill>
-            <a:srgbClr val="312E81"/>
+            <a:srgbClr val="FFFFFF"/>
           </a:solidFill>
           <a:ln w="12700">
             <a:solidFill>
-              <a:srgbClr val="4338CA"/>
+              <a:srgbClr val="E5E7EB"/>
             </a:solidFill>
             <a:prstDash val="solid"/>
           </a:ln>
-        </p:spPr>
-      </p:sp>
-      <p:sp>
-        <p:nvSpPr>
-          <p:cNvPr id="9" name="Text 7"/>
-          <p:cNvSpPr/>
-          <p:nvPr/>
-        </p:nvSpPr>
-        <p:spPr>
-          <a:xfrm>
-            <a:off x="4681728" y="2331720"/>
-            <a:ext cx="2980944" cy="548640"/>
+          <a:effectLst>
+            <a:outerShdw sx="100000" sy="100000" kx="0" ky="0" algn="bl" rotWithShape="0" blurRad="127000" dist="50800" dir="5400000">
+              <a:srgbClr val="1E1B4B">
+                <a:alpha val="18000"/>
+              </a:srgbClr>
+            </a:outerShdw>
+          </a:effectLst>
+        </p:spPr>
+      </p:sp>
+      <p:sp>
+        <p:nvSpPr>
+          <p:cNvPr id="10" name="Text 8"/>
+          <p:cNvSpPr/>
+          <p:nvPr/>
+        </p:nvSpPr>
+        <p:spPr>
+          <a:xfrm>
+            <a:off x="822960" y="3447288"/>
+            <a:ext cx="512064" cy="512064"/>
+          </a:xfrm>
+          <a:prstGeom prst="ellipse">
+            <a:avLst/>
+          </a:prstGeom>
+          <a:solidFill>
+            <a:srgbClr val="8B5CF6"/>
+          </a:solidFill>
+          <a:ln/>
+        </p:spPr>
+        <p:txBody>
+          <a:bodyPr wrap="square" lIns="0" tIns="0" rIns="0" bIns="0" rtlCol="0" anchor="ctr"/>
+          <a:lstStyle/>
+          <a:p>
+            <a:pPr algn="ctr" indent="0" marL="0">
+              <a:buNone/>
+            </a:pPr>
+            <a:r>
+              <a:rPr lang="en-US" sz="1800" b="1" dirty="0">
+                <a:solidFill>
+                  <a:srgbClr val="FFFFFF"/>
+                </a:solidFill>
+                <a:latin typeface="맑은 고딕" pitchFamily="34" charset="0"/>
+                <a:ea typeface="맑은 고딕" pitchFamily="34" charset="-122"/>
+                <a:cs typeface="맑은 고딕" pitchFamily="34" charset="-120"/>
+              </a:rPr>
+              <a:t>2</a:t>
+            </a:r>
+            <a:endParaRPr lang="en-US" sz="1800" dirty="0"/>
+          </a:p>
+        </p:txBody>
+      </p:sp>
+      <p:sp>
+        <p:nvSpPr>
+          <p:cNvPr id="11" name="Text 9"/>
+          <p:cNvSpPr/>
+          <p:nvPr/>
+        </p:nvSpPr>
+        <p:spPr>
+          <a:xfrm>
+            <a:off x="1527048" y="3319272"/>
+            <a:ext cx="2926080" cy="731520"/>
           </a:xfrm>
           <a:prstGeom prst="rect">
             <a:avLst/>
@@ -3686,69 +3097,30 @@
               <a:buNone/>
             </a:pPr>
             <a:r>
-              <a:rPr lang="en-US" sz="2000" b="1" dirty="0">
-                <a:solidFill>
-                  <a:srgbClr val="C7D2FE"/>
-                </a:solidFill>
-                <a:latin typeface="맑은 고딕" pitchFamily="34" charset="0"/>
-                <a:ea typeface="맑은 고딕" pitchFamily="34" charset="-122"/>
-                <a:cs typeface="맑은 고딕" pitchFamily="34" charset="-120"/>
-              </a:rPr>
-              <a:t>수동 확인</a:t>
-            </a:r>
-            <a:endParaRPr lang="en-US" sz="2000" dirty="0"/>
-          </a:p>
-        </p:txBody>
-      </p:sp>
-      <p:sp>
-        <p:nvSpPr>
-          <p:cNvPr id="10" name="Text 8"/>
-          <p:cNvSpPr/>
-          <p:nvPr/>
-        </p:nvSpPr>
-        <p:spPr>
-          <a:xfrm>
-            <a:off x="4681728" y="2926080"/>
-            <a:ext cx="2980944" cy="822960"/>
-          </a:xfrm>
-          <a:prstGeom prst="rect">
-            <a:avLst/>
-          </a:prstGeom>
-          <a:noFill/>
-          <a:ln/>
-        </p:spPr>
-        <p:txBody>
-          <a:bodyPr wrap="square" lIns="0" tIns="0" rIns="0" bIns="0" rtlCol="0" anchor="ctr"/>
-          <a:lstStyle/>
-          <a:p>
-            <a:pPr indent="0" marL="0">
-              <a:buNone/>
-            </a:pPr>
-            <a:r>
-              <a:rPr lang="en-US" sz="3200" b="1" dirty="0">
-                <a:solidFill>
-                  <a:srgbClr val="FFFFFF"/>
-                </a:solidFill>
-                <a:latin typeface="맑은 고딕" pitchFamily="34" charset="0"/>
-                <a:ea typeface="맑은 고딕" pitchFamily="34" charset="-122"/>
-                <a:cs typeface="맑은 고딕" pitchFamily="34" charset="-120"/>
-              </a:rPr>
-              <a:t>→ 자동 표시</a:t>
-            </a:r>
-            <a:endParaRPr lang="en-US" sz="3200" dirty="0"/>
-          </a:p>
-        </p:txBody>
-      </p:sp>
-      <p:sp>
-        <p:nvSpPr>
-          <p:cNvPr id="11" name="Text 9"/>
-          <p:cNvSpPr/>
-          <p:nvPr/>
-        </p:nvSpPr>
-        <p:spPr>
-          <a:xfrm>
-            <a:off x="4681728" y="4114800"/>
-            <a:ext cx="2980944" cy="822960"/>
+              <a:rPr lang="en-US" sz="1700" b="1" dirty="0">
+                <a:solidFill>
+                  <a:srgbClr val="1F2937"/>
+                </a:solidFill>
+                <a:latin typeface="맑은 고딕" pitchFamily="34" charset="0"/>
+                <a:ea typeface="맑은 고딕" pitchFamily="34" charset="-122"/>
+                <a:cs typeface="맑은 고딕" pitchFamily="34" charset="-120"/>
+              </a:rPr>
+              <a:t>변경 영향 분석</a:t>
+            </a:r>
+            <a:endParaRPr lang="en-US" sz="1700" dirty="0"/>
+          </a:p>
+        </p:txBody>
+      </p:sp>
+      <p:sp>
+        <p:nvSpPr>
+          <p:cNvPr id="12" name="Text 10"/>
+          <p:cNvSpPr/>
+          <p:nvPr/>
+        </p:nvSpPr>
+        <p:spPr>
+          <a:xfrm>
+            <a:off x="4498848" y="3319272"/>
+            <a:ext cx="6858000" cy="777240"/>
           </a:xfrm>
           <a:prstGeom prst="rect">
             <a:avLst/>
@@ -3762,20 +3134,20 @@
           <a:p>
             <a:pPr indent="0" marL="0">
               <a:lnSpc>
-                <a:spcPct val="110000"/>
+                <a:spcPct val="105000"/>
               </a:lnSpc>
               <a:buNone/>
             </a:pPr>
             <a:r>
               <a:rPr lang="en-US" sz="1300" dirty="0">
                 <a:solidFill>
-                  <a:srgbClr val="A5B4FC"/>
-                </a:solidFill>
-                <a:latin typeface="맑은 고딕" pitchFamily="34" charset="0"/>
-                <a:ea typeface="맑은 고딕" pitchFamily="34" charset="-122"/>
-                <a:cs typeface="맑은 고딕" pitchFamily="34" charset="-120"/>
-              </a:rPr>
-              <a:t>요구사항 변경 시 영향받는 문서 파악</a:t>
+                  <a:srgbClr val="6B7280"/>
+                </a:solidFill>
+                <a:latin typeface="맑은 고딕" pitchFamily="34" charset="0"/>
+                <a:ea typeface="맑은 고딕" pitchFamily="34" charset="-122"/>
+                <a:cs typeface="맑은 고딕" pitchFamily="34" charset="-120"/>
+              </a:rPr>
+              <a:t>요구사항이 수정되면 영향받는 문서·티켓을 자동으로 표시 → 누락 방지</a:t>
             </a:r>
             <a:endParaRPr lang="en-US" sz="1300" dirty="0"/>
           </a:p>
@@ -3783,41 +3155,89 @@
       </p:sp>
       <p:sp>
         <p:nvSpPr>
-          <p:cNvPr id="12" name="Shape 10"/>
-          <p:cNvSpPr/>
-          <p:nvPr/>
-        </p:nvSpPr>
-        <p:spPr>
-          <a:xfrm>
-            <a:off x="8247888" y="1920240"/>
-            <a:ext cx="3529584" cy="3200400"/>
+          <p:cNvPr id="13" name="Shape 11"/>
+          <p:cNvSpPr/>
+          <p:nvPr/>
+        </p:nvSpPr>
+        <p:spPr>
+          <a:xfrm>
+            <a:off x="566928" y="4434840"/>
+            <a:ext cx="11064240" cy="1097280"/>
           </a:xfrm>
           <a:prstGeom prst="roundRect">
             <a:avLst>
-              <a:gd name="adj" fmla="val 2857"/>
+              <a:gd name="adj" fmla="val 6667"/>
             </a:avLst>
           </a:prstGeom>
           <a:solidFill>
-            <a:srgbClr val="312E81"/>
+            <a:srgbClr val="EEF2FF"/>
           </a:solidFill>
           <a:ln w="12700">
             <a:solidFill>
-              <a:srgbClr val="4338CA"/>
+              <a:srgbClr val="E5E7EB"/>
             </a:solidFill>
             <a:prstDash val="solid"/>
           </a:ln>
-        </p:spPr>
-      </p:sp>
-      <p:sp>
-        <p:nvSpPr>
-          <p:cNvPr id="13" name="Text 11"/>
-          <p:cNvSpPr/>
-          <p:nvPr/>
-        </p:nvSpPr>
-        <p:spPr>
-          <a:xfrm>
-            <a:off x="8522208" y="2331720"/>
-            <a:ext cx="2980944" cy="548640"/>
+          <a:effectLst>
+            <a:outerShdw sx="100000" sy="100000" kx="0" ky="0" algn="bl" rotWithShape="0" blurRad="127000" dist="50800" dir="5400000">
+              <a:srgbClr val="1E1B4B">
+                <a:alpha val="18000"/>
+              </a:srgbClr>
+            </a:outerShdw>
+          </a:effectLst>
+        </p:spPr>
+      </p:sp>
+      <p:sp>
+        <p:nvSpPr>
+          <p:cNvPr id="14" name="Text 12"/>
+          <p:cNvSpPr/>
+          <p:nvPr/>
+        </p:nvSpPr>
+        <p:spPr>
+          <a:xfrm>
+            <a:off x="822960" y="4727448"/>
+            <a:ext cx="512064" cy="512064"/>
+          </a:xfrm>
+          <a:prstGeom prst="ellipse">
+            <a:avLst/>
+          </a:prstGeom>
+          <a:solidFill>
+            <a:srgbClr val="8B5CF6"/>
+          </a:solidFill>
+          <a:ln/>
+        </p:spPr>
+        <p:txBody>
+          <a:bodyPr wrap="square" lIns="0" tIns="0" rIns="0" bIns="0" rtlCol="0" anchor="ctr"/>
+          <a:lstStyle/>
+          <a:p>
+            <a:pPr algn="ctr" indent="0" marL="0">
+              <a:buNone/>
+            </a:pPr>
+            <a:r>
+              <a:rPr lang="en-US" sz="1800" b="1" dirty="0">
+                <a:solidFill>
+                  <a:srgbClr val="FFFFFF"/>
+                </a:solidFill>
+                <a:latin typeface="맑은 고딕" pitchFamily="34" charset="0"/>
+                <a:ea typeface="맑은 고딕" pitchFamily="34" charset="-122"/>
+                <a:cs typeface="맑은 고딕" pitchFamily="34" charset="-120"/>
+              </a:rPr>
+              <a:t>3</a:t>
+            </a:r>
+            <a:endParaRPr lang="en-US" sz="1800" dirty="0"/>
+          </a:p>
+        </p:txBody>
+      </p:sp>
+      <p:sp>
+        <p:nvSpPr>
+          <p:cNvPr id="15" name="Text 13"/>
+          <p:cNvSpPr/>
+          <p:nvPr/>
+        </p:nvSpPr>
+        <p:spPr>
+          <a:xfrm>
+            <a:off x="1527048" y="4599432"/>
+            <a:ext cx="2926080" cy="731520"/>
           </a:xfrm>
           <a:prstGeom prst="rect">
             <a:avLst/>
@@ -3833,69 +3253,30 @@
               <a:buNone/>
             </a:pPr>
             <a:r>
-              <a:rPr lang="en-US" sz="2000" b="1" dirty="0">
-                <a:solidFill>
-                  <a:srgbClr val="C7D2FE"/>
-                </a:solidFill>
-                <a:latin typeface="맑은 고딕" pitchFamily="34" charset="0"/>
-                <a:ea typeface="맑은 고딕" pitchFamily="34" charset="-122"/>
-                <a:cs typeface="맑은 고딕" pitchFamily="34" charset="-120"/>
-              </a:rPr>
-              <a:t>개발 중 발견</a:t>
-            </a:r>
-            <a:endParaRPr lang="en-US" sz="2000" dirty="0"/>
-          </a:p>
-        </p:txBody>
-      </p:sp>
-      <p:sp>
-        <p:nvSpPr>
-          <p:cNvPr id="14" name="Text 12"/>
-          <p:cNvSpPr/>
-          <p:nvPr/>
-        </p:nvSpPr>
-        <p:spPr>
-          <a:xfrm>
-            <a:off x="8522208" y="2926080"/>
-            <a:ext cx="2980944" cy="822960"/>
-          </a:xfrm>
-          <a:prstGeom prst="rect">
-            <a:avLst/>
-          </a:prstGeom>
-          <a:noFill/>
-          <a:ln/>
-        </p:spPr>
-        <p:txBody>
-          <a:bodyPr wrap="square" lIns="0" tIns="0" rIns="0" bIns="0" rtlCol="0" anchor="ctr"/>
-          <a:lstStyle/>
-          <a:p>
-            <a:pPr indent="0" marL="0">
-              <a:buNone/>
-            </a:pPr>
-            <a:r>
-              <a:rPr lang="en-US" sz="3200" b="1" dirty="0">
-                <a:solidFill>
-                  <a:srgbClr val="FFFFFF"/>
-                </a:solidFill>
-                <a:latin typeface="맑은 고딕" pitchFamily="34" charset="0"/>
-                <a:ea typeface="맑은 고딕" pitchFamily="34" charset="-122"/>
-                <a:cs typeface="맑은 고딕" pitchFamily="34" charset="-120"/>
-              </a:rPr>
-              <a:t>→ 착수 전 발견</a:t>
-            </a:r>
-            <a:endParaRPr lang="en-US" sz="3200" dirty="0"/>
-          </a:p>
-        </p:txBody>
-      </p:sp>
-      <p:sp>
-        <p:nvSpPr>
-          <p:cNvPr id="15" name="Text 13"/>
-          <p:cNvSpPr/>
-          <p:nvPr/>
-        </p:nvSpPr>
-        <p:spPr>
-          <a:xfrm>
-            <a:off x="8522208" y="4114800"/>
-            <a:ext cx="2980944" cy="822960"/>
+              <a:rPr lang="en-US" sz="1700" b="1" dirty="0">
+                <a:solidFill>
+                  <a:srgbClr val="1F2937"/>
+                </a:solidFill>
+                <a:latin typeface="맑은 고딕" pitchFamily="34" charset="0"/>
+                <a:ea typeface="맑은 고딕" pitchFamily="34" charset="-122"/>
+                <a:cs typeface="맑은 고딕" pitchFamily="34" charset="-120"/>
+              </a:rPr>
+              <a:t>진행상황 / 개발완료</a:t>
+            </a:r>
+            <a:endParaRPr lang="en-US" sz="1700" dirty="0"/>
+          </a:p>
+        </p:txBody>
+      </p:sp>
+      <p:sp>
+        <p:nvSpPr>
+          <p:cNvPr id="16" name="Text 14"/>
+          <p:cNvSpPr/>
+          <p:nvPr/>
+        </p:nvSpPr>
+        <p:spPr>
+          <a:xfrm>
+            <a:off x="4498848" y="4599432"/>
+            <a:ext cx="6858000" cy="777240"/>
           </a:xfrm>
           <a:prstGeom prst="rect">
             <a:avLst/>
@@ -3909,20 +3290,20 @@
           <a:p>
             <a:pPr indent="0" marL="0">
               <a:lnSpc>
-                <a:spcPct val="110000"/>
+                <a:spcPct val="105000"/>
               </a:lnSpc>
               <a:buNone/>
             </a:pPr>
             <a:r>
               <a:rPr lang="en-US" sz="1300" dirty="0">
                 <a:solidFill>
-                  <a:srgbClr val="A5B4FC"/>
-                </a:solidFill>
-                <a:latin typeface="맑은 고딕" pitchFamily="34" charset="0"/>
-                <a:ea typeface="맑은 고딕" pitchFamily="34" charset="-122"/>
-                <a:cs typeface="맑은 고딕" pitchFamily="34" charset="-120"/>
-              </a:rPr>
-              <a:t>불명확·상충으로 인한 재작업</a:t>
+                  <a:srgbClr val="6B7280"/>
+                </a:solidFill>
+                <a:latin typeface="맑은 고딕" pitchFamily="34" charset="0"/>
+                <a:ea typeface="맑은 고딕" pitchFamily="34" charset="-122"/>
+                <a:cs typeface="맑은 고딕" pitchFamily="34" charset="-120"/>
+              </a:rPr>
+              <a:t>요구사항·티켓의 상태(작성중·검토·개발중·완료)와 진행률을 한눈에</a:t>
             </a:r>
             <a:endParaRPr lang="en-US" sz="1300" dirty="0"/>
           </a:p>
@@ -3930,14 +3311,14 @@
       </p:sp>
       <p:sp>
         <p:nvSpPr>
-          <p:cNvPr id="16" name="Text 14"/>
-          <p:cNvSpPr/>
-          <p:nvPr/>
-        </p:nvSpPr>
-        <p:spPr>
-          <a:xfrm>
-            <a:off x="566928" y="5852160"/>
-            <a:ext cx="10058400" cy="365760"/>
+          <p:cNvPr id="17" name="Text 15"/>
+          <p:cNvSpPr/>
+          <p:nvPr/>
+        </p:nvSpPr>
+        <p:spPr>
+          <a:xfrm>
+            <a:off x="566928" y="5943600"/>
+            <a:ext cx="10972800" cy="365760"/>
           </a:xfrm>
           <a:prstGeom prst="rect">
             <a:avLst/>
@@ -3955,13 +3336,13 @@
             <a:r>
               <a:rPr lang="en-US" sz="1200" i="1" dirty="0">
                 <a:solidFill>
-                  <a:srgbClr val="818CF8"/>
-                </a:solidFill>
-                <a:latin typeface="맑은 고딕" pitchFamily="34" charset="0"/>
-                <a:ea typeface="맑은 고딕" pitchFamily="34" charset="-122"/>
-                <a:cs typeface="맑은 고딕" pitchFamily="34" charset="-120"/>
-              </a:rPr>
-              <a:t>※ 목표/예시 수치 — 실측으로 확정</a:t>
+                  <a:srgbClr val="6B7280"/>
+                </a:solidFill>
+                <a:latin typeface="맑은 고딕" pitchFamily="34" charset="0"/>
+                <a:ea typeface="맑은 고딕" pitchFamily="34" charset="-122"/>
+                <a:cs typeface="맑은 고딕" pitchFamily="34" charset="-120"/>
+              </a:rPr>
+              <a:t>※ 기존 “DB 변경관리”를 대체 — 컨셉(고객 요구사항 기반 문서화)에 맞춰 재정의</a:t>
             </a:r>
             <a:endParaRPr lang="en-US" sz="1200" dirty="0"/>
           </a:p>
@@ -4032,6 +3413,1149 @@
                 <a:ea typeface="맑은 고딕" pitchFamily="34" charset="-122"/>
                 <a:cs typeface="맑은 고딕" pitchFamily="34" charset="-120"/>
               </a:rPr>
+              <a:t>AI</a:t>
+            </a:r>
+            <a:endParaRPr lang="en-US" sz="1200" dirty="0"/>
+          </a:p>
+        </p:txBody>
+      </p:sp>
+      <p:sp>
+        <p:nvSpPr>
+          <p:cNvPr id="3" name="Text 1"/>
+          <p:cNvSpPr/>
+          <p:nvPr/>
+        </p:nvSpPr>
+        <p:spPr>
+          <a:xfrm>
+            <a:off x="566928" y="749808"/>
+            <a:ext cx="10515600" cy="640080"/>
+          </a:xfrm>
+          <a:prstGeom prst="rect">
+            <a:avLst/>
+          </a:prstGeom>
+          <a:noFill/>
+          <a:ln/>
+        </p:spPr>
+        <p:txBody>
+          <a:bodyPr wrap="square" lIns="0" tIns="0" rIns="0" bIns="0" rtlCol="0" anchor="ctr"/>
+          <a:lstStyle/>
+          <a:p>
+            <a:pPr indent="0" marL="0">
+              <a:buNone/>
+            </a:pPr>
+            <a:r>
+              <a:rPr lang="en-US" sz="3000" b="1" dirty="0">
+                <a:solidFill>
+                  <a:srgbClr val="1F2937"/>
+                </a:solidFill>
+                <a:latin typeface="맑은 고딕" pitchFamily="34" charset="0"/>
+                <a:ea typeface="맑은 고딕" pitchFamily="34" charset="-122"/>
+                <a:cs typeface="맑은 고딕" pitchFamily="34" charset="-120"/>
+              </a:rPr>
+              <a:t>AI — 두 엔진 비교</a:t>
+            </a:r>
+            <a:endParaRPr lang="en-US" sz="3000" dirty="0"/>
+          </a:p>
+        </p:txBody>
+      </p:sp>
+      <p:sp>
+        <p:nvSpPr>
+          <p:cNvPr id="4" name="Shape 2"/>
+          <p:cNvSpPr/>
+          <p:nvPr/>
+        </p:nvSpPr>
+        <p:spPr>
+          <a:xfrm>
+            <a:off x="566928" y="1783080"/>
+            <a:ext cx="5440680" cy="2697480"/>
+          </a:xfrm>
+          <a:prstGeom prst="roundRect">
+            <a:avLst>
+              <a:gd name="adj" fmla="val 3390"/>
+            </a:avLst>
+          </a:prstGeom>
+          <a:solidFill>
+            <a:srgbClr val="EEF2FF"/>
+          </a:solidFill>
+          <a:ln w="12700">
+            <a:solidFill>
+              <a:srgbClr val="C7D2FE"/>
+            </a:solidFill>
+            <a:prstDash val="solid"/>
+          </a:ln>
+        </p:spPr>
+      </p:sp>
+      <p:sp>
+        <p:nvSpPr>
+          <p:cNvPr id="5" name="Text 3"/>
+          <p:cNvSpPr/>
+          <p:nvPr/>
+        </p:nvSpPr>
+        <p:spPr>
+          <a:xfrm>
+            <a:off x="886968" y="2011680"/>
+            <a:ext cx="4846320" cy="457200"/>
+          </a:xfrm>
+          <a:prstGeom prst="rect">
+            <a:avLst/>
+          </a:prstGeom>
+          <a:noFill/>
+          <a:ln/>
+        </p:spPr>
+        <p:txBody>
+          <a:bodyPr wrap="square" lIns="0" tIns="0" rIns="0" bIns="0" rtlCol="0" anchor="ctr"/>
+          <a:lstStyle/>
+          <a:p>
+            <a:pPr indent="0" marL="0">
+              <a:buNone/>
+            </a:pPr>
+            <a:r>
+              <a:rPr lang="en-US" sz="1900" b="1" dirty="0">
+                <a:solidFill>
+                  <a:srgbClr val="6366F1"/>
+                </a:solidFill>
+                <a:latin typeface="맑은 고딕" pitchFamily="34" charset="0"/>
+                <a:ea typeface="맑은 고딕" pitchFamily="34" charset="-122"/>
+                <a:cs typeface="맑은 고딕" pitchFamily="34" charset="-120"/>
+              </a:rPr>
+              <a:t>로컬 Qwen3-8B</a:t>
+            </a:r>
+            <a:endParaRPr lang="en-US" sz="1900" dirty="0"/>
+          </a:p>
+        </p:txBody>
+      </p:sp>
+      <p:sp>
+        <p:nvSpPr>
+          <p:cNvPr id="6" name="Text 4"/>
+          <p:cNvSpPr/>
+          <p:nvPr/>
+        </p:nvSpPr>
+        <p:spPr>
+          <a:xfrm>
+            <a:off x="932688" y="2606040"/>
+            <a:ext cx="4754880" cy="1737360"/>
+          </a:xfrm>
+          <a:prstGeom prst="rect">
+            <a:avLst/>
+          </a:prstGeom>
+          <a:noFill/>
+          <a:ln/>
+        </p:spPr>
+        <p:txBody>
+          <a:bodyPr wrap="square" lIns="0" tIns="0" rIns="0" bIns="0" rtlCol="0" anchor="ctr"/>
+          <a:lstStyle/>
+          <a:p>
+            <a:pPr marL="342900" indent="-342900">
+              <a:spcAft>
+                <a:spcPts val="700"/>
+              </a:spcAft>
+              <a:buSzPct val="100000"/>
+              <a:buChar char="•"/>
+            </a:pPr>
+            <a:r>
+              <a:rPr lang="en-US" sz="1300" dirty="0">
+                <a:solidFill>
+                  <a:srgbClr val="1F2937"/>
+                </a:solidFill>
+                <a:latin typeface="맑은 고딕" pitchFamily="34" charset="0"/>
+                <a:ea typeface="맑은 고딕" pitchFamily="34" charset="-122"/>
+                <a:cs typeface="맑은 고딕" pitchFamily="34" charset="-120"/>
+              </a:rPr>
+              <a:t>내 워크스테이션(P4000 8GB)에서 직접</a:t>
+            </a:r>
+            <a:endParaRPr lang="en-US" sz="1300" dirty="0"/>
+          </a:p>
+          <a:p>
+            <a:pPr marL="342900" indent="-342900">
+              <a:spcAft>
+                <a:spcPts val="700"/>
+              </a:spcAft>
+              <a:buSzPct val="100000"/>
+              <a:buChar char="•"/>
+            </a:pPr>
+            <a:r>
+              <a:rPr lang="en-US" sz="1300" dirty="0">
+                <a:solidFill>
+                  <a:srgbClr val="1F2937"/>
+                </a:solidFill>
+                <a:latin typeface="맑은 고딕" pitchFamily="34" charset="0"/>
+                <a:ea typeface="맑은 고딕" pitchFamily="34" charset="-122"/>
+                <a:cs typeface="맑은 고딕" pitchFamily="34" charset="-120"/>
+              </a:rPr>
+              <a:t>8B 모델 · GGUF 양자화 Q5_K_M(≈5.85GB)</a:t>
+            </a:r>
+            <a:endParaRPr lang="en-US" sz="1300" dirty="0"/>
+          </a:p>
+          <a:p>
+            <a:pPr marL="342900" indent="-342900">
+              <a:spcAft>
+                <a:spcPts val="700"/>
+              </a:spcAft>
+              <a:buSzPct val="100000"/>
+              <a:buChar char="•"/>
+            </a:pPr>
+            <a:r>
+              <a:rPr lang="en-US" sz="1300" dirty="0">
+                <a:solidFill>
+                  <a:srgbClr val="1F2937"/>
+                </a:solidFill>
+                <a:latin typeface="맑은 고딕" pitchFamily="34" charset="0"/>
+                <a:ea typeface="맑은 고딕" pitchFamily="34" charset="-122"/>
+                <a:cs typeface="맑은 고딕" pitchFamily="34" charset="-120"/>
+              </a:rPr>
+              <a:t>오프라인 자립 · 한국어 강점</a:t>
+            </a:r>
+            <a:endParaRPr lang="en-US" sz="1300" dirty="0"/>
+          </a:p>
+        </p:txBody>
+      </p:sp>
+      <p:sp>
+        <p:nvSpPr>
+          <p:cNvPr id="7" name="Shape 5"/>
+          <p:cNvSpPr/>
+          <p:nvPr/>
+        </p:nvSpPr>
+        <p:spPr>
+          <a:xfrm>
+            <a:off x="6327648" y="1783080"/>
+            <a:ext cx="5440680" cy="2697480"/>
+          </a:xfrm>
+          <a:prstGeom prst="roundRect">
+            <a:avLst>
+              <a:gd name="adj" fmla="val 3390"/>
+            </a:avLst>
+          </a:prstGeom>
+          <a:solidFill>
+            <a:srgbClr val="F5F3FF"/>
+          </a:solidFill>
+          <a:ln w="12700">
+            <a:solidFill>
+              <a:srgbClr val="DDD6FE"/>
+            </a:solidFill>
+            <a:prstDash val="solid"/>
+          </a:ln>
+        </p:spPr>
+      </p:sp>
+      <p:sp>
+        <p:nvSpPr>
+          <p:cNvPr id="8" name="Text 6"/>
+          <p:cNvSpPr/>
+          <p:nvPr/>
+        </p:nvSpPr>
+        <p:spPr>
+          <a:xfrm>
+            <a:off x="6647688" y="2011680"/>
+            <a:ext cx="4846320" cy="457200"/>
+          </a:xfrm>
+          <a:prstGeom prst="rect">
+            <a:avLst/>
+          </a:prstGeom>
+          <a:noFill/>
+          <a:ln/>
+        </p:spPr>
+        <p:txBody>
+          <a:bodyPr wrap="square" lIns="0" tIns="0" rIns="0" bIns="0" rtlCol="0" anchor="ctr"/>
+          <a:lstStyle/>
+          <a:p>
+            <a:pPr indent="0" marL="0">
+              <a:buNone/>
+            </a:pPr>
+            <a:r>
+              <a:rPr lang="en-US" sz="1900" b="1" dirty="0">
+                <a:solidFill>
+                  <a:srgbClr val="8B5CF6"/>
+                </a:solidFill>
+                <a:latin typeface="맑은 고딕" pitchFamily="34" charset="0"/>
+                <a:ea typeface="맑은 고딕" pitchFamily="34" charset="-122"/>
+                <a:cs typeface="맑은 고딕" pitchFamily="34" charset="-120"/>
+              </a:rPr>
+              <a:t>사내 GPT-OSS-120B</a:t>
+            </a:r>
+            <a:endParaRPr lang="en-US" sz="1900" dirty="0"/>
+          </a:p>
+        </p:txBody>
+      </p:sp>
+      <p:sp>
+        <p:nvSpPr>
+          <p:cNvPr id="9" name="Text 7"/>
+          <p:cNvSpPr/>
+          <p:nvPr/>
+        </p:nvSpPr>
+        <p:spPr>
+          <a:xfrm>
+            <a:off x="6693408" y="2606040"/>
+            <a:ext cx="4754880" cy="1737360"/>
+          </a:xfrm>
+          <a:prstGeom prst="rect">
+            <a:avLst/>
+          </a:prstGeom>
+          <a:noFill/>
+          <a:ln/>
+        </p:spPr>
+        <p:txBody>
+          <a:bodyPr wrap="square" lIns="0" tIns="0" rIns="0" bIns="0" rtlCol="0" anchor="ctr"/>
+          <a:lstStyle/>
+          <a:p>
+            <a:pPr marL="342900" indent="-342900">
+              <a:spcAft>
+                <a:spcPts val="700"/>
+              </a:spcAft>
+              <a:buSzPct val="100000"/>
+              <a:buChar char="•"/>
+            </a:pPr>
+            <a:r>
+              <a:rPr lang="en-US" sz="1300" dirty="0">
+                <a:solidFill>
+                  <a:srgbClr val="1F2937"/>
+                </a:solidFill>
+                <a:latin typeface="맑은 고딕" pitchFamily="34" charset="0"/>
+                <a:ea typeface="맑은 고딕" pitchFamily="34" charset="-122"/>
+                <a:cs typeface="맑은 고딕" pitchFamily="34" charset="-120"/>
+              </a:rPr>
+              <a:t>사내 LLM API 서비스(OpenAI 호환)</a:t>
+            </a:r>
+            <a:endParaRPr lang="en-US" sz="1300" dirty="0"/>
+          </a:p>
+          <a:p>
+            <a:pPr marL="342900" indent="-342900">
+              <a:spcAft>
+                <a:spcPts val="700"/>
+              </a:spcAft>
+              <a:buSzPct val="100000"/>
+              <a:buChar char="•"/>
+            </a:pPr>
+            <a:r>
+              <a:rPr lang="en-US" sz="1300" dirty="0">
+                <a:solidFill>
+                  <a:srgbClr val="1F2937"/>
+                </a:solidFill>
+                <a:latin typeface="맑은 고딕" pitchFamily="34" charset="0"/>
+                <a:ea typeface="맑은 고딕" pitchFamily="34" charset="-122"/>
+                <a:cs typeface="맑은 고딕" pitchFamily="34" charset="-120"/>
+              </a:rPr>
+              <a:t>훨씬 큰 모델 → 어려운 판단 정확도 유리</a:t>
+            </a:r>
+            <a:endParaRPr lang="en-US" sz="1300" dirty="0"/>
+          </a:p>
+          <a:p>
+            <a:pPr marL="342900" indent="-342900">
+              <a:spcAft>
+                <a:spcPts val="700"/>
+              </a:spcAft>
+              <a:buSzPct val="100000"/>
+              <a:buChar char="•"/>
+            </a:pPr>
+            <a:r>
+              <a:rPr lang="en-US" sz="1300" dirty="0">
+                <a:solidFill>
+                  <a:srgbClr val="1F2937"/>
+                </a:solidFill>
+                <a:latin typeface="맑은 고딕" pitchFamily="34" charset="0"/>
+                <a:ea typeface="맑은 고딕" pitchFamily="34" charset="-122"/>
+                <a:cs typeface="맑은 고딕" pitchFamily="34" charset="-120"/>
+              </a:rPr>
+              <a:t>공용 서버 의존</a:t>
+            </a:r>
+            <a:endParaRPr lang="en-US" sz="1300" dirty="0"/>
+          </a:p>
+        </p:txBody>
+      </p:sp>
+      <p:sp>
+        <p:nvSpPr>
+          <p:cNvPr id="10" name="Shape 8"/>
+          <p:cNvSpPr/>
+          <p:nvPr/>
+        </p:nvSpPr>
+        <p:spPr>
+          <a:xfrm>
+            <a:off x="566928" y="4709160"/>
+            <a:ext cx="11064240" cy="1463040"/>
+          </a:xfrm>
+          <a:prstGeom prst="roundRect">
+            <a:avLst>
+              <a:gd name="adj" fmla="val 6250"/>
+            </a:avLst>
+          </a:prstGeom>
+          <a:solidFill>
+            <a:srgbClr val="1E1B4B"/>
+          </a:solidFill>
+          <a:ln/>
+          <a:effectLst>
+            <a:outerShdw sx="100000" sy="100000" kx="0" ky="0" algn="bl" rotWithShape="0" blurRad="127000" dist="50800" dir="5400000">
+              <a:srgbClr val="1E1B4B">
+                <a:alpha val="18000"/>
+              </a:srgbClr>
+            </a:outerShdw>
+          </a:effectLst>
+        </p:spPr>
+      </p:sp>
+      <p:sp>
+        <p:nvSpPr>
+          <p:cNvPr id="11" name="Text 9"/>
+          <p:cNvSpPr/>
+          <p:nvPr/>
+        </p:nvSpPr>
+        <p:spPr>
+          <a:xfrm>
+            <a:off x="886968" y="4892040"/>
+            <a:ext cx="10424160" cy="457200"/>
+          </a:xfrm>
+          <a:prstGeom prst="rect">
+            <a:avLst/>
+          </a:prstGeom>
+          <a:noFill/>
+          <a:ln/>
+        </p:spPr>
+        <p:txBody>
+          <a:bodyPr wrap="square" lIns="0" tIns="0" rIns="0" bIns="0" rtlCol="0" anchor="ctr"/>
+          <a:lstStyle/>
+          <a:p>
+            <a:pPr indent="0" marL="0">
+              <a:buNone/>
+            </a:pPr>
+            <a:r>
+              <a:rPr lang="en-US" sz="1350" b="1" dirty="0">
+                <a:solidFill>
+                  <a:srgbClr val="FFFFFF"/>
+                </a:solidFill>
+                <a:latin typeface="맑은 고딕" pitchFamily="34" charset="0"/>
+                <a:ea typeface="맑은 고딕" pitchFamily="34" charset="-122"/>
+                <a:cs typeface="맑은 고딕" pitchFamily="34" charset="-120"/>
+              </a:rPr>
+              <a:t>응답 시간은 둘 다 3~5초로 비슷</a:t>
+            </a:r>
+            <a:pPr indent="0" marL="0">
+              <a:buNone/>
+            </a:pPr>
+            <a:r>
+              <a:rPr lang="en-US" sz="1350" dirty="0">
+                <a:solidFill>
+                  <a:srgbClr val="C7D2FE"/>
+                </a:solidFill>
+                <a:latin typeface="맑은 고딕" pitchFamily="34" charset="0"/>
+                <a:ea typeface="맑은 고딕" pitchFamily="34" charset="-122"/>
+                <a:cs typeface="맑은 고딕" pitchFamily="34" charset="-120"/>
+              </a:rPr>
+              <a:t> → 속도가 아니라 정확도·자립성으로 선택. 동일 요구사항 세트로 실측 후 확정.</a:t>
+            </a:r>
+            <a:endParaRPr lang="en-US" sz="1350" dirty="0"/>
+          </a:p>
+        </p:txBody>
+      </p:sp>
+      <p:sp>
+        <p:nvSpPr>
+          <p:cNvPr id="12" name="Text 10"/>
+          <p:cNvSpPr/>
+          <p:nvPr/>
+        </p:nvSpPr>
+        <p:spPr>
+          <a:xfrm>
+            <a:off x="886968" y="5440680"/>
+            <a:ext cx="10424160" cy="640080"/>
+          </a:xfrm>
+          <a:prstGeom prst="rect">
+            <a:avLst/>
+          </a:prstGeom>
+          <a:noFill/>
+          <a:ln/>
+        </p:spPr>
+        <p:txBody>
+          <a:bodyPr wrap="square" lIns="0" tIns="0" rIns="0" bIns="0" rtlCol="0" anchor="ctr"/>
+          <a:lstStyle/>
+          <a:p>
+            <a:pPr indent="0" marL="0">
+              <a:lnSpc>
+                <a:spcPct val="105000"/>
+              </a:lnSpc>
+              <a:buNone/>
+            </a:pPr>
+            <a:r>
+              <a:rPr lang="en-US" sz="1250" b="1" dirty="0">
+                <a:solidFill>
+                  <a:srgbClr val="A5B4FC"/>
+                </a:solidFill>
+                <a:latin typeface="맑은 고딕" pitchFamily="34" charset="0"/>
+                <a:ea typeface="맑은 고딕" pitchFamily="34" charset="-122"/>
+                <a:cs typeface="맑은 고딕" pitchFamily="34" charset="-120"/>
+              </a:rPr>
+              <a:t>양자화란?</a:t>
+            </a:r>
+            <a:pPr indent="0" marL="0">
+              <a:lnSpc>
+                <a:spcPct val="105000"/>
+              </a:lnSpc>
+              <a:buNone/>
+            </a:pPr>
+            <a:r>
+              <a:rPr lang="en-US" sz="1250" dirty="0">
+                <a:solidFill>
+                  <a:srgbClr val="C7D2FE"/>
+                </a:solidFill>
+                <a:latin typeface="맑은 고딕" pitchFamily="34" charset="0"/>
+                <a:ea typeface="맑은 고딕" pitchFamily="34" charset="-122"/>
+                <a:cs typeface="맑은 고딕" pitchFamily="34" charset="-120"/>
+              </a:rPr>
+              <a:t>  사진을 JPG로 압축하듯 용량↓·품질 소폭↓. 8B 원본(≈16GB)은 8GB GPU에 못 올라가 5.85GB로 압축해 사용.</a:t>
+            </a:r>
+            <a:endParaRPr lang="en-US" sz="1250" dirty="0"/>
+          </a:p>
+        </p:txBody>
+      </p:sp>
+    </p:spTree>
+  </p:cSld>
+  <p:clrMapOvr>
+    <a:masterClrMapping/>
+  </p:clrMapOvr>
+</p:sld>
+</file>
+
+<file path=ppt/slides/slide14.xml><?xml version="1.0" encoding="utf-8"?>
+<p:sld xmlns:a="http://schemas.openxmlformats.org/drawingml/2006/main" xmlns:r="http://schemas.openxmlformats.org/officeDocument/2006/relationships" xmlns:p="http://schemas.openxmlformats.org/presentationml/2006/main">
+  <p:cSld name="Slide 14">
+    <p:bg>
+      <p:bgPr>
+        <a:solidFill>
+          <a:srgbClr val="1E1B4B"/>
+        </a:solidFill>
+      </p:bgPr>
+    </p:bg>
+    <p:spTree>
+      <p:nvGrpSpPr>
+        <p:cNvPr id="1" name=""/>
+        <p:cNvGrpSpPr/>
+        <p:nvPr/>
+      </p:nvGrpSpPr>
+      <p:grpSpPr>
+        <a:xfrm>
+          <a:off x="0" y="0"/>
+          <a:ext cx="0" cy="0"/>
+          <a:chOff x="0" y="0"/>
+          <a:chExt cx="0" cy="0"/>
+        </a:xfrm>
+      </p:grpSpPr>
+      <p:sp>
+        <p:nvSpPr>
+          <p:cNvPr id="2" name="Text 0"/>
+          <p:cNvSpPr/>
+          <p:nvPr/>
+        </p:nvSpPr>
+        <p:spPr>
+          <a:xfrm>
+            <a:off x="566928" y="502920"/>
+            <a:ext cx="10058400" cy="274320"/>
+          </a:xfrm>
+          <a:prstGeom prst="rect">
+            <a:avLst/>
+          </a:prstGeom>
+          <a:noFill/>
+          <a:ln/>
+        </p:spPr>
+        <p:txBody>
+          <a:bodyPr wrap="square" lIns="0" tIns="0" rIns="0" bIns="0" rtlCol="0" anchor="ctr"/>
+          <a:lstStyle/>
+          <a:p>
+            <a:pPr indent="0" marL="0">
+              <a:buNone/>
+            </a:pPr>
+            <a:r>
+              <a:rPr lang="en-US" sz="1200" b="1" spc="100" kern="0" dirty="0">
+                <a:solidFill>
+                  <a:srgbClr val="A5B4FC"/>
+                </a:solidFill>
+                <a:latin typeface="맑은 고딕" pitchFamily="34" charset="0"/>
+                <a:ea typeface="맑은 고딕" pitchFamily="34" charset="-122"/>
+                <a:cs typeface="맑은 고딕" pitchFamily="34" charset="-120"/>
+              </a:rPr>
+              <a:t>기대 효과</a:t>
+            </a:r>
+            <a:endParaRPr lang="en-US" sz="1200" dirty="0"/>
+          </a:p>
+        </p:txBody>
+      </p:sp>
+      <p:sp>
+        <p:nvSpPr>
+          <p:cNvPr id="3" name="Text 1"/>
+          <p:cNvSpPr/>
+          <p:nvPr/>
+        </p:nvSpPr>
+        <p:spPr>
+          <a:xfrm>
+            <a:off x="566928" y="804672"/>
+            <a:ext cx="10515600" cy="640080"/>
+          </a:xfrm>
+          <a:prstGeom prst="rect">
+            <a:avLst/>
+          </a:prstGeom>
+          <a:noFill/>
+          <a:ln/>
+        </p:spPr>
+        <p:txBody>
+          <a:bodyPr wrap="square" lIns="0" tIns="0" rIns="0" bIns="0" rtlCol="0" anchor="ctr"/>
+          <a:lstStyle/>
+          <a:p>
+            <a:pPr indent="0" marL="0">
+              <a:buNone/>
+            </a:pPr>
+            <a:r>
+              <a:rPr lang="en-US" sz="3000" b="1" dirty="0">
+                <a:solidFill>
+                  <a:srgbClr val="FFFFFF"/>
+                </a:solidFill>
+                <a:latin typeface="맑은 고딕" pitchFamily="34" charset="0"/>
+                <a:ea typeface="맑은 고딕" pitchFamily="34" charset="-122"/>
+                <a:cs typeface="맑은 고딕" pitchFamily="34" charset="-120"/>
+              </a:rPr>
+              <a:t>수작업 문서화 공수를 크게 줄인다</a:t>
+            </a:r>
+            <a:endParaRPr lang="en-US" sz="3000" dirty="0"/>
+          </a:p>
+        </p:txBody>
+      </p:sp>
+      <p:sp>
+        <p:nvSpPr>
+          <p:cNvPr id="4" name="Shape 2"/>
+          <p:cNvSpPr/>
+          <p:nvPr/>
+        </p:nvSpPr>
+        <p:spPr>
+          <a:xfrm>
+            <a:off x="566928" y="1920240"/>
+            <a:ext cx="3529584" cy="3200400"/>
+          </a:xfrm>
+          <a:prstGeom prst="roundRect">
+            <a:avLst>
+              <a:gd name="adj" fmla="val 2857"/>
+            </a:avLst>
+          </a:prstGeom>
+          <a:solidFill>
+            <a:srgbClr val="312E81"/>
+          </a:solidFill>
+          <a:ln w="12700">
+            <a:solidFill>
+              <a:srgbClr val="4338CA"/>
+            </a:solidFill>
+            <a:prstDash val="solid"/>
+          </a:ln>
+        </p:spPr>
+      </p:sp>
+      <p:sp>
+        <p:nvSpPr>
+          <p:cNvPr id="5" name="Text 3"/>
+          <p:cNvSpPr/>
+          <p:nvPr/>
+        </p:nvSpPr>
+        <p:spPr>
+          <a:xfrm>
+            <a:off x="841248" y="2331720"/>
+            <a:ext cx="2980944" cy="548640"/>
+          </a:xfrm>
+          <a:prstGeom prst="rect">
+            <a:avLst/>
+          </a:prstGeom>
+          <a:noFill/>
+          <a:ln/>
+        </p:spPr>
+        <p:txBody>
+          <a:bodyPr wrap="square" lIns="0" tIns="0" rIns="0" bIns="0" rtlCol="0" anchor="ctr"/>
+          <a:lstStyle/>
+          <a:p>
+            <a:pPr indent="0" marL="0">
+              <a:buNone/>
+            </a:pPr>
+            <a:r>
+              <a:rPr lang="en-US" sz="2000" b="1" dirty="0">
+                <a:solidFill>
+                  <a:srgbClr val="C7D2FE"/>
+                </a:solidFill>
+                <a:latin typeface="맑은 고딕" pitchFamily="34" charset="0"/>
+                <a:ea typeface="맑은 고딕" pitchFamily="34" charset="-122"/>
+                <a:cs typeface="맑은 고딕" pitchFamily="34" charset="-120"/>
+              </a:rPr>
+              <a:t>약 2시간</a:t>
+            </a:r>
+            <a:endParaRPr lang="en-US" sz="2000" dirty="0"/>
+          </a:p>
+        </p:txBody>
+      </p:sp>
+      <p:sp>
+        <p:nvSpPr>
+          <p:cNvPr id="6" name="Text 4"/>
+          <p:cNvSpPr/>
+          <p:nvPr/>
+        </p:nvSpPr>
+        <p:spPr>
+          <a:xfrm>
+            <a:off x="841248" y="2926080"/>
+            <a:ext cx="2980944" cy="822960"/>
+          </a:xfrm>
+          <a:prstGeom prst="rect">
+            <a:avLst/>
+          </a:prstGeom>
+          <a:noFill/>
+          <a:ln/>
+        </p:spPr>
+        <p:txBody>
+          <a:bodyPr wrap="square" lIns="0" tIns="0" rIns="0" bIns="0" rtlCol="0" anchor="ctr"/>
+          <a:lstStyle/>
+          <a:p>
+            <a:pPr indent="0" marL="0">
+              <a:buNone/>
+            </a:pPr>
+            <a:r>
+              <a:rPr lang="en-US" sz="3200" b="1" dirty="0">
+                <a:solidFill>
+                  <a:srgbClr val="FFFFFF"/>
+                </a:solidFill>
+                <a:latin typeface="맑은 고딕" pitchFamily="34" charset="0"/>
+                <a:ea typeface="맑은 고딕" pitchFamily="34" charset="-122"/>
+                <a:cs typeface="맑은 고딕" pitchFamily="34" charset="-120"/>
+              </a:rPr>
+              <a:t>→ 약 10초</a:t>
+            </a:r>
+            <a:endParaRPr lang="en-US" sz="3200" dirty="0"/>
+          </a:p>
+        </p:txBody>
+      </p:sp>
+      <p:sp>
+        <p:nvSpPr>
+          <p:cNvPr id="7" name="Text 5"/>
+          <p:cNvSpPr/>
+          <p:nvPr/>
+        </p:nvSpPr>
+        <p:spPr>
+          <a:xfrm>
+            <a:off x="841248" y="4114800"/>
+            <a:ext cx="2980944" cy="822960"/>
+          </a:xfrm>
+          <a:prstGeom prst="rect">
+            <a:avLst/>
+          </a:prstGeom>
+          <a:noFill/>
+          <a:ln/>
+        </p:spPr>
+        <p:txBody>
+          <a:bodyPr wrap="square" lIns="0" tIns="0" rIns="0" bIns="0" rtlCol="0" anchor="ctr"/>
+          <a:lstStyle/>
+          <a:p>
+            <a:pPr indent="0" marL="0">
+              <a:lnSpc>
+                <a:spcPct val="110000"/>
+              </a:lnSpc>
+              <a:buNone/>
+            </a:pPr>
+            <a:r>
+              <a:rPr lang="en-US" sz="1300" dirty="0">
+                <a:solidFill>
+                  <a:srgbClr val="A5B4FC"/>
+                </a:solidFill>
+                <a:latin typeface="맑은 고딕" pitchFamily="34" charset="0"/>
+                <a:ea typeface="맑은 고딕" pitchFamily="34" charset="-122"/>
+                <a:cs typeface="맑은 고딕" pitchFamily="34" charset="-120"/>
+              </a:rPr>
+              <a:t>요구사항 1건의 문서·티켓 초안 작성</a:t>
+            </a:r>
+            <a:endParaRPr lang="en-US" sz="1300" dirty="0"/>
+          </a:p>
+        </p:txBody>
+      </p:sp>
+      <p:sp>
+        <p:nvSpPr>
+          <p:cNvPr id="8" name="Shape 6"/>
+          <p:cNvSpPr/>
+          <p:nvPr/>
+        </p:nvSpPr>
+        <p:spPr>
+          <a:xfrm>
+            <a:off x="4407408" y="1920240"/>
+            <a:ext cx="3529584" cy="3200400"/>
+          </a:xfrm>
+          <a:prstGeom prst="roundRect">
+            <a:avLst>
+              <a:gd name="adj" fmla="val 2857"/>
+            </a:avLst>
+          </a:prstGeom>
+          <a:solidFill>
+            <a:srgbClr val="312E81"/>
+          </a:solidFill>
+          <a:ln w="12700">
+            <a:solidFill>
+              <a:srgbClr val="4338CA"/>
+            </a:solidFill>
+            <a:prstDash val="solid"/>
+          </a:ln>
+        </p:spPr>
+      </p:sp>
+      <p:sp>
+        <p:nvSpPr>
+          <p:cNvPr id="9" name="Text 7"/>
+          <p:cNvSpPr/>
+          <p:nvPr/>
+        </p:nvSpPr>
+        <p:spPr>
+          <a:xfrm>
+            <a:off x="4681728" y="2331720"/>
+            <a:ext cx="2980944" cy="548640"/>
+          </a:xfrm>
+          <a:prstGeom prst="rect">
+            <a:avLst/>
+          </a:prstGeom>
+          <a:noFill/>
+          <a:ln/>
+        </p:spPr>
+        <p:txBody>
+          <a:bodyPr wrap="square" lIns="0" tIns="0" rIns="0" bIns="0" rtlCol="0" anchor="ctr"/>
+          <a:lstStyle/>
+          <a:p>
+            <a:pPr indent="0" marL="0">
+              <a:buNone/>
+            </a:pPr>
+            <a:r>
+              <a:rPr lang="en-US" sz="2000" b="1" dirty="0">
+                <a:solidFill>
+                  <a:srgbClr val="C7D2FE"/>
+                </a:solidFill>
+                <a:latin typeface="맑은 고딕" pitchFamily="34" charset="0"/>
+                <a:ea typeface="맑은 고딕" pitchFamily="34" charset="-122"/>
+                <a:cs typeface="맑은 고딕" pitchFamily="34" charset="-120"/>
+              </a:rPr>
+              <a:t>수동 확인</a:t>
+            </a:r>
+            <a:endParaRPr lang="en-US" sz="2000" dirty="0"/>
+          </a:p>
+        </p:txBody>
+      </p:sp>
+      <p:sp>
+        <p:nvSpPr>
+          <p:cNvPr id="10" name="Text 8"/>
+          <p:cNvSpPr/>
+          <p:nvPr/>
+        </p:nvSpPr>
+        <p:spPr>
+          <a:xfrm>
+            <a:off x="4681728" y="2926080"/>
+            <a:ext cx="2980944" cy="822960"/>
+          </a:xfrm>
+          <a:prstGeom prst="rect">
+            <a:avLst/>
+          </a:prstGeom>
+          <a:noFill/>
+          <a:ln/>
+        </p:spPr>
+        <p:txBody>
+          <a:bodyPr wrap="square" lIns="0" tIns="0" rIns="0" bIns="0" rtlCol="0" anchor="ctr"/>
+          <a:lstStyle/>
+          <a:p>
+            <a:pPr indent="0" marL="0">
+              <a:buNone/>
+            </a:pPr>
+            <a:r>
+              <a:rPr lang="en-US" sz="3200" b="1" dirty="0">
+                <a:solidFill>
+                  <a:srgbClr val="FFFFFF"/>
+                </a:solidFill>
+                <a:latin typeface="맑은 고딕" pitchFamily="34" charset="0"/>
+                <a:ea typeface="맑은 고딕" pitchFamily="34" charset="-122"/>
+                <a:cs typeface="맑은 고딕" pitchFamily="34" charset="-120"/>
+              </a:rPr>
+              <a:t>→ 자동 표시</a:t>
+            </a:r>
+            <a:endParaRPr lang="en-US" sz="3200" dirty="0"/>
+          </a:p>
+        </p:txBody>
+      </p:sp>
+      <p:sp>
+        <p:nvSpPr>
+          <p:cNvPr id="11" name="Text 9"/>
+          <p:cNvSpPr/>
+          <p:nvPr/>
+        </p:nvSpPr>
+        <p:spPr>
+          <a:xfrm>
+            <a:off x="4681728" y="4114800"/>
+            <a:ext cx="2980944" cy="822960"/>
+          </a:xfrm>
+          <a:prstGeom prst="rect">
+            <a:avLst/>
+          </a:prstGeom>
+          <a:noFill/>
+          <a:ln/>
+        </p:spPr>
+        <p:txBody>
+          <a:bodyPr wrap="square" lIns="0" tIns="0" rIns="0" bIns="0" rtlCol="0" anchor="ctr"/>
+          <a:lstStyle/>
+          <a:p>
+            <a:pPr indent="0" marL="0">
+              <a:lnSpc>
+                <a:spcPct val="110000"/>
+              </a:lnSpc>
+              <a:buNone/>
+            </a:pPr>
+            <a:r>
+              <a:rPr lang="en-US" sz="1300" dirty="0">
+                <a:solidFill>
+                  <a:srgbClr val="A5B4FC"/>
+                </a:solidFill>
+                <a:latin typeface="맑은 고딕" pitchFamily="34" charset="0"/>
+                <a:ea typeface="맑은 고딕" pitchFamily="34" charset="-122"/>
+                <a:cs typeface="맑은 고딕" pitchFamily="34" charset="-120"/>
+              </a:rPr>
+              <a:t>요구사항 변경 시 영향받는 문서 파악</a:t>
+            </a:r>
+            <a:endParaRPr lang="en-US" sz="1300" dirty="0"/>
+          </a:p>
+        </p:txBody>
+      </p:sp>
+      <p:sp>
+        <p:nvSpPr>
+          <p:cNvPr id="12" name="Shape 10"/>
+          <p:cNvSpPr/>
+          <p:nvPr/>
+        </p:nvSpPr>
+        <p:spPr>
+          <a:xfrm>
+            <a:off x="8247888" y="1920240"/>
+            <a:ext cx="3529584" cy="3200400"/>
+          </a:xfrm>
+          <a:prstGeom prst="roundRect">
+            <a:avLst>
+              <a:gd name="adj" fmla="val 2857"/>
+            </a:avLst>
+          </a:prstGeom>
+          <a:solidFill>
+            <a:srgbClr val="312E81"/>
+          </a:solidFill>
+          <a:ln w="12700">
+            <a:solidFill>
+              <a:srgbClr val="4338CA"/>
+            </a:solidFill>
+            <a:prstDash val="solid"/>
+          </a:ln>
+        </p:spPr>
+      </p:sp>
+      <p:sp>
+        <p:nvSpPr>
+          <p:cNvPr id="13" name="Text 11"/>
+          <p:cNvSpPr/>
+          <p:nvPr/>
+        </p:nvSpPr>
+        <p:spPr>
+          <a:xfrm>
+            <a:off x="8522208" y="2331720"/>
+            <a:ext cx="2980944" cy="548640"/>
+          </a:xfrm>
+          <a:prstGeom prst="rect">
+            <a:avLst/>
+          </a:prstGeom>
+          <a:noFill/>
+          <a:ln/>
+        </p:spPr>
+        <p:txBody>
+          <a:bodyPr wrap="square" lIns="0" tIns="0" rIns="0" bIns="0" rtlCol="0" anchor="ctr"/>
+          <a:lstStyle/>
+          <a:p>
+            <a:pPr indent="0" marL="0">
+              <a:buNone/>
+            </a:pPr>
+            <a:r>
+              <a:rPr lang="en-US" sz="2000" b="1" dirty="0">
+                <a:solidFill>
+                  <a:srgbClr val="C7D2FE"/>
+                </a:solidFill>
+                <a:latin typeface="맑은 고딕" pitchFamily="34" charset="0"/>
+                <a:ea typeface="맑은 고딕" pitchFamily="34" charset="-122"/>
+                <a:cs typeface="맑은 고딕" pitchFamily="34" charset="-120"/>
+              </a:rPr>
+              <a:t>개발 중 발견</a:t>
+            </a:r>
+            <a:endParaRPr lang="en-US" sz="2000" dirty="0"/>
+          </a:p>
+        </p:txBody>
+      </p:sp>
+      <p:sp>
+        <p:nvSpPr>
+          <p:cNvPr id="14" name="Text 12"/>
+          <p:cNvSpPr/>
+          <p:nvPr/>
+        </p:nvSpPr>
+        <p:spPr>
+          <a:xfrm>
+            <a:off x="8522208" y="2926080"/>
+            <a:ext cx="2980944" cy="822960"/>
+          </a:xfrm>
+          <a:prstGeom prst="rect">
+            <a:avLst/>
+          </a:prstGeom>
+          <a:noFill/>
+          <a:ln/>
+        </p:spPr>
+        <p:txBody>
+          <a:bodyPr wrap="square" lIns="0" tIns="0" rIns="0" bIns="0" rtlCol="0" anchor="ctr"/>
+          <a:lstStyle/>
+          <a:p>
+            <a:pPr indent="0" marL="0">
+              <a:buNone/>
+            </a:pPr>
+            <a:r>
+              <a:rPr lang="en-US" sz="3200" b="1" dirty="0">
+                <a:solidFill>
+                  <a:srgbClr val="FFFFFF"/>
+                </a:solidFill>
+                <a:latin typeface="맑은 고딕" pitchFamily="34" charset="0"/>
+                <a:ea typeface="맑은 고딕" pitchFamily="34" charset="-122"/>
+                <a:cs typeface="맑은 고딕" pitchFamily="34" charset="-120"/>
+              </a:rPr>
+              <a:t>→ 착수 전 발견</a:t>
+            </a:r>
+            <a:endParaRPr lang="en-US" sz="3200" dirty="0"/>
+          </a:p>
+        </p:txBody>
+      </p:sp>
+      <p:sp>
+        <p:nvSpPr>
+          <p:cNvPr id="15" name="Text 13"/>
+          <p:cNvSpPr/>
+          <p:nvPr/>
+        </p:nvSpPr>
+        <p:spPr>
+          <a:xfrm>
+            <a:off x="8522208" y="4114800"/>
+            <a:ext cx="2980944" cy="822960"/>
+          </a:xfrm>
+          <a:prstGeom prst="rect">
+            <a:avLst/>
+          </a:prstGeom>
+          <a:noFill/>
+          <a:ln/>
+        </p:spPr>
+        <p:txBody>
+          <a:bodyPr wrap="square" lIns="0" tIns="0" rIns="0" bIns="0" rtlCol="0" anchor="ctr"/>
+          <a:lstStyle/>
+          <a:p>
+            <a:pPr indent="0" marL="0">
+              <a:lnSpc>
+                <a:spcPct val="110000"/>
+              </a:lnSpc>
+              <a:buNone/>
+            </a:pPr>
+            <a:r>
+              <a:rPr lang="en-US" sz="1300" dirty="0">
+                <a:solidFill>
+                  <a:srgbClr val="A5B4FC"/>
+                </a:solidFill>
+                <a:latin typeface="맑은 고딕" pitchFamily="34" charset="0"/>
+                <a:ea typeface="맑은 고딕" pitchFamily="34" charset="-122"/>
+                <a:cs typeface="맑은 고딕" pitchFamily="34" charset="-120"/>
+              </a:rPr>
+              <a:t>불명확·상충으로 인한 재작업</a:t>
+            </a:r>
+            <a:endParaRPr lang="en-US" sz="1300" dirty="0"/>
+          </a:p>
+        </p:txBody>
+      </p:sp>
+      <p:sp>
+        <p:nvSpPr>
+          <p:cNvPr id="16" name="Text 14"/>
+          <p:cNvSpPr/>
+          <p:nvPr/>
+        </p:nvSpPr>
+        <p:spPr>
+          <a:xfrm>
+            <a:off x="566928" y="5852160"/>
+            <a:ext cx="10058400" cy="365760"/>
+          </a:xfrm>
+          <a:prstGeom prst="rect">
+            <a:avLst/>
+          </a:prstGeom>
+          <a:noFill/>
+          <a:ln/>
+        </p:spPr>
+        <p:txBody>
+          <a:bodyPr wrap="square" lIns="0" tIns="0" rIns="0" bIns="0" rtlCol="0" anchor="ctr"/>
+          <a:lstStyle/>
+          <a:p>
+            <a:pPr indent="0" marL="0">
+              <a:buNone/>
+            </a:pPr>
+            <a:r>
+              <a:rPr lang="en-US" sz="1200" i="1" dirty="0">
+                <a:solidFill>
+                  <a:srgbClr val="818CF8"/>
+                </a:solidFill>
+                <a:latin typeface="맑은 고딕" pitchFamily="34" charset="0"/>
+                <a:ea typeface="맑은 고딕" pitchFamily="34" charset="-122"/>
+                <a:cs typeface="맑은 고딕" pitchFamily="34" charset="-120"/>
+              </a:rPr>
+              <a:t>※ 목표/예시 수치 — 실측으로 확정</a:t>
+            </a:r>
+            <a:endParaRPr lang="en-US" sz="1200" dirty="0"/>
+          </a:p>
+        </p:txBody>
+      </p:sp>
+    </p:spTree>
+  </p:cSld>
+  <p:clrMapOvr>
+    <a:masterClrMapping/>
+  </p:clrMapOvr>
+</p:sld>
+</file>
+
+<file path=ppt/slides/slide15.xml><?xml version="1.0" encoding="utf-8"?>
+<p:sld xmlns:a="http://schemas.openxmlformats.org/drawingml/2006/main" xmlns:r="http://schemas.openxmlformats.org/officeDocument/2006/relationships" xmlns:p="http://schemas.openxmlformats.org/presentationml/2006/main">
+  <p:cSld name="Slide 15">
+    <p:bg>
+      <p:bgPr>
+        <a:solidFill>
+          <a:srgbClr val="FFFFFF"/>
+        </a:solidFill>
+      </p:bgPr>
+    </p:bg>
+    <p:spTree>
+      <p:nvGrpSpPr>
+        <p:cNvPr id="1" name=""/>
+        <p:cNvGrpSpPr/>
+        <p:nvPr/>
+      </p:nvGrpSpPr>
+      <p:grpSpPr>
+        <a:xfrm>
+          <a:off x="0" y="0"/>
+          <a:ext cx="0" cy="0"/>
+          <a:chOff x="0" y="0"/>
+          <a:chExt cx="0" cy="0"/>
+        </a:xfrm>
+      </p:grpSpPr>
+      <p:sp>
+        <p:nvSpPr>
+          <p:cNvPr id="2" name="Text 0"/>
+          <p:cNvSpPr/>
+          <p:nvPr/>
+        </p:nvSpPr>
+        <p:spPr>
+          <a:xfrm>
+            <a:off x="566928" y="457200"/>
+            <a:ext cx="10058400" cy="274320"/>
+          </a:xfrm>
+          <a:prstGeom prst="rect">
+            <a:avLst/>
+          </a:prstGeom>
+          <a:noFill/>
+          <a:ln/>
+        </p:spPr>
+        <p:txBody>
+          <a:bodyPr wrap="square" lIns="0" tIns="0" rIns="0" bIns="0" rtlCol="0" anchor="ctr"/>
+          <a:lstStyle/>
+          <a:p>
+            <a:pPr indent="0" marL="0">
+              <a:buNone/>
+            </a:pPr>
+            <a:r>
+              <a:rPr lang="en-US" sz="1200" b="1" spc="100" kern="0" dirty="0">
+                <a:solidFill>
+                  <a:srgbClr val="6366F1"/>
+                </a:solidFill>
+                <a:latin typeface="맑은 고딕" pitchFamily="34" charset="0"/>
+                <a:ea typeface="맑은 고딕" pitchFamily="34" charset="-122"/>
+                <a:cs typeface="맑은 고딕" pitchFamily="34" charset="-120"/>
+              </a:rPr>
               <a:t>정리</a:t>
             </a:r>
             <a:endParaRPr lang="en-US" sz="1200" dirty="0"/>
@@ -6054,7 +6578,7 @@
                 <a:ea typeface="맑은 고딕" pitchFamily="34" charset="-122"/>
                 <a:cs typeface="맑은 고딕" pitchFamily="34" charset="-120"/>
               </a:rPr>
-              <a:t>시스템 구성 — 백엔드 중심</a:t>
+              <a:t>시스템 구성</a:t>
             </a:r>
             <a:endParaRPr lang="en-US" sz="3000" dirty="0"/>
           </a:p>
@@ -6062,7 +6586,7 @@
       </p:sp>
       <p:pic>
         <p:nvPicPr>
-          <p:cNvPr id="4" name="Image 0" descr="/home/user/semes-superrookie/docs/img/ppt-arch-backend.png">    </p:cNvPr>
+          <p:cNvPr id="4" name="Image 0" descr="/home/user/semes-superrookie/docs/img/ppt-arch2.png">    </p:cNvPr>
           <p:cNvPicPr>
             <a:picLocks noChangeAspect="1"/>
           </p:cNvPicPr>
@@ -6076,8 +6600,8 @@
         </p:blipFill>
         <p:spPr>
           <a:xfrm>
-            <a:off x="960120" y="1600200"/>
-            <a:ext cx="10241280" cy="3694176"/>
+            <a:off x="1293876" y="2011680"/>
+            <a:ext cx="9601200" cy="3127248"/>
           </a:xfrm>
           <a:prstGeom prst="rect">
             <a:avLst/>
@@ -6092,60 +6616,7 @@
         </p:nvSpPr>
         <p:spPr>
           <a:xfrm>
-            <a:off x="566928" y="5532120"/>
-            <a:ext cx="11064240" cy="365760"/>
-          </a:xfrm>
-          <a:prstGeom prst="rect">
-            <a:avLst/>
-          </a:prstGeom>
-          <a:noFill/>
-          <a:ln/>
-        </p:spPr>
-        <p:txBody>
-          <a:bodyPr wrap="square" lIns="0" tIns="0" rIns="0" bIns="0" rtlCol="0" anchor="ctr"/>
-          <a:lstStyle/>
-          <a:p>
-            <a:pPr algn="ctr" indent="0" marL="0">
-              <a:buNone/>
-            </a:pPr>
-            <a:r>
-              <a:rPr lang="en-US" sz="1300" b="1" dirty="0">
-                <a:solidFill>
-                  <a:srgbClr val="1F2937"/>
-                </a:solidFill>
-                <a:latin typeface="맑은 고딕" pitchFamily="34" charset="0"/>
-                <a:ea typeface="맑은 고딕" pitchFamily="34" charset="-122"/>
-                <a:cs typeface="맑은 고딕" pitchFamily="34" charset="-120"/>
-              </a:rPr>
-              <a:t>백엔드가 중심 </a:t>
-            </a:r>
-            <a:pPr algn="ctr" indent="0" marL="0">
-              <a:buNone/>
-            </a:pPr>
-            <a:r>
-              <a:rPr lang="en-US" sz="1300" dirty="0">
-                <a:solidFill>
-                  <a:srgbClr val="6B7280"/>
-                </a:solidFill>
-                <a:latin typeface="맑은 고딕" pitchFamily="34" charset="0"/>
-                <a:ea typeface="맑은 고딕" pitchFamily="34" charset="-122"/>
-                <a:cs typeface="맑은 고딕" pitchFamily="34" charset="-120"/>
-              </a:rPr>
-              <a:t>— 요구사항·산출물·추적성을 관리하고 AI 판정/생성을 중개한다. (구현 프레임워크는 세부사항)</a:t>
-            </a:r>
-            <a:endParaRPr lang="en-US" sz="1300" dirty="0"/>
-          </a:p>
-        </p:txBody>
-      </p:sp>
-      <p:sp>
-        <p:nvSpPr>
-          <p:cNvPr id="6" name="Text 3"/>
-          <p:cNvSpPr/>
-          <p:nvPr/>
-        </p:nvSpPr>
-        <p:spPr>
-          <a:xfrm>
-            <a:off x="566928" y="5943600"/>
+            <a:off x="566928" y="5669280"/>
             <a:ext cx="11064240" cy="365760"/>
           </a:xfrm>
           <a:prstGeom prst="rect">
@@ -6687,7 +7158,7 @@
                 <a:ea typeface="맑은 고딕" pitchFamily="34" charset="-122"/>
                 <a:cs typeface="맑은 고딕" pitchFamily="34" charset="-120"/>
               </a:rPr>
-              <a:t>핵심 기능 2</a:t>
+              <a:t>핵심 기능 1 · 요구사항 검토 ③</a:t>
             </a:r>
             <a:endParaRPr lang="en-US" sz="1200" dirty="0"/>
           </a:p>
@@ -6726,7 +7197,7 @@
                 <a:ea typeface="맑은 고딕" pitchFamily="34" charset="-122"/>
                 <a:cs typeface="맑은 고딕" pitchFamily="34" charset="-120"/>
               </a:rPr>
-              <a:t>문서·티켓 자동 생성</a:t>
+              <a:t>실제 예시 — 검출 &amp; AI 제안</a:t>
             </a:r>
             <a:endParaRPr lang="en-US" sz="3000" dirty="0"/>
           </a:p>
@@ -6740,7 +7211,7 @@
         </p:nvSpPr>
         <p:spPr>
           <a:xfrm>
-            <a:off x="10424160" y="822960"/>
+            <a:off x="9875520" y="822960"/>
             <a:ext cx="1737360" cy="310896"/>
           </a:xfrm>
           <a:prstGeom prst="roundRect">
@@ -6749,7 +7220,7 @@
             </a:avLst>
           </a:prstGeom>
           <a:solidFill>
-            <a:srgbClr val="FEF3C7"/>
+            <a:srgbClr val="D1FAE5"/>
           </a:solidFill>
           <a:ln/>
         </p:spPr>
@@ -6763,795 +7234,42 @@
             <a:r>
               <a:rPr lang="en-US" sz="1100" b="1" dirty="0">
                 <a:solidFill>
-                  <a:srgbClr val="B45309"/>
-                </a:solidFill>
-                <a:latin typeface="맑은 고딕" pitchFamily="34" charset="0"/>
-                <a:ea typeface="맑은 고딕" pitchFamily="34" charset="-122"/>
-                <a:cs typeface="맑은 고딕" pitchFamily="34" charset="-120"/>
-              </a:rPr>
-              <a:t>개발 예정</a:t>
+                  <a:srgbClr val="059669"/>
+                </a:solidFill>
+                <a:latin typeface="맑은 고딕" pitchFamily="34" charset="0"/>
+                <a:ea typeface="맑은 고딕" pitchFamily="34" charset="-122"/>
+                <a:cs typeface="맑은 고딕" pitchFamily="34" charset="-120"/>
+              </a:rPr>
+              <a:t>완료 · 테스트됨</a:t>
             </a:r>
             <a:endParaRPr lang="en-US" sz="1100" dirty="0"/>
           </a:p>
         </p:txBody>
       </p:sp>
-      <p:sp>
-        <p:nvSpPr>
-          <p:cNvPr id="5" name="Text 3"/>
-          <p:cNvSpPr/>
-          <p:nvPr/>
-        </p:nvSpPr>
-        <p:spPr>
-          <a:xfrm>
-            <a:off x="566928" y="1783080"/>
-            <a:ext cx="5486400" cy="365760"/>
-          </a:xfrm>
-          <a:prstGeom prst="rect">
-            <a:avLst/>
-          </a:prstGeom>
-          <a:noFill/>
-          <a:ln/>
-        </p:spPr>
-        <p:txBody>
-          <a:bodyPr wrap="square" lIns="0" tIns="0" rIns="0" bIns="0" rtlCol="0" anchor="ctr"/>
-          <a:lstStyle/>
-          <a:p>
-            <a:pPr indent="0" marL="0">
-              <a:buNone/>
-            </a:pPr>
-            <a:r>
-              <a:rPr lang="en-US" sz="1500" b="1" dirty="0">
-                <a:solidFill>
-                  <a:srgbClr val="1F2937"/>
-                </a:solidFill>
-                <a:latin typeface="맑은 고딕" pitchFamily="34" charset="0"/>
-                <a:ea typeface="맑은 고딕" pitchFamily="34" charset="-122"/>
-                <a:cs typeface="맑은 고딕" pitchFamily="34" charset="-120"/>
-              </a:rPr>
-              <a:t>기능 하나 = Jira 이슈 4종 (+ 비기능요구사항)</a:t>
-            </a:r>
-            <a:endParaRPr lang="en-US" sz="1500" dirty="0"/>
-          </a:p>
-        </p:txBody>
-      </p:sp>
-      <p:sp>
-        <p:nvSpPr>
-          <p:cNvPr id="6" name="Shape 4"/>
-          <p:cNvSpPr/>
-          <p:nvPr/>
-        </p:nvSpPr>
-        <p:spPr>
-          <a:xfrm>
-            <a:off x="566928" y="2286000"/>
-            <a:ext cx="5486400" cy="713232"/>
-          </a:xfrm>
-          <a:prstGeom prst="roundRect">
-            <a:avLst>
-              <a:gd name="adj" fmla="val 7692"/>
-            </a:avLst>
-          </a:prstGeom>
-          <a:solidFill>
-            <a:srgbClr val="EEF2FF"/>
-          </a:solidFill>
-          <a:ln w="12700">
-            <a:solidFill>
-              <a:srgbClr val="C7D2FE"/>
-            </a:solidFill>
-            <a:prstDash val="solid"/>
-          </a:ln>
-        </p:spPr>
-      </p:sp>
-      <p:sp>
-        <p:nvSpPr>
-          <p:cNvPr id="7" name="Text 5"/>
-          <p:cNvSpPr/>
-          <p:nvPr/>
-        </p:nvSpPr>
-        <p:spPr>
-          <a:xfrm>
-            <a:off x="713232" y="2414016"/>
-            <a:ext cx="457200" cy="457200"/>
-          </a:xfrm>
-          <a:prstGeom prst="ellipse">
-            <a:avLst/>
-          </a:prstGeom>
-          <a:solidFill>
-            <a:srgbClr val="6366F1"/>
-          </a:solidFill>
-          <a:ln/>
-        </p:spPr>
-        <p:txBody>
-          <a:bodyPr wrap="square" lIns="0" tIns="0" rIns="0" bIns="0" rtlCol="0" anchor="ctr"/>
-          <a:lstStyle/>
-          <a:p>
-            <a:pPr algn="ctr" indent="0" marL="0">
-              <a:buNone/>
-            </a:pPr>
-            <a:r>
-              <a:rPr lang="en-US" sz="1500" b="1" dirty="0">
-                <a:solidFill>
-                  <a:srgbClr val="FFFFFF"/>
-                </a:solidFill>
-                <a:latin typeface="맑은 고딕" pitchFamily="34" charset="0"/>
-                <a:ea typeface="맑은 고딕" pitchFamily="34" charset="-122"/>
-                <a:cs typeface="맑은 고딕" pitchFamily="34" charset="-120"/>
-              </a:rPr>
-              <a:t>1</a:t>
-            </a:r>
-            <a:endParaRPr lang="en-US" sz="1500" dirty="0"/>
-          </a:p>
-        </p:txBody>
-      </p:sp>
-      <p:sp>
-        <p:nvSpPr>
-          <p:cNvPr id="8" name="Text 6"/>
-          <p:cNvSpPr/>
-          <p:nvPr/>
-        </p:nvSpPr>
-        <p:spPr>
-          <a:xfrm>
-            <a:off x="1298448" y="2304288"/>
-            <a:ext cx="4617720" cy="676656"/>
-          </a:xfrm>
-          <a:prstGeom prst="rect">
-            <a:avLst/>
-          </a:prstGeom>
-          <a:noFill/>
-          <a:ln/>
-        </p:spPr>
-        <p:txBody>
-          <a:bodyPr wrap="square" lIns="0" tIns="0" rIns="0" bIns="0" rtlCol="0" anchor="ctr"/>
-          <a:lstStyle/>
-          <a:p>
-            <a:pPr indent="0" marL="0">
-              <a:buNone/>
-            </a:pPr>
-            <a:r>
-              <a:rPr lang="en-US" sz="1350" b="1" dirty="0">
-                <a:solidFill>
-                  <a:srgbClr val="1F2937"/>
-                </a:solidFill>
-                <a:latin typeface="맑은 고딕" pitchFamily="34" charset="0"/>
-                <a:ea typeface="맑은 고딕" pitchFamily="34" charset="-122"/>
-                <a:cs typeface="맑은 고딕" pitchFamily="34" charset="-120"/>
-              </a:rPr>
-              <a:t>티켓 (기능요구사항)   </a:t>
-            </a:r>
-            <a:pPr indent="0" marL="0">
-              <a:buNone/>
-            </a:pPr>
-            <a:r>
-              <a:rPr lang="en-US" sz="1150" dirty="0">
-                <a:solidFill>
-                  <a:srgbClr val="6B7280"/>
-                </a:solidFill>
-                <a:latin typeface="맑은 고딕" pitchFamily="34" charset="0"/>
-                <a:ea typeface="맑은 고딕" pitchFamily="34" charset="-122"/>
-                <a:cs typeface="맑은 고딕" pitchFamily="34" charset="-120"/>
-              </a:rPr>
-              <a:t>개발 단위가 되는 메인 티켓</a:t>
-            </a:r>
-            <a:endParaRPr lang="en-US" sz="1350" dirty="0"/>
-          </a:p>
-        </p:txBody>
-      </p:sp>
-      <p:sp>
-        <p:nvSpPr>
-          <p:cNvPr id="9" name="Shape 7"/>
-          <p:cNvSpPr/>
-          <p:nvPr/>
-        </p:nvSpPr>
-        <p:spPr>
-          <a:xfrm>
-            <a:off x="566928" y="3108960"/>
-            <a:ext cx="5486400" cy="713232"/>
-          </a:xfrm>
-          <a:prstGeom prst="roundRect">
-            <a:avLst>
-              <a:gd name="adj" fmla="val 7692"/>
-            </a:avLst>
-          </a:prstGeom>
-          <a:solidFill>
-            <a:srgbClr val="EEF2FF"/>
-          </a:solidFill>
-          <a:ln w="12700">
-            <a:solidFill>
-              <a:srgbClr val="C7D2FE"/>
-            </a:solidFill>
-            <a:prstDash val="solid"/>
-          </a:ln>
-        </p:spPr>
-      </p:sp>
-      <p:sp>
-        <p:nvSpPr>
-          <p:cNvPr id="10" name="Text 8"/>
-          <p:cNvSpPr/>
-          <p:nvPr/>
-        </p:nvSpPr>
-        <p:spPr>
-          <a:xfrm>
-            <a:off x="713232" y="3236976"/>
-            <a:ext cx="457200" cy="457200"/>
-          </a:xfrm>
-          <a:prstGeom prst="ellipse">
-            <a:avLst/>
-          </a:prstGeom>
-          <a:solidFill>
-            <a:srgbClr val="6366F1"/>
-          </a:solidFill>
-          <a:ln/>
-        </p:spPr>
-        <p:txBody>
-          <a:bodyPr wrap="square" lIns="0" tIns="0" rIns="0" bIns="0" rtlCol="0" anchor="ctr"/>
-          <a:lstStyle/>
-          <a:p>
-            <a:pPr algn="ctr" indent="0" marL="0">
-              <a:buNone/>
-            </a:pPr>
-            <a:r>
-              <a:rPr lang="en-US" sz="1500" b="1" dirty="0">
-                <a:solidFill>
-                  <a:srgbClr val="FFFFFF"/>
-                </a:solidFill>
-                <a:latin typeface="맑은 고딕" pitchFamily="34" charset="0"/>
-                <a:ea typeface="맑은 고딕" pitchFamily="34" charset="-122"/>
-                <a:cs typeface="맑은 고딕" pitchFamily="34" charset="-120"/>
-              </a:rPr>
-              <a:t>2</a:t>
-            </a:r>
-            <a:endParaRPr lang="en-US" sz="1500" dirty="0"/>
-          </a:p>
-        </p:txBody>
-      </p:sp>
-      <p:sp>
-        <p:nvSpPr>
-          <p:cNvPr id="11" name="Text 9"/>
-          <p:cNvSpPr/>
-          <p:nvPr/>
-        </p:nvSpPr>
-        <p:spPr>
-          <a:xfrm>
-            <a:off x="1298448" y="3127248"/>
-            <a:ext cx="4617720" cy="676656"/>
-          </a:xfrm>
-          <a:prstGeom prst="rect">
-            <a:avLst/>
-          </a:prstGeom>
-          <a:noFill/>
-          <a:ln/>
-        </p:spPr>
-        <p:txBody>
-          <a:bodyPr wrap="square" lIns="0" tIns="0" rIns="0" bIns="0" rtlCol="0" anchor="ctr"/>
-          <a:lstStyle/>
-          <a:p>
-            <a:pPr indent="0" marL="0">
-              <a:buNone/>
-            </a:pPr>
-            <a:r>
-              <a:rPr lang="en-US" sz="1350" b="1" dirty="0">
-                <a:solidFill>
-                  <a:srgbClr val="1F2937"/>
-                </a:solidFill>
-                <a:latin typeface="맑은 고딕" pitchFamily="34" charset="0"/>
-                <a:ea typeface="맑은 고딕" pitchFamily="34" charset="-122"/>
-                <a:cs typeface="맑은 고딕" pitchFamily="34" charset="-120"/>
-              </a:rPr>
-              <a:t>SWVOC (고객요구사항)   </a:t>
-            </a:r>
-            <a:pPr indent="0" marL="0">
-              <a:buNone/>
-            </a:pPr>
-            <a:r>
-              <a:rPr lang="en-US" sz="1150" dirty="0">
-                <a:solidFill>
-                  <a:srgbClr val="6B7280"/>
-                </a:solidFill>
-                <a:latin typeface="맑은 고딕" pitchFamily="34" charset="0"/>
-                <a:ea typeface="맑은 고딕" pitchFamily="34" charset="-122"/>
-                <a:cs typeface="맑은 고딕" pitchFamily="34" charset="-120"/>
-              </a:rPr>
-              <a:t>고객 요구사항 원문·정리</a:t>
-            </a:r>
-            <a:endParaRPr lang="en-US" sz="1350" dirty="0"/>
-          </a:p>
-        </p:txBody>
-      </p:sp>
-      <p:sp>
-        <p:nvSpPr>
-          <p:cNvPr id="12" name="Shape 10"/>
-          <p:cNvSpPr/>
-          <p:nvPr/>
-        </p:nvSpPr>
-        <p:spPr>
-          <a:xfrm>
-            <a:off x="566928" y="3931920"/>
-            <a:ext cx="5486400" cy="713232"/>
-          </a:xfrm>
-          <a:prstGeom prst="roundRect">
-            <a:avLst>
-              <a:gd name="adj" fmla="val 7692"/>
-            </a:avLst>
-          </a:prstGeom>
-          <a:solidFill>
-            <a:srgbClr val="EEF2FF"/>
-          </a:solidFill>
-          <a:ln w="12700">
-            <a:solidFill>
-              <a:srgbClr val="C7D2FE"/>
-            </a:solidFill>
-            <a:prstDash val="solid"/>
-          </a:ln>
-        </p:spPr>
-      </p:sp>
-      <p:sp>
-        <p:nvSpPr>
-          <p:cNvPr id="13" name="Text 11"/>
-          <p:cNvSpPr/>
-          <p:nvPr/>
-        </p:nvSpPr>
-        <p:spPr>
-          <a:xfrm>
-            <a:off x="713232" y="4059936"/>
-            <a:ext cx="457200" cy="457200"/>
-          </a:xfrm>
-          <a:prstGeom prst="ellipse">
-            <a:avLst/>
-          </a:prstGeom>
-          <a:solidFill>
-            <a:srgbClr val="6366F1"/>
-          </a:solidFill>
-          <a:ln/>
-        </p:spPr>
-        <p:txBody>
-          <a:bodyPr wrap="square" lIns="0" tIns="0" rIns="0" bIns="0" rtlCol="0" anchor="ctr"/>
-          <a:lstStyle/>
-          <a:p>
-            <a:pPr algn="ctr" indent="0" marL="0">
-              <a:buNone/>
-            </a:pPr>
-            <a:r>
-              <a:rPr lang="en-US" sz="1500" b="1" dirty="0">
-                <a:solidFill>
-                  <a:srgbClr val="FFFFFF"/>
-                </a:solidFill>
-                <a:latin typeface="맑은 고딕" pitchFamily="34" charset="0"/>
-                <a:ea typeface="맑은 고딕" pitchFamily="34" charset="-122"/>
-                <a:cs typeface="맑은 고딕" pitchFamily="34" charset="-120"/>
-              </a:rPr>
-              <a:t>3</a:t>
-            </a:r>
-            <a:endParaRPr lang="en-US" sz="1500" dirty="0"/>
-          </a:p>
-        </p:txBody>
-      </p:sp>
-      <p:sp>
-        <p:nvSpPr>
-          <p:cNvPr id="14" name="Text 12"/>
-          <p:cNvSpPr/>
-          <p:nvPr/>
-        </p:nvSpPr>
-        <p:spPr>
-          <a:xfrm>
-            <a:off x="1298448" y="3950208"/>
-            <a:ext cx="4617720" cy="676656"/>
-          </a:xfrm>
-          <a:prstGeom prst="rect">
-            <a:avLst/>
-          </a:prstGeom>
-          <a:noFill/>
-          <a:ln/>
-        </p:spPr>
-        <p:txBody>
-          <a:bodyPr wrap="square" lIns="0" tIns="0" rIns="0" bIns="0" rtlCol="0" anchor="ctr"/>
-          <a:lstStyle/>
-          <a:p>
-            <a:pPr indent="0" marL="0">
-              <a:buNone/>
-            </a:pPr>
-            <a:r>
-              <a:rPr lang="en-US" sz="1350" b="1" dirty="0">
-                <a:solidFill>
-                  <a:srgbClr val="1F2937"/>
-                </a:solidFill>
-                <a:latin typeface="맑은 고딕" pitchFamily="34" charset="0"/>
-                <a:ea typeface="맑은 고딕" pitchFamily="34" charset="-122"/>
-                <a:cs typeface="맑은 고딕" pitchFamily="34" charset="-120"/>
-              </a:rPr>
-              <a:t>Function Requirement   </a:t>
-            </a:r>
-            <a:pPr indent="0" marL="0">
-              <a:buNone/>
-            </a:pPr>
-            <a:r>
-              <a:rPr lang="en-US" sz="1150" dirty="0">
-                <a:solidFill>
-                  <a:srgbClr val="6B7280"/>
-                </a:solidFill>
-                <a:latin typeface="맑은 고딕" pitchFamily="34" charset="0"/>
-                <a:ea typeface="맑은 고딕" pitchFamily="34" charset="-122"/>
-                <a:cs typeface="맑은 고딕" pitchFamily="34" charset="-120"/>
-              </a:rPr>
-              <a:t>기능 요구사항 상세</a:t>
-            </a:r>
-            <a:endParaRPr lang="en-US" sz="1350" dirty="0"/>
-          </a:p>
-        </p:txBody>
-      </p:sp>
-      <p:sp>
-        <p:nvSpPr>
-          <p:cNvPr id="15" name="Shape 13"/>
-          <p:cNvSpPr/>
-          <p:nvPr/>
-        </p:nvSpPr>
-        <p:spPr>
-          <a:xfrm>
-            <a:off x="566928" y="4754880"/>
-            <a:ext cx="5486400" cy="713232"/>
-          </a:xfrm>
-          <a:prstGeom prst="roundRect">
-            <a:avLst>
-              <a:gd name="adj" fmla="val 7692"/>
-            </a:avLst>
-          </a:prstGeom>
-          <a:solidFill>
-            <a:srgbClr val="EEF2FF"/>
-          </a:solidFill>
-          <a:ln w="12700">
-            <a:solidFill>
-              <a:srgbClr val="C7D2FE"/>
-            </a:solidFill>
-            <a:prstDash val="solid"/>
-          </a:ln>
-        </p:spPr>
-      </p:sp>
-      <p:sp>
-        <p:nvSpPr>
-          <p:cNvPr id="16" name="Text 14"/>
-          <p:cNvSpPr/>
-          <p:nvPr/>
-        </p:nvSpPr>
-        <p:spPr>
-          <a:xfrm>
-            <a:off x="713232" y="4882896"/>
-            <a:ext cx="457200" cy="457200"/>
-          </a:xfrm>
-          <a:prstGeom prst="ellipse">
-            <a:avLst/>
-          </a:prstGeom>
-          <a:solidFill>
-            <a:srgbClr val="6366F1"/>
-          </a:solidFill>
-          <a:ln/>
-        </p:spPr>
-        <p:txBody>
-          <a:bodyPr wrap="square" lIns="0" tIns="0" rIns="0" bIns="0" rtlCol="0" anchor="ctr"/>
-          <a:lstStyle/>
-          <a:p>
-            <a:pPr algn="ctr" indent="0" marL="0">
-              <a:buNone/>
-            </a:pPr>
-            <a:r>
-              <a:rPr lang="en-US" sz="1500" b="1" dirty="0">
-                <a:solidFill>
-                  <a:srgbClr val="FFFFFF"/>
-                </a:solidFill>
-                <a:latin typeface="맑은 고딕" pitchFamily="34" charset="0"/>
-                <a:ea typeface="맑은 고딕" pitchFamily="34" charset="-122"/>
-                <a:cs typeface="맑은 고딕" pitchFamily="34" charset="-120"/>
-              </a:rPr>
-              <a:t>4</a:t>
-            </a:r>
-            <a:endParaRPr lang="en-US" sz="1500" dirty="0"/>
-          </a:p>
-        </p:txBody>
-      </p:sp>
-      <p:sp>
-        <p:nvSpPr>
-          <p:cNvPr id="17" name="Text 15"/>
-          <p:cNvSpPr/>
-          <p:nvPr/>
-        </p:nvSpPr>
-        <p:spPr>
-          <a:xfrm>
-            <a:off x="1298448" y="4773168"/>
-            <a:ext cx="4617720" cy="676656"/>
-          </a:xfrm>
-          <a:prstGeom prst="rect">
-            <a:avLst/>
-          </a:prstGeom>
-          <a:noFill/>
-          <a:ln/>
-        </p:spPr>
-        <p:txBody>
-          <a:bodyPr wrap="square" lIns="0" tIns="0" rIns="0" bIns="0" rtlCol="0" anchor="ctr"/>
-          <a:lstStyle/>
-          <a:p>
-            <a:pPr indent="0" marL="0">
-              <a:buNone/>
-            </a:pPr>
-            <a:r>
-              <a:rPr lang="en-US" sz="1350" b="1" dirty="0">
-                <a:solidFill>
-                  <a:srgbClr val="1F2937"/>
-                </a:solidFill>
-                <a:latin typeface="맑은 고딕" pitchFamily="34" charset="0"/>
-                <a:ea typeface="맑은 고딕" pitchFamily="34" charset="-122"/>
-                <a:cs typeface="맑은 고딕" pitchFamily="34" charset="-120"/>
-              </a:rPr>
-              <a:t>Detail Design   </a:t>
-            </a:r>
-            <a:pPr indent="0" marL="0">
-              <a:buNone/>
-            </a:pPr>
-            <a:r>
-              <a:rPr lang="en-US" sz="1150" dirty="0">
-                <a:solidFill>
-                  <a:srgbClr val="6B7280"/>
-                </a:solidFill>
-                <a:latin typeface="맑은 고딕" pitchFamily="34" charset="0"/>
-                <a:ea typeface="맑은 고딕" pitchFamily="34" charset="-122"/>
-                <a:cs typeface="맑은 고딕" pitchFamily="34" charset="-120"/>
-              </a:rPr>
-              <a:t>상세설계 — 시퀀스 다이어그램 등</a:t>
-            </a:r>
-            <a:endParaRPr lang="en-US" sz="1350" dirty="0"/>
-          </a:p>
-        </p:txBody>
-      </p:sp>
-      <p:sp>
-        <p:nvSpPr>
-          <p:cNvPr id="18" name="Shape 16"/>
-          <p:cNvSpPr/>
-          <p:nvPr/>
-        </p:nvSpPr>
-        <p:spPr>
-          <a:xfrm>
-            <a:off x="6537960" y="1783080"/>
-            <a:ext cx="5074920" cy="4160520"/>
-          </a:xfrm>
-          <a:prstGeom prst="roundRect">
-            <a:avLst>
-              <a:gd name="adj" fmla="val 2198"/>
-            </a:avLst>
-          </a:prstGeom>
-          <a:solidFill>
-            <a:srgbClr val="FFFFFF"/>
-          </a:solidFill>
-          <a:ln w="12700">
-            <a:solidFill>
-              <a:srgbClr val="E5E7EB"/>
-            </a:solidFill>
-            <a:prstDash val="solid"/>
-          </a:ln>
-          <a:effectLst>
-            <a:outerShdw sx="100000" sy="100000" kx="0" ky="0" algn="bl" rotWithShape="0" blurRad="127000" dist="50800" dir="5400000">
-              <a:srgbClr val="1E1B4B">
-                <a:alpha val="18000"/>
-              </a:srgbClr>
-            </a:outerShdw>
-          </a:effectLst>
-        </p:spPr>
-      </p:sp>
-      <p:sp>
-        <p:nvSpPr>
-          <p:cNvPr id="19" name="Text 17"/>
-          <p:cNvSpPr/>
-          <p:nvPr/>
-        </p:nvSpPr>
-        <p:spPr>
-          <a:xfrm>
-            <a:off x="6812280" y="2011680"/>
-            <a:ext cx="4572000" cy="365760"/>
-          </a:xfrm>
-          <a:prstGeom prst="rect">
-            <a:avLst/>
-          </a:prstGeom>
-          <a:noFill/>
-          <a:ln/>
-        </p:spPr>
-        <p:txBody>
-          <a:bodyPr wrap="square" lIns="0" tIns="0" rIns="0" bIns="0" rtlCol="0" anchor="ctr"/>
-          <a:lstStyle/>
-          <a:p>
-            <a:pPr indent="0" marL="0">
-              <a:buNone/>
-            </a:pPr>
-            <a:r>
-              <a:rPr lang="en-US" sz="1500" b="1" dirty="0">
-                <a:solidFill>
-                  <a:srgbClr val="8B5CF6"/>
-                </a:solidFill>
-                <a:latin typeface="맑은 고딕" pitchFamily="34" charset="0"/>
-                <a:ea typeface="맑은 고딕" pitchFamily="34" charset="-122"/>
-                <a:cs typeface="맑은 고딕" pitchFamily="34" charset="-120"/>
-              </a:rPr>
-              <a:t>어떻게 생성하나</a:t>
-            </a:r>
-            <a:endParaRPr lang="en-US" sz="1500" dirty="0"/>
-          </a:p>
-        </p:txBody>
-      </p:sp>
-      <p:sp>
-        <p:nvSpPr>
-          <p:cNvPr id="20" name="Text 18"/>
-          <p:cNvSpPr/>
-          <p:nvPr/>
-        </p:nvSpPr>
-        <p:spPr>
-          <a:xfrm>
-            <a:off x="6858000" y="2468880"/>
-            <a:ext cx="4572000" cy="3291840"/>
-          </a:xfrm>
-          <a:prstGeom prst="rect">
-            <a:avLst/>
-          </a:prstGeom>
-          <a:noFill/>
-          <a:ln/>
-        </p:spPr>
-        <p:txBody>
-          <a:bodyPr wrap="square" lIns="0" tIns="0" rIns="0" bIns="0" rtlCol="0" anchor="t"/>
-          <a:lstStyle/>
-          <a:p>
-            <a:pPr marL="342900" indent="-342900">
-              <a:spcAft>
-                <a:spcPts val="400"/>
-              </a:spcAft>
-              <a:buSzPct val="100000"/>
-              <a:buChar char="•"/>
-            </a:pPr>
-            <a:r>
-              <a:rPr lang="en-US" sz="1350" b="1" dirty="0">
-                <a:solidFill>
-                  <a:srgbClr val="1F2937"/>
-                </a:solidFill>
-                <a:latin typeface="맑은 고딕" pitchFamily="34" charset="0"/>
-                <a:ea typeface="맑은 고딕" pitchFamily="34" charset="-122"/>
-                <a:cs typeface="맑은 고딕" pitchFamily="34" charset="-120"/>
-              </a:rPr>
-              <a:t>정해진 양식(템플릿) 고정</a:t>
-            </a:r>
-            <a:endParaRPr lang="en-US" sz="1350" dirty="0"/>
-          </a:p>
-          <a:p>
-            <a:pPr lvl="1" indent="0" marL="0">
-              <a:spcAft>
-                <a:spcPts val="1000"/>
-              </a:spcAft>
-              <a:buNone/>
-            </a:pPr>
-            <a:r>
-              <a:rPr lang="en-US" sz="1200" dirty="0">
-                <a:solidFill>
-                  <a:srgbClr val="6B7280"/>
-                </a:solidFill>
-                <a:latin typeface="맑은 고딕" pitchFamily="34" charset="0"/>
-                <a:ea typeface="맑은 고딕" pitchFamily="34" charset="-122"/>
-                <a:cs typeface="맑은 고딕" pitchFamily="34" charset="-120"/>
-              </a:rPr>
-              <a:t>각 산출물의 필드·구조를 템플릿으로 미리 정의</a:t>
-            </a:r>
-            <a:endParaRPr lang="en-US" sz="1350" dirty="0"/>
-          </a:p>
-          <a:p>
-            <a:pPr marL="342900" indent="-342900">
-              <a:spcAft>
-                <a:spcPts val="400"/>
-              </a:spcAft>
-              <a:buSzPct val="100000"/>
-              <a:buChar char="•"/>
-            </a:pPr>
-            <a:r>
-              <a:rPr lang="en-US" sz="1350" b="1" dirty="0">
-                <a:solidFill>
-                  <a:srgbClr val="1F2937"/>
-                </a:solidFill>
-                <a:latin typeface="맑은 고딕" pitchFamily="34" charset="0"/>
-                <a:ea typeface="맑은 고딕" pitchFamily="34" charset="-122"/>
-                <a:cs typeface="맑은 고딕" pitchFamily="34" charset="-120"/>
-              </a:rPr>
-              <a:t>산출물 유형별 프롬프트 사전 작성</a:t>
-            </a:r>
-            <a:endParaRPr lang="en-US" sz="1350" dirty="0"/>
-          </a:p>
-          <a:p>
-            <a:pPr lvl="1" indent="0" marL="0">
-              <a:spcAft>
-                <a:spcPts val="1000"/>
-              </a:spcAft>
-              <a:buNone/>
-            </a:pPr>
-            <a:r>
-              <a:rPr lang="en-US" sz="1200" dirty="0">
-                <a:solidFill>
-                  <a:srgbClr val="6B7280"/>
-                </a:solidFill>
-                <a:latin typeface="맑은 고딕" pitchFamily="34" charset="0"/>
-                <a:ea typeface="맑은 고딕" pitchFamily="34" charset="-122"/>
-                <a:cs typeface="맑은 고딕" pitchFamily="34" charset="-120"/>
-              </a:rPr>
-              <a:t>예) Detail Design → 시퀀스 다이어그램 자동 생성</a:t>
-            </a:r>
-            <a:endParaRPr lang="en-US" sz="1350" dirty="0"/>
-          </a:p>
-          <a:p>
-            <a:pPr marL="342900" indent="-342900">
-              <a:spcAft>
-                <a:spcPts val="400"/>
-              </a:spcAft>
-              <a:buSzPct val="100000"/>
-              <a:buChar char="•"/>
-            </a:pPr>
-            <a:r>
-              <a:rPr lang="en-US" sz="1350" b="1" dirty="0">
-                <a:solidFill>
-                  <a:srgbClr val="1F2937"/>
-                </a:solidFill>
-                <a:latin typeface="맑은 고딕" pitchFamily="34" charset="0"/>
-                <a:ea typeface="맑은 고딕" pitchFamily="34" charset="-122"/>
-                <a:cs typeface="맑은 고딕" pitchFamily="34" charset="-120"/>
-              </a:rPr>
-              <a:t>AI 결과는 항상 “초안”</a:t>
-            </a:r>
-            <a:endParaRPr lang="en-US" sz="1350" dirty="0"/>
-          </a:p>
-          <a:p>
-            <a:pPr lvl="1" indent="0" marL="0">
-              <a:buNone/>
-            </a:pPr>
-            <a:r>
-              <a:rPr lang="en-US" sz="1200" dirty="0">
-                <a:solidFill>
-                  <a:srgbClr val="6B7280"/>
-                </a:solidFill>
-                <a:latin typeface="맑은 고딕" pitchFamily="34" charset="0"/>
-                <a:ea typeface="맑은 고딕" pitchFamily="34" charset="-122"/>
-                <a:cs typeface="맑은 고딕" pitchFamily="34" charset="-120"/>
-              </a:rPr>
-              <a:t>담당자가 틀 위에서 편집·추가·삭제</a:t>
-            </a:r>
-            <a:endParaRPr lang="en-US" sz="1350" dirty="0"/>
-          </a:p>
-        </p:txBody>
-      </p:sp>
-      <p:sp>
-        <p:nvSpPr>
-          <p:cNvPr id="21" name="Text 19"/>
-          <p:cNvSpPr/>
-          <p:nvPr/>
-        </p:nvSpPr>
-        <p:spPr>
-          <a:xfrm>
-            <a:off x="566928" y="6035040"/>
-            <a:ext cx="10972800" cy="320040"/>
-          </a:xfrm>
-          <a:prstGeom prst="rect">
-            <a:avLst/>
-          </a:prstGeom>
-          <a:noFill/>
-          <a:ln/>
-        </p:spPr>
-        <p:txBody>
-          <a:bodyPr wrap="square" lIns="0" tIns="0" rIns="0" bIns="0" rtlCol="0" anchor="ctr"/>
-          <a:lstStyle/>
-          <a:p>
-            <a:pPr indent="0" marL="0">
-              <a:buNone/>
-            </a:pPr>
-            <a:r>
-              <a:rPr lang="en-US" sz="1250" b="1" i="1" dirty="0">
-                <a:solidFill>
-                  <a:srgbClr val="6366F1"/>
-                </a:solidFill>
-                <a:latin typeface="맑은 고딕" pitchFamily="34" charset="0"/>
-                <a:ea typeface="맑은 고딕" pitchFamily="34" charset="-122"/>
-                <a:cs typeface="맑은 고딕" pitchFamily="34" charset="-120"/>
-              </a:rPr>
-              <a:t>→ 다음 장: req-tf-01 하나에서 실제로 도출한 예시</a:t>
-            </a:r>
-            <a:endParaRPr lang="en-US" sz="1250" dirty="0"/>
-          </a:p>
-        </p:txBody>
-      </p:sp>
+      <p:pic>
+        <p:nvPicPr>
+          <p:cNvPr id="5" name="Image 0" descr="/home/user/semes-superrookie/docs/img/ppt-review-real-1.png">    </p:cNvPr>
+          <p:cNvPicPr>
+            <a:picLocks noChangeAspect="1"/>
+          </p:cNvPicPr>
+          <p:nvPr/>
+        </p:nvPicPr>
+        <p:blipFill>
+          <a:blip r:embed="rId1"/>
+          <a:stretch>
+            <a:fillRect/>
+          </a:stretch>
+        </p:blipFill>
+        <p:spPr>
+          <a:xfrm>
+            <a:off x="379476" y="1737360"/>
+            <a:ext cx="11430000" cy="4445813"/>
+          </a:xfrm>
+          <a:prstGeom prst="rect">
+            <a:avLst/>
+          </a:prstGeom>
+        </p:spPr>
+      </p:pic>
     </p:spTree>
   </p:cSld>
   <p:clrMapOvr>
@@ -7617,7 +7335,7 @@
                 <a:ea typeface="맑은 고딕" pitchFamily="34" charset="-122"/>
                 <a:cs typeface="맑은 고딕" pitchFamily="34" charset="-120"/>
               </a:rPr>
-              <a:t>핵심 기능 2 · 도출 예시 ①</a:t>
+              <a:t>핵심 기능 1 · 요구사항 검토 ④</a:t>
             </a:r>
             <a:endParaRPr lang="en-US" sz="1200" dirty="0"/>
           </a:p>
@@ -7656,15 +7374,58 @@
                 <a:ea typeface="맑은 고딕" pitchFamily="34" charset="-122"/>
                 <a:cs typeface="맑은 고딕" pitchFamily="34" charset="-120"/>
               </a:rPr>
-              <a:t>요구사항 하나 → 기능 · 비기능 요구사항</a:t>
+              <a:t>실제 예시 — Before / After</a:t>
             </a:r>
             <a:endParaRPr lang="en-US" sz="3000" dirty="0"/>
+          </a:p>
+        </p:txBody>
+      </p:sp>
+      <p:sp>
+        <p:nvSpPr>
+          <p:cNvPr id="4" name="Text 2"/>
+          <p:cNvSpPr/>
+          <p:nvPr/>
+        </p:nvSpPr>
+        <p:spPr>
+          <a:xfrm>
+            <a:off x="9875520" y="822960"/>
+            <a:ext cx="1737360" cy="310896"/>
+          </a:xfrm>
+          <a:prstGeom prst="roundRect">
+            <a:avLst>
+              <a:gd name="adj" fmla="val 47059"/>
+            </a:avLst>
+          </a:prstGeom>
+          <a:solidFill>
+            <a:srgbClr val="D1FAE5"/>
+          </a:solidFill>
+          <a:ln/>
+        </p:spPr>
+        <p:txBody>
+          <a:bodyPr wrap="square" lIns="0" tIns="0" rIns="0" bIns="0" rtlCol="0" anchor="ctr"/>
+          <a:lstStyle/>
+          <a:p>
+            <a:pPr algn="ctr" indent="0" marL="0">
+              <a:buNone/>
+            </a:pPr>
+            <a:r>
+              <a:rPr lang="en-US" sz="1100" b="1" dirty="0">
+                <a:solidFill>
+                  <a:srgbClr val="059669"/>
+                </a:solidFill>
+                <a:latin typeface="맑은 고딕" pitchFamily="34" charset="0"/>
+                <a:ea typeface="맑은 고딕" pitchFamily="34" charset="-122"/>
+                <a:cs typeface="맑은 고딕" pitchFamily="34" charset="-120"/>
+              </a:rPr>
+              <a:t>완료 · 테스트됨</a:t>
+            </a:r>
+            <a:endParaRPr lang="en-US" sz="1100" dirty="0"/>
           </a:p>
         </p:txBody>
       </p:sp>
       <p:pic>
         <p:nvPicPr>
-          <p:cNvPr id="4" name="Image 0" descr="/home/user/semes-superrookie/docs/img/ppt-derive-1.png">    </p:cNvPr>
+          <p:cNvPr id="5" name="Image 0" descr="/home/user/semes-superrookie/docs/img/ppt-review-real-2.png">    </p:cNvPr>
           <p:cNvPicPr>
             <a:picLocks noChangeAspect="1"/>
           </p:cNvPicPr>
@@ -7678,8 +7439,8 @@
         </p:blipFill>
         <p:spPr>
           <a:xfrm>
-            <a:off x="836676" y="1828800"/>
-            <a:ext cx="10515600" cy="3927348"/>
+            <a:off x="379476" y="2103120"/>
+            <a:ext cx="11430000" cy="3160166"/>
           </a:xfrm>
           <a:prstGeom prst="rect">
             <a:avLst/>
@@ -7688,13 +7449,13 @@
       </p:pic>
       <p:sp>
         <p:nvSpPr>
-          <p:cNvPr id="5" name="Text 2"/>
-          <p:cNvSpPr/>
-          <p:nvPr/>
-        </p:nvSpPr>
-        <p:spPr>
-          <a:xfrm>
-            <a:off x="566928" y="5943600"/>
+          <p:cNvPr id="6" name="Text 3"/>
+          <p:cNvSpPr/>
+          <p:nvPr/>
+        </p:nvSpPr>
+        <p:spPr>
+          <a:xfrm>
+            <a:off x="566928" y="5577840"/>
             <a:ext cx="11064240" cy="365760"/>
           </a:xfrm>
           <a:prstGeom prst="rect">
@@ -7719,7 +7480,7 @@
                 <a:ea typeface="맑은 고딕" pitchFamily="34" charset="-122"/>
                 <a:cs typeface="맑은 고딕" pitchFamily="34" charset="-120"/>
               </a:rPr>
-              <a:t>req-tf-01(신규 태스크 생성) 한 건에서 기능요구사항 6건 · 비기능요구사항 5건을 자동 도출 (AI 초안)</a:t>
+              <a:t>req-ta-01「태스크 할당 기준」을 검출·제안·협의로 명확화한 결과 — 이전 요구사항과 비교·보관</a:t>
             </a:r>
             <a:endParaRPr lang="en-US" sz="1250" dirty="0"/>
           </a:p>
@@ -7790,7 +7551,7 @@
                 <a:ea typeface="맑은 고딕" pitchFamily="34" charset="-122"/>
                 <a:cs typeface="맑은 고딕" pitchFamily="34" charset="-120"/>
               </a:rPr>
-              <a:t>핵심 기능 2 · 도출 예시 ②</a:t>
+              <a:t>핵심 기능 2</a:t>
             </a:r>
             <a:endParaRPr lang="en-US" sz="1200" dirty="0"/>
           </a:p>
@@ -7829,51 +7590,31 @@
                 <a:ea typeface="맑은 고딕" pitchFamily="34" charset="-122"/>
                 <a:cs typeface="맑은 고딕" pitchFamily="34" charset="-120"/>
               </a:rPr>
-              <a:t>요구사항 하나 → Jira 티켓 4종</a:t>
+              <a:t>문서·티켓 자동 생성</a:t>
             </a:r>
             <a:endParaRPr lang="en-US" sz="3000" dirty="0"/>
           </a:p>
         </p:txBody>
       </p:sp>
-      <p:pic>
-        <p:nvPicPr>
-          <p:cNvPr id="4" name="Image 0" descr="/home/user/semes-superrookie/docs/img/ppt-derive-2.png">    </p:cNvPr>
-          <p:cNvPicPr>
-            <a:picLocks noChangeAspect="1"/>
-          </p:cNvPicPr>
-          <p:nvPr/>
-        </p:nvPicPr>
-        <p:blipFill>
-          <a:blip r:embed="rId1"/>
-          <a:stretch>
-            <a:fillRect/>
-          </a:stretch>
-        </p:blipFill>
-        <p:spPr>
-          <a:xfrm>
-            <a:off x="836676" y="1691640"/>
-            <a:ext cx="10515600" cy="4453128"/>
-          </a:xfrm>
-          <a:prstGeom prst="rect">
-            <a:avLst/>
-          </a:prstGeom>
-        </p:spPr>
-      </p:pic>
-      <p:sp>
-        <p:nvSpPr>
-          <p:cNvPr id="5" name="Text 2"/>
-          <p:cNvSpPr/>
-          <p:nvPr/>
-        </p:nvSpPr>
-        <p:spPr>
-          <a:xfrm>
-            <a:off x="566928" y="6263640"/>
-            <a:ext cx="11064240" cy="365760"/>
-          </a:xfrm>
-          <a:prstGeom prst="rect">
-            <a:avLst/>
-          </a:prstGeom>
-          <a:noFill/>
+      <p:sp>
+        <p:nvSpPr>
+          <p:cNvPr id="4" name="Text 2"/>
+          <p:cNvSpPr/>
+          <p:nvPr/>
+        </p:nvSpPr>
+        <p:spPr>
+          <a:xfrm>
+            <a:off x="10424160" y="822960"/>
+            <a:ext cx="1737360" cy="310896"/>
+          </a:xfrm>
+          <a:prstGeom prst="roundRect">
+            <a:avLst>
+              <a:gd name="adj" fmla="val 47059"/>
+            </a:avLst>
+          </a:prstGeom>
+          <a:solidFill>
+            <a:srgbClr val="FEF3C7"/>
+          </a:solidFill>
           <a:ln/>
         </p:spPr>
         <p:txBody>
@@ -7884,6 +7625,665 @@
               <a:buNone/>
             </a:pPr>
             <a:r>
+              <a:rPr lang="en-US" sz="1100" b="1" dirty="0">
+                <a:solidFill>
+                  <a:srgbClr val="B45309"/>
+                </a:solidFill>
+                <a:latin typeface="맑은 고딕" pitchFamily="34" charset="0"/>
+                <a:ea typeface="맑은 고딕" pitchFamily="34" charset="-122"/>
+                <a:cs typeface="맑은 고딕" pitchFamily="34" charset="-120"/>
+              </a:rPr>
+              <a:t>개발 예정</a:t>
+            </a:r>
+            <a:endParaRPr lang="en-US" sz="1100" dirty="0"/>
+          </a:p>
+        </p:txBody>
+      </p:sp>
+      <p:sp>
+        <p:nvSpPr>
+          <p:cNvPr id="5" name="Text 3"/>
+          <p:cNvSpPr/>
+          <p:nvPr/>
+        </p:nvSpPr>
+        <p:spPr>
+          <a:xfrm>
+            <a:off x="566928" y="1783080"/>
+            <a:ext cx="5486400" cy="365760"/>
+          </a:xfrm>
+          <a:prstGeom prst="rect">
+            <a:avLst/>
+          </a:prstGeom>
+          <a:noFill/>
+          <a:ln/>
+        </p:spPr>
+        <p:txBody>
+          <a:bodyPr wrap="square" lIns="0" tIns="0" rIns="0" bIns="0" rtlCol="0" anchor="ctr"/>
+          <a:lstStyle/>
+          <a:p>
+            <a:pPr indent="0" marL="0">
+              <a:buNone/>
+            </a:pPr>
+            <a:r>
+              <a:rPr lang="en-US" sz="1500" b="1" dirty="0">
+                <a:solidFill>
+                  <a:srgbClr val="1F2937"/>
+                </a:solidFill>
+                <a:latin typeface="맑은 고딕" pitchFamily="34" charset="0"/>
+                <a:ea typeface="맑은 고딕" pitchFamily="34" charset="-122"/>
+                <a:cs typeface="맑은 고딕" pitchFamily="34" charset="-120"/>
+              </a:rPr>
+              <a:t>기능 하나 = Jira 이슈 4종 (+ 비기능요구사항)</a:t>
+            </a:r>
+            <a:endParaRPr lang="en-US" sz="1500" dirty="0"/>
+          </a:p>
+        </p:txBody>
+      </p:sp>
+      <p:sp>
+        <p:nvSpPr>
+          <p:cNvPr id="6" name="Shape 4"/>
+          <p:cNvSpPr/>
+          <p:nvPr/>
+        </p:nvSpPr>
+        <p:spPr>
+          <a:xfrm>
+            <a:off x="566928" y="2286000"/>
+            <a:ext cx="5486400" cy="713232"/>
+          </a:xfrm>
+          <a:prstGeom prst="roundRect">
+            <a:avLst>
+              <a:gd name="adj" fmla="val 7692"/>
+            </a:avLst>
+          </a:prstGeom>
+          <a:solidFill>
+            <a:srgbClr val="EEF2FF"/>
+          </a:solidFill>
+          <a:ln w="12700">
+            <a:solidFill>
+              <a:srgbClr val="C7D2FE"/>
+            </a:solidFill>
+            <a:prstDash val="solid"/>
+          </a:ln>
+        </p:spPr>
+      </p:sp>
+      <p:sp>
+        <p:nvSpPr>
+          <p:cNvPr id="7" name="Text 5"/>
+          <p:cNvSpPr/>
+          <p:nvPr/>
+        </p:nvSpPr>
+        <p:spPr>
+          <a:xfrm>
+            <a:off x="713232" y="2414016"/>
+            <a:ext cx="457200" cy="457200"/>
+          </a:xfrm>
+          <a:prstGeom prst="ellipse">
+            <a:avLst/>
+          </a:prstGeom>
+          <a:solidFill>
+            <a:srgbClr val="6366F1"/>
+          </a:solidFill>
+          <a:ln/>
+        </p:spPr>
+        <p:txBody>
+          <a:bodyPr wrap="square" lIns="0" tIns="0" rIns="0" bIns="0" rtlCol="0" anchor="ctr"/>
+          <a:lstStyle/>
+          <a:p>
+            <a:pPr algn="ctr" indent="0" marL="0">
+              <a:buNone/>
+            </a:pPr>
+            <a:r>
+              <a:rPr lang="en-US" sz="1500" b="1" dirty="0">
+                <a:solidFill>
+                  <a:srgbClr val="FFFFFF"/>
+                </a:solidFill>
+                <a:latin typeface="맑은 고딕" pitchFamily="34" charset="0"/>
+                <a:ea typeface="맑은 고딕" pitchFamily="34" charset="-122"/>
+                <a:cs typeface="맑은 고딕" pitchFamily="34" charset="-120"/>
+              </a:rPr>
+              <a:t>1</a:t>
+            </a:r>
+            <a:endParaRPr lang="en-US" sz="1500" dirty="0"/>
+          </a:p>
+        </p:txBody>
+      </p:sp>
+      <p:sp>
+        <p:nvSpPr>
+          <p:cNvPr id="8" name="Text 6"/>
+          <p:cNvSpPr/>
+          <p:nvPr/>
+        </p:nvSpPr>
+        <p:spPr>
+          <a:xfrm>
+            <a:off x="1298448" y="2304288"/>
+            <a:ext cx="4617720" cy="676656"/>
+          </a:xfrm>
+          <a:prstGeom prst="rect">
+            <a:avLst/>
+          </a:prstGeom>
+          <a:noFill/>
+          <a:ln/>
+        </p:spPr>
+        <p:txBody>
+          <a:bodyPr wrap="square" lIns="0" tIns="0" rIns="0" bIns="0" rtlCol="0" anchor="ctr"/>
+          <a:lstStyle/>
+          <a:p>
+            <a:pPr indent="0" marL="0">
+              <a:buNone/>
+            </a:pPr>
+            <a:r>
+              <a:rPr lang="en-US" sz="1350" b="1" dirty="0">
+                <a:solidFill>
+                  <a:srgbClr val="1F2937"/>
+                </a:solidFill>
+                <a:latin typeface="맑은 고딕" pitchFamily="34" charset="0"/>
+                <a:ea typeface="맑은 고딕" pitchFamily="34" charset="-122"/>
+                <a:cs typeface="맑은 고딕" pitchFamily="34" charset="-120"/>
+              </a:rPr>
+              <a:t>티켓 (기능요구사항)   </a:t>
+            </a:r>
+            <a:pPr indent="0" marL="0">
+              <a:buNone/>
+            </a:pPr>
+            <a:r>
+              <a:rPr lang="en-US" sz="1150" dirty="0">
+                <a:solidFill>
+                  <a:srgbClr val="6B7280"/>
+                </a:solidFill>
+                <a:latin typeface="맑은 고딕" pitchFamily="34" charset="0"/>
+                <a:ea typeface="맑은 고딕" pitchFamily="34" charset="-122"/>
+                <a:cs typeface="맑은 고딕" pitchFamily="34" charset="-120"/>
+              </a:rPr>
+              <a:t>개발 단위가 되는 메인 티켓</a:t>
+            </a:r>
+            <a:endParaRPr lang="en-US" sz="1350" dirty="0"/>
+          </a:p>
+        </p:txBody>
+      </p:sp>
+      <p:sp>
+        <p:nvSpPr>
+          <p:cNvPr id="9" name="Shape 7"/>
+          <p:cNvSpPr/>
+          <p:nvPr/>
+        </p:nvSpPr>
+        <p:spPr>
+          <a:xfrm>
+            <a:off x="566928" y="3108960"/>
+            <a:ext cx="5486400" cy="713232"/>
+          </a:xfrm>
+          <a:prstGeom prst="roundRect">
+            <a:avLst>
+              <a:gd name="adj" fmla="val 7692"/>
+            </a:avLst>
+          </a:prstGeom>
+          <a:solidFill>
+            <a:srgbClr val="EEF2FF"/>
+          </a:solidFill>
+          <a:ln w="12700">
+            <a:solidFill>
+              <a:srgbClr val="C7D2FE"/>
+            </a:solidFill>
+            <a:prstDash val="solid"/>
+          </a:ln>
+        </p:spPr>
+      </p:sp>
+      <p:sp>
+        <p:nvSpPr>
+          <p:cNvPr id="10" name="Text 8"/>
+          <p:cNvSpPr/>
+          <p:nvPr/>
+        </p:nvSpPr>
+        <p:spPr>
+          <a:xfrm>
+            <a:off x="713232" y="3236976"/>
+            <a:ext cx="457200" cy="457200"/>
+          </a:xfrm>
+          <a:prstGeom prst="ellipse">
+            <a:avLst/>
+          </a:prstGeom>
+          <a:solidFill>
+            <a:srgbClr val="6366F1"/>
+          </a:solidFill>
+          <a:ln/>
+        </p:spPr>
+        <p:txBody>
+          <a:bodyPr wrap="square" lIns="0" tIns="0" rIns="0" bIns="0" rtlCol="0" anchor="ctr"/>
+          <a:lstStyle/>
+          <a:p>
+            <a:pPr algn="ctr" indent="0" marL="0">
+              <a:buNone/>
+            </a:pPr>
+            <a:r>
+              <a:rPr lang="en-US" sz="1500" b="1" dirty="0">
+                <a:solidFill>
+                  <a:srgbClr val="FFFFFF"/>
+                </a:solidFill>
+                <a:latin typeface="맑은 고딕" pitchFamily="34" charset="0"/>
+                <a:ea typeface="맑은 고딕" pitchFamily="34" charset="-122"/>
+                <a:cs typeface="맑은 고딕" pitchFamily="34" charset="-120"/>
+              </a:rPr>
+              <a:t>2</a:t>
+            </a:r>
+            <a:endParaRPr lang="en-US" sz="1500" dirty="0"/>
+          </a:p>
+        </p:txBody>
+      </p:sp>
+      <p:sp>
+        <p:nvSpPr>
+          <p:cNvPr id="11" name="Text 9"/>
+          <p:cNvSpPr/>
+          <p:nvPr/>
+        </p:nvSpPr>
+        <p:spPr>
+          <a:xfrm>
+            <a:off x="1298448" y="3127248"/>
+            <a:ext cx="4617720" cy="676656"/>
+          </a:xfrm>
+          <a:prstGeom prst="rect">
+            <a:avLst/>
+          </a:prstGeom>
+          <a:noFill/>
+          <a:ln/>
+        </p:spPr>
+        <p:txBody>
+          <a:bodyPr wrap="square" lIns="0" tIns="0" rIns="0" bIns="0" rtlCol="0" anchor="ctr"/>
+          <a:lstStyle/>
+          <a:p>
+            <a:pPr indent="0" marL="0">
+              <a:buNone/>
+            </a:pPr>
+            <a:r>
+              <a:rPr lang="en-US" sz="1350" b="1" dirty="0">
+                <a:solidFill>
+                  <a:srgbClr val="1F2937"/>
+                </a:solidFill>
+                <a:latin typeface="맑은 고딕" pitchFamily="34" charset="0"/>
+                <a:ea typeface="맑은 고딕" pitchFamily="34" charset="-122"/>
+                <a:cs typeface="맑은 고딕" pitchFamily="34" charset="-120"/>
+              </a:rPr>
+              <a:t>SWVOC (고객요구사항)   </a:t>
+            </a:r>
+            <a:pPr indent="0" marL="0">
+              <a:buNone/>
+            </a:pPr>
+            <a:r>
+              <a:rPr lang="en-US" sz="1150" dirty="0">
+                <a:solidFill>
+                  <a:srgbClr val="6B7280"/>
+                </a:solidFill>
+                <a:latin typeface="맑은 고딕" pitchFamily="34" charset="0"/>
+                <a:ea typeface="맑은 고딕" pitchFamily="34" charset="-122"/>
+                <a:cs typeface="맑은 고딕" pitchFamily="34" charset="-120"/>
+              </a:rPr>
+              <a:t>고객 요구사항 원문·정리</a:t>
+            </a:r>
+            <a:endParaRPr lang="en-US" sz="1350" dirty="0"/>
+          </a:p>
+        </p:txBody>
+      </p:sp>
+      <p:sp>
+        <p:nvSpPr>
+          <p:cNvPr id="12" name="Shape 10"/>
+          <p:cNvSpPr/>
+          <p:nvPr/>
+        </p:nvSpPr>
+        <p:spPr>
+          <a:xfrm>
+            <a:off x="566928" y="3931920"/>
+            <a:ext cx="5486400" cy="713232"/>
+          </a:xfrm>
+          <a:prstGeom prst="roundRect">
+            <a:avLst>
+              <a:gd name="adj" fmla="val 7692"/>
+            </a:avLst>
+          </a:prstGeom>
+          <a:solidFill>
+            <a:srgbClr val="EEF2FF"/>
+          </a:solidFill>
+          <a:ln w="12700">
+            <a:solidFill>
+              <a:srgbClr val="C7D2FE"/>
+            </a:solidFill>
+            <a:prstDash val="solid"/>
+          </a:ln>
+        </p:spPr>
+      </p:sp>
+      <p:sp>
+        <p:nvSpPr>
+          <p:cNvPr id="13" name="Text 11"/>
+          <p:cNvSpPr/>
+          <p:nvPr/>
+        </p:nvSpPr>
+        <p:spPr>
+          <a:xfrm>
+            <a:off x="713232" y="4059936"/>
+            <a:ext cx="457200" cy="457200"/>
+          </a:xfrm>
+          <a:prstGeom prst="ellipse">
+            <a:avLst/>
+          </a:prstGeom>
+          <a:solidFill>
+            <a:srgbClr val="6366F1"/>
+          </a:solidFill>
+          <a:ln/>
+        </p:spPr>
+        <p:txBody>
+          <a:bodyPr wrap="square" lIns="0" tIns="0" rIns="0" bIns="0" rtlCol="0" anchor="ctr"/>
+          <a:lstStyle/>
+          <a:p>
+            <a:pPr algn="ctr" indent="0" marL="0">
+              <a:buNone/>
+            </a:pPr>
+            <a:r>
+              <a:rPr lang="en-US" sz="1500" b="1" dirty="0">
+                <a:solidFill>
+                  <a:srgbClr val="FFFFFF"/>
+                </a:solidFill>
+                <a:latin typeface="맑은 고딕" pitchFamily="34" charset="0"/>
+                <a:ea typeface="맑은 고딕" pitchFamily="34" charset="-122"/>
+                <a:cs typeface="맑은 고딕" pitchFamily="34" charset="-120"/>
+              </a:rPr>
+              <a:t>3</a:t>
+            </a:r>
+            <a:endParaRPr lang="en-US" sz="1500" dirty="0"/>
+          </a:p>
+        </p:txBody>
+      </p:sp>
+      <p:sp>
+        <p:nvSpPr>
+          <p:cNvPr id="14" name="Text 12"/>
+          <p:cNvSpPr/>
+          <p:nvPr/>
+        </p:nvSpPr>
+        <p:spPr>
+          <a:xfrm>
+            <a:off x="1298448" y="3950208"/>
+            <a:ext cx="4617720" cy="676656"/>
+          </a:xfrm>
+          <a:prstGeom prst="rect">
+            <a:avLst/>
+          </a:prstGeom>
+          <a:noFill/>
+          <a:ln/>
+        </p:spPr>
+        <p:txBody>
+          <a:bodyPr wrap="square" lIns="0" tIns="0" rIns="0" bIns="0" rtlCol="0" anchor="ctr"/>
+          <a:lstStyle/>
+          <a:p>
+            <a:pPr indent="0" marL="0">
+              <a:buNone/>
+            </a:pPr>
+            <a:r>
+              <a:rPr lang="en-US" sz="1350" b="1" dirty="0">
+                <a:solidFill>
+                  <a:srgbClr val="1F2937"/>
+                </a:solidFill>
+                <a:latin typeface="맑은 고딕" pitchFamily="34" charset="0"/>
+                <a:ea typeface="맑은 고딕" pitchFamily="34" charset="-122"/>
+                <a:cs typeface="맑은 고딕" pitchFamily="34" charset="-120"/>
+              </a:rPr>
+              <a:t>Function Requirement   </a:t>
+            </a:r>
+            <a:pPr indent="0" marL="0">
+              <a:buNone/>
+            </a:pPr>
+            <a:r>
+              <a:rPr lang="en-US" sz="1150" dirty="0">
+                <a:solidFill>
+                  <a:srgbClr val="6B7280"/>
+                </a:solidFill>
+                <a:latin typeface="맑은 고딕" pitchFamily="34" charset="0"/>
+                <a:ea typeface="맑은 고딕" pitchFamily="34" charset="-122"/>
+                <a:cs typeface="맑은 고딕" pitchFamily="34" charset="-120"/>
+              </a:rPr>
+              <a:t>기능 요구사항 상세</a:t>
+            </a:r>
+            <a:endParaRPr lang="en-US" sz="1350" dirty="0"/>
+          </a:p>
+        </p:txBody>
+      </p:sp>
+      <p:sp>
+        <p:nvSpPr>
+          <p:cNvPr id="15" name="Shape 13"/>
+          <p:cNvSpPr/>
+          <p:nvPr/>
+        </p:nvSpPr>
+        <p:spPr>
+          <a:xfrm>
+            <a:off x="566928" y="4754880"/>
+            <a:ext cx="5486400" cy="713232"/>
+          </a:xfrm>
+          <a:prstGeom prst="roundRect">
+            <a:avLst>
+              <a:gd name="adj" fmla="val 7692"/>
+            </a:avLst>
+          </a:prstGeom>
+          <a:solidFill>
+            <a:srgbClr val="EEF2FF"/>
+          </a:solidFill>
+          <a:ln w="12700">
+            <a:solidFill>
+              <a:srgbClr val="C7D2FE"/>
+            </a:solidFill>
+            <a:prstDash val="solid"/>
+          </a:ln>
+        </p:spPr>
+      </p:sp>
+      <p:sp>
+        <p:nvSpPr>
+          <p:cNvPr id="16" name="Text 14"/>
+          <p:cNvSpPr/>
+          <p:nvPr/>
+        </p:nvSpPr>
+        <p:spPr>
+          <a:xfrm>
+            <a:off x="713232" y="4882896"/>
+            <a:ext cx="457200" cy="457200"/>
+          </a:xfrm>
+          <a:prstGeom prst="ellipse">
+            <a:avLst/>
+          </a:prstGeom>
+          <a:solidFill>
+            <a:srgbClr val="6366F1"/>
+          </a:solidFill>
+          <a:ln/>
+        </p:spPr>
+        <p:txBody>
+          <a:bodyPr wrap="square" lIns="0" tIns="0" rIns="0" bIns="0" rtlCol="0" anchor="ctr"/>
+          <a:lstStyle/>
+          <a:p>
+            <a:pPr algn="ctr" indent="0" marL="0">
+              <a:buNone/>
+            </a:pPr>
+            <a:r>
+              <a:rPr lang="en-US" sz="1500" b="1" dirty="0">
+                <a:solidFill>
+                  <a:srgbClr val="FFFFFF"/>
+                </a:solidFill>
+                <a:latin typeface="맑은 고딕" pitchFamily="34" charset="0"/>
+                <a:ea typeface="맑은 고딕" pitchFamily="34" charset="-122"/>
+                <a:cs typeface="맑은 고딕" pitchFamily="34" charset="-120"/>
+              </a:rPr>
+              <a:t>4</a:t>
+            </a:r>
+            <a:endParaRPr lang="en-US" sz="1500" dirty="0"/>
+          </a:p>
+        </p:txBody>
+      </p:sp>
+      <p:sp>
+        <p:nvSpPr>
+          <p:cNvPr id="17" name="Text 15"/>
+          <p:cNvSpPr/>
+          <p:nvPr/>
+        </p:nvSpPr>
+        <p:spPr>
+          <a:xfrm>
+            <a:off x="1298448" y="4773168"/>
+            <a:ext cx="4617720" cy="676656"/>
+          </a:xfrm>
+          <a:prstGeom prst="rect">
+            <a:avLst/>
+          </a:prstGeom>
+          <a:noFill/>
+          <a:ln/>
+        </p:spPr>
+        <p:txBody>
+          <a:bodyPr wrap="square" lIns="0" tIns="0" rIns="0" bIns="0" rtlCol="0" anchor="ctr"/>
+          <a:lstStyle/>
+          <a:p>
+            <a:pPr indent="0" marL="0">
+              <a:buNone/>
+            </a:pPr>
+            <a:r>
+              <a:rPr lang="en-US" sz="1350" b="1" dirty="0">
+                <a:solidFill>
+                  <a:srgbClr val="1F2937"/>
+                </a:solidFill>
+                <a:latin typeface="맑은 고딕" pitchFamily="34" charset="0"/>
+                <a:ea typeface="맑은 고딕" pitchFamily="34" charset="-122"/>
+                <a:cs typeface="맑은 고딕" pitchFamily="34" charset="-120"/>
+              </a:rPr>
+              <a:t>Detail Design   </a:t>
+            </a:r>
+            <a:pPr indent="0" marL="0">
+              <a:buNone/>
+            </a:pPr>
+            <a:r>
+              <a:rPr lang="en-US" sz="1150" dirty="0">
+                <a:solidFill>
+                  <a:srgbClr val="6B7280"/>
+                </a:solidFill>
+                <a:latin typeface="맑은 고딕" pitchFamily="34" charset="0"/>
+                <a:ea typeface="맑은 고딕" pitchFamily="34" charset="-122"/>
+                <a:cs typeface="맑은 고딕" pitchFamily="34" charset="-120"/>
+              </a:rPr>
+              <a:t>상세설계 — 시퀀스 다이어그램 등</a:t>
+            </a:r>
+            <a:endParaRPr lang="en-US" sz="1350" dirty="0"/>
+          </a:p>
+        </p:txBody>
+      </p:sp>
+      <p:sp>
+        <p:nvSpPr>
+          <p:cNvPr id="18" name="Shape 16"/>
+          <p:cNvSpPr/>
+          <p:nvPr/>
+        </p:nvSpPr>
+        <p:spPr>
+          <a:xfrm>
+            <a:off x="6537960" y="1783080"/>
+            <a:ext cx="5074920" cy="4160520"/>
+          </a:xfrm>
+          <a:prstGeom prst="roundRect">
+            <a:avLst>
+              <a:gd name="adj" fmla="val 2198"/>
+            </a:avLst>
+          </a:prstGeom>
+          <a:solidFill>
+            <a:srgbClr val="FFFFFF"/>
+          </a:solidFill>
+          <a:ln w="12700">
+            <a:solidFill>
+              <a:srgbClr val="E5E7EB"/>
+            </a:solidFill>
+            <a:prstDash val="solid"/>
+          </a:ln>
+          <a:effectLst>
+            <a:outerShdw sx="100000" sy="100000" kx="0" ky="0" algn="bl" rotWithShape="0" blurRad="127000" dist="50800" dir="5400000">
+              <a:srgbClr val="1E1B4B">
+                <a:alpha val="18000"/>
+              </a:srgbClr>
+            </a:outerShdw>
+          </a:effectLst>
+        </p:spPr>
+      </p:sp>
+      <p:sp>
+        <p:nvSpPr>
+          <p:cNvPr id="19" name="Text 17"/>
+          <p:cNvSpPr/>
+          <p:nvPr/>
+        </p:nvSpPr>
+        <p:spPr>
+          <a:xfrm>
+            <a:off x="6812280" y="2011680"/>
+            <a:ext cx="4572000" cy="365760"/>
+          </a:xfrm>
+          <a:prstGeom prst="rect">
+            <a:avLst/>
+          </a:prstGeom>
+          <a:noFill/>
+          <a:ln/>
+        </p:spPr>
+        <p:txBody>
+          <a:bodyPr wrap="square" lIns="0" tIns="0" rIns="0" bIns="0" rtlCol="0" anchor="ctr"/>
+          <a:lstStyle/>
+          <a:p>
+            <a:pPr indent="0" marL="0">
+              <a:buNone/>
+            </a:pPr>
+            <a:r>
+              <a:rPr lang="en-US" sz="1500" b="1" dirty="0">
+                <a:solidFill>
+                  <a:srgbClr val="8B5CF6"/>
+                </a:solidFill>
+                <a:latin typeface="맑은 고딕" pitchFamily="34" charset="0"/>
+                <a:ea typeface="맑은 고딕" pitchFamily="34" charset="-122"/>
+                <a:cs typeface="맑은 고딕" pitchFamily="34" charset="-120"/>
+              </a:rPr>
+              <a:t>어떻게 생성하나</a:t>
+            </a:r>
+            <a:endParaRPr lang="en-US" sz="1500" dirty="0"/>
+          </a:p>
+        </p:txBody>
+      </p:sp>
+      <p:sp>
+        <p:nvSpPr>
+          <p:cNvPr id="20" name="Text 18"/>
+          <p:cNvSpPr/>
+          <p:nvPr/>
+        </p:nvSpPr>
+        <p:spPr>
+          <a:xfrm>
+            <a:off x="6858000" y="2468880"/>
+            <a:ext cx="4572000" cy="3291840"/>
+          </a:xfrm>
+          <a:prstGeom prst="rect">
+            <a:avLst/>
+          </a:prstGeom>
+          <a:noFill/>
+          <a:ln/>
+        </p:spPr>
+        <p:txBody>
+          <a:bodyPr wrap="square" lIns="0" tIns="0" rIns="0" bIns="0" rtlCol="0" anchor="t"/>
+          <a:lstStyle/>
+          <a:p>
+            <a:pPr marL="342900" indent="-342900">
+              <a:spcAft>
+                <a:spcPts val="400"/>
+              </a:spcAft>
+              <a:buSzPct val="100000"/>
+              <a:buChar char="•"/>
+            </a:pPr>
+            <a:r>
+              <a:rPr lang="en-US" sz="1350" b="1" dirty="0">
+                <a:solidFill>
+                  <a:srgbClr val="1F2937"/>
+                </a:solidFill>
+                <a:latin typeface="맑은 고딕" pitchFamily="34" charset="0"/>
+                <a:ea typeface="맑은 고딕" pitchFamily="34" charset="-122"/>
+                <a:cs typeface="맑은 고딕" pitchFamily="34" charset="-120"/>
+              </a:rPr>
+              <a:t>정해진 양식(템플릿) 고정</a:t>
+            </a:r>
+            <a:endParaRPr lang="en-US" sz="1350" dirty="0"/>
+          </a:p>
+          <a:p>
+            <a:pPr lvl="1" indent="0" marL="0">
+              <a:spcAft>
+                <a:spcPts val="1000"/>
+              </a:spcAft>
+              <a:buNone/>
+            </a:pPr>
+            <a:r>
               <a:rPr lang="en-US" sz="1200" dirty="0">
                 <a:solidFill>
                   <a:srgbClr val="6B7280"/>
@@ -7892,9 +8292,127 @@
                 <a:ea typeface="맑은 고딕" pitchFamily="34" charset="-122"/>
                 <a:cs typeface="맑은 고딕" pitchFamily="34" charset="-120"/>
               </a:rPr>
-              <a:t>정해진 양식(템플릿)+사전 프롬프트로 4종 이슈 초안 생성 · Detail Design은 시퀀스 다이어그램까지 자동</a:t>
-            </a:r>
-            <a:endParaRPr lang="en-US" sz="1200" dirty="0"/>
+              <a:t>각 산출물의 필드·구조를 템플릿으로 미리 정의</a:t>
+            </a:r>
+            <a:endParaRPr lang="en-US" sz="1350" dirty="0"/>
+          </a:p>
+          <a:p>
+            <a:pPr marL="342900" indent="-342900">
+              <a:spcAft>
+                <a:spcPts val="400"/>
+              </a:spcAft>
+              <a:buSzPct val="100000"/>
+              <a:buChar char="•"/>
+            </a:pPr>
+            <a:r>
+              <a:rPr lang="en-US" sz="1350" b="1" dirty="0">
+                <a:solidFill>
+                  <a:srgbClr val="1F2937"/>
+                </a:solidFill>
+                <a:latin typeface="맑은 고딕" pitchFamily="34" charset="0"/>
+                <a:ea typeface="맑은 고딕" pitchFamily="34" charset="-122"/>
+                <a:cs typeface="맑은 고딕" pitchFamily="34" charset="-120"/>
+              </a:rPr>
+              <a:t>산출물 유형별 프롬프트 사전 작성</a:t>
+            </a:r>
+            <a:endParaRPr lang="en-US" sz="1350" dirty="0"/>
+          </a:p>
+          <a:p>
+            <a:pPr lvl="1" indent="0" marL="0">
+              <a:spcAft>
+                <a:spcPts val="1000"/>
+              </a:spcAft>
+              <a:buNone/>
+            </a:pPr>
+            <a:r>
+              <a:rPr lang="en-US" sz="1200" dirty="0">
+                <a:solidFill>
+                  <a:srgbClr val="6B7280"/>
+                </a:solidFill>
+                <a:latin typeface="맑은 고딕" pitchFamily="34" charset="0"/>
+                <a:ea typeface="맑은 고딕" pitchFamily="34" charset="-122"/>
+                <a:cs typeface="맑은 고딕" pitchFamily="34" charset="-120"/>
+              </a:rPr>
+              <a:t>예) Detail Design → 시퀀스 다이어그램 자동 생성</a:t>
+            </a:r>
+            <a:endParaRPr lang="en-US" sz="1350" dirty="0"/>
+          </a:p>
+          <a:p>
+            <a:pPr marL="342900" indent="-342900">
+              <a:spcAft>
+                <a:spcPts val="400"/>
+              </a:spcAft>
+              <a:buSzPct val="100000"/>
+              <a:buChar char="•"/>
+            </a:pPr>
+            <a:r>
+              <a:rPr lang="en-US" sz="1350" b="1" dirty="0">
+                <a:solidFill>
+                  <a:srgbClr val="1F2937"/>
+                </a:solidFill>
+                <a:latin typeface="맑은 고딕" pitchFamily="34" charset="0"/>
+                <a:ea typeface="맑은 고딕" pitchFamily="34" charset="-122"/>
+                <a:cs typeface="맑은 고딕" pitchFamily="34" charset="-120"/>
+              </a:rPr>
+              <a:t>AI 결과는 항상 “초안”</a:t>
+            </a:r>
+            <a:endParaRPr lang="en-US" sz="1350" dirty="0"/>
+          </a:p>
+          <a:p>
+            <a:pPr lvl="1" indent="0" marL="0">
+              <a:buNone/>
+            </a:pPr>
+            <a:r>
+              <a:rPr lang="en-US" sz="1200" dirty="0">
+                <a:solidFill>
+                  <a:srgbClr val="6B7280"/>
+                </a:solidFill>
+                <a:latin typeface="맑은 고딕" pitchFamily="34" charset="0"/>
+                <a:ea typeface="맑은 고딕" pitchFamily="34" charset="-122"/>
+                <a:cs typeface="맑은 고딕" pitchFamily="34" charset="-120"/>
+              </a:rPr>
+              <a:t>담당자가 틀 위에서 편집·추가·삭제</a:t>
+            </a:r>
+            <a:endParaRPr lang="en-US" sz="1350" dirty="0"/>
+          </a:p>
+        </p:txBody>
+      </p:sp>
+      <p:sp>
+        <p:nvSpPr>
+          <p:cNvPr id="21" name="Text 19"/>
+          <p:cNvSpPr/>
+          <p:nvPr/>
+        </p:nvSpPr>
+        <p:spPr>
+          <a:xfrm>
+            <a:off x="566928" y="6035040"/>
+            <a:ext cx="10972800" cy="320040"/>
+          </a:xfrm>
+          <a:prstGeom prst="rect">
+            <a:avLst/>
+          </a:prstGeom>
+          <a:noFill/>
+          <a:ln/>
+        </p:spPr>
+        <p:txBody>
+          <a:bodyPr wrap="square" lIns="0" tIns="0" rIns="0" bIns="0" rtlCol="0" anchor="ctr"/>
+          <a:lstStyle/>
+          <a:p>
+            <a:pPr indent="0" marL="0">
+              <a:buNone/>
+            </a:pPr>
+            <a:r>
+              <a:rPr lang="en-US" sz="1250" b="1" i="1" dirty="0">
+                <a:solidFill>
+                  <a:srgbClr val="6366F1"/>
+                </a:solidFill>
+                <a:latin typeface="맑은 고딕" pitchFamily="34" charset="0"/>
+                <a:ea typeface="맑은 고딕" pitchFamily="34" charset="-122"/>
+                <a:cs typeface="맑은 고딕" pitchFamily="34" charset="-120"/>
+              </a:rPr>
+              <a:t>→ 다음 장: req-tf-01 하나에서 실제로 도출한 예시</a:t>
+            </a:r>
+            <a:endParaRPr lang="en-US" sz="1250" dirty="0"/>
           </a:p>
         </p:txBody>
       </p:sp>

--- a/docs/진행공유_요구사항자동화.pptx
+++ b/docs/진행공유_요구사항자동화.pptx
@@ -6578,7 +6578,7 @@
                 <a:ea typeface="맑은 고딕" pitchFamily="34" charset="-122"/>
                 <a:cs typeface="맑은 고딕" pitchFamily="34" charset="-120"/>
               </a:rPr>
-              <a:t>시스템 구성</a:t>
+              <a:t>폐쇄망 안 3계층 + 데이터베이스</a:t>
             </a:r>
             <a:endParaRPr lang="en-US" sz="3000" dirty="0"/>
           </a:p>
@@ -6600,67 +6600,14 @@
         </p:blipFill>
         <p:spPr>
           <a:xfrm>
-            <a:off x="1293876" y="2011680"/>
-            <a:ext cx="9601200" cy="3127248"/>
+            <a:off x="2436876" y="1691640"/>
+            <a:ext cx="7315200" cy="4220870"/>
           </a:xfrm>
           <a:prstGeom prst="rect">
             <a:avLst/>
           </a:prstGeom>
         </p:spPr>
       </p:pic>
-      <p:sp>
-        <p:nvSpPr>
-          <p:cNvPr id="5" name="Text 2"/>
-          <p:cNvSpPr/>
-          <p:nvPr/>
-        </p:nvSpPr>
-        <p:spPr>
-          <a:xfrm>
-            <a:off x="566928" y="5669280"/>
-            <a:ext cx="11064240" cy="365760"/>
-          </a:xfrm>
-          <a:prstGeom prst="rect">
-            <a:avLst/>
-          </a:prstGeom>
-          <a:noFill/>
-          <a:ln/>
-        </p:spPr>
-        <p:txBody>
-          <a:bodyPr wrap="square" lIns="0" tIns="0" rIns="0" bIns="0" rtlCol="0" anchor="ctr"/>
-          <a:lstStyle/>
-          <a:p>
-            <a:pPr algn="ctr" indent="0" marL="0">
-              <a:buNone/>
-            </a:pPr>
-            <a:r>
-              <a:rPr lang="en-US" sz="1300" b="1" dirty="0">
-                <a:solidFill>
-                  <a:srgbClr val="8B5CF6"/>
-                </a:solidFill>
-                <a:latin typeface="맑은 고딕" pitchFamily="34" charset="0"/>
-                <a:ea typeface="맑은 고딕" pitchFamily="34" charset="-122"/>
-                <a:cs typeface="맑은 고딕" pitchFamily="34" charset="-120"/>
-              </a:rPr>
-              <a:t>반출 차단 환경 </a:t>
-            </a:r>
-            <a:pPr algn="ctr" indent="0" marL="0">
-              <a:buNone/>
-            </a:pPr>
-            <a:r>
-              <a:rPr lang="en-US" sz="1300" dirty="0">
-                <a:solidFill>
-                  <a:srgbClr val="6B7280"/>
-                </a:solidFill>
-                <a:latin typeface="맑은 고딕" pitchFamily="34" charset="0"/>
-                <a:ea typeface="맑은 고딕" pitchFamily="34" charset="-122"/>
-                <a:cs typeface="맑은 고딕" pitchFamily="34" charset="-120"/>
-              </a:rPr>
-              <a:t>— 외부 AI API(GPT·Claude) 불가 → 사내 로컬/사내 API 모델만 사용</a:t>
-            </a:r>
-            <a:endParaRPr lang="en-US" sz="1300" dirty="0"/>
-          </a:p>
-        </p:txBody>
-      </p:sp>
     </p:spTree>
   </p:cSld>
   <p:clrMapOvr>

--- a/docs/진행공유_요구사항자동화.pptx
+++ b/docs/진행공유_요구사항자동화.pptx
@@ -20,9 +20,10 @@
     <p:sldId id="268" r:id="rId14"/>
     <p:sldId id="269" r:id="rId15"/>
     <p:sldId id="270" r:id="rId16"/>
+    <p:sldId id="271" r:id="rId17"/>
   </p:sldIdLst>
   <p:notesMasterIdLst>
-    <p:notesMasterId r:id="rId17"/>
+    <p:notesMasterId r:id="rId18"/>
   </p:notesMasterIdLst>
   <p:sldSz cx="12192000" cy="6858000"/>
   <p:notesSz cx="6858000" cy="12192000"/>
@@ -1068,6 +1069,94 @@
             <a:fld id="{F7021451-1387-4CA6-816F-3879F97B5CBC}" type="slidenum">
               <a:rPr lang="en-US"/>
               <a:t>15</a:t>
+            </a:fld>
+            <a:endParaRPr lang="en-US"/>
+          </a:p>
+        </p:txBody>
+      </p:sp>
+    </p:spTree>
+    <p:extLst>
+      <p:ext uri="{BB962C8B-B14F-4D97-AF65-F5344CB8AC3E}">
+        <p14:creationId xmlns:p14="http://schemas.microsoft.com/office/powerpoint/2010/main" val="1024086991"/>
+      </p:ext>
+    </p:extLst>
+  </p:cSld>
+  <p:clrMapOvr>
+    <a:masterClrMapping/>
+  </p:clrMapOvr>
+</p:notes>
+</file>
+
+<file path=ppt/notesSlides/notesSlide16.xml><?xml version="1.0" encoding="utf-8"?>
+<p:notes xmlns:a="http://schemas.openxmlformats.org/drawingml/2006/main" xmlns:r="http://schemas.openxmlformats.org/officeDocument/2006/relationships" xmlns:p="http://schemas.openxmlformats.org/presentationml/2006/main">
+  <p:cSld>
+    <p:spTree>
+      <p:nvGrpSpPr>
+        <p:cNvPr id="1" name=""/>
+        <p:cNvGrpSpPr/>
+        <p:nvPr/>
+      </p:nvGrpSpPr>
+      <p:grpSpPr>
+        <a:xfrm>
+          <a:off x="0" y="0"/>
+          <a:ext cx="0" cy="0"/>
+          <a:chOff x="0" y="0"/>
+          <a:chExt cx="0" cy="0"/>
+        </a:xfrm>
+      </p:grpSpPr>
+      <p:sp>
+        <p:nvSpPr>
+          <p:cNvPr id="2" name="Slide Image Placeholder 1"/>
+          <p:cNvSpPr>
+            <a:spLocks noGrp="1" noRot="1" noChangeAspect="1"/>
+          </p:cNvSpPr>
+          <p:nvPr>
+            <p:ph type="sldImg"/>
+          </p:nvPr>
+        </p:nvSpPr>
+        <p:spPr/>
+      </p:sp>
+      <p:sp>
+        <p:nvSpPr>
+          <p:cNvPr id="3" name="Notes Placeholder 2"/>
+          <p:cNvSpPr>
+            <a:spLocks noGrp="1"/>
+          </p:cNvSpPr>
+          <p:nvPr>
+            <p:ph type="body" idx="1"/>
+          </p:nvPr>
+        </p:nvSpPr>
+        <p:spPr/>
+        <p:txBody>
+          <a:bodyPr/>
+          <a:lstStyle/>
+          <a:p>
+            <a:r>
+              <a:rPr lang="en-US" dirty="0"/>
+              <a:t/>
+            </a:r>
+            <a:endParaRPr lang="en-US" dirty="0"/>
+          </a:p>
+        </p:txBody>
+      </p:sp>
+      <p:sp>
+        <p:nvSpPr>
+          <p:cNvPr id="4" name="Slide Number Placeholder 3"/>
+          <p:cNvSpPr>
+            <a:spLocks noGrp="1"/>
+          </p:cNvSpPr>
+          <p:nvPr>
+            <p:ph type="sldNum" sz="quarter" idx="10"/>
+          </p:nvPr>
+        </p:nvSpPr>
+        <p:spPr/>
+        <p:txBody>
+          <a:bodyPr/>
+          <a:lstStyle/>
+          <a:p>
+            <a:fld id="{F7021451-1387-4CA6-816F-3879F97B5CBC}" type="slidenum">
+              <a:rPr lang="en-US"/>
+              <a:t>16</a:t>
             </a:fld>
             <a:endParaRPr lang="en-US"/>
           </a:p>
@@ -2407,7 +2496,7 @@
                 <a:ea typeface="맑은 고딕" pitchFamily="34" charset="-122"/>
                 <a:cs typeface="맑은 고딕" pitchFamily="34" charset="-120"/>
               </a:rPr>
-              <a:t>핵심 기능 2 · 도출 예시 ①</a:t>
+              <a:t>핵심 기능 2</a:t>
             </a:r>
             <a:endParaRPr lang="en-US" sz="1200" dirty="0"/>
           </a:p>
@@ -2446,51 +2535,31 @@
                 <a:ea typeface="맑은 고딕" pitchFamily="34" charset="-122"/>
                 <a:cs typeface="맑은 고딕" pitchFamily="34" charset="-120"/>
               </a:rPr>
-              <a:t>요구사항 하나 → 기능 · 비기능 요구사항</a:t>
+              <a:t>문서·티켓 자동 생성</a:t>
             </a:r>
             <a:endParaRPr lang="en-US" sz="3000" dirty="0"/>
           </a:p>
         </p:txBody>
       </p:sp>
-      <p:pic>
-        <p:nvPicPr>
-          <p:cNvPr id="4" name="Image 0" descr="/home/user/semes-superrookie/docs/img/ppt-derive-1.png">    </p:cNvPr>
-          <p:cNvPicPr>
-            <a:picLocks noChangeAspect="1"/>
-          </p:cNvPicPr>
-          <p:nvPr/>
-        </p:nvPicPr>
-        <p:blipFill>
-          <a:blip r:embed="rId1"/>
-          <a:stretch>
-            <a:fillRect/>
-          </a:stretch>
-        </p:blipFill>
-        <p:spPr>
-          <a:xfrm>
-            <a:off x="836676" y="1828800"/>
-            <a:ext cx="10515600" cy="3927348"/>
-          </a:xfrm>
-          <a:prstGeom prst="rect">
-            <a:avLst/>
-          </a:prstGeom>
-        </p:spPr>
-      </p:pic>
-      <p:sp>
-        <p:nvSpPr>
-          <p:cNvPr id="5" name="Text 2"/>
-          <p:cNvSpPr/>
-          <p:nvPr/>
-        </p:nvSpPr>
-        <p:spPr>
-          <a:xfrm>
-            <a:off x="566928" y="5943600"/>
-            <a:ext cx="11064240" cy="365760"/>
-          </a:xfrm>
-          <a:prstGeom prst="rect">
-            <a:avLst/>
-          </a:prstGeom>
-          <a:noFill/>
+      <p:sp>
+        <p:nvSpPr>
+          <p:cNvPr id="4" name="Text 2"/>
+          <p:cNvSpPr/>
+          <p:nvPr/>
+        </p:nvSpPr>
+        <p:spPr>
+          <a:xfrm>
+            <a:off x="10424160" y="822960"/>
+            <a:ext cx="1737360" cy="310896"/>
+          </a:xfrm>
+          <a:prstGeom prst="roundRect">
+            <a:avLst>
+              <a:gd name="adj" fmla="val 47059"/>
+            </a:avLst>
+          </a:prstGeom>
+          <a:solidFill>
+            <a:srgbClr val="FEF3C7"/>
+          </a:solidFill>
           <a:ln/>
         </p:spPr>
         <p:txBody>
@@ -2501,7 +2570,167 @@
               <a:buNone/>
             </a:pPr>
             <a:r>
-              <a:rPr lang="en-US" sz="1250" dirty="0">
+              <a:rPr lang="en-US" sz="1100" b="1" dirty="0">
+                <a:solidFill>
+                  <a:srgbClr val="B45309"/>
+                </a:solidFill>
+                <a:latin typeface="맑은 고딕" pitchFamily="34" charset="0"/>
+                <a:ea typeface="맑은 고딕" pitchFamily="34" charset="-122"/>
+                <a:cs typeface="맑은 고딕" pitchFamily="34" charset="-120"/>
+              </a:rPr>
+              <a:t>개발 예정</a:t>
+            </a:r>
+            <a:endParaRPr lang="en-US" sz="1100" dirty="0"/>
+          </a:p>
+        </p:txBody>
+      </p:sp>
+      <p:sp>
+        <p:nvSpPr>
+          <p:cNvPr id="5" name="Text 3"/>
+          <p:cNvSpPr/>
+          <p:nvPr/>
+        </p:nvSpPr>
+        <p:spPr>
+          <a:xfrm>
+            <a:off x="566928" y="1783080"/>
+            <a:ext cx="5486400" cy="365760"/>
+          </a:xfrm>
+          <a:prstGeom prst="rect">
+            <a:avLst/>
+          </a:prstGeom>
+          <a:noFill/>
+          <a:ln/>
+        </p:spPr>
+        <p:txBody>
+          <a:bodyPr wrap="square" lIns="0" tIns="0" rIns="0" bIns="0" rtlCol="0" anchor="ctr"/>
+          <a:lstStyle/>
+          <a:p>
+            <a:pPr indent="0" marL="0">
+              <a:buNone/>
+            </a:pPr>
+            <a:r>
+              <a:rPr lang="en-US" sz="1500" b="1" dirty="0">
+                <a:solidFill>
+                  <a:srgbClr val="1F2937"/>
+                </a:solidFill>
+                <a:latin typeface="맑은 고딕" pitchFamily="34" charset="0"/>
+                <a:ea typeface="맑은 고딕" pitchFamily="34" charset="-122"/>
+                <a:cs typeface="맑은 고딕" pitchFamily="34" charset="-120"/>
+              </a:rPr>
+              <a:t>기능 하나 = Jira 이슈 4종 (+ 비기능요구사항)</a:t>
+            </a:r>
+            <a:endParaRPr lang="en-US" sz="1500" dirty="0"/>
+          </a:p>
+        </p:txBody>
+      </p:sp>
+      <p:sp>
+        <p:nvSpPr>
+          <p:cNvPr id="6" name="Shape 4"/>
+          <p:cNvSpPr/>
+          <p:nvPr/>
+        </p:nvSpPr>
+        <p:spPr>
+          <a:xfrm>
+            <a:off x="566928" y="2286000"/>
+            <a:ext cx="5486400" cy="713232"/>
+          </a:xfrm>
+          <a:prstGeom prst="roundRect">
+            <a:avLst>
+              <a:gd name="adj" fmla="val 7692"/>
+            </a:avLst>
+          </a:prstGeom>
+          <a:solidFill>
+            <a:srgbClr val="EEF2FF"/>
+          </a:solidFill>
+          <a:ln w="12700">
+            <a:solidFill>
+              <a:srgbClr val="C7D2FE"/>
+            </a:solidFill>
+            <a:prstDash val="solid"/>
+          </a:ln>
+        </p:spPr>
+      </p:sp>
+      <p:sp>
+        <p:nvSpPr>
+          <p:cNvPr id="7" name="Text 5"/>
+          <p:cNvSpPr/>
+          <p:nvPr/>
+        </p:nvSpPr>
+        <p:spPr>
+          <a:xfrm>
+            <a:off x="713232" y="2414016"/>
+            <a:ext cx="457200" cy="457200"/>
+          </a:xfrm>
+          <a:prstGeom prst="ellipse">
+            <a:avLst/>
+          </a:prstGeom>
+          <a:solidFill>
+            <a:srgbClr val="6366F1"/>
+          </a:solidFill>
+          <a:ln/>
+        </p:spPr>
+        <p:txBody>
+          <a:bodyPr wrap="square" lIns="0" tIns="0" rIns="0" bIns="0" rtlCol="0" anchor="ctr"/>
+          <a:lstStyle/>
+          <a:p>
+            <a:pPr algn="ctr" indent="0" marL="0">
+              <a:buNone/>
+            </a:pPr>
+            <a:r>
+              <a:rPr lang="en-US" sz="1500" b="1" dirty="0">
+                <a:solidFill>
+                  <a:srgbClr val="FFFFFF"/>
+                </a:solidFill>
+                <a:latin typeface="맑은 고딕" pitchFamily="34" charset="0"/>
+                <a:ea typeface="맑은 고딕" pitchFamily="34" charset="-122"/>
+                <a:cs typeface="맑은 고딕" pitchFamily="34" charset="-120"/>
+              </a:rPr>
+              <a:t>1</a:t>
+            </a:r>
+            <a:endParaRPr lang="en-US" sz="1500" dirty="0"/>
+          </a:p>
+        </p:txBody>
+      </p:sp>
+      <p:sp>
+        <p:nvSpPr>
+          <p:cNvPr id="8" name="Text 6"/>
+          <p:cNvSpPr/>
+          <p:nvPr/>
+        </p:nvSpPr>
+        <p:spPr>
+          <a:xfrm>
+            <a:off x="1298448" y="2304288"/>
+            <a:ext cx="4617720" cy="676656"/>
+          </a:xfrm>
+          <a:prstGeom prst="rect">
+            <a:avLst/>
+          </a:prstGeom>
+          <a:noFill/>
+          <a:ln/>
+        </p:spPr>
+        <p:txBody>
+          <a:bodyPr wrap="square" lIns="0" tIns="0" rIns="0" bIns="0" rtlCol="0" anchor="ctr"/>
+          <a:lstStyle/>
+          <a:p>
+            <a:pPr indent="0" marL="0">
+              <a:buNone/>
+            </a:pPr>
+            <a:r>
+              <a:rPr lang="en-US" sz="1350" b="1" dirty="0">
+                <a:solidFill>
+                  <a:srgbClr val="1F2937"/>
+                </a:solidFill>
+                <a:latin typeface="맑은 고딕" pitchFamily="34" charset="0"/>
+                <a:ea typeface="맑은 고딕" pitchFamily="34" charset="-122"/>
+                <a:cs typeface="맑은 고딕" pitchFamily="34" charset="-120"/>
+              </a:rPr>
+              <a:t>티켓 (기능요구사항)   </a:t>
+            </a:r>
+            <a:pPr indent="0" marL="0">
+              <a:buNone/>
+            </a:pPr>
+            <a:r>
+              <a:rPr lang="en-US" sz="1150" dirty="0">
                 <a:solidFill>
                   <a:srgbClr val="6B7280"/>
                 </a:solidFill>
@@ -2509,7 +2738,624 @@
                 <a:ea typeface="맑은 고딕" pitchFamily="34" charset="-122"/>
                 <a:cs typeface="맑은 고딕" pitchFamily="34" charset="-120"/>
               </a:rPr>
-              <a:t>req-tf-01(신규 태스크 생성) 한 건에서 기능요구사항 6건 · 비기능요구사항 5건을 자동 도출 (AI 초안)</a:t>
+              <a:t>개발 단위가 되는 메인 티켓</a:t>
+            </a:r>
+            <a:endParaRPr lang="en-US" sz="1350" dirty="0"/>
+          </a:p>
+        </p:txBody>
+      </p:sp>
+      <p:sp>
+        <p:nvSpPr>
+          <p:cNvPr id="9" name="Shape 7"/>
+          <p:cNvSpPr/>
+          <p:nvPr/>
+        </p:nvSpPr>
+        <p:spPr>
+          <a:xfrm>
+            <a:off x="566928" y="3108960"/>
+            <a:ext cx="5486400" cy="713232"/>
+          </a:xfrm>
+          <a:prstGeom prst="roundRect">
+            <a:avLst>
+              <a:gd name="adj" fmla="val 7692"/>
+            </a:avLst>
+          </a:prstGeom>
+          <a:solidFill>
+            <a:srgbClr val="EEF2FF"/>
+          </a:solidFill>
+          <a:ln w="12700">
+            <a:solidFill>
+              <a:srgbClr val="C7D2FE"/>
+            </a:solidFill>
+            <a:prstDash val="solid"/>
+          </a:ln>
+        </p:spPr>
+      </p:sp>
+      <p:sp>
+        <p:nvSpPr>
+          <p:cNvPr id="10" name="Text 8"/>
+          <p:cNvSpPr/>
+          <p:nvPr/>
+        </p:nvSpPr>
+        <p:spPr>
+          <a:xfrm>
+            <a:off x="713232" y="3236976"/>
+            <a:ext cx="457200" cy="457200"/>
+          </a:xfrm>
+          <a:prstGeom prst="ellipse">
+            <a:avLst/>
+          </a:prstGeom>
+          <a:solidFill>
+            <a:srgbClr val="6366F1"/>
+          </a:solidFill>
+          <a:ln/>
+        </p:spPr>
+        <p:txBody>
+          <a:bodyPr wrap="square" lIns="0" tIns="0" rIns="0" bIns="0" rtlCol="0" anchor="ctr"/>
+          <a:lstStyle/>
+          <a:p>
+            <a:pPr algn="ctr" indent="0" marL="0">
+              <a:buNone/>
+            </a:pPr>
+            <a:r>
+              <a:rPr lang="en-US" sz="1500" b="1" dirty="0">
+                <a:solidFill>
+                  <a:srgbClr val="FFFFFF"/>
+                </a:solidFill>
+                <a:latin typeface="맑은 고딕" pitchFamily="34" charset="0"/>
+                <a:ea typeface="맑은 고딕" pitchFamily="34" charset="-122"/>
+                <a:cs typeface="맑은 고딕" pitchFamily="34" charset="-120"/>
+              </a:rPr>
+              <a:t>2</a:t>
+            </a:r>
+            <a:endParaRPr lang="en-US" sz="1500" dirty="0"/>
+          </a:p>
+        </p:txBody>
+      </p:sp>
+      <p:sp>
+        <p:nvSpPr>
+          <p:cNvPr id="11" name="Text 9"/>
+          <p:cNvSpPr/>
+          <p:nvPr/>
+        </p:nvSpPr>
+        <p:spPr>
+          <a:xfrm>
+            <a:off x="1298448" y="3127248"/>
+            <a:ext cx="4617720" cy="676656"/>
+          </a:xfrm>
+          <a:prstGeom prst="rect">
+            <a:avLst/>
+          </a:prstGeom>
+          <a:noFill/>
+          <a:ln/>
+        </p:spPr>
+        <p:txBody>
+          <a:bodyPr wrap="square" lIns="0" tIns="0" rIns="0" bIns="0" rtlCol="0" anchor="ctr"/>
+          <a:lstStyle/>
+          <a:p>
+            <a:pPr indent="0" marL="0">
+              <a:buNone/>
+            </a:pPr>
+            <a:r>
+              <a:rPr lang="en-US" sz="1350" b="1" dirty="0">
+                <a:solidFill>
+                  <a:srgbClr val="1F2937"/>
+                </a:solidFill>
+                <a:latin typeface="맑은 고딕" pitchFamily="34" charset="0"/>
+                <a:ea typeface="맑은 고딕" pitchFamily="34" charset="-122"/>
+                <a:cs typeface="맑은 고딕" pitchFamily="34" charset="-120"/>
+              </a:rPr>
+              <a:t>SWVOC (고객요구사항)   </a:t>
+            </a:r>
+            <a:pPr indent="0" marL="0">
+              <a:buNone/>
+            </a:pPr>
+            <a:r>
+              <a:rPr lang="en-US" sz="1150" dirty="0">
+                <a:solidFill>
+                  <a:srgbClr val="6B7280"/>
+                </a:solidFill>
+                <a:latin typeface="맑은 고딕" pitchFamily="34" charset="0"/>
+                <a:ea typeface="맑은 고딕" pitchFamily="34" charset="-122"/>
+                <a:cs typeface="맑은 고딕" pitchFamily="34" charset="-120"/>
+              </a:rPr>
+              <a:t>고객 요구사항 원문·정리</a:t>
+            </a:r>
+            <a:endParaRPr lang="en-US" sz="1350" dirty="0"/>
+          </a:p>
+        </p:txBody>
+      </p:sp>
+      <p:sp>
+        <p:nvSpPr>
+          <p:cNvPr id="12" name="Shape 10"/>
+          <p:cNvSpPr/>
+          <p:nvPr/>
+        </p:nvSpPr>
+        <p:spPr>
+          <a:xfrm>
+            <a:off x="566928" y="3931920"/>
+            <a:ext cx="5486400" cy="713232"/>
+          </a:xfrm>
+          <a:prstGeom prst="roundRect">
+            <a:avLst>
+              <a:gd name="adj" fmla="val 7692"/>
+            </a:avLst>
+          </a:prstGeom>
+          <a:solidFill>
+            <a:srgbClr val="EEF2FF"/>
+          </a:solidFill>
+          <a:ln w="12700">
+            <a:solidFill>
+              <a:srgbClr val="C7D2FE"/>
+            </a:solidFill>
+            <a:prstDash val="solid"/>
+          </a:ln>
+        </p:spPr>
+      </p:sp>
+      <p:sp>
+        <p:nvSpPr>
+          <p:cNvPr id="13" name="Text 11"/>
+          <p:cNvSpPr/>
+          <p:nvPr/>
+        </p:nvSpPr>
+        <p:spPr>
+          <a:xfrm>
+            <a:off x="713232" y="4059936"/>
+            <a:ext cx="457200" cy="457200"/>
+          </a:xfrm>
+          <a:prstGeom prst="ellipse">
+            <a:avLst/>
+          </a:prstGeom>
+          <a:solidFill>
+            <a:srgbClr val="6366F1"/>
+          </a:solidFill>
+          <a:ln/>
+        </p:spPr>
+        <p:txBody>
+          <a:bodyPr wrap="square" lIns="0" tIns="0" rIns="0" bIns="0" rtlCol="0" anchor="ctr"/>
+          <a:lstStyle/>
+          <a:p>
+            <a:pPr algn="ctr" indent="0" marL="0">
+              <a:buNone/>
+            </a:pPr>
+            <a:r>
+              <a:rPr lang="en-US" sz="1500" b="1" dirty="0">
+                <a:solidFill>
+                  <a:srgbClr val="FFFFFF"/>
+                </a:solidFill>
+                <a:latin typeface="맑은 고딕" pitchFamily="34" charset="0"/>
+                <a:ea typeface="맑은 고딕" pitchFamily="34" charset="-122"/>
+                <a:cs typeface="맑은 고딕" pitchFamily="34" charset="-120"/>
+              </a:rPr>
+              <a:t>3</a:t>
+            </a:r>
+            <a:endParaRPr lang="en-US" sz="1500" dirty="0"/>
+          </a:p>
+        </p:txBody>
+      </p:sp>
+      <p:sp>
+        <p:nvSpPr>
+          <p:cNvPr id="14" name="Text 12"/>
+          <p:cNvSpPr/>
+          <p:nvPr/>
+        </p:nvSpPr>
+        <p:spPr>
+          <a:xfrm>
+            <a:off x="1298448" y="3950208"/>
+            <a:ext cx="4617720" cy="676656"/>
+          </a:xfrm>
+          <a:prstGeom prst="rect">
+            <a:avLst/>
+          </a:prstGeom>
+          <a:noFill/>
+          <a:ln/>
+        </p:spPr>
+        <p:txBody>
+          <a:bodyPr wrap="square" lIns="0" tIns="0" rIns="0" bIns="0" rtlCol="0" anchor="ctr"/>
+          <a:lstStyle/>
+          <a:p>
+            <a:pPr indent="0" marL="0">
+              <a:buNone/>
+            </a:pPr>
+            <a:r>
+              <a:rPr lang="en-US" sz="1350" b="1" dirty="0">
+                <a:solidFill>
+                  <a:srgbClr val="1F2937"/>
+                </a:solidFill>
+                <a:latin typeface="맑은 고딕" pitchFamily="34" charset="0"/>
+                <a:ea typeface="맑은 고딕" pitchFamily="34" charset="-122"/>
+                <a:cs typeface="맑은 고딕" pitchFamily="34" charset="-120"/>
+              </a:rPr>
+              <a:t>Function Requirement   </a:t>
+            </a:r>
+            <a:pPr indent="0" marL="0">
+              <a:buNone/>
+            </a:pPr>
+            <a:r>
+              <a:rPr lang="en-US" sz="1150" dirty="0">
+                <a:solidFill>
+                  <a:srgbClr val="6B7280"/>
+                </a:solidFill>
+                <a:latin typeface="맑은 고딕" pitchFamily="34" charset="0"/>
+                <a:ea typeface="맑은 고딕" pitchFamily="34" charset="-122"/>
+                <a:cs typeface="맑은 고딕" pitchFamily="34" charset="-120"/>
+              </a:rPr>
+              <a:t>기능 요구사항 상세</a:t>
+            </a:r>
+            <a:endParaRPr lang="en-US" sz="1350" dirty="0"/>
+          </a:p>
+        </p:txBody>
+      </p:sp>
+      <p:sp>
+        <p:nvSpPr>
+          <p:cNvPr id="15" name="Shape 13"/>
+          <p:cNvSpPr/>
+          <p:nvPr/>
+        </p:nvSpPr>
+        <p:spPr>
+          <a:xfrm>
+            <a:off x="566928" y="4754880"/>
+            <a:ext cx="5486400" cy="713232"/>
+          </a:xfrm>
+          <a:prstGeom prst="roundRect">
+            <a:avLst>
+              <a:gd name="adj" fmla="val 7692"/>
+            </a:avLst>
+          </a:prstGeom>
+          <a:solidFill>
+            <a:srgbClr val="EEF2FF"/>
+          </a:solidFill>
+          <a:ln w="12700">
+            <a:solidFill>
+              <a:srgbClr val="C7D2FE"/>
+            </a:solidFill>
+            <a:prstDash val="solid"/>
+          </a:ln>
+        </p:spPr>
+      </p:sp>
+      <p:sp>
+        <p:nvSpPr>
+          <p:cNvPr id="16" name="Text 14"/>
+          <p:cNvSpPr/>
+          <p:nvPr/>
+        </p:nvSpPr>
+        <p:spPr>
+          <a:xfrm>
+            <a:off x="713232" y="4882896"/>
+            <a:ext cx="457200" cy="457200"/>
+          </a:xfrm>
+          <a:prstGeom prst="ellipse">
+            <a:avLst/>
+          </a:prstGeom>
+          <a:solidFill>
+            <a:srgbClr val="6366F1"/>
+          </a:solidFill>
+          <a:ln/>
+        </p:spPr>
+        <p:txBody>
+          <a:bodyPr wrap="square" lIns="0" tIns="0" rIns="0" bIns="0" rtlCol="0" anchor="ctr"/>
+          <a:lstStyle/>
+          <a:p>
+            <a:pPr algn="ctr" indent="0" marL="0">
+              <a:buNone/>
+            </a:pPr>
+            <a:r>
+              <a:rPr lang="en-US" sz="1500" b="1" dirty="0">
+                <a:solidFill>
+                  <a:srgbClr val="FFFFFF"/>
+                </a:solidFill>
+                <a:latin typeface="맑은 고딕" pitchFamily="34" charset="0"/>
+                <a:ea typeface="맑은 고딕" pitchFamily="34" charset="-122"/>
+                <a:cs typeface="맑은 고딕" pitchFamily="34" charset="-120"/>
+              </a:rPr>
+              <a:t>4</a:t>
+            </a:r>
+            <a:endParaRPr lang="en-US" sz="1500" dirty="0"/>
+          </a:p>
+        </p:txBody>
+      </p:sp>
+      <p:sp>
+        <p:nvSpPr>
+          <p:cNvPr id="17" name="Text 15"/>
+          <p:cNvSpPr/>
+          <p:nvPr/>
+        </p:nvSpPr>
+        <p:spPr>
+          <a:xfrm>
+            <a:off x="1298448" y="4773168"/>
+            <a:ext cx="4617720" cy="676656"/>
+          </a:xfrm>
+          <a:prstGeom prst="rect">
+            <a:avLst/>
+          </a:prstGeom>
+          <a:noFill/>
+          <a:ln/>
+        </p:spPr>
+        <p:txBody>
+          <a:bodyPr wrap="square" lIns="0" tIns="0" rIns="0" bIns="0" rtlCol="0" anchor="ctr"/>
+          <a:lstStyle/>
+          <a:p>
+            <a:pPr indent="0" marL="0">
+              <a:buNone/>
+            </a:pPr>
+            <a:r>
+              <a:rPr lang="en-US" sz="1350" b="1" dirty="0">
+                <a:solidFill>
+                  <a:srgbClr val="1F2937"/>
+                </a:solidFill>
+                <a:latin typeface="맑은 고딕" pitchFamily="34" charset="0"/>
+                <a:ea typeface="맑은 고딕" pitchFamily="34" charset="-122"/>
+                <a:cs typeface="맑은 고딕" pitchFamily="34" charset="-120"/>
+              </a:rPr>
+              <a:t>Detail Design   </a:t>
+            </a:r>
+            <a:pPr indent="0" marL="0">
+              <a:buNone/>
+            </a:pPr>
+            <a:r>
+              <a:rPr lang="en-US" sz="1150" dirty="0">
+                <a:solidFill>
+                  <a:srgbClr val="6B7280"/>
+                </a:solidFill>
+                <a:latin typeface="맑은 고딕" pitchFamily="34" charset="0"/>
+                <a:ea typeface="맑은 고딕" pitchFamily="34" charset="-122"/>
+                <a:cs typeface="맑은 고딕" pitchFamily="34" charset="-120"/>
+              </a:rPr>
+              <a:t>상세설계 — 시퀀스 다이어그램 등</a:t>
+            </a:r>
+            <a:endParaRPr lang="en-US" sz="1350" dirty="0"/>
+          </a:p>
+        </p:txBody>
+      </p:sp>
+      <p:sp>
+        <p:nvSpPr>
+          <p:cNvPr id="18" name="Shape 16"/>
+          <p:cNvSpPr/>
+          <p:nvPr/>
+        </p:nvSpPr>
+        <p:spPr>
+          <a:xfrm>
+            <a:off x="6537960" y="1783080"/>
+            <a:ext cx="5074920" cy="4160520"/>
+          </a:xfrm>
+          <a:prstGeom prst="roundRect">
+            <a:avLst>
+              <a:gd name="adj" fmla="val 2198"/>
+            </a:avLst>
+          </a:prstGeom>
+          <a:solidFill>
+            <a:srgbClr val="FFFFFF"/>
+          </a:solidFill>
+          <a:ln w="12700">
+            <a:solidFill>
+              <a:srgbClr val="E5E7EB"/>
+            </a:solidFill>
+            <a:prstDash val="solid"/>
+          </a:ln>
+          <a:effectLst>
+            <a:outerShdw sx="100000" sy="100000" kx="0" ky="0" algn="bl" rotWithShape="0" blurRad="127000" dist="50800" dir="5400000">
+              <a:srgbClr val="1E1B4B">
+                <a:alpha val="18000"/>
+              </a:srgbClr>
+            </a:outerShdw>
+          </a:effectLst>
+        </p:spPr>
+      </p:sp>
+      <p:sp>
+        <p:nvSpPr>
+          <p:cNvPr id="19" name="Text 17"/>
+          <p:cNvSpPr/>
+          <p:nvPr/>
+        </p:nvSpPr>
+        <p:spPr>
+          <a:xfrm>
+            <a:off x="6812280" y="2011680"/>
+            <a:ext cx="4572000" cy="365760"/>
+          </a:xfrm>
+          <a:prstGeom prst="rect">
+            <a:avLst/>
+          </a:prstGeom>
+          <a:noFill/>
+          <a:ln/>
+        </p:spPr>
+        <p:txBody>
+          <a:bodyPr wrap="square" lIns="0" tIns="0" rIns="0" bIns="0" rtlCol="0" anchor="ctr"/>
+          <a:lstStyle/>
+          <a:p>
+            <a:pPr indent="0" marL="0">
+              <a:buNone/>
+            </a:pPr>
+            <a:r>
+              <a:rPr lang="en-US" sz="1500" b="1" dirty="0">
+                <a:solidFill>
+                  <a:srgbClr val="8B5CF6"/>
+                </a:solidFill>
+                <a:latin typeface="맑은 고딕" pitchFamily="34" charset="0"/>
+                <a:ea typeface="맑은 고딕" pitchFamily="34" charset="-122"/>
+                <a:cs typeface="맑은 고딕" pitchFamily="34" charset="-120"/>
+              </a:rPr>
+              <a:t>어떻게 생성하나</a:t>
+            </a:r>
+            <a:endParaRPr lang="en-US" sz="1500" dirty="0"/>
+          </a:p>
+        </p:txBody>
+      </p:sp>
+      <p:sp>
+        <p:nvSpPr>
+          <p:cNvPr id="20" name="Text 18"/>
+          <p:cNvSpPr/>
+          <p:nvPr/>
+        </p:nvSpPr>
+        <p:spPr>
+          <a:xfrm>
+            <a:off x="6858000" y="2468880"/>
+            <a:ext cx="4572000" cy="3291840"/>
+          </a:xfrm>
+          <a:prstGeom prst="rect">
+            <a:avLst/>
+          </a:prstGeom>
+          <a:noFill/>
+          <a:ln/>
+        </p:spPr>
+        <p:txBody>
+          <a:bodyPr wrap="square" lIns="0" tIns="0" rIns="0" bIns="0" rtlCol="0" anchor="t"/>
+          <a:lstStyle/>
+          <a:p>
+            <a:pPr marL="342900" indent="-342900">
+              <a:spcAft>
+                <a:spcPts val="400"/>
+              </a:spcAft>
+              <a:buSzPct val="100000"/>
+              <a:buChar char="•"/>
+            </a:pPr>
+            <a:r>
+              <a:rPr lang="en-US" sz="1350" b="1" dirty="0">
+                <a:solidFill>
+                  <a:srgbClr val="1F2937"/>
+                </a:solidFill>
+                <a:latin typeface="맑은 고딕" pitchFamily="34" charset="0"/>
+                <a:ea typeface="맑은 고딕" pitchFamily="34" charset="-122"/>
+                <a:cs typeface="맑은 고딕" pitchFamily="34" charset="-120"/>
+              </a:rPr>
+              <a:t>정해진 양식(템플릿) 고정</a:t>
+            </a:r>
+            <a:endParaRPr lang="en-US" sz="1350" dirty="0"/>
+          </a:p>
+          <a:p>
+            <a:pPr lvl="1" indent="0" marL="0">
+              <a:spcAft>
+                <a:spcPts val="1000"/>
+              </a:spcAft>
+              <a:buNone/>
+            </a:pPr>
+            <a:r>
+              <a:rPr lang="en-US" sz="1200" dirty="0">
+                <a:solidFill>
+                  <a:srgbClr val="6B7280"/>
+                </a:solidFill>
+                <a:latin typeface="맑은 고딕" pitchFamily="34" charset="0"/>
+                <a:ea typeface="맑은 고딕" pitchFamily="34" charset="-122"/>
+                <a:cs typeface="맑은 고딕" pitchFamily="34" charset="-120"/>
+              </a:rPr>
+              <a:t>각 산출물의 필드·구조를 템플릿으로 미리 정의</a:t>
+            </a:r>
+            <a:endParaRPr lang="en-US" sz="1350" dirty="0"/>
+          </a:p>
+          <a:p>
+            <a:pPr marL="342900" indent="-342900">
+              <a:spcAft>
+                <a:spcPts val="400"/>
+              </a:spcAft>
+              <a:buSzPct val="100000"/>
+              <a:buChar char="•"/>
+            </a:pPr>
+            <a:r>
+              <a:rPr lang="en-US" sz="1350" b="1" dirty="0">
+                <a:solidFill>
+                  <a:srgbClr val="1F2937"/>
+                </a:solidFill>
+                <a:latin typeface="맑은 고딕" pitchFamily="34" charset="0"/>
+                <a:ea typeface="맑은 고딕" pitchFamily="34" charset="-122"/>
+                <a:cs typeface="맑은 고딕" pitchFamily="34" charset="-120"/>
+              </a:rPr>
+              <a:t>산출물 유형별 프롬프트 사전 작성</a:t>
+            </a:r>
+            <a:endParaRPr lang="en-US" sz="1350" dirty="0"/>
+          </a:p>
+          <a:p>
+            <a:pPr lvl="1" indent="0" marL="0">
+              <a:spcAft>
+                <a:spcPts val="1000"/>
+              </a:spcAft>
+              <a:buNone/>
+            </a:pPr>
+            <a:r>
+              <a:rPr lang="en-US" sz="1200" dirty="0">
+                <a:solidFill>
+                  <a:srgbClr val="6B7280"/>
+                </a:solidFill>
+                <a:latin typeface="맑은 고딕" pitchFamily="34" charset="0"/>
+                <a:ea typeface="맑은 고딕" pitchFamily="34" charset="-122"/>
+                <a:cs typeface="맑은 고딕" pitchFamily="34" charset="-120"/>
+              </a:rPr>
+              <a:t>예) Detail Design → 시퀀스 다이어그램 자동 생성</a:t>
+            </a:r>
+            <a:endParaRPr lang="en-US" sz="1350" dirty="0"/>
+          </a:p>
+          <a:p>
+            <a:pPr marL="342900" indent="-342900">
+              <a:spcAft>
+                <a:spcPts val="400"/>
+              </a:spcAft>
+              <a:buSzPct val="100000"/>
+              <a:buChar char="•"/>
+            </a:pPr>
+            <a:r>
+              <a:rPr lang="en-US" sz="1350" b="1" dirty="0">
+                <a:solidFill>
+                  <a:srgbClr val="1F2937"/>
+                </a:solidFill>
+                <a:latin typeface="맑은 고딕" pitchFamily="34" charset="0"/>
+                <a:ea typeface="맑은 고딕" pitchFamily="34" charset="-122"/>
+                <a:cs typeface="맑은 고딕" pitchFamily="34" charset="-120"/>
+              </a:rPr>
+              <a:t>AI 결과는 항상 “초안”</a:t>
+            </a:r>
+            <a:endParaRPr lang="en-US" sz="1350" dirty="0"/>
+          </a:p>
+          <a:p>
+            <a:pPr lvl="1" indent="0" marL="0">
+              <a:buNone/>
+            </a:pPr>
+            <a:r>
+              <a:rPr lang="en-US" sz="1200" dirty="0">
+                <a:solidFill>
+                  <a:srgbClr val="6B7280"/>
+                </a:solidFill>
+                <a:latin typeface="맑은 고딕" pitchFamily="34" charset="0"/>
+                <a:ea typeface="맑은 고딕" pitchFamily="34" charset="-122"/>
+                <a:cs typeface="맑은 고딕" pitchFamily="34" charset="-120"/>
+              </a:rPr>
+              <a:t>담당자가 틀 위에서 편집·추가·삭제</a:t>
+            </a:r>
+            <a:endParaRPr lang="en-US" sz="1350" dirty="0"/>
+          </a:p>
+        </p:txBody>
+      </p:sp>
+      <p:sp>
+        <p:nvSpPr>
+          <p:cNvPr id="21" name="Text 19"/>
+          <p:cNvSpPr/>
+          <p:nvPr/>
+        </p:nvSpPr>
+        <p:spPr>
+          <a:xfrm>
+            <a:off x="566928" y="6035040"/>
+            <a:ext cx="10972800" cy="320040"/>
+          </a:xfrm>
+          <a:prstGeom prst="rect">
+            <a:avLst/>
+          </a:prstGeom>
+          <a:noFill/>
+          <a:ln/>
+        </p:spPr>
+        <p:txBody>
+          <a:bodyPr wrap="square" lIns="0" tIns="0" rIns="0" bIns="0" rtlCol="0" anchor="ctr"/>
+          <a:lstStyle/>
+          <a:p>
+            <a:pPr indent="0" marL="0">
+              <a:buNone/>
+            </a:pPr>
+            <a:r>
+              <a:rPr lang="en-US" sz="1250" b="1" i="1" dirty="0">
+                <a:solidFill>
+                  <a:srgbClr val="6366F1"/>
+                </a:solidFill>
+                <a:latin typeface="맑은 고딕" pitchFamily="34" charset="0"/>
+                <a:ea typeface="맑은 고딕" pitchFamily="34" charset="-122"/>
+                <a:cs typeface="맑은 고딕" pitchFamily="34" charset="-120"/>
+              </a:rPr>
+              <a:t>→ 다음 장: req-tf-01 하나에서 실제로 도출한 예시</a:t>
             </a:r>
             <a:endParaRPr lang="en-US" sz="1250" dirty="0"/>
           </a:p>
@@ -2580,7 +3426,7 @@
                 <a:ea typeface="맑은 고딕" pitchFamily="34" charset="-122"/>
                 <a:cs typeface="맑은 고딕" pitchFamily="34" charset="-120"/>
               </a:rPr>
-              <a:t>핵심 기능 2 · 도출 예시 ②</a:t>
+              <a:t>핵심 기능 2 · 도출 예시 ①</a:t>
             </a:r>
             <a:endParaRPr lang="en-US" sz="1200" dirty="0"/>
           </a:p>
@@ -2619,7 +3465,7 @@
                 <a:ea typeface="맑은 고딕" pitchFamily="34" charset="-122"/>
                 <a:cs typeface="맑은 고딕" pitchFamily="34" charset="-120"/>
               </a:rPr>
-              <a:t>요구사항 하나 → Jira 티켓 4종</a:t>
+              <a:t>요구사항 하나 → 기능 · 비기능 요구사항</a:t>
             </a:r>
             <a:endParaRPr lang="en-US" sz="3000" dirty="0"/>
           </a:p>
@@ -2627,7 +3473,7 @@
       </p:sp>
       <p:pic>
         <p:nvPicPr>
-          <p:cNvPr id="4" name="Image 0" descr="/home/user/semes-superrookie/docs/img/ppt-derive-2.png">    </p:cNvPr>
+          <p:cNvPr id="4" name="Image 0" descr="/home/user/semes-superrookie/docs/img/ppt-derive-1.png">    </p:cNvPr>
           <p:cNvPicPr>
             <a:picLocks noChangeAspect="1"/>
           </p:cNvPicPr>
@@ -2641,8 +3487,8 @@
         </p:blipFill>
         <p:spPr>
           <a:xfrm>
-            <a:off x="836676" y="1691640"/>
-            <a:ext cx="10515600" cy="4453128"/>
+            <a:off x="836676" y="1828800"/>
+            <a:ext cx="10515600" cy="3927348"/>
           </a:xfrm>
           <a:prstGeom prst="rect">
             <a:avLst/>
@@ -2657,7 +3503,7 @@
         </p:nvSpPr>
         <p:spPr>
           <a:xfrm>
-            <a:off x="566928" y="6263640"/>
+            <a:off x="566928" y="5943600"/>
             <a:ext cx="11064240" cy="365760"/>
           </a:xfrm>
           <a:prstGeom prst="rect">
@@ -2674,7 +3520,7 @@
               <a:buNone/>
             </a:pPr>
             <a:r>
-              <a:rPr lang="en-US" sz="1200" dirty="0">
+              <a:rPr lang="en-US" sz="1250" dirty="0">
                 <a:solidFill>
                   <a:srgbClr val="6B7280"/>
                 </a:solidFill>
@@ -2682,9 +3528,9 @@
                 <a:ea typeface="맑은 고딕" pitchFamily="34" charset="-122"/>
                 <a:cs typeface="맑은 고딕" pitchFamily="34" charset="-120"/>
               </a:rPr>
-              <a:t>정해진 양식(템플릿)+사전 프롬프트로 4종 이슈 초안 생성 · Detail Design은 시퀀스 다이어그램까지 자동</a:t>
-            </a:r>
-            <a:endParaRPr lang="en-US" sz="1200" dirty="0"/>
+              <a:t>req-tf-01(신규 태스크 생성) 한 건에서 기능요구사항 6건 · 비기능요구사항 5건을 자동 도출 (AI 초안)</a:t>
+            </a:r>
+            <a:endParaRPr lang="en-US" sz="1250" dirty="0"/>
           </a:p>
         </p:txBody>
       </p:sp>
@@ -2753,7 +3599,7 @@
                 <a:ea typeface="맑은 고딕" pitchFamily="34" charset="-122"/>
                 <a:cs typeface="맑은 고딕" pitchFamily="34" charset="-120"/>
               </a:rPr>
-              <a:t>핵심 기능 3</a:t>
+              <a:t>핵심 기능 2 · 도출 예시 ②</a:t>
             </a:r>
             <a:endParaRPr lang="en-US" sz="1200" dirty="0"/>
           </a:p>
@@ -2792,31 +3638,51 @@
                 <a:ea typeface="맑은 고딕" pitchFamily="34" charset="-122"/>
                 <a:cs typeface="맑은 고딕" pitchFamily="34" charset="-120"/>
               </a:rPr>
-              <a:t>문서 추적성</a:t>
+              <a:t>요구사항 하나 → Jira 티켓 4종</a:t>
             </a:r>
             <a:endParaRPr lang="en-US" sz="3000" dirty="0"/>
           </a:p>
         </p:txBody>
       </p:sp>
-      <p:sp>
-        <p:nvSpPr>
-          <p:cNvPr id="4" name="Text 2"/>
-          <p:cNvSpPr/>
-          <p:nvPr/>
-        </p:nvSpPr>
-        <p:spPr>
-          <a:xfrm>
-            <a:off x="10424160" y="822960"/>
-            <a:ext cx="1737360" cy="310896"/>
-          </a:xfrm>
-          <a:prstGeom prst="roundRect">
-            <a:avLst>
-              <a:gd name="adj" fmla="val 47059"/>
-            </a:avLst>
-          </a:prstGeom>
-          <a:solidFill>
-            <a:srgbClr val="FEF3C7"/>
-          </a:solidFill>
+      <p:pic>
+        <p:nvPicPr>
+          <p:cNvPr id="4" name="Image 0" descr="/home/user/semes-superrookie/docs/img/ppt-derive-2.png">    </p:cNvPr>
+          <p:cNvPicPr>
+            <a:picLocks noChangeAspect="1"/>
+          </p:cNvPicPr>
+          <p:nvPr/>
+        </p:nvPicPr>
+        <p:blipFill>
+          <a:blip r:embed="rId1"/>
+          <a:stretch>
+            <a:fillRect/>
+          </a:stretch>
+        </p:blipFill>
+        <p:spPr>
+          <a:xfrm>
+            <a:off x="836676" y="1691640"/>
+            <a:ext cx="10515600" cy="4453128"/>
+          </a:xfrm>
+          <a:prstGeom prst="rect">
+            <a:avLst/>
+          </a:prstGeom>
+        </p:spPr>
+      </p:pic>
+      <p:sp>
+        <p:nvSpPr>
+          <p:cNvPr id="5" name="Text 2"/>
+          <p:cNvSpPr/>
+          <p:nvPr/>
+        </p:nvSpPr>
+        <p:spPr>
+          <a:xfrm>
+            <a:off x="566928" y="6263640"/>
+            <a:ext cx="11064240" cy="365760"/>
+          </a:xfrm>
+          <a:prstGeom prst="rect">
+            <a:avLst/>
+          </a:prstGeom>
+          <a:noFill/>
           <a:ln/>
         </p:spPr>
         <p:txBody>
@@ -2827,163 +3693,7 @@
               <a:buNone/>
             </a:pPr>
             <a:r>
-              <a:rPr lang="en-US" sz="1100" b="1" dirty="0">
-                <a:solidFill>
-                  <a:srgbClr val="B45309"/>
-                </a:solidFill>
-                <a:latin typeface="맑은 고딕" pitchFamily="34" charset="0"/>
-                <a:ea typeface="맑은 고딕" pitchFamily="34" charset="-122"/>
-                <a:cs typeface="맑은 고딕" pitchFamily="34" charset="-120"/>
-              </a:rPr>
-              <a:t>개발 예정</a:t>
-            </a:r>
-            <a:endParaRPr lang="en-US" sz="1100" dirty="0"/>
-          </a:p>
-        </p:txBody>
-      </p:sp>
-      <p:sp>
-        <p:nvSpPr>
-          <p:cNvPr id="5" name="Shape 3"/>
-          <p:cNvSpPr/>
-          <p:nvPr/>
-        </p:nvSpPr>
-        <p:spPr>
-          <a:xfrm>
-            <a:off x="566928" y="1874520"/>
-            <a:ext cx="11064240" cy="1097280"/>
-          </a:xfrm>
-          <a:prstGeom prst="roundRect">
-            <a:avLst>
-              <a:gd name="adj" fmla="val 6667"/>
-            </a:avLst>
-          </a:prstGeom>
-          <a:solidFill>
-            <a:srgbClr val="FFFFFF"/>
-          </a:solidFill>
-          <a:ln w="12700">
-            <a:solidFill>
-              <a:srgbClr val="E5E7EB"/>
-            </a:solidFill>
-            <a:prstDash val="solid"/>
-          </a:ln>
-          <a:effectLst>
-            <a:outerShdw sx="100000" sy="100000" kx="0" ky="0" algn="bl" rotWithShape="0" blurRad="127000" dist="50800" dir="5400000">
-              <a:srgbClr val="1E1B4B">
-                <a:alpha val="18000"/>
-              </a:srgbClr>
-            </a:outerShdw>
-          </a:effectLst>
-        </p:spPr>
-      </p:sp>
-      <p:sp>
-        <p:nvSpPr>
-          <p:cNvPr id="6" name="Text 4"/>
-          <p:cNvSpPr/>
-          <p:nvPr/>
-        </p:nvSpPr>
-        <p:spPr>
-          <a:xfrm>
-            <a:off x="822960" y="2167128"/>
-            <a:ext cx="512064" cy="512064"/>
-          </a:xfrm>
-          <a:prstGeom prst="ellipse">
-            <a:avLst/>
-          </a:prstGeom>
-          <a:solidFill>
-            <a:srgbClr val="8B5CF6"/>
-          </a:solidFill>
-          <a:ln/>
-        </p:spPr>
-        <p:txBody>
-          <a:bodyPr wrap="square" lIns="0" tIns="0" rIns="0" bIns="0" rtlCol="0" anchor="ctr"/>
-          <a:lstStyle/>
-          <a:p>
-            <a:pPr algn="ctr" indent="0" marL="0">
-              <a:buNone/>
-            </a:pPr>
-            <a:r>
-              <a:rPr lang="en-US" sz="1800" b="1" dirty="0">
-                <a:solidFill>
-                  <a:srgbClr val="FFFFFF"/>
-                </a:solidFill>
-                <a:latin typeface="맑은 고딕" pitchFamily="34" charset="0"/>
-                <a:ea typeface="맑은 고딕" pitchFamily="34" charset="-122"/>
-                <a:cs typeface="맑은 고딕" pitchFamily="34" charset="-120"/>
-              </a:rPr>
-              <a:t>1</a:t>
-            </a:r>
-            <a:endParaRPr lang="en-US" sz="1800" dirty="0"/>
-          </a:p>
-        </p:txBody>
-      </p:sp>
-      <p:sp>
-        <p:nvSpPr>
-          <p:cNvPr id="7" name="Text 5"/>
-          <p:cNvSpPr/>
-          <p:nvPr/>
-        </p:nvSpPr>
-        <p:spPr>
-          <a:xfrm>
-            <a:off x="1527048" y="2039112"/>
-            <a:ext cx="2926080" cy="731520"/>
-          </a:xfrm>
-          <a:prstGeom prst="rect">
-            <a:avLst/>
-          </a:prstGeom>
-          <a:noFill/>
-          <a:ln/>
-        </p:spPr>
-        <p:txBody>
-          <a:bodyPr wrap="square" lIns="0" tIns="0" rIns="0" bIns="0" rtlCol="0" anchor="ctr"/>
-          <a:lstStyle/>
-          <a:p>
-            <a:pPr indent="0" marL="0">
-              <a:buNone/>
-            </a:pPr>
-            <a:r>
-              <a:rPr lang="en-US" sz="1700" b="1" dirty="0">
-                <a:solidFill>
-                  <a:srgbClr val="1F2937"/>
-                </a:solidFill>
-                <a:latin typeface="맑은 고딕" pitchFamily="34" charset="0"/>
-                <a:ea typeface="맑은 고딕" pitchFamily="34" charset="-122"/>
-                <a:cs typeface="맑은 고딕" pitchFamily="34" charset="-120"/>
-              </a:rPr>
-              <a:t>연결 조회</a:t>
-            </a:r>
-            <a:endParaRPr lang="en-US" sz="1700" dirty="0"/>
-          </a:p>
-        </p:txBody>
-      </p:sp>
-      <p:sp>
-        <p:nvSpPr>
-          <p:cNvPr id="8" name="Text 6"/>
-          <p:cNvSpPr/>
-          <p:nvPr/>
-        </p:nvSpPr>
-        <p:spPr>
-          <a:xfrm>
-            <a:off x="4498848" y="2039112"/>
-            <a:ext cx="6858000" cy="777240"/>
-          </a:xfrm>
-          <a:prstGeom prst="rect">
-            <a:avLst/>
-          </a:prstGeom>
-          <a:noFill/>
-          <a:ln/>
-        </p:spPr>
-        <p:txBody>
-          <a:bodyPr wrap="square" lIns="0" tIns="0" rIns="0" bIns="0" rtlCol="0" anchor="ctr"/>
-          <a:lstStyle/>
-          <a:p>
-            <a:pPr indent="0" marL="0">
-              <a:lnSpc>
-                <a:spcPct val="105000"/>
-              </a:lnSpc>
-              <a:buNone/>
-            </a:pPr>
-            <a:r>
-              <a:rPr lang="en-US" sz="1300" dirty="0">
+              <a:rPr lang="en-US" sz="1200" dirty="0">
                 <a:solidFill>
                   <a:srgbClr val="6B7280"/>
                 </a:solidFill>
@@ -2991,358 +3701,7 @@
                 <a:ea typeface="맑은 고딕" pitchFamily="34" charset="-122"/>
                 <a:cs typeface="맑은 고딕" pitchFamily="34" charset="-120"/>
               </a:rPr>
-              <a:t>요구사항 1건에 연결된 기능요구사항·비기능요구사항·티켓을 한눈에 조회 (양방향)</a:t>
-            </a:r>
-            <a:endParaRPr lang="en-US" sz="1300" dirty="0"/>
-          </a:p>
-        </p:txBody>
-      </p:sp>
-      <p:sp>
-        <p:nvSpPr>
-          <p:cNvPr id="9" name="Shape 7"/>
-          <p:cNvSpPr/>
-          <p:nvPr/>
-        </p:nvSpPr>
-        <p:spPr>
-          <a:xfrm>
-            <a:off x="566928" y="3154680"/>
-            <a:ext cx="11064240" cy="1097280"/>
-          </a:xfrm>
-          <a:prstGeom prst="roundRect">
-            <a:avLst>
-              <a:gd name="adj" fmla="val 6667"/>
-            </a:avLst>
-          </a:prstGeom>
-          <a:solidFill>
-            <a:srgbClr val="FFFFFF"/>
-          </a:solidFill>
-          <a:ln w="12700">
-            <a:solidFill>
-              <a:srgbClr val="E5E7EB"/>
-            </a:solidFill>
-            <a:prstDash val="solid"/>
-          </a:ln>
-          <a:effectLst>
-            <a:outerShdw sx="100000" sy="100000" kx="0" ky="0" algn="bl" rotWithShape="0" blurRad="127000" dist="50800" dir="5400000">
-              <a:srgbClr val="1E1B4B">
-                <a:alpha val="18000"/>
-              </a:srgbClr>
-            </a:outerShdw>
-          </a:effectLst>
-        </p:spPr>
-      </p:sp>
-      <p:sp>
-        <p:nvSpPr>
-          <p:cNvPr id="10" name="Text 8"/>
-          <p:cNvSpPr/>
-          <p:nvPr/>
-        </p:nvSpPr>
-        <p:spPr>
-          <a:xfrm>
-            <a:off x="822960" y="3447288"/>
-            <a:ext cx="512064" cy="512064"/>
-          </a:xfrm>
-          <a:prstGeom prst="ellipse">
-            <a:avLst/>
-          </a:prstGeom>
-          <a:solidFill>
-            <a:srgbClr val="8B5CF6"/>
-          </a:solidFill>
-          <a:ln/>
-        </p:spPr>
-        <p:txBody>
-          <a:bodyPr wrap="square" lIns="0" tIns="0" rIns="0" bIns="0" rtlCol="0" anchor="ctr"/>
-          <a:lstStyle/>
-          <a:p>
-            <a:pPr algn="ctr" indent="0" marL="0">
-              <a:buNone/>
-            </a:pPr>
-            <a:r>
-              <a:rPr lang="en-US" sz="1800" b="1" dirty="0">
-                <a:solidFill>
-                  <a:srgbClr val="FFFFFF"/>
-                </a:solidFill>
-                <a:latin typeface="맑은 고딕" pitchFamily="34" charset="0"/>
-                <a:ea typeface="맑은 고딕" pitchFamily="34" charset="-122"/>
-                <a:cs typeface="맑은 고딕" pitchFamily="34" charset="-120"/>
-              </a:rPr>
-              <a:t>2</a:t>
-            </a:r>
-            <a:endParaRPr lang="en-US" sz="1800" dirty="0"/>
-          </a:p>
-        </p:txBody>
-      </p:sp>
-      <p:sp>
-        <p:nvSpPr>
-          <p:cNvPr id="11" name="Text 9"/>
-          <p:cNvSpPr/>
-          <p:nvPr/>
-        </p:nvSpPr>
-        <p:spPr>
-          <a:xfrm>
-            <a:off x="1527048" y="3319272"/>
-            <a:ext cx="2926080" cy="731520"/>
-          </a:xfrm>
-          <a:prstGeom prst="rect">
-            <a:avLst/>
-          </a:prstGeom>
-          <a:noFill/>
-          <a:ln/>
-        </p:spPr>
-        <p:txBody>
-          <a:bodyPr wrap="square" lIns="0" tIns="0" rIns="0" bIns="0" rtlCol="0" anchor="ctr"/>
-          <a:lstStyle/>
-          <a:p>
-            <a:pPr indent="0" marL="0">
-              <a:buNone/>
-            </a:pPr>
-            <a:r>
-              <a:rPr lang="en-US" sz="1700" b="1" dirty="0">
-                <a:solidFill>
-                  <a:srgbClr val="1F2937"/>
-                </a:solidFill>
-                <a:latin typeface="맑은 고딕" pitchFamily="34" charset="0"/>
-                <a:ea typeface="맑은 고딕" pitchFamily="34" charset="-122"/>
-                <a:cs typeface="맑은 고딕" pitchFamily="34" charset="-120"/>
-              </a:rPr>
-              <a:t>변경 영향 분석</a:t>
-            </a:r>
-            <a:endParaRPr lang="en-US" sz="1700" dirty="0"/>
-          </a:p>
-        </p:txBody>
-      </p:sp>
-      <p:sp>
-        <p:nvSpPr>
-          <p:cNvPr id="12" name="Text 10"/>
-          <p:cNvSpPr/>
-          <p:nvPr/>
-        </p:nvSpPr>
-        <p:spPr>
-          <a:xfrm>
-            <a:off x="4498848" y="3319272"/>
-            <a:ext cx="6858000" cy="777240"/>
-          </a:xfrm>
-          <a:prstGeom prst="rect">
-            <a:avLst/>
-          </a:prstGeom>
-          <a:noFill/>
-          <a:ln/>
-        </p:spPr>
-        <p:txBody>
-          <a:bodyPr wrap="square" lIns="0" tIns="0" rIns="0" bIns="0" rtlCol="0" anchor="ctr"/>
-          <a:lstStyle/>
-          <a:p>
-            <a:pPr indent="0" marL="0">
-              <a:lnSpc>
-                <a:spcPct val="105000"/>
-              </a:lnSpc>
-              <a:buNone/>
-            </a:pPr>
-            <a:r>
-              <a:rPr lang="en-US" sz="1300" dirty="0">
-                <a:solidFill>
-                  <a:srgbClr val="6B7280"/>
-                </a:solidFill>
-                <a:latin typeface="맑은 고딕" pitchFamily="34" charset="0"/>
-                <a:ea typeface="맑은 고딕" pitchFamily="34" charset="-122"/>
-                <a:cs typeface="맑은 고딕" pitchFamily="34" charset="-120"/>
-              </a:rPr>
-              <a:t>요구사항이 수정되면 영향받는 문서·티켓을 자동으로 표시 → 누락 방지</a:t>
-            </a:r>
-            <a:endParaRPr lang="en-US" sz="1300" dirty="0"/>
-          </a:p>
-        </p:txBody>
-      </p:sp>
-      <p:sp>
-        <p:nvSpPr>
-          <p:cNvPr id="13" name="Shape 11"/>
-          <p:cNvSpPr/>
-          <p:nvPr/>
-        </p:nvSpPr>
-        <p:spPr>
-          <a:xfrm>
-            <a:off x="566928" y="4434840"/>
-            <a:ext cx="11064240" cy="1097280"/>
-          </a:xfrm>
-          <a:prstGeom prst="roundRect">
-            <a:avLst>
-              <a:gd name="adj" fmla="val 6667"/>
-            </a:avLst>
-          </a:prstGeom>
-          <a:solidFill>
-            <a:srgbClr val="EEF2FF"/>
-          </a:solidFill>
-          <a:ln w="12700">
-            <a:solidFill>
-              <a:srgbClr val="E5E7EB"/>
-            </a:solidFill>
-            <a:prstDash val="solid"/>
-          </a:ln>
-          <a:effectLst>
-            <a:outerShdw sx="100000" sy="100000" kx="0" ky="0" algn="bl" rotWithShape="0" blurRad="127000" dist="50800" dir="5400000">
-              <a:srgbClr val="1E1B4B">
-                <a:alpha val="18000"/>
-              </a:srgbClr>
-            </a:outerShdw>
-          </a:effectLst>
-        </p:spPr>
-      </p:sp>
-      <p:sp>
-        <p:nvSpPr>
-          <p:cNvPr id="14" name="Text 12"/>
-          <p:cNvSpPr/>
-          <p:nvPr/>
-        </p:nvSpPr>
-        <p:spPr>
-          <a:xfrm>
-            <a:off x="822960" y="4727448"/>
-            <a:ext cx="512064" cy="512064"/>
-          </a:xfrm>
-          <a:prstGeom prst="ellipse">
-            <a:avLst/>
-          </a:prstGeom>
-          <a:solidFill>
-            <a:srgbClr val="8B5CF6"/>
-          </a:solidFill>
-          <a:ln/>
-        </p:spPr>
-        <p:txBody>
-          <a:bodyPr wrap="square" lIns="0" tIns="0" rIns="0" bIns="0" rtlCol="0" anchor="ctr"/>
-          <a:lstStyle/>
-          <a:p>
-            <a:pPr algn="ctr" indent="0" marL="0">
-              <a:buNone/>
-            </a:pPr>
-            <a:r>
-              <a:rPr lang="en-US" sz="1800" b="1" dirty="0">
-                <a:solidFill>
-                  <a:srgbClr val="FFFFFF"/>
-                </a:solidFill>
-                <a:latin typeface="맑은 고딕" pitchFamily="34" charset="0"/>
-                <a:ea typeface="맑은 고딕" pitchFamily="34" charset="-122"/>
-                <a:cs typeface="맑은 고딕" pitchFamily="34" charset="-120"/>
-              </a:rPr>
-              <a:t>3</a:t>
-            </a:r>
-            <a:endParaRPr lang="en-US" sz="1800" dirty="0"/>
-          </a:p>
-        </p:txBody>
-      </p:sp>
-      <p:sp>
-        <p:nvSpPr>
-          <p:cNvPr id="15" name="Text 13"/>
-          <p:cNvSpPr/>
-          <p:nvPr/>
-        </p:nvSpPr>
-        <p:spPr>
-          <a:xfrm>
-            <a:off x="1527048" y="4599432"/>
-            <a:ext cx="2926080" cy="731520"/>
-          </a:xfrm>
-          <a:prstGeom prst="rect">
-            <a:avLst/>
-          </a:prstGeom>
-          <a:noFill/>
-          <a:ln/>
-        </p:spPr>
-        <p:txBody>
-          <a:bodyPr wrap="square" lIns="0" tIns="0" rIns="0" bIns="0" rtlCol="0" anchor="ctr"/>
-          <a:lstStyle/>
-          <a:p>
-            <a:pPr indent="0" marL="0">
-              <a:buNone/>
-            </a:pPr>
-            <a:r>
-              <a:rPr lang="en-US" sz="1700" b="1" dirty="0">
-                <a:solidFill>
-                  <a:srgbClr val="1F2937"/>
-                </a:solidFill>
-                <a:latin typeface="맑은 고딕" pitchFamily="34" charset="0"/>
-                <a:ea typeface="맑은 고딕" pitchFamily="34" charset="-122"/>
-                <a:cs typeface="맑은 고딕" pitchFamily="34" charset="-120"/>
-              </a:rPr>
-              <a:t>진행상황 / 개발완료</a:t>
-            </a:r>
-            <a:endParaRPr lang="en-US" sz="1700" dirty="0"/>
-          </a:p>
-        </p:txBody>
-      </p:sp>
-      <p:sp>
-        <p:nvSpPr>
-          <p:cNvPr id="16" name="Text 14"/>
-          <p:cNvSpPr/>
-          <p:nvPr/>
-        </p:nvSpPr>
-        <p:spPr>
-          <a:xfrm>
-            <a:off x="4498848" y="4599432"/>
-            <a:ext cx="6858000" cy="777240"/>
-          </a:xfrm>
-          <a:prstGeom prst="rect">
-            <a:avLst/>
-          </a:prstGeom>
-          <a:noFill/>
-          <a:ln/>
-        </p:spPr>
-        <p:txBody>
-          <a:bodyPr wrap="square" lIns="0" tIns="0" rIns="0" bIns="0" rtlCol="0" anchor="ctr"/>
-          <a:lstStyle/>
-          <a:p>
-            <a:pPr indent="0" marL="0">
-              <a:lnSpc>
-                <a:spcPct val="105000"/>
-              </a:lnSpc>
-              <a:buNone/>
-            </a:pPr>
-            <a:r>
-              <a:rPr lang="en-US" sz="1300" dirty="0">
-                <a:solidFill>
-                  <a:srgbClr val="6B7280"/>
-                </a:solidFill>
-                <a:latin typeface="맑은 고딕" pitchFamily="34" charset="0"/>
-                <a:ea typeface="맑은 고딕" pitchFamily="34" charset="-122"/>
-                <a:cs typeface="맑은 고딕" pitchFamily="34" charset="-120"/>
-              </a:rPr>
-              <a:t>요구사항·티켓의 상태(작성중·검토·개발중·완료)와 진행률을 한눈에</a:t>
-            </a:r>
-            <a:endParaRPr lang="en-US" sz="1300" dirty="0"/>
-          </a:p>
-        </p:txBody>
-      </p:sp>
-      <p:sp>
-        <p:nvSpPr>
-          <p:cNvPr id="17" name="Text 15"/>
-          <p:cNvSpPr/>
-          <p:nvPr/>
-        </p:nvSpPr>
-        <p:spPr>
-          <a:xfrm>
-            <a:off x="566928" y="5943600"/>
-            <a:ext cx="10972800" cy="365760"/>
-          </a:xfrm>
-          <a:prstGeom prst="rect">
-            <a:avLst/>
-          </a:prstGeom>
-          <a:noFill/>
-          <a:ln/>
-        </p:spPr>
-        <p:txBody>
-          <a:bodyPr wrap="square" lIns="0" tIns="0" rIns="0" bIns="0" rtlCol="0" anchor="ctr"/>
-          <a:lstStyle/>
-          <a:p>
-            <a:pPr indent="0" marL="0">
-              <a:buNone/>
-            </a:pPr>
-            <a:r>
-              <a:rPr lang="en-US" sz="1200" i="1" dirty="0">
-                <a:solidFill>
-                  <a:srgbClr val="6B7280"/>
-                </a:solidFill>
-                <a:latin typeface="맑은 고딕" pitchFamily="34" charset="0"/>
-                <a:ea typeface="맑은 고딕" pitchFamily="34" charset="-122"/>
-                <a:cs typeface="맑은 고딕" pitchFamily="34" charset="-120"/>
-              </a:rPr>
-              <a:t>※ 기존 “DB 변경관리”를 대체 — 컨셉(고객 요구사항 기반 문서화)에 맞춰 재정의</a:t>
+              <a:t>정해진 양식(템플릿)+사전 프롬프트로 4종 이슈 초안 생성 · Detail Design은 시퀀스 다이어그램까지 자동</a:t>
             </a:r>
             <a:endParaRPr lang="en-US" sz="1200" dirty="0"/>
           </a:p>
@@ -3413,7 +3772,7 @@
                 <a:ea typeface="맑은 고딕" pitchFamily="34" charset="-122"/>
                 <a:cs typeface="맑은 고딕" pitchFamily="34" charset="-120"/>
               </a:rPr>
-              <a:t>AI</a:t>
+              <a:t>핵심 기능 3</a:t>
             </a:r>
             <a:endParaRPr lang="en-US" sz="1200" dirty="0"/>
           </a:p>
@@ -3452,7 +3811,7 @@
                 <a:ea typeface="맑은 고딕" pitchFamily="34" charset="-122"/>
                 <a:cs typeface="맑은 고딕" pitchFamily="34" charset="-120"/>
               </a:rPr>
-              <a:t>AI — 두 엔진 비교</a:t>
+              <a:t>문서 추적성</a:t>
             </a:r>
             <a:endParaRPr lang="en-US" sz="3000" dirty="0"/>
           </a:p>
@@ -3460,326 +3819,72 @@
       </p:sp>
       <p:sp>
         <p:nvSpPr>
-          <p:cNvPr id="4" name="Shape 2"/>
-          <p:cNvSpPr/>
-          <p:nvPr/>
-        </p:nvSpPr>
-        <p:spPr>
-          <a:xfrm>
-            <a:off x="566928" y="1783080"/>
-            <a:ext cx="5440680" cy="2697480"/>
+          <p:cNvPr id="4" name="Text 2"/>
+          <p:cNvSpPr/>
+          <p:nvPr/>
+        </p:nvSpPr>
+        <p:spPr>
+          <a:xfrm>
+            <a:off x="10424160" y="822960"/>
+            <a:ext cx="1737360" cy="310896"/>
           </a:xfrm>
           <a:prstGeom prst="roundRect">
             <a:avLst>
-              <a:gd name="adj" fmla="val 3390"/>
+              <a:gd name="adj" fmla="val 47059"/>
             </a:avLst>
           </a:prstGeom>
           <a:solidFill>
-            <a:srgbClr val="EEF2FF"/>
+            <a:srgbClr val="FEF3C7"/>
+          </a:solidFill>
+          <a:ln/>
+        </p:spPr>
+        <p:txBody>
+          <a:bodyPr wrap="square" lIns="0" tIns="0" rIns="0" bIns="0" rtlCol="0" anchor="ctr"/>
+          <a:lstStyle/>
+          <a:p>
+            <a:pPr algn="ctr" indent="0" marL="0">
+              <a:buNone/>
+            </a:pPr>
+            <a:r>
+              <a:rPr lang="en-US" sz="1100" b="1" dirty="0">
+                <a:solidFill>
+                  <a:srgbClr val="B45309"/>
+                </a:solidFill>
+                <a:latin typeface="맑은 고딕" pitchFamily="34" charset="0"/>
+                <a:ea typeface="맑은 고딕" pitchFamily="34" charset="-122"/>
+                <a:cs typeface="맑은 고딕" pitchFamily="34" charset="-120"/>
+              </a:rPr>
+              <a:t>개발 예정</a:t>
+            </a:r>
+            <a:endParaRPr lang="en-US" sz="1100" dirty="0"/>
+          </a:p>
+        </p:txBody>
+      </p:sp>
+      <p:sp>
+        <p:nvSpPr>
+          <p:cNvPr id="5" name="Shape 3"/>
+          <p:cNvSpPr/>
+          <p:nvPr/>
+        </p:nvSpPr>
+        <p:spPr>
+          <a:xfrm>
+            <a:off x="566928" y="1874520"/>
+            <a:ext cx="11064240" cy="1097280"/>
+          </a:xfrm>
+          <a:prstGeom prst="roundRect">
+            <a:avLst>
+              <a:gd name="adj" fmla="val 6667"/>
+            </a:avLst>
+          </a:prstGeom>
+          <a:solidFill>
+            <a:srgbClr val="FFFFFF"/>
           </a:solidFill>
           <a:ln w="12700">
             <a:solidFill>
-              <a:srgbClr val="C7D2FE"/>
+              <a:srgbClr val="E5E7EB"/>
             </a:solidFill>
             <a:prstDash val="solid"/>
           </a:ln>
-        </p:spPr>
-      </p:sp>
-      <p:sp>
-        <p:nvSpPr>
-          <p:cNvPr id="5" name="Text 3"/>
-          <p:cNvSpPr/>
-          <p:nvPr/>
-        </p:nvSpPr>
-        <p:spPr>
-          <a:xfrm>
-            <a:off x="886968" y="2011680"/>
-            <a:ext cx="4846320" cy="457200"/>
-          </a:xfrm>
-          <a:prstGeom prst="rect">
-            <a:avLst/>
-          </a:prstGeom>
-          <a:noFill/>
-          <a:ln/>
-        </p:spPr>
-        <p:txBody>
-          <a:bodyPr wrap="square" lIns="0" tIns="0" rIns="0" bIns="0" rtlCol="0" anchor="ctr"/>
-          <a:lstStyle/>
-          <a:p>
-            <a:pPr indent="0" marL="0">
-              <a:buNone/>
-            </a:pPr>
-            <a:r>
-              <a:rPr lang="en-US" sz="1900" b="1" dirty="0">
-                <a:solidFill>
-                  <a:srgbClr val="6366F1"/>
-                </a:solidFill>
-                <a:latin typeface="맑은 고딕" pitchFamily="34" charset="0"/>
-                <a:ea typeface="맑은 고딕" pitchFamily="34" charset="-122"/>
-                <a:cs typeface="맑은 고딕" pitchFamily="34" charset="-120"/>
-              </a:rPr>
-              <a:t>로컬 Qwen3-8B</a:t>
-            </a:r>
-            <a:endParaRPr lang="en-US" sz="1900" dirty="0"/>
-          </a:p>
-        </p:txBody>
-      </p:sp>
-      <p:sp>
-        <p:nvSpPr>
-          <p:cNvPr id="6" name="Text 4"/>
-          <p:cNvSpPr/>
-          <p:nvPr/>
-        </p:nvSpPr>
-        <p:spPr>
-          <a:xfrm>
-            <a:off x="932688" y="2606040"/>
-            <a:ext cx="4754880" cy="1737360"/>
-          </a:xfrm>
-          <a:prstGeom prst="rect">
-            <a:avLst/>
-          </a:prstGeom>
-          <a:noFill/>
-          <a:ln/>
-        </p:spPr>
-        <p:txBody>
-          <a:bodyPr wrap="square" lIns="0" tIns="0" rIns="0" bIns="0" rtlCol="0" anchor="ctr"/>
-          <a:lstStyle/>
-          <a:p>
-            <a:pPr marL="342900" indent="-342900">
-              <a:spcAft>
-                <a:spcPts val="700"/>
-              </a:spcAft>
-              <a:buSzPct val="100000"/>
-              <a:buChar char="•"/>
-            </a:pPr>
-            <a:r>
-              <a:rPr lang="en-US" sz="1300" dirty="0">
-                <a:solidFill>
-                  <a:srgbClr val="1F2937"/>
-                </a:solidFill>
-                <a:latin typeface="맑은 고딕" pitchFamily="34" charset="0"/>
-                <a:ea typeface="맑은 고딕" pitchFamily="34" charset="-122"/>
-                <a:cs typeface="맑은 고딕" pitchFamily="34" charset="-120"/>
-              </a:rPr>
-              <a:t>내 워크스테이션(P4000 8GB)에서 직접</a:t>
-            </a:r>
-            <a:endParaRPr lang="en-US" sz="1300" dirty="0"/>
-          </a:p>
-          <a:p>
-            <a:pPr marL="342900" indent="-342900">
-              <a:spcAft>
-                <a:spcPts val="700"/>
-              </a:spcAft>
-              <a:buSzPct val="100000"/>
-              <a:buChar char="•"/>
-            </a:pPr>
-            <a:r>
-              <a:rPr lang="en-US" sz="1300" dirty="0">
-                <a:solidFill>
-                  <a:srgbClr val="1F2937"/>
-                </a:solidFill>
-                <a:latin typeface="맑은 고딕" pitchFamily="34" charset="0"/>
-                <a:ea typeface="맑은 고딕" pitchFamily="34" charset="-122"/>
-                <a:cs typeface="맑은 고딕" pitchFamily="34" charset="-120"/>
-              </a:rPr>
-              <a:t>8B 모델 · GGUF 양자화 Q5_K_M(≈5.85GB)</a:t>
-            </a:r>
-            <a:endParaRPr lang="en-US" sz="1300" dirty="0"/>
-          </a:p>
-          <a:p>
-            <a:pPr marL="342900" indent="-342900">
-              <a:spcAft>
-                <a:spcPts val="700"/>
-              </a:spcAft>
-              <a:buSzPct val="100000"/>
-              <a:buChar char="•"/>
-            </a:pPr>
-            <a:r>
-              <a:rPr lang="en-US" sz="1300" dirty="0">
-                <a:solidFill>
-                  <a:srgbClr val="1F2937"/>
-                </a:solidFill>
-                <a:latin typeface="맑은 고딕" pitchFamily="34" charset="0"/>
-                <a:ea typeface="맑은 고딕" pitchFamily="34" charset="-122"/>
-                <a:cs typeface="맑은 고딕" pitchFamily="34" charset="-120"/>
-              </a:rPr>
-              <a:t>오프라인 자립 · 한국어 강점</a:t>
-            </a:r>
-            <a:endParaRPr lang="en-US" sz="1300" dirty="0"/>
-          </a:p>
-        </p:txBody>
-      </p:sp>
-      <p:sp>
-        <p:nvSpPr>
-          <p:cNvPr id="7" name="Shape 5"/>
-          <p:cNvSpPr/>
-          <p:nvPr/>
-        </p:nvSpPr>
-        <p:spPr>
-          <a:xfrm>
-            <a:off x="6327648" y="1783080"/>
-            <a:ext cx="5440680" cy="2697480"/>
-          </a:xfrm>
-          <a:prstGeom prst="roundRect">
-            <a:avLst>
-              <a:gd name="adj" fmla="val 3390"/>
-            </a:avLst>
-          </a:prstGeom>
-          <a:solidFill>
-            <a:srgbClr val="F5F3FF"/>
-          </a:solidFill>
-          <a:ln w="12700">
-            <a:solidFill>
-              <a:srgbClr val="DDD6FE"/>
-            </a:solidFill>
-            <a:prstDash val="solid"/>
-          </a:ln>
-        </p:spPr>
-      </p:sp>
-      <p:sp>
-        <p:nvSpPr>
-          <p:cNvPr id="8" name="Text 6"/>
-          <p:cNvSpPr/>
-          <p:nvPr/>
-        </p:nvSpPr>
-        <p:spPr>
-          <a:xfrm>
-            <a:off x="6647688" y="2011680"/>
-            <a:ext cx="4846320" cy="457200"/>
-          </a:xfrm>
-          <a:prstGeom prst="rect">
-            <a:avLst/>
-          </a:prstGeom>
-          <a:noFill/>
-          <a:ln/>
-        </p:spPr>
-        <p:txBody>
-          <a:bodyPr wrap="square" lIns="0" tIns="0" rIns="0" bIns="0" rtlCol="0" anchor="ctr"/>
-          <a:lstStyle/>
-          <a:p>
-            <a:pPr indent="0" marL="0">
-              <a:buNone/>
-            </a:pPr>
-            <a:r>
-              <a:rPr lang="en-US" sz="1900" b="1" dirty="0">
-                <a:solidFill>
-                  <a:srgbClr val="8B5CF6"/>
-                </a:solidFill>
-                <a:latin typeface="맑은 고딕" pitchFamily="34" charset="0"/>
-                <a:ea typeface="맑은 고딕" pitchFamily="34" charset="-122"/>
-                <a:cs typeface="맑은 고딕" pitchFamily="34" charset="-120"/>
-              </a:rPr>
-              <a:t>사내 GPT-OSS-120B</a:t>
-            </a:r>
-            <a:endParaRPr lang="en-US" sz="1900" dirty="0"/>
-          </a:p>
-        </p:txBody>
-      </p:sp>
-      <p:sp>
-        <p:nvSpPr>
-          <p:cNvPr id="9" name="Text 7"/>
-          <p:cNvSpPr/>
-          <p:nvPr/>
-        </p:nvSpPr>
-        <p:spPr>
-          <a:xfrm>
-            <a:off x="6693408" y="2606040"/>
-            <a:ext cx="4754880" cy="1737360"/>
-          </a:xfrm>
-          <a:prstGeom prst="rect">
-            <a:avLst/>
-          </a:prstGeom>
-          <a:noFill/>
-          <a:ln/>
-        </p:spPr>
-        <p:txBody>
-          <a:bodyPr wrap="square" lIns="0" tIns="0" rIns="0" bIns="0" rtlCol="0" anchor="ctr"/>
-          <a:lstStyle/>
-          <a:p>
-            <a:pPr marL="342900" indent="-342900">
-              <a:spcAft>
-                <a:spcPts val="700"/>
-              </a:spcAft>
-              <a:buSzPct val="100000"/>
-              <a:buChar char="•"/>
-            </a:pPr>
-            <a:r>
-              <a:rPr lang="en-US" sz="1300" dirty="0">
-                <a:solidFill>
-                  <a:srgbClr val="1F2937"/>
-                </a:solidFill>
-                <a:latin typeface="맑은 고딕" pitchFamily="34" charset="0"/>
-                <a:ea typeface="맑은 고딕" pitchFamily="34" charset="-122"/>
-                <a:cs typeface="맑은 고딕" pitchFamily="34" charset="-120"/>
-              </a:rPr>
-              <a:t>사내 LLM API 서비스(OpenAI 호환)</a:t>
-            </a:r>
-            <a:endParaRPr lang="en-US" sz="1300" dirty="0"/>
-          </a:p>
-          <a:p>
-            <a:pPr marL="342900" indent="-342900">
-              <a:spcAft>
-                <a:spcPts val="700"/>
-              </a:spcAft>
-              <a:buSzPct val="100000"/>
-              <a:buChar char="•"/>
-            </a:pPr>
-            <a:r>
-              <a:rPr lang="en-US" sz="1300" dirty="0">
-                <a:solidFill>
-                  <a:srgbClr val="1F2937"/>
-                </a:solidFill>
-                <a:latin typeface="맑은 고딕" pitchFamily="34" charset="0"/>
-                <a:ea typeface="맑은 고딕" pitchFamily="34" charset="-122"/>
-                <a:cs typeface="맑은 고딕" pitchFamily="34" charset="-120"/>
-              </a:rPr>
-              <a:t>훨씬 큰 모델 → 어려운 판단 정확도 유리</a:t>
-            </a:r>
-            <a:endParaRPr lang="en-US" sz="1300" dirty="0"/>
-          </a:p>
-          <a:p>
-            <a:pPr marL="342900" indent="-342900">
-              <a:spcAft>
-                <a:spcPts val="700"/>
-              </a:spcAft>
-              <a:buSzPct val="100000"/>
-              <a:buChar char="•"/>
-            </a:pPr>
-            <a:r>
-              <a:rPr lang="en-US" sz="1300" dirty="0">
-                <a:solidFill>
-                  <a:srgbClr val="1F2937"/>
-                </a:solidFill>
-                <a:latin typeface="맑은 고딕" pitchFamily="34" charset="0"/>
-                <a:ea typeface="맑은 고딕" pitchFamily="34" charset="-122"/>
-                <a:cs typeface="맑은 고딕" pitchFamily="34" charset="-120"/>
-              </a:rPr>
-              <a:t>공용 서버 의존</a:t>
-            </a:r>
-            <a:endParaRPr lang="en-US" sz="1300" dirty="0"/>
-          </a:p>
-        </p:txBody>
-      </p:sp>
-      <p:sp>
-        <p:nvSpPr>
-          <p:cNvPr id="10" name="Shape 8"/>
-          <p:cNvSpPr/>
-          <p:nvPr/>
-        </p:nvSpPr>
-        <p:spPr>
-          <a:xfrm>
-            <a:off x="566928" y="4709160"/>
-            <a:ext cx="11064240" cy="1463040"/>
-          </a:xfrm>
-          <a:prstGeom prst="roundRect">
-            <a:avLst>
-              <a:gd name="adj" fmla="val 6250"/>
-            </a:avLst>
-          </a:prstGeom>
-          <a:solidFill>
-            <a:srgbClr val="1E1B4B"/>
-          </a:solidFill>
-          <a:ln/>
           <a:effectLst>
             <a:outerShdw sx="100000" sy="100000" kx="0" ky="0" algn="bl" rotWithShape="0" blurRad="127000" dist="50800" dir="5400000">
               <a:srgbClr val="1E1B4B">
@@ -3791,14 +3896,55 @@
       </p:sp>
       <p:sp>
         <p:nvSpPr>
-          <p:cNvPr id="11" name="Text 9"/>
-          <p:cNvSpPr/>
-          <p:nvPr/>
-        </p:nvSpPr>
-        <p:spPr>
-          <a:xfrm>
-            <a:off x="886968" y="4892040"/>
-            <a:ext cx="10424160" cy="457200"/>
+          <p:cNvPr id="6" name="Text 4"/>
+          <p:cNvSpPr/>
+          <p:nvPr/>
+        </p:nvSpPr>
+        <p:spPr>
+          <a:xfrm>
+            <a:off x="822960" y="2167128"/>
+            <a:ext cx="512064" cy="512064"/>
+          </a:xfrm>
+          <a:prstGeom prst="ellipse">
+            <a:avLst/>
+          </a:prstGeom>
+          <a:solidFill>
+            <a:srgbClr val="8B5CF6"/>
+          </a:solidFill>
+          <a:ln/>
+        </p:spPr>
+        <p:txBody>
+          <a:bodyPr wrap="square" lIns="0" tIns="0" rIns="0" bIns="0" rtlCol="0" anchor="ctr"/>
+          <a:lstStyle/>
+          <a:p>
+            <a:pPr algn="ctr" indent="0" marL="0">
+              <a:buNone/>
+            </a:pPr>
+            <a:r>
+              <a:rPr lang="en-US" sz="1800" b="1" dirty="0">
+                <a:solidFill>
+                  <a:srgbClr val="FFFFFF"/>
+                </a:solidFill>
+                <a:latin typeface="맑은 고딕" pitchFamily="34" charset="0"/>
+                <a:ea typeface="맑은 고딕" pitchFamily="34" charset="-122"/>
+                <a:cs typeface="맑은 고딕" pitchFamily="34" charset="-120"/>
+              </a:rPr>
+              <a:t>1</a:t>
+            </a:r>
+            <a:endParaRPr lang="en-US" sz="1800" dirty="0"/>
+          </a:p>
+        </p:txBody>
+      </p:sp>
+      <p:sp>
+        <p:nvSpPr>
+          <p:cNvPr id="7" name="Text 5"/>
+          <p:cNvSpPr/>
+          <p:nvPr/>
+        </p:nvSpPr>
+        <p:spPr>
+          <a:xfrm>
+            <a:off x="1527048" y="2039112"/>
+            <a:ext cx="2926080" cy="731520"/>
           </a:xfrm>
           <a:prstGeom prst="rect">
             <a:avLst/>
@@ -3814,44 +3960,30 @@
               <a:buNone/>
             </a:pPr>
             <a:r>
-              <a:rPr lang="en-US" sz="1350" b="1" dirty="0">
-                <a:solidFill>
-                  <a:srgbClr val="FFFFFF"/>
-                </a:solidFill>
-                <a:latin typeface="맑은 고딕" pitchFamily="34" charset="0"/>
-                <a:ea typeface="맑은 고딕" pitchFamily="34" charset="-122"/>
-                <a:cs typeface="맑은 고딕" pitchFamily="34" charset="-120"/>
-              </a:rPr>
-              <a:t>응답 시간은 둘 다 3~5초로 비슷</a:t>
-            </a:r>
-            <a:pPr indent="0" marL="0">
-              <a:buNone/>
-            </a:pPr>
-            <a:r>
-              <a:rPr lang="en-US" sz="1350" dirty="0">
-                <a:solidFill>
-                  <a:srgbClr val="C7D2FE"/>
-                </a:solidFill>
-                <a:latin typeface="맑은 고딕" pitchFamily="34" charset="0"/>
-                <a:ea typeface="맑은 고딕" pitchFamily="34" charset="-122"/>
-                <a:cs typeface="맑은 고딕" pitchFamily="34" charset="-120"/>
-              </a:rPr>
-              <a:t> → 속도가 아니라 정확도·자립성으로 선택. 동일 요구사항 세트로 실측 후 확정.</a:t>
-            </a:r>
-            <a:endParaRPr lang="en-US" sz="1350" dirty="0"/>
-          </a:p>
-        </p:txBody>
-      </p:sp>
-      <p:sp>
-        <p:nvSpPr>
-          <p:cNvPr id="12" name="Text 10"/>
-          <p:cNvSpPr/>
-          <p:nvPr/>
-        </p:nvSpPr>
-        <p:spPr>
-          <a:xfrm>
-            <a:off x="886968" y="5440680"/>
-            <a:ext cx="10424160" cy="640080"/>
+              <a:rPr lang="en-US" sz="1700" b="1" dirty="0">
+                <a:solidFill>
+                  <a:srgbClr val="1F2937"/>
+                </a:solidFill>
+                <a:latin typeface="맑은 고딕" pitchFamily="34" charset="0"/>
+                <a:ea typeface="맑은 고딕" pitchFamily="34" charset="-122"/>
+                <a:cs typeface="맑은 고딕" pitchFamily="34" charset="-120"/>
+              </a:rPr>
+              <a:t>연결 조회</a:t>
+            </a:r>
+            <a:endParaRPr lang="en-US" sz="1700" dirty="0"/>
+          </a:p>
+        </p:txBody>
+      </p:sp>
+      <p:sp>
+        <p:nvSpPr>
+          <p:cNvPr id="8" name="Text 6"/>
+          <p:cNvSpPr/>
+          <p:nvPr/>
+        </p:nvSpPr>
+        <p:spPr>
+          <a:xfrm>
+            <a:off x="4498848" y="2039112"/>
+            <a:ext cx="6858000" cy="777240"/>
           </a:xfrm>
           <a:prstGeom prst="rect">
             <a:avLst/>
@@ -3870,16 +4002,155 @@
               <a:buNone/>
             </a:pPr>
             <a:r>
-              <a:rPr lang="en-US" sz="1250" b="1" dirty="0">
-                <a:solidFill>
-                  <a:srgbClr val="A5B4FC"/>
-                </a:solidFill>
-                <a:latin typeface="맑은 고딕" pitchFamily="34" charset="0"/>
-                <a:ea typeface="맑은 고딕" pitchFamily="34" charset="-122"/>
-                <a:cs typeface="맑은 고딕" pitchFamily="34" charset="-120"/>
-              </a:rPr>
-              <a:t>양자화란?</a:t>
-            </a:r>
+              <a:rPr lang="en-US" sz="1300" dirty="0">
+                <a:solidFill>
+                  <a:srgbClr val="6B7280"/>
+                </a:solidFill>
+                <a:latin typeface="맑은 고딕" pitchFamily="34" charset="0"/>
+                <a:ea typeface="맑은 고딕" pitchFamily="34" charset="-122"/>
+                <a:cs typeface="맑은 고딕" pitchFamily="34" charset="-120"/>
+              </a:rPr>
+              <a:t>요구사항 1건에 연결된 기능요구사항·비기능요구사항·티켓을 한눈에 조회 (양방향)</a:t>
+            </a:r>
+            <a:endParaRPr lang="en-US" sz="1300" dirty="0"/>
+          </a:p>
+        </p:txBody>
+      </p:sp>
+      <p:sp>
+        <p:nvSpPr>
+          <p:cNvPr id="9" name="Shape 7"/>
+          <p:cNvSpPr/>
+          <p:nvPr/>
+        </p:nvSpPr>
+        <p:spPr>
+          <a:xfrm>
+            <a:off x="566928" y="3154680"/>
+            <a:ext cx="11064240" cy="1097280"/>
+          </a:xfrm>
+          <a:prstGeom prst="roundRect">
+            <a:avLst>
+              <a:gd name="adj" fmla="val 6667"/>
+            </a:avLst>
+          </a:prstGeom>
+          <a:solidFill>
+            <a:srgbClr val="FFFFFF"/>
+          </a:solidFill>
+          <a:ln w="12700">
+            <a:solidFill>
+              <a:srgbClr val="E5E7EB"/>
+            </a:solidFill>
+            <a:prstDash val="solid"/>
+          </a:ln>
+          <a:effectLst>
+            <a:outerShdw sx="100000" sy="100000" kx="0" ky="0" algn="bl" rotWithShape="0" blurRad="127000" dist="50800" dir="5400000">
+              <a:srgbClr val="1E1B4B">
+                <a:alpha val="18000"/>
+              </a:srgbClr>
+            </a:outerShdw>
+          </a:effectLst>
+        </p:spPr>
+      </p:sp>
+      <p:sp>
+        <p:nvSpPr>
+          <p:cNvPr id="10" name="Text 8"/>
+          <p:cNvSpPr/>
+          <p:nvPr/>
+        </p:nvSpPr>
+        <p:spPr>
+          <a:xfrm>
+            <a:off x="822960" y="3447288"/>
+            <a:ext cx="512064" cy="512064"/>
+          </a:xfrm>
+          <a:prstGeom prst="ellipse">
+            <a:avLst/>
+          </a:prstGeom>
+          <a:solidFill>
+            <a:srgbClr val="8B5CF6"/>
+          </a:solidFill>
+          <a:ln/>
+        </p:spPr>
+        <p:txBody>
+          <a:bodyPr wrap="square" lIns="0" tIns="0" rIns="0" bIns="0" rtlCol="0" anchor="ctr"/>
+          <a:lstStyle/>
+          <a:p>
+            <a:pPr algn="ctr" indent="0" marL="0">
+              <a:buNone/>
+            </a:pPr>
+            <a:r>
+              <a:rPr lang="en-US" sz="1800" b="1" dirty="0">
+                <a:solidFill>
+                  <a:srgbClr val="FFFFFF"/>
+                </a:solidFill>
+                <a:latin typeface="맑은 고딕" pitchFamily="34" charset="0"/>
+                <a:ea typeface="맑은 고딕" pitchFamily="34" charset="-122"/>
+                <a:cs typeface="맑은 고딕" pitchFamily="34" charset="-120"/>
+              </a:rPr>
+              <a:t>2</a:t>
+            </a:r>
+            <a:endParaRPr lang="en-US" sz="1800" dirty="0"/>
+          </a:p>
+        </p:txBody>
+      </p:sp>
+      <p:sp>
+        <p:nvSpPr>
+          <p:cNvPr id="11" name="Text 9"/>
+          <p:cNvSpPr/>
+          <p:nvPr/>
+        </p:nvSpPr>
+        <p:spPr>
+          <a:xfrm>
+            <a:off x="1527048" y="3319272"/>
+            <a:ext cx="2926080" cy="731520"/>
+          </a:xfrm>
+          <a:prstGeom prst="rect">
+            <a:avLst/>
+          </a:prstGeom>
+          <a:noFill/>
+          <a:ln/>
+        </p:spPr>
+        <p:txBody>
+          <a:bodyPr wrap="square" lIns="0" tIns="0" rIns="0" bIns="0" rtlCol="0" anchor="ctr"/>
+          <a:lstStyle/>
+          <a:p>
+            <a:pPr indent="0" marL="0">
+              <a:buNone/>
+            </a:pPr>
+            <a:r>
+              <a:rPr lang="en-US" sz="1700" b="1" dirty="0">
+                <a:solidFill>
+                  <a:srgbClr val="1F2937"/>
+                </a:solidFill>
+                <a:latin typeface="맑은 고딕" pitchFamily="34" charset="0"/>
+                <a:ea typeface="맑은 고딕" pitchFamily="34" charset="-122"/>
+                <a:cs typeface="맑은 고딕" pitchFamily="34" charset="-120"/>
+              </a:rPr>
+              <a:t>변경 영향 분석</a:t>
+            </a:r>
+            <a:endParaRPr lang="en-US" sz="1700" dirty="0"/>
+          </a:p>
+        </p:txBody>
+      </p:sp>
+      <p:sp>
+        <p:nvSpPr>
+          <p:cNvPr id="12" name="Text 10"/>
+          <p:cNvSpPr/>
+          <p:nvPr/>
+        </p:nvSpPr>
+        <p:spPr>
+          <a:xfrm>
+            <a:off x="4498848" y="3319272"/>
+            <a:ext cx="6858000" cy="777240"/>
+          </a:xfrm>
+          <a:prstGeom prst="rect">
+            <a:avLst/>
+          </a:prstGeom>
+          <a:noFill/>
+          <a:ln/>
+        </p:spPr>
+        <p:txBody>
+          <a:bodyPr wrap="square" lIns="0" tIns="0" rIns="0" bIns="0" rtlCol="0" anchor="ctr"/>
+          <a:lstStyle/>
+          <a:p>
             <a:pPr indent="0" marL="0">
               <a:lnSpc>
                 <a:spcPct val="105000"/>
@@ -3887,17 +4158,212 @@
               <a:buNone/>
             </a:pPr>
             <a:r>
-              <a:rPr lang="en-US" sz="1250" dirty="0">
-                <a:solidFill>
-                  <a:srgbClr val="C7D2FE"/>
-                </a:solidFill>
-                <a:latin typeface="맑은 고딕" pitchFamily="34" charset="0"/>
-                <a:ea typeface="맑은 고딕" pitchFamily="34" charset="-122"/>
-                <a:cs typeface="맑은 고딕" pitchFamily="34" charset="-120"/>
-              </a:rPr>
-              <a:t>  사진을 JPG로 압축하듯 용량↓·품질 소폭↓. 8B 원본(≈16GB)은 8GB GPU에 못 올라가 5.85GB로 압축해 사용.</a:t>
-            </a:r>
-            <a:endParaRPr lang="en-US" sz="1250" dirty="0"/>
+              <a:rPr lang="en-US" sz="1300" dirty="0">
+                <a:solidFill>
+                  <a:srgbClr val="6B7280"/>
+                </a:solidFill>
+                <a:latin typeface="맑은 고딕" pitchFamily="34" charset="0"/>
+                <a:ea typeface="맑은 고딕" pitchFamily="34" charset="-122"/>
+                <a:cs typeface="맑은 고딕" pitchFamily="34" charset="-120"/>
+              </a:rPr>
+              <a:t>요구사항이 수정되면 영향받는 문서·티켓을 자동으로 표시 → 누락 방지</a:t>
+            </a:r>
+            <a:endParaRPr lang="en-US" sz="1300" dirty="0"/>
+          </a:p>
+        </p:txBody>
+      </p:sp>
+      <p:sp>
+        <p:nvSpPr>
+          <p:cNvPr id="13" name="Shape 11"/>
+          <p:cNvSpPr/>
+          <p:nvPr/>
+        </p:nvSpPr>
+        <p:spPr>
+          <a:xfrm>
+            <a:off x="566928" y="4434840"/>
+            <a:ext cx="11064240" cy="1097280"/>
+          </a:xfrm>
+          <a:prstGeom prst="roundRect">
+            <a:avLst>
+              <a:gd name="adj" fmla="val 6667"/>
+            </a:avLst>
+          </a:prstGeom>
+          <a:solidFill>
+            <a:srgbClr val="EEF2FF"/>
+          </a:solidFill>
+          <a:ln w="12700">
+            <a:solidFill>
+              <a:srgbClr val="E5E7EB"/>
+            </a:solidFill>
+            <a:prstDash val="solid"/>
+          </a:ln>
+          <a:effectLst>
+            <a:outerShdw sx="100000" sy="100000" kx="0" ky="0" algn="bl" rotWithShape="0" blurRad="127000" dist="50800" dir="5400000">
+              <a:srgbClr val="1E1B4B">
+                <a:alpha val="18000"/>
+              </a:srgbClr>
+            </a:outerShdw>
+          </a:effectLst>
+        </p:spPr>
+      </p:sp>
+      <p:sp>
+        <p:nvSpPr>
+          <p:cNvPr id="14" name="Text 12"/>
+          <p:cNvSpPr/>
+          <p:nvPr/>
+        </p:nvSpPr>
+        <p:spPr>
+          <a:xfrm>
+            <a:off x="822960" y="4727448"/>
+            <a:ext cx="512064" cy="512064"/>
+          </a:xfrm>
+          <a:prstGeom prst="ellipse">
+            <a:avLst/>
+          </a:prstGeom>
+          <a:solidFill>
+            <a:srgbClr val="8B5CF6"/>
+          </a:solidFill>
+          <a:ln/>
+        </p:spPr>
+        <p:txBody>
+          <a:bodyPr wrap="square" lIns="0" tIns="0" rIns="0" bIns="0" rtlCol="0" anchor="ctr"/>
+          <a:lstStyle/>
+          <a:p>
+            <a:pPr algn="ctr" indent="0" marL="0">
+              <a:buNone/>
+            </a:pPr>
+            <a:r>
+              <a:rPr lang="en-US" sz="1800" b="1" dirty="0">
+                <a:solidFill>
+                  <a:srgbClr val="FFFFFF"/>
+                </a:solidFill>
+                <a:latin typeface="맑은 고딕" pitchFamily="34" charset="0"/>
+                <a:ea typeface="맑은 고딕" pitchFamily="34" charset="-122"/>
+                <a:cs typeface="맑은 고딕" pitchFamily="34" charset="-120"/>
+              </a:rPr>
+              <a:t>3</a:t>
+            </a:r>
+            <a:endParaRPr lang="en-US" sz="1800" dirty="0"/>
+          </a:p>
+        </p:txBody>
+      </p:sp>
+      <p:sp>
+        <p:nvSpPr>
+          <p:cNvPr id="15" name="Text 13"/>
+          <p:cNvSpPr/>
+          <p:nvPr/>
+        </p:nvSpPr>
+        <p:spPr>
+          <a:xfrm>
+            <a:off x="1527048" y="4599432"/>
+            <a:ext cx="2926080" cy="731520"/>
+          </a:xfrm>
+          <a:prstGeom prst="rect">
+            <a:avLst/>
+          </a:prstGeom>
+          <a:noFill/>
+          <a:ln/>
+        </p:spPr>
+        <p:txBody>
+          <a:bodyPr wrap="square" lIns="0" tIns="0" rIns="0" bIns="0" rtlCol="0" anchor="ctr"/>
+          <a:lstStyle/>
+          <a:p>
+            <a:pPr indent="0" marL="0">
+              <a:buNone/>
+            </a:pPr>
+            <a:r>
+              <a:rPr lang="en-US" sz="1700" b="1" dirty="0">
+                <a:solidFill>
+                  <a:srgbClr val="1F2937"/>
+                </a:solidFill>
+                <a:latin typeface="맑은 고딕" pitchFamily="34" charset="0"/>
+                <a:ea typeface="맑은 고딕" pitchFamily="34" charset="-122"/>
+                <a:cs typeface="맑은 고딕" pitchFamily="34" charset="-120"/>
+              </a:rPr>
+              <a:t>진행상황 / 개발완료</a:t>
+            </a:r>
+            <a:endParaRPr lang="en-US" sz="1700" dirty="0"/>
+          </a:p>
+        </p:txBody>
+      </p:sp>
+      <p:sp>
+        <p:nvSpPr>
+          <p:cNvPr id="16" name="Text 14"/>
+          <p:cNvSpPr/>
+          <p:nvPr/>
+        </p:nvSpPr>
+        <p:spPr>
+          <a:xfrm>
+            <a:off x="4498848" y="4599432"/>
+            <a:ext cx="6858000" cy="777240"/>
+          </a:xfrm>
+          <a:prstGeom prst="rect">
+            <a:avLst/>
+          </a:prstGeom>
+          <a:noFill/>
+          <a:ln/>
+        </p:spPr>
+        <p:txBody>
+          <a:bodyPr wrap="square" lIns="0" tIns="0" rIns="0" bIns="0" rtlCol="0" anchor="ctr"/>
+          <a:lstStyle/>
+          <a:p>
+            <a:pPr indent="0" marL="0">
+              <a:lnSpc>
+                <a:spcPct val="105000"/>
+              </a:lnSpc>
+              <a:buNone/>
+            </a:pPr>
+            <a:r>
+              <a:rPr lang="en-US" sz="1300" dirty="0">
+                <a:solidFill>
+                  <a:srgbClr val="6B7280"/>
+                </a:solidFill>
+                <a:latin typeface="맑은 고딕" pitchFamily="34" charset="0"/>
+                <a:ea typeface="맑은 고딕" pitchFamily="34" charset="-122"/>
+                <a:cs typeface="맑은 고딕" pitchFamily="34" charset="-120"/>
+              </a:rPr>
+              <a:t>요구사항·티켓의 상태(작성중·검토·개발중·완료)와 진행률을 한눈에</a:t>
+            </a:r>
+            <a:endParaRPr lang="en-US" sz="1300" dirty="0"/>
+          </a:p>
+        </p:txBody>
+      </p:sp>
+      <p:sp>
+        <p:nvSpPr>
+          <p:cNvPr id="17" name="Text 15"/>
+          <p:cNvSpPr/>
+          <p:nvPr/>
+        </p:nvSpPr>
+        <p:spPr>
+          <a:xfrm>
+            <a:off x="566928" y="5943600"/>
+            <a:ext cx="10972800" cy="365760"/>
+          </a:xfrm>
+          <a:prstGeom prst="rect">
+            <a:avLst/>
+          </a:prstGeom>
+          <a:noFill/>
+          <a:ln/>
+        </p:spPr>
+        <p:txBody>
+          <a:bodyPr wrap="square" lIns="0" tIns="0" rIns="0" bIns="0" rtlCol="0" anchor="ctr"/>
+          <a:lstStyle/>
+          <a:p>
+            <a:pPr indent="0" marL="0">
+              <a:buNone/>
+            </a:pPr>
+            <a:r>
+              <a:rPr lang="en-US" sz="1200" i="1" dirty="0">
+                <a:solidFill>
+                  <a:srgbClr val="6B7280"/>
+                </a:solidFill>
+                <a:latin typeface="맑은 고딕" pitchFamily="34" charset="0"/>
+                <a:ea typeface="맑은 고딕" pitchFamily="34" charset="-122"/>
+                <a:cs typeface="맑은 고딕" pitchFamily="34" charset="-120"/>
+              </a:rPr>
+              <a:t>※ 기존 “DB 변경관리”를 대체 — 컨셉(고객 요구사항 기반 문서화)에 맞춰 재정의</a:t>
+            </a:r>
+            <a:endParaRPr lang="en-US" sz="1200" dirty="0"/>
           </a:p>
         </p:txBody>
       </p:sp>
@@ -3912,6 +4378,559 @@
 <file path=ppt/slides/slide14.xml><?xml version="1.0" encoding="utf-8"?>
 <p:sld xmlns:a="http://schemas.openxmlformats.org/drawingml/2006/main" xmlns:r="http://schemas.openxmlformats.org/officeDocument/2006/relationships" xmlns:p="http://schemas.openxmlformats.org/presentationml/2006/main">
   <p:cSld name="Slide 14">
+    <p:bg>
+      <p:bgPr>
+        <a:solidFill>
+          <a:srgbClr val="FFFFFF"/>
+        </a:solidFill>
+      </p:bgPr>
+    </p:bg>
+    <p:spTree>
+      <p:nvGrpSpPr>
+        <p:cNvPr id="1" name=""/>
+        <p:cNvGrpSpPr/>
+        <p:nvPr/>
+      </p:nvGrpSpPr>
+      <p:grpSpPr>
+        <a:xfrm>
+          <a:off x="0" y="0"/>
+          <a:ext cx="0" cy="0"/>
+          <a:chOff x="0" y="0"/>
+          <a:chExt cx="0" cy="0"/>
+        </a:xfrm>
+      </p:grpSpPr>
+      <p:sp>
+        <p:nvSpPr>
+          <p:cNvPr id="2" name="Text 0"/>
+          <p:cNvSpPr/>
+          <p:nvPr/>
+        </p:nvSpPr>
+        <p:spPr>
+          <a:xfrm>
+            <a:off x="566928" y="457200"/>
+            <a:ext cx="10058400" cy="274320"/>
+          </a:xfrm>
+          <a:prstGeom prst="rect">
+            <a:avLst/>
+          </a:prstGeom>
+          <a:noFill/>
+          <a:ln/>
+        </p:spPr>
+        <p:txBody>
+          <a:bodyPr wrap="square" lIns="0" tIns="0" rIns="0" bIns="0" rtlCol="0" anchor="ctr"/>
+          <a:lstStyle/>
+          <a:p>
+            <a:pPr indent="0" marL="0">
+              <a:buNone/>
+            </a:pPr>
+            <a:r>
+              <a:rPr lang="en-US" sz="1200" b="1" spc="100" kern="0" dirty="0">
+                <a:solidFill>
+                  <a:srgbClr val="6366F1"/>
+                </a:solidFill>
+                <a:latin typeface="맑은 고딕" pitchFamily="34" charset="0"/>
+                <a:ea typeface="맑은 고딕" pitchFamily="34" charset="-122"/>
+                <a:cs typeface="맑은 고딕" pitchFamily="34" charset="-120"/>
+              </a:rPr>
+              <a:t>AI</a:t>
+            </a:r>
+            <a:endParaRPr lang="en-US" sz="1200" dirty="0"/>
+          </a:p>
+        </p:txBody>
+      </p:sp>
+      <p:sp>
+        <p:nvSpPr>
+          <p:cNvPr id="3" name="Text 1"/>
+          <p:cNvSpPr/>
+          <p:nvPr/>
+        </p:nvSpPr>
+        <p:spPr>
+          <a:xfrm>
+            <a:off x="566928" y="749808"/>
+            <a:ext cx="10515600" cy="640080"/>
+          </a:xfrm>
+          <a:prstGeom prst="rect">
+            <a:avLst/>
+          </a:prstGeom>
+          <a:noFill/>
+          <a:ln/>
+        </p:spPr>
+        <p:txBody>
+          <a:bodyPr wrap="square" lIns="0" tIns="0" rIns="0" bIns="0" rtlCol="0" anchor="ctr"/>
+          <a:lstStyle/>
+          <a:p>
+            <a:pPr indent="0" marL="0">
+              <a:buNone/>
+            </a:pPr>
+            <a:r>
+              <a:rPr lang="en-US" sz="3000" b="1" dirty="0">
+                <a:solidFill>
+                  <a:srgbClr val="1F2937"/>
+                </a:solidFill>
+                <a:latin typeface="맑은 고딕" pitchFamily="34" charset="0"/>
+                <a:ea typeface="맑은 고딕" pitchFamily="34" charset="-122"/>
+                <a:cs typeface="맑은 고딕" pitchFamily="34" charset="-120"/>
+              </a:rPr>
+              <a:t>AI — 두 엔진 비교</a:t>
+            </a:r>
+            <a:endParaRPr lang="en-US" sz="3000" dirty="0"/>
+          </a:p>
+        </p:txBody>
+      </p:sp>
+      <p:sp>
+        <p:nvSpPr>
+          <p:cNvPr id="4" name="Shape 2"/>
+          <p:cNvSpPr/>
+          <p:nvPr/>
+        </p:nvSpPr>
+        <p:spPr>
+          <a:xfrm>
+            <a:off x="566928" y="1783080"/>
+            <a:ext cx="5440680" cy="2697480"/>
+          </a:xfrm>
+          <a:prstGeom prst="roundRect">
+            <a:avLst>
+              <a:gd name="adj" fmla="val 3390"/>
+            </a:avLst>
+          </a:prstGeom>
+          <a:solidFill>
+            <a:srgbClr val="EEF2FF"/>
+          </a:solidFill>
+          <a:ln w="12700">
+            <a:solidFill>
+              <a:srgbClr val="C7D2FE"/>
+            </a:solidFill>
+            <a:prstDash val="solid"/>
+          </a:ln>
+        </p:spPr>
+      </p:sp>
+      <p:sp>
+        <p:nvSpPr>
+          <p:cNvPr id="5" name="Text 3"/>
+          <p:cNvSpPr/>
+          <p:nvPr/>
+        </p:nvSpPr>
+        <p:spPr>
+          <a:xfrm>
+            <a:off x="886968" y="2011680"/>
+            <a:ext cx="4846320" cy="457200"/>
+          </a:xfrm>
+          <a:prstGeom prst="rect">
+            <a:avLst/>
+          </a:prstGeom>
+          <a:noFill/>
+          <a:ln/>
+        </p:spPr>
+        <p:txBody>
+          <a:bodyPr wrap="square" lIns="0" tIns="0" rIns="0" bIns="0" rtlCol="0" anchor="ctr"/>
+          <a:lstStyle/>
+          <a:p>
+            <a:pPr indent="0" marL="0">
+              <a:buNone/>
+            </a:pPr>
+            <a:r>
+              <a:rPr lang="en-US" sz="1900" b="1" dirty="0">
+                <a:solidFill>
+                  <a:srgbClr val="6366F1"/>
+                </a:solidFill>
+                <a:latin typeface="맑은 고딕" pitchFamily="34" charset="0"/>
+                <a:ea typeface="맑은 고딕" pitchFamily="34" charset="-122"/>
+                <a:cs typeface="맑은 고딕" pitchFamily="34" charset="-120"/>
+              </a:rPr>
+              <a:t>로컬 Qwen3-8B</a:t>
+            </a:r>
+            <a:endParaRPr lang="en-US" sz="1900" dirty="0"/>
+          </a:p>
+        </p:txBody>
+      </p:sp>
+      <p:sp>
+        <p:nvSpPr>
+          <p:cNvPr id="6" name="Text 4"/>
+          <p:cNvSpPr/>
+          <p:nvPr/>
+        </p:nvSpPr>
+        <p:spPr>
+          <a:xfrm>
+            <a:off x="932688" y="2606040"/>
+            <a:ext cx="4754880" cy="1737360"/>
+          </a:xfrm>
+          <a:prstGeom prst="rect">
+            <a:avLst/>
+          </a:prstGeom>
+          <a:noFill/>
+          <a:ln/>
+        </p:spPr>
+        <p:txBody>
+          <a:bodyPr wrap="square" lIns="0" tIns="0" rIns="0" bIns="0" rtlCol="0" anchor="ctr"/>
+          <a:lstStyle/>
+          <a:p>
+            <a:pPr marL="342900" indent="-342900">
+              <a:spcAft>
+                <a:spcPts val="700"/>
+              </a:spcAft>
+              <a:buSzPct val="100000"/>
+              <a:buChar char="•"/>
+            </a:pPr>
+            <a:r>
+              <a:rPr lang="en-US" sz="1300" dirty="0">
+                <a:solidFill>
+                  <a:srgbClr val="1F2937"/>
+                </a:solidFill>
+                <a:latin typeface="맑은 고딕" pitchFamily="34" charset="0"/>
+                <a:ea typeface="맑은 고딕" pitchFamily="34" charset="-122"/>
+                <a:cs typeface="맑은 고딕" pitchFamily="34" charset="-120"/>
+              </a:rPr>
+              <a:t>내 워크스테이션(P4000 8GB)에서 직접</a:t>
+            </a:r>
+            <a:endParaRPr lang="en-US" sz="1300" dirty="0"/>
+          </a:p>
+          <a:p>
+            <a:pPr marL="342900" indent="-342900">
+              <a:spcAft>
+                <a:spcPts val="700"/>
+              </a:spcAft>
+              <a:buSzPct val="100000"/>
+              <a:buChar char="•"/>
+            </a:pPr>
+            <a:r>
+              <a:rPr lang="en-US" sz="1300" dirty="0">
+                <a:solidFill>
+                  <a:srgbClr val="1F2937"/>
+                </a:solidFill>
+                <a:latin typeface="맑은 고딕" pitchFamily="34" charset="0"/>
+                <a:ea typeface="맑은 고딕" pitchFamily="34" charset="-122"/>
+                <a:cs typeface="맑은 고딕" pitchFamily="34" charset="-120"/>
+              </a:rPr>
+              <a:t>8B 모델 · GGUF 양자화 Q5_K_M(≈5.85GB)</a:t>
+            </a:r>
+            <a:endParaRPr lang="en-US" sz="1300" dirty="0"/>
+          </a:p>
+          <a:p>
+            <a:pPr marL="342900" indent="-342900">
+              <a:spcAft>
+                <a:spcPts val="700"/>
+              </a:spcAft>
+              <a:buSzPct val="100000"/>
+              <a:buChar char="•"/>
+            </a:pPr>
+            <a:r>
+              <a:rPr lang="en-US" sz="1300" dirty="0">
+                <a:solidFill>
+                  <a:srgbClr val="1F2937"/>
+                </a:solidFill>
+                <a:latin typeface="맑은 고딕" pitchFamily="34" charset="0"/>
+                <a:ea typeface="맑은 고딕" pitchFamily="34" charset="-122"/>
+                <a:cs typeface="맑은 고딕" pitchFamily="34" charset="-120"/>
+              </a:rPr>
+              <a:t>오프라인 자립 · 한국어 강점</a:t>
+            </a:r>
+            <a:endParaRPr lang="en-US" sz="1300" dirty="0"/>
+          </a:p>
+        </p:txBody>
+      </p:sp>
+      <p:sp>
+        <p:nvSpPr>
+          <p:cNvPr id="7" name="Shape 5"/>
+          <p:cNvSpPr/>
+          <p:nvPr/>
+        </p:nvSpPr>
+        <p:spPr>
+          <a:xfrm>
+            <a:off x="6327648" y="1783080"/>
+            <a:ext cx="5440680" cy="2697480"/>
+          </a:xfrm>
+          <a:prstGeom prst="roundRect">
+            <a:avLst>
+              <a:gd name="adj" fmla="val 3390"/>
+            </a:avLst>
+          </a:prstGeom>
+          <a:solidFill>
+            <a:srgbClr val="F5F3FF"/>
+          </a:solidFill>
+          <a:ln w="12700">
+            <a:solidFill>
+              <a:srgbClr val="DDD6FE"/>
+            </a:solidFill>
+            <a:prstDash val="solid"/>
+          </a:ln>
+        </p:spPr>
+      </p:sp>
+      <p:sp>
+        <p:nvSpPr>
+          <p:cNvPr id="8" name="Text 6"/>
+          <p:cNvSpPr/>
+          <p:nvPr/>
+        </p:nvSpPr>
+        <p:spPr>
+          <a:xfrm>
+            <a:off x="6647688" y="2011680"/>
+            <a:ext cx="4846320" cy="457200"/>
+          </a:xfrm>
+          <a:prstGeom prst="rect">
+            <a:avLst/>
+          </a:prstGeom>
+          <a:noFill/>
+          <a:ln/>
+        </p:spPr>
+        <p:txBody>
+          <a:bodyPr wrap="square" lIns="0" tIns="0" rIns="0" bIns="0" rtlCol="0" anchor="ctr"/>
+          <a:lstStyle/>
+          <a:p>
+            <a:pPr indent="0" marL="0">
+              <a:buNone/>
+            </a:pPr>
+            <a:r>
+              <a:rPr lang="en-US" sz="1900" b="1" dirty="0">
+                <a:solidFill>
+                  <a:srgbClr val="8B5CF6"/>
+                </a:solidFill>
+                <a:latin typeface="맑은 고딕" pitchFamily="34" charset="0"/>
+                <a:ea typeface="맑은 고딕" pitchFamily="34" charset="-122"/>
+                <a:cs typeface="맑은 고딕" pitchFamily="34" charset="-120"/>
+              </a:rPr>
+              <a:t>사내 GPT-OSS-120B</a:t>
+            </a:r>
+            <a:endParaRPr lang="en-US" sz="1900" dirty="0"/>
+          </a:p>
+        </p:txBody>
+      </p:sp>
+      <p:sp>
+        <p:nvSpPr>
+          <p:cNvPr id="9" name="Text 7"/>
+          <p:cNvSpPr/>
+          <p:nvPr/>
+        </p:nvSpPr>
+        <p:spPr>
+          <a:xfrm>
+            <a:off x="6693408" y="2606040"/>
+            <a:ext cx="4754880" cy="1737360"/>
+          </a:xfrm>
+          <a:prstGeom prst="rect">
+            <a:avLst/>
+          </a:prstGeom>
+          <a:noFill/>
+          <a:ln/>
+        </p:spPr>
+        <p:txBody>
+          <a:bodyPr wrap="square" lIns="0" tIns="0" rIns="0" bIns="0" rtlCol="0" anchor="ctr"/>
+          <a:lstStyle/>
+          <a:p>
+            <a:pPr marL="342900" indent="-342900">
+              <a:spcAft>
+                <a:spcPts val="700"/>
+              </a:spcAft>
+              <a:buSzPct val="100000"/>
+              <a:buChar char="•"/>
+            </a:pPr>
+            <a:r>
+              <a:rPr lang="en-US" sz="1300" dirty="0">
+                <a:solidFill>
+                  <a:srgbClr val="1F2937"/>
+                </a:solidFill>
+                <a:latin typeface="맑은 고딕" pitchFamily="34" charset="0"/>
+                <a:ea typeface="맑은 고딕" pitchFamily="34" charset="-122"/>
+                <a:cs typeface="맑은 고딕" pitchFamily="34" charset="-120"/>
+              </a:rPr>
+              <a:t>사내 LLM API 서비스(OpenAI 호환)</a:t>
+            </a:r>
+            <a:endParaRPr lang="en-US" sz="1300" dirty="0"/>
+          </a:p>
+          <a:p>
+            <a:pPr marL="342900" indent="-342900">
+              <a:spcAft>
+                <a:spcPts val="700"/>
+              </a:spcAft>
+              <a:buSzPct val="100000"/>
+              <a:buChar char="•"/>
+            </a:pPr>
+            <a:r>
+              <a:rPr lang="en-US" sz="1300" dirty="0">
+                <a:solidFill>
+                  <a:srgbClr val="1F2937"/>
+                </a:solidFill>
+                <a:latin typeface="맑은 고딕" pitchFamily="34" charset="0"/>
+                <a:ea typeface="맑은 고딕" pitchFamily="34" charset="-122"/>
+                <a:cs typeface="맑은 고딕" pitchFamily="34" charset="-120"/>
+              </a:rPr>
+              <a:t>훨씬 큰 모델 → 어려운 판단 정확도 유리</a:t>
+            </a:r>
+            <a:endParaRPr lang="en-US" sz="1300" dirty="0"/>
+          </a:p>
+          <a:p>
+            <a:pPr marL="342900" indent="-342900">
+              <a:spcAft>
+                <a:spcPts val="700"/>
+              </a:spcAft>
+              <a:buSzPct val="100000"/>
+              <a:buChar char="•"/>
+            </a:pPr>
+            <a:r>
+              <a:rPr lang="en-US" sz="1300" dirty="0">
+                <a:solidFill>
+                  <a:srgbClr val="1F2937"/>
+                </a:solidFill>
+                <a:latin typeface="맑은 고딕" pitchFamily="34" charset="0"/>
+                <a:ea typeface="맑은 고딕" pitchFamily="34" charset="-122"/>
+                <a:cs typeface="맑은 고딕" pitchFamily="34" charset="-120"/>
+              </a:rPr>
+              <a:t>공용 서버 의존</a:t>
+            </a:r>
+            <a:endParaRPr lang="en-US" sz="1300" dirty="0"/>
+          </a:p>
+        </p:txBody>
+      </p:sp>
+      <p:sp>
+        <p:nvSpPr>
+          <p:cNvPr id="10" name="Shape 8"/>
+          <p:cNvSpPr/>
+          <p:nvPr/>
+        </p:nvSpPr>
+        <p:spPr>
+          <a:xfrm>
+            <a:off x="566928" y="4709160"/>
+            <a:ext cx="11064240" cy="1463040"/>
+          </a:xfrm>
+          <a:prstGeom prst="roundRect">
+            <a:avLst>
+              <a:gd name="adj" fmla="val 6250"/>
+            </a:avLst>
+          </a:prstGeom>
+          <a:solidFill>
+            <a:srgbClr val="1E1B4B"/>
+          </a:solidFill>
+          <a:ln/>
+          <a:effectLst>
+            <a:outerShdw sx="100000" sy="100000" kx="0" ky="0" algn="bl" rotWithShape="0" blurRad="127000" dist="50800" dir="5400000">
+              <a:srgbClr val="1E1B4B">
+                <a:alpha val="18000"/>
+              </a:srgbClr>
+            </a:outerShdw>
+          </a:effectLst>
+        </p:spPr>
+      </p:sp>
+      <p:sp>
+        <p:nvSpPr>
+          <p:cNvPr id="11" name="Text 9"/>
+          <p:cNvSpPr/>
+          <p:nvPr/>
+        </p:nvSpPr>
+        <p:spPr>
+          <a:xfrm>
+            <a:off x="886968" y="4892040"/>
+            <a:ext cx="10424160" cy="457200"/>
+          </a:xfrm>
+          <a:prstGeom prst="rect">
+            <a:avLst/>
+          </a:prstGeom>
+          <a:noFill/>
+          <a:ln/>
+        </p:spPr>
+        <p:txBody>
+          <a:bodyPr wrap="square" lIns="0" tIns="0" rIns="0" bIns="0" rtlCol="0" anchor="ctr"/>
+          <a:lstStyle/>
+          <a:p>
+            <a:pPr indent="0" marL="0">
+              <a:buNone/>
+            </a:pPr>
+            <a:r>
+              <a:rPr lang="en-US" sz="1350" b="1" dirty="0">
+                <a:solidFill>
+                  <a:srgbClr val="FFFFFF"/>
+                </a:solidFill>
+                <a:latin typeface="맑은 고딕" pitchFamily="34" charset="0"/>
+                <a:ea typeface="맑은 고딕" pitchFamily="34" charset="-122"/>
+                <a:cs typeface="맑은 고딕" pitchFamily="34" charset="-120"/>
+              </a:rPr>
+              <a:t>응답 시간은 둘 다 3~5초로 비슷</a:t>
+            </a:r>
+            <a:pPr indent="0" marL="0">
+              <a:buNone/>
+            </a:pPr>
+            <a:r>
+              <a:rPr lang="en-US" sz="1350" dirty="0">
+                <a:solidFill>
+                  <a:srgbClr val="C7D2FE"/>
+                </a:solidFill>
+                <a:latin typeface="맑은 고딕" pitchFamily="34" charset="0"/>
+                <a:ea typeface="맑은 고딕" pitchFamily="34" charset="-122"/>
+                <a:cs typeface="맑은 고딕" pitchFamily="34" charset="-120"/>
+              </a:rPr>
+              <a:t> → 속도가 아니라 정확도·자립성으로 선택. 동일 요구사항 세트로 실측 후 확정.</a:t>
+            </a:r>
+            <a:endParaRPr lang="en-US" sz="1350" dirty="0"/>
+          </a:p>
+        </p:txBody>
+      </p:sp>
+      <p:sp>
+        <p:nvSpPr>
+          <p:cNvPr id="12" name="Text 10"/>
+          <p:cNvSpPr/>
+          <p:nvPr/>
+        </p:nvSpPr>
+        <p:spPr>
+          <a:xfrm>
+            <a:off x="886968" y="5440680"/>
+            <a:ext cx="10424160" cy="640080"/>
+          </a:xfrm>
+          <a:prstGeom prst="rect">
+            <a:avLst/>
+          </a:prstGeom>
+          <a:noFill/>
+          <a:ln/>
+        </p:spPr>
+        <p:txBody>
+          <a:bodyPr wrap="square" lIns="0" tIns="0" rIns="0" bIns="0" rtlCol="0" anchor="ctr"/>
+          <a:lstStyle/>
+          <a:p>
+            <a:pPr indent="0" marL="0">
+              <a:lnSpc>
+                <a:spcPct val="105000"/>
+              </a:lnSpc>
+              <a:buNone/>
+            </a:pPr>
+            <a:r>
+              <a:rPr lang="en-US" sz="1250" b="1" dirty="0">
+                <a:solidFill>
+                  <a:srgbClr val="A5B4FC"/>
+                </a:solidFill>
+                <a:latin typeface="맑은 고딕" pitchFamily="34" charset="0"/>
+                <a:ea typeface="맑은 고딕" pitchFamily="34" charset="-122"/>
+                <a:cs typeface="맑은 고딕" pitchFamily="34" charset="-120"/>
+              </a:rPr>
+              <a:t>양자화란?</a:t>
+            </a:r>
+            <a:pPr indent="0" marL="0">
+              <a:lnSpc>
+                <a:spcPct val="105000"/>
+              </a:lnSpc>
+              <a:buNone/>
+            </a:pPr>
+            <a:r>
+              <a:rPr lang="en-US" sz="1250" dirty="0">
+                <a:solidFill>
+                  <a:srgbClr val="C7D2FE"/>
+                </a:solidFill>
+                <a:latin typeface="맑은 고딕" pitchFamily="34" charset="0"/>
+                <a:ea typeface="맑은 고딕" pitchFamily="34" charset="-122"/>
+                <a:cs typeface="맑은 고딕" pitchFamily="34" charset="-120"/>
+              </a:rPr>
+              <a:t>  사진을 JPG로 압축하듯 용량↓·품질 소폭↓. 8B 원본(≈16GB)은 8GB GPU에 못 올라가 5.85GB로 압축해 사용.</a:t>
+            </a:r>
+            <a:endParaRPr lang="en-US" sz="1250" dirty="0"/>
+          </a:p>
+        </p:txBody>
+      </p:sp>
+    </p:spTree>
+  </p:cSld>
+  <p:clrMapOvr>
+    <a:masterClrMapping/>
+  </p:clrMapOvr>
+</p:sld>
+</file>
+
+<file path=ppt/slides/slide15.xml><?xml version="1.0" encoding="utf-8"?>
+<p:sld xmlns:a="http://schemas.openxmlformats.org/drawingml/2006/main" xmlns:r="http://schemas.openxmlformats.org/officeDocument/2006/relationships" xmlns:p="http://schemas.openxmlformats.org/presentationml/2006/main">
+  <p:cSld name="Slide 15">
     <p:bg>
       <p:bgPr>
         <a:solidFill>
@@ -4499,9 +5518,9 @@
 </p:sld>
 </file>
 
-<file path=ppt/slides/slide15.xml><?xml version="1.0" encoding="utf-8"?>
+<file path=ppt/slides/slide16.xml><?xml version="1.0" encoding="utf-8"?>
 <p:sld xmlns:a="http://schemas.openxmlformats.org/drawingml/2006/main" xmlns:r="http://schemas.openxmlformats.org/officeDocument/2006/relationships" xmlns:p="http://schemas.openxmlformats.org/presentationml/2006/main">
-  <p:cSld name="Slide 15">
+  <p:cSld name="Slide 16">
     <p:bg>
       <p:bgPr>
         <a:solidFill>
@@ -7209,8 +8228,8 @@
         </p:blipFill>
         <p:spPr>
           <a:xfrm>
-            <a:off x="379476" y="1737360"/>
-            <a:ext cx="11430000" cy="4445813"/>
+            <a:off x="379476" y="2240280"/>
+            <a:ext cx="11430000" cy="3621938"/>
           </a:xfrm>
           <a:prstGeom prst="rect">
             <a:avLst/>
@@ -7321,7 +8340,7 @@
                 <a:ea typeface="맑은 고딕" pitchFamily="34" charset="-122"/>
                 <a:cs typeface="맑은 고딕" pitchFamily="34" charset="-120"/>
               </a:rPr>
-              <a:t>실제 예시 — Before / After</a:t>
+              <a:t>실제 예시 — Before / After (항목별)</a:t>
             </a:r>
             <a:endParaRPr lang="en-US" sz="3000" dirty="0"/>
           </a:p>
@@ -7386,53 +8405,14 @@
         </p:blipFill>
         <p:spPr>
           <a:xfrm>
-            <a:off x="379476" y="2103120"/>
-            <a:ext cx="11430000" cy="3160166"/>
+            <a:off x="379476" y="2377440"/>
+            <a:ext cx="11430000" cy="2958084"/>
           </a:xfrm>
           <a:prstGeom prst="rect">
             <a:avLst/>
           </a:prstGeom>
         </p:spPr>
       </p:pic>
-      <p:sp>
-        <p:nvSpPr>
-          <p:cNvPr id="6" name="Text 3"/>
-          <p:cNvSpPr/>
-          <p:nvPr/>
-        </p:nvSpPr>
-        <p:spPr>
-          <a:xfrm>
-            <a:off x="566928" y="5577840"/>
-            <a:ext cx="11064240" cy="365760"/>
-          </a:xfrm>
-          <a:prstGeom prst="rect">
-            <a:avLst/>
-          </a:prstGeom>
-          <a:noFill/>
-          <a:ln/>
-        </p:spPr>
-        <p:txBody>
-          <a:bodyPr wrap="square" lIns="0" tIns="0" rIns="0" bIns="0" rtlCol="0" anchor="ctr"/>
-          <a:lstStyle/>
-          <a:p>
-            <a:pPr algn="ctr" indent="0" marL="0">
-              <a:buNone/>
-            </a:pPr>
-            <a:r>
-              <a:rPr lang="en-US" sz="1250" dirty="0">
-                <a:solidFill>
-                  <a:srgbClr val="6B7280"/>
-                </a:solidFill>
-                <a:latin typeface="맑은 고딕" pitchFamily="34" charset="0"/>
-                <a:ea typeface="맑은 고딕" pitchFamily="34" charset="-122"/>
-                <a:cs typeface="맑은 고딕" pitchFamily="34" charset="-120"/>
-              </a:rPr>
-              <a:t>req-ta-01「태스크 할당 기준」을 검출·제안·협의로 명확화한 결과 — 이전 요구사항과 비교·보관</a:t>
-            </a:r>
-            <a:endParaRPr lang="en-US" sz="1250" dirty="0"/>
-          </a:p>
-        </p:txBody>
-      </p:sp>
     </p:spTree>
   </p:cSld>
   <p:clrMapOvr>
@@ -7498,7 +8478,7 @@
                 <a:ea typeface="맑은 고딕" pitchFamily="34" charset="-122"/>
                 <a:cs typeface="맑은 고딕" pitchFamily="34" charset="-120"/>
               </a:rPr>
-              <a:t>핵심 기능 2</a:t>
+              <a:t>핵심 기능 1 · 요구사항 검토 ⑤</a:t>
             </a:r>
             <a:endParaRPr lang="en-US" sz="1200" dirty="0"/>
           </a:p>
@@ -7537,7 +8517,7 @@
                 <a:ea typeface="맑은 고딕" pitchFamily="34" charset="-122"/>
                 <a:cs typeface="맑은 고딕" pitchFamily="34" charset="-120"/>
               </a:rPr>
-              <a:t>문서·티켓 자동 생성</a:t>
+              <a:t>실제 예시 — Before / After (전체 요구사항)</a:t>
             </a:r>
             <a:endParaRPr lang="en-US" sz="3000" dirty="0"/>
           </a:p>
@@ -7551,7 +8531,7 @@
         </p:nvSpPr>
         <p:spPr>
           <a:xfrm>
-            <a:off x="10424160" y="822960"/>
+            <a:off x="9875520" y="822960"/>
             <a:ext cx="1737360" cy="310896"/>
           </a:xfrm>
           <a:prstGeom prst="roundRect">
@@ -7560,7 +8540,7 @@
             </a:avLst>
           </a:prstGeom>
           <a:solidFill>
-            <a:srgbClr val="FEF3C7"/>
+            <a:srgbClr val="D1FAE5"/>
           </a:solidFill>
           <a:ln/>
         </p:spPr>
@@ -7574,795 +8554,42 @@
             <a:r>
               <a:rPr lang="en-US" sz="1100" b="1" dirty="0">
                 <a:solidFill>
-                  <a:srgbClr val="B45309"/>
-                </a:solidFill>
-                <a:latin typeface="맑은 고딕" pitchFamily="34" charset="0"/>
-                <a:ea typeface="맑은 고딕" pitchFamily="34" charset="-122"/>
-                <a:cs typeface="맑은 고딕" pitchFamily="34" charset="-120"/>
-              </a:rPr>
-              <a:t>개발 예정</a:t>
+                  <a:srgbClr val="059669"/>
+                </a:solidFill>
+                <a:latin typeface="맑은 고딕" pitchFamily="34" charset="0"/>
+                <a:ea typeface="맑은 고딕" pitchFamily="34" charset="-122"/>
+                <a:cs typeface="맑은 고딕" pitchFamily="34" charset="-120"/>
+              </a:rPr>
+              <a:t>완료 · 테스트됨</a:t>
             </a:r>
             <a:endParaRPr lang="en-US" sz="1100" dirty="0"/>
           </a:p>
         </p:txBody>
       </p:sp>
-      <p:sp>
-        <p:nvSpPr>
-          <p:cNvPr id="5" name="Text 3"/>
-          <p:cNvSpPr/>
-          <p:nvPr/>
-        </p:nvSpPr>
-        <p:spPr>
-          <a:xfrm>
-            <a:off x="566928" y="1783080"/>
-            <a:ext cx="5486400" cy="365760"/>
-          </a:xfrm>
-          <a:prstGeom prst="rect">
-            <a:avLst/>
-          </a:prstGeom>
-          <a:noFill/>
-          <a:ln/>
-        </p:spPr>
-        <p:txBody>
-          <a:bodyPr wrap="square" lIns="0" tIns="0" rIns="0" bIns="0" rtlCol="0" anchor="ctr"/>
-          <a:lstStyle/>
-          <a:p>
-            <a:pPr indent="0" marL="0">
-              <a:buNone/>
-            </a:pPr>
-            <a:r>
-              <a:rPr lang="en-US" sz="1500" b="1" dirty="0">
-                <a:solidFill>
-                  <a:srgbClr val="1F2937"/>
-                </a:solidFill>
-                <a:latin typeface="맑은 고딕" pitchFamily="34" charset="0"/>
-                <a:ea typeface="맑은 고딕" pitchFamily="34" charset="-122"/>
-                <a:cs typeface="맑은 고딕" pitchFamily="34" charset="-120"/>
-              </a:rPr>
-              <a:t>기능 하나 = Jira 이슈 4종 (+ 비기능요구사항)</a:t>
-            </a:r>
-            <a:endParaRPr lang="en-US" sz="1500" dirty="0"/>
-          </a:p>
-        </p:txBody>
-      </p:sp>
-      <p:sp>
-        <p:nvSpPr>
-          <p:cNvPr id="6" name="Shape 4"/>
-          <p:cNvSpPr/>
-          <p:nvPr/>
-        </p:nvSpPr>
-        <p:spPr>
-          <a:xfrm>
-            <a:off x="566928" y="2286000"/>
-            <a:ext cx="5486400" cy="713232"/>
-          </a:xfrm>
-          <a:prstGeom prst="roundRect">
-            <a:avLst>
-              <a:gd name="adj" fmla="val 7692"/>
-            </a:avLst>
-          </a:prstGeom>
-          <a:solidFill>
-            <a:srgbClr val="EEF2FF"/>
-          </a:solidFill>
-          <a:ln w="12700">
-            <a:solidFill>
-              <a:srgbClr val="C7D2FE"/>
-            </a:solidFill>
-            <a:prstDash val="solid"/>
-          </a:ln>
-        </p:spPr>
-      </p:sp>
-      <p:sp>
-        <p:nvSpPr>
-          <p:cNvPr id="7" name="Text 5"/>
-          <p:cNvSpPr/>
-          <p:nvPr/>
-        </p:nvSpPr>
-        <p:spPr>
-          <a:xfrm>
-            <a:off x="713232" y="2414016"/>
-            <a:ext cx="457200" cy="457200"/>
-          </a:xfrm>
-          <a:prstGeom prst="ellipse">
-            <a:avLst/>
-          </a:prstGeom>
-          <a:solidFill>
-            <a:srgbClr val="6366F1"/>
-          </a:solidFill>
-          <a:ln/>
-        </p:spPr>
-        <p:txBody>
-          <a:bodyPr wrap="square" lIns="0" tIns="0" rIns="0" bIns="0" rtlCol="0" anchor="ctr"/>
-          <a:lstStyle/>
-          <a:p>
-            <a:pPr algn="ctr" indent="0" marL="0">
-              <a:buNone/>
-            </a:pPr>
-            <a:r>
-              <a:rPr lang="en-US" sz="1500" b="1" dirty="0">
-                <a:solidFill>
-                  <a:srgbClr val="FFFFFF"/>
-                </a:solidFill>
-                <a:latin typeface="맑은 고딕" pitchFamily="34" charset="0"/>
-                <a:ea typeface="맑은 고딕" pitchFamily="34" charset="-122"/>
-                <a:cs typeface="맑은 고딕" pitchFamily="34" charset="-120"/>
-              </a:rPr>
-              <a:t>1</a:t>
-            </a:r>
-            <a:endParaRPr lang="en-US" sz="1500" dirty="0"/>
-          </a:p>
-        </p:txBody>
-      </p:sp>
-      <p:sp>
-        <p:nvSpPr>
-          <p:cNvPr id="8" name="Text 6"/>
-          <p:cNvSpPr/>
-          <p:nvPr/>
-        </p:nvSpPr>
-        <p:spPr>
-          <a:xfrm>
-            <a:off x="1298448" y="2304288"/>
-            <a:ext cx="4617720" cy="676656"/>
-          </a:xfrm>
-          <a:prstGeom prst="rect">
-            <a:avLst/>
-          </a:prstGeom>
-          <a:noFill/>
-          <a:ln/>
-        </p:spPr>
-        <p:txBody>
-          <a:bodyPr wrap="square" lIns="0" tIns="0" rIns="0" bIns="0" rtlCol="0" anchor="ctr"/>
-          <a:lstStyle/>
-          <a:p>
-            <a:pPr indent="0" marL="0">
-              <a:buNone/>
-            </a:pPr>
-            <a:r>
-              <a:rPr lang="en-US" sz="1350" b="1" dirty="0">
-                <a:solidFill>
-                  <a:srgbClr val="1F2937"/>
-                </a:solidFill>
-                <a:latin typeface="맑은 고딕" pitchFamily="34" charset="0"/>
-                <a:ea typeface="맑은 고딕" pitchFamily="34" charset="-122"/>
-                <a:cs typeface="맑은 고딕" pitchFamily="34" charset="-120"/>
-              </a:rPr>
-              <a:t>티켓 (기능요구사항)   </a:t>
-            </a:r>
-            <a:pPr indent="0" marL="0">
-              <a:buNone/>
-            </a:pPr>
-            <a:r>
-              <a:rPr lang="en-US" sz="1150" dirty="0">
-                <a:solidFill>
-                  <a:srgbClr val="6B7280"/>
-                </a:solidFill>
-                <a:latin typeface="맑은 고딕" pitchFamily="34" charset="0"/>
-                <a:ea typeface="맑은 고딕" pitchFamily="34" charset="-122"/>
-                <a:cs typeface="맑은 고딕" pitchFamily="34" charset="-120"/>
-              </a:rPr>
-              <a:t>개발 단위가 되는 메인 티켓</a:t>
-            </a:r>
-            <a:endParaRPr lang="en-US" sz="1350" dirty="0"/>
-          </a:p>
-        </p:txBody>
-      </p:sp>
-      <p:sp>
-        <p:nvSpPr>
-          <p:cNvPr id="9" name="Shape 7"/>
-          <p:cNvSpPr/>
-          <p:nvPr/>
-        </p:nvSpPr>
-        <p:spPr>
-          <a:xfrm>
-            <a:off x="566928" y="3108960"/>
-            <a:ext cx="5486400" cy="713232"/>
-          </a:xfrm>
-          <a:prstGeom prst="roundRect">
-            <a:avLst>
-              <a:gd name="adj" fmla="val 7692"/>
-            </a:avLst>
-          </a:prstGeom>
-          <a:solidFill>
-            <a:srgbClr val="EEF2FF"/>
-          </a:solidFill>
-          <a:ln w="12700">
-            <a:solidFill>
-              <a:srgbClr val="C7D2FE"/>
-            </a:solidFill>
-            <a:prstDash val="solid"/>
-          </a:ln>
-        </p:spPr>
-      </p:sp>
-      <p:sp>
-        <p:nvSpPr>
-          <p:cNvPr id="10" name="Text 8"/>
-          <p:cNvSpPr/>
-          <p:nvPr/>
-        </p:nvSpPr>
-        <p:spPr>
-          <a:xfrm>
-            <a:off x="713232" y="3236976"/>
-            <a:ext cx="457200" cy="457200"/>
-          </a:xfrm>
-          <a:prstGeom prst="ellipse">
-            <a:avLst/>
-          </a:prstGeom>
-          <a:solidFill>
-            <a:srgbClr val="6366F1"/>
-          </a:solidFill>
-          <a:ln/>
-        </p:spPr>
-        <p:txBody>
-          <a:bodyPr wrap="square" lIns="0" tIns="0" rIns="0" bIns="0" rtlCol="0" anchor="ctr"/>
-          <a:lstStyle/>
-          <a:p>
-            <a:pPr algn="ctr" indent="0" marL="0">
-              <a:buNone/>
-            </a:pPr>
-            <a:r>
-              <a:rPr lang="en-US" sz="1500" b="1" dirty="0">
-                <a:solidFill>
-                  <a:srgbClr val="FFFFFF"/>
-                </a:solidFill>
-                <a:latin typeface="맑은 고딕" pitchFamily="34" charset="0"/>
-                <a:ea typeface="맑은 고딕" pitchFamily="34" charset="-122"/>
-                <a:cs typeface="맑은 고딕" pitchFamily="34" charset="-120"/>
-              </a:rPr>
-              <a:t>2</a:t>
-            </a:r>
-            <a:endParaRPr lang="en-US" sz="1500" dirty="0"/>
-          </a:p>
-        </p:txBody>
-      </p:sp>
-      <p:sp>
-        <p:nvSpPr>
-          <p:cNvPr id="11" name="Text 9"/>
-          <p:cNvSpPr/>
-          <p:nvPr/>
-        </p:nvSpPr>
-        <p:spPr>
-          <a:xfrm>
-            <a:off x="1298448" y="3127248"/>
-            <a:ext cx="4617720" cy="676656"/>
-          </a:xfrm>
-          <a:prstGeom prst="rect">
-            <a:avLst/>
-          </a:prstGeom>
-          <a:noFill/>
-          <a:ln/>
-        </p:spPr>
-        <p:txBody>
-          <a:bodyPr wrap="square" lIns="0" tIns="0" rIns="0" bIns="0" rtlCol="0" anchor="ctr"/>
-          <a:lstStyle/>
-          <a:p>
-            <a:pPr indent="0" marL="0">
-              <a:buNone/>
-            </a:pPr>
-            <a:r>
-              <a:rPr lang="en-US" sz="1350" b="1" dirty="0">
-                <a:solidFill>
-                  <a:srgbClr val="1F2937"/>
-                </a:solidFill>
-                <a:latin typeface="맑은 고딕" pitchFamily="34" charset="0"/>
-                <a:ea typeface="맑은 고딕" pitchFamily="34" charset="-122"/>
-                <a:cs typeface="맑은 고딕" pitchFamily="34" charset="-120"/>
-              </a:rPr>
-              <a:t>SWVOC (고객요구사항)   </a:t>
-            </a:r>
-            <a:pPr indent="0" marL="0">
-              <a:buNone/>
-            </a:pPr>
-            <a:r>
-              <a:rPr lang="en-US" sz="1150" dirty="0">
-                <a:solidFill>
-                  <a:srgbClr val="6B7280"/>
-                </a:solidFill>
-                <a:latin typeface="맑은 고딕" pitchFamily="34" charset="0"/>
-                <a:ea typeface="맑은 고딕" pitchFamily="34" charset="-122"/>
-                <a:cs typeface="맑은 고딕" pitchFamily="34" charset="-120"/>
-              </a:rPr>
-              <a:t>고객 요구사항 원문·정리</a:t>
-            </a:r>
-            <a:endParaRPr lang="en-US" sz="1350" dirty="0"/>
-          </a:p>
-        </p:txBody>
-      </p:sp>
-      <p:sp>
-        <p:nvSpPr>
-          <p:cNvPr id="12" name="Shape 10"/>
-          <p:cNvSpPr/>
-          <p:nvPr/>
-        </p:nvSpPr>
-        <p:spPr>
-          <a:xfrm>
-            <a:off x="566928" y="3931920"/>
-            <a:ext cx="5486400" cy="713232"/>
-          </a:xfrm>
-          <a:prstGeom prst="roundRect">
-            <a:avLst>
-              <a:gd name="adj" fmla="val 7692"/>
-            </a:avLst>
-          </a:prstGeom>
-          <a:solidFill>
-            <a:srgbClr val="EEF2FF"/>
-          </a:solidFill>
-          <a:ln w="12700">
-            <a:solidFill>
-              <a:srgbClr val="C7D2FE"/>
-            </a:solidFill>
-            <a:prstDash val="solid"/>
-          </a:ln>
-        </p:spPr>
-      </p:sp>
-      <p:sp>
-        <p:nvSpPr>
-          <p:cNvPr id="13" name="Text 11"/>
-          <p:cNvSpPr/>
-          <p:nvPr/>
-        </p:nvSpPr>
-        <p:spPr>
-          <a:xfrm>
-            <a:off x="713232" y="4059936"/>
-            <a:ext cx="457200" cy="457200"/>
-          </a:xfrm>
-          <a:prstGeom prst="ellipse">
-            <a:avLst/>
-          </a:prstGeom>
-          <a:solidFill>
-            <a:srgbClr val="6366F1"/>
-          </a:solidFill>
-          <a:ln/>
-        </p:spPr>
-        <p:txBody>
-          <a:bodyPr wrap="square" lIns="0" tIns="0" rIns="0" bIns="0" rtlCol="0" anchor="ctr"/>
-          <a:lstStyle/>
-          <a:p>
-            <a:pPr algn="ctr" indent="0" marL="0">
-              <a:buNone/>
-            </a:pPr>
-            <a:r>
-              <a:rPr lang="en-US" sz="1500" b="1" dirty="0">
-                <a:solidFill>
-                  <a:srgbClr val="FFFFFF"/>
-                </a:solidFill>
-                <a:latin typeface="맑은 고딕" pitchFamily="34" charset="0"/>
-                <a:ea typeface="맑은 고딕" pitchFamily="34" charset="-122"/>
-                <a:cs typeface="맑은 고딕" pitchFamily="34" charset="-120"/>
-              </a:rPr>
-              <a:t>3</a:t>
-            </a:r>
-            <a:endParaRPr lang="en-US" sz="1500" dirty="0"/>
-          </a:p>
-        </p:txBody>
-      </p:sp>
-      <p:sp>
-        <p:nvSpPr>
-          <p:cNvPr id="14" name="Text 12"/>
-          <p:cNvSpPr/>
-          <p:nvPr/>
-        </p:nvSpPr>
-        <p:spPr>
-          <a:xfrm>
-            <a:off x="1298448" y="3950208"/>
-            <a:ext cx="4617720" cy="676656"/>
-          </a:xfrm>
-          <a:prstGeom prst="rect">
-            <a:avLst/>
-          </a:prstGeom>
-          <a:noFill/>
-          <a:ln/>
-        </p:spPr>
-        <p:txBody>
-          <a:bodyPr wrap="square" lIns="0" tIns="0" rIns="0" bIns="0" rtlCol="0" anchor="ctr"/>
-          <a:lstStyle/>
-          <a:p>
-            <a:pPr indent="0" marL="0">
-              <a:buNone/>
-            </a:pPr>
-            <a:r>
-              <a:rPr lang="en-US" sz="1350" b="1" dirty="0">
-                <a:solidFill>
-                  <a:srgbClr val="1F2937"/>
-                </a:solidFill>
-                <a:latin typeface="맑은 고딕" pitchFamily="34" charset="0"/>
-                <a:ea typeface="맑은 고딕" pitchFamily="34" charset="-122"/>
-                <a:cs typeface="맑은 고딕" pitchFamily="34" charset="-120"/>
-              </a:rPr>
-              <a:t>Function Requirement   </a:t>
-            </a:r>
-            <a:pPr indent="0" marL="0">
-              <a:buNone/>
-            </a:pPr>
-            <a:r>
-              <a:rPr lang="en-US" sz="1150" dirty="0">
-                <a:solidFill>
-                  <a:srgbClr val="6B7280"/>
-                </a:solidFill>
-                <a:latin typeface="맑은 고딕" pitchFamily="34" charset="0"/>
-                <a:ea typeface="맑은 고딕" pitchFamily="34" charset="-122"/>
-                <a:cs typeface="맑은 고딕" pitchFamily="34" charset="-120"/>
-              </a:rPr>
-              <a:t>기능 요구사항 상세</a:t>
-            </a:r>
-            <a:endParaRPr lang="en-US" sz="1350" dirty="0"/>
-          </a:p>
-        </p:txBody>
-      </p:sp>
-      <p:sp>
-        <p:nvSpPr>
-          <p:cNvPr id="15" name="Shape 13"/>
-          <p:cNvSpPr/>
-          <p:nvPr/>
-        </p:nvSpPr>
-        <p:spPr>
-          <a:xfrm>
-            <a:off x="566928" y="4754880"/>
-            <a:ext cx="5486400" cy="713232"/>
-          </a:xfrm>
-          <a:prstGeom prst="roundRect">
-            <a:avLst>
-              <a:gd name="adj" fmla="val 7692"/>
-            </a:avLst>
-          </a:prstGeom>
-          <a:solidFill>
-            <a:srgbClr val="EEF2FF"/>
-          </a:solidFill>
-          <a:ln w="12700">
-            <a:solidFill>
-              <a:srgbClr val="C7D2FE"/>
-            </a:solidFill>
-            <a:prstDash val="solid"/>
-          </a:ln>
-        </p:spPr>
-      </p:sp>
-      <p:sp>
-        <p:nvSpPr>
-          <p:cNvPr id="16" name="Text 14"/>
-          <p:cNvSpPr/>
-          <p:nvPr/>
-        </p:nvSpPr>
-        <p:spPr>
-          <a:xfrm>
-            <a:off x="713232" y="4882896"/>
-            <a:ext cx="457200" cy="457200"/>
-          </a:xfrm>
-          <a:prstGeom prst="ellipse">
-            <a:avLst/>
-          </a:prstGeom>
-          <a:solidFill>
-            <a:srgbClr val="6366F1"/>
-          </a:solidFill>
-          <a:ln/>
-        </p:spPr>
-        <p:txBody>
-          <a:bodyPr wrap="square" lIns="0" tIns="0" rIns="0" bIns="0" rtlCol="0" anchor="ctr"/>
-          <a:lstStyle/>
-          <a:p>
-            <a:pPr algn="ctr" indent="0" marL="0">
-              <a:buNone/>
-            </a:pPr>
-            <a:r>
-              <a:rPr lang="en-US" sz="1500" b="1" dirty="0">
-                <a:solidFill>
-                  <a:srgbClr val="FFFFFF"/>
-                </a:solidFill>
-                <a:latin typeface="맑은 고딕" pitchFamily="34" charset="0"/>
-                <a:ea typeface="맑은 고딕" pitchFamily="34" charset="-122"/>
-                <a:cs typeface="맑은 고딕" pitchFamily="34" charset="-120"/>
-              </a:rPr>
-              <a:t>4</a:t>
-            </a:r>
-            <a:endParaRPr lang="en-US" sz="1500" dirty="0"/>
-          </a:p>
-        </p:txBody>
-      </p:sp>
-      <p:sp>
-        <p:nvSpPr>
-          <p:cNvPr id="17" name="Text 15"/>
-          <p:cNvSpPr/>
-          <p:nvPr/>
-        </p:nvSpPr>
-        <p:spPr>
-          <a:xfrm>
-            <a:off x="1298448" y="4773168"/>
-            <a:ext cx="4617720" cy="676656"/>
-          </a:xfrm>
-          <a:prstGeom prst="rect">
-            <a:avLst/>
-          </a:prstGeom>
-          <a:noFill/>
-          <a:ln/>
-        </p:spPr>
-        <p:txBody>
-          <a:bodyPr wrap="square" lIns="0" tIns="0" rIns="0" bIns="0" rtlCol="0" anchor="ctr"/>
-          <a:lstStyle/>
-          <a:p>
-            <a:pPr indent="0" marL="0">
-              <a:buNone/>
-            </a:pPr>
-            <a:r>
-              <a:rPr lang="en-US" sz="1350" b="1" dirty="0">
-                <a:solidFill>
-                  <a:srgbClr val="1F2937"/>
-                </a:solidFill>
-                <a:latin typeface="맑은 고딕" pitchFamily="34" charset="0"/>
-                <a:ea typeface="맑은 고딕" pitchFamily="34" charset="-122"/>
-                <a:cs typeface="맑은 고딕" pitchFamily="34" charset="-120"/>
-              </a:rPr>
-              <a:t>Detail Design   </a:t>
-            </a:r>
-            <a:pPr indent="0" marL="0">
-              <a:buNone/>
-            </a:pPr>
-            <a:r>
-              <a:rPr lang="en-US" sz="1150" dirty="0">
-                <a:solidFill>
-                  <a:srgbClr val="6B7280"/>
-                </a:solidFill>
-                <a:latin typeface="맑은 고딕" pitchFamily="34" charset="0"/>
-                <a:ea typeface="맑은 고딕" pitchFamily="34" charset="-122"/>
-                <a:cs typeface="맑은 고딕" pitchFamily="34" charset="-120"/>
-              </a:rPr>
-              <a:t>상세설계 — 시퀀스 다이어그램 등</a:t>
-            </a:r>
-            <a:endParaRPr lang="en-US" sz="1350" dirty="0"/>
-          </a:p>
-        </p:txBody>
-      </p:sp>
-      <p:sp>
-        <p:nvSpPr>
-          <p:cNvPr id="18" name="Shape 16"/>
-          <p:cNvSpPr/>
-          <p:nvPr/>
-        </p:nvSpPr>
-        <p:spPr>
-          <a:xfrm>
-            <a:off x="6537960" y="1783080"/>
-            <a:ext cx="5074920" cy="4160520"/>
-          </a:xfrm>
-          <a:prstGeom prst="roundRect">
-            <a:avLst>
-              <a:gd name="adj" fmla="val 2198"/>
-            </a:avLst>
-          </a:prstGeom>
-          <a:solidFill>
-            <a:srgbClr val="FFFFFF"/>
-          </a:solidFill>
-          <a:ln w="12700">
-            <a:solidFill>
-              <a:srgbClr val="E5E7EB"/>
-            </a:solidFill>
-            <a:prstDash val="solid"/>
-          </a:ln>
-          <a:effectLst>
-            <a:outerShdw sx="100000" sy="100000" kx="0" ky="0" algn="bl" rotWithShape="0" blurRad="127000" dist="50800" dir="5400000">
-              <a:srgbClr val="1E1B4B">
-                <a:alpha val="18000"/>
-              </a:srgbClr>
-            </a:outerShdw>
-          </a:effectLst>
-        </p:spPr>
-      </p:sp>
-      <p:sp>
-        <p:nvSpPr>
-          <p:cNvPr id="19" name="Text 17"/>
-          <p:cNvSpPr/>
-          <p:nvPr/>
-        </p:nvSpPr>
-        <p:spPr>
-          <a:xfrm>
-            <a:off x="6812280" y="2011680"/>
-            <a:ext cx="4572000" cy="365760"/>
-          </a:xfrm>
-          <a:prstGeom prst="rect">
-            <a:avLst/>
-          </a:prstGeom>
-          <a:noFill/>
-          <a:ln/>
-        </p:spPr>
-        <p:txBody>
-          <a:bodyPr wrap="square" lIns="0" tIns="0" rIns="0" bIns="0" rtlCol="0" anchor="ctr"/>
-          <a:lstStyle/>
-          <a:p>
-            <a:pPr indent="0" marL="0">
-              <a:buNone/>
-            </a:pPr>
-            <a:r>
-              <a:rPr lang="en-US" sz="1500" b="1" dirty="0">
-                <a:solidFill>
-                  <a:srgbClr val="8B5CF6"/>
-                </a:solidFill>
-                <a:latin typeface="맑은 고딕" pitchFamily="34" charset="0"/>
-                <a:ea typeface="맑은 고딕" pitchFamily="34" charset="-122"/>
-                <a:cs typeface="맑은 고딕" pitchFamily="34" charset="-120"/>
-              </a:rPr>
-              <a:t>어떻게 생성하나</a:t>
-            </a:r>
-            <a:endParaRPr lang="en-US" sz="1500" dirty="0"/>
-          </a:p>
-        </p:txBody>
-      </p:sp>
-      <p:sp>
-        <p:nvSpPr>
-          <p:cNvPr id="20" name="Text 18"/>
-          <p:cNvSpPr/>
-          <p:nvPr/>
-        </p:nvSpPr>
-        <p:spPr>
-          <a:xfrm>
-            <a:off x="6858000" y="2468880"/>
-            <a:ext cx="4572000" cy="3291840"/>
-          </a:xfrm>
-          <a:prstGeom prst="rect">
-            <a:avLst/>
-          </a:prstGeom>
-          <a:noFill/>
-          <a:ln/>
-        </p:spPr>
-        <p:txBody>
-          <a:bodyPr wrap="square" lIns="0" tIns="0" rIns="0" bIns="0" rtlCol="0" anchor="t"/>
-          <a:lstStyle/>
-          <a:p>
-            <a:pPr marL="342900" indent="-342900">
-              <a:spcAft>
-                <a:spcPts val="400"/>
-              </a:spcAft>
-              <a:buSzPct val="100000"/>
-              <a:buChar char="•"/>
-            </a:pPr>
-            <a:r>
-              <a:rPr lang="en-US" sz="1350" b="1" dirty="0">
-                <a:solidFill>
-                  <a:srgbClr val="1F2937"/>
-                </a:solidFill>
-                <a:latin typeface="맑은 고딕" pitchFamily="34" charset="0"/>
-                <a:ea typeface="맑은 고딕" pitchFamily="34" charset="-122"/>
-                <a:cs typeface="맑은 고딕" pitchFamily="34" charset="-120"/>
-              </a:rPr>
-              <a:t>정해진 양식(템플릿) 고정</a:t>
-            </a:r>
-            <a:endParaRPr lang="en-US" sz="1350" dirty="0"/>
-          </a:p>
-          <a:p>
-            <a:pPr lvl="1" indent="0" marL="0">
-              <a:spcAft>
-                <a:spcPts val="1000"/>
-              </a:spcAft>
-              <a:buNone/>
-            </a:pPr>
-            <a:r>
-              <a:rPr lang="en-US" sz="1200" dirty="0">
-                <a:solidFill>
-                  <a:srgbClr val="6B7280"/>
-                </a:solidFill>
-                <a:latin typeface="맑은 고딕" pitchFamily="34" charset="0"/>
-                <a:ea typeface="맑은 고딕" pitchFamily="34" charset="-122"/>
-                <a:cs typeface="맑은 고딕" pitchFamily="34" charset="-120"/>
-              </a:rPr>
-              <a:t>각 산출물의 필드·구조를 템플릿으로 미리 정의</a:t>
-            </a:r>
-            <a:endParaRPr lang="en-US" sz="1350" dirty="0"/>
-          </a:p>
-          <a:p>
-            <a:pPr marL="342900" indent="-342900">
-              <a:spcAft>
-                <a:spcPts val="400"/>
-              </a:spcAft>
-              <a:buSzPct val="100000"/>
-              <a:buChar char="•"/>
-            </a:pPr>
-            <a:r>
-              <a:rPr lang="en-US" sz="1350" b="1" dirty="0">
-                <a:solidFill>
-                  <a:srgbClr val="1F2937"/>
-                </a:solidFill>
-                <a:latin typeface="맑은 고딕" pitchFamily="34" charset="0"/>
-                <a:ea typeface="맑은 고딕" pitchFamily="34" charset="-122"/>
-                <a:cs typeface="맑은 고딕" pitchFamily="34" charset="-120"/>
-              </a:rPr>
-              <a:t>산출물 유형별 프롬프트 사전 작성</a:t>
-            </a:r>
-            <a:endParaRPr lang="en-US" sz="1350" dirty="0"/>
-          </a:p>
-          <a:p>
-            <a:pPr lvl="1" indent="0" marL="0">
-              <a:spcAft>
-                <a:spcPts val="1000"/>
-              </a:spcAft>
-              <a:buNone/>
-            </a:pPr>
-            <a:r>
-              <a:rPr lang="en-US" sz="1200" dirty="0">
-                <a:solidFill>
-                  <a:srgbClr val="6B7280"/>
-                </a:solidFill>
-                <a:latin typeface="맑은 고딕" pitchFamily="34" charset="0"/>
-                <a:ea typeface="맑은 고딕" pitchFamily="34" charset="-122"/>
-                <a:cs typeface="맑은 고딕" pitchFamily="34" charset="-120"/>
-              </a:rPr>
-              <a:t>예) Detail Design → 시퀀스 다이어그램 자동 생성</a:t>
-            </a:r>
-            <a:endParaRPr lang="en-US" sz="1350" dirty="0"/>
-          </a:p>
-          <a:p>
-            <a:pPr marL="342900" indent="-342900">
-              <a:spcAft>
-                <a:spcPts val="400"/>
-              </a:spcAft>
-              <a:buSzPct val="100000"/>
-              <a:buChar char="•"/>
-            </a:pPr>
-            <a:r>
-              <a:rPr lang="en-US" sz="1350" b="1" dirty="0">
-                <a:solidFill>
-                  <a:srgbClr val="1F2937"/>
-                </a:solidFill>
-                <a:latin typeface="맑은 고딕" pitchFamily="34" charset="0"/>
-                <a:ea typeface="맑은 고딕" pitchFamily="34" charset="-122"/>
-                <a:cs typeface="맑은 고딕" pitchFamily="34" charset="-120"/>
-              </a:rPr>
-              <a:t>AI 결과는 항상 “초안”</a:t>
-            </a:r>
-            <a:endParaRPr lang="en-US" sz="1350" dirty="0"/>
-          </a:p>
-          <a:p>
-            <a:pPr lvl="1" indent="0" marL="0">
-              <a:buNone/>
-            </a:pPr>
-            <a:r>
-              <a:rPr lang="en-US" sz="1200" dirty="0">
-                <a:solidFill>
-                  <a:srgbClr val="6B7280"/>
-                </a:solidFill>
-                <a:latin typeface="맑은 고딕" pitchFamily="34" charset="0"/>
-                <a:ea typeface="맑은 고딕" pitchFamily="34" charset="-122"/>
-                <a:cs typeface="맑은 고딕" pitchFamily="34" charset="-120"/>
-              </a:rPr>
-              <a:t>담당자가 틀 위에서 편집·추가·삭제</a:t>
-            </a:r>
-            <a:endParaRPr lang="en-US" sz="1350" dirty="0"/>
-          </a:p>
-        </p:txBody>
-      </p:sp>
-      <p:sp>
-        <p:nvSpPr>
-          <p:cNvPr id="21" name="Text 19"/>
-          <p:cNvSpPr/>
-          <p:nvPr/>
-        </p:nvSpPr>
-        <p:spPr>
-          <a:xfrm>
-            <a:off x="566928" y="6035040"/>
-            <a:ext cx="10972800" cy="320040"/>
-          </a:xfrm>
-          <a:prstGeom prst="rect">
-            <a:avLst/>
-          </a:prstGeom>
-          <a:noFill/>
-          <a:ln/>
-        </p:spPr>
-        <p:txBody>
-          <a:bodyPr wrap="square" lIns="0" tIns="0" rIns="0" bIns="0" rtlCol="0" anchor="ctr"/>
-          <a:lstStyle/>
-          <a:p>
-            <a:pPr indent="0" marL="0">
-              <a:buNone/>
-            </a:pPr>
-            <a:r>
-              <a:rPr lang="en-US" sz="1250" b="1" i="1" dirty="0">
-                <a:solidFill>
-                  <a:srgbClr val="6366F1"/>
-                </a:solidFill>
-                <a:latin typeface="맑은 고딕" pitchFamily="34" charset="0"/>
-                <a:ea typeface="맑은 고딕" pitchFamily="34" charset="-122"/>
-                <a:cs typeface="맑은 고딕" pitchFamily="34" charset="-120"/>
-              </a:rPr>
-              <a:t>→ 다음 장: req-tf-01 하나에서 실제로 도출한 예시</a:t>
-            </a:r>
-            <a:endParaRPr lang="en-US" sz="1250" dirty="0"/>
-          </a:p>
-        </p:txBody>
-      </p:sp>
+      <p:pic>
+        <p:nvPicPr>
+          <p:cNvPr id="5" name="Image 0" descr="/home/user/semes-superrookie/docs/img/ppt-review-real-3.png">    </p:cNvPr>
+          <p:cNvPicPr>
+            <a:picLocks noChangeAspect="1"/>
+          </p:cNvPicPr>
+          <p:nvPr/>
+        </p:nvPicPr>
+        <p:blipFill>
+          <a:blip r:embed="rId1"/>
+          <a:stretch>
+            <a:fillRect/>
+          </a:stretch>
+        </p:blipFill>
+        <p:spPr>
+          <a:xfrm>
+            <a:off x="379476" y="2286000"/>
+            <a:ext cx="11430000" cy="3115361"/>
+          </a:xfrm>
+          <a:prstGeom prst="rect">
+            <a:avLst/>
+          </a:prstGeom>
+        </p:spPr>
+      </p:pic>
     </p:spTree>
   </p:cSld>
   <p:clrMapOvr>

--- a/docs/진행공유_요구사항자동화.pptx
+++ b/docs/진행공유_요구사항자동화.pptx
@@ -3465,7 +3465,7 @@
                 <a:ea typeface="맑은 고딕" pitchFamily="34" charset="-122"/>
                 <a:cs typeface="맑은 고딕" pitchFamily="34" charset="-120"/>
               </a:rPr>
-              <a:t>요구사항 하나 → 기능 · 비기능 요구사항</a:t>
+              <a:t>확정 요구사항 → 도출 → 기능 · 비기능 요구사항</a:t>
             </a:r>
             <a:endParaRPr lang="en-US" sz="3000" dirty="0"/>
           </a:p>
@@ -3473,7 +3473,7 @@
       </p:sp>
       <p:pic>
         <p:nvPicPr>
-          <p:cNvPr id="4" name="Image 0" descr="/home/user/semes-superrookie/docs/img/ppt-derive-1.png">    </p:cNvPr>
+          <p:cNvPr id="4" name="Image 0" descr="/home/user/semes-superrookie/docs/img/ppt-derive-flow.png">    </p:cNvPr>
           <p:cNvPicPr>
             <a:picLocks noChangeAspect="1"/>
           </p:cNvPicPr>
@@ -3487,8 +3487,8 @@
         </p:blipFill>
         <p:spPr>
           <a:xfrm>
-            <a:off x="836676" y="1828800"/>
-            <a:ext cx="10515600" cy="3927348"/>
+            <a:off x="379476" y="2148840"/>
+            <a:ext cx="11430000" cy="3527755"/>
           </a:xfrm>
           <a:prstGeom prst="rect">
             <a:avLst/>
@@ -3503,7 +3503,7 @@
         </p:nvSpPr>
         <p:spPr>
           <a:xfrm>
-            <a:off x="566928" y="5943600"/>
+            <a:off x="566928" y="5897880"/>
             <a:ext cx="11064240" cy="365760"/>
           </a:xfrm>
           <a:prstGeom prst="rect">
@@ -3528,7 +3528,7 @@
                 <a:ea typeface="맑은 고딕" pitchFamily="34" charset="-122"/>
                 <a:cs typeface="맑은 고딕" pitchFamily="34" charset="-120"/>
               </a:rPr>
-              <a:t>req-tf-01(신규 태스크 생성) 한 건에서 기능요구사항 6건 · 비기능요구사항 5건을 자동 도출 (AI 초안)</a:t>
+              <a:t>확정된 req-ta-01「태스크 할당 기준」에서 기능요구사항·비기능요구사항을 자동 도출하고, 각 항목의 상세까지 채운다</a:t>
             </a:r>
             <a:endParaRPr lang="en-US" sz="1250" dirty="0"/>
           </a:p>

--- a/docs/진행공유_요구사항자동화.pptx
+++ b/docs/진행공유_요구사항자동화.pptx
@@ -3487,8 +3487,8 @@
         </p:blipFill>
         <p:spPr>
           <a:xfrm>
-            <a:off x="379476" y="2148840"/>
-            <a:ext cx="11430000" cy="3527755"/>
+            <a:off x="699516" y="1645920"/>
+            <a:ext cx="10789920" cy="4089197"/>
           </a:xfrm>
           <a:prstGeom prst="rect">
             <a:avLst/>
@@ -3528,7 +3528,7 @@
                 <a:ea typeface="맑은 고딕" pitchFamily="34" charset="-122"/>
                 <a:cs typeface="맑은 고딕" pitchFamily="34" charset="-120"/>
               </a:rPr>
-              <a:t>확정된 req-ta-01「태스크 할당 기준」에서 기능요구사항·비기능요구사항을 자동 도출하고, 각 항목의 상세까지 채운다</a:t>
+              <a:t>확정 요구사항에서 기능·비기능 요구사항과 상세를 LLM이 초안으로 제안 → 개발자가 직접 편집·확정</a:t>
             </a:r>
             <a:endParaRPr lang="en-US" sz="1250" dirty="0"/>
           </a:p>

--- a/docs/진행공유_요구사항자동화.pptx
+++ b/docs/진행공유_요구사항자동화.pptx
@@ -2592,8 +2592,8 @@
         </p:nvSpPr>
         <p:spPr>
           <a:xfrm>
-            <a:off x="566928" y="1783080"/>
-            <a:ext cx="5486400" cy="365760"/>
+            <a:off x="566928" y="1755648"/>
+            <a:ext cx="10972800" cy="365760"/>
           </a:xfrm>
           <a:prstGeom prst="rect">
             <a:avLst/>
@@ -2617,7 +2617,7 @@
                 <a:ea typeface="맑은 고딕" pitchFamily="34" charset="-122"/>
                 <a:cs typeface="맑은 고딕" pitchFamily="34" charset="-120"/>
               </a:rPr>
-              <a:t>기능 하나 = Jira 이슈 4종 (+ 비기능요구사항)</a:t>
+              <a:t>확정된 요구사항 하나에서, 개발에 필요한 산출물들을 자동으로 도출한다.</a:t>
             </a:r>
             <a:endParaRPr lang="en-US" sz="1500" dirty="0"/>
           </a:p>
@@ -2631,44 +2631,89 @@
         </p:nvSpPr>
         <p:spPr>
           <a:xfrm>
-            <a:off x="566928" y="2286000"/>
-            <a:ext cx="5486400" cy="713232"/>
+            <a:off x="566928" y="2651760"/>
+            <a:ext cx="2743200" cy="1691640"/>
           </a:xfrm>
           <a:prstGeom prst="roundRect">
             <a:avLst>
-              <a:gd name="adj" fmla="val 7692"/>
+              <a:gd name="adj" fmla="val 5405"/>
             </a:avLst>
           </a:prstGeom>
           <a:solidFill>
             <a:srgbClr val="EEF2FF"/>
+          </a:solidFill>
+          <a:ln w="19050">
+            <a:solidFill>
+              <a:srgbClr val="C7D2FE"/>
+            </a:solidFill>
+            <a:prstDash val="solid"/>
+          </a:ln>
+        </p:spPr>
+      </p:sp>
+      <p:sp>
+        <p:nvSpPr>
+          <p:cNvPr id="7" name="Text 5"/>
+          <p:cNvSpPr/>
+          <p:nvPr/>
+        </p:nvSpPr>
+        <p:spPr>
+          <a:xfrm>
+            <a:off x="749808" y="2852928"/>
+            <a:ext cx="2377440" cy="365760"/>
+          </a:xfrm>
+          <a:prstGeom prst="rect">
+            <a:avLst/>
+          </a:prstGeom>
+          <a:noFill/>
+          <a:ln/>
+        </p:spPr>
+        <p:txBody>
+          <a:bodyPr wrap="square" lIns="0" tIns="0" rIns="0" bIns="0" rtlCol="0" anchor="ctr"/>
+          <a:lstStyle/>
+          <a:p>
+            <a:pPr indent="0" marL="0">
+              <a:buNone/>
+            </a:pPr>
+            <a:r>
+              <a:rPr lang="en-US" sz="1600" b="1" dirty="0">
+                <a:solidFill>
+                  <a:srgbClr val="1F2937"/>
+                </a:solidFill>
+                <a:latin typeface="맑은 고딕" pitchFamily="34" charset="0"/>
+                <a:ea typeface="맑은 고딕" pitchFamily="34" charset="-122"/>
+                <a:cs typeface="맑은 고딕" pitchFamily="34" charset="-120"/>
+              </a:rPr>
+              <a:t>요구사항 1개</a:t>
+            </a:r>
+            <a:endParaRPr lang="en-US" sz="1600" dirty="0"/>
+          </a:p>
+        </p:txBody>
+      </p:sp>
+      <p:sp>
+        <p:nvSpPr>
+          <p:cNvPr id="8" name="Text 6"/>
+          <p:cNvSpPr/>
+          <p:nvPr/>
+        </p:nvSpPr>
+        <p:spPr>
+          <a:xfrm>
+            <a:off x="749808" y="3310128"/>
+            <a:ext cx="1554480" cy="310896"/>
+          </a:xfrm>
+          <a:prstGeom prst="roundRect">
+            <a:avLst>
+              <a:gd name="adj" fmla="val 14706"/>
+            </a:avLst>
+          </a:prstGeom>
+          <a:solidFill>
+            <a:srgbClr val="FFFFFF"/>
           </a:solidFill>
           <a:ln w="12700">
             <a:solidFill>
               <a:srgbClr val="C7D2FE"/>
             </a:solidFill>
-            <a:prstDash val="solid"/>
           </a:ln>
         </p:spPr>
-      </p:sp>
-      <p:sp>
-        <p:nvSpPr>
-          <p:cNvPr id="7" name="Text 5"/>
-          <p:cNvSpPr/>
-          <p:nvPr/>
-        </p:nvSpPr>
-        <p:spPr>
-          <a:xfrm>
-            <a:off x="713232" y="2414016"/>
-            <a:ext cx="457200" cy="457200"/>
-          </a:xfrm>
-          <a:prstGeom prst="ellipse">
-            <a:avLst/>
-          </a:prstGeom>
-          <a:solidFill>
-            <a:srgbClr val="6366F1"/>
-          </a:solidFill>
-          <a:ln/>
-        </p:spPr>
         <p:txBody>
           <a:bodyPr wrap="square" lIns="0" tIns="0" rIns="0" bIns="0" rtlCol="0" anchor="ctr"/>
           <a:lstStyle/>
@@ -2677,30 +2722,30 @@
               <a:buNone/>
             </a:pPr>
             <a:r>
-              <a:rPr lang="en-US" sz="1500" b="1" dirty="0">
-                <a:solidFill>
-                  <a:srgbClr val="FFFFFF"/>
-                </a:solidFill>
-                <a:latin typeface="맑은 고딕" pitchFamily="34" charset="0"/>
-                <a:ea typeface="맑은 고딕" pitchFamily="34" charset="-122"/>
-                <a:cs typeface="맑은 고딕" pitchFamily="34" charset="-120"/>
-              </a:rPr>
-              <a:t>1</a:t>
-            </a:r>
-            <a:endParaRPr lang="en-US" sz="1500" dirty="0"/>
-          </a:p>
-        </p:txBody>
-      </p:sp>
-      <p:sp>
-        <p:nvSpPr>
-          <p:cNvPr id="8" name="Text 6"/>
-          <p:cNvSpPr/>
-          <p:nvPr/>
-        </p:nvSpPr>
-        <p:spPr>
-          <a:xfrm>
-            <a:off x="1298448" y="2304288"/>
-            <a:ext cx="4617720" cy="676656"/>
+              <a:rPr lang="en-US" sz="1200" b="1" dirty="0">
+                <a:solidFill>
+                  <a:srgbClr val="4338CA"/>
+                </a:solidFill>
+                <a:latin typeface="Consolas" pitchFamily="34" charset="0"/>
+                <a:ea typeface="Consolas" pitchFamily="34" charset="-122"/>
+                <a:cs typeface="Consolas" pitchFamily="34" charset="-120"/>
+              </a:rPr>
+              <a:t>req-ta-01</a:t>
+            </a:r>
+            <a:endParaRPr lang="en-US" sz="1200" dirty="0"/>
+          </a:p>
+        </p:txBody>
+      </p:sp>
+      <p:sp>
+        <p:nvSpPr>
+          <p:cNvPr id="9" name="Text 7"/>
+          <p:cNvSpPr/>
+          <p:nvPr/>
+        </p:nvSpPr>
+        <p:spPr>
+          <a:xfrm>
+            <a:off x="749808" y="3767328"/>
+            <a:ext cx="2377440" cy="320040"/>
           </a:xfrm>
           <a:prstGeom prst="rect">
             <a:avLst/>
@@ -2716,21 +2761,7 @@
               <a:buNone/>
             </a:pPr>
             <a:r>
-              <a:rPr lang="en-US" sz="1350" b="1" dirty="0">
-                <a:solidFill>
-                  <a:srgbClr val="1F2937"/>
-                </a:solidFill>
-                <a:latin typeface="맑은 고딕" pitchFamily="34" charset="0"/>
-                <a:ea typeface="맑은 고딕" pitchFamily="34" charset="-122"/>
-                <a:cs typeface="맑은 고딕" pitchFamily="34" charset="-120"/>
-              </a:rPr>
-              <a:t>티켓 (기능요구사항)   </a:t>
-            </a:r>
-            <a:pPr indent="0" marL="0">
-              <a:buNone/>
-            </a:pPr>
-            <a:r>
-              <a:rPr lang="en-US" sz="1150" dirty="0">
+              <a:rPr lang="en-US" sz="1250" dirty="0">
                 <a:solidFill>
                   <a:srgbClr val="6B7280"/>
                 </a:solidFill>
@@ -2738,389 +2769,65 @@
                 <a:ea typeface="맑은 고딕" pitchFamily="34" charset="-122"/>
                 <a:cs typeface="맑은 고딕" pitchFamily="34" charset="-120"/>
               </a:rPr>
-              <a:t>개발 단위가 되는 메인 티켓</a:t>
-            </a:r>
-            <a:endParaRPr lang="en-US" sz="1350" dirty="0"/>
-          </a:p>
-        </p:txBody>
-      </p:sp>
-      <p:sp>
-        <p:nvSpPr>
-          <p:cNvPr id="9" name="Shape 7"/>
-          <p:cNvSpPr/>
-          <p:nvPr/>
-        </p:nvSpPr>
-        <p:spPr>
-          <a:xfrm>
-            <a:off x="566928" y="3108960"/>
-            <a:ext cx="5486400" cy="713232"/>
+              <a:t>태스크 할당 기준</a:t>
+            </a:r>
+            <a:endParaRPr lang="en-US" sz="1250" dirty="0"/>
+          </a:p>
+        </p:txBody>
+      </p:sp>
+      <p:sp>
+        <p:nvSpPr>
+          <p:cNvPr id="10" name="Text 8"/>
+          <p:cNvSpPr/>
+          <p:nvPr/>
+        </p:nvSpPr>
+        <p:spPr>
+          <a:xfrm>
+            <a:off x="3429000" y="3246120"/>
+            <a:ext cx="1280160" cy="457200"/>
+          </a:xfrm>
+          <a:prstGeom prst="rect">
+            <a:avLst/>
+          </a:prstGeom>
+          <a:noFill/>
+          <a:ln/>
+        </p:spPr>
+        <p:txBody>
+          <a:bodyPr wrap="square" lIns="0" tIns="0" rIns="0" bIns="0" rtlCol="0" anchor="ctr"/>
+          <a:lstStyle/>
+          <a:p>
+            <a:pPr algn="ctr" indent="0" marL="0">
+              <a:buNone/>
+            </a:pPr>
+            <a:r>
+              <a:rPr lang="en-US" sz="1300" b="1" dirty="0">
+                <a:solidFill>
+                  <a:srgbClr val="6366F1"/>
+                </a:solidFill>
+                <a:latin typeface="맑은 고딕" pitchFamily="34" charset="0"/>
+                <a:ea typeface="맑은 고딕" pitchFamily="34" charset="-122"/>
+                <a:cs typeface="맑은 고딕" pitchFamily="34" charset="-120"/>
+              </a:rPr>
+              <a:t>자동 도출 ▶</a:t>
+            </a:r>
+            <a:endParaRPr lang="en-US" sz="1300" dirty="0"/>
+          </a:p>
+        </p:txBody>
+      </p:sp>
+      <p:sp>
+        <p:nvSpPr>
+          <p:cNvPr id="11" name="Shape 9"/>
+          <p:cNvSpPr/>
+          <p:nvPr/>
+        </p:nvSpPr>
+        <p:spPr>
+          <a:xfrm>
+            <a:off x="4800600" y="2148840"/>
+            <a:ext cx="6812280" cy="658368"/>
           </a:xfrm>
           <a:prstGeom prst="roundRect">
             <a:avLst>
-              <a:gd name="adj" fmla="val 7692"/>
-            </a:avLst>
-          </a:prstGeom>
-          <a:solidFill>
-            <a:srgbClr val="EEF2FF"/>
-          </a:solidFill>
-          <a:ln w="12700">
-            <a:solidFill>
-              <a:srgbClr val="C7D2FE"/>
-            </a:solidFill>
-            <a:prstDash val="solid"/>
-          </a:ln>
-        </p:spPr>
-      </p:sp>
-      <p:sp>
-        <p:nvSpPr>
-          <p:cNvPr id="10" name="Text 8"/>
-          <p:cNvSpPr/>
-          <p:nvPr/>
-        </p:nvSpPr>
-        <p:spPr>
-          <a:xfrm>
-            <a:off x="713232" y="3236976"/>
-            <a:ext cx="457200" cy="457200"/>
-          </a:xfrm>
-          <a:prstGeom prst="ellipse">
-            <a:avLst/>
-          </a:prstGeom>
-          <a:solidFill>
-            <a:srgbClr val="6366F1"/>
-          </a:solidFill>
-          <a:ln/>
-        </p:spPr>
-        <p:txBody>
-          <a:bodyPr wrap="square" lIns="0" tIns="0" rIns="0" bIns="0" rtlCol="0" anchor="ctr"/>
-          <a:lstStyle/>
-          <a:p>
-            <a:pPr algn="ctr" indent="0" marL="0">
-              <a:buNone/>
-            </a:pPr>
-            <a:r>
-              <a:rPr lang="en-US" sz="1500" b="1" dirty="0">
-                <a:solidFill>
-                  <a:srgbClr val="FFFFFF"/>
-                </a:solidFill>
-                <a:latin typeface="맑은 고딕" pitchFamily="34" charset="0"/>
-                <a:ea typeface="맑은 고딕" pitchFamily="34" charset="-122"/>
-                <a:cs typeface="맑은 고딕" pitchFamily="34" charset="-120"/>
-              </a:rPr>
-              <a:t>2</a:t>
-            </a:r>
-            <a:endParaRPr lang="en-US" sz="1500" dirty="0"/>
-          </a:p>
-        </p:txBody>
-      </p:sp>
-      <p:sp>
-        <p:nvSpPr>
-          <p:cNvPr id="11" name="Text 9"/>
-          <p:cNvSpPr/>
-          <p:nvPr/>
-        </p:nvSpPr>
-        <p:spPr>
-          <a:xfrm>
-            <a:off x="1298448" y="3127248"/>
-            <a:ext cx="4617720" cy="676656"/>
-          </a:xfrm>
-          <a:prstGeom prst="rect">
-            <a:avLst/>
-          </a:prstGeom>
-          <a:noFill/>
-          <a:ln/>
-        </p:spPr>
-        <p:txBody>
-          <a:bodyPr wrap="square" lIns="0" tIns="0" rIns="0" bIns="0" rtlCol="0" anchor="ctr"/>
-          <a:lstStyle/>
-          <a:p>
-            <a:pPr indent="0" marL="0">
-              <a:buNone/>
-            </a:pPr>
-            <a:r>
-              <a:rPr lang="en-US" sz="1350" b="1" dirty="0">
-                <a:solidFill>
-                  <a:srgbClr val="1F2937"/>
-                </a:solidFill>
-                <a:latin typeface="맑은 고딕" pitchFamily="34" charset="0"/>
-                <a:ea typeface="맑은 고딕" pitchFamily="34" charset="-122"/>
-                <a:cs typeface="맑은 고딕" pitchFamily="34" charset="-120"/>
-              </a:rPr>
-              <a:t>SWVOC (고객요구사항)   </a:t>
-            </a:r>
-            <a:pPr indent="0" marL="0">
-              <a:buNone/>
-            </a:pPr>
-            <a:r>
-              <a:rPr lang="en-US" sz="1150" dirty="0">
-                <a:solidFill>
-                  <a:srgbClr val="6B7280"/>
-                </a:solidFill>
-                <a:latin typeface="맑은 고딕" pitchFamily="34" charset="0"/>
-                <a:ea typeface="맑은 고딕" pitchFamily="34" charset="-122"/>
-                <a:cs typeface="맑은 고딕" pitchFamily="34" charset="-120"/>
-              </a:rPr>
-              <a:t>고객 요구사항 원문·정리</a:t>
-            </a:r>
-            <a:endParaRPr lang="en-US" sz="1350" dirty="0"/>
-          </a:p>
-        </p:txBody>
-      </p:sp>
-      <p:sp>
-        <p:nvSpPr>
-          <p:cNvPr id="12" name="Shape 10"/>
-          <p:cNvSpPr/>
-          <p:nvPr/>
-        </p:nvSpPr>
-        <p:spPr>
-          <a:xfrm>
-            <a:off x="566928" y="3931920"/>
-            <a:ext cx="5486400" cy="713232"/>
-          </a:xfrm>
-          <a:prstGeom prst="roundRect">
-            <a:avLst>
-              <a:gd name="adj" fmla="val 7692"/>
-            </a:avLst>
-          </a:prstGeom>
-          <a:solidFill>
-            <a:srgbClr val="EEF2FF"/>
-          </a:solidFill>
-          <a:ln w="12700">
-            <a:solidFill>
-              <a:srgbClr val="C7D2FE"/>
-            </a:solidFill>
-            <a:prstDash val="solid"/>
-          </a:ln>
-        </p:spPr>
-      </p:sp>
-      <p:sp>
-        <p:nvSpPr>
-          <p:cNvPr id="13" name="Text 11"/>
-          <p:cNvSpPr/>
-          <p:nvPr/>
-        </p:nvSpPr>
-        <p:spPr>
-          <a:xfrm>
-            <a:off x="713232" y="4059936"/>
-            <a:ext cx="457200" cy="457200"/>
-          </a:xfrm>
-          <a:prstGeom prst="ellipse">
-            <a:avLst/>
-          </a:prstGeom>
-          <a:solidFill>
-            <a:srgbClr val="6366F1"/>
-          </a:solidFill>
-          <a:ln/>
-        </p:spPr>
-        <p:txBody>
-          <a:bodyPr wrap="square" lIns="0" tIns="0" rIns="0" bIns="0" rtlCol="0" anchor="ctr"/>
-          <a:lstStyle/>
-          <a:p>
-            <a:pPr algn="ctr" indent="0" marL="0">
-              <a:buNone/>
-            </a:pPr>
-            <a:r>
-              <a:rPr lang="en-US" sz="1500" b="1" dirty="0">
-                <a:solidFill>
-                  <a:srgbClr val="FFFFFF"/>
-                </a:solidFill>
-                <a:latin typeface="맑은 고딕" pitchFamily="34" charset="0"/>
-                <a:ea typeface="맑은 고딕" pitchFamily="34" charset="-122"/>
-                <a:cs typeface="맑은 고딕" pitchFamily="34" charset="-120"/>
-              </a:rPr>
-              <a:t>3</a:t>
-            </a:r>
-            <a:endParaRPr lang="en-US" sz="1500" dirty="0"/>
-          </a:p>
-        </p:txBody>
-      </p:sp>
-      <p:sp>
-        <p:nvSpPr>
-          <p:cNvPr id="14" name="Text 12"/>
-          <p:cNvSpPr/>
-          <p:nvPr/>
-        </p:nvSpPr>
-        <p:spPr>
-          <a:xfrm>
-            <a:off x="1298448" y="3950208"/>
-            <a:ext cx="4617720" cy="676656"/>
-          </a:xfrm>
-          <a:prstGeom prst="rect">
-            <a:avLst/>
-          </a:prstGeom>
-          <a:noFill/>
-          <a:ln/>
-        </p:spPr>
-        <p:txBody>
-          <a:bodyPr wrap="square" lIns="0" tIns="0" rIns="0" bIns="0" rtlCol="0" anchor="ctr"/>
-          <a:lstStyle/>
-          <a:p>
-            <a:pPr indent="0" marL="0">
-              <a:buNone/>
-            </a:pPr>
-            <a:r>
-              <a:rPr lang="en-US" sz="1350" b="1" dirty="0">
-                <a:solidFill>
-                  <a:srgbClr val="1F2937"/>
-                </a:solidFill>
-                <a:latin typeface="맑은 고딕" pitchFamily="34" charset="0"/>
-                <a:ea typeface="맑은 고딕" pitchFamily="34" charset="-122"/>
-                <a:cs typeface="맑은 고딕" pitchFamily="34" charset="-120"/>
-              </a:rPr>
-              <a:t>Function Requirement   </a:t>
-            </a:r>
-            <a:pPr indent="0" marL="0">
-              <a:buNone/>
-            </a:pPr>
-            <a:r>
-              <a:rPr lang="en-US" sz="1150" dirty="0">
-                <a:solidFill>
-                  <a:srgbClr val="6B7280"/>
-                </a:solidFill>
-                <a:latin typeface="맑은 고딕" pitchFamily="34" charset="0"/>
-                <a:ea typeface="맑은 고딕" pitchFamily="34" charset="-122"/>
-                <a:cs typeface="맑은 고딕" pitchFamily="34" charset="-120"/>
-              </a:rPr>
-              <a:t>기능 요구사항 상세</a:t>
-            </a:r>
-            <a:endParaRPr lang="en-US" sz="1350" dirty="0"/>
-          </a:p>
-        </p:txBody>
-      </p:sp>
-      <p:sp>
-        <p:nvSpPr>
-          <p:cNvPr id="15" name="Shape 13"/>
-          <p:cNvSpPr/>
-          <p:nvPr/>
-        </p:nvSpPr>
-        <p:spPr>
-          <a:xfrm>
-            <a:off x="566928" y="4754880"/>
-            <a:ext cx="5486400" cy="713232"/>
-          </a:xfrm>
-          <a:prstGeom prst="roundRect">
-            <a:avLst>
-              <a:gd name="adj" fmla="val 7692"/>
-            </a:avLst>
-          </a:prstGeom>
-          <a:solidFill>
-            <a:srgbClr val="EEF2FF"/>
-          </a:solidFill>
-          <a:ln w="12700">
-            <a:solidFill>
-              <a:srgbClr val="C7D2FE"/>
-            </a:solidFill>
-            <a:prstDash val="solid"/>
-          </a:ln>
-        </p:spPr>
-      </p:sp>
-      <p:sp>
-        <p:nvSpPr>
-          <p:cNvPr id="16" name="Text 14"/>
-          <p:cNvSpPr/>
-          <p:nvPr/>
-        </p:nvSpPr>
-        <p:spPr>
-          <a:xfrm>
-            <a:off x="713232" y="4882896"/>
-            <a:ext cx="457200" cy="457200"/>
-          </a:xfrm>
-          <a:prstGeom prst="ellipse">
-            <a:avLst/>
-          </a:prstGeom>
-          <a:solidFill>
-            <a:srgbClr val="6366F1"/>
-          </a:solidFill>
-          <a:ln/>
-        </p:spPr>
-        <p:txBody>
-          <a:bodyPr wrap="square" lIns="0" tIns="0" rIns="0" bIns="0" rtlCol="0" anchor="ctr"/>
-          <a:lstStyle/>
-          <a:p>
-            <a:pPr algn="ctr" indent="0" marL="0">
-              <a:buNone/>
-            </a:pPr>
-            <a:r>
-              <a:rPr lang="en-US" sz="1500" b="1" dirty="0">
-                <a:solidFill>
-                  <a:srgbClr val="FFFFFF"/>
-                </a:solidFill>
-                <a:latin typeface="맑은 고딕" pitchFamily="34" charset="0"/>
-                <a:ea typeface="맑은 고딕" pitchFamily="34" charset="-122"/>
-                <a:cs typeface="맑은 고딕" pitchFamily="34" charset="-120"/>
-              </a:rPr>
-              <a:t>4</a:t>
-            </a:r>
-            <a:endParaRPr lang="en-US" sz="1500" dirty="0"/>
-          </a:p>
-        </p:txBody>
-      </p:sp>
-      <p:sp>
-        <p:nvSpPr>
-          <p:cNvPr id="17" name="Text 15"/>
-          <p:cNvSpPr/>
-          <p:nvPr/>
-        </p:nvSpPr>
-        <p:spPr>
-          <a:xfrm>
-            <a:off x="1298448" y="4773168"/>
-            <a:ext cx="4617720" cy="676656"/>
-          </a:xfrm>
-          <a:prstGeom prst="rect">
-            <a:avLst/>
-          </a:prstGeom>
-          <a:noFill/>
-          <a:ln/>
-        </p:spPr>
-        <p:txBody>
-          <a:bodyPr wrap="square" lIns="0" tIns="0" rIns="0" bIns="0" rtlCol="0" anchor="ctr"/>
-          <a:lstStyle/>
-          <a:p>
-            <a:pPr indent="0" marL="0">
-              <a:buNone/>
-            </a:pPr>
-            <a:r>
-              <a:rPr lang="en-US" sz="1350" b="1" dirty="0">
-                <a:solidFill>
-                  <a:srgbClr val="1F2937"/>
-                </a:solidFill>
-                <a:latin typeface="맑은 고딕" pitchFamily="34" charset="0"/>
-                <a:ea typeface="맑은 고딕" pitchFamily="34" charset="-122"/>
-                <a:cs typeface="맑은 고딕" pitchFamily="34" charset="-120"/>
-              </a:rPr>
-              <a:t>Detail Design   </a:t>
-            </a:r>
-            <a:pPr indent="0" marL="0">
-              <a:buNone/>
-            </a:pPr>
-            <a:r>
-              <a:rPr lang="en-US" sz="1150" dirty="0">
-                <a:solidFill>
-                  <a:srgbClr val="6B7280"/>
-                </a:solidFill>
-                <a:latin typeface="맑은 고딕" pitchFamily="34" charset="0"/>
-                <a:ea typeface="맑은 고딕" pitchFamily="34" charset="-122"/>
-                <a:cs typeface="맑은 고딕" pitchFamily="34" charset="-120"/>
-              </a:rPr>
-              <a:t>상세설계 — 시퀀스 다이어그램 등</a:t>
-            </a:r>
-            <a:endParaRPr lang="en-US" sz="1350" dirty="0"/>
-          </a:p>
-        </p:txBody>
-      </p:sp>
-      <p:sp>
-        <p:nvSpPr>
-          <p:cNvPr id="18" name="Shape 16"/>
-          <p:cNvSpPr/>
-          <p:nvPr/>
-        </p:nvSpPr>
-        <p:spPr>
-          <a:xfrm>
-            <a:off x="6537960" y="1783080"/>
-            <a:ext cx="5074920" cy="4160520"/>
-          </a:xfrm>
-          <a:prstGeom prst="roundRect">
-            <a:avLst>
-              <a:gd name="adj" fmla="val 2198"/>
+              <a:gd name="adj" fmla="val 8333"/>
             </a:avLst>
           </a:prstGeom>
           <a:solidFill>
@@ -3143,14 +2850,404 @@
       </p:sp>
       <p:sp>
         <p:nvSpPr>
+          <p:cNvPr id="12" name="Text 10"/>
+          <p:cNvSpPr/>
+          <p:nvPr/>
+        </p:nvSpPr>
+        <p:spPr>
+          <a:xfrm>
+            <a:off x="5029200" y="2148840"/>
+            <a:ext cx="5212080" cy="658368"/>
+          </a:xfrm>
+          <a:prstGeom prst="rect">
+            <a:avLst/>
+          </a:prstGeom>
+          <a:noFill/>
+          <a:ln/>
+        </p:spPr>
+        <p:txBody>
+          <a:bodyPr wrap="square" lIns="0" tIns="0" rIns="0" bIns="0" rtlCol="0" anchor="ctr"/>
+          <a:lstStyle/>
+          <a:p>
+            <a:pPr indent="0" marL="0">
+              <a:buNone/>
+            </a:pPr>
+            <a:r>
+              <a:rPr lang="en-US" sz="1350" b="1" dirty="0">
+                <a:solidFill>
+                  <a:srgbClr val="1F2937"/>
+                </a:solidFill>
+                <a:latin typeface="맑은 고딕" pitchFamily="34" charset="0"/>
+                <a:ea typeface="맑은 고딕" pitchFamily="34" charset="-122"/>
+                <a:cs typeface="맑은 고딕" pitchFamily="34" charset="-120"/>
+              </a:rPr>
+              <a:t>SWVOC   </a:t>
+            </a:r>
+            <a:pPr indent="0" marL="0">
+              <a:buNone/>
+            </a:pPr>
+            <a:r>
+              <a:rPr lang="en-US" sz="1150" dirty="0">
+                <a:solidFill>
+                  <a:srgbClr val="6B7280"/>
+                </a:solidFill>
+                <a:latin typeface="맑은 고딕" pitchFamily="34" charset="0"/>
+                <a:ea typeface="맑은 고딕" pitchFamily="34" charset="-122"/>
+                <a:cs typeface="맑은 고딕" pitchFamily="34" charset="-120"/>
+              </a:rPr>
+              <a:t>고객요구사항 원문·정리 (요구사항당)</a:t>
+            </a:r>
+            <a:endParaRPr lang="en-US" sz="1350" dirty="0"/>
+          </a:p>
+        </p:txBody>
+      </p:sp>
+      <p:sp>
+        <p:nvSpPr>
+          <p:cNvPr id="13" name="Text 11"/>
+          <p:cNvSpPr/>
+          <p:nvPr/>
+        </p:nvSpPr>
+        <p:spPr>
+          <a:xfrm>
+            <a:off x="10378440" y="2295144"/>
+            <a:ext cx="960120" cy="365760"/>
+          </a:xfrm>
+          <a:prstGeom prst="roundRect">
+            <a:avLst>
+              <a:gd name="adj" fmla="val 30000"/>
+            </a:avLst>
+          </a:prstGeom>
+          <a:solidFill>
+            <a:srgbClr val="EEF2FF"/>
+          </a:solidFill>
+          <a:ln/>
+        </p:spPr>
+        <p:txBody>
+          <a:bodyPr wrap="square" lIns="0" tIns="0" rIns="0" bIns="0" rtlCol="0" anchor="ctr"/>
+          <a:lstStyle/>
+          <a:p>
+            <a:pPr algn="ctr" indent="0" marL="0">
+              <a:buNone/>
+            </a:pPr>
+            <a:r>
+              <a:rPr lang="en-US" sz="1300" b="1" dirty="0">
+                <a:solidFill>
+                  <a:srgbClr val="4338CA"/>
+                </a:solidFill>
+                <a:latin typeface="맑은 고딕" pitchFamily="34" charset="0"/>
+                <a:ea typeface="맑은 고딕" pitchFamily="34" charset="-122"/>
+                <a:cs typeface="맑은 고딕" pitchFamily="34" charset="-120"/>
+              </a:rPr>
+              <a:t>×1</a:t>
+            </a:r>
+            <a:endParaRPr lang="en-US" sz="1300" dirty="0"/>
+          </a:p>
+        </p:txBody>
+      </p:sp>
+      <p:sp>
+        <p:nvSpPr>
+          <p:cNvPr id="14" name="Shape 12"/>
+          <p:cNvSpPr/>
+          <p:nvPr/>
+        </p:nvSpPr>
+        <p:spPr>
+          <a:xfrm>
+            <a:off x="4800600" y="2898648"/>
+            <a:ext cx="6812280" cy="658368"/>
+          </a:xfrm>
+          <a:prstGeom prst="roundRect">
+            <a:avLst>
+              <a:gd name="adj" fmla="val 8333"/>
+            </a:avLst>
+          </a:prstGeom>
+          <a:solidFill>
+            <a:srgbClr val="FFFFFF"/>
+          </a:solidFill>
+          <a:ln w="12700">
+            <a:solidFill>
+              <a:srgbClr val="E5E7EB"/>
+            </a:solidFill>
+            <a:prstDash val="solid"/>
+          </a:ln>
+          <a:effectLst>
+            <a:outerShdw sx="100000" sy="100000" kx="0" ky="0" algn="bl" rotWithShape="0" blurRad="127000" dist="50800" dir="5400000">
+              <a:srgbClr val="1E1B4B">
+                <a:alpha val="18000"/>
+              </a:srgbClr>
+            </a:outerShdw>
+          </a:effectLst>
+        </p:spPr>
+      </p:sp>
+      <p:sp>
+        <p:nvSpPr>
+          <p:cNvPr id="15" name="Text 13"/>
+          <p:cNvSpPr/>
+          <p:nvPr/>
+        </p:nvSpPr>
+        <p:spPr>
+          <a:xfrm>
+            <a:off x="5029200" y="2898648"/>
+            <a:ext cx="5212080" cy="658368"/>
+          </a:xfrm>
+          <a:prstGeom prst="rect">
+            <a:avLst/>
+          </a:prstGeom>
+          <a:noFill/>
+          <a:ln/>
+        </p:spPr>
+        <p:txBody>
+          <a:bodyPr wrap="square" lIns="0" tIns="0" rIns="0" bIns="0" rtlCol="0" anchor="ctr"/>
+          <a:lstStyle/>
+          <a:p>
+            <a:pPr indent="0" marL="0">
+              <a:buNone/>
+            </a:pPr>
+            <a:r>
+              <a:rPr lang="en-US" sz="1350" b="1" dirty="0">
+                <a:solidFill>
+                  <a:srgbClr val="1F2937"/>
+                </a:solidFill>
+                <a:latin typeface="맑은 고딕" pitchFamily="34" charset="0"/>
+                <a:ea typeface="맑은 고딕" pitchFamily="34" charset="-122"/>
+                <a:cs typeface="맑은 고딕" pitchFamily="34" charset="-120"/>
+              </a:rPr>
+              <a:t>비기능요구사항 (NFR)   </a:t>
+            </a:r>
+            <a:pPr indent="0" marL="0">
+              <a:buNone/>
+            </a:pPr>
+            <a:r>
+              <a:rPr lang="en-US" sz="1150" dirty="0">
+                <a:solidFill>
+                  <a:srgbClr val="6B7280"/>
+                </a:solidFill>
+                <a:latin typeface="맑은 고딕" pitchFamily="34" charset="0"/>
+                <a:ea typeface="맑은 고딕" pitchFamily="34" charset="-122"/>
+                <a:cs typeface="맑은 고딕" pitchFamily="34" charset="-120"/>
+              </a:rPr>
+              <a:t>성능·신뢰성·추적성 (요구사항당)</a:t>
+            </a:r>
+            <a:endParaRPr lang="en-US" sz="1350" dirty="0"/>
+          </a:p>
+        </p:txBody>
+      </p:sp>
+      <p:sp>
+        <p:nvSpPr>
+          <p:cNvPr id="16" name="Text 14"/>
+          <p:cNvSpPr/>
+          <p:nvPr/>
+        </p:nvSpPr>
+        <p:spPr>
+          <a:xfrm>
+            <a:off x="10378440" y="3044952"/>
+            <a:ext cx="960120" cy="365760"/>
+          </a:xfrm>
+          <a:prstGeom prst="roundRect">
+            <a:avLst>
+              <a:gd name="adj" fmla="val 30000"/>
+            </a:avLst>
+          </a:prstGeom>
+          <a:solidFill>
+            <a:srgbClr val="EEF2FF"/>
+          </a:solidFill>
+          <a:ln/>
+        </p:spPr>
+        <p:txBody>
+          <a:bodyPr wrap="square" lIns="0" tIns="0" rIns="0" bIns="0" rtlCol="0" anchor="ctr"/>
+          <a:lstStyle/>
+          <a:p>
+            <a:pPr algn="ctr" indent="0" marL="0">
+              <a:buNone/>
+            </a:pPr>
+            <a:r>
+              <a:rPr lang="en-US" sz="1300" b="1" dirty="0">
+                <a:solidFill>
+                  <a:srgbClr val="4338CA"/>
+                </a:solidFill>
+                <a:latin typeface="맑은 고딕" pitchFamily="34" charset="0"/>
+                <a:ea typeface="맑은 고딕" pitchFamily="34" charset="-122"/>
+                <a:cs typeface="맑은 고딕" pitchFamily="34" charset="-120"/>
+              </a:rPr>
+              <a:t>×3</a:t>
+            </a:r>
+            <a:endParaRPr lang="en-US" sz="1300" dirty="0"/>
+          </a:p>
+        </p:txBody>
+      </p:sp>
+      <p:sp>
+        <p:nvSpPr>
+          <p:cNvPr id="17" name="Shape 15"/>
+          <p:cNvSpPr/>
+          <p:nvPr/>
+        </p:nvSpPr>
+        <p:spPr>
+          <a:xfrm>
+            <a:off x="4800600" y="3648456"/>
+            <a:ext cx="6812280" cy="658368"/>
+          </a:xfrm>
+          <a:prstGeom prst="roundRect">
+            <a:avLst>
+              <a:gd name="adj" fmla="val 8333"/>
+            </a:avLst>
+          </a:prstGeom>
+          <a:solidFill>
+            <a:srgbClr val="FFFFFF"/>
+          </a:solidFill>
+          <a:ln w="12700">
+            <a:solidFill>
+              <a:srgbClr val="E5E7EB"/>
+            </a:solidFill>
+            <a:prstDash val="solid"/>
+          </a:ln>
+          <a:effectLst>
+            <a:outerShdw sx="100000" sy="100000" kx="0" ky="0" algn="bl" rotWithShape="0" blurRad="127000" dist="50800" dir="5400000">
+              <a:srgbClr val="1E1B4B">
+                <a:alpha val="18000"/>
+              </a:srgbClr>
+            </a:outerShdw>
+          </a:effectLst>
+        </p:spPr>
+      </p:sp>
+      <p:sp>
+        <p:nvSpPr>
+          <p:cNvPr id="18" name="Text 16"/>
+          <p:cNvSpPr/>
+          <p:nvPr/>
+        </p:nvSpPr>
+        <p:spPr>
+          <a:xfrm>
+            <a:off x="5029200" y="3648456"/>
+            <a:ext cx="5212080" cy="658368"/>
+          </a:xfrm>
+          <a:prstGeom prst="rect">
+            <a:avLst/>
+          </a:prstGeom>
+          <a:noFill/>
+          <a:ln/>
+        </p:spPr>
+        <p:txBody>
+          <a:bodyPr wrap="square" lIns="0" tIns="0" rIns="0" bIns="0" rtlCol="0" anchor="ctr"/>
+          <a:lstStyle/>
+          <a:p>
+            <a:pPr indent="0" marL="0">
+              <a:buNone/>
+            </a:pPr>
+            <a:r>
+              <a:rPr lang="en-US" sz="1350" b="1" dirty="0">
+                <a:solidFill>
+                  <a:srgbClr val="1F2937"/>
+                </a:solidFill>
+                <a:latin typeface="맑은 고딕" pitchFamily="34" charset="0"/>
+                <a:ea typeface="맑은 고딕" pitchFamily="34" charset="-122"/>
+                <a:cs typeface="맑은 고딕" pitchFamily="34" charset="-120"/>
+              </a:rPr>
+              <a:t>기능요구사항 (Function Req.)   </a:t>
+            </a:r>
+            <a:pPr indent="0" marL="0">
+              <a:buNone/>
+            </a:pPr>
+            <a:r>
+              <a:rPr lang="en-US" sz="1150" dirty="0">
+                <a:solidFill>
+                  <a:srgbClr val="6B7280"/>
+                </a:solidFill>
+                <a:latin typeface="맑은 고딕" pitchFamily="34" charset="0"/>
+                <a:ea typeface="맑은 고딕" pitchFamily="34" charset="-122"/>
+                <a:cs typeface="맑은 고딕" pitchFamily="34" charset="-120"/>
+              </a:rPr>
+              <a:t>기능별 명세 (기능당)</a:t>
+            </a:r>
+            <a:endParaRPr lang="en-US" sz="1350" dirty="0"/>
+          </a:p>
+        </p:txBody>
+      </p:sp>
+      <p:sp>
+        <p:nvSpPr>
           <p:cNvPr id="19" name="Text 17"/>
           <p:cNvSpPr/>
           <p:nvPr/>
         </p:nvSpPr>
         <p:spPr>
           <a:xfrm>
-            <a:off x="6812280" y="2011680"/>
-            <a:ext cx="4572000" cy="365760"/>
+            <a:off x="10378440" y="3794760"/>
+            <a:ext cx="960120" cy="365760"/>
+          </a:xfrm>
+          <a:prstGeom prst="roundRect">
+            <a:avLst>
+              <a:gd name="adj" fmla="val 30000"/>
+            </a:avLst>
+          </a:prstGeom>
+          <a:solidFill>
+            <a:srgbClr val="EEF2FF"/>
+          </a:solidFill>
+          <a:ln/>
+        </p:spPr>
+        <p:txBody>
+          <a:bodyPr wrap="square" lIns="0" tIns="0" rIns="0" bIns="0" rtlCol="0" anchor="ctr"/>
+          <a:lstStyle/>
+          <a:p>
+            <a:pPr algn="ctr" indent="0" marL="0">
+              <a:buNone/>
+            </a:pPr>
+            <a:r>
+              <a:rPr lang="en-US" sz="1300" b="1" dirty="0">
+                <a:solidFill>
+                  <a:srgbClr val="4338CA"/>
+                </a:solidFill>
+                <a:latin typeface="맑은 고딕" pitchFamily="34" charset="0"/>
+                <a:ea typeface="맑은 고딕" pitchFamily="34" charset="-122"/>
+                <a:cs typeface="맑은 고딕" pitchFamily="34" charset="-120"/>
+              </a:rPr>
+              <a:t>×5</a:t>
+            </a:r>
+            <a:endParaRPr lang="en-US" sz="1300" dirty="0"/>
+          </a:p>
+        </p:txBody>
+      </p:sp>
+      <p:sp>
+        <p:nvSpPr>
+          <p:cNvPr id="20" name="Shape 18"/>
+          <p:cNvSpPr/>
+          <p:nvPr/>
+        </p:nvSpPr>
+        <p:spPr>
+          <a:xfrm>
+            <a:off x="4800600" y="4398264"/>
+            <a:ext cx="6812280" cy="658368"/>
+          </a:xfrm>
+          <a:prstGeom prst="roundRect">
+            <a:avLst>
+              <a:gd name="adj" fmla="val 8333"/>
+            </a:avLst>
+          </a:prstGeom>
+          <a:solidFill>
+            <a:srgbClr val="FFFFFF"/>
+          </a:solidFill>
+          <a:ln w="12700">
+            <a:solidFill>
+              <a:srgbClr val="E5E7EB"/>
+            </a:solidFill>
+            <a:prstDash val="solid"/>
+          </a:ln>
+          <a:effectLst>
+            <a:outerShdw sx="100000" sy="100000" kx="0" ky="0" algn="bl" rotWithShape="0" blurRad="127000" dist="50800" dir="5400000">
+              <a:srgbClr val="1E1B4B">
+                <a:alpha val="18000"/>
+              </a:srgbClr>
+            </a:outerShdw>
+          </a:effectLst>
+        </p:spPr>
+      </p:sp>
+      <p:sp>
+        <p:nvSpPr>
+          <p:cNvPr id="21" name="Text 19"/>
+          <p:cNvSpPr/>
+          <p:nvPr/>
+        </p:nvSpPr>
+        <p:spPr>
+          <a:xfrm>
+            <a:off x="5029200" y="4398264"/>
+            <a:ext cx="5212080" cy="658368"/>
           </a:xfrm>
           <a:prstGeom prst="rect">
             <a:avLst/>
@@ -3166,49 +3263,6 @@
               <a:buNone/>
             </a:pPr>
             <a:r>
-              <a:rPr lang="en-US" sz="1500" b="1" dirty="0">
-                <a:solidFill>
-                  <a:srgbClr val="8B5CF6"/>
-                </a:solidFill>
-                <a:latin typeface="맑은 고딕" pitchFamily="34" charset="0"/>
-                <a:ea typeface="맑은 고딕" pitchFamily="34" charset="-122"/>
-                <a:cs typeface="맑은 고딕" pitchFamily="34" charset="-120"/>
-              </a:rPr>
-              <a:t>어떻게 생성하나</a:t>
-            </a:r>
-            <a:endParaRPr lang="en-US" sz="1500" dirty="0"/>
-          </a:p>
-        </p:txBody>
-      </p:sp>
-      <p:sp>
-        <p:nvSpPr>
-          <p:cNvPr id="20" name="Text 18"/>
-          <p:cNvSpPr/>
-          <p:nvPr/>
-        </p:nvSpPr>
-        <p:spPr>
-          <a:xfrm>
-            <a:off x="6858000" y="2468880"/>
-            <a:ext cx="4572000" cy="3291840"/>
-          </a:xfrm>
-          <a:prstGeom prst="rect">
-            <a:avLst/>
-          </a:prstGeom>
-          <a:noFill/>
-          <a:ln/>
-        </p:spPr>
-        <p:txBody>
-          <a:bodyPr wrap="square" lIns="0" tIns="0" rIns="0" bIns="0" rtlCol="0" anchor="t"/>
-          <a:lstStyle/>
-          <a:p>
-            <a:pPr marL="342900" indent="-342900">
-              <a:spcAft>
-                <a:spcPts val="400"/>
-              </a:spcAft>
-              <a:buSzPct val="100000"/>
-              <a:buChar char="•"/>
-            </a:pPr>
-            <a:r>
               <a:rPr lang="en-US" sz="1350" b="1" dirty="0">
                 <a:solidFill>
                   <a:srgbClr val="1F2937"/>
@@ -3217,19 +3271,143 @@
                 <a:ea typeface="맑은 고딕" pitchFamily="34" charset="-122"/>
                 <a:cs typeface="맑은 고딕" pitchFamily="34" charset="-120"/>
               </a:rPr>
-              <a:t>정해진 양식(템플릿) 고정</a:t>
+              <a:t>티켓   </a:t>
+            </a:r>
+            <a:pPr indent="0" marL="0">
+              <a:buNone/>
+            </a:pPr>
+            <a:r>
+              <a:rPr lang="en-US" sz="1150" dirty="0">
+                <a:solidFill>
+                  <a:srgbClr val="6B7280"/>
+                </a:solidFill>
+                <a:latin typeface="맑은 고딕" pitchFamily="34" charset="0"/>
+                <a:ea typeface="맑은 고딕" pitchFamily="34" charset="-122"/>
+                <a:cs typeface="맑은 고딕" pitchFamily="34" charset="-120"/>
+              </a:rPr>
+              <a:t>기능별 개발 작업 (기능당)</a:t>
             </a:r>
             <a:endParaRPr lang="en-US" sz="1350" dirty="0"/>
           </a:p>
-          <a:p>
-            <a:pPr lvl="1" indent="0" marL="0">
-              <a:spcAft>
-                <a:spcPts val="1000"/>
-              </a:spcAft>
-              <a:buNone/>
-            </a:pPr>
-            <a:r>
-              <a:rPr lang="en-US" sz="1200" dirty="0">
+        </p:txBody>
+      </p:sp>
+      <p:sp>
+        <p:nvSpPr>
+          <p:cNvPr id="22" name="Text 20"/>
+          <p:cNvSpPr/>
+          <p:nvPr/>
+        </p:nvSpPr>
+        <p:spPr>
+          <a:xfrm>
+            <a:off x="10378440" y="4544568"/>
+            <a:ext cx="960120" cy="365760"/>
+          </a:xfrm>
+          <a:prstGeom prst="roundRect">
+            <a:avLst>
+              <a:gd name="adj" fmla="val 30000"/>
+            </a:avLst>
+          </a:prstGeom>
+          <a:solidFill>
+            <a:srgbClr val="EEF2FF"/>
+          </a:solidFill>
+          <a:ln/>
+        </p:spPr>
+        <p:txBody>
+          <a:bodyPr wrap="square" lIns="0" tIns="0" rIns="0" bIns="0" rtlCol="0" anchor="ctr"/>
+          <a:lstStyle/>
+          <a:p>
+            <a:pPr algn="ctr" indent="0" marL="0">
+              <a:buNone/>
+            </a:pPr>
+            <a:r>
+              <a:rPr lang="en-US" sz="1300" b="1" dirty="0">
+                <a:solidFill>
+                  <a:srgbClr val="4338CA"/>
+                </a:solidFill>
+                <a:latin typeface="맑은 고딕" pitchFamily="34" charset="0"/>
+                <a:ea typeface="맑은 고딕" pitchFamily="34" charset="-122"/>
+                <a:cs typeface="맑은 고딕" pitchFamily="34" charset="-120"/>
+              </a:rPr>
+              <a:t>×5</a:t>
+            </a:r>
+            <a:endParaRPr lang="en-US" sz="1300" dirty="0"/>
+          </a:p>
+        </p:txBody>
+      </p:sp>
+      <p:sp>
+        <p:nvSpPr>
+          <p:cNvPr id="23" name="Shape 21"/>
+          <p:cNvSpPr/>
+          <p:nvPr/>
+        </p:nvSpPr>
+        <p:spPr>
+          <a:xfrm>
+            <a:off x="4800600" y="5148072"/>
+            <a:ext cx="6812280" cy="658368"/>
+          </a:xfrm>
+          <a:prstGeom prst="roundRect">
+            <a:avLst>
+              <a:gd name="adj" fmla="val 8333"/>
+            </a:avLst>
+          </a:prstGeom>
+          <a:solidFill>
+            <a:srgbClr val="FFFFFF"/>
+          </a:solidFill>
+          <a:ln w="12700">
+            <a:solidFill>
+              <a:srgbClr val="E5E7EB"/>
+            </a:solidFill>
+            <a:prstDash val="solid"/>
+          </a:ln>
+          <a:effectLst>
+            <a:outerShdw sx="100000" sy="100000" kx="0" ky="0" algn="bl" rotWithShape="0" blurRad="127000" dist="50800" dir="5400000">
+              <a:srgbClr val="1E1B4B">
+                <a:alpha val="18000"/>
+              </a:srgbClr>
+            </a:outerShdw>
+          </a:effectLst>
+        </p:spPr>
+      </p:sp>
+      <p:sp>
+        <p:nvSpPr>
+          <p:cNvPr id="24" name="Text 22"/>
+          <p:cNvSpPr/>
+          <p:nvPr/>
+        </p:nvSpPr>
+        <p:spPr>
+          <a:xfrm>
+            <a:off x="5029200" y="5148072"/>
+            <a:ext cx="5212080" cy="658368"/>
+          </a:xfrm>
+          <a:prstGeom prst="rect">
+            <a:avLst/>
+          </a:prstGeom>
+          <a:noFill/>
+          <a:ln/>
+        </p:spPr>
+        <p:txBody>
+          <a:bodyPr wrap="square" lIns="0" tIns="0" rIns="0" bIns="0" rtlCol="0" anchor="ctr"/>
+          <a:lstStyle/>
+          <a:p>
+            <a:pPr indent="0" marL="0">
+              <a:buNone/>
+            </a:pPr>
+            <a:r>
+              <a:rPr lang="en-US" sz="1350" b="1" dirty="0">
+                <a:solidFill>
+                  <a:srgbClr val="1F2937"/>
+                </a:solidFill>
+                <a:latin typeface="맑은 고딕" pitchFamily="34" charset="0"/>
+                <a:ea typeface="맑은 고딕" pitchFamily="34" charset="-122"/>
+                <a:cs typeface="맑은 고딕" pitchFamily="34" charset="-120"/>
+              </a:rPr>
+              <a:t>Detail Design   </a:t>
+            </a:r>
+            <a:pPr indent="0" marL="0">
+              <a:buNone/>
+            </a:pPr>
+            <a:r>
+              <a:rPr lang="en-US" sz="1150" dirty="0">
                 <a:solidFill>
                   <a:srgbClr val="6B7280"/>
                 </a:solidFill>
@@ -3237,40 +3415,95 @@
                 <a:ea typeface="맑은 고딕" pitchFamily="34" charset="-122"/>
                 <a:cs typeface="맑은 고딕" pitchFamily="34" charset="-120"/>
               </a:rPr>
-              <a:t>각 산출물의 필드·구조를 템플릿으로 미리 정의</a:t>
+              <a:t>기능별 상세설계·시퀀스 (기능당)</a:t>
             </a:r>
             <a:endParaRPr lang="en-US" sz="1350" dirty="0"/>
           </a:p>
-          <a:p>
-            <a:pPr marL="342900" indent="-342900">
-              <a:spcAft>
-                <a:spcPts val="400"/>
-              </a:spcAft>
-              <a:buSzPct val="100000"/>
-              <a:buChar char="•"/>
-            </a:pPr>
-            <a:r>
-              <a:rPr lang="en-US" sz="1350" b="1" dirty="0">
-                <a:solidFill>
-                  <a:srgbClr val="1F2937"/>
-                </a:solidFill>
-                <a:latin typeface="맑은 고딕" pitchFamily="34" charset="0"/>
-                <a:ea typeface="맑은 고딕" pitchFamily="34" charset="-122"/>
-                <a:cs typeface="맑은 고딕" pitchFamily="34" charset="-120"/>
-              </a:rPr>
-              <a:t>산출물 유형별 프롬프트 사전 작성</a:t>
-            </a:r>
-            <a:endParaRPr lang="en-US" sz="1350" dirty="0"/>
-          </a:p>
-          <a:p>
-            <a:pPr lvl="1" indent="0" marL="0">
-              <a:spcAft>
-                <a:spcPts val="1000"/>
-              </a:spcAft>
-              <a:buNone/>
-            </a:pPr>
-            <a:r>
-              <a:rPr lang="en-US" sz="1200" dirty="0">
+        </p:txBody>
+      </p:sp>
+      <p:sp>
+        <p:nvSpPr>
+          <p:cNvPr id="25" name="Text 23"/>
+          <p:cNvSpPr/>
+          <p:nvPr/>
+        </p:nvSpPr>
+        <p:spPr>
+          <a:xfrm>
+            <a:off x="10378440" y="5294376"/>
+            <a:ext cx="960120" cy="365760"/>
+          </a:xfrm>
+          <a:prstGeom prst="roundRect">
+            <a:avLst>
+              <a:gd name="adj" fmla="val 30000"/>
+            </a:avLst>
+          </a:prstGeom>
+          <a:solidFill>
+            <a:srgbClr val="EEF2FF"/>
+          </a:solidFill>
+          <a:ln/>
+        </p:spPr>
+        <p:txBody>
+          <a:bodyPr wrap="square" lIns="0" tIns="0" rIns="0" bIns="0" rtlCol="0" anchor="ctr"/>
+          <a:lstStyle/>
+          <a:p>
+            <a:pPr algn="ctr" indent="0" marL="0">
+              <a:buNone/>
+            </a:pPr>
+            <a:r>
+              <a:rPr lang="en-US" sz="1300" b="1" dirty="0">
+                <a:solidFill>
+                  <a:srgbClr val="4338CA"/>
+                </a:solidFill>
+                <a:latin typeface="맑은 고딕" pitchFamily="34" charset="0"/>
+                <a:ea typeface="맑은 고딕" pitchFamily="34" charset="-122"/>
+                <a:cs typeface="맑은 고딕" pitchFamily="34" charset="-120"/>
+              </a:rPr>
+              <a:t>×5</a:t>
+            </a:r>
+            <a:endParaRPr lang="en-US" sz="1300" dirty="0"/>
+          </a:p>
+        </p:txBody>
+      </p:sp>
+      <p:sp>
+        <p:nvSpPr>
+          <p:cNvPr id="26" name="Text 24"/>
+          <p:cNvSpPr/>
+          <p:nvPr/>
+        </p:nvSpPr>
+        <p:spPr>
+          <a:xfrm>
+            <a:off x="566928" y="5989320"/>
+            <a:ext cx="11064240" cy="365760"/>
+          </a:xfrm>
+          <a:prstGeom prst="rect">
+            <a:avLst/>
+          </a:prstGeom>
+          <a:noFill/>
+          <a:ln/>
+        </p:spPr>
+        <p:txBody>
+          <a:bodyPr wrap="square" lIns="0" tIns="0" rIns="0" bIns="0" rtlCol="0" anchor="ctr"/>
+          <a:lstStyle/>
+          <a:p>
+            <a:pPr algn="ctr" indent="0" marL="0">
+              <a:buNone/>
+            </a:pPr>
+            <a:r>
+              <a:rPr lang="en-US" sz="1300" b="1" dirty="0">
+                <a:solidFill>
+                  <a:srgbClr val="6366F1"/>
+                </a:solidFill>
+                <a:latin typeface="맑은 고딕" pitchFamily="34" charset="0"/>
+                <a:ea typeface="맑은 고딕" pitchFamily="34" charset="-122"/>
+                <a:cs typeface="맑은 고딕" pitchFamily="34" charset="-120"/>
+              </a:rPr>
+              <a:t>요구사항 1개 → 약 19개 산출물</a:t>
+            </a:r>
+            <a:pPr algn="ctr" indent="0" marL="0">
+              <a:buNone/>
+            </a:pPr>
+            <a:r>
+              <a:rPr lang="en-US" sz="1300" dirty="0">
                 <a:solidFill>
                   <a:srgbClr val="6B7280"/>
                 </a:solidFill>
@@ -3278,86 +3511,9 @@
                 <a:ea typeface="맑은 고딕" pitchFamily="34" charset="-122"/>
                 <a:cs typeface="맑은 고딕" pitchFamily="34" charset="-120"/>
               </a:rPr>
-              <a:t>예) Detail Design → 시퀀스 다이어그램 자동 생성</a:t>
-            </a:r>
-            <a:endParaRPr lang="en-US" sz="1350" dirty="0"/>
-          </a:p>
-          <a:p>
-            <a:pPr marL="342900" indent="-342900">
-              <a:spcAft>
-                <a:spcPts val="400"/>
-              </a:spcAft>
-              <a:buSzPct val="100000"/>
-              <a:buChar char="•"/>
-            </a:pPr>
-            <a:r>
-              <a:rPr lang="en-US" sz="1350" b="1" dirty="0">
-                <a:solidFill>
-                  <a:srgbClr val="1F2937"/>
-                </a:solidFill>
-                <a:latin typeface="맑은 고딕" pitchFamily="34" charset="0"/>
-                <a:ea typeface="맑은 고딕" pitchFamily="34" charset="-122"/>
-                <a:cs typeface="맑은 고딕" pitchFamily="34" charset="-120"/>
-              </a:rPr>
-              <a:t>AI 결과는 항상 “초안”</a:t>
-            </a:r>
-            <a:endParaRPr lang="en-US" sz="1350" dirty="0"/>
-          </a:p>
-          <a:p>
-            <a:pPr lvl="1" indent="0" marL="0">
-              <a:buNone/>
-            </a:pPr>
-            <a:r>
-              <a:rPr lang="en-US" sz="1200" dirty="0">
-                <a:solidFill>
-                  <a:srgbClr val="6B7280"/>
-                </a:solidFill>
-                <a:latin typeface="맑은 고딕" pitchFamily="34" charset="0"/>
-                <a:ea typeface="맑은 고딕" pitchFamily="34" charset="-122"/>
-                <a:cs typeface="맑은 고딕" pitchFamily="34" charset="-120"/>
-              </a:rPr>
-              <a:t>담당자가 틀 위에서 편집·추가·삭제</a:t>
-            </a:r>
-            <a:endParaRPr lang="en-US" sz="1350" dirty="0"/>
-          </a:p>
-        </p:txBody>
-      </p:sp>
-      <p:sp>
-        <p:nvSpPr>
-          <p:cNvPr id="21" name="Text 19"/>
-          <p:cNvSpPr/>
-          <p:nvPr/>
-        </p:nvSpPr>
-        <p:spPr>
-          <a:xfrm>
-            <a:off x="566928" y="6035040"/>
-            <a:ext cx="10972800" cy="320040"/>
-          </a:xfrm>
-          <a:prstGeom prst="rect">
-            <a:avLst/>
-          </a:prstGeom>
-          <a:noFill/>
-          <a:ln/>
-        </p:spPr>
-        <p:txBody>
-          <a:bodyPr wrap="square" lIns="0" tIns="0" rIns="0" bIns="0" rtlCol="0" anchor="ctr"/>
-          <a:lstStyle/>
-          <a:p>
-            <a:pPr indent="0" marL="0">
-              <a:buNone/>
-            </a:pPr>
-            <a:r>
-              <a:rPr lang="en-US" sz="1250" b="1" i="1" dirty="0">
-                <a:solidFill>
-                  <a:srgbClr val="6366F1"/>
-                </a:solidFill>
-                <a:latin typeface="맑은 고딕" pitchFamily="34" charset="0"/>
-                <a:ea typeface="맑은 고딕" pitchFamily="34" charset="-122"/>
-                <a:cs typeface="맑은 고딕" pitchFamily="34" charset="-120"/>
-              </a:rPr>
-              <a:t>→ 다음 장: req-tf-01 하나에서 실제로 도출한 예시</a:t>
-            </a:r>
-            <a:endParaRPr lang="en-US" sz="1250" dirty="0"/>
+              <a:t> 을 AI가 초안으로 자동 생성 → 담당자가 편집·확정</a:t>
+            </a:r>
+            <a:endParaRPr lang="en-US" sz="1300" dirty="0"/>
           </a:p>
         </p:txBody>
       </p:sp>

--- a/docs/진행공유_요구사항자동화.pptx
+++ b/docs/진행공유_요구사항자동화.pptx
@@ -20,10 +20,9 @@
     <p:sldId id="268" r:id="rId14"/>
     <p:sldId id="269" r:id="rId15"/>
     <p:sldId id="270" r:id="rId16"/>
-    <p:sldId id="271" r:id="rId17"/>
   </p:sldIdLst>
   <p:notesMasterIdLst>
-    <p:notesMasterId r:id="rId18"/>
+    <p:notesMasterId r:id="rId17"/>
   </p:notesMasterIdLst>
   <p:sldSz cx="12192000" cy="6858000"/>
   <p:notesSz cx="6858000" cy="12192000"/>
@@ -1069,94 +1068,6 @@
             <a:fld id="{F7021451-1387-4CA6-816F-3879F97B5CBC}" type="slidenum">
               <a:rPr lang="en-US"/>
               <a:t>15</a:t>
-            </a:fld>
-            <a:endParaRPr lang="en-US"/>
-          </a:p>
-        </p:txBody>
-      </p:sp>
-    </p:spTree>
-    <p:extLst>
-      <p:ext uri="{BB962C8B-B14F-4D97-AF65-F5344CB8AC3E}">
-        <p14:creationId xmlns:p14="http://schemas.microsoft.com/office/powerpoint/2010/main" val="1024086991"/>
-      </p:ext>
-    </p:extLst>
-  </p:cSld>
-  <p:clrMapOvr>
-    <a:masterClrMapping/>
-  </p:clrMapOvr>
-</p:notes>
-</file>
-
-<file path=ppt/notesSlides/notesSlide16.xml><?xml version="1.0" encoding="utf-8"?>
-<p:notes xmlns:a="http://schemas.openxmlformats.org/drawingml/2006/main" xmlns:r="http://schemas.openxmlformats.org/officeDocument/2006/relationships" xmlns:p="http://schemas.openxmlformats.org/presentationml/2006/main">
-  <p:cSld>
-    <p:spTree>
-      <p:nvGrpSpPr>
-        <p:cNvPr id="1" name=""/>
-        <p:cNvGrpSpPr/>
-        <p:nvPr/>
-      </p:nvGrpSpPr>
-      <p:grpSpPr>
-        <a:xfrm>
-          <a:off x="0" y="0"/>
-          <a:ext cx="0" cy="0"/>
-          <a:chOff x="0" y="0"/>
-          <a:chExt cx="0" cy="0"/>
-        </a:xfrm>
-      </p:grpSpPr>
-      <p:sp>
-        <p:nvSpPr>
-          <p:cNvPr id="2" name="Slide Image Placeholder 1"/>
-          <p:cNvSpPr>
-            <a:spLocks noGrp="1" noRot="1" noChangeAspect="1"/>
-          </p:cNvSpPr>
-          <p:nvPr>
-            <p:ph type="sldImg"/>
-          </p:nvPr>
-        </p:nvSpPr>
-        <p:spPr/>
-      </p:sp>
-      <p:sp>
-        <p:nvSpPr>
-          <p:cNvPr id="3" name="Notes Placeholder 2"/>
-          <p:cNvSpPr>
-            <a:spLocks noGrp="1"/>
-          </p:cNvSpPr>
-          <p:nvPr>
-            <p:ph type="body" idx="1"/>
-          </p:nvPr>
-        </p:nvSpPr>
-        <p:spPr/>
-        <p:txBody>
-          <a:bodyPr/>
-          <a:lstStyle/>
-          <a:p>
-            <a:r>
-              <a:rPr lang="en-US" dirty="0"/>
-              <a:t/>
-            </a:r>
-            <a:endParaRPr lang="en-US" dirty="0"/>
-          </a:p>
-        </p:txBody>
-      </p:sp>
-      <p:sp>
-        <p:nvSpPr>
-          <p:cNvPr id="4" name="Slide Number Placeholder 3"/>
-          <p:cNvSpPr>
-            <a:spLocks noGrp="1"/>
-          </p:cNvSpPr>
-          <p:nvPr>
-            <p:ph type="sldNum" sz="quarter" idx="10"/>
-          </p:nvPr>
-        </p:nvSpPr>
-        <p:spPr/>
-        <p:txBody>
-          <a:bodyPr/>
-          <a:lstStyle/>
-          <a:p>
-            <a:fld id="{F7021451-1387-4CA6-816F-3879F97B5CBC}" type="slidenum">
-              <a:rPr lang="en-US"/>
-              <a:t>16</a:t>
             </a:fld>
             <a:endParaRPr lang="en-US"/>
           </a:p>
@@ -2535,7 +2446,7 @@
                 <a:ea typeface="맑은 고딕" pitchFamily="34" charset="-122"/>
                 <a:cs typeface="맑은 고딕" pitchFamily="34" charset="-120"/>
               </a:rPr>
-              <a:t>문서·티켓 자동 생성</a:t>
+              <a:t>산출물 도출</a:t>
             </a:r>
             <a:endParaRPr lang="en-US" sz="3000" dirty="0"/>
           </a:p>
@@ -2593,7 +2504,7 @@
         <p:spPr>
           <a:xfrm>
             <a:off x="566928" y="1755648"/>
-            <a:ext cx="10972800" cy="365760"/>
+            <a:ext cx="11064240" cy="365760"/>
           </a:xfrm>
           <a:prstGeom prst="rect">
             <a:avLst/>
@@ -2611,912 +2522,56 @@
             <a:r>
               <a:rPr lang="en-US" sz="1500" b="1" dirty="0">
                 <a:solidFill>
+                  <a:srgbClr val="6366F1"/>
+                </a:solidFill>
+                <a:latin typeface="맑은 고딕" pitchFamily="34" charset="0"/>
+                <a:ea typeface="맑은 고딕" pitchFamily="34" charset="-122"/>
+                <a:cs typeface="맑은 고딕" pitchFamily="34" charset="-120"/>
+              </a:rPr>
+              <a:t>도출 </a:t>
+            </a:r>
+            <a:pPr indent="0" marL="0">
+              <a:buNone/>
+            </a:pPr>
+            <a:r>
+              <a:rPr lang="en-US" sz="1500" dirty="0">
+                <a:solidFill>
                   <a:srgbClr val="1F2937"/>
                 </a:solidFill>
                 <a:latin typeface="맑은 고딕" pitchFamily="34" charset="0"/>
                 <a:ea typeface="맑은 고딕" pitchFamily="34" charset="-122"/>
                 <a:cs typeface="맑은 고딕" pitchFamily="34" charset="-120"/>
               </a:rPr>
-              <a:t>확정된 요구사항 하나에서, 개발에 필요한 산출물들을 자동으로 도출한다.</a:t>
+              <a:t>— 확정된 요구사항에서 필요한 산출물(고객요구사항·기능/비기능 요구사항·티켓·상세설계)을 자동으로 도출한다.</a:t>
             </a:r>
             <a:endParaRPr lang="en-US" sz="1500" dirty="0"/>
           </a:p>
         </p:txBody>
       </p:sp>
-      <p:sp>
-        <p:nvSpPr>
-          <p:cNvPr id="6" name="Shape 4"/>
-          <p:cNvSpPr/>
-          <p:nvPr/>
-        </p:nvSpPr>
-        <p:spPr>
-          <a:xfrm>
-            <a:off x="566928" y="2651760"/>
-            <a:ext cx="2743200" cy="1691640"/>
-          </a:xfrm>
-          <a:prstGeom prst="roundRect">
-            <a:avLst>
-              <a:gd name="adj" fmla="val 5405"/>
-            </a:avLst>
-          </a:prstGeom>
-          <a:solidFill>
-            <a:srgbClr val="EEF2FF"/>
-          </a:solidFill>
-          <a:ln w="19050">
-            <a:solidFill>
-              <a:srgbClr val="C7D2FE"/>
-            </a:solidFill>
-            <a:prstDash val="solid"/>
-          </a:ln>
-        </p:spPr>
-      </p:sp>
-      <p:sp>
-        <p:nvSpPr>
-          <p:cNvPr id="7" name="Text 5"/>
-          <p:cNvSpPr/>
-          <p:nvPr/>
-        </p:nvSpPr>
-        <p:spPr>
-          <a:xfrm>
-            <a:off x="749808" y="2852928"/>
-            <a:ext cx="2377440" cy="365760"/>
-          </a:xfrm>
-          <a:prstGeom prst="rect">
-            <a:avLst/>
-          </a:prstGeom>
-          <a:noFill/>
-          <a:ln/>
-        </p:spPr>
-        <p:txBody>
-          <a:bodyPr wrap="square" lIns="0" tIns="0" rIns="0" bIns="0" rtlCol="0" anchor="ctr"/>
-          <a:lstStyle/>
-          <a:p>
-            <a:pPr indent="0" marL="0">
-              <a:buNone/>
-            </a:pPr>
-            <a:r>
-              <a:rPr lang="en-US" sz="1600" b="1" dirty="0">
-                <a:solidFill>
-                  <a:srgbClr val="1F2937"/>
-                </a:solidFill>
-                <a:latin typeface="맑은 고딕" pitchFamily="34" charset="0"/>
-                <a:ea typeface="맑은 고딕" pitchFamily="34" charset="-122"/>
-                <a:cs typeface="맑은 고딕" pitchFamily="34" charset="-120"/>
-              </a:rPr>
-              <a:t>요구사항 1개</a:t>
-            </a:r>
-            <a:endParaRPr lang="en-US" sz="1600" dirty="0"/>
-          </a:p>
-        </p:txBody>
-      </p:sp>
-      <p:sp>
-        <p:nvSpPr>
-          <p:cNvPr id="8" name="Text 6"/>
-          <p:cNvSpPr/>
-          <p:nvPr/>
-        </p:nvSpPr>
-        <p:spPr>
-          <a:xfrm>
-            <a:off x="749808" y="3310128"/>
-            <a:ext cx="1554480" cy="310896"/>
-          </a:xfrm>
-          <a:prstGeom prst="roundRect">
-            <a:avLst>
-              <a:gd name="adj" fmla="val 14706"/>
-            </a:avLst>
-          </a:prstGeom>
-          <a:solidFill>
-            <a:srgbClr val="FFFFFF"/>
-          </a:solidFill>
-          <a:ln w="12700">
-            <a:solidFill>
-              <a:srgbClr val="C7D2FE"/>
-            </a:solidFill>
-          </a:ln>
-        </p:spPr>
-        <p:txBody>
-          <a:bodyPr wrap="square" lIns="0" tIns="0" rIns="0" bIns="0" rtlCol="0" anchor="ctr"/>
-          <a:lstStyle/>
-          <a:p>
-            <a:pPr algn="ctr" indent="0" marL="0">
-              <a:buNone/>
-            </a:pPr>
-            <a:r>
-              <a:rPr lang="en-US" sz="1200" b="1" dirty="0">
-                <a:solidFill>
-                  <a:srgbClr val="4338CA"/>
-                </a:solidFill>
-                <a:latin typeface="Consolas" pitchFamily="34" charset="0"/>
-                <a:ea typeface="Consolas" pitchFamily="34" charset="-122"/>
-                <a:cs typeface="Consolas" pitchFamily="34" charset="-120"/>
-              </a:rPr>
-              <a:t>req-ta-01</a:t>
-            </a:r>
-            <a:endParaRPr lang="en-US" sz="1200" dirty="0"/>
-          </a:p>
-        </p:txBody>
-      </p:sp>
-      <p:sp>
-        <p:nvSpPr>
-          <p:cNvPr id="9" name="Text 7"/>
-          <p:cNvSpPr/>
-          <p:nvPr/>
-        </p:nvSpPr>
-        <p:spPr>
-          <a:xfrm>
-            <a:off x="749808" y="3767328"/>
-            <a:ext cx="2377440" cy="320040"/>
-          </a:xfrm>
-          <a:prstGeom prst="rect">
-            <a:avLst/>
-          </a:prstGeom>
-          <a:noFill/>
-          <a:ln/>
-        </p:spPr>
-        <p:txBody>
-          <a:bodyPr wrap="square" lIns="0" tIns="0" rIns="0" bIns="0" rtlCol="0" anchor="ctr"/>
-          <a:lstStyle/>
-          <a:p>
-            <a:pPr indent="0" marL="0">
-              <a:buNone/>
-            </a:pPr>
-            <a:r>
-              <a:rPr lang="en-US" sz="1250" dirty="0">
-                <a:solidFill>
-                  <a:srgbClr val="6B7280"/>
-                </a:solidFill>
-                <a:latin typeface="맑은 고딕" pitchFamily="34" charset="0"/>
-                <a:ea typeface="맑은 고딕" pitchFamily="34" charset="-122"/>
-                <a:cs typeface="맑은 고딕" pitchFamily="34" charset="-120"/>
-              </a:rPr>
-              <a:t>태스크 할당 기준</a:t>
-            </a:r>
-            <a:endParaRPr lang="en-US" sz="1250" dirty="0"/>
-          </a:p>
-        </p:txBody>
-      </p:sp>
-      <p:sp>
-        <p:nvSpPr>
-          <p:cNvPr id="10" name="Text 8"/>
-          <p:cNvSpPr/>
-          <p:nvPr/>
-        </p:nvSpPr>
-        <p:spPr>
-          <a:xfrm>
-            <a:off x="3429000" y="3246120"/>
-            <a:ext cx="1280160" cy="457200"/>
-          </a:xfrm>
-          <a:prstGeom prst="rect">
-            <a:avLst/>
-          </a:prstGeom>
-          <a:noFill/>
-          <a:ln/>
-        </p:spPr>
-        <p:txBody>
-          <a:bodyPr wrap="square" lIns="0" tIns="0" rIns="0" bIns="0" rtlCol="0" anchor="ctr"/>
-          <a:lstStyle/>
-          <a:p>
-            <a:pPr algn="ctr" indent="0" marL="0">
-              <a:buNone/>
-            </a:pPr>
-            <a:r>
-              <a:rPr lang="en-US" sz="1300" b="1" dirty="0">
-                <a:solidFill>
-                  <a:srgbClr val="6366F1"/>
-                </a:solidFill>
-                <a:latin typeface="맑은 고딕" pitchFamily="34" charset="0"/>
-                <a:ea typeface="맑은 고딕" pitchFamily="34" charset="-122"/>
-                <a:cs typeface="맑은 고딕" pitchFamily="34" charset="-120"/>
-              </a:rPr>
-              <a:t>자동 도출 ▶</a:t>
-            </a:r>
-            <a:endParaRPr lang="en-US" sz="1300" dirty="0"/>
-          </a:p>
-        </p:txBody>
-      </p:sp>
-      <p:sp>
-        <p:nvSpPr>
-          <p:cNvPr id="11" name="Shape 9"/>
-          <p:cNvSpPr/>
-          <p:nvPr/>
-        </p:nvSpPr>
-        <p:spPr>
-          <a:xfrm>
-            <a:off x="4800600" y="2148840"/>
-            <a:ext cx="6812280" cy="658368"/>
-          </a:xfrm>
-          <a:prstGeom prst="roundRect">
-            <a:avLst>
-              <a:gd name="adj" fmla="val 8333"/>
-            </a:avLst>
-          </a:prstGeom>
-          <a:solidFill>
-            <a:srgbClr val="FFFFFF"/>
-          </a:solidFill>
-          <a:ln w="12700">
-            <a:solidFill>
-              <a:srgbClr val="E5E7EB"/>
-            </a:solidFill>
-            <a:prstDash val="solid"/>
-          </a:ln>
-          <a:effectLst>
-            <a:outerShdw sx="100000" sy="100000" kx="0" ky="0" algn="bl" rotWithShape="0" blurRad="127000" dist="50800" dir="5400000">
-              <a:srgbClr val="1E1B4B">
-                <a:alpha val="18000"/>
-              </a:srgbClr>
-            </a:outerShdw>
-          </a:effectLst>
-        </p:spPr>
-      </p:sp>
-      <p:sp>
-        <p:nvSpPr>
-          <p:cNvPr id="12" name="Text 10"/>
-          <p:cNvSpPr/>
-          <p:nvPr/>
-        </p:nvSpPr>
-        <p:spPr>
-          <a:xfrm>
-            <a:off x="5029200" y="2148840"/>
-            <a:ext cx="5212080" cy="658368"/>
-          </a:xfrm>
-          <a:prstGeom prst="rect">
-            <a:avLst/>
-          </a:prstGeom>
-          <a:noFill/>
-          <a:ln/>
-        </p:spPr>
-        <p:txBody>
-          <a:bodyPr wrap="square" lIns="0" tIns="0" rIns="0" bIns="0" rtlCol="0" anchor="ctr"/>
-          <a:lstStyle/>
-          <a:p>
-            <a:pPr indent="0" marL="0">
-              <a:buNone/>
-            </a:pPr>
-            <a:r>
-              <a:rPr lang="en-US" sz="1350" b="1" dirty="0">
-                <a:solidFill>
-                  <a:srgbClr val="1F2937"/>
-                </a:solidFill>
-                <a:latin typeface="맑은 고딕" pitchFamily="34" charset="0"/>
-                <a:ea typeface="맑은 고딕" pitchFamily="34" charset="-122"/>
-                <a:cs typeface="맑은 고딕" pitchFamily="34" charset="-120"/>
-              </a:rPr>
-              <a:t>SWVOC   </a:t>
-            </a:r>
-            <a:pPr indent="0" marL="0">
-              <a:buNone/>
-            </a:pPr>
-            <a:r>
-              <a:rPr lang="en-US" sz="1150" dirty="0">
-                <a:solidFill>
-                  <a:srgbClr val="6B7280"/>
-                </a:solidFill>
-                <a:latin typeface="맑은 고딕" pitchFamily="34" charset="0"/>
-                <a:ea typeface="맑은 고딕" pitchFamily="34" charset="-122"/>
-                <a:cs typeface="맑은 고딕" pitchFamily="34" charset="-120"/>
-              </a:rPr>
-              <a:t>고객요구사항 원문·정리 (요구사항당)</a:t>
-            </a:r>
-            <a:endParaRPr lang="en-US" sz="1350" dirty="0"/>
-          </a:p>
-        </p:txBody>
-      </p:sp>
-      <p:sp>
-        <p:nvSpPr>
-          <p:cNvPr id="13" name="Text 11"/>
-          <p:cNvSpPr/>
-          <p:nvPr/>
-        </p:nvSpPr>
-        <p:spPr>
-          <a:xfrm>
-            <a:off x="10378440" y="2295144"/>
-            <a:ext cx="960120" cy="365760"/>
-          </a:xfrm>
-          <a:prstGeom prst="roundRect">
-            <a:avLst>
-              <a:gd name="adj" fmla="val 30000"/>
-            </a:avLst>
-          </a:prstGeom>
-          <a:solidFill>
-            <a:srgbClr val="EEF2FF"/>
-          </a:solidFill>
-          <a:ln/>
-        </p:spPr>
-        <p:txBody>
-          <a:bodyPr wrap="square" lIns="0" tIns="0" rIns="0" bIns="0" rtlCol="0" anchor="ctr"/>
-          <a:lstStyle/>
-          <a:p>
-            <a:pPr algn="ctr" indent="0" marL="0">
-              <a:buNone/>
-            </a:pPr>
-            <a:r>
-              <a:rPr lang="en-US" sz="1300" b="1" dirty="0">
-                <a:solidFill>
-                  <a:srgbClr val="4338CA"/>
-                </a:solidFill>
-                <a:latin typeface="맑은 고딕" pitchFamily="34" charset="0"/>
-                <a:ea typeface="맑은 고딕" pitchFamily="34" charset="-122"/>
-                <a:cs typeface="맑은 고딕" pitchFamily="34" charset="-120"/>
-              </a:rPr>
-              <a:t>×1</a:t>
-            </a:r>
-            <a:endParaRPr lang="en-US" sz="1300" dirty="0"/>
-          </a:p>
-        </p:txBody>
-      </p:sp>
-      <p:sp>
-        <p:nvSpPr>
-          <p:cNvPr id="14" name="Shape 12"/>
-          <p:cNvSpPr/>
-          <p:nvPr/>
-        </p:nvSpPr>
-        <p:spPr>
-          <a:xfrm>
-            <a:off x="4800600" y="2898648"/>
-            <a:ext cx="6812280" cy="658368"/>
-          </a:xfrm>
-          <a:prstGeom prst="roundRect">
-            <a:avLst>
-              <a:gd name="adj" fmla="val 8333"/>
-            </a:avLst>
-          </a:prstGeom>
-          <a:solidFill>
-            <a:srgbClr val="FFFFFF"/>
-          </a:solidFill>
-          <a:ln w="12700">
-            <a:solidFill>
-              <a:srgbClr val="E5E7EB"/>
-            </a:solidFill>
-            <a:prstDash val="solid"/>
-          </a:ln>
-          <a:effectLst>
-            <a:outerShdw sx="100000" sy="100000" kx="0" ky="0" algn="bl" rotWithShape="0" blurRad="127000" dist="50800" dir="5400000">
-              <a:srgbClr val="1E1B4B">
-                <a:alpha val="18000"/>
-              </a:srgbClr>
-            </a:outerShdw>
-          </a:effectLst>
-        </p:spPr>
-      </p:sp>
-      <p:sp>
-        <p:nvSpPr>
-          <p:cNvPr id="15" name="Text 13"/>
-          <p:cNvSpPr/>
-          <p:nvPr/>
-        </p:nvSpPr>
-        <p:spPr>
-          <a:xfrm>
-            <a:off x="5029200" y="2898648"/>
-            <a:ext cx="5212080" cy="658368"/>
-          </a:xfrm>
-          <a:prstGeom prst="rect">
-            <a:avLst/>
-          </a:prstGeom>
-          <a:noFill/>
-          <a:ln/>
-        </p:spPr>
-        <p:txBody>
-          <a:bodyPr wrap="square" lIns="0" tIns="0" rIns="0" bIns="0" rtlCol="0" anchor="ctr"/>
-          <a:lstStyle/>
-          <a:p>
-            <a:pPr indent="0" marL="0">
-              <a:buNone/>
-            </a:pPr>
-            <a:r>
-              <a:rPr lang="en-US" sz="1350" b="1" dirty="0">
-                <a:solidFill>
-                  <a:srgbClr val="1F2937"/>
-                </a:solidFill>
-                <a:latin typeface="맑은 고딕" pitchFamily="34" charset="0"/>
-                <a:ea typeface="맑은 고딕" pitchFamily="34" charset="-122"/>
-                <a:cs typeface="맑은 고딕" pitchFamily="34" charset="-120"/>
-              </a:rPr>
-              <a:t>비기능요구사항 (NFR)   </a:t>
-            </a:r>
-            <a:pPr indent="0" marL="0">
-              <a:buNone/>
-            </a:pPr>
-            <a:r>
-              <a:rPr lang="en-US" sz="1150" dirty="0">
-                <a:solidFill>
-                  <a:srgbClr val="6B7280"/>
-                </a:solidFill>
-                <a:latin typeface="맑은 고딕" pitchFamily="34" charset="0"/>
-                <a:ea typeface="맑은 고딕" pitchFamily="34" charset="-122"/>
-                <a:cs typeface="맑은 고딕" pitchFamily="34" charset="-120"/>
-              </a:rPr>
-              <a:t>성능·신뢰성·추적성 (요구사항당)</a:t>
-            </a:r>
-            <a:endParaRPr lang="en-US" sz="1350" dirty="0"/>
-          </a:p>
-        </p:txBody>
-      </p:sp>
-      <p:sp>
-        <p:nvSpPr>
-          <p:cNvPr id="16" name="Text 14"/>
-          <p:cNvSpPr/>
-          <p:nvPr/>
-        </p:nvSpPr>
-        <p:spPr>
-          <a:xfrm>
-            <a:off x="10378440" y="3044952"/>
-            <a:ext cx="960120" cy="365760"/>
-          </a:xfrm>
-          <a:prstGeom prst="roundRect">
-            <a:avLst>
-              <a:gd name="adj" fmla="val 30000"/>
-            </a:avLst>
-          </a:prstGeom>
-          <a:solidFill>
-            <a:srgbClr val="EEF2FF"/>
-          </a:solidFill>
-          <a:ln/>
-        </p:spPr>
-        <p:txBody>
-          <a:bodyPr wrap="square" lIns="0" tIns="0" rIns="0" bIns="0" rtlCol="0" anchor="ctr"/>
-          <a:lstStyle/>
-          <a:p>
-            <a:pPr algn="ctr" indent="0" marL="0">
-              <a:buNone/>
-            </a:pPr>
-            <a:r>
-              <a:rPr lang="en-US" sz="1300" b="1" dirty="0">
-                <a:solidFill>
-                  <a:srgbClr val="4338CA"/>
-                </a:solidFill>
-                <a:latin typeface="맑은 고딕" pitchFamily="34" charset="0"/>
-                <a:ea typeface="맑은 고딕" pitchFamily="34" charset="-122"/>
-                <a:cs typeface="맑은 고딕" pitchFamily="34" charset="-120"/>
-              </a:rPr>
-              <a:t>×3</a:t>
-            </a:r>
-            <a:endParaRPr lang="en-US" sz="1300" dirty="0"/>
-          </a:p>
-        </p:txBody>
-      </p:sp>
-      <p:sp>
-        <p:nvSpPr>
-          <p:cNvPr id="17" name="Shape 15"/>
-          <p:cNvSpPr/>
-          <p:nvPr/>
-        </p:nvSpPr>
-        <p:spPr>
-          <a:xfrm>
-            <a:off x="4800600" y="3648456"/>
-            <a:ext cx="6812280" cy="658368"/>
-          </a:xfrm>
-          <a:prstGeom prst="roundRect">
-            <a:avLst>
-              <a:gd name="adj" fmla="val 8333"/>
-            </a:avLst>
-          </a:prstGeom>
-          <a:solidFill>
-            <a:srgbClr val="FFFFFF"/>
-          </a:solidFill>
-          <a:ln w="12700">
-            <a:solidFill>
-              <a:srgbClr val="E5E7EB"/>
-            </a:solidFill>
-            <a:prstDash val="solid"/>
-          </a:ln>
-          <a:effectLst>
-            <a:outerShdw sx="100000" sy="100000" kx="0" ky="0" algn="bl" rotWithShape="0" blurRad="127000" dist="50800" dir="5400000">
-              <a:srgbClr val="1E1B4B">
-                <a:alpha val="18000"/>
-              </a:srgbClr>
-            </a:outerShdw>
-          </a:effectLst>
-        </p:spPr>
-      </p:sp>
-      <p:sp>
-        <p:nvSpPr>
-          <p:cNvPr id="18" name="Text 16"/>
-          <p:cNvSpPr/>
-          <p:nvPr/>
-        </p:nvSpPr>
-        <p:spPr>
-          <a:xfrm>
-            <a:off x="5029200" y="3648456"/>
-            <a:ext cx="5212080" cy="658368"/>
-          </a:xfrm>
-          <a:prstGeom prst="rect">
-            <a:avLst/>
-          </a:prstGeom>
-          <a:noFill/>
-          <a:ln/>
-        </p:spPr>
-        <p:txBody>
-          <a:bodyPr wrap="square" lIns="0" tIns="0" rIns="0" bIns="0" rtlCol="0" anchor="ctr"/>
-          <a:lstStyle/>
-          <a:p>
-            <a:pPr indent="0" marL="0">
-              <a:buNone/>
-            </a:pPr>
-            <a:r>
-              <a:rPr lang="en-US" sz="1350" b="1" dirty="0">
-                <a:solidFill>
-                  <a:srgbClr val="1F2937"/>
-                </a:solidFill>
-                <a:latin typeface="맑은 고딕" pitchFamily="34" charset="0"/>
-                <a:ea typeface="맑은 고딕" pitchFamily="34" charset="-122"/>
-                <a:cs typeface="맑은 고딕" pitchFamily="34" charset="-120"/>
-              </a:rPr>
-              <a:t>기능요구사항 (Function Req.)   </a:t>
-            </a:r>
-            <a:pPr indent="0" marL="0">
-              <a:buNone/>
-            </a:pPr>
-            <a:r>
-              <a:rPr lang="en-US" sz="1150" dirty="0">
-                <a:solidFill>
-                  <a:srgbClr val="6B7280"/>
-                </a:solidFill>
-                <a:latin typeface="맑은 고딕" pitchFamily="34" charset="0"/>
-                <a:ea typeface="맑은 고딕" pitchFamily="34" charset="-122"/>
-                <a:cs typeface="맑은 고딕" pitchFamily="34" charset="-120"/>
-              </a:rPr>
-              <a:t>기능별 명세 (기능당)</a:t>
-            </a:r>
-            <a:endParaRPr lang="en-US" sz="1350" dirty="0"/>
-          </a:p>
-        </p:txBody>
-      </p:sp>
-      <p:sp>
-        <p:nvSpPr>
-          <p:cNvPr id="19" name="Text 17"/>
-          <p:cNvSpPr/>
-          <p:nvPr/>
-        </p:nvSpPr>
-        <p:spPr>
-          <a:xfrm>
-            <a:off x="10378440" y="3794760"/>
-            <a:ext cx="960120" cy="365760"/>
-          </a:xfrm>
-          <a:prstGeom prst="roundRect">
-            <a:avLst>
-              <a:gd name="adj" fmla="val 30000"/>
-            </a:avLst>
-          </a:prstGeom>
-          <a:solidFill>
-            <a:srgbClr val="EEF2FF"/>
-          </a:solidFill>
-          <a:ln/>
-        </p:spPr>
-        <p:txBody>
-          <a:bodyPr wrap="square" lIns="0" tIns="0" rIns="0" bIns="0" rtlCol="0" anchor="ctr"/>
-          <a:lstStyle/>
-          <a:p>
-            <a:pPr algn="ctr" indent="0" marL="0">
-              <a:buNone/>
-            </a:pPr>
-            <a:r>
-              <a:rPr lang="en-US" sz="1300" b="1" dirty="0">
-                <a:solidFill>
-                  <a:srgbClr val="4338CA"/>
-                </a:solidFill>
-                <a:latin typeface="맑은 고딕" pitchFamily="34" charset="0"/>
-                <a:ea typeface="맑은 고딕" pitchFamily="34" charset="-122"/>
-                <a:cs typeface="맑은 고딕" pitchFamily="34" charset="-120"/>
-              </a:rPr>
-              <a:t>×5</a:t>
-            </a:r>
-            <a:endParaRPr lang="en-US" sz="1300" dirty="0"/>
-          </a:p>
-        </p:txBody>
-      </p:sp>
-      <p:sp>
-        <p:nvSpPr>
-          <p:cNvPr id="20" name="Shape 18"/>
-          <p:cNvSpPr/>
-          <p:nvPr/>
-        </p:nvSpPr>
-        <p:spPr>
-          <a:xfrm>
-            <a:off x="4800600" y="4398264"/>
-            <a:ext cx="6812280" cy="658368"/>
-          </a:xfrm>
-          <a:prstGeom prst="roundRect">
-            <a:avLst>
-              <a:gd name="adj" fmla="val 8333"/>
-            </a:avLst>
-          </a:prstGeom>
-          <a:solidFill>
-            <a:srgbClr val="FFFFFF"/>
-          </a:solidFill>
-          <a:ln w="12700">
-            <a:solidFill>
-              <a:srgbClr val="E5E7EB"/>
-            </a:solidFill>
-            <a:prstDash val="solid"/>
-          </a:ln>
-          <a:effectLst>
-            <a:outerShdw sx="100000" sy="100000" kx="0" ky="0" algn="bl" rotWithShape="0" blurRad="127000" dist="50800" dir="5400000">
-              <a:srgbClr val="1E1B4B">
-                <a:alpha val="18000"/>
-              </a:srgbClr>
-            </a:outerShdw>
-          </a:effectLst>
-        </p:spPr>
-      </p:sp>
-      <p:sp>
-        <p:nvSpPr>
-          <p:cNvPr id="21" name="Text 19"/>
-          <p:cNvSpPr/>
-          <p:nvPr/>
-        </p:nvSpPr>
-        <p:spPr>
-          <a:xfrm>
-            <a:off x="5029200" y="4398264"/>
-            <a:ext cx="5212080" cy="658368"/>
-          </a:xfrm>
-          <a:prstGeom prst="rect">
-            <a:avLst/>
-          </a:prstGeom>
-          <a:noFill/>
-          <a:ln/>
-        </p:spPr>
-        <p:txBody>
-          <a:bodyPr wrap="square" lIns="0" tIns="0" rIns="0" bIns="0" rtlCol="0" anchor="ctr"/>
-          <a:lstStyle/>
-          <a:p>
-            <a:pPr indent="0" marL="0">
-              <a:buNone/>
-            </a:pPr>
-            <a:r>
-              <a:rPr lang="en-US" sz="1350" b="1" dirty="0">
-                <a:solidFill>
-                  <a:srgbClr val="1F2937"/>
-                </a:solidFill>
-                <a:latin typeface="맑은 고딕" pitchFamily="34" charset="0"/>
-                <a:ea typeface="맑은 고딕" pitchFamily="34" charset="-122"/>
-                <a:cs typeface="맑은 고딕" pitchFamily="34" charset="-120"/>
-              </a:rPr>
-              <a:t>티켓   </a:t>
-            </a:r>
-            <a:pPr indent="0" marL="0">
-              <a:buNone/>
-            </a:pPr>
-            <a:r>
-              <a:rPr lang="en-US" sz="1150" dirty="0">
-                <a:solidFill>
-                  <a:srgbClr val="6B7280"/>
-                </a:solidFill>
-                <a:latin typeface="맑은 고딕" pitchFamily="34" charset="0"/>
-                <a:ea typeface="맑은 고딕" pitchFamily="34" charset="-122"/>
-                <a:cs typeface="맑은 고딕" pitchFamily="34" charset="-120"/>
-              </a:rPr>
-              <a:t>기능별 개발 작업 (기능당)</a:t>
-            </a:r>
-            <a:endParaRPr lang="en-US" sz="1350" dirty="0"/>
-          </a:p>
-        </p:txBody>
-      </p:sp>
-      <p:sp>
-        <p:nvSpPr>
-          <p:cNvPr id="22" name="Text 20"/>
-          <p:cNvSpPr/>
-          <p:nvPr/>
-        </p:nvSpPr>
-        <p:spPr>
-          <a:xfrm>
-            <a:off x="10378440" y="4544568"/>
-            <a:ext cx="960120" cy="365760"/>
-          </a:xfrm>
-          <a:prstGeom prst="roundRect">
-            <a:avLst>
-              <a:gd name="adj" fmla="val 30000"/>
-            </a:avLst>
-          </a:prstGeom>
-          <a:solidFill>
-            <a:srgbClr val="EEF2FF"/>
-          </a:solidFill>
-          <a:ln/>
-        </p:spPr>
-        <p:txBody>
-          <a:bodyPr wrap="square" lIns="0" tIns="0" rIns="0" bIns="0" rtlCol="0" anchor="ctr"/>
-          <a:lstStyle/>
-          <a:p>
-            <a:pPr algn="ctr" indent="0" marL="0">
-              <a:buNone/>
-            </a:pPr>
-            <a:r>
-              <a:rPr lang="en-US" sz="1300" b="1" dirty="0">
-                <a:solidFill>
-                  <a:srgbClr val="4338CA"/>
-                </a:solidFill>
-                <a:latin typeface="맑은 고딕" pitchFamily="34" charset="0"/>
-                <a:ea typeface="맑은 고딕" pitchFamily="34" charset="-122"/>
-                <a:cs typeface="맑은 고딕" pitchFamily="34" charset="-120"/>
-              </a:rPr>
-              <a:t>×5</a:t>
-            </a:r>
-            <a:endParaRPr lang="en-US" sz="1300" dirty="0"/>
-          </a:p>
-        </p:txBody>
-      </p:sp>
-      <p:sp>
-        <p:nvSpPr>
-          <p:cNvPr id="23" name="Shape 21"/>
-          <p:cNvSpPr/>
-          <p:nvPr/>
-        </p:nvSpPr>
-        <p:spPr>
-          <a:xfrm>
-            <a:off x="4800600" y="5148072"/>
-            <a:ext cx="6812280" cy="658368"/>
-          </a:xfrm>
-          <a:prstGeom prst="roundRect">
-            <a:avLst>
-              <a:gd name="adj" fmla="val 8333"/>
-            </a:avLst>
-          </a:prstGeom>
-          <a:solidFill>
-            <a:srgbClr val="FFFFFF"/>
-          </a:solidFill>
-          <a:ln w="12700">
-            <a:solidFill>
-              <a:srgbClr val="E5E7EB"/>
-            </a:solidFill>
-            <a:prstDash val="solid"/>
-          </a:ln>
-          <a:effectLst>
-            <a:outerShdw sx="100000" sy="100000" kx="0" ky="0" algn="bl" rotWithShape="0" blurRad="127000" dist="50800" dir="5400000">
-              <a:srgbClr val="1E1B4B">
-                <a:alpha val="18000"/>
-              </a:srgbClr>
-            </a:outerShdw>
-          </a:effectLst>
-        </p:spPr>
-      </p:sp>
-      <p:sp>
-        <p:nvSpPr>
-          <p:cNvPr id="24" name="Text 22"/>
-          <p:cNvSpPr/>
-          <p:nvPr/>
-        </p:nvSpPr>
-        <p:spPr>
-          <a:xfrm>
-            <a:off x="5029200" y="5148072"/>
-            <a:ext cx="5212080" cy="658368"/>
-          </a:xfrm>
-          <a:prstGeom prst="rect">
-            <a:avLst/>
-          </a:prstGeom>
-          <a:noFill/>
-          <a:ln/>
-        </p:spPr>
-        <p:txBody>
-          <a:bodyPr wrap="square" lIns="0" tIns="0" rIns="0" bIns="0" rtlCol="0" anchor="ctr"/>
-          <a:lstStyle/>
-          <a:p>
-            <a:pPr indent="0" marL="0">
-              <a:buNone/>
-            </a:pPr>
-            <a:r>
-              <a:rPr lang="en-US" sz="1350" b="1" dirty="0">
-                <a:solidFill>
-                  <a:srgbClr val="1F2937"/>
-                </a:solidFill>
-                <a:latin typeface="맑은 고딕" pitchFamily="34" charset="0"/>
-                <a:ea typeface="맑은 고딕" pitchFamily="34" charset="-122"/>
-                <a:cs typeface="맑은 고딕" pitchFamily="34" charset="-120"/>
-              </a:rPr>
-              <a:t>Detail Design   </a:t>
-            </a:r>
-            <a:pPr indent="0" marL="0">
-              <a:buNone/>
-            </a:pPr>
-            <a:r>
-              <a:rPr lang="en-US" sz="1150" dirty="0">
-                <a:solidFill>
-                  <a:srgbClr val="6B7280"/>
-                </a:solidFill>
-                <a:latin typeface="맑은 고딕" pitchFamily="34" charset="0"/>
-                <a:ea typeface="맑은 고딕" pitchFamily="34" charset="-122"/>
-                <a:cs typeface="맑은 고딕" pitchFamily="34" charset="-120"/>
-              </a:rPr>
-              <a:t>기능별 상세설계·시퀀스 (기능당)</a:t>
-            </a:r>
-            <a:endParaRPr lang="en-US" sz="1350" dirty="0"/>
-          </a:p>
-        </p:txBody>
-      </p:sp>
-      <p:sp>
-        <p:nvSpPr>
-          <p:cNvPr id="25" name="Text 23"/>
-          <p:cNvSpPr/>
-          <p:nvPr/>
-        </p:nvSpPr>
-        <p:spPr>
-          <a:xfrm>
-            <a:off x="10378440" y="5294376"/>
-            <a:ext cx="960120" cy="365760"/>
-          </a:xfrm>
-          <a:prstGeom prst="roundRect">
-            <a:avLst>
-              <a:gd name="adj" fmla="val 30000"/>
-            </a:avLst>
-          </a:prstGeom>
-          <a:solidFill>
-            <a:srgbClr val="EEF2FF"/>
-          </a:solidFill>
-          <a:ln/>
-        </p:spPr>
-        <p:txBody>
-          <a:bodyPr wrap="square" lIns="0" tIns="0" rIns="0" bIns="0" rtlCol="0" anchor="ctr"/>
-          <a:lstStyle/>
-          <a:p>
-            <a:pPr algn="ctr" indent="0" marL="0">
-              <a:buNone/>
-            </a:pPr>
-            <a:r>
-              <a:rPr lang="en-US" sz="1300" b="1" dirty="0">
-                <a:solidFill>
-                  <a:srgbClr val="4338CA"/>
-                </a:solidFill>
-                <a:latin typeface="맑은 고딕" pitchFamily="34" charset="0"/>
-                <a:ea typeface="맑은 고딕" pitchFamily="34" charset="-122"/>
-                <a:cs typeface="맑은 고딕" pitchFamily="34" charset="-120"/>
-              </a:rPr>
-              <a:t>×5</a:t>
-            </a:r>
-            <a:endParaRPr lang="en-US" sz="1300" dirty="0"/>
-          </a:p>
-        </p:txBody>
-      </p:sp>
-      <p:sp>
-        <p:nvSpPr>
-          <p:cNvPr id="26" name="Text 24"/>
-          <p:cNvSpPr/>
-          <p:nvPr/>
-        </p:nvSpPr>
-        <p:spPr>
-          <a:xfrm>
-            <a:off x="566928" y="5989320"/>
-            <a:ext cx="11064240" cy="365760"/>
-          </a:xfrm>
-          <a:prstGeom prst="rect">
-            <a:avLst/>
-          </a:prstGeom>
-          <a:noFill/>
-          <a:ln/>
-        </p:spPr>
-        <p:txBody>
-          <a:bodyPr wrap="square" lIns="0" tIns="0" rIns="0" bIns="0" rtlCol="0" anchor="ctr"/>
-          <a:lstStyle/>
-          <a:p>
-            <a:pPr algn="ctr" indent="0" marL="0">
-              <a:buNone/>
-            </a:pPr>
-            <a:r>
-              <a:rPr lang="en-US" sz="1300" b="1" dirty="0">
-                <a:solidFill>
-                  <a:srgbClr val="6366F1"/>
-                </a:solidFill>
-                <a:latin typeface="맑은 고딕" pitchFamily="34" charset="0"/>
-                <a:ea typeface="맑은 고딕" pitchFamily="34" charset="-122"/>
-                <a:cs typeface="맑은 고딕" pitchFamily="34" charset="-120"/>
-              </a:rPr>
-              <a:t>요구사항 1개 → 약 19개 산출물</a:t>
-            </a:r>
-            <a:pPr algn="ctr" indent="0" marL="0">
-              <a:buNone/>
-            </a:pPr>
-            <a:r>
-              <a:rPr lang="en-US" sz="1300" dirty="0">
-                <a:solidFill>
-                  <a:srgbClr val="6B7280"/>
-                </a:solidFill>
-                <a:latin typeface="맑은 고딕" pitchFamily="34" charset="0"/>
-                <a:ea typeface="맑은 고딕" pitchFamily="34" charset="-122"/>
-                <a:cs typeface="맑은 고딕" pitchFamily="34" charset="-120"/>
-              </a:rPr>
-              <a:t> 을 AI가 초안으로 자동 생성 → 담당자가 편집·확정</a:t>
-            </a:r>
-            <a:endParaRPr lang="en-US" sz="1300" dirty="0"/>
-          </a:p>
-        </p:txBody>
-      </p:sp>
+      <p:pic>
+        <p:nvPicPr>
+          <p:cNvPr id="6" name="Image 0" descr="/home/user/semes-superrookie/docs/img/ppt-derive-flow.png">    </p:cNvPr>
+          <p:cNvPicPr>
+            <a:picLocks noChangeAspect="1"/>
+          </p:cNvPicPr>
+          <p:nvPr/>
+        </p:nvPicPr>
+        <p:blipFill>
+          <a:blip r:embed="rId1"/>
+          <a:stretch>
+            <a:fillRect/>
+          </a:stretch>
+        </p:blipFill>
+        <p:spPr>
+          <a:xfrm>
+            <a:off x="699516" y="2331720"/>
+            <a:ext cx="10789920" cy="4089197"/>
+          </a:xfrm>
+          <a:prstGeom prst="rect">
+            <a:avLst/>
+          </a:prstGeom>
+        </p:spPr>
+      </p:pic>
     </p:spTree>
   </p:cSld>
   <p:clrMapOvr>
@@ -3582,7 +2637,7 @@
                 <a:ea typeface="맑은 고딕" pitchFamily="34" charset="-122"/>
                 <a:cs typeface="맑은 고딕" pitchFamily="34" charset="-120"/>
               </a:rPr>
-              <a:t>핵심 기능 2 · 도출 예시 ①</a:t>
+              <a:t>핵심 기능 2 · 산출물 도출</a:t>
             </a:r>
             <a:endParaRPr lang="en-US" sz="1200" dirty="0"/>
           </a:p>
@@ -3621,7 +2676,7 @@
                 <a:ea typeface="맑은 고딕" pitchFamily="34" charset="-122"/>
                 <a:cs typeface="맑은 고딕" pitchFamily="34" charset="-120"/>
               </a:rPr>
-              <a:t>확정 요구사항 → 도출 → 기능 · 비기능 요구사항</a:t>
+              <a:t>예시 — Jira 티켓 4종</a:t>
             </a:r>
             <a:endParaRPr lang="en-US" sz="3000" dirty="0"/>
           </a:p>
@@ -3629,7 +2684,7 @@
       </p:sp>
       <p:pic>
         <p:nvPicPr>
-          <p:cNvPr id="4" name="Image 0" descr="/home/user/semes-superrookie/docs/img/ppt-derive-flow.png">    </p:cNvPr>
+          <p:cNvPr id="4" name="Image 0" descr="/home/user/semes-superrookie/docs/img/ppt-derive-2.png">    </p:cNvPr>
           <p:cNvPicPr>
             <a:picLocks noChangeAspect="1"/>
           </p:cNvPicPr>
@@ -3643,8 +2698,8 @@
         </p:blipFill>
         <p:spPr>
           <a:xfrm>
-            <a:off x="699516" y="1645920"/>
-            <a:ext cx="10789920" cy="4089197"/>
+            <a:off x="836676" y="1691640"/>
+            <a:ext cx="10515600" cy="4453128"/>
           </a:xfrm>
           <a:prstGeom prst="rect">
             <a:avLst/>
@@ -3659,7 +2714,7 @@
         </p:nvSpPr>
         <p:spPr>
           <a:xfrm>
-            <a:off x="566928" y="5897880"/>
+            <a:off x="566928" y="6263640"/>
             <a:ext cx="11064240" cy="365760"/>
           </a:xfrm>
           <a:prstGeom prst="rect">
@@ -3676,7 +2731,7 @@
               <a:buNone/>
             </a:pPr>
             <a:r>
-              <a:rPr lang="en-US" sz="1250" dirty="0">
+              <a:rPr lang="en-US" sz="1200" dirty="0">
                 <a:solidFill>
                   <a:srgbClr val="6B7280"/>
                 </a:solidFill>
@@ -3684,9 +2739,9 @@
                 <a:ea typeface="맑은 고딕" pitchFamily="34" charset="-122"/>
                 <a:cs typeface="맑은 고딕" pitchFamily="34" charset="-120"/>
               </a:rPr>
-              <a:t>확정 요구사항에서 기능·비기능 요구사항과 상세를 LLM이 초안으로 제안 → 개발자가 직접 편집·확정</a:t>
-            </a:r>
-            <a:endParaRPr lang="en-US" sz="1250" dirty="0"/>
+              <a:t>확정 요구사항에서 기능마다 필요한 Jira 이슈 초안 생성 · Detail Design은 시퀀스 다이어그램까지 자동</a:t>
+            </a:r>
+            <a:endParaRPr lang="en-US" sz="1200" dirty="0"/>
           </a:p>
         </p:txBody>
       </p:sp>
@@ -3755,7 +2810,7 @@
                 <a:ea typeface="맑은 고딕" pitchFamily="34" charset="-122"/>
                 <a:cs typeface="맑은 고딕" pitchFamily="34" charset="-120"/>
               </a:rPr>
-              <a:t>핵심 기능 2 · 도출 예시 ②</a:t>
+              <a:t>핵심 기능 3</a:t>
             </a:r>
             <a:endParaRPr lang="en-US" sz="1200" dirty="0"/>
           </a:p>
@@ -3794,51 +2849,31 @@
                 <a:ea typeface="맑은 고딕" pitchFamily="34" charset="-122"/>
                 <a:cs typeface="맑은 고딕" pitchFamily="34" charset="-120"/>
               </a:rPr>
-              <a:t>요구사항 하나 → Jira 티켓 4종</a:t>
+              <a:t>산출물 관리 (추적성)</a:t>
             </a:r>
             <a:endParaRPr lang="en-US" sz="3000" dirty="0"/>
           </a:p>
         </p:txBody>
       </p:sp>
-      <p:pic>
-        <p:nvPicPr>
-          <p:cNvPr id="4" name="Image 0" descr="/home/user/semes-superrookie/docs/img/ppt-derive-2.png">    </p:cNvPr>
-          <p:cNvPicPr>
-            <a:picLocks noChangeAspect="1"/>
-          </p:cNvPicPr>
-          <p:nvPr/>
-        </p:nvPicPr>
-        <p:blipFill>
-          <a:blip r:embed="rId1"/>
-          <a:stretch>
-            <a:fillRect/>
-          </a:stretch>
-        </p:blipFill>
-        <p:spPr>
-          <a:xfrm>
-            <a:off x="836676" y="1691640"/>
-            <a:ext cx="10515600" cy="4453128"/>
-          </a:xfrm>
-          <a:prstGeom prst="rect">
-            <a:avLst/>
-          </a:prstGeom>
-        </p:spPr>
-      </p:pic>
-      <p:sp>
-        <p:nvSpPr>
-          <p:cNvPr id="5" name="Text 2"/>
-          <p:cNvSpPr/>
-          <p:nvPr/>
-        </p:nvSpPr>
-        <p:spPr>
-          <a:xfrm>
-            <a:off x="566928" y="6263640"/>
-            <a:ext cx="11064240" cy="365760"/>
-          </a:xfrm>
-          <a:prstGeom prst="rect">
-            <a:avLst/>
-          </a:prstGeom>
-          <a:noFill/>
+      <p:sp>
+        <p:nvSpPr>
+          <p:cNvPr id="4" name="Text 2"/>
+          <p:cNvSpPr/>
+          <p:nvPr/>
+        </p:nvSpPr>
+        <p:spPr>
+          <a:xfrm>
+            <a:off x="10424160" y="822960"/>
+            <a:ext cx="1737360" cy="310896"/>
+          </a:xfrm>
+          <a:prstGeom prst="roundRect">
+            <a:avLst>
+              <a:gd name="adj" fmla="val 47059"/>
+            </a:avLst>
+          </a:prstGeom>
+          <a:solidFill>
+            <a:srgbClr val="FEF3C7"/>
+          </a:solidFill>
           <a:ln/>
         </p:spPr>
         <p:txBody>
@@ -3849,7 +2884,163 @@
               <a:buNone/>
             </a:pPr>
             <a:r>
-              <a:rPr lang="en-US" sz="1200" dirty="0">
+              <a:rPr lang="en-US" sz="1100" b="1" dirty="0">
+                <a:solidFill>
+                  <a:srgbClr val="B45309"/>
+                </a:solidFill>
+                <a:latin typeface="맑은 고딕" pitchFamily="34" charset="0"/>
+                <a:ea typeface="맑은 고딕" pitchFamily="34" charset="-122"/>
+                <a:cs typeface="맑은 고딕" pitchFamily="34" charset="-120"/>
+              </a:rPr>
+              <a:t>개발 예정</a:t>
+            </a:r>
+            <a:endParaRPr lang="en-US" sz="1100" dirty="0"/>
+          </a:p>
+        </p:txBody>
+      </p:sp>
+      <p:sp>
+        <p:nvSpPr>
+          <p:cNvPr id="5" name="Shape 3"/>
+          <p:cNvSpPr/>
+          <p:nvPr/>
+        </p:nvSpPr>
+        <p:spPr>
+          <a:xfrm>
+            <a:off x="566928" y="1874520"/>
+            <a:ext cx="11064240" cy="1097280"/>
+          </a:xfrm>
+          <a:prstGeom prst="roundRect">
+            <a:avLst>
+              <a:gd name="adj" fmla="val 6667"/>
+            </a:avLst>
+          </a:prstGeom>
+          <a:solidFill>
+            <a:srgbClr val="FFFFFF"/>
+          </a:solidFill>
+          <a:ln w="12700">
+            <a:solidFill>
+              <a:srgbClr val="E5E7EB"/>
+            </a:solidFill>
+            <a:prstDash val="solid"/>
+          </a:ln>
+          <a:effectLst>
+            <a:outerShdw sx="100000" sy="100000" kx="0" ky="0" algn="bl" rotWithShape="0" blurRad="127000" dist="50800" dir="5400000">
+              <a:srgbClr val="1E1B4B">
+                <a:alpha val="18000"/>
+              </a:srgbClr>
+            </a:outerShdw>
+          </a:effectLst>
+        </p:spPr>
+      </p:sp>
+      <p:sp>
+        <p:nvSpPr>
+          <p:cNvPr id="6" name="Text 4"/>
+          <p:cNvSpPr/>
+          <p:nvPr/>
+        </p:nvSpPr>
+        <p:spPr>
+          <a:xfrm>
+            <a:off x="822960" y="2167128"/>
+            <a:ext cx="512064" cy="512064"/>
+          </a:xfrm>
+          <a:prstGeom prst="ellipse">
+            <a:avLst/>
+          </a:prstGeom>
+          <a:solidFill>
+            <a:srgbClr val="8B5CF6"/>
+          </a:solidFill>
+          <a:ln/>
+        </p:spPr>
+        <p:txBody>
+          <a:bodyPr wrap="square" lIns="0" tIns="0" rIns="0" bIns="0" rtlCol="0" anchor="ctr"/>
+          <a:lstStyle/>
+          <a:p>
+            <a:pPr algn="ctr" indent="0" marL="0">
+              <a:buNone/>
+            </a:pPr>
+            <a:r>
+              <a:rPr lang="en-US" sz="1800" b="1" dirty="0">
+                <a:solidFill>
+                  <a:srgbClr val="FFFFFF"/>
+                </a:solidFill>
+                <a:latin typeface="맑은 고딕" pitchFamily="34" charset="0"/>
+                <a:ea typeface="맑은 고딕" pitchFamily="34" charset="-122"/>
+                <a:cs typeface="맑은 고딕" pitchFamily="34" charset="-120"/>
+              </a:rPr>
+              <a:t>1</a:t>
+            </a:r>
+            <a:endParaRPr lang="en-US" sz="1800" dirty="0"/>
+          </a:p>
+        </p:txBody>
+      </p:sp>
+      <p:sp>
+        <p:nvSpPr>
+          <p:cNvPr id="7" name="Text 5"/>
+          <p:cNvSpPr/>
+          <p:nvPr/>
+        </p:nvSpPr>
+        <p:spPr>
+          <a:xfrm>
+            <a:off x="1527048" y="2039112"/>
+            <a:ext cx="2926080" cy="731520"/>
+          </a:xfrm>
+          <a:prstGeom prst="rect">
+            <a:avLst/>
+          </a:prstGeom>
+          <a:noFill/>
+          <a:ln/>
+        </p:spPr>
+        <p:txBody>
+          <a:bodyPr wrap="square" lIns="0" tIns="0" rIns="0" bIns="0" rtlCol="0" anchor="ctr"/>
+          <a:lstStyle/>
+          <a:p>
+            <a:pPr indent="0" marL="0">
+              <a:buNone/>
+            </a:pPr>
+            <a:r>
+              <a:rPr lang="en-US" sz="1700" b="1" dirty="0">
+                <a:solidFill>
+                  <a:srgbClr val="1F2937"/>
+                </a:solidFill>
+                <a:latin typeface="맑은 고딕" pitchFamily="34" charset="0"/>
+                <a:ea typeface="맑은 고딕" pitchFamily="34" charset="-122"/>
+                <a:cs typeface="맑은 고딕" pitchFamily="34" charset="-120"/>
+              </a:rPr>
+              <a:t>연결 조회</a:t>
+            </a:r>
+            <a:endParaRPr lang="en-US" sz="1700" dirty="0"/>
+          </a:p>
+        </p:txBody>
+      </p:sp>
+      <p:sp>
+        <p:nvSpPr>
+          <p:cNvPr id="8" name="Text 6"/>
+          <p:cNvSpPr/>
+          <p:nvPr/>
+        </p:nvSpPr>
+        <p:spPr>
+          <a:xfrm>
+            <a:off x="4498848" y="2039112"/>
+            <a:ext cx="6858000" cy="777240"/>
+          </a:xfrm>
+          <a:prstGeom prst="rect">
+            <a:avLst/>
+          </a:prstGeom>
+          <a:noFill/>
+          <a:ln/>
+        </p:spPr>
+        <p:txBody>
+          <a:bodyPr wrap="square" lIns="0" tIns="0" rIns="0" bIns="0" rtlCol="0" anchor="ctr"/>
+          <a:lstStyle/>
+          <a:p>
+            <a:pPr indent="0" marL="0">
+              <a:lnSpc>
+                <a:spcPct val="105000"/>
+              </a:lnSpc>
+              <a:buNone/>
+            </a:pPr>
+            <a:r>
+              <a:rPr lang="en-US" sz="1300" dirty="0">
                 <a:solidFill>
                   <a:srgbClr val="6B7280"/>
                 </a:solidFill>
@@ -3857,7 +3048,358 @@
                 <a:ea typeface="맑은 고딕" pitchFamily="34" charset="-122"/>
                 <a:cs typeface="맑은 고딕" pitchFamily="34" charset="-120"/>
               </a:rPr>
-              <a:t>정해진 양식(템플릿)+사전 프롬프트로 4종 이슈 초안 생성 · Detail Design은 시퀀스 다이어그램까지 자동</a:t>
+              <a:t>요구사항 1건에 연결된 기능요구사항·비기능요구사항·티켓을 한눈에 조회 (양방향)</a:t>
+            </a:r>
+            <a:endParaRPr lang="en-US" sz="1300" dirty="0"/>
+          </a:p>
+        </p:txBody>
+      </p:sp>
+      <p:sp>
+        <p:nvSpPr>
+          <p:cNvPr id="9" name="Shape 7"/>
+          <p:cNvSpPr/>
+          <p:nvPr/>
+        </p:nvSpPr>
+        <p:spPr>
+          <a:xfrm>
+            <a:off x="566928" y="3154680"/>
+            <a:ext cx="11064240" cy="1097280"/>
+          </a:xfrm>
+          <a:prstGeom prst="roundRect">
+            <a:avLst>
+              <a:gd name="adj" fmla="val 6667"/>
+            </a:avLst>
+          </a:prstGeom>
+          <a:solidFill>
+            <a:srgbClr val="FFFFFF"/>
+          </a:solidFill>
+          <a:ln w="12700">
+            <a:solidFill>
+              <a:srgbClr val="E5E7EB"/>
+            </a:solidFill>
+            <a:prstDash val="solid"/>
+          </a:ln>
+          <a:effectLst>
+            <a:outerShdw sx="100000" sy="100000" kx="0" ky="0" algn="bl" rotWithShape="0" blurRad="127000" dist="50800" dir="5400000">
+              <a:srgbClr val="1E1B4B">
+                <a:alpha val="18000"/>
+              </a:srgbClr>
+            </a:outerShdw>
+          </a:effectLst>
+        </p:spPr>
+      </p:sp>
+      <p:sp>
+        <p:nvSpPr>
+          <p:cNvPr id="10" name="Text 8"/>
+          <p:cNvSpPr/>
+          <p:nvPr/>
+        </p:nvSpPr>
+        <p:spPr>
+          <a:xfrm>
+            <a:off x="822960" y="3447288"/>
+            <a:ext cx="512064" cy="512064"/>
+          </a:xfrm>
+          <a:prstGeom prst="ellipse">
+            <a:avLst/>
+          </a:prstGeom>
+          <a:solidFill>
+            <a:srgbClr val="8B5CF6"/>
+          </a:solidFill>
+          <a:ln/>
+        </p:spPr>
+        <p:txBody>
+          <a:bodyPr wrap="square" lIns="0" tIns="0" rIns="0" bIns="0" rtlCol="0" anchor="ctr"/>
+          <a:lstStyle/>
+          <a:p>
+            <a:pPr algn="ctr" indent="0" marL="0">
+              <a:buNone/>
+            </a:pPr>
+            <a:r>
+              <a:rPr lang="en-US" sz="1800" b="1" dirty="0">
+                <a:solidFill>
+                  <a:srgbClr val="FFFFFF"/>
+                </a:solidFill>
+                <a:latin typeface="맑은 고딕" pitchFamily="34" charset="0"/>
+                <a:ea typeface="맑은 고딕" pitchFamily="34" charset="-122"/>
+                <a:cs typeface="맑은 고딕" pitchFamily="34" charset="-120"/>
+              </a:rPr>
+              <a:t>2</a:t>
+            </a:r>
+            <a:endParaRPr lang="en-US" sz="1800" dirty="0"/>
+          </a:p>
+        </p:txBody>
+      </p:sp>
+      <p:sp>
+        <p:nvSpPr>
+          <p:cNvPr id="11" name="Text 9"/>
+          <p:cNvSpPr/>
+          <p:nvPr/>
+        </p:nvSpPr>
+        <p:spPr>
+          <a:xfrm>
+            <a:off x="1527048" y="3319272"/>
+            <a:ext cx="2926080" cy="731520"/>
+          </a:xfrm>
+          <a:prstGeom prst="rect">
+            <a:avLst/>
+          </a:prstGeom>
+          <a:noFill/>
+          <a:ln/>
+        </p:spPr>
+        <p:txBody>
+          <a:bodyPr wrap="square" lIns="0" tIns="0" rIns="0" bIns="0" rtlCol="0" anchor="ctr"/>
+          <a:lstStyle/>
+          <a:p>
+            <a:pPr indent="0" marL="0">
+              <a:buNone/>
+            </a:pPr>
+            <a:r>
+              <a:rPr lang="en-US" sz="1700" b="1" dirty="0">
+                <a:solidFill>
+                  <a:srgbClr val="1F2937"/>
+                </a:solidFill>
+                <a:latin typeface="맑은 고딕" pitchFamily="34" charset="0"/>
+                <a:ea typeface="맑은 고딕" pitchFamily="34" charset="-122"/>
+                <a:cs typeface="맑은 고딕" pitchFamily="34" charset="-120"/>
+              </a:rPr>
+              <a:t>변경 영향 분석</a:t>
+            </a:r>
+            <a:endParaRPr lang="en-US" sz="1700" dirty="0"/>
+          </a:p>
+        </p:txBody>
+      </p:sp>
+      <p:sp>
+        <p:nvSpPr>
+          <p:cNvPr id="12" name="Text 10"/>
+          <p:cNvSpPr/>
+          <p:nvPr/>
+        </p:nvSpPr>
+        <p:spPr>
+          <a:xfrm>
+            <a:off x="4498848" y="3319272"/>
+            <a:ext cx="6858000" cy="777240"/>
+          </a:xfrm>
+          <a:prstGeom prst="rect">
+            <a:avLst/>
+          </a:prstGeom>
+          <a:noFill/>
+          <a:ln/>
+        </p:spPr>
+        <p:txBody>
+          <a:bodyPr wrap="square" lIns="0" tIns="0" rIns="0" bIns="0" rtlCol="0" anchor="ctr"/>
+          <a:lstStyle/>
+          <a:p>
+            <a:pPr indent="0" marL="0">
+              <a:lnSpc>
+                <a:spcPct val="105000"/>
+              </a:lnSpc>
+              <a:buNone/>
+            </a:pPr>
+            <a:r>
+              <a:rPr lang="en-US" sz="1300" dirty="0">
+                <a:solidFill>
+                  <a:srgbClr val="6B7280"/>
+                </a:solidFill>
+                <a:latin typeface="맑은 고딕" pitchFamily="34" charset="0"/>
+                <a:ea typeface="맑은 고딕" pitchFamily="34" charset="-122"/>
+                <a:cs typeface="맑은 고딕" pitchFamily="34" charset="-120"/>
+              </a:rPr>
+              <a:t>요구사항이 수정되면 영향받는 문서·티켓을 자동으로 표시 → 누락 방지</a:t>
+            </a:r>
+            <a:endParaRPr lang="en-US" sz="1300" dirty="0"/>
+          </a:p>
+        </p:txBody>
+      </p:sp>
+      <p:sp>
+        <p:nvSpPr>
+          <p:cNvPr id="13" name="Shape 11"/>
+          <p:cNvSpPr/>
+          <p:nvPr/>
+        </p:nvSpPr>
+        <p:spPr>
+          <a:xfrm>
+            <a:off x="566928" y="4434840"/>
+            <a:ext cx="11064240" cy="1097280"/>
+          </a:xfrm>
+          <a:prstGeom prst="roundRect">
+            <a:avLst>
+              <a:gd name="adj" fmla="val 6667"/>
+            </a:avLst>
+          </a:prstGeom>
+          <a:solidFill>
+            <a:srgbClr val="EEF2FF"/>
+          </a:solidFill>
+          <a:ln w="12700">
+            <a:solidFill>
+              <a:srgbClr val="E5E7EB"/>
+            </a:solidFill>
+            <a:prstDash val="solid"/>
+          </a:ln>
+          <a:effectLst>
+            <a:outerShdw sx="100000" sy="100000" kx="0" ky="0" algn="bl" rotWithShape="0" blurRad="127000" dist="50800" dir="5400000">
+              <a:srgbClr val="1E1B4B">
+                <a:alpha val="18000"/>
+              </a:srgbClr>
+            </a:outerShdw>
+          </a:effectLst>
+        </p:spPr>
+      </p:sp>
+      <p:sp>
+        <p:nvSpPr>
+          <p:cNvPr id="14" name="Text 12"/>
+          <p:cNvSpPr/>
+          <p:nvPr/>
+        </p:nvSpPr>
+        <p:spPr>
+          <a:xfrm>
+            <a:off x="822960" y="4727448"/>
+            <a:ext cx="512064" cy="512064"/>
+          </a:xfrm>
+          <a:prstGeom prst="ellipse">
+            <a:avLst/>
+          </a:prstGeom>
+          <a:solidFill>
+            <a:srgbClr val="8B5CF6"/>
+          </a:solidFill>
+          <a:ln/>
+        </p:spPr>
+        <p:txBody>
+          <a:bodyPr wrap="square" lIns="0" tIns="0" rIns="0" bIns="0" rtlCol="0" anchor="ctr"/>
+          <a:lstStyle/>
+          <a:p>
+            <a:pPr algn="ctr" indent="0" marL="0">
+              <a:buNone/>
+            </a:pPr>
+            <a:r>
+              <a:rPr lang="en-US" sz="1800" b="1" dirty="0">
+                <a:solidFill>
+                  <a:srgbClr val="FFFFFF"/>
+                </a:solidFill>
+                <a:latin typeface="맑은 고딕" pitchFamily="34" charset="0"/>
+                <a:ea typeface="맑은 고딕" pitchFamily="34" charset="-122"/>
+                <a:cs typeface="맑은 고딕" pitchFamily="34" charset="-120"/>
+              </a:rPr>
+              <a:t>3</a:t>
+            </a:r>
+            <a:endParaRPr lang="en-US" sz="1800" dirty="0"/>
+          </a:p>
+        </p:txBody>
+      </p:sp>
+      <p:sp>
+        <p:nvSpPr>
+          <p:cNvPr id="15" name="Text 13"/>
+          <p:cNvSpPr/>
+          <p:nvPr/>
+        </p:nvSpPr>
+        <p:spPr>
+          <a:xfrm>
+            <a:off x="1527048" y="4599432"/>
+            <a:ext cx="2926080" cy="731520"/>
+          </a:xfrm>
+          <a:prstGeom prst="rect">
+            <a:avLst/>
+          </a:prstGeom>
+          <a:noFill/>
+          <a:ln/>
+        </p:spPr>
+        <p:txBody>
+          <a:bodyPr wrap="square" lIns="0" tIns="0" rIns="0" bIns="0" rtlCol="0" anchor="ctr"/>
+          <a:lstStyle/>
+          <a:p>
+            <a:pPr indent="0" marL="0">
+              <a:buNone/>
+            </a:pPr>
+            <a:r>
+              <a:rPr lang="en-US" sz="1700" b="1" dirty="0">
+                <a:solidFill>
+                  <a:srgbClr val="1F2937"/>
+                </a:solidFill>
+                <a:latin typeface="맑은 고딕" pitchFamily="34" charset="0"/>
+                <a:ea typeface="맑은 고딕" pitchFamily="34" charset="-122"/>
+                <a:cs typeface="맑은 고딕" pitchFamily="34" charset="-120"/>
+              </a:rPr>
+              <a:t>진행상황 / 개발완료</a:t>
+            </a:r>
+            <a:endParaRPr lang="en-US" sz="1700" dirty="0"/>
+          </a:p>
+        </p:txBody>
+      </p:sp>
+      <p:sp>
+        <p:nvSpPr>
+          <p:cNvPr id="16" name="Text 14"/>
+          <p:cNvSpPr/>
+          <p:nvPr/>
+        </p:nvSpPr>
+        <p:spPr>
+          <a:xfrm>
+            <a:off x="4498848" y="4599432"/>
+            <a:ext cx="6858000" cy="777240"/>
+          </a:xfrm>
+          <a:prstGeom prst="rect">
+            <a:avLst/>
+          </a:prstGeom>
+          <a:noFill/>
+          <a:ln/>
+        </p:spPr>
+        <p:txBody>
+          <a:bodyPr wrap="square" lIns="0" tIns="0" rIns="0" bIns="0" rtlCol="0" anchor="ctr"/>
+          <a:lstStyle/>
+          <a:p>
+            <a:pPr indent="0" marL="0">
+              <a:lnSpc>
+                <a:spcPct val="105000"/>
+              </a:lnSpc>
+              <a:buNone/>
+            </a:pPr>
+            <a:r>
+              <a:rPr lang="en-US" sz="1300" dirty="0">
+                <a:solidFill>
+                  <a:srgbClr val="6B7280"/>
+                </a:solidFill>
+                <a:latin typeface="맑은 고딕" pitchFamily="34" charset="0"/>
+                <a:ea typeface="맑은 고딕" pitchFamily="34" charset="-122"/>
+                <a:cs typeface="맑은 고딕" pitchFamily="34" charset="-120"/>
+              </a:rPr>
+              <a:t>요구사항·티켓의 상태(작성중·검토·개발중·완료)와 진행률을 한눈에</a:t>
+            </a:r>
+            <a:endParaRPr lang="en-US" sz="1300" dirty="0"/>
+          </a:p>
+        </p:txBody>
+      </p:sp>
+      <p:sp>
+        <p:nvSpPr>
+          <p:cNvPr id="17" name="Text 15"/>
+          <p:cNvSpPr/>
+          <p:nvPr/>
+        </p:nvSpPr>
+        <p:spPr>
+          <a:xfrm>
+            <a:off x="566928" y="5943600"/>
+            <a:ext cx="10972800" cy="365760"/>
+          </a:xfrm>
+          <a:prstGeom prst="rect">
+            <a:avLst/>
+          </a:prstGeom>
+          <a:noFill/>
+          <a:ln/>
+        </p:spPr>
+        <p:txBody>
+          <a:bodyPr wrap="square" lIns="0" tIns="0" rIns="0" bIns="0" rtlCol="0" anchor="ctr"/>
+          <a:lstStyle/>
+          <a:p>
+            <a:pPr indent="0" marL="0">
+              <a:buNone/>
+            </a:pPr>
+            <a:r>
+              <a:rPr lang="en-US" sz="1200" i="1" dirty="0">
+                <a:solidFill>
+                  <a:srgbClr val="6B7280"/>
+                </a:solidFill>
+                <a:latin typeface="맑은 고딕" pitchFamily="34" charset="0"/>
+                <a:ea typeface="맑은 고딕" pitchFamily="34" charset="-122"/>
+                <a:cs typeface="맑은 고딕" pitchFamily="34" charset="-120"/>
+              </a:rPr>
+              <a:t>※ 기존 “DB 변경관리”를 대체 — 컨셉(고객 요구사항 기반 문서화)에 맞춰 재정의</a:t>
             </a:r>
             <a:endParaRPr lang="en-US" sz="1200" dirty="0"/>
           </a:p>
@@ -3928,7 +3470,7 @@
                 <a:ea typeface="맑은 고딕" pitchFamily="34" charset="-122"/>
                 <a:cs typeface="맑은 고딕" pitchFamily="34" charset="-120"/>
               </a:rPr>
-              <a:t>핵심 기능 3</a:t>
+              <a:t>AI</a:t>
             </a:r>
             <a:endParaRPr lang="en-US" sz="1200" dirty="0"/>
           </a:p>
@@ -3967,7 +3509,7 @@
                 <a:ea typeface="맑은 고딕" pitchFamily="34" charset="-122"/>
                 <a:cs typeface="맑은 고딕" pitchFamily="34" charset="-120"/>
               </a:rPr>
-              <a:t>문서 추적성</a:t>
+              <a:t>AI — 두 엔진 비교</a:t>
             </a:r>
             <a:endParaRPr lang="en-US" sz="3000" dirty="0"/>
           </a:p>
@@ -3975,72 +3517,326 @@
       </p:sp>
       <p:sp>
         <p:nvSpPr>
-          <p:cNvPr id="4" name="Text 2"/>
-          <p:cNvSpPr/>
-          <p:nvPr/>
-        </p:nvSpPr>
-        <p:spPr>
-          <a:xfrm>
-            <a:off x="10424160" y="822960"/>
-            <a:ext cx="1737360" cy="310896"/>
+          <p:cNvPr id="4" name="Shape 2"/>
+          <p:cNvSpPr/>
+          <p:nvPr/>
+        </p:nvSpPr>
+        <p:spPr>
+          <a:xfrm>
+            <a:off x="566928" y="1783080"/>
+            <a:ext cx="5440680" cy="2697480"/>
           </a:xfrm>
           <a:prstGeom prst="roundRect">
             <a:avLst>
-              <a:gd name="adj" fmla="val 47059"/>
+              <a:gd name="adj" fmla="val 3390"/>
             </a:avLst>
           </a:prstGeom>
           <a:solidFill>
-            <a:srgbClr val="FEF3C7"/>
-          </a:solidFill>
-          <a:ln/>
-        </p:spPr>
-        <p:txBody>
-          <a:bodyPr wrap="square" lIns="0" tIns="0" rIns="0" bIns="0" rtlCol="0" anchor="ctr"/>
-          <a:lstStyle/>
-          <a:p>
-            <a:pPr algn="ctr" indent="0" marL="0">
-              <a:buNone/>
-            </a:pPr>
-            <a:r>
-              <a:rPr lang="en-US" sz="1100" b="1" dirty="0">
-                <a:solidFill>
-                  <a:srgbClr val="B45309"/>
-                </a:solidFill>
-                <a:latin typeface="맑은 고딕" pitchFamily="34" charset="0"/>
-                <a:ea typeface="맑은 고딕" pitchFamily="34" charset="-122"/>
-                <a:cs typeface="맑은 고딕" pitchFamily="34" charset="-120"/>
-              </a:rPr>
-              <a:t>개발 예정</a:t>
-            </a:r>
-            <a:endParaRPr lang="en-US" sz="1100" dirty="0"/>
-          </a:p>
-        </p:txBody>
-      </p:sp>
-      <p:sp>
-        <p:nvSpPr>
-          <p:cNvPr id="5" name="Shape 3"/>
-          <p:cNvSpPr/>
-          <p:nvPr/>
-        </p:nvSpPr>
-        <p:spPr>
-          <a:xfrm>
-            <a:off x="566928" y="1874520"/>
-            <a:ext cx="11064240" cy="1097280"/>
-          </a:xfrm>
-          <a:prstGeom prst="roundRect">
-            <a:avLst>
-              <a:gd name="adj" fmla="val 6667"/>
-            </a:avLst>
-          </a:prstGeom>
-          <a:solidFill>
-            <a:srgbClr val="FFFFFF"/>
+            <a:srgbClr val="EEF2FF"/>
           </a:solidFill>
           <a:ln w="12700">
             <a:solidFill>
-              <a:srgbClr val="E5E7EB"/>
+              <a:srgbClr val="C7D2FE"/>
             </a:solidFill>
             <a:prstDash val="solid"/>
           </a:ln>
+        </p:spPr>
+      </p:sp>
+      <p:sp>
+        <p:nvSpPr>
+          <p:cNvPr id="5" name="Text 3"/>
+          <p:cNvSpPr/>
+          <p:nvPr/>
+        </p:nvSpPr>
+        <p:spPr>
+          <a:xfrm>
+            <a:off x="886968" y="2011680"/>
+            <a:ext cx="4846320" cy="457200"/>
+          </a:xfrm>
+          <a:prstGeom prst="rect">
+            <a:avLst/>
+          </a:prstGeom>
+          <a:noFill/>
+          <a:ln/>
+        </p:spPr>
+        <p:txBody>
+          <a:bodyPr wrap="square" lIns="0" tIns="0" rIns="0" bIns="0" rtlCol="0" anchor="ctr"/>
+          <a:lstStyle/>
+          <a:p>
+            <a:pPr indent="0" marL="0">
+              <a:buNone/>
+            </a:pPr>
+            <a:r>
+              <a:rPr lang="en-US" sz="1900" b="1" dirty="0">
+                <a:solidFill>
+                  <a:srgbClr val="6366F1"/>
+                </a:solidFill>
+                <a:latin typeface="맑은 고딕" pitchFamily="34" charset="0"/>
+                <a:ea typeface="맑은 고딕" pitchFamily="34" charset="-122"/>
+                <a:cs typeface="맑은 고딕" pitchFamily="34" charset="-120"/>
+              </a:rPr>
+              <a:t>로컬 Qwen3-8B</a:t>
+            </a:r>
+            <a:endParaRPr lang="en-US" sz="1900" dirty="0"/>
+          </a:p>
+        </p:txBody>
+      </p:sp>
+      <p:sp>
+        <p:nvSpPr>
+          <p:cNvPr id="6" name="Text 4"/>
+          <p:cNvSpPr/>
+          <p:nvPr/>
+        </p:nvSpPr>
+        <p:spPr>
+          <a:xfrm>
+            <a:off x="932688" y="2606040"/>
+            <a:ext cx="4754880" cy="1737360"/>
+          </a:xfrm>
+          <a:prstGeom prst="rect">
+            <a:avLst/>
+          </a:prstGeom>
+          <a:noFill/>
+          <a:ln/>
+        </p:spPr>
+        <p:txBody>
+          <a:bodyPr wrap="square" lIns="0" tIns="0" rIns="0" bIns="0" rtlCol="0" anchor="ctr"/>
+          <a:lstStyle/>
+          <a:p>
+            <a:pPr marL="342900" indent="-342900">
+              <a:spcAft>
+                <a:spcPts val="700"/>
+              </a:spcAft>
+              <a:buSzPct val="100000"/>
+              <a:buChar char="•"/>
+            </a:pPr>
+            <a:r>
+              <a:rPr lang="en-US" sz="1300" dirty="0">
+                <a:solidFill>
+                  <a:srgbClr val="1F2937"/>
+                </a:solidFill>
+                <a:latin typeface="맑은 고딕" pitchFamily="34" charset="0"/>
+                <a:ea typeface="맑은 고딕" pitchFamily="34" charset="-122"/>
+                <a:cs typeface="맑은 고딕" pitchFamily="34" charset="-120"/>
+              </a:rPr>
+              <a:t>내 워크스테이션(P4000 8GB)에서 직접</a:t>
+            </a:r>
+            <a:endParaRPr lang="en-US" sz="1300" dirty="0"/>
+          </a:p>
+          <a:p>
+            <a:pPr marL="342900" indent="-342900">
+              <a:spcAft>
+                <a:spcPts val="700"/>
+              </a:spcAft>
+              <a:buSzPct val="100000"/>
+              <a:buChar char="•"/>
+            </a:pPr>
+            <a:r>
+              <a:rPr lang="en-US" sz="1300" dirty="0">
+                <a:solidFill>
+                  <a:srgbClr val="1F2937"/>
+                </a:solidFill>
+                <a:latin typeface="맑은 고딕" pitchFamily="34" charset="0"/>
+                <a:ea typeface="맑은 고딕" pitchFamily="34" charset="-122"/>
+                <a:cs typeface="맑은 고딕" pitchFamily="34" charset="-120"/>
+              </a:rPr>
+              <a:t>8B 모델 · GGUF 양자화 Q5_K_M(≈5.85GB)</a:t>
+            </a:r>
+            <a:endParaRPr lang="en-US" sz="1300" dirty="0"/>
+          </a:p>
+          <a:p>
+            <a:pPr marL="342900" indent="-342900">
+              <a:spcAft>
+                <a:spcPts val="700"/>
+              </a:spcAft>
+              <a:buSzPct val="100000"/>
+              <a:buChar char="•"/>
+            </a:pPr>
+            <a:r>
+              <a:rPr lang="en-US" sz="1300" dirty="0">
+                <a:solidFill>
+                  <a:srgbClr val="1F2937"/>
+                </a:solidFill>
+                <a:latin typeface="맑은 고딕" pitchFamily="34" charset="0"/>
+                <a:ea typeface="맑은 고딕" pitchFamily="34" charset="-122"/>
+                <a:cs typeface="맑은 고딕" pitchFamily="34" charset="-120"/>
+              </a:rPr>
+              <a:t>오프라인 자립 · 한국어 강점</a:t>
+            </a:r>
+            <a:endParaRPr lang="en-US" sz="1300" dirty="0"/>
+          </a:p>
+        </p:txBody>
+      </p:sp>
+      <p:sp>
+        <p:nvSpPr>
+          <p:cNvPr id="7" name="Shape 5"/>
+          <p:cNvSpPr/>
+          <p:nvPr/>
+        </p:nvSpPr>
+        <p:spPr>
+          <a:xfrm>
+            <a:off x="6327648" y="1783080"/>
+            <a:ext cx="5440680" cy="2697480"/>
+          </a:xfrm>
+          <a:prstGeom prst="roundRect">
+            <a:avLst>
+              <a:gd name="adj" fmla="val 3390"/>
+            </a:avLst>
+          </a:prstGeom>
+          <a:solidFill>
+            <a:srgbClr val="F5F3FF"/>
+          </a:solidFill>
+          <a:ln w="12700">
+            <a:solidFill>
+              <a:srgbClr val="DDD6FE"/>
+            </a:solidFill>
+            <a:prstDash val="solid"/>
+          </a:ln>
+        </p:spPr>
+      </p:sp>
+      <p:sp>
+        <p:nvSpPr>
+          <p:cNvPr id="8" name="Text 6"/>
+          <p:cNvSpPr/>
+          <p:nvPr/>
+        </p:nvSpPr>
+        <p:spPr>
+          <a:xfrm>
+            <a:off x="6647688" y="2011680"/>
+            <a:ext cx="4846320" cy="457200"/>
+          </a:xfrm>
+          <a:prstGeom prst="rect">
+            <a:avLst/>
+          </a:prstGeom>
+          <a:noFill/>
+          <a:ln/>
+        </p:spPr>
+        <p:txBody>
+          <a:bodyPr wrap="square" lIns="0" tIns="0" rIns="0" bIns="0" rtlCol="0" anchor="ctr"/>
+          <a:lstStyle/>
+          <a:p>
+            <a:pPr indent="0" marL="0">
+              <a:buNone/>
+            </a:pPr>
+            <a:r>
+              <a:rPr lang="en-US" sz="1900" b="1" dirty="0">
+                <a:solidFill>
+                  <a:srgbClr val="8B5CF6"/>
+                </a:solidFill>
+                <a:latin typeface="맑은 고딕" pitchFamily="34" charset="0"/>
+                <a:ea typeface="맑은 고딕" pitchFamily="34" charset="-122"/>
+                <a:cs typeface="맑은 고딕" pitchFamily="34" charset="-120"/>
+              </a:rPr>
+              <a:t>사내 GPT-OSS-120B</a:t>
+            </a:r>
+            <a:endParaRPr lang="en-US" sz="1900" dirty="0"/>
+          </a:p>
+        </p:txBody>
+      </p:sp>
+      <p:sp>
+        <p:nvSpPr>
+          <p:cNvPr id="9" name="Text 7"/>
+          <p:cNvSpPr/>
+          <p:nvPr/>
+        </p:nvSpPr>
+        <p:spPr>
+          <a:xfrm>
+            <a:off x="6693408" y="2606040"/>
+            <a:ext cx="4754880" cy="1737360"/>
+          </a:xfrm>
+          <a:prstGeom prst="rect">
+            <a:avLst/>
+          </a:prstGeom>
+          <a:noFill/>
+          <a:ln/>
+        </p:spPr>
+        <p:txBody>
+          <a:bodyPr wrap="square" lIns="0" tIns="0" rIns="0" bIns="0" rtlCol="0" anchor="ctr"/>
+          <a:lstStyle/>
+          <a:p>
+            <a:pPr marL="342900" indent="-342900">
+              <a:spcAft>
+                <a:spcPts val="700"/>
+              </a:spcAft>
+              <a:buSzPct val="100000"/>
+              <a:buChar char="•"/>
+            </a:pPr>
+            <a:r>
+              <a:rPr lang="en-US" sz="1300" dirty="0">
+                <a:solidFill>
+                  <a:srgbClr val="1F2937"/>
+                </a:solidFill>
+                <a:latin typeface="맑은 고딕" pitchFamily="34" charset="0"/>
+                <a:ea typeface="맑은 고딕" pitchFamily="34" charset="-122"/>
+                <a:cs typeface="맑은 고딕" pitchFamily="34" charset="-120"/>
+              </a:rPr>
+              <a:t>사내 LLM API 서비스(OpenAI 호환)</a:t>
+            </a:r>
+            <a:endParaRPr lang="en-US" sz="1300" dirty="0"/>
+          </a:p>
+          <a:p>
+            <a:pPr marL="342900" indent="-342900">
+              <a:spcAft>
+                <a:spcPts val="700"/>
+              </a:spcAft>
+              <a:buSzPct val="100000"/>
+              <a:buChar char="•"/>
+            </a:pPr>
+            <a:r>
+              <a:rPr lang="en-US" sz="1300" dirty="0">
+                <a:solidFill>
+                  <a:srgbClr val="1F2937"/>
+                </a:solidFill>
+                <a:latin typeface="맑은 고딕" pitchFamily="34" charset="0"/>
+                <a:ea typeface="맑은 고딕" pitchFamily="34" charset="-122"/>
+                <a:cs typeface="맑은 고딕" pitchFamily="34" charset="-120"/>
+              </a:rPr>
+              <a:t>훨씬 큰 모델 → 어려운 판단 정확도 유리</a:t>
+            </a:r>
+            <a:endParaRPr lang="en-US" sz="1300" dirty="0"/>
+          </a:p>
+          <a:p>
+            <a:pPr marL="342900" indent="-342900">
+              <a:spcAft>
+                <a:spcPts val="700"/>
+              </a:spcAft>
+              <a:buSzPct val="100000"/>
+              <a:buChar char="•"/>
+            </a:pPr>
+            <a:r>
+              <a:rPr lang="en-US" sz="1300" dirty="0">
+                <a:solidFill>
+                  <a:srgbClr val="1F2937"/>
+                </a:solidFill>
+                <a:latin typeface="맑은 고딕" pitchFamily="34" charset="0"/>
+                <a:ea typeface="맑은 고딕" pitchFamily="34" charset="-122"/>
+                <a:cs typeface="맑은 고딕" pitchFamily="34" charset="-120"/>
+              </a:rPr>
+              <a:t>공용 서버 의존</a:t>
+            </a:r>
+            <a:endParaRPr lang="en-US" sz="1300" dirty="0"/>
+          </a:p>
+        </p:txBody>
+      </p:sp>
+      <p:sp>
+        <p:nvSpPr>
+          <p:cNvPr id="10" name="Shape 8"/>
+          <p:cNvSpPr/>
+          <p:nvPr/>
+        </p:nvSpPr>
+        <p:spPr>
+          <a:xfrm>
+            <a:off x="566928" y="4709160"/>
+            <a:ext cx="11064240" cy="1463040"/>
+          </a:xfrm>
+          <a:prstGeom prst="roundRect">
+            <a:avLst>
+              <a:gd name="adj" fmla="val 6250"/>
+            </a:avLst>
+          </a:prstGeom>
+          <a:solidFill>
+            <a:srgbClr val="1E1B4B"/>
+          </a:solidFill>
+          <a:ln/>
           <a:effectLst>
             <a:outerShdw sx="100000" sy="100000" kx="0" ky="0" algn="bl" rotWithShape="0" blurRad="127000" dist="50800" dir="5400000">
               <a:srgbClr val="1E1B4B">
@@ -4052,32 +3848,30 @@
       </p:sp>
       <p:sp>
         <p:nvSpPr>
-          <p:cNvPr id="6" name="Text 4"/>
-          <p:cNvSpPr/>
-          <p:nvPr/>
-        </p:nvSpPr>
-        <p:spPr>
-          <a:xfrm>
-            <a:off x="822960" y="2167128"/>
-            <a:ext cx="512064" cy="512064"/>
-          </a:xfrm>
-          <a:prstGeom prst="ellipse">
-            <a:avLst/>
-          </a:prstGeom>
-          <a:solidFill>
-            <a:srgbClr val="8B5CF6"/>
-          </a:solidFill>
-          <a:ln/>
-        </p:spPr>
-        <p:txBody>
-          <a:bodyPr wrap="square" lIns="0" tIns="0" rIns="0" bIns="0" rtlCol="0" anchor="ctr"/>
-          <a:lstStyle/>
-          <a:p>
-            <a:pPr algn="ctr" indent="0" marL="0">
-              <a:buNone/>
-            </a:pPr>
-            <a:r>
-              <a:rPr lang="en-US" sz="1800" b="1" dirty="0">
+          <p:cNvPr id="11" name="Text 9"/>
+          <p:cNvSpPr/>
+          <p:nvPr/>
+        </p:nvSpPr>
+        <p:spPr>
+          <a:xfrm>
+            <a:off x="886968" y="4892040"/>
+            <a:ext cx="10424160" cy="457200"/>
+          </a:xfrm>
+          <a:prstGeom prst="rect">
+            <a:avLst/>
+          </a:prstGeom>
+          <a:noFill/>
+          <a:ln/>
+        </p:spPr>
+        <p:txBody>
+          <a:bodyPr wrap="square" lIns="0" tIns="0" rIns="0" bIns="0" rtlCol="0" anchor="ctr"/>
+          <a:lstStyle/>
+          <a:p>
+            <a:pPr indent="0" marL="0">
+              <a:buNone/>
+            </a:pPr>
+            <a:r>
+              <a:rPr lang="en-US" sz="1350" b="1" dirty="0">
                 <a:solidFill>
                   <a:srgbClr val="FFFFFF"/>
                 </a:solidFill>
@@ -4085,61 +3879,36 @@
                 <a:ea typeface="맑은 고딕" pitchFamily="34" charset="-122"/>
                 <a:cs typeface="맑은 고딕" pitchFamily="34" charset="-120"/>
               </a:rPr>
-              <a:t>1</a:t>
-            </a:r>
-            <a:endParaRPr lang="en-US" sz="1800" dirty="0"/>
-          </a:p>
-        </p:txBody>
-      </p:sp>
-      <p:sp>
-        <p:nvSpPr>
-          <p:cNvPr id="7" name="Text 5"/>
-          <p:cNvSpPr/>
-          <p:nvPr/>
-        </p:nvSpPr>
-        <p:spPr>
-          <a:xfrm>
-            <a:off x="1527048" y="2039112"/>
-            <a:ext cx="2926080" cy="731520"/>
-          </a:xfrm>
-          <a:prstGeom prst="rect">
-            <a:avLst/>
-          </a:prstGeom>
-          <a:noFill/>
-          <a:ln/>
-        </p:spPr>
-        <p:txBody>
-          <a:bodyPr wrap="square" lIns="0" tIns="0" rIns="0" bIns="0" rtlCol="0" anchor="ctr"/>
-          <a:lstStyle/>
-          <a:p>
+              <a:t>응답 시간은 둘 다 3~5초로 비슷</a:t>
+            </a:r>
             <a:pPr indent="0" marL="0">
               <a:buNone/>
             </a:pPr>
             <a:r>
-              <a:rPr lang="en-US" sz="1700" b="1" dirty="0">
-                <a:solidFill>
-                  <a:srgbClr val="1F2937"/>
-                </a:solidFill>
-                <a:latin typeface="맑은 고딕" pitchFamily="34" charset="0"/>
-                <a:ea typeface="맑은 고딕" pitchFamily="34" charset="-122"/>
-                <a:cs typeface="맑은 고딕" pitchFamily="34" charset="-120"/>
-              </a:rPr>
-              <a:t>연결 조회</a:t>
-            </a:r>
-            <a:endParaRPr lang="en-US" sz="1700" dirty="0"/>
-          </a:p>
-        </p:txBody>
-      </p:sp>
-      <p:sp>
-        <p:nvSpPr>
-          <p:cNvPr id="8" name="Text 6"/>
-          <p:cNvSpPr/>
-          <p:nvPr/>
-        </p:nvSpPr>
-        <p:spPr>
-          <a:xfrm>
-            <a:off x="4498848" y="2039112"/>
-            <a:ext cx="6858000" cy="777240"/>
+              <a:rPr lang="en-US" sz="1350" dirty="0">
+                <a:solidFill>
+                  <a:srgbClr val="C7D2FE"/>
+                </a:solidFill>
+                <a:latin typeface="맑은 고딕" pitchFamily="34" charset="0"/>
+                <a:ea typeface="맑은 고딕" pitchFamily="34" charset="-122"/>
+                <a:cs typeface="맑은 고딕" pitchFamily="34" charset="-120"/>
+              </a:rPr>
+              <a:t> → 속도가 아니라 정확도·자립성으로 선택. 동일 요구사항 세트로 실측 후 확정.</a:t>
+            </a:r>
+            <a:endParaRPr lang="en-US" sz="1350" dirty="0"/>
+          </a:p>
+        </p:txBody>
+      </p:sp>
+      <p:sp>
+        <p:nvSpPr>
+          <p:cNvPr id="12" name="Text 10"/>
+          <p:cNvSpPr/>
+          <p:nvPr/>
+        </p:nvSpPr>
+        <p:spPr>
+          <a:xfrm>
+            <a:off x="886968" y="5440680"/>
+            <a:ext cx="10424160" cy="640080"/>
           </a:xfrm>
           <a:prstGeom prst="rect">
             <a:avLst/>
@@ -4158,155 +3927,16 @@
               <a:buNone/>
             </a:pPr>
             <a:r>
-              <a:rPr lang="en-US" sz="1300" dirty="0">
-                <a:solidFill>
-                  <a:srgbClr val="6B7280"/>
-                </a:solidFill>
-                <a:latin typeface="맑은 고딕" pitchFamily="34" charset="0"/>
-                <a:ea typeface="맑은 고딕" pitchFamily="34" charset="-122"/>
-                <a:cs typeface="맑은 고딕" pitchFamily="34" charset="-120"/>
-              </a:rPr>
-              <a:t>요구사항 1건에 연결된 기능요구사항·비기능요구사항·티켓을 한눈에 조회 (양방향)</a:t>
-            </a:r>
-            <a:endParaRPr lang="en-US" sz="1300" dirty="0"/>
-          </a:p>
-        </p:txBody>
-      </p:sp>
-      <p:sp>
-        <p:nvSpPr>
-          <p:cNvPr id="9" name="Shape 7"/>
-          <p:cNvSpPr/>
-          <p:nvPr/>
-        </p:nvSpPr>
-        <p:spPr>
-          <a:xfrm>
-            <a:off x="566928" y="3154680"/>
-            <a:ext cx="11064240" cy="1097280"/>
-          </a:xfrm>
-          <a:prstGeom prst="roundRect">
-            <a:avLst>
-              <a:gd name="adj" fmla="val 6667"/>
-            </a:avLst>
-          </a:prstGeom>
-          <a:solidFill>
-            <a:srgbClr val="FFFFFF"/>
-          </a:solidFill>
-          <a:ln w="12700">
-            <a:solidFill>
-              <a:srgbClr val="E5E7EB"/>
-            </a:solidFill>
-            <a:prstDash val="solid"/>
-          </a:ln>
-          <a:effectLst>
-            <a:outerShdw sx="100000" sy="100000" kx="0" ky="0" algn="bl" rotWithShape="0" blurRad="127000" dist="50800" dir="5400000">
-              <a:srgbClr val="1E1B4B">
-                <a:alpha val="18000"/>
-              </a:srgbClr>
-            </a:outerShdw>
-          </a:effectLst>
-        </p:spPr>
-      </p:sp>
-      <p:sp>
-        <p:nvSpPr>
-          <p:cNvPr id="10" name="Text 8"/>
-          <p:cNvSpPr/>
-          <p:nvPr/>
-        </p:nvSpPr>
-        <p:spPr>
-          <a:xfrm>
-            <a:off x="822960" y="3447288"/>
-            <a:ext cx="512064" cy="512064"/>
-          </a:xfrm>
-          <a:prstGeom prst="ellipse">
-            <a:avLst/>
-          </a:prstGeom>
-          <a:solidFill>
-            <a:srgbClr val="8B5CF6"/>
-          </a:solidFill>
-          <a:ln/>
-        </p:spPr>
-        <p:txBody>
-          <a:bodyPr wrap="square" lIns="0" tIns="0" rIns="0" bIns="0" rtlCol="0" anchor="ctr"/>
-          <a:lstStyle/>
-          <a:p>
-            <a:pPr algn="ctr" indent="0" marL="0">
-              <a:buNone/>
-            </a:pPr>
-            <a:r>
-              <a:rPr lang="en-US" sz="1800" b="1" dirty="0">
-                <a:solidFill>
-                  <a:srgbClr val="FFFFFF"/>
-                </a:solidFill>
-                <a:latin typeface="맑은 고딕" pitchFamily="34" charset="0"/>
-                <a:ea typeface="맑은 고딕" pitchFamily="34" charset="-122"/>
-                <a:cs typeface="맑은 고딕" pitchFamily="34" charset="-120"/>
-              </a:rPr>
-              <a:t>2</a:t>
-            </a:r>
-            <a:endParaRPr lang="en-US" sz="1800" dirty="0"/>
-          </a:p>
-        </p:txBody>
-      </p:sp>
-      <p:sp>
-        <p:nvSpPr>
-          <p:cNvPr id="11" name="Text 9"/>
-          <p:cNvSpPr/>
-          <p:nvPr/>
-        </p:nvSpPr>
-        <p:spPr>
-          <a:xfrm>
-            <a:off x="1527048" y="3319272"/>
-            <a:ext cx="2926080" cy="731520"/>
-          </a:xfrm>
-          <a:prstGeom prst="rect">
-            <a:avLst/>
-          </a:prstGeom>
-          <a:noFill/>
-          <a:ln/>
-        </p:spPr>
-        <p:txBody>
-          <a:bodyPr wrap="square" lIns="0" tIns="0" rIns="0" bIns="0" rtlCol="0" anchor="ctr"/>
-          <a:lstStyle/>
-          <a:p>
-            <a:pPr indent="0" marL="0">
-              <a:buNone/>
-            </a:pPr>
-            <a:r>
-              <a:rPr lang="en-US" sz="1700" b="1" dirty="0">
-                <a:solidFill>
-                  <a:srgbClr val="1F2937"/>
-                </a:solidFill>
-                <a:latin typeface="맑은 고딕" pitchFamily="34" charset="0"/>
-                <a:ea typeface="맑은 고딕" pitchFamily="34" charset="-122"/>
-                <a:cs typeface="맑은 고딕" pitchFamily="34" charset="-120"/>
-              </a:rPr>
-              <a:t>변경 영향 분석</a:t>
-            </a:r>
-            <a:endParaRPr lang="en-US" sz="1700" dirty="0"/>
-          </a:p>
-        </p:txBody>
-      </p:sp>
-      <p:sp>
-        <p:nvSpPr>
-          <p:cNvPr id="12" name="Text 10"/>
-          <p:cNvSpPr/>
-          <p:nvPr/>
-        </p:nvSpPr>
-        <p:spPr>
-          <a:xfrm>
-            <a:off x="4498848" y="3319272"/>
-            <a:ext cx="6858000" cy="777240"/>
-          </a:xfrm>
-          <a:prstGeom prst="rect">
-            <a:avLst/>
-          </a:prstGeom>
-          <a:noFill/>
-          <a:ln/>
-        </p:spPr>
-        <p:txBody>
-          <a:bodyPr wrap="square" lIns="0" tIns="0" rIns="0" bIns="0" rtlCol="0" anchor="ctr"/>
-          <a:lstStyle/>
-          <a:p>
+              <a:rPr lang="en-US" sz="1250" b="1" dirty="0">
+                <a:solidFill>
+                  <a:srgbClr val="A5B4FC"/>
+                </a:solidFill>
+                <a:latin typeface="맑은 고딕" pitchFamily="34" charset="0"/>
+                <a:ea typeface="맑은 고딕" pitchFamily="34" charset="-122"/>
+                <a:cs typeface="맑은 고딕" pitchFamily="34" charset="-120"/>
+              </a:rPr>
+              <a:t>양자화란?</a:t>
+            </a:r>
             <a:pPr indent="0" marL="0">
               <a:lnSpc>
                 <a:spcPct val="105000"/>
@@ -4314,212 +3944,17 @@
               <a:buNone/>
             </a:pPr>
             <a:r>
-              <a:rPr lang="en-US" sz="1300" dirty="0">
-                <a:solidFill>
-                  <a:srgbClr val="6B7280"/>
-                </a:solidFill>
-                <a:latin typeface="맑은 고딕" pitchFamily="34" charset="0"/>
-                <a:ea typeface="맑은 고딕" pitchFamily="34" charset="-122"/>
-                <a:cs typeface="맑은 고딕" pitchFamily="34" charset="-120"/>
-              </a:rPr>
-              <a:t>요구사항이 수정되면 영향받는 문서·티켓을 자동으로 표시 → 누락 방지</a:t>
-            </a:r>
-            <a:endParaRPr lang="en-US" sz="1300" dirty="0"/>
-          </a:p>
-        </p:txBody>
-      </p:sp>
-      <p:sp>
-        <p:nvSpPr>
-          <p:cNvPr id="13" name="Shape 11"/>
-          <p:cNvSpPr/>
-          <p:nvPr/>
-        </p:nvSpPr>
-        <p:spPr>
-          <a:xfrm>
-            <a:off x="566928" y="4434840"/>
-            <a:ext cx="11064240" cy="1097280"/>
-          </a:xfrm>
-          <a:prstGeom prst="roundRect">
-            <a:avLst>
-              <a:gd name="adj" fmla="val 6667"/>
-            </a:avLst>
-          </a:prstGeom>
-          <a:solidFill>
-            <a:srgbClr val="EEF2FF"/>
-          </a:solidFill>
-          <a:ln w="12700">
-            <a:solidFill>
-              <a:srgbClr val="E5E7EB"/>
-            </a:solidFill>
-            <a:prstDash val="solid"/>
-          </a:ln>
-          <a:effectLst>
-            <a:outerShdw sx="100000" sy="100000" kx="0" ky="0" algn="bl" rotWithShape="0" blurRad="127000" dist="50800" dir="5400000">
-              <a:srgbClr val="1E1B4B">
-                <a:alpha val="18000"/>
-              </a:srgbClr>
-            </a:outerShdw>
-          </a:effectLst>
-        </p:spPr>
-      </p:sp>
-      <p:sp>
-        <p:nvSpPr>
-          <p:cNvPr id="14" name="Text 12"/>
-          <p:cNvSpPr/>
-          <p:nvPr/>
-        </p:nvSpPr>
-        <p:spPr>
-          <a:xfrm>
-            <a:off x="822960" y="4727448"/>
-            <a:ext cx="512064" cy="512064"/>
-          </a:xfrm>
-          <a:prstGeom prst="ellipse">
-            <a:avLst/>
-          </a:prstGeom>
-          <a:solidFill>
-            <a:srgbClr val="8B5CF6"/>
-          </a:solidFill>
-          <a:ln/>
-        </p:spPr>
-        <p:txBody>
-          <a:bodyPr wrap="square" lIns="0" tIns="0" rIns="0" bIns="0" rtlCol="0" anchor="ctr"/>
-          <a:lstStyle/>
-          <a:p>
-            <a:pPr algn="ctr" indent="0" marL="0">
-              <a:buNone/>
-            </a:pPr>
-            <a:r>
-              <a:rPr lang="en-US" sz="1800" b="1" dirty="0">
-                <a:solidFill>
-                  <a:srgbClr val="FFFFFF"/>
-                </a:solidFill>
-                <a:latin typeface="맑은 고딕" pitchFamily="34" charset="0"/>
-                <a:ea typeface="맑은 고딕" pitchFamily="34" charset="-122"/>
-                <a:cs typeface="맑은 고딕" pitchFamily="34" charset="-120"/>
-              </a:rPr>
-              <a:t>3</a:t>
-            </a:r>
-            <a:endParaRPr lang="en-US" sz="1800" dirty="0"/>
-          </a:p>
-        </p:txBody>
-      </p:sp>
-      <p:sp>
-        <p:nvSpPr>
-          <p:cNvPr id="15" name="Text 13"/>
-          <p:cNvSpPr/>
-          <p:nvPr/>
-        </p:nvSpPr>
-        <p:spPr>
-          <a:xfrm>
-            <a:off x="1527048" y="4599432"/>
-            <a:ext cx="2926080" cy="731520"/>
-          </a:xfrm>
-          <a:prstGeom prst="rect">
-            <a:avLst/>
-          </a:prstGeom>
-          <a:noFill/>
-          <a:ln/>
-        </p:spPr>
-        <p:txBody>
-          <a:bodyPr wrap="square" lIns="0" tIns="0" rIns="0" bIns="0" rtlCol="0" anchor="ctr"/>
-          <a:lstStyle/>
-          <a:p>
-            <a:pPr indent="0" marL="0">
-              <a:buNone/>
-            </a:pPr>
-            <a:r>
-              <a:rPr lang="en-US" sz="1700" b="1" dirty="0">
-                <a:solidFill>
-                  <a:srgbClr val="1F2937"/>
-                </a:solidFill>
-                <a:latin typeface="맑은 고딕" pitchFamily="34" charset="0"/>
-                <a:ea typeface="맑은 고딕" pitchFamily="34" charset="-122"/>
-                <a:cs typeface="맑은 고딕" pitchFamily="34" charset="-120"/>
-              </a:rPr>
-              <a:t>진행상황 / 개발완료</a:t>
-            </a:r>
-            <a:endParaRPr lang="en-US" sz="1700" dirty="0"/>
-          </a:p>
-        </p:txBody>
-      </p:sp>
-      <p:sp>
-        <p:nvSpPr>
-          <p:cNvPr id="16" name="Text 14"/>
-          <p:cNvSpPr/>
-          <p:nvPr/>
-        </p:nvSpPr>
-        <p:spPr>
-          <a:xfrm>
-            <a:off x="4498848" y="4599432"/>
-            <a:ext cx="6858000" cy="777240"/>
-          </a:xfrm>
-          <a:prstGeom prst="rect">
-            <a:avLst/>
-          </a:prstGeom>
-          <a:noFill/>
-          <a:ln/>
-        </p:spPr>
-        <p:txBody>
-          <a:bodyPr wrap="square" lIns="0" tIns="0" rIns="0" bIns="0" rtlCol="0" anchor="ctr"/>
-          <a:lstStyle/>
-          <a:p>
-            <a:pPr indent="0" marL="0">
-              <a:lnSpc>
-                <a:spcPct val="105000"/>
-              </a:lnSpc>
-              <a:buNone/>
-            </a:pPr>
-            <a:r>
-              <a:rPr lang="en-US" sz="1300" dirty="0">
-                <a:solidFill>
-                  <a:srgbClr val="6B7280"/>
-                </a:solidFill>
-                <a:latin typeface="맑은 고딕" pitchFamily="34" charset="0"/>
-                <a:ea typeface="맑은 고딕" pitchFamily="34" charset="-122"/>
-                <a:cs typeface="맑은 고딕" pitchFamily="34" charset="-120"/>
-              </a:rPr>
-              <a:t>요구사항·티켓의 상태(작성중·검토·개발중·완료)와 진행률을 한눈에</a:t>
-            </a:r>
-            <a:endParaRPr lang="en-US" sz="1300" dirty="0"/>
-          </a:p>
-        </p:txBody>
-      </p:sp>
-      <p:sp>
-        <p:nvSpPr>
-          <p:cNvPr id="17" name="Text 15"/>
-          <p:cNvSpPr/>
-          <p:nvPr/>
-        </p:nvSpPr>
-        <p:spPr>
-          <a:xfrm>
-            <a:off x="566928" y="5943600"/>
-            <a:ext cx="10972800" cy="365760"/>
-          </a:xfrm>
-          <a:prstGeom prst="rect">
-            <a:avLst/>
-          </a:prstGeom>
-          <a:noFill/>
-          <a:ln/>
-        </p:spPr>
-        <p:txBody>
-          <a:bodyPr wrap="square" lIns="0" tIns="0" rIns="0" bIns="0" rtlCol="0" anchor="ctr"/>
-          <a:lstStyle/>
-          <a:p>
-            <a:pPr indent="0" marL="0">
-              <a:buNone/>
-            </a:pPr>
-            <a:r>
-              <a:rPr lang="en-US" sz="1200" i="1" dirty="0">
-                <a:solidFill>
-                  <a:srgbClr val="6B7280"/>
-                </a:solidFill>
-                <a:latin typeface="맑은 고딕" pitchFamily="34" charset="0"/>
-                <a:ea typeface="맑은 고딕" pitchFamily="34" charset="-122"/>
-                <a:cs typeface="맑은 고딕" pitchFamily="34" charset="-120"/>
-              </a:rPr>
-              <a:t>※ 기존 “DB 변경관리”를 대체 — 컨셉(고객 요구사항 기반 문서화)에 맞춰 재정의</a:t>
-            </a:r>
-            <a:endParaRPr lang="en-US" sz="1200" dirty="0"/>
+              <a:rPr lang="en-US" sz="1250" dirty="0">
+                <a:solidFill>
+                  <a:srgbClr val="C7D2FE"/>
+                </a:solidFill>
+                <a:latin typeface="맑은 고딕" pitchFamily="34" charset="0"/>
+                <a:ea typeface="맑은 고딕" pitchFamily="34" charset="-122"/>
+                <a:cs typeface="맑은 고딕" pitchFamily="34" charset="-120"/>
+              </a:rPr>
+              <a:t>  사진을 JPG로 압축하듯 용량↓·품질 소폭↓. 8B 원본(≈16GB)은 8GB GPU에 못 올라가 5.85GB로 압축해 사용.</a:t>
+            </a:r>
+            <a:endParaRPr lang="en-US" sz="1250" dirty="0"/>
           </a:p>
         </p:txBody>
       </p:sp>
@@ -4534,559 +3969,6 @@
 <file path=ppt/slides/slide14.xml><?xml version="1.0" encoding="utf-8"?>
 <p:sld xmlns:a="http://schemas.openxmlformats.org/drawingml/2006/main" xmlns:r="http://schemas.openxmlformats.org/officeDocument/2006/relationships" xmlns:p="http://schemas.openxmlformats.org/presentationml/2006/main">
   <p:cSld name="Slide 14">
-    <p:bg>
-      <p:bgPr>
-        <a:solidFill>
-          <a:srgbClr val="FFFFFF"/>
-        </a:solidFill>
-      </p:bgPr>
-    </p:bg>
-    <p:spTree>
-      <p:nvGrpSpPr>
-        <p:cNvPr id="1" name=""/>
-        <p:cNvGrpSpPr/>
-        <p:nvPr/>
-      </p:nvGrpSpPr>
-      <p:grpSpPr>
-        <a:xfrm>
-          <a:off x="0" y="0"/>
-          <a:ext cx="0" cy="0"/>
-          <a:chOff x="0" y="0"/>
-          <a:chExt cx="0" cy="0"/>
-        </a:xfrm>
-      </p:grpSpPr>
-      <p:sp>
-        <p:nvSpPr>
-          <p:cNvPr id="2" name="Text 0"/>
-          <p:cNvSpPr/>
-          <p:nvPr/>
-        </p:nvSpPr>
-        <p:spPr>
-          <a:xfrm>
-            <a:off x="566928" y="457200"/>
-            <a:ext cx="10058400" cy="274320"/>
-          </a:xfrm>
-          <a:prstGeom prst="rect">
-            <a:avLst/>
-          </a:prstGeom>
-          <a:noFill/>
-          <a:ln/>
-        </p:spPr>
-        <p:txBody>
-          <a:bodyPr wrap="square" lIns="0" tIns="0" rIns="0" bIns="0" rtlCol="0" anchor="ctr"/>
-          <a:lstStyle/>
-          <a:p>
-            <a:pPr indent="0" marL="0">
-              <a:buNone/>
-            </a:pPr>
-            <a:r>
-              <a:rPr lang="en-US" sz="1200" b="1" spc="100" kern="0" dirty="0">
-                <a:solidFill>
-                  <a:srgbClr val="6366F1"/>
-                </a:solidFill>
-                <a:latin typeface="맑은 고딕" pitchFamily="34" charset="0"/>
-                <a:ea typeface="맑은 고딕" pitchFamily="34" charset="-122"/>
-                <a:cs typeface="맑은 고딕" pitchFamily="34" charset="-120"/>
-              </a:rPr>
-              <a:t>AI</a:t>
-            </a:r>
-            <a:endParaRPr lang="en-US" sz="1200" dirty="0"/>
-          </a:p>
-        </p:txBody>
-      </p:sp>
-      <p:sp>
-        <p:nvSpPr>
-          <p:cNvPr id="3" name="Text 1"/>
-          <p:cNvSpPr/>
-          <p:nvPr/>
-        </p:nvSpPr>
-        <p:spPr>
-          <a:xfrm>
-            <a:off x="566928" y="749808"/>
-            <a:ext cx="10515600" cy="640080"/>
-          </a:xfrm>
-          <a:prstGeom prst="rect">
-            <a:avLst/>
-          </a:prstGeom>
-          <a:noFill/>
-          <a:ln/>
-        </p:spPr>
-        <p:txBody>
-          <a:bodyPr wrap="square" lIns="0" tIns="0" rIns="0" bIns="0" rtlCol="0" anchor="ctr"/>
-          <a:lstStyle/>
-          <a:p>
-            <a:pPr indent="0" marL="0">
-              <a:buNone/>
-            </a:pPr>
-            <a:r>
-              <a:rPr lang="en-US" sz="3000" b="1" dirty="0">
-                <a:solidFill>
-                  <a:srgbClr val="1F2937"/>
-                </a:solidFill>
-                <a:latin typeface="맑은 고딕" pitchFamily="34" charset="0"/>
-                <a:ea typeface="맑은 고딕" pitchFamily="34" charset="-122"/>
-                <a:cs typeface="맑은 고딕" pitchFamily="34" charset="-120"/>
-              </a:rPr>
-              <a:t>AI — 두 엔진 비교</a:t>
-            </a:r>
-            <a:endParaRPr lang="en-US" sz="3000" dirty="0"/>
-          </a:p>
-        </p:txBody>
-      </p:sp>
-      <p:sp>
-        <p:nvSpPr>
-          <p:cNvPr id="4" name="Shape 2"/>
-          <p:cNvSpPr/>
-          <p:nvPr/>
-        </p:nvSpPr>
-        <p:spPr>
-          <a:xfrm>
-            <a:off x="566928" y="1783080"/>
-            <a:ext cx="5440680" cy="2697480"/>
-          </a:xfrm>
-          <a:prstGeom prst="roundRect">
-            <a:avLst>
-              <a:gd name="adj" fmla="val 3390"/>
-            </a:avLst>
-          </a:prstGeom>
-          <a:solidFill>
-            <a:srgbClr val="EEF2FF"/>
-          </a:solidFill>
-          <a:ln w="12700">
-            <a:solidFill>
-              <a:srgbClr val="C7D2FE"/>
-            </a:solidFill>
-            <a:prstDash val="solid"/>
-          </a:ln>
-        </p:spPr>
-      </p:sp>
-      <p:sp>
-        <p:nvSpPr>
-          <p:cNvPr id="5" name="Text 3"/>
-          <p:cNvSpPr/>
-          <p:nvPr/>
-        </p:nvSpPr>
-        <p:spPr>
-          <a:xfrm>
-            <a:off x="886968" y="2011680"/>
-            <a:ext cx="4846320" cy="457200"/>
-          </a:xfrm>
-          <a:prstGeom prst="rect">
-            <a:avLst/>
-          </a:prstGeom>
-          <a:noFill/>
-          <a:ln/>
-        </p:spPr>
-        <p:txBody>
-          <a:bodyPr wrap="square" lIns="0" tIns="0" rIns="0" bIns="0" rtlCol="0" anchor="ctr"/>
-          <a:lstStyle/>
-          <a:p>
-            <a:pPr indent="0" marL="0">
-              <a:buNone/>
-            </a:pPr>
-            <a:r>
-              <a:rPr lang="en-US" sz="1900" b="1" dirty="0">
-                <a:solidFill>
-                  <a:srgbClr val="6366F1"/>
-                </a:solidFill>
-                <a:latin typeface="맑은 고딕" pitchFamily="34" charset="0"/>
-                <a:ea typeface="맑은 고딕" pitchFamily="34" charset="-122"/>
-                <a:cs typeface="맑은 고딕" pitchFamily="34" charset="-120"/>
-              </a:rPr>
-              <a:t>로컬 Qwen3-8B</a:t>
-            </a:r>
-            <a:endParaRPr lang="en-US" sz="1900" dirty="0"/>
-          </a:p>
-        </p:txBody>
-      </p:sp>
-      <p:sp>
-        <p:nvSpPr>
-          <p:cNvPr id="6" name="Text 4"/>
-          <p:cNvSpPr/>
-          <p:nvPr/>
-        </p:nvSpPr>
-        <p:spPr>
-          <a:xfrm>
-            <a:off x="932688" y="2606040"/>
-            <a:ext cx="4754880" cy="1737360"/>
-          </a:xfrm>
-          <a:prstGeom prst="rect">
-            <a:avLst/>
-          </a:prstGeom>
-          <a:noFill/>
-          <a:ln/>
-        </p:spPr>
-        <p:txBody>
-          <a:bodyPr wrap="square" lIns="0" tIns="0" rIns="0" bIns="0" rtlCol="0" anchor="ctr"/>
-          <a:lstStyle/>
-          <a:p>
-            <a:pPr marL="342900" indent="-342900">
-              <a:spcAft>
-                <a:spcPts val="700"/>
-              </a:spcAft>
-              <a:buSzPct val="100000"/>
-              <a:buChar char="•"/>
-            </a:pPr>
-            <a:r>
-              <a:rPr lang="en-US" sz="1300" dirty="0">
-                <a:solidFill>
-                  <a:srgbClr val="1F2937"/>
-                </a:solidFill>
-                <a:latin typeface="맑은 고딕" pitchFamily="34" charset="0"/>
-                <a:ea typeface="맑은 고딕" pitchFamily="34" charset="-122"/>
-                <a:cs typeface="맑은 고딕" pitchFamily="34" charset="-120"/>
-              </a:rPr>
-              <a:t>내 워크스테이션(P4000 8GB)에서 직접</a:t>
-            </a:r>
-            <a:endParaRPr lang="en-US" sz="1300" dirty="0"/>
-          </a:p>
-          <a:p>
-            <a:pPr marL="342900" indent="-342900">
-              <a:spcAft>
-                <a:spcPts val="700"/>
-              </a:spcAft>
-              <a:buSzPct val="100000"/>
-              <a:buChar char="•"/>
-            </a:pPr>
-            <a:r>
-              <a:rPr lang="en-US" sz="1300" dirty="0">
-                <a:solidFill>
-                  <a:srgbClr val="1F2937"/>
-                </a:solidFill>
-                <a:latin typeface="맑은 고딕" pitchFamily="34" charset="0"/>
-                <a:ea typeface="맑은 고딕" pitchFamily="34" charset="-122"/>
-                <a:cs typeface="맑은 고딕" pitchFamily="34" charset="-120"/>
-              </a:rPr>
-              <a:t>8B 모델 · GGUF 양자화 Q5_K_M(≈5.85GB)</a:t>
-            </a:r>
-            <a:endParaRPr lang="en-US" sz="1300" dirty="0"/>
-          </a:p>
-          <a:p>
-            <a:pPr marL="342900" indent="-342900">
-              <a:spcAft>
-                <a:spcPts val="700"/>
-              </a:spcAft>
-              <a:buSzPct val="100000"/>
-              <a:buChar char="•"/>
-            </a:pPr>
-            <a:r>
-              <a:rPr lang="en-US" sz="1300" dirty="0">
-                <a:solidFill>
-                  <a:srgbClr val="1F2937"/>
-                </a:solidFill>
-                <a:latin typeface="맑은 고딕" pitchFamily="34" charset="0"/>
-                <a:ea typeface="맑은 고딕" pitchFamily="34" charset="-122"/>
-                <a:cs typeface="맑은 고딕" pitchFamily="34" charset="-120"/>
-              </a:rPr>
-              <a:t>오프라인 자립 · 한국어 강점</a:t>
-            </a:r>
-            <a:endParaRPr lang="en-US" sz="1300" dirty="0"/>
-          </a:p>
-        </p:txBody>
-      </p:sp>
-      <p:sp>
-        <p:nvSpPr>
-          <p:cNvPr id="7" name="Shape 5"/>
-          <p:cNvSpPr/>
-          <p:nvPr/>
-        </p:nvSpPr>
-        <p:spPr>
-          <a:xfrm>
-            <a:off x="6327648" y="1783080"/>
-            <a:ext cx="5440680" cy="2697480"/>
-          </a:xfrm>
-          <a:prstGeom prst="roundRect">
-            <a:avLst>
-              <a:gd name="adj" fmla="val 3390"/>
-            </a:avLst>
-          </a:prstGeom>
-          <a:solidFill>
-            <a:srgbClr val="F5F3FF"/>
-          </a:solidFill>
-          <a:ln w="12700">
-            <a:solidFill>
-              <a:srgbClr val="DDD6FE"/>
-            </a:solidFill>
-            <a:prstDash val="solid"/>
-          </a:ln>
-        </p:spPr>
-      </p:sp>
-      <p:sp>
-        <p:nvSpPr>
-          <p:cNvPr id="8" name="Text 6"/>
-          <p:cNvSpPr/>
-          <p:nvPr/>
-        </p:nvSpPr>
-        <p:spPr>
-          <a:xfrm>
-            <a:off x="6647688" y="2011680"/>
-            <a:ext cx="4846320" cy="457200"/>
-          </a:xfrm>
-          <a:prstGeom prst="rect">
-            <a:avLst/>
-          </a:prstGeom>
-          <a:noFill/>
-          <a:ln/>
-        </p:spPr>
-        <p:txBody>
-          <a:bodyPr wrap="square" lIns="0" tIns="0" rIns="0" bIns="0" rtlCol="0" anchor="ctr"/>
-          <a:lstStyle/>
-          <a:p>
-            <a:pPr indent="0" marL="0">
-              <a:buNone/>
-            </a:pPr>
-            <a:r>
-              <a:rPr lang="en-US" sz="1900" b="1" dirty="0">
-                <a:solidFill>
-                  <a:srgbClr val="8B5CF6"/>
-                </a:solidFill>
-                <a:latin typeface="맑은 고딕" pitchFamily="34" charset="0"/>
-                <a:ea typeface="맑은 고딕" pitchFamily="34" charset="-122"/>
-                <a:cs typeface="맑은 고딕" pitchFamily="34" charset="-120"/>
-              </a:rPr>
-              <a:t>사내 GPT-OSS-120B</a:t>
-            </a:r>
-            <a:endParaRPr lang="en-US" sz="1900" dirty="0"/>
-          </a:p>
-        </p:txBody>
-      </p:sp>
-      <p:sp>
-        <p:nvSpPr>
-          <p:cNvPr id="9" name="Text 7"/>
-          <p:cNvSpPr/>
-          <p:nvPr/>
-        </p:nvSpPr>
-        <p:spPr>
-          <a:xfrm>
-            <a:off x="6693408" y="2606040"/>
-            <a:ext cx="4754880" cy="1737360"/>
-          </a:xfrm>
-          <a:prstGeom prst="rect">
-            <a:avLst/>
-          </a:prstGeom>
-          <a:noFill/>
-          <a:ln/>
-        </p:spPr>
-        <p:txBody>
-          <a:bodyPr wrap="square" lIns="0" tIns="0" rIns="0" bIns="0" rtlCol="0" anchor="ctr"/>
-          <a:lstStyle/>
-          <a:p>
-            <a:pPr marL="342900" indent="-342900">
-              <a:spcAft>
-                <a:spcPts val="700"/>
-              </a:spcAft>
-              <a:buSzPct val="100000"/>
-              <a:buChar char="•"/>
-            </a:pPr>
-            <a:r>
-              <a:rPr lang="en-US" sz="1300" dirty="0">
-                <a:solidFill>
-                  <a:srgbClr val="1F2937"/>
-                </a:solidFill>
-                <a:latin typeface="맑은 고딕" pitchFamily="34" charset="0"/>
-                <a:ea typeface="맑은 고딕" pitchFamily="34" charset="-122"/>
-                <a:cs typeface="맑은 고딕" pitchFamily="34" charset="-120"/>
-              </a:rPr>
-              <a:t>사내 LLM API 서비스(OpenAI 호환)</a:t>
-            </a:r>
-            <a:endParaRPr lang="en-US" sz="1300" dirty="0"/>
-          </a:p>
-          <a:p>
-            <a:pPr marL="342900" indent="-342900">
-              <a:spcAft>
-                <a:spcPts val="700"/>
-              </a:spcAft>
-              <a:buSzPct val="100000"/>
-              <a:buChar char="•"/>
-            </a:pPr>
-            <a:r>
-              <a:rPr lang="en-US" sz="1300" dirty="0">
-                <a:solidFill>
-                  <a:srgbClr val="1F2937"/>
-                </a:solidFill>
-                <a:latin typeface="맑은 고딕" pitchFamily="34" charset="0"/>
-                <a:ea typeface="맑은 고딕" pitchFamily="34" charset="-122"/>
-                <a:cs typeface="맑은 고딕" pitchFamily="34" charset="-120"/>
-              </a:rPr>
-              <a:t>훨씬 큰 모델 → 어려운 판단 정확도 유리</a:t>
-            </a:r>
-            <a:endParaRPr lang="en-US" sz="1300" dirty="0"/>
-          </a:p>
-          <a:p>
-            <a:pPr marL="342900" indent="-342900">
-              <a:spcAft>
-                <a:spcPts val="700"/>
-              </a:spcAft>
-              <a:buSzPct val="100000"/>
-              <a:buChar char="•"/>
-            </a:pPr>
-            <a:r>
-              <a:rPr lang="en-US" sz="1300" dirty="0">
-                <a:solidFill>
-                  <a:srgbClr val="1F2937"/>
-                </a:solidFill>
-                <a:latin typeface="맑은 고딕" pitchFamily="34" charset="0"/>
-                <a:ea typeface="맑은 고딕" pitchFamily="34" charset="-122"/>
-                <a:cs typeface="맑은 고딕" pitchFamily="34" charset="-120"/>
-              </a:rPr>
-              <a:t>공용 서버 의존</a:t>
-            </a:r>
-            <a:endParaRPr lang="en-US" sz="1300" dirty="0"/>
-          </a:p>
-        </p:txBody>
-      </p:sp>
-      <p:sp>
-        <p:nvSpPr>
-          <p:cNvPr id="10" name="Shape 8"/>
-          <p:cNvSpPr/>
-          <p:nvPr/>
-        </p:nvSpPr>
-        <p:spPr>
-          <a:xfrm>
-            <a:off x="566928" y="4709160"/>
-            <a:ext cx="11064240" cy="1463040"/>
-          </a:xfrm>
-          <a:prstGeom prst="roundRect">
-            <a:avLst>
-              <a:gd name="adj" fmla="val 6250"/>
-            </a:avLst>
-          </a:prstGeom>
-          <a:solidFill>
-            <a:srgbClr val="1E1B4B"/>
-          </a:solidFill>
-          <a:ln/>
-          <a:effectLst>
-            <a:outerShdw sx="100000" sy="100000" kx="0" ky="0" algn="bl" rotWithShape="0" blurRad="127000" dist="50800" dir="5400000">
-              <a:srgbClr val="1E1B4B">
-                <a:alpha val="18000"/>
-              </a:srgbClr>
-            </a:outerShdw>
-          </a:effectLst>
-        </p:spPr>
-      </p:sp>
-      <p:sp>
-        <p:nvSpPr>
-          <p:cNvPr id="11" name="Text 9"/>
-          <p:cNvSpPr/>
-          <p:nvPr/>
-        </p:nvSpPr>
-        <p:spPr>
-          <a:xfrm>
-            <a:off x="886968" y="4892040"/>
-            <a:ext cx="10424160" cy="457200"/>
-          </a:xfrm>
-          <a:prstGeom prst="rect">
-            <a:avLst/>
-          </a:prstGeom>
-          <a:noFill/>
-          <a:ln/>
-        </p:spPr>
-        <p:txBody>
-          <a:bodyPr wrap="square" lIns="0" tIns="0" rIns="0" bIns="0" rtlCol="0" anchor="ctr"/>
-          <a:lstStyle/>
-          <a:p>
-            <a:pPr indent="0" marL="0">
-              <a:buNone/>
-            </a:pPr>
-            <a:r>
-              <a:rPr lang="en-US" sz="1350" b="1" dirty="0">
-                <a:solidFill>
-                  <a:srgbClr val="FFFFFF"/>
-                </a:solidFill>
-                <a:latin typeface="맑은 고딕" pitchFamily="34" charset="0"/>
-                <a:ea typeface="맑은 고딕" pitchFamily="34" charset="-122"/>
-                <a:cs typeface="맑은 고딕" pitchFamily="34" charset="-120"/>
-              </a:rPr>
-              <a:t>응답 시간은 둘 다 3~5초로 비슷</a:t>
-            </a:r>
-            <a:pPr indent="0" marL="0">
-              <a:buNone/>
-            </a:pPr>
-            <a:r>
-              <a:rPr lang="en-US" sz="1350" dirty="0">
-                <a:solidFill>
-                  <a:srgbClr val="C7D2FE"/>
-                </a:solidFill>
-                <a:latin typeface="맑은 고딕" pitchFamily="34" charset="0"/>
-                <a:ea typeface="맑은 고딕" pitchFamily="34" charset="-122"/>
-                <a:cs typeface="맑은 고딕" pitchFamily="34" charset="-120"/>
-              </a:rPr>
-              <a:t> → 속도가 아니라 정확도·자립성으로 선택. 동일 요구사항 세트로 실측 후 확정.</a:t>
-            </a:r>
-            <a:endParaRPr lang="en-US" sz="1350" dirty="0"/>
-          </a:p>
-        </p:txBody>
-      </p:sp>
-      <p:sp>
-        <p:nvSpPr>
-          <p:cNvPr id="12" name="Text 10"/>
-          <p:cNvSpPr/>
-          <p:nvPr/>
-        </p:nvSpPr>
-        <p:spPr>
-          <a:xfrm>
-            <a:off x="886968" y="5440680"/>
-            <a:ext cx="10424160" cy="640080"/>
-          </a:xfrm>
-          <a:prstGeom prst="rect">
-            <a:avLst/>
-          </a:prstGeom>
-          <a:noFill/>
-          <a:ln/>
-        </p:spPr>
-        <p:txBody>
-          <a:bodyPr wrap="square" lIns="0" tIns="0" rIns="0" bIns="0" rtlCol="0" anchor="ctr"/>
-          <a:lstStyle/>
-          <a:p>
-            <a:pPr indent="0" marL="0">
-              <a:lnSpc>
-                <a:spcPct val="105000"/>
-              </a:lnSpc>
-              <a:buNone/>
-            </a:pPr>
-            <a:r>
-              <a:rPr lang="en-US" sz="1250" b="1" dirty="0">
-                <a:solidFill>
-                  <a:srgbClr val="A5B4FC"/>
-                </a:solidFill>
-                <a:latin typeface="맑은 고딕" pitchFamily="34" charset="0"/>
-                <a:ea typeface="맑은 고딕" pitchFamily="34" charset="-122"/>
-                <a:cs typeface="맑은 고딕" pitchFamily="34" charset="-120"/>
-              </a:rPr>
-              <a:t>양자화란?</a:t>
-            </a:r>
-            <a:pPr indent="0" marL="0">
-              <a:lnSpc>
-                <a:spcPct val="105000"/>
-              </a:lnSpc>
-              <a:buNone/>
-            </a:pPr>
-            <a:r>
-              <a:rPr lang="en-US" sz="1250" dirty="0">
-                <a:solidFill>
-                  <a:srgbClr val="C7D2FE"/>
-                </a:solidFill>
-                <a:latin typeface="맑은 고딕" pitchFamily="34" charset="0"/>
-                <a:ea typeface="맑은 고딕" pitchFamily="34" charset="-122"/>
-                <a:cs typeface="맑은 고딕" pitchFamily="34" charset="-120"/>
-              </a:rPr>
-              <a:t>  사진을 JPG로 압축하듯 용량↓·품질 소폭↓. 8B 원본(≈16GB)은 8GB GPU에 못 올라가 5.85GB로 압축해 사용.</a:t>
-            </a:r>
-            <a:endParaRPr lang="en-US" sz="1250" dirty="0"/>
-          </a:p>
-        </p:txBody>
-      </p:sp>
-    </p:spTree>
-  </p:cSld>
-  <p:clrMapOvr>
-    <a:masterClrMapping/>
-  </p:clrMapOvr>
-</p:sld>
-</file>
-
-<file path=ppt/slides/slide15.xml><?xml version="1.0" encoding="utf-8"?>
-<p:sld xmlns:a="http://schemas.openxmlformats.org/drawingml/2006/main" xmlns:r="http://schemas.openxmlformats.org/officeDocument/2006/relationships" xmlns:p="http://schemas.openxmlformats.org/presentationml/2006/main">
-  <p:cSld name="Slide 15">
     <p:bg>
       <p:bgPr>
         <a:solidFill>
@@ -5674,9 +4556,9 @@
 </p:sld>
 </file>
 
-<file path=ppt/slides/slide16.xml><?xml version="1.0" encoding="utf-8"?>
+<file path=ppt/slides/slide15.xml><?xml version="1.0" encoding="utf-8"?>
 <p:sld xmlns:a="http://schemas.openxmlformats.org/drawingml/2006/main" xmlns:r="http://schemas.openxmlformats.org/officeDocument/2006/relationships" xmlns:p="http://schemas.openxmlformats.org/presentationml/2006/main">
-  <p:cSld name="Slide 16">
+  <p:cSld name="Slide 15">
     <p:bg>
       <p:bgPr>
         <a:solidFill>
@@ -7281,7 +6163,7 @@
                 <a:ea typeface="맑은 고딕" pitchFamily="34" charset="-122"/>
                 <a:cs typeface="맑은 고딕" pitchFamily="34" charset="-120"/>
               </a:rPr>
-              <a:t>문서·티켓 자동 생성</a:t>
+              <a:t>산출물 도출</a:t>
             </a:r>
             <a:endParaRPr lang="en-US" sz="1900" dirty="0"/>
           </a:p>
@@ -7323,7 +6205,7 @@
                 <a:ea typeface="맑은 고딕" pitchFamily="34" charset="-122"/>
                 <a:cs typeface="맑은 고딕" pitchFamily="34" charset="-120"/>
               </a:rPr>
-              <a:t>기능·비기능 요구사항과 SWVOC·상세설계·티켓 등 초안을 자동 생성</a:t>
+              <a:t>확정 요구사항에서 기능·비기능 요구사항·티켓·상세설계 등 산출물 초안을 자동 도출</a:t>
             </a:r>
             <a:endParaRPr lang="en-US" sz="1300" dirty="0"/>
           </a:p>
@@ -7519,7 +6401,7 @@
                 <a:ea typeface="맑은 고딕" pitchFamily="34" charset="-122"/>
                 <a:cs typeface="맑은 고딕" pitchFamily="34" charset="-120"/>
               </a:rPr>
-              <a:t>문서 추적성</a:t>
+              <a:t>산출물 관리 (추적성)</a:t>
             </a:r>
             <a:endParaRPr lang="en-US" sz="1900" dirty="0"/>
           </a:p>
@@ -7561,7 +6443,7 @@
                 <a:ea typeface="맑은 고딕" pitchFamily="34" charset="-122"/>
                 <a:cs typeface="맑은 고딕" pitchFamily="34" charset="-120"/>
               </a:rPr>
-              <a:t>요구사항별 연결 산출물을 한눈에 — 영향 범위·진행상황까지 관리</a:t>
+              <a:t>요구사항별 연결 산출물을 한눈에 — 변경 영향·진행상황까지 관리</a:t>
             </a:r>
             <a:endParaRPr lang="en-US" sz="1300" dirty="0"/>
           </a:p>

--- a/docs/진행공유_요구사항자동화.pptx
+++ b/docs/진행공유_요구사항자동화.pptx
@@ -2900,89 +2900,14 @@
       </p:sp>
       <p:sp>
         <p:nvSpPr>
-          <p:cNvPr id="5" name="Shape 3"/>
-          <p:cNvSpPr/>
-          <p:nvPr/>
-        </p:nvSpPr>
-        <p:spPr>
-          <a:xfrm>
-            <a:off x="566928" y="1874520"/>
-            <a:ext cx="11064240" cy="1097280"/>
-          </a:xfrm>
-          <a:prstGeom prst="roundRect">
-            <a:avLst>
-              <a:gd name="adj" fmla="val 6667"/>
-            </a:avLst>
-          </a:prstGeom>
-          <a:solidFill>
-            <a:srgbClr val="FFFFFF"/>
-          </a:solidFill>
-          <a:ln w="12700">
-            <a:solidFill>
-              <a:srgbClr val="E5E7EB"/>
-            </a:solidFill>
-            <a:prstDash val="solid"/>
-          </a:ln>
-          <a:effectLst>
-            <a:outerShdw sx="100000" sy="100000" kx="0" ky="0" algn="bl" rotWithShape="0" blurRad="127000" dist="50800" dir="5400000">
-              <a:srgbClr val="1E1B4B">
-                <a:alpha val="18000"/>
-              </a:srgbClr>
-            </a:outerShdw>
-          </a:effectLst>
-        </p:spPr>
-      </p:sp>
-      <p:sp>
-        <p:nvSpPr>
-          <p:cNvPr id="6" name="Text 4"/>
-          <p:cNvSpPr/>
-          <p:nvPr/>
-        </p:nvSpPr>
-        <p:spPr>
-          <a:xfrm>
-            <a:off x="822960" y="2167128"/>
-            <a:ext cx="512064" cy="512064"/>
-          </a:xfrm>
-          <a:prstGeom prst="ellipse">
-            <a:avLst/>
-          </a:prstGeom>
-          <a:solidFill>
-            <a:srgbClr val="8B5CF6"/>
-          </a:solidFill>
-          <a:ln/>
-        </p:spPr>
-        <p:txBody>
-          <a:bodyPr wrap="square" lIns="0" tIns="0" rIns="0" bIns="0" rtlCol="0" anchor="ctr"/>
-          <a:lstStyle/>
-          <a:p>
-            <a:pPr algn="ctr" indent="0" marL="0">
-              <a:buNone/>
-            </a:pPr>
-            <a:r>
-              <a:rPr lang="en-US" sz="1800" b="1" dirty="0">
-                <a:solidFill>
-                  <a:srgbClr val="FFFFFF"/>
-                </a:solidFill>
-                <a:latin typeface="맑은 고딕" pitchFamily="34" charset="0"/>
-                <a:ea typeface="맑은 고딕" pitchFamily="34" charset="-122"/>
-                <a:cs typeface="맑은 고딕" pitchFamily="34" charset="-120"/>
-              </a:rPr>
-              <a:t>1</a:t>
-            </a:r>
-            <a:endParaRPr lang="en-US" sz="1800" dirty="0"/>
-          </a:p>
-        </p:txBody>
-      </p:sp>
-      <p:sp>
-        <p:nvSpPr>
-          <p:cNvPr id="7" name="Text 5"/>
-          <p:cNvSpPr/>
-          <p:nvPr/>
-        </p:nvSpPr>
-        <p:spPr>
-          <a:xfrm>
-            <a:off x="1527048" y="2039112"/>
-            <a:ext cx="2926080" cy="731520"/>
+          <p:cNvPr id="5" name="Text 3"/>
+          <p:cNvSpPr/>
+          <p:nvPr/>
+        </p:nvSpPr>
+        <p:spPr>
+          <a:xfrm>
+            <a:off x="566928" y="1737360"/>
+            <a:ext cx="11064240" cy="365760"/>
           </a:xfrm>
           <a:prstGeom prst="rect">
             <a:avLst/>
@@ -2998,7 +2923,21 @@
               <a:buNone/>
             </a:pPr>
             <a:r>
-              <a:rPr lang="en-US" sz="1700" b="1" dirty="0">
+              <a:rPr lang="en-US" sz="1500" b="1" dirty="0">
+                <a:solidFill>
+                  <a:srgbClr val="8B5CF6"/>
+                </a:solidFill>
+                <a:latin typeface="맑은 고딕" pitchFamily="34" charset="0"/>
+                <a:ea typeface="맑은 고딕" pitchFamily="34" charset="-122"/>
+                <a:cs typeface="맑은 고딕" pitchFamily="34" charset="-120"/>
+              </a:rPr>
+              <a:t>관리 </a:t>
+            </a:r>
+            <a:pPr indent="0" marL="0">
+              <a:buNone/>
+            </a:pPr>
+            <a:r>
+              <a:rPr lang="en-US" sz="1500" dirty="0">
                 <a:solidFill>
                   <a:srgbClr val="1F2937"/>
                 </a:solidFill>
@@ -3006,405 +2945,36 @@
                 <a:ea typeface="맑은 고딕" pitchFamily="34" charset="-122"/>
                 <a:cs typeface="맑은 고딕" pitchFamily="34" charset="-120"/>
               </a:rPr>
-              <a:t>연결 조회</a:t>
-            </a:r>
-            <a:endParaRPr lang="en-US" sz="1700" dirty="0"/>
-          </a:p>
-        </p:txBody>
-      </p:sp>
-      <p:sp>
-        <p:nvSpPr>
-          <p:cNvPr id="8" name="Text 6"/>
-          <p:cNvSpPr/>
-          <p:nvPr/>
-        </p:nvSpPr>
-        <p:spPr>
-          <a:xfrm>
-            <a:off x="4498848" y="2039112"/>
-            <a:ext cx="6858000" cy="777240"/>
-          </a:xfrm>
-          <a:prstGeom prst="rect">
-            <a:avLst/>
-          </a:prstGeom>
-          <a:noFill/>
-          <a:ln/>
-        </p:spPr>
-        <p:txBody>
-          <a:bodyPr wrap="square" lIns="0" tIns="0" rIns="0" bIns="0" rtlCol="0" anchor="ctr"/>
-          <a:lstStyle/>
-          <a:p>
-            <a:pPr indent="0" marL="0">
-              <a:lnSpc>
-                <a:spcPct val="105000"/>
-              </a:lnSpc>
-              <a:buNone/>
-            </a:pPr>
-            <a:r>
-              <a:rPr lang="en-US" sz="1300" dirty="0">
-                <a:solidFill>
-                  <a:srgbClr val="6B7280"/>
-                </a:solidFill>
-                <a:latin typeface="맑은 고딕" pitchFamily="34" charset="0"/>
-                <a:ea typeface="맑은 고딕" pitchFamily="34" charset="-122"/>
-                <a:cs typeface="맑은 고딕" pitchFamily="34" charset="-120"/>
-              </a:rPr>
-              <a:t>요구사항 1건에 연결된 기능요구사항·비기능요구사항·티켓을 한눈에 조회 (양방향)</a:t>
-            </a:r>
-            <a:endParaRPr lang="en-US" sz="1300" dirty="0"/>
-          </a:p>
-        </p:txBody>
-      </p:sp>
-      <p:sp>
-        <p:nvSpPr>
-          <p:cNvPr id="9" name="Shape 7"/>
-          <p:cNvSpPr/>
-          <p:nvPr/>
-        </p:nvSpPr>
-        <p:spPr>
-          <a:xfrm>
-            <a:off x="566928" y="3154680"/>
-            <a:ext cx="11064240" cy="1097280"/>
-          </a:xfrm>
-          <a:prstGeom prst="roundRect">
-            <a:avLst>
-              <a:gd name="adj" fmla="val 6667"/>
-            </a:avLst>
-          </a:prstGeom>
-          <a:solidFill>
-            <a:srgbClr val="FFFFFF"/>
-          </a:solidFill>
-          <a:ln w="12700">
-            <a:solidFill>
-              <a:srgbClr val="E5E7EB"/>
-            </a:solidFill>
-            <a:prstDash val="solid"/>
-          </a:ln>
-          <a:effectLst>
-            <a:outerShdw sx="100000" sy="100000" kx="0" ky="0" algn="bl" rotWithShape="0" blurRad="127000" dist="50800" dir="5400000">
-              <a:srgbClr val="1E1B4B">
-                <a:alpha val="18000"/>
-              </a:srgbClr>
-            </a:outerShdw>
-          </a:effectLst>
-        </p:spPr>
-      </p:sp>
-      <p:sp>
-        <p:nvSpPr>
-          <p:cNvPr id="10" name="Text 8"/>
-          <p:cNvSpPr/>
-          <p:nvPr/>
-        </p:nvSpPr>
-        <p:spPr>
-          <a:xfrm>
-            <a:off x="822960" y="3447288"/>
-            <a:ext cx="512064" cy="512064"/>
-          </a:xfrm>
-          <a:prstGeom prst="ellipse">
-            <a:avLst/>
-          </a:prstGeom>
-          <a:solidFill>
-            <a:srgbClr val="8B5CF6"/>
-          </a:solidFill>
-          <a:ln/>
-        </p:spPr>
-        <p:txBody>
-          <a:bodyPr wrap="square" lIns="0" tIns="0" rIns="0" bIns="0" rtlCol="0" anchor="ctr"/>
-          <a:lstStyle/>
-          <a:p>
-            <a:pPr algn="ctr" indent="0" marL="0">
-              <a:buNone/>
-            </a:pPr>
-            <a:r>
-              <a:rPr lang="en-US" sz="1800" b="1" dirty="0">
-                <a:solidFill>
-                  <a:srgbClr val="FFFFFF"/>
-                </a:solidFill>
-                <a:latin typeface="맑은 고딕" pitchFamily="34" charset="0"/>
-                <a:ea typeface="맑은 고딕" pitchFamily="34" charset="-122"/>
-                <a:cs typeface="맑은 고딕" pitchFamily="34" charset="-120"/>
-              </a:rPr>
-              <a:t>2</a:t>
-            </a:r>
-            <a:endParaRPr lang="en-US" sz="1800" dirty="0"/>
-          </a:p>
-        </p:txBody>
-      </p:sp>
-      <p:sp>
-        <p:nvSpPr>
-          <p:cNvPr id="11" name="Text 9"/>
-          <p:cNvSpPr/>
-          <p:nvPr/>
-        </p:nvSpPr>
-        <p:spPr>
-          <a:xfrm>
-            <a:off x="1527048" y="3319272"/>
-            <a:ext cx="2926080" cy="731520"/>
-          </a:xfrm>
-          <a:prstGeom prst="rect">
-            <a:avLst/>
-          </a:prstGeom>
-          <a:noFill/>
-          <a:ln/>
-        </p:spPr>
-        <p:txBody>
-          <a:bodyPr wrap="square" lIns="0" tIns="0" rIns="0" bIns="0" rtlCol="0" anchor="ctr"/>
-          <a:lstStyle/>
-          <a:p>
-            <a:pPr indent="0" marL="0">
-              <a:buNone/>
-            </a:pPr>
-            <a:r>
-              <a:rPr lang="en-US" sz="1700" b="1" dirty="0">
-                <a:solidFill>
-                  <a:srgbClr val="1F2937"/>
-                </a:solidFill>
-                <a:latin typeface="맑은 고딕" pitchFamily="34" charset="0"/>
-                <a:ea typeface="맑은 고딕" pitchFamily="34" charset="-122"/>
-                <a:cs typeface="맑은 고딕" pitchFamily="34" charset="-120"/>
-              </a:rPr>
-              <a:t>변경 영향 분석</a:t>
-            </a:r>
-            <a:endParaRPr lang="en-US" sz="1700" dirty="0"/>
-          </a:p>
-        </p:txBody>
-      </p:sp>
-      <p:sp>
-        <p:nvSpPr>
-          <p:cNvPr id="12" name="Text 10"/>
-          <p:cNvSpPr/>
-          <p:nvPr/>
-        </p:nvSpPr>
-        <p:spPr>
-          <a:xfrm>
-            <a:off x="4498848" y="3319272"/>
-            <a:ext cx="6858000" cy="777240"/>
-          </a:xfrm>
-          <a:prstGeom prst="rect">
-            <a:avLst/>
-          </a:prstGeom>
-          <a:noFill/>
-          <a:ln/>
-        </p:spPr>
-        <p:txBody>
-          <a:bodyPr wrap="square" lIns="0" tIns="0" rIns="0" bIns="0" rtlCol="0" anchor="ctr"/>
-          <a:lstStyle/>
-          <a:p>
-            <a:pPr indent="0" marL="0">
-              <a:lnSpc>
-                <a:spcPct val="105000"/>
-              </a:lnSpc>
-              <a:buNone/>
-            </a:pPr>
-            <a:r>
-              <a:rPr lang="en-US" sz="1300" dirty="0">
-                <a:solidFill>
-                  <a:srgbClr val="6B7280"/>
-                </a:solidFill>
-                <a:latin typeface="맑은 고딕" pitchFamily="34" charset="0"/>
-                <a:ea typeface="맑은 고딕" pitchFamily="34" charset="-122"/>
-                <a:cs typeface="맑은 고딕" pitchFamily="34" charset="-120"/>
-              </a:rPr>
-              <a:t>요구사항이 수정되면 영향받는 문서·티켓을 자동으로 표시 → 누락 방지</a:t>
-            </a:r>
-            <a:endParaRPr lang="en-US" sz="1300" dirty="0"/>
-          </a:p>
-        </p:txBody>
-      </p:sp>
-      <p:sp>
-        <p:nvSpPr>
-          <p:cNvPr id="13" name="Shape 11"/>
-          <p:cNvSpPr/>
-          <p:nvPr/>
-        </p:nvSpPr>
-        <p:spPr>
-          <a:xfrm>
-            <a:off x="566928" y="4434840"/>
-            <a:ext cx="11064240" cy="1097280"/>
-          </a:xfrm>
-          <a:prstGeom prst="roundRect">
-            <a:avLst>
-              <a:gd name="adj" fmla="val 6667"/>
-            </a:avLst>
-          </a:prstGeom>
-          <a:solidFill>
-            <a:srgbClr val="EEF2FF"/>
-          </a:solidFill>
-          <a:ln w="12700">
-            <a:solidFill>
-              <a:srgbClr val="E5E7EB"/>
-            </a:solidFill>
-            <a:prstDash val="solid"/>
-          </a:ln>
-          <a:effectLst>
-            <a:outerShdw sx="100000" sy="100000" kx="0" ky="0" algn="bl" rotWithShape="0" blurRad="127000" dist="50800" dir="5400000">
-              <a:srgbClr val="1E1B4B">
-                <a:alpha val="18000"/>
-              </a:srgbClr>
-            </a:outerShdw>
-          </a:effectLst>
-        </p:spPr>
-      </p:sp>
-      <p:sp>
-        <p:nvSpPr>
-          <p:cNvPr id="14" name="Text 12"/>
-          <p:cNvSpPr/>
-          <p:nvPr/>
-        </p:nvSpPr>
-        <p:spPr>
-          <a:xfrm>
-            <a:off x="822960" y="4727448"/>
-            <a:ext cx="512064" cy="512064"/>
-          </a:xfrm>
-          <a:prstGeom prst="ellipse">
-            <a:avLst/>
-          </a:prstGeom>
-          <a:solidFill>
-            <a:srgbClr val="8B5CF6"/>
-          </a:solidFill>
-          <a:ln/>
-        </p:spPr>
-        <p:txBody>
-          <a:bodyPr wrap="square" lIns="0" tIns="0" rIns="0" bIns="0" rtlCol="0" anchor="ctr"/>
-          <a:lstStyle/>
-          <a:p>
-            <a:pPr algn="ctr" indent="0" marL="0">
-              <a:buNone/>
-            </a:pPr>
-            <a:r>
-              <a:rPr lang="en-US" sz="1800" b="1" dirty="0">
-                <a:solidFill>
-                  <a:srgbClr val="FFFFFF"/>
-                </a:solidFill>
-                <a:latin typeface="맑은 고딕" pitchFamily="34" charset="0"/>
-                <a:ea typeface="맑은 고딕" pitchFamily="34" charset="-122"/>
-                <a:cs typeface="맑은 고딕" pitchFamily="34" charset="-120"/>
-              </a:rPr>
-              <a:t>3</a:t>
-            </a:r>
-            <a:endParaRPr lang="en-US" sz="1800" dirty="0"/>
-          </a:p>
-        </p:txBody>
-      </p:sp>
-      <p:sp>
-        <p:nvSpPr>
-          <p:cNvPr id="15" name="Text 13"/>
-          <p:cNvSpPr/>
-          <p:nvPr/>
-        </p:nvSpPr>
-        <p:spPr>
-          <a:xfrm>
-            <a:off x="1527048" y="4599432"/>
-            <a:ext cx="2926080" cy="731520"/>
-          </a:xfrm>
-          <a:prstGeom prst="rect">
-            <a:avLst/>
-          </a:prstGeom>
-          <a:noFill/>
-          <a:ln/>
-        </p:spPr>
-        <p:txBody>
-          <a:bodyPr wrap="square" lIns="0" tIns="0" rIns="0" bIns="0" rtlCol="0" anchor="ctr"/>
-          <a:lstStyle/>
-          <a:p>
-            <a:pPr indent="0" marL="0">
-              <a:buNone/>
-            </a:pPr>
-            <a:r>
-              <a:rPr lang="en-US" sz="1700" b="1" dirty="0">
-                <a:solidFill>
-                  <a:srgbClr val="1F2937"/>
-                </a:solidFill>
-                <a:latin typeface="맑은 고딕" pitchFamily="34" charset="0"/>
-                <a:ea typeface="맑은 고딕" pitchFamily="34" charset="-122"/>
-                <a:cs typeface="맑은 고딕" pitchFamily="34" charset="-120"/>
-              </a:rPr>
-              <a:t>진행상황 / 개발완료</a:t>
-            </a:r>
-            <a:endParaRPr lang="en-US" sz="1700" dirty="0"/>
-          </a:p>
-        </p:txBody>
-      </p:sp>
-      <p:sp>
-        <p:nvSpPr>
-          <p:cNvPr id="16" name="Text 14"/>
-          <p:cNvSpPr/>
-          <p:nvPr/>
-        </p:nvSpPr>
-        <p:spPr>
-          <a:xfrm>
-            <a:off x="4498848" y="4599432"/>
-            <a:ext cx="6858000" cy="777240"/>
-          </a:xfrm>
-          <a:prstGeom prst="rect">
-            <a:avLst/>
-          </a:prstGeom>
-          <a:noFill/>
-          <a:ln/>
-        </p:spPr>
-        <p:txBody>
-          <a:bodyPr wrap="square" lIns="0" tIns="0" rIns="0" bIns="0" rtlCol="0" anchor="ctr"/>
-          <a:lstStyle/>
-          <a:p>
-            <a:pPr indent="0" marL="0">
-              <a:lnSpc>
-                <a:spcPct val="105000"/>
-              </a:lnSpc>
-              <a:buNone/>
-            </a:pPr>
-            <a:r>
-              <a:rPr lang="en-US" sz="1300" dirty="0">
-                <a:solidFill>
-                  <a:srgbClr val="6B7280"/>
-                </a:solidFill>
-                <a:latin typeface="맑은 고딕" pitchFamily="34" charset="0"/>
-                <a:ea typeface="맑은 고딕" pitchFamily="34" charset="-122"/>
-                <a:cs typeface="맑은 고딕" pitchFamily="34" charset="-120"/>
-              </a:rPr>
-              <a:t>요구사항·티켓의 상태(작성중·검토·개발중·완료)와 진행률을 한눈에</a:t>
-            </a:r>
-            <a:endParaRPr lang="en-US" sz="1300" dirty="0"/>
-          </a:p>
-        </p:txBody>
-      </p:sp>
-      <p:sp>
-        <p:nvSpPr>
-          <p:cNvPr id="17" name="Text 15"/>
-          <p:cNvSpPr/>
-          <p:nvPr/>
-        </p:nvSpPr>
-        <p:spPr>
-          <a:xfrm>
-            <a:off x="566928" y="5943600"/>
-            <a:ext cx="10972800" cy="365760"/>
-          </a:xfrm>
-          <a:prstGeom prst="rect">
-            <a:avLst/>
-          </a:prstGeom>
-          <a:noFill/>
-          <a:ln/>
-        </p:spPr>
-        <p:txBody>
-          <a:bodyPr wrap="square" lIns="0" tIns="0" rIns="0" bIns="0" rtlCol="0" anchor="ctr"/>
-          <a:lstStyle/>
-          <a:p>
-            <a:pPr indent="0" marL="0">
-              <a:buNone/>
-            </a:pPr>
-            <a:r>
-              <a:rPr lang="en-US" sz="1200" i="1" dirty="0">
-                <a:solidFill>
-                  <a:srgbClr val="6B7280"/>
-                </a:solidFill>
-                <a:latin typeface="맑은 고딕" pitchFamily="34" charset="0"/>
-                <a:ea typeface="맑은 고딕" pitchFamily="34" charset="-122"/>
-                <a:cs typeface="맑은 고딕" pitchFamily="34" charset="-120"/>
-              </a:rPr>
-              <a:t>※ 기존 “DB 변경관리”를 대체 — 컨셉(고객 요구사항 기반 문서화)에 맞춰 재정의</a:t>
-            </a:r>
-            <a:endParaRPr lang="en-US" sz="1200" dirty="0"/>
-          </a:p>
-        </p:txBody>
-      </p:sp>
+              <a:t>— 요구사항과 산출물을 연결해 두고, 요구사항이 바뀌면 영향받는 산출물과 진행상황을 자동으로 보여준다.</a:t>
+            </a:r>
+            <a:endParaRPr lang="en-US" sz="1500" dirty="0"/>
+          </a:p>
+        </p:txBody>
+      </p:sp>
+      <p:pic>
+        <p:nvPicPr>
+          <p:cNvPr id="6" name="Image 0" descr="/home/user/semes-superrookie/docs/img/ppt-trace.png">    </p:cNvPr>
+          <p:cNvPicPr>
+            <a:picLocks noChangeAspect="1"/>
+          </p:cNvPicPr>
+          <p:nvPr/>
+        </p:nvPicPr>
+        <p:blipFill>
+          <a:blip r:embed="rId1"/>
+          <a:stretch>
+            <a:fillRect/>
+          </a:stretch>
+        </p:blipFill>
+        <p:spPr>
+          <a:xfrm>
+            <a:off x="722376" y="2286000"/>
+            <a:ext cx="10744200" cy="4321454"/>
+          </a:xfrm>
+          <a:prstGeom prst="rect">
+            <a:avLst/>
+          </a:prstGeom>
+        </p:spPr>
+      </p:pic>
     </p:spTree>
   </p:cSld>
   <p:clrMapOvr>

--- a/docs/진행공유_요구사항자동화.pptx
+++ b/docs/진행공유_요구사항자동화.pptx
@@ -2906,8 +2906,8 @@
         </p:nvSpPr>
         <p:spPr>
           <a:xfrm>
-            <a:off x="566928" y="1737360"/>
-            <a:ext cx="11064240" cy="365760"/>
+            <a:off x="566928" y="1572768"/>
+            <a:ext cx="11064240" cy="320040"/>
           </a:xfrm>
           <a:prstGeom prst="rect">
             <a:avLst/>
@@ -2923,37 +2923,37 @@
               <a:buNone/>
             </a:pPr>
             <a:r>
-              <a:rPr lang="en-US" sz="1500" b="1" dirty="0">
-                <a:solidFill>
-                  <a:srgbClr val="8B5CF6"/>
-                </a:solidFill>
-                <a:latin typeface="맑은 고딕" pitchFamily="34" charset="0"/>
-                <a:ea typeface="맑은 고딕" pitchFamily="34" charset="-122"/>
-                <a:cs typeface="맑은 고딕" pitchFamily="34" charset="-120"/>
-              </a:rPr>
-              <a:t>관리 </a:t>
+              <a:rPr lang="en-US" sz="1400" b="1" dirty="0">
+                <a:solidFill>
+                  <a:srgbClr val="1F2937"/>
+                </a:solidFill>
+                <a:latin typeface="맑은 고딕" pitchFamily="34" charset="0"/>
+                <a:ea typeface="맑은 고딕" pitchFamily="34" charset="-122"/>
+                <a:cs typeface="맑은 고딕" pitchFamily="34" charset="-120"/>
+              </a:rPr>
+              <a:t>① 연결 관리 </a:t>
             </a:r>
             <a:pPr indent="0" marL="0">
               <a:buNone/>
             </a:pPr>
             <a:r>
-              <a:rPr lang="en-US" sz="1500" dirty="0">
-                <a:solidFill>
-                  <a:srgbClr val="1F2937"/>
-                </a:solidFill>
-                <a:latin typeface="맑은 고딕" pitchFamily="34" charset="0"/>
-                <a:ea typeface="맑은 고딕" pitchFamily="34" charset="-122"/>
-                <a:cs typeface="맑은 고딕" pitchFamily="34" charset="-120"/>
-              </a:rPr>
-              <a:t>— 요구사항과 산출물을 연결해 두고, 요구사항이 바뀌면 영향받는 산출물과 진행상황을 자동으로 보여준다.</a:t>
-            </a:r>
-            <a:endParaRPr lang="en-US" sz="1500" dirty="0"/>
+              <a:rPr lang="en-US" sz="1400" dirty="0">
+                <a:solidFill>
+                  <a:srgbClr val="6B7280"/>
+                </a:solidFill>
+                <a:latin typeface="맑은 고딕" pitchFamily="34" charset="0"/>
+                <a:ea typeface="맑은 고딕" pitchFamily="34" charset="-122"/>
+                <a:cs typeface="맑은 고딕" pitchFamily="34" charset="-120"/>
+              </a:rPr>
+              <a:t>— 요구사항 하나에 어떤 산출물이 물려 있는지 (양방향 조회)</a:t>
+            </a:r>
+            <a:endParaRPr lang="en-US" sz="1400" dirty="0"/>
           </a:p>
         </p:txBody>
       </p:sp>
       <p:pic>
         <p:nvPicPr>
-          <p:cNvPr id="6" name="Image 0" descr="/home/user/semes-superrookie/docs/img/ppt-trace.png">    </p:cNvPr>
+          <p:cNvPr id="6" name="Image 0" descr="/home/user/semes-superrookie/docs/img/ppt-trace-1.png">    </p:cNvPr>
           <p:cNvPicPr>
             <a:picLocks noChangeAspect="1"/>
           </p:cNvPicPr>
@@ -2967,8 +2967,85 @@
         </p:blipFill>
         <p:spPr>
           <a:xfrm>
-            <a:off x="722376" y="2286000"/>
-            <a:ext cx="10744200" cy="4321454"/>
+            <a:off x="699516" y="1938528"/>
+            <a:ext cx="10789920" cy="2081174"/>
+          </a:xfrm>
+          <a:prstGeom prst="rect">
+            <a:avLst/>
+          </a:prstGeom>
+        </p:spPr>
+      </p:pic>
+      <p:sp>
+        <p:nvSpPr>
+          <p:cNvPr id="7" name="Text 4"/>
+          <p:cNvSpPr/>
+          <p:nvPr/>
+        </p:nvSpPr>
+        <p:spPr>
+          <a:xfrm>
+            <a:off x="566928" y="4224528"/>
+            <a:ext cx="11064240" cy="320040"/>
+          </a:xfrm>
+          <a:prstGeom prst="rect">
+            <a:avLst/>
+          </a:prstGeom>
+          <a:noFill/>
+          <a:ln/>
+        </p:spPr>
+        <p:txBody>
+          <a:bodyPr wrap="square" lIns="0" tIns="0" rIns="0" bIns="0" rtlCol="0" anchor="ctr"/>
+          <a:lstStyle/>
+          <a:p>
+            <a:pPr indent="0" marL="0">
+              <a:buNone/>
+            </a:pPr>
+            <a:r>
+              <a:rPr lang="en-US" sz="1400" b="1" dirty="0">
+                <a:solidFill>
+                  <a:srgbClr val="1F2937"/>
+                </a:solidFill>
+                <a:latin typeface="맑은 고딕" pitchFamily="34" charset="0"/>
+                <a:ea typeface="맑은 고딕" pitchFamily="34" charset="-122"/>
+                <a:cs typeface="맑은 고딕" pitchFamily="34" charset="-120"/>
+              </a:rPr>
+              <a:t>② 변경 추적 </a:t>
+            </a:r>
+            <a:pPr indent="0" marL="0">
+              <a:buNone/>
+            </a:pPr>
+            <a:r>
+              <a:rPr lang="en-US" sz="1400" dirty="0">
+                <a:solidFill>
+                  <a:srgbClr val="6B7280"/>
+                </a:solidFill>
+                <a:latin typeface="맑은 고딕" pitchFamily="34" charset="0"/>
+                <a:ea typeface="맑은 고딕" pitchFamily="34" charset="-122"/>
+                <a:cs typeface="맑은 고딕" pitchFamily="34" charset="-120"/>
+              </a:rPr>
+              <a:t>— 요구사항이 바뀌면, 그걸 근거로 만든 산출물을 자동으로 찾아 알림</a:t>
+            </a:r>
+            <a:endParaRPr lang="en-US" sz="1400" dirty="0"/>
+          </a:p>
+        </p:txBody>
+      </p:sp>
+      <p:pic>
+        <p:nvPicPr>
+          <p:cNvPr id="8" name="Image 1" descr="/home/user/semes-superrookie/docs/img/ppt-trace-2.png">    </p:cNvPr>
+          <p:cNvPicPr>
+            <a:picLocks noChangeAspect="1"/>
+          </p:cNvPicPr>
+          <p:nvPr/>
+        </p:nvPicPr>
+        <p:blipFill>
+          <a:blip r:embed="rId2"/>
+          <a:stretch>
+            <a:fillRect/>
+          </a:stretch>
+        </p:blipFill>
+        <p:spPr>
+          <a:xfrm>
+            <a:off x="699516" y="4590288"/>
+            <a:ext cx="10789920" cy="1672438"/>
           </a:xfrm>
           <a:prstGeom prst="rect">
             <a:avLst/>

--- a/docs/진행공유_요구사항자동화.pptx
+++ b/docs/진행공유_요구사항자동화.pptx
@@ -2968,7 +2968,7 @@
         <p:spPr>
           <a:xfrm>
             <a:off x="699516" y="1938528"/>
-            <a:ext cx="10789920" cy="2081174"/>
+            <a:ext cx="10789920" cy="2211934"/>
           </a:xfrm>
           <a:prstGeom prst="rect">
             <a:avLst/>

--- a/docs/진행공유_요구사항자동화.pptx
+++ b/docs/진행공유_요구사항자동화.pptx
@@ -2906,7 +2906,7 @@
         </p:nvSpPr>
         <p:spPr>
           <a:xfrm>
-            <a:off x="566928" y="1572768"/>
+            <a:off x="566928" y="1463040"/>
             <a:ext cx="11064240" cy="320040"/>
           </a:xfrm>
           <a:prstGeom prst="rect">
@@ -2967,8 +2967,8 @@
         </p:blipFill>
         <p:spPr>
           <a:xfrm>
-            <a:off x="699516" y="1938528"/>
-            <a:ext cx="10789920" cy="2211934"/>
+            <a:off x="1065276" y="1783080"/>
+            <a:ext cx="10058400" cy="2628900"/>
           </a:xfrm>
           <a:prstGeom prst="rect">
             <a:avLst/>
@@ -2983,7 +2983,7 @@
         </p:nvSpPr>
         <p:spPr>
           <a:xfrm>
-            <a:off x="566928" y="4224528"/>
+            <a:off x="566928" y="4480560"/>
             <a:ext cx="11064240" cy="320040"/>
           </a:xfrm>
           <a:prstGeom prst="rect">
@@ -3044,8 +3044,8 @@
         </p:blipFill>
         <p:spPr>
           <a:xfrm>
-            <a:off x="699516" y="4590288"/>
-            <a:ext cx="10789920" cy="1672438"/>
+            <a:off x="1065276" y="4800600"/>
+            <a:ext cx="10058400" cy="1559052"/>
           </a:xfrm>
           <a:prstGeom prst="rect">
             <a:avLst/>

--- a/docs/진행공유_요구사항자동화.pptx
+++ b/docs/진행공유_요구사항자동화.pptx
@@ -20,9 +20,10 @@
     <p:sldId id="268" r:id="rId14"/>
     <p:sldId id="269" r:id="rId15"/>
     <p:sldId id="270" r:id="rId16"/>
+    <p:sldId id="271" r:id="rId17"/>
   </p:sldIdLst>
   <p:notesMasterIdLst>
-    <p:notesMasterId r:id="rId17"/>
+    <p:notesMasterId r:id="rId18"/>
   </p:notesMasterIdLst>
   <p:sldSz cx="12192000" cy="6858000"/>
   <p:notesSz cx="6858000" cy="12192000"/>
@@ -1068,6 +1069,94 @@
             <a:fld id="{F7021451-1387-4CA6-816F-3879F97B5CBC}" type="slidenum">
               <a:rPr lang="en-US"/>
               <a:t>15</a:t>
+            </a:fld>
+            <a:endParaRPr lang="en-US"/>
+          </a:p>
+        </p:txBody>
+      </p:sp>
+    </p:spTree>
+    <p:extLst>
+      <p:ext uri="{BB962C8B-B14F-4D97-AF65-F5344CB8AC3E}">
+        <p14:creationId xmlns:p14="http://schemas.microsoft.com/office/powerpoint/2010/main" val="1024086991"/>
+      </p:ext>
+    </p:extLst>
+  </p:cSld>
+  <p:clrMapOvr>
+    <a:masterClrMapping/>
+  </p:clrMapOvr>
+</p:notes>
+</file>
+
+<file path=ppt/notesSlides/notesSlide16.xml><?xml version="1.0" encoding="utf-8"?>
+<p:notes xmlns:a="http://schemas.openxmlformats.org/drawingml/2006/main" xmlns:r="http://schemas.openxmlformats.org/officeDocument/2006/relationships" xmlns:p="http://schemas.openxmlformats.org/presentationml/2006/main">
+  <p:cSld>
+    <p:spTree>
+      <p:nvGrpSpPr>
+        <p:cNvPr id="1" name=""/>
+        <p:cNvGrpSpPr/>
+        <p:nvPr/>
+      </p:nvGrpSpPr>
+      <p:grpSpPr>
+        <a:xfrm>
+          <a:off x="0" y="0"/>
+          <a:ext cx="0" cy="0"/>
+          <a:chOff x="0" y="0"/>
+          <a:chExt cx="0" cy="0"/>
+        </a:xfrm>
+      </p:grpSpPr>
+      <p:sp>
+        <p:nvSpPr>
+          <p:cNvPr id="2" name="Slide Image Placeholder 1"/>
+          <p:cNvSpPr>
+            <a:spLocks noGrp="1" noRot="1" noChangeAspect="1"/>
+          </p:cNvSpPr>
+          <p:nvPr>
+            <p:ph type="sldImg"/>
+          </p:nvPr>
+        </p:nvSpPr>
+        <p:spPr/>
+      </p:sp>
+      <p:sp>
+        <p:nvSpPr>
+          <p:cNvPr id="3" name="Notes Placeholder 2"/>
+          <p:cNvSpPr>
+            <a:spLocks noGrp="1"/>
+          </p:cNvSpPr>
+          <p:nvPr>
+            <p:ph type="body" idx="1"/>
+          </p:nvPr>
+        </p:nvSpPr>
+        <p:spPr/>
+        <p:txBody>
+          <a:bodyPr/>
+          <a:lstStyle/>
+          <a:p>
+            <a:r>
+              <a:rPr lang="en-US" dirty="0"/>
+              <a:t/>
+            </a:r>
+            <a:endParaRPr lang="en-US" dirty="0"/>
+          </a:p>
+        </p:txBody>
+      </p:sp>
+      <p:sp>
+        <p:nvSpPr>
+          <p:cNvPr id="4" name="Slide Number Placeholder 3"/>
+          <p:cNvSpPr>
+            <a:spLocks noGrp="1"/>
+          </p:cNvSpPr>
+          <p:nvPr>
+            <p:ph type="sldNum" sz="quarter" idx="10"/>
+          </p:nvPr>
+        </p:nvSpPr>
+        <p:spPr/>
+        <p:txBody>
+          <a:bodyPr/>
+          <a:lstStyle/>
+          <a:p>
+            <a:fld id="{F7021451-1387-4CA6-816F-3879F97B5CBC}" type="slidenum">
+              <a:rPr lang="en-US"/>
+              <a:t>16</a:t>
             </a:fld>
             <a:endParaRPr lang="en-US"/>
           </a:p>
@@ -2810,7 +2899,7 @@
                 <a:ea typeface="맑은 고딕" pitchFamily="34" charset="-122"/>
                 <a:cs typeface="맑은 고딕" pitchFamily="34" charset="-120"/>
               </a:rPr>
-              <a:t>핵심 기능 3</a:t>
+              <a:t>핵심 기능 3 · 산출물 관리 ①</a:t>
             </a:r>
             <a:endParaRPr lang="en-US" sz="1200" dirty="0"/>
           </a:p>
@@ -2849,7 +2938,7 @@
                 <a:ea typeface="맑은 고딕" pitchFamily="34" charset="-122"/>
                 <a:cs typeface="맑은 고딕" pitchFamily="34" charset="-120"/>
               </a:rPr>
-              <a:t>산출물 관리 (추적성)</a:t>
+              <a:t>연결 관리 (추적성)</a:t>
             </a:r>
             <a:endParaRPr lang="en-US" sz="3000" dirty="0"/>
           </a:p>
@@ -2906,7 +2995,7 @@
         </p:nvSpPr>
         <p:spPr>
           <a:xfrm>
-            <a:off x="566928" y="1463040"/>
+            <a:off x="566928" y="1627632"/>
             <a:ext cx="11064240" cy="320040"/>
           </a:xfrm>
           <a:prstGeom prst="rect">
@@ -2945,7 +3034,7 @@
                 <a:ea typeface="맑은 고딕" pitchFamily="34" charset="-122"/>
                 <a:cs typeface="맑은 고딕" pitchFamily="34" charset="-120"/>
               </a:rPr>
-              <a:t>— 요구사항 하나에 어떤 산출물이 물려 있는지 (양방향 조회)</a:t>
+              <a:t>— 요구사항 하나에 어떤 산출물(티켓·SWVOC·Function Requirement·Detail Design)이 물려 있는지 한눈에 (양방향 조회)</a:t>
             </a:r>
             <a:endParaRPr lang="en-US" sz="1400" dirty="0"/>
           </a:p>
@@ -2967,8 +3056,8 @@
         </p:blipFill>
         <p:spPr>
           <a:xfrm>
-            <a:off x="1065276" y="1783080"/>
-            <a:ext cx="10058400" cy="2628900"/>
+            <a:off x="379476" y="2468880"/>
+            <a:ext cx="11430000" cy="2988259"/>
           </a:xfrm>
           <a:prstGeom prst="rect">
             <a:avLst/>
@@ -2983,8 +3072,8 @@
         </p:nvSpPr>
         <p:spPr>
           <a:xfrm>
-            <a:off x="566928" y="4480560"/>
-            <a:ext cx="11064240" cy="320040"/>
+            <a:off x="566928" y="5806440"/>
+            <a:ext cx="11064240" cy="365760"/>
           </a:xfrm>
           <a:prstGeom prst="rect">
             <a:avLst/>
@@ -2996,25 +3085,11 @@
           <a:bodyPr wrap="square" lIns="0" tIns="0" rIns="0" bIns="0" rtlCol="0" anchor="ctr"/>
           <a:lstStyle/>
           <a:p>
-            <a:pPr indent="0" marL="0">
-              <a:buNone/>
-            </a:pPr>
-            <a:r>
-              <a:rPr lang="en-US" sz="1400" b="1" dirty="0">
-                <a:solidFill>
-                  <a:srgbClr val="1F2937"/>
-                </a:solidFill>
-                <a:latin typeface="맑은 고딕" pitchFamily="34" charset="0"/>
-                <a:ea typeface="맑은 고딕" pitchFamily="34" charset="-122"/>
-                <a:cs typeface="맑은 고딕" pitchFamily="34" charset="-120"/>
-              </a:rPr>
-              <a:t>② 변경 추적 </a:t>
-            </a:r>
-            <a:pPr indent="0" marL="0">
-              <a:buNone/>
-            </a:pPr>
-            <a:r>
-              <a:rPr lang="en-US" sz="1400" dirty="0">
+            <a:pPr algn="ctr" indent="0" marL="0">
+              <a:buNone/>
+            </a:pPr>
+            <a:r>
+              <a:rPr lang="en-US" sz="1250" dirty="0">
                 <a:solidFill>
                   <a:srgbClr val="6B7280"/>
                 </a:solidFill>
@@ -3022,36 +3097,12 @@
                 <a:ea typeface="맑은 고딕" pitchFamily="34" charset="-122"/>
                 <a:cs typeface="맑은 고딕" pitchFamily="34" charset="-120"/>
               </a:rPr>
-              <a:t>— 요구사항이 바뀌면, 그걸 근거로 만든 산출물을 자동으로 찾아 알림</a:t>
-            </a:r>
-            <a:endParaRPr lang="en-US" sz="1400" dirty="0"/>
-          </a:p>
-        </p:txBody>
-      </p:sp>
-      <p:pic>
-        <p:nvPicPr>
-          <p:cNvPr id="8" name="Image 1" descr="/home/user/semes-superrookie/docs/img/ppt-trace-2.png">    </p:cNvPr>
-          <p:cNvPicPr>
-            <a:picLocks noChangeAspect="1"/>
-          </p:cNvPicPr>
-          <p:nvPr/>
-        </p:nvPicPr>
-        <p:blipFill>
-          <a:blip r:embed="rId2"/>
-          <a:stretch>
-            <a:fillRect/>
-          </a:stretch>
-        </p:blipFill>
-        <p:spPr>
-          <a:xfrm>
-            <a:off x="1065276" y="4800600"/>
-            <a:ext cx="10058400" cy="1559052"/>
-          </a:xfrm>
-          <a:prstGeom prst="rect">
-            <a:avLst/>
-          </a:prstGeom>
-        </p:spPr>
-      </p:pic>
+              <a:t>요구사항 1건 ↔ 기능별 티켓 3개, 각 티켓 아래 산출물 3종을 실제 Jira ID로 연결</a:t>
+            </a:r>
+            <a:endParaRPr lang="en-US" sz="1250" dirty="0"/>
+          </a:p>
+        </p:txBody>
+      </p:sp>
     </p:spTree>
   </p:cSld>
   <p:clrMapOvr>
@@ -3117,7 +3168,7 @@
                 <a:ea typeface="맑은 고딕" pitchFamily="34" charset="-122"/>
                 <a:cs typeface="맑은 고딕" pitchFamily="34" charset="-120"/>
               </a:rPr>
-              <a:t>AI</a:t>
+              <a:t>핵심 기능 3 · 산출물 관리 ②</a:t>
             </a:r>
             <a:endParaRPr lang="en-US" sz="1200" dirty="0"/>
           </a:p>
@@ -3156,7 +3207,7 @@
                 <a:ea typeface="맑은 고딕" pitchFamily="34" charset="-122"/>
                 <a:cs typeface="맑은 고딕" pitchFamily="34" charset="-120"/>
               </a:rPr>
-              <a:t>AI — 두 엔진 비교</a:t>
+              <a:t>변경 추적 (변경 영향 분석)</a:t>
             </a:r>
             <a:endParaRPr lang="en-US" sz="3000" dirty="0"/>
           </a:p>
@@ -3164,30 +3215,46 @@
       </p:sp>
       <p:sp>
         <p:nvSpPr>
-          <p:cNvPr id="4" name="Shape 2"/>
-          <p:cNvSpPr/>
-          <p:nvPr/>
-        </p:nvSpPr>
-        <p:spPr>
-          <a:xfrm>
-            <a:off x="566928" y="1783080"/>
-            <a:ext cx="5440680" cy="2697480"/>
+          <p:cNvPr id="4" name="Text 2"/>
+          <p:cNvSpPr/>
+          <p:nvPr/>
+        </p:nvSpPr>
+        <p:spPr>
+          <a:xfrm>
+            <a:off x="10424160" y="822960"/>
+            <a:ext cx="1737360" cy="310896"/>
           </a:xfrm>
           <a:prstGeom prst="roundRect">
             <a:avLst>
-              <a:gd name="adj" fmla="val 3390"/>
+              <a:gd name="adj" fmla="val 47059"/>
             </a:avLst>
           </a:prstGeom>
           <a:solidFill>
-            <a:srgbClr val="EEF2FF"/>
+            <a:srgbClr val="FEF3C7"/>
           </a:solidFill>
-          <a:ln w="12700">
-            <a:solidFill>
-              <a:srgbClr val="C7D2FE"/>
-            </a:solidFill>
-            <a:prstDash val="solid"/>
-          </a:ln>
-        </p:spPr>
+          <a:ln/>
+        </p:spPr>
+        <p:txBody>
+          <a:bodyPr wrap="square" lIns="0" tIns="0" rIns="0" bIns="0" rtlCol="0" anchor="ctr"/>
+          <a:lstStyle/>
+          <a:p>
+            <a:pPr algn="ctr" indent="0" marL="0">
+              <a:buNone/>
+            </a:pPr>
+            <a:r>
+              <a:rPr lang="en-US" sz="1100" b="1" dirty="0">
+                <a:solidFill>
+                  <a:srgbClr val="B45309"/>
+                </a:solidFill>
+                <a:latin typeface="맑은 고딕" pitchFamily="34" charset="0"/>
+                <a:ea typeface="맑은 고딕" pitchFamily="34" charset="-122"/>
+                <a:cs typeface="맑은 고딕" pitchFamily="34" charset="-120"/>
+              </a:rPr>
+              <a:t>개발 예정</a:t>
+            </a:r>
+            <a:endParaRPr lang="en-US" sz="1100" dirty="0"/>
+          </a:p>
+        </p:txBody>
       </p:sp>
       <p:sp>
         <p:nvSpPr>
@@ -3197,8 +3264,8 @@
         </p:nvSpPr>
         <p:spPr>
           <a:xfrm>
-            <a:off x="886968" y="2011680"/>
-            <a:ext cx="4846320" cy="457200"/>
+            <a:off x="566928" y="1371600"/>
+            <a:ext cx="11064240" cy="320040"/>
           </a:xfrm>
           <a:prstGeom prst="rect">
             <a:avLst/>
@@ -3214,7 +3281,84 @@
               <a:buNone/>
             </a:pPr>
             <a:r>
-              <a:rPr lang="en-US" sz="1900" b="1" dirty="0">
+              <a:rPr lang="en-US" sz="1400" b="1" dirty="0">
+                <a:solidFill>
+                  <a:srgbClr val="1F2937"/>
+                </a:solidFill>
+                <a:latin typeface="맑은 고딕" pitchFamily="34" charset="0"/>
+                <a:ea typeface="맑은 고딕" pitchFamily="34" charset="-122"/>
+                <a:cs typeface="맑은 고딕" pitchFamily="34" charset="-120"/>
+              </a:rPr>
+              <a:t>② 변경 추적 </a:t>
+            </a:r>
+            <a:pPr indent="0" marL="0">
+              <a:buNone/>
+            </a:pPr>
+            <a:r>
+              <a:rPr lang="en-US" sz="1400" dirty="0">
+                <a:solidFill>
+                  <a:srgbClr val="6B7280"/>
+                </a:solidFill>
+                <a:latin typeface="맑은 고딕" pitchFamily="34" charset="0"/>
+                <a:ea typeface="맑은 고딕" pitchFamily="34" charset="-122"/>
+                <a:cs typeface="맑은 고딕" pitchFamily="34" charset="-120"/>
+              </a:rPr>
+              <a:t>— 요구사항을 수정하면, 그 문장을 근거로 만든 산출물을 자동으로 찾아 알림</a:t>
+            </a:r>
+            <a:endParaRPr lang="en-US" sz="1400" dirty="0"/>
+          </a:p>
+        </p:txBody>
+      </p:sp>
+      <p:pic>
+        <p:nvPicPr>
+          <p:cNvPr id="6" name="Image 0" descr="/home/user/semes-superrookie/docs/img/ppt-trace-edit.png">    </p:cNvPr>
+          <p:cNvPicPr>
+            <a:picLocks noChangeAspect="1"/>
+          </p:cNvPicPr>
+          <p:nvPr/>
+        </p:nvPicPr>
+        <p:blipFill>
+          <a:blip r:embed="rId1"/>
+          <a:stretch>
+            <a:fillRect/>
+          </a:stretch>
+        </p:blipFill>
+        <p:spPr>
+          <a:xfrm>
+            <a:off x="1065276" y="1737360"/>
+            <a:ext cx="10058400" cy="2779776"/>
+          </a:xfrm>
+          <a:prstGeom prst="rect">
+            <a:avLst/>
+          </a:prstGeom>
+        </p:spPr>
+      </p:pic>
+      <p:sp>
+        <p:nvSpPr>
+          <p:cNvPr id="7" name="Text 4"/>
+          <p:cNvSpPr/>
+          <p:nvPr/>
+        </p:nvSpPr>
+        <p:spPr>
+          <a:xfrm>
+            <a:off x="566928" y="4535424"/>
+            <a:ext cx="11064240" cy="292608"/>
+          </a:xfrm>
+          <a:prstGeom prst="rect">
+            <a:avLst/>
+          </a:prstGeom>
+          <a:noFill/>
+          <a:ln/>
+        </p:spPr>
+        <p:txBody>
+          <a:bodyPr wrap="square" lIns="0" tIns="0" rIns="0" bIns="0" rtlCol="0" anchor="ctr"/>
+          <a:lstStyle/>
+          <a:p>
+            <a:pPr algn="ctr" indent="0" marL="0">
+              <a:buNone/>
+            </a:pPr>
+            <a:r>
+              <a:rPr lang="en-US" sz="1300" b="1" dirty="0">
                 <a:solidFill>
                   <a:srgbClr val="6366F1"/>
                 </a:solidFill>
@@ -3222,389 +3366,36 @@
                 <a:ea typeface="맑은 고딕" pitchFamily="34" charset="-122"/>
                 <a:cs typeface="맑은 고딕" pitchFamily="34" charset="-120"/>
               </a:rPr>
-              <a:t>로컬 Qwen3-8B</a:t>
-            </a:r>
-            <a:endParaRPr lang="en-US" sz="1900" dirty="0"/>
-          </a:p>
-        </p:txBody>
-      </p:sp>
-      <p:sp>
-        <p:nvSpPr>
-          <p:cNvPr id="6" name="Text 4"/>
-          <p:cNvSpPr/>
-          <p:nvPr/>
-        </p:nvSpPr>
-        <p:spPr>
-          <a:xfrm>
-            <a:off x="932688" y="2606040"/>
-            <a:ext cx="4754880" cy="1737360"/>
-          </a:xfrm>
-          <a:prstGeom prst="rect">
-            <a:avLst/>
-          </a:prstGeom>
-          <a:noFill/>
-          <a:ln/>
-        </p:spPr>
-        <p:txBody>
-          <a:bodyPr wrap="square" lIns="0" tIns="0" rIns="0" bIns="0" rtlCol="0" anchor="ctr"/>
-          <a:lstStyle/>
-          <a:p>
-            <a:pPr marL="342900" indent="-342900">
-              <a:spcAft>
-                <a:spcPts val="700"/>
-              </a:spcAft>
-              <a:buSzPct val="100000"/>
-              <a:buChar char="•"/>
-            </a:pPr>
-            <a:r>
-              <a:rPr lang="en-US" sz="1300" dirty="0">
-                <a:solidFill>
-                  <a:srgbClr val="1F2937"/>
-                </a:solidFill>
-                <a:latin typeface="맑은 고딕" pitchFamily="34" charset="0"/>
-                <a:ea typeface="맑은 고딕" pitchFamily="34" charset="-122"/>
-                <a:cs typeface="맑은 고딕" pitchFamily="34" charset="-120"/>
-              </a:rPr>
-              <a:t>내 워크스테이션(P4000 8GB)에서 직접</a:t>
+              <a:t>↓  저장 시 자동 추적</a:t>
             </a:r>
             <a:endParaRPr lang="en-US" sz="1300" dirty="0"/>
           </a:p>
-          <a:p>
-            <a:pPr marL="342900" indent="-342900">
-              <a:spcAft>
-                <a:spcPts val="700"/>
-              </a:spcAft>
-              <a:buSzPct val="100000"/>
-              <a:buChar char="•"/>
-            </a:pPr>
-            <a:r>
-              <a:rPr lang="en-US" sz="1300" dirty="0">
-                <a:solidFill>
-                  <a:srgbClr val="1F2937"/>
-                </a:solidFill>
-                <a:latin typeface="맑은 고딕" pitchFamily="34" charset="0"/>
-                <a:ea typeface="맑은 고딕" pitchFamily="34" charset="-122"/>
-                <a:cs typeface="맑은 고딕" pitchFamily="34" charset="-120"/>
-              </a:rPr>
-              <a:t>8B 모델 · GGUF 양자화 Q5_K_M(≈5.85GB)</a:t>
-            </a:r>
-            <a:endParaRPr lang="en-US" sz="1300" dirty="0"/>
-          </a:p>
-          <a:p>
-            <a:pPr marL="342900" indent="-342900">
-              <a:spcAft>
-                <a:spcPts val="700"/>
-              </a:spcAft>
-              <a:buSzPct val="100000"/>
-              <a:buChar char="•"/>
-            </a:pPr>
-            <a:r>
-              <a:rPr lang="en-US" sz="1300" dirty="0">
-                <a:solidFill>
-                  <a:srgbClr val="1F2937"/>
-                </a:solidFill>
-                <a:latin typeface="맑은 고딕" pitchFamily="34" charset="0"/>
-                <a:ea typeface="맑은 고딕" pitchFamily="34" charset="-122"/>
-                <a:cs typeface="맑은 고딕" pitchFamily="34" charset="-120"/>
-              </a:rPr>
-              <a:t>오프라인 자립 · 한국어 강점</a:t>
-            </a:r>
-            <a:endParaRPr lang="en-US" sz="1300" dirty="0"/>
-          </a:p>
-        </p:txBody>
-      </p:sp>
-      <p:sp>
-        <p:nvSpPr>
-          <p:cNvPr id="7" name="Shape 5"/>
-          <p:cNvSpPr/>
-          <p:nvPr/>
-        </p:nvSpPr>
-        <p:spPr>
-          <a:xfrm>
-            <a:off x="6327648" y="1783080"/>
-            <a:ext cx="5440680" cy="2697480"/>
-          </a:xfrm>
-          <a:prstGeom prst="roundRect">
-            <a:avLst>
-              <a:gd name="adj" fmla="val 3390"/>
-            </a:avLst>
-          </a:prstGeom>
-          <a:solidFill>
-            <a:srgbClr val="F5F3FF"/>
-          </a:solidFill>
-          <a:ln w="12700">
-            <a:solidFill>
-              <a:srgbClr val="DDD6FE"/>
-            </a:solidFill>
-            <a:prstDash val="solid"/>
-          </a:ln>
-        </p:spPr>
-      </p:sp>
-      <p:sp>
-        <p:nvSpPr>
-          <p:cNvPr id="8" name="Text 6"/>
-          <p:cNvSpPr/>
-          <p:nvPr/>
-        </p:nvSpPr>
-        <p:spPr>
-          <a:xfrm>
-            <a:off x="6647688" y="2011680"/>
-            <a:ext cx="4846320" cy="457200"/>
-          </a:xfrm>
-          <a:prstGeom prst="rect">
-            <a:avLst/>
-          </a:prstGeom>
-          <a:noFill/>
-          <a:ln/>
-        </p:spPr>
-        <p:txBody>
-          <a:bodyPr wrap="square" lIns="0" tIns="0" rIns="0" bIns="0" rtlCol="0" anchor="ctr"/>
-          <a:lstStyle/>
-          <a:p>
-            <a:pPr indent="0" marL="0">
-              <a:buNone/>
-            </a:pPr>
-            <a:r>
-              <a:rPr lang="en-US" sz="1900" b="1" dirty="0">
-                <a:solidFill>
-                  <a:srgbClr val="8B5CF6"/>
-                </a:solidFill>
-                <a:latin typeface="맑은 고딕" pitchFamily="34" charset="0"/>
-                <a:ea typeface="맑은 고딕" pitchFamily="34" charset="-122"/>
-                <a:cs typeface="맑은 고딕" pitchFamily="34" charset="-120"/>
-              </a:rPr>
-              <a:t>사내 GPT-OSS-120B</a:t>
-            </a:r>
-            <a:endParaRPr lang="en-US" sz="1900" dirty="0"/>
-          </a:p>
-        </p:txBody>
-      </p:sp>
-      <p:sp>
-        <p:nvSpPr>
-          <p:cNvPr id="9" name="Text 7"/>
-          <p:cNvSpPr/>
-          <p:nvPr/>
-        </p:nvSpPr>
-        <p:spPr>
-          <a:xfrm>
-            <a:off x="6693408" y="2606040"/>
-            <a:ext cx="4754880" cy="1737360"/>
-          </a:xfrm>
-          <a:prstGeom prst="rect">
-            <a:avLst/>
-          </a:prstGeom>
-          <a:noFill/>
-          <a:ln/>
-        </p:spPr>
-        <p:txBody>
-          <a:bodyPr wrap="square" lIns="0" tIns="0" rIns="0" bIns="0" rtlCol="0" anchor="ctr"/>
-          <a:lstStyle/>
-          <a:p>
-            <a:pPr marL="342900" indent="-342900">
-              <a:spcAft>
-                <a:spcPts val="700"/>
-              </a:spcAft>
-              <a:buSzPct val="100000"/>
-              <a:buChar char="•"/>
-            </a:pPr>
-            <a:r>
-              <a:rPr lang="en-US" sz="1300" dirty="0">
-                <a:solidFill>
-                  <a:srgbClr val="1F2937"/>
-                </a:solidFill>
-                <a:latin typeface="맑은 고딕" pitchFamily="34" charset="0"/>
-                <a:ea typeface="맑은 고딕" pitchFamily="34" charset="-122"/>
-                <a:cs typeface="맑은 고딕" pitchFamily="34" charset="-120"/>
-              </a:rPr>
-              <a:t>사내 LLM API 서비스(OpenAI 호환)</a:t>
-            </a:r>
-            <a:endParaRPr lang="en-US" sz="1300" dirty="0"/>
-          </a:p>
-          <a:p>
-            <a:pPr marL="342900" indent="-342900">
-              <a:spcAft>
-                <a:spcPts val="700"/>
-              </a:spcAft>
-              <a:buSzPct val="100000"/>
-              <a:buChar char="•"/>
-            </a:pPr>
-            <a:r>
-              <a:rPr lang="en-US" sz="1300" dirty="0">
-                <a:solidFill>
-                  <a:srgbClr val="1F2937"/>
-                </a:solidFill>
-                <a:latin typeface="맑은 고딕" pitchFamily="34" charset="0"/>
-                <a:ea typeface="맑은 고딕" pitchFamily="34" charset="-122"/>
-                <a:cs typeface="맑은 고딕" pitchFamily="34" charset="-120"/>
-              </a:rPr>
-              <a:t>훨씬 큰 모델 → 어려운 판단 정확도 유리</a:t>
-            </a:r>
-            <a:endParaRPr lang="en-US" sz="1300" dirty="0"/>
-          </a:p>
-          <a:p>
-            <a:pPr marL="342900" indent="-342900">
-              <a:spcAft>
-                <a:spcPts val="700"/>
-              </a:spcAft>
-              <a:buSzPct val="100000"/>
-              <a:buChar char="•"/>
-            </a:pPr>
-            <a:r>
-              <a:rPr lang="en-US" sz="1300" dirty="0">
-                <a:solidFill>
-                  <a:srgbClr val="1F2937"/>
-                </a:solidFill>
-                <a:latin typeface="맑은 고딕" pitchFamily="34" charset="0"/>
-                <a:ea typeface="맑은 고딕" pitchFamily="34" charset="-122"/>
-                <a:cs typeface="맑은 고딕" pitchFamily="34" charset="-120"/>
-              </a:rPr>
-              <a:t>공용 서버 의존</a:t>
-            </a:r>
-            <a:endParaRPr lang="en-US" sz="1300" dirty="0"/>
-          </a:p>
-        </p:txBody>
-      </p:sp>
-      <p:sp>
-        <p:nvSpPr>
-          <p:cNvPr id="10" name="Shape 8"/>
-          <p:cNvSpPr/>
-          <p:nvPr/>
-        </p:nvSpPr>
-        <p:spPr>
-          <a:xfrm>
-            <a:off x="566928" y="4709160"/>
-            <a:ext cx="11064240" cy="1463040"/>
-          </a:xfrm>
-          <a:prstGeom prst="roundRect">
-            <a:avLst>
-              <a:gd name="adj" fmla="val 6250"/>
-            </a:avLst>
-          </a:prstGeom>
-          <a:solidFill>
-            <a:srgbClr val="1E1B4B"/>
-          </a:solidFill>
-          <a:ln/>
-          <a:effectLst>
-            <a:outerShdw sx="100000" sy="100000" kx="0" ky="0" algn="bl" rotWithShape="0" blurRad="127000" dist="50800" dir="5400000">
-              <a:srgbClr val="1E1B4B">
-                <a:alpha val="18000"/>
-              </a:srgbClr>
-            </a:outerShdw>
-          </a:effectLst>
-        </p:spPr>
-      </p:sp>
-      <p:sp>
-        <p:nvSpPr>
-          <p:cNvPr id="11" name="Text 9"/>
-          <p:cNvSpPr/>
-          <p:nvPr/>
-        </p:nvSpPr>
-        <p:spPr>
-          <a:xfrm>
-            <a:off x="886968" y="4892040"/>
-            <a:ext cx="10424160" cy="457200"/>
-          </a:xfrm>
-          <a:prstGeom prst="rect">
-            <a:avLst/>
-          </a:prstGeom>
-          <a:noFill/>
-          <a:ln/>
-        </p:spPr>
-        <p:txBody>
-          <a:bodyPr wrap="square" lIns="0" tIns="0" rIns="0" bIns="0" rtlCol="0" anchor="ctr"/>
-          <a:lstStyle/>
-          <a:p>
-            <a:pPr indent="0" marL="0">
-              <a:buNone/>
-            </a:pPr>
-            <a:r>
-              <a:rPr lang="en-US" sz="1350" b="1" dirty="0">
-                <a:solidFill>
-                  <a:srgbClr val="FFFFFF"/>
-                </a:solidFill>
-                <a:latin typeface="맑은 고딕" pitchFamily="34" charset="0"/>
-                <a:ea typeface="맑은 고딕" pitchFamily="34" charset="-122"/>
-                <a:cs typeface="맑은 고딕" pitchFamily="34" charset="-120"/>
-              </a:rPr>
-              <a:t>응답 시간은 둘 다 3~5초로 비슷</a:t>
-            </a:r>
-            <a:pPr indent="0" marL="0">
-              <a:buNone/>
-            </a:pPr>
-            <a:r>
-              <a:rPr lang="en-US" sz="1350" dirty="0">
-                <a:solidFill>
-                  <a:srgbClr val="C7D2FE"/>
-                </a:solidFill>
-                <a:latin typeface="맑은 고딕" pitchFamily="34" charset="0"/>
-                <a:ea typeface="맑은 고딕" pitchFamily="34" charset="-122"/>
-                <a:cs typeface="맑은 고딕" pitchFamily="34" charset="-120"/>
-              </a:rPr>
-              <a:t> → 속도가 아니라 정확도·자립성으로 선택. 동일 요구사항 세트로 실측 후 확정.</a:t>
-            </a:r>
-            <a:endParaRPr lang="en-US" sz="1350" dirty="0"/>
-          </a:p>
-        </p:txBody>
-      </p:sp>
-      <p:sp>
-        <p:nvSpPr>
-          <p:cNvPr id="12" name="Text 10"/>
-          <p:cNvSpPr/>
-          <p:nvPr/>
-        </p:nvSpPr>
-        <p:spPr>
-          <a:xfrm>
-            <a:off x="886968" y="5440680"/>
-            <a:ext cx="10424160" cy="640080"/>
-          </a:xfrm>
-          <a:prstGeom prst="rect">
-            <a:avLst/>
-          </a:prstGeom>
-          <a:noFill/>
-          <a:ln/>
-        </p:spPr>
-        <p:txBody>
-          <a:bodyPr wrap="square" lIns="0" tIns="0" rIns="0" bIns="0" rtlCol="0" anchor="ctr"/>
-          <a:lstStyle/>
-          <a:p>
-            <a:pPr indent="0" marL="0">
-              <a:lnSpc>
-                <a:spcPct val="105000"/>
-              </a:lnSpc>
-              <a:buNone/>
-            </a:pPr>
-            <a:r>
-              <a:rPr lang="en-US" sz="1250" b="1" dirty="0">
-                <a:solidFill>
-                  <a:srgbClr val="A5B4FC"/>
-                </a:solidFill>
-                <a:latin typeface="맑은 고딕" pitchFamily="34" charset="0"/>
-                <a:ea typeface="맑은 고딕" pitchFamily="34" charset="-122"/>
-                <a:cs typeface="맑은 고딕" pitchFamily="34" charset="-120"/>
-              </a:rPr>
-              <a:t>양자화란?</a:t>
-            </a:r>
-            <a:pPr indent="0" marL="0">
-              <a:lnSpc>
-                <a:spcPct val="105000"/>
-              </a:lnSpc>
-              <a:buNone/>
-            </a:pPr>
-            <a:r>
-              <a:rPr lang="en-US" sz="1250" dirty="0">
-                <a:solidFill>
-                  <a:srgbClr val="C7D2FE"/>
-                </a:solidFill>
-                <a:latin typeface="맑은 고딕" pitchFamily="34" charset="0"/>
-                <a:ea typeface="맑은 고딕" pitchFamily="34" charset="-122"/>
-                <a:cs typeface="맑은 고딕" pitchFamily="34" charset="-120"/>
-              </a:rPr>
-              <a:t>  사진을 JPG로 압축하듯 용량↓·품질 소폭↓. 8B 원본(≈16GB)은 8GB GPU에 못 올라가 5.85GB로 압축해 사용.</a:t>
-            </a:r>
-            <a:endParaRPr lang="en-US" sz="1250" dirty="0"/>
-          </a:p>
-        </p:txBody>
-      </p:sp>
+        </p:txBody>
+      </p:sp>
+      <p:pic>
+        <p:nvPicPr>
+          <p:cNvPr id="8" name="Image 1" descr="/home/user/semes-superrookie/docs/img/ppt-trace-2.png">    </p:cNvPr>
+          <p:cNvPicPr>
+            <a:picLocks noChangeAspect="1"/>
+          </p:cNvPicPr>
+          <p:nvPr/>
+        </p:nvPicPr>
+        <p:blipFill>
+          <a:blip r:embed="rId2"/>
+          <a:stretch>
+            <a:fillRect/>
+          </a:stretch>
+        </p:blipFill>
+        <p:spPr>
+          <a:xfrm>
+            <a:off x="1065276" y="4882896"/>
+            <a:ext cx="10058400" cy="1559052"/>
+          </a:xfrm>
+          <a:prstGeom prst="rect">
+            <a:avLst/>
+          </a:prstGeom>
+        </p:spPr>
+      </p:pic>
     </p:spTree>
   </p:cSld>
   <p:clrMapOvr>
@@ -3616,6 +3407,559 @@
 <file path=ppt/slides/slide14.xml><?xml version="1.0" encoding="utf-8"?>
 <p:sld xmlns:a="http://schemas.openxmlformats.org/drawingml/2006/main" xmlns:r="http://schemas.openxmlformats.org/officeDocument/2006/relationships" xmlns:p="http://schemas.openxmlformats.org/presentationml/2006/main">
   <p:cSld name="Slide 14">
+    <p:bg>
+      <p:bgPr>
+        <a:solidFill>
+          <a:srgbClr val="FFFFFF"/>
+        </a:solidFill>
+      </p:bgPr>
+    </p:bg>
+    <p:spTree>
+      <p:nvGrpSpPr>
+        <p:cNvPr id="1" name=""/>
+        <p:cNvGrpSpPr/>
+        <p:nvPr/>
+      </p:nvGrpSpPr>
+      <p:grpSpPr>
+        <a:xfrm>
+          <a:off x="0" y="0"/>
+          <a:ext cx="0" cy="0"/>
+          <a:chOff x="0" y="0"/>
+          <a:chExt cx="0" cy="0"/>
+        </a:xfrm>
+      </p:grpSpPr>
+      <p:sp>
+        <p:nvSpPr>
+          <p:cNvPr id="2" name="Text 0"/>
+          <p:cNvSpPr/>
+          <p:nvPr/>
+        </p:nvSpPr>
+        <p:spPr>
+          <a:xfrm>
+            <a:off x="566928" y="457200"/>
+            <a:ext cx="10058400" cy="274320"/>
+          </a:xfrm>
+          <a:prstGeom prst="rect">
+            <a:avLst/>
+          </a:prstGeom>
+          <a:noFill/>
+          <a:ln/>
+        </p:spPr>
+        <p:txBody>
+          <a:bodyPr wrap="square" lIns="0" tIns="0" rIns="0" bIns="0" rtlCol="0" anchor="ctr"/>
+          <a:lstStyle/>
+          <a:p>
+            <a:pPr indent="0" marL="0">
+              <a:buNone/>
+            </a:pPr>
+            <a:r>
+              <a:rPr lang="en-US" sz="1200" b="1" spc="100" kern="0" dirty="0">
+                <a:solidFill>
+                  <a:srgbClr val="6366F1"/>
+                </a:solidFill>
+                <a:latin typeface="맑은 고딕" pitchFamily="34" charset="0"/>
+                <a:ea typeface="맑은 고딕" pitchFamily="34" charset="-122"/>
+                <a:cs typeface="맑은 고딕" pitchFamily="34" charset="-120"/>
+              </a:rPr>
+              <a:t>AI</a:t>
+            </a:r>
+            <a:endParaRPr lang="en-US" sz="1200" dirty="0"/>
+          </a:p>
+        </p:txBody>
+      </p:sp>
+      <p:sp>
+        <p:nvSpPr>
+          <p:cNvPr id="3" name="Text 1"/>
+          <p:cNvSpPr/>
+          <p:nvPr/>
+        </p:nvSpPr>
+        <p:spPr>
+          <a:xfrm>
+            <a:off x="566928" y="749808"/>
+            <a:ext cx="10515600" cy="640080"/>
+          </a:xfrm>
+          <a:prstGeom prst="rect">
+            <a:avLst/>
+          </a:prstGeom>
+          <a:noFill/>
+          <a:ln/>
+        </p:spPr>
+        <p:txBody>
+          <a:bodyPr wrap="square" lIns="0" tIns="0" rIns="0" bIns="0" rtlCol="0" anchor="ctr"/>
+          <a:lstStyle/>
+          <a:p>
+            <a:pPr indent="0" marL="0">
+              <a:buNone/>
+            </a:pPr>
+            <a:r>
+              <a:rPr lang="en-US" sz="3000" b="1" dirty="0">
+                <a:solidFill>
+                  <a:srgbClr val="1F2937"/>
+                </a:solidFill>
+                <a:latin typeface="맑은 고딕" pitchFamily="34" charset="0"/>
+                <a:ea typeface="맑은 고딕" pitchFamily="34" charset="-122"/>
+                <a:cs typeface="맑은 고딕" pitchFamily="34" charset="-120"/>
+              </a:rPr>
+              <a:t>AI — 두 엔진 비교</a:t>
+            </a:r>
+            <a:endParaRPr lang="en-US" sz="3000" dirty="0"/>
+          </a:p>
+        </p:txBody>
+      </p:sp>
+      <p:sp>
+        <p:nvSpPr>
+          <p:cNvPr id="4" name="Shape 2"/>
+          <p:cNvSpPr/>
+          <p:nvPr/>
+        </p:nvSpPr>
+        <p:spPr>
+          <a:xfrm>
+            <a:off x="566928" y="1783080"/>
+            <a:ext cx="5440680" cy="2697480"/>
+          </a:xfrm>
+          <a:prstGeom prst="roundRect">
+            <a:avLst>
+              <a:gd name="adj" fmla="val 3390"/>
+            </a:avLst>
+          </a:prstGeom>
+          <a:solidFill>
+            <a:srgbClr val="EEF2FF"/>
+          </a:solidFill>
+          <a:ln w="12700">
+            <a:solidFill>
+              <a:srgbClr val="C7D2FE"/>
+            </a:solidFill>
+            <a:prstDash val="solid"/>
+          </a:ln>
+        </p:spPr>
+      </p:sp>
+      <p:sp>
+        <p:nvSpPr>
+          <p:cNvPr id="5" name="Text 3"/>
+          <p:cNvSpPr/>
+          <p:nvPr/>
+        </p:nvSpPr>
+        <p:spPr>
+          <a:xfrm>
+            <a:off x="886968" y="2011680"/>
+            <a:ext cx="4846320" cy="457200"/>
+          </a:xfrm>
+          <a:prstGeom prst="rect">
+            <a:avLst/>
+          </a:prstGeom>
+          <a:noFill/>
+          <a:ln/>
+        </p:spPr>
+        <p:txBody>
+          <a:bodyPr wrap="square" lIns="0" tIns="0" rIns="0" bIns="0" rtlCol="0" anchor="ctr"/>
+          <a:lstStyle/>
+          <a:p>
+            <a:pPr indent="0" marL="0">
+              <a:buNone/>
+            </a:pPr>
+            <a:r>
+              <a:rPr lang="en-US" sz="1900" b="1" dirty="0">
+                <a:solidFill>
+                  <a:srgbClr val="6366F1"/>
+                </a:solidFill>
+                <a:latin typeface="맑은 고딕" pitchFamily="34" charset="0"/>
+                <a:ea typeface="맑은 고딕" pitchFamily="34" charset="-122"/>
+                <a:cs typeface="맑은 고딕" pitchFamily="34" charset="-120"/>
+              </a:rPr>
+              <a:t>로컬 Qwen3-8B</a:t>
+            </a:r>
+            <a:endParaRPr lang="en-US" sz="1900" dirty="0"/>
+          </a:p>
+        </p:txBody>
+      </p:sp>
+      <p:sp>
+        <p:nvSpPr>
+          <p:cNvPr id="6" name="Text 4"/>
+          <p:cNvSpPr/>
+          <p:nvPr/>
+        </p:nvSpPr>
+        <p:spPr>
+          <a:xfrm>
+            <a:off x="932688" y="2606040"/>
+            <a:ext cx="4754880" cy="1737360"/>
+          </a:xfrm>
+          <a:prstGeom prst="rect">
+            <a:avLst/>
+          </a:prstGeom>
+          <a:noFill/>
+          <a:ln/>
+        </p:spPr>
+        <p:txBody>
+          <a:bodyPr wrap="square" lIns="0" tIns="0" rIns="0" bIns="0" rtlCol="0" anchor="ctr"/>
+          <a:lstStyle/>
+          <a:p>
+            <a:pPr marL="342900" indent="-342900">
+              <a:spcAft>
+                <a:spcPts val="700"/>
+              </a:spcAft>
+              <a:buSzPct val="100000"/>
+              <a:buChar char="•"/>
+            </a:pPr>
+            <a:r>
+              <a:rPr lang="en-US" sz="1300" dirty="0">
+                <a:solidFill>
+                  <a:srgbClr val="1F2937"/>
+                </a:solidFill>
+                <a:latin typeface="맑은 고딕" pitchFamily="34" charset="0"/>
+                <a:ea typeface="맑은 고딕" pitchFamily="34" charset="-122"/>
+                <a:cs typeface="맑은 고딕" pitchFamily="34" charset="-120"/>
+              </a:rPr>
+              <a:t>내 워크스테이션(P4000 8GB)에서 직접</a:t>
+            </a:r>
+            <a:endParaRPr lang="en-US" sz="1300" dirty="0"/>
+          </a:p>
+          <a:p>
+            <a:pPr marL="342900" indent="-342900">
+              <a:spcAft>
+                <a:spcPts val="700"/>
+              </a:spcAft>
+              <a:buSzPct val="100000"/>
+              <a:buChar char="•"/>
+            </a:pPr>
+            <a:r>
+              <a:rPr lang="en-US" sz="1300" dirty="0">
+                <a:solidFill>
+                  <a:srgbClr val="1F2937"/>
+                </a:solidFill>
+                <a:latin typeface="맑은 고딕" pitchFamily="34" charset="0"/>
+                <a:ea typeface="맑은 고딕" pitchFamily="34" charset="-122"/>
+                <a:cs typeface="맑은 고딕" pitchFamily="34" charset="-120"/>
+              </a:rPr>
+              <a:t>8B 모델 · GGUF 양자화 Q5_K_M(≈5.85GB)</a:t>
+            </a:r>
+            <a:endParaRPr lang="en-US" sz="1300" dirty="0"/>
+          </a:p>
+          <a:p>
+            <a:pPr marL="342900" indent="-342900">
+              <a:spcAft>
+                <a:spcPts val="700"/>
+              </a:spcAft>
+              <a:buSzPct val="100000"/>
+              <a:buChar char="•"/>
+            </a:pPr>
+            <a:r>
+              <a:rPr lang="en-US" sz="1300" dirty="0">
+                <a:solidFill>
+                  <a:srgbClr val="1F2937"/>
+                </a:solidFill>
+                <a:latin typeface="맑은 고딕" pitchFamily="34" charset="0"/>
+                <a:ea typeface="맑은 고딕" pitchFamily="34" charset="-122"/>
+                <a:cs typeface="맑은 고딕" pitchFamily="34" charset="-120"/>
+              </a:rPr>
+              <a:t>오프라인 자립 · 한국어 강점</a:t>
+            </a:r>
+            <a:endParaRPr lang="en-US" sz="1300" dirty="0"/>
+          </a:p>
+        </p:txBody>
+      </p:sp>
+      <p:sp>
+        <p:nvSpPr>
+          <p:cNvPr id="7" name="Shape 5"/>
+          <p:cNvSpPr/>
+          <p:nvPr/>
+        </p:nvSpPr>
+        <p:spPr>
+          <a:xfrm>
+            <a:off x="6327648" y="1783080"/>
+            <a:ext cx="5440680" cy="2697480"/>
+          </a:xfrm>
+          <a:prstGeom prst="roundRect">
+            <a:avLst>
+              <a:gd name="adj" fmla="val 3390"/>
+            </a:avLst>
+          </a:prstGeom>
+          <a:solidFill>
+            <a:srgbClr val="F5F3FF"/>
+          </a:solidFill>
+          <a:ln w="12700">
+            <a:solidFill>
+              <a:srgbClr val="DDD6FE"/>
+            </a:solidFill>
+            <a:prstDash val="solid"/>
+          </a:ln>
+        </p:spPr>
+      </p:sp>
+      <p:sp>
+        <p:nvSpPr>
+          <p:cNvPr id="8" name="Text 6"/>
+          <p:cNvSpPr/>
+          <p:nvPr/>
+        </p:nvSpPr>
+        <p:spPr>
+          <a:xfrm>
+            <a:off x="6647688" y="2011680"/>
+            <a:ext cx="4846320" cy="457200"/>
+          </a:xfrm>
+          <a:prstGeom prst="rect">
+            <a:avLst/>
+          </a:prstGeom>
+          <a:noFill/>
+          <a:ln/>
+        </p:spPr>
+        <p:txBody>
+          <a:bodyPr wrap="square" lIns="0" tIns="0" rIns="0" bIns="0" rtlCol="0" anchor="ctr"/>
+          <a:lstStyle/>
+          <a:p>
+            <a:pPr indent="0" marL="0">
+              <a:buNone/>
+            </a:pPr>
+            <a:r>
+              <a:rPr lang="en-US" sz="1900" b="1" dirty="0">
+                <a:solidFill>
+                  <a:srgbClr val="8B5CF6"/>
+                </a:solidFill>
+                <a:latin typeface="맑은 고딕" pitchFamily="34" charset="0"/>
+                <a:ea typeface="맑은 고딕" pitchFamily="34" charset="-122"/>
+                <a:cs typeface="맑은 고딕" pitchFamily="34" charset="-120"/>
+              </a:rPr>
+              <a:t>사내 GPT-OSS-120B</a:t>
+            </a:r>
+            <a:endParaRPr lang="en-US" sz="1900" dirty="0"/>
+          </a:p>
+        </p:txBody>
+      </p:sp>
+      <p:sp>
+        <p:nvSpPr>
+          <p:cNvPr id="9" name="Text 7"/>
+          <p:cNvSpPr/>
+          <p:nvPr/>
+        </p:nvSpPr>
+        <p:spPr>
+          <a:xfrm>
+            <a:off x="6693408" y="2606040"/>
+            <a:ext cx="4754880" cy="1737360"/>
+          </a:xfrm>
+          <a:prstGeom prst="rect">
+            <a:avLst/>
+          </a:prstGeom>
+          <a:noFill/>
+          <a:ln/>
+        </p:spPr>
+        <p:txBody>
+          <a:bodyPr wrap="square" lIns="0" tIns="0" rIns="0" bIns="0" rtlCol="0" anchor="ctr"/>
+          <a:lstStyle/>
+          <a:p>
+            <a:pPr marL="342900" indent="-342900">
+              <a:spcAft>
+                <a:spcPts val="700"/>
+              </a:spcAft>
+              <a:buSzPct val="100000"/>
+              <a:buChar char="•"/>
+            </a:pPr>
+            <a:r>
+              <a:rPr lang="en-US" sz="1300" dirty="0">
+                <a:solidFill>
+                  <a:srgbClr val="1F2937"/>
+                </a:solidFill>
+                <a:latin typeface="맑은 고딕" pitchFamily="34" charset="0"/>
+                <a:ea typeface="맑은 고딕" pitchFamily="34" charset="-122"/>
+                <a:cs typeface="맑은 고딕" pitchFamily="34" charset="-120"/>
+              </a:rPr>
+              <a:t>사내 LLM API 서비스(OpenAI 호환)</a:t>
+            </a:r>
+            <a:endParaRPr lang="en-US" sz="1300" dirty="0"/>
+          </a:p>
+          <a:p>
+            <a:pPr marL="342900" indent="-342900">
+              <a:spcAft>
+                <a:spcPts val="700"/>
+              </a:spcAft>
+              <a:buSzPct val="100000"/>
+              <a:buChar char="•"/>
+            </a:pPr>
+            <a:r>
+              <a:rPr lang="en-US" sz="1300" dirty="0">
+                <a:solidFill>
+                  <a:srgbClr val="1F2937"/>
+                </a:solidFill>
+                <a:latin typeface="맑은 고딕" pitchFamily="34" charset="0"/>
+                <a:ea typeface="맑은 고딕" pitchFamily="34" charset="-122"/>
+                <a:cs typeface="맑은 고딕" pitchFamily="34" charset="-120"/>
+              </a:rPr>
+              <a:t>훨씬 큰 모델 → 어려운 판단 정확도 유리</a:t>
+            </a:r>
+            <a:endParaRPr lang="en-US" sz="1300" dirty="0"/>
+          </a:p>
+          <a:p>
+            <a:pPr marL="342900" indent="-342900">
+              <a:spcAft>
+                <a:spcPts val="700"/>
+              </a:spcAft>
+              <a:buSzPct val="100000"/>
+              <a:buChar char="•"/>
+            </a:pPr>
+            <a:r>
+              <a:rPr lang="en-US" sz="1300" dirty="0">
+                <a:solidFill>
+                  <a:srgbClr val="1F2937"/>
+                </a:solidFill>
+                <a:latin typeface="맑은 고딕" pitchFamily="34" charset="0"/>
+                <a:ea typeface="맑은 고딕" pitchFamily="34" charset="-122"/>
+                <a:cs typeface="맑은 고딕" pitchFamily="34" charset="-120"/>
+              </a:rPr>
+              <a:t>공용 서버 의존</a:t>
+            </a:r>
+            <a:endParaRPr lang="en-US" sz="1300" dirty="0"/>
+          </a:p>
+        </p:txBody>
+      </p:sp>
+      <p:sp>
+        <p:nvSpPr>
+          <p:cNvPr id="10" name="Shape 8"/>
+          <p:cNvSpPr/>
+          <p:nvPr/>
+        </p:nvSpPr>
+        <p:spPr>
+          <a:xfrm>
+            <a:off x="566928" y="4709160"/>
+            <a:ext cx="11064240" cy="1463040"/>
+          </a:xfrm>
+          <a:prstGeom prst="roundRect">
+            <a:avLst>
+              <a:gd name="adj" fmla="val 6250"/>
+            </a:avLst>
+          </a:prstGeom>
+          <a:solidFill>
+            <a:srgbClr val="1E1B4B"/>
+          </a:solidFill>
+          <a:ln/>
+          <a:effectLst>
+            <a:outerShdw sx="100000" sy="100000" kx="0" ky="0" algn="bl" rotWithShape="0" blurRad="127000" dist="50800" dir="5400000">
+              <a:srgbClr val="1E1B4B">
+                <a:alpha val="18000"/>
+              </a:srgbClr>
+            </a:outerShdw>
+          </a:effectLst>
+        </p:spPr>
+      </p:sp>
+      <p:sp>
+        <p:nvSpPr>
+          <p:cNvPr id="11" name="Text 9"/>
+          <p:cNvSpPr/>
+          <p:nvPr/>
+        </p:nvSpPr>
+        <p:spPr>
+          <a:xfrm>
+            <a:off x="886968" y="4892040"/>
+            <a:ext cx="10424160" cy="457200"/>
+          </a:xfrm>
+          <a:prstGeom prst="rect">
+            <a:avLst/>
+          </a:prstGeom>
+          <a:noFill/>
+          <a:ln/>
+        </p:spPr>
+        <p:txBody>
+          <a:bodyPr wrap="square" lIns="0" tIns="0" rIns="0" bIns="0" rtlCol="0" anchor="ctr"/>
+          <a:lstStyle/>
+          <a:p>
+            <a:pPr indent="0" marL="0">
+              <a:buNone/>
+            </a:pPr>
+            <a:r>
+              <a:rPr lang="en-US" sz="1350" b="1" dirty="0">
+                <a:solidFill>
+                  <a:srgbClr val="FFFFFF"/>
+                </a:solidFill>
+                <a:latin typeface="맑은 고딕" pitchFamily="34" charset="0"/>
+                <a:ea typeface="맑은 고딕" pitchFamily="34" charset="-122"/>
+                <a:cs typeface="맑은 고딕" pitchFamily="34" charset="-120"/>
+              </a:rPr>
+              <a:t>응답 시간은 둘 다 3~5초로 비슷</a:t>
+            </a:r>
+            <a:pPr indent="0" marL="0">
+              <a:buNone/>
+            </a:pPr>
+            <a:r>
+              <a:rPr lang="en-US" sz="1350" dirty="0">
+                <a:solidFill>
+                  <a:srgbClr val="C7D2FE"/>
+                </a:solidFill>
+                <a:latin typeface="맑은 고딕" pitchFamily="34" charset="0"/>
+                <a:ea typeface="맑은 고딕" pitchFamily="34" charset="-122"/>
+                <a:cs typeface="맑은 고딕" pitchFamily="34" charset="-120"/>
+              </a:rPr>
+              <a:t> → 속도가 아니라 정확도·자립성으로 선택. 동일 요구사항 세트로 실측 후 확정.</a:t>
+            </a:r>
+            <a:endParaRPr lang="en-US" sz="1350" dirty="0"/>
+          </a:p>
+        </p:txBody>
+      </p:sp>
+      <p:sp>
+        <p:nvSpPr>
+          <p:cNvPr id="12" name="Text 10"/>
+          <p:cNvSpPr/>
+          <p:nvPr/>
+        </p:nvSpPr>
+        <p:spPr>
+          <a:xfrm>
+            <a:off x="886968" y="5440680"/>
+            <a:ext cx="10424160" cy="640080"/>
+          </a:xfrm>
+          <a:prstGeom prst="rect">
+            <a:avLst/>
+          </a:prstGeom>
+          <a:noFill/>
+          <a:ln/>
+        </p:spPr>
+        <p:txBody>
+          <a:bodyPr wrap="square" lIns="0" tIns="0" rIns="0" bIns="0" rtlCol="0" anchor="ctr"/>
+          <a:lstStyle/>
+          <a:p>
+            <a:pPr indent="0" marL="0">
+              <a:lnSpc>
+                <a:spcPct val="105000"/>
+              </a:lnSpc>
+              <a:buNone/>
+            </a:pPr>
+            <a:r>
+              <a:rPr lang="en-US" sz="1250" b="1" dirty="0">
+                <a:solidFill>
+                  <a:srgbClr val="A5B4FC"/>
+                </a:solidFill>
+                <a:latin typeface="맑은 고딕" pitchFamily="34" charset="0"/>
+                <a:ea typeface="맑은 고딕" pitchFamily="34" charset="-122"/>
+                <a:cs typeface="맑은 고딕" pitchFamily="34" charset="-120"/>
+              </a:rPr>
+              <a:t>양자화란?</a:t>
+            </a:r>
+            <a:pPr indent="0" marL="0">
+              <a:lnSpc>
+                <a:spcPct val="105000"/>
+              </a:lnSpc>
+              <a:buNone/>
+            </a:pPr>
+            <a:r>
+              <a:rPr lang="en-US" sz="1250" dirty="0">
+                <a:solidFill>
+                  <a:srgbClr val="C7D2FE"/>
+                </a:solidFill>
+                <a:latin typeface="맑은 고딕" pitchFamily="34" charset="0"/>
+                <a:ea typeface="맑은 고딕" pitchFamily="34" charset="-122"/>
+                <a:cs typeface="맑은 고딕" pitchFamily="34" charset="-120"/>
+              </a:rPr>
+              <a:t>  사진을 JPG로 압축하듯 용량↓·품질 소폭↓. 8B 원본(≈16GB)은 8GB GPU에 못 올라가 5.85GB로 압축해 사용.</a:t>
+            </a:r>
+            <a:endParaRPr lang="en-US" sz="1250" dirty="0"/>
+          </a:p>
+        </p:txBody>
+      </p:sp>
+    </p:spTree>
+  </p:cSld>
+  <p:clrMapOvr>
+    <a:masterClrMapping/>
+  </p:clrMapOvr>
+</p:sld>
+</file>
+
+<file path=ppt/slides/slide15.xml><?xml version="1.0" encoding="utf-8"?>
+<p:sld xmlns:a="http://schemas.openxmlformats.org/drawingml/2006/main" xmlns:r="http://schemas.openxmlformats.org/officeDocument/2006/relationships" xmlns:p="http://schemas.openxmlformats.org/presentationml/2006/main">
+  <p:cSld name="Slide 15">
     <p:bg>
       <p:bgPr>
         <a:solidFill>
@@ -4203,9 +4547,9 @@
 </p:sld>
 </file>
 
-<file path=ppt/slides/slide15.xml><?xml version="1.0" encoding="utf-8"?>
+<file path=ppt/slides/slide16.xml><?xml version="1.0" encoding="utf-8"?>
 <p:sld xmlns:a="http://schemas.openxmlformats.org/drawingml/2006/main" xmlns:r="http://schemas.openxmlformats.org/officeDocument/2006/relationships" xmlns:p="http://schemas.openxmlformats.org/presentationml/2006/main">
-  <p:cSld name="Slide 15">
+  <p:cSld name="Slide 16">
     <p:bg>
       <p:bgPr>
         <a:solidFill>

--- a/docs/진행공유_요구사항자동화.pptx
+++ b/docs/진행공유_요구사항자동화.pptx
@@ -21,9 +21,10 @@
     <p:sldId id="269" r:id="rId15"/>
     <p:sldId id="270" r:id="rId16"/>
     <p:sldId id="271" r:id="rId17"/>
+    <p:sldId id="272" r:id="rId18"/>
   </p:sldIdLst>
   <p:notesMasterIdLst>
-    <p:notesMasterId r:id="rId18"/>
+    <p:notesMasterId r:id="rId19"/>
   </p:notesMasterIdLst>
   <p:sldSz cx="12192000" cy="6858000"/>
   <p:notesSz cx="6858000" cy="12192000"/>
@@ -1157,6 +1158,94 @@
             <a:fld id="{F7021451-1387-4CA6-816F-3879F97B5CBC}" type="slidenum">
               <a:rPr lang="en-US"/>
               <a:t>16</a:t>
+            </a:fld>
+            <a:endParaRPr lang="en-US"/>
+          </a:p>
+        </p:txBody>
+      </p:sp>
+    </p:spTree>
+    <p:extLst>
+      <p:ext uri="{BB962C8B-B14F-4D97-AF65-F5344CB8AC3E}">
+        <p14:creationId xmlns:p14="http://schemas.microsoft.com/office/powerpoint/2010/main" val="1024086991"/>
+      </p:ext>
+    </p:extLst>
+  </p:cSld>
+  <p:clrMapOvr>
+    <a:masterClrMapping/>
+  </p:clrMapOvr>
+</p:notes>
+</file>
+
+<file path=ppt/notesSlides/notesSlide17.xml><?xml version="1.0" encoding="utf-8"?>
+<p:notes xmlns:a="http://schemas.openxmlformats.org/drawingml/2006/main" xmlns:r="http://schemas.openxmlformats.org/officeDocument/2006/relationships" xmlns:p="http://schemas.openxmlformats.org/presentationml/2006/main">
+  <p:cSld>
+    <p:spTree>
+      <p:nvGrpSpPr>
+        <p:cNvPr id="1" name=""/>
+        <p:cNvGrpSpPr/>
+        <p:nvPr/>
+      </p:nvGrpSpPr>
+      <p:grpSpPr>
+        <a:xfrm>
+          <a:off x="0" y="0"/>
+          <a:ext cx="0" cy="0"/>
+          <a:chOff x="0" y="0"/>
+          <a:chExt cx="0" cy="0"/>
+        </a:xfrm>
+      </p:grpSpPr>
+      <p:sp>
+        <p:nvSpPr>
+          <p:cNvPr id="2" name="Slide Image Placeholder 1"/>
+          <p:cNvSpPr>
+            <a:spLocks noGrp="1" noRot="1" noChangeAspect="1"/>
+          </p:cNvSpPr>
+          <p:nvPr>
+            <p:ph type="sldImg"/>
+          </p:nvPr>
+        </p:nvSpPr>
+        <p:spPr/>
+      </p:sp>
+      <p:sp>
+        <p:nvSpPr>
+          <p:cNvPr id="3" name="Notes Placeholder 2"/>
+          <p:cNvSpPr>
+            <a:spLocks noGrp="1"/>
+          </p:cNvSpPr>
+          <p:nvPr>
+            <p:ph type="body" idx="1"/>
+          </p:nvPr>
+        </p:nvSpPr>
+        <p:spPr/>
+        <p:txBody>
+          <a:bodyPr/>
+          <a:lstStyle/>
+          <a:p>
+            <a:r>
+              <a:rPr lang="en-US" dirty="0"/>
+              <a:t/>
+            </a:r>
+            <a:endParaRPr lang="en-US" dirty="0"/>
+          </a:p>
+        </p:txBody>
+      </p:sp>
+      <p:sp>
+        <p:nvSpPr>
+          <p:cNvPr id="4" name="Slide Number Placeholder 3"/>
+          <p:cNvSpPr>
+            <a:spLocks noGrp="1"/>
+          </p:cNvSpPr>
+          <p:nvPr>
+            <p:ph type="sldNum" sz="quarter" idx="10"/>
+          </p:nvPr>
+        </p:nvSpPr>
+        <p:spPr/>
+        <p:txBody>
+          <a:bodyPr/>
+          <a:lstStyle/>
+          <a:p>
+            <a:fld id="{F7021451-1387-4CA6-816F-3879F97B5CBC}" type="slidenum">
+              <a:rPr lang="en-US"/>
+              <a:t>17</a:t>
             </a:fld>
             <a:endParaRPr lang="en-US"/>
           </a:p>
@@ -3963,6 +4052,179 @@
     <p:bg>
       <p:bgPr>
         <a:solidFill>
+          <a:srgbClr val="FFFFFF"/>
+        </a:solidFill>
+      </p:bgPr>
+    </p:bg>
+    <p:spTree>
+      <p:nvGrpSpPr>
+        <p:cNvPr id="1" name=""/>
+        <p:cNvGrpSpPr/>
+        <p:nvPr/>
+      </p:nvGrpSpPr>
+      <p:grpSpPr>
+        <a:xfrm>
+          <a:off x="0" y="0"/>
+          <a:ext cx="0" cy="0"/>
+          <a:chOff x="0" y="0"/>
+          <a:chExt cx="0" cy="0"/>
+        </a:xfrm>
+      </p:grpSpPr>
+      <p:sp>
+        <p:nvSpPr>
+          <p:cNvPr id="2" name="Text 0"/>
+          <p:cNvSpPr/>
+          <p:nvPr/>
+        </p:nvSpPr>
+        <p:spPr>
+          <a:xfrm>
+            <a:off x="566928" y="457200"/>
+            <a:ext cx="10058400" cy="274320"/>
+          </a:xfrm>
+          <a:prstGeom prst="rect">
+            <a:avLst/>
+          </a:prstGeom>
+          <a:noFill/>
+          <a:ln/>
+        </p:spPr>
+        <p:txBody>
+          <a:bodyPr wrap="square" lIns="0" tIns="0" rIns="0" bIns="0" rtlCol="0" anchor="ctr"/>
+          <a:lstStyle/>
+          <a:p>
+            <a:pPr indent="0" marL="0">
+              <a:buNone/>
+            </a:pPr>
+            <a:r>
+              <a:rPr lang="en-US" sz="1200" b="1" spc="100" kern="0" dirty="0">
+                <a:solidFill>
+                  <a:srgbClr val="6366F1"/>
+                </a:solidFill>
+                <a:latin typeface="맑은 고딕" pitchFamily="34" charset="0"/>
+                <a:ea typeface="맑은 고딕" pitchFamily="34" charset="-122"/>
+                <a:cs typeface="맑은 고딕" pitchFamily="34" charset="-120"/>
+              </a:rPr>
+              <a:t>일정</a:t>
+            </a:r>
+            <a:endParaRPr lang="en-US" sz="1200" dirty="0"/>
+          </a:p>
+        </p:txBody>
+      </p:sp>
+      <p:sp>
+        <p:nvSpPr>
+          <p:cNvPr id="3" name="Text 1"/>
+          <p:cNvSpPr/>
+          <p:nvPr/>
+        </p:nvSpPr>
+        <p:spPr>
+          <a:xfrm>
+            <a:off x="566928" y="749808"/>
+            <a:ext cx="10515600" cy="640080"/>
+          </a:xfrm>
+          <a:prstGeom prst="rect">
+            <a:avLst/>
+          </a:prstGeom>
+          <a:noFill/>
+          <a:ln/>
+        </p:spPr>
+        <p:txBody>
+          <a:bodyPr wrap="square" lIns="0" tIns="0" rIns="0" bIns="0" rtlCol="0" anchor="ctr"/>
+          <a:lstStyle/>
+          <a:p>
+            <a:pPr indent="0" marL="0">
+              <a:buNone/>
+            </a:pPr>
+            <a:r>
+              <a:rPr lang="en-US" sz="3000" b="1" dirty="0">
+                <a:solidFill>
+                  <a:srgbClr val="1F2937"/>
+                </a:solidFill>
+                <a:latin typeface="맑은 고딕" pitchFamily="34" charset="0"/>
+                <a:ea typeface="맑은 고딕" pitchFamily="34" charset="-122"/>
+                <a:cs typeface="맑은 고딕" pitchFamily="34" charset="-120"/>
+              </a:rPr>
+              <a:t>개발 로드맵 · 마일스톤 (8 ~ 11월)</a:t>
+            </a:r>
+            <a:endParaRPr lang="en-US" sz="3000" dirty="0"/>
+          </a:p>
+        </p:txBody>
+      </p:sp>
+      <p:pic>
+        <p:nvPicPr>
+          <p:cNvPr id="4" name="Image 0" descr="/home/user/semes-superrookie/docs/img/ppt-roadmap.png">    </p:cNvPr>
+          <p:cNvPicPr>
+            <a:picLocks noChangeAspect="1"/>
+          </p:cNvPicPr>
+          <p:nvPr/>
+        </p:nvPicPr>
+        <p:blipFill>
+          <a:blip r:embed="rId1"/>
+          <a:stretch>
+            <a:fillRect/>
+          </a:stretch>
+        </p:blipFill>
+        <p:spPr>
+          <a:xfrm>
+            <a:off x="333756" y="1783080"/>
+            <a:ext cx="11521440" cy="4025189"/>
+          </a:xfrm>
+          <a:prstGeom prst="rect">
+            <a:avLst/>
+          </a:prstGeom>
+        </p:spPr>
+      </p:pic>
+      <p:sp>
+        <p:nvSpPr>
+          <p:cNvPr id="5" name="Text 2"/>
+          <p:cNvSpPr/>
+          <p:nvPr/>
+        </p:nvSpPr>
+        <p:spPr>
+          <a:xfrm>
+            <a:off x="566928" y="5989320"/>
+            <a:ext cx="11064240" cy="457200"/>
+          </a:xfrm>
+          <a:prstGeom prst="rect">
+            <a:avLst/>
+          </a:prstGeom>
+          <a:noFill/>
+          <a:ln/>
+        </p:spPr>
+        <p:txBody>
+          <a:bodyPr wrap="square" lIns="0" tIns="0" rIns="0" bIns="0" rtlCol="0" anchor="ctr"/>
+          <a:lstStyle/>
+          <a:p>
+            <a:pPr algn="ctr" indent="0" marL="0">
+              <a:buNone/>
+            </a:pPr>
+            <a:r>
+              <a:rPr lang="en-US" sz="1200" dirty="0">
+                <a:solidFill>
+                  <a:srgbClr val="6B7280"/>
+                </a:solidFill>
+                <a:latin typeface="맑은 고딕" pitchFamily="34" charset="0"/>
+                <a:ea typeface="맑은 고딕" pitchFamily="34" charset="-122"/>
+                <a:cs typeface="맑은 고딕" pitchFamily="34" charset="-120"/>
+              </a:rPr>
+              <a:t>과제 공식일정(◆ 8/10 계획 · 9/29 중간보고 · 11월 말 최종보고)에 맞춰 개발을 6단계로 진행 — 기능1은 완료, 8월부터 기능2·3·연동·검증 순으로 개발</a:t>
+            </a:r>
+            <a:endParaRPr lang="en-US" sz="1200" dirty="0"/>
+          </a:p>
+        </p:txBody>
+      </p:sp>
+    </p:spTree>
+  </p:cSld>
+  <p:clrMapOvr>
+    <a:masterClrMapping/>
+  </p:clrMapOvr>
+</p:sld>
+</file>
+
+<file path=ppt/slides/slide16.xml><?xml version="1.0" encoding="utf-8"?>
+<p:sld xmlns:a="http://schemas.openxmlformats.org/drawingml/2006/main" xmlns:r="http://schemas.openxmlformats.org/officeDocument/2006/relationships" xmlns:p="http://schemas.openxmlformats.org/presentationml/2006/main">
+  <p:cSld name="Slide 16">
+    <p:bg>
+      <p:bgPr>
+        <a:solidFill>
           <a:srgbClr val="1E1B4B"/>
         </a:solidFill>
       </p:bgPr>
@@ -4547,9 +4809,9 @@
 </p:sld>
 </file>
 
-<file path=ppt/slides/slide16.xml><?xml version="1.0" encoding="utf-8"?>
+<file path=ppt/slides/slide17.xml><?xml version="1.0" encoding="utf-8"?>
 <p:sld xmlns:a="http://schemas.openxmlformats.org/drawingml/2006/main" xmlns:r="http://schemas.openxmlformats.org/officeDocument/2006/relationships" xmlns:p="http://schemas.openxmlformats.org/presentationml/2006/main">
-  <p:cSld name="Slide 16">
+  <p:cSld name="Slide 17">
     <p:bg>
       <p:bgPr>
         <a:solidFill>

--- a/docs/진행공유_요구사항자동화.pptx
+++ b/docs/진행공유_요구사항자동화.pptx
@@ -4164,8 +4164,8 @@
         </p:blipFill>
         <p:spPr>
           <a:xfrm>
-            <a:off x="333756" y="1783080"/>
-            <a:ext cx="11521440" cy="4025189"/>
+            <a:off x="196596" y="2148840"/>
+            <a:ext cx="11795760" cy="3289097"/>
           </a:xfrm>
           <a:prstGeom prst="rect">
             <a:avLst/>
@@ -4180,7 +4180,7 @@
         </p:nvSpPr>
         <p:spPr>
           <a:xfrm>
-            <a:off x="566928" y="5989320"/>
+            <a:off x="566928" y="5806440"/>
             <a:ext cx="11064240" cy="457200"/>
           </a:xfrm>
           <a:prstGeom prst="rect">
@@ -4197,7 +4197,7 @@
               <a:buNone/>
             </a:pPr>
             <a:r>
-              <a:rPr lang="en-US" sz="1200" dirty="0">
+              <a:rPr lang="en-US" sz="1250" dirty="0">
                 <a:solidFill>
                   <a:srgbClr val="6B7280"/>
                 </a:solidFill>
@@ -4205,9 +4205,9 @@
                 <a:ea typeface="맑은 고딕" pitchFamily="34" charset="-122"/>
                 <a:cs typeface="맑은 고딕" pitchFamily="34" charset="-120"/>
               </a:rPr>
-              <a:t>과제 공식일정(◆ 8/10 계획 · 9/29 중간보고 · 11월 말 최종보고)에 맞춰 개발을 6단계로 진행 — 기능1은 완료, 8월부터 기능2·3·연동·검증 순으로 개발</a:t>
-            </a:r>
-            <a:endParaRPr lang="en-US" sz="1200" dirty="0"/>
+              <a:t>과제 공식일정(◆ 8/10 계획 · 9/29 중간보고 · 11월 말 최종보고) 사이사이에 개발을 2단계씩, 총 4단계로 진행</a:t>
+            </a:r>
+            <a:endParaRPr lang="en-US" sz="1250" dirty="0"/>
           </a:p>
         </p:txBody>
       </p:sp>

--- a/docs/진행공유_요구사항자동화.pptx
+++ b/docs/진행공유_요구사항자동화.pptx
@@ -7454,7 +7454,7 @@
                 <a:ea typeface="맑은 고딕" pitchFamily="34" charset="-122"/>
                 <a:cs typeface="맑은 고딕" pitchFamily="34" charset="-120"/>
               </a:rPr>
-              <a:t>실제 예시 — 검출 &amp; AI 제안</a:t>
+              <a:t>실제 예시 — 검출 → AI 제안 → 수정·확정</a:t>
             </a:r>
             <a:endParaRPr lang="en-US" sz="3000" dirty="0"/>
           </a:p>
@@ -7519,14 +7519,53 @@
         </p:blipFill>
         <p:spPr>
           <a:xfrm>
-            <a:off x="379476" y="2240280"/>
-            <a:ext cx="11430000" cy="3621938"/>
+            <a:off x="379476" y="2286000"/>
+            <a:ext cx="11430000" cy="3388766"/>
           </a:xfrm>
           <a:prstGeom prst="rect">
             <a:avLst/>
           </a:prstGeom>
         </p:spPr>
       </p:pic>
+      <p:sp>
+        <p:nvSpPr>
+          <p:cNvPr id="6" name="Text 3"/>
+          <p:cNvSpPr/>
+          <p:nvPr/>
+        </p:nvSpPr>
+        <p:spPr>
+          <a:xfrm>
+            <a:off x="566928" y="5989320"/>
+            <a:ext cx="11064240" cy="365760"/>
+          </a:xfrm>
+          <a:prstGeom prst="rect">
+            <a:avLst/>
+          </a:prstGeom>
+          <a:noFill/>
+          <a:ln/>
+        </p:spPr>
+        <p:txBody>
+          <a:bodyPr wrap="square" lIns="0" tIns="0" rIns="0" bIns="0" rtlCol="0" anchor="ctr"/>
+          <a:lstStyle/>
+          <a:p>
+            <a:pPr algn="ctr" indent="0" marL="0">
+              <a:buNone/>
+            </a:pPr>
+            <a:r>
+              <a:rPr lang="en-US" sz="1250" dirty="0">
+                <a:solidFill>
+                  <a:srgbClr val="6B7280"/>
+                </a:solidFill>
+                <a:latin typeface="맑은 고딕" pitchFamily="34" charset="0"/>
+                <a:ea typeface="맑은 고딕" pitchFamily="34" charset="-122"/>
+                <a:cs typeface="맑은 고딕" pitchFamily="34" charset="-120"/>
+              </a:rPr>
+              <a:t>검출된 항목마다 AI 제안을 보고, 그 제안을 반영해 본문을 직접 수정·확정한다</a:t>
+            </a:r>
+            <a:endParaRPr lang="en-US" sz="1250" dirty="0"/>
+          </a:p>
+        </p:txBody>
+      </p:sp>
     </p:spTree>
   </p:cSld>
   <p:clrMapOvr>

--- a/docs/진행공유_요구사항자동화.pptx
+++ b/docs/진행공유_요구사항자동화.pptx
@@ -4381,7 +4381,7 @@
                 <a:ea typeface="맑은 고딕" pitchFamily="34" charset="-122"/>
                 <a:cs typeface="맑은 고딕" pitchFamily="34" charset="-120"/>
               </a:rPr>
-              <a:t>약 2시간</a:t>
+              <a:t>평균 3시간</a:t>
             </a:r>
             <a:endParaRPr lang="en-US" sz="2000" dirty="0"/>
           </a:p>
@@ -4420,7 +4420,7 @@
                 <a:ea typeface="맑은 고딕" pitchFamily="34" charset="-122"/>
                 <a:cs typeface="맑은 고딕" pitchFamily="34" charset="-120"/>
               </a:rPr>
-              <a:t>→ 약 10초</a:t>
+              <a:t>→ 5분 이내</a:t>
             </a:r>
             <a:endParaRPr lang="en-US" sz="3200" dirty="0"/>
           </a:p>
@@ -4462,7 +4462,7 @@
                 <a:ea typeface="맑은 고딕" pitchFamily="34" charset="-122"/>
                 <a:cs typeface="맑은 고딕" pitchFamily="34" charset="-120"/>
               </a:rPr>
-              <a:t>요구사항 1건의 문서·티켓 초안 작성</a:t>
+              <a:t>하나의 기능에 대한 산출물 작성</a:t>
             </a:r>
             <a:endParaRPr lang="en-US" sz="1300" dirty="0"/>
           </a:p>
@@ -6039,12 +6039,12 @@
         </p:nvSpPr>
         <p:spPr>
           <a:xfrm>
-            <a:off x="566928" y="1783080"/>
-            <a:ext cx="3529584" cy="3749040"/>
+            <a:off x="566928" y="1645920"/>
+            <a:ext cx="3529584" cy="2487168"/>
           </a:xfrm>
           <a:prstGeom prst="roundRect">
             <a:avLst>
-              <a:gd name="adj" fmla="val 2332"/>
+              <a:gd name="adj" fmla="val 3309"/>
             </a:avLst>
           </a:prstGeom>
           <a:solidFill>
@@ -6073,8 +6073,8 @@
         </p:nvSpPr>
         <p:spPr>
           <a:xfrm>
-            <a:off x="886968" y="2103120"/>
-            <a:ext cx="685800" cy="685800"/>
+            <a:off x="859536" y="1874520"/>
+            <a:ext cx="548640" cy="548640"/>
           </a:xfrm>
           <a:prstGeom prst="ellipse">
             <a:avLst/>
@@ -6092,7 +6092,7 @@
               <a:buNone/>
             </a:pPr>
             <a:r>
-              <a:rPr lang="en-US" sz="2400" b="1" dirty="0">
+              <a:rPr lang="en-US" sz="2000" b="1" dirty="0">
                 <a:solidFill>
                   <a:srgbClr val="FFFFFF"/>
                 </a:solidFill>
@@ -6102,7 +6102,7 @@
               </a:rPr>
               <a:t>1</a:t>
             </a:r>
-            <a:endParaRPr lang="en-US" sz="2400" dirty="0"/>
+            <a:endParaRPr lang="en-US" sz="2000" dirty="0"/>
           </a:p>
         </p:txBody>
       </p:sp>
@@ -6114,8 +6114,8 @@
         </p:nvSpPr>
         <p:spPr>
           <a:xfrm>
-            <a:off x="886968" y="2971800"/>
-            <a:ext cx="2889504" cy="274320"/>
+            <a:off x="1527048" y="1938528"/>
+            <a:ext cx="2340864" cy="256032"/>
           </a:xfrm>
           <a:prstGeom prst="rect">
             <a:avLst/>
@@ -6131,7 +6131,7 @@
               <a:buNone/>
             </a:pPr>
             <a:r>
-              <a:rPr lang="en-US" sz="1200" b="1" dirty="0">
+              <a:rPr lang="en-US" sz="1100" b="1" dirty="0">
                 <a:solidFill>
                   <a:srgbClr val="6B7280"/>
                 </a:solidFill>
@@ -6141,7 +6141,7 @@
               </a:rPr>
               <a:t>핵심 기능 1</a:t>
             </a:r>
-            <a:endParaRPr lang="en-US" sz="1200" dirty="0"/>
+            <a:endParaRPr lang="en-US" sz="1100" dirty="0"/>
           </a:p>
         </p:txBody>
       </p:sp>
@@ -6153,8 +6153,8 @@
         </p:nvSpPr>
         <p:spPr>
           <a:xfrm>
-            <a:off x="886968" y="3246120"/>
-            <a:ext cx="2889504" cy="457200"/>
+            <a:off x="1527048" y="2176272"/>
+            <a:ext cx="2386584" cy="292608"/>
           </a:xfrm>
           <a:prstGeom prst="rect">
             <a:avLst/>
@@ -6170,7 +6170,7 @@
               <a:buNone/>
             </a:pPr>
             <a:r>
-              <a:rPr lang="en-US" sz="1900" b="1" dirty="0">
+              <a:rPr lang="en-US" sz="1550" b="1" dirty="0">
                 <a:solidFill>
                   <a:srgbClr val="1F2937"/>
                 </a:solidFill>
@@ -6180,7 +6180,7 @@
               </a:rPr>
               <a:t>요구사항 검토</a:t>
             </a:r>
-            <a:endParaRPr lang="en-US" sz="1900" dirty="0"/>
+            <a:endParaRPr lang="en-US" sz="1550" dirty="0"/>
           </a:p>
         </p:txBody>
       </p:sp>
@@ -6192,8 +6192,8 @@
         </p:nvSpPr>
         <p:spPr>
           <a:xfrm>
-            <a:off x="886968" y="3794760"/>
-            <a:ext cx="2889504" cy="1005840"/>
+            <a:off x="859536" y="2651760"/>
+            <a:ext cx="2944368" cy="640080"/>
           </a:xfrm>
           <a:prstGeom prst="rect">
             <a:avLst/>
@@ -6207,12 +6207,12 @@
           <a:p>
             <a:pPr indent="0" marL="0">
               <a:lnSpc>
-                <a:spcPct val="110000"/>
+                <a:spcPct val="112000"/>
               </a:lnSpc>
               <a:buNone/>
             </a:pPr>
             <a:r>
-              <a:rPr lang="en-US" sz="1300" dirty="0">
+              <a:rPr lang="en-US" sz="1200" dirty="0">
                 <a:solidFill>
                   <a:srgbClr val="6B7280"/>
                 </a:solidFill>
@@ -6220,9 +6220,9 @@
                 <a:ea typeface="맑은 고딕" pitchFamily="34" charset="-122"/>
                 <a:cs typeface="맑은 고딕" pitchFamily="34" charset="-120"/>
               </a:rPr>
-              <a:t>불명확·상충되는 요구를 LLM이 검출·제안하고, 개발자가 고객과 협의해 확정·관리</a:t>
-            </a:r>
-            <a:endParaRPr lang="en-US" sz="1300" dirty="0"/>
+              <a:t>불명확·상충 요구를 LLM이 검출·제안 → 협의·확정</a:t>
+            </a:r>
+            <a:endParaRPr lang="en-US" sz="1200" dirty="0"/>
           </a:p>
         </p:txBody>
       </p:sp>
@@ -6234,7 +6234,7 @@
         </p:nvSpPr>
         <p:spPr>
           <a:xfrm>
-            <a:off x="886968" y="4983480"/>
+            <a:off x="859536" y="3611880"/>
             <a:ext cx="1737360" cy="310896"/>
           </a:xfrm>
           <a:prstGeom prst="roundRect">
@@ -6277,12 +6277,12 @@
         </p:nvSpPr>
         <p:spPr>
           <a:xfrm>
-            <a:off x="4407408" y="1783080"/>
-            <a:ext cx="3529584" cy="3749040"/>
+            <a:off x="4407408" y="1645920"/>
+            <a:ext cx="3529584" cy="2487168"/>
           </a:xfrm>
           <a:prstGeom prst="roundRect">
             <a:avLst>
-              <a:gd name="adj" fmla="val 2332"/>
+              <a:gd name="adj" fmla="val 3309"/>
             </a:avLst>
           </a:prstGeom>
           <a:solidFill>
@@ -6311,8 +6311,8 @@
         </p:nvSpPr>
         <p:spPr>
           <a:xfrm>
-            <a:off x="4727448" y="2103120"/>
-            <a:ext cx="685800" cy="685800"/>
+            <a:off x="4700016" y="1874520"/>
+            <a:ext cx="548640" cy="548640"/>
           </a:xfrm>
           <a:prstGeom prst="ellipse">
             <a:avLst/>
@@ -6330,7 +6330,7 @@
               <a:buNone/>
             </a:pPr>
             <a:r>
-              <a:rPr lang="en-US" sz="2400" b="1" dirty="0">
+              <a:rPr lang="en-US" sz="2000" b="1" dirty="0">
                 <a:solidFill>
                   <a:srgbClr val="6366F1"/>
                 </a:solidFill>
@@ -6340,7 +6340,7 @@
               </a:rPr>
               <a:t>2</a:t>
             </a:r>
-            <a:endParaRPr lang="en-US" sz="2400" dirty="0"/>
+            <a:endParaRPr lang="en-US" sz="2000" dirty="0"/>
           </a:p>
         </p:txBody>
       </p:sp>
@@ -6352,8 +6352,8 @@
         </p:nvSpPr>
         <p:spPr>
           <a:xfrm>
-            <a:off x="4727448" y="2971800"/>
-            <a:ext cx="2889504" cy="274320"/>
+            <a:off x="5367528" y="1938528"/>
+            <a:ext cx="2340864" cy="256032"/>
           </a:xfrm>
           <a:prstGeom prst="rect">
             <a:avLst/>
@@ -6369,7 +6369,7 @@
               <a:buNone/>
             </a:pPr>
             <a:r>
-              <a:rPr lang="en-US" sz="1200" b="1" dirty="0">
+              <a:rPr lang="en-US" sz="1100" b="1" dirty="0">
                 <a:solidFill>
                   <a:srgbClr val="6B7280"/>
                 </a:solidFill>
@@ -6379,7 +6379,7 @@
               </a:rPr>
               <a:t>핵심 기능 2</a:t>
             </a:r>
-            <a:endParaRPr lang="en-US" sz="1200" dirty="0"/>
+            <a:endParaRPr lang="en-US" sz="1100" dirty="0"/>
           </a:p>
         </p:txBody>
       </p:sp>
@@ -6391,8 +6391,8 @@
         </p:nvSpPr>
         <p:spPr>
           <a:xfrm>
-            <a:off x="4727448" y="3246120"/>
-            <a:ext cx="2889504" cy="457200"/>
+            <a:off x="5367528" y="2176272"/>
+            <a:ext cx="2386584" cy="292608"/>
           </a:xfrm>
           <a:prstGeom prst="rect">
             <a:avLst/>
@@ -6408,7 +6408,7 @@
               <a:buNone/>
             </a:pPr>
             <a:r>
-              <a:rPr lang="en-US" sz="1900" b="1" dirty="0">
+              <a:rPr lang="en-US" sz="1550" b="1" dirty="0">
                 <a:solidFill>
                   <a:srgbClr val="1F2937"/>
                 </a:solidFill>
@@ -6418,7 +6418,7 @@
               </a:rPr>
               <a:t>산출물 도출</a:t>
             </a:r>
-            <a:endParaRPr lang="en-US" sz="1900" dirty="0"/>
+            <a:endParaRPr lang="en-US" sz="1550" dirty="0"/>
           </a:p>
         </p:txBody>
       </p:sp>
@@ -6430,8 +6430,8 @@
         </p:nvSpPr>
         <p:spPr>
           <a:xfrm>
-            <a:off x="4727448" y="3794760"/>
-            <a:ext cx="2889504" cy="1005840"/>
+            <a:off x="4700016" y="2651760"/>
+            <a:ext cx="2944368" cy="640080"/>
           </a:xfrm>
           <a:prstGeom prst="rect">
             <a:avLst/>
@@ -6445,12 +6445,12 @@
           <a:p>
             <a:pPr indent="0" marL="0">
               <a:lnSpc>
-                <a:spcPct val="110000"/>
+                <a:spcPct val="112000"/>
               </a:lnSpc>
               <a:buNone/>
             </a:pPr>
             <a:r>
-              <a:rPr lang="en-US" sz="1300" dirty="0">
+              <a:rPr lang="en-US" sz="1200" dirty="0">
                 <a:solidFill>
                   <a:srgbClr val="6B7280"/>
                 </a:solidFill>
@@ -6458,9 +6458,9 @@
                 <a:ea typeface="맑은 고딕" pitchFamily="34" charset="-122"/>
                 <a:cs typeface="맑은 고딕" pitchFamily="34" charset="-120"/>
               </a:rPr>
-              <a:t>확정 요구사항에서 기능·비기능 요구사항·티켓·상세설계 등 산출물 초안을 자동 도출</a:t>
-            </a:r>
-            <a:endParaRPr lang="en-US" sz="1300" dirty="0"/>
+              <a:t>확정 요구사항에서 티켓·문서 초안을 자동 도출</a:t>
+            </a:r>
+            <a:endParaRPr lang="en-US" sz="1200" dirty="0"/>
           </a:p>
         </p:txBody>
       </p:sp>
@@ -6472,7 +6472,7 @@
         </p:nvSpPr>
         <p:spPr>
           <a:xfrm>
-            <a:off x="4727448" y="4983480"/>
+            <a:off x="4700016" y="3611880"/>
             <a:ext cx="1737360" cy="310896"/>
           </a:xfrm>
           <a:prstGeom prst="roundRect">
@@ -6515,12 +6515,12 @@
         </p:nvSpPr>
         <p:spPr>
           <a:xfrm>
-            <a:off x="8247888" y="1783080"/>
-            <a:ext cx="3529584" cy="3749040"/>
+            <a:off x="8247888" y="1645920"/>
+            <a:ext cx="3529584" cy="2487168"/>
           </a:xfrm>
           <a:prstGeom prst="roundRect">
             <a:avLst>
-              <a:gd name="adj" fmla="val 2332"/>
+              <a:gd name="adj" fmla="val 3309"/>
             </a:avLst>
           </a:prstGeom>
           <a:solidFill>
@@ -6549,8 +6549,8 @@
         </p:nvSpPr>
         <p:spPr>
           <a:xfrm>
-            <a:off x="8567928" y="2103120"/>
-            <a:ext cx="685800" cy="685800"/>
+            <a:off x="8540496" y="1874520"/>
+            <a:ext cx="548640" cy="548640"/>
           </a:xfrm>
           <a:prstGeom prst="ellipse">
             <a:avLst/>
@@ -6568,7 +6568,7 @@
               <a:buNone/>
             </a:pPr>
             <a:r>
-              <a:rPr lang="en-US" sz="2400" b="1" dirty="0">
+              <a:rPr lang="en-US" sz="2000" b="1" dirty="0">
                 <a:solidFill>
                   <a:srgbClr val="6366F1"/>
                 </a:solidFill>
@@ -6578,7 +6578,7 @@
               </a:rPr>
               <a:t>3</a:t>
             </a:r>
-            <a:endParaRPr lang="en-US" sz="2400" dirty="0"/>
+            <a:endParaRPr lang="en-US" sz="2000" dirty="0"/>
           </a:p>
         </p:txBody>
       </p:sp>
@@ -6590,8 +6590,8 @@
         </p:nvSpPr>
         <p:spPr>
           <a:xfrm>
-            <a:off x="8567928" y="2971800"/>
-            <a:ext cx="2889504" cy="274320"/>
+            <a:off x="9208008" y="1938528"/>
+            <a:ext cx="2340864" cy="256032"/>
           </a:xfrm>
           <a:prstGeom prst="rect">
             <a:avLst/>
@@ -6607,7 +6607,7 @@
               <a:buNone/>
             </a:pPr>
             <a:r>
-              <a:rPr lang="en-US" sz="1200" b="1" dirty="0">
+              <a:rPr lang="en-US" sz="1100" b="1" dirty="0">
                 <a:solidFill>
                   <a:srgbClr val="6B7280"/>
                 </a:solidFill>
@@ -6617,7 +6617,7 @@
               </a:rPr>
               <a:t>핵심 기능 3</a:t>
             </a:r>
-            <a:endParaRPr lang="en-US" sz="1200" dirty="0"/>
+            <a:endParaRPr lang="en-US" sz="1100" dirty="0"/>
           </a:p>
         </p:txBody>
       </p:sp>
@@ -6629,8 +6629,8 @@
         </p:nvSpPr>
         <p:spPr>
           <a:xfrm>
-            <a:off x="8567928" y="3246120"/>
-            <a:ext cx="2889504" cy="457200"/>
+            <a:off x="9208008" y="2176272"/>
+            <a:ext cx="2386584" cy="292608"/>
           </a:xfrm>
           <a:prstGeom prst="rect">
             <a:avLst/>
@@ -6646,7 +6646,7 @@
               <a:buNone/>
             </a:pPr>
             <a:r>
-              <a:rPr lang="en-US" sz="1900" b="1" dirty="0">
+              <a:rPr lang="en-US" sz="1550" b="1" dirty="0">
                 <a:solidFill>
                   <a:srgbClr val="1F2937"/>
                 </a:solidFill>
@@ -6656,7 +6656,7 @@
               </a:rPr>
               <a:t>산출물 관리 (추적성)</a:t>
             </a:r>
-            <a:endParaRPr lang="en-US" sz="1900" dirty="0"/>
+            <a:endParaRPr lang="en-US" sz="1550" dirty="0"/>
           </a:p>
         </p:txBody>
       </p:sp>
@@ -6668,8 +6668,8 @@
         </p:nvSpPr>
         <p:spPr>
           <a:xfrm>
-            <a:off x="8567928" y="3794760"/>
-            <a:ext cx="2889504" cy="1005840"/>
+            <a:off x="8540496" y="2651760"/>
+            <a:ext cx="2944368" cy="640080"/>
           </a:xfrm>
           <a:prstGeom prst="rect">
             <a:avLst/>
@@ -6683,12 +6683,12 @@
           <a:p>
             <a:pPr indent="0" marL="0">
               <a:lnSpc>
-                <a:spcPct val="110000"/>
+                <a:spcPct val="112000"/>
               </a:lnSpc>
               <a:buNone/>
             </a:pPr>
             <a:r>
-              <a:rPr lang="en-US" sz="1300" dirty="0">
+              <a:rPr lang="en-US" sz="1200" dirty="0">
                 <a:solidFill>
                   <a:srgbClr val="6B7280"/>
                 </a:solidFill>
@@ -6696,9 +6696,9 @@
                 <a:ea typeface="맑은 고딕" pitchFamily="34" charset="-122"/>
                 <a:cs typeface="맑은 고딕" pitchFamily="34" charset="-120"/>
               </a:rPr>
-              <a:t>요구사항별 연결 산출물을 한눈에 — 변경 영향·진행상황까지 관리</a:t>
-            </a:r>
-            <a:endParaRPr lang="en-US" sz="1300" dirty="0"/>
+              <a:t>요구사항↔산출물 연결·변경 영향·진행 관리</a:t>
+            </a:r>
+            <a:endParaRPr lang="en-US" sz="1200" dirty="0"/>
           </a:p>
         </p:txBody>
       </p:sp>
@@ -6710,7 +6710,7 @@
         </p:nvSpPr>
         <p:spPr>
           <a:xfrm>
-            <a:off x="8567928" y="4983480"/>
+            <a:off x="8540496" y="3611880"/>
             <a:ext cx="1737360" cy="310896"/>
           </a:xfrm>
           <a:prstGeom prst="roundRect">
@@ -6747,14 +6747,183 @@
       </p:sp>
       <p:sp>
         <p:nvSpPr>
-          <p:cNvPr id="22" name="Text 20"/>
-          <p:cNvSpPr/>
-          <p:nvPr/>
-        </p:nvSpPr>
-        <p:spPr>
-          <a:xfrm>
-            <a:off x="566928" y="5806440"/>
-            <a:ext cx="10972800" cy="365760"/>
+          <p:cNvPr id="22" name="Shape 20"/>
+          <p:cNvSpPr/>
+          <p:nvPr/>
+        </p:nvSpPr>
+        <p:spPr>
+          <a:xfrm>
+            <a:off x="566928" y="4370832"/>
+            <a:ext cx="11064240" cy="1783080"/>
+          </a:xfrm>
+          <a:prstGeom prst="roundRect">
+            <a:avLst>
+              <a:gd name="adj" fmla="val 5641"/>
+            </a:avLst>
+          </a:prstGeom>
+          <a:solidFill>
+            <a:srgbClr val="1E1B4B"/>
+          </a:solidFill>
+          <a:ln/>
+          <a:effectLst>
+            <a:outerShdw sx="100000" sy="100000" kx="0" ky="0" algn="bl" rotWithShape="0" blurRad="127000" dist="50800" dir="5400000">
+              <a:srgbClr val="1E1B4B">
+                <a:alpha val="18000"/>
+              </a:srgbClr>
+            </a:outerShdw>
+          </a:effectLst>
+        </p:spPr>
+      </p:sp>
+      <p:sp>
+        <p:nvSpPr>
+          <p:cNvPr id="23" name="Shape 21"/>
+          <p:cNvSpPr/>
+          <p:nvPr/>
+        </p:nvSpPr>
+        <p:spPr>
+          <a:xfrm>
+            <a:off x="5806440" y="4709160"/>
+            <a:ext cx="0" cy="1097280"/>
+          </a:xfrm>
+          <a:prstGeom prst="line">
+            <a:avLst/>
+          </a:prstGeom>
+          <a:noFill/>
+          <a:ln w="12700">
+            <a:solidFill>
+              <a:srgbClr val="4338CA"/>
+            </a:solidFill>
+            <a:prstDash val="solid"/>
+          </a:ln>
+        </p:spPr>
+      </p:sp>
+      <p:sp>
+        <p:nvSpPr>
+          <p:cNvPr id="24" name="Text 22"/>
+          <p:cNvSpPr/>
+          <p:nvPr/>
+        </p:nvSpPr>
+        <p:spPr>
+          <a:xfrm>
+            <a:off x="978408" y="4645152"/>
+            <a:ext cx="4572000" cy="274320"/>
+          </a:xfrm>
+          <a:prstGeom prst="rect">
+            <a:avLst/>
+          </a:prstGeom>
+          <a:noFill/>
+          <a:ln/>
+        </p:spPr>
+        <p:txBody>
+          <a:bodyPr wrap="square" lIns="0" tIns="0" rIns="0" bIns="0" rtlCol="0" anchor="ctr"/>
+          <a:lstStyle/>
+          <a:p>
+            <a:pPr indent="0" marL="0">
+              <a:buNone/>
+            </a:pPr>
+            <a:r>
+              <a:rPr lang="en-US" sz="1200" b="1" spc="100" kern="0" dirty="0">
+                <a:solidFill>
+                  <a:srgbClr val="A5B4FC"/>
+                </a:solidFill>
+                <a:latin typeface="맑은 고딕" pitchFamily="34" charset="0"/>
+                <a:ea typeface="맑은 고딕" pitchFamily="34" charset="-122"/>
+                <a:cs typeface="맑은 고딕" pitchFamily="34" charset="-120"/>
+              </a:rPr>
+              <a:t>기대 효과</a:t>
+            </a:r>
+            <a:endParaRPr lang="en-US" sz="1200" dirty="0"/>
+          </a:p>
+        </p:txBody>
+      </p:sp>
+      <p:sp>
+        <p:nvSpPr>
+          <p:cNvPr id="25" name="Text 23"/>
+          <p:cNvSpPr/>
+          <p:nvPr/>
+        </p:nvSpPr>
+        <p:spPr>
+          <a:xfrm>
+            <a:off x="978408" y="4956048"/>
+            <a:ext cx="4937760" cy="457200"/>
+          </a:xfrm>
+          <a:prstGeom prst="rect">
+            <a:avLst/>
+          </a:prstGeom>
+          <a:noFill/>
+          <a:ln/>
+        </p:spPr>
+        <p:txBody>
+          <a:bodyPr wrap="square" lIns="0" tIns="0" rIns="0" bIns="0" rtlCol="0" anchor="ctr"/>
+          <a:lstStyle/>
+          <a:p>
+            <a:pPr indent="0" marL="0">
+              <a:buNone/>
+            </a:pPr>
+            <a:r>
+              <a:rPr lang="en-US" sz="2100" b="1" dirty="0">
+                <a:solidFill>
+                  <a:srgbClr val="FFFFFF"/>
+                </a:solidFill>
+                <a:latin typeface="맑은 고딕" pitchFamily="34" charset="0"/>
+                <a:ea typeface="맑은 고딕" pitchFamily="34" charset="-122"/>
+                <a:cs typeface="맑은 고딕" pitchFamily="34" charset="-120"/>
+              </a:rPr>
+              <a:t>업무 효율성이 크게 올라갑니다</a:t>
+            </a:r>
+            <a:endParaRPr lang="en-US" sz="2100" dirty="0"/>
+          </a:p>
+        </p:txBody>
+      </p:sp>
+      <p:sp>
+        <p:nvSpPr>
+          <p:cNvPr id="26" name="Text 24"/>
+          <p:cNvSpPr/>
+          <p:nvPr/>
+        </p:nvSpPr>
+        <p:spPr>
+          <a:xfrm>
+            <a:off x="978408" y="5468112"/>
+            <a:ext cx="5029200" cy="365760"/>
+          </a:xfrm>
+          <a:prstGeom prst="rect">
+            <a:avLst/>
+          </a:prstGeom>
+          <a:noFill/>
+          <a:ln/>
+        </p:spPr>
+        <p:txBody>
+          <a:bodyPr wrap="square" lIns="0" tIns="0" rIns="0" bIns="0" rtlCol="0" anchor="ctr"/>
+          <a:lstStyle/>
+          <a:p>
+            <a:pPr indent="0" marL="0">
+              <a:buNone/>
+            </a:pPr>
+            <a:r>
+              <a:rPr lang="en-US" sz="1200" dirty="0">
+                <a:solidFill>
+                  <a:srgbClr val="C7D2FE"/>
+                </a:solidFill>
+                <a:latin typeface="맑은 고딕" pitchFamily="34" charset="0"/>
+                <a:ea typeface="맑은 고딕" pitchFamily="34" charset="-122"/>
+                <a:cs typeface="맑은 고딕" pitchFamily="34" charset="-120"/>
+              </a:rPr>
+              <a:t>요구사항 검토부터 산출물 작성까지 한 흐름으로 자동화</a:t>
+            </a:r>
+            <a:endParaRPr lang="en-US" sz="1200" dirty="0"/>
+          </a:p>
+        </p:txBody>
+      </p:sp>
+      <p:sp>
+        <p:nvSpPr>
+          <p:cNvPr id="27" name="Text 25"/>
+          <p:cNvSpPr/>
+          <p:nvPr/>
+        </p:nvSpPr>
+        <p:spPr>
+          <a:xfrm>
+            <a:off x="6126480" y="4590288"/>
+            <a:ext cx="5394960" cy="274320"/>
           </a:xfrm>
           <a:prstGeom prst="rect">
             <a:avLst/>
@@ -6770,17 +6939,134 @@
               <a:buNone/>
             </a:pPr>
             <a:r>
-              <a:rPr lang="en-US" sz="1300" b="1" dirty="0">
-                <a:solidFill>
-                  <a:srgbClr val="6366F1"/>
-                </a:solidFill>
-                <a:latin typeface="맑은 고딕" pitchFamily="34" charset="0"/>
-                <a:ea typeface="맑은 고딕" pitchFamily="34" charset="-122"/>
-                <a:cs typeface="맑은 고딕" pitchFamily="34" charset="-120"/>
-              </a:rPr>
-              <a:t>흐름:  요구사항 검토  →  문서·티켓 생성  →  추적성</a:t>
-            </a:r>
-            <a:endParaRPr lang="en-US" sz="1300" dirty="0"/>
+              <a:rPr lang="en-US" sz="1200" dirty="0">
+                <a:solidFill>
+                  <a:srgbClr val="A5B4FC"/>
+                </a:solidFill>
+                <a:latin typeface="맑은 고딕" pitchFamily="34" charset="0"/>
+                <a:ea typeface="맑은 고딕" pitchFamily="34" charset="-122"/>
+                <a:cs typeface="맑은 고딕" pitchFamily="34" charset="-120"/>
+              </a:rPr>
+              <a:t>하나의 기능에 대한 산출물 작성 소요시간</a:t>
+            </a:r>
+            <a:endParaRPr lang="en-US" sz="1200" dirty="0"/>
+          </a:p>
+        </p:txBody>
+      </p:sp>
+      <p:sp>
+        <p:nvSpPr>
+          <p:cNvPr id="28" name="Text 26"/>
+          <p:cNvSpPr/>
+          <p:nvPr/>
+        </p:nvSpPr>
+        <p:spPr>
+          <a:xfrm>
+            <a:off x="6035040" y="4983480"/>
+            <a:ext cx="2331720" cy="640080"/>
+          </a:xfrm>
+          <a:prstGeom prst="rect">
+            <a:avLst/>
+          </a:prstGeom>
+          <a:noFill/>
+          <a:ln/>
+        </p:spPr>
+        <p:txBody>
+          <a:bodyPr wrap="square" lIns="0" tIns="0" rIns="0" bIns="0" rtlCol="0" anchor="ctr"/>
+          <a:lstStyle/>
+          <a:p>
+            <a:pPr algn="r" indent="0" marL="0">
+              <a:buNone/>
+            </a:pPr>
+            <a:r>
+              <a:rPr lang="en-US" sz="2200" b="1" dirty="0">
+                <a:solidFill>
+                  <a:srgbClr val="C7D2FE"/>
+                </a:solidFill>
+                <a:latin typeface="맑은 고딕" pitchFamily="34" charset="0"/>
+                <a:ea typeface="맑은 고딕" pitchFamily="34" charset="-122"/>
+                <a:cs typeface="맑은 고딕" pitchFamily="34" charset="-120"/>
+              </a:rPr>
+              <a:t>평균 3시간</a:t>
+            </a:r>
+            <a:endParaRPr lang="en-US" sz="2200" dirty="0"/>
+          </a:p>
+        </p:txBody>
+      </p:sp>
+      <p:sp>
+        <p:nvSpPr>
+          <p:cNvPr id="29" name="Text 27"/>
+          <p:cNvSpPr/>
+          <p:nvPr/>
+        </p:nvSpPr>
+        <p:spPr>
+          <a:xfrm>
+            <a:off x="8412480" y="4983480"/>
+            <a:ext cx="640080" cy="640080"/>
+          </a:xfrm>
+          <a:prstGeom prst="rect">
+            <a:avLst/>
+          </a:prstGeom>
+          <a:noFill/>
+          <a:ln/>
+        </p:spPr>
+        <p:txBody>
+          <a:bodyPr wrap="square" lIns="0" tIns="0" rIns="0" bIns="0" rtlCol="0" anchor="ctr"/>
+          <a:lstStyle/>
+          <a:p>
+            <a:pPr algn="ctr" indent="0" marL="0">
+              <a:buNone/>
+            </a:pPr>
+            <a:r>
+              <a:rPr lang="en-US" sz="2600" b="1" dirty="0">
+                <a:solidFill>
+                  <a:srgbClr val="818CF8"/>
+                </a:solidFill>
+                <a:latin typeface="맑은 고딕" pitchFamily="34" charset="0"/>
+                <a:ea typeface="맑은 고딕" pitchFamily="34" charset="-122"/>
+                <a:cs typeface="맑은 고딕" pitchFamily="34" charset="-120"/>
+              </a:rPr>
+              <a:t>→</a:t>
+            </a:r>
+            <a:endParaRPr lang="en-US" sz="2600" dirty="0"/>
+          </a:p>
+        </p:txBody>
+      </p:sp>
+      <p:sp>
+        <p:nvSpPr>
+          <p:cNvPr id="30" name="Text 28"/>
+          <p:cNvSpPr/>
+          <p:nvPr/>
+        </p:nvSpPr>
+        <p:spPr>
+          <a:xfrm>
+            <a:off x="9006840" y="4937760"/>
+            <a:ext cx="2468880" cy="731520"/>
+          </a:xfrm>
+          <a:prstGeom prst="rect">
+            <a:avLst/>
+          </a:prstGeom>
+          <a:noFill/>
+          <a:ln/>
+        </p:spPr>
+        <p:txBody>
+          <a:bodyPr wrap="square" lIns="0" tIns="0" rIns="0" bIns="0" rtlCol="0" anchor="ctr"/>
+          <a:lstStyle/>
+          <a:p>
+            <a:pPr algn="l" indent="0" marL="0">
+              <a:buNone/>
+            </a:pPr>
+            <a:r>
+              <a:rPr lang="en-US" sz="3400" b="1" dirty="0">
+                <a:solidFill>
+                  <a:srgbClr val="FFFFFF"/>
+                </a:solidFill>
+                <a:latin typeface="맑은 고딕" pitchFamily="34" charset="0"/>
+                <a:ea typeface="맑은 고딕" pitchFamily="34" charset="-122"/>
+                <a:cs typeface="맑은 고딕" pitchFamily="34" charset="-120"/>
+              </a:rPr>
+              <a:t>5분 이내</a:t>
+            </a:r>
+            <a:endParaRPr lang="en-US" sz="3400" dirty="0"/>
           </a:p>
         </p:txBody>
       </p:sp>

--- a/docs/진행공유_요구사항자동화.pptx
+++ b/docs/진행공유_요구사항자동화.pptx
@@ -22,9 +22,10 @@
     <p:sldId id="270" r:id="rId16"/>
     <p:sldId id="271" r:id="rId17"/>
     <p:sldId id="272" r:id="rId18"/>
+    <p:sldId id="273" r:id="rId19"/>
   </p:sldIdLst>
   <p:notesMasterIdLst>
-    <p:notesMasterId r:id="rId19"/>
+    <p:notesMasterId r:id="rId20"/>
   </p:notesMasterIdLst>
   <p:sldSz cx="12192000" cy="6858000"/>
   <p:notesSz cx="6858000" cy="12192000"/>
@@ -1246,6 +1247,94 @@
             <a:fld id="{F7021451-1387-4CA6-816F-3879F97B5CBC}" type="slidenum">
               <a:rPr lang="en-US"/>
               <a:t>17</a:t>
+            </a:fld>
+            <a:endParaRPr lang="en-US"/>
+          </a:p>
+        </p:txBody>
+      </p:sp>
+    </p:spTree>
+    <p:extLst>
+      <p:ext uri="{BB962C8B-B14F-4D97-AF65-F5344CB8AC3E}">
+        <p14:creationId xmlns:p14="http://schemas.microsoft.com/office/powerpoint/2010/main" val="1024086991"/>
+      </p:ext>
+    </p:extLst>
+  </p:cSld>
+  <p:clrMapOvr>
+    <a:masterClrMapping/>
+  </p:clrMapOvr>
+</p:notes>
+</file>
+
+<file path=ppt/notesSlides/notesSlide18.xml><?xml version="1.0" encoding="utf-8"?>
+<p:notes xmlns:a="http://schemas.openxmlformats.org/drawingml/2006/main" xmlns:r="http://schemas.openxmlformats.org/officeDocument/2006/relationships" xmlns:p="http://schemas.openxmlformats.org/presentationml/2006/main">
+  <p:cSld>
+    <p:spTree>
+      <p:nvGrpSpPr>
+        <p:cNvPr id="1" name=""/>
+        <p:cNvGrpSpPr/>
+        <p:nvPr/>
+      </p:nvGrpSpPr>
+      <p:grpSpPr>
+        <a:xfrm>
+          <a:off x="0" y="0"/>
+          <a:ext cx="0" cy="0"/>
+          <a:chOff x="0" y="0"/>
+          <a:chExt cx="0" cy="0"/>
+        </a:xfrm>
+      </p:grpSpPr>
+      <p:sp>
+        <p:nvSpPr>
+          <p:cNvPr id="2" name="Slide Image Placeholder 1"/>
+          <p:cNvSpPr>
+            <a:spLocks noGrp="1" noRot="1" noChangeAspect="1"/>
+          </p:cNvSpPr>
+          <p:nvPr>
+            <p:ph type="sldImg"/>
+          </p:nvPr>
+        </p:nvSpPr>
+        <p:spPr/>
+      </p:sp>
+      <p:sp>
+        <p:nvSpPr>
+          <p:cNvPr id="3" name="Notes Placeholder 2"/>
+          <p:cNvSpPr>
+            <a:spLocks noGrp="1"/>
+          </p:cNvSpPr>
+          <p:nvPr>
+            <p:ph type="body" idx="1"/>
+          </p:nvPr>
+        </p:nvSpPr>
+        <p:spPr/>
+        <p:txBody>
+          <a:bodyPr/>
+          <a:lstStyle/>
+          <a:p>
+            <a:r>
+              <a:rPr lang="en-US" dirty="0"/>
+              <a:t/>
+            </a:r>
+            <a:endParaRPr lang="en-US" dirty="0"/>
+          </a:p>
+        </p:txBody>
+      </p:sp>
+      <p:sp>
+        <p:nvSpPr>
+          <p:cNvPr id="4" name="Slide Number Placeholder 3"/>
+          <p:cNvSpPr>
+            <a:spLocks noGrp="1"/>
+          </p:cNvSpPr>
+          <p:nvPr>
+            <p:ph type="sldNum" sz="quarter" idx="10"/>
+          </p:nvPr>
+        </p:nvSpPr>
+        <p:spPr/>
+        <p:txBody>
+          <a:bodyPr/>
+          <a:lstStyle/>
+          <a:p>
+            <a:fld id="{F7021451-1387-4CA6-816F-3879F97B5CBC}" type="slidenum">
+              <a:rPr lang="en-US"/>
+              <a:t>18</a:t>
             </a:fld>
             <a:endParaRPr lang="en-US"/>
           </a:p>
@@ -2854,15 +2943,58 @@
                 <a:ea typeface="맑은 고딕" pitchFamily="34" charset="-122"/>
                 <a:cs typeface="맑은 고딕" pitchFamily="34" charset="-120"/>
               </a:rPr>
-              <a:t>예시 — Jira 티켓 4종</a:t>
+              <a:t>AI가 도출하는 산출물 5종 · 작성 주체</a:t>
             </a:r>
             <a:endParaRPr lang="en-US" sz="3000" dirty="0"/>
+          </a:p>
+        </p:txBody>
+      </p:sp>
+      <p:sp>
+        <p:nvSpPr>
+          <p:cNvPr id="4" name="Text 2"/>
+          <p:cNvSpPr/>
+          <p:nvPr/>
+        </p:nvSpPr>
+        <p:spPr>
+          <a:xfrm>
+            <a:off x="10424160" y="822960"/>
+            <a:ext cx="1737360" cy="310896"/>
+          </a:xfrm>
+          <a:prstGeom prst="roundRect">
+            <a:avLst>
+              <a:gd name="adj" fmla="val 47059"/>
+            </a:avLst>
+          </a:prstGeom>
+          <a:solidFill>
+            <a:srgbClr val="FEF3C7"/>
+          </a:solidFill>
+          <a:ln/>
+        </p:spPr>
+        <p:txBody>
+          <a:bodyPr wrap="square" lIns="0" tIns="0" rIns="0" bIns="0" rtlCol="0" anchor="ctr"/>
+          <a:lstStyle/>
+          <a:p>
+            <a:pPr algn="ctr" indent="0" marL="0">
+              <a:buNone/>
+            </a:pPr>
+            <a:r>
+              <a:rPr lang="en-US" sz="1100" b="1" dirty="0">
+                <a:solidFill>
+                  <a:srgbClr val="B45309"/>
+                </a:solidFill>
+                <a:latin typeface="맑은 고딕" pitchFamily="34" charset="0"/>
+                <a:ea typeface="맑은 고딕" pitchFamily="34" charset="-122"/>
+                <a:cs typeface="맑은 고딕" pitchFamily="34" charset="-120"/>
+              </a:rPr>
+              <a:t>개발 예정</a:t>
+            </a:r>
+            <a:endParaRPr lang="en-US" sz="1100" dirty="0"/>
           </a:p>
         </p:txBody>
       </p:sp>
       <p:pic>
         <p:nvPicPr>
-          <p:cNvPr id="4" name="Image 0" descr="/home/user/semes-superrookie/docs/img/ppt-derive-2.png">    </p:cNvPr>
+          <p:cNvPr id="5" name="Image 0" descr="/home/user/semes-superrookie/docs/img/ppt-derive-table.png">    </p:cNvPr>
           <p:cNvPicPr>
             <a:picLocks noChangeAspect="1"/>
           </p:cNvPicPr>
@@ -2876,8 +3008,8 @@
         </p:blipFill>
         <p:spPr>
           <a:xfrm>
-            <a:off x="836676" y="1691640"/>
-            <a:ext cx="10515600" cy="4453128"/>
+            <a:off x="333756" y="1783080"/>
+            <a:ext cx="11521440" cy="4305910"/>
           </a:xfrm>
           <a:prstGeom prst="rect">
             <a:avLst/>
@@ -2886,13 +3018,13 @@
       </p:pic>
       <p:sp>
         <p:nvSpPr>
-          <p:cNvPr id="5" name="Text 2"/>
-          <p:cNvSpPr/>
-          <p:nvPr/>
-        </p:nvSpPr>
-        <p:spPr>
-          <a:xfrm>
-            <a:off x="566928" y="6263640"/>
+          <p:cNvPr id="6" name="Text 3"/>
+          <p:cNvSpPr/>
+          <p:nvPr/>
+        </p:nvSpPr>
+        <p:spPr>
+          <a:xfrm>
+            <a:off x="566928" y="6172200"/>
             <a:ext cx="11064240" cy="365760"/>
           </a:xfrm>
           <a:prstGeom prst="rect">
@@ -2917,7 +3049,7 @@
                 <a:ea typeface="맑은 고딕" pitchFamily="34" charset="-122"/>
                 <a:cs typeface="맑은 고딕" pitchFamily="34" charset="-120"/>
               </a:rPr>
-              <a:t>확정 요구사항에서 기능마다 필요한 Jira 이슈 초안 생성 · Detail Design은 시퀀스 다이어그램까지 자동</a:t>
+              <a:t>모두 AI가 뽑아 주는 건 아니다 — 구조·규칙에서 나오는 건 AI 초안, 배경·판단이 필요한 건 사람이 작성</a:t>
             </a:r>
             <a:endParaRPr lang="en-US" sz="1200" dirty="0"/>
           </a:p>
@@ -2988,7 +3120,7 @@
                 <a:ea typeface="맑은 고딕" pitchFamily="34" charset="-122"/>
                 <a:cs typeface="맑은 고딕" pitchFamily="34" charset="-120"/>
               </a:rPr>
-              <a:t>핵심 기능 3 · 산출물 관리 ①</a:t>
+              <a:t>핵심 기능 2 · 산출물 도출</a:t>
             </a:r>
             <a:endParaRPr lang="en-US" sz="1200" dirty="0"/>
           </a:p>
@@ -3027,7 +3159,7 @@
                 <a:ea typeface="맑은 고딕" pitchFamily="34" charset="-122"/>
                 <a:cs typeface="맑은 고딕" pitchFamily="34" charset="-120"/>
               </a:rPr>
-              <a:t>연결 관리 (추적성)</a:t>
+              <a:t>산출물 5종 구조 한눈에</a:t>
             </a:r>
             <a:endParaRPr lang="en-US" sz="3000" dirty="0"/>
           </a:p>
@@ -3076,62 +3208,9 @@
           </a:p>
         </p:txBody>
       </p:sp>
-      <p:sp>
-        <p:nvSpPr>
-          <p:cNvPr id="5" name="Text 3"/>
-          <p:cNvSpPr/>
-          <p:nvPr/>
-        </p:nvSpPr>
-        <p:spPr>
-          <a:xfrm>
-            <a:off x="566928" y="1627632"/>
-            <a:ext cx="11064240" cy="320040"/>
-          </a:xfrm>
-          <a:prstGeom prst="rect">
-            <a:avLst/>
-          </a:prstGeom>
-          <a:noFill/>
-          <a:ln/>
-        </p:spPr>
-        <p:txBody>
-          <a:bodyPr wrap="square" lIns="0" tIns="0" rIns="0" bIns="0" rtlCol="0" anchor="ctr"/>
-          <a:lstStyle/>
-          <a:p>
-            <a:pPr indent="0" marL="0">
-              <a:buNone/>
-            </a:pPr>
-            <a:r>
-              <a:rPr lang="en-US" sz="1400" b="1" dirty="0">
-                <a:solidFill>
-                  <a:srgbClr val="1F2937"/>
-                </a:solidFill>
-                <a:latin typeface="맑은 고딕" pitchFamily="34" charset="0"/>
-                <a:ea typeface="맑은 고딕" pitchFamily="34" charset="-122"/>
-                <a:cs typeface="맑은 고딕" pitchFamily="34" charset="-120"/>
-              </a:rPr>
-              <a:t>① 연결 관리 </a:t>
-            </a:r>
-            <a:pPr indent="0" marL="0">
-              <a:buNone/>
-            </a:pPr>
-            <a:r>
-              <a:rPr lang="en-US" sz="1400" dirty="0">
-                <a:solidFill>
-                  <a:srgbClr val="6B7280"/>
-                </a:solidFill>
-                <a:latin typeface="맑은 고딕" pitchFamily="34" charset="0"/>
-                <a:ea typeface="맑은 고딕" pitchFamily="34" charset="-122"/>
-                <a:cs typeface="맑은 고딕" pitchFamily="34" charset="-120"/>
-              </a:rPr>
-              <a:t>— 요구사항 하나에 어떤 산출물(티켓·SWVOC·Function Requirement·Detail Design)이 물려 있는지 한눈에 (양방향 조회)</a:t>
-            </a:r>
-            <a:endParaRPr lang="en-US" sz="1400" dirty="0"/>
-          </a:p>
-        </p:txBody>
-      </p:sp>
       <p:pic>
         <p:nvPicPr>
-          <p:cNvPr id="6" name="Image 0" descr="/home/user/semes-superrookie/docs/img/ppt-trace-1.png">    </p:cNvPr>
+          <p:cNvPr id="5" name="Image 0" descr="/home/user/semes-superrookie/docs/img/ppt-derive-struct.png">    </p:cNvPr>
           <p:cNvPicPr>
             <a:picLocks noChangeAspect="1"/>
           </p:cNvPicPr>
@@ -3145,8 +3224,8 @@
         </p:blipFill>
         <p:spPr>
           <a:xfrm>
-            <a:off x="379476" y="2468880"/>
-            <a:ext cx="11430000" cy="2988259"/>
+            <a:off x="196596" y="2057400"/>
+            <a:ext cx="11795760" cy="3341218"/>
           </a:xfrm>
           <a:prstGeom prst="rect">
             <a:avLst/>
@@ -3155,7 +3234,7 @@
       </p:pic>
       <p:sp>
         <p:nvSpPr>
-          <p:cNvPr id="7" name="Text 4"/>
+          <p:cNvPr id="6" name="Text 3"/>
           <p:cNvSpPr/>
           <p:nvPr/>
         </p:nvSpPr>
@@ -3186,7 +3265,7 @@
                 <a:ea typeface="맑은 고딕" pitchFamily="34" charset="-122"/>
                 <a:cs typeface="맑은 고딕" pitchFamily="34" charset="-120"/>
               </a:rPr>
-              <a:t>요구사항 1건 ↔ 기능별 티켓 3개, 각 티켓 아래 산출물 3종을 실제 Jira ID로 연결</a:t>
+              <a:t>기능·비기능 요구사항의 “동작 정의”(기본·변형·예외 × 선행·후행·시나리오, 9행)가 AI 도출의 핵심</a:t>
             </a:r>
             <a:endParaRPr lang="en-US" sz="1250" dirty="0"/>
           </a:p>
@@ -3257,7 +3336,7 @@
                 <a:ea typeface="맑은 고딕" pitchFamily="34" charset="-122"/>
                 <a:cs typeface="맑은 고딕" pitchFamily="34" charset="-120"/>
               </a:rPr>
-              <a:t>핵심 기능 3 · 산출물 관리 ②</a:t>
+              <a:t>핵심 기능 3 · 산출물 관리 ①</a:t>
             </a:r>
             <a:endParaRPr lang="en-US" sz="1200" dirty="0"/>
           </a:p>
@@ -3296,7 +3375,7 @@
                 <a:ea typeface="맑은 고딕" pitchFamily="34" charset="-122"/>
                 <a:cs typeface="맑은 고딕" pitchFamily="34" charset="-120"/>
               </a:rPr>
-              <a:t>변경 추적 (변경 영향 분석)</a:t>
+              <a:t>연결 관리 (추적성)</a:t>
             </a:r>
             <a:endParaRPr lang="en-US" sz="3000" dirty="0"/>
           </a:p>
@@ -3353,7 +3432,7 @@
         </p:nvSpPr>
         <p:spPr>
           <a:xfrm>
-            <a:off x="566928" y="1371600"/>
+            <a:off x="566928" y="1627632"/>
             <a:ext cx="11064240" cy="320040"/>
           </a:xfrm>
           <a:prstGeom prst="rect">
@@ -3378,7 +3457,7 @@
                 <a:ea typeface="맑은 고딕" pitchFamily="34" charset="-122"/>
                 <a:cs typeface="맑은 고딕" pitchFamily="34" charset="-120"/>
               </a:rPr>
-              <a:t>② 변경 추적 </a:t>
+              <a:t>① 연결 관리 </a:t>
             </a:r>
             <a:pPr indent="0" marL="0">
               <a:buNone/>
@@ -3392,7 +3471,7 @@
                 <a:ea typeface="맑은 고딕" pitchFamily="34" charset="-122"/>
                 <a:cs typeface="맑은 고딕" pitchFamily="34" charset="-120"/>
               </a:rPr>
-              <a:t>— 요구사항을 수정하면, 그 문장을 근거로 만든 산출물을 자동으로 찾아 알림</a:t>
+              <a:t>— 요구사항 하나에 어떤 산출물(티켓·SWVOC·Function Requirement·Detail Design)이 물려 있는지 한눈에 (양방향 조회)</a:t>
             </a:r>
             <a:endParaRPr lang="en-US" sz="1400" dirty="0"/>
           </a:p>
@@ -3400,7 +3479,7 @@
       </p:sp>
       <p:pic>
         <p:nvPicPr>
-          <p:cNvPr id="6" name="Image 0" descr="/home/user/semes-superrookie/docs/img/ppt-trace-edit.png">    </p:cNvPr>
+          <p:cNvPr id="6" name="Image 0" descr="/home/user/semes-superrookie/docs/img/ppt-trace-1.png">    </p:cNvPr>
           <p:cNvPicPr>
             <a:picLocks noChangeAspect="1"/>
           </p:cNvPicPr>
@@ -3414,8 +3493,8 @@
         </p:blipFill>
         <p:spPr>
           <a:xfrm>
-            <a:off x="1065276" y="1737360"/>
-            <a:ext cx="10058400" cy="2779776"/>
+            <a:off x="379476" y="2468880"/>
+            <a:ext cx="11430000" cy="2988259"/>
           </a:xfrm>
           <a:prstGeom prst="rect">
             <a:avLst/>
@@ -3430,8 +3509,8 @@
         </p:nvSpPr>
         <p:spPr>
           <a:xfrm>
-            <a:off x="566928" y="4535424"/>
-            <a:ext cx="11064240" cy="292608"/>
+            <a:off x="566928" y="5806440"/>
+            <a:ext cx="11064240" cy="365760"/>
           </a:xfrm>
           <a:prstGeom prst="rect">
             <a:avLst/>
@@ -3447,44 +3526,20 @@
               <a:buNone/>
             </a:pPr>
             <a:r>
-              <a:rPr lang="en-US" sz="1300" b="1" dirty="0">
-                <a:solidFill>
-                  <a:srgbClr val="6366F1"/>
-                </a:solidFill>
-                <a:latin typeface="맑은 고딕" pitchFamily="34" charset="0"/>
-                <a:ea typeface="맑은 고딕" pitchFamily="34" charset="-122"/>
-                <a:cs typeface="맑은 고딕" pitchFamily="34" charset="-120"/>
-              </a:rPr>
-              <a:t>↓  저장 시 자동 추적</a:t>
-            </a:r>
-            <a:endParaRPr lang="en-US" sz="1300" dirty="0"/>
-          </a:p>
-        </p:txBody>
-      </p:sp>
-      <p:pic>
-        <p:nvPicPr>
-          <p:cNvPr id="8" name="Image 1" descr="/home/user/semes-superrookie/docs/img/ppt-trace-2.png">    </p:cNvPr>
-          <p:cNvPicPr>
-            <a:picLocks noChangeAspect="1"/>
-          </p:cNvPicPr>
-          <p:nvPr/>
-        </p:nvPicPr>
-        <p:blipFill>
-          <a:blip r:embed="rId2"/>
-          <a:stretch>
-            <a:fillRect/>
-          </a:stretch>
-        </p:blipFill>
-        <p:spPr>
-          <a:xfrm>
-            <a:off x="1065276" y="4882896"/>
-            <a:ext cx="10058400" cy="1559052"/>
-          </a:xfrm>
-          <a:prstGeom prst="rect">
-            <a:avLst/>
-          </a:prstGeom>
-        </p:spPr>
-      </p:pic>
+              <a:rPr lang="en-US" sz="1250" dirty="0">
+                <a:solidFill>
+                  <a:srgbClr val="6B7280"/>
+                </a:solidFill>
+                <a:latin typeface="맑은 고딕" pitchFamily="34" charset="0"/>
+                <a:ea typeface="맑은 고딕" pitchFamily="34" charset="-122"/>
+                <a:cs typeface="맑은 고딕" pitchFamily="34" charset="-120"/>
+              </a:rPr>
+              <a:t>요구사항 1건 ↔ 기능별 티켓 3개, 각 티켓 아래 산출물 3종을 실제 Jira ID로 연결</a:t>
+            </a:r>
+            <a:endParaRPr lang="en-US" sz="1250" dirty="0"/>
+          </a:p>
+        </p:txBody>
+      </p:sp>
     </p:spTree>
   </p:cSld>
   <p:clrMapOvr>
@@ -3550,7 +3605,7 @@
                 <a:ea typeface="맑은 고딕" pitchFamily="34" charset="-122"/>
                 <a:cs typeface="맑은 고딕" pitchFamily="34" charset="-120"/>
               </a:rPr>
-              <a:t>AI</a:t>
+              <a:t>핵심 기능 3 · 산출물 관리 ②</a:t>
             </a:r>
             <a:endParaRPr lang="en-US" sz="1200" dirty="0"/>
           </a:p>
@@ -3589,7 +3644,7 @@
                 <a:ea typeface="맑은 고딕" pitchFamily="34" charset="-122"/>
                 <a:cs typeface="맑은 고딕" pitchFamily="34" charset="-120"/>
               </a:rPr>
-              <a:t>AI — 두 엔진 비교</a:t>
+              <a:t>변경 추적 (변경 영향 분석)</a:t>
             </a:r>
             <a:endParaRPr lang="en-US" sz="3000" dirty="0"/>
           </a:p>
@@ -3597,30 +3652,46 @@
       </p:sp>
       <p:sp>
         <p:nvSpPr>
-          <p:cNvPr id="4" name="Shape 2"/>
-          <p:cNvSpPr/>
-          <p:nvPr/>
-        </p:nvSpPr>
-        <p:spPr>
-          <a:xfrm>
-            <a:off x="566928" y="1783080"/>
-            <a:ext cx="5440680" cy="2697480"/>
+          <p:cNvPr id="4" name="Text 2"/>
+          <p:cNvSpPr/>
+          <p:nvPr/>
+        </p:nvSpPr>
+        <p:spPr>
+          <a:xfrm>
+            <a:off x="10424160" y="822960"/>
+            <a:ext cx="1737360" cy="310896"/>
           </a:xfrm>
           <a:prstGeom prst="roundRect">
             <a:avLst>
-              <a:gd name="adj" fmla="val 3390"/>
+              <a:gd name="adj" fmla="val 47059"/>
             </a:avLst>
           </a:prstGeom>
           <a:solidFill>
-            <a:srgbClr val="EEF2FF"/>
+            <a:srgbClr val="FEF3C7"/>
           </a:solidFill>
-          <a:ln w="12700">
-            <a:solidFill>
-              <a:srgbClr val="C7D2FE"/>
-            </a:solidFill>
-            <a:prstDash val="solid"/>
-          </a:ln>
-        </p:spPr>
+          <a:ln/>
+        </p:spPr>
+        <p:txBody>
+          <a:bodyPr wrap="square" lIns="0" tIns="0" rIns="0" bIns="0" rtlCol="0" anchor="ctr"/>
+          <a:lstStyle/>
+          <a:p>
+            <a:pPr algn="ctr" indent="0" marL="0">
+              <a:buNone/>
+            </a:pPr>
+            <a:r>
+              <a:rPr lang="en-US" sz="1100" b="1" dirty="0">
+                <a:solidFill>
+                  <a:srgbClr val="B45309"/>
+                </a:solidFill>
+                <a:latin typeface="맑은 고딕" pitchFamily="34" charset="0"/>
+                <a:ea typeface="맑은 고딕" pitchFamily="34" charset="-122"/>
+                <a:cs typeface="맑은 고딕" pitchFamily="34" charset="-120"/>
+              </a:rPr>
+              <a:t>개발 예정</a:t>
+            </a:r>
+            <a:endParaRPr lang="en-US" sz="1100" dirty="0"/>
+          </a:p>
+        </p:txBody>
       </p:sp>
       <p:sp>
         <p:nvSpPr>
@@ -3630,8 +3701,8 @@
         </p:nvSpPr>
         <p:spPr>
           <a:xfrm>
-            <a:off x="886968" y="2011680"/>
-            <a:ext cx="4846320" cy="457200"/>
+            <a:off x="566928" y="1371600"/>
+            <a:ext cx="11064240" cy="320040"/>
           </a:xfrm>
           <a:prstGeom prst="rect">
             <a:avLst/>
@@ -3647,7 +3718,84 @@
               <a:buNone/>
             </a:pPr>
             <a:r>
-              <a:rPr lang="en-US" sz="1900" b="1" dirty="0">
+              <a:rPr lang="en-US" sz="1400" b="1" dirty="0">
+                <a:solidFill>
+                  <a:srgbClr val="1F2937"/>
+                </a:solidFill>
+                <a:latin typeface="맑은 고딕" pitchFamily="34" charset="0"/>
+                <a:ea typeface="맑은 고딕" pitchFamily="34" charset="-122"/>
+                <a:cs typeface="맑은 고딕" pitchFamily="34" charset="-120"/>
+              </a:rPr>
+              <a:t>② 변경 추적 </a:t>
+            </a:r>
+            <a:pPr indent="0" marL="0">
+              <a:buNone/>
+            </a:pPr>
+            <a:r>
+              <a:rPr lang="en-US" sz="1400" dirty="0">
+                <a:solidFill>
+                  <a:srgbClr val="6B7280"/>
+                </a:solidFill>
+                <a:latin typeface="맑은 고딕" pitchFamily="34" charset="0"/>
+                <a:ea typeface="맑은 고딕" pitchFamily="34" charset="-122"/>
+                <a:cs typeface="맑은 고딕" pitchFamily="34" charset="-120"/>
+              </a:rPr>
+              <a:t>— 요구사항을 수정하면, 그 문장을 근거로 만든 산출물을 자동으로 찾아 알림</a:t>
+            </a:r>
+            <a:endParaRPr lang="en-US" sz="1400" dirty="0"/>
+          </a:p>
+        </p:txBody>
+      </p:sp>
+      <p:pic>
+        <p:nvPicPr>
+          <p:cNvPr id="6" name="Image 0" descr="/home/user/semes-superrookie/docs/img/ppt-trace-edit.png">    </p:cNvPr>
+          <p:cNvPicPr>
+            <a:picLocks noChangeAspect="1"/>
+          </p:cNvPicPr>
+          <p:nvPr/>
+        </p:nvPicPr>
+        <p:blipFill>
+          <a:blip r:embed="rId1"/>
+          <a:stretch>
+            <a:fillRect/>
+          </a:stretch>
+        </p:blipFill>
+        <p:spPr>
+          <a:xfrm>
+            <a:off x="1065276" y="1737360"/>
+            <a:ext cx="10058400" cy="2779776"/>
+          </a:xfrm>
+          <a:prstGeom prst="rect">
+            <a:avLst/>
+          </a:prstGeom>
+        </p:spPr>
+      </p:pic>
+      <p:sp>
+        <p:nvSpPr>
+          <p:cNvPr id="7" name="Text 4"/>
+          <p:cNvSpPr/>
+          <p:nvPr/>
+        </p:nvSpPr>
+        <p:spPr>
+          <a:xfrm>
+            <a:off x="566928" y="4535424"/>
+            <a:ext cx="11064240" cy="292608"/>
+          </a:xfrm>
+          <a:prstGeom prst="rect">
+            <a:avLst/>
+          </a:prstGeom>
+          <a:noFill/>
+          <a:ln/>
+        </p:spPr>
+        <p:txBody>
+          <a:bodyPr wrap="square" lIns="0" tIns="0" rIns="0" bIns="0" rtlCol="0" anchor="ctr"/>
+          <a:lstStyle/>
+          <a:p>
+            <a:pPr algn="ctr" indent="0" marL="0">
+              <a:buNone/>
+            </a:pPr>
+            <a:r>
+              <a:rPr lang="en-US" sz="1300" b="1" dirty="0">
                 <a:solidFill>
                   <a:srgbClr val="6366F1"/>
                 </a:solidFill>
@@ -3655,389 +3803,36 @@
                 <a:ea typeface="맑은 고딕" pitchFamily="34" charset="-122"/>
                 <a:cs typeface="맑은 고딕" pitchFamily="34" charset="-120"/>
               </a:rPr>
-              <a:t>로컬 Qwen3-8B</a:t>
-            </a:r>
-            <a:endParaRPr lang="en-US" sz="1900" dirty="0"/>
-          </a:p>
-        </p:txBody>
-      </p:sp>
-      <p:sp>
-        <p:nvSpPr>
-          <p:cNvPr id="6" name="Text 4"/>
-          <p:cNvSpPr/>
-          <p:nvPr/>
-        </p:nvSpPr>
-        <p:spPr>
-          <a:xfrm>
-            <a:off x="932688" y="2606040"/>
-            <a:ext cx="4754880" cy="1737360"/>
-          </a:xfrm>
-          <a:prstGeom prst="rect">
-            <a:avLst/>
-          </a:prstGeom>
-          <a:noFill/>
-          <a:ln/>
-        </p:spPr>
-        <p:txBody>
-          <a:bodyPr wrap="square" lIns="0" tIns="0" rIns="0" bIns="0" rtlCol="0" anchor="ctr"/>
-          <a:lstStyle/>
-          <a:p>
-            <a:pPr marL="342900" indent="-342900">
-              <a:spcAft>
-                <a:spcPts val="700"/>
-              </a:spcAft>
-              <a:buSzPct val="100000"/>
-              <a:buChar char="•"/>
-            </a:pPr>
-            <a:r>
-              <a:rPr lang="en-US" sz="1300" dirty="0">
-                <a:solidFill>
-                  <a:srgbClr val="1F2937"/>
-                </a:solidFill>
-                <a:latin typeface="맑은 고딕" pitchFamily="34" charset="0"/>
-                <a:ea typeface="맑은 고딕" pitchFamily="34" charset="-122"/>
-                <a:cs typeface="맑은 고딕" pitchFamily="34" charset="-120"/>
-              </a:rPr>
-              <a:t>내 워크스테이션(P4000 8GB)에서 직접</a:t>
+              <a:t>↓  저장 시 자동 추적</a:t>
             </a:r>
             <a:endParaRPr lang="en-US" sz="1300" dirty="0"/>
           </a:p>
-          <a:p>
-            <a:pPr marL="342900" indent="-342900">
-              <a:spcAft>
-                <a:spcPts val="700"/>
-              </a:spcAft>
-              <a:buSzPct val="100000"/>
-              <a:buChar char="•"/>
-            </a:pPr>
-            <a:r>
-              <a:rPr lang="en-US" sz="1300" dirty="0">
-                <a:solidFill>
-                  <a:srgbClr val="1F2937"/>
-                </a:solidFill>
-                <a:latin typeface="맑은 고딕" pitchFamily="34" charset="0"/>
-                <a:ea typeface="맑은 고딕" pitchFamily="34" charset="-122"/>
-                <a:cs typeface="맑은 고딕" pitchFamily="34" charset="-120"/>
-              </a:rPr>
-              <a:t>8B 모델 · GGUF 양자화 Q5_K_M(≈5.85GB)</a:t>
-            </a:r>
-            <a:endParaRPr lang="en-US" sz="1300" dirty="0"/>
-          </a:p>
-          <a:p>
-            <a:pPr marL="342900" indent="-342900">
-              <a:spcAft>
-                <a:spcPts val="700"/>
-              </a:spcAft>
-              <a:buSzPct val="100000"/>
-              <a:buChar char="•"/>
-            </a:pPr>
-            <a:r>
-              <a:rPr lang="en-US" sz="1300" dirty="0">
-                <a:solidFill>
-                  <a:srgbClr val="1F2937"/>
-                </a:solidFill>
-                <a:latin typeface="맑은 고딕" pitchFamily="34" charset="0"/>
-                <a:ea typeface="맑은 고딕" pitchFamily="34" charset="-122"/>
-                <a:cs typeface="맑은 고딕" pitchFamily="34" charset="-120"/>
-              </a:rPr>
-              <a:t>오프라인 자립 · 한국어 강점</a:t>
-            </a:r>
-            <a:endParaRPr lang="en-US" sz="1300" dirty="0"/>
-          </a:p>
-        </p:txBody>
-      </p:sp>
-      <p:sp>
-        <p:nvSpPr>
-          <p:cNvPr id="7" name="Shape 5"/>
-          <p:cNvSpPr/>
-          <p:nvPr/>
-        </p:nvSpPr>
-        <p:spPr>
-          <a:xfrm>
-            <a:off x="6327648" y="1783080"/>
-            <a:ext cx="5440680" cy="2697480"/>
-          </a:xfrm>
-          <a:prstGeom prst="roundRect">
-            <a:avLst>
-              <a:gd name="adj" fmla="val 3390"/>
-            </a:avLst>
-          </a:prstGeom>
-          <a:solidFill>
-            <a:srgbClr val="F5F3FF"/>
-          </a:solidFill>
-          <a:ln w="12700">
-            <a:solidFill>
-              <a:srgbClr val="DDD6FE"/>
-            </a:solidFill>
-            <a:prstDash val="solid"/>
-          </a:ln>
-        </p:spPr>
-      </p:sp>
-      <p:sp>
-        <p:nvSpPr>
-          <p:cNvPr id="8" name="Text 6"/>
-          <p:cNvSpPr/>
-          <p:nvPr/>
-        </p:nvSpPr>
-        <p:spPr>
-          <a:xfrm>
-            <a:off x="6647688" y="2011680"/>
-            <a:ext cx="4846320" cy="457200"/>
-          </a:xfrm>
-          <a:prstGeom prst="rect">
-            <a:avLst/>
-          </a:prstGeom>
-          <a:noFill/>
-          <a:ln/>
-        </p:spPr>
-        <p:txBody>
-          <a:bodyPr wrap="square" lIns="0" tIns="0" rIns="0" bIns="0" rtlCol="0" anchor="ctr"/>
-          <a:lstStyle/>
-          <a:p>
-            <a:pPr indent="0" marL="0">
-              <a:buNone/>
-            </a:pPr>
-            <a:r>
-              <a:rPr lang="en-US" sz="1900" b="1" dirty="0">
-                <a:solidFill>
-                  <a:srgbClr val="8B5CF6"/>
-                </a:solidFill>
-                <a:latin typeface="맑은 고딕" pitchFamily="34" charset="0"/>
-                <a:ea typeface="맑은 고딕" pitchFamily="34" charset="-122"/>
-                <a:cs typeface="맑은 고딕" pitchFamily="34" charset="-120"/>
-              </a:rPr>
-              <a:t>사내 GPT-OSS-120B</a:t>
-            </a:r>
-            <a:endParaRPr lang="en-US" sz="1900" dirty="0"/>
-          </a:p>
-        </p:txBody>
-      </p:sp>
-      <p:sp>
-        <p:nvSpPr>
-          <p:cNvPr id="9" name="Text 7"/>
-          <p:cNvSpPr/>
-          <p:nvPr/>
-        </p:nvSpPr>
-        <p:spPr>
-          <a:xfrm>
-            <a:off x="6693408" y="2606040"/>
-            <a:ext cx="4754880" cy="1737360"/>
-          </a:xfrm>
-          <a:prstGeom prst="rect">
-            <a:avLst/>
-          </a:prstGeom>
-          <a:noFill/>
-          <a:ln/>
-        </p:spPr>
-        <p:txBody>
-          <a:bodyPr wrap="square" lIns="0" tIns="0" rIns="0" bIns="0" rtlCol="0" anchor="ctr"/>
-          <a:lstStyle/>
-          <a:p>
-            <a:pPr marL="342900" indent="-342900">
-              <a:spcAft>
-                <a:spcPts val="700"/>
-              </a:spcAft>
-              <a:buSzPct val="100000"/>
-              <a:buChar char="•"/>
-            </a:pPr>
-            <a:r>
-              <a:rPr lang="en-US" sz="1300" dirty="0">
-                <a:solidFill>
-                  <a:srgbClr val="1F2937"/>
-                </a:solidFill>
-                <a:latin typeface="맑은 고딕" pitchFamily="34" charset="0"/>
-                <a:ea typeface="맑은 고딕" pitchFamily="34" charset="-122"/>
-                <a:cs typeface="맑은 고딕" pitchFamily="34" charset="-120"/>
-              </a:rPr>
-              <a:t>사내 LLM API 서비스(OpenAI 호환)</a:t>
-            </a:r>
-            <a:endParaRPr lang="en-US" sz="1300" dirty="0"/>
-          </a:p>
-          <a:p>
-            <a:pPr marL="342900" indent="-342900">
-              <a:spcAft>
-                <a:spcPts val="700"/>
-              </a:spcAft>
-              <a:buSzPct val="100000"/>
-              <a:buChar char="•"/>
-            </a:pPr>
-            <a:r>
-              <a:rPr lang="en-US" sz="1300" dirty="0">
-                <a:solidFill>
-                  <a:srgbClr val="1F2937"/>
-                </a:solidFill>
-                <a:latin typeface="맑은 고딕" pitchFamily="34" charset="0"/>
-                <a:ea typeface="맑은 고딕" pitchFamily="34" charset="-122"/>
-                <a:cs typeface="맑은 고딕" pitchFamily="34" charset="-120"/>
-              </a:rPr>
-              <a:t>훨씬 큰 모델 → 어려운 판단 정확도 유리</a:t>
-            </a:r>
-            <a:endParaRPr lang="en-US" sz="1300" dirty="0"/>
-          </a:p>
-          <a:p>
-            <a:pPr marL="342900" indent="-342900">
-              <a:spcAft>
-                <a:spcPts val="700"/>
-              </a:spcAft>
-              <a:buSzPct val="100000"/>
-              <a:buChar char="•"/>
-            </a:pPr>
-            <a:r>
-              <a:rPr lang="en-US" sz="1300" dirty="0">
-                <a:solidFill>
-                  <a:srgbClr val="1F2937"/>
-                </a:solidFill>
-                <a:latin typeface="맑은 고딕" pitchFamily="34" charset="0"/>
-                <a:ea typeface="맑은 고딕" pitchFamily="34" charset="-122"/>
-                <a:cs typeface="맑은 고딕" pitchFamily="34" charset="-120"/>
-              </a:rPr>
-              <a:t>공용 서버 의존</a:t>
-            </a:r>
-            <a:endParaRPr lang="en-US" sz="1300" dirty="0"/>
-          </a:p>
-        </p:txBody>
-      </p:sp>
-      <p:sp>
-        <p:nvSpPr>
-          <p:cNvPr id="10" name="Shape 8"/>
-          <p:cNvSpPr/>
-          <p:nvPr/>
-        </p:nvSpPr>
-        <p:spPr>
-          <a:xfrm>
-            <a:off x="566928" y="4709160"/>
-            <a:ext cx="11064240" cy="1463040"/>
-          </a:xfrm>
-          <a:prstGeom prst="roundRect">
-            <a:avLst>
-              <a:gd name="adj" fmla="val 6250"/>
-            </a:avLst>
-          </a:prstGeom>
-          <a:solidFill>
-            <a:srgbClr val="1E1B4B"/>
-          </a:solidFill>
-          <a:ln/>
-          <a:effectLst>
-            <a:outerShdw sx="100000" sy="100000" kx="0" ky="0" algn="bl" rotWithShape="0" blurRad="127000" dist="50800" dir="5400000">
-              <a:srgbClr val="1E1B4B">
-                <a:alpha val="18000"/>
-              </a:srgbClr>
-            </a:outerShdw>
-          </a:effectLst>
-        </p:spPr>
-      </p:sp>
-      <p:sp>
-        <p:nvSpPr>
-          <p:cNvPr id="11" name="Text 9"/>
-          <p:cNvSpPr/>
-          <p:nvPr/>
-        </p:nvSpPr>
-        <p:spPr>
-          <a:xfrm>
-            <a:off x="886968" y="4892040"/>
-            <a:ext cx="10424160" cy="457200"/>
-          </a:xfrm>
-          <a:prstGeom prst="rect">
-            <a:avLst/>
-          </a:prstGeom>
-          <a:noFill/>
-          <a:ln/>
-        </p:spPr>
-        <p:txBody>
-          <a:bodyPr wrap="square" lIns="0" tIns="0" rIns="0" bIns="0" rtlCol="0" anchor="ctr"/>
-          <a:lstStyle/>
-          <a:p>
-            <a:pPr indent="0" marL="0">
-              <a:buNone/>
-            </a:pPr>
-            <a:r>
-              <a:rPr lang="en-US" sz="1350" b="1" dirty="0">
-                <a:solidFill>
-                  <a:srgbClr val="FFFFFF"/>
-                </a:solidFill>
-                <a:latin typeface="맑은 고딕" pitchFamily="34" charset="0"/>
-                <a:ea typeface="맑은 고딕" pitchFamily="34" charset="-122"/>
-                <a:cs typeface="맑은 고딕" pitchFamily="34" charset="-120"/>
-              </a:rPr>
-              <a:t>응답 시간은 둘 다 3~5초로 비슷</a:t>
-            </a:r>
-            <a:pPr indent="0" marL="0">
-              <a:buNone/>
-            </a:pPr>
-            <a:r>
-              <a:rPr lang="en-US" sz="1350" dirty="0">
-                <a:solidFill>
-                  <a:srgbClr val="C7D2FE"/>
-                </a:solidFill>
-                <a:latin typeface="맑은 고딕" pitchFamily="34" charset="0"/>
-                <a:ea typeface="맑은 고딕" pitchFamily="34" charset="-122"/>
-                <a:cs typeface="맑은 고딕" pitchFamily="34" charset="-120"/>
-              </a:rPr>
-              <a:t> → 속도가 아니라 정확도·자립성으로 선택. 동일 요구사항 세트로 실측 후 확정.</a:t>
-            </a:r>
-            <a:endParaRPr lang="en-US" sz="1350" dirty="0"/>
-          </a:p>
-        </p:txBody>
-      </p:sp>
-      <p:sp>
-        <p:nvSpPr>
-          <p:cNvPr id="12" name="Text 10"/>
-          <p:cNvSpPr/>
-          <p:nvPr/>
-        </p:nvSpPr>
-        <p:spPr>
-          <a:xfrm>
-            <a:off x="886968" y="5440680"/>
-            <a:ext cx="10424160" cy="640080"/>
-          </a:xfrm>
-          <a:prstGeom prst="rect">
-            <a:avLst/>
-          </a:prstGeom>
-          <a:noFill/>
-          <a:ln/>
-        </p:spPr>
-        <p:txBody>
-          <a:bodyPr wrap="square" lIns="0" tIns="0" rIns="0" bIns="0" rtlCol="0" anchor="ctr"/>
-          <a:lstStyle/>
-          <a:p>
-            <a:pPr indent="0" marL="0">
-              <a:lnSpc>
-                <a:spcPct val="105000"/>
-              </a:lnSpc>
-              <a:buNone/>
-            </a:pPr>
-            <a:r>
-              <a:rPr lang="en-US" sz="1250" b="1" dirty="0">
-                <a:solidFill>
-                  <a:srgbClr val="A5B4FC"/>
-                </a:solidFill>
-                <a:latin typeface="맑은 고딕" pitchFamily="34" charset="0"/>
-                <a:ea typeface="맑은 고딕" pitchFamily="34" charset="-122"/>
-                <a:cs typeface="맑은 고딕" pitchFamily="34" charset="-120"/>
-              </a:rPr>
-              <a:t>양자화란?</a:t>
-            </a:r>
-            <a:pPr indent="0" marL="0">
-              <a:lnSpc>
-                <a:spcPct val="105000"/>
-              </a:lnSpc>
-              <a:buNone/>
-            </a:pPr>
-            <a:r>
-              <a:rPr lang="en-US" sz="1250" dirty="0">
-                <a:solidFill>
-                  <a:srgbClr val="C7D2FE"/>
-                </a:solidFill>
-                <a:latin typeface="맑은 고딕" pitchFamily="34" charset="0"/>
-                <a:ea typeface="맑은 고딕" pitchFamily="34" charset="-122"/>
-                <a:cs typeface="맑은 고딕" pitchFamily="34" charset="-120"/>
-              </a:rPr>
-              <a:t>  사진을 JPG로 압축하듯 용량↓·품질 소폭↓. 8B 원본(≈16GB)은 8GB GPU에 못 올라가 5.85GB로 압축해 사용.</a:t>
-            </a:r>
-            <a:endParaRPr lang="en-US" sz="1250" dirty="0"/>
-          </a:p>
-        </p:txBody>
-      </p:sp>
+        </p:txBody>
+      </p:sp>
+      <p:pic>
+        <p:nvPicPr>
+          <p:cNvPr id="8" name="Image 1" descr="/home/user/semes-superrookie/docs/img/ppt-trace-2.png">    </p:cNvPr>
+          <p:cNvPicPr>
+            <a:picLocks noChangeAspect="1"/>
+          </p:cNvPicPr>
+          <p:nvPr/>
+        </p:nvPicPr>
+        <p:blipFill>
+          <a:blip r:embed="rId2"/>
+          <a:stretch>
+            <a:fillRect/>
+          </a:stretch>
+        </p:blipFill>
+        <p:spPr>
+          <a:xfrm>
+            <a:off x="1065276" y="4882896"/>
+            <a:ext cx="10058400" cy="1559052"/>
+          </a:xfrm>
+          <a:prstGeom prst="rect">
+            <a:avLst/>
+          </a:prstGeom>
+        </p:spPr>
+      </p:pic>
     </p:spTree>
   </p:cSld>
   <p:clrMapOvr>
@@ -4103,7 +3898,7 @@
                 <a:ea typeface="맑은 고딕" pitchFamily="34" charset="-122"/>
                 <a:cs typeface="맑은 고딕" pitchFamily="34" charset="-120"/>
               </a:rPr>
-              <a:t>일정</a:t>
+              <a:t>AI</a:t>
             </a:r>
             <a:endParaRPr lang="en-US" sz="1200" dirty="0"/>
           </a:p>
@@ -4142,70 +3937,450 @@
                 <a:ea typeface="맑은 고딕" pitchFamily="34" charset="-122"/>
                 <a:cs typeface="맑은 고딕" pitchFamily="34" charset="-120"/>
               </a:rPr>
-              <a:t>개발 로드맵 · 마일스톤 (8 ~ 11월)</a:t>
+              <a:t>AI — 두 엔진 비교</a:t>
             </a:r>
             <a:endParaRPr lang="en-US" sz="3000" dirty="0"/>
           </a:p>
         </p:txBody>
       </p:sp>
-      <p:pic>
-        <p:nvPicPr>
-          <p:cNvPr id="4" name="Image 0" descr="/home/user/semes-superrookie/docs/img/ppt-roadmap.png">    </p:cNvPr>
-          <p:cNvPicPr>
-            <a:picLocks noChangeAspect="1"/>
-          </p:cNvPicPr>
-          <p:nvPr/>
-        </p:nvPicPr>
-        <p:blipFill>
-          <a:blip r:embed="rId1"/>
-          <a:stretch>
-            <a:fillRect/>
-          </a:stretch>
-        </p:blipFill>
-        <p:spPr>
-          <a:xfrm>
-            <a:off x="196596" y="2148840"/>
-            <a:ext cx="11795760" cy="3289097"/>
-          </a:xfrm>
-          <a:prstGeom prst="rect">
-            <a:avLst/>
-          </a:prstGeom>
-        </p:spPr>
-      </p:pic>
-      <p:sp>
-        <p:nvSpPr>
-          <p:cNvPr id="5" name="Text 2"/>
-          <p:cNvSpPr/>
-          <p:nvPr/>
-        </p:nvSpPr>
-        <p:spPr>
-          <a:xfrm>
-            <a:off x="566928" y="5806440"/>
-            <a:ext cx="11064240" cy="457200"/>
-          </a:xfrm>
-          <a:prstGeom prst="rect">
-            <a:avLst/>
-          </a:prstGeom>
-          <a:noFill/>
-          <a:ln/>
-        </p:spPr>
-        <p:txBody>
-          <a:bodyPr wrap="square" lIns="0" tIns="0" rIns="0" bIns="0" rtlCol="0" anchor="ctr"/>
-          <a:lstStyle/>
-          <a:p>
-            <a:pPr algn="ctr" indent="0" marL="0">
+      <p:sp>
+        <p:nvSpPr>
+          <p:cNvPr id="4" name="Shape 2"/>
+          <p:cNvSpPr/>
+          <p:nvPr/>
+        </p:nvSpPr>
+        <p:spPr>
+          <a:xfrm>
+            <a:off x="566928" y="1783080"/>
+            <a:ext cx="5440680" cy="2697480"/>
+          </a:xfrm>
+          <a:prstGeom prst="roundRect">
+            <a:avLst>
+              <a:gd name="adj" fmla="val 3390"/>
+            </a:avLst>
+          </a:prstGeom>
+          <a:solidFill>
+            <a:srgbClr val="EEF2FF"/>
+          </a:solidFill>
+          <a:ln w="12700">
+            <a:solidFill>
+              <a:srgbClr val="C7D2FE"/>
+            </a:solidFill>
+            <a:prstDash val="solid"/>
+          </a:ln>
+        </p:spPr>
+      </p:sp>
+      <p:sp>
+        <p:nvSpPr>
+          <p:cNvPr id="5" name="Text 3"/>
+          <p:cNvSpPr/>
+          <p:nvPr/>
+        </p:nvSpPr>
+        <p:spPr>
+          <a:xfrm>
+            <a:off x="886968" y="2011680"/>
+            <a:ext cx="4846320" cy="457200"/>
+          </a:xfrm>
+          <a:prstGeom prst="rect">
+            <a:avLst/>
+          </a:prstGeom>
+          <a:noFill/>
+          <a:ln/>
+        </p:spPr>
+        <p:txBody>
+          <a:bodyPr wrap="square" lIns="0" tIns="0" rIns="0" bIns="0" rtlCol="0" anchor="ctr"/>
+          <a:lstStyle/>
+          <a:p>
+            <a:pPr indent="0" marL="0">
+              <a:buNone/>
+            </a:pPr>
+            <a:r>
+              <a:rPr lang="en-US" sz="1900" b="1" dirty="0">
+                <a:solidFill>
+                  <a:srgbClr val="6366F1"/>
+                </a:solidFill>
+                <a:latin typeface="맑은 고딕" pitchFamily="34" charset="0"/>
+                <a:ea typeface="맑은 고딕" pitchFamily="34" charset="-122"/>
+                <a:cs typeface="맑은 고딕" pitchFamily="34" charset="-120"/>
+              </a:rPr>
+              <a:t>로컬 Qwen3-8B</a:t>
+            </a:r>
+            <a:endParaRPr lang="en-US" sz="1900" dirty="0"/>
+          </a:p>
+        </p:txBody>
+      </p:sp>
+      <p:sp>
+        <p:nvSpPr>
+          <p:cNvPr id="6" name="Text 4"/>
+          <p:cNvSpPr/>
+          <p:nvPr/>
+        </p:nvSpPr>
+        <p:spPr>
+          <a:xfrm>
+            <a:off x="932688" y="2606040"/>
+            <a:ext cx="4754880" cy="1737360"/>
+          </a:xfrm>
+          <a:prstGeom prst="rect">
+            <a:avLst/>
+          </a:prstGeom>
+          <a:noFill/>
+          <a:ln/>
+        </p:spPr>
+        <p:txBody>
+          <a:bodyPr wrap="square" lIns="0" tIns="0" rIns="0" bIns="0" rtlCol="0" anchor="ctr"/>
+          <a:lstStyle/>
+          <a:p>
+            <a:pPr marL="342900" indent="-342900">
+              <a:spcAft>
+                <a:spcPts val="700"/>
+              </a:spcAft>
+              <a:buSzPct val="100000"/>
+              <a:buChar char="•"/>
+            </a:pPr>
+            <a:r>
+              <a:rPr lang="en-US" sz="1300" dirty="0">
+                <a:solidFill>
+                  <a:srgbClr val="1F2937"/>
+                </a:solidFill>
+                <a:latin typeface="맑은 고딕" pitchFamily="34" charset="0"/>
+                <a:ea typeface="맑은 고딕" pitchFamily="34" charset="-122"/>
+                <a:cs typeface="맑은 고딕" pitchFamily="34" charset="-120"/>
+              </a:rPr>
+              <a:t>내 워크스테이션(P4000 8GB)에서 직접</a:t>
+            </a:r>
+            <a:endParaRPr lang="en-US" sz="1300" dirty="0"/>
+          </a:p>
+          <a:p>
+            <a:pPr marL="342900" indent="-342900">
+              <a:spcAft>
+                <a:spcPts val="700"/>
+              </a:spcAft>
+              <a:buSzPct val="100000"/>
+              <a:buChar char="•"/>
+            </a:pPr>
+            <a:r>
+              <a:rPr lang="en-US" sz="1300" dirty="0">
+                <a:solidFill>
+                  <a:srgbClr val="1F2937"/>
+                </a:solidFill>
+                <a:latin typeface="맑은 고딕" pitchFamily="34" charset="0"/>
+                <a:ea typeface="맑은 고딕" pitchFamily="34" charset="-122"/>
+                <a:cs typeface="맑은 고딕" pitchFamily="34" charset="-120"/>
+              </a:rPr>
+              <a:t>8B 모델 · GGUF 양자화 Q5_K_M(≈5.85GB)</a:t>
+            </a:r>
+            <a:endParaRPr lang="en-US" sz="1300" dirty="0"/>
+          </a:p>
+          <a:p>
+            <a:pPr marL="342900" indent="-342900">
+              <a:spcAft>
+                <a:spcPts val="700"/>
+              </a:spcAft>
+              <a:buSzPct val="100000"/>
+              <a:buChar char="•"/>
+            </a:pPr>
+            <a:r>
+              <a:rPr lang="en-US" sz="1300" dirty="0">
+                <a:solidFill>
+                  <a:srgbClr val="1F2937"/>
+                </a:solidFill>
+                <a:latin typeface="맑은 고딕" pitchFamily="34" charset="0"/>
+                <a:ea typeface="맑은 고딕" pitchFamily="34" charset="-122"/>
+                <a:cs typeface="맑은 고딕" pitchFamily="34" charset="-120"/>
+              </a:rPr>
+              <a:t>오프라인 자립 · 한국어 강점</a:t>
+            </a:r>
+            <a:endParaRPr lang="en-US" sz="1300" dirty="0"/>
+          </a:p>
+        </p:txBody>
+      </p:sp>
+      <p:sp>
+        <p:nvSpPr>
+          <p:cNvPr id="7" name="Shape 5"/>
+          <p:cNvSpPr/>
+          <p:nvPr/>
+        </p:nvSpPr>
+        <p:spPr>
+          <a:xfrm>
+            <a:off x="6327648" y="1783080"/>
+            <a:ext cx="5440680" cy="2697480"/>
+          </a:xfrm>
+          <a:prstGeom prst="roundRect">
+            <a:avLst>
+              <a:gd name="adj" fmla="val 3390"/>
+            </a:avLst>
+          </a:prstGeom>
+          <a:solidFill>
+            <a:srgbClr val="F5F3FF"/>
+          </a:solidFill>
+          <a:ln w="12700">
+            <a:solidFill>
+              <a:srgbClr val="DDD6FE"/>
+            </a:solidFill>
+            <a:prstDash val="solid"/>
+          </a:ln>
+        </p:spPr>
+      </p:sp>
+      <p:sp>
+        <p:nvSpPr>
+          <p:cNvPr id="8" name="Text 6"/>
+          <p:cNvSpPr/>
+          <p:nvPr/>
+        </p:nvSpPr>
+        <p:spPr>
+          <a:xfrm>
+            <a:off x="6647688" y="2011680"/>
+            <a:ext cx="4846320" cy="457200"/>
+          </a:xfrm>
+          <a:prstGeom prst="rect">
+            <a:avLst/>
+          </a:prstGeom>
+          <a:noFill/>
+          <a:ln/>
+        </p:spPr>
+        <p:txBody>
+          <a:bodyPr wrap="square" lIns="0" tIns="0" rIns="0" bIns="0" rtlCol="0" anchor="ctr"/>
+          <a:lstStyle/>
+          <a:p>
+            <a:pPr indent="0" marL="0">
+              <a:buNone/>
+            </a:pPr>
+            <a:r>
+              <a:rPr lang="en-US" sz="1900" b="1" dirty="0">
+                <a:solidFill>
+                  <a:srgbClr val="8B5CF6"/>
+                </a:solidFill>
+                <a:latin typeface="맑은 고딕" pitchFamily="34" charset="0"/>
+                <a:ea typeface="맑은 고딕" pitchFamily="34" charset="-122"/>
+                <a:cs typeface="맑은 고딕" pitchFamily="34" charset="-120"/>
+              </a:rPr>
+              <a:t>사내 GPT-OSS-120B</a:t>
+            </a:r>
+            <a:endParaRPr lang="en-US" sz="1900" dirty="0"/>
+          </a:p>
+        </p:txBody>
+      </p:sp>
+      <p:sp>
+        <p:nvSpPr>
+          <p:cNvPr id="9" name="Text 7"/>
+          <p:cNvSpPr/>
+          <p:nvPr/>
+        </p:nvSpPr>
+        <p:spPr>
+          <a:xfrm>
+            <a:off x="6693408" y="2606040"/>
+            <a:ext cx="4754880" cy="1737360"/>
+          </a:xfrm>
+          <a:prstGeom prst="rect">
+            <a:avLst/>
+          </a:prstGeom>
+          <a:noFill/>
+          <a:ln/>
+        </p:spPr>
+        <p:txBody>
+          <a:bodyPr wrap="square" lIns="0" tIns="0" rIns="0" bIns="0" rtlCol="0" anchor="ctr"/>
+          <a:lstStyle/>
+          <a:p>
+            <a:pPr marL="342900" indent="-342900">
+              <a:spcAft>
+                <a:spcPts val="700"/>
+              </a:spcAft>
+              <a:buSzPct val="100000"/>
+              <a:buChar char="•"/>
+            </a:pPr>
+            <a:r>
+              <a:rPr lang="en-US" sz="1300" dirty="0">
+                <a:solidFill>
+                  <a:srgbClr val="1F2937"/>
+                </a:solidFill>
+                <a:latin typeface="맑은 고딕" pitchFamily="34" charset="0"/>
+                <a:ea typeface="맑은 고딕" pitchFamily="34" charset="-122"/>
+                <a:cs typeface="맑은 고딕" pitchFamily="34" charset="-120"/>
+              </a:rPr>
+              <a:t>사내 LLM API 서비스(OpenAI 호환)</a:t>
+            </a:r>
+            <a:endParaRPr lang="en-US" sz="1300" dirty="0"/>
+          </a:p>
+          <a:p>
+            <a:pPr marL="342900" indent="-342900">
+              <a:spcAft>
+                <a:spcPts val="700"/>
+              </a:spcAft>
+              <a:buSzPct val="100000"/>
+              <a:buChar char="•"/>
+            </a:pPr>
+            <a:r>
+              <a:rPr lang="en-US" sz="1300" dirty="0">
+                <a:solidFill>
+                  <a:srgbClr val="1F2937"/>
+                </a:solidFill>
+                <a:latin typeface="맑은 고딕" pitchFamily="34" charset="0"/>
+                <a:ea typeface="맑은 고딕" pitchFamily="34" charset="-122"/>
+                <a:cs typeface="맑은 고딕" pitchFamily="34" charset="-120"/>
+              </a:rPr>
+              <a:t>훨씬 큰 모델 → 어려운 판단 정확도 유리</a:t>
+            </a:r>
+            <a:endParaRPr lang="en-US" sz="1300" dirty="0"/>
+          </a:p>
+          <a:p>
+            <a:pPr marL="342900" indent="-342900">
+              <a:spcAft>
+                <a:spcPts val="700"/>
+              </a:spcAft>
+              <a:buSzPct val="100000"/>
+              <a:buChar char="•"/>
+            </a:pPr>
+            <a:r>
+              <a:rPr lang="en-US" sz="1300" dirty="0">
+                <a:solidFill>
+                  <a:srgbClr val="1F2937"/>
+                </a:solidFill>
+                <a:latin typeface="맑은 고딕" pitchFamily="34" charset="0"/>
+                <a:ea typeface="맑은 고딕" pitchFamily="34" charset="-122"/>
+                <a:cs typeface="맑은 고딕" pitchFamily="34" charset="-120"/>
+              </a:rPr>
+              <a:t>공용 서버 의존</a:t>
+            </a:r>
+            <a:endParaRPr lang="en-US" sz="1300" dirty="0"/>
+          </a:p>
+        </p:txBody>
+      </p:sp>
+      <p:sp>
+        <p:nvSpPr>
+          <p:cNvPr id="10" name="Shape 8"/>
+          <p:cNvSpPr/>
+          <p:nvPr/>
+        </p:nvSpPr>
+        <p:spPr>
+          <a:xfrm>
+            <a:off x="566928" y="4709160"/>
+            <a:ext cx="11064240" cy="1463040"/>
+          </a:xfrm>
+          <a:prstGeom prst="roundRect">
+            <a:avLst>
+              <a:gd name="adj" fmla="val 6250"/>
+            </a:avLst>
+          </a:prstGeom>
+          <a:solidFill>
+            <a:srgbClr val="1E1B4B"/>
+          </a:solidFill>
+          <a:ln/>
+          <a:effectLst>
+            <a:outerShdw sx="100000" sy="100000" kx="0" ky="0" algn="bl" rotWithShape="0" blurRad="127000" dist="50800" dir="5400000">
+              <a:srgbClr val="1E1B4B">
+                <a:alpha val="18000"/>
+              </a:srgbClr>
+            </a:outerShdw>
+          </a:effectLst>
+        </p:spPr>
+      </p:sp>
+      <p:sp>
+        <p:nvSpPr>
+          <p:cNvPr id="11" name="Text 9"/>
+          <p:cNvSpPr/>
+          <p:nvPr/>
+        </p:nvSpPr>
+        <p:spPr>
+          <a:xfrm>
+            <a:off x="886968" y="4892040"/>
+            <a:ext cx="10424160" cy="457200"/>
+          </a:xfrm>
+          <a:prstGeom prst="rect">
+            <a:avLst/>
+          </a:prstGeom>
+          <a:noFill/>
+          <a:ln/>
+        </p:spPr>
+        <p:txBody>
+          <a:bodyPr wrap="square" lIns="0" tIns="0" rIns="0" bIns="0" rtlCol="0" anchor="ctr"/>
+          <a:lstStyle/>
+          <a:p>
+            <a:pPr indent="0" marL="0">
+              <a:buNone/>
+            </a:pPr>
+            <a:r>
+              <a:rPr lang="en-US" sz="1350" b="1" dirty="0">
+                <a:solidFill>
+                  <a:srgbClr val="FFFFFF"/>
+                </a:solidFill>
+                <a:latin typeface="맑은 고딕" pitchFamily="34" charset="0"/>
+                <a:ea typeface="맑은 고딕" pitchFamily="34" charset="-122"/>
+                <a:cs typeface="맑은 고딕" pitchFamily="34" charset="-120"/>
+              </a:rPr>
+              <a:t>응답 시간은 둘 다 3~5초로 비슷</a:t>
+            </a:r>
+            <a:pPr indent="0" marL="0">
+              <a:buNone/>
+            </a:pPr>
+            <a:r>
+              <a:rPr lang="en-US" sz="1350" dirty="0">
+                <a:solidFill>
+                  <a:srgbClr val="C7D2FE"/>
+                </a:solidFill>
+                <a:latin typeface="맑은 고딕" pitchFamily="34" charset="0"/>
+                <a:ea typeface="맑은 고딕" pitchFamily="34" charset="-122"/>
+                <a:cs typeface="맑은 고딕" pitchFamily="34" charset="-120"/>
+              </a:rPr>
+              <a:t> → 속도가 아니라 정확도·자립성으로 선택. 동일 요구사항 세트로 실측 후 확정.</a:t>
+            </a:r>
+            <a:endParaRPr lang="en-US" sz="1350" dirty="0"/>
+          </a:p>
+        </p:txBody>
+      </p:sp>
+      <p:sp>
+        <p:nvSpPr>
+          <p:cNvPr id="12" name="Text 10"/>
+          <p:cNvSpPr/>
+          <p:nvPr/>
+        </p:nvSpPr>
+        <p:spPr>
+          <a:xfrm>
+            <a:off x="886968" y="5440680"/>
+            <a:ext cx="10424160" cy="640080"/>
+          </a:xfrm>
+          <a:prstGeom prst="rect">
+            <a:avLst/>
+          </a:prstGeom>
+          <a:noFill/>
+          <a:ln/>
+        </p:spPr>
+        <p:txBody>
+          <a:bodyPr wrap="square" lIns="0" tIns="0" rIns="0" bIns="0" rtlCol="0" anchor="ctr"/>
+          <a:lstStyle/>
+          <a:p>
+            <a:pPr indent="0" marL="0">
+              <a:lnSpc>
+                <a:spcPct val="105000"/>
+              </a:lnSpc>
+              <a:buNone/>
+            </a:pPr>
+            <a:r>
+              <a:rPr lang="en-US" sz="1250" b="1" dirty="0">
+                <a:solidFill>
+                  <a:srgbClr val="A5B4FC"/>
+                </a:solidFill>
+                <a:latin typeface="맑은 고딕" pitchFamily="34" charset="0"/>
+                <a:ea typeface="맑은 고딕" pitchFamily="34" charset="-122"/>
+                <a:cs typeface="맑은 고딕" pitchFamily="34" charset="-120"/>
+              </a:rPr>
+              <a:t>양자화란?</a:t>
+            </a:r>
+            <a:pPr indent="0" marL="0">
+              <a:lnSpc>
+                <a:spcPct val="105000"/>
+              </a:lnSpc>
               <a:buNone/>
             </a:pPr>
             <a:r>
               <a:rPr lang="en-US" sz="1250" dirty="0">
                 <a:solidFill>
-                  <a:srgbClr val="6B7280"/>
-                </a:solidFill>
-                <a:latin typeface="맑은 고딕" pitchFamily="34" charset="0"/>
-                <a:ea typeface="맑은 고딕" pitchFamily="34" charset="-122"/>
-                <a:cs typeface="맑은 고딕" pitchFamily="34" charset="-120"/>
-              </a:rPr>
-              <a:t>과제 공식일정(◆ 8/10 계획 · 9/29 중간보고 · 11월 말 최종보고) 사이사이에 개발을 2단계씩, 총 4단계로 진행</a:t>
+                  <a:srgbClr val="C7D2FE"/>
+                </a:solidFill>
+                <a:latin typeface="맑은 고딕" pitchFamily="34" charset="0"/>
+                <a:ea typeface="맑은 고딕" pitchFamily="34" charset="-122"/>
+                <a:cs typeface="맑은 고딕" pitchFamily="34" charset="-120"/>
+              </a:rPr>
+              <a:t>  사진을 JPG로 압축하듯 용량↓·품질 소폭↓. 8B 원본(≈16GB)은 8GB GPU에 못 올라가 5.85GB로 압축해 사용.</a:t>
             </a:r>
             <a:endParaRPr lang="en-US" sz="1250" dirty="0"/>
           </a:p>
@@ -4222,6 +4397,179 @@
 <file path=ppt/slides/slide16.xml><?xml version="1.0" encoding="utf-8"?>
 <p:sld xmlns:a="http://schemas.openxmlformats.org/drawingml/2006/main" xmlns:r="http://schemas.openxmlformats.org/officeDocument/2006/relationships" xmlns:p="http://schemas.openxmlformats.org/presentationml/2006/main">
   <p:cSld name="Slide 16">
+    <p:bg>
+      <p:bgPr>
+        <a:solidFill>
+          <a:srgbClr val="FFFFFF"/>
+        </a:solidFill>
+      </p:bgPr>
+    </p:bg>
+    <p:spTree>
+      <p:nvGrpSpPr>
+        <p:cNvPr id="1" name=""/>
+        <p:cNvGrpSpPr/>
+        <p:nvPr/>
+      </p:nvGrpSpPr>
+      <p:grpSpPr>
+        <a:xfrm>
+          <a:off x="0" y="0"/>
+          <a:ext cx="0" cy="0"/>
+          <a:chOff x="0" y="0"/>
+          <a:chExt cx="0" cy="0"/>
+        </a:xfrm>
+      </p:grpSpPr>
+      <p:sp>
+        <p:nvSpPr>
+          <p:cNvPr id="2" name="Text 0"/>
+          <p:cNvSpPr/>
+          <p:nvPr/>
+        </p:nvSpPr>
+        <p:spPr>
+          <a:xfrm>
+            <a:off x="566928" y="457200"/>
+            <a:ext cx="10058400" cy="274320"/>
+          </a:xfrm>
+          <a:prstGeom prst="rect">
+            <a:avLst/>
+          </a:prstGeom>
+          <a:noFill/>
+          <a:ln/>
+        </p:spPr>
+        <p:txBody>
+          <a:bodyPr wrap="square" lIns="0" tIns="0" rIns="0" bIns="0" rtlCol="0" anchor="ctr"/>
+          <a:lstStyle/>
+          <a:p>
+            <a:pPr indent="0" marL="0">
+              <a:buNone/>
+            </a:pPr>
+            <a:r>
+              <a:rPr lang="en-US" sz="1200" b="1" spc="100" kern="0" dirty="0">
+                <a:solidFill>
+                  <a:srgbClr val="6366F1"/>
+                </a:solidFill>
+                <a:latin typeface="맑은 고딕" pitchFamily="34" charset="0"/>
+                <a:ea typeface="맑은 고딕" pitchFamily="34" charset="-122"/>
+                <a:cs typeface="맑은 고딕" pitchFamily="34" charset="-120"/>
+              </a:rPr>
+              <a:t>일정</a:t>
+            </a:r>
+            <a:endParaRPr lang="en-US" sz="1200" dirty="0"/>
+          </a:p>
+        </p:txBody>
+      </p:sp>
+      <p:sp>
+        <p:nvSpPr>
+          <p:cNvPr id="3" name="Text 1"/>
+          <p:cNvSpPr/>
+          <p:nvPr/>
+        </p:nvSpPr>
+        <p:spPr>
+          <a:xfrm>
+            <a:off x="566928" y="749808"/>
+            <a:ext cx="10515600" cy="640080"/>
+          </a:xfrm>
+          <a:prstGeom prst="rect">
+            <a:avLst/>
+          </a:prstGeom>
+          <a:noFill/>
+          <a:ln/>
+        </p:spPr>
+        <p:txBody>
+          <a:bodyPr wrap="square" lIns="0" tIns="0" rIns="0" bIns="0" rtlCol="0" anchor="ctr"/>
+          <a:lstStyle/>
+          <a:p>
+            <a:pPr indent="0" marL="0">
+              <a:buNone/>
+            </a:pPr>
+            <a:r>
+              <a:rPr lang="en-US" sz="3000" b="1" dirty="0">
+                <a:solidFill>
+                  <a:srgbClr val="1F2937"/>
+                </a:solidFill>
+                <a:latin typeface="맑은 고딕" pitchFamily="34" charset="0"/>
+                <a:ea typeface="맑은 고딕" pitchFamily="34" charset="-122"/>
+                <a:cs typeface="맑은 고딕" pitchFamily="34" charset="-120"/>
+              </a:rPr>
+              <a:t>개발 로드맵 · 마일스톤 (8 ~ 11월)</a:t>
+            </a:r>
+            <a:endParaRPr lang="en-US" sz="3000" dirty="0"/>
+          </a:p>
+        </p:txBody>
+      </p:sp>
+      <p:pic>
+        <p:nvPicPr>
+          <p:cNvPr id="4" name="Image 0" descr="/home/user/semes-superrookie/docs/img/ppt-roadmap.png">    </p:cNvPr>
+          <p:cNvPicPr>
+            <a:picLocks noChangeAspect="1"/>
+          </p:cNvPicPr>
+          <p:nvPr/>
+        </p:nvPicPr>
+        <p:blipFill>
+          <a:blip r:embed="rId1"/>
+          <a:stretch>
+            <a:fillRect/>
+          </a:stretch>
+        </p:blipFill>
+        <p:spPr>
+          <a:xfrm>
+            <a:off x="196596" y="2148840"/>
+            <a:ext cx="11795760" cy="3289097"/>
+          </a:xfrm>
+          <a:prstGeom prst="rect">
+            <a:avLst/>
+          </a:prstGeom>
+        </p:spPr>
+      </p:pic>
+      <p:sp>
+        <p:nvSpPr>
+          <p:cNvPr id="5" name="Text 2"/>
+          <p:cNvSpPr/>
+          <p:nvPr/>
+        </p:nvSpPr>
+        <p:spPr>
+          <a:xfrm>
+            <a:off x="566928" y="5806440"/>
+            <a:ext cx="11064240" cy="457200"/>
+          </a:xfrm>
+          <a:prstGeom prst="rect">
+            <a:avLst/>
+          </a:prstGeom>
+          <a:noFill/>
+          <a:ln/>
+        </p:spPr>
+        <p:txBody>
+          <a:bodyPr wrap="square" lIns="0" tIns="0" rIns="0" bIns="0" rtlCol="0" anchor="ctr"/>
+          <a:lstStyle/>
+          <a:p>
+            <a:pPr algn="ctr" indent="0" marL="0">
+              <a:buNone/>
+            </a:pPr>
+            <a:r>
+              <a:rPr lang="en-US" sz="1250" dirty="0">
+                <a:solidFill>
+                  <a:srgbClr val="6B7280"/>
+                </a:solidFill>
+                <a:latin typeface="맑은 고딕" pitchFamily="34" charset="0"/>
+                <a:ea typeface="맑은 고딕" pitchFamily="34" charset="-122"/>
+                <a:cs typeface="맑은 고딕" pitchFamily="34" charset="-120"/>
+              </a:rPr>
+              <a:t>과제 공식일정(◆ 8/10 계획 · 9/29 중간보고 · 11월 말 최종보고) 사이사이에 개발을 2단계씩, 총 4단계로 진행</a:t>
+            </a:r>
+            <a:endParaRPr lang="en-US" sz="1250" dirty="0"/>
+          </a:p>
+        </p:txBody>
+      </p:sp>
+    </p:spTree>
+  </p:cSld>
+  <p:clrMapOvr>
+    <a:masterClrMapping/>
+  </p:clrMapOvr>
+</p:sld>
+</file>
+
+<file path=ppt/slides/slide17.xml><?xml version="1.0" encoding="utf-8"?>
+<p:sld xmlns:a="http://schemas.openxmlformats.org/drawingml/2006/main" xmlns:r="http://schemas.openxmlformats.org/officeDocument/2006/relationships" xmlns:p="http://schemas.openxmlformats.org/presentationml/2006/main">
+  <p:cSld name="Slide 17">
     <p:bg>
       <p:bgPr>
         <a:solidFill>
@@ -4809,9 +5157,9 @@
 </p:sld>
 </file>
 
-<file path=ppt/slides/slide17.xml><?xml version="1.0" encoding="utf-8"?>
+<file path=ppt/slides/slide18.xml><?xml version="1.0" encoding="utf-8"?>
 <p:sld xmlns:a="http://schemas.openxmlformats.org/drawingml/2006/main" xmlns:r="http://schemas.openxmlformats.org/officeDocument/2006/relationships" xmlns:p="http://schemas.openxmlformats.org/presentationml/2006/main">
-  <p:cSld name="Slide 17">
+  <p:cSld name="Slide 18">
     <p:bg>
       <p:bgPr>
         <a:solidFill>

--- a/docs/진행공유_요구사항자동화.pptx
+++ b/docs/진행공유_요구사항자동화.pptx
@@ -2992,30 +2992,1781 @@
           </a:p>
         </p:txBody>
       </p:sp>
-      <p:pic>
-        <p:nvPicPr>
-          <p:cNvPr id="5" name="Image 0" descr="/home/user/semes-superrookie/docs/img/ppt-derive-table.png">    </p:cNvPr>
-          <p:cNvPicPr>
-            <a:picLocks noChangeAspect="1"/>
-          </p:cNvPicPr>
-          <p:nvPr/>
-        </p:nvPicPr>
-        <p:blipFill>
-          <a:blip r:embed="rId1"/>
-          <a:stretch>
-            <a:fillRect/>
-          </a:stretch>
-        </p:blipFill>
-        <p:spPr>
-          <a:xfrm>
-            <a:off x="333756" y="1783080"/>
-            <a:ext cx="11521440" cy="4305910"/>
-          </a:xfrm>
-          <a:prstGeom prst="rect">
-            <a:avLst/>
-          </a:prstGeom>
-        </p:spPr>
-      </p:pic>
+      <p:graphicFrame>
+        <p:nvGraphicFramePr>
+          <p:cNvPr id="12" name="Table 0"/>
+          <p:cNvGraphicFramePr>
+            <a:graphicFrameLocks noGrp="1"/>
+          </p:cNvGraphicFramePr>
+          <p:nvPr>
+            <p:extLst>
+              <p:ext uri="{D42A27DB-BD31-4B8C-83A1-F6EECF244321}">
+                <p14:modId xmlns:p14="http://schemas.microsoft.com/office/powerpoint/2010/main" val="1579011935"/>
+              </p:ext>
+            </p:extLst>
+          </p:nvPr>
+        </p:nvGraphicFramePr>
+        <p:xfrm>
+          <a:off x="566928" y="1645920"/>
+          <a:ext cx="11064240" cy="914400"/>
+        </p:xfrm>
+        <a:graphic>
+          <a:graphicData uri="http://schemas.openxmlformats.org/drawingml/2006/table">
+            <a:tbl>
+              <a:tblPr/>
+              <a:tblGrid>
+                <a:gridCol w="2468880"/>
+                <a:gridCol w="5943600"/>
+                <a:gridCol w="2651760"/>
+              </a:tblGrid>
+              <a:tr h="365760">
+                <a:tc>
+                  <a:txBody>
+                    <a:bodyPr/>
+                    <a:lstStyle/>
+                    <a:p>
+                      <a:pPr algn="l" indent="0" marL="0">
+                        <a:buNone/>
+                      </a:pPr>
+                      <a:r>
+                        <a:rPr lang="en-US" sz="1250" b="1" dirty="0">
+                          <a:solidFill>
+                            <a:srgbClr val="FFFFFF"/>
+                          </a:solidFill>
+                          <a:latin typeface="맑은 고딕" pitchFamily="34" charset="0"/>
+                          <a:ea typeface="맑은 고딕" pitchFamily="34" charset="-122"/>
+                          <a:cs typeface="맑은 고딕" pitchFamily="34" charset="-120"/>
+                        </a:rPr>
+                        <a:t>산출물</a:t>
+                      </a:r>
+                      <a:endParaRPr lang="en-US" sz="1250" dirty="0">
+                        <a:latin typeface="맑은 고딕" charset="0"/>
+                        <a:ea typeface="맑은 고딕" charset="0"/>
+                        <a:cs typeface="맑은 고딕" charset="0"/>
+                      </a:endParaRPr>
+                    </a:p>
+                  </a:txBody>
+                  <a:tcPr marL="88900" marR="88900" marT="50800" marB="50800" anchor="ctr">
+                    <a:lnL w="12700" cap="flat" cmpd="sng" algn="ctr">
+                      <a:solidFill>
+                        <a:srgbClr val="E5E7EB"/>
+                      </a:solidFill>
+                      <a:prstDash val="solid"/>
+                      <a:round/>
+                      <a:headEnd type="none" w="med" len="med"/>
+                      <a:tailEnd type="none" w="med" len="med"/>
+                    </a:lnL>
+                    <a:lnR w="12700" cap="flat" cmpd="sng" algn="ctr">
+                      <a:solidFill>
+                        <a:srgbClr val="E5E7EB"/>
+                      </a:solidFill>
+                      <a:prstDash val="solid"/>
+                      <a:round/>
+                      <a:headEnd type="none" w="med" len="med"/>
+                      <a:tailEnd type="none" w="med" len="med"/>
+                    </a:lnR>
+                    <a:lnT w="12700" cap="flat" cmpd="sng" algn="ctr">
+                      <a:solidFill>
+                        <a:srgbClr val="E5E7EB"/>
+                      </a:solidFill>
+                      <a:prstDash val="solid"/>
+                      <a:round/>
+                      <a:headEnd type="none" w="med" len="med"/>
+                      <a:tailEnd type="none" w="med" len="med"/>
+                    </a:lnT>
+                    <a:lnB w="12700" cap="flat" cmpd="sng" algn="ctr">
+                      <a:solidFill>
+                        <a:srgbClr val="E5E7EB"/>
+                      </a:solidFill>
+                      <a:prstDash val="solid"/>
+                      <a:round/>
+                      <a:headEnd type="none" w="med" len="med"/>
+                      <a:tailEnd type="none" w="med" len="med"/>
+                    </a:lnB>
+                    <a:solidFill>
+                      <a:srgbClr val="1E1B4B"/>
+                    </a:solidFill>
+                  </a:tcPr>
+                </a:tc>
+                <a:tc>
+                  <a:txBody>
+                    <a:bodyPr/>
+                    <a:lstStyle/>
+                    <a:p>
+                      <a:pPr algn="l" indent="0" marL="0">
+                        <a:buNone/>
+                      </a:pPr>
+                      <a:r>
+                        <a:rPr lang="en-US" sz="1250" b="1" dirty="0">
+                          <a:solidFill>
+                            <a:srgbClr val="FFFFFF"/>
+                          </a:solidFill>
+                          <a:latin typeface="맑은 고딕" pitchFamily="34" charset="0"/>
+                          <a:ea typeface="맑은 고딕" pitchFamily="34" charset="-122"/>
+                          <a:cs typeface="맑은 고딕" pitchFamily="34" charset="-120"/>
+                        </a:rPr>
+                        <a:t>핵심 구성</a:t>
+                      </a:r>
+                      <a:endParaRPr lang="en-US" sz="1250" dirty="0">
+                        <a:latin typeface="맑은 고딕" charset="0"/>
+                        <a:ea typeface="맑은 고딕" charset="0"/>
+                        <a:cs typeface="맑은 고딕" charset="0"/>
+                      </a:endParaRPr>
+                    </a:p>
+                  </a:txBody>
+                  <a:tcPr marL="88900" marR="88900" marT="50800" marB="50800" anchor="ctr">
+                    <a:lnL w="12700" cap="flat" cmpd="sng" algn="ctr">
+                      <a:solidFill>
+                        <a:srgbClr val="E5E7EB"/>
+                      </a:solidFill>
+                      <a:prstDash val="solid"/>
+                      <a:round/>
+                      <a:headEnd type="none" w="med" len="med"/>
+                      <a:tailEnd type="none" w="med" len="med"/>
+                    </a:lnL>
+                    <a:lnR w="12700" cap="flat" cmpd="sng" algn="ctr">
+                      <a:solidFill>
+                        <a:srgbClr val="E5E7EB"/>
+                      </a:solidFill>
+                      <a:prstDash val="solid"/>
+                      <a:round/>
+                      <a:headEnd type="none" w="med" len="med"/>
+                      <a:tailEnd type="none" w="med" len="med"/>
+                    </a:lnR>
+                    <a:lnT w="12700" cap="flat" cmpd="sng" algn="ctr">
+                      <a:solidFill>
+                        <a:srgbClr val="E5E7EB"/>
+                      </a:solidFill>
+                      <a:prstDash val="solid"/>
+                      <a:round/>
+                      <a:headEnd type="none" w="med" len="med"/>
+                      <a:tailEnd type="none" w="med" len="med"/>
+                    </a:lnT>
+                    <a:lnB w="12700" cap="flat" cmpd="sng" algn="ctr">
+                      <a:solidFill>
+                        <a:srgbClr val="E5E7EB"/>
+                      </a:solidFill>
+                      <a:prstDash val="solid"/>
+                      <a:round/>
+                      <a:headEnd type="none" w="med" len="med"/>
+                      <a:tailEnd type="none" w="med" len="med"/>
+                    </a:lnB>
+                    <a:solidFill>
+                      <a:srgbClr val="1E1B4B"/>
+                    </a:solidFill>
+                  </a:tcPr>
+                </a:tc>
+                <a:tc>
+                  <a:txBody>
+                    <a:bodyPr/>
+                    <a:lstStyle/>
+                    <a:p>
+                      <a:pPr algn="l" indent="0" marL="0">
+                        <a:buNone/>
+                      </a:pPr>
+                      <a:r>
+                        <a:rPr lang="en-US" sz="1250" b="1" dirty="0">
+                          <a:solidFill>
+                            <a:srgbClr val="FFFFFF"/>
+                          </a:solidFill>
+                          <a:latin typeface="맑은 고딕" pitchFamily="34" charset="0"/>
+                          <a:ea typeface="맑은 고딕" pitchFamily="34" charset="-122"/>
+                          <a:cs typeface="맑은 고딕" pitchFamily="34" charset="-120"/>
+                        </a:rPr>
+                        <a:t>작성 주체</a:t>
+                      </a:r>
+                      <a:endParaRPr lang="en-US" sz="1250" dirty="0">
+                        <a:latin typeface="맑은 고딕" charset="0"/>
+                        <a:ea typeface="맑은 고딕" charset="0"/>
+                        <a:cs typeface="맑은 고딕" charset="0"/>
+                      </a:endParaRPr>
+                    </a:p>
+                  </a:txBody>
+                  <a:tcPr marL="88900" marR="88900" marT="50800" marB="50800" anchor="ctr">
+                    <a:lnL w="12700" cap="flat" cmpd="sng" algn="ctr">
+                      <a:solidFill>
+                        <a:srgbClr val="E5E7EB"/>
+                      </a:solidFill>
+                      <a:prstDash val="solid"/>
+                      <a:round/>
+                      <a:headEnd type="none" w="med" len="med"/>
+                      <a:tailEnd type="none" w="med" len="med"/>
+                    </a:lnL>
+                    <a:lnR w="12700" cap="flat" cmpd="sng" algn="ctr">
+                      <a:solidFill>
+                        <a:srgbClr val="E5E7EB"/>
+                      </a:solidFill>
+                      <a:prstDash val="solid"/>
+                      <a:round/>
+                      <a:headEnd type="none" w="med" len="med"/>
+                      <a:tailEnd type="none" w="med" len="med"/>
+                    </a:lnR>
+                    <a:lnT w="12700" cap="flat" cmpd="sng" algn="ctr">
+                      <a:solidFill>
+                        <a:srgbClr val="E5E7EB"/>
+                      </a:solidFill>
+                      <a:prstDash val="solid"/>
+                      <a:round/>
+                      <a:headEnd type="none" w="med" len="med"/>
+                      <a:tailEnd type="none" w="med" len="med"/>
+                    </a:lnT>
+                    <a:lnB w="12700" cap="flat" cmpd="sng" algn="ctr">
+                      <a:solidFill>
+                        <a:srgbClr val="E5E7EB"/>
+                      </a:solidFill>
+                      <a:prstDash val="solid"/>
+                      <a:round/>
+                      <a:headEnd type="none" w="med" len="med"/>
+                      <a:tailEnd type="none" w="med" len="med"/>
+                    </a:lnB>
+                    <a:solidFill>
+                      <a:srgbClr val="1E1B4B"/>
+                    </a:solidFill>
+                  </a:tcPr>
+                </a:tc>
+              </a:tr>
+              <a:tr h="914400">
+                <a:tc>
+                  <a:txBody>
+                    <a:bodyPr/>
+                    <a:lstStyle/>
+                    <a:p>
+                      <a:pPr indent="0" marL="0">
+                        <a:buNone/>
+                      </a:pPr>
+                      <a:r>
+                        <a:rPr lang="en-US" sz="1200" b="1" dirty="0">
+                          <a:solidFill>
+                            <a:srgbClr val="6B7280"/>
+                          </a:solidFill>
+                          <a:latin typeface="맑은 고딕" pitchFamily="34" charset="0"/>
+                          <a:ea typeface="맑은 고딕" pitchFamily="34" charset="-122"/>
+                          <a:cs typeface="맑은 고딕" pitchFamily="34" charset="-120"/>
+                        </a:rPr>
+                        <a:t>1  </a:t>
+                      </a:r>
+                      <a:pPr indent="0" marL="0">
+                        <a:buNone/>
+                      </a:pPr>
+                      <a:r>
+                        <a:rPr lang="en-US" sz="1400" b="1" dirty="0">
+                          <a:solidFill>
+                            <a:srgbClr val="1F2937"/>
+                          </a:solidFill>
+                          <a:latin typeface="맑은 고딕" pitchFamily="34" charset="0"/>
+                          <a:ea typeface="맑은 고딕" pitchFamily="34" charset="-122"/>
+                          <a:cs typeface="맑은 고딕" pitchFamily="34" charset="-120"/>
+                        </a:rPr>
+                        <a:t>개발 이슈</a:t>
+                      </a:r>
+                      <a:endParaRPr lang="en-US" sz="1200" dirty="0">
+                        <a:latin typeface="맑은 고딕" charset="0"/>
+                        <a:ea typeface="맑은 고딕" charset="0"/>
+                        <a:cs typeface="맑은 고딕" charset="0"/>
+                      </a:endParaRPr>
+                    </a:p>
+                    <a:p>
+                      <a:pPr indent="0" marL="0">
+                        <a:buNone/>
+                      </a:pPr>
+                      <a:r>
+                        <a:rPr lang="en-US" sz="950" dirty="0">
+                          <a:solidFill>
+                            <a:srgbClr val="A5AEC0"/>
+                          </a:solidFill>
+                          <a:latin typeface="맑은 고딕" pitchFamily="34" charset="0"/>
+                          <a:ea typeface="맑은 고딕" pitchFamily="34" charset="-122"/>
+                          <a:cs typeface="맑은 고딕" pitchFamily="34" charset="-120"/>
+                        </a:rPr>
+                        <a:t>티켓 · Issue</a:t>
+                      </a:r>
+                      <a:endParaRPr lang="en-US" sz="1200" dirty="0">
+                        <a:latin typeface="맑은 고딕" charset="0"/>
+                        <a:ea typeface="맑은 고딕" charset="0"/>
+                        <a:cs typeface="맑은 고딕" charset="0"/>
+                      </a:endParaRPr>
+                    </a:p>
+                  </a:txBody>
+                  <a:tcPr marL="88900" marR="88900" marT="50800" marB="50800" anchor="ctr">
+                    <a:lnL w="12700" cap="flat" cmpd="sng" algn="ctr">
+                      <a:solidFill>
+                        <a:srgbClr val="E5E7EB"/>
+                      </a:solidFill>
+                      <a:prstDash val="solid"/>
+                      <a:round/>
+                      <a:headEnd type="none" w="med" len="med"/>
+                      <a:tailEnd type="none" w="med" len="med"/>
+                    </a:lnL>
+                    <a:lnR w="12700" cap="flat" cmpd="sng" algn="ctr">
+                      <a:solidFill>
+                        <a:srgbClr val="E5E7EB"/>
+                      </a:solidFill>
+                      <a:prstDash val="solid"/>
+                      <a:round/>
+                      <a:headEnd type="none" w="med" len="med"/>
+                      <a:tailEnd type="none" w="med" len="med"/>
+                    </a:lnR>
+                    <a:lnT w="12700" cap="flat" cmpd="sng" algn="ctr">
+                      <a:solidFill>
+                        <a:srgbClr val="E5E7EB"/>
+                      </a:solidFill>
+                      <a:prstDash val="solid"/>
+                      <a:round/>
+                      <a:headEnd type="none" w="med" len="med"/>
+                      <a:tailEnd type="none" w="med" len="med"/>
+                    </a:lnT>
+                    <a:lnB w="12700" cap="flat" cmpd="sng" algn="ctr">
+                      <a:solidFill>
+                        <a:srgbClr val="E5E7EB"/>
+                      </a:solidFill>
+                      <a:prstDash val="solid"/>
+                      <a:round/>
+                      <a:headEnd type="none" w="med" len="med"/>
+                      <a:tailEnd type="none" w="med" len="med"/>
+                    </a:lnB>
+                  </a:tcPr>
+                </a:tc>
+                <a:tc>
+                  <a:txBody>
+                    <a:bodyPr/>
+                    <a:lstStyle/>
+                    <a:p>
+                      <a:pPr indent="0" marL="0">
+                        <a:buNone/>
+                      </a:pPr>
+                      <a:r>
+                        <a:rPr lang="en-US" sz="1050" b="1" dirty="0">
+                          <a:solidFill>
+                            <a:srgbClr val="6D28D9"/>
+                          </a:solidFill>
+                          <a:latin typeface="맑은 고딕" pitchFamily="34" charset="0"/>
+                          <a:ea typeface="맑은 고딕" pitchFamily="34" charset="-122"/>
+                          <a:cs typeface="맑은 고딕" pitchFamily="34" charset="-120"/>
+                        </a:rPr>
+                        <a:t>요구사항 접수 </a:t>
+                      </a:r>
+                      <a:pPr indent="0" marL="0">
+                        <a:buNone/>
+                      </a:pPr>
+                      <a:r>
+                        <a:rPr lang="en-US" sz="1150" dirty="0">
+                          <a:solidFill>
+                            <a:srgbClr val="475569"/>
+                          </a:solidFill>
+                          <a:latin typeface="맑은 고딕" pitchFamily="34" charset="0"/>
+                          <a:ea typeface="맑은 고딕" pitchFamily="34" charset="-122"/>
+                          <a:cs typeface="맑은 고딕" pitchFamily="34" charset="-120"/>
+                        </a:rPr>
+                        <a:t>현상기록 · 개선요청사항</a:t>
+                      </a:r>
+                      <a:endParaRPr lang="en-US" sz="1200" dirty="0">
+                        <a:latin typeface="맑은 고딕" charset="0"/>
+                        <a:ea typeface="맑은 고딕" charset="0"/>
+                        <a:cs typeface="맑은 고딕" charset="0"/>
+                      </a:endParaRPr>
+                    </a:p>
+                    <a:p>
+                      <a:pPr indent="0" marL="0">
+                        <a:buNone/>
+                      </a:pPr>
+                      <a:r>
+                        <a:rPr lang="en-US" sz="1050" b="1" dirty="0">
+                          <a:solidFill>
+                            <a:srgbClr val="6D28D9"/>
+                          </a:solidFill>
+                          <a:latin typeface="맑은 고딕" pitchFamily="34" charset="0"/>
+                          <a:ea typeface="맑은 고딕" pitchFamily="34" charset="-122"/>
+                          <a:cs typeface="맑은 고딕" pitchFamily="34" charset="-120"/>
+                        </a:rPr>
+                        <a:t>요구사항 개발 </a:t>
+                      </a:r>
+                      <a:pPr indent="0" marL="0">
+                        <a:buNone/>
+                      </a:pPr>
+                      <a:r>
+                        <a:rPr lang="en-US" sz="1150" dirty="0">
+                          <a:solidFill>
+                            <a:srgbClr val="475569"/>
+                          </a:solidFill>
+                          <a:latin typeface="맑은 고딕" pitchFamily="34" charset="0"/>
+                          <a:ea typeface="맑은 고딕" pitchFamily="34" charset="-122"/>
+                          <a:cs typeface="맑은 고딕" pitchFamily="34" charset="-120"/>
+                        </a:rPr>
+                        <a:t>변경범위 입력 · 제약사항 정의</a:t>
+                      </a:r>
+                      <a:endParaRPr lang="en-US" sz="1200" dirty="0">
+                        <a:latin typeface="맑은 고딕" charset="0"/>
+                        <a:ea typeface="맑은 고딕" charset="0"/>
+                        <a:cs typeface="맑은 고딕" charset="0"/>
+                      </a:endParaRPr>
+                    </a:p>
+                    <a:p>
+                      <a:pPr indent="0" marL="0">
+                        <a:buNone/>
+                      </a:pPr>
+                      <a:r>
+                        <a:rPr lang="en-US" sz="1050" b="1" dirty="0">
+                          <a:solidFill>
+                            <a:srgbClr val="6D28D9"/>
+                          </a:solidFill>
+                          <a:latin typeface="맑은 고딕" pitchFamily="34" charset="0"/>
+                          <a:ea typeface="맑은 고딕" pitchFamily="34" charset="-122"/>
+                          <a:cs typeface="맑은 고딕" pitchFamily="34" charset="-120"/>
+                        </a:rPr>
+                        <a:t>변경점 설계 </a:t>
+                      </a:r>
+                      <a:pPr indent="0" marL="0">
+                        <a:buNone/>
+                      </a:pPr>
+                      <a:r>
+                        <a:rPr lang="en-US" sz="1150" dirty="0">
+                          <a:solidFill>
+                            <a:srgbClr val="475569"/>
+                          </a:solidFill>
+                          <a:latin typeface="맑은 고딕" pitchFamily="34" charset="0"/>
+                          <a:ea typeface="맑은 고딕" pitchFamily="34" charset="-122"/>
+                          <a:cs typeface="맑은 고딕" pitchFamily="34" charset="-120"/>
+                        </a:rPr>
+                        <a:t>변경 전 · 변경 후</a:t>
+                      </a:r>
+                      <a:endParaRPr lang="en-US" sz="1200" dirty="0">
+                        <a:latin typeface="맑은 고딕" charset="0"/>
+                        <a:ea typeface="맑은 고딕" charset="0"/>
+                        <a:cs typeface="맑은 고딕" charset="0"/>
+                      </a:endParaRPr>
+                    </a:p>
+                  </a:txBody>
+                  <a:tcPr marL="88900" marR="88900" marT="50800" marB="50800" anchor="ctr">
+                    <a:lnL w="12700" cap="flat" cmpd="sng" algn="ctr">
+                      <a:solidFill>
+                        <a:srgbClr val="E5E7EB"/>
+                      </a:solidFill>
+                      <a:prstDash val="solid"/>
+                      <a:round/>
+                      <a:headEnd type="none" w="med" len="med"/>
+                      <a:tailEnd type="none" w="med" len="med"/>
+                    </a:lnL>
+                    <a:lnR w="12700" cap="flat" cmpd="sng" algn="ctr">
+                      <a:solidFill>
+                        <a:srgbClr val="E5E7EB"/>
+                      </a:solidFill>
+                      <a:prstDash val="solid"/>
+                      <a:round/>
+                      <a:headEnd type="none" w="med" len="med"/>
+                      <a:tailEnd type="none" w="med" len="med"/>
+                    </a:lnR>
+                    <a:lnT w="12700" cap="flat" cmpd="sng" algn="ctr">
+                      <a:solidFill>
+                        <a:srgbClr val="E5E7EB"/>
+                      </a:solidFill>
+                      <a:prstDash val="solid"/>
+                      <a:round/>
+                      <a:headEnd type="none" w="med" len="med"/>
+                      <a:tailEnd type="none" w="med" len="med"/>
+                    </a:lnT>
+                    <a:lnB w="12700" cap="flat" cmpd="sng" algn="ctr">
+                      <a:solidFill>
+                        <a:srgbClr val="E5E7EB"/>
+                      </a:solidFill>
+                      <a:prstDash val="solid"/>
+                      <a:round/>
+                      <a:headEnd type="none" w="med" len="med"/>
+                      <a:tailEnd type="none" w="med" len="med"/>
+                    </a:lnB>
+                  </a:tcPr>
+                </a:tc>
+                <a:tc>
+                  <a:txBody>
+                    <a:bodyPr/>
+                    <a:lstStyle/>
+                    <a:p>
+                      <a:pPr indent="0" marL="0">
+                        <a:buNone/>
+                      </a:pPr>
+                      <a:r>
+                        <a:rPr lang="en-US" sz="1250" b="1" dirty="0">
+                          <a:solidFill>
+                            <a:srgbClr val="4338CA"/>
+                          </a:solidFill>
+                          <a:latin typeface="맑은 고딕" pitchFamily="34" charset="0"/>
+                          <a:ea typeface="맑은 고딕" pitchFamily="34" charset="-122"/>
+                          <a:cs typeface="맑은 고딕" pitchFamily="34" charset="-120"/>
+                        </a:rPr>
+                        <a:t>AI</a:t>
+                      </a:r>
+                      <a:pPr indent="0" marL="0">
+                        <a:buNone/>
+                      </a:pPr>
+                      <a:r>
+                        <a:rPr lang="en-US" sz="1250" dirty="0">
+                          <a:solidFill>
+                            <a:srgbClr val="6B7280"/>
+                          </a:solidFill>
+                          <a:latin typeface="맑은 고딕" pitchFamily="34" charset="0"/>
+                          <a:ea typeface="맑은 고딕" pitchFamily="34" charset="-122"/>
+                          <a:cs typeface="맑은 고딕" pitchFamily="34" charset="-120"/>
+                        </a:rPr>
+                        <a:t> + </a:t>
+                      </a:r>
+                      <a:pPr indent="0" marL="0">
+                        <a:buNone/>
+                      </a:pPr>
+                      <a:r>
+                        <a:rPr lang="en-US" sz="1250" b="1" dirty="0">
+                          <a:solidFill>
+                            <a:srgbClr val="C2410C"/>
+                          </a:solidFill>
+                          <a:latin typeface="맑은 고딕" pitchFamily="34" charset="0"/>
+                          <a:ea typeface="맑은 고딕" pitchFamily="34" charset="-122"/>
+                          <a:cs typeface="맑은 고딕" pitchFamily="34" charset="-120"/>
+                        </a:rPr>
+                        <a:t>사람</a:t>
+                      </a:r>
+                      <a:endParaRPr lang="en-US" sz="1200" dirty="0">
+                        <a:latin typeface="맑은 고딕" charset="0"/>
+                        <a:ea typeface="맑은 고딕" charset="0"/>
+                        <a:cs typeface="맑은 고딕" charset="0"/>
+                      </a:endParaRPr>
+                    </a:p>
+                    <a:p>
+                      <a:pPr indent="0" marL="0">
+                        <a:buNone/>
+                      </a:pPr>
+                      <a:r>
+                        <a:rPr lang="en-US" sz="1000" dirty="0">
+                          <a:solidFill>
+                            <a:srgbClr val="94A3B8"/>
+                          </a:solidFill>
+                          <a:latin typeface="맑은 고딕" pitchFamily="34" charset="0"/>
+                          <a:ea typeface="맑은 고딕" pitchFamily="34" charset="-122"/>
+                          <a:cs typeface="맑은 고딕" pitchFamily="34" charset="-120"/>
+                        </a:rPr>
+                        <a:t>현상기록(배경)은 사람</a:t>
+                      </a:r>
+                      <a:endParaRPr lang="en-US" sz="1200" dirty="0">
+                        <a:latin typeface="맑은 고딕" charset="0"/>
+                        <a:ea typeface="맑은 고딕" charset="0"/>
+                        <a:cs typeface="맑은 고딕" charset="0"/>
+                      </a:endParaRPr>
+                    </a:p>
+                  </a:txBody>
+                  <a:tcPr marL="88900" marR="88900" marT="50800" marB="50800" anchor="ctr">
+                    <a:lnL w="12700" cap="flat" cmpd="sng" algn="ctr">
+                      <a:solidFill>
+                        <a:srgbClr val="E5E7EB"/>
+                      </a:solidFill>
+                      <a:prstDash val="solid"/>
+                      <a:round/>
+                      <a:headEnd type="none" w="med" len="med"/>
+                      <a:tailEnd type="none" w="med" len="med"/>
+                    </a:lnL>
+                    <a:lnR w="12700" cap="flat" cmpd="sng" algn="ctr">
+                      <a:solidFill>
+                        <a:srgbClr val="E5E7EB"/>
+                      </a:solidFill>
+                      <a:prstDash val="solid"/>
+                      <a:round/>
+                      <a:headEnd type="none" w="med" len="med"/>
+                      <a:tailEnd type="none" w="med" len="med"/>
+                    </a:lnR>
+                    <a:lnT w="12700" cap="flat" cmpd="sng" algn="ctr">
+                      <a:solidFill>
+                        <a:srgbClr val="E5E7EB"/>
+                      </a:solidFill>
+                      <a:prstDash val="solid"/>
+                      <a:round/>
+                      <a:headEnd type="none" w="med" len="med"/>
+                      <a:tailEnd type="none" w="med" len="med"/>
+                    </a:lnT>
+                    <a:lnB w="12700" cap="flat" cmpd="sng" algn="ctr">
+                      <a:solidFill>
+                        <a:srgbClr val="E5E7EB"/>
+                      </a:solidFill>
+                      <a:prstDash val="solid"/>
+                      <a:round/>
+                      <a:headEnd type="none" w="med" len="med"/>
+                      <a:tailEnd type="none" w="med" len="med"/>
+                    </a:lnB>
+                  </a:tcPr>
+                </a:tc>
+              </a:tr>
+              <a:tr h="749808">
+                <a:tc>
+                  <a:txBody>
+                    <a:bodyPr/>
+                    <a:lstStyle/>
+                    <a:p>
+                      <a:pPr indent="0" marL="0">
+                        <a:buNone/>
+                      </a:pPr>
+                      <a:r>
+                        <a:rPr lang="en-US" sz="1200" b="1" dirty="0">
+                          <a:solidFill>
+                            <a:srgbClr val="6B7280"/>
+                          </a:solidFill>
+                          <a:latin typeface="맑은 고딕" pitchFamily="34" charset="0"/>
+                          <a:ea typeface="맑은 고딕" pitchFamily="34" charset="-122"/>
+                          <a:cs typeface="맑은 고딕" pitchFamily="34" charset="-120"/>
+                        </a:rPr>
+                        <a:t>2  </a:t>
+                      </a:r>
+                      <a:pPr indent="0" marL="0">
+                        <a:buNone/>
+                      </a:pPr>
+                      <a:r>
+                        <a:rPr lang="en-US" sz="1400" b="1" dirty="0">
+                          <a:solidFill>
+                            <a:srgbClr val="1F2937"/>
+                          </a:solidFill>
+                          <a:latin typeface="맑은 고딕" pitchFamily="34" charset="0"/>
+                          <a:ea typeface="맑은 고딕" pitchFamily="34" charset="-122"/>
+                          <a:cs typeface="맑은 고딕" pitchFamily="34" charset="-120"/>
+                        </a:rPr>
+                        <a:t>Detail Design</a:t>
+                      </a:r>
+                      <a:endParaRPr lang="en-US" sz="1200" dirty="0">
+                        <a:latin typeface="맑은 고딕" charset="0"/>
+                        <a:ea typeface="맑은 고딕" charset="0"/>
+                        <a:cs typeface="맑은 고딕" charset="0"/>
+                      </a:endParaRPr>
+                    </a:p>
+                    <a:p>
+                      <a:pPr indent="0" marL="0">
+                        <a:buNone/>
+                      </a:pPr>
+                      <a:r>
+                        <a:rPr lang="en-US" sz="950" dirty="0">
+                          <a:solidFill>
+                            <a:srgbClr val="A5AEC0"/>
+                          </a:solidFill>
+                          <a:latin typeface="맑은 고딕" pitchFamily="34" charset="0"/>
+                          <a:ea typeface="맑은 고딕" pitchFamily="34" charset="-122"/>
+                          <a:cs typeface="맑은 고딕" pitchFamily="34" charset="-120"/>
+                        </a:rPr>
+                        <a:t>상세설계</a:t>
+                      </a:r>
+                      <a:endParaRPr lang="en-US" sz="1200" dirty="0">
+                        <a:latin typeface="맑은 고딕" charset="0"/>
+                        <a:ea typeface="맑은 고딕" charset="0"/>
+                        <a:cs typeface="맑은 고딕" charset="0"/>
+                      </a:endParaRPr>
+                    </a:p>
+                  </a:txBody>
+                  <a:tcPr marL="88900" marR="88900" marT="50800" marB="50800" anchor="ctr">
+                    <a:lnL w="12700" cap="flat" cmpd="sng" algn="ctr">
+                      <a:solidFill>
+                        <a:srgbClr val="E5E7EB"/>
+                      </a:solidFill>
+                      <a:prstDash val="solid"/>
+                      <a:round/>
+                      <a:headEnd type="none" w="med" len="med"/>
+                      <a:tailEnd type="none" w="med" len="med"/>
+                    </a:lnL>
+                    <a:lnR w="12700" cap="flat" cmpd="sng" algn="ctr">
+                      <a:solidFill>
+                        <a:srgbClr val="E5E7EB"/>
+                      </a:solidFill>
+                      <a:prstDash val="solid"/>
+                      <a:round/>
+                      <a:headEnd type="none" w="med" len="med"/>
+                      <a:tailEnd type="none" w="med" len="med"/>
+                    </a:lnR>
+                    <a:lnT w="12700" cap="flat" cmpd="sng" algn="ctr">
+                      <a:solidFill>
+                        <a:srgbClr val="E5E7EB"/>
+                      </a:solidFill>
+                      <a:prstDash val="solid"/>
+                      <a:round/>
+                      <a:headEnd type="none" w="med" len="med"/>
+                      <a:tailEnd type="none" w="med" len="med"/>
+                    </a:lnT>
+                    <a:lnB w="12700" cap="flat" cmpd="sng" algn="ctr">
+                      <a:solidFill>
+                        <a:srgbClr val="E5E7EB"/>
+                      </a:solidFill>
+                      <a:prstDash val="solid"/>
+                      <a:round/>
+                      <a:headEnd type="none" w="med" len="med"/>
+                      <a:tailEnd type="none" w="med" len="med"/>
+                    </a:lnB>
+                  </a:tcPr>
+                </a:tc>
+                <a:tc>
+                  <a:txBody>
+                    <a:bodyPr/>
+                    <a:lstStyle/>
+                    <a:p>
+                      <a:pPr indent="0" marL="0">
+                        <a:buNone/>
+                      </a:pPr>
+                      <a:r>
+                        <a:rPr lang="en-US" sz="1150" dirty="0">
+                          <a:solidFill>
+                            <a:srgbClr val="475569"/>
+                          </a:solidFill>
+                          <a:latin typeface="맑은 고딕" pitchFamily="34" charset="0"/>
+                          <a:ea typeface="맑은 고딕" pitchFamily="34" charset="-122"/>
+                          <a:cs typeface="맑은 고딕" pitchFamily="34" charset="-120"/>
+                        </a:rPr>
+                        <a:t>설명</a:t>
+                      </a:r>
+                      <a:endParaRPr lang="en-US" sz="1200" dirty="0">
+                        <a:latin typeface="맑은 고딕" charset="0"/>
+                        <a:ea typeface="맑은 고딕" charset="0"/>
+                        <a:cs typeface="맑은 고딕" charset="0"/>
+                      </a:endParaRPr>
+                    </a:p>
+                    <a:p>
+                      <a:pPr indent="0" marL="0">
+                        <a:buNone/>
+                      </a:pPr>
+                      <a:r>
+                        <a:rPr lang="en-US" sz="1150" dirty="0">
+                          <a:solidFill>
+                            <a:srgbClr val="475569"/>
+                          </a:solidFill>
+                          <a:latin typeface="맑은 고딕" pitchFamily="34" charset="0"/>
+                          <a:ea typeface="맑은 고딕" pitchFamily="34" charset="-122"/>
+                          <a:cs typeface="맑은 고딕" pitchFamily="34" charset="-120"/>
+                        </a:rPr>
+                        <a:t>Class Diagram</a:t>
+                      </a:r>
+                      <a:endParaRPr lang="en-US" sz="1200" dirty="0">
+                        <a:latin typeface="맑은 고딕" charset="0"/>
+                        <a:ea typeface="맑은 고딕" charset="0"/>
+                        <a:cs typeface="맑은 고딕" charset="0"/>
+                      </a:endParaRPr>
+                    </a:p>
+                    <a:p>
+                      <a:pPr indent="0" marL="0">
+                        <a:buNone/>
+                      </a:pPr>
+                      <a:r>
+                        <a:rPr lang="en-US" sz="1150" dirty="0">
+                          <a:solidFill>
+                            <a:srgbClr val="475569"/>
+                          </a:solidFill>
+                          <a:latin typeface="맑은 고딕" pitchFamily="34" charset="0"/>
+                          <a:ea typeface="맑은 고딕" pitchFamily="34" charset="-122"/>
+                          <a:cs typeface="맑은 고딕" pitchFamily="34" charset="-120"/>
+                        </a:rPr>
+                        <a:t>Sequence Diagram (as-is · to-be)</a:t>
+                      </a:r>
+                      <a:endParaRPr lang="en-US" sz="1200" dirty="0">
+                        <a:latin typeface="맑은 고딕" charset="0"/>
+                        <a:ea typeface="맑은 고딕" charset="0"/>
+                        <a:cs typeface="맑은 고딕" charset="0"/>
+                      </a:endParaRPr>
+                    </a:p>
+                  </a:txBody>
+                  <a:tcPr marL="88900" marR="88900" marT="50800" marB="50800" anchor="ctr">
+                    <a:lnL w="12700" cap="flat" cmpd="sng" algn="ctr">
+                      <a:solidFill>
+                        <a:srgbClr val="E5E7EB"/>
+                      </a:solidFill>
+                      <a:prstDash val="solid"/>
+                      <a:round/>
+                      <a:headEnd type="none" w="med" len="med"/>
+                      <a:tailEnd type="none" w="med" len="med"/>
+                    </a:lnL>
+                    <a:lnR w="12700" cap="flat" cmpd="sng" algn="ctr">
+                      <a:solidFill>
+                        <a:srgbClr val="E5E7EB"/>
+                      </a:solidFill>
+                      <a:prstDash val="solid"/>
+                      <a:round/>
+                      <a:headEnd type="none" w="med" len="med"/>
+                      <a:tailEnd type="none" w="med" len="med"/>
+                    </a:lnR>
+                    <a:lnT w="12700" cap="flat" cmpd="sng" algn="ctr">
+                      <a:solidFill>
+                        <a:srgbClr val="E5E7EB"/>
+                      </a:solidFill>
+                      <a:prstDash val="solid"/>
+                      <a:round/>
+                      <a:headEnd type="none" w="med" len="med"/>
+                      <a:tailEnd type="none" w="med" len="med"/>
+                    </a:lnT>
+                    <a:lnB w="12700" cap="flat" cmpd="sng" algn="ctr">
+                      <a:solidFill>
+                        <a:srgbClr val="E5E7EB"/>
+                      </a:solidFill>
+                      <a:prstDash val="solid"/>
+                      <a:round/>
+                      <a:headEnd type="none" w="med" len="med"/>
+                      <a:tailEnd type="none" w="med" len="med"/>
+                    </a:lnB>
+                  </a:tcPr>
+                </a:tc>
+                <a:tc>
+                  <a:txBody>
+                    <a:bodyPr/>
+                    <a:lstStyle/>
+                    <a:p>
+                      <a:pPr indent="0" marL="0">
+                        <a:buNone/>
+                      </a:pPr>
+                      <a:r>
+                        <a:rPr lang="en-US" sz="1250" b="1" dirty="0">
+                          <a:solidFill>
+                            <a:srgbClr val="4338CA"/>
+                          </a:solidFill>
+                          <a:latin typeface="맑은 고딕" pitchFamily="34" charset="0"/>
+                          <a:ea typeface="맑은 고딕" pitchFamily="34" charset="-122"/>
+                          <a:cs typeface="맑은 고딕" pitchFamily="34" charset="-120"/>
+                        </a:rPr>
+                        <a:t>AI</a:t>
+                      </a:r>
+                      <a:pPr indent="0" marL="0">
+                        <a:buNone/>
+                      </a:pPr>
+                      <a:r>
+                        <a:rPr lang="en-US" sz="1250" dirty="0">
+                          <a:solidFill>
+                            <a:srgbClr val="6B7280"/>
+                          </a:solidFill>
+                          <a:latin typeface="맑은 고딕" pitchFamily="34" charset="0"/>
+                          <a:ea typeface="맑은 고딕" pitchFamily="34" charset="-122"/>
+                          <a:cs typeface="맑은 고딕" pitchFamily="34" charset="-120"/>
+                        </a:rPr>
+                        <a:t> + </a:t>
+                      </a:r>
+                      <a:pPr indent="0" marL="0">
+                        <a:buNone/>
+                      </a:pPr>
+                      <a:r>
+                        <a:rPr lang="en-US" sz="1250" b="1" dirty="0">
+                          <a:solidFill>
+                            <a:srgbClr val="C2410C"/>
+                          </a:solidFill>
+                          <a:latin typeface="맑은 고딕" pitchFamily="34" charset="0"/>
+                          <a:ea typeface="맑은 고딕" pitchFamily="34" charset="-122"/>
+                          <a:cs typeface="맑은 고딕" pitchFamily="34" charset="-120"/>
+                        </a:rPr>
+                        <a:t>사람</a:t>
+                      </a:r>
+                      <a:endParaRPr lang="en-US" sz="1200" dirty="0">
+                        <a:latin typeface="맑은 고딕" charset="0"/>
+                        <a:ea typeface="맑은 고딕" charset="0"/>
+                        <a:cs typeface="맑은 고딕" charset="0"/>
+                      </a:endParaRPr>
+                    </a:p>
+                    <a:p>
+                      <a:pPr indent="0" marL="0">
+                        <a:buNone/>
+                      </a:pPr>
+                      <a:r>
+                        <a:rPr lang="en-US" sz="1000" dirty="0">
+                          <a:solidFill>
+                            <a:srgbClr val="94A3B8"/>
+                          </a:solidFill>
+                          <a:latin typeface="맑은 고딕" pitchFamily="34" charset="0"/>
+                          <a:ea typeface="맑은 고딕" pitchFamily="34" charset="-122"/>
+                          <a:cs typeface="맑은 고딕" pitchFamily="34" charset="-120"/>
+                        </a:rPr>
+                        <a:t>Class · as-is는 사람 검증</a:t>
+                      </a:r>
+                      <a:endParaRPr lang="en-US" sz="1200" dirty="0">
+                        <a:latin typeface="맑은 고딕" charset="0"/>
+                        <a:ea typeface="맑은 고딕" charset="0"/>
+                        <a:cs typeface="맑은 고딕" charset="0"/>
+                      </a:endParaRPr>
+                    </a:p>
+                  </a:txBody>
+                  <a:tcPr marL="88900" marR="88900" marT="50800" marB="50800" anchor="ctr">
+                    <a:lnL w="12700" cap="flat" cmpd="sng" algn="ctr">
+                      <a:solidFill>
+                        <a:srgbClr val="E5E7EB"/>
+                      </a:solidFill>
+                      <a:prstDash val="solid"/>
+                      <a:round/>
+                      <a:headEnd type="none" w="med" len="med"/>
+                      <a:tailEnd type="none" w="med" len="med"/>
+                    </a:lnL>
+                    <a:lnR w="12700" cap="flat" cmpd="sng" algn="ctr">
+                      <a:solidFill>
+                        <a:srgbClr val="E5E7EB"/>
+                      </a:solidFill>
+                      <a:prstDash val="solid"/>
+                      <a:round/>
+                      <a:headEnd type="none" w="med" len="med"/>
+                      <a:tailEnd type="none" w="med" len="med"/>
+                    </a:lnR>
+                    <a:lnT w="12700" cap="flat" cmpd="sng" algn="ctr">
+                      <a:solidFill>
+                        <a:srgbClr val="E5E7EB"/>
+                      </a:solidFill>
+                      <a:prstDash val="solid"/>
+                      <a:round/>
+                      <a:headEnd type="none" w="med" len="med"/>
+                      <a:tailEnd type="none" w="med" len="med"/>
+                    </a:lnT>
+                    <a:lnB w="12700" cap="flat" cmpd="sng" algn="ctr">
+                      <a:solidFill>
+                        <a:srgbClr val="E5E7EB"/>
+                      </a:solidFill>
+                      <a:prstDash val="solid"/>
+                      <a:round/>
+                      <a:headEnd type="none" w="med" len="med"/>
+                      <a:tailEnd type="none" w="med" len="med"/>
+                    </a:lnB>
+                  </a:tcPr>
+                </a:tc>
+              </a:tr>
+              <a:tr h="749808">
+                <a:tc>
+                  <a:txBody>
+                    <a:bodyPr/>
+                    <a:lstStyle/>
+                    <a:p>
+                      <a:pPr indent="0" marL="0">
+                        <a:buNone/>
+                      </a:pPr>
+                      <a:r>
+                        <a:rPr lang="en-US" sz="1200" b="1" dirty="0">
+                          <a:solidFill>
+                            <a:srgbClr val="6B7280"/>
+                          </a:solidFill>
+                          <a:latin typeface="맑은 고딕" pitchFamily="34" charset="0"/>
+                          <a:ea typeface="맑은 고딕" pitchFamily="34" charset="-122"/>
+                          <a:cs typeface="맑은 고딕" pitchFamily="34" charset="-120"/>
+                        </a:rPr>
+                        <a:t>3  </a:t>
+                      </a:r>
+                      <a:pPr indent="0" marL="0">
+                        <a:buNone/>
+                      </a:pPr>
+                      <a:r>
+                        <a:rPr lang="en-US" sz="1400" b="1" dirty="0">
+                          <a:solidFill>
+                            <a:srgbClr val="1F2937"/>
+                          </a:solidFill>
+                          <a:latin typeface="맑은 고딕" pitchFamily="34" charset="0"/>
+                          <a:ea typeface="맑은 고딕" pitchFamily="34" charset="-122"/>
+                          <a:cs typeface="맑은 고딕" pitchFamily="34" charset="-120"/>
+                        </a:rPr>
+                        <a:t>SWVOC</a:t>
+                      </a:r>
+                      <a:endParaRPr lang="en-US" sz="1200" dirty="0">
+                        <a:latin typeface="맑은 고딕" charset="0"/>
+                        <a:ea typeface="맑은 고딕" charset="0"/>
+                        <a:cs typeface="맑은 고딕" charset="0"/>
+                      </a:endParaRPr>
+                    </a:p>
+                    <a:p>
+                      <a:pPr indent="0" marL="0">
+                        <a:buNone/>
+                      </a:pPr>
+                      <a:r>
+                        <a:rPr lang="en-US" sz="950" dirty="0">
+                          <a:solidFill>
+                            <a:srgbClr val="A5AEC0"/>
+                          </a:solidFill>
+                          <a:latin typeface="맑은 고딕" pitchFamily="34" charset="0"/>
+                          <a:ea typeface="맑은 고딕" pitchFamily="34" charset="-122"/>
+                          <a:cs typeface="맑은 고딕" pitchFamily="34" charset="-120"/>
+                        </a:rPr>
+                        <a:t>고객 요청 원문</a:t>
+                      </a:r>
+                      <a:endParaRPr lang="en-US" sz="1200" dirty="0">
+                        <a:latin typeface="맑은 고딕" charset="0"/>
+                        <a:ea typeface="맑은 고딕" charset="0"/>
+                        <a:cs typeface="맑은 고딕" charset="0"/>
+                      </a:endParaRPr>
+                    </a:p>
+                  </a:txBody>
+                  <a:tcPr marL="88900" marR="88900" marT="50800" marB="50800" anchor="ctr">
+                    <a:lnL w="12700" cap="flat" cmpd="sng" algn="ctr">
+                      <a:solidFill>
+                        <a:srgbClr val="E5E7EB"/>
+                      </a:solidFill>
+                      <a:prstDash val="solid"/>
+                      <a:round/>
+                      <a:headEnd type="none" w="med" len="med"/>
+                      <a:tailEnd type="none" w="med" len="med"/>
+                    </a:lnL>
+                    <a:lnR w="12700" cap="flat" cmpd="sng" algn="ctr">
+                      <a:solidFill>
+                        <a:srgbClr val="E5E7EB"/>
+                      </a:solidFill>
+                      <a:prstDash val="solid"/>
+                      <a:round/>
+                      <a:headEnd type="none" w="med" len="med"/>
+                      <a:tailEnd type="none" w="med" len="med"/>
+                    </a:lnR>
+                    <a:lnT w="12700" cap="flat" cmpd="sng" algn="ctr">
+                      <a:solidFill>
+                        <a:srgbClr val="E5E7EB"/>
+                      </a:solidFill>
+                      <a:prstDash val="solid"/>
+                      <a:round/>
+                      <a:headEnd type="none" w="med" len="med"/>
+                      <a:tailEnd type="none" w="med" len="med"/>
+                    </a:lnT>
+                    <a:lnB w="12700" cap="flat" cmpd="sng" algn="ctr">
+                      <a:solidFill>
+                        <a:srgbClr val="E5E7EB"/>
+                      </a:solidFill>
+                      <a:prstDash val="solid"/>
+                      <a:round/>
+                      <a:headEnd type="none" w="med" len="med"/>
+                      <a:tailEnd type="none" w="med" len="med"/>
+                    </a:lnB>
+                  </a:tcPr>
+                </a:tc>
+                <a:tc>
+                  <a:txBody>
+                    <a:bodyPr/>
+                    <a:lstStyle/>
+                    <a:p>
+                      <a:pPr indent="0" marL="0">
+                        <a:buNone/>
+                      </a:pPr>
+                      <a:r>
+                        <a:rPr lang="en-US" sz="1150" dirty="0">
+                          <a:solidFill>
+                            <a:srgbClr val="475569"/>
+                          </a:solidFill>
+                          <a:latin typeface="맑은 고딕" pitchFamily="34" charset="0"/>
+                          <a:ea typeface="맑은 고딕" pitchFamily="34" charset="-122"/>
+                          <a:cs typeface="맑은 고딕" pitchFamily="34" charset="-120"/>
+                        </a:rPr>
+                        <a:t>요청자 (누가 · 어느 기능)</a:t>
+                      </a:r>
+                      <a:endParaRPr lang="en-US" sz="1200" dirty="0">
+                        <a:latin typeface="맑은 고딕" charset="0"/>
+                        <a:ea typeface="맑은 고딕" charset="0"/>
+                        <a:cs typeface="맑은 고딕" charset="0"/>
+                      </a:endParaRPr>
+                    </a:p>
+                    <a:p>
+                      <a:pPr indent="0" marL="0">
+                        <a:buNone/>
+                      </a:pPr>
+                      <a:r>
+                        <a:rPr lang="en-US" sz="1150" dirty="0">
+                          <a:solidFill>
+                            <a:srgbClr val="475569"/>
+                          </a:solidFill>
+                          <a:latin typeface="맑은 고딕" pitchFamily="34" charset="0"/>
+                          <a:ea typeface="맑은 고딕" pitchFamily="34" charset="-122"/>
+                          <a:cs typeface="맑은 고딕" pitchFamily="34" charset="-120"/>
+                        </a:rPr>
+                        <a:t>요청사항</a:t>
+                      </a:r>
+                      <a:endParaRPr lang="en-US" sz="1200" dirty="0">
+                        <a:latin typeface="맑은 고딕" charset="0"/>
+                        <a:ea typeface="맑은 고딕" charset="0"/>
+                        <a:cs typeface="맑은 고딕" charset="0"/>
+                      </a:endParaRPr>
+                    </a:p>
+                    <a:p>
+                      <a:pPr indent="0" marL="0">
+                        <a:buNone/>
+                      </a:pPr>
+                      <a:r>
+                        <a:rPr lang="en-US" sz="1150" dirty="0">
+                          <a:solidFill>
+                            <a:srgbClr val="475569"/>
+                          </a:solidFill>
+                          <a:latin typeface="맑은 고딕" pitchFamily="34" charset="0"/>
+                          <a:ea typeface="맑은 고딕" pitchFamily="34" charset="-122"/>
+                          <a:cs typeface="맑은 고딕" pitchFamily="34" charset="-120"/>
+                        </a:rPr>
+                        <a:t>특이사항</a:t>
+                      </a:r>
+                      <a:endParaRPr lang="en-US" sz="1200" dirty="0">
+                        <a:latin typeface="맑은 고딕" charset="0"/>
+                        <a:ea typeface="맑은 고딕" charset="0"/>
+                        <a:cs typeface="맑은 고딕" charset="0"/>
+                      </a:endParaRPr>
+                    </a:p>
+                  </a:txBody>
+                  <a:tcPr marL="88900" marR="88900" marT="50800" marB="50800" anchor="ctr">
+                    <a:lnL w="12700" cap="flat" cmpd="sng" algn="ctr">
+                      <a:solidFill>
+                        <a:srgbClr val="E5E7EB"/>
+                      </a:solidFill>
+                      <a:prstDash val="solid"/>
+                      <a:round/>
+                      <a:headEnd type="none" w="med" len="med"/>
+                      <a:tailEnd type="none" w="med" len="med"/>
+                    </a:lnL>
+                    <a:lnR w="12700" cap="flat" cmpd="sng" algn="ctr">
+                      <a:solidFill>
+                        <a:srgbClr val="E5E7EB"/>
+                      </a:solidFill>
+                      <a:prstDash val="solid"/>
+                      <a:round/>
+                      <a:headEnd type="none" w="med" len="med"/>
+                      <a:tailEnd type="none" w="med" len="med"/>
+                    </a:lnR>
+                    <a:lnT w="12700" cap="flat" cmpd="sng" algn="ctr">
+                      <a:solidFill>
+                        <a:srgbClr val="E5E7EB"/>
+                      </a:solidFill>
+                      <a:prstDash val="solid"/>
+                      <a:round/>
+                      <a:headEnd type="none" w="med" len="med"/>
+                      <a:tailEnd type="none" w="med" len="med"/>
+                    </a:lnT>
+                    <a:lnB w="12700" cap="flat" cmpd="sng" algn="ctr">
+                      <a:solidFill>
+                        <a:srgbClr val="E5E7EB"/>
+                      </a:solidFill>
+                      <a:prstDash val="solid"/>
+                      <a:round/>
+                      <a:headEnd type="none" w="med" len="med"/>
+                      <a:tailEnd type="none" w="med" len="med"/>
+                    </a:lnB>
+                  </a:tcPr>
+                </a:tc>
+                <a:tc>
+                  <a:txBody>
+                    <a:bodyPr/>
+                    <a:lstStyle/>
+                    <a:p>
+                      <a:pPr indent="0" marL="0">
+                        <a:buNone/>
+                      </a:pPr>
+                      <a:r>
+                        <a:rPr lang="en-US" sz="1250" b="1" dirty="0">
+                          <a:solidFill>
+                            <a:srgbClr val="C2410C"/>
+                          </a:solidFill>
+                          <a:latin typeface="맑은 고딕" pitchFamily="34" charset="0"/>
+                          <a:ea typeface="맑은 고딕" pitchFamily="34" charset="-122"/>
+                          <a:cs typeface="맑은 고딕" pitchFamily="34" charset="-120"/>
+                        </a:rPr>
+                        <a:t>사람 중심</a:t>
+                      </a:r>
+                      <a:endParaRPr lang="en-US" sz="1200" dirty="0">
+                        <a:latin typeface="맑은 고딕" charset="0"/>
+                        <a:ea typeface="맑은 고딕" charset="0"/>
+                        <a:cs typeface="맑은 고딕" charset="0"/>
+                      </a:endParaRPr>
+                    </a:p>
+                    <a:p>
+                      <a:pPr indent="0" marL="0">
+                        <a:buNone/>
+                      </a:pPr>
+                      <a:r>
+                        <a:rPr lang="en-US" sz="1000" dirty="0">
+                          <a:solidFill>
+                            <a:srgbClr val="94A3B8"/>
+                          </a:solidFill>
+                          <a:latin typeface="맑은 고딕" pitchFamily="34" charset="0"/>
+                          <a:ea typeface="맑은 고딕" pitchFamily="34" charset="-122"/>
+                          <a:cs typeface="맑은 고딕" pitchFamily="34" charset="-120"/>
+                        </a:rPr>
+                        <a:t>요청사항은 AI가 정리</a:t>
+                      </a:r>
+                      <a:endParaRPr lang="en-US" sz="1200" dirty="0">
+                        <a:latin typeface="맑은 고딕" charset="0"/>
+                        <a:ea typeface="맑은 고딕" charset="0"/>
+                        <a:cs typeface="맑은 고딕" charset="0"/>
+                      </a:endParaRPr>
+                    </a:p>
+                  </a:txBody>
+                  <a:tcPr marL="88900" marR="88900" marT="50800" marB="50800" anchor="ctr">
+                    <a:lnL w="12700" cap="flat" cmpd="sng" algn="ctr">
+                      <a:solidFill>
+                        <a:srgbClr val="E5E7EB"/>
+                      </a:solidFill>
+                      <a:prstDash val="solid"/>
+                      <a:round/>
+                      <a:headEnd type="none" w="med" len="med"/>
+                      <a:tailEnd type="none" w="med" len="med"/>
+                    </a:lnL>
+                    <a:lnR w="12700" cap="flat" cmpd="sng" algn="ctr">
+                      <a:solidFill>
+                        <a:srgbClr val="E5E7EB"/>
+                      </a:solidFill>
+                      <a:prstDash val="solid"/>
+                      <a:round/>
+                      <a:headEnd type="none" w="med" len="med"/>
+                      <a:tailEnd type="none" w="med" len="med"/>
+                    </a:lnR>
+                    <a:lnT w="12700" cap="flat" cmpd="sng" algn="ctr">
+                      <a:solidFill>
+                        <a:srgbClr val="E5E7EB"/>
+                      </a:solidFill>
+                      <a:prstDash val="solid"/>
+                      <a:round/>
+                      <a:headEnd type="none" w="med" len="med"/>
+                      <a:tailEnd type="none" w="med" len="med"/>
+                    </a:lnT>
+                    <a:lnB w="12700" cap="flat" cmpd="sng" algn="ctr">
+                      <a:solidFill>
+                        <a:srgbClr val="E5E7EB"/>
+                      </a:solidFill>
+                      <a:prstDash val="solid"/>
+                      <a:round/>
+                      <a:headEnd type="none" w="med" len="med"/>
+                      <a:tailEnd type="none" w="med" len="med"/>
+                    </a:lnB>
+                  </a:tcPr>
+                </a:tc>
+              </a:tr>
+              <a:tr h="914400">
+                <a:tc>
+                  <a:txBody>
+                    <a:bodyPr/>
+                    <a:lstStyle/>
+                    <a:p>
+                      <a:pPr indent="0" marL="0">
+                        <a:buNone/>
+                      </a:pPr>
+                      <a:r>
+                        <a:rPr lang="en-US" sz="1200" b="1" dirty="0">
+                          <a:solidFill>
+                            <a:srgbClr val="6B7280"/>
+                          </a:solidFill>
+                          <a:latin typeface="맑은 고딕" pitchFamily="34" charset="0"/>
+                          <a:ea typeface="맑은 고딕" pitchFamily="34" charset="-122"/>
+                          <a:cs typeface="맑은 고딕" pitchFamily="34" charset="-120"/>
+                        </a:rPr>
+                        <a:t>4  </a:t>
+                      </a:r>
+                      <a:pPr indent="0" marL="0">
+                        <a:buNone/>
+                      </a:pPr>
+                      <a:r>
+                        <a:rPr lang="en-US" sz="1400" b="1" dirty="0">
+                          <a:solidFill>
+                            <a:srgbClr val="1F2937"/>
+                          </a:solidFill>
+                          <a:latin typeface="맑은 고딕" pitchFamily="34" charset="0"/>
+                          <a:ea typeface="맑은 고딕" pitchFamily="34" charset="-122"/>
+                          <a:cs typeface="맑은 고딕" pitchFamily="34" charset="-120"/>
+                        </a:rPr>
+                        <a:t>기능 요구사항</a:t>
+                      </a:r>
+                      <a:endParaRPr lang="en-US" sz="1200" dirty="0">
+                        <a:latin typeface="맑은 고딕" charset="0"/>
+                        <a:ea typeface="맑은 고딕" charset="0"/>
+                        <a:cs typeface="맑은 고딕" charset="0"/>
+                      </a:endParaRPr>
+                    </a:p>
+                    <a:p>
+                      <a:pPr indent="0" marL="0">
+                        <a:buNone/>
+                      </a:pPr>
+                      <a:r>
+                        <a:rPr lang="en-US" sz="950" dirty="0">
+                          <a:solidFill>
+                            <a:srgbClr val="A5AEC0"/>
+                          </a:solidFill>
+                          <a:latin typeface="맑은 고딕" pitchFamily="34" charset="0"/>
+                          <a:ea typeface="맑은 고딕" pitchFamily="34" charset="-122"/>
+                          <a:cs typeface="맑은 고딕" pitchFamily="34" charset="-120"/>
+                        </a:rPr>
+                        <a:t>Function Requirement</a:t>
+                      </a:r>
+                      <a:endParaRPr lang="en-US" sz="1200" dirty="0">
+                        <a:latin typeface="맑은 고딕" charset="0"/>
+                        <a:ea typeface="맑은 고딕" charset="0"/>
+                        <a:cs typeface="맑은 고딕" charset="0"/>
+                      </a:endParaRPr>
+                    </a:p>
+                  </a:txBody>
+                  <a:tcPr marL="88900" marR="88900" marT="50800" marB="50800" anchor="ctr">
+                    <a:lnL w="12700" cap="flat" cmpd="sng" algn="ctr">
+                      <a:solidFill>
+                        <a:srgbClr val="E5E7EB"/>
+                      </a:solidFill>
+                      <a:prstDash val="solid"/>
+                      <a:round/>
+                      <a:headEnd type="none" w="med" len="med"/>
+                      <a:tailEnd type="none" w="med" len="med"/>
+                    </a:lnL>
+                    <a:lnR w="12700" cap="flat" cmpd="sng" algn="ctr">
+                      <a:solidFill>
+                        <a:srgbClr val="E5E7EB"/>
+                      </a:solidFill>
+                      <a:prstDash val="solid"/>
+                      <a:round/>
+                      <a:headEnd type="none" w="med" len="med"/>
+                      <a:tailEnd type="none" w="med" len="med"/>
+                    </a:lnR>
+                    <a:lnT w="12700" cap="flat" cmpd="sng" algn="ctr">
+                      <a:solidFill>
+                        <a:srgbClr val="E5E7EB"/>
+                      </a:solidFill>
+                      <a:prstDash val="solid"/>
+                      <a:round/>
+                      <a:headEnd type="none" w="med" len="med"/>
+                      <a:tailEnd type="none" w="med" len="med"/>
+                    </a:lnT>
+                    <a:lnB w="12700" cap="flat" cmpd="sng" algn="ctr">
+                      <a:solidFill>
+                        <a:srgbClr val="E5E7EB"/>
+                      </a:solidFill>
+                      <a:prstDash val="solid"/>
+                      <a:round/>
+                      <a:headEnd type="none" w="med" len="med"/>
+                      <a:tailEnd type="none" w="med" len="med"/>
+                    </a:lnB>
+                  </a:tcPr>
+                </a:tc>
+                <a:tc>
+                  <a:txBody>
+                    <a:bodyPr/>
+                    <a:lstStyle/>
+                    <a:p>
+                      <a:pPr indent="0" marL="0">
+                        <a:buNone/>
+                      </a:pPr>
+                      <a:r>
+                        <a:rPr lang="en-US" sz="1150" dirty="0">
+                          <a:solidFill>
+                            <a:srgbClr val="475569"/>
+                          </a:solidFill>
+                          <a:latin typeface="맑은 고딕" pitchFamily="34" charset="0"/>
+                          <a:ea typeface="맑은 고딕" pitchFamily="34" charset="-122"/>
+                          <a:cs typeface="맑은 고딕" pitchFamily="34" charset="-120"/>
+                        </a:rPr>
+                        <a:t>개요 (역할 · 목적)</a:t>
+                      </a:r>
+                      <a:endParaRPr lang="en-US" sz="1200" dirty="0">
+                        <a:latin typeface="맑은 고딕" charset="0"/>
+                        <a:ea typeface="맑은 고딕" charset="0"/>
+                        <a:cs typeface="맑은 고딕" charset="0"/>
+                      </a:endParaRPr>
+                    </a:p>
+                    <a:p>
+                      <a:pPr indent="0" marL="0">
+                        <a:buNone/>
+                      </a:pPr>
+                      <a:r>
+                        <a:rPr lang="en-US" sz="1150" b="1" dirty="0">
+                          <a:solidFill>
+                            <a:srgbClr val="1F2937"/>
+                          </a:solidFill>
+                          <a:latin typeface="맑은 고딕" pitchFamily="34" charset="0"/>
+                          <a:ea typeface="맑은 고딕" pitchFamily="34" charset="-122"/>
+                          <a:cs typeface="맑은 고딕" pitchFamily="34" charset="-120"/>
+                        </a:rPr>
+                        <a:t>동작 정의 </a:t>
+                      </a:r>
+                      <a:pPr indent="0" marL="0">
+                        <a:buNone/>
+                      </a:pPr>
+                      <a:r>
+                        <a:rPr lang="en-US" sz="1150" dirty="0">
+                          <a:solidFill>
+                            <a:srgbClr val="475569"/>
+                          </a:solidFill>
+                          <a:latin typeface="맑은 고딕" pitchFamily="34" charset="0"/>
+                          <a:ea typeface="맑은 고딕" pitchFamily="34" charset="-122"/>
+                          <a:cs typeface="맑은 고딕" pitchFamily="34" charset="-120"/>
+                        </a:rPr>
+                        <a:t>— 기본·변형·예외 × 선행·후행·시나리오 (9행)</a:t>
+                      </a:r>
+                      <a:endParaRPr lang="en-US" sz="1200" dirty="0">
+                        <a:latin typeface="맑은 고딕" charset="0"/>
+                        <a:ea typeface="맑은 고딕" charset="0"/>
+                        <a:cs typeface="맑은 고딕" charset="0"/>
+                      </a:endParaRPr>
+                    </a:p>
+                    <a:p>
+                      <a:pPr indent="0" marL="0">
+                        <a:buNone/>
+                      </a:pPr>
+                      <a:r>
+                        <a:rPr lang="en-US" sz="1150" dirty="0">
+                          <a:solidFill>
+                            <a:srgbClr val="475569"/>
+                          </a:solidFill>
+                          <a:latin typeface="맑은 고딕" pitchFamily="34" charset="0"/>
+                          <a:ea typeface="맑은 고딕" pitchFamily="34" charset="-122"/>
+                          <a:cs typeface="맑은 고딕" pitchFamily="34" charset="-120"/>
+                        </a:rPr>
+                        <a:t>제약사항</a:t>
+                      </a:r>
+                      <a:endParaRPr lang="en-US" sz="1200" dirty="0">
+                        <a:latin typeface="맑은 고딕" charset="0"/>
+                        <a:ea typeface="맑은 고딕" charset="0"/>
+                        <a:cs typeface="맑은 고딕" charset="0"/>
+                      </a:endParaRPr>
+                    </a:p>
+                  </a:txBody>
+                  <a:tcPr marL="88900" marR="88900" marT="50800" marB="50800" anchor="ctr">
+                    <a:lnL w="12700" cap="flat" cmpd="sng" algn="ctr">
+                      <a:solidFill>
+                        <a:srgbClr val="E5E7EB"/>
+                      </a:solidFill>
+                      <a:prstDash val="solid"/>
+                      <a:round/>
+                      <a:headEnd type="none" w="med" len="med"/>
+                      <a:tailEnd type="none" w="med" len="med"/>
+                    </a:lnL>
+                    <a:lnR w="12700" cap="flat" cmpd="sng" algn="ctr">
+                      <a:solidFill>
+                        <a:srgbClr val="E5E7EB"/>
+                      </a:solidFill>
+                      <a:prstDash val="solid"/>
+                      <a:round/>
+                      <a:headEnd type="none" w="med" len="med"/>
+                      <a:tailEnd type="none" w="med" len="med"/>
+                    </a:lnR>
+                    <a:lnT w="12700" cap="flat" cmpd="sng" algn="ctr">
+                      <a:solidFill>
+                        <a:srgbClr val="E5E7EB"/>
+                      </a:solidFill>
+                      <a:prstDash val="solid"/>
+                      <a:round/>
+                      <a:headEnd type="none" w="med" len="med"/>
+                      <a:tailEnd type="none" w="med" len="med"/>
+                    </a:lnT>
+                    <a:lnB w="12700" cap="flat" cmpd="sng" algn="ctr">
+                      <a:solidFill>
+                        <a:srgbClr val="E5E7EB"/>
+                      </a:solidFill>
+                      <a:prstDash val="solid"/>
+                      <a:round/>
+                      <a:headEnd type="none" w="med" len="med"/>
+                      <a:tailEnd type="none" w="med" len="med"/>
+                    </a:lnB>
+                  </a:tcPr>
+                </a:tc>
+                <a:tc>
+                  <a:txBody>
+                    <a:bodyPr/>
+                    <a:lstStyle/>
+                    <a:p>
+                      <a:pPr indent="0" marL="0">
+                        <a:buNone/>
+                      </a:pPr>
+                      <a:r>
+                        <a:rPr lang="en-US" sz="1250" b="1" dirty="0">
+                          <a:solidFill>
+                            <a:srgbClr val="4338CA"/>
+                          </a:solidFill>
+                          <a:latin typeface="맑은 고딕" pitchFamily="34" charset="0"/>
+                          <a:ea typeface="맑은 고딕" pitchFamily="34" charset="-122"/>
+                          <a:cs typeface="맑은 고딕" pitchFamily="34" charset="-120"/>
+                        </a:rPr>
+                        <a:t>AI 초안</a:t>
+                      </a:r>
+                      <a:endParaRPr lang="en-US" sz="1200" dirty="0">
+                        <a:latin typeface="맑은 고딕" charset="0"/>
+                        <a:ea typeface="맑은 고딕" charset="0"/>
+                        <a:cs typeface="맑은 고딕" charset="0"/>
+                      </a:endParaRPr>
+                    </a:p>
+                    <a:p>
+                      <a:pPr indent="0" marL="0">
+                        <a:buNone/>
+                      </a:pPr>
+                      <a:r>
+                        <a:rPr lang="en-US" sz="1000" dirty="0">
+                          <a:solidFill>
+                            <a:srgbClr val="94A3B8"/>
+                          </a:solidFill>
+                          <a:latin typeface="맑은 고딕" pitchFamily="34" charset="0"/>
+                          <a:ea typeface="맑은 고딕" pitchFamily="34" charset="-122"/>
+                          <a:cs typeface="맑은 고딕" pitchFamily="34" charset="-120"/>
+                        </a:rPr>
+                        <a:t>동작 정의가 AI 도출의 핵심</a:t>
+                      </a:r>
+                      <a:endParaRPr lang="en-US" sz="1200" dirty="0">
+                        <a:latin typeface="맑은 고딕" charset="0"/>
+                        <a:ea typeface="맑은 고딕" charset="0"/>
+                        <a:cs typeface="맑은 고딕" charset="0"/>
+                      </a:endParaRPr>
+                    </a:p>
+                  </a:txBody>
+                  <a:tcPr marL="88900" marR="88900" marT="50800" marB="50800" anchor="ctr">
+                    <a:lnL w="12700" cap="flat" cmpd="sng" algn="ctr">
+                      <a:solidFill>
+                        <a:srgbClr val="E5E7EB"/>
+                      </a:solidFill>
+                      <a:prstDash val="solid"/>
+                      <a:round/>
+                      <a:headEnd type="none" w="med" len="med"/>
+                      <a:tailEnd type="none" w="med" len="med"/>
+                    </a:lnL>
+                    <a:lnR w="12700" cap="flat" cmpd="sng" algn="ctr">
+                      <a:solidFill>
+                        <a:srgbClr val="E5E7EB"/>
+                      </a:solidFill>
+                      <a:prstDash val="solid"/>
+                      <a:round/>
+                      <a:headEnd type="none" w="med" len="med"/>
+                      <a:tailEnd type="none" w="med" len="med"/>
+                    </a:lnR>
+                    <a:lnT w="12700" cap="flat" cmpd="sng" algn="ctr">
+                      <a:solidFill>
+                        <a:srgbClr val="E5E7EB"/>
+                      </a:solidFill>
+                      <a:prstDash val="solid"/>
+                      <a:round/>
+                      <a:headEnd type="none" w="med" len="med"/>
+                      <a:tailEnd type="none" w="med" len="med"/>
+                    </a:lnT>
+                    <a:lnB w="12700" cap="flat" cmpd="sng" algn="ctr">
+                      <a:solidFill>
+                        <a:srgbClr val="E5E7EB"/>
+                      </a:solidFill>
+                      <a:prstDash val="solid"/>
+                      <a:round/>
+                      <a:headEnd type="none" w="med" len="med"/>
+                      <a:tailEnd type="none" w="med" len="med"/>
+                    </a:lnB>
+                  </a:tcPr>
+                </a:tc>
+              </a:tr>
+              <a:tr h="530352">
+                <a:tc>
+                  <a:txBody>
+                    <a:bodyPr/>
+                    <a:lstStyle/>
+                    <a:p>
+                      <a:pPr indent="0" marL="0">
+                        <a:buNone/>
+                      </a:pPr>
+                      <a:r>
+                        <a:rPr lang="en-US" sz="1200" b="1" dirty="0">
+                          <a:solidFill>
+                            <a:srgbClr val="6B7280"/>
+                          </a:solidFill>
+                          <a:latin typeface="맑은 고딕" pitchFamily="34" charset="0"/>
+                          <a:ea typeface="맑은 고딕" pitchFamily="34" charset="-122"/>
+                          <a:cs typeface="맑은 고딕" pitchFamily="34" charset="-120"/>
+                        </a:rPr>
+                        <a:t>5  </a:t>
+                      </a:r>
+                      <a:pPr indent="0" marL="0">
+                        <a:buNone/>
+                      </a:pPr>
+                      <a:r>
+                        <a:rPr lang="en-US" sz="1400" b="1" dirty="0">
+                          <a:solidFill>
+                            <a:srgbClr val="1F2937"/>
+                          </a:solidFill>
+                          <a:latin typeface="맑은 고딕" pitchFamily="34" charset="0"/>
+                          <a:ea typeface="맑은 고딕" pitchFamily="34" charset="-122"/>
+                          <a:cs typeface="맑은 고딕" pitchFamily="34" charset="-120"/>
+                        </a:rPr>
+                        <a:t>비기능 요구사항</a:t>
+                      </a:r>
+                      <a:endParaRPr lang="en-US" sz="1200" dirty="0">
+                        <a:latin typeface="맑은 고딕" charset="0"/>
+                        <a:ea typeface="맑은 고딕" charset="0"/>
+                        <a:cs typeface="맑은 고딕" charset="0"/>
+                      </a:endParaRPr>
+                    </a:p>
+                    <a:p>
+                      <a:pPr indent="0" marL="0">
+                        <a:buNone/>
+                      </a:pPr>
+                      <a:r>
+                        <a:rPr lang="en-US" sz="950" dirty="0">
+                          <a:solidFill>
+                            <a:srgbClr val="A5AEC0"/>
+                          </a:solidFill>
+                          <a:latin typeface="맑은 고딕" pitchFamily="34" charset="0"/>
+                          <a:ea typeface="맑은 고딕" pitchFamily="34" charset="-122"/>
+                          <a:cs typeface="맑은 고딕" pitchFamily="34" charset="-120"/>
+                        </a:rPr>
+                        <a:t>Non-functional</a:t>
+                      </a:r>
+                      <a:endParaRPr lang="en-US" sz="1200" dirty="0">
+                        <a:latin typeface="맑은 고딕" charset="0"/>
+                        <a:ea typeface="맑은 고딕" charset="0"/>
+                        <a:cs typeface="맑은 고딕" charset="0"/>
+                      </a:endParaRPr>
+                    </a:p>
+                  </a:txBody>
+                  <a:tcPr marL="88900" marR="88900" marT="50800" marB="50800" anchor="ctr">
+                    <a:lnL w="12700" cap="flat" cmpd="sng" algn="ctr">
+                      <a:solidFill>
+                        <a:srgbClr val="E5E7EB"/>
+                      </a:solidFill>
+                      <a:prstDash val="solid"/>
+                      <a:round/>
+                      <a:headEnd type="none" w="med" len="med"/>
+                      <a:tailEnd type="none" w="med" len="med"/>
+                    </a:lnL>
+                    <a:lnR w="12700" cap="flat" cmpd="sng" algn="ctr">
+                      <a:solidFill>
+                        <a:srgbClr val="E5E7EB"/>
+                      </a:solidFill>
+                      <a:prstDash val="solid"/>
+                      <a:round/>
+                      <a:headEnd type="none" w="med" len="med"/>
+                      <a:tailEnd type="none" w="med" len="med"/>
+                    </a:lnR>
+                    <a:lnT w="12700" cap="flat" cmpd="sng" algn="ctr">
+                      <a:solidFill>
+                        <a:srgbClr val="E5E7EB"/>
+                      </a:solidFill>
+                      <a:prstDash val="solid"/>
+                      <a:round/>
+                      <a:headEnd type="none" w="med" len="med"/>
+                      <a:tailEnd type="none" w="med" len="med"/>
+                    </a:lnT>
+                    <a:lnB w="12700" cap="flat" cmpd="sng" algn="ctr">
+                      <a:solidFill>
+                        <a:srgbClr val="E5E7EB"/>
+                      </a:solidFill>
+                      <a:prstDash val="solid"/>
+                      <a:round/>
+                      <a:headEnd type="none" w="med" len="med"/>
+                      <a:tailEnd type="none" w="med" len="med"/>
+                    </a:lnB>
+                  </a:tcPr>
+                </a:tc>
+                <a:tc>
+                  <a:txBody>
+                    <a:bodyPr/>
+                    <a:lstStyle/>
+                    <a:p>
+                      <a:pPr indent="0" marL="0">
+                        <a:buNone/>
+                      </a:pPr>
+                      <a:r>
+                        <a:rPr lang="en-US" sz="1150" i="1" dirty="0">
+                          <a:solidFill>
+                            <a:srgbClr val="94A3B8"/>
+                          </a:solidFill>
+                          <a:latin typeface="맑은 고딕" pitchFamily="34" charset="0"/>
+                          <a:ea typeface="맑은 고딕" pitchFamily="34" charset="-122"/>
+                          <a:cs typeface="맑은 고딕" pitchFamily="34" charset="-120"/>
+                        </a:rPr>
+                        <a:t>기능 요구사항과 동일 구조</a:t>
+                      </a:r>
+                      <a:pPr indent="0" marL="0">
+                        <a:buNone/>
+                      </a:pPr>
+                      <a:r>
+                        <a:rPr lang="en-US" sz="1150" dirty="0">
+                          <a:solidFill>
+                            <a:srgbClr val="475569"/>
+                          </a:solidFill>
+                          <a:latin typeface="맑은 고딕" pitchFamily="34" charset="0"/>
+                          <a:ea typeface="맑은 고딕" pitchFamily="34" charset="-122"/>
+                          <a:cs typeface="맑은 고딕" pitchFamily="34" charset="-120"/>
+                        </a:rPr>
+                        <a:t>  — 개요 · 동작 정의(9행) · 제약사항</a:t>
+                      </a:r>
+                      <a:endParaRPr lang="en-US" sz="1200" dirty="0">
+                        <a:latin typeface="맑은 고딕" charset="0"/>
+                        <a:ea typeface="맑은 고딕" charset="0"/>
+                        <a:cs typeface="맑은 고딕" charset="0"/>
+                      </a:endParaRPr>
+                    </a:p>
+                  </a:txBody>
+                  <a:tcPr marL="88900" marR="88900" marT="50800" marB="50800" anchor="ctr">
+                    <a:lnL w="12700" cap="flat" cmpd="sng" algn="ctr">
+                      <a:solidFill>
+                        <a:srgbClr val="E5E7EB"/>
+                      </a:solidFill>
+                      <a:prstDash val="solid"/>
+                      <a:round/>
+                      <a:headEnd type="none" w="med" len="med"/>
+                      <a:tailEnd type="none" w="med" len="med"/>
+                    </a:lnL>
+                    <a:lnR w="12700" cap="flat" cmpd="sng" algn="ctr">
+                      <a:solidFill>
+                        <a:srgbClr val="E5E7EB"/>
+                      </a:solidFill>
+                      <a:prstDash val="solid"/>
+                      <a:round/>
+                      <a:headEnd type="none" w="med" len="med"/>
+                      <a:tailEnd type="none" w="med" len="med"/>
+                    </a:lnR>
+                    <a:lnT w="12700" cap="flat" cmpd="sng" algn="ctr">
+                      <a:solidFill>
+                        <a:srgbClr val="E5E7EB"/>
+                      </a:solidFill>
+                      <a:prstDash val="solid"/>
+                      <a:round/>
+                      <a:headEnd type="none" w="med" len="med"/>
+                      <a:tailEnd type="none" w="med" len="med"/>
+                    </a:lnT>
+                    <a:lnB w="12700" cap="flat" cmpd="sng" algn="ctr">
+                      <a:solidFill>
+                        <a:srgbClr val="E5E7EB"/>
+                      </a:solidFill>
+                      <a:prstDash val="solid"/>
+                      <a:round/>
+                      <a:headEnd type="none" w="med" len="med"/>
+                      <a:tailEnd type="none" w="med" len="med"/>
+                    </a:lnB>
+                  </a:tcPr>
+                </a:tc>
+                <a:tc>
+                  <a:txBody>
+                    <a:bodyPr/>
+                    <a:lstStyle/>
+                    <a:p>
+                      <a:pPr indent="0" marL="0">
+                        <a:buNone/>
+                      </a:pPr>
+                      <a:r>
+                        <a:rPr lang="en-US" sz="1250" b="1" dirty="0">
+                          <a:solidFill>
+                            <a:srgbClr val="4338CA"/>
+                          </a:solidFill>
+                          <a:latin typeface="맑은 고딕" pitchFamily="34" charset="0"/>
+                          <a:ea typeface="맑은 고딕" pitchFamily="34" charset="-122"/>
+                          <a:cs typeface="맑은 고딕" pitchFamily="34" charset="-120"/>
+                        </a:rPr>
+                        <a:t>AI 초안</a:t>
+                      </a:r>
+                      <a:endParaRPr lang="en-US" sz="1200" dirty="0">
+                        <a:latin typeface="맑은 고딕" charset="0"/>
+                        <a:ea typeface="맑은 고딕" charset="0"/>
+                        <a:cs typeface="맑은 고딕" charset="0"/>
+                      </a:endParaRPr>
+                    </a:p>
+                  </a:txBody>
+                  <a:tcPr marL="88900" marR="88900" marT="50800" marB="50800" anchor="ctr">
+                    <a:lnL w="12700" cap="flat" cmpd="sng" algn="ctr">
+                      <a:solidFill>
+                        <a:srgbClr val="E5E7EB"/>
+                      </a:solidFill>
+                      <a:prstDash val="solid"/>
+                      <a:round/>
+                      <a:headEnd type="none" w="med" len="med"/>
+                      <a:tailEnd type="none" w="med" len="med"/>
+                    </a:lnL>
+                    <a:lnR w="12700" cap="flat" cmpd="sng" algn="ctr">
+                      <a:solidFill>
+                        <a:srgbClr val="E5E7EB"/>
+                      </a:solidFill>
+                      <a:prstDash val="solid"/>
+                      <a:round/>
+                      <a:headEnd type="none" w="med" len="med"/>
+                      <a:tailEnd type="none" w="med" len="med"/>
+                    </a:lnR>
+                    <a:lnT w="12700" cap="flat" cmpd="sng" algn="ctr">
+                      <a:solidFill>
+                        <a:srgbClr val="E5E7EB"/>
+                      </a:solidFill>
+                      <a:prstDash val="solid"/>
+                      <a:round/>
+                      <a:headEnd type="none" w="med" len="med"/>
+                      <a:tailEnd type="none" w="med" len="med"/>
+                    </a:lnT>
+                    <a:lnB w="12700" cap="flat" cmpd="sng" algn="ctr">
+                      <a:solidFill>
+                        <a:srgbClr val="E5E7EB"/>
+                      </a:solidFill>
+                      <a:prstDash val="solid"/>
+                      <a:round/>
+                      <a:headEnd type="none" w="med" len="med"/>
+                      <a:tailEnd type="none" w="med" len="med"/>
+                    </a:lnB>
+                  </a:tcPr>
+                </a:tc>
+              </a:tr>
+            </a:tbl>
+          </a:graphicData>
+        </a:graphic>
+      </p:graphicFrame>
       <p:sp>
         <p:nvSpPr>
           <p:cNvPr id="6" name="Text 3"/>
@@ -3041,6 +4792,34 @@
               <a:buNone/>
             </a:pPr>
             <a:r>
+              <a:rPr lang="en-US" sz="1200" b="1" dirty="0">
+                <a:solidFill>
+                  <a:srgbClr val="6B7280"/>
+                </a:solidFill>
+                <a:latin typeface="맑은 고딕" pitchFamily="34" charset="0"/>
+                <a:ea typeface="맑은 고딕" pitchFamily="34" charset="-122"/>
+                <a:cs typeface="맑은 고딕" pitchFamily="34" charset="-120"/>
+              </a:rPr>
+              <a:t>작성 주체:  </a:t>
+            </a:r>
+            <a:pPr algn="ctr" indent="0" marL="0">
+              <a:buNone/>
+            </a:pPr>
+            <a:r>
+              <a:rPr lang="en-US" sz="1200" b="1" dirty="0">
+                <a:solidFill>
+                  <a:srgbClr val="4338CA"/>
+                </a:solidFill>
+                <a:latin typeface="맑은 고딕" pitchFamily="34" charset="0"/>
+                <a:ea typeface="맑은 고딕" pitchFamily="34" charset="-122"/>
+                <a:cs typeface="맑은 고딕" pitchFamily="34" charset="-120"/>
+              </a:rPr>
+              <a:t>AI 초안</a:t>
+            </a:r>
+            <a:pPr algn="ctr" indent="0" marL="0">
+              <a:buNone/>
+            </a:pPr>
+            <a:r>
               <a:rPr lang="en-US" sz="1200" dirty="0">
                 <a:solidFill>
                   <a:srgbClr val="6B7280"/>
@@ -3049,7 +4828,35 @@
                 <a:ea typeface="맑은 고딕" pitchFamily="34" charset="-122"/>
                 <a:cs typeface="맑은 고딕" pitchFamily="34" charset="-120"/>
               </a:rPr>
-              <a:t>모두 AI가 뽑아 주는 건 아니다 — 구조·규칙에서 나오는 건 AI 초안, 배경·판단이 필요한 건 사람이 작성</a:t>
+              <a:t> (구조·규칙에서 자동 도출)   ·   </a:t>
+            </a:r>
+            <a:pPr algn="ctr" indent="0" marL="0">
+              <a:buNone/>
+            </a:pPr>
+            <a:r>
+              <a:rPr lang="en-US" sz="1200" b="1" dirty="0">
+                <a:solidFill>
+                  <a:srgbClr val="C2410C"/>
+                </a:solidFill>
+                <a:latin typeface="맑은 고딕" pitchFamily="34" charset="0"/>
+                <a:ea typeface="맑은 고딕" pitchFamily="34" charset="-122"/>
+                <a:cs typeface="맑은 고딕" pitchFamily="34" charset="-120"/>
+              </a:rPr>
+              <a:t>사람</a:t>
+            </a:r>
+            <a:pPr algn="ctr" indent="0" marL="0">
+              <a:buNone/>
+            </a:pPr>
+            <a:r>
+              <a:rPr lang="en-US" sz="1200" dirty="0">
+                <a:solidFill>
+                  <a:srgbClr val="6B7280"/>
+                </a:solidFill>
+                <a:latin typeface="맑은 고딕" pitchFamily="34" charset="0"/>
+                <a:ea typeface="맑은 고딕" pitchFamily="34" charset="-122"/>
+                <a:cs typeface="맑은 고딕" pitchFamily="34" charset="-120"/>
+              </a:rPr>
+              <a:t> (배경·판단이 필요한 부분) — 모두 AI가 뽑아 주는 건 아니다</a:t>
             </a:r>
             <a:endParaRPr lang="en-US" sz="1200" dirty="0"/>
           </a:p>

--- a/docs/진행공유_요구사항자동화.pptx
+++ b/docs/진행공유_요구사항자동화.pptx
@@ -2943,7 +2943,7 @@
                 <a:ea typeface="맑은 고딕" pitchFamily="34" charset="-122"/>
                 <a:cs typeface="맑은 고딕" pitchFamily="34" charset="-120"/>
               </a:rPr>
-              <a:t>AI가 도출하는 산출물 5종 · 작성 주체</a:t>
+              <a:t>산출물 커버리지 — 요구사항 1건에서 나오는 5종</a:t>
             </a:r>
             <a:endParaRPr lang="en-US" sz="3000" dirty="0"/>
           </a:p>
@@ -3007,7 +3007,7 @@
           </p:nvPr>
         </p:nvGraphicFramePr>
         <p:xfrm>
-          <a:off x="566928" y="1645920"/>
+          <a:off x="566928" y="1554480"/>
           <a:ext cx="11064240" cy="914400"/>
         </p:xfrm>
         <a:graphic>
@@ -3015,11 +3015,11 @@
             <a:tbl>
               <a:tblPr/>
               <a:tblGrid>
-                <a:gridCol w="2468880"/>
-                <a:gridCol w="5943600"/>
-                <a:gridCol w="2651760"/>
+                <a:gridCol w="2286000"/>
+                <a:gridCol w="6400800"/>
+                <a:gridCol w="2377440"/>
               </a:tblGrid>
-              <a:tr h="365760">
+              <a:tr h="347472">
                 <a:tc>
                   <a:txBody>
                     <a:bodyPr/>
@@ -3029,7 +3029,7 @@
                         <a:buNone/>
                       </a:pPr>
                       <a:r>
-                        <a:rPr lang="en-US" sz="1250" b="1" dirty="0">
+                        <a:rPr lang="en-US" sz="1200" b="1" dirty="0">
                           <a:solidFill>
                             <a:srgbClr val="FFFFFF"/>
                           </a:solidFill>
@@ -3039,7 +3039,7 @@
                         </a:rPr>
                         <a:t>산출물</a:t>
                       </a:r>
-                      <a:endParaRPr lang="en-US" sz="1250" dirty="0">
+                      <a:endParaRPr lang="en-US" sz="1200" dirty="0">
                         <a:latin typeface="맑은 고딕" charset="0"/>
                         <a:ea typeface="맑은 고딕" charset="0"/>
                         <a:cs typeface="맑은 고딕" charset="0"/>
@@ -3097,7 +3097,7 @@
                         <a:buNone/>
                       </a:pPr>
                       <a:r>
-                        <a:rPr lang="en-US" sz="1250" b="1" dirty="0">
+                        <a:rPr lang="en-US" sz="1200" b="1" dirty="0">
                           <a:solidFill>
                             <a:srgbClr val="FFFFFF"/>
                           </a:solidFill>
@@ -3105,9 +3105,9 @@
                           <a:ea typeface="맑은 고딕" pitchFamily="34" charset="-122"/>
                           <a:cs typeface="맑은 고딕" pitchFamily="34" charset="-120"/>
                         </a:rPr>
-                        <a:t>핵심 구성</a:t>
+                        <a:t>세부 구성</a:t>
                       </a:r>
-                      <a:endParaRPr lang="en-US" sz="1250" dirty="0">
+                      <a:endParaRPr lang="en-US" sz="1200" dirty="0">
                         <a:latin typeface="맑은 고딕" charset="0"/>
                         <a:ea typeface="맑은 고딕" charset="0"/>
                         <a:cs typeface="맑은 고딕" charset="0"/>
@@ -3165,7 +3165,7 @@
                         <a:buNone/>
                       </a:pPr>
                       <a:r>
-                        <a:rPr lang="en-US" sz="1250" b="1" dirty="0">
+                        <a:rPr lang="en-US" sz="1200" b="1" dirty="0">
                           <a:solidFill>
                             <a:srgbClr val="FFFFFF"/>
                           </a:solidFill>
@@ -3173,9 +3173,9 @@
                           <a:ea typeface="맑은 고딕" pitchFamily="34" charset="-122"/>
                           <a:cs typeface="맑은 고딕" pitchFamily="34" charset="-120"/>
                         </a:rPr>
-                        <a:t>작성 주체</a:t>
+                        <a:t>AI 커버리지 (자동화 범위)</a:t>
                       </a:r>
-                      <a:endParaRPr lang="en-US" sz="1250" dirty="0">
+                      <a:endParaRPr lang="en-US" sz="1200" dirty="0">
                         <a:latin typeface="맑은 고딕" charset="0"/>
                         <a:ea typeface="맑은 고딕" charset="0"/>
                         <a:cs typeface="맑은 고딕" charset="0"/>
@@ -3225,7 +3225,7 @@
                   </a:tcPr>
                 </a:tc>
               </a:tr>
-              <a:tr h="914400">
+              <a:tr h="932688">
                 <a:tc>
                   <a:txBody>
                     <a:bodyPr/>
@@ -3235,7 +3235,7 @@
                         <a:buNone/>
                       </a:pPr>
                       <a:r>
-                        <a:rPr lang="en-US" sz="1200" b="1" dirty="0">
+                        <a:rPr lang="en-US" sz="1150" b="1" dirty="0">
                           <a:solidFill>
                             <a:srgbClr val="6B7280"/>
                           </a:solidFill>
@@ -3249,7 +3249,7 @@
                         <a:buNone/>
                       </a:pPr>
                       <a:r>
-                        <a:rPr lang="en-US" sz="1400" b="1" dirty="0">
+                        <a:rPr lang="en-US" sz="1350" b="1" dirty="0">
                           <a:solidFill>
                             <a:srgbClr val="1F2937"/>
                           </a:solidFill>
@@ -3270,7 +3270,7 @@
                         <a:buNone/>
                       </a:pPr>
                       <a:r>
-                        <a:rPr lang="en-US" sz="950" dirty="0">
+                        <a:rPr lang="en-US" sz="900" dirty="0">
                           <a:solidFill>
                             <a:srgbClr val="A5AEC0"/>
                           </a:solidFill>
@@ -3349,7 +3349,7 @@
                         <a:buNone/>
                       </a:pPr>
                       <a:r>
-                        <a:rPr lang="en-US" sz="1150" dirty="0">
+                        <a:rPr lang="en-US" sz="1050" dirty="0">
                           <a:solidFill>
                             <a:srgbClr val="475569"/>
                           </a:solidFill>
@@ -3357,7 +3357,7 @@
                           <a:ea typeface="맑은 고딕" pitchFamily="34" charset="-122"/>
                           <a:cs typeface="맑은 고딕" pitchFamily="34" charset="-120"/>
                         </a:rPr>
-                        <a:t>현상기록 · 개선요청사항</a:t>
+                        <a:t>— 현상기록(현재 동작·문제) · 개선요청사항</a:t>
                       </a:r>
                       <a:endParaRPr lang="en-US" sz="1200" dirty="0">
                         <a:latin typeface="맑은 고딕" charset="0"/>
@@ -3384,7 +3384,7 @@
                         <a:buNone/>
                       </a:pPr>
                       <a:r>
-                        <a:rPr lang="en-US" sz="1150" dirty="0">
+                        <a:rPr lang="en-US" sz="1050" dirty="0">
                           <a:solidFill>
                             <a:srgbClr val="475569"/>
                           </a:solidFill>
@@ -3392,7 +3392,7 @@
                           <a:ea typeface="맑은 고딕" pitchFamily="34" charset="-122"/>
                           <a:cs typeface="맑은 고딕" pitchFamily="34" charset="-120"/>
                         </a:rPr>
-                        <a:t>변경범위 입력 · 제약사항 정의</a:t>
+                        <a:t>— 변경범위 입력(영향 모듈) · 제약사항 정의</a:t>
                       </a:r>
                       <a:endParaRPr lang="en-US" sz="1200" dirty="0">
                         <a:latin typeface="맑은 고딕" charset="0"/>
@@ -3419,7 +3419,7 @@
                         <a:buNone/>
                       </a:pPr>
                       <a:r>
-                        <a:rPr lang="en-US" sz="1150" dirty="0">
+                        <a:rPr lang="en-US" sz="1050" dirty="0">
                           <a:solidFill>
                             <a:srgbClr val="475569"/>
                           </a:solidFill>
@@ -3427,7 +3427,7 @@
                           <a:ea typeface="맑은 고딕" pitchFamily="34" charset="-122"/>
                           <a:cs typeface="맑은 고딕" pitchFamily="34" charset="-120"/>
                         </a:rPr>
-                        <a:t>변경 전 · 변경 후</a:t>
+                        <a:t>— 변경 전(as-is) · 변경 후(to-be)</a:t>
                       </a:r>
                       <a:endParaRPr lang="en-US" sz="1200" dirty="0">
                         <a:latin typeface="맑은 고딕" charset="0"/>
@@ -3484,7 +3484,28 @@
                         <a:buNone/>
                       </a:pPr>
                       <a:r>
-                        <a:rPr lang="en-US" sz="1250" b="1" dirty="0">
+                        <a:rPr lang="en-US" sz="1200" b="1" dirty="0">
+                          <a:solidFill>
+                            <a:srgbClr val="0F766E"/>
+                          </a:solidFill>
+                          <a:latin typeface="맑은 고딕" pitchFamily="34" charset="0"/>
+                          <a:ea typeface="맑은 고딕" pitchFamily="34" charset="-122"/>
+                          <a:cs typeface="맑은 고딕" pitchFamily="34" charset="-120"/>
+                        </a:rPr>
+                        <a:t>부분 자동</a:t>
+                      </a:r>
+                      <a:endParaRPr lang="en-US" sz="1200" dirty="0">
+                        <a:latin typeface="맑은 고딕" charset="0"/>
+                        <a:ea typeface="맑은 고딕" charset="0"/>
+                        <a:cs typeface="맑은 고딕" charset="0"/>
+                      </a:endParaRPr>
+                    </a:p>
+                    <a:p>
+                      <a:pPr indent="0" marL="0">
+                        <a:buNone/>
+                      </a:pPr>
+                      <a:r>
+                        <a:rPr lang="en-US" sz="1050" b="1" dirty="0">
                           <a:solidFill>
                             <a:srgbClr val="4338CA"/>
                           </a:solidFill>
@@ -3492,13 +3513,13 @@
                           <a:ea typeface="맑은 고딕" pitchFamily="34" charset="-122"/>
                           <a:cs typeface="맑은 고딕" pitchFamily="34" charset="-120"/>
                         </a:rPr>
-                        <a:t>AI</a:t>
+                        <a:t>AI 초안</a:t>
                       </a:r>
                       <a:pPr indent="0" marL="0">
                         <a:buNone/>
                       </a:pPr>
                       <a:r>
-                        <a:rPr lang="en-US" sz="1250" dirty="0">
+                        <a:rPr lang="en-US" sz="1050" dirty="0">
                           <a:solidFill>
                             <a:srgbClr val="6B7280"/>
                           </a:solidFill>
@@ -3512,7 +3533,7 @@
                         <a:buNone/>
                       </a:pPr>
                       <a:r>
-                        <a:rPr lang="en-US" sz="1250" b="1" dirty="0">
+                        <a:rPr lang="en-US" sz="1050" b="1" dirty="0">
                           <a:solidFill>
                             <a:srgbClr val="C2410C"/>
                           </a:solidFill>
@@ -3533,7 +3554,7 @@
                         <a:buNone/>
                       </a:pPr>
                       <a:r>
-                        <a:rPr lang="en-US" sz="1000" dirty="0">
+                        <a:rPr lang="en-US" sz="950" dirty="0">
                           <a:solidFill>
                             <a:srgbClr val="94A3B8"/>
                           </a:solidFill>
@@ -3541,7 +3562,7 @@
                           <a:ea typeface="맑은 고딕" pitchFamily="34" charset="-122"/>
                           <a:cs typeface="맑은 고딕" pitchFamily="34" charset="-120"/>
                         </a:rPr>
-                        <a:t>현상기록(배경)은 사람</a:t>
+                        <a:t>현상기록(배경)은 사람이 작성</a:t>
                       </a:r>
                       <a:endParaRPr lang="en-US" sz="1200" dirty="0">
                         <a:latin typeface="맑은 고딕" charset="0"/>
@@ -3590,7 +3611,7 @@
                   </a:tcPr>
                 </a:tc>
               </a:tr>
-              <a:tr h="749808">
+              <a:tr h="932688">
                 <a:tc>
                   <a:txBody>
                     <a:bodyPr/>
@@ -3600,7 +3621,7 @@
                         <a:buNone/>
                       </a:pPr>
                       <a:r>
-                        <a:rPr lang="en-US" sz="1200" b="1" dirty="0">
+                        <a:rPr lang="en-US" sz="1150" b="1" dirty="0">
                           <a:solidFill>
                             <a:srgbClr val="6B7280"/>
                           </a:solidFill>
@@ -3614,7 +3635,7 @@
                         <a:buNone/>
                       </a:pPr>
                       <a:r>
-                        <a:rPr lang="en-US" sz="1400" b="1" dirty="0">
+                        <a:rPr lang="en-US" sz="1350" b="1" dirty="0">
                           <a:solidFill>
                             <a:srgbClr val="1F2937"/>
                           </a:solidFill>
@@ -3635,7 +3656,7 @@
                         <a:buNone/>
                       </a:pPr>
                       <a:r>
-                        <a:rPr lang="en-US" sz="950" dirty="0">
+                        <a:rPr lang="en-US" sz="900" dirty="0">
                           <a:solidFill>
                             <a:srgbClr val="A5AEC0"/>
                           </a:solidFill>
@@ -3700,7 +3721,21 @@
                         <a:buNone/>
                       </a:pPr>
                       <a:r>
-                        <a:rPr lang="en-US" sz="1150" dirty="0">
+                        <a:rPr lang="en-US" sz="1050" b="1" dirty="0">
+                          <a:solidFill>
+                            <a:srgbClr val="1F2937"/>
+                          </a:solidFill>
+                          <a:latin typeface="맑은 고딕" pitchFamily="34" charset="0"/>
+                          <a:ea typeface="맑은 고딕" pitchFamily="34" charset="-122"/>
+                          <a:cs typeface="맑은 고딕" pitchFamily="34" charset="-120"/>
+                        </a:rPr>
+                        <a:t>설명 </a:t>
+                      </a:r>
+                      <a:pPr indent="0" marL="0">
+                        <a:buNone/>
+                      </a:pPr>
+                      <a:r>
+                        <a:rPr lang="en-US" sz="1050" dirty="0">
                           <a:solidFill>
                             <a:srgbClr val="475569"/>
                           </a:solidFill>
@@ -3708,7 +3743,7 @@
                           <a:ea typeface="맑은 고딕" pitchFamily="34" charset="-122"/>
                           <a:cs typeface="맑은 고딕" pitchFamily="34" charset="-120"/>
                         </a:rPr>
-                        <a:t>설명</a:t>
+                        <a:t>— 기능 개요 · 구현 방향</a:t>
                       </a:r>
                       <a:endParaRPr lang="en-US" sz="1200" dirty="0">
                         <a:latin typeface="맑은 고딕" charset="0"/>
@@ -3721,7 +3756,21 @@
                         <a:buNone/>
                       </a:pPr>
                       <a:r>
-                        <a:rPr lang="en-US" sz="1150" dirty="0">
+                        <a:rPr lang="en-US" sz="1050" b="1" dirty="0">
+                          <a:solidFill>
+                            <a:srgbClr val="1F2937"/>
+                          </a:solidFill>
+                          <a:latin typeface="맑은 고딕" pitchFamily="34" charset="0"/>
+                          <a:ea typeface="맑은 고딕" pitchFamily="34" charset="-122"/>
+                          <a:cs typeface="맑은 고딕" pitchFamily="34" charset="-120"/>
+                        </a:rPr>
+                        <a:t>Class Diagram </a:t>
+                      </a:r>
+                      <a:pPr indent="0" marL="0">
+                        <a:buNone/>
+                      </a:pPr>
+                      <a:r>
+                        <a:rPr lang="en-US" sz="1050" dirty="0">
                           <a:solidFill>
                             <a:srgbClr val="475569"/>
                           </a:solidFill>
@@ -3729,7 +3778,7 @@
                           <a:ea typeface="맑은 고딕" pitchFamily="34" charset="-122"/>
                           <a:cs typeface="맑은 고딕" pitchFamily="34" charset="-120"/>
                         </a:rPr>
-                        <a:t>Class Diagram</a:t>
+                        <a:t>— 클래스 구조 · 관계</a:t>
                       </a:r>
                       <a:endParaRPr lang="en-US" sz="1200" dirty="0">
                         <a:latin typeface="맑은 고딕" charset="0"/>
@@ -3742,7 +3791,21 @@
                         <a:buNone/>
                       </a:pPr>
                       <a:r>
-                        <a:rPr lang="en-US" sz="1150" dirty="0">
+                        <a:rPr lang="en-US" sz="1050" b="1" dirty="0">
+                          <a:solidFill>
+                            <a:srgbClr val="1F2937"/>
+                          </a:solidFill>
+                          <a:latin typeface="맑은 고딕" pitchFamily="34" charset="0"/>
+                          <a:ea typeface="맑은 고딕" pitchFamily="34" charset="-122"/>
+                          <a:cs typeface="맑은 고딕" pitchFamily="34" charset="-120"/>
+                        </a:rPr>
+                        <a:t>Sequence Diagram </a:t>
+                      </a:r>
+                      <a:pPr indent="0" marL="0">
+                        <a:buNone/>
+                      </a:pPr>
+                      <a:r>
+                        <a:rPr lang="en-US" sz="1050" dirty="0">
                           <a:solidFill>
                             <a:srgbClr val="475569"/>
                           </a:solidFill>
@@ -3750,7 +3813,7 @@
                           <a:ea typeface="맑은 고딕" pitchFamily="34" charset="-122"/>
                           <a:cs typeface="맑은 고딕" pitchFamily="34" charset="-120"/>
                         </a:rPr>
-                        <a:t>Sequence Diagram (as-is · to-be)</a:t>
+                        <a:t>— as-is(현재 흐름) · to-be(변경 흐름)</a:t>
                       </a:r>
                       <a:endParaRPr lang="en-US" sz="1200" dirty="0">
                         <a:latin typeface="맑은 고딕" charset="0"/>
@@ -3807,7 +3870,28 @@
                         <a:buNone/>
                       </a:pPr>
                       <a:r>
-                        <a:rPr lang="en-US" sz="1250" b="1" dirty="0">
+                        <a:rPr lang="en-US" sz="1200" b="1" dirty="0">
+                          <a:solidFill>
+                            <a:srgbClr val="0F766E"/>
+                          </a:solidFill>
+                          <a:latin typeface="맑은 고딕" pitchFamily="34" charset="0"/>
+                          <a:ea typeface="맑은 고딕" pitchFamily="34" charset="-122"/>
+                          <a:cs typeface="맑은 고딕" pitchFamily="34" charset="-120"/>
+                        </a:rPr>
+                        <a:t>부분 자동</a:t>
+                      </a:r>
+                      <a:endParaRPr lang="en-US" sz="1200" dirty="0">
+                        <a:latin typeface="맑은 고딕" charset="0"/>
+                        <a:ea typeface="맑은 고딕" charset="0"/>
+                        <a:cs typeface="맑은 고딕" charset="0"/>
+                      </a:endParaRPr>
+                    </a:p>
+                    <a:p>
+                      <a:pPr indent="0" marL="0">
+                        <a:buNone/>
+                      </a:pPr>
+                      <a:r>
+                        <a:rPr lang="en-US" sz="1050" b="1" dirty="0">
                           <a:solidFill>
                             <a:srgbClr val="4338CA"/>
                           </a:solidFill>
@@ -3815,13 +3899,13 @@
                           <a:ea typeface="맑은 고딕" pitchFamily="34" charset="-122"/>
                           <a:cs typeface="맑은 고딕" pitchFamily="34" charset="-120"/>
                         </a:rPr>
-                        <a:t>AI</a:t>
+                        <a:t>AI 초안</a:t>
                       </a:r>
                       <a:pPr indent="0" marL="0">
                         <a:buNone/>
                       </a:pPr>
                       <a:r>
-                        <a:rPr lang="en-US" sz="1250" dirty="0">
+                        <a:rPr lang="en-US" sz="1050" dirty="0">
                           <a:solidFill>
                             <a:srgbClr val="6B7280"/>
                           </a:solidFill>
@@ -3835,7 +3919,7 @@
                         <a:buNone/>
                       </a:pPr>
                       <a:r>
-                        <a:rPr lang="en-US" sz="1250" b="1" dirty="0">
+                        <a:rPr lang="en-US" sz="1050" b="1" dirty="0">
                           <a:solidFill>
                             <a:srgbClr val="C2410C"/>
                           </a:solidFill>
@@ -3856,7 +3940,7 @@
                         <a:buNone/>
                       </a:pPr>
                       <a:r>
-                        <a:rPr lang="en-US" sz="1000" dirty="0">
+                        <a:rPr lang="en-US" sz="950" dirty="0">
                           <a:solidFill>
                             <a:srgbClr val="94A3B8"/>
                           </a:solidFill>
@@ -3864,7 +3948,7 @@
                           <a:ea typeface="맑은 고딕" pitchFamily="34" charset="-122"/>
                           <a:cs typeface="맑은 고딕" pitchFamily="34" charset="-120"/>
                         </a:rPr>
-                        <a:t>Class · as-is는 사람 검증</a:t>
+                        <a:t>Class·as-is는 사람이 검증·보완</a:t>
                       </a:r>
                       <a:endParaRPr lang="en-US" sz="1200" dirty="0">
                         <a:latin typeface="맑은 고딕" charset="0"/>
@@ -3913,7 +3997,7 @@
                   </a:tcPr>
                 </a:tc>
               </a:tr>
-              <a:tr h="749808">
+              <a:tr h="868680">
                 <a:tc>
                   <a:txBody>
                     <a:bodyPr/>
@@ -3923,7 +4007,7 @@
                         <a:buNone/>
                       </a:pPr>
                       <a:r>
-                        <a:rPr lang="en-US" sz="1200" b="1" dirty="0">
+                        <a:rPr lang="en-US" sz="1150" b="1" dirty="0">
                           <a:solidFill>
                             <a:srgbClr val="6B7280"/>
                           </a:solidFill>
@@ -3937,7 +4021,7 @@
                         <a:buNone/>
                       </a:pPr>
                       <a:r>
-                        <a:rPr lang="en-US" sz="1400" b="1" dirty="0">
+                        <a:rPr lang="en-US" sz="1350" b="1" dirty="0">
                           <a:solidFill>
                             <a:srgbClr val="1F2937"/>
                           </a:solidFill>
@@ -3958,7 +4042,7 @@
                         <a:buNone/>
                       </a:pPr>
                       <a:r>
-                        <a:rPr lang="en-US" sz="950" dirty="0">
+                        <a:rPr lang="en-US" sz="900" dirty="0">
                           <a:solidFill>
                             <a:srgbClr val="A5AEC0"/>
                           </a:solidFill>
@@ -4023,7 +4107,21 @@
                         <a:buNone/>
                       </a:pPr>
                       <a:r>
-                        <a:rPr lang="en-US" sz="1150" dirty="0">
+                        <a:rPr lang="en-US" sz="1050" b="1" dirty="0">
+                          <a:solidFill>
+                            <a:srgbClr val="1F2937"/>
+                          </a:solidFill>
+                          <a:latin typeface="맑은 고딕" pitchFamily="34" charset="0"/>
+                          <a:ea typeface="맑은 고딕" pitchFamily="34" charset="-122"/>
+                          <a:cs typeface="맑은 고딕" pitchFamily="34" charset="-120"/>
+                        </a:rPr>
+                        <a:t>요청자 </a:t>
+                      </a:r>
+                      <a:pPr indent="0" marL="0">
+                        <a:buNone/>
+                      </a:pPr>
+                      <a:r>
+                        <a:rPr lang="en-US" sz="1050" dirty="0">
                           <a:solidFill>
                             <a:srgbClr val="475569"/>
                           </a:solidFill>
@@ -4031,7 +4129,7 @@
                           <a:ea typeface="맑은 고딕" pitchFamily="34" charset="-122"/>
                           <a:cs typeface="맑은 고딕" pitchFamily="34" charset="-120"/>
                         </a:rPr>
-                        <a:t>요청자 (누가 · 어느 기능)</a:t>
+                        <a:t>— 요청 부서·담당 · 대상 기능</a:t>
                       </a:r>
                       <a:endParaRPr lang="en-US" sz="1200" dirty="0">
                         <a:latin typeface="맑은 고딕" charset="0"/>
@@ -4044,7 +4142,21 @@
                         <a:buNone/>
                       </a:pPr>
                       <a:r>
-                        <a:rPr lang="en-US" sz="1150" dirty="0">
+                        <a:rPr lang="en-US" sz="1050" b="1" dirty="0">
+                          <a:solidFill>
+                            <a:srgbClr val="1F2937"/>
+                          </a:solidFill>
+                          <a:latin typeface="맑은 고딕" pitchFamily="34" charset="0"/>
+                          <a:ea typeface="맑은 고딕" pitchFamily="34" charset="-122"/>
+                          <a:cs typeface="맑은 고딕" pitchFamily="34" charset="-120"/>
+                        </a:rPr>
+                        <a:t>요청사항 </a:t>
+                      </a:r>
+                      <a:pPr indent="0" marL="0">
+                        <a:buNone/>
+                      </a:pPr>
+                      <a:r>
+                        <a:rPr lang="en-US" sz="1050" dirty="0">
                           <a:solidFill>
                             <a:srgbClr val="475569"/>
                           </a:solidFill>
@@ -4052,7 +4164,7 @@
                           <a:ea typeface="맑은 고딕" pitchFamily="34" charset="-122"/>
                           <a:cs typeface="맑은 고딕" pitchFamily="34" charset="-120"/>
                         </a:rPr>
-                        <a:t>요청사항</a:t>
+                        <a:t>— 고객 요구 내용 요약</a:t>
                       </a:r>
                       <a:endParaRPr lang="en-US" sz="1200" dirty="0">
                         <a:latin typeface="맑은 고딕" charset="0"/>
@@ -4065,7 +4177,21 @@
                         <a:buNone/>
                       </a:pPr>
                       <a:r>
-                        <a:rPr lang="en-US" sz="1150" dirty="0">
+                        <a:rPr lang="en-US" sz="1050" b="1" dirty="0">
+                          <a:solidFill>
+                            <a:srgbClr val="1F2937"/>
+                          </a:solidFill>
+                          <a:latin typeface="맑은 고딕" pitchFamily="34" charset="0"/>
+                          <a:ea typeface="맑은 고딕" pitchFamily="34" charset="-122"/>
+                          <a:cs typeface="맑은 고딕" pitchFamily="34" charset="-120"/>
+                        </a:rPr>
+                        <a:t>특이사항 </a:t>
+                      </a:r>
+                      <a:pPr indent="0" marL="0">
+                        <a:buNone/>
+                      </a:pPr>
+                      <a:r>
+                        <a:rPr lang="en-US" sz="1050" dirty="0">
                           <a:solidFill>
                             <a:srgbClr val="475569"/>
                           </a:solidFill>
@@ -4073,7 +4199,7 @@
                           <a:ea typeface="맑은 고딕" pitchFamily="34" charset="-122"/>
                           <a:cs typeface="맑은 고딕" pitchFamily="34" charset="-120"/>
                         </a:rPr>
-                        <a:t>특이사항</a:t>
+                        <a:t>— 제약 · 주의 · 이력</a:t>
                       </a:r>
                       <a:endParaRPr lang="en-US" sz="1200" dirty="0">
                         <a:latin typeface="맑은 고딕" charset="0"/>
@@ -4130,7 +4256,28 @@
                         <a:buNone/>
                       </a:pPr>
                       <a:r>
-                        <a:rPr lang="en-US" sz="1250" b="1" dirty="0">
+                        <a:rPr lang="en-US" sz="1200" b="1" dirty="0">
+                          <a:solidFill>
+                            <a:srgbClr val="C2410C"/>
+                          </a:solidFill>
+                          <a:latin typeface="맑은 고딕" pitchFamily="34" charset="0"/>
+                          <a:ea typeface="맑은 고딕" pitchFamily="34" charset="-122"/>
+                          <a:cs typeface="맑은 고딕" pitchFamily="34" charset="-120"/>
+                        </a:rPr>
+                        <a:t>수동</a:t>
+                      </a:r>
+                      <a:endParaRPr lang="en-US" sz="1200" dirty="0">
+                        <a:latin typeface="맑은 고딕" charset="0"/>
+                        <a:ea typeface="맑은 고딕" charset="0"/>
+                        <a:cs typeface="맑은 고딕" charset="0"/>
+                      </a:endParaRPr>
+                    </a:p>
+                    <a:p>
+                      <a:pPr indent="0" marL="0">
+                        <a:buNone/>
+                      </a:pPr>
+                      <a:r>
+                        <a:rPr lang="en-US" sz="1050" b="1" dirty="0">
                           <a:solidFill>
                             <a:srgbClr val="C2410C"/>
                           </a:solidFill>
@@ -4151,7 +4298,7 @@
                         <a:buNone/>
                       </a:pPr>
                       <a:r>
-                        <a:rPr lang="en-US" sz="1000" dirty="0">
+                        <a:rPr lang="en-US" sz="950" dirty="0">
                           <a:solidFill>
                             <a:srgbClr val="94A3B8"/>
                           </a:solidFill>
@@ -4159,7 +4306,7 @@
                           <a:ea typeface="맑은 고딕" pitchFamily="34" charset="-122"/>
                           <a:cs typeface="맑은 고딕" pitchFamily="34" charset="-120"/>
                         </a:rPr>
-                        <a:t>요청사항은 AI가 정리</a:t>
+                        <a:t>요청사항만 AI가 정리</a:t>
                       </a:r>
                       <a:endParaRPr lang="en-US" sz="1200" dirty="0">
                         <a:latin typeface="맑은 고딕" charset="0"/>
@@ -4208,7 +4355,7 @@
                   </a:tcPr>
                 </a:tc>
               </a:tr>
-              <a:tr h="914400">
+              <a:tr h="960120">
                 <a:tc>
                   <a:txBody>
                     <a:bodyPr/>
@@ -4218,7 +4365,7 @@
                         <a:buNone/>
                       </a:pPr>
                       <a:r>
-                        <a:rPr lang="en-US" sz="1200" b="1" dirty="0">
+                        <a:rPr lang="en-US" sz="1150" b="1" dirty="0">
                           <a:solidFill>
                             <a:srgbClr val="6B7280"/>
                           </a:solidFill>
@@ -4232,7 +4379,7 @@
                         <a:buNone/>
                       </a:pPr>
                       <a:r>
-                        <a:rPr lang="en-US" sz="1400" b="1" dirty="0">
+                        <a:rPr lang="en-US" sz="1350" b="1" dirty="0">
                           <a:solidFill>
                             <a:srgbClr val="1F2937"/>
                           </a:solidFill>
@@ -4253,7 +4400,7 @@
                         <a:buNone/>
                       </a:pPr>
                       <a:r>
-                        <a:rPr lang="en-US" sz="950" dirty="0">
+                        <a:rPr lang="en-US" sz="900" dirty="0">
                           <a:solidFill>
                             <a:srgbClr val="A5AEC0"/>
                           </a:solidFill>
@@ -4318,7 +4465,21 @@
                         <a:buNone/>
                       </a:pPr>
                       <a:r>
-                        <a:rPr lang="en-US" sz="1150" dirty="0">
+                        <a:rPr lang="en-US" sz="1050" b="1" dirty="0">
+                          <a:solidFill>
+                            <a:srgbClr val="1F2937"/>
+                          </a:solidFill>
+                          <a:latin typeface="맑은 고딕" pitchFamily="34" charset="0"/>
+                          <a:ea typeface="맑은 고딕" pitchFamily="34" charset="-122"/>
+                          <a:cs typeface="맑은 고딕" pitchFamily="34" charset="-120"/>
+                        </a:rPr>
+                        <a:t>개요 </a:t>
+                      </a:r>
+                      <a:pPr indent="0" marL="0">
+                        <a:buNone/>
+                      </a:pPr>
+                      <a:r>
+                        <a:rPr lang="en-US" sz="1050" dirty="0">
                           <a:solidFill>
                             <a:srgbClr val="475569"/>
                           </a:solidFill>
@@ -4326,7 +4487,7 @@
                           <a:ea typeface="맑은 고딕" pitchFamily="34" charset="-122"/>
                           <a:cs typeface="맑은 고딕" pitchFamily="34" charset="-120"/>
                         </a:rPr>
-                        <a:t>개요 (역할 · 목적)</a:t>
+                        <a:t>— 역할(시스템 내 책임) · 목적</a:t>
                       </a:r>
                       <a:endParaRPr lang="en-US" sz="1200" dirty="0">
                         <a:latin typeface="맑은 고딕" charset="0"/>
@@ -4339,7 +4500,7 @@
                         <a:buNone/>
                       </a:pPr>
                       <a:r>
-                        <a:rPr lang="en-US" sz="1150" b="1" dirty="0">
+                        <a:rPr lang="en-US" sz="1050" b="1" dirty="0">
                           <a:solidFill>
                             <a:srgbClr val="1F2937"/>
                           </a:solidFill>
@@ -4353,7 +4514,7 @@
                         <a:buNone/>
                       </a:pPr>
                       <a:r>
-                        <a:rPr lang="en-US" sz="1150" dirty="0">
+                        <a:rPr lang="en-US" sz="1050" dirty="0">
                           <a:solidFill>
                             <a:srgbClr val="475569"/>
                           </a:solidFill>
@@ -4361,7 +4522,21 @@
                           <a:ea typeface="맑은 고딕" pitchFamily="34" charset="-122"/>
                           <a:cs typeface="맑은 고딕" pitchFamily="34" charset="-120"/>
                         </a:rPr>
-                        <a:t>— 기본·변형·예외 × 선행·후행·시나리오 (9행)</a:t>
+                        <a:t>— 동작유형 3(기본·변형·예외) × 선행조건·후행조건·시나리오 </a:t>
+                      </a:r>
+                      <a:pPr indent="0" marL="0">
+                        <a:buNone/>
+                      </a:pPr>
+                      <a:r>
+                        <a:rPr lang="en-US" sz="1050" b="1" dirty="0">
+                          <a:solidFill>
+                            <a:srgbClr val="6D28D9"/>
+                          </a:solidFill>
+                          <a:latin typeface="맑은 고딕" pitchFamily="34" charset="0"/>
+                          <a:ea typeface="맑은 고딕" pitchFamily="34" charset="-122"/>
+                          <a:cs typeface="맑은 고딕" pitchFamily="34" charset="-120"/>
+                        </a:rPr>
+                        <a:t>= 9행</a:t>
                       </a:r>
                       <a:endParaRPr lang="en-US" sz="1200" dirty="0">
                         <a:latin typeface="맑은 고딕" charset="0"/>
@@ -4374,7 +4549,21 @@
                         <a:buNone/>
                       </a:pPr>
                       <a:r>
-                        <a:rPr lang="en-US" sz="1150" dirty="0">
+                        <a:rPr lang="en-US" sz="1050" b="1" dirty="0">
+                          <a:solidFill>
+                            <a:srgbClr val="1F2937"/>
+                          </a:solidFill>
+                          <a:latin typeface="맑은 고딕" pitchFamily="34" charset="0"/>
+                          <a:ea typeface="맑은 고딕" pitchFamily="34" charset="-122"/>
+                          <a:cs typeface="맑은 고딕" pitchFamily="34" charset="-120"/>
+                        </a:rPr>
+                        <a:t>제약사항 </a:t>
+                      </a:r>
+                      <a:pPr indent="0" marL="0">
+                        <a:buNone/>
+                      </a:pPr>
+                      <a:r>
+                        <a:rPr lang="en-US" sz="1050" dirty="0">
                           <a:solidFill>
                             <a:srgbClr val="475569"/>
                           </a:solidFill>
@@ -4382,7 +4571,7 @@
                           <a:ea typeface="맑은 고딕" pitchFamily="34" charset="-122"/>
                           <a:cs typeface="맑은 고딕" pitchFamily="34" charset="-120"/>
                         </a:rPr>
-                        <a:t>제약사항</a:t>
+                        <a:t>— 성능 · 환경 · 인터페이스</a:t>
                       </a:r>
                       <a:endParaRPr lang="en-US" sz="1200" dirty="0">
                         <a:latin typeface="맑은 고딕" charset="0"/>
@@ -4439,7 +4628,28 @@
                         <a:buNone/>
                       </a:pPr>
                       <a:r>
-                        <a:rPr lang="en-US" sz="1250" b="1" dirty="0">
+                        <a:rPr lang="en-US" sz="1200" b="1" dirty="0">
+                          <a:solidFill>
+                            <a:srgbClr val="4338CA"/>
+                          </a:solidFill>
+                          <a:latin typeface="맑은 고딕" pitchFamily="34" charset="0"/>
+                          <a:ea typeface="맑은 고딕" pitchFamily="34" charset="-122"/>
+                          <a:cs typeface="맑은 고딕" pitchFamily="34" charset="-120"/>
+                        </a:rPr>
+                        <a:t>대부분 자동</a:t>
+                      </a:r>
+                      <a:endParaRPr lang="en-US" sz="1200" dirty="0">
+                        <a:latin typeface="맑은 고딕" charset="0"/>
+                        <a:ea typeface="맑은 고딕" charset="0"/>
+                        <a:cs typeface="맑은 고딕" charset="0"/>
+                      </a:endParaRPr>
+                    </a:p>
+                    <a:p>
+                      <a:pPr indent="0" marL="0">
+                        <a:buNone/>
+                      </a:pPr>
+                      <a:r>
+                        <a:rPr lang="en-US" sz="1050" b="1" dirty="0">
                           <a:solidFill>
                             <a:srgbClr val="4338CA"/>
                           </a:solidFill>
@@ -4460,7 +4670,7 @@
                         <a:buNone/>
                       </a:pPr>
                       <a:r>
-                        <a:rPr lang="en-US" sz="1000" dirty="0">
+                        <a:rPr lang="en-US" sz="950" dirty="0">
                           <a:solidFill>
                             <a:srgbClr val="94A3B8"/>
                           </a:solidFill>
@@ -4517,7 +4727,7 @@
                   </a:tcPr>
                 </a:tc>
               </a:tr>
-              <a:tr h="530352">
+              <a:tr h="566928">
                 <a:tc>
                   <a:txBody>
                     <a:bodyPr/>
@@ -4527,7 +4737,7 @@
                         <a:buNone/>
                       </a:pPr>
                       <a:r>
-                        <a:rPr lang="en-US" sz="1200" b="1" dirty="0">
+                        <a:rPr lang="en-US" sz="1150" b="1" dirty="0">
                           <a:solidFill>
                             <a:srgbClr val="6B7280"/>
                           </a:solidFill>
@@ -4541,7 +4751,7 @@
                         <a:buNone/>
                       </a:pPr>
                       <a:r>
-                        <a:rPr lang="en-US" sz="1400" b="1" dirty="0">
+                        <a:rPr lang="en-US" sz="1350" b="1" dirty="0">
                           <a:solidFill>
                             <a:srgbClr val="1F2937"/>
                           </a:solidFill>
@@ -4562,7 +4772,7 @@
                         <a:buNone/>
                       </a:pPr>
                       <a:r>
-                        <a:rPr lang="en-US" sz="950" dirty="0">
+                        <a:rPr lang="en-US" sz="900" dirty="0">
                           <a:solidFill>
                             <a:srgbClr val="A5AEC0"/>
                           </a:solidFill>
@@ -4627,7 +4837,7 @@
                         <a:buNone/>
                       </a:pPr>
                       <a:r>
-                        <a:rPr lang="en-US" sz="1150" i="1" dirty="0">
+                        <a:rPr lang="en-US" sz="1050" i="1" dirty="0">
                           <a:solidFill>
                             <a:srgbClr val="94A3B8"/>
                           </a:solidFill>
@@ -4637,11 +4847,18 @@
                         </a:rPr>
                         <a:t>기능 요구사항과 동일 구조</a:t>
                       </a:r>
+                      <a:endParaRPr lang="en-US" sz="1200" dirty="0">
+                        <a:latin typeface="맑은 고딕" charset="0"/>
+                        <a:ea typeface="맑은 고딕" charset="0"/>
+                        <a:cs typeface="맑은 고딕" charset="0"/>
+                      </a:endParaRPr>
+                    </a:p>
+                    <a:p>
                       <a:pPr indent="0" marL="0">
                         <a:buNone/>
                       </a:pPr>
                       <a:r>
-                        <a:rPr lang="en-US" sz="1150" dirty="0">
+                        <a:rPr lang="en-US" sz="1050" dirty="0">
                           <a:solidFill>
                             <a:srgbClr val="475569"/>
                           </a:solidFill>
@@ -4649,7 +4866,7 @@
                           <a:ea typeface="맑은 고딕" pitchFamily="34" charset="-122"/>
                           <a:cs typeface="맑은 고딕" pitchFamily="34" charset="-120"/>
                         </a:rPr>
-                        <a:t>  — 개요 · 동작 정의(9행) · 제약사항</a:t>
+                        <a:t>품질 속성(성능·신뢰성·가용성 등)을 대상으로 도출</a:t>
                       </a:r>
                       <a:endParaRPr lang="en-US" sz="1200" dirty="0">
                         <a:latin typeface="맑은 고딕" charset="0"/>
@@ -4706,7 +4923,28 @@
                         <a:buNone/>
                       </a:pPr>
                       <a:r>
-                        <a:rPr lang="en-US" sz="1250" b="1" dirty="0">
+                        <a:rPr lang="en-US" sz="1200" b="1" dirty="0">
+                          <a:solidFill>
+                            <a:srgbClr val="4338CA"/>
+                          </a:solidFill>
+                          <a:latin typeface="맑은 고딕" pitchFamily="34" charset="0"/>
+                          <a:ea typeface="맑은 고딕" pitchFamily="34" charset="-122"/>
+                          <a:cs typeface="맑은 고딕" pitchFamily="34" charset="-120"/>
+                        </a:rPr>
+                        <a:t>대부분 자동</a:t>
+                      </a:r>
+                      <a:endParaRPr lang="en-US" sz="1200" dirty="0">
+                        <a:latin typeface="맑은 고딕" charset="0"/>
+                        <a:ea typeface="맑은 고딕" charset="0"/>
+                        <a:cs typeface="맑은 고딕" charset="0"/>
+                      </a:endParaRPr>
+                    </a:p>
+                    <a:p>
+                      <a:pPr indent="0" marL="0">
+                        <a:buNone/>
+                      </a:pPr>
+                      <a:r>
+                        <a:rPr lang="en-US" sz="1050" b="1" dirty="0">
                           <a:solidFill>
                             <a:srgbClr val="4338CA"/>
                           </a:solidFill>
@@ -4775,8 +5013,8 @@
         </p:nvSpPr>
         <p:spPr>
           <a:xfrm>
-            <a:off x="566928" y="6172200"/>
-            <a:ext cx="11064240" cy="365760"/>
+            <a:off x="566928" y="6327648"/>
+            <a:ext cx="11064240" cy="320040"/>
           </a:xfrm>
           <a:prstGeom prst="rect">
             <a:avLst/>
@@ -4792,7 +5030,7 @@
               <a:buNone/>
             </a:pPr>
             <a:r>
-              <a:rPr lang="en-US" sz="1200" b="1" dirty="0">
+              <a:rPr lang="en-US" sz="1100" dirty="0">
                 <a:solidFill>
                   <a:srgbClr val="6B7280"/>
                 </a:solidFill>
@@ -4800,13 +5038,13 @@
                 <a:ea typeface="맑은 고딕" pitchFamily="34" charset="-122"/>
                 <a:cs typeface="맑은 고딕" pitchFamily="34" charset="-120"/>
               </a:rPr>
-              <a:t>작성 주체:  </a:t>
+              <a:t>커버리지 = 각 산출물을 도구가 어디까지 자동화하는지.  </a:t>
             </a:r>
             <a:pPr algn="ctr" indent="0" marL="0">
               <a:buNone/>
             </a:pPr>
             <a:r>
-              <a:rPr lang="en-US" sz="1200" b="1" dirty="0">
+              <a:rPr lang="en-US" sz="1100" b="1" dirty="0">
                 <a:solidFill>
                   <a:srgbClr val="4338CA"/>
                 </a:solidFill>
@@ -4814,13 +5052,13 @@
                 <a:ea typeface="맑은 고딕" pitchFamily="34" charset="-122"/>
                 <a:cs typeface="맑은 고딕" pitchFamily="34" charset="-120"/>
               </a:rPr>
-              <a:t>AI 초안</a:t>
+              <a:t>대부분 자동</a:t>
             </a:r>
             <a:pPr algn="ctr" indent="0" marL="0">
               <a:buNone/>
             </a:pPr>
             <a:r>
-              <a:rPr lang="en-US" sz="1200" dirty="0">
+              <a:rPr lang="en-US" sz="1100" dirty="0">
                 <a:solidFill>
                   <a:srgbClr val="6B7280"/>
                 </a:solidFill>
@@ -4828,13 +5066,13 @@
                 <a:ea typeface="맑은 고딕" pitchFamily="34" charset="-122"/>
                 <a:cs typeface="맑은 고딕" pitchFamily="34" charset="-120"/>
               </a:rPr>
-              <a:t> (구조·규칙에서 자동 도출)   ·   </a:t>
+              <a:t> / 부분 자동 / </a:t>
             </a:r>
             <a:pPr algn="ctr" indent="0" marL="0">
               <a:buNone/>
             </a:pPr>
             <a:r>
-              <a:rPr lang="en-US" sz="1200" b="1" dirty="0">
+              <a:rPr lang="en-US" sz="1100" b="1" dirty="0">
                 <a:solidFill>
                   <a:srgbClr val="C2410C"/>
                 </a:solidFill>
@@ -4842,13 +5080,41 @@
                 <a:ea typeface="맑은 고딕" pitchFamily="34" charset="-122"/>
                 <a:cs typeface="맑은 고딕" pitchFamily="34" charset="-120"/>
               </a:rPr>
+              <a:t>수동</a:t>
+            </a:r>
+            <a:pPr algn="ctr" indent="0" marL="0">
+              <a:buNone/>
+            </a:pPr>
+            <a:r>
+              <a:rPr lang="en-US" sz="1100" dirty="0">
+                <a:solidFill>
+                  <a:srgbClr val="6B7280"/>
+                </a:solidFill>
+                <a:latin typeface="맑은 고딕" pitchFamily="34" charset="0"/>
+                <a:ea typeface="맑은 고딕" pitchFamily="34" charset="-122"/>
+                <a:cs typeface="맑은 고딕" pitchFamily="34" charset="-120"/>
+              </a:rPr>
+              <a:t> — </a:t>
+            </a:r>
+            <a:pPr algn="ctr" indent="0" marL="0">
+              <a:buNone/>
+            </a:pPr>
+            <a:r>
+              <a:rPr lang="en-US" sz="1100" b="1" dirty="0">
+                <a:solidFill>
+                  <a:srgbClr val="C2410C"/>
+                </a:solidFill>
+                <a:latin typeface="맑은 고딕" pitchFamily="34" charset="0"/>
+                <a:ea typeface="맑은 고딕" pitchFamily="34" charset="-122"/>
+                <a:cs typeface="맑은 고딕" pitchFamily="34" charset="-120"/>
+              </a:rPr>
               <a:t>사람</a:t>
             </a:r>
             <a:pPr algn="ctr" indent="0" marL="0">
               <a:buNone/>
             </a:pPr>
             <a:r>
-              <a:rPr lang="en-US" sz="1200" dirty="0">
+              <a:rPr lang="en-US" sz="1100" dirty="0">
                 <a:solidFill>
                   <a:srgbClr val="6B7280"/>
                 </a:solidFill>
@@ -4856,9 +5122,9 @@
                 <a:ea typeface="맑은 고딕" pitchFamily="34" charset="-122"/>
                 <a:cs typeface="맑은 고딕" pitchFamily="34" charset="-120"/>
               </a:rPr>
-              <a:t> (배경·판단이 필요한 부분) — 모두 AI가 뽑아 주는 건 아니다</a:t>
-            </a:r>
-            <a:endParaRPr lang="en-US" sz="1200" dirty="0"/>
+              <a:t>(진한 주황)이 필요한 부분은 별도 표시</a:t>
+            </a:r>
+            <a:endParaRPr lang="en-US" sz="1100" dirty="0"/>
           </a:p>
         </p:txBody>
       </p:sp>

--- a/docs/진행공유_요구사항자동화.pptx
+++ b/docs/진행공유_요구사항자동화.pptx
@@ -2943,7 +2943,7 @@
                 <a:ea typeface="맑은 고딕" pitchFamily="34" charset="-122"/>
                 <a:cs typeface="맑은 고딕" pitchFamily="34" charset="-120"/>
               </a:rPr>
-              <a:t>산출물 커버리지 — 요구사항 1건에서 나오는 5종</a:t>
+              <a:t>산출물 커버리지 — 항목별로 누가 쓰나</a:t>
             </a:r>
             <a:endParaRPr lang="en-US" sz="3000" dirty="0"/>
           </a:p>
@@ -2989,6 +2989,115 @@
               <a:t>개발 예정</a:t>
             </a:r>
             <a:endParaRPr lang="en-US" sz="1100" dirty="0"/>
+          </a:p>
+        </p:txBody>
+      </p:sp>
+      <p:sp>
+        <p:nvSpPr>
+          <p:cNvPr id="5" name="Text 3"/>
+          <p:cNvSpPr/>
+          <p:nvPr/>
+        </p:nvSpPr>
+        <p:spPr>
+          <a:xfrm>
+            <a:off x="566928" y="1417320"/>
+            <a:ext cx="11064240" cy="310896"/>
+          </a:xfrm>
+          <a:prstGeom prst="rect">
+            <a:avLst/>
+          </a:prstGeom>
+          <a:noFill/>
+          <a:ln/>
+        </p:spPr>
+        <p:txBody>
+          <a:bodyPr wrap="square" lIns="0" tIns="0" rIns="0" bIns="0" rtlCol="0" anchor="ctr"/>
+          <a:lstStyle/>
+          <a:p>
+            <a:pPr algn="ctr" indent="0" marL="0">
+              <a:buNone/>
+            </a:pPr>
+            <a:r>
+              <a:rPr lang="en-US" sz="1200" dirty="0">
+                <a:solidFill>
+                  <a:srgbClr val="4338CA"/>
+                </a:solidFill>
+                <a:latin typeface="맑은 고딕" pitchFamily="34" charset="0"/>
+                <a:ea typeface="맑은 고딕" pitchFamily="34" charset="-122"/>
+                <a:cs typeface="맑은 고딕" pitchFamily="34" charset="-120"/>
+              </a:rPr>
+              <a:t>● </a:t>
+            </a:r>
+            <a:pPr algn="ctr" indent="0" marL="0">
+              <a:buNone/>
+            </a:pPr>
+            <a:r>
+              <a:rPr lang="en-US" sz="1150" b="1" dirty="0">
+                <a:solidFill>
+                  <a:srgbClr val="4338CA"/>
+                </a:solidFill>
+                <a:latin typeface="맑은 고딕" pitchFamily="34" charset="0"/>
+                <a:ea typeface="맑은 고딕" pitchFamily="34" charset="-122"/>
+                <a:cs typeface="맑은 고딕" pitchFamily="34" charset="-120"/>
+              </a:rPr>
+              <a:t>AI 초안</a:t>
+            </a:r>
+            <a:pPr algn="ctr" indent="0" marL="0">
+              <a:buNone/>
+            </a:pPr>
+            <a:r>
+              <a:rPr lang="en-US" sz="1150" dirty="0">
+                <a:solidFill>
+                  <a:srgbClr val="6B7280"/>
+                </a:solidFill>
+                <a:latin typeface="맑은 고딕" pitchFamily="34" charset="0"/>
+                <a:ea typeface="맑은 고딕" pitchFamily="34" charset="-122"/>
+                <a:cs typeface="맑은 고딕" pitchFamily="34" charset="-120"/>
+              </a:rPr>
+              <a:t>  고객 요구·정해진 양식에서 도출        </a:t>
+            </a:r>
+            <a:pPr algn="ctr" indent="0" marL="0">
+              <a:buNone/>
+            </a:pPr>
+            <a:r>
+              <a:rPr lang="en-US" sz="1200" dirty="0">
+                <a:solidFill>
+                  <a:srgbClr val="C2410C"/>
+                </a:solidFill>
+                <a:latin typeface="맑은 고딕" pitchFamily="34" charset="0"/>
+                <a:ea typeface="맑은 고딕" pitchFamily="34" charset="-122"/>
+                <a:cs typeface="맑은 고딕" pitchFamily="34" charset="-120"/>
+              </a:rPr>
+              <a:t>● </a:t>
+            </a:r>
+            <a:pPr algn="ctr" indent="0" marL="0">
+              <a:buNone/>
+            </a:pPr>
+            <a:r>
+              <a:rPr lang="en-US" sz="1150" b="1" dirty="0">
+                <a:solidFill>
+                  <a:srgbClr val="C2410C"/>
+                </a:solidFill>
+                <a:latin typeface="맑은 고딕" pitchFamily="34" charset="0"/>
+                <a:ea typeface="맑은 고딕" pitchFamily="34" charset="-122"/>
+                <a:cs typeface="맑은 고딕" pitchFamily="34" charset="-120"/>
+              </a:rPr>
+              <a:t>사람</a:t>
+            </a:r>
+            <a:pPr algn="ctr" indent="0" marL="0">
+              <a:buNone/>
+            </a:pPr>
+            <a:r>
+              <a:rPr lang="en-US" sz="1150" dirty="0">
+                <a:solidFill>
+                  <a:srgbClr val="6B7280"/>
+                </a:solidFill>
+                <a:latin typeface="맑은 고딕" pitchFamily="34" charset="0"/>
+                <a:ea typeface="맑은 고딕" pitchFamily="34" charset="-122"/>
+                <a:cs typeface="맑은 고딕" pitchFamily="34" charset="-120"/>
+              </a:rPr>
+              <a:t>  현재 시스템(as-is)·설계 지식·판단이 필요한 부분</a:t>
+            </a:r>
+            <a:endParaRPr lang="en-US" sz="1150" dirty="0"/>
           </a:p>
         </p:txBody>
       </p:sp>
@@ -3007,7 +3116,7 @@
           </p:nvPr>
         </p:nvGraphicFramePr>
         <p:xfrm>
-          <a:off x="566928" y="1554480"/>
+          <a:off x="566928" y="1828800"/>
           <a:ext cx="11064240" cy="914400"/>
         </p:xfrm>
         <a:graphic>
@@ -3015,11 +3124,11 @@
             <a:tbl>
               <a:tblPr/>
               <a:tblGrid>
-                <a:gridCol w="2286000"/>
-                <a:gridCol w="6400800"/>
+                <a:gridCol w="2148840"/>
+                <a:gridCol w="6537960"/>
                 <a:gridCol w="2377440"/>
               </a:tblGrid>
-              <a:tr h="347472">
+              <a:tr h="329184">
                 <a:tc>
                   <a:txBody>
                     <a:bodyPr/>
@@ -3029,7 +3138,7 @@
                         <a:buNone/>
                       </a:pPr>
                       <a:r>
-                        <a:rPr lang="en-US" sz="1200" b="1" dirty="0">
+                        <a:rPr lang="en-US" sz="1150" b="1" dirty="0">
                           <a:solidFill>
                             <a:srgbClr val="FFFFFF"/>
                           </a:solidFill>
@@ -3039,7 +3148,7 @@
                         </a:rPr>
                         <a:t>산출물</a:t>
                       </a:r>
-                      <a:endParaRPr lang="en-US" sz="1200" dirty="0">
+                      <a:endParaRPr lang="en-US" sz="1150" dirty="0">
                         <a:latin typeface="맑은 고딕" charset="0"/>
                         <a:ea typeface="맑은 고딕" charset="0"/>
                         <a:cs typeface="맑은 고딕" charset="0"/>
@@ -3097,7 +3206,7 @@
                         <a:buNone/>
                       </a:pPr>
                       <a:r>
-                        <a:rPr lang="en-US" sz="1200" b="1" dirty="0">
+                        <a:rPr lang="en-US" sz="1150" b="1" dirty="0">
                           <a:solidFill>
                             <a:srgbClr val="FFFFFF"/>
                           </a:solidFill>
@@ -3105,9 +3214,9 @@
                           <a:ea typeface="맑은 고딕" pitchFamily="34" charset="-122"/>
                           <a:cs typeface="맑은 고딕" pitchFamily="34" charset="-120"/>
                         </a:rPr>
-                        <a:t>세부 구성</a:t>
+                        <a:t>세부 항목 · 작성 주체</a:t>
                       </a:r>
-                      <a:endParaRPr lang="en-US" sz="1200" dirty="0">
+                      <a:endParaRPr lang="en-US" sz="1150" dirty="0">
                         <a:latin typeface="맑은 고딕" charset="0"/>
                         <a:ea typeface="맑은 고딕" charset="0"/>
                         <a:cs typeface="맑은 고딕" charset="0"/>
@@ -3165,7 +3274,7 @@
                         <a:buNone/>
                       </a:pPr>
                       <a:r>
-                        <a:rPr lang="en-US" sz="1200" b="1" dirty="0">
+                        <a:rPr lang="en-US" sz="1150" b="1" dirty="0">
                           <a:solidFill>
                             <a:srgbClr val="FFFFFF"/>
                           </a:solidFill>
@@ -3173,9 +3282,9 @@
                           <a:ea typeface="맑은 고딕" pitchFamily="34" charset="-122"/>
                           <a:cs typeface="맑은 고딕" pitchFamily="34" charset="-120"/>
                         </a:rPr>
-                        <a:t>AI 커버리지 (자동화 범위)</a:t>
+                        <a:t>커버리지 (누가 무엇을)</a:t>
                       </a:r>
-                      <a:endParaRPr lang="en-US" sz="1200" dirty="0">
+                      <a:endParaRPr lang="en-US" sz="1150" dirty="0">
                         <a:latin typeface="맑은 고딕" charset="0"/>
                         <a:ea typeface="맑은 고딕" charset="0"/>
                         <a:cs typeface="맑은 고딕" charset="0"/>
@@ -3225,7 +3334,7 @@
                   </a:tcPr>
                 </a:tc>
               </a:tr>
-              <a:tr h="932688">
+              <a:tr h="960120">
                 <a:tc>
                   <a:txBody>
                     <a:bodyPr/>
@@ -3235,7 +3344,7 @@
                         <a:buNone/>
                       </a:pPr>
                       <a:r>
-                        <a:rPr lang="en-US" sz="1150" b="1" dirty="0">
+                        <a:rPr lang="en-US" sz="1100" b="1" dirty="0">
                           <a:solidFill>
                             <a:srgbClr val="6B7280"/>
                           </a:solidFill>
@@ -3249,7 +3358,7 @@
                         <a:buNone/>
                       </a:pPr>
                       <a:r>
-                        <a:rPr lang="en-US" sz="1350" b="1" dirty="0">
+                        <a:rPr lang="en-US" sz="1300" b="1" dirty="0">
                           <a:solidFill>
                             <a:srgbClr val="1F2937"/>
                           </a:solidFill>
@@ -3270,7 +3379,7 @@
                         <a:buNone/>
                       </a:pPr>
                       <a:r>
-                        <a:rPr lang="en-US" sz="900" dirty="0">
+                        <a:rPr lang="en-US" sz="850" dirty="0">
                           <a:solidFill>
                             <a:srgbClr val="A5AEC0"/>
                           </a:solidFill>
@@ -3335,21 +3444,35 @@
                         <a:buNone/>
                       </a:pPr>
                       <a:r>
-                        <a:rPr lang="en-US" sz="1050" b="1" dirty="0">
+                        <a:rPr lang="en-US" sz="800" dirty="0">
                           <a:solidFill>
-                            <a:srgbClr val="6D28D9"/>
+                            <a:srgbClr val="C2410C"/>
                           </a:solidFill>
                           <a:latin typeface="맑은 고딕" pitchFamily="34" charset="0"/>
                           <a:ea typeface="맑은 고딕" pitchFamily="34" charset="-122"/>
                           <a:cs typeface="맑은 고딕" pitchFamily="34" charset="-120"/>
                         </a:rPr>
-                        <a:t>요구사항 접수 </a:t>
+                        <a:t>● </a:t>
                       </a:r>
                       <a:pPr indent="0" marL="0">
                         <a:buNone/>
                       </a:pPr>
                       <a:r>
-                        <a:rPr lang="en-US" sz="1050" dirty="0">
+                        <a:rPr lang="en-US" sz="1000" b="1" dirty="0">
+                          <a:solidFill>
+                            <a:srgbClr val="1F2937"/>
+                          </a:solidFill>
+                          <a:latin typeface="맑은 고딕" pitchFamily="34" charset="0"/>
+                          <a:ea typeface="맑은 고딕" pitchFamily="34" charset="-122"/>
+                          <a:cs typeface="맑은 고딕" pitchFamily="34" charset="-120"/>
+                        </a:rPr>
+                        <a:t>현상기록 </a:t>
+                      </a:r>
+                      <a:pPr indent="0" marL="0">
+                        <a:buNone/>
+                      </a:pPr>
+                      <a:r>
+                        <a:rPr lang="en-US" sz="1000" dirty="0">
                           <a:solidFill>
                             <a:srgbClr val="475569"/>
                           </a:solidFill>
@@ -3357,7 +3480,7 @@
                           <a:ea typeface="맑은 고딕" pitchFamily="34" charset="-122"/>
                           <a:cs typeface="맑은 고딕" pitchFamily="34" charset="-120"/>
                         </a:rPr>
-                        <a:t>— 현상기록(현재 동작·문제) · 개선요청사항</a:t>
+                        <a:t>— 현재 동작·문제 상황</a:t>
                       </a:r>
                       <a:endParaRPr lang="en-US" sz="1200" dirty="0">
                         <a:latin typeface="맑은 고딕" charset="0"/>
@@ -3370,21 +3493,35 @@
                         <a:buNone/>
                       </a:pPr>
                       <a:r>
-                        <a:rPr lang="en-US" sz="1050" b="1" dirty="0">
+                        <a:rPr lang="en-US" sz="800" dirty="0">
                           <a:solidFill>
-                            <a:srgbClr val="6D28D9"/>
+                            <a:srgbClr val="4338CA"/>
                           </a:solidFill>
                           <a:latin typeface="맑은 고딕" pitchFamily="34" charset="0"/>
                           <a:ea typeface="맑은 고딕" pitchFamily="34" charset="-122"/>
                           <a:cs typeface="맑은 고딕" pitchFamily="34" charset="-120"/>
                         </a:rPr>
-                        <a:t>요구사항 개발 </a:t>
+                        <a:t>● </a:t>
                       </a:r>
                       <a:pPr indent="0" marL="0">
                         <a:buNone/>
                       </a:pPr>
                       <a:r>
-                        <a:rPr lang="en-US" sz="1050" dirty="0">
+                        <a:rPr lang="en-US" sz="1000" b="1" dirty="0">
+                          <a:solidFill>
+                            <a:srgbClr val="1F2937"/>
+                          </a:solidFill>
+                          <a:latin typeface="맑은 고딕" pitchFamily="34" charset="0"/>
+                          <a:ea typeface="맑은 고딕" pitchFamily="34" charset="-122"/>
+                          <a:cs typeface="맑은 고딕" pitchFamily="34" charset="-120"/>
+                        </a:rPr>
+                        <a:t>개선요청사항 </a:t>
+                      </a:r>
+                      <a:pPr indent="0" marL="0">
+                        <a:buNone/>
+                      </a:pPr>
+                      <a:r>
+                        <a:rPr lang="en-US" sz="1000" dirty="0">
                           <a:solidFill>
                             <a:srgbClr val="475569"/>
                           </a:solidFill>
@@ -3392,7 +3529,7 @@
                           <a:ea typeface="맑은 고딕" pitchFamily="34" charset="-122"/>
                           <a:cs typeface="맑은 고딕" pitchFamily="34" charset="-120"/>
                         </a:rPr>
-                        <a:t>— 변경범위 입력(영향 모듈) · 제약사항 정의</a:t>
+                        <a:t>— 고객이 원하는 변경</a:t>
                       </a:r>
                       <a:endParaRPr lang="en-US" sz="1200" dirty="0">
                         <a:latin typeface="맑은 고딕" charset="0"/>
@@ -3405,21 +3542,35 @@
                         <a:buNone/>
                       </a:pPr>
                       <a:r>
-                        <a:rPr lang="en-US" sz="1050" b="1" dirty="0">
+                        <a:rPr lang="en-US" sz="800" dirty="0">
                           <a:solidFill>
-                            <a:srgbClr val="6D28D9"/>
+                            <a:srgbClr val="C2410C"/>
                           </a:solidFill>
                           <a:latin typeface="맑은 고딕" pitchFamily="34" charset="0"/>
                           <a:ea typeface="맑은 고딕" pitchFamily="34" charset="-122"/>
                           <a:cs typeface="맑은 고딕" pitchFamily="34" charset="-120"/>
                         </a:rPr>
-                        <a:t>변경점 설계 </a:t>
+                        <a:t>● </a:t>
                       </a:r>
                       <a:pPr indent="0" marL="0">
                         <a:buNone/>
                       </a:pPr>
                       <a:r>
-                        <a:rPr lang="en-US" sz="1050" dirty="0">
+                        <a:rPr lang="en-US" sz="1000" b="1" dirty="0">
+                          <a:solidFill>
+                            <a:srgbClr val="1F2937"/>
+                          </a:solidFill>
+                          <a:latin typeface="맑은 고딕" pitchFamily="34" charset="0"/>
+                          <a:ea typeface="맑은 고딕" pitchFamily="34" charset="-122"/>
+                          <a:cs typeface="맑은 고딕" pitchFamily="34" charset="-120"/>
+                        </a:rPr>
+                        <a:t>변경범위 </a:t>
+                      </a:r>
+                      <a:pPr indent="0" marL="0">
+                        <a:buNone/>
+                      </a:pPr>
+                      <a:r>
+                        <a:rPr lang="en-US" sz="1000" dirty="0">
                           <a:solidFill>
                             <a:srgbClr val="475569"/>
                           </a:solidFill>
@@ -3427,7 +3578,168 @@
                           <a:ea typeface="맑은 고딕" pitchFamily="34" charset="-122"/>
                           <a:cs typeface="맑은 고딕" pitchFamily="34" charset="-120"/>
                         </a:rPr>
-                        <a:t>— 변경 전(as-is) · 변경 후(to-be)</a:t>
+                        <a:t>— 영향 모듈·기능</a:t>
+                      </a:r>
+                      <a:pPr indent="0" marL="0">
+                        <a:buNone/>
+                      </a:pPr>
+                      <a:r>
+                        <a:rPr lang="en-US" sz="1000" dirty="0">
+                          <a:solidFill>
+                            <a:srgbClr val="000000"/>
+                          </a:solidFill>
+                          <a:latin typeface="맑은 고딕" pitchFamily="34" charset="0"/>
+                          <a:ea typeface="맑은 고딕" pitchFamily="34" charset="-122"/>
+                          <a:cs typeface="맑은 고딕" pitchFamily="34" charset="-120"/>
+                        </a:rPr>
+                        <a:t>     </a:t>
+                      </a:r>
+                      <a:pPr indent="0" marL="0">
+                        <a:buNone/>
+                      </a:pPr>
+                      <a:r>
+                        <a:rPr lang="en-US" sz="800" dirty="0">
+                          <a:solidFill>
+                            <a:srgbClr val="4338CA"/>
+                          </a:solidFill>
+                          <a:latin typeface="맑은 고딕" pitchFamily="34" charset="0"/>
+                          <a:ea typeface="맑은 고딕" pitchFamily="34" charset="-122"/>
+                          <a:cs typeface="맑은 고딕" pitchFamily="34" charset="-120"/>
+                        </a:rPr>
+                        <a:t>● </a:t>
+                      </a:r>
+                      <a:pPr indent="0" marL="0">
+                        <a:buNone/>
+                      </a:pPr>
+                      <a:r>
+                        <a:rPr lang="en-US" sz="1000" b="1" dirty="0">
+                          <a:solidFill>
+                            <a:srgbClr val="1F2937"/>
+                          </a:solidFill>
+                          <a:latin typeface="맑은 고딕" pitchFamily="34" charset="0"/>
+                          <a:ea typeface="맑은 고딕" pitchFamily="34" charset="-122"/>
+                          <a:cs typeface="맑은 고딕" pitchFamily="34" charset="-120"/>
+                        </a:rPr>
+                        <a:t>제약사항 </a:t>
+                      </a:r>
+                      <a:pPr indent="0" marL="0">
+                        <a:buNone/>
+                      </a:pPr>
+                      <a:r>
+                        <a:rPr lang="en-US" sz="1000" dirty="0">
+                          <a:solidFill>
+                            <a:srgbClr val="475569"/>
+                          </a:solidFill>
+                          <a:latin typeface="맑은 고딕" pitchFamily="34" charset="0"/>
+                          <a:ea typeface="맑은 고딕" pitchFamily="34" charset="-122"/>
+                          <a:cs typeface="맑은 고딕" pitchFamily="34" charset="-120"/>
+                        </a:rPr>
+                        <a:t>— 요구에 명시된 조건</a:t>
+                      </a:r>
+                      <a:endParaRPr lang="en-US" sz="1200" dirty="0">
+                        <a:latin typeface="맑은 고딕" charset="0"/>
+                        <a:ea typeface="맑은 고딕" charset="0"/>
+                        <a:cs typeface="맑은 고딕" charset="0"/>
+                      </a:endParaRPr>
+                    </a:p>
+                    <a:p>
+                      <a:pPr indent="0" marL="0">
+                        <a:buNone/>
+                      </a:pPr>
+                      <a:r>
+                        <a:rPr lang="en-US" sz="800" dirty="0">
+                          <a:solidFill>
+                            <a:srgbClr val="C2410C"/>
+                          </a:solidFill>
+                          <a:latin typeface="맑은 고딕" pitchFamily="34" charset="0"/>
+                          <a:ea typeface="맑은 고딕" pitchFamily="34" charset="-122"/>
+                          <a:cs typeface="맑은 고딕" pitchFamily="34" charset="-120"/>
+                        </a:rPr>
+                        <a:t>● </a:t>
+                      </a:r>
+                      <a:pPr indent="0" marL="0">
+                        <a:buNone/>
+                      </a:pPr>
+                      <a:r>
+                        <a:rPr lang="en-US" sz="1000" b="1" dirty="0">
+                          <a:solidFill>
+                            <a:srgbClr val="1F2937"/>
+                          </a:solidFill>
+                          <a:latin typeface="맑은 고딕" pitchFamily="34" charset="0"/>
+                          <a:ea typeface="맑은 고딕" pitchFamily="34" charset="-122"/>
+                          <a:cs typeface="맑은 고딕" pitchFamily="34" charset="-120"/>
+                        </a:rPr>
+                        <a:t>변경 전(as-is) </a:t>
+                      </a:r>
+                      <a:pPr indent="0" marL="0">
+                        <a:buNone/>
+                      </a:pPr>
+                      <a:r>
+                        <a:rPr lang="en-US" sz="1000" dirty="0">
+                          <a:solidFill>
+                            <a:srgbClr val="475569"/>
+                          </a:solidFill>
+                          <a:latin typeface="맑은 고딕" pitchFamily="34" charset="0"/>
+                          <a:ea typeface="맑은 고딕" pitchFamily="34" charset="-122"/>
+                          <a:cs typeface="맑은 고딕" pitchFamily="34" charset="-120"/>
+                        </a:rPr>
+                        <a:t>— 현재 설계·동작</a:t>
+                      </a:r>
+                      <a:pPr indent="0" marL="0">
+                        <a:buNone/>
+                      </a:pPr>
+                      <a:r>
+                        <a:rPr lang="en-US" sz="1000" dirty="0">
+                          <a:solidFill>
+                            <a:srgbClr val="000000"/>
+                          </a:solidFill>
+                          <a:latin typeface="맑은 고딕" pitchFamily="34" charset="0"/>
+                          <a:ea typeface="맑은 고딕" pitchFamily="34" charset="-122"/>
+                          <a:cs typeface="맑은 고딕" pitchFamily="34" charset="-120"/>
+                        </a:rPr>
+                        <a:t>     </a:t>
+                      </a:r>
+                      <a:pPr indent="0" marL="0">
+                        <a:buNone/>
+                      </a:pPr>
+                      <a:r>
+                        <a:rPr lang="en-US" sz="800" dirty="0">
+                          <a:solidFill>
+                            <a:srgbClr val="4338CA"/>
+                          </a:solidFill>
+                          <a:latin typeface="맑은 고딕" pitchFamily="34" charset="0"/>
+                          <a:ea typeface="맑은 고딕" pitchFamily="34" charset="-122"/>
+                          <a:cs typeface="맑은 고딕" pitchFamily="34" charset="-120"/>
+                        </a:rPr>
+                        <a:t>● </a:t>
+                      </a:r>
+                      <a:pPr indent="0" marL="0">
+                        <a:buNone/>
+                      </a:pPr>
+                      <a:r>
+                        <a:rPr lang="en-US" sz="1000" b="1" dirty="0">
+                          <a:solidFill>
+                            <a:srgbClr val="1F2937"/>
+                          </a:solidFill>
+                          <a:latin typeface="맑은 고딕" pitchFamily="34" charset="0"/>
+                          <a:ea typeface="맑은 고딕" pitchFamily="34" charset="-122"/>
+                          <a:cs typeface="맑은 고딕" pitchFamily="34" charset="-120"/>
+                        </a:rPr>
+                        <a:t>변경 후(to-be) </a:t>
+                      </a:r>
+                      <a:pPr indent="0" marL="0">
+                        <a:buNone/>
+                      </a:pPr>
+                      <a:r>
+                        <a:rPr lang="en-US" sz="1000" dirty="0">
+                          <a:solidFill>
+                            <a:srgbClr val="475569"/>
+                          </a:solidFill>
+                          <a:latin typeface="맑은 고딕" pitchFamily="34" charset="0"/>
+                          <a:ea typeface="맑은 고딕" pitchFamily="34" charset="-122"/>
+                          <a:cs typeface="맑은 고딕" pitchFamily="34" charset="-120"/>
+                        </a:rPr>
+                        <a:t>— 요구 기반 목표</a:t>
                       </a:r>
                       <a:endParaRPr lang="en-US" sz="1200" dirty="0">
                         <a:latin typeface="맑은 고딕" charset="0"/>
@@ -3484,28 +3796,7 @@
                         <a:buNone/>
                       </a:pPr>
                       <a:r>
-                        <a:rPr lang="en-US" sz="1200" b="1" dirty="0">
-                          <a:solidFill>
-                            <a:srgbClr val="0F766E"/>
-                          </a:solidFill>
-                          <a:latin typeface="맑은 고딕" pitchFamily="34" charset="0"/>
-                          <a:ea typeface="맑은 고딕" pitchFamily="34" charset="-122"/>
-                          <a:cs typeface="맑은 고딕" pitchFamily="34" charset="-120"/>
-                        </a:rPr>
-                        <a:t>부분 자동</a:t>
-                      </a:r>
-                      <a:endParaRPr lang="en-US" sz="1200" dirty="0">
-                        <a:latin typeface="맑은 고딕" charset="0"/>
-                        <a:ea typeface="맑은 고딕" charset="0"/>
-                        <a:cs typeface="맑은 고딕" charset="0"/>
-                      </a:endParaRPr>
-                    </a:p>
-                    <a:p>
-                      <a:pPr indent="0" marL="0">
-                        <a:buNone/>
-                      </a:pPr>
-                      <a:r>
-                        <a:rPr lang="en-US" sz="1050" b="1" dirty="0">
+                        <a:rPr lang="en-US" sz="1000" b="1" dirty="0">
                           <a:solidFill>
                             <a:srgbClr val="4338CA"/>
                           </a:solidFill>
@@ -3513,27 +3804,27 @@
                           <a:ea typeface="맑은 고딕" pitchFamily="34" charset="-122"/>
                           <a:cs typeface="맑은 고딕" pitchFamily="34" charset="-120"/>
                         </a:rPr>
-                        <a:t>AI 초안</a:t>
+                        <a:t>개선요청·제약·to-be</a:t>
                       </a:r>
                       <a:pPr indent="0" marL="0">
                         <a:buNone/>
                       </a:pPr>
                       <a:r>
-                        <a:rPr lang="en-US" sz="1050" dirty="0">
+                        <a:rPr lang="en-US" sz="1000" dirty="0">
                           <a:solidFill>
-                            <a:srgbClr val="6B7280"/>
+                            <a:srgbClr val="475569"/>
                           </a:solidFill>
                           <a:latin typeface="맑은 고딕" pitchFamily="34" charset="0"/>
                           <a:ea typeface="맑은 고딕" pitchFamily="34" charset="-122"/>
                           <a:cs typeface="맑은 고딕" pitchFamily="34" charset="-120"/>
                         </a:rPr>
-                        <a:t> + </a:t>
+                        <a:t>는 AI 초안, </a:t>
                       </a:r>
                       <a:pPr indent="0" marL="0">
                         <a:buNone/>
                       </a:pPr>
                       <a:r>
-                        <a:rPr lang="en-US" sz="1050" b="1" dirty="0">
+                        <a:rPr lang="en-US" sz="1000" b="1" dirty="0">
                           <a:solidFill>
                             <a:srgbClr val="C2410C"/>
                           </a:solidFill>
@@ -3541,28 +3832,21 @@
                           <a:ea typeface="맑은 고딕" pitchFamily="34" charset="-122"/>
                           <a:cs typeface="맑은 고딕" pitchFamily="34" charset="-120"/>
                         </a:rPr>
-                        <a:t>사람</a:t>
+                        <a:t>현상기록·변경범위·as-is</a:t>
                       </a:r>
-                      <a:endParaRPr lang="en-US" sz="1200" dirty="0">
-                        <a:latin typeface="맑은 고딕" charset="0"/>
-                        <a:ea typeface="맑은 고딕" charset="0"/>
-                        <a:cs typeface="맑은 고딕" charset="0"/>
-                      </a:endParaRPr>
-                    </a:p>
-                    <a:p>
                       <a:pPr indent="0" marL="0">
                         <a:buNone/>
                       </a:pPr>
                       <a:r>
-                        <a:rPr lang="en-US" sz="950" dirty="0">
+                        <a:rPr lang="en-US" sz="1000" dirty="0">
                           <a:solidFill>
-                            <a:srgbClr val="94A3B8"/>
+                            <a:srgbClr val="475569"/>
                           </a:solidFill>
                           <a:latin typeface="맑은 고딕" pitchFamily="34" charset="0"/>
                           <a:ea typeface="맑은 고딕" pitchFamily="34" charset="-122"/>
                           <a:cs typeface="맑은 고딕" pitchFamily="34" charset="-120"/>
                         </a:rPr>
-                        <a:t>현상기록(배경)은 사람이 작성</a:t>
+                        <a:t>는 사람</a:t>
                       </a:r>
                       <a:endParaRPr lang="en-US" sz="1200" dirty="0">
                         <a:latin typeface="맑은 고딕" charset="0"/>
@@ -3611,7 +3895,7 @@
                   </a:tcPr>
                 </a:tc>
               </a:tr>
-              <a:tr h="932688">
+              <a:tr h="777240">
                 <a:tc>
                   <a:txBody>
                     <a:bodyPr/>
@@ -3621,7 +3905,7 @@
                         <a:buNone/>
                       </a:pPr>
                       <a:r>
-                        <a:rPr lang="en-US" sz="1150" b="1" dirty="0">
+                        <a:rPr lang="en-US" sz="1100" b="1" dirty="0">
                           <a:solidFill>
                             <a:srgbClr val="6B7280"/>
                           </a:solidFill>
@@ -3635,7 +3919,7 @@
                         <a:buNone/>
                       </a:pPr>
                       <a:r>
-                        <a:rPr lang="en-US" sz="1350" b="1" dirty="0">
+                        <a:rPr lang="en-US" sz="1300" b="1" dirty="0">
                           <a:solidFill>
                             <a:srgbClr val="1F2937"/>
                           </a:solidFill>
@@ -3656,7 +3940,7 @@
                         <a:buNone/>
                       </a:pPr>
                       <a:r>
-                        <a:rPr lang="en-US" sz="900" dirty="0">
+                        <a:rPr lang="en-US" sz="850" dirty="0">
                           <a:solidFill>
                             <a:srgbClr val="A5AEC0"/>
                           </a:solidFill>
@@ -3721,7 +4005,21 @@
                         <a:buNone/>
                       </a:pPr>
                       <a:r>
-                        <a:rPr lang="en-US" sz="1050" b="1" dirty="0">
+                        <a:rPr lang="en-US" sz="800" dirty="0">
+                          <a:solidFill>
+                            <a:srgbClr val="4338CA"/>
+                          </a:solidFill>
+                          <a:latin typeface="맑은 고딕" pitchFamily="34" charset="0"/>
+                          <a:ea typeface="맑은 고딕" pitchFamily="34" charset="-122"/>
+                          <a:cs typeface="맑은 고딕" pitchFamily="34" charset="-120"/>
+                        </a:rPr>
+                        <a:t>● </a:t>
+                      </a:r>
+                      <a:pPr indent="0" marL="0">
+                        <a:buNone/>
+                      </a:pPr>
+                      <a:r>
+                        <a:rPr lang="en-US" sz="1000" b="1" dirty="0">
                           <a:solidFill>
                             <a:srgbClr val="1F2937"/>
                           </a:solidFill>
@@ -3735,7 +4033,7 @@
                         <a:buNone/>
                       </a:pPr>
                       <a:r>
-                        <a:rPr lang="en-US" sz="1050" dirty="0">
+                        <a:rPr lang="en-US" sz="1000" dirty="0">
                           <a:solidFill>
                             <a:srgbClr val="475569"/>
                           </a:solidFill>
@@ -3743,7 +4041,7 @@
                           <a:ea typeface="맑은 고딕" pitchFamily="34" charset="-122"/>
                           <a:cs typeface="맑은 고딕" pitchFamily="34" charset="-120"/>
                         </a:rPr>
-                        <a:t>— 기능 개요 · 구현 방향</a:t>
+                        <a:t>— 기능 개요·구현 방향</a:t>
                       </a:r>
                       <a:endParaRPr lang="en-US" sz="1200" dirty="0">
                         <a:latin typeface="맑은 고딕" charset="0"/>
@@ -3756,7 +4054,21 @@
                         <a:buNone/>
                       </a:pPr>
                       <a:r>
-                        <a:rPr lang="en-US" sz="1050" b="1" dirty="0">
+                        <a:rPr lang="en-US" sz="800" dirty="0">
+                          <a:solidFill>
+                            <a:srgbClr val="C2410C"/>
+                          </a:solidFill>
+                          <a:latin typeface="맑은 고딕" pitchFamily="34" charset="0"/>
+                          <a:ea typeface="맑은 고딕" pitchFamily="34" charset="-122"/>
+                          <a:cs typeface="맑은 고딕" pitchFamily="34" charset="-120"/>
+                        </a:rPr>
+                        <a:t>● </a:t>
+                      </a:r>
+                      <a:pPr indent="0" marL="0">
+                        <a:buNone/>
+                      </a:pPr>
+                      <a:r>
+                        <a:rPr lang="en-US" sz="1000" b="1" dirty="0">
                           <a:solidFill>
                             <a:srgbClr val="1F2937"/>
                           </a:solidFill>
@@ -3770,7 +4082,7 @@
                         <a:buNone/>
                       </a:pPr>
                       <a:r>
-                        <a:rPr lang="en-US" sz="1050" dirty="0">
+                        <a:rPr lang="en-US" sz="1000" dirty="0">
                           <a:solidFill>
                             <a:srgbClr val="475569"/>
                           </a:solidFill>
@@ -3778,7 +4090,7 @@
                           <a:ea typeface="맑은 고딕" pitchFamily="34" charset="-122"/>
                           <a:cs typeface="맑은 고딕" pitchFamily="34" charset="-120"/>
                         </a:rPr>
-                        <a:t>— 클래스 구조 · 관계</a:t>
+                        <a:t>— 클래스 구조·관계 (설계 지식)</a:t>
                       </a:r>
                       <a:endParaRPr lang="en-US" sz="1200" dirty="0">
                         <a:latin typeface="맑은 고딕" charset="0"/>
@@ -3791,7 +4103,21 @@
                         <a:buNone/>
                       </a:pPr>
                       <a:r>
-                        <a:rPr lang="en-US" sz="1050" b="1" dirty="0">
+                        <a:rPr lang="en-US" sz="800" dirty="0">
+                          <a:solidFill>
+                            <a:srgbClr val="C2410C"/>
+                          </a:solidFill>
+                          <a:latin typeface="맑은 고딕" pitchFamily="34" charset="0"/>
+                          <a:ea typeface="맑은 고딕" pitchFamily="34" charset="-122"/>
+                          <a:cs typeface="맑은 고딕" pitchFamily="34" charset="-120"/>
+                        </a:rPr>
+                        <a:t>● </a:t>
+                      </a:r>
+                      <a:pPr indent="0" marL="0">
+                        <a:buNone/>
+                      </a:pPr>
+                      <a:r>
+                        <a:rPr lang="en-US" sz="1000" b="1" dirty="0">
                           <a:solidFill>
                             <a:srgbClr val="1F2937"/>
                           </a:solidFill>
@@ -3799,13 +4125,13 @@
                           <a:ea typeface="맑은 고딕" pitchFamily="34" charset="-122"/>
                           <a:cs typeface="맑은 고딕" pitchFamily="34" charset="-120"/>
                         </a:rPr>
-                        <a:t>Sequence Diagram </a:t>
+                        <a:t>Sequence (as-is) </a:t>
                       </a:r>
                       <a:pPr indent="0" marL="0">
                         <a:buNone/>
                       </a:pPr>
                       <a:r>
-                        <a:rPr lang="en-US" sz="1050" dirty="0">
+                        <a:rPr lang="en-US" sz="1000" dirty="0">
                           <a:solidFill>
                             <a:srgbClr val="475569"/>
                           </a:solidFill>
@@ -3813,7 +4139,63 @@
                           <a:ea typeface="맑은 고딕" pitchFamily="34" charset="-122"/>
                           <a:cs typeface="맑은 고딕" pitchFamily="34" charset="-120"/>
                         </a:rPr>
-                        <a:t>— as-is(현재 흐름) · to-be(변경 흐름)</a:t>
+                        <a:t>— 현재 흐름</a:t>
+                      </a:r>
+                      <a:pPr indent="0" marL="0">
+                        <a:buNone/>
+                      </a:pPr>
+                      <a:r>
+                        <a:rPr lang="en-US" sz="1000" dirty="0">
+                          <a:solidFill>
+                            <a:srgbClr val="000000"/>
+                          </a:solidFill>
+                          <a:latin typeface="맑은 고딕" pitchFamily="34" charset="0"/>
+                          <a:ea typeface="맑은 고딕" pitchFamily="34" charset="-122"/>
+                          <a:cs typeface="맑은 고딕" pitchFamily="34" charset="-120"/>
+                        </a:rPr>
+                        <a:t>     </a:t>
+                      </a:r>
+                      <a:pPr indent="0" marL="0">
+                        <a:buNone/>
+                      </a:pPr>
+                      <a:r>
+                        <a:rPr lang="en-US" sz="800" dirty="0">
+                          <a:solidFill>
+                            <a:srgbClr val="4338CA"/>
+                          </a:solidFill>
+                          <a:latin typeface="맑은 고딕" pitchFamily="34" charset="0"/>
+                          <a:ea typeface="맑은 고딕" pitchFamily="34" charset="-122"/>
+                          <a:cs typeface="맑은 고딕" pitchFamily="34" charset="-120"/>
+                        </a:rPr>
+                        <a:t>● </a:t>
+                      </a:r>
+                      <a:pPr indent="0" marL="0">
+                        <a:buNone/>
+                      </a:pPr>
+                      <a:r>
+                        <a:rPr lang="en-US" sz="1000" b="1" dirty="0">
+                          <a:solidFill>
+                            <a:srgbClr val="1F2937"/>
+                          </a:solidFill>
+                          <a:latin typeface="맑은 고딕" pitchFamily="34" charset="0"/>
+                          <a:ea typeface="맑은 고딕" pitchFamily="34" charset="-122"/>
+                          <a:cs typeface="맑은 고딕" pitchFamily="34" charset="-120"/>
+                        </a:rPr>
+                        <a:t>Sequence (to-be) </a:t>
+                      </a:r>
+                      <a:pPr indent="0" marL="0">
+                        <a:buNone/>
+                      </a:pPr>
+                      <a:r>
+                        <a:rPr lang="en-US" sz="1000" dirty="0">
+                          <a:solidFill>
+                            <a:srgbClr val="475569"/>
+                          </a:solidFill>
+                          <a:latin typeface="맑은 고딕" pitchFamily="34" charset="0"/>
+                          <a:ea typeface="맑은 고딕" pitchFamily="34" charset="-122"/>
+                          <a:cs typeface="맑은 고딕" pitchFamily="34" charset="-120"/>
+                        </a:rPr>
+                        <a:t>— 변경 흐름</a:t>
                       </a:r>
                       <a:endParaRPr lang="en-US" sz="1200" dirty="0">
                         <a:latin typeface="맑은 고딕" charset="0"/>
@@ -3870,28 +4252,7 @@
                         <a:buNone/>
                       </a:pPr>
                       <a:r>
-                        <a:rPr lang="en-US" sz="1200" b="1" dirty="0">
-                          <a:solidFill>
-                            <a:srgbClr val="0F766E"/>
-                          </a:solidFill>
-                          <a:latin typeface="맑은 고딕" pitchFamily="34" charset="0"/>
-                          <a:ea typeface="맑은 고딕" pitchFamily="34" charset="-122"/>
-                          <a:cs typeface="맑은 고딕" pitchFamily="34" charset="-120"/>
-                        </a:rPr>
-                        <a:t>부분 자동</a:t>
-                      </a:r>
-                      <a:endParaRPr lang="en-US" sz="1200" dirty="0">
-                        <a:latin typeface="맑은 고딕" charset="0"/>
-                        <a:ea typeface="맑은 고딕" charset="0"/>
-                        <a:cs typeface="맑은 고딕" charset="0"/>
-                      </a:endParaRPr>
-                    </a:p>
-                    <a:p>
-                      <a:pPr indent="0" marL="0">
-                        <a:buNone/>
-                      </a:pPr>
-                      <a:r>
-                        <a:rPr lang="en-US" sz="1050" b="1" dirty="0">
+                        <a:rPr lang="en-US" sz="1000" b="1" dirty="0">
                           <a:solidFill>
                             <a:srgbClr val="4338CA"/>
                           </a:solidFill>
@@ -3899,27 +4260,27 @@
                           <a:ea typeface="맑은 고딕" pitchFamily="34" charset="-122"/>
                           <a:cs typeface="맑은 고딕" pitchFamily="34" charset="-120"/>
                         </a:rPr>
-                        <a:t>AI 초안</a:t>
+                        <a:t>설명·to-be 흐름</a:t>
                       </a:r>
                       <a:pPr indent="0" marL="0">
                         <a:buNone/>
                       </a:pPr>
                       <a:r>
-                        <a:rPr lang="en-US" sz="1050" dirty="0">
+                        <a:rPr lang="en-US" sz="1000" dirty="0">
                           <a:solidFill>
-                            <a:srgbClr val="6B7280"/>
+                            <a:srgbClr val="475569"/>
                           </a:solidFill>
                           <a:latin typeface="맑은 고딕" pitchFamily="34" charset="0"/>
                           <a:ea typeface="맑은 고딕" pitchFamily="34" charset="-122"/>
                           <a:cs typeface="맑은 고딕" pitchFamily="34" charset="-120"/>
                         </a:rPr>
-                        <a:t> + </a:t>
+                        <a:t>은 AI 초안, </a:t>
                       </a:r>
                       <a:pPr indent="0" marL="0">
                         <a:buNone/>
                       </a:pPr>
                       <a:r>
-                        <a:rPr lang="en-US" sz="1050" b="1" dirty="0">
+                        <a:rPr lang="en-US" sz="1000" b="1" dirty="0">
                           <a:solidFill>
                             <a:srgbClr val="C2410C"/>
                           </a:solidFill>
@@ -3927,28 +4288,21 @@
                           <a:ea typeface="맑은 고딕" pitchFamily="34" charset="-122"/>
                           <a:cs typeface="맑은 고딕" pitchFamily="34" charset="-120"/>
                         </a:rPr>
-                        <a:t>사람</a:t>
+                        <a:t>다이어그램·as-is</a:t>
                       </a:r>
-                      <a:endParaRPr lang="en-US" sz="1200" dirty="0">
-                        <a:latin typeface="맑은 고딕" charset="0"/>
-                        <a:ea typeface="맑은 고딕" charset="0"/>
-                        <a:cs typeface="맑은 고딕" charset="0"/>
-                      </a:endParaRPr>
-                    </a:p>
-                    <a:p>
                       <a:pPr indent="0" marL="0">
                         <a:buNone/>
                       </a:pPr>
                       <a:r>
-                        <a:rPr lang="en-US" sz="950" dirty="0">
+                        <a:rPr lang="en-US" sz="1000" dirty="0">
                           <a:solidFill>
-                            <a:srgbClr val="94A3B8"/>
+                            <a:srgbClr val="475569"/>
                           </a:solidFill>
                           <a:latin typeface="맑은 고딕" pitchFamily="34" charset="0"/>
                           <a:ea typeface="맑은 고딕" pitchFamily="34" charset="-122"/>
                           <a:cs typeface="맑은 고딕" pitchFamily="34" charset="-120"/>
                         </a:rPr>
-                        <a:t>Class·as-is는 사람이 검증·보완</a:t>
+                        <a:t>는 사람이 작성</a:t>
                       </a:r>
                       <a:endParaRPr lang="en-US" sz="1200" dirty="0">
                         <a:latin typeface="맑은 고딕" charset="0"/>
@@ -3997,7 +4351,7 @@
                   </a:tcPr>
                 </a:tc>
               </a:tr>
-              <a:tr h="868680">
+              <a:tr h="777240">
                 <a:tc>
                   <a:txBody>
                     <a:bodyPr/>
@@ -4007,7 +4361,7 @@
                         <a:buNone/>
                       </a:pPr>
                       <a:r>
-                        <a:rPr lang="en-US" sz="1150" b="1" dirty="0">
+                        <a:rPr lang="en-US" sz="1100" b="1" dirty="0">
                           <a:solidFill>
                             <a:srgbClr val="6B7280"/>
                           </a:solidFill>
@@ -4021,7 +4375,7 @@
                         <a:buNone/>
                       </a:pPr>
                       <a:r>
-                        <a:rPr lang="en-US" sz="1350" b="1" dirty="0">
+                        <a:rPr lang="en-US" sz="1300" b="1" dirty="0">
                           <a:solidFill>
                             <a:srgbClr val="1F2937"/>
                           </a:solidFill>
@@ -4042,7 +4396,7 @@
                         <a:buNone/>
                       </a:pPr>
                       <a:r>
-                        <a:rPr lang="en-US" sz="900" dirty="0">
+                        <a:rPr lang="en-US" sz="850" dirty="0">
                           <a:solidFill>
                             <a:srgbClr val="A5AEC0"/>
                           </a:solidFill>
@@ -4107,7 +4461,21 @@
                         <a:buNone/>
                       </a:pPr>
                       <a:r>
-                        <a:rPr lang="en-US" sz="1050" b="1" dirty="0">
+                        <a:rPr lang="en-US" sz="800" dirty="0">
+                          <a:solidFill>
+                            <a:srgbClr val="C2410C"/>
+                          </a:solidFill>
+                          <a:latin typeface="맑은 고딕" pitchFamily="34" charset="0"/>
+                          <a:ea typeface="맑은 고딕" pitchFamily="34" charset="-122"/>
+                          <a:cs typeface="맑은 고딕" pitchFamily="34" charset="-120"/>
+                        </a:rPr>
+                        <a:t>● </a:t>
+                      </a:r>
+                      <a:pPr indent="0" marL="0">
+                        <a:buNone/>
+                      </a:pPr>
+                      <a:r>
+                        <a:rPr lang="en-US" sz="1000" b="1" dirty="0">
                           <a:solidFill>
                             <a:srgbClr val="1F2937"/>
                           </a:solidFill>
@@ -4121,7 +4489,7 @@
                         <a:buNone/>
                       </a:pPr>
                       <a:r>
-                        <a:rPr lang="en-US" sz="1050" dirty="0">
+                        <a:rPr lang="en-US" sz="1000" dirty="0">
                           <a:solidFill>
                             <a:srgbClr val="475569"/>
                           </a:solidFill>
@@ -4129,7 +4497,7 @@
                           <a:ea typeface="맑은 고딕" pitchFamily="34" charset="-122"/>
                           <a:cs typeface="맑은 고딕" pitchFamily="34" charset="-120"/>
                         </a:rPr>
-                        <a:t>— 요청 부서·담당 · 대상 기능</a:t>
+                        <a:t>— 요청 부서·담당·대상 기능</a:t>
                       </a:r>
                       <a:endParaRPr lang="en-US" sz="1200" dirty="0">
                         <a:latin typeface="맑은 고딕" charset="0"/>
@@ -4142,7 +4510,21 @@
                         <a:buNone/>
                       </a:pPr>
                       <a:r>
-                        <a:rPr lang="en-US" sz="1050" b="1" dirty="0">
+                        <a:rPr lang="en-US" sz="800" dirty="0">
+                          <a:solidFill>
+                            <a:srgbClr val="4338CA"/>
+                          </a:solidFill>
+                          <a:latin typeface="맑은 고딕" pitchFamily="34" charset="0"/>
+                          <a:ea typeface="맑은 고딕" pitchFamily="34" charset="-122"/>
+                          <a:cs typeface="맑은 고딕" pitchFamily="34" charset="-120"/>
+                        </a:rPr>
+                        <a:t>● </a:t>
+                      </a:r>
+                      <a:pPr indent="0" marL="0">
+                        <a:buNone/>
+                      </a:pPr>
+                      <a:r>
+                        <a:rPr lang="en-US" sz="1000" b="1" dirty="0">
                           <a:solidFill>
                             <a:srgbClr val="1F2937"/>
                           </a:solidFill>
@@ -4156,7 +4538,7 @@
                         <a:buNone/>
                       </a:pPr>
                       <a:r>
-                        <a:rPr lang="en-US" sz="1050" dirty="0">
+                        <a:rPr lang="en-US" sz="1000" dirty="0">
                           <a:solidFill>
                             <a:srgbClr val="475569"/>
                           </a:solidFill>
@@ -4164,7 +4546,7 @@
                           <a:ea typeface="맑은 고딕" pitchFamily="34" charset="-122"/>
                           <a:cs typeface="맑은 고딕" pitchFamily="34" charset="-120"/>
                         </a:rPr>
-                        <a:t>— 고객 요구 내용 요약</a:t>
+                        <a:t>— 고객 요구 내용을 양식에 맞춰 정리·요약</a:t>
                       </a:r>
                       <a:endParaRPr lang="en-US" sz="1200" dirty="0">
                         <a:latin typeface="맑은 고딕" charset="0"/>
@@ -4177,7 +4559,21 @@
                         <a:buNone/>
                       </a:pPr>
                       <a:r>
-                        <a:rPr lang="en-US" sz="1050" b="1" dirty="0">
+                        <a:rPr lang="en-US" sz="800" dirty="0">
+                          <a:solidFill>
+                            <a:srgbClr val="C2410C"/>
+                          </a:solidFill>
+                          <a:latin typeface="맑은 고딕" pitchFamily="34" charset="0"/>
+                          <a:ea typeface="맑은 고딕" pitchFamily="34" charset="-122"/>
+                          <a:cs typeface="맑은 고딕" pitchFamily="34" charset="-120"/>
+                        </a:rPr>
+                        <a:t>● </a:t>
+                      </a:r>
+                      <a:pPr indent="0" marL="0">
+                        <a:buNone/>
+                      </a:pPr>
+                      <a:r>
+                        <a:rPr lang="en-US" sz="1000" b="1" dirty="0">
                           <a:solidFill>
                             <a:srgbClr val="1F2937"/>
                           </a:solidFill>
@@ -4191,7 +4587,7 @@
                         <a:buNone/>
                       </a:pPr>
                       <a:r>
-                        <a:rPr lang="en-US" sz="1050" dirty="0">
+                        <a:rPr lang="en-US" sz="1000" dirty="0">
                           <a:solidFill>
                             <a:srgbClr val="475569"/>
                           </a:solidFill>
@@ -4199,7 +4595,7 @@
                           <a:ea typeface="맑은 고딕" pitchFamily="34" charset="-122"/>
                           <a:cs typeface="맑은 고딕" pitchFamily="34" charset="-120"/>
                         </a:rPr>
-                        <a:t>— 제약 · 주의 · 이력</a:t>
+                        <a:t>— 제약·주의·이력 (판단)</a:t>
                       </a:r>
                       <a:endParaRPr lang="en-US" sz="1200" dirty="0">
                         <a:latin typeface="맑은 고딕" charset="0"/>
@@ -4256,7 +4652,35 @@
                         <a:buNone/>
                       </a:pPr>
                       <a:r>
-                        <a:rPr lang="en-US" sz="1200" b="1" dirty="0">
+                        <a:rPr lang="en-US" sz="1000" b="1" dirty="0">
+                          <a:solidFill>
+                            <a:srgbClr val="4338CA"/>
+                          </a:solidFill>
+                          <a:latin typeface="맑은 고딕" pitchFamily="34" charset="0"/>
+                          <a:ea typeface="맑은 고딕" pitchFamily="34" charset="-122"/>
+                          <a:cs typeface="맑은 고딕" pitchFamily="34" charset="-120"/>
+                        </a:rPr>
+                        <a:t>요청사항</a:t>
+                      </a:r>
+                      <a:pPr indent="0" marL="0">
+                        <a:buNone/>
+                      </a:pPr>
+                      <a:r>
+                        <a:rPr lang="en-US" sz="1000" dirty="0">
+                          <a:solidFill>
+                            <a:srgbClr val="475569"/>
+                          </a:solidFill>
+                          <a:latin typeface="맑은 고딕" pitchFamily="34" charset="0"/>
+                          <a:ea typeface="맑은 고딕" pitchFamily="34" charset="-122"/>
+                          <a:cs typeface="맑은 고딕" pitchFamily="34" charset="-120"/>
+                        </a:rPr>
+                        <a:t>은 고객 요구에서 AI 초안, </a:t>
+                      </a:r>
+                      <a:pPr indent="0" marL="0">
+                        <a:buNone/>
+                      </a:pPr>
+                      <a:r>
+                        <a:rPr lang="en-US" sz="1000" b="1" dirty="0">
                           <a:solidFill>
                             <a:srgbClr val="C2410C"/>
                           </a:solidFill>
@@ -4264,49 +4688,21 @@
                           <a:ea typeface="맑은 고딕" pitchFamily="34" charset="-122"/>
                           <a:cs typeface="맑은 고딕" pitchFamily="34" charset="-120"/>
                         </a:rPr>
-                        <a:t>수동</a:t>
+                        <a:t>요청자·특이사항</a:t>
                       </a:r>
-                      <a:endParaRPr lang="en-US" sz="1200" dirty="0">
-                        <a:latin typeface="맑은 고딕" charset="0"/>
-                        <a:ea typeface="맑은 고딕" charset="0"/>
-                        <a:cs typeface="맑은 고딕" charset="0"/>
-                      </a:endParaRPr>
-                    </a:p>
-                    <a:p>
                       <a:pPr indent="0" marL="0">
                         <a:buNone/>
                       </a:pPr>
                       <a:r>
-                        <a:rPr lang="en-US" sz="1050" b="1" dirty="0">
+                        <a:rPr lang="en-US" sz="1000" dirty="0">
                           <a:solidFill>
-                            <a:srgbClr val="C2410C"/>
+                            <a:srgbClr val="475569"/>
                           </a:solidFill>
                           <a:latin typeface="맑은 고딕" pitchFamily="34" charset="0"/>
                           <a:ea typeface="맑은 고딕" pitchFamily="34" charset="-122"/>
                           <a:cs typeface="맑은 고딕" pitchFamily="34" charset="-120"/>
                         </a:rPr>
-                        <a:t>사람 중심</a:t>
-                      </a:r>
-                      <a:endParaRPr lang="en-US" sz="1200" dirty="0">
-                        <a:latin typeface="맑은 고딕" charset="0"/>
-                        <a:ea typeface="맑은 고딕" charset="0"/>
-                        <a:cs typeface="맑은 고딕" charset="0"/>
-                      </a:endParaRPr>
-                    </a:p>
-                    <a:p>
-                      <a:pPr indent="0" marL="0">
-                        <a:buNone/>
-                      </a:pPr>
-                      <a:r>
-                        <a:rPr lang="en-US" sz="950" dirty="0">
-                          <a:solidFill>
-                            <a:srgbClr val="94A3B8"/>
-                          </a:solidFill>
-                          <a:latin typeface="맑은 고딕" pitchFamily="34" charset="0"/>
-                          <a:ea typeface="맑은 고딕" pitchFamily="34" charset="-122"/>
-                          <a:cs typeface="맑은 고딕" pitchFamily="34" charset="-120"/>
-                        </a:rPr>
-                        <a:t>요청사항만 AI가 정리</a:t>
+                        <a:t>은 사람</a:t>
                       </a:r>
                       <a:endParaRPr lang="en-US" sz="1200" dirty="0">
                         <a:latin typeface="맑은 고딕" charset="0"/>
@@ -4355,7 +4751,7 @@
                   </a:tcPr>
                 </a:tc>
               </a:tr>
-              <a:tr h="960120">
+              <a:tr h="932688">
                 <a:tc>
                   <a:txBody>
                     <a:bodyPr/>
@@ -4365,7 +4761,7 @@
                         <a:buNone/>
                       </a:pPr>
                       <a:r>
-                        <a:rPr lang="en-US" sz="1150" b="1" dirty="0">
+                        <a:rPr lang="en-US" sz="1100" b="1" dirty="0">
                           <a:solidFill>
                             <a:srgbClr val="6B7280"/>
                           </a:solidFill>
@@ -4379,7 +4775,7 @@
                         <a:buNone/>
                       </a:pPr>
                       <a:r>
-                        <a:rPr lang="en-US" sz="1350" b="1" dirty="0">
+                        <a:rPr lang="en-US" sz="1300" b="1" dirty="0">
                           <a:solidFill>
                             <a:srgbClr val="1F2937"/>
                           </a:solidFill>
@@ -4400,7 +4796,7 @@
                         <a:buNone/>
                       </a:pPr>
                       <a:r>
-                        <a:rPr lang="en-US" sz="900" dirty="0">
+                        <a:rPr lang="en-US" sz="850" dirty="0">
                           <a:solidFill>
                             <a:srgbClr val="A5AEC0"/>
                           </a:solidFill>
@@ -4465,7 +4861,21 @@
                         <a:buNone/>
                       </a:pPr>
                       <a:r>
-                        <a:rPr lang="en-US" sz="1050" b="1" dirty="0">
+                        <a:rPr lang="en-US" sz="800" dirty="0">
+                          <a:solidFill>
+                            <a:srgbClr val="4338CA"/>
+                          </a:solidFill>
+                          <a:latin typeface="맑은 고딕" pitchFamily="34" charset="0"/>
+                          <a:ea typeface="맑은 고딕" pitchFamily="34" charset="-122"/>
+                          <a:cs typeface="맑은 고딕" pitchFamily="34" charset="-120"/>
+                        </a:rPr>
+                        <a:t>● </a:t>
+                      </a:r>
+                      <a:pPr indent="0" marL="0">
+                        <a:buNone/>
+                      </a:pPr>
+                      <a:r>
+                        <a:rPr lang="en-US" sz="1000" b="1" dirty="0">
                           <a:solidFill>
                             <a:srgbClr val="1F2937"/>
                           </a:solidFill>
@@ -4479,7 +4889,7 @@
                         <a:buNone/>
                       </a:pPr>
                       <a:r>
-                        <a:rPr lang="en-US" sz="1050" dirty="0">
+                        <a:rPr lang="en-US" sz="1000" dirty="0">
                           <a:solidFill>
                             <a:srgbClr val="475569"/>
                           </a:solidFill>
@@ -4487,7 +4897,7 @@
                           <a:ea typeface="맑은 고딕" pitchFamily="34" charset="-122"/>
                           <a:cs typeface="맑은 고딕" pitchFamily="34" charset="-120"/>
                         </a:rPr>
-                        <a:t>— 역할(시스템 내 책임) · 목적</a:t>
+                        <a:t>— 역할(시스템 내 책임)·목적</a:t>
                       </a:r>
                       <a:endParaRPr lang="en-US" sz="1200" dirty="0">
                         <a:latin typeface="맑은 고딕" charset="0"/>
@@ -4500,7 +4910,21 @@
                         <a:buNone/>
                       </a:pPr>
                       <a:r>
-                        <a:rPr lang="en-US" sz="1050" b="1" dirty="0">
+                        <a:rPr lang="en-US" sz="800" dirty="0">
+                          <a:solidFill>
+                            <a:srgbClr val="4338CA"/>
+                          </a:solidFill>
+                          <a:latin typeface="맑은 고딕" pitchFamily="34" charset="0"/>
+                          <a:ea typeface="맑은 고딕" pitchFamily="34" charset="-122"/>
+                          <a:cs typeface="맑은 고딕" pitchFamily="34" charset="-120"/>
+                        </a:rPr>
+                        <a:t>● </a:t>
+                      </a:r>
+                      <a:pPr indent="0" marL="0">
+                        <a:buNone/>
+                      </a:pPr>
+                      <a:r>
+                        <a:rPr lang="en-US" sz="1000" b="1" dirty="0">
                           <a:solidFill>
                             <a:srgbClr val="1F2937"/>
                           </a:solidFill>
@@ -4514,7 +4938,7 @@
                         <a:buNone/>
                       </a:pPr>
                       <a:r>
-                        <a:rPr lang="en-US" sz="1050" dirty="0">
+                        <a:rPr lang="en-US" sz="1000" dirty="0">
                           <a:solidFill>
                             <a:srgbClr val="475569"/>
                           </a:solidFill>
@@ -4522,21 +4946,35 @@
                           <a:ea typeface="맑은 고딕" pitchFamily="34" charset="-122"/>
                           <a:cs typeface="맑은 고딕" pitchFamily="34" charset="-120"/>
                         </a:rPr>
-                        <a:t>— 동작유형 3(기본·변형·예외) × 선행조건·후행조건·시나리오 </a:t>
+                        <a:t>— 기본·변형·예외 3가지 동작유형마다 </a:t>
                       </a:r>
                       <a:pPr indent="0" marL="0">
                         <a:buNone/>
                       </a:pPr>
                       <a:r>
-                        <a:rPr lang="en-US" sz="1050" b="1" dirty="0">
+                        <a:rPr lang="en-US" sz="1000" b="1" dirty="0">
                           <a:solidFill>
-                            <a:srgbClr val="6D28D9"/>
+                            <a:srgbClr val="1F2937"/>
                           </a:solidFill>
                           <a:latin typeface="맑은 고딕" pitchFamily="34" charset="0"/>
                           <a:ea typeface="맑은 고딕" pitchFamily="34" charset="-122"/>
                           <a:cs typeface="맑은 고딕" pitchFamily="34" charset="-120"/>
                         </a:rPr>
-                        <a:t>= 9행</a:t>
+                        <a:t>선행조건·후행조건·시나리오</a:t>
+                      </a:r>
+                      <a:pPr indent="0" marL="0">
+                        <a:buNone/>
+                      </a:pPr>
+                      <a:r>
+                        <a:rPr lang="en-US" sz="1000" dirty="0">
+                          <a:solidFill>
+                            <a:srgbClr val="475569"/>
+                          </a:solidFill>
+                          <a:latin typeface="맑은 고딕" pitchFamily="34" charset="0"/>
+                          <a:ea typeface="맑은 고딕" pitchFamily="34" charset="-122"/>
+                          <a:cs typeface="맑은 고딕" pitchFamily="34" charset="-120"/>
+                        </a:rPr>
+                        <a:t> 작성 → 총 9행</a:t>
                       </a:r>
                       <a:endParaRPr lang="en-US" sz="1200" dirty="0">
                         <a:latin typeface="맑은 고딕" charset="0"/>
@@ -4549,7 +4987,21 @@
                         <a:buNone/>
                       </a:pPr>
                       <a:r>
-                        <a:rPr lang="en-US" sz="1050" b="1" dirty="0">
+                        <a:rPr lang="en-US" sz="800" dirty="0">
+                          <a:solidFill>
+                            <a:srgbClr val="4338CA"/>
+                          </a:solidFill>
+                          <a:latin typeface="맑은 고딕" pitchFamily="34" charset="0"/>
+                          <a:ea typeface="맑은 고딕" pitchFamily="34" charset="-122"/>
+                          <a:cs typeface="맑은 고딕" pitchFamily="34" charset="-120"/>
+                        </a:rPr>
+                        <a:t>● </a:t>
+                      </a:r>
+                      <a:pPr indent="0" marL="0">
+                        <a:buNone/>
+                      </a:pPr>
+                      <a:r>
+                        <a:rPr lang="en-US" sz="1000" b="1" dirty="0">
                           <a:solidFill>
                             <a:srgbClr val="1F2937"/>
                           </a:solidFill>
@@ -4563,7 +5015,7 @@
                         <a:buNone/>
                       </a:pPr>
                       <a:r>
-                        <a:rPr lang="en-US" sz="1050" dirty="0">
+                        <a:rPr lang="en-US" sz="1000" dirty="0">
                           <a:solidFill>
                             <a:srgbClr val="475569"/>
                           </a:solidFill>
@@ -4571,7 +5023,7 @@
                           <a:ea typeface="맑은 고딕" pitchFamily="34" charset="-122"/>
                           <a:cs typeface="맑은 고딕" pitchFamily="34" charset="-120"/>
                         </a:rPr>
-                        <a:t>— 성능 · 환경 · 인터페이스</a:t>
+                        <a:t>— 성능·환경·인터페이스</a:t>
                       </a:r>
                       <a:endParaRPr lang="en-US" sz="1200" dirty="0">
                         <a:latin typeface="맑은 고딕" charset="0"/>
@@ -4628,7 +5080,21 @@
                         <a:buNone/>
                       </a:pPr>
                       <a:r>
-                        <a:rPr lang="en-US" sz="1200" b="1" dirty="0">
+                        <a:rPr lang="en-US" sz="1000" dirty="0">
+                          <a:solidFill>
+                            <a:srgbClr val="475569"/>
+                          </a:solidFill>
+                          <a:latin typeface="맑은 고딕" pitchFamily="34" charset="0"/>
+                          <a:ea typeface="맑은 고딕" pitchFamily="34" charset="-122"/>
+                          <a:cs typeface="맑은 고딕" pitchFamily="34" charset="-120"/>
+                        </a:rPr>
+                        <a:t>고객 요구에서 규칙적으로 도출 → </a:t>
+                      </a:r>
+                      <a:pPr indent="0" marL="0">
+                        <a:buNone/>
+                      </a:pPr>
+                      <a:r>
+                        <a:rPr lang="en-US" sz="1000" b="1" dirty="0">
                           <a:solidFill>
                             <a:srgbClr val="4338CA"/>
                           </a:solidFill>
@@ -4636,49 +5102,21 @@
                           <a:ea typeface="맑은 고딕" pitchFamily="34" charset="-122"/>
                           <a:cs typeface="맑은 고딕" pitchFamily="34" charset="-120"/>
                         </a:rPr>
-                        <a:t>대부분 자동</a:t>
+                        <a:t>전 항목 AI 초안</a:t>
                       </a:r>
-                      <a:endParaRPr lang="en-US" sz="1200" dirty="0">
-                        <a:latin typeface="맑은 고딕" charset="0"/>
-                        <a:ea typeface="맑은 고딕" charset="0"/>
-                        <a:cs typeface="맑은 고딕" charset="0"/>
-                      </a:endParaRPr>
-                    </a:p>
-                    <a:p>
                       <a:pPr indent="0" marL="0">
                         <a:buNone/>
                       </a:pPr>
                       <a:r>
-                        <a:rPr lang="en-US" sz="1050" b="1" dirty="0">
+                        <a:rPr lang="en-US" sz="1000" dirty="0">
                           <a:solidFill>
-                            <a:srgbClr val="4338CA"/>
+                            <a:srgbClr val="475569"/>
                           </a:solidFill>
                           <a:latin typeface="맑은 고딕" pitchFamily="34" charset="0"/>
                           <a:ea typeface="맑은 고딕" pitchFamily="34" charset="-122"/>
                           <a:cs typeface="맑은 고딕" pitchFamily="34" charset="-120"/>
                         </a:rPr>
-                        <a:t>AI 초안</a:t>
-                      </a:r>
-                      <a:endParaRPr lang="en-US" sz="1200" dirty="0">
-                        <a:latin typeface="맑은 고딕" charset="0"/>
-                        <a:ea typeface="맑은 고딕" charset="0"/>
-                        <a:cs typeface="맑은 고딕" charset="0"/>
-                      </a:endParaRPr>
-                    </a:p>
-                    <a:p>
-                      <a:pPr indent="0" marL="0">
-                        <a:buNone/>
-                      </a:pPr>
-                      <a:r>
-                        <a:rPr lang="en-US" sz="950" dirty="0">
-                          <a:solidFill>
-                            <a:srgbClr val="94A3B8"/>
-                          </a:solidFill>
-                          <a:latin typeface="맑은 고딕" pitchFamily="34" charset="0"/>
-                          <a:ea typeface="맑은 고딕" pitchFamily="34" charset="-122"/>
-                          <a:cs typeface="맑은 고딕" pitchFamily="34" charset="-120"/>
-                        </a:rPr>
-                        <a:t>동작 정의가 AI 도출의 핵심</a:t>
+                        <a:t> (사람이 검토·확정)</a:t>
                       </a:r>
                       <a:endParaRPr lang="en-US" sz="1200" dirty="0">
                         <a:latin typeface="맑은 고딕" charset="0"/>
@@ -4727,7 +5165,7 @@
                   </a:tcPr>
                 </a:tc>
               </a:tr>
-              <a:tr h="566928">
+              <a:tr h="822960">
                 <a:tc>
                   <a:txBody>
                     <a:bodyPr/>
@@ -4737,7 +5175,7 @@
                         <a:buNone/>
                       </a:pPr>
                       <a:r>
-                        <a:rPr lang="en-US" sz="1150" b="1" dirty="0">
+                        <a:rPr lang="en-US" sz="1100" b="1" dirty="0">
                           <a:solidFill>
                             <a:srgbClr val="6B7280"/>
                           </a:solidFill>
@@ -4751,7 +5189,7 @@
                         <a:buNone/>
                       </a:pPr>
                       <a:r>
-                        <a:rPr lang="en-US" sz="1350" b="1" dirty="0">
+                        <a:rPr lang="en-US" sz="1300" b="1" dirty="0">
                           <a:solidFill>
                             <a:srgbClr val="1F2937"/>
                           </a:solidFill>
@@ -4772,7 +5210,7 @@
                         <a:buNone/>
                       </a:pPr>
                       <a:r>
-                        <a:rPr lang="en-US" sz="900" dirty="0">
+                        <a:rPr lang="en-US" sz="850" dirty="0">
                           <a:solidFill>
                             <a:srgbClr val="A5AEC0"/>
                           </a:solidFill>
@@ -4837,15 +5275,43 @@
                         <a:buNone/>
                       </a:pPr>
                       <a:r>
-                        <a:rPr lang="en-US" sz="1050" i="1" dirty="0">
+                        <a:rPr lang="en-US" sz="800" dirty="0">
                           <a:solidFill>
-                            <a:srgbClr val="94A3B8"/>
+                            <a:srgbClr val="4338CA"/>
                           </a:solidFill>
                           <a:latin typeface="맑은 고딕" pitchFamily="34" charset="0"/>
                           <a:ea typeface="맑은 고딕" pitchFamily="34" charset="-122"/>
                           <a:cs typeface="맑은 고딕" pitchFamily="34" charset="-120"/>
                         </a:rPr>
-                        <a:t>기능 요구사항과 동일 구조</a:t>
+                        <a:t>● </a:t>
+                      </a:r>
+                      <a:pPr indent="0" marL="0">
+                        <a:buNone/>
+                      </a:pPr>
+                      <a:r>
+                        <a:rPr lang="en-US" sz="1000" b="1" dirty="0">
+                          <a:solidFill>
+                            <a:srgbClr val="1F2937"/>
+                          </a:solidFill>
+                          <a:latin typeface="맑은 고딕" pitchFamily="34" charset="0"/>
+                          <a:ea typeface="맑은 고딕" pitchFamily="34" charset="-122"/>
+                          <a:cs typeface="맑은 고딕" pitchFamily="34" charset="-120"/>
+                        </a:rPr>
+                        <a:t>개요 </a:t>
+                      </a:r>
+                      <a:pPr indent="0" marL="0">
+                        <a:buNone/>
+                      </a:pPr>
+                      <a:r>
+                        <a:rPr lang="en-US" sz="1000" dirty="0">
+                          <a:solidFill>
+                            <a:srgbClr val="475569"/>
+                          </a:solidFill>
+                          <a:latin typeface="맑은 고딕" pitchFamily="34" charset="0"/>
+                          <a:ea typeface="맑은 고딕" pitchFamily="34" charset="-122"/>
+                          <a:cs typeface="맑은 고딕" pitchFamily="34" charset="-120"/>
+                        </a:rPr>
+                        <a:t>— 대상 품질 속성(성능·신뢰성·가용성)의 역할·목적</a:t>
                       </a:r>
                       <a:endParaRPr lang="en-US" sz="1200" dirty="0">
                         <a:latin typeface="맑은 고딕" charset="0"/>
@@ -4858,7 +5324,35 @@
                         <a:buNone/>
                       </a:pPr>
                       <a:r>
-                        <a:rPr lang="en-US" sz="1050" dirty="0">
+                        <a:rPr lang="en-US" sz="800" dirty="0">
+                          <a:solidFill>
+                            <a:srgbClr val="4338CA"/>
+                          </a:solidFill>
+                          <a:latin typeface="맑은 고딕" pitchFamily="34" charset="0"/>
+                          <a:ea typeface="맑은 고딕" pitchFamily="34" charset="-122"/>
+                          <a:cs typeface="맑은 고딕" pitchFamily="34" charset="-120"/>
+                        </a:rPr>
+                        <a:t>● </a:t>
+                      </a:r>
+                      <a:pPr indent="0" marL="0">
+                        <a:buNone/>
+                      </a:pPr>
+                      <a:r>
+                        <a:rPr lang="en-US" sz="1000" b="1" dirty="0">
+                          <a:solidFill>
+                            <a:srgbClr val="1F2937"/>
+                          </a:solidFill>
+                          <a:latin typeface="맑은 고딕" pitchFamily="34" charset="0"/>
+                          <a:ea typeface="맑은 고딕" pitchFamily="34" charset="-122"/>
+                          <a:cs typeface="맑은 고딕" pitchFamily="34" charset="-120"/>
+                        </a:rPr>
+                        <a:t>동작 정의 </a:t>
+                      </a:r>
+                      <a:pPr indent="0" marL="0">
+                        <a:buNone/>
+                      </a:pPr>
+                      <a:r>
+                        <a:rPr lang="en-US" sz="1000" dirty="0">
                           <a:solidFill>
                             <a:srgbClr val="475569"/>
                           </a:solidFill>
@@ -4866,7 +5360,56 @@
                           <a:ea typeface="맑은 고딕" pitchFamily="34" charset="-122"/>
                           <a:cs typeface="맑은 고딕" pitchFamily="34" charset="-120"/>
                         </a:rPr>
-                        <a:t>품질 속성(성능·신뢰성·가용성 등)을 대상으로 도출</a:t>
+                        <a:t>— 품질 항목마다 선행·후행·시나리오 (기능과 동일 9행 구조)</a:t>
+                      </a:r>
+                      <a:endParaRPr lang="en-US" sz="1200" dirty="0">
+                        <a:latin typeface="맑은 고딕" charset="0"/>
+                        <a:ea typeface="맑은 고딕" charset="0"/>
+                        <a:cs typeface="맑은 고딕" charset="0"/>
+                      </a:endParaRPr>
+                    </a:p>
+                    <a:p>
+                      <a:pPr indent="0" marL="0">
+                        <a:buNone/>
+                      </a:pPr>
+                      <a:r>
+                        <a:rPr lang="en-US" sz="800" dirty="0">
+                          <a:solidFill>
+                            <a:srgbClr val="4338CA"/>
+                          </a:solidFill>
+                          <a:latin typeface="맑은 고딕" pitchFamily="34" charset="0"/>
+                          <a:ea typeface="맑은 고딕" pitchFamily="34" charset="-122"/>
+                          <a:cs typeface="맑은 고딕" pitchFamily="34" charset="-120"/>
+                        </a:rPr>
+                        <a:t>● </a:t>
+                      </a:r>
+                      <a:pPr indent="0" marL="0">
+                        <a:buNone/>
+                      </a:pPr>
+                      <a:r>
+                        <a:rPr lang="en-US" sz="1000" b="1" dirty="0">
+                          <a:solidFill>
+                            <a:srgbClr val="1F2937"/>
+                          </a:solidFill>
+                          <a:latin typeface="맑은 고딕" pitchFamily="34" charset="0"/>
+                          <a:ea typeface="맑은 고딕" pitchFamily="34" charset="-122"/>
+                          <a:cs typeface="맑은 고딕" pitchFamily="34" charset="-120"/>
+                        </a:rPr>
+                        <a:t>제약사항 </a:t>
+                      </a:r>
+                      <a:pPr indent="0" marL="0">
+                        <a:buNone/>
+                      </a:pPr>
+                      <a:r>
+                        <a:rPr lang="en-US" sz="1000" dirty="0">
+                          <a:solidFill>
+                            <a:srgbClr val="475569"/>
+                          </a:solidFill>
+                          <a:latin typeface="맑은 고딕" pitchFamily="34" charset="0"/>
+                          <a:ea typeface="맑은 고딕" pitchFamily="34" charset="-122"/>
+                          <a:cs typeface="맑은 고딕" pitchFamily="34" charset="-120"/>
+                        </a:rPr>
+                        <a:t>— 측정 기준·목표치</a:t>
                       </a:r>
                       <a:endParaRPr lang="en-US" sz="1200" dirty="0">
                         <a:latin typeface="맑은 고딕" charset="0"/>
@@ -4923,7 +5466,21 @@
                         <a:buNone/>
                       </a:pPr>
                       <a:r>
-                        <a:rPr lang="en-US" sz="1200" b="1" dirty="0">
+                        <a:rPr lang="en-US" sz="1000" dirty="0">
+                          <a:solidFill>
+                            <a:srgbClr val="475569"/>
+                          </a:solidFill>
+                          <a:latin typeface="맑은 고딕" pitchFamily="34" charset="0"/>
+                          <a:ea typeface="맑은 고딕" pitchFamily="34" charset="-122"/>
+                          <a:cs typeface="맑은 고딕" pitchFamily="34" charset="-120"/>
+                        </a:rPr>
+                        <a:t>기능 요구사항과 동일 — </a:t>
+                      </a:r>
+                      <a:pPr indent="0" marL="0">
+                        <a:buNone/>
+                      </a:pPr>
+                      <a:r>
+                        <a:rPr lang="en-US" sz="1000" b="1" dirty="0">
                           <a:solidFill>
                             <a:srgbClr val="4338CA"/>
                           </a:solidFill>
@@ -4931,28 +5488,21 @@
                           <a:ea typeface="맑은 고딕" pitchFamily="34" charset="-122"/>
                           <a:cs typeface="맑은 고딕" pitchFamily="34" charset="-120"/>
                         </a:rPr>
-                        <a:t>대부분 자동</a:t>
+                        <a:t>전 항목 AI 초안</a:t>
                       </a:r>
-                      <a:endParaRPr lang="en-US" sz="1200" dirty="0">
-                        <a:latin typeface="맑은 고딕" charset="0"/>
-                        <a:ea typeface="맑은 고딕" charset="0"/>
-                        <a:cs typeface="맑은 고딕" charset="0"/>
-                      </a:endParaRPr>
-                    </a:p>
-                    <a:p>
                       <a:pPr indent="0" marL="0">
                         <a:buNone/>
                       </a:pPr>
                       <a:r>
-                        <a:rPr lang="en-US" sz="1050" b="1" dirty="0">
+                        <a:rPr lang="en-US" sz="1000" dirty="0">
                           <a:solidFill>
-                            <a:srgbClr val="4338CA"/>
+                            <a:srgbClr val="475569"/>
                           </a:solidFill>
                           <a:latin typeface="맑은 고딕" pitchFamily="34" charset="0"/>
                           <a:ea typeface="맑은 고딕" pitchFamily="34" charset="-122"/>
                           <a:cs typeface="맑은 고딕" pitchFamily="34" charset="-120"/>
                         </a:rPr>
-                        <a:t>AI 초안</a:t>
+                        <a:t> (사람이 검토·확정)</a:t>
                       </a:r>
                       <a:endParaRPr lang="en-US" sz="1200" dirty="0">
                         <a:latin typeface="맑은 고딕" charset="0"/>
@@ -5005,129 +5555,6 @@
           </a:graphicData>
         </a:graphic>
       </p:graphicFrame>
-      <p:sp>
-        <p:nvSpPr>
-          <p:cNvPr id="6" name="Text 3"/>
-          <p:cNvSpPr/>
-          <p:nvPr/>
-        </p:nvSpPr>
-        <p:spPr>
-          <a:xfrm>
-            <a:off x="566928" y="6327648"/>
-            <a:ext cx="11064240" cy="320040"/>
-          </a:xfrm>
-          <a:prstGeom prst="rect">
-            <a:avLst/>
-          </a:prstGeom>
-          <a:noFill/>
-          <a:ln/>
-        </p:spPr>
-        <p:txBody>
-          <a:bodyPr wrap="square" lIns="0" tIns="0" rIns="0" bIns="0" rtlCol="0" anchor="ctr"/>
-          <a:lstStyle/>
-          <a:p>
-            <a:pPr algn="ctr" indent="0" marL="0">
-              <a:buNone/>
-            </a:pPr>
-            <a:r>
-              <a:rPr lang="en-US" sz="1100" dirty="0">
-                <a:solidFill>
-                  <a:srgbClr val="6B7280"/>
-                </a:solidFill>
-                <a:latin typeface="맑은 고딕" pitchFamily="34" charset="0"/>
-                <a:ea typeface="맑은 고딕" pitchFamily="34" charset="-122"/>
-                <a:cs typeface="맑은 고딕" pitchFamily="34" charset="-120"/>
-              </a:rPr>
-              <a:t>커버리지 = 각 산출물을 도구가 어디까지 자동화하는지.  </a:t>
-            </a:r>
-            <a:pPr algn="ctr" indent="0" marL="0">
-              <a:buNone/>
-            </a:pPr>
-            <a:r>
-              <a:rPr lang="en-US" sz="1100" b="1" dirty="0">
-                <a:solidFill>
-                  <a:srgbClr val="4338CA"/>
-                </a:solidFill>
-                <a:latin typeface="맑은 고딕" pitchFamily="34" charset="0"/>
-                <a:ea typeface="맑은 고딕" pitchFamily="34" charset="-122"/>
-                <a:cs typeface="맑은 고딕" pitchFamily="34" charset="-120"/>
-              </a:rPr>
-              <a:t>대부분 자동</a:t>
-            </a:r>
-            <a:pPr algn="ctr" indent="0" marL="0">
-              <a:buNone/>
-            </a:pPr>
-            <a:r>
-              <a:rPr lang="en-US" sz="1100" dirty="0">
-                <a:solidFill>
-                  <a:srgbClr val="6B7280"/>
-                </a:solidFill>
-                <a:latin typeface="맑은 고딕" pitchFamily="34" charset="0"/>
-                <a:ea typeface="맑은 고딕" pitchFamily="34" charset="-122"/>
-                <a:cs typeface="맑은 고딕" pitchFamily="34" charset="-120"/>
-              </a:rPr>
-              <a:t> / 부분 자동 / </a:t>
-            </a:r>
-            <a:pPr algn="ctr" indent="0" marL="0">
-              <a:buNone/>
-            </a:pPr>
-            <a:r>
-              <a:rPr lang="en-US" sz="1100" b="1" dirty="0">
-                <a:solidFill>
-                  <a:srgbClr val="C2410C"/>
-                </a:solidFill>
-                <a:latin typeface="맑은 고딕" pitchFamily="34" charset="0"/>
-                <a:ea typeface="맑은 고딕" pitchFamily="34" charset="-122"/>
-                <a:cs typeface="맑은 고딕" pitchFamily="34" charset="-120"/>
-              </a:rPr>
-              <a:t>수동</a:t>
-            </a:r>
-            <a:pPr algn="ctr" indent="0" marL="0">
-              <a:buNone/>
-            </a:pPr>
-            <a:r>
-              <a:rPr lang="en-US" sz="1100" dirty="0">
-                <a:solidFill>
-                  <a:srgbClr val="6B7280"/>
-                </a:solidFill>
-                <a:latin typeface="맑은 고딕" pitchFamily="34" charset="0"/>
-                <a:ea typeface="맑은 고딕" pitchFamily="34" charset="-122"/>
-                <a:cs typeface="맑은 고딕" pitchFamily="34" charset="-120"/>
-              </a:rPr>
-              <a:t> — </a:t>
-            </a:r>
-            <a:pPr algn="ctr" indent="0" marL="0">
-              <a:buNone/>
-            </a:pPr>
-            <a:r>
-              <a:rPr lang="en-US" sz="1100" b="1" dirty="0">
-                <a:solidFill>
-                  <a:srgbClr val="C2410C"/>
-                </a:solidFill>
-                <a:latin typeface="맑은 고딕" pitchFamily="34" charset="0"/>
-                <a:ea typeface="맑은 고딕" pitchFamily="34" charset="-122"/>
-                <a:cs typeface="맑은 고딕" pitchFamily="34" charset="-120"/>
-              </a:rPr>
-              <a:t>사람</a:t>
-            </a:r>
-            <a:pPr algn="ctr" indent="0" marL="0">
-              <a:buNone/>
-            </a:pPr>
-            <a:r>
-              <a:rPr lang="en-US" sz="1100" dirty="0">
-                <a:solidFill>
-                  <a:srgbClr val="6B7280"/>
-                </a:solidFill>
-                <a:latin typeface="맑은 고딕" pitchFamily="34" charset="0"/>
-                <a:ea typeface="맑은 고딕" pitchFamily="34" charset="-122"/>
-                <a:cs typeface="맑은 고딕" pitchFamily="34" charset="-120"/>
-              </a:rPr>
-              <a:t>(진한 주황)이 필요한 부분은 별도 표시</a:t>
-            </a:r>
-            <a:endParaRPr lang="en-US" sz="1100" dirty="0"/>
-          </a:p>
-        </p:txBody>
-      </p:sp>
     </p:spTree>
   </p:cSld>
   <p:clrMapOvr>

--- a/docs/진행공유_요구사항자동화.pptx
+++ b/docs/진행공유_요구사항자동화.pptx
@@ -2994,14 +2994,41 @@
       </p:sp>
       <p:sp>
         <p:nvSpPr>
-          <p:cNvPr id="5" name="Text 3"/>
-          <p:cNvSpPr/>
-          <p:nvPr/>
-        </p:nvSpPr>
-        <p:spPr>
-          <a:xfrm>
-            <a:off x="566928" y="1417320"/>
-            <a:ext cx="11064240" cy="310896"/>
+          <p:cNvPr id="5" name="Shape 3"/>
+          <p:cNvSpPr/>
+          <p:nvPr/>
+        </p:nvSpPr>
+        <p:spPr>
+          <a:xfrm>
+            <a:off x="566928" y="1316736"/>
+            <a:ext cx="5413248" cy="768096"/>
+          </a:xfrm>
+          <a:prstGeom prst="roundRect">
+            <a:avLst>
+              <a:gd name="adj" fmla="val 9524"/>
+            </a:avLst>
+          </a:prstGeom>
+          <a:solidFill>
+            <a:srgbClr val="EEF2FF"/>
+          </a:solidFill>
+          <a:ln w="12700">
+            <a:solidFill>
+              <a:srgbClr val="C7D2FE"/>
+            </a:solidFill>
+            <a:prstDash val="solid"/>
+          </a:ln>
+        </p:spPr>
+      </p:sp>
+      <p:sp>
+        <p:nvSpPr>
+          <p:cNvPr id="6" name="Text 4"/>
+          <p:cNvSpPr/>
+          <p:nvPr/>
+        </p:nvSpPr>
+        <p:spPr>
+          <a:xfrm>
+            <a:off x="795528" y="1389888"/>
+            <a:ext cx="5029200" cy="274320"/>
           </a:xfrm>
           <a:prstGeom prst="rect">
             <a:avLst/>
@@ -3013,11 +3040,11 @@
           <a:bodyPr wrap="square" lIns="0" tIns="0" rIns="0" bIns="0" rtlCol="0" anchor="ctr"/>
           <a:lstStyle/>
           <a:p>
-            <a:pPr algn="ctr" indent="0" marL="0">
-              <a:buNone/>
-            </a:pPr>
-            <a:r>
-              <a:rPr lang="en-US" sz="1200" dirty="0">
+            <a:pPr indent="0" marL="0">
+              <a:buNone/>
+            </a:pPr>
+            <a:r>
+              <a:rPr lang="en-US" sz="1300" dirty="0">
                 <a:solidFill>
                   <a:srgbClr val="4338CA"/>
                 </a:solidFill>
@@ -3027,75 +3054,319 @@
               </a:rPr>
               <a:t>● </a:t>
             </a:r>
-            <a:pPr algn="ctr" indent="0" marL="0">
+            <a:pPr indent="0" marL="0">
+              <a:buNone/>
+            </a:pPr>
+            <a:r>
+              <a:rPr lang="en-US" sz="1300" b="1" dirty="0">
+                <a:solidFill>
+                  <a:srgbClr val="4338CA"/>
+                </a:solidFill>
+                <a:latin typeface="맑은 고딕" pitchFamily="34" charset="0"/>
+                <a:ea typeface="맑은 고딕" pitchFamily="34" charset="-122"/>
+                <a:cs typeface="맑은 고딕" pitchFamily="34" charset="-120"/>
+              </a:rPr>
+              <a:t>AI가 초안 작성</a:t>
+            </a:r>
+            <a:endParaRPr lang="en-US" sz="1300" dirty="0"/>
+          </a:p>
+        </p:txBody>
+      </p:sp>
+      <p:sp>
+        <p:nvSpPr>
+          <p:cNvPr id="7" name="Text 5"/>
+          <p:cNvSpPr/>
+          <p:nvPr/>
+        </p:nvSpPr>
+        <p:spPr>
+          <a:xfrm>
+            <a:off x="795528" y="1645920"/>
+            <a:ext cx="5029200" cy="384048"/>
+          </a:xfrm>
+          <a:prstGeom prst="rect">
+            <a:avLst/>
+          </a:prstGeom>
+          <a:noFill/>
+          <a:ln/>
+        </p:spPr>
+        <p:txBody>
+          <a:bodyPr wrap="square" lIns="0" tIns="0" rIns="0" bIns="0" rtlCol="0" anchor="ctr"/>
+          <a:lstStyle/>
+          <a:p>
+            <a:pPr indent="0" marL="0">
+              <a:lnSpc>
+                <a:spcPct val="105000"/>
+              </a:lnSpc>
+              <a:buNone/>
+            </a:pPr>
+            <a:r>
+              <a:rPr lang="en-US" sz="1050" dirty="0">
+                <a:solidFill>
+                  <a:srgbClr val="1F2937"/>
+                </a:solidFill>
+                <a:latin typeface="맑은 고딕" pitchFamily="34" charset="0"/>
+                <a:ea typeface="맑은 고딕" pitchFamily="34" charset="-122"/>
+                <a:cs typeface="맑은 고딕" pitchFamily="34" charset="-120"/>
+              </a:rPr>
+              <a:t>개선요청 · 요청사항 · 기능/비기능 요구사항 등 — 고객 요구와 정해진 양식에서 규칙적으로 도출</a:t>
+            </a:r>
+            <a:endParaRPr lang="en-US" sz="1050" dirty="0"/>
+          </a:p>
+        </p:txBody>
+      </p:sp>
+      <p:sp>
+        <p:nvSpPr>
+          <p:cNvPr id="8" name="Shape 6"/>
+          <p:cNvSpPr/>
+          <p:nvPr/>
+        </p:nvSpPr>
+        <p:spPr>
+          <a:xfrm>
+            <a:off x="6217920" y="1316736"/>
+            <a:ext cx="5413248" cy="768096"/>
+          </a:xfrm>
+          <a:prstGeom prst="roundRect">
+            <a:avLst>
+              <a:gd name="adj" fmla="val 9524"/>
+            </a:avLst>
+          </a:prstGeom>
+          <a:solidFill>
+            <a:srgbClr val="FFF7ED"/>
+          </a:solidFill>
+          <a:ln w="12700">
+            <a:solidFill>
+              <a:srgbClr val="FED7AA"/>
+            </a:solidFill>
+            <a:prstDash val="solid"/>
+          </a:ln>
+        </p:spPr>
+      </p:sp>
+      <p:sp>
+        <p:nvSpPr>
+          <p:cNvPr id="9" name="Text 7"/>
+          <p:cNvSpPr/>
+          <p:nvPr/>
+        </p:nvSpPr>
+        <p:spPr>
+          <a:xfrm>
+            <a:off x="6446520" y="1389888"/>
+            <a:ext cx="5029200" cy="274320"/>
+          </a:xfrm>
+          <a:prstGeom prst="rect">
+            <a:avLst/>
+          </a:prstGeom>
+          <a:noFill/>
+          <a:ln/>
+        </p:spPr>
+        <p:txBody>
+          <a:bodyPr wrap="square" lIns="0" tIns="0" rIns="0" bIns="0" rtlCol="0" anchor="ctr"/>
+          <a:lstStyle/>
+          <a:p>
+            <a:pPr indent="0" marL="0">
+              <a:buNone/>
+            </a:pPr>
+            <a:r>
+              <a:rPr lang="en-US" sz="1300" dirty="0">
+                <a:solidFill>
+                  <a:srgbClr val="C2410C"/>
+                </a:solidFill>
+                <a:latin typeface="맑은 고딕" pitchFamily="34" charset="0"/>
+                <a:ea typeface="맑은 고딕" pitchFamily="34" charset="-122"/>
+                <a:cs typeface="맑은 고딕" pitchFamily="34" charset="-120"/>
+              </a:rPr>
+              <a:t>● </a:t>
+            </a:r>
+            <a:pPr indent="0" marL="0">
+              <a:buNone/>
+            </a:pPr>
+            <a:r>
+              <a:rPr lang="en-US" sz="1300" b="1" dirty="0">
+                <a:solidFill>
+                  <a:srgbClr val="C2410C"/>
+                </a:solidFill>
+                <a:latin typeface="맑은 고딕" pitchFamily="34" charset="0"/>
+                <a:ea typeface="맑은 고딕" pitchFamily="34" charset="-122"/>
+                <a:cs typeface="맑은 고딕" pitchFamily="34" charset="-120"/>
+              </a:rPr>
+              <a:t>사람이 직접 작성</a:t>
+            </a:r>
+            <a:endParaRPr lang="en-US" sz="1300" dirty="0"/>
+          </a:p>
+        </p:txBody>
+      </p:sp>
+      <p:sp>
+        <p:nvSpPr>
+          <p:cNvPr id="10" name="Text 8"/>
+          <p:cNvSpPr/>
+          <p:nvPr/>
+        </p:nvSpPr>
+        <p:spPr>
+          <a:xfrm>
+            <a:off x="6446520" y="1645920"/>
+            <a:ext cx="5029200" cy="384048"/>
+          </a:xfrm>
+          <a:prstGeom prst="rect">
+            <a:avLst/>
+          </a:prstGeom>
+          <a:noFill/>
+          <a:ln/>
+        </p:spPr>
+        <p:txBody>
+          <a:bodyPr wrap="square" lIns="0" tIns="0" rIns="0" bIns="0" rtlCol="0" anchor="ctr"/>
+          <a:lstStyle/>
+          <a:p>
+            <a:pPr indent="0" marL="0">
+              <a:lnSpc>
+                <a:spcPct val="105000"/>
+              </a:lnSpc>
+              <a:buNone/>
+            </a:pPr>
+            <a:r>
+              <a:rPr lang="en-US" sz="1050" dirty="0">
+                <a:solidFill>
+                  <a:srgbClr val="1F2937"/>
+                </a:solidFill>
+                <a:latin typeface="맑은 고딕" pitchFamily="34" charset="0"/>
+                <a:ea typeface="맑은 고딕" pitchFamily="34" charset="-122"/>
+                <a:cs typeface="맑은 고딕" pitchFamily="34" charset="-120"/>
+              </a:rPr>
+              <a:t>현상기록 · 변경범위 · 다이어그램 · 특이사항 등 — 현재 시스템·설계 지식·판단이 필요</a:t>
+            </a:r>
+            <a:endParaRPr lang="en-US" sz="1050" dirty="0"/>
+          </a:p>
+        </p:txBody>
+      </p:sp>
+      <p:sp>
+        <p:nvSpPr>
+          <p:cNvPr id="11" name="Shape 9"/>
+          <p:cNvSpPr/>
+          <p:nvPr/>
+        </p:nvSpPr>
+        <p:spPr>
+          <a:xfrm>
+            <a:off x="566928" y="2176272"/>
+            <a:ext cx="11064240" cy="530352"/>
+          </a:xfrm>
+          <a:prstGeom prst="roundRect">
+            <a:avLst>
+              <a:gd name="adj" fmla="val 13793"/>
+            </a:avLst>
+          </a:prstGeom>
+          <a:solidFill>
+            <a:srgbClr val="FEF9EF"/>
+          </a:solidFill>
+          <a:ln w="12700">
+            <a:solidFill>
+              <a:srgbClr val="FDE9C8"/>
+            </a:solidFill>
+            <a:prstDash val="solid"/>
+          </a:ln>
+        </p:spPr>
+      </p:sp>
+      <p:sp>
+        <p:nvSpPr>
+          <p:cNvPr id="12" name="Text 10"/>
+          <p:cNvSpPr/>
+          <p:nvPr/>
+        </p:nvSpPr>
+        <p:spPr>
+          <a:xfrm>
+            <a:off x="841248" y="2249424"/>
+            <a:ext cx="10515600" cy="384048"/>
+          </a:xfrm>
+          <a:prstGeom prst="rect">
+            <a:avLst/>
+          </a:prstGeom>
+          <a:noFill/>
+          <a:ln/>
+        </p:spPr>
+        <p:txBody>
+          <a:bodyPr wrap="square" lIns="0" tIns="0" rIns="0" bIns="0" rtlCol="0" anchor="ctr"/>
+          <a:lstStyle/>
+          <a:p>
+            <a:pPr indent="0" marL="0">
               <a:buNone/>
             </a:pPr>
             <a:r>
               <a:rPr lang="en-US" sz="1150" b="1" dirty="0">
                 <a:solidFill>
-                  <a:srgbClr val="4338CA"/>
-                </a:solidFill>
-                <a:latin typeface="맑은 고딕" pitchFamily="34" charset="0"/>
-                <a:ea typeface="맑은 고딕" pitchFamily="34" charset="-122"/>
-                <a:cs typeface="맑은 고딕" pitchFamily="34" charset="-120"/>
-              </a:rPr>
-              <a:t>AI 초안</a:t>
-            </a:r>
-            <a:pPr algn="ctr" indent="0" marL="0">
+                  <a:srgbClr val="C2410C"/>
+                </a:solidFill>
+                <a:latin typeface="맑은 고딕" pitchFamily="34" charset="0"/>
+                <a:ea typeface="맑은 고딕" pitchFamily="34" charset="-122"/>
+                <a:cs typeface="맑은 고딕" pitchFamily="34" charset="-120"/>
+              </a:rPr>
+              <a:t>왜 사람의 손길이 필요한가?  </a:t>
+            </a:r>
+            <a:pPr indent="0" marL="0">
               <a:buNone/>
             </a:pPr>
             <a:r>
               <a:rPr lang="en-US" sz="1150" dirty="0">
                 <a:solidFill>
-                  <a:srgbClr val="6B7280"/>
-                </a:solidFill>
-                <a:latin typeface="맑은 고딕" pitchFamily="34" charset="0"/>
-                <a:ea typeface="맑은 고딕" pitchFamily="34" charset="-122"/>
-                <a:cs typeface="맑은 고딕" pitchFamily="34" charset="-120"/>
-              </a:rPr>
-              <a:t>  고객 요구·정해진 양식에서 도출        </a:t>
-            </a:r>
-            <a:pPr algn="ctr" indent="0" marL="0">
-              <a:buNone/>
-            </a:pPr>
-            <a:r>
-              <a:rPr lang="en-US" sz="1200" dirty="0">
-                <a:solidFill>
-                  <a:srgbClr val="C2410C"/>
-                </a:solidFill>
-                <a:latin typeface="맑은 고딕" pitchFamily="34" charset="0"/>
-                <a:ea typeface="맑은 고딕" pitchFamily="34" charset="-122"/>
-                <a:cs typeface="맑은 고딕" pitchFamily="34" charset="-120"/>
-              </a:rPr>
-              <a:t>● </a:t>
-            </a:r>
-            <a:pPr algn="ctr" indent="0" marL="0">
+                  <a:srgbClr val="1F2937"/>
+                </a:solidFill>
+                <a:latin typeface="맑은 고딕" pitchFamily="34" charset="0"/>
+                <a:ea typeface="맑은 고딕" pitchFamily="34" charset="-122"/>
+                <a:cs typeface="맑은 고딕" pitchFamily="34" charset="-120"/>
+              </a:rPr>
+              <a:t>AI는 기존 코드·시스템의 </a:t>
+            </a:r>
+            <a:pPr indent="0" marL="0">
               <a:buNone/>
             </a:pPr>
             <a:r>
               <a:rPr lang="en-US" sz="1150" b="1" dirty="0">
                 <a:solidFill>
-                  <a:srgbClr val="C2410C"/>
-                </a:solidFill>
-                <a:latin typeface="맑은 고딕" pitchFamily="34" charset="0"/>
-                <a:ea typeface="맑은 고딕" pitchFamily="34" charset="-122"/>
-                <a:cs typeface="맑은 고딕" pitchFamily="34" charset="-120"/>
-              </a:rPr>
-              <a:t>사람</a:t>
-            </a:r>
-            <a:pPr algn="ctr" indent="0" marL="0">
+                  <a:srgbClr val="1F2937"/>
+                </a:solidFill>
+                <a:latin typeface="맑은 고딕" pitchFamily="34" charset="0"/>
+                <a:ea typeface="맑은 고딕" pitchFamily="34" charset="-122"/>
+                <a:cs typeface="맑은 고딕" pitchFamily="34" charset="-120"/>
+              </a:rPr>
+              <a:t>현재 상태(as-is)를 알 수 없고</a:t>
+            </a:r>
+            <a:pPr indent="0" marL="0">
               <a:buNone/>
             </a:pPr>
             <a:r>
               <a:rPr lang="en-US" sz="1150" dirty="0">
                 <a:solidFill>
-                  <a:srgbClr val="6B7280"/>
-                </a:solidFill>
-                <a:latin typeface="맑은 고딕" pitchFamily="34" charset="0"/>
-                <a:ea typeface="맑은 고딕" pitchFamily="34" charset="-122"/>
-                <a:cs typeface="맑은 고딕" pitchFamily="34" charset="-120"/>
-              </a:rPr>
-              <a:t>  현재 시스템(as-is)·설계 지식·판단이 필요한 부분</a:t>
+                  <a:srgbClr val="1F2937"/>
+                </a:solidFill>
+                <a:latin typeface="맑은 고딕" pitchFamily="34" charset="0"/>
+                <a:ea typeface="맑은 고딕" pitchFamily="34" charset="-122"/>
+                <a:cs typeface="맑은 고딕" pitchFamily="34" charset="-120"/>
+              </a:rPr>
+              <a:t>, 설계 결정·예외 판단은 </a:t>
+            </a:r>
+            <a:pPr indent="0" marL="0">
+              <a:buNone/>
+            </a:pPr>
+            <a:r>
+              <a:rPr lang="en-US" sz="1150" b="1" dirty="0">
+                <a:solidFill>
+                  <a:srgbClr val="1F2937"/>
+                </a:solidFill>
+                <a:latin typeface="맑은 고딕" pitchFamily="34" charset="0"/>
+                <a:ea typeface="맑은 고딕" pitchFamily="34" charset="-122"/>
+                <a:cs typeface="맑은 고딕" pitchFamily="34" charset="-120"/>
+              </a:rPr>
+              <a:t>책임과 도메인 경험이 필요</a:t>
+            </a:r>
+            <a:pPr indent="0" marL="0">
+              <a:buNone/>
+            </a:pPr>
+            <a:r>
+              <a:rPr lang="en-US" sz="1150" dirty="0">
+                <a:solidFill>
+                  <a:srgbClr val="1F2937"/>
+                </a:solidFill>
+                <a:latin typeface="맑은 고딕" pitchFamily="34" charset="0"/>
+                <a:ea typeface="맑은 고딕" pitchFamily="34" charset="-122"/>
+                <a:cs typeface="맑은 고딕" pitchFamily="34" charset="-120"/>
+              </a:rPr>
+              <a:t>하다.  → AI 초안 위에 사람이 검토·보완한다.</a:t>
             </a:r>
             <a:endParaRPr lang="en-US" sz="1150" dirty="0"/>
           </a:p>
@@ -3116,7 +3387,7 @@
           </p:nvPr>
         </p:nvGraphicFramePr>
         <p:xfrm>
-          <a:off x="566928" y="1828800"/>
+          <a:off x="566928" y="2798064"/>
           <a:ext cx="11064240" cy="914400"/>
         </p:xfrm>
         <a:graphic>
@@ -3124,11 +3395,10 @@
             <a:tbl>
               <a:tblPr/>
               <a:tblGrid>
-                <a:gridCol w="2148840"/>
-                <a:gridCol w="6537960"/>
-                <a:gridCol w="2377440"/>
+                <a:gridCol w="2331720"/>
+                <a:gridCol w="8732520"/>
               </a:tblGrid>
-              <a:tr h="329184">
+              <a:tr h="310896">
                 <a:tc>
                   <a:txBody>
                     <a:bodyPr/>
@@ -3155,7 +3425,7 @@
                       </a:endParaRPr>
                     </a:p>
                   </a:txBody>
-                  <a:tcPr marL="88900" marR="88900" marT="50800" marB="50800" anchor="ctr">
+                  <a:tcPr marL="101600" marR="101600" marT="50800" marB="50800" anchor="ctr">
                     <a:lnL w="12700" cap="flat" cmpd="sng" algn="ctr">
                       <a:solidFill>
                         <a:srgbClr val="E5E7EB"/>
@@ -3223,75 +3493,7 @@
                       </a:endParaRPr>
                     </a:p>
                   </a:txBody>
-                  <a:tcPr marL="88900" marR="88900" marT="50800" marB="50800" anchor="ctr">
-                    <a:lnL w="12700" cap="flat" cmpd="sng" algn="ctr">
-                      <a:solidFill>
-                        <a:srgbClr val="E5E7EB"/>
-                      </a:solidFill>
-                      <a:prstDash val="solid"/>
-                      <a:round/>
-                      <a:headEnd type="none" w="med" len="med"/>
-                      <a:tailEnd type="none" w="med" len="med"/>
-                    </a:lnL>
-                    <a:lnR w="12700" cap="flat" cmpd="sng" algn="ctr">
-                      <a:solidFill>
-                        <a:srgbClr val="E5E7EB"/>
-                      </a:solidFill>
-                      <a:prstDash val="solid"/>
-                      <a:round/>
-                      <a:headEnd type="none" w="med" len="med"/>
-                      <a:tailEnd type="none" w="med" len="med"/>
-                    </a:lnR>
-                    <a:lnT w="12700" cap="flat" cmpd="sng" algn="ctr">
-                      <a:solidFill>
-                        <a:srgbClr val="E5E7EB"/>
-                      </a:solidFill>
-                      <a:prstDash val="solid"/>
-                      <a:round/>
-                      <a:headEnd type="none" w="med" len="med"/>
-                      <a:tailEnd type="none" w="med" len="med"/>
-                    </a:lnT>
-                    <a:lnB w="12700" cap="flat" cmpd="sng" algn="ctr">
-                      <a:solidFill>
-                        <a:srgbClr val="E5E7EB"/>
-                      </a:solidFill>
-                      <a:prstDash val="solid"/>
-                      <a:round/>
-                      <a:headEnd type="none" w="med" len="med"/>
-                      <a:tailEnd type="none" w="med" len="med"/>
-                    </a:lnB>
-                    <a:solidFill>
-                      <a:srgbClr val="1E1B4B"/>
-                    </a:solidFill>
-                  </a:tcPr>
-                </a:tc>
-                <a:tc>
-                  <a:txBody>
-                    <a:bodyPr/>
-                    <a:lstStyle/>
-                    <a:p>
-                      <a:pPr algn="l" indent="0" marL="0">
-                        <a:buNone/>
-                      </a:pPr>
-                      <a:r>
-                        <a:rPr lang="en-US" sz="1150" b="1" dirty="0">
-                          <a:solidFill>
-                            <a:srgbClr val="FFFFFF"/>
-                          </a:solidFill>
-                          <a:latin typeface="맑은 고딕" pitchFamily="34" charset="0"/>
-                          <a:ea typeface="맑은 고딕" pitchFamily="34" charset="-122"/>
-                          <a:cs typeface="맑은 고딕" pitchFamily="34" charset="-120"/>
-                        </a:rPr>
-                        <a:t>커버리지 (누가 무엇을)</a:t>
-                      </a:r>
-                      <a:endParaRPr lang="en-US" sz="1150" dirty="0">
-                        <a:latin typeface="맑은 고딕" charset="0"/>
-                        <a:ea typeface="맑은 고딕" charset="0"/>
-                        <a:cs typeface="맑은 고딕" charset="0"/>
-                      </a:endParaRPr>
-                    </a:p>
-                  </a:txBody>
-                  <a:tcPr marL="88900" marR="88900" marT="50800" marB="50800" anchor="ctr">
+                  <a:tcPr marL="101600" marR="101600" marT="50800" marB="50800" anchor="ctr">
                     <a:lnL w="12700" cap="flat" cmpd="sng" algn="ctr">
                       <a:solidFill>
                         <a:srgbClr val="E5E7EB"/>
@@ -3334,7 +3536,7 @@
                   </a:tcPr>
                 </a:tc>
               </a:tr>
-              <a:tr h="960120">
+              <a:tr h="713232">
                 <a:tc>
                   <a:txBody>
                     <a:bodyPr/>
@@ -3396,7 +3598,7 @@
                       </a:endParaRPr>
                     </a:p>
                   </a:txBody>
-                  <a:tcPr marL="88900" marR="88900" marT="50800" marB="50800" anchor="ctr">
+                  <a:tcPr marL="101600" marR="101600" marT="50800" marB="50800" anchor="ctr">
                     <a:lnL w="12700" cap="flat" cmpd="sng" algn="ctr">
                       <a:solidFill>
                         <a:srgbClr val="E5E7EB"/>
@@ -3452,7 +3654,7 @@
                           <a:ea typeface="맑은 고딕" pitchFamily="34" charset="-122"/>
                           <a:cs typeface="맑은 고딕" pitchFamily="34" charset="-120"/>
                         </a:rPr>
-                        <a:t>● </a:t>
+                        <a:t>●  </a:t>
                       </a:r>
                       <a:pPr indent="0" marL="0">
                         <a:buNone/>
@@ -3480,15 +3682,22 @@
                           <a:ea typeface="맑은 고딕" pitchFamily="34" charset="-122"/>
                           <a:cs typeface="맑은 고딕" pitchFamily="34" charset="-120"/>
                         </a:rPr>
-                        <a:t>— 현재 동작·문제 상황</a:t>
+                        <a:t>— 현재 동작·문제</a:t>
                       </a:r>
-                      <a:endParaRPr lang="en-US" sz="1200" dirty="0">
-                        <a:latin typeface="맑은 고딕" charset="0"/>
-                        <a:ea typeface="맑은 고딕" charset="0"/>
-                        <a:cs typeface="맑은 고딕" charset="0"/>
-                      </a:endParaRPr>
-                    </a:p>
-                    <a:p>
+                      <a:pPr indent="0" marL="0">
+                        <a:buNone/>
+                      </a:pPr>
+                      <a:r>
+                        <a:rPr lang="en-US" sz="1000" dirty="0">
+                          <a:solidFill>
+                            <a:srgbClr val="000000"/>
+                          </a:solidFill>
+                          <a:latin typeface="맑은 고딕" pitchFamily="34" charset="0"/>
+                          <a:ea typeface="맑은 고딕" pitchFamily="34" charset="-122"/>
+                          <a:cs typeface="맑은 고딕" pitchFamily="34" charset="-120"/>
+                        </a:rPr>
+                        <a:t>         </a:t>
+                      </a:r>
                       <a:pPr indent="0" marL="0">
                         <a:buNone/>
                       </a:pPr>
@@ -3501,7 +3710,7 @@
                           <a:ea typeface="맑은 고딕" pitchFamily="34" charset="-122"/>
                           <a:cs typeface="맑은 고딕" pitchFamily="34" charset="-120"/>
                         </a:rPr>
-                        <a:t>● </a:t>
+                        <a:t>●  </a:t>
                       </a:r>
                       <a:pPr indent="0" marL="0">
                         <a:buNone/>
@@ -3550,7 +3759,7 @@
                           <a:ea typeface="맑은 고딕" pitchFamily="34" charset="-122"/>
                           <a:cs typeface="맑은 고딕" pitchFamily="34" charset="-120"/>
                         </a:rPr>
-                        <a:t>● </a:t>
+                        <a:t>●  </a:t>
                       </a:r>
                       <a:pPr indent="0" marL="0">
                         <a:buNone/>
@@ -3592,7 +3801,7 @@
                           <a:ea typeface="맑은 고딕" pitchFamily="34" charset="-122"/>
                           <a:cs typeface="맑은 고딕" pitchFamily="34" charset="-120"/>
                         </a:rPr>
-                        <a:t>     </a:t>
+                        <a:t>         </a:t>
                       </a:r>
                       <a:pPr indent="0" marL="0">
                         <a:buNone/>
@@ -3606,7 +3815,7 @@
                           <a:ea typeface="맑은 고딕" pitchFamily="34" charset="-122"/>
                           <a:cs typeface="맑은 고딕" pitchFamily="34" charset="-120"/>
                         </a:rPr>
-                        <a:t>● </a:t>
+                        <a:t>●  </a:t>
                       </a:r>
                       <a:pPr indent="0" marL="0">
                         <a:buNone/>
@@ -3655,7 +3864,7 @@
                           <a:ea typeface="맑은 고딕" pitchFamily="34" charset="-122"/>
                           <a:cs typeface="맑은 고딕" pitchFamily="34" charset="-120"/>
                         </a:rPr>
-                        <a:t>● </a:t>
+                        <a:t>●  </a:t>
                       </a:r>
                       <a:pPr indent="0" marL="0">
                         <a:buNone/>
@@ -3669,7 +3878,7 @@
                           <a:ea typeface="맑은 고딕" pitchFamily="34" charset="-122"/>
                           <a:cs typeface="맑은 고딕" pitchFamily="34" charset="-120"/>
                         </a:rPr>
-                        <a:t>변경 전(as-is) </a:t>
+                        <a:t>변경 전·후 </a:t>
                       </a:r>
                       <a:pPr indent="0" marL="0">
                         <a:buNone/>
@@ -3683,63 +3892,7 @@
                           <a:ea typeface="맑은 고딕" pitchFamily="34" charset="-122"/>
                           <a:cs typeface="맑은 고딕" pitchFamily="34" charset="-120"/>
                         </a:rPr>
-                        <a:t>— 현재 설계·동작</a:t>
-                      </a:r>
-                      <a:pPr indent="0" marL="0">
-                        <a:buNone/>
-                      </a:pPr>
-                      <a:r>
-                        <a:rPr lang="en-US" sz="1000" dirty="0">
-                          <a:solidFill>
-                            <a:srgbClr val="000000"/>
-                          </a:solidFill>
-                          <a:latin typeface="맑은 고딕" pitchFamily="34" charset="0"/>
-                          <a:ea typeface="맑은 고딕" pitchFamily="34" charset="-122"/>
-                          <a:cs typeface="맑은 고딕" pitchFamily="34" charset="-120"/>
-                        </a:rPr>
-                        <a:t>     </a:t>
-                      </a:r>
-                      <a:pPr indent="0" marL="0">
-                        <a:buNone/>
-                      </a:pPr>
-                      <a:r>
-                        <a:rPr lang="en-US" sz="800" dirty="0">
-                          <a:solidFill>
-                            <a:srgbClr val="4338CA"/>
-                          </a:solidFill>
-                          <a:latin typeface="맑은 고딕" pitchFamily="34" charset="0"/>
-                          <a:ea typeface="맑은 고딕" pitchFamily="34" charset="-122"/>
-                          <a:cs typeface="맑은 고딕" pitchFamily="34" charset="-120"/>
-                        </a:rPr>
-                        <a:t>● </a:t>
-                      </a:r>
-                      <a:pPr indent="0" marL="0">
-                        <a:buNone/>
-                      </a:pPr>
-                      <a:r>
-                        <a:rPr lang="en-US" sz="1000" b="1" dirty="0">
-                          <a:solidFill>
-                            <a:srgbClr val="1F2937"/>
-                          </a:solidFill>
-                          <a:latin typeface="맑은 고딕" pitchFamily="34" charset="0"/>
-                          <a:ea typeface="맑은 고딕" pitchFamily="34" charset="-122"/>
-                          <a:cs typeface="맑은 고딕" pitchFamily="34" charset="-120"/>
-                        </a:rPr>
-                        <a:t>변경 후(to-be) </a:t>
-                      </a:r>
-                      <a:pPr indent="0" marL="0">
-                        <a:buNone/>
-                      </a:pPr>
-                      <a:r>
-                        <a:rPr lang="en-US" sz="1000" dirty="0">
-                          <a:solidFill>
-                            <a:srgbClr val="475569"/>
-                          </a:solidFill>
-                          <a:latin typeface="맑은 고딕" pitchFamily="34" charset="0"/>
-                          <a:ea typeface="맑은 고딕" pitchFamily="34" charset="-122"/>
-                          <a:cs typeface="맑은 고딕" pitchFamily="34" charset="-120"/>
-                        </a:rPr>
-                        <a:t>— 요구 기반 목표</a:t>
+                        <a:t>— 변경점 설계 내용</a:t>
                       </a:r>
                       <a:endParaRPr lang="en-US" sz="1200" dirty="0">
                         <a:latin typeface="맑은 고딕" charset="0"/>
@@ -3748,114 +3901,7 @@
                       </a:endParaRPr>
                     </a:p>
                   </a:txBody>
-                  <a:tcPr marL="88900" marR="88900" marT="50800" marB="50800" anchor="ctr">
-                    <a:lnL w="12700" cap="flat" cmpd="sng" algn="ctr">
-                      <a:solidFill>
-                        <a:srgbClr val="E5E7EB"/>
-                      </a:solidFill>
-                      <a:prstDash val="solid"/>
-                      <a:round/>
-                      <a:headEnd type="none" w="med" len="med"/>
-                      <a:tailEnd type="none" w="med" len="med"/>
-                    </a:lnL>
-                    <a:lnR w="12700" cap="flat" cmpd="sng" algn="ctr">
-                      <a:solidFill>
-                        <a:srgbClr val="E5E7EB"/>
-                      </a:solidFill>
-                      <a:prstDash val="solid"/>
-                      <a:round/>
-                      <a:headEnd type="none" w="med" len="med"/>
-                      <a:tailEnd type="none" w="med" len="med"/>
-                    </a:lnR>
-                    <a:lnT w="12700" cap="flat" cmpd="sng" algn="ctr">
-                      <a:solidFill>
-                        <a:srgbClr val="E5E7EB"/>
-                      </a:solidFill>
-                      <a:prstDash val="solid"/>
-                      <a:round/>
-                      <a:headEnd type="none" w="med" len="med"/>
-                      <a:tailEnd type="none" w="med" len="med"/>
-                    </a:lnT>
-                    <a:lnB w="12700" cap="flat" cmpd="sng" algn="ctr">
-                      <a:solidFill>
-                        <a:srgbClr val="E5E7EB"/>
-                      </a:solidFill>
-                      <a:prstDash val="solid"/>
-                      <a:round/>
-                      <a:headEnd type="none" w="med" len="med"/>
-                      <a:tailEnd type="none" w="med" len="med"/>
-                    </a:lnB>
-                  </a:tcPr>
-                </a:tc>
-                <a:tc>
-                  <a:txBody>
-                    <a:bodyPr/>
-                    <a:lstStyle/>
-                    <a:p>
-                      <a:pPr indent="0" marL="0">
-                        <a:buNone/>
-                      </a:pPr>
-                      <a:r>
-                        <a:rPr lang="en-US" sz="1000" b="1" dirty="0">
-                          <a:solidFill>
-                            <a:srgbClr val="4338CA"/>
-                          </a:solidFill>
-                          <a:latin typeface="맑은 고딕" pitchFamily="34" charset="0"/>
-                          <a:ea typeface="맑은 고딕" pitchFamily="34" charset="-122"/>
-                          <a:cs typeface="맑은 고딕" pitchFamily="34" charset="-120"/>
-                        </a:rPr>
-                        <a:t>개선요청·제약·to-be</a:t>
-                      </a:r>
-                      <a:pPr indent="0" marL="0">
-                        <a:buNone/>
-                      </a:pPr>
-                      <a:r>
-                        <a:rPr lang="en-US" sz="1000" dirty="0">
-                          <a:solidFill>
-                            <a:srgbClr val="475569"/>
-                          </a:solidFill>
-                          <a:latin typeface="맑은 고딕" pitchFamily="34" charset="0"/>
-                          <a:ea typeface="맑은 고딕" pitchFamily="34" charset="-122"/>
-                          <a:cs typeface="맑은 고딕" pitchFamily="34" charset="-120"/>
-                        </a:rPr>
-                        <a:t>는 AI 초안, </a:t>
-                      </a:r>
-                      <a:pPr indent="0" marL="0">
-                        <a:buNone/>
-                      </a:pPr>
-                      <a:r>
-                        <a:rPr lang="en-US" sz="1000" b="1" dirty="0">
-                          <a:solidFill>
-                            <a:srgbClr val="C2410C"/>
-                          </a:solidFill>
-                          <a:latin typeface="맑은 고딕" pitchFamily="34" charset="0"/>
-                          <a:ea typeface="맑은 고딕" pitchFamily="34" charset="-122"/>
-                          <a:cs typeface="맑은 고딕" pitchFamily="34" charset="-120"/>
-                        </a:rPr>
-                        <a:t>현상기록·변경범위·as-is</a:t>
-                      </a:r>
-                      <a:pPr indent="0" marL="0">
-                        <a:buNone/>
-                      </a:pPr>
-                      <a:r>
-                        <a:rPr lang="en-US" sz="1000" dirty="0">
-                          <a:solidFill>
-                            <a:srgbClr val="475569"/>
-                          </a:solidFill>
-                          <a:latin typeface="맑은 고딕" pitchFamily="34" charset="0"/>
-                          <a:ea typeface="맑은 고딕" pitchFamily="34" charset="-122"/>
-                          <a:cs typeface="맑은 고딕" pitchFamily="34" charset="-120"/>
-                        </a:rPr>
-                        <a:t>는 사람</a:t>
-                      </a:r>
-                      <a:endParaRPr lang="en-US" sz="1200" dirty="0">
-                        <a:latin typeface="맑은 고딕" charset="0"/>
-                        <a:ea typeface="맑은 고딕" charset="0"/>
-                        <a:cs typeface="맑은 고딕" charset="0"/>
-                      </a:endParaRPr>
-                    </a:p>
-                  </a:txBody>
-                  <a:tcPr marL="88900" marR="88900" marT="50800" marB="50800" anchor="ctr">
+                  <a:tcPr marL="101600" marR="101600" marT="50800" marB="50800" anchor="ctr">
                     <a:lnL w="12700" cap="flat" cmpd="sng" algn="ctr">
                       <a:solidFill>
                         <a:srgbClr val="E5E7EB"/>
@@ -3895,7 +3941,7 @@
                   </a:tcPr>
                 </a:tc>
               </a:tr>
-              <a:tr h="777240">
+              <a:tr h="603504">
                 <a:tc>
                   <a:txBody>
                     <a:bodyPr/>
@@ -3957,7 +4003,7 @@
                       </a:endParaRPr>
                     </a:p>
                   </a:txBody>
-                  <a:tcPr marL="88900" marR="88900" marT="50800" marB="50800" anchor="ctr">
+                  <a:tcPr marL="101600" marR="101600" marT="50800" marB="50800" anchor="ctr">
                     <a:lnL w="12700" cap="flat" cmpd="sng" algn="ctr">
                       <a:solidFill>
                         <a:srgbClr val="E5E7EB"/>
@@ -4013,7 +4059,7 @@
                           <a:ea typeface="맑은 고딕" pitchFamily="34" charset="-122"/>
                           <a:cs typeface="맑은 고딕" pitchFamily="34" charset="-120"/>
                         </a:rPr>
-                        <a:t>● </a:t>
+                        <a:t>●  </a:t>
                       </a:r>
                       <a:pPr indent="0" marL="0">
                         <a:buNone/>
@@ -4043,13 +4089,20 @@
                         </a:rPr>
                         <a:t>— 기능 개요·구현 방향</a:t>
                       </a:r>
-                      <a:endParaRPr lang="en-US" sz="1200" dirty="0">
-                        <a:latin typeface="맑은 고딕" charset="0"/>
-                        <a:ea typeface="맑은 고딕" charset="0"/>
-                        <a:cs typeface="맑은 고딕" charset="0"/>
-                      </a:endParaRPr>
-                    </a:p>
-                    <a:p>
+                      <a:pPr indent="0" marL="0">
+                        <a:buNone/>
+                      </a:pPr>
+                      <a:r>
+                        <a:rPr lang="en-US" sz="1000" dirty="0">
+                          <a:solidFill>
+                            <a:srgbClr val="000000"/>
+                          </a:solidFill>
+                          <a:latin typeface="맑은 고딕" pitchFamily="34" charset="0"/>
+                          <a:ea typeface="맑은 고딕" pitchFamily="34" charset="-122"/>
+                          <a:cs typeface="맑은 고딕" pitchFamily="34" charset="-120"/>
+                        </a:rPr>
+                        <a:t>         </a:t>
+                      </a:r>
                       <a:pPr indent="0" marL="0">
                         <a:buNone/>
                       </a:pPr>
@@ -4062,7 +4115,7 @@
                           <a:ea typeface="맑은 고딕" pitchFamily="34" charset="-122"/>
                           <a:cs typeface="맑은 고딕" pitchFamily="34" charset="-120"/>
                         </a:rPr>
-                        <a:t>● </a:t>
+                        <a:t>●  </a:t>
                       </a:r>
                       <a:pPr indent="0" marL="0">
                         <a:buNone/>
@@ -4090,7 +4143,7 @@
                           <a:ea typeface="맑은 고딕" pitchFamily="34" charset="-122"/>
                           <a:cs typeface="맑은 고딕" pitchFamily="34" charset="-120"/>
                         </a:rPr>
-                        <a:t>— 클래스 구조·관계 (설계 지식)</a:t>
+                        <a:t>— 클래스 구조·관계</a:t>
                       </a:r>
                       <a:endParaRPr lang="en-US" sz="1200" dirty="0">
                         <a:latin typeface="맑은 고딕" charset="0"/>
@@ -4111,7 +4164,7 @@
                           <a:ea typeface="맑은 고딕" pitchFamily="34" charset="-122"/>
                           <a:cs typeface="맑은 고딕" pitchFamily="34" charset="-120"/>
                         </a:rPr>
-                        <a:t>● </a:t>
+                        <a:t>●  </a:t>
                       </a:r>
                       <a:pPr indent="0" marL="0">
                         <a:buNone/>
@@ -4125,7 +4178,7 @@
                           <a:ea typeface="맑은 고딕" pitchFamily="34" charset="-122"/>
                           <a:cs typeface="맑은 고딕" pitchFamily="34" charset="-120"/>
                         </a:rPr>
-                        <a:t>Sequence (as-is) </a:t>
+                        <a:t>Sequence Diagram (as-is·to-be) </a:t>
                       </a:r>
                       <a:pPr indent="0" marL="0">
                         <a:buNone/>
@@ -4139,63 +4192,7 @@
                           <a:ea typeface="맑은 고딕" pitchFamily="34" charset="-122"/>
                           <a:cs typeface="맑은 고딕" pitchFamily="34" charset="-120"/>
                         </a:rPr>
-                        <a:t>— 현재 흐름</a:t>
-                      </a:r>
-                      <a:pPr indent="0" marL="0">
-                        <a:buNone/>
-                      </a:pPr>
-                      <a:r>
-                        <a:rPr lang="en-US" sz="1000" dirty="0">
-                          <a:solidFill>
-                            <a:srgbClr val="000000"/>
-                          </a:solidFill>
-                          <a:latin typeface="맑은 고딕" pitchFamily="34" charset="0"/>
-                          <a:ea typeface="맑은 고딕" pitchFamily="34" charset="-122"/>
-                          <a:cs typeface="맑은 고딕" pitchFamily="34" charset="-120"/>
-                        </a:rPr>
-                        <a:t>     </a:t>
-                      </a:r>
-                      <a:pPr indent="0" marL="0">
-                        <a:buNone/>
-                      </a:pPr>
-                      <a:r>
-                        <a:rPr lang="en-US" sz="800" dirty="0">
-                          <a:solidFill>
-                            <a:srgbClr val="4338CA"/>
-                          </a:solidFill>
-                          <a:latin typeface="맑은 고딕" pitchFamily="34" charset="0"/>
-                          <a:ea typeface="맑은 고딕" pitchFamily="34" charset="-122"/>
-                          <a:cs typeface="맑은 고딕" pitchFamily="34" charset="-120"/>
-                        </a:rPr>
-                        <a:t>● </a:t>
-                      </a:r>
-                      <a:pPr indent="0" marL="0">
-                        <a:buNone/>
-                      </a:pPr>
-                      <a:r>
-                        <a:rPr lang="en-US" sz="1000" b="1" dirty="0">
-                          <a:solidFill>
-                            <a:srgbClr val="1F2937"/>
-                          </a:solidFill>
-                          <a:latin typeface="맑은 고딕" pitchFamily="34" charset="0"/>
-                          <a:ea typeface="맑은 고딕" pitchFamily="34" charset="-122"/>
-                          <a:cs typeface="맑은 고딕" pitchFamily="34" charset="-120"/>
-                        </a:rPr>
-                        <a:t>Sequence (to-be) </a:t>
-                      </a:r>
-                      <a:pPr indent="0" marL="0">
-                        <a:buNone/>
-                      </a:pPr>
-                      <a:r>
-                        <a:rPr lang="en-US" sz="1000" dirty="0">
-                          <a:solidFill>
-                            <a:srgbClr val="475569"/>
-                          </a:solidFill>
-                          <a:latin typeface="맑은 고딕" pitchFamily="34" charset="0"/>
-                          <a:ea typeface="맑은 고딕" pitchFamily="34" charset="-122"/>
-                          <a:cs typeface="맑은 고딕" pitchFamily="34" charset="-120"/>
-                        </a:rPr>
-                        <a:t>— 변경 흐름</a:t>
+                        <a:t>— 처리 흐름</a:t>
                       </a:r>
                       <a:endParaRPr lang="en-US" sz="1200" dirty="0">
                         <a:latin typeface="맑은 고딕" charset="0"/>
@@ -4204,114 +4201,7 @@
                       </a:endParaRPr>
                     </a:p>
                   </a:txBody>
-                  <a:tcPr marL="88900" marR="88900" marT="50800" marB="50800" anchor="ctr">
-                    <a:lnL w="12700" cap="flat" cmpd="sng" algn="ctr">
-                      <a:solidFill>
-                        <a:srgbClr val="E5E7EB"/>
-                      </a:solidFill>
-                      <a:prstDash val="solid"/>
-                      <a:round/>
-                      <a:headEnd type="none" w="med" len="med"/>
-                      <a:tailEnd type="none" w="med" len="med"/>
-                    </a:lnL>
-                    <a:lnR w="12700" cap="flat" cmpd="sng" algn="ctr">
-                      <a:solidFill>
-                        <a:srgbClr val="E5E7EB"/>
-                      </a:solidFill>
-                      <a:prstDash val="solid"/>
-                      <a:round/>
-                      <a:headEnd type="none" w="med" len="med"/>
-                      <a:tailEnd type="none" w="med" len="med"/>
-                    </a:lnR>
-                    <a:lnT w="12700" cap="flat" cmpd="sng" algn="ctr">
-                      <a:solidFill>
-                        <a:srgbClr val="E5E7EB"/>
-                      </a:solidFill>
-                      <a:prstDash val="solid"/>
-                      <a:round/>
-                      <a:headEnd type="none" w="med" len="med"/>
-                      <a:tailEnd type="none" w="med" len="med"/>
-                    </a:lnT>
-                    <a:lnB w="12700" cap="flat" cmpd="sng" algn="ctr">
-                      <a:solidFill>
-                        <a:srgbClr val="E5E7EB"/>
-                      </a:solidFill>
-                      <a:prstDash val="solid"/>
-                      <a:round/>
-                      <a:headEnd type="none" w="med" len="med"/>
-                      <a:tailEnd type="none" w="med" len="med"/>
-                    </a:lnB>
-                  </a:tcPr>
-                </a:tc>
-                <a:tc>
-                  <a:txBody>
-                    <a:bodyPr/>
-                    <a:lstStyle/>
-                    <a:p>
-                      <a:pPr indent="0" marL="0">
-                        <a:buNone/>
-                      </a:pPr>
-                      <a:r>
-                        <a:rPr lang="en-US" sz="1000" b="1" dirty="0">
-                          <a:solidFill>
-                            <a:srgbClr val="4338CA"/>
-                          </a:solidFill>
-                          <a:latin typeface="맑은 고딕" pitchFamily="34" charset="0"/>
-                          <a:ea typeface="맑은 고딕" pitchFamily="34" charset="-122"/>
-                          <a:cs typeface="맑은 고딕" pitchFamily="34" charset="-120"/>
-                        </a:rPr>
-                        <a:t>설명·to-be 흐름</a:t>
-                      </a:r>
-                      <a:pPr indent="0" marL="0">
-                        <a:buNone/>
-                      </a:pPr>
-                      <a:r>
-                        <a:rPr lang="en-US" sz="1000" dirty="0">
-                          <a:solidFill>
-                            <a:srgbClr val="475569"/>
-                          </a:solidFill>
-                          <a:latin typeface="맑은 고딕" pitchFamily="34" charset="0"/>
-                          <a:ea typeface="맑은 고딕" pitchFamily="34" charset="-122"/>
-                          <a:cs typeface="맑은 고딕" pitchFamily="34" charset="-120"/>
-                        </a:rPr>
-                        <a:t>은 AI 초안, </a:t>
-                      </a:r>
-                      <a:pPr indent="0" marL="0">
-                        <a:buNone/>
-                      </a:pPr>
-                      <a:r>
-                        <a:rPr lang="en-US" sz="1000" b="1" dirty="0">
-                          <a:solidFill>
-                            <a:srgbClr val="C2410C"/>
-                          </a:solidFill>
-                          <a:latin typeface="맑은 고딕" pitchFamily="34" charset="0"/>
-                          <a:ea typeface="맑은 고딕" pitchFamily="34" charset="-122"/>
-                          <a:cs typeface="맑은 고딕" pitchFamily="34" charset="-120"/>
-                        </a:rPr>
-                        <a:t>다이어그램·as-is</a:t>
-                      </a:r>
-                      <a:pPr indent="0" marL="0">
-                        <a:buNone/>
-                      </a:pPr>
-                      <a:r>
-                        <a:rPr lang="en-US" sz="1000" dirty="0">
-                          <a:solidFill>
-                            <a:srgbClr val="475569"/>
-                          </a:solidFill>
-                          <a:latin typeface="맑은 고딕" pitchFamily="34" charset="0"/>
-                          <a:ea typeface="맑은 고딕" pitchFamily="34" charset="-122"/>
-                          <a:cs typeface="맑은 고딕" pitchFamily="34" charset="-120"/>
-                        </a:rPr>
-                        <a:t>는 사람이 작성</a:t>
-                      </a:r>
-                      <a:endParaRPr lang="en-US" sz="1200" dirty="0">
-                        <a:latin typeface="맑은 고딕" charset="0"/>
-                        <a:ea typeface="맑은 고딕" charset="0"/>
-                        <a:cs typeface="맑은 고딕" charset="0"/>
-                      </a:endParaRPr>
-                    </a:p>
-                  </a:txBody>
-                  <a:tcPr marL="88900" marR="88900" marT="50800" marB="50800" anchor="ctr">
+                  <a:tcPr marL="101600" marR="101600" marT="50800" marB="50800" anchor="ctr">
                     <a:lnL w="12700" cap="flat" cmpd="sng" algn="ctr">
                       <a:solidFill>
                         <a:srgbClr val="E5E7EB"/>
@@ -4351,7 +4241,7 @@
                   </a:tcPr>
                 </a:tc>
               </a:tr>
-              <a:tr h="777240">
+              <a:tr h="603504">
                 <a:tc>
                   <a:txBody>
                     <a:bodyPr/>
@@ -4413,7 +4303,7 @@
                       </a:endParaRPr>
                     </a:p>
                   </a:txBody>
-                  <a:tcPr marL="88900" marR="88900" marT="50800" marB="50800" anchor="ctr">
+                  <a:tcPr marL="101600" marR="101600" marT="50800" marB="50800" anchor="ctr">
                     <a:lnL w="12700" cap="flat" cmpd="sng" algn="ctr">
                       <a:solidFill>
                         <a:srgbClr val="E5E7EB"/>
@@ -4469,7 +4359,7 @@
                           <a:ea typeface="맑은 고딕" pitchFamily="34" charset="-122"/>
                           <a:cs typeface="맑은 고딕" pitchFamily="34" charset="-120"/>
                         </a:rPr>
-                        <a:t>● </a:t>
+                        <a:t>●  </a:t>
                       </a:r>
                       <a:pPr indent="0" marL="0">
                         <a:buNone/>
@@ -4497,15 +4387,22 @@
                           <a:ea typeface="맑은 고딕" pitchFamily="34" charset="-122"/>
                           <a:cs typeface="맑은 고딕" pitchFamily="34" charset="-120"/>
                         </a:rPr>
-                        <a:t>— 요청 부서·담당·대상 기능</a:t>
+                        <a:t>— 부서·담당·대상 기능</a:t>
                       </a:r>
-                      <a:endParaRPr lang="en-US" sz="1200" dirty="0">
-                        <a:latin typeface="맑은 고딕" charset="0"/>
-                        <a:ea typeface="맑은 고딕" charset="0"/>
-                        <a:cs typeface="맑은 고딕" charset="0"/>
-                      </a:endParaRPr>
-                    </a:p>
-                    <a:p>
+                      <a:pPr indent="0" marL="0">
+                        <a:buNone/>
+                      </a:pPr>
+                      <a:r>
+                        <a:rPr lang="en-US" sz="1000" dirty="0">
+                          <a:solidFill>
+                            <a:srgbClr val="000000"/>
+                          </a:solidFill>
+                          <a:latin typeface="맑은 고딕" pitchFamily="34" charset="0"/>
+                          <a:ea typeface="맑은 고딕" pitchFamily="34" charset="-122"/>
+                          <a:cs typeface="맑은 고딕" pitchFamily="34" charset="-120"/>
+                        </a:rPr>
+                        <a:t>         </a:t>
+                      </a:r>
                       <a:pPr indent="0" marL="0">
                         <a:buNone/>
                       </a:pPr>
@@ -4518,7 +4415,7 @@
                           <a:ea typeface="맑은 고딕" pitchFamily="34" charset="-122"/>
                           <a:cs typeface="맑은 고딕" pitchFamily="34" charset="-120"/>
                         </a:rPr>
-                        <a:t>● </a:t>
+                        <a:t>●  </a:t>
                       </a:r>
                       <a:pPr indent="0" marL="0">
                         <a:buNone/>
@@ -4546,7 +4443,7 @@
                           <a:ea typeface="맑은 고딕" pitchFamily="34" charset="-122"/>
                           <a:cs typeface="맑은 고딕" pitchFamily="34" charset="-120"/>
                         </a:rPr>
-                        <a:t>— 고객 요구 내용을 양식에 맞춰 정리·요약</a:t>
+                        <a:t>— 고객 요구를 양식에 맞춰 정리</a:t>
                       </a:r>
                       <a:endParaRPr lang="en-US" sz="1200" dirty="0">
                         <a:latin typeface="맑은 고딕" charset="0"/>
@@ -4567,7 +4464,7 @@
                           <a:ea typeface="맑은 고딕" pitchFamily="34" charset="-122"/>
                           <a:cs typeface="맑은 고딕" pitchFamily="34" charset="-120"/>
                         </a:rPr>
-                        <a:t>● </a:t>
+                        <a:t>●  </a:t>
                       </a:r>
                       <a:pPr indent="0" marL="0">
                         <a:buNone/>
@@ -4595,7 +4492,7 @@
                           <a:ea typeface="맑은 고딕" pitchFamily="34" charset="-122"/>
                           <a:cs typeface="맑은 고딕" pitchFamily="34" charset="-120"/>
                         </a:rPr>
-                        <a:t>— 제약·주의·이력 (판단)</a:t>
+                        <a:t>— 제약·주의·이력</a:t>
                       </a:r>
                       <a:endParaRPr lang="en-US" sz="1200" dirty="0">
                         <a:latin typeface="맑은 고딕" charset="0"/>
@@ -4604,114 +4501,7 @@
                       </a:endParaRPr>
                     </a:p>
                   </a:txBody>
-                  <a:tcPr marL="88900" marR="88900" marT="50800" marB="50800" anchor="ctr">
-                    <a:lnL w="12700" cap="flat" cmpd="sng" algn="ctr">
-                      <a:solidFill>
-                        <a:srgbClr val="E5E7EB"/>
-                      </a:solidFill>
-                      <a:prstDash val="solid"/>
-                      <a:round/>
-                      <a:headEnd type="none" w="med" len="med"/>
-                      <a:tailEnd type="none" w="med" len="med"/>
-                    </a:lnL>
-                    <a:lnR w="12700" cap="flat" cmpd="sng" algn="ctr">
-                      <a:solidFill>
-                        <a:srgbClr val="E5E7EB"/>
-                      </a:solidFill>
-                      <a:prstDash val="solid"/>
-                      <a:round/>
-                      <a:headEnd type="none" w="med" len="med"/>
-                      <a:tailEnd type="none" w="med" len="med"/>
-                    </a:lnR>
-                    <a:lnT w="12700" cap="flat" cmpd="sng" algn="ctr">
-                      <a:solidFill>
-                        <a:srgbClr val="E5E7EB"/>
-                      </a:solidFill>
-                      <a:prstDash val="solid"/>
-                      <a:round/>
-                      <a:headEnd type="none" w="med" len="med"/>
-                      <a:tailEnd type="none" w="med" len="med"/>
-                    </a:lnT>
-                    <a:lnB w="12700" cap="flat" cmpd="sng" algn="ctr">
-                      <a:solidFill>
-                        <a:srgbClr val="E5E7EB"/>
-                      </a:solidFill>
-                      <a:prstDash val="solid"/>
-                      <a:round/>
-                      <a:headEnd type="none" w="med" len="med"/>
-                      <a:tailEnd type="none" w="med" len="med"/>
-                    </a:lnB>
-                  </a:tcPr>
-                </a:tc>
-                <a:tc>
-                  <a:txBody>
-                    <a:bodyPr/>
-                    <a:lstStyle/>
-                    <a:p>
-                      <a:pPr indent="0" marL="0">
-                        <a:buNone/>
-                      </a:pPr>
-                      <a:r>
-                        <a:rPr lang="en-US" sz="1000" b="1" dirty="0">
-                          <a:solidFill>
-                            <a:srgbClr val="4338CA"/>
-                          </a:solidFill>
-                          <a:latin typeface="맑은 고딕" pitchFamily="34" charset="0"/>
-                          <a:ea typeface="맑은 고딕" pitchFamily="34" charset="-122"/>
-                          <a:cs typeface="맑은 고딕" pitchFamily="34" charset="-120"/>
-                        </a:rPr>
-                        <a:t>요청사항</a:t>
-                      </a:r>
-                      <a:pPr indent="0" marL="0">
-                        <a:buNone/>
-                      </a:pPr>
-                      <a:r>
-                        <a:rPr lang="en-US" sz="1000" dirty="0">
-                          <a:solidFill>
-                            <a:srgbClr val="475569"/>
-                          </a:solidFill>
-                          <a:latin typeface="맑은 고딕" pitchFamily="34" charset="0"/>
-                          <a:ea typeface="맑은 고딕" pitchFamily="34" charset="-122"/>
-                          <a:cs typeface="맑은 고딕" pitchFamily="34" charset="-120"/>
-                        </a:rPr>
-                        <a:t>은 고객 요구에서 AI 초안, </a:t>
-                      </a:r>
-                      <a:pPr indent="0" marL="0">
-                        <a:buNone/>
-                      </a:pPr>
-                      <a:r>
-                        <a:rPr lang="en-US" sz="1000" b="1" dirty="0">
-                          <a:solidFill>
-                            <a:srgbClr val="C2410C"/>
-                          </a:solidFill>
-                          <a:latin typeface="맑은 고딕" pitchFamily="34" charset="0"/>
-                          <a:ea typeface="맑은 고딕" pitchFamily="34" charset="-122"/>
-                          <a:cs typeface="맑은 고딕" pitchFamily="34" charset="-120"/>
-                        </a:rPr>
-                        <a:t>요청자·특이사항</a:t>
-                      </a:r>
-                      <a:pPr indent="0" marL="0">
-                        <a:buNone/>
-                      </a:pPr>
-                      <a:r>
-                        <a:rPr lang="en-US" sz="1000" dirty="0">
-                          <a:solidFill>
-                            <a:srgbClr val="475569"/>
-                          </a:solidFill>
-                          <a:latin typeface="맑은 고딕" pitchFamily="34" charset="0"/>
-                          <a:ea typeface="맑은 고딕" pitchFamily="34" charset="-122"/>
-                          <a:cs typeface="맑은 고딕" pitchFamily="34" charset="-120"/>
-                        </a:rPr>
-                        <a:t>은 사람</a:t>
-                      </a:r>
-                      <a:endParaRPr lang="en-US" sz="1200" dirty="0">
-                        <a:latin typeface="맑은 고딕" charset="0"/>
-                        <a:ea typeface="맑은 고딕" charset="0"/>
-                        <a:cs typeface="맑은 고딕" charset="0"/>
-                      </a:endParaRPr>
-                    </a:p>
-                  </a:txBody>
-                  <a:tcPr marL="88900" marR="88900" marT="50800" marB="50800" anchor="ctr">
+                  <a:tcPr marL="101600" marR="101600" marT="50800" marB="50800" anchor="ctr">
                     <a:lnL w="12700" cap="flat" cmpd="sng" algn="ctr">
                       <a:solidFill>
                         <a:srgbClr val="E5E7EB"/>
@@ -4751,7 +4541,7 @@
                   </a:tcPr>
                 </a:tc>
               </a:tr>
-              <a:tr h="932688">
+              <a:tr h="786384">
                 <a:tc>
                   <a:txBody>
                     <a:bodyPr/>
@@ -4813,7 +4603,7 @@
                       </a:endParaRPr>
                     </a:p>
                   </a:txBody>
-                  <a:tcPr marL="88900" marR="88900" marT="50800" marB="50800" anchor="ctr">
+                  <a:tcPr marL="101600" marR="101600" marT="50800" marB="50800" anchor="ctr">
                     <a:lnL w="12700" cap="flat" cmpd="sng" algn="ctr">
                       <a:solidFill>
                         <a:srgbClr val="E5E7EB"/>
@@ -4869,7 +4659,7 @@
                           <a:ea typeface="맑은 고딕" pitchFamily="34" charset="-122"/>
                           <a:cs typeface="맑은 고딕" pitchFamily="34" charset="-120"/>
                         </a:rPr>
-                        <a:t>● </a:t>
+                        <a:t>●  </a:t>
                       </a:r>
                       <a:pPr indent="0" marL="0">
                         <a:buNone/>
@@ -4918,7 +4708,7 @@
                           <a:ea typeface="맑은 고딕" pitchFamily="34" charset="-122"/>
                           <a:cs typeface="맑은 고딕" pitchFamily="34" charset="-120"/>
                         </a:rPr>
-                        <a:t>● </a:t>
+                        <a:t>●  </a:t>
                       </a:r>
                       <a:pPr indent="0" marL="0">
                         <a:buNone/>
@@ -4995,7 +4785,7 @@
                           <a:ea typeface="맑은 고딕" pitchFamily="34" charset="-122"/>
                           <a:cs typeface="맑은 고딕" pitchFamily="34" charset="-120"/>
                         </a:rPr>
-                        <a:t>● </a:t>
+                        <a:t>●  </a:t>
                       </a:r>
                       <a:pPr indent="0" marL="0">
                         <a:buNone/>
@@ -5032,100 +4822,7 @@
                       </a:endParaRPr>
                     </a:p>
                   </a:txBody>
-                  <a:tcPr marL="88900" marR="88900" marT="50800" marB="50800" anchor="ctr">
-                    <a:lnL w="12700" cap="flat" cmpd="sng" algn="ctr">
-                      <a:solidFill>
-                        <a:srgbClr val="E5E7EB"/>
-                      </a:solidFill>
-                      <a:prstDash val="solid"/>
-                      <a:round/>
-                      <a:headEnd type="none" w="med" len="med"/>
-                      <a:tailEnd type="none" w="med" len="med"/>
-                    </a:lnL>
-                    <a:lnR w="12700" cap="flat" cmpd="sng" algn="ctr">
-                      <a:solidFill>
-                        <a:srgbClr val="E5E7EB"/>
-                      </a:solidFill>
-                      <a:prstDash val="solid"/>
-                      <a:round/>
-                      <a:headEnd type="none" w="med" len="med"/>
-                      <a:tailEnd type="none" w="med" len="med"/>
-                    </a:lnR>
-                    <a:lnT w="12700" cap="flat" cmpd="sng" algn="ctr">
-                      <a:solidFill>
-                        <a:srgbClr val="E5E7EB"/>
-                      </a:solidFill>
-                      <a:prstDash val="solid"/>
-                      <a:round/>
-                      <a:headEnd type="none" w="med" len="med"/>
-                      <a:tailEnd type="none" w="med" len="med"/>
-                    </a:lnT>
-                    <a:lnB w="12700" cap="flat" cmpd="sng" algn="ctr">
-                      <a:solidFill>
-                        <a:srgbClr val="E5E7EB"/>
-                      </a:solidFill>
-                      <a:prstDash val="solid"/>
-                      <a:round/>
-                      <a:headEnd type="none" w="med" len="med"/>
-                      <a:tailEnd type="none" w="med" len="med"/>
-                    </a:lnB>
-                  </a:tcPr>
-                </a:tc>
-                <a:tc>
-                  <a:txBody>
-                    <a:bodyPr/>
-                    <a:lstStyle/>
-                    <a:p>
-                      <a:pPr indent="0" marL="0">
-                        <a:buNone/>
-                      </a:pPr>
-                      <a:r>
-                        <a:rPr lang="en-US" sz="1000" dirty="0">
-                          <a:solidFill>
-                            <a:srgbClr val="475569"/>
-                          </a:solidFill>
-                          <a:latin typeface="맑은 고딕" pitchFamily="34" charset="0"/>
-                          <a:ea typeface="맑은 고딕" pitchFamily="34" charset="-122"/>
-                          <a:cs typeface="맑은 고딕" pitchFamily="34" charset="-120"/>
-                        </a:rPr>
-                        <a:t>고객 요구에서 규칙적으로 도출 → </a:t>
-                      </a:r>
-                      <a:pPr indent="0" marL="0">
-                        <a:buNone/>
-                      </a:pPr>
-                      <a:r>
-                        <a:rPr lang="en-US" sz="1000" b="1" dirty="0">
-                          <a:solidFill>
-                            <a:srgbClr val="4338CA"/>
-                          </a:solidFill>
-                          <a:latin typeface="맑은 고딕" pitchFamily="34" charset="0"/>
-                          <a:ea typeface="맑은 고딕" pitchFamily="34" charset="-122"/>
-                          <a:cs typeface="맑은 고딕" pitchFamily="34" charset="-120"/>
-                        </a:rPr>
-                        <a:t>전 항목 AI 초안</a:t>
-                      </a:r>
-                      <a:pPr indent="0" marL="0">
-                        <a:buNone/>
-                      </a:pPr>
-                      <a:r>
-                        <a:rPr lang="en-US" sz="1000" dirty="0">
-                          <a:solidFill>
-                            <a:srgbClr val="475569"/>
-                          </a:solidFill>
-                          <a:latin typeface="맑은 고딕" pitchFamily="34" charset="0"/>
-                          <a:ea typeface="맑은 고딕" pitchFamily="34" charset="-122"/>
-                          <a:cs typeface="맑은 고딕" pitchFamily="34" charset="-120"/>
-                        </a:rPr>
-                        <a:t> (사람이 검토·확정)</a:t>
-                      </a:r>
-                      <a:endParaRPr lang="en-US" sz="1200" dirty="0">
-                        <a:latin typeface="맑은 고딕" charset="0"/>
-                        <a:ea typeface="맑은 고딕" charset="0"/>
-                        <a:cs typeface="맑은 고딕" charset="0"/>
-                      </a:endParaRPr>
-                    </a:p>
-                  </a:txBody>
-                  <a:tcPr marL="88900" marR="88900" marT="50800" marB="50800" anchor="ctr">
+                  <a:tcPr marL="101600" marR="101600" marT="50800" marB="50800" anchor="ctr">
                     <a:lnL w="12700" cap="flat" cmpd="sng" algn="ctr">
                       <a:solidFill>
                         <a:srgbClr val="E5E7EB"/>
@@ -5165,7 +4862,7 @@
                   </a:tcPr>
                 </a:tc>
               </a:tr>
-              <a:tr h="822960">
+              <a:tr h="713232">
                 <a:tc>
                   <a:txBody>
                     <a:bodyPr/>
@@ -5227,7 +4924,7 @@
                       </a:endParaRPr>
                     </a:p>
                   </a:txBody>
-                  <a:tcPr marL="88900" marR="88900" marT="50800" marB="50800" anchor="ctr">
+                  <a:tcPr marL="101600" marR="101600" marT="50800" marB="50800" anchor="ctr">
                     <a:lnL w="12700" cap="flat" cmpd="sng" algn="ctr">
                       <a:solidFill>
                         <a:srgbClr val="E5E7EB"/>
@@ -5283,7 +4980,7 @@
                           <a:ea typeface="맑은 고딕" pitchFamily="34" charset="-122"/>
                           <a:cs typeface="맑은 고딕" pitchFamily="34" charset="-120"/>
                         </a:rPr>
-                        <a:t>● </a:t>
+                        <a:t>●  </a:t>
                       </a:r>
                       <a:pPr indent="0" marL="0">
                         <a:buNone/>
@@ -5311,7 +5008,7 @@
                           <a:ea typeface="맑은 고딕" pitchFamily="34" charset="-122"/>
                           <a:cs typeface="맑은 고딕" pitchFamily="34" charset="-120"/>
                         </a:rPr>
-                        <a:t>— 대상 품질 속성(성능·신뢰성·가용성)의 역할·목적</a:t>
+                        <a:t>— 품질 속성(성능·신뢰성·가용성)의 역할·목적</a:t>
                       </a:r>
                       <a:endParaRPr lang="en-US" sz="1200" dirty="0">
                         <a:latin typeface="맑은 고딕" charset="0"/>
@@ -5332,7 +5029,7 @@
                           <a:ea typeface="맑은 고딕" pitchFamily="34" charset="-122"/>
                           <a:cs typeface="맑은 고딕" pitchFamily="34" charset="-120"/>
                         </a:rPr>
-                        <a:t>● </a:t>
+                        <a:t>●  </a:t>
                       </a:r>
                       <a:pPr indent="0" marL="0">
                         <a:buNone/>
@@ -5360,7 +5057,7 @@
                           <a:ea typeface="맑은 고딕" pitchFamily="34" charset="-122"/>
                           <a:cs typeface="맑은 고딕" pitchFamily="34" charset="-120"/>
                         </a:rPr>
-                        <a:t>— 품질 항목마다 선행·후행·시나리오 (기능과 동일 9행 구조)</a:t>
+                        <a:t>— 품질 항목마다 선행·후행·시나리오 (기능과 동일 9행)</a:t>
                       </a:r>
                       <a:endParaRPr lang="en-US" sz="1200" dirty="0">
                         <a:latin typeface="맑은 고딕" charset="0"/>
@@ -5381,7 +5078,7 @@
                           <a:ea typeface="맑은 고딕" pitchFamily="34" charset="-122"/>
                           <a:cs typeface="맑은 고딕" pitchFamily="34" charset="-120"/>
                         </a:rPr>
-                        <a:t>● </a:t>
+                        <a:t>●  </a:t>
                       </a:r>
                       <a:pPr indent="0" marL="0">
                         <a:buNone/>
@@ -5418,100 +5115,7 @@
                       </a:endParaRPr>
                     </a:p>
                   </a:txBody>
-                  <a:tcPr marL="88900" marR="88900" marT="50800" marB="50800" anchor="ctr">
-                    <a:lnL w="12700" cap="flat" cmpd="sng" algn="ctr">
-                      <a:solidFill>
-                        <a:srgbClr val="E5E7EB"/>
-                      </a:solidFill>
-                      <a:prstDash val="solid"/>
-                      <a:round/>
-                      <a:headEnd type="none" w="med" len="med"/>
-                      <a:tailEnd type="none" w="med" len="med"/>
-                    </a:lnL>
-                    <a:lnR w="12700" cap="flat" cmpd="sng" algn="ctr">
-                      <a:solidFill>
-                        <a:srgbClr val="E5E7EB"/>
-                      </a:solidFill>
-                      <a:prstDash val="solid"/>
-                      <a:round/>
-                      <a:headEnd type="none" w="med" len="med"/>
-                      <a:tailEnd type="none" w="med" len="med"/>
-                    </a:lnR>
-                    <a:lnT w="12700" cap="flat" cmpd="sng" algn="ctr">
-                      <a:solidFill>
-                        <a:srgbClr val="E5E7EB"/>
-                      </a:solidFill>
-                      <a:prstDash val="solid"/>
-                      <a:round/>
-                      <a:headEnd type="none" w="med" len="med"/>
-                      <a:tailEnd type="none" w="med" len="med"/>
-                    </a:lnT>
-                    <a:lnB w="12700" cap="flat" cmpd="sng" algn="ctr">
-                      <a:solidFill>
-                        <a:srgbClr val="E5E7EB"/>
-                      </a:solidFill>
-                      <a:prstDash val="solid"/>
-                      <a:round/>
-                      <a:headEnd type="none" w="med" len="med"/>
-                      <a:tailEnd type="none" w="med" len="med"/>
-                    </a:lnB>
-                  </a:tcPr>
-                </a:tc>
-                <a:tc>
-                  <a:txBody>
-                    <a:bodyPr/>
-                    <a:lstStyle/>
-                    <a:p>
-                      <a:pPr indent="0" marL="0">
-                        <a:buNone/>
-                      </a:pPr>
-                      <a:r>
-                        <a:rPr lang="en-US" sz="1000" dirty="0">
-                          <a:solidFill>
-                            <a:srgbClr val="475569"/>
-                          </a:solidFill>
-                          <a:latin typeface="맑은 고딕" pitchFamily="34" charset="0"/>
-                          <a:ea typeface="맑은 고딕" pitchFamily="34" charset="-122"/>
-                          <a:cs typeface="맑은 고딕" pitchFamily="34" charset="-120"/>
-                        </a:rPr>
-                        <a:t>기능 요구사항과 동일 — </a:t>
-                      </a:r>
-                      <a:pPr indent="0" marL="0">
-                        <a:buNone/>
-                      </a:pPr>
-                      <a:r>
-                        <a:rPr lang="en-US" sz="1000" b="1" dirty="0">
-                          <a:solidFill>
-                            <a:srgbClr val="4338CA"/>
-                          </a:solidFill>
-                          <a:latin typeface="맑은 고딕" pitchFamily="34" charset="0"/>
-                          <a:ea typeface="맑은 고딕" pitchFamily="34" charset="-122"/>
-                          <a:cs typeface="맑은 고딕" pitchFamily="34" charset="-120"/>
-                        </a:rPr>
-                        <a:t>전 항목 AI 초안</a:t>
-                      </a:r>
-                      <a:pPr indent="0" marL="0">
-                        <a:buNone/>
-                      </a:pPr>
-                      <a:r>
-                        <a:rPr lang="en-US" sz="1000" dirty="0">
-                          <a:solidFill>
-                            <a:srgbClr val="475569"/>
-                          </a:solidFill>
-                          <a:latin typeface="맑은 고딕" pitchFamily="34" charset="0"/>
-                          <a:ea typeface="맑은 고딕" pitchFamily="34" charset="-122"/>
-                          <a:cs typeface="맑은 고딕" pitchFamily="34" charset="-120"/>
-                        </a:rPr>
-                        <a:t> (사람이 검토·확정)</a:t>
-                      </a:r>
-                      <a:endParaRPr lang="en-US" sz="1200" dirty="0">
-                        <a:latin typeface="맑은 고딕" charset="0"/>
-                        <a:ea typeface="맑은 고딕" charset="0"/>
-                        <a:cs typeface="맑은 고딕" charset="0"/>
-                      </a:endParaRPr>
-                    </a:p>
-                  </a:txBody>
-                  <a:tcPr marL="88900" marR="88900" marT="50800" marB="50800" anchor="ctr">
+                  <a:tcPr marL="101600" marR="101600" marT="50800" marB="50800" anchor="ctr">
                     <a:lnL w="12700" cap="flat" cmpd="sng" algn="ctr">
                       <a:solidFill>
                         <a:srgbClr val="E5E7EB"/>

--- a/docs/진행공유_요구사항자동화.pptx
+++ b/docs/진행공유_요구사항자동화.pptx
@@ -3001,15 +3001,15 @@
         <p:spPr>
           <a:xfrm>
             <a:off x="566928" y="1316736"/>
-            <a:ext cx="5413248" cy="768096"/>
+            <a:ext cx="11064240" cy="932688"/>
           </a:xfrm>
           <a:prstGeom prst="roundRect">
             <a:avLst>
-              <a:gd name="adj" fmla="val 9524"/>
+              <a:gd name="adj" fmla="val 8824"/>
             </a:avLst>
           </a:prstGeom>
           <a:solidFill>
-            <a:srgbClr val="EEF2FF"/>
+            <a:srgbClr val="F8FAFF"/>
           </a:solidFill>
           <a:ln w="12700">
             <a:solidFill>
@@ -3027,8 +3027,8 @@
         </p:nvSpPr>
         <p:spPr>
           <a:xfrm>
-            <a:off x="795528" y="1389888"/>
-            <a:ext cx="5029200" cy="274320"/>
+            <a:off x="886968" y="1399032"/>
+            <a:ext cx="10424160" cy="292608"/>
           </a:xfrm>
           <a:prstGeom prst="rect">
             <a:avLst/>
@@ -3044,7 +3044,7 @@
               <a:buNone/>
             </a:pPr>
             <a:r>
-              <a:rPr lang="en-US" sz="1300" dirty="0">
+              <a:rPr lang="en-US" sz="1200" b="1" dirty="0">
                 <a:solidFill>
                   <a:srgbClr val="4338CA"/>
                 </a:solidFill>
@@ -3052,23 +3052,23 @@
                 <a:ea typeface="맑은 고딕" pitchFamily="34" charset="-122"/>
                 <a:cs typeface="맑은 고딕" pitchFamily="34" charset="-120"/>
               </a:rPr>
-              <a:t>● </a:t>
+              <a:t>판단 기준</a:t>
             </a:r>
             <a:pPr indent="0" marL="0">
               <a:buNone/>
             </a:pPr>
             <a:r>
-              <a:rPr lang="en-US" sz="1300" b="1" dirty="0">
-                <a:solidFill>
-                  <a:srgbClr val="4338CA"/>
-                </a:solidFill>
-                <a:latin typeface="맑은 고딕" pitchFamily="34" charset="0"/>
-                <a:ea typeface="맑은 고딕" pitchFamily="34" charset="-122"/>
-                <a:cs typeface="맑은 고딕" pitchFamily="34" charset="-120"/>
-              </a:rPr>
-              <a:t>AI가 초안 작성</a:t>
-            </a:r>
-            <a:endParaRPr lang="en-US" sz="1300" dirty="0"/>
+              <a:rPr lang="en-US" sz="1350" b="1" dirty="0">
+                <a:solidFill>
+                  <a:srgbClr val="1F2937"/>
+                </a:solidFill>
+                <a:latin typeface="맑은 고딕" pitchFamily="34" charset="0"/>
+                <a:ea typeface="맑은 고딕" pitchFamily="34" charset="-122"/>
+                <a:cs typeface="맑은 고딕" pitchFamily="34" charset="-120"/>
+              </a:rPr>
+              <a:t>    이 항목을 「지금 받은 고객 요구서 + 정해진 문서 양식」만으로 채울 수 있는가?</a:t>
+            </a:r>
+            <a:endParaRPr lang="en-US" sz="1200" dirty="0"/>
           </a:p>
         </p:txBody>
       </p:sp>
@@ -3080,8 +3080,8 @@
         </p:nvSpPr>
         <p:spPr>
           <a:xfrm>
-            <a:off x="795528" y="1645920"/>
-            <a:ext cx="5029200" cy="384048"/>
+            <a:off x="886968" y="1700784"/>
+            <a:ext cx="10424160" cy="256032"/>
           </a:xfrm>
           <a:prstGeom prst="rect">
             <a:avLst/>
@@ -3094,13 +3094,24 @@
           <a:lstStyle/>
           <a:p>
             <a:pPr indent="0" marL="0">
-              <a:lnSpc>
-                <a:spcPct val="105000"/>
-              </a:lnSpc>
-              <a:buNone/>
-            </a:pPr>
-            <a:r>
-              <a:rPr lang="en-US" sz="1050" dirty="0">
+              <a:buNone/>
+            </a:pPr>
+            <a:r>
+              <a:rPr lang="en-US" sz="1100" dirty="0">
+                <a:solidFill>
+                  <a:srgbClr val="4338CA"/>
+                </a:solidFill>
+                <a:latin typeface="맑은 고딕" pitchFamily="34" charset="0"/>
+                <a:ea typeface="맑은 고딕" pitchFamily="34" charset="-122"/>
+                <a:cs typeface="맑은 고딕" pitchFamily="34" charset="-120"/>
+              </a:rPr>
+              <a:t>●  </a:t>
+            </a:r>
+            <a:pPr indent="0" marL="0">
+              <a:buNone/>
+            </a:pPr>
+            <a:r>
+              <a:rPr lang="en-US" sz="1150" b="1" dirty="0">
                 <a:solidFill>
                   <a:srgbClr val="1F2937"/>
                 </a:solidFill>
@@ -3108,49 +3119,50 @@
                 <a:ea typeface="맑은 고딕" pitchFamily="34" charset="-122"/>
                 <a:cs typeface="맑은 고딕" pitchFamily="34" charset="-120"/>
               </a:rPr>
-              <a:t>개선요청 · 요청사항 · 기능/비기능 요구사항 등 — 고객 요구와 정해진 양식에서 규칙적으로 도출</a:t>
-            </a:r>
-            <a:endParaRPr lang="en-US" sz="1050" dirty="0"/>
-          </a:p>
-        </p:txBody>
-      </p:sp>
-      <p:sp>
-        <p:nvSpPr>
-          <p:cNvPr id="8" name="Shape 6"/>
-          <p:cNvSpPr/>
-          <p:nvPr/>
-        </p:nvSpPr>
-        <p:spPr>
-          <a:xfrm>
-            <a:off x="6217920" y="1316736"/>
-            <a:ext cx="5413248" cy="768096"/>
-          </a:xfrm>
-          <a:prstGeom prst="roundRect">
-            <a:avLst>
-              <a:gd name="adj" fmla="val 9524"/>
-            </a:avLst>
-          </a:prstGeom>
-          <a:solidFill>
-            <a:srgbClr val="FFF7ED"/>
-          </a:solidFill>
-          <a:ln w="12700">
-            <a:solidFill>
-              <a:srgbClr val="FED7AA"/>
-            </a:solidFill>
-            <a:prstDash val="solid"/>
-          </a:ln>
-        </p:spPr>
-      </p:sp>
-      <p:sp>
-        <p:nvSpPr>
-          <p:cNvPr id="9" name="Text 7"/>
-          <p:cNvSpPr/>
-          <p:nvPr/>
-        </p:nvSpPr>
-        <p:spPr>
-          <a:xfrm>
-            <a:off x="6446520" y="1389888"/>
-            <a:ext cx="5029200" cy="274320"/>
+              <a:t>예 → </a:t>
+            </a:r>
+            <a:pPr indent="0" marL="0">
+              <a:buNone/>
+            </a:pPr>
+            <a:r>
+              <a:rPr lang="en-US" sz="1150" b="1" dirty="0">
+                <a:solidFill>
+                  <a:srgbClr val="4338CA"/>
+                </a:solidFill>
+                <a:latin typeface="맑은 고딕" pitchFamily="34" charset="0"/>
+                <a:ea typeface="맑은 고딕" pitchFamily="34" charset="-122"/>
+                <a:cs typeface="맑은 고딕" pitchFamily="34" charset="-120"/>
+              </a:rPr>
+              <a:t>AI 초안</a:t>
+            </a:r>
+            <a:pPr indent="0" marL="0">
+              <a:buNone/>
+            </a:pPr>
+            <a:r>
+              <a:rPr lang="en-US" sz="1150" dirty="0">
+                <a:solidFill>
+                  <a:srgbClr val="475569"/>
+                </a:solidFill>
+                <a:latin typeface="맑은 고딕" pitchFamily="34" charset="0"/>
+                <a:ea typeface="맑은 고딕" pitchFamily="34" charset="-122"/>
+                <a:cs typeface="맑은 고딕" pitchFamily="34" charset="-120"/>
+              </a:rPr>
+              <a:t>    고객 요구를 요약·정형화·명세로 “옮기는” 일 — 입력이 다 주어져 있어 AI가 잘함</a:t>
+            </a:r>
+            <a:endParaRPr lang="en-US" sz="1150" dirty="0"/>
+          </a:p>
+        </p:txBody>
+      </p:sp>
+      <p:sp>
+        <p:nvSpPr>
+          <p:cNvPr id="8" name="Text 6"/>
+          <p:cNvSpPr/>
+          <p:nvPr/>
+        </p:nvSpPr>
+        <p:spPr>
+          <a:xfrm>
+            <a:off x="886968" y="1965960"/>
+            <a:ext cx="10424160" cy="256032"/>
           </a:xfrm>
           <a:prstGeom prst="rect">
             <a:avLst/>
@@ -3166,7 +3178,7 @@
               <a:buNone/>
             </a:pPr>
             <a:r>
-              <a:rPr lang="en-US" sz="1300" dirty="0">
+              <a:rPr lang="en-US" sz="1100" dirty="0">
                 <a:solidFill>
                   <a:srgbClr val="C2410C"/>
                 </a:solidFill>
@@ -3174,13 +3186,27 @@
                 <a:ea typeface="맑은 고딕" pitchFamily="34" charset="-122"/>
                 <a:cs typeface="맑은 고딕" pitchFamily="34" charset="-120"/>
               </a:rPr>
-              <a:t>● </a:t>
+              <a:t>●  </a:t>
             </a:r>
             <a:pPr indent="0" marL="0">
               <a:buNone/>
             </a:pPr>
             <a:r>
-              <a:rPr lang="en-US" sz="1300" b="1" dirty="0">
+              <a:rPr lang="en-US" sz="1150" b="1" dirty="0">
+                <a:solidFill>
+                  <a:srgbClr val="1F2937"/>
+                </a:solidFill>
+                <a:latin typeface="맑은 고딕" pitchFamily="34" charset="0"/>
+                <a:ea typeface="맑은 고딕" pitchFamily="34" charset="-122"/>
+                <a:cs typeface="맑은 고딕" pitchFamily="34" charset="-120"/>
+              </a:rPr>
+              <a:t>아니오 → </a:t>
+            </a:r>
+            <a:pPr indent="0" marL="0">
+              <a:buNone/>
+            </a:pPr>
+            <a:r>
+              <a:rPr lang="en-US" sz="1150" b="1" dirty="0">
                 <a:solidFill>
                   <a:srgbClr val="C2410C"/>
                 </a:solidFill>
@@ -3188,185 +3214,21 @@
                 <a:ea typeface="맑은 고딕" pitchFamily="34" charset="-122"/>
                 <a:cs typeface="맑은 고딕" pitchFamily="34" charset="-120"/>
               </a:rPr>
-              <a:t>사람이 직접 작성</a:t>
-            </a:r>
-            <a:endParaRPr lang="en-US" sz="1300" dirty="0"/>
-          </a:p>
-        </p:txBody>
-      </p:sp>
-      <p:sp>
-        <p:nvSpPr>
-          <p:cNvPr id="10" name="Text 8"/>
-          <p:cNvSpPr/>
-          <p:nvPr/>
-        </p:nvSpPr>
-        <p:spPr>
-          <a:xfrm>
-            <a:off x="6446520" y="1645920"/>
-            <a:ext cx="5029200" cy="384048"/>
-          </a:xfrm>
-          <a:prstGeom prst="rect">
-            <a:avLst/>
-          </a:prstGeom>
-          <a:noFill/>
-          <a:ln/>
-        </p:spPr>
-        <p:txBody>
-          <a:bodyPr wrap="square" lIns="0" tIns="0" rIns="0" bIns="0" rtlCol="0" anchor="ctr"/>
-          <a:lstStyle/>
-          <a:p>
+              <a:t>사람</a:t>
+            </a:r>
             <a:pPr indent="0" marL="0">
-              <a:lnSpc>
-                <a:spcPct val="105000"/>
-              </a:lnSpc>
-              <a:buNone/>
-            </a:pPr>
-            <a:r>
-              <a:rPr lang="en-US" sz="1050" dirty="0">
-                <a:solidFill>
-                  <a:srgbClr val="1F2937"/>
-                </a:solidFill>
-                <a:latin typeface="맑은 고딕" pitchFamily="34" charset="0"/>
-                <a:ea typeface="맑은 고딕" pitchFamily="34" charset="-122"/>
-                <a:cs typeface="맑은 고딕" pitchFamily="34" charset="-120"/>
-              </a:rPr>
-              <a:t>현상기록 · 변경범위 · 다이어그램 · 특이사항 등 — 현재 시스템·설계 지식·판단이 필요</a:t>
-            </a:r>
-            <a:endParaRPr lang="en-US" sz="1050" dirty="0"/>
-          </a:p>
-        </p:txBody>
-      </p:sp>
-      <p:sp>
-        <p:nvSpPr>
-          <p:cNvPr id="11" name="Shape 9"/>
-          <p:cNvSpPr/>
-          <p:nvPr/>
-        </p:nvSpPr>
-        <p:spPr>
-          <a:xfrm>
-            <a:off x="566928" y="2176272"/>
-            <a:ext cx="11064240" cy="530352"/>
-          </a:xfrm>
-          <a:prstGeom prst="roundRect">
-            <a:avLst>
-              <a:gd name="adj" fmla="val 13793"/>
-            </a:avLst>
-          </a:prstGeom>
-          <a:solidFill>
-            <a:srgbClr val="FEF9EF"/>
-          </a:solidFill>
-          <a:ln w="12700">
-            <a:solidFill>
-              <a:srgbClr val="FDE9C8"/>
-            </a:solidFill>
-            <a:prstDash val="solid"/>
-          </a:ln>
-        </p:spPr>
-      </p:sp>
-      <p:sp>
-        <p:nvSpPr>
-          <p:cNvPr id="12" name="Text 10"/>
-          <p:cNvSpPr/>
-          <p:nvPr/>
-        </p:nvSpPr>
-        <p:spPr>
-          <a:xfrm>
-            <a:off x="841248" y="2249424"/>
-            <a:ext cx="10515600" cy="384048"/>
-          </a:xfrm>
-          <a:prstGeom prst="rect">
-            <a:avLst/>
-          </a:prstGeom>
-          <a:noFill/>
-          <a:ln/>
-        </p:spPr>
-        <p:txBody>
-          <a:bodyPr wrap="square" lIns="0" tIns="0" rIns="0" bIns="0" rtlCol="0" anchor="ctr"/>
-          <a:lstStyle/>
-          <a:p>
-            <a:pPr indent="0" marL="0">
-              <a:buNone/>
-            </a:pPr>
-            <a:r>
-              <a:rPr lang="en-US" sz="1150" b="1" dirty="0">
-                <a:solidFill>
-                  <a:srgbClr val="C2410C"/>
-                </a:solidFill>
-                <a:latin typeface="맑은 고딕" pitchFamily="34" charset="0"/>
-                <a:ea typeface="맑은 고딕" pitchFamily="34" charset="-122"/>
-                <a:cs typeface="맑은 고딕" pitchFamily="34" charset="-120"/>
-              </a:rPr>
-              <a:t>왜 사람의 손길이 필요한가?  </a:t>
-            </a:r>
-            <a:pPr indent="0" marL="0">
               <a:buNone/>
             </a:pPr>
             <a:r>
               <a:rPr lang="en-US" sz="1150" dirty="0">
                 <a:solidFill>
-                  <a:srgbClr val="1F2937"/>
-                </a:solidFill>
-                <a:latin typeface="맑은 고딕" pitchFamily="34" charset="0"/>
-                <a:ea typeface="맑은 고딕" pitchFamily="34" charset="-122"/>
-                <a:cs typeface="맑은 고딕" pitchFamily="34" charset="-120"/>
-              </a:rPr>
-              <a:t>AI는 기존 코드·시스템의 </a:t>
-            </a:r>
-            <a:pPr indent="0" marL="0">
-              <a:buNone/>
-            </a:pPr>
-            <a:r>
-              <a:rPr lang="en-US" sz="1150" b="1" dirty="0">
-                <a:solidFill>
-                  <a:srgbClr val="1F2937"/>
-                </a:solidFill>
-                <a:latin typeface="맑은 고딕" pitchFamily="34" charset="0"/>
-                <a:ea typeface="맑은 고딕" pitchFamily="34" charset="-122"/>
-                <a:cs typeface="맑은 고딕" pitchFamily="34" charset="-120"/>
-              </a:rPr>
-              <a:t>현재 상태(as-is)를 알 수 없고</a:t>
-            </a:r>
-            <a:pPr indent="0" marL="0">
-              <a:buNone/>
-            </a:pPr>
-            <a:r>
-              <a:rPr lang="en-US" sz="1150" dirty="0">
-                <a:solidFill>
-                  <a:srgbClr val="1F2937"/>
-                </a:solidFill>
-                <a:latin typeface="맑은 고딕" pitchFamily="34" charset="0"/>
-                <a:ea typeface="맑은 고딕" pitchFamily="34" charset="-122"/>
-                <a:cs typeface="맑은 고딕" pitchFamily="34" charset="-120"/>
-              </a:rPr>
-              <a:t>, 설계 결정·예외 판단은 </a:t>
-            </a:r>
-            <a:pPr indent="0" marL="0">
-              <a:buNone/>
-            </a:pPr>
-            <a:r>
-              <a:rPr lang="en-US" sz="1150" b="1" dirty="0">
-                <a:solidFill>
-                  <a:srgbClr val="1F2937"/>
-                </a:solidFill>
-                <a:latin typeface="맑은 고딕" pitchFamily="34" charset="0"/>
-                <a:ea typeface="맑은 고딕" pitchFamily="34" charset="-122"/>
-                <a:cs typeface="맑은 고딕" pitchFamily="34" charset="-120"/>
-              </a:rPr>
-              <a:t>책임과 도메인 경험이 필요</a:t>
-            </a:r>
-            <a:pPr indent="0" marL="0">
-              <a:buNone/>
-            </a:pPr>
-            <a:r>
-              <a:rPr lang="en-US" sz="1150" dirty="0">
-                <a:solidFill>
-                  <a:srgbClr val="1F2937"/>
-                </a:solidFill>
-                <a:latin typeface="맑은 고딕" pitchFamily="34" charset="0"/>
-                <a:ea typeface="맑은 고딕" pitchFamily="34" charset="-122"/>
-                <a:cs typeface="맑은 고딕" pitchFamily="34" charset="-120"/>
-              </a:rPr>
-              <a:t>하다.  → AI 초안 위에 사람이 검토·보완한다.</a:t>
+                  <a:srgbClr val="475569"/>
+                </a:solidFill>
+                <a:latin typeface="맑은 고딕" pitchFamily="34" charset="0"/>
+                <a:ea typeface="맑은 고딕" pitchFamily="34" charset="-122"/>
+                <a:cs typeface="맑은 고딕" pitchFamily="34" charset="-120"/>
+              </a:rPr>
+              <a:t>    우리 시스템의 현재 상태(as-is)를 알아야 하거나 설계·예외 판단이 필요 — AI가 알 수 없는 정보</a:t>
             </a:r>
             <a:endParaRPr lang="en-US" sz="1150" dirty="0"/>
           </a:p>
@@ -3387,7 +3249,7 @@
           </p:nvPr>
         </p:nvGraphicFramePr>
         <p:xfrm>
-          <a:off x="566928" y="2798064"/>
+          <a:off x="566928" y="2359152"/>
           <a:ext cx="11064240" cy="914400"/>
         </p:xfrm>
         <a:graphic>
@@ -3395,10 +3257,11 @@
             <a:tbl>
               <a:tblPr/>
               <a:tblGrid>
-                <a:gridCol w="2331720"/>
-                <a:gridCol w="8732520"/>
+                <a:gridCol w="2194560"/>
+                <a:gridCol w="6492240"/>
+                <a:gridCol w="2377440"/>
               </a:tblGrid>
-              <a:tr h="310896">
+              <a:tr h="274320">
                 <a:tc>
                   <a:txBody>
                     <a:bodyPr/>
@@ -3425,7 +3288,7 @@
                       </a:endParaRPr>
                     </a:p>
                   </a:txBody>
-                  <a:tcPr marL="101600" marR="101600" marT="50800" marB="50800" anchor="ctr">
+                  <a:tcPr marL="101600" marR="101600" marT="25400" marB="25400" anchor="ctr">
                     <a:lnL w="12700" cap="flat" cmpd="sng" algn="ctr">
                       <a:solidFill>
                         <a:srgbClr val="E5E7EB"/>
@@ -3484,7 +3347,7 @@
                           <a:ea typeface="맑은 고딕" pitchFamily="34" charset="-122"/>
                           <a:cs typeface="맑은 고딕" pitchFamily="34" charset="-120"/>
                         </a:rPr>
-                        <a:t>세부 항목 · 작성 주체</a:t>
+                        <a:t>세부 항목</a:t>
                       </a:r>
                       <a:endParaRPr lang="en-US" sz="1150" dirty="0">
                         <a:latin typeface="맑은 고딕" charset="0"/>
@@ -3493,7 +3356,75 @@
                       </a:endParaRPr>
                     </a:p>
                   </a:txBody>
-                  <a:tcPr marL="101600" marR="101600" marT="50800" marB="50800" anchor="ctr">
+                  <a:tcPr marL="101600" marR="101600" marT="25400" marB="25400" anchor="ctr">
+                    <a:lnL w="12700" cap="flat" cmpd="sng" algn="ctr">
+                      <a:solidFill>
+                        <a:srgbClr val="E5E7EB"/>
+                      </a:solidFill>
+                      <a:prstDash val="solid"/>
+                      <a:round/>
+                      <a:headEnd type="none" w="med" len="med"/>
+                      <a:tailEnd type="none" w="med" len="med"/>
+                    </a:lnL>
+                    <a:lnR w="12700" cap="flat" cmpd="sng" algn="ctr">
+                      <a:solidFill>
+                        <a:srgbClr val="E5E7EB"/>
+                      </a:solidFill>
+                      <a:prstDash val="solid"/>
+                      <a:round/>
+                      <a:headEnd type="none" w="med" len="med"/>
+                      <a:tailEnd type="none" w="med" len="med"/>
+                    </a:lnR>
+                    <a:lnT w="12700" cap="flat" cmpd="sng" algn="ctr">
+                      <a:solidFill>
+                        <a:srgbClr val="E5E7EB"/>
+                      </a:solidFill>
+                      <a:prstDash val="solid"/>
+                      <a:round/>
+                      <a:headEnd type="none" w="med" len="med"/>
+                      <a:tailEnd type="none" w="med" len="med"/>
+                    </a:lnT>
+                    <a:lnB w="12700" cap="flat" cmpd="sng" algn="ctr">
+                      <a:solidFill>
+                        <a:srgbClr val="E5E7EB"/>
+                      </a:solidFill>
+                      <a:prstDash val="solid"/>
+                      <a:round/>
+                      <a:headEnd type="none" w="med" len="med"/>
+                      <a:tailEnd type="none" w="med" len="med"/>
+                    </a:lnB>
+                    <a:solidFill>
+                      <a:srgbClr val="1E1B4B"/>
+                    </a:solidFill>
+                  </a:tcPr>
+                </a:tc>
+                <a:tc>
+                  <a:txBody>
+                    <a:bodyPr/>
+                    <a:lstStyle/>
+                    <a:p>
+                      <a:pPr algn="ctr" indent="0" marL="0">
+                        <a:buNone/>
+                      </a:pPr>
+                      <a:r>
+                        <a:rPr lang="en-US" sz="1150" b="1" dirty="0">
+                          <a:solidFill>
+                            <a:srgbClr val="FFFFFF"/>
+                          </a:solidFill>
+                          <a:latin typeface="맑은 고딕" pitchFamily="34" charset="0"/>
+                          <a:ea typeface="맑은 고딕" pitchFamily="34" charset="-122"/>
+                          <a:cs typeface="맑은 고딕" pitchFamily="34" charset="-120"/>
+                        </a:rPr>
+                        <a:t>작성 주체</a:t>
+                      </a:r>
+                      <a:endParaRPr lang="en-US" sz="1150" dirty="0">
+                        <a:latin typeface="맑은 고딕" charset="0"/>
+                        <a:ea typeface="맑은 고딕" charset="0"/>
+                        <a:cs typeface="맑은 고딕" charset="0"/>
+                      </a:endParaRPr>
+                    </a:p>
+                  </a:txBody>
+                  <a:tcPr marL="101600" marR="101600" marT="25400" marB="25400" anchor="ctr">
                     <a:lnL w="12700" cap="flat" cmpd="sng" algn="ctr">
                       <a:solidFill>
                         <a:srgbClr val="E5E7EB"/>
@@ -3536,8 +3467,8 @@
                   </a:tcPr>
                 </a:tc>
               </a:tr>
-              <a:tr h="713232">
-                <a:tc>
+              <a:tr h="201168">
+                <a:tc rowSpan="5">
                   <a:txBody>
                     <a:bodyPr/>
                     <a:lstStyle/>
@@ -3546,7 +3477,7 @@
                         <a:buNone/>
                       </a:pPr>
                       <a:r>
-                        <a:rPr lang="en-US" sz="1100" b="1" dirty="0">
+                        <a:rPr lang="en-US" sz="1050" b="1" dirty="0">
                           <a:solidFill>
                             <a:srgbClr val="6B7280"/>
                           </a:solidFill>
@@ -3560,7 +3491,7 @@
                         <a:buNone/>
                       </a:pPr>
                       <a:r>
-                        <a:rPr lang="en-US" sz="1300" b="1" dirty="0">
+                        <a:rPr lang="en-US" sz="1250" b="1" dirty="0">
                           <a:solidFill>
                             <a:srgbClr val="1F2937"/>
                           </a:solidFill>
@@ -3581,7 +3512,7 @@
                         <a:buNone/>
                       </a:pPr>
                       <a:r>
-                        <a:rPr lang="en-US" sz="850" dirty="0">
+                        <a:rPr lang="en-US" sz="800" dirty="0">
                           <a:solidFill>
                             <a:srgbClr val="A5AEC0"/>
                           </a:solidFill>
@@ -3598,7 +3529,7 @@
                       </a:endParaRPr>
                     </a:p>
                   </a:txBody>
-                  <a:tcPr marL="101600" marR="101600" marT="50800" marB="50800" anchor="ctr">
+                  <a:tcPr marL="101600" marR="101600" marT="25400" marB="25400" anchor="ctr">
                     <a:lnL w="12700" cap="flat" cmpd="sng" algn="ctr">
                       <a:solidFill>
                         <a:srgbClr val="E5E7EB"/>
@@ -3635,6 +3566,9 @@
                       <a:headEnd type="none" w="med" len="med"/>
                       <a:tailEnd type="none" w="med" len="med"/>
                     </a:lnB>
+                    <a:solidFill>
+                      <a:srgbClr val="FFFFFF"/>
+                    </a:solidFill>
                   </a:tcPr>
                 </a:tc>
                 <a:tc>
@@ -3646,21 +3580,7 @@
                         <a:buNone/>
                       </a:pPr>
                       <a:r>
-                        <a:rPr lang="en-US" sz="800" dirty="0">
-                          <a:solidFill>
-                            <a:srgbClr val="C2410C"/>
-                          </a:solidFill>
-                          <a:latin typeface="맑은 고딕" pitchFamily="34" charset="0"/>
-                          <a:ea typeface="맑은 고딕" pitchFamily="34" charset="-122"/>
-                          <a:cs typeface="맑은 고딕" pitchFamily="34" charset="-120"/>
-                        </a:rPr>
-                        <a:t>●  </a:t>
-                      </a:r>
-                      <a:pPr indent="0" marL="0">
-                        <a:buNone/>
-                      </a:pPr>
-                      <a:r>
-                        <a:rPr lang="en-US" sz="1000" b="1" dirty="0">
+                        <a:rPr lang="en-US" sz="950" b="1" dirty="0">
                           <a:solidFill>
                             <a:srgbClr val="1F2937"/>
                           </a:solidFill>
@@ -3674,7 +3594,7 @@
                         <a:buNone/>
                       </a:pPr>
                       <a:r>
-                        <a:rPr lang="en-US" sz="1000" dirty="0">
+                        <a:rPr lang="en-US" sz="950" dirty="0">
                           <a:solidFill>
                             <a:srgbClr val="475569"/>
                           </a:solidFill>
@@ -3682,41 +3602,140 @@
                           <a:ea typeface="맑은 고딕" pitchFamily="34" charset="-122"/>
                           <a:cs typeface="맑은 고딕" pitchFamily="34" charset="-120"/>
                         </a:rPr>
-                        <a:t>— 현재 동작·문제</a:t>
+                        <a:t>— 현재 동작·문제 상황</a:t>
                       </a:r>
-                      <a:pPr indent="0" marL="0">
+                      <a:endParaRPr lang="en-US" sz="1200" dirty="0">
+                        <a:latin typeface="맑은 고딕" charset="0"/>
+                        <a:ea typeface="맑은 고딕" charset="0"/>
+                        <a:cs typeface="맑은 고딕" charset="0"/>
+                      </a:endParaRPr>
+                    </a:p>
+                  </a:txBody>
+                  <a:tcPr marL="101600" marR="101600" marT="25400" marB="25400" anchor="ctr">
+                    <a:lnL w="12700" cap="flat" cmpd="sng" algn="ctr">
+                      <a:solidFill>
+                        <a:srgbClr val="E5E7EB"/>
+                      </a:solidFill>
+                      <a:prstDash val="solid"/>
+                      <a:round/>
+                      <a:headEnd type="none" w="med" len="med"/>
+                      <a:tailEnd type="none" w="med" len="med"/>
+                    </a:lnL>
+                    <a:lnR w="12700" cap="flat" cmpd="sng" algn="ctr">
+                      <a:solidFill>
+                        <a:srgbClr val="E5E7EB"/>
+                      </a:solidFill>
+                      <a:prstDash val="solid"/>
+                      <a:round/>
+                      <a:headEnd type="none" w="med" len="med"/>
+                      <a:tailEnd type="none" w="med" len="med"/>
+                    </a:lnR>
+                    <a:lnT w="12700" cap="flat" cmpd="sng" algn="ctr">
+                      <a:solidFill>
+                        <a:srgbClr val="E5E7EB"/>
+                      </a:solidFill>
+                      <a:prstDash val="solid"/>
+                      <a:round/>
+                      <a:headEnd type="none" w="med" len="med"/>
+                      <a:tailEnd type="none" w="med" len="med"/>
+                    </a:lnT>
+                    <a:lnB w="12700" cap="flat" cmpd="sng" algn="ctr">
+                      <a:solidFill>
+                        <a:srgbClr val="E5E7EB"/>
+                      </a:solidFill>
+                      <a:prstDash val="solid"/>
+                      <a:round/>
+                      <a:headEnd type="none" w="med" len="med"/>
+                      <a:tailEnd type="none" w="med" len="med"/>
+                    </a:lnB>
+                    <a:solidFill>
+                      <a:srgbClr val="FFFFFF"/>
+                    </a:solidFill>
+                  </a:tcPr>
+                </a:tc>
+                <a:tc>
+                  <a:txBody>
+                    <a:bodyPr/>
+                    <a:lstStyle/>
+                    <a:p>
+                      <a:pPr algn="ctr" indent="0" marL="0">
                         <a:buNone/>
                       </a:pPr>
                       <a:r>
-                        <a:rPr lang="en-US" sz="1000" dirty="0">
+                        <a:rPr lang="en-US" sz="950" b="1" dirty="0">
                           <a:solidFill>
-                            <a:srgbClr val="000000"/>
+                            <a:srgbClr val="C2410C"/>
                           </a:solidFill>
                           <a:latin typeface="맑은 고딕" pitchFamily="34" charset="0"/>
                           <a:ea typeface="맑은 고딕" pitchFamily="34" charset="-122"/>
                           <a:cs typeface="맑은 고딕" pitchFamily="34" charset="-120"/>
                         </a:rPr>
-                        <a:t>         </a:t>
+                        <a:t>사람</a:t>
                       </a:r>
+                      <a:endParaRPr lang="en-US" sz="950" dirty="0">
+                        <a:latin typeface="맑은 고딕" charset="0"/>
+                        <a:ea typeface="맑은 고딕" charset="0"/>
+                        <a:cs typeface="맑은 고딕" charset="0"/>
+                      </a:endParaRPr>
+                    </a:p>
+                  </a:txBody>
+                  <a:tcPr marL="101600" marR="101600" marT="25400" marB="25400" anchor="ctr">
+                    <a:lnL w="12700" cap="flat" cmpd="sng" algn="ctr">
+                      <a:solidFill>
+                        <a:srgbClr val="E5E7EB"/>
+                      </a:solidFill>
+                      <a:prstDash val="solid"/>
+                      <a:round/>
+                      <a:headEnd type="none" w="med" len="med"/>
+                      <a:tailEnd type="none" w="med" len="med"/>
+                    </a:lnL>
+                    <a:lnR w="12700" cap="flat" cmpd="sng" algn="ctr">
+                      <a:solidFill>
+                        <a:srgbClr val="E5E7EB"/>
+                      </a:solidFill>
+                      <a:prstDash val="solid"/>
+                      <a:round/>
+                      <a:headEnd type="none" w="med" len="med"/>
+                      <a:tailEnd type="none" w="med" len="med"/>
+                    </a:lnR>
+                    <a:lnT w="12700" cap="flat" cmpd="sng" algn="ctr">
+                      <a:solidFill>
+                        <a:srgbClr val="E5E7EB"/>
+                      </a:solidFill>
+                      <a:prstDash val="solid"/>
+                      <a:round/>
+                      <a:headEnd type="none" w="med" len="med"/>
+                      <a:tailEnd type="none" w="med" len="med"/>
+                    </a:lnT>
+                    <a:lnB w="12700" cap="flat" cmpd="sng" algn="ctr">
+                      <a:solidFill>
+                        <a:srgbClr val="E5E7EB"/>
+                      </a:solidFill>
+                      <a:prstDash val="solid"/>
+                      <a:round/>
+                      <a:headEnd type="none" w="med" len="med"/>
+                      <a:tailEnd type="none" w="med" len="med"/>
+                    </a:lnB>
+                    <a:solidFill>
+                      <a:srgbClr val="FFFFFF"/>
+                    </a:solidFill>
+                  </a:tcPr>
+                </a:tc>
+              </a:tr>
+              <a:tr h="201168">
+                <a:tc vMerge="1">
+                  <a:tcPr/>
+                </a:tc>
+                <a:tc>
+                  <a:txBody>
+                    <a:bodyPr/>
+                    <a:lstStyle/>
+                    <a:p>
                       <a:pPr indent="0" marL="0">
                         <a:buNone/>
                       </a:pPr>
                       <a:r>
-                        <a:rPr lang="en-US" sz="800" dirty="0">
-                          <a:solidFill>
-                            <a:srgbClr val="4338CA"/>
-                          </a:solidFill>
-                          <a:latin typeface="맑은 고딕" pitchFamily="34" charset="0"/>
-                          <a:ea typeface="맑은 고딕" pitchFamily="34" charset="-122"/>
-                          <a:cs typeface="맑은 고딕" pitchFamily="34" charset="-120"/>
-                        </a:rPr>
-                        <a:t>●  </a:t>
-                      </a:r>
-                      <a:pPr indent="0" marL="0">
-                        <a:buNone/>
-                      </a:pPr>
-                      <a:r>
-                        <a:rPr lang="en-US" sz="1000" b="1" dirty="0">
+                        <a:rPr lang="en-US" sz="950" b="1" dirty="0">
                           <a:solidFill>
                             <a:srgbClr val="1F2937"/>
                           </a:solidFill>
@@ -3730,7 +3749,7 @@
                         <a:buNone/>
                       </a:pPr>
                       <a:r>
-                        <a:rPr lang="en-US" sz="1000" dirty="0">
+                        <a:rPr lang="en-US" sz="950" dirty="0">
                           <a:solidFill>
                             <a:srgbClr val="475569"/>
                           </a:solidFill>
@@ -3746,26 +3765,132 @@
                         <a:cs typeface="맑은 고딕" charset="0"/>
                       </a:endParaRPr>
                     </a:p>
+                  </a:txBody>
+                  <a:tcPr marL="101600" marR="101600" marT="25400" marB="25400" anchor="ctr">
+                    <a:lnL w="12700" cap="flat" cmpd="sng" algn="ctr">
+                      <a:solidFill>
+                        <a:srgbClr val="E5E7EB"/>
+                      </a:solidFill>
+                      <a:prstDash val="solid"/>
+                      <a:round/>
+                      <a:headEnd type="none" w="med" len="med"/>
+                      <a:tailEnd type="none" w="med" len="med"/>
+                    </a:lnL>
+                    <a:lnR w="12700" cap="flat" cmpd="sng" algn="ctr">
+                      <a:solidFill>
+                        <a:srgbClr val="E5E7EB"/>
+                      </a:solidFill>
+                      <a:prstDash val="solid"/>
+                      <a:round/>
+                      <a:headEnd type="none" w="med" len="med"/>
+                      <a:tailEnd type="none" w="med" len="med"/>
+                    </a:lnR>
+                    <a:lnT w="12700" cap="flat" cmpd="sng" algn="ctr">
+                      <a:solidFill>
+                        <a:srgbClr val="E5E7EB"/>
+                      </a:solidFill>
+                      <a:prstDash val="solid"/>
+                      <a:round/>
+                      <a:headEnd type="none" w="med" len="med"/>
+                      <a:tailEnd type="none" w="med" len="med"/>
+                    </a:lnT>
+                    <a:lnB w="12700" cap="flat" cmpd="sng" algn="ctr">
+                      <a:solidFill>
+                        <a:srgbClr val="E5E7EB"/>
+                      </a:solidFill>
+                      <a:prstDash val="solid"/>
+                      <a:round/>
+                      <a:headEnd type="none" w="med" len="med"/>
+                      <a:tailEnd type="none" w="med" len="med"/>
+                    </a:lnB>
+                    <a:solidFill>
+                      <a:srgbClr val="FFFFFF"/>
+                    </a:solidFill>
+                  </a:tcPr>
+                </a:tc>
+                <a:tc>
+                  <a:txBody>
+                    <a:bodyPr/>
+                    <a:lstStyle/>
+                    <a:p>
+                      <a:pPr algn="ctr" indent="0" marL="0">
+                        <a:buNone/>
+                      </a:pPr>
+                      <a:r>
+                        <a:rPr lang="en-US" sz="950" b="1" dirty="0">
+                          <a:solidFill>
+                            <a:srgbClr val="4338CA"/>
+                          </a:solidFill>
+                          <a:latin typeface="맑은 고딕" pitchFamily="34" charset="0"/>
+                          <a:ea typeface="맑은 고딕" pitchFamily="34" charset="-122"/>
+                          <a:cs typeface="맑은 고딕" pitchFamily="34" charset="-120"/>
+                        </a:rPr>
+                        <a:t>AI 초안</a:t>
+                      </a:r>
+                      <a:endParaRPr lang="en-US" sz="950" dirty="0">
+                        <a:latin typeface="맑은 고딕" charset="0"/>
+                        <a:ea typeface="맑은 고딕" charset="0"/>
+                        <a:cs typeface="맑은 고딕" charset="0"/>
+                      </a:endParaRPr>
+                    </a:p>
+                  </a:txBody>
+                  <a:tcPr marL="101600" marR="101600" marT="25400" marB="25400" anchor="ctr">
+                    <a:lnL w="12700" cap="flat" cmpd="sng" algn="ctr">
+                      <a:solidFill>
+                        <a:srgbClr val="E5E7EB"/>
+                      </a:solidFill>
+                      <a:prstDash val="solid"/>
+                      <a:round/>
+                      <a:headEnd type="none" w="med" len="med"/>
+                      <a:tailEnd type="none" w="med" len="med"/>
+                    </a:lnL>
+                    <a:lnR w="12700" cap="flat" cmpd="sng" algn="ctr">
+                      <a:solidFill>
+                        <a:srgbClr val="E5E7EB"/>
+                      </a:solidFill>
+                      <a:prstDash val="solid"/>
+                      <a:round/>
+                      <a:headEnd type="none" w="med" len="med"/>
+                      <a:tailEnd type="none" w="med" len="med"/>
+                    </a:lnR>
+                    <a:lnT w="12700" cap="flat" cmpd="sng" algn="ctr">
+                      <a:solidFill>
+                        <a:srgbClr val="E5E7EB"/>
+                      </a:solidFill>
+                      <a:prstDash val="solid"/>
+                      <a:round/>
+                      <a:headEnd type="none" w="med" len="med"/>
+                      <a:tailEnd type="none" w="med" len="med"/>
+                    </a:lnT>
+                    <a:lnB w="12700" cap="flat" cmpd="sng" algn="ctr">
+                      <a:solidFill>
+                        <a:srgbClr val="E5E7EB"/>
+                      </a:solidFill>
+                      <a:prstDash val="solid"/>
+                      <a:round/>
+                      <a:headEnd type="none" w="med" len="med"/>
+                      <a:tailEnd type="none" w="med" len="med"/>
+                    </a:lnB>
+                    <a:solidFill>
+                      <a:srgbClr val="FFFFFF"/>
+                    </a:solidFill>
+                  </a:tcPr>
+                </a:tc>
+              </a:tr>
+              <a:tr h="201168">
+                <a:tc vMerge="1">
+                  <a:tcPr/>
+                </a:tc>
+                <a:tc>
+                  <a:txBody>
+                    <a:bodyPr/>
+                    <a:lstStyle/>
                     <a:p>
                       <a:pPr indent="0" marL="0">
                         <a:buNone/>
                       </a:pPr>
                       <a:r>
-                        <a:rPr lang="en-US" sz="800" dirty="0">
-                          <a:solidFill>
-                            <a:srgbClr val="C2410C"/>
-                          </a:solidFill>
-                          <a:latin typeface="맑은 고딕" pitchFamily="34" charset="0"/>
-                          <a:ea typeface="맑은 고딕" pitchFamily="34" charset="-122"/>
-                          <a:cs typeface="맑은 고딕" pitchFamily="34" charset="-120"/>
-                        </a:rPr>
-                        <a:t>●  </a:t>
-                      </a:r>
-                      <a:pPr indent="0" marL="0">
-                        <a:buNone/>
-                      </a:pPr>
-                      <a:r>
-                        <a:rPr lang="en-US" sz="1000" b="1" dirty="0">
+                        <a:rPr lang="en-US" sz="950" b="1" dirty="0">
                           <a:solidFill>
                             <a:srgbClr val="1F2937"/>
                           </a:solidFill>
@@ -3779,7 +3904,7 @@
                         <a:buNone/>
                       </a:pPr>
                       <a:r>
-                        <a:rPr lang="en-US" sz="1000" dirty="0">
+                        <a:rPr lang="en-US" sz="950" dirty="0">
                           <a:solidFill>
                             <a:srgbClr val="475569"/>
                           </a:solidFill>
@@ -3789,39 +3914,138 @@
                         </a:rPr>
                         <a:t>— 영향 모듈·기능</a:t>
                       </a:r>
-                      <a:pPr indent="0" marL="0">
+                      <a:endParaRPr lang="en-US" sz="1200" dirty="0">
+                        <a:latin typeface="맑은 고딕" charset="0"/>
+                        <a:ea typeface="맑은 고딕" charset="0"/>
+                        <a:cs typeface="맑은 고딕" charset="0"/>
+                      </a:endParaRPr>
+                    </a:p>
+                  </a:txBody>
+                  <a:tcPr marL="101600" marR="101600" marT="25400" marB="25400" anchor="ctr">
+                    <a:lnL w="12700" cap="flat" cmpd="sng" algn="ctr">
+                      <a:solidFill>
+                        <a:srgbClr val="E5E7EB"/>
+                      </a:solidFill>
+                      <a:prstDash val="solid"/>
+                      <a:round/>
+                      <a:headEnd type="none" w="med" len="med"/>
+                      <a:tailEnd type="none" w="med" len="med"/>
+                    </a:lnL>
+                    <a:lnR w="12700" cap="flat" cmpd="sng" algn="ctr">
+                      <a:solidFill>
+                        <a:srgbClr val="E5E7EB"/>
+                      </a:solidFill>
+                      <a:prstDash val="solid"/>
+                      <a:round/>
+                      <a:headEnd type="none" w="med" len="med"/>
+                      <a:tailEnd type="none" w="med" len="med"/>
+                    </a:lnR>
+                    <a:lnT w="12700" cap="flat" cmpd="sng" algn="ctr">
+                      <a:solidFill>
+                        <a:srgbClr val="E5E7EB"/>
+                      </a:solidFill>
+                      <a:prstDash val="solid"/>
+                      <a:round/>
+                      <a:headEnd type="none" w="med" len="med"/>
+                      <a:tailEnd type="none" w="med" len="med"/>
+                    </a:lnT>
+                    <a:lnB w="12700" cap="flat" cmpd="sng" algn="ctr">
+                      <a:solidFill>
+                        <a:srgbClr val="E5E7EB"/>
+                      </a:solidFill>
+                      <a:prstDash val="solid"/>
+                      <a:round/>
+                      <a:headEnd type="none" w="med" len="med"/>
+                      <a:tailEnd type="none" w="med" len="med"/>
+                    </a:lnB>
+                    <a:solidFill>
+                      <a:srgbClr val="FFFFFF"/>
+                    </a:solidFill>
+                  </a:tcPr>
+                </a:tc>
+                <a:tc>
+                  <a:txBody>
+                    <a:bodyPr/>
+                    <a:lstStyle/>
+                    <a:p>
+                      <a:pPr algn="ctr" indent="0" marL="0">
                         <a:buNone/>
                       </a:pPr>
                       <a:r>
-                        <a:rPr lang="en-US" sz="1000" dirty="0">
+                        <a:rPr lang="en-US" sz="950" b="1" dirty="0">
                           <a:solidFill>
-                            <a:srgbClr val="000000"/>
+                            <a:srgbClr val="C2410C"/>
                           </a:solidFill>
                           <a:latin typeface="맑은 고딕" pitchFamily="34" charset="0"/>
                           <a:ea typeface="맑은 고딕" pitchFamily="34" charset="-122"/>
                           <a:cs typeface="맑은 고딕" pitchFamily="34" charset="-120"/>
                         </a:rPr>
-                        <a:t>         </a:t>
+                        <a:t>사람</a:t>
                       </a:r>
+                      <a:endParaRPr lang="en-US" sz="950" dirty="0">
+                        <a:latin typeface="맑은 고딕" charset="0"/>
+                        <a:ea typeface="맑은 고딕" charset="0"/>
+                        <a:cs typeface="맑은 고딕" charset="0"/>
+                      </a:endParaRPr>
+                    </a:p>
+                  </a:txBody>
+                  <a:tcPr marL="101600" marR="101600" marT="25400" marB="25400" anchor="ctr">
+                    <a:lnL w="12700" cap="flat" cmpd="sng" algn="ctr">
+                      <a:solidFill>
+                        <a:srgbClr val="E5E7EB"/>
+                      </a:solidFill>
+                      <a:prstDash val="solid"/>
+                      <a:round/>
+                      <a:headEnd type="none" w="med" len="med"/>
+                      <a:tailEnd type="none" w="med" len="med"/>
+                    </a:lnL>
+                    <a:lnR w="12700" cap="flat" cmpd="sng" algn="ctr">
+                      <a:solidFill>
+                        <a:srgbClr val="E5E7EB"/>
+                      </a:solidFill>
+                      <a:prstDash val="solid"/>
+                      <a:round/>
+                      <a:headEnd type="none" w="med" len="med"/>
+                      <a:tailEnd type="none" w="med" len="med"/>
+                    </a:lnR>
+                    <a:lnT w="12700" cap="flat" cmpd="sng" algn="ctr">
+                      <a:solidFill>
+                        <a:srgbClr val="E5E7EB"/>
+                      </a:solidFill>
+                      <a:prstDash val="solid"/>
+                      <a:round/>
+                      <a:headEnd type="none" w="med" len="med"/>
+                      <a:tailEnd type="none" w="med" len="med"/>
+                    </a:lnT>
+                    <a:lnB w="12700" cap="flat" cmpd="sng" algn="ctr">
+                      <a:solidFill>
+                        <a:srgbClr val="E5E7EB"/>
+                      </a:solidFill>
+                      <a:prstDash val="solid"/>
+                      <a:round/>
+                      <a:headEnd type="none" w="med" len="med"/>
+                      <a:tailEnd type="none" w="med" len="med"/>
+                    </a:lnB>
+                    <a:solidFill>
+                      <a:srgbClr val="FFFFFF"/>
+                    </a:solidFill>
+                  </a:tcPr>
+                </a:tc>
+              </a:tr>
+              <a:tr h="201168">
+                <a:tc vMerge="1">
+                  <a:tcPr/>
+                </a:tc>
+                <a:tc>
+                  <a:txBody>
+                    <a:bodyPr/>
+                    <a:lstStyle/>
+                    <a:p>
                       <a:pPr indent="0" marL="0">
                         <a:buNone/>
                       </a:pPr>
                       <a:r>
-                        <a:rPr lang="en-US" sz="800" dirty="0">
-                          <a:solidFill>
-                            <a:srgbClr val="4338CA"/>
-                          </a:solidFill>
-                          <a:latin typeface="맑은 고딕" pitchFamily="34" charset="0"/>
-                          <a:ea typeface="맑은 고딕" pitchFamily="34" charset="-122"/>
-                          <a:cs typeface="맑은 고딕" pitchFamily="34" charset="-120"/>
-                        </a:rPr>
-                        <a:t>●  </a:t>
-                      </a:r>
-                      <a:pPr indent="0" marL="0">
-                        <a:buNone/>
-                      </a:pPr>
-                      <a:r>
-                        <a:rPr lang="en-US" sz="1000" b="1" dirty="0">
+                        <a:rPr lang="en-US" sz="950" b="1" dirty="0">
                           <a:solidFill>
                             <a:srgbClr val="1F2937"/>
                           </a:solidFill>
@@ -3835,7 +4059,7 @@
                         <a:buNone/>
                       </a:pPr>
                       <a:r>
-                        <a:rPr lang="en-US" sz="1000" dirty="0">
+                        <a:rPr lang="en-US" sz="950" dirty="0">
                           <a:solidFill>
                             <a:srgbClr val="475569"/>
                           </a:solidFill>
@@ -3851,26 +4075,132 @@
                         <a:cs typeface="맑은 고딕" charset="0"/>
                       </a:endParaRPr>
                     </a:p>
+                  </a:txBody>
+                  <a:tcPr marL="101600" marR="101600" marT="25400" marB="25400" anchor="ctr">
+                    <a:lnL w="12700" cap="flat" cmpd="sng" algn="ctr">
+                      <a:solidFill>
+                        <a:srgbClr val="E5E7EB"/>
+                      </a:solidFill>
+                      <a:prstDash val="solid"/>
+                      <a:round/>
+                      <a:headEnd type="none" w="med" len="med"/>
+                      <a:tailEnd type="none" w="med" len="med"/>
+                    </a:lnL>
+                    <a:lnR w="12700" cap="flat" cmpd="sng" algn="ctr">
+                      <a:solidFill>
+                        <a:srgbClr val="E5E7EB"/>
+                      </a:solidFill>
+                      <a:prstDash val="solid"/>
+                      <a:round/>
+                      <a:headEnd type="none" w="med" len="med"/>
+                      <a:tailEnd type="none" w="med" len="med"/>
+                    </a:lnR>
+                    <a:lnT w="12700" cap="flat" cmpd="sng" algn="ctr">
+                      <a:solidFill>
+                        <a:srgbClr val="E5E7EB"/>
+                      </a:solidFill>
+                      <a:prstDash val="solid"/>
+                      <a:round/>
+                      <a:headEnd type="none" w="med" len="med"/>
+                      <a:tailEnd type="none" w="med" len="med"/>
+                    </a:lnT>
+                    <a:lnB w="12700" cap="flat" cmpd="sng" algn="ctr">
+                      <a:solidFill>
+                        <a:srgbClr val="E5E7EB"/>
+                      </a:solidFill>
+                      <a:prstDash val="solid"/>
+                      <a:round/>
+                      <a:headEnd type="none" w="med" len="med"/>
+                      <a:tailEnd type="none" w="med" len="med"/>
+                    </a:lnB>
+                    <a:solidFill>
+                      <a:srgbClr val="FFFFFF"/>
+                    </a:solidFill>
+                  </a:tcPr>
+                </a:tc>
+                <a:tc>
+                  <a:txBody>
+                    <a:bodyPr/>
+                    <a:lstStyle/>
+                    <a:p>
+                      <a:pPr algn="ctr" indent="0" marL="0">
+                        <a:buNone/>
+                      </a:pPr>
+                      <a:r>
+                        <a:rPr lang="en-US" sz="950" b="1" dirty="0">
+                          <a:solidFill>
+                            <a:srgbClr val="4338CA"/>
+                          </a:solidFill>
+                          <a:latin typeface="맑은 고딕" pitchFamily="34" charset="0"/>
+                          <a:ea typeface="맑은 고딕" pitchFamily="34" charset="-122"/>
+                          <a:cs typeface="맑은 고딕" pitchFamily="34" charset="-120"/>
+                        </a:rPr>
+                        <a:t>AI 초안</a:t>
+                      </a:r>
+                      <a:endParaRPr lang="en-US" sz="950" dirty="0">
+                        <a:latin typeface="맑은 고딕" charset="0"/>
+                        <a:ea typeface="맑은 고딕" charset="0"/>
+                        <a:cs typeface="맑은 고딕" charset="0"/>
+                      </a:endParaRPr>
+                    </a:p>
+                  </a:txBody>
+                  <a:tcPr marL="101600" marR="101600" marT="25400" marB="25400" anchor="ctr">
+                    <a:lnL w="12700" cap="flat" cmpd="sng" algn="ctr">
+                      <a:solidFill>
+                        <a:srgbClr val="E5E7EB"/>
+                      </a:solidFill>
+                      <a:prstDash val="solid"/>
+                      <a:round/>
+                      <a:headEnd type="none" w="med" len="med"/>
+                      <a:tailEnd type="none" w="med" len="med"/>
+                    </a:lnL>
+                    <a:lnR w="12700" cap="flat" cmpd="sng" algn="ctr">
+                      <a:solidFill>
+                        <a:srgbClr val="E5E7EB"/>
+                      </a:solidFill>
+                      <a:prstDash val="solid"/>
+                      <a:round/>
+                      <a:headEnd type="none" w="med" len="med"/>
+                      <a:tailEnd type="none" w="med" len="med"/>
+                    </a:lnR>
+                    <a:lnT w="12700" cap="flat" cmpd="sng" algn="ctr">
+                      <a:solidFill>
+                        <a:srgbClr val="E5E7EB"/>
+                      </a:solidFill>
+                      <a:prstDash val="solid"/>
+                      <a:round/>
+                      <a:headEnd type="none" w="med" len="med"/>
+                      <a:tailEnd type="none" w="med" len="med"/>
+                    </a:lnT>
+                    <a:lnB w="12700" cap="flat" cmpd="sng" algn="ctr">
+                      <a:solidFill>
+                        <a:srgbClr val="E5E7EB"/>
+                      </a:solidFill>
+                      <a:prstDash val="solid"/>
+                      <a:round/>
+                      <a:headEnd type="none" w="med" len="med"/>
+                      <a:tailEnd type="none" w="med" len="med"/>
+                    </a:lnB>
+                    <a:solidFill>
+                      <a:srgbClr val="FFFFFF"/>
+                    </a:solidFill>
+                  </a:tcPr>
+                </a:tc>
+              </a:tr>
+              <a:tr h="201168">
+                <a:tc vMerge="1">
+                  <a:tcPr/>
+                </a:tc>
+                <a:tc>
+                  <a:txBody>
+                    <a:bodyPr/>
+                    <a:lstStyle/>
                     <a:p>
                       <a:pPr indent="0" marL="0">
                         <a:buNone/>
                       </a:pPr>
                       <a:r>
-                        <a:rPr lang="en-US" sz="800" dirty="0">
-                          <a:solidFill>
-                            <a:srgbClr val="C2410C"/>
-                          </a:solidFill>
-                          <a:latin typeface="맑은 고딕" pitchFamily="34" charset="0"/>
-                          <a:ea typeface="맑은 고딕" pitchFamily="34" charset="-122"/>
-                          <a:cs typeface="맑은 고딕" pitchFamily="34" charset="-120"/>
-                        </a:rPr>
-                        <a:t>●  </a:t>
-                      </a:r>
-                      <a:pPr indent="0" marL="0">
-                        <a:buNone/>
-                      </a:pPr>
-                      <a:r>
-                        <a:rPr lang="en-US" sz="1000" b="1" dirty="0">
+                        <a:rPr lang="en-US" sz="950" b="1" dirty="0">
                           <a:solidFill>
                             <a:srgbClr val="1F2937"/>
                           </a:solidFill>
@@ -3884,7 +4214,7 @@
                         <a:buNone/>
                       </a:pPr>
                       <a:r>
-                        <a:rPr lang="en-US" sz="1000" dirty="0">
+                        <a:rPr lang="en-US" sz="950" dirty="0">
                           <a:solidFill>
                             <a:srgbClr val="475569"/>
                           </a:solidFill>
@@ -3901,7 +4231,7 @@
                       </a:endParaRPr>
                     </a:p>
                   </a:txBody>
-                  <a:tcPr marL="101600" marR="101600" marT="50800" marB="50800" anchor="ctr">
+                  <a:tcPr marL="101600" marR="101600" marT="25400" marB="25400" anchor="ctr">
                     <a:lnL w="12700" cap="flat" cmpd="sng" algn="ctr">
                       <a:solidFill>
                         <a:srgbClr val="E5E7EB"/>
@@ -3938,11 +4268,82 @@
                       <a:headEnd type="none" w="med" len="med"/>
                       <a:tailEnd type="none" w="med" len="med"/>
                     </a:lnB>
+                    <a:solidFill>
+                      <a:srgbClr val="FFFFFF"/>
+                    </a:solidFill>
+                  </a:tcPr>
+                </a:tc>
+                <a:tc>
+                  <a:txBody>
+                    <a:bodyPr/>
+                    <a:lstStyle/>
+                    <a:p>
+                      <a:pPr algn="ctr" indent="0" marL="0">
+                        <a:buNone/>
+                      </a:pPr>
+                      <a:r>
+                        <a:rPr lang="en-US" sz="950" b="1" dirty="0">
+                          <a:solidFill>
+                            <a:srgbClr val="C2410C"/>
+                          </a:solidFill>
+                          <a:latin typeface="맑은 고딕" pitchFamily="34" charset="0"/>
+                          <a:ea typeface="맑은 고딕" pitchFamily="34" charset="-122"/>
+                          <a:cs typeface="맑은 고딕" pitchFamily="34" charset="-120"/>
+                        </a:rPr>
+                        <a:t>사람</a:t>
+                      </a:r>
+                      <a:endParaRPr lang="en-US" sz="950" dirty="0">
+                        <a:latin typeface="맑은 고딕" charset="0"/>
+                        <a:ea typeface="맑은 고딕" charset="0"/>
+                        <a:cs typeface="맑은 고딕" charset="0"/>
+                      </a:endParaRPr>
+                    </a:p>
+                  </a:txBody>
+                  <a:tcPr marL="101600" marR="101600" marT="25400" marB="25400" anchor="ctr">
+                    <a:lnL w="12700" cap="flat" cmpd="sng" algn="ctr">
+                      <a:solidFill>
+                        <a:srgbClr val="E5E7EB"/>
+                      </a:solidFill>
+                      <a:prstDash val="solid"/>
+                      <a:round/>
+                      <a:headEnd type="none" w="med" len="med"/>
+                      <a:tailEnd type="none" w="med" len="med"/>
+                    </a:lnL>
+                    <a:lnR w="12700" cap="flat" cmpd="sng" algn="ctr">
+                      <a:solidFill>
+                        <a:srgbClr val="E5E7EB"/>
+                      </a:solidFill>
+                      <a:prstDash val="solid"/>
+                      <a:round/>
+                      <a:headEnd type="none" w="med" len="med"/>
+                      <a:tailEnd type="none" w="med" len="med"/>
+                    </a:lnR>
+                    <a:lnT w="12700" cap="flat" cmpd="sng" algn="ctr">
+                      <a:solidFill>
+                        <a:srgbClr val="E5E7EB"/>
+                      </a:solidFill>
+                      <a:prstDash val="solid"/>
+                      <a:round/>
+                      <a:headEnd type="none" w="med" len="med"/>
+                      <a:tailEnd type="none" w="med" len="med"/>
+                    </a:lnT>
+                    <a:lnB w="12700" cap="flat" cmpd="sng" algn="ctr">
+                      <a:solidFill>
+                        <a:srgbClr val="E5E7EB"/>
+                      </a:solidFill>
+                      <a:prstDash val="solid"/>
+                      <a:round/>
+                      <a:headEnd type="none" w="med" len="med"/>
+                      <a:tailEnd type="none" w="med" len="med"/>
+                    </a:lnB>
+                    <a:solidFill>
+                      <a:srgbClr val="FFFFFF"/>
+                    </a:solidFill>
                   </a:tcPr>
                 </a:tc>
               </a:tr>
-              <a:tr h="603504">
-                <a:tc>
+              <a:tr h="201168">
+                <a:tc rowSpan="3">
                   <a:txBody>
                     <a:bodyPr/>
                     <a:lstStyle/>
@@ -3951,7 +4352,7 @@
                         <a:buNone/>
                       </a:pPr>
                       <a:r>
-                        <a:rPr lang="en-US" sz="1100" b="1" dirty="0">
+                        <a:rPr lang="en-US" sz="1050" b="1" dirty="0">
                           <a:solidFill>
                             <a:srgbClr val="6B7280"/>
                           </a:solidFill>
@@ -3965,7 +4366,7 @@
                         <a:buNone/>
                       </a:pPr>
                       <a:r>
-                        <a:rPr lang="en-US" sz="1300" b="1" dirty="0">
+                        <a:rPr lang="en-US" sz="1250" b="1" dirty="0">
                           <a:solidFill>
                             <a:srgbClr val="1F2937"/>
                           </a:solidFill>
@@ -3986,7 +4387,7 @@
                         <a:buNone/>
                       </a:pPr>
                       <a:r>
-                        <a:rPr lang="en-US" sz="850" dirty="0">
+                        <a:rPr lang="en-US" sz="800" dirty="0">
                           <a:solidFill>
                             <a:srgbClr val="A5AEC0"/>
                           </a:solidFill>
@@ -4003,7 +4404,7 @@
                       </a:endParaRPr>
                     </a:p>
                   </a:txBody>
-                  <a:tcPr marL="101600" marR="101600" marT="50800" marB="50800" anchor="ctr">
+                  <a:tcPr marL="101600" marR="101600" marT="25400" marB="25400" anchor="ctr">
                     <a:lnL w="12700" cap="flat" cmpd="sng" algn="ctr">
                       <a:solidFill>
                         <a:srgbClr val="E5E7EB"/>
@@ -4040,6 +4441,9 @@
                       <a:headEnd type="none" w="med" len="med"/>
                       <a:tailEnd type="none" w="med" len="med"/>
                     </a:lnB>
+                    <a:solidFill>
+                      <a:srgbClr val="F7F9FC"/>
+                    </a:solidFill>
                   </a:tcPr>
                 </a:tc>
                 <a:tc>
@@ -4051,21 +4455,7 @@
                         <a:buNone/>
                       </a:pPr>
                       <a:r>
-                        <a:rPr lang="en-US" sz="800" dirty="0">
-                          <a:solidFill>
-                            <a:srgbClr val="4338CA"/>
-                          </a:solidFill>
-                          <a:latin typeface="맑은 고딕" pitchFamily="34" charset="0"/>
-                          <a:ea typeface="맑은 고딕" pitchFamily="34" charset="-122"/>
-                          <a:cs typeface="맑은 고딕" pitchFamily="34" charset="-120"/>
-                        </a:rPr>
-                        <a:t>●  </a:t>
-                      </a:r>
-                      <a:pPr indent="0" marL="0">
-                        <a:buNone/>
-                      </a:pPr>
-                      <a:r>
-                        <a:rPr lang="en-US" sz="1000" b="1" dirty="0">
+                        <a:rPr lang="en-US" sz="950" b="1" dirty="0">
                           <a:solidFill>
                             <a:srgbClr val="1F2937"/>
                           </a:solidFill>
@@ -4079,7 +4469,7 @@
                         <a:buNone/>
                       </a:pPr>
                       <a:r>
-                        <a:rPr lang="en-US" sz="1000" dirty="0">
+                        <a:rPr lang="en-US" sz="950" dirty="0">
                           <a:solidFill>
                             <a:srgbClr val="475569"/>
                           </a:solidFill>
@@ -4089,39 +4479,138 @@
                         </a:rPr>
                         <a:t>— 기능 개요·구현 방향</a:t>
                       </a:r>
-                      <a:pPr indent="0" marL="0">
+                      <a:endParaRPr lang="en-US" sz="1200" dirty="0">
+                        <a:latin typeface="맑은 고딕" charset="0"/>
+                        <a:ea typeface="맑은 고딕" charset="0"/>
+                        <a:cs typeface="맑은 고딕" charset="0"/>
+                      </a:endParaRPr>
+                    </a:p>
+                  </a:txBody>
+                  <a:tcPr marL="101600" marR="101600" marT="25400" marB="25400" anchor="ctr">
+                    <a:lnL w="12700" cap="flat" cmpd="sng" algn="ctr">
+                      <a:solidFill>
+                        <a:srgbClr val="E5E7EB"/>
+                      </a:solidFill>
+                      <a:prstDash val="solid"/>
+                      <a:round/>
+                      <a:headEnd type="none" w="med" len="med"/>
+                      <a:tailEnd type="none" w="med" len="med"/>
+                    </a:lnL>
+                    <a:lnR w="12700" cap="flat" cmpd="sng" algn="ctr">
+                      <a:solidFill>
+                        <a:srgbClr val="E5E7EB"/>
+                      </a:solidFill>
+                      <a:prstDash val="solid"/>
+                      <a:round/>
+                      <a:headEnd type="none" w="med" len="med"/>
+                      <a:tailEnd type="none" w="med" len="med"/>
+                    </a:lnR>
+                    <a:lnT w="12700" cap="flat" cmpd="sng" algn="ctr">
+                      <a:solidFill>
+                        <a:srgbClr val="E5E7EB"/>
+                      </a:solidFill>
+                      <a:prstDash val="solid"/>
+                      <a:round/>
+                      <a:headEnd type="none" w="med" len="med"/>
+                      <a:tailEnd type="none" w="med" len="med"/>
+                    </a:lnT>
+                    <a:lnB w="12700" cap="flat" cmpd="sng" algn="ctr">
+                      <a:solidFill>
+                        <a:srgbClr val="E5E7EB"/>
+                      </a:solidFill>
+                      <a:prstDash val="solid"/>
+                      <a:round/>
+                      <a:headEnd type="none" w="med" len="med"/>
+                      <a:tailEnd type="none" w="med" len="med"/>
+                    </a:lnB>
+                    <a:solidFill>
+                      <a:srgbClr val="F7F9FC"/>
+                    </a:solidFill>
+                  </a:tcPr>
+                </a:tc>
+                <a:tc>
+                  <a:txBody>
+                    <a:bodyPr/>
+                    <a:lstStyle/>
+                    <a:p>
+                      <a:pPr algn="ctr" indent="0" marL="0">
                         <a:buNone/>
                       </a:pPr>
                       <a:r>
-                        <a:rPr lang="en-US" sz="1000" dirty="0">
+                        <a:rPr lang="en-US" sz="950" b="1" dirty="0">
                           <a:solidFill>
-                            <a:srgbClr val="000000"/>
+                            <a:srgbClr val="4338CA"/>
                           </a:solidFill>
                           <a:latin typeface="맑은 고딕" pitchFamily="34" charset="0"/>
                           <a:ea typeface="맑은 고딕" pitchFamily="34" charset="-122"/>
                           <a:cs typeface="맑은 고딕" pitchFamily="34" charset="-120"/>
                         </a:rPr>
-                        <a:t>         </a:t>
+                        <a:t>AI 초안</a:t>
                       </a:r>
+                      <a:endParaRPr lang="en-US" sz="950" dirty="0">
+                        <a:latin typeface="맑은 고딕" charset="0"/>
+                        <a:ea typeface="맑은 고딕" charset="0"/>
+                        <a:cs typeface="맑은 고딕" charset="0"/>
+                      </a:endParaRPr>
+                    </a:p>
+                  </a:txBody>
+                  <a:tcPr marL="101600" marR="101600" marT="25400" marB="25400" anchor="ctr">
+                    <a:lnL w="12700" cap="flat" cmpd="sng" algn="ctr">
+                      <a:solidFill>
+                        <a:srgbClr val="E5E7EB"/>
+                      </a:solidFill>
+                      <a:prstDash val="solid"/>
+                      <a:round/>
+                      <a:headEnd type="none" w="med" len="med"/>
+                      <a:tailEnd type="none" w="med" len="med"/>
+                    </a:lnL>
+                    <a:lnR w="12700" cap="flat" cmpd="sng" algn="ctr">
+                      <a:solidFill>
+                        <a:srgbClr val="E5E7EB"/>
+                      </a:solidFill>
+                      <a:prstDash val="solid"/>
+                      <a:round/>
+                      <a:headEnd type="none" w="med" len="med"/>
+                      <a:tailEnd type="none" w="med" len="med"/>
+                    </a:lnR>
+                    <a:lnT w="12700" cap="flat" cmpd="sng" algn="ctr">
+                      <a:solidFill>
+                        <a:srgbClr val="E5E7EB"/>
+                      </a:solidFill>
+                      <a:prstDash val="solid"/>
+                      <a:round/>
+                      <a:headEnd type="none" w="med" len="med"/>
+                      <a:tailEnd type="none" w="med" len="med"/>
+                    </a:lnT>
+                    <a:lnB w="12700" cap="flat" cmpd="sng" algn="ctr">
+                      <a:solidFill>
+                        <a:srgbClr val="E5E7EB"/>
+                      </a:solidFill>
+                      <a:prstDash val="solid"/>
+                      <a:round/>
+                      <a:headEnd type="none" w="med" len="med"/>
+                      <a:tailEnd type="none" w="med" len="med"/>
+                    </a:lnB>
+                    <a:solidFill>
+                      <a:srgbClr val="F7F9FC"/>
+                    </a:solidFill>
+                  </a:tcPr>
+                </a:tc>
+              </a:tr>
+              <a:tr h="201168">
+                <a:tc vMerge="1">
+                  <a:tcPr/>
+                </a:tc>
+                <a:tc>
+                  <a:txBody>
+                    <a:bodyPr/>
+                    <a:lstStyle/>
+                    <a:p>
                       <a:pPr indent="0" marL="0">
                         <a:buNone/>
                       </a:pPr>
                       <a:r>
-                        <a:rPr lang="en-US" sz="800" dirty="0">
-                          <a:solidFill>
-                            <a:srgbClr val="C2410C"/>
-                          </a:solidFill>
-                          <a:latin typeface="맑은 고딕" pitchFamily="34" charset="0"/>
-                          <a:ea typeface="맑은 고딕" pitchFamily="34" charset="-122"/>
-                          <a:cs typeface="맑은 고딕" pitchFamily="34" charset="-120"/>
-                        </a:rPr>
-                        <a:t>●  </a:t>
-                      </a:r>
-                      <a:pPr indent="0" marL="0">
-                        <a:buNone/>
-                      </a:pPr>
-                      <a:r>
-                        <a:rPr lang="en-US" sz="1000" b="1" dirty="0">
+                        <a:rPr lang="en-US" sz="950" b="1" dirty="0">
                           <a:solidFill>
                             <a:srgbClr val="1F2937"/>
                           </a:solidFill>
@@ -4135,7 +4624,7 @@
                         <a:buNone/>
                       </a:pPr>
                       <a:r>
-                        <a:rPr lang="en-US" sz="1000" dirty="0">
+                        <a:rPr lang="en-US" sz="950" dirty="0">
                           <a:solidFill>
                             <a:srgbClr val="475569"/>
                           </a:solidFill>
@@ -4151,12 +4640,59 @@
                         <a:cs typeface="맑은 고딕" charset="0"/>
                       </a:endParaRPr>
                     </a:p>
+                  </a:txBody>
+                  <a:tcPr marL="101600" marR="101600" marT="25400" marB="25400" anchor="ctr">
+                    <a:lnL w="12700" cap="flat" cmpd="sng" algn="ctr">
+                      <a:solidFill>
+                        <a:srgbClr val="E5E7EB"/>
+                      </a:solidFill>
+                      <a:prstDash val="solid"/>
+                      <a:round/>
+                      <a:headEnd type="none" w="med" len="med"/>
+                      <a:tailEnd type="none" w="med" len="med"/>
+                    </a:lnL>
+                    <a:lnR w="12700" cap="flat" cmpd="sng" algn="ctr">
+                      <a:solidFill>
+                        <a:srgbClr val="E5E7EB"/>
+                      </a:solidFill>
+                      <a:prstDash val="solid"/>
+                      <a:round/>
+                      <a:headEnd type="none" w="med" len="med"/>
+                      <a:tailEnd type="none" w="med" len="med"/>
+                    </a:lnR>
+                    <a:lnT w="12700" cap="flat" cmpd="sng" algn="ctr">
+                      <a:solidFill>
+                        <a:srgbClr val="E5E7EB"/>
+                      </a:solidFill>
+                      <a:prstDash val="solid"/>
+                      <a:round/>
+                      <a:headEnd type="none" w="med" len="med"/>
+                      <a:tailEnd type="none" w="med" len="med"/>
+                    </a:lnT>
+                    <a:lnB w="12700" cap="flat" cmpd="sng" algn="ctr">
+                      <a:solidFill>
+                        <a:srgbClr val="E5E7EB"/>
+                      </a:solidFill>
+                      <a:prstDash val="solid"/>
+                      <a:round/>
+                      <a:headEnd type="none" w="med" len="med"/>
+                      <a:tailEnd type="none" w="med" len="med"/>
+                    </a:lnB>
+                    <a:solidFill>
+                      <a:srgbClr val="F7F9FC"/>
+                    </a:solidFill>
+                  </a:tcPr>
+                </a:tc>
+                <a:tc>
+                  <a:txBody>
+                    <a:bodyPr/>
+                    <a:lstStyle/>
                     <a:p>
-                      <a:pPr indent="0" marL="0">
+                      <a:pPr algn="ctr" indent="0" marL="0">
                         <a:buNone/>
                       </a:pPr>
                       <a:r>
-                        <a:rPr lang="en-US" sz="800" dirty="0">
+                        <a:rPr lang="en-US" sz="950" b="1" dirty="0">
                           <a:solidFill>
                             <a:srgbClr val="C2410C"/>
                           </a:solidFill>
@@ -4164,13 +4700,72 @@
                           <a:ea typeface="맑은 고딕" pitchFamily="34" charset="-122"/>
                           <a:cs typeface="맑은 고딕" pitchFamily="34" charset="-120"/>
                         </a:rPr>
-                        <a:t>●  </a:t>
+                        <a:t>사람</a:t>
                       </a:r>
+                      <a:endParaRPr lang="en-US" sz="950" dirty="0">
+                        <a:latin typeface="맑은 고딕" charset="0"/>
+                        <a:ea typeface="맑은 고딕" charset="0"/>
+                        <a:cs typeface="맑은 고딕" charset="0"/>
+                      </a:endParaRPr>
+                    </a:p>
+                  </a:txBody>
+                  <a:tcPr marL="101600" marR="101600" marT="25400" marB="25400" anchor="ctr">
+                    <a:lnL w="12700" cap="flat" cmpd="sng" algn="ctr">
+                      <a:solidFill>
+                        <a:srgbClr val="E5E7EB"/>
+                      </a:solidFill>
+                      <a:prstDash val="solid"/>
+                      <a:round/>
+                      <a:headEnd type="none" w="med" len="med"/>
+                      <a:tailEnd type="none" w="med" len="med"/>
+                    </a:lnL>
+                    <a:lnR w="12700" cap="flat" cmpd="sng" algn="ctr">
+                      <a:solidFill>
+                        <a:srgbClr val="E5E7EB"/>
+                      </a:solidFill>
+                      <a:prstDash val="solid"/>
+                      <a:round/>
+                      <a:headEnd type="none" w="med" len="med"/>
+                      <a:tailEnd type="none" w="med" len="med"/>
+                    </a:lnR>
+                    <a:lnT w="12700" cap="flat" cmpd="sng" algn="ctr">
+                      <a:solidFill>
+                        <a:srgbClr val="E5E7EB"/>
+                      </a:solidFill>
+                      <a:prstDash val="solid"/>
+                      <a:round/>
+                      <a:headEnd type="none" w="med" len="med"/>
+                      <a:tailEnd type="none" w="med" len="med"/>
+                    </a:lnT>
+                    <a:lnB w="12700" cap="flat" cmpd="sng" algn="ctr">
+                      <a:solidFill>
+                        <a:srgbClr val="E5E7EB"/>
+                      </a:solidFill>
+                      <a:prstDash val="solid"/>
+                      <a:round/>
+                      <a:headEnd type="none" w="med" len="med"/>
+                      <a:tailEnd type="none" w="med" len="med"/>
+                    </a:lnB>
+                    <a:solidFill>
+                      <a:srgbClr val="F7F9FC"/>
+                    </a:solidFill>
+                  </a:tcPr>
+                </a:tc>
+              </a:tr>
+              <a:tr h="201168">
+                <a:tc vMerge="1">
+                  <a:tcPr/>
+                </a:tc>
+                <a:tc>
+                  <a:txBody>
+                    <a:bodyPr/>
+                    <a:lstStyle/>
+                    <a:p>
                       <a:pPr indent="0" marL="0">
                         <a:buNone/>
                       </a:pPr>
                       <a:r>
-                        <a:rPr lang="en-US" sz="1000" b="1" dirty="0">
+                        <a:rPr lang="en-US" sz="950" b="1" dirty="0">
                           <a:solidFill>
                             <a:srgbClr val="1F2937"/>
                           </a:solidFill>
@@ -4184,7 +4779,7 @@
                         <a:buNone/>
                       </a:pPr>
                       <a:r>
-                        <a:rPr lang="en-US" sz="1000" dirty="0">
+                        <a:rPr lang="en-US" sz="950" dirty="0">
                           <a:solidFill>
                             <a:srgbClr val="475569"/>
                           </a:solidFill>
@@ -4201,7 +4796,7 @@
                       </a:endParaRPr>
                     </a:p>
                   </a:txBody>
-                  <a:tcPr marL="101600" marR="101600" marT="50800" marB="50800" anchor="ctr">
+                  <a:tcPr marL="101600" marR="101600" marT="25400" marB="25400" anchor="ctr">
                     <a:lnL w="12700" cap="flat" cmpd="sng" algn="ctr">
                       <a:solidFill>
                         <a:srgbClr val="E5E7EB"/>
@@ -4238,11 +4833,82 @@
                       <a:headEnd type="none" w="med" len="med"/>
                       <a:tailEnd type="none" w="med" len="med"/>
                     </a:lnB>
+                    <a:solidFill>
+                      <a:srgbClr val="F7F9FC"/>
+                    </a:solidFill>
+                  </a:tcPr>
+                </a:tc>
+                <a:tc>
+                  <a:txBody>
+                    <a:bodyPr/>
+                    <a:lstStyle/>
+                    <a:p>
+                      <a:pPr algn="ctr" indent="0" marL="0">
+                        <a:buNone/>
+                      </a:pPr>
+                      <a:r>
+                        <a:rPr lang="en-US" sz="950" b="1" dirty="0">
+                          <a:solidFill>
+                            <a:srgbClr val="C2410C"/>
+                          </a:solidFill>
+                          <a:latin typeface="맑은 고딕" pitchFamily="34" charset="0"/>
+                          <a:ea typeface="맑은 고딕" pitchFamily="34" charset="-122"/>
+                          <a:cs typeface="맑은 고딕" pitchFamily="34" charset="-120"/>
+                        </a:rPr>
+                        <a:t>사람</a:t>
+                      </a:r>
+                      <a:endParaRPr lang="en-US" sz="950" dirty="0">
+                        <a:latin typeface="맑은 고딕" charset="0"/>
+                        <a:ea typeface="맑은 고딕" charset="0"/>
+                        <a:cs typeface="맑은 고딕" charset="0"/>
+                      </a:endParaRPr>
+                    </a:p>
+                  </a:txBody>
+                  <a:tcPr marL="101600" marR="101600" marT="25400" marB="25400" anchor="ctr">
+                    <a:lnL w="12700" cap="flat" cmpd="sng" algn="ctr">
+                      <a:solidFill>
+                        <a:srgbClr val="E5E7EB"/>
+                      </a:solidFill>
+                      <a:prstDash val="solid"/>
+                      <a:round/>
+                      <a:headEnd type="none" w="med" len="med"/>
+                      <a:tailEnd type="none" w="med" len="med"/>
+                    </a:lnL>
+                    <a:lnR w="12700" cap="flat" cmpd="sng" algn="ctr">
+                      <a:solidFill>
+                        <a:srgbClr val="E5E7EB"/>
+                      </a:solidFill>
+                      <a:prstDash val="solid"/>
+                      <a:round/>
+                      <a:headEnd type="none" w="med" len="med"/>
+                      <a:tailEnd type="none" w="med" len="med"/>
+                    </a:lnR>
+                    <a:lnT w="12700" cap="flat" cmpd="sng" algn="ctr">
+                      <a:solidFill>
+                        <a:srgbClr val="E5E7EB"/>
+                      </a:solidFill>
+                      <a:prstDash val="solid"/>
+                      <a:round/>
+                      <a:headEnd type="none" w="med" len="med"/>
+                      <a:tailEnd type="none" w="med" len="med"/>
+                    </a:lnT>
+                    <a:lnB w="12700" cap="flat" cmpd="sng" algn="ctr">
+                      <a:solidFill>
+                        <a:srgbClr val="E5E7EB"/>
+                      </a:solidFill>
+                      <a:prstDash val="solid"/>
+                      <a:round/>
+                      <a:headEnd type="none" w="med" len="med"/>
+                      <a:tailEnd type="none" w="med" len="med"/>
+                    </a:lnB>
+                    <a:solidFill>
+                      <a:srgbClr val="F7F9FC"/>
+                    </a:solidFill>
                   </a:tcPr>
                 </a:tc>
               </a:tr>
-              <a:tr h="603504">
-                <a:tc>
+              <a:tr h="201168">
+                <a:tc rowSpan="3">
                   <a:txBody>
                     <a:bodyPr/>
                     <a:lstStyle/>
@@ -4251,7 +4917,7 @@
                         <a:buNone/>
                       </a:pPr>
                       <a:r>
-                        <a:rPr lang="en-US" sz="1100" b="1" dirty="0">
+                        <a:rPr lang="en-US" sz="1050" b="1" dirty="0">
                           <a:solidFill>
                             <a:srgbClr val="6B7280"/>
                           </a:solidFill>
@@ -4265,7 +4931,7 @@
                         <a:buNone/>
                       </a:pPr>
                       <a:r>
-                        <a:rPr lang="en-US" sz="1300" b="1" dirty="0">
+                        <a:rPr lang="en-US" sz="1250" b="1" dirty="0">
                           <a:solidFill>
                             <a:srgbClr val="1F2937"/>
                           </a:solidFill>
@@ -4286,7 +4952,7 @@
                         <a:buNone/>
                       </a:pPr>
                       <a:r>
-                        <a:rPr lang="en-US" sz="850" dirty="0">
+                        <a:rPr lang="en-US" sz="800" dirty="0">
                           <a:solidFill>
                             <a:srgbClr val="A5AEC0"/>
                           </a:solidFill>
@@ -4303,7 +4969,7 @@
                       </a:endParaRPr>
                     </a:p>
                   </a:txBody>
-                  <a:tcPr marL="101600" marR="101600" marT="50800" marB="50800" anchor="ctr">
+                  <a:tcPr marL="101600" marR="101600" marT="25400" marB="25400" anchor="ctr">
                     <a:lnL w="12700" cap="flat" cmpd="sng" algn="ctr">
                       <a:solidFill>
                         <a:srgbClr val="E5E7EB"/>
@@ -4340,6 +5006,9 @@
                       <a:headEnd type="none" w="med" len="med"/>
                       <a:tailEnd type="none" w="med" len="med"/>
                     </a:lnB>
+                    <a:solidFill>
+                      <a:srgbClr val="FFFFFF"/>
+                    </a:solidFill>
                   </a:tcPr>
                 </a:tc>
                 <a:tc>
@@ -4351,21 +5020,7 @@
                         <a:buNone/>
                       </a:pPr>
                       <a:r>
-                        <a:rPr lang="en-US" sz="800" dirty="0">
-                          <a:solidFill>
-                            <a:srgbClr val="C2410C"/>
-                          </a:solidFill>
-                          <a:latin typeface="맑은 고딕" pitchFamily="34" charset="0"/>
-                          <a:ea typeface="맑은 고딕" pitchFamily="34" charset="-122"/>
-                          <a:cs typeface="맑은 고딕" pitchFamily="34" charset="-120"/>
-                        </a:rPr>
-                        <a:t>●  </a:t>
-                      </a:r>
-                      <a:pPr indent="0" marL="0">
-                        <a:buNone/>
-                      </a:pPr>
-                      <a:r>
-                        <a:rPr lang="en-US" sz="1000" b="1" dirty="0">
+                        <a:rPr lang="en-US" sz="950" b="1" dirty="0">
                           <a:solidFill>
                             <a:srgbClr val="1F2937"/>
                           </a:solidFill>
@@ -4379,7 +5034,7 @@
                         <a:buNone/>
                       </a:pPr>
                       <a:r>
-                        <a:rPr lang="en-US" sz="1000" dirty="0">
+                        <a:rPr lang="en-US" sz="950" dirty="0">
                           <a:solidFill>
                             <a:srgbClr val="475569"/>
                           </a:solidFill>
@@ -4387,41 +5042,140 @@
                           <a:ea typeface="맑은 고딕" pitchFamily="34" charset="-122"/>
                           <a:cs typeface="맑은 고딕" pitchFamily="34" charset="-120"/>
                         </a:rPr>
-                        <a:t>— 부서·담당·대상 기능</a:t>
+                        <a:t>— 요청 부서·담당·대상 기능</a:t>
                       </a:r>
-                      <a:pPr indent="0" marL="0">
+                      <a:endParaRPr lang="en-US" sz="1200" dirty="0">
+                        <a:latin typeface="맑은 고딕" charset="0"/>
+                        <a:ea typeface="맑은 고딕" charset="0"/>
+                        <a:cs typeface="맑은 고딕" charset="0"/>
+                      </a:endParaRPr>
+                    </a:p>
+                  </a:txBody>
+                  <a:tcPr marL="101600" marR="101600" marT="25400" marB="25400" anchor="ctr">
+                    <a:lnL w="12700" cap="flat" cmpd="sng" algn="ctr">
+                      <a:solidFill>
+                        <a:srgbClr val="E5E7EB"/>
+                      </a:solidFill>
+                      <a:prstDash val="solid"/>
+                      <a:round/>
+                      <a:headEnd type="none" w="med" len="med"/>
+                      <a:tailEnd type="none" w="med" len="med"/>
+                    </a:lnL>
+                    <a:lnR w="12700" cap="flat" cmpd="sng" algn="ctr">
+                      <a:solidFill>
+                        <a:srgbClr val="E5E7EB"/>
+                      </a:solidFill>
+                      <a:prstDash val="solid"/>
+                      <a:round/>
+                      <a:headEnd type="none" w="med" len="med"/>
+                      <a:tailEnd type="none" w="med" len="med"/>
+                    </a:lnR>
+                    <a:lnT w="12700" cap="flat" cmpd="sng" algn="ctr">
+                      <a:solidFill>
+                        <a:srgbClr val="E5E7EB"/>
+                      </a:solidFill>
+                      <a:prstDash val="solid"/>
+                      <a:round/>
+                      <a:headEnd type="none" w="med" len="med"/>
+                      <a:tailEnd type="none" w="med" len="med"/>
+                    </a:lnT>
+                    <a:lnB w="12700" cap="flat" cmpd="sng" algn="ctr">
+                      <a:solidFill>
+                        <a:srgbClr val="E5E7EB"/>
+                      </a:solidFill>
+                      <a:prstDash val="solid"/>
+                      <a:round/>
+                      <a:headEnd type="none" w="med" len="med"/>
+                      <a:tailEnd type="none" w="med" len="med"/>
+                    </a:lnB>
+                    <a:solidFill>
+                      <a:srgbClr val="FFFFFF"/>
+                    </a:solidFill>
+                  </a:tcPr>
+                </a:tc>
+                <a:tc>
+                  <a:txBody>
+                    <a:bodyPr/>
+                    <a:lstStyle/>
+                    <a:p>
+                      <a:pPr algn="ctr" indent="0" marL="0">
                         <a:buNone/>
                       </a:pPr>
                       <a:r>
-                        <a:rPr lang="en-US" sz="1000" dirty="0">
+                        <a:rPr lang="en-US" sz="950" b="1" dirty="0">
                           <a:solidFill>
-                            <a:srgbClr val="000000"/>
+                            <a:srgbClr val="C2410C"/>
                           </a:solidFill>
                           <a:latin typeface="맑은 고딕" pitchFamily="34" charset="0"/>
                           <a:ea typeface="맑은 고딕" pitchFamily="34" charset="-122"/>
                           <a:cs typeface="맑은 고딕" pitchFamily="34" charset="-120"/>
                         </a:rPr>
-                        <a:t>         </a:t>
+                        <a:t>사람</a:t>
                       </a:r>
+                      <a:endParaRPr lang="en-US" sz="950" dirty="0">
+                        <a:latin typeface="맑은 고딕" charset="0"/>
+                        <a:ea typeface="맑은 고딕" charset="0"/>
+                        <a:cs typeface="맑은 고딕" charset="0"/>
+                      </a:endParaRPr>
+                    </a:p>
+                  </a:txBody>
+                  <a:tcPr marL="101600" marR="101600" marT="25400" marB="25400" anchor="ctr">
+                    <a:lnL w="12700" cap="flat" cmpd="sng" algn="ctr">
+                      <a:solidFill>
+                        <a:srgbClr val="E5E7EB"/>
+                      </a:solidFill>
+                      <a:prstDash val="solid"/>
+                      <a:round/>
+                      <a:headEnd type="none" w="med" len="med"/>
+                      <a:tailEnd type="none" w="med" len="med"/>
+                    </a:lnL>
+                    <a:lnR w="12700" cap="flat" cmpd="sng" algn="ctr">
+                      <a:solidFill>
+                        <a:srgbClr val="E5E7EB"/>
+                      </a:solidFill>
+                      <a:prstDash val="solid"/>
+                      <a:round/>
+                      <a:headEnd type="none" w="med" len="med"/>
+                      <a:tailEnd type="none" w="med" len="med"/>
+                    </a:lnR>
+                    <a:lnT w="12700" cap="flat" cmpd="sng" algn="ctr">
+                      <a:solidFill>
+                        <a:srgbClr val="E5E7EB"/>
+                      </a:solidFill>
+                      <a:prstDash val="solid"/>
+                      <a:round/>
+                      <a:headEnd type="none" w="med" len="med"/>
+                      <a:tailEnd type="none" w="med" len="med"/>
+                    </a:lnT>
+                    <a:lnB w="12700" cap="flat" cmpd="sng" algn="ctr">
+                      <a:solidFill>
+                        <a:srgbClr val="E5E7EB"/>
+                      </a:solidFill>
+                      <a:prstDash val="solid"/>
+                      <a:round/>
+                      <a:headEnd type="none" w="med" len="med"/>
+                      <a:tailEnd type="none" w="med" len="med"/>
+                    </a:lnB>
+                    <a:solidFill>
+                      <a:srgbClr val="FFFFFF"/>
+                    </a:solidFill>
+                  </a:tcPr>
+                </a:tc>
+              </a:tr>
+              <a:tr h="201168">
+                <a:tc vMerge="1">
+                  <a:tcPr/>
+                </a:tc>
+                <a:tc>
+                  <a:txBody>
+                    <a:bodyPr/>
+                    <a:lstStyle/>
+                    <a:p>
                       <a:pPr indent="0" marL="0">
                         <a:buNone/>
                       </a:pPr>
                       <a:r>
-                        <a:rPr lang="en-US" sz="800" dirty="0">
-                          <a:solidFill>
-                            <a:srgbClr val="4338CA"/>
-                          </a:solidFill>
-                          <a:latin typeface="맑은 고딕" pitchFamily="34" charset="0"/>
-                          <a:ea typeface="맑은 고딕" pitchFamily="34" charset="-122"/>
-                          <a:cs typeface="맑은 고딕" pitchFamily="34" charset="-120"/>
-                        </a:rPr>
-                        <a:t>●  </a:t>
-                      </a:r>
-                      <a:pPr indent="0" marL="0">
-                        <a:buNone/>
-                      </a:pPr>
-                      <a:r>
-                        <a:rPr lang="en-US" sz="1000" b="1" dirty="0">
+                        <a:rPr lang="en-US" sz="950" b="1" dirty="0">
                           <a:solidFill>
                             <a:srgbClr val="1F2937"/>
                           </a:solidFill>
@@ -4435,7 +5189,7 @@
                         <a:buNone/>
                       </a:pPr>
                       <a:r>
-                        <a:rPr lang="en-US" sz="1000" dirty="0">
+                        <a:rPr lang="en-US" sz="950" dirty="0">
                           <a:solidFill>
                             <a:srgbClr val="475569"/>
                           </a:solidFill>
@@ -4451,26 +5205,132 @@
                         <a:cs typeface="맑은 고딕" charset="0"/>
                       </a:endParaRPr>
                     </a:p>
+                  </a:txBody>
+                  <a:tcPr marL="101600" marR="101600" marT="25400" marB="25400" anchor="ctr">
+                    <a:lnL w="12700" cap="flat" cmpd="sng" algn="ctr">
+                      <a:solidFill>
+                        <a:srgbClr val="E5E7EB"/>
+                      </a:solidFill>
+                      <a:prstDash val="solid"/>
+                      <a:round/>
+                      <a:headEnd type="none" w="med" len="med"/>
+                      <a:tailEnd type="none" w="med" len="med"/>
+                    </a:lnL>
+                    <a:lnR w="12700" cap="flat" cmpd="sng" algn="ctr">
+                      <a:solidFill>
+                        <a:srgbClr val="E5E7EB"/>
+                      </a:solidFill>
+                      <a:prstDash val="solid"/>
+                      <a:round/>
+                      <a:headEnd type="none" w="med" len="med"/>
+                      <a:tailEnd type="none" w="med" len="med"/>
+                    </a:lnR>
+                    <a:lnT w="12700" cap="flat" cmpd="sng" algn="ctr">
+                      <a:solidFill>
+                        <a:srgbClr val="E5E7EB"/>
+                      </a:solidFill>
+                      <a:prstDash val="solid"/>
+                      <a:round/>
+                      <a:headEnd type="none" w="med" len="med"/>
+                      <a:tailEnd type="none" w="med" len="med"/>
+                    </a:lnT>
+                    <a:lnB w="12700" cap="flat" cmpd="sng" algn="ctr">
+                      <a:solidFill>
+                        <a:srgbClr val="E5E7EB"/>
+                      </a:solidFill>
+                      <a:prstDash val="solid"/>
+                      <a:round/>
+                      <a:headEnd type="none" w="med" len="med"/>
+                      <a:tailEnd type="none" w="med" len="med"/>
+                    </a:lnB>
+                    <a:solidFill>
+                      <a:srgbClr val="FFFFFF"/>
+                    </a:solidFill>
+                  </a:tcPr>
+                </a:tc>
+                <a:tc>
+                  <a:txBody>
+                    <a:bodyPr/>
+                    <a:lstStyle/>
+                    <a:p>
+                      <a:pPr algn="ctr" indent="0" marL="0">
+                        <a:buNone/>
+                      </a:pPr>
+                      <a:r>
+                        <a:rPr lang="en-US" sz="950" b="1" dirty="0">
+                          <a:solidFill>
+                            <a:srgbClr val="4338CA"/>
+                          </a:solidFill>
+                          <a:latin typeface="맑은 고딕" pitchFamily="34" charset="0"/>
+                          <a:ea typeface="맑은 고딕" pitchFamily="34" charset="-122"/>
+                          <a:cs typeface="맑은 고딕" pitchFamily="34" charset="-120"/>
+                        </a:rPr>
+                        <a:t>AI 초안</a:t>
+                      </a:r>
+                      <a:endParaRPr lang="en-US" sz="950" dirty="0">
+                        <a:latin typeface="맑은 고딕" charset="0"/>
+                        <a:ea typeface="맑은 고딕" charset="0"/>
+                        <a:cs typeface="맑은 고딕" charset="0"/>
+                      </a:endParaRPr>
+                    </a:p>
+                  </a:txBody>
+                  <a:tcPr marL="101600" marR="101600" marT="25400" marB="25400" anchor="ctr">
+                    <a:lnL w="12700" cap="flat" cmpd="sng" algn="ctr">
+                      <a:solidFill>
+                        <a:srgbClr val="E5E7EB"/>
+                      </a:solidFill>
+                      <a:prstDash val="solid"/>
+                      <a:round/>
+                      <a:headEnd type="none" w="med" len="med"/>
+                      <a:tailEnd type="none" w="med" len="med"/>
+                    </a:lnL>
+                    <a:lnR w="12700" cap="flat" cmpd="sng" algn="ctr">
+                      <a:solidFill>
+                        <a:srgbClr val="E5E7EB"/>
+                      </a:solidFill>
+                      <a:prstDash val="solid"/>
+                      <a:round/>
+                      <a:headEnd type="none" w="med" len="med"/>
+                      <a:tailEnd type="none" w="med" len="med"/>
+                    </a:lnR>
+                    <a:lnT w="12700" cap="flat" cmpd="sng" algn="ctr">
+                      <a:solidFill>
+                        <a:srgbClr val="E5E7EB"/>
+                      </a:solidFill>
+                      <a:prstDash val="solid"/>
+                      <a:round/>
+                      <a:headEnd type="none" w="med" len="med"/>
+                      <a:tailEnd type="none" w="med" len="med"/>
+                    </a:lnT>
+                    <a:lnB w="12700" cap="flat" cmpd="sng" algn="ctr">
+                      <a:solidFill>
+                        <a:srgbClr val="E5E7EB"/>
+                      </a:solidFill>
+                      <a:prstDash val="solid"/>
+                      <a:round/>
+                      <a:headEnd type="none" w="med" len="med"/>
+                      <a:tailEnd type="none" w="med" len="med"/>
+                    </a:lnB>
+                    <a:solidFill>
+                      <a:srgbClr val="FFFFFF"/>
+                    </a:solidFill>
+                  </a:tcPr>
+                </a:tc>
+              </a:tr>
+              <a:tr h="201168">
+                <a:tc vMerge="1">
+                  <a:tcPr/>
+                </a:tc>
+                <a:tc>
+                  <a:txBody>
+                    <a:bodyPr/>
+                    <a:lstStyle/>
                     <a:p>
                       <a:pPr indent="0" marL="0">
                         <a:buNone/>
                       </a:pPr>
                       <a:r>
-                        <a:rPr lang="en-US" sz="800" dirty="0">
-                          <a:solidFill>
-                            <a:srgbClr val="C2410C"/>
-                          </a:solidFill>
-                          <a:latin typeface="맑은 고딕" pitchFamily="34" charset="0"/>
-                          <a:ea typeface="맑은 고딕" pitchFamily="34" charset="-122"/>
-                          <a:cs typeface="맑은 고딕" pitchFamily="34" charset="-120"/>
-                        </a:rPr>
-                        <a:t>●  </a:t>
-                      </a:r>
-                      <a:pPr indent="0" marL="0">
-                        <a:buNone/>
-                      </a:pPr>
-                      <a:r>
-                        <a:rPr lang="en-US" sz="1000" b="1" dirty="0">
+                        <a:rPr lang="en-US" sz="950" b="1" dirty="0">
                           <a:solidFill>
                             <a:srgbClr val="1F2937"/>
                           </a:solidFill>
@@ -4484,7 +5344,7 @@
                         <a:buNone/>
                       </a:pPr>
                       <a:r>
-                        <a:rPr lang="en-US" sz="1000" dirty="0">
+                        <a:rPr lang="en-US" sz="950" dirty="0">
                           <a:solidFill>
                             <a:srgbClr val="475569"/>
                           </a:solidFill>
@@ -4501,7 +5361,7 @@
                       </a:endParaRPr>
                     </a:p>
                   </a:txBody>
-                  <a:tcPr marL="101600" marR="101600" marT="50800" marB="50800" anchor="ctr">
+                  <a:tcPr marL="101600" marR="101600" marT="25400" marB="25400" anchor="ctr">
                     <a:lnL w="12700" cap="flat" cmpd="sng" algn="ctr">
                       <a:solidFill>
                         <a:srgbClr val="E5E7EB"/>
@@ -4538,11 +5398,82 @@
                       <a:headEnd type="none" w="med" len="med"/>
                       <a:tailEnd type="none" w="med" len="med"/>
                     </a:lnB>
+                    <a:solidFill>
+                      <a:srgbClr val="FFFFFF"/>
+                    </a:solidFill>
+                  </a:tcPr>
+                </a:tc>
+                <a:tc>
+                  <a:txBody>
+                    <a:bodyPr/>
+                    <a:lstStyle/>
+                    <a:p>
+                      <a:pPr algn="ctr" indent="0" marL="0">
+                        <a:buNone/>
+                      </a:pPr>
+                      <a:r>
+                        <a:rPr lang="en-US" sz="950" b="1" dirty="0">
+                          <a:solidFill>
+                            <a:srgbClr val="C2410C"/>
+                          </a:solidFill>
+                          <a:latin typeface="맑은 고딕" pitchFamily="34" charset="0"/>
+                          <a:ea typeface="맑은 고딕" pitchFamily="34" charset="-122"/>
+                          <a:cs typeface="맑은 고딕" pitchFamily="34" charset="-120"/>
+                        </a:rPr>
+                        <a:t>사람</a:t>
+                      </a:r>
+                      <a:endParaRPr lang="en-US" sz="950" dirty="0">
+                        <a:latin typeface="맑은 고딕" charset="0"/>
+                        <a:ea typeface="맑은 고딕" charset="0"/>
+                        <a:cs typeface="맑은 고딕" charset="0"/>
+                      </a:endParaRPr>
+                    </a:p>
+                  </a:txBody>
+                  <a:tcPr marL="101600" marR="101600" marT="25400" marB="25400" anchor="ctr">
+                    <a:lnL w="12700" cap="flat" cmpd="sng" algn="ctr">
+                      <a:solidFill>
+                        <a:srgbClr val="E5E7EB"/>
+                      </a:solidFill>
+                      <a:prstDash val="solid"/>
+                      <a:round/>
+                      <a:headEnd type="none" w="med" len="med"/>
+                      <a:tailEnd type="none" w="med" len="med"/>
+                    </a:lnL>
+                    <a:lnR w="12700" cap="flat" cmpd="sng" algn="ctr">
+                      <a:solidFill>
+                        <a:srgbClr val="E5E7EB"/>
+                      </a:solidFill>
+                      <a:prstDash val="solid"/>
+                      <a:round/>
+                      <a:headEnd type="none" w="med" len="med"/>
+                      <a:tailEnd type="none" w="med" len="med"/>
+                    </a:lnR>
+                    <a:lnT w="12700" cap="flat" cmpd="sng" algn="ctr">
+                      <a:solidFill>
+                        <a:srgbClr val="E5E7EB"/>
+                      </a:solidFill>
+                      <a:prstDash val="solid"/>
+                      <a:round/>
+                      <a:headEnd type="none" w="med" len="med"/>
+                      <a:tailEnd type="none" w="med" len="med"/>
+                    </a:lnT>
+                    <a:lnB w="12700" cap="flat" cmpd="sng" algn="ctr">
+                      <a:solidFill>
+                        <a:srgbClr val="E5E7EB"/>
+                      </a:solidFill>
+                      <a:prstDash val="solid"/>
+                      <a:round/>
+                      <a:headEnd type="none" w="med" len="med"/>
+                      <a:tailEnd type="none" w="med" len="med"/>
+                    </a:lnB>
+                    <a:solidFill>
+                      <a:srgbClr val="FFFFFF"/>
+                    </a:solidFill>
                   </a:tcPr>
                 </a:tc>
               </a:tr>
-              <a:tr h="786384">
-                <a:tc>
+              <a:tr h="201168">
+                <a:tc rowSpan="3">
                   <a:txBody>
                     <a:bodyPr/>
                     <a:lstStyle/>
@@ -4551,7 +5482,7 @@
                         <a:buNone/>
                       </a:pPr>
                       <a:r>
-                        <a:rPr lang="en-US" sz="1100" b="1" dirty="0">
+                        <a:rPr lang="en-US" sz="1050" b="1" dirty="0">
                           <a:solidFill>
                             <a:srgbClr val="6B7280"/>
                           </a:solidFill>
@@ -4565,7 +5496,7 @@
                         <a:buNone/>
                       </a:pPr>
                       <a:r>
-                        <a:rPr lang="en-US" sz="1300" b="1" dirty="0">
+                        <a:rPr lang="en-US" sz="1250" b="1" dirty="0">
                           <a:solidFill>
                             <a:srgbClr val="1F2937"/>
                           </a:solidFill>
@@ -4586,7 +5517,7 @@
                         <a:buNone/>
                       </a:pPr>
                       <a:r>
-                        <a:rPr lang="en-US" sz="850" dirty="0">
+                        <a:rPr lang="en-US" sz="800" dirty="0">
                           <a:solidFill>
                             <a:srgbClr val="A5AEC0"/>
                           </a:solidFill>
@@ -4603,7 +5534,7 @@
                       </a:endParaRPr>
                     </a:p>
                   </a:txBody>
-                  <a:tcPr marL="101600" marR="101600" marT="50800" marB="50800" anchor="ctr">
+                  <a:tcPr marL="101600" marR="101600" marT="25400" marB="25400" anchor="ctr">
                     <a:lnL w="12700" cap="flat" cmpd="sng" algn="ctr">
                       <a:solidFill>
                         <a:srgbClr val="E5E7EB"/>
@@ -4640,6 +5571,9 @@
                       <a:headEnd type="none" w="med" len="med"/>
                       <a:tailEnd type="none" w="med" len="med"/>
                     </a:lnB>
+                    <a:solidFill>
+                      <a:srgbClr val="F7F9FC"/>
+                    </a:solidFill>
                   </a:tcPr>
                 </a:tc>
                 <a:tc>
@@ -4651,21 +5585,7 @@
                         <a:buNone/>
                       </a:pPr>
                       <a:r>
-                        <a:rPr lang="en-US" sz="800" dirty="0">
-                          <a:solidFill>
-                            <a:srgbClr val="4338CA"/>
-                          </a:solidFill>
-                          <a:latin typeface="맑은 고딕" pitchFamily="34" charset="0"/>
-                          <a:ea typeface="맑은 고딕" pitchFamily="34" charset="-122"/>
-                          <a:cs typeface="맑은 고딕" pitchFamily="34" charset="-120"/>
-                        </a:rPr>
-                        <a:t>●  </a:t>
-                      </a:r>
-                      <a:pPr indent="0" marL="0">
-                        <a:buNone/>
-                      </a:pPr>
-                      <a:r>
-                        <a:rPr lang="en-US" sz="1000" b="1" dirty="0">
+                        <a:rPr lang="en-US" sz="950" b="1" dirty="0">
                           <a:solidFill>
                             <a:srgbClr val="1F2937"/>
                           </a:solidFill>
@@ -4679,7 +5599,7 @@
                         <a:buNone/>
                       </a:pPr>
                       <a:r>
-                        <a:rPr lang="en-US" sz="1000" dirty="0">
+                        <a:rPr lang="en-US" sz="950" dirty="0">
                           <a:solidFill>
                             <a:srgbClr val="475569"/>
                           </a:solidFill>
@@ -4695,12 +5615,59 @@
                         <a:cs typeface="맑은 고딕" charset="0"/>
                       </a:endParaRPr>
                     </a:p>
+                  </a:txBody>
+                  <a:tcPr marL="101600" marR="101600" marT="25400" marB="25400" anchor="ctr">
+                    <a:lnL w="12700" cap="flat" cmpd="sng" algn="ctr">
+                      <a:solidFill>
+                        <a:srgbClr val="E5E7EB"/>
+                      </a:solidFill>
+                      <a:prstDash val="solid"/>
+                      <a:round/>
+                      <a:headEnd type="none" w="med" len="med"/>
+                      <a:tailEnd type="none" w="med" len="med"/>
+                    </a:lnL>
+                    <a:lnR w="12700" cap="flat" cmpd="sng" algn="ctr">
+                      <a:solidFill>
+                        <a:srgbClr val="E5E7EB"/>
+                      </a:solidFill>
+                      <a:prstDash val="solid"/>
+                      <a:round/>
+                      <a:headEnd type="none" w="med" len="med"/>
+                      <a:tailEnd type="none" w="med" len="med"/>
+                    </a:lnR>
+                    <a:lnT w="12700" cap="flat" cmpd="sng" algn="ctr">
+                      <a:solidFill>
+                        <a:srgbClr val="E5E7EB"/>
+                      </a:solidFill>
+                      <a:prstDash val="solid"/>
+                      <a:round/>
+                      <a:headEnd type="none" w="med" len="med"/>
+                      <a:tailEnd type="none" w="med" len="med"/>
+                    </a:lnT>
+                    <a:lnB w="12700" cap="flat" cmpd="sng" algn="ctr">
+                      <a:solidFill>
+                        <a:srgbClr val="E5E7EB"/>
+                      </a:solidFill>
+                      <a:prstDash val="solid"/>
+                      <a:round/>
+                      <a:headEnd type="none" w="med" len="med"/>
+                      <a:tailEnd type="none" w="med" len="med"/>
+                    </a:lnB>
+                    <a:solidFill>
+                      <a:srgbClr val="F7F9FC"/>
+                    </a:solidFill>
+                  </a:tcPr>
+                </a:tc>
+                <a:tc>
+                  <a:txBody>
+                    <a:bodyPr/>
+                    <a:lstStyle/>
                     <a:p>
-                      <a:pPr indent="0" marL="0">
+                      <a:pPr algn="ctr" indent="0" marL="0">
                         <a:buNone/>
                       </a:pPr>
                       <a:r>
-                        <a:rPr lang="en-US" sz="800" dirty="0">
+                        <a:rPr lang="en-US" sz="950" b="1" dirty="0">
                           <a:solidFill>
                             <a:srgbClr val="4338CA"/>
                           </a:solidFill>
@@ -4708,13 +5675,72 @@
                           <a:ea typeface="맑은 고딕" pitchFamily="34" charset="-122"/>
                           <a:cs typeface="맑은 고딕" pitchFamily="34" charset="-120"/>
                         </a:rPr>
-                        <a:t>●  </a:t>
+                        <a:t>AI 초안</a:t>
                       </a:r>
+                      <a:endParaRPr lang="en-US" sz="950" dirty="0">
+                        <a:latin typeface="맑은 고딕" charset="0"/>
+                        <a:ea typeface="맑은 고딕" charset="0"/>
+                        <a:cs typeface="맑은 고딕" charset="0"/>
+                      </a:endParaRPr>
+                    </a:p>
+                  </a:txBody>
+                  <a:tcPr marL="101600" marR="101600" marT="25400" marB="25400" anchor="ctr">
+                    <a:lnL w="12700" cap="flat" cmpd="sng" algn="ctr">
+                      <a:solidFill>
+                        <a:srgbClr val="E5E7EB"/>
+                      </a:solidFill>
+                      <a:prstDash val="solid"/>
+                      <a:round/>
+                      <a:headEnd type="none" w="med" len="med"/>
+                      <a:tailEnd type="none" w="med" len="med"/>
+                    </a:lnL>
+                    <a:lnR w="12700" cap="flat" cmpd="sng" algn="ctr">
+                      <a:solidFill>
+                        <a:srgbClr val="E5E7EB"/>
+                      </a:solidFill>
+                      <a:prstDash val="solid"/>
+                      <a:round/>
+                      <a:headEnd type="none" w="med" len="med"/>
+                      <a:tailEnd type="none" w="med" len="med"/>
+                    </a:lnR>
+                    <a:lnT w="12700" cap="flat" cmpd="sng" algn="ctr">
+                      <a:solidFill>
+                        <a:srgbClr val="E5E7EB"/>
+                      </a:solidFill>
+                      <a:prstDash val="solid"/>
+                      <a:round/>
+                      <a:headEnd type="none" w="med" len="med"/>
+                      <a:tailEnd type="none" w="med" len="med"/>
+                    </a:lnT>
+                    <a:lnB w="12700" cap="flat" cmpd="sng" algn="ctr">
+                      <a:solidFill>
+                        <a:srgbClr val="E5E7EB"/>
+                      </a:solidFill>
+                      <a:prstDash val="solid"/>
+                      <a:round/>
+                      <a:headEnd type="none" w="med" len="med"/>
+                      <a:tailEnd type="none" w="med" len="med"/>
+                    </a:lnB>
+                    <a:solidFill>
+                      <a:srgbClr val="F7F9FC"/>
+                    </a:solidFill>
+                  </a:tcPr>
+                </a:tc>
+              </a:tr>
+              <a:tr h="201168">
+                <a:tc vMerge="1">
+                  <a:tcPr/>
+                </a:tc>
+                <a:tc>
+                  <a:txBody>
+                    <a:bodyPr/>
+                    <a:lstStyle/>
+                    <a:p>
                       <a:pPr indent="0" marL="0">
                         <a:buNone/>
                       </a:pPr>
                       <a:r>
-                        <a:rPr lang="en-US" sz="1000" b="1" dirty="0">
+                        <a:rPr lang="en-US" sz="950" b="1" dirty="0">
                           <a:solidFill>
                             <a:srgbClr val="1F2937"/>
                           </a:solidFill>
@@ -4728,7 +5754,7 @@
                         <a:buNone/>
                       </a:pPr>
                       <a:r>
-                        <a:rPr lang="en-US" sz="1000" dirty="0">
+                        <a:rPr lang="en-US" sz="950" dirty="0">
                           <a:solidFill>
                             <a:srgbClr val="475569"/>
                           </a:solidFill>
@@ -4736,35 +5762,7 @@
                           <a:ea typeface="맑은 고딕" pitchFamily="34" charset="-122"/>
                           <a:cs typeface="맑은 고딕" pitchFamily="34" charset="-120"/>
                         </a:rPr>
-                        <a:t>— 기본·변형·예외 3가지 동작유형마다 </a:t>
-                      </a:r>
-                      <a:pPr indent="0" marL="0">
-                        <a:buNone/>
-                      </a:pPr>
-                      <a:r>
-                        <a:rPr lang="en-US" sz="1000" b="1" dirty="0">
-                          <a:solidFill>
-                            <a:srgbClr val="1F2937"/>
-                          </a:solidFill>
-                          <a:latin typeface="맑은 고딕" pitchFamily="34" charset="0"/>
-                          <a:ea typeface="맑은 고딕" pitchFamily="34" charset="-122"/>
-                          <a:cs typeface="맑은 고딕" pitchFamily="34" charset="-120"/>
-                        </a:rPr>
-                        <a:t>선행조건·후행조건·시나리오</a:t>
-                      </a:r>
-                      <a:pPr indent="0" marL="0">
-                        <a:buNone/>
-                      </a:pPr>
-                      <a:r>
-                        <a:rPr lang="en-US" sz="1000" dirty="0">
-                          <a:solidFill>
-                            <a:srgbClr val="475569"/>
-                          </a:solidFill>
-                          <a:latin typeface="맑은 고딕" pitchFamily="34" charset="0"/>
-                          <a:ea typeface="맑은 고딕" pitchFamily="34" charset="-122"/>
-                          <a:cs typeface="맑은 고딕" pitchFamily="34" charset="-120"/>
-                        </a:rPr>
-                        <a:t> 작성 → 총 9행</a:t>
+                        <a:t>— 기본·변형·예외 유형마다 선행·후행·시나리오 (총 9행)</a:t>
                       </a:r>
                       <a:endParaRPr lang="en-US" sz="1200" dirty="0">
                         <a:latin typeface="맑은 고딕" charset="0"/>
@@ -4772,12 +5770,59 @@
                         <a:cs typeface="맑은 고딕" charset="0"/>
                       </a:endParaRPr>
                     </a:p>
+                  </a:txBody>
+                  <a:tcPr marL="101600" marR="101600" marT="25400" marB="25400" anchor="ctr">
+                    <a:lnL w="12700" cap="flat" cmpd="sng" algn="ctr">
+                      <a:solidFill>
+                        <a:srgbClr val="E5E7EB"/>
+                      </a:solidFill>
+                      <a:prstDash val="solid"/>
+                      <a:round/>
+                      <a:headEnd type="none" w="med" len="med"/>
+                      <a:tailEnd type="none" w="med" len="med"/>
+                    </a:lnL>
+                    <a:lnR w="12700" cap="flat" cmpd="sng" algn="ctr">
+                      <a:solidFill>
+                        <a:srgbClr val="E5E7EB"/>
+                      </a:solidFill>
+                      <a:prstDash val="solid"/>
+                      <a:round/>
+                      <a:headEnd type="none" w="med" len="med"/>
+                      <a:tailEnd type="none" w="med" len="med"/>
+                    </a:lnR>
+                    <a:lnT w="12700" cap="flat" cmpd="sng" algn="ctr">
+                      <a:solidFill>
+                        <a:srgbClr val="E5E7EB"/>
+                      </a:solidFill>
+                      <a:prstDash val="solid"/>
+                      <a:round/>
+                      <a:headEnd type="none" w="med" len="med"/>
+                      <a:tailEnd type="none" w="med" len="med"/>
+                    </a:lnT>
+                    <a:lnB w="12700" cap="flat" cmpd="sng" algn="ctr">
+                      <a:solidFill>
+                        <a:srgbClr val="E5E7EB"/>
+                      </a:solidFill>
+                      <a:prstDash val="solid"/>
+                      <a:round/>
+                      <a:headEnd type="none" w="med" len="med"/>
+                      <a:tailEnd type="none" w="med" len="med"/>
+                    </a:lnB>
+                    <a:solidFill>
+                      <a:srgbClr val="F7F9FC"/>
+                    </a:solidFill>
+                  </a:tcPr>
+                </a:tc>
+                <a:tc>
+                  <a:txBody>
+                    <a:bodyPr/>
+                    <a:lstStyle/>
                     <a:p>
-                      <a:pPr indent="0" marL="0">
+                      <a:pPr algn="ctr" indent="0" marL="0">
                         <a:buNone/>
                       </a:pPr>
                       <a:r>
-                        <a:rPr lang="en-US" sz="800" dirty="0">
+                        <a:rPr lang="en-US" sz="950" b="1" dirty="0">
                           <a:solidFill>
                             <a:srgbClr val="4338CA"/>
                           </a:solidFill>
@@ -4785,13 +5830,72 @@
                           <a:ea typeface="맑은 고딕" pitchFamily="34" charset="-122"/>
                           <a:cs typeface="맑은 고딕" pitchFamily="34" charset="-120"/>
                         </a:rPr>
-                        <a:t>●  </a:t>
+                        <a:t>AI 초안</a:t>
                       </a:r>
+                      <a:endParaRPr lang="en-US" sz="950" dirty="0">
+                        <a:latin typeface="맑은 고딕" charset="0"/>
+                        <a:ea typeface="맑은 고딕" charset="0"/>
+                        <a:cs typeface="맑은 고딕" charset="0"/>
+                      </a:endParaRPr>
+                    </a:p>
+                  </a:txBody>
+                  <a:tcPr marL="101600" marR="101600" marT="25400" marB="25400" anchor="ctr">
+                    <a:lnL w="12700" cap="flat" cmpd="sng" algn="ctr">
+                      <a:solidFill>
+                        <a:srgbClr val="E5E7EB"/>
+                      </a:solidFill>
+                      <a:prstDash val="solid"/>
+                      <a:round/>
+                      <a:headEnd type="none" w="med" len="med"/>
+                      <a:tailEnd type="none" w="med" len="med"/>
+                    </a:lnL>
+                    <a:lnR w="12700" cap="flat" cmpd="sng" algn="ctr">
+                      <a:solidFill>
+                        <a:srgbClr val="E5E7EB"/>
+                      </a:solidFill>
+                      <a:prstDash val="solid"/>
+                      <a:round/>
+                      <a:headEnd type="none" w="med" len="med"/>
+                      <a:tailEnd type="none" w="med" len="med"/>
+                    </a:lnR>
+                    <a:lnT w="12700" cap="flat" cmpd="sng" algn="ctr">
+                      <a:solidFill>
+                        <a:srgbClr val="E5E7EB"/>
+                      </a:solidFill>
+                      <a:prstDash val="solid"/>
+                      <a:round/>
+                      <a:headEnd type="none" w="med" len="med"/>
+                      <a:tailEnd type="none" w="med" len="med"/>
+                    </a:lnT>
+                    <a:lnB w="12700" cap="flat" cmpd="sng" algn="ctr">
+                      <a:solidFill>
+                        <a:srgbClr val="E5E7EB"/>
+                      </a:solidFill>
+                      <a:prstDash val="solid"/>
+                      <a:round/>
+                      <a:headEnd type="none" w="med" len="med"/>
+                      <a:tailEnd type="none" w="med" len="med"/>
+                    </a:lnB>
+                    <a:solidFill>
+                      <a:srgbClr val="F7F9FC"/>
+                    </a:solidFill>
+                  </a:tcPr>
+                </a:tc>
+              </a:tr>
+              <a:tr h="201168">
+                <a:tc vMerge="1">
+                  <a:tcPr/>
+                </a:tc>
+                <a:tc>
+                  <a:txBody>
+                    <a:bodyPr/>
+                    <a:lstStyle/>
+                    <a:p>
                       <a:pPr indent="0" marL="0">
                         <a:buNone/>
                       </a:pPr>
                       <a:r>
-                        <a:rPr lang="en-US" sz="1000" b="1" dirty="0">
+                        <a:rPr lang="en-US" sz="950" b="1" dirty="0">
                           <a:solidFill>
                             <a:srgbClr val="1F2937"/>
                           </a:solidFill>
@@ -4805,7 +5909,7 @@
                         <a:buNone/>
                       </a:pPr>
                       <a:r>
-                        <a:rPr lang="en-US" sz="1000" dirty="0">
+                        <a:rPr lang="en-US" sz="950" dirty="0">
                           <a:solidFill>
                             <a:srgbClr val="475569"/>
                           </a:solidFill>
@@ -4822,7 +5926,7 @@
                       </a:endParaRPr>
                     </a:p>
                   </a:txBody>
-                  <a:tcPr marL="101600" marR="101600" marT="50800" marB="50800" anchor="ctr">
+                  <a:tcPr marL="101600" marR="101600" marT="25400" marB="25400" anchor="ctr">
                     <a:lnL w="12700" cap="flat" cmpd="sng" algn="ctr">
                       <a:solidFill>
                         <a:srgbClr val="E5E7EB"/>
@@ -4859,11 +5963,82 @@
                       <a:headEnd type="none" w="med" len="med"/>
                       <a:tailEnd type="none" w="med" len="med"/>
                     </a:lnB>
+                    <a:solidFill>
+                      <a:srgbClr val="F7F9FC"/>
+                    </a:solidFill>
+                  </a:tcPr>
+                </a:tc>
+                <a:tc>
+                  <a:txBody>
+                    <a:bodyPr/>
+                    <a:lstStyle/>
+                    <a:p>
+                      <a:pPr algn="ctr" indent="0" marL="0">
+                        <a:buNone/>
+                      </a:pPr>
+                      <a:r>
+                        <a:rPr lang="en-US" sz="950" b="1" dirty="0">
+                          <a:solidFill>
+                            <a:srgbClr val="4338CA"/>
+                          </a:solidFill>
+                          <a:latin typeface="맑은 고딕" pitchFamily="34" charset="0"/>
+                          <a:ea typeface="맑은 고딕" pitchFamily="34" charset="-122"/>
+                          <a:cs typeface="맑은 고딕" pitchFamily="34" charset="-120"/>
+                        </a:rPr>
+                        <a:t>AI 초안</a:t>
+                      </a:r>
+                      <a:endParaRPr lang="en-US" sz="950" dirty="0">
+                        <a:latin typeface="맑은 고딕" charset="0"/>
+                        <a:ea typeface="맑은 고딕" charset="0"/>
+                        <a:cs typeface="맑은 고딕" charset="0"/>
+                      </a:endParaRPr>
+                    </a:p>
+                  </a:txBody>
+                  <a:tcPr marL="101600" marR="101600" marT="25400" marB="25400" anchor="ctr">
+                    <a:lnL w="12700" cap="flat" cmpd="sng" algn="ctr">
+                      <a:solidFill>
+                        <a:srgbClr val="E5E7EB"/>
+                      </a:solidFill>
+                      <a:prstDash val="solid"/>
+                      <a:round/>
+                      <a:headEnd type="none" w="med" len="med"/>
+                      <a:tailEnd type="none" w="med" len="med"/>
+                    </a:lnL>
+                    <a:lnR w="12700" cap="flat" cmpd="sng" algn="ctr">
+                      <a:solidFill>
+                        <a:srgbClr val="E5E7EB"/>
+                      </a:solidFill>
+                      <a:prstDash val="solid"/>
+                      <a:round/>
+                      <a:headEnd type="none" w="med" len="med"/>
+                      <a:tailEnd type="none" w="med" len="med"/>
+                    </a:lnR>
+                    <a:lnT w="12700" cap="flat" cmpd="sng" algn="ctr">
+                      <a:solidFill>
+                        <a:srgbClr val="E5E7EB"/>
+                      </a:solidFill>
+                      <a:prstDash val="solid"/>
+                      <a:round/>
+                      <a:headEnd type="none" w="med" len="med"/>
+                      <a:tailEnd type="none" w="med" len="med"/>
+                    </a:lnT>
+                    <a:lnB w="12700" cap="flat" cmpd="sng" algn="ctr">
+                      <a:solidFill>
+                        <a:srgbClr val="E5E7EB"/>
+                      </a:solidFill>
+                      <a:prstDash val="solid"/>
+                      <a:round/>
+                      <a:headEnd type="none" w="med" len="med"/>
+                      <a:tailEnd type="none" w="med" len="med"/>
+                    </a:lnB>
+                    <a:solidFill>
+                      <a:srgbClr val="F7F9FC"/>
+                    </a:solidFill>
                   </a:tcPr>
                 </a:tc>
               </a:tr>
-              <a:tr h="713232">
-                <a:tc>
+              <a:tr h="201168">
+                <a:tc rowSpan="3">
                   <a:txBody>
                     <a:bodyPr/>
                     <a:lstStyle/>
@@ -4872,7 +6047,7 @@
                         <a:buNone/>
                       </a:pPr>
                       <a:r>
-                        <a:rPr lang="en-US" sz="1100" b="1" dirty="0">
+                        <a:rPr lang="en-US" sz="1050" b="1" dirty="0">
                           <a:solidFill>
                             <a:srgbClr val="6B7280"/>
                           </a:solidFill>
@@ -4886,7 +6061,7 @@
                         <a:buNone/>
                       </a:pPr>
                       <a:r>
-                        <a:rPr lang="en-US" sz="1300" b="1" dirty="0">
+                        <a:rPr lang="en-US" sz="1250" b="1" dirty="0">
                           <a:solidFill>
                             <a:srgbClr val="1F2937"/>
                           </a:solidFill>
@@ -4907,7 +6082,7 @@
                         <a:buNone/>
                       </a:pPr>
                       <a:r>
-                        <a:rPr lang="en-US" sz="850" dirty="0">
+                        <a:rPr lang="en-US" sz="800" dirty="0">
                           <a:solidFill>
                             <a:srgbClr val="A5AEC0"/>
                           </a:solidFill>
@@ -4924,7 +6099,7 @@
                       </a:endParaRPr>
                     </a:p>
                   </a:txBody>
-                  <a:tcPr marL="101600" marR="101600" marT="50800" marB="50800" anchor="ctr">
+                  <a:tcPr marL="101600" marR="101600" marT="25400" marB="25400" anchor="ctr">
                     <a:lnL w="12700" cap="flat" cmpd="sng" algn="ctr">
                       <a:solidFill>
                         <a:srgbClr val="E5E7EB"/>
@@ -4961,6 +6136,9 @@
                       <a:headEnd type="none" w="med" len="med"/>
                       <a:tailEnd type="none" w="med" len="med"/>
                     </a:lnB>
+                    <a:solidFill>
+                      <a:srgbClr val="FFFFFF"/>
+                    </a:solidFill>
                   </a:tcPr>
                 </a:tc>
                 <a:tc>
@@ -4972,21 +6150,7 @@
                         <a:buNone/>
                       </a:pPr>
                       <a:r>
-                        <a:rPr lang="en-US" sz="800" dirty="0">
-                          <a:solidFill>
-                            <a:srgbClr val="4338CA"/>
-                          </a:solidFill>
-                          <a:latin typeface="맑은 고딕" pitchFamily="34" charset="0"/>
-                          <a:ea typeface="맑은 고딕" pitchFamily="34" charset="-122"/>
-                          <a:cs typeface="맑은 고딕" pitchFamily="34" charset="-120"/>
-                        </a:rPr>
-                        <a:t>●  </a:t>
-                      </a:r>
-                      <a:pPr indent="0" marL="0">
-                        <a:buNone/>
-                      </a:pPr>
-                      <a:r>
-                        <a:rPr lang="en-US" sz="1000" b="1" dirty="0">
+                        <a:rPr lang="en-US" sz="950" b="1" dirty="0">
                           <a:solidFill>
                             <a:srgbClr val="1F2937"/>
                           </a:solidFill>
@@ -5000,7 +6164,7 @@
                         <a:buNone/>
                       </a:pPr>
                       <a:r>
-                        <a:rPr lang="en-US" sz="1000" dirty="0">
+                        <a:rPr lang="en-US" sz="950" dirty="0">
                           <a:solidFill>
                             <a:srgbClr val="475569"/>
                           </a:solidFill>
@@ -5016,12 +6180,59 @@
                         <a:cs typeface="맑은 고딕" charset="0"/>
                       </a:endParaRPr>
                     </a:p>
+                  </a:txBody>
+                  <a:tcPr marL="101600" marR="101600" marT="25400" marB="25400" anchor="ctr">
+                    <a:lnL w="12700" cap="flat" cmpd="sng" algn="ctr">
+                      <a:solidFill>
+                        <a:srgbClr val="E5E7EB"/>
+                      </a:solidFill>
+                      <a:prstDash val="solid"/>
+                      <a:round/>
+                      <a:headEnd type="none" w="med" len="med"/>
+                      <a:tailEnd type="none" w="med" len="med"/>
+                    </a:lnL>
+                    <a:lnR w="12700" cap="flat" cmpd="sng" algn="ctr">
+                      <a:solidFill>
+                        <a:srgbClr val="E5E7EB"/>
+                      </a:solidFill>
+                      <a:prstDash val="solid"/>
+                      <a:round/>
+                      <a:headEnd type="none" w="med" len="med"/>
+                      <a:tailEnd type="none" w="med" len="med"/>
+                    </a:lnR>
+                    <a:lnT w="12700" cap="flat" cmpd="sng" algn="ctr">
+                      <a:solidFill>
+                        <a:srgbClr val="E5E7EB"/>
+                      </a:solidFill>
+                      <a:prstDash val="solid"/>
+                      <a:round/>
+                      <a:headEnd type="none" w="med" len="med"/>
+                      <a:tailEnd type="none" w="med" len="med"/>
+                    </a:lnT>
+                    <a:lnB w="12700" cap="flat" cmpd="sng" algn="ctr">
+                      <a:solidFill>
+                        <a:srgbClr val="E5E7EB"/>
+                      </a:solidFill>
+                      <a:prstDash val="solid"/>
+                      <a:round/>
+                      <a:headEnd type="none" w="med" len="med"/>
+                      <a:tailEnd type="none" w="med" len="med"/>
+                    </a:lnB>
+                    <a:solidFill>
+                      <a:srgbClr val="FFFFFF"/>
+                    </a:solidFill>
+                  </a:tcPr>
+                </a:tc>
+                <a:tc>
+                  <a:txBody>
+                    <a:bodyPr/>
+                    <a:lstStyle/>
                     <a:p>
-                      <a:pPr indent="0" marL="0">
+                      <a:pPr algn="ctr" indent="0" marL="0">
                         <a:buNone/>
                       </a:pPr>
                       <a:r>
-                        <a:rPr lang="en-US" sz="800" dirty="0">
+                        <a:rPr lang="en-US" sz="950" b="1" dirty="0">
                           <a:solidFill>
                             <a:srgbClr val="4338CA"/>
                           </a:solidFill>
@@ -5029,13 +6240,72 @@
                           <a:ea typeface="맑은 고딕" pitchFamily="34" charset="-122"/>
                           <a:cs typeface="맑은 고딕" pitchFamily="34" charset="-120"/>
                         </a:rPr>
-                        <a:t>●  </a:t>
+                        <a:t>AI 초안</a:t>
                       </a:r>
+                      <a:endParaRPr lang="en-US" sz="950" dirty="0">
+                        <a:latin typeface="맑은 고딕" charset="0"/>
+                        <a:ea typeface="맑은 고딕" charset="0"/>
+                        <a:cs typeface="맑은 고딕" charset="0"/>
+                      </a:endParaRPr>
+                    </a:p>
+                  </a:txBody>
+                  <a:tcPr marL="101600" marR="101600" marT="25400" marB="25400" anchor="ctr">
+                    <a:lnL w="12700" cap="flat" cmpd="sng" algn="ctr">
+                      <a:solidFill>
+                        <a:srgbClr val="E5E7EB"/>
+                      </a:solidFill>
+                      <a:prstDash val="solid"/>
+                      <a:round/>
+                      <a:headEnd type="none" w="med" len="med"/>
+                      <a:tailEnd type="none" w="med" len="med"/>
+                    </a:lnL>
+                    <a:lnR w="12700" cap="flat" cmpd="sng" algn="ctr">
+                      <a:solidFill>
+                        <a:srgbClr val="E5E7EB"/>
+                      </a:solidFill>
+                      <a:prstDash val="solid"/>
+                      <a:round/>
+                      <a:headEnd type="none" w="med" len="med"/>
+                      <a:tailEnd type="none" w="med" len="med"/>
+                    </a:lnR>
+                    <a:lnT w="12700" cap="flat" cmpd="sng" algn="ctr">
+                      <a:solidFill>
+                        <a:srgbClr val="E5E7EB"/>
+                      </a:solidFill>
+                      <a:prstDash val="solid"/>
+                      <a:round/>
+                      <a:headEnd type="none" w="med" len="med"/>
+                      <a:tailEnd type="none" w="med" len="med"/>
+                    </a:lnT>
+                    <a:lnB w="12700" cap="flat" cmpd="sng" algn="ctr">
+                      <a:solidFill>
+                        <a:srgbClr val="E5E7EB"/>
+                      </a:solidFill>
+                      <a:prstDash val="solid"/>
+                      <a:round/>
+                      <a:headEnd type="none" w="med" len="med"/>
+                      <a:tailEnd type="none" w="med" len="med"/>
+                    </a:lnB>
+                    <a:solidFill>
+                      <a:srgbClr val="FFFFFF"/>
+                    </a:solidFill>
+                  </a:tcPr>
+                </a:tc>
+              </a:tr>
+              <a:tr h="201168">
+                <a:tc vMerge="1">
+                  <a:tcPr/>
+                </a:tc>
+                <a:tc>
+                  <a:txBody>
+                    <a:bodyPr/>
+                    <a:lstStyle/>
+                    <a:p>
                       <a:pPr indent="0" marL="0">
                         <a:buNone/>
                       </a:pPr>
                       <a:r>
-                        <a:rPr lang="en-US" sz="1000" b="1" dirty="0">
+                        <a:rPr lang="en-US" sz="950" b="1" dirty="0">
                           <a:solidFill>
                             <a:srgbClr val="1F2937"/>
                           </a:solidFill>
@@ -5049,7 +6319,7 @@
                         <a:buNone/>
                       </a:pPr>
                       <a:r>
-                        <a:rPr lang="en-US" sz="1000" dirty="0">
+                        <a:rPr lang="en-US" sz="950" dirty="0">
                           <a:solidFill>
                             <a:srgbClr val="475569"/>
                           </a:solidFill>
@@ -5065,12 +6335,59 @@
                         <a:cs typeface="맑은 고딕" charset="0"/>
                       </a:endParaRPr>
                     </a:p>
+                  </a:txBody>
+                  <a:tcPr marL="101600" marR="101600" marT="25400" marB="25400" anchor="ctr">
+                    <a:lnL w="12700" cap="flat" cmpd="sng" algn="ctr">
+                      <a:solidFill>
+                        <a:srgbClr val="E5E7EB"/>
+                      </a:solidFill>
+                      <a:prstDash val="solid"/>
+                      <a:round/>
+                      <a:headEnd type="none" w="med" len="med"/>
+                      <a:tailEnd type="none" w="med" len="med"/>
+                    </a:lnL>
+                    <a:lnR w="12700" cap="flat" cmpd="sng" algn="ctr">
+                      <a:solidFill>
+                        <a:srgbClr val="E5E7EB"/>
+                      </a:solidFill>
+                      <a:prstDash val="solid"/>
+                      <a:round/>
+                      <a:headEnd type="none" w="med" len="med"/>
+                      <a:tailEnd type="none" w="med" len="med"/>
+                    </a:lnR>
+                    <a:lnT w="12700" cap="flat" cmpd="sng" algn="ctr">
+                      <a:solidFill>
+                        <a:srgbClr val="E5E7EB"/>
+                      </a:solidFill>
+                      <a:prstDash val="solid"/>
+                      <a:round/>
+                      <a:headEnd type="none" w="med" len="med"/>
+                      <a:tailEnd type="none" w="med" len="med"/>
+                    </a:lnT>
+                    <a:lnB w="12700" cap="flat" cmpd="sng" algn="ctr">
+                      <a:solidFill>
+                        <a:srgbClr val="E5E7EB"/>
+                      </a:solidFill>
+                      <a:prstDash val="solid"/>
+                      <a:round/>
+                      <a:headEnd type="none" w="med" len="med"/>
+                      <a:tailEnd type="none" w="med" len="med"/>
+                    </a:lnB>
+                    <a:solidFill>
+                      <a:srgbClr val="FFFFFF"/>
+                    </a:solidFill>
+                  </a:tcPr>
+                </a:tc>
+                <a:tc>
+                  <a:txBody>
+                    <a:bodyPr/>
+                    <a:lstStyle/>
                     <a:p>
-                      <a:pPr indent="0" marL="0">
+                      <a:pPr algn="ctr" indent="0" marL="0">
                         <a:buNone/>
                       </a:pPr>
                       <a:r>
-                        <a:rPr lang="en-US" sz="800" dirty="0">
+                        <a:rPr lang="en-US" sz="950" b="1" dirty="0">
                           <a:solidFill>
                             <a:srgbClr val="4338CA"/>
                           </a:solidFill>
@@ -5078,13 +6395,72 @@
                           <a:ea typeface="맑은 고딕" pitchFamily="34" charset="-122"/>
                           <a:cs typeface="맑은 고딕" pitchFamily="34" charset="-120"/>
                         </a:rPr>
-                        <a:t>●  </a:t>
+                        <a:t>AI 초안</a:t>
                       </a:r>
+                      <a:endParaRPr lang="en-US" sz="950" dirty="0">
+                        <a:latin typeface="맑은 고딕" charset="0"/>
+                        <a:ea typeface="맑은 고딕" charset="0"/>
+                        <a:cs typeface="맑은 고딕" charset="0"/>
+                      </a:endParaRPr>
+                    </a:p>
+                  </a:txBody>
+                  <a:tcPr marL="101600" marR="101600" marT="25400" marB="25400" anchor="ctr">
+                    <a:lnL w="12700" cap="flat" cmpd="sng" algn="ctr">
+                      <a:solidFill>
+                        <a:srgbClr val="E5E7EB"/>
+                      </a:solidFill>
+                      <a:prstDash val="solid"/>
+                      <a:round/>
+                      <a:headEnd type="none" w="med" len="med"/>
+                      <a:tailEnd type="none" w="med" len="med"/>
+                    </a:lnL>
+                    <a:lnR w="12700" cap="flat" cmpd="sng" algn="ctr">
+                      <a:solidFill>
+                        <a:srgbClr val="E5E7EB"/>
+                      </a:solidFill>
+                      <a:prstDash val="solid"/>
+                      <a:round/>
+                      <a:headEnd type="none" w="med" len="med"/>
+                      <a:tailEnd type="none" w="med" len="med"/>
+                    </a:lnR>
+                    <a:lnT w="12700" cap="flat" cmpd="sng" algn="ctr">
+                      <a:solidFill>
+                        <a:srgbClr val="E5E7EB"/>
+                      </a:solidFill>
+                      <a:prstDash val="solid"/>
+                      <a:round/>
+                      <a:headEnd type="none" w="med" len="med"/>
+                      <a:tailEnd type="none" w="med" len="med"/>
+                    </a:lnT>
+                    <a:lnB w="12700" cap="flat" cmpd="sng" algn="ctr">
+                      <a:solidFill>
+                        <a:srgbClr val="E5E7EB"/>
+                      </a:solidFill>
+                      <a:prstDash val="solid"/>
+                      <a:round/>
+                      <a:headEnd type="none" w="med" len="med"/>
+                      <a:tailEnd type="none" w="med" len="med"/>
+                    </a:lnB>
+                    <a:solidFill>
+                      <a:srgbClr val="FFFFFF"/>
+                    </a:solidFill>
+                  </a:tcPr>
+                </a:tc>
+              </a:tr>
+              <a:tr h="201168">
+                <a:tc vMerge="1">
+                  <a:tcPr/>
+                </a:tc>
+                <a:tc>
+                  <a:txBody>
+                    <a:bodyPr/>
+                    <a:lstStyle/>
+                    <a:p>
                       <a:pPr indent="0" marL="0">
                         <a:buNone/>
                       </a:pPr>
                       <a:r>
-                        <a:rPr lang="en-US" sz="1000" b="1" dirty="0">
+                        <a:rPr lang="en-US" sz="950" b="1" dirty="0">
                           <a:solidFill>
                             <a:srgbClr val="1F2937"/>
                           </a:solidFill>
@@ -5098,7 +6474,7 @@
                         <a:buNone/>
                       </a:pPr>
                       <a:r>
-                        <a:rPr lang="en-US" sz="1000" dirty="0">
+                        <a:rPr lang="en-US" sz="950" dirty="0">
                           <a:solidFill>
                             <a:srgbClr val="475569"/>
                           </a:solidFill>
@@ -5115,7 +6491,7 @@
                       </a:endParaRPr>
                     </a:p>
                   </a:txBody>
-                  <a:tcPr marL="101600" marR="101600" marT="50800" marB="50800" anchor="ctr">
+                  <a:tcPr marL="101600" marR="101600" marT="25400" marB="25400" anchor="ctr">
                     <a:lnL w="12700" cap="flat" cmpd="sng" algn="ctr">
                       <a:solidFill>
                         <a:srgbClr val="E5E7EB"/>
@@ -5152,6 +6528,77 @@
                       <a:headEnd type="none" w="med" len="med"/>
                       <a:tailEnd type="none" w="med" len="med"/>
                     </a:lnB>
+                    <a:solidFill>
+                      <a:srgbClr val="FFFFFF"/>
+                    </a:solidFill>
+                  </a:tcPr>
+                </a:tc>
+                <a:tc>
+                  <a:txBody>
+                    <a:bodyPr/>
+                    <a:lstStyle/>
+                    <a:p>
+                      <a:pPr algn="ctr" indent="0" marL="0">
+                        <a:buNone/>
+                      </a:pPr>
+                      <a:r>
+                        <a:rPr lang="en-US" sz="950" b="1" dirty="0">
+                          <a:solidFill>
+                            <a:srgbClr val="4338CA"/>
+                          </a:solidFill>
+                          <a:latin typeface="맑은 고딕" pitchFamily="34" charset="0"/>
+                          <a:ea typeface="맑은 고딕" pitchFamily="34" charset="-122"/>
+                          <a:cs typeface="맑은 고딕" pitchFamily="34" charset="-120"/>
+                        </a:rPr>
+                        <a:t>AI 초안</a:t>
+                      </a:r>
+                      <a:endParaRPr lang="en-US" sz="950" dirty="0">
+                        <a:latin typeface="맑은 고딕" charset="0"/>
+                        <a:ea typeface="맑은 고딕" charset="0"/>
+                        <a:cs typeface="맑은 고딕" charset="0"/>
+                      </a:endParaRPr>
+                    </a:p>
+                  </a:txBody>
+                  <a:tcPr marL="101600" marR="101600" marT="25400" marB="25400" anchor="ctr">
+                    <a:lnL w="12700" cap="flat" cmpd="sng" algn="ctr">
+                      <a:solidFill>
+                        <a:srgbClr val="E5E7EB"/>
+                      </a:solidFill>
+                      <a:prstDash val="solid"/>
+                      <a:round/>
+                      <a:headEnd type="none" w="med" len="med"/>
+                      <a:tailEnd type="none" w="med" len="med"/>
+                    </a:lnL>
+                    <a:lnR w="12700" cap="flat" cmpd="sng" algn="ctr">
+                      <a:solidFill>
+                        <a:srgbClr val="E5E7EB"/>
+                      </a:solidFill>
+                      <a:prstDash val="solid"/>
+                      <a:round/>
+                      <a:headEnd type="none" w="med" len="med"/>
+                      <a:tailEnd type="none" w="med" len="med"/>
+                    </a:lnR>
+                    <a:lnT w="12700" cap="flat" cmpd="sng" algn="ctr">
+                      <a:solidFill>
+                        <a:srgbClr val="E5E7EB"/>
+                      </a:solidFill>
+                      <a:prstDash val="solid"/>
+                      <a:round/>
+                      <a:headEnd type="none" w="med" len="med"/>
+                      <a:tailEnd type="none" w="med" len="med"/>
+                    </a:lnT>
+                    <a:lnB w="12700" cap="flat" cmpd="sng" algn="ctr">
+                      <a:solidFill>
+                        <a:srgbClr val="E5E7EB"/>
+                      </a:solidFill>
+                      <a:prstDash val="solid"/>
+                      <a:round/>
+                      <a:headEnd type="none" w="med" len="med"/>
+                      <a:tailEnd type="none" w="med" len="med"/>
+                    </a:lnB>
+                    <a:solidFill>
+                      <a:srgbClr val="FFFFFF"/>
+                    </a:solidFill>
                   </a:tcPr>
                 </a:tc>
               </a:tr>

--- a/docs/진행공유_요구사항자동화.pptx
+++ b/docs/진행공유_요구사항자동화.pptx
@@ -2713,7 +2713,7 @@
                 <a:ea typeface="맑은 고딕" pitchFamily="34" charset="-122"/>
                 <a:cs typeface="맑은 고딕" pitchFamily="34" charset="-120"/>
               </a:rPr>
-              <a:t>산출물 도출</a:t>
+              <a:t>산출물 도출 — 요구사항 → 개발 이슈 N개</a:t>
             </a:r>
             <a:endParaRPr lang="en-US" sz="3000" dirty="0"/>
           </a:p>
@@ -2770,7 +2770,7 @@
         </p:nvSpPr>
         <p:spPr>
           <a:xfrm>
-            <a:off x="566928" y="1755648"/>
+            <a:off x="566928" y="1737360"/>
             <a:ext cx="11064240" cy="365760"/>
           </a:xfrm>
           <a:prstGeom prst="rect">
@@ -2787,7 +2787,7 @@
               <a:buNone/>
             </a:pPr>
             <a:r>
-              <a:rPr lang="en-US" sz="1500" b="1" dirty="0">
+              <a:rPr lang="en-US" sz="1450" b="1" dirty="0">
                 <a:solidFill>
                   <a:srgbClr val="6366F1"/>
                 </a:solidFill>
@@ -2801,7 +2801,7 @@
               <a:buNone/>
             </a:pPr>
             <a:r>
-              <a:rPr lang="en-US" sz="1500" dirty="0">
+              <a:rPr lang="en-US" sz="1450" dirty="0">
                 <a:solidFill>
                   <a:srgbClr val="1F2937"/>
                 </a:solidFill>
@@ -2809,9 +2809,9 @@
                 <a:ea typeface="맑은 고딕" pitchFamily="34" charset="-122"/>
                 <a:cs typeface="맑은 고딕" pitchFamily="34" charset="-120"/>
               </a:rPr>
-              <a:t>— 확정된 요구사항에서 필요한 산출물(고객요구사항·기능/비기능 요구사항·티켓·상세설계)을 자동으로 도출한다.</a:t>
-            </a:r>
-            <a:endParaRPr lang="en-US" sz="1500" dirty="0"/>
+              <a:t>— 확정 요구사항 1개에서 개발 이슈(티켓) N개를 도출하고, 개발 이슈마다 SWVOC·기능/비기능 요구사항·Detail Design을 각각 자동 생성한다.</a:t>
+            </a:r>
+            <a:endParaRPr lang="en-US" sz="1450" dirty="0"/>
           </a:p>
         </p:txBody>
       </p:sp>
@@ -2831,8 +2831,8 @@
         </p:blipFill>
         <p:spPr>
           <a:xfrm>
-            <a:off x="699516" y="2331720"/>
-            <a:ext cx="10789920" cy="4089197"/>
+            <a:off x="822960" y="2212848"/>
+            <a:ext cx="10515600" cy="3970325"/>
           </a:xfrm>
           <a:prstGeom prst="rect">
             <a:avLst/>

--- a/docs/진행공유_요구사항자동화.pptx
+++ b/docs/진행공유_요구사항자동화.pptx
@@ -2831,8 +2831,8 @@
         </p:blipFill>
         <p:spPr>
           <a:xfrm>
-            <a:off x="822960" y="2212848"/>
-            <a:ext cx="10515600" cy="3970325"/>
+            <a:off x="288036" y="2514600"/>
+            <a:ext cx="11612880" cy="3055925"/>
           </a:xfrm>
           <a:prstGeom prst="rect">
             <a:avLst/>

--- a/docs/진행공유_요구사항자동화.pptx
+++ b/docs/진행공유_요구사항자동화.pptx
@@ -23,9 +23,12 @@
     <p:sldId id="271" r:id="rId17"/>
     <p:sldId id="272" r:id="rId18"/>
     <p:sldId id="273" r:id="rId19"/>
+    <p:sldId id="274" r:id="rId20"/>
+    <p:sldId id="275" r:id="rId21"/>
+    <p:sldId id="276" r:id="rId22"/>
   </p:sldIdLst>
   <p:notesMasterIdLst>
-    <p:notesMasterId r:id="rId20"/>
+    <p:notesMasterId r:id="rId23"/>
   </p:notesMasterIdLst>
   <p:sldSz cx="12192000" cy="6858000"/>
   <p:notesSz cx="6858000" cy="12192000"/>
@@ -1353,6 +1356,94 @@
 </p:notes>
 </file>
 
+<file path=ppt/notesSlides/notesSlide19.xml><?xml version="1.0" encoding="utf-8"?>
+<p:notes xmlns:a="http://schemas.openxmlformats.org/drawingml/2006/main" xmlns:r="http://schemas.openxmlformats.org/officeDocument/2006/relationships" xmlns:p="http://schemas.openxmlformats.org/presentationml/2006/main">
+  <p:cSld>
+    <p:spTree>
+      <p:nvGrpSpPr>
+        <p:cNvPr id="1" name=""/>
+        <p:cNvGrpSpPr/>
+        <p:nvPr/>
+      </p:nvGrpSpPr>
+      <p:grpSpPr>
+        <a:xfrm>
+          <a:off x="0" y="0"/>
+          <a:ext cx="0" cy="0"/>
+          <a:chOff x="0" y="0"/>
+          <a:chExt cx="0" cy="0"/>
+        </a:xfrm>
+      </p:grpSpPr>
+      <p:sp>
+        <p:nvSpPr>
+          <p:cNvPr id="2" name="Slide Image Placeholder 1"/>
+          <p:cNvSpPr>
+            <a:spLocks noGrp="1" noRot="1" noChangeAspect="1"/>
+          </p:cNvSpPr>
+          <p:nvPr>
+            <p:ph type="sldImg"/>
+          </p:nvPr>
+        </p:nvSpPr>
+        <p:spPr/>
+      </p:sp>
+      <p:sp>
+        <p:nvSpPr>
+          <p:cNvPr id="3" name="Notes Placeholder 2"/>
+          <p:cNvSpPr>
+            <a:spLocks noGrp="1"/>
+          </p:cNvSpPr>
+          <p:nvPr>
+            <p:ph type="body" idx="1"/>
+          </p:nvPr>
+        </p:nvSpPr>
+        <p:spPr/>
+        <p:txBody>
+          <a:bodyPr/>
+          <a:lstStyle/>
+          <a:p>
+            <a:r>
+              <a:rPr lang="en-US" dirty="0"/>
+              <a:t/>
+            </a:r>
+            <a:endParaRPr lang="en-US" dirty="0"/>
+          </a:p>
+        </p:txBody>
+      </p:sp>
+      <p:sp>
+        <p:nvSpPr>
+          <p:cNvPr id="4" name="Slide Number Placeholder 3"/>
+          <p:cNvSpPr>
+            <a:spLocks noGrp="1"/>
+          </p:cNvSpPr>
+          <p:nvPr>
+            <p:ph type="sldNum" sz="quarter" idx="10"/>
+          </p:nvPr>
+        </p:nvSpPr>
+        <p:spPr/>
+        <p:txBody>
+          <a:bodyPr/>
+          <a:lstStyle/>
+          <a:p>
+            <a:fld id="{F7021451-1387-4CA6-816F-3879F97B5CBC}" type="slidenum">
+              <a:rPr lang="en-US"/>
+              <a:t>19</a:t>
+            </a:fld>
+            <a:endParaRPr lang="en-US"/>
+          </a:p>
+        </p:txBody>
+      </p:sp>
+    </p:spTree>
+    <p:extLst>
+      <p:ext uri="{BB962C8B-B14F-4D97-AF65-F5344CB8AC3E}">
+        <p14:creationId xmlns:p14="http://schemas.microsoft.com/office/powerpoint/2010/main" val="1024086991"/>
+      </p:ext>
+    </p:extLst>
+  </p:cSld>
+  <p:clrMapOvr>
+    <a:masterClrMapping/>
+  </p:clrMapOvr>
+</p:notes>
+</file>
+
 <file path=ppt/notesSlides/notesSlide2.xml><?xml version="1.0" encoding="utf-8"?>
 <p:notes xmlns:a="http://schemas.openxmlformats.org/drawingml/2006/main" xmlns:r="http://schemas.openxmlformats.org/officeDocument/2006/relationships" xmlns:p="http://schemas.openxmlformats.org/presentationml/2006/main">
   <p:cSld>
@@ -1423,6 +1514,182 @@
             <a:fld id="{F7021451-1387-4CA6-816F-3879F97B5CBC}" type="slidenum">
               <a:rPr lang="en-US"/>
               <a:t>2</a:t>
+            </a:fld>
+            <a:endParaRPr lang="en-US"/>
+          </a:p>
+        </p:txBody>
+      </p:sp>
+    </p:spTree>
+    <p:extLst>
+      <p:ext uri="{BB962C8B-B14F-4D97-AF65-F5344CB8AC3E}">
+        <p14:creationId xmlns:p14="http://schemas.microsoft.com/office/powerpoint/2010/main" val="1024086991"/>
+      </p:ext>
+    </p:extLst>
+  </p:cSld>
+  <p:clrMapOvr>
+    <a:masterClrMapping/>
+  </p:clrMapOvr>
+</p:notes>
+</file>
+
+<file path=ppt/notesSlides/notesSlide20.xml><?xml version="1.0" encoding="utf-8"?>
+<p:notes xmlns:a="http://schemas.openxmlformats.org/drawingml/2006/main" xmlns:r="http://schemas.openxmlformats.org/officeDocument/2006/relationships" xmlns:p="http://schemas.openxmlformats.org/presentationml/2006/main">
+  <p:cSld>
+    <p:spTree>
+      <p:nvGrpSpPr>
+        <p:cNvPr id="1" name=""/>
+        <p:cNvGrpSpPr/>
+        <p:nvPr/>
+      </p:nvGrpSpPr>
+      <p:grpSpPr>
+        <a:xfrm>
+          <a:off x="0" y="0"/>
+          <a:ext cx="0" cy="0"/>
+          <a:chOff x="0" y="0"/>
+          <a:chExt cx="0" cy="0"/>
+        </a:xfrm>
+      </p:grpSpPr>
+      <p:sp>
+        <p:nvSpPr>
+          <p:cNvPr id="2" name="Slide Image Placeholder 1"/>
+          <p:cNvSpPr>
+            <a:spLocks noGrp="1" noRot="1" noChangeAspect="1"/>
+          </p:cNvSpPr>
+          <p:nvPr>
+            <p:ph type="sldImg"/>
+          </p:nvPr>
+        </p:nvSpPr>
+        <p:spPr/>
+      </p:sp>
+      <p:sp>
+        <p:nvSpPr>
+          <p:cNvPr id="3" name="Notes Placeholder 2"/>
+          <p:cNvSpPr>
+            <a:spLocks noGrp="1"/>
+          </p:cNvSpPr>
+          <p:nvPr>
+            <p:ph type="body" idx="1"/>
+          </p:nvPr>
+        </p:nvSpPr>
+        <p:spPr/>
+        <p:txBody>
+          <a:bodyPr/>
+          <a:lstStyle/>
+          <a:p>
+            <a:r>
+              <a:rPr lang="en-US" dirty="0"/>
+              <a:t/>
+            </a:r>
+            <a:endParaRPr lang="en-US" dirty="0"/>
+          </a:p>
+        </p:txBody>
+      </p:sp>
+      <p:sp>
+        <p:nvSpPr>
+          <p:cNvPr id="4" name="Slide Number Placeholder 3"/>
+          <p:cNvSpPr>
+            <a:spLocks noGrp="1"/>
+          </p:cNvSpPr>
+          <p:nvPr>
+            <p:ph type="sldNum" sz="quarter" idx="10"/>
+          </p:nvPr>
+        </p:nvSpPr>
+        <p:spPr/>
+        <p:txBody>
+          <a:bodyPr/>
+          <a:lstStyle/>
+          <a:p>
+            <a:fld id="{F7021451-1387-4CA6-816F-3879F97B5CBC}" type="slidenum">
+              <a:rPr lang="en-US"/>
+              <a:t>20</a:t>
+            </a:fld>
+            <a:endParaRPr lang="en-US"/>
+          </a:p>
+        </p:txBody>
+      </p:sp>
+    </p:spTree>
+    <p:extLst>
+      <p:ext uri="{BB962C8B-B14F-4D97-AF65-F5344CB8AC3E}">
+        <p14:creationId xmlns:p14="http://schemas.microsoft.com/office/powerpoint/2010/main" val="1024086991"/>
+      </p:ext>
+    </p:extLst>
+  </p:cSld>
+  <p:clrMapOvr>
+    <a:masterClrMapping/>
+  </p:clrMapOvr>
+</p:notes>
+</file>
+
+<file path=ppt/notesSlides/notesSlide21.xml><?xml version="1.0" encoding="utf-8"?>
+<p:notes xmlns:a="http://schemas.openxmlformats.org/drawingml/2006/main" xmlns:r="http://schemas.openxmlformats.org/officeDocument/2006/relationships" xmlns:p="http://schemas.openxmlformats.org/presentationml/2006/main">
+  <p:cSld>
+    <p:spTree>
+      <p:nvGrpSpPr>
+        <p:cNvPr id="1" name=""/>
+        <p:cNvGrpSpPr/>
+        <p:nvPr/>
+      </p:nvGrpSpPr>
+      <p:grpSpPr>
+        <a:xfrm>
+          <a:off x="0" y="0"/>
+          <a:ext cx="0" cy="0"/>
+          <a:chOff x="0" y="0"/>
+          <a:chExt cx="0" cy="0"/>
+        </a:xfrm>
+      </p:grpSpPr>
+      <p:sp>
+        <p:nvSpPr>
+          <p:cNvPr id="2" name="Slide Image Placeholder 1"/>
+          <p:cNvSpPr>
+            <a:spLocks noGrp="1" noRot="1" noChangeAspect="1"/>
+          </p:cNvSpPr>
+          <p:nvPr>
+            <p:ph type="sldImg"/>
+          </p:nvPr>
+        </p:nvSpPr>
+        <p:spPr/>
+      </p:sp>
+      <p:sp>
+        <p:nvSpPr>
+          <p:cNvPr id="3" name="Notes Placeholder 2"/>
+          <p:cNvSpPr>
+            <a:spLocks noGrp="1"/>
+          </p:cNvSpPr>
+          <p:nvPr>
+            <p:ph type="body" idx="1"/>
+          </p:nvPr>
+        </p:nvSpPr>
+        <p:spPr/>
+        <p:txBody>
+          <a:bodyPr/>
+          <a:lstStyle/>
+          <a:p>
+            <a:r>
+              <a:rPr lang="en-US" dirty="0"/>
+              <a:t/>
+            </a:r>
+            <a:endParaRPr lang="en-US" dirty="0"/>
+          </a:p>
+        </p:txBody>
+      </p:sp>
+      <p:sp>
+        <p:nvSpPr>
+          <p:cNvPr id="4" name="Slide Number Placeholder 3"/>
+          <p:cNvSpPr>
+            <a:spLocks noGrp="1"/>
+          </p:cNvSpPr>
+          <p:nvPr>
+            <p:ph type="sldNum" sz="quarter" idx="10"/>
+          </p:nvPr>
+        </p:nvSpPr>
+        <p:spPr/>
+        <p:txBody>
+          <a:bodyPr/>
+          <a:lstStyle/>
+          <a:p>
+            <a:fld id="{F7021451-1387-4CA6-816F-3879F97B5CBC}" type="slidenum">
+              <a:rPr lang="en-US"/>
+              <a:t>21</a:t>
             </a:fld>
             <a:endParaRPr lang="en-US"/>
           </a:p>
@@ -2943,7 +3210,7 @@
                 <a:ea typeface="맑은 고딕" pitchFamily="34" charset="-122"/>
                 <a:cs typeface="맑은 고딕" pitchFamily="34" charset="-120"/>
               </a:rPr>
-              <a:t>산출물 커버리지 — 항목별로 누가 쓰나</a:t>
+              <a:t>산출물 커버리지 — AI가 어디까지 만드나</a:t>
             </a:r>
             <a:endParaRPr lang="en-US" sz="3000" dirty="0"/>
           </a:p>
@@ -3044,31 +3311,31 @@
               <a:buNone/>
             </a:pPr>
             <a:r>
-              <a:rPr lang="en-US" sz="1200" b="1" dirty="0">
-                <a:solidFill>
-                  <a:srgbClr val="4338CA"/>
-                </a:solidFill>
-                <a:latin typeface="맑은 고딕" pitchFamily="34" charset="0"/>
-                <a:ea typeface="맑은 고딕" pitchFamily="34" charset="-122"/>
-                <a:cs typeface="맑은 고딕" pitchFamily="34" charset="-120"/>
-              </a:rPr>
-              <a:t>판단 기준</a:t>
+              <a:rPr lang="en-US" sz="1350" b="1" dirty="0">
+                <a:solidFill>
+                  <a:srgbClr val="1F2937"/>
+                </a:solidFill>
+                <a:latin typeface="맑은 고딕" pitchFamily="34" charset="0"/>
+                <a:ea typeface="맑은 고딕" pitchFamily="34" charset="-122"/>
+                <a:cs typeface="맑은 고딕" pitchFamily="34" charset="-120"/>
+              </a:rPr>
+              <a:t>모든 산출물의 세부 항목은 최종적으로 AI가 완성한다.</a:t>
             </a:r>
             <a:pPr indent="0" marL="0">
               <a:buNone/>
             </a:pPr>
             <a:r>
-              <a:rPr lang="en-US" sz="1350" b="1" dirty="0">
-                <a:solidFill>
-                  <a:srgbClr val="1F2937"/>
-                </a:solidFill>
-                <a:latin typeface="맑은 고딕" pitchFamily="34" charset="0"/>
-                <a:ea typeface="맑은 고딕" pitchFamily="34" charset="-122"/>
-                <a:cs typeface="맑은 고딕" pitchFamily="34" charset="-120"/>
-              </a:rPr>
-              <a:t>    이 항목을 「지금 받은 고객 요구서 + 정해진 문서 양식」만으로 채울 수 있는가?</a:t>
-            </a:r>
-            <a:endParaRPr lang="en-US" sz="1200" dirty="0"/>
+              <a:rPr lang="en-US" sz="1250" dirty="0">
+                <a:solidFill>
+                  <a:srgbClr val="6B7280"/>
+                </a:solidFill>
+                <a:latin typeface="맑은 고딕" pitchFamily="34" charset="0"/>
+                <a:ea typeface="맑은 고딕" pitchFamily="34" charset="-122"/>
+                <a:cs typeface="맑은 고딕" pitchFamily="34" charset="-120"/>
+              </a:rPr>
+              <a:t>   다만 협업 방식이 2가지 — 다음 장에서 예시로 설명</a:t>
+            </a:r>
+            <a:endParaRPr lang="en-US" sz="1350" dirty="0"/>
           </a:p>
         </p:txBody>
       </p:sp>
@@ -3113,32 +3380,18 @@
             <a:r>
               <a:rPr lang="en-US" sz="1150" b="1" dirty="0">
                 <a:solidFill>
-                  <a:srgbClr val="1F2937"/>
-                </a:solidFill>
-                <a:latin typeface="맑은 고딕" pitchFamily="34" charset="0"/>
-                <a:ea typeface="맑은 고딕" pitchFamily="34" charset="-122"/>
-                <a:cs typeface="맑은 고딕" pitchFamily="34" charset="-120"/>
-              </a:rPr>
-              <a:t>예 → </a:t>
+                  <a:srgbClr val="4338CA"/>
+                </a:solidFill>
+                <a:latin typeface="맑은 고딕" pitchFamily="34" charset="0"/>
+                <a:ea typeface="맑은 고딕" pitchFamily="34" charset="-122"/>
+                <a:cs typeface="맑은 고딕" pitchFamily="34" charset="-120"/>
+              </a:rPr>
+              <a:t>AI 초안 → 사람 확정</a:t>
             </a:r>
             <a:pPr indent="0" marL="0">
               <a:buNone/>
             </a:pPr>
             <a:r>
-              <a:rPr lang="en-US" sz="1150" b="1" dirty="0">
-                <a:solidFill>
-                  <a:srgbClr val="4338CA"/>
-                </a:solidFill>
-                <a:latin typeface="맑은 고딕" pitchFamily="34" charset="0"/>
-                <a:ea typeface="맑은 고딕" pitchFamily="34" charset="-122"/>
-                <a:cs typeface="맑은 고딕" pitchFamily="34" charset="-120"/>
-              </a:rPr>
-              <a:t>AI 초안</a:t>
-            </a:r>
-            <a:pPr indent="0" marL="0">
-              <a:buNone/>
-            </a:pPr>
-            <a:r>
               <a:rPr lang="en-US" sz="1150" dirty="0">
                 <a:solidFill>
                   <a:srgbClr val="475569"/>
@@ -3147,7 +3400,7 @@
                 <a:ea typeface="맑은 고딕" pitchFamily="34" charset="-122"/>
                 <a:cs typeface="맑은 고딕" pitchFamily="34" charset="-120"/>
               </a:rPr>
-              <a:t>    고객 요구를 요약·정형화·명세로 “옮기는” 일 — 입력이 다 주어져 있어 AI가 잘함</a:t>
+              <a:t>    고객 요구서만으로 채울 수 있는 항목 — AI가 초안, 사람은 판단 필요한 값만 수정 후 확정</a:t>
             </a:r>
             <a:endParaRPr lang="en-US" sz="1150" dirty="0"/>
           </a:p>
@@ -3194,32 +3447,18 @@
             <a:r>
               <a:rPr lang="en-US" sz="1150" b="1" dirty="0">
                 <a:solidFill>
-                  <a:srgbClr val="1F2937"/>
-                </a:solidFill>
-                <a:latin typeface="맑은 고딕" pitchFamily="34" charset="0"/>
-                <a:ea typeface="맑은 고딕" pitchFamily="34" charset="-122"/>
-                <a:cs typeface="맑은 고딕" pitchFamily="34" charset="-120"/>
-              </a:rPr>
-              <a:t>아니오 → </a:t>
+                  <a:srgbClr val="C2410C"/>
+                </a:solidFill>
+                <a:latin typeface="맑은 고딕" pitchFamily="34" charset="0"/>
+                <a:ea typeface="맑은 고딕" pitchFamily="34" charset="-122"/>
+                <a:cs typeface="맑은 고딕" pitchFamily="34" charset="-120"/>
+              </a:rPr>
+              <a:t>사람 초벌 → AI 완성</a:t>
             </a:r>
             <a:pPr indent="0" marL="0">
               <a:buNone/>
             </a:pPr>
             <a:r>
-              <a:rPr lang="en-US" sz="1150" b="1" dirty="0">
-                <a:solidFill>
-                  <a:srgbClr val="C2410C"/>
-                </a:solidFill>
-                <a:latin typeface="맑은 고딕" pitchFamily="34" charset="0"/>
-                <a:ea typeface="맑은 고딕" pitchFamily="34" charset="-122"/>
-                <a:cs typeface="맑은 고딕" pitchFamily="34" charset="-120"/>
-              </a:rPr>
-              <a:t>사람</a:t>
-            </a:r>
-            <a:pPr indent="0" marL="0">
-              <a:buNone/>
-            </a:pPr>
-            <a:r>
               <a:rPr lang="en-US" sz="1150" dirty="0">
                 <a:solidFill>
                   <a:srgbClr val="475569"/>
@@ -3228,7 +3467,7 @@
                 <a:ea typeface="맑은 고딕" pitchFamily="34" charset="-122"/>
                 <a:cs typeface="맑은 고딕" pitchFamily="34" charset="-120"/>
               </a:rPr>
-              <a:t>    우리 시스템의 현재 상태(as-is)를 알아야 하거나 설계·예외 판단이 필요 — AI가 알 수 없는 정보</a:t>
+              <a:t>    AI가 모르는 현재 시스템 상태(as-is)가 필요한 항목 — 사람이 대충 메모하면 AI가 양식에 맞춰 완성</a:t>
             </a:r>
             <a:endParaRPr lang="en-US" sz="1150" dirty="0"/>
           </a:p>
@@ -3415,7 +3654,7 @@
                           <a:ea typeface="맑은 고딕" pitchFamily="34" charset="-122"/>
                           <a:cs typeface="맑은 고딕" pitchFamily="34" charset="-120"/>
                         </a:rPr>
-                        <a:t>작성 주체</a:t>
+                        <a:t>협업 방식</a:t>
                       </a:r>
                       <a:endParaRPr lang="en-US" sz="1150" dirty="0">
                         <a:latin typeface="맑은 고딕" charset="0"/>
@@ -3467,7 +3706,572 @@
                   </a:tcPr>
                 </a:tc>
               </a:tr>
-              <a:tr h="201168">
+              <a:tr h="196596">
+                <a:tc rowSpan="3">
+                  <a:txBody>
+                    <a:bodyPr/>
+                    <a:lstStyle/>
+                    <a:p>
+                      <a:pPr indent="0" marL="0">
+                        <a:buNone/>
+                      </a:pPr>
+                      <a:r>
+                        <a:rPr lang="en-US" sz="1050" b="1" dirty="0">
+                          <a:solidFill>
+                            <a:srgbClr val="6B7280"/>
+                          </a:solidFill>
+                          <a:latin typeface="맑은 고딕" pitchFamily="34" charset="0"/>
+                          <a:ea typeface="맑은 고딕" pitchFamily="34" charset="-122"/>
+                          <a:cs typeface="맑은 고딕" pitchFamily="34" charset="-120"/>
+                        </a:rPr>
+                        <a:t>1  </a:t>
+                      </a:r>
+                      <a:pPr indent="0" marL="0">
+                        <a:buNone/>
+                      </a:pPr>
+                      <a:r>
+                        <a:rPr lang="en-US" sz="1250" b="1" dirty="0">
+                          <a:solidFill>
+                            <a:srgbClr val="1F2937"/>
+                          </a:solidFill>
+                          <a:latin typeface="맑은 고딕" pitchFamily="34" charset="0"/>
+                          <a:ea typeface="맑은 고딕" pitchFamily="34" charset="-122"/>
+                          <a:cs typeface="맑은 고딕" pitchFamily="34" charset="-120"/>
+                        </a:rPr>
+                        <a:t>SWVOC</a:t>
+                      </a:r>
+                      <a:endParaRPr lang="en-US" sz="1200" dirty="0">
+                        <a:latin typeface="맑은 고딕" charset="0"/>
+                        <a:ea typeface="맑은 고딕" charset="0"/>
+                        <a:cs typeface="맑은 고딕" charset="0"/>
+                      </a:endParaRPr>
+                    </a:p>
+                    <a:p>
+                      <a:pPr indent="0" marL="0">
+                        <a:buNone/>
+                      </a:pPr>
+                      <a:r>
+                        <a:rPr lang="en-US" sz="800" dirty="0">
+                          <a:solidFill>
+                            <a:srgbClr val="A5AEC0"/>
+                          </a:solidFill>
+                          <a:latin typeface="맑은 고딕" pitchFamily="34" charset="0"/>
+                          <a:ea typeface="맑은 고딕" pitchFamily="34" charset="-122"/>
+                          <a:cs typeface="맑은 고딕" pitchFamily="34" charset="-120"/>
+                        </a:rPr>
+                        <a:t>고객 요청 원문</a:t>
+                      </a:r>
+                      <a:endParaRPr lang="en-US" sz="1200" dirty="0">
+                        <a:latin typeface="맑은 고딕" charset="0"/>
+                        <a:ea typeface="맑은 고딕" charset="0"/>
+                        <a:cs typeface="맑은 고딕" charset="0"/>
+                      </a:endParaRPr>
+                    </a:p>
+                  </a:txBody>
+                  <a:tcPr marL="101600" marR="101600" marT="25400" marB="25400" anchor="ctr">
+                    <a:lnL w="12700" cap="flat" cmpd="sng" algn="ctr">
+                      <a:solidFill>
+                        <a:srgbClr val="E5E7EB"/>
+                      </a:solidFill>
+                      <a:prstDash val="solid"/>
+                      <a:round/>
+                      <a:headEnd type="none" w="med" len="med"/>
+                      <a:tailEnd type="none" w="med" len="med"/>
+                    </a:lnL>
+                    <a:lnR w="12700" cap="flat" cmpd="sng" algn="ctr">
+                      <a:solidFill>
+                        <a:srgbClr val="E5E7EB"/>
+                      </a:solidFill>
+                      <a:prstDash val="solid"/>
+                      <a:round/>
+                      <a:headEnd type="none" w="med" len="med"/>
+                      <a:tailEnd type="none" w="med" len="med"/>
+                    </a:lnR>
+                    <a:lnT w="12700" cap="flat" cmpd="sng" algn="ctr">
+                      <a:solidFill>
+                        <a:srgbClr val="E5E7EB"/>
+                      </a:solidFill>
+                      <a:prstDash val="solid"/>
+                      <a:round/>
+                      <a:headEnd type="none" w="med" len="med"/>
+                      <a:tailEnd type="none" w="med" len="med"/>
+                    </a:lnT>
+                    <a:lnB w="12700" cap="flat" cmpd="sng" algn="ctr">
+                      <a:solidFill>
+                        <a:srgbClr val="E5E7EB"/>
+                      </a:solidFill>
+                      <a:prstDash val="solid"/>
+                      <a:round/>
+                      <a:headEnd type="none" w="med" len="med"/>
+                      <a:tailEnd type="none" w="med" len="med"/>
+                    </a:lnB>
+                    <a:solidFill>
+                      <a:srgbClr val="FFFFFF"/>
+                    </a:solidFill>
+                  </a:tcPr>
+                </a:tc>
+                <a:tc>
+                  <a:txBody>
+                    <a:bodyPr/>
+                    <a:lstStyle/>
+                    <a:p>
+                      <a:pPr indent="0" marL="0">
+                        <a:buNone/>
+                      </a:pPr>
+                      <a:r>
+                        <a:rPr lang="en-US" sz="1000" b="1" dirty="0">
+                          <a:solidFill>
+                            <a:srgbClr val="1F2937"/>
+                          </a:solidFill>
+                          <a:latin typeface="맑은 고딕" pitchFamily="34" charset="0"/>
+                          <a:ea typeface="맑은 고딕" pitchFamily="34" charset="-122"/>
+                          <a:cs typeface="맑은 고딕" pitchFamily="34" charset="-120"/>
+                        </a:rPr>
+                        <a:t>요청자 </a:t>
+                      </a:r>
+                      <a:pPr indent="0" marL="0">
+                        <a:buNone/>
+                      </a:pPr>
+                      <a:r>
+                        <a:rPr lang="en-US" sz="1000" dirty="0">
+                          <a:solidFill>
+                            <a:srgbClr val="475569"/>
+                          </a:solidFill>
+                          <a:latin typeface="맑은 고딕" pitchFamily="34" charset="0"/>
+                          <a:ea typeface="맑은 고딕" pitchFamily="34" charset="-122"/>
+                          <a:cs typeface="맑은 고딕" pitchFamily="34" charset="-120"/>
+                        </a:rPr>
+                        <a:t>— 요청 부서·담당·대상 기능</a:t>
+                      </a:r>
+                      <a:endParaRPr lang="en-US" sz="1200" dirty="0">
+                        <a:latin typeface="맑은 고딕" charset="0"/>
+                        <a:ea typeface="맑은 고딕" charset="0"/>
+                        <a:cs typeface="맑은 고딕" charset="0"/>
+                      </a:endParaRPr>
+                    </a:p>
+                  </a:txBody>
+                  <a:tcPr marL="101600" marR="101600" marT="25400" marB="25400" anchor="ctr">
+                    <a:lnL w="12700" cap="flat" cmpd="sng" algn="ctr">
+                      <a:solidFill>
+                        <a:srgbClr val="E5E7EB"/>
+                      </a:solidFill>
+                      <a:prstDash val="solid"/>
+                      <a:round/>
+                      <a:headEnd type="none" w="med" len="med"/>
+                      <a:tailEnd type="none" w="med" len="med"/>
+                    </a:lnL>
+                    <a:lnR w="12700" cap="flat" cmpd="sng" algn="ctr">
+                      <a:solidFill>
+                        <a:srgbClr val="E5E7EB"/>
+                      </a:solidFill>
+                      <a:prstDash val="solid"/>
+                      <a:round/>
+                      <a:headEnd type="none" w="med" len="med"/>
+                      <a:tailEnd type="none" w="med" len="med"/>
+                    </a:lnR>
+                    <a:lnT w="12700" cap="flat" cmpd="sng" algn="ctr">
+                      <a:solidFill>
+                        <a:srgbClr val="E5E7EB"/>
+                      </a:solidFill>
+                      <a:prstDash val="solid"/>
+                      <a:round/>
+                      <a:headEnd type="none" w="med" len="med"/>
+                      <a:tailEnd type="none" w="med" len="med"/>
+                    </a:lnT>
+                    <a:lnB w="12700" cap="flat" cmpd="sng" algn="ctr">
+                      <a:solidFill>
+                        <a:srgbClr val="E5E7EB"/>
+                      </a:solidFill>
+                      <a:prstDash val="solid"/>
+                      <a:round/>
+                      <a:headEnd type="none" w="med" len="med"/>
+                      <a:tailEnd type="none" w="med" len="med"/>
+                    </a:lnB>
+                    <a:solidFill>
+                      <a:srgbClr val="FFFFFF"/>
+                    </a:solidFill>
+                  </a:tcPr>
+                </a:tc>
+                <a:tc>
+                  <a:txBody>
+                    <a:bodyPr/>
+                    <a:lstStyle/>
+                    <a:p>
+                      <a:pPr algn="ctr" indent="0" marL="0">
+                        <a:buNone/>
+                      </a:pPr>
+                      <a:r>
+                        <a:rPr lang="en-US" sz="1000" b="1" dirty="0">
+                          <a:solidFill>
+                            <a:srgbClr val="C2410C"/>
+                          </a:solidFill>
+                          <a:latin typeface="맑은 고딕" pitchFamily="34" charset="0"/>
+                          <a:ea typeface="맑은 고딕" pitchFamily="34" charset="-122"/>
+                          <a:cs typeface="맑은 고딕" pitchFamily="34" charset="-120"/>
+                        </a:rPr>
+                        <a:t>사람 초벌</a:t>
+                      </a:r>
+                      <a:endParaRPr lang="en-US" sz="1000" dirty="0">
+                        <a:latin typeface="맑은 고딕" charset="0"/>
+                        <a:ea typeface="맑은 고딕" charset="0"/>
+                        <a:cs typeface="맑은 고딕" charset="0"/>
+                      </a:endParaRPr>
+                    </a:p>
+                  </a:txBody>
+                  <a:tcPr marL="101600" marR="101600" marT="25400" marB="25400" anchor="ctr">
+                    <a:lnL w="12700" cap="flat" cmpd="sng" algn="ctr">
+                      <a:solidFill>
+                        <a:srgbClr val="E5E7EB"/>
+                      </a:solidFill>
+                      <a:prstDash val="solid"/>
+                      <a:round/>
+                      <a:headEnd type="none" w="med" len="med"/>
+                      <a:tailEnd type="none" w="med" len="med"/>
+                    </a:lnL>
+                    <a:lnR w="12700" cap="flat" cmpd="sng" algn="ctr">
+                      <a:solidFill>
+                        <a:srgbClr val="E5E7EB"/>
+                      </a:solidFill>
+                      <a:prstDash val="solid"/>
+                      <a:round/>
+                      <a:headEnd type="none" w="med" len="med"/>
+                      <a:tailEnd type="none" w="med" len="med"/>
+                    </a:lnR>
+                    <a:lnT w="12700" cap="flat" cmpd="sng" algn="ctr">
+                      <a:solidFill>
+                        <a:srgbClr val="E5E7EB"/>
+                      </a:solidFill>
+                      <a:prstDash val="solid"/>
+                      <a:round/>
+                      <a:headEnd type="none" w="med" len="med"/>
+                      <a:tailEnd type="none" w="med" len="med"/>
+                    </a:lnT>
+                    <a:lnB w="12700" cap="flat" cmpd="sng" algn="ctr">
+                      <a:solidFill>
+                        <a:srgbClr val="E5E7EB"/>
+                      </a:solidFill>
+                      <a:prstDash val="solid"/>
+                      <a:round/>
+                      <a:headEnd type="none" w="med" len="med"/>
+                      <a:tailEnd type="none" w="med" len="med"/>
+                    </a:lnB>
+                    <a:solidFill>
+                      <a:srgbClr val="FFFFFF"/>
+                    </a:solidFill>
+                  </a:tcPr>
+                </a:tc>
+              </a:tr>
+              <a:tr h="196596">
+                <a:tc vMerge="1">
+                  <a:tcPr/>
+                </a:tc>
+                <a:tc>
+                  <a:txBody>
+                    <a:bodyPr/>
+                    <a:lstStyle/>
+                    <a:p>
+                      <a:pPr indent="0" marL="0">
+                        <a:buNone/>
+                      </a:pPr>
+                      <a:r>
+                        <a:rPr lang="en-US" sz="1000" b="1" dirty="0">
+                          <a:solidFill>
+                            <a:srgbClr val="1F2937"/>
+                          </a:solidFill>
+                          <a:latin typeface="맑은 고딕" pitchFamily="34" charset="0"/>
+                          <a:ea typeface="맑은 고딕" pitchFamily="34" charset="-122"/>
+                          <a:cs typeface="맑은 고딕" pitchFamily="34" charset="-120"/>
+                        </a:rPr>
+                        <a:t>요청사항 </a:t>
+                      </a:r>
+                      <a:pPr indent="0" marL="0">
+                        <a:buNone/>
+                      </a:pPr>
+                      <a:r>
+                        <a:rPr lang="en-US" sz="1000" dirty="0">
+                          <a:solidFill>
+                            <a:srgbClr val="475569"/>
+                          </a:solidFill>
+                          <a:latin typeface="맑은 고딕" pitchFamily="34" charset="0"/>
+                          <a:ea typeface="맑은 고딕" pitchFamily="34" charset="-122"/>
+                          <a:cs typeface="맑은 고딕" pitchFamily="34" charset="-120"/>
+                        </a:rPr>
+                        <a:t>— 고객 요구를 양식에 맞춰 정리</a:t>
+                      </a:r>
+                      <a:endParaRPr lang="en-US" sz="1200" dirty="0">
+                        <a:latin typeface="맑은 고딕" charset="0"/>
+                        <a:ea typeface="맑은 고딕" charset="0"/>
+                        <a:cs typeface="맑은 고딕" charset="0"/>
+                      </a:endParaRPr>
+                    </a:p>
+                  </a:txBody>
+                  <a:tcPr marL="101600" marR="101600" marT="25400" marB="25400" anchor="ctr">
+                    <a:lnL w="12700" cap="flat" cmpd="sng" algn="ctr">
+                      <a:solidFill>
+                        <a:srgbClr val="E5E7EB"/>
+                      </a:solidFill>
+                      <a:prstDash val="solid"/>
+                      <a:round/>
+                      <a:headEnd type="none" w="med" len="med"/>
+                      <a:tailEnd type="none" w="med" len="med"/>
+                    </a:lnL>
+                    <a:lnR w="12700" cap="flat" cmpd="sng" algn="ctr">
+                      <a:solidFill>
+                        <a:srgbClr val="E5E7EB"/>
+                      </a:solidFill>
+                      <a:prstDash val="solid"/>
+                      <a:round/>
+                      <a:headEnd type="none" w="med" len="med"/>
+                      <a:tailEnd type="none" w="med" len="med"/>
+                    </a:lnR>
+                    <a:lnT w="12700" cap="flat" cmpd="sng" algn="ctr">
+                      <a:solidFill>
+                        <a:srgbClr val="E5E7EB"/>
+                      </a:solidFill>
+                      <a:prstDash val="solid"/>
+                      <a:round/>
+                      <a:headEnd type="none" w="med" len="med"/>
+                      <a:tailEnd type="none" w="med" len="med"/>
+                    </a:lnT>
+                    <a:lnB w="12700" cap="flat" cmpd="sng" algn="ctr">
+                      <a:solidFill>
+                        <a:srgbClr val="E5E7EB"/>
+                      </a:solidFill>
+                      <a:prstDash val="solid"/>
+                      <a:round/>
+                      <a:headEnd type="none" w="med" len="med"/>
+                      <a:tailEnd type="none" w="med" len="med"/>
+                    </a:lnB>
+                    <a:solidFill>
+                      <a:srgbClr val="FFFFFF"/>
+                    </a:solidFill>
+                  </a:tcPr>
+                </a:tc>
+                <a:tc>
+                  <a:txBody>
+                    <a:bodyPr/>
+                    <a:lstStyle/>
+                    <a:p>
+                      <a:pPr algn="ctr" indent="0" marL="0">
+                        <a:buNone/>
+                      </a:pPr>
+                      <a:r>
+                        <a:rPr lang="en-US" sz="1000" b="1" dirty="0">
+                          <a:solidFill>
+                            <a:srgbClr val="4338CA"/>
+                          </a:solidFill>
+                          <a:latin typeface="맑은 고딕" pitchFamily="34" charset="0"/>
+                          <a:ea typeface="맑은 고딕" pitchFamily="34" charset="-122"/>
+                          <a:cs typeface="맑은 고딕" pitchFamily="34" charset="-120"/>
+                        </a:rPr>
+                        <a:t>AI 초안</a:t>
+                      </a:r>
+                      <a:endParaRPr lang="en-US" sz="1000" dirty="0">
+                        <a:latin typeface="맑은 고딕" charset="0"/>
+                        <a:ea typeface="맑은 고딕" charset="0"/>
+                        <a:cs typeface="맑은 고딕" charset="0"/>
+                      </a:endParaRPr>
+                    </a:p>
+                  </a:txBody>
+                  <a:tcPr marL="101600" marR="101600" marT="25400" marB="25400" anchor="ctr">
+                    <a:lnL w="12700" cap="flat" cmpd="sng" algn="ctr">
+                      <a:solidFill>
+                        <a:srgbClr val="E5E7EB"/>
+                      </a:solidFill>
+                      <a:prstDash val="solid"/>
+                      <a:round/>
+                      <a:headEnd type="none" w="med" len="med"/>
+                      <a:tailEnd type="none" w="med" len="med"/>
+                    </a:lnL>
+                    <a:lnR w="12700" cap="flat" cmpd="sng" algn="ctr">
+                      <a:solidFill>
+                        <a:srgbClr val="E5E7EB"/>
+                      </a:solidFill>
+                      <a:prstDash val="solid"/>
+                      <a:round/>
+                      <a:headEnd type="none" w="med" len="med"/>
+                      <a:tailEnd type="none" w="med" len="med"/>
+                    </a:lnR>
+                    <a:lnT w="12700" cap="flat" cmpd="sng" algn="ctr">
+                      <a:solidFill>
+                        <a:srgbClr val="E5E7EB"/>
+                      </a:solidFill>
+                      <a:prstDash val="solid"/>
+                      <a:round/>
+                      <a:headEnd type="none" w="med" len="med"/>
+                      <a:tailEnd type="none" w="med" len="med"/>
+                    </a:lnT>
+                    <a:lnB w="12700" cap="flat" cmpd="sng" algn="ctr">
+                      <a:solidFill>
+                        <a:srgbClr val="E5E7EB"/>
+                      </a:solidFill>
+                      <a:prstDash val="solid"/>
+                      <a:round/>
+                      <a:headEnd type="none" w="med" len="med"/>
+                      <a:tailEnd type="none" w="med" len="med"/>
+                    </a:lnB>
+                    <a:solidFill>
+                      <a:srgbClr val="FFFFFF"/>
+                    </a:solidFill>
+                  </a:tcPr>
+                </a:tc>
+              </a:tr>
+              <a:tr h="196596">
+                <a:tc vMerge="1">
+                  <a:tcPr/>
+                </a:tc>
+                <a:tc>
+                  <a:txBody>
+                    <a:bodyPr/>
+                    <a:lstStyle/>
+                    <a:p>
+                      <a:pPr indent="0" marL="0">
+                        <a:buNone/>
+                      </a:pPr>
+                      <a:r>
+                        <a:rPr lang="en-US" sz="1000" b="1" dirty="0">
+                          <a:solidFill>
+                            <a:srgbClr val="1F2937"/>
+                          </a:solidFill>
+                          <a:latin typeface="맑은 고딕" pitchFamily="34" charset="0"/>
+                          <a:ea typeface="맑은 고딕" pitchFamily="34" charset="-122"/>
+                          <a:cs typeface="맑은 고딕" pitchFamily="34" charset="-120"/>
+                        </a:rPr>
+                        <a:t>특이사항 </a:t>
+                      </a:r>
+                      <a:pPr indent="0" marL="0">
+                        <a:buNone/>
+                      </a:pPr>
+                      <a:r>
+                        <a:rPr lang="en-US" sz="1000" dirty="0">
+                          <a:solidFill>
+                            <a:srgbClr val="475569"/>
+                          </a:solidFill>
+                          <a:latin typeface="맑은 고딕" pitchFamily="34" charset="0"/>
+                          <a:ea typeface="맑은 고딕" pitchFamily="34" charset="-122"/>
+                          <a:cs typeface="맑은 고딕" pitchFamily="34" charset="-120"/>
+                        </a:rPr>
+                        <a:t>— 제약·주의·이력</a:t>
+                      </a:r>
+                      <a:endParaRPr lang="en-US" sz="1200" dirty="0">
+                        <a:latin typeface="맑은 고딕" charset="0"/>
+                        <a:ea typeface="맑은 고딕" charset="0"/>
+                        <a:cs typeface="맑은 고딕" charset="0"/>
+                      </a:endParaRPr>
+                    </a:p>
+                  </a:txBody>
+                  <a:tcPr marL="101600" marR="101600" marT="25400" marB="25400" anchor="ctr">
+                    <a:lnL w="12700" cap="flat" cmpd="sng" algn="ctr">
+                      <a:solidFill>
+                        <a:srgbClr val="E5E7EB"/>
+                      </a:solidFill>
+                      <a:prstDash val="solid"/>
+                      <a:round/>
+                      <a:headEnd type="none" w="med" len="med"/>
+                      <a:tailEnd type="none" w="med" len="med"/>
+                    </a:lnL>
+                    <a:lnR w="12700" cap="flat" cmpd="sng" algn="ctr">
+                      <a:solidFill>
+                        <a:srgbClr val="E5E7EB"/>
+                      </a:solidFill>
+                      <a:prstDash val="solid"/>
+                      <a:round/>
+                      <a:headEnd type="none" w="med" len="med"/>
+                      <a:tailEnd type="none" w="med" len="med"/>
+                    </a:lnR>
+                    <a:lnT w="12700" cap="flat" cmpd="sng" algn="ctr">
+                      <a:solidFill>
+                        <a:srgbClr val="E5E7EB"/>
+                      </a:solidFill>
+                      <a:prstDash val="solid"/>
+                      <a:round/>
+                      <a:headEnd type="none" w="med" len="med"/>
+                      <a:tailEnd type="none" w="med" len="med"/>
+                    </a:lnT>
+                    <a:lnB w="12700" cap="flat" cmpd="sng" algn="ctr">
+                      <a:solidFill>
+                        <a:srgbClr val="E5E7EB"/>
+                      </a:solidFill>
+                      <a:prstDash val="solid"/>
+                      <a:round/>
+                      <a:headEnd type="none" w="med" len="med"/>
+                      <a:tailEnd type="none" w="med" len="med"/>
+                    </a:lnB>
+                    <a:solidFill>
+                      <a:srgbClr val="FFFFFF"/>
+                    </a:solidFill>
+                  </a:tcPr>
+                </a:tc>
+                <a:tc>
+                  <a:txBody>
+                    <a:bodyPr/>
+                    <a:lstStyle/>
+                    <a:p>
+                      <a:pPr algn="ctr" indent="0" marL="0">
+                        <a:buNone/>
+                      </a:pPr>
+                      <a:r>
+                        <a:rPr lang="en-US" sz="1000" b="1" dirty="0">
+                          <a:solidFill>
+                            <a:srgbClr val="C2410C"/>
+                          </a:solidFill>
+                          <a:latin typeface="맑은 고딕" pitchFamily="34" charset="0"/>
+                          <a:ea typeface="맑은 고딕" pitchFamily="34" charset="-122"/>
+                          <a:cs typeface="맑은 고딕" pitchFamily="34" charset="-120"/>
+                        </a:rPr>
+                        <a:t>사람 초벌</a:t>
+                      </a:r>
+                      <a:endParaRPr lang="en-US" sz="1000" dirty="0">
+                        <a:latin typeface="맑은 고딕" charset="0"/>
+                        <a:ea typeface="맑은 고딕" charset="0"/>
+                        <a:cs typeface="맑은 고딕" charset="0"/>
+                      </a:endParaRPr>
+                    </a:p>
+                  </a:txBody>
+                  <a:tcPr marL="101600" marR="101600" marT="25400" marB="25400" anchor="ctr">
+                    <a:lnL w="12700" cap="flat" cmpd="sng" algn="ctr">
+                      <a:solidFill>
+                        <a:srgbClr val="E5E7EB"/>
+                      </a:solidFill>
+                      <a:prstDash val="solid"/>
+                      <a:round/>
+                      <a:headEnd type="none" w="med" len="med"/>
+                      <a:tailEnd type="none" w="med" len="med"/>
+                    </a:lnL>
+                    <a:lnR w="12700" cap="flat" cmpd="sng" algn="ctr">
+                      <a:solidFill>
+                        <a:srgbClr val="E5E7EB"/>
+                      </a:solidFill>
+                      <a:prstDash val="solid"/>
+                      <a:round/>
+                      <a:headEnd type="none" w="med" len="med"/>
+                      <a:tailEnd type="none" w="med" len="med"/>
+                    </a:lnR>
+                    <a:lnT w="12700" cap="flat" cmpd="sng" algn="ctr">
+                      <a:solidFill>
+                        <a:srgbClr val="E5E7EB"/>
+                      </a:solidFill>
+                      <a:prstDash val="solid"/>
+                      <a:round/>
+                      <a:headEnd type="none" w="med" len="med"/>
+                      <a:tailEnd type="none" w="med" len="med"/>
+                    </a:lnT>
+                    <a:lnB w="12700" cap="flat" cmpd="sng" algn="ctr">
+                      <a:solidFill>
+                        <a:srgbClr val="E5E7EB"/>
+                      </a:solidFill>
+                      <a:prstDash val="solid"/>
+                      <a:round/>
+                      <a:headEnd type="none" w="med" len="med"/>
+                      <a:tailEnd type="none" w="med" len="med"/>
+                    </a:lnB>
+                    <a:solidFill>
+                      <a:srgbClr val="FFFFFF"/>
+                    </a:solidFill>
+                  </a:tcPr>
+                </a:tc>
+              </a:tr>
+              <a:tr h="196596">
                 <a:tc rowSpan="5">
                   <a:txBody>
                     <a:bodyPr/>
@@ -3485,7 +4289,7 @@
                           <a:ea typeface="맑은 고딕" pitchFamily="34" charset="-122"/>
                           <a:cs typeface="맑은 고딕" pitchFamily="34" charset="-120"/>
                         </a:rPr>
-                        <a:t>1  </a:t>
+                        <a:t>2  </a:t>
                       </a:r>
                       <a:pPr indent="0" marL="0">
                         <a:buNone/>
@@ -3567,7 +4371,7 @@
                       <a:tailEnd type="none" w="med" len="med"/>
                     </a:lnB>
                     <a:solidFill>
-                      <a:srgbClr val="FFFFFF"/>
+                      <a:srgbClr val="F7F9FC"/>
                     </a:solidFill>
                   </a:tcPr>
                 </a:tc>
@@ -3580,7 +4384,7 @@
                         <a:buNone/>
                       </a:pPr>
                       <a:r>
-                        <a:rPr lang="en-US" sz="950" b="1" dirty="0">
+                        <a:rPr lang="en-US" sz="1000" b="1" dirty="0">
                           <a:solidFill>
                             <a:srgbClr val="1F2937"/>
                           </a:solidFill>
@@ -3594,7 +4398,7 @@
                         <a:buNone/>
                       </a:pPr>
                       <a:r>
-                        <a:rPr lang="en-US" sz="950" dirty="0">
+                        <a:rPr lang="en-US" sz="1000" dirty="0">
                           <a:solidFill>
                             <a:srgbClr val="475569"/>
                           </a:solidFill>
@@ -3649,7 +4453,7 @@
                       <a:tailEnd type="none" w="med" len="med"/>
                     </a:lnB>
                     <a:solidFill>
-                      <a:srgbClr val="FFFFFF"/>
+                      <a:srgbClr val="F7F9FC"/>
                     </a:solidFill>
                   </a:tcPr>
                 </a:tc>
@@ -3662,7 +4466,7 @@
                         <a:buNone/>
                       </a:pPr>
                       <a:r>
-                        <a:rPr lang="en-US" sz="950" b="1" dirty="0">
+                        <a:rPr lang="en-US" sz="1000" b="1" dirty="0">
                           <a:solidFill>
                             <a:srgbClr val="C2410C"/>
                           </a:solidFill>
@@ -3670,9 +4474,9 @@
                           <a:ea typeface="맑은 고딕" pitchFamily="34" charset="-122"/>
                           <a:cs typeface="맑은 고딕" pitchFamily="34" charset="-120"/>
                         </a:rPr>
-                        <a:t>사람</a:t>
+                        <a:t>사람 초벌</a:t>
                       </a:r>
-                      <a:endParaRPr lang="en-US" sz="950" dirty="0">
+                      <a:endParaRPr lang="en-US" sz="1000" dirty="0">
                         <a:latin typeface="맑은 고딕" charset="0"/>
                         <a:ea typeface="맑은 고딕" charset="0"/>
                         <a:cs typeface="맑은 고딕" charset="0"/>
@@ -3717,12 +4521,12 @@
                       <a:tailEnd type="none" w="med" len="med"/>
                     </a:lnB>
                     <a:solidFill>
-                      <a:srgbClr val="FFFFFF"/>
+                      <a:srgbClr val="F7F9FC"/>
                     </a:solidFill>
                   </a:tcPr>
                 </a:tc>
               </a:tr>
-              <a:tr h="201168">
+              <a:tr h="196596">
                 <a:tc vMerge="1">
                   <a:tcPr/>
                 </a:tc>
@@ -3735,7 +4539,7 @@
                         <a:buNone/>
                       </a:pPr>
                       <a:r>
-                        <a:rPr lang="en-US" sz="950" b="1" dirty="0">
+                        <a:rPr lang="en-US" sz="1000" b="1" dirty="0">
                           <a:solidFill>
                             <a:srgbClr val="1F2937"/>
                           </a:solidFill>
@@ -3749,7 +4553,7 @@
                         <a:buNone/>
                       </a:pPr>
                       <a:r>
-                        <a:rPr lang="en-US" sz="950" dirty="0">
+                        <a:rPr lang="en-US" sz="1000" dirty="0">
                           <a:solidFill>
                             <a:srgbClr val="475569"/>
                           </a:solidFill>
@@ -3804,7 +4608,7 @@
                       <a:tailEnd type="none" w="med" len="med"/>
                     </a:lnB>
                     <a:solidFill>
-                      <a:srgbClr val="FFFFFF"/>
+                      <a:srgbClr val="F7F9FC"/>
                     </a:solidFill>
                   </a:tcPr>
                 </a:tc>
@@ -3817,7 +4621,7 @@
                         <a:buNone/>
                       </a:pPr>
                       <a:r>
-                        <a:rPr lang="en-US" sz="950" b="1" dirty="0">
+                        <a:rPr lang="en-US" sz="1000" b="1" dirty="0">
                           <a:solidFill>
                             <a:srgbClr val="4338CA"/>
                           </a:solidFill>
@@ -3827,7 +4631,7 @@
                         </a:rPr>
                         <a:t>AI 초안</a:t>
                       </a:r>
-                      <a:endParaRPr lang="en-US" sz="950" dirty="0">
+                      <a:endParaRPr lang="en-US" sz="1000" dirty="0">
                         <a:latin typeface="맑은 고딕" charset="0"/>
                         <a:ea typeface="맑은 고딕" charset="0"/>
                         <a:cs typeface="맑은 고딕" charset="0"/>
@@ -3872,12 +4676,12 @@
                       <a:tailEnd type="none" w="med" len="med"/>
                     </a:lnB>
                     <a:solidFill>
-                      <a:srgbClr val="FFFFFF"/>
+                      <a:srgbClr val="F7F9FC"/>
                     </a:solidFill>
                   </a:tcPr>
                 </a:tc>
               </a:tr>
-              <a:tr h="201168">
+              <a:tr h="196596">
                 <a:tc vMerge="1">
                   <a:tcPr/>
                 </a:tc>
@@ -3890,7 +4694,7 @@
                         <a:buNone/>
                       </a:pPr>
                       <a:r>
-                        <a:rPr lang="en-US" sz="950" b="1" dirty="0">
+                        <a:rPr lang="en-US" sz="1000" b="1" dirty="0">
                           <a:solidFill>
                             <a:srgbClr val="1F2937"/>
                           </a:solidFill>
@@ -3904,7 +4708,7 @@
                         <a:buNone/>
                       </a:pPr>
                       <a:r>
-                        <a:rPr lang="en-US" sz="950" dirty="0">
+                        <a:rPr lang="en-US" sz="1000" dirty="0">
                           <a:solidFill>
                             <a:srgbClr val="475569"/>
                           </a:solidFill>
@@ -3959,7 +4763,7 @@
                       <a:tailEnd type="none" w="med" len="med"/>
                     </a:lnB>
                     <a:solidFill>
-                      <a:srgbClr val="FFFFFF"/>
+                      <a:srgbClr val="F7F9FC"/>
                     </a:solidFill>
                   </a:tcPr>
                 </a:tc>
@@ -3972,7 +4776,7 @@
                         <a:buNone/>
                       </a:pPr>
                       <a:r>
-                        <a:rPr lang="en-US" sz="950" b="1" dirty="0">
+                        <a:rPr lang="en-US" sz="1000" b="1" dirty="0">
                           <a:solidFill>
                             <a:srgbClr val="C2410C"/>
                           </a:solidFill>
@@ -3980,9 +4784,9 @@
                           <a:ea typeface="맑은 고딕" pitchFamily="34" charset="-122"/>
                           <a:cs typeface="맑은 고딕" pitchFamily="34" charset="-120"/>
                         </a:rPr>
-                        <a:t>사람</a:t>
+                        <a:t>사람 초벌</a:t>
                       </a:r>
-                      <a:endParaRPr lang="en-US" sz="950" dirty="0">
+                      <a:endParaRPr lang="en-US" sz="1000" dirty="0">
                         <a:latin typeface="맑은 고딕" charset="0"/>
                         <a:ea typeface="맑은 고딕" charset="0"/>
                         <a:cs typeface="맑은 고딕" charset="0"/>
@@ -4027,12 +4831,12 @@
                       <a:tailEnd type="none" w="med" len="med"/>
                     </a:lnB>
                     <a:solidFill>
-                      <a:srgbClr val="FFFFFF"/>
+                      <a:srgbClr val="F7F9FC"/>
                     </a:solidFill>
                   </a:tcPr>
                 </a:tc>
               </a:tr>
-              <a:tr h="201168">
+              <a:tr h="196596">
                 <a:tc vMerge="1">
                   <a:tcPr/>
                 </a:tc>
@@ -4045,7 +4849,7 @@
                         <a:buNone/>
                       </a:pPr>
                       <a:r>
-                        <a:rPr lang="en-US" sz="950" b="1" dirty="0">
+                        <a:rPr lang="en-US" sz="1000" b="1" dirty="0">
                           <a:solidFill>
                             <a:srgbClr val="1F2937"/>
                           </a:solidFill>
@@ -4059,7 +4863,7 @@
                         <a:buNone/>
                       </a:pPr>
                       <a:r>
-                        <a:rPr lang="en-US" sz="950" dirty="0">
+                        <a:rPr lang="en-US" sz="1000" dirty="0">
                           <a:solidFill>
                             <a:srgbClr val="475569"/>
                           </a:solidFill>
@@ -4114,7 +4918,7 @@
                       <a:tailEnd type="none" w="med" len="med"/>
                     </a:lnB>
                     <a:solidFill>
-                      <a:srgbClr val="FFFFFF"/>
+                      <a:srgbClr val="F7F9FC"/>
                     </a:solidFill>
                   </a:tcPr>
                 </a:tc>
@@ -4127,7 +4931,7 @@
                         <a:buNone/>
                       </a:pPr>
                       <a:r>
-                        <a:rPr lang="en-US" sz="950" b="1" dirty="0">
+                        <a:rPr lang="en-US" sz="1000" b="1" dirty="0">
                           <a:solidFill>
                             <a:srgbClr val="4338CA"/>
                           </a:solidFill>
@@ -4137,7 +4941,7 @@
                         </a:rPr>
                         <a:t>AI 초안</a:t>
                       </a:r>
-                      <a:endParaRPr lang="en-US" sz="950" dirty="0">
+                      <a:endParaRPr lang="en-US" sz="1000" dirty="0">
                         <a:latin typeface="맑은 고딕" charset="0"/>
                         <a:ea typeface="맑은 고딕" charset="0"/>
                         <a:cs typeface="맑은 고딕" charset="0"/>
@@ -4182,12 +4986,12 @@
                       <a:tailEnd type="none" w="med" len="med"/>
                     </a:lnB>
                     <a:solidFill>
-                      <a:srgbClr val="FFFFFF"/>
+                      <a:srgbClr val="F7F9FC"/>
                     </a:solidFill>
                   </a:tcPr>
                 </a:tc>
               </a:tr>
-              <a:tr h="201168">
+              <a:tr h="196596">
                 <a:tc vMerge="1">
                   <a:tcPr/>
                 </a:tc>
@@ -4200,7 +5004,7 @@
                         <a:buNone/>
                       </a:pPr>
                       <a:r>
-                        <a:rPr lang="en-US" sz="950" b="1" dirty="0">
+                        <a:rPr lang="en-US" sz="1000" b="1" dirty="0">
                           <a:solidFill>
                             <a:srgbClr val="1F2937"/>
                           </a:solidFill>
@@ -4214,7 +5018,7 @@
                         <a:buNone/>
                       </a:pPr>
                       <a:r>
-                        <a:rPr lang="en-US" sz="950" dirty="0">
+                        <a:rPr lang="en-US" sz="1000" dirty="0">
                           <a:solidFill>
                             <a:srgbClr val="475569"/>
                           </a:solidFill>
@@ -4222,7 +5026,7 @@
                           <a:ea typeface="맑은 고딕" pitchFamily="34" charset="-122"/>
                           <a:cs typeface="맑은 고딕" pitchFamily="34" charset="-120"/>
                         </a:rPr>
-                        <a:t>— 변경점 설계 내용</a:t>
+                        <a:t>— 변경점 설계 (as-is는 사람, to-be는 AI)</a:t>
                       </a:r>
                       <a:endParaRPr lang="en-US" sz="1200" dirty="0">
                         <a:latin typeface="맑은 고딕" charset="0"/>
@@ -4269,7 +5073,7 @@
                       <a:tailEnd type="none" w="med" len="med"/>
                     </a:lnB>
                     <a:solidFill>
-                      <a:srgbClr val="FFFFFF"/>
+                      <a:srgbClr val="F7F9FC"/>
                     </a:solidFill>
                   </a:tcPr>
                 </a:tc>
@@ -4282,7 +5086,7 @@
                         <a:buNone/>
                       </a:pPr>
                       <a:r>
-                        <a:rPr lang="en-US" sz="950" b="1" dirty="0">
+                        <a:rPr lang="en-US" sz="1000" b="1" dirty="0">
                           <a:solidFill>
                             <a:srgbClr val="C2410C"/>
                           </a:solidFill>
@@ -4290,9 +5094,9 @@
                           <a:ea typeface="맑은 고딕" pitchFamily="34" charset="-122"/>
                           <a:cs typeface="맑은 고딕" pitchFamily="34" charset="-120"/>
                         </a:rPr>
-                        <a:t>사람</a:t>
+                        <a:t>사람 초벌</a:t>
                       </a:r>
-                      <a:endParaRPr lang="en-US" sz="950" dirty="0">
+                      <a:endParaRPr lang="en-US" sz="1000" dirty="0">
                         <a:latin typeface="맑은 고딕" charset="0"/>
                         <a:ea typeface="맑은 고딕" charset="0"/>
                         <a:cs typeface="맑은 고딕" charset="0"/>
@@ -4337,12 +5141,12 @@
                       <a:tailEnd type="none" w="med" len="med"/>
                     </a:lnB>
                     <a:solidFill>
-                      <a:srgbClr val="FFFFFF"/>
+                      <a:srgbClr val="F7F9FC"/>
                     </a:solidFill>
                   </a:tcPr>
                 </a:tc>
               </a:tr>
-              <a:tr h="201168">
+              <a:tr h="196596">
                 <a:tc rowSpan="3">
                   <a:txBody>
                     <a:bodyPr/>
@@ -4360,7 +5164,1137 @@
                           <a:ea typeface="맑은 고딕" pitchFamily="34" charset="-122"/>
                           <a:cs typeface="맑은 고딕" pitchFamily="34" charset="-120"/>
                         </a:rPr>
-                        <a:t>2  </a:t>
+                        <a:t>3  </a:t>
+                      </a:r>
+                      <a:pPr indent="0" marL="0">
+                        <a:buNone/>
+                      </a:pPr>
+                      <a:r>
+                        <a:rPr lang="en-US" sz="1250" b="1" dirty="0">
+                          <a:solidFill>
+                            <a:srgbClr val="1F2937"/>
+                          </a:solidFill>
+                          <a:latin typeface="맑은 고딕" pitchFamily="34" charset="0"/>
+                          <a:ea typeface="맑은 고딕" pitchFamily="34" charset="-122"/>
+                          <a:cs typeface="맑은 고딕" pitchFamily="34" charset="-120"/>
+                        </a:rPr>
+                        <a:t>기능 요구사항</a:t>
+                      </a:r>
+                      <a:endParaRPr lang="en-US" sz="1200" dirty="0">
+                        <a:latin typeface="맑은 고딕" charset="0"/>
+                        <a:ea typeface="맑은 고딕" charset="0"/>
+                        <a:cs typeface="맑은 고딕" charset="0"/>
+                      </a:endParaRPr>
+                    </a:p>
+                    <a:p>
+                      <a:pPr indent="0" marL="0">
+                        <a:buNone/>
+                      </a:pPr>
+                      <a:r>
+                        <a:rPr lang="en-US" sz="800" dirty="0">
+                          <a:solidFill>
+                            <a:srgbClr val="A5AEC0"/>
+                          </a:solidFill>
+                          <a:latin typeface="맑은 고딕" pitchFamily="34" charset="0"/>
+                          <a:ea typeface="맑은 고딕" pitchFamily="34" charset="-122"/>
+                          <a:cs typeface="맑은 고딕" pitchFamily="34" charset="-120"/>
+                        </a:rPr>
+                        <a:t>Function Requirement</a:t>
+                      </a:r>
+                      <a:endParaRPr lang="en-US" sz="1200" dirty="0">
+                        <a:latin typeface="맑은 고딕" charset="0"/>
+                        <a:ea typeface="맑은 고딕" charset="0"/>
+                        <a:cs typeface="맑은 고딕" charset="0"/>
+                      </a:endParaRPr>
+                    </a:p>
+                  </a:txBody>
+                  <a:tcPr marL="101600" marR="101600" marT="25400" marB="25400" anchor="ctr">
+                    <a:lnL w="12700" cap="flat" cmpd="sng" algn="ctr">
+                      <a:solidFill>
+                        <a:srgbClr val="E5E7EB"/>
+                      </a:solidFill>
+                      <a:prstDash val="solid"/>
+                      <a:round/>
+                      <a:headEnd type="none" w="med" len="med"/>
+                      <a:tailEnd type="none" w="med" len="med"/>
+                    </a:lnL>
+                    <a:lnR w="12700" cap="flat" cmpd="sng" algn="ctr">
+                      <a:solidFill>
+                        <a:srgbClr val="E5E7EB"/>
+                      </a:solidFill>
+                      <a:prstDash val="solid"/>
+                      <a:round/>
+                      <a:headEnd type="none" w="med" len="med"/>
+                      <a:tailEnd type="none" w="med" len="med"/>
+                    </a:lnR>
+                    <a:lnT w="12700" cap="flat" cmpd="sng" algn="ctr">
+                      <a:solidFill>
+                        <a:srgbClr val="E5E7EB"/>
+                      </a:solidFill>
+                      <a:prstDash val="solid"/>
+                      <a:round/>
+                      <a:headEnd type="none" w="med" len="med"/>
+                      <a:tailEnd type="none" w="med" len="med"/>
+                    </a:lnT>
+                    <a:lnB w="12700" cap="flat" cmpd="sng" algn="ctr">
+                      <a:solidFill>
+                        <a:srgbClr val="E5E7EB"/>
+                      </a:solidFill>
+                      <a:prstDash val="solid"/>
+                      <a:round/>
+                      <a:headEnd type="none" w="med" len="med"/>
+                      <a:tailEnd type="none" w="med" len="med"/>
+                    </a:lnB>
+                    <a:solidFill>
+                      <a:srgbClr val="FFFFFF"/>
+                    </a:solidFill>
+                  </a:tcPr>
+                </a:tc>
+                <a:tc>
+                  <a:txBody>
+                    <a:bodyPr/>
+                    <a:lstStyle/>
+                    <a:p>
+                      <a:pPr indent="0" marL="0">
+                        <a:buNone/>
+                      </a:pPr>
+                      <a:r>
+                        <a:rPr lang="en-US" sz="1000" b="1" dirty="0">
+                          <a:solidFill>
+                            <a:srgbClr val="1F2937"/>
+                          </a:solidFill>
+                          <a:latin typeface="맑은 고딕" pitchFamily="34" charset="0"/>
+                          <a:ea typeface="맑은 고딕" pitchFamily="34" charset="-122"/>
+                          <a:cs typeface="맑은 고딕" pitchFamily="34" charset="-120"/>
+                        </a:rPr>
+                        <a:t>개요 </a:t>
+                      </a:r>
+                      <a:pPr indent="0" marL="0">
+                        <a:buNone/>
+                      </a:pPr>
+                      <a:r>
+                        <a:rPr lang="en-US" sz="1000" dirty="0">
+                          <a:solidFill>
+                            <a:srgbClr val="475569"/>
+                          </a:solidFill>
+                          <a:latin typeface="맑은 고딕" pitchFamily="34" charset="0"/>
+                          <a:ea typeface="맑은 고딕" pitchFamily="34" charset="-122"/>
+                          <a:cs typeface="맑은 고딕" pitchFamily="34" charset="-120"/>
+                        </a:rPr>
+                        <a:t>— 역할(시스템 내 책임)·목적</a:t>
+                      </a:r>
+                      <a:endParaRPr lang="en-US" sz="1200" dirty="0">
+                        <a:latin typeface="맑은 고딕" charset="0"/>
+                        <a:ea typeface="맑은 고딕" charset="0"/>
+                        <a:cs typeface="맑은 고딕" charset="0"/>
+                      </a:endParaRPr>
+                    </a:p>
+                  </a:txBody>
+                  <a:tcPr marL="101600" marR="101600" marT="25400" marB="25400" anchor="ctr">
+                    <a:lnL w="12700" cap="flat" cmpd="sng" algn="ctr">
+                      <a:solidFill>
+                        <a:srgbClr val="E5E7EB"/>
+                      </a:solidFill>
+                      <a:prstDash val="solid"/>
+                      <a:round/>
+                      <a:headEnd type="none" w="med" len="med"/>
+                      <a:tailEnd type="none" w="med" len="med"/>
+                    </a:lnL>
+                    <a:lnR w="12700" cap="flat" cmpd="sng" algn="ctr">
+                      <a:solidFill>
+                        <a:srgbClr val="E5E7EB"/>
+                      </a:solidFill>
+                      <a:prstDash val="solid"/>
+                      <a:round/>
+                      <a:headEnd type="none" w="med" len="med"/>
+                      <a:tailEnd type="none" w="med" len="med"/>
+                    </a:lnR>
+                    <a:lnT w="12700" cap="flat" cmpd="sng" algn="ctr">
+                      <a:solidFill>
+                        <a:srgbClr val="E5E7EB"/>
+                      </a:solidFill>
+                      <a:prstDash val="solid"/>
+                      <a:round/>
+                      <a:headEnd type="none" w="med" len="med"/>
+                      <a:tailEnd type="none" w="med" len="med"/>
+                    </a:lnT>
+                    <a:lnB w="12700" cap="flat" cmpd="sng" algn="ctr">
+                      <a:solidFill>
+                        <a:srgbClr val="E5E7EB"/>
+                      </a:solidFill>
+                      <a:prstDash val="solid"/>
+                      <a:round/>
+                      <a:headEnd type="none" w="med" len="med"/>
+                      <a:tailEnd type="none" w="med" len="med"/>
+                    </a:lnB>
+                    <a:solidFill>
+                      <a:srgbClr val="FFFFFF"/>
+                    </a:solidFill>
+                  </a:tcPr>
+                </a:tc>
+                <a:tc>
+                  <a:txBody>
+                    <a:bodyPr/>
+                    <a:lstStyle/>
+                    <a:p>
+                      <a:pPr algn="ctr" indent="0" marL="0">
+                        <a:buNone/>
+                      </a:pPr>
+                      <a:r>
+                        <a:rPr lang="en-US" sz="1000" b="1" dirty="0">
+                          <a:solidFill>
+                            <a:srgbClr val="4338CA"/>
+                          </a:solidFill>
+                          <a:latin typeface="맑은 고딕" pitchFamily="34" charset="0"/>
+                          <a:ea typeface="맑은 고딕" pitchFamily="34" charset="-122"/>
+                          <a:cs typeface="맑은 고딕" pitchFamily="34" charset="-120"/>
+                        </a:rPr>
+                        <a:t>AI 초안</a:t>
+                      </a:r>
+                      <a:endParaRPr lang="en-US" sz="1000" dirty="0">
+                        <a:latin typeface="맑은 고딕" charset="0"/>
+                        <a:ea typeface="맑은 고딕" charset="0"/>
+                        <a:cs typeface="맑은 고딕" charset="0"/>
+                      </a:endParaRPr>
+                    </a:p>
+                  </a:txBody>
+                  <a:tcPr marL="101600" marR="101600" marT="25400" marB="25400" anchor="ctr">
+                    <a:lnL w="12700" cap="flat" cmpd="sng" algn="ctr">
+                      <a:solidFill>
+                        <a:srgbClr val="E5E7EB"/>
+                      </a:solidFill>
+                      <a:prstDash val="solid"/>
+                      <a:round/>
+                      <a:headEnd type="none" w="med" len="med"/>
+                      <a:tailEnd type="none" w="med" len="med"/>
+                    </a:lnL>
+                    <a:lnR w="12700" cap="flat" cmpd="sng" algn="ctr">
+                      <a:solidFill>
+                        <a:srgbClr val="E5E7EB"/>
+                      </a:solidFill>
+                      <a:prstDash val="solid"/>
+                      <a:round/>
+                      <a:headEnd type="none" w="med" len="med"/>
+                      <a:tailEnd type="none" w="med" len="med"/>
+                    </a:lnR>
+                    <a:lnT w="12700" cap="flat" cmpd="sng" algn="ctr">
+                      <a:solidFill>
+                        <a:srgbClr val="E5E7EB"/>
+                      </a:solidFill>
+                      <a:prstDash val="solid"/>
+                      <a:round/>
+                      <a:headEnd type="none" w="med" len="med"/>
+                      <a:tailEnd type="none" w="med" len="med"/>
+                    </a:lnT>
+                    <a:lnB w="12700" cap="flat" cmpd="sng" algn="ctr">
+                      <a:solidFill>
+                        <a:srgbClr val="E5E7EB"/>
+                      </a:solidFill>
+                      <a:prstDash val="solid"/>
+                      <a:round/>
+                      <a:headEnd type="none" w="med" len="med"/>
+                      <a:tailEnd type="none" w="med" len="med"/>
+                    </a:lnB>
+                    <a:solidFill>
+                      <a:srgbClr val="FFFFFF"/>
+                    </a:solidFill>
+                  </a:tcPr>
+                </a:tc>
+              </a:tr>
+              <a:tr h="196596">
+                <a:tc vMerge="1">
+                  <a:tcPr/>
+                </a:tc>
+                <a:tc>
+                  <a:txBody>
+                    <a:bodyPr/>
+                    <a:lstStyle/>
+                    <a:p>
+                      <a:pPr indent="0" marL="0">
+                        <a:buNone/>
+                      </a:pPr>
+                      <a:r>
+                        <a:rPr lang="en-US" sz="1000" b="1" dirty="0">
+                          <a:solidFill>
+                            <a:srgbClr val="1F2937"/>
+                          </a:solidFill>
+                          <a:latin typeface="맑은 고딕" pitchFamily="34" charset="0"/>
+                          <a:ea typeface="맑은 고딕" pitchFamily="34" charset="-122"/>
+                          <a:cs typeface="맑은 고딕" pitchFamily="34" charset="-120"/>
+                        </a:rPr>
+                        <a:t>동작 정의 </a:t>
+                      </a:r>
+                      <a:pPr indent="0" marL="0">
+                        <a:buNone/>
+                      </a:pPr>
+                      <a:r>
+                        <a:rPr lang="en-US" sz="1000" dirty="0">
+                          <a:solidFill>
+                            <a:srgbClr val="475569"/>
+                          </a:solidFill>
+                          <a:latin typeface="맑은 고딕" pitchFamily="34" charset="0"/>
+                          <a:ea typeface="맑은 고딕" pitchFamily="34" charset="-122"/>
+                          <a:cs typeface="맑은 고딕" pitchFamily="34" charset="-120"/>
+                        </a:rPr>
+                        <a:t>— 기본·변형·예외 유형마다 선행·후행·시나리오 (총 9행)</a:t>
+                      </a:r>
+                      <a:endParaRPr lang="en-US" sz="1200" dirty="0">
+                        <a:latin typeface="맑은 고딕" charset="0"/>
+                        <a:ea typeface="맑은 고딕" charset="0"/>
+                        <a:cs typeface="맑은 고딕" charset="0"/>
+                      </a:endParaRPr>
+                    </a:p>
+                  </a:txBody>
+                  <a:tcPr marL="101600" marR="101600" marT="25400" marB="25400" anchor="ctr">
+                    <a:lnL w="12700" cap="flat" cmpd="sng" algn="ctr">
+                      <a:solidFill>
+                        <a:srgbClr val="E5E7EB"/>
+                      </a:solidFill>
+                      <a:prstDash val="solid"/>
+                      <a:round/>
+                      <a:headEnd type="none" w="med" len="med"/>
+                      <a:tailEnd type="none" w="med" len="med"/>
+                    </a:lnL>
+                    <a:lnR w="12700" cap="flat" cmpd="sng" algn="ctr">
+                      <a:solidFill>
+                        <a:srgbClr val="E5E7EB"/>
+                      </a:solidFill>
+                      <a:prstDash val="solid"/>
+                      <a:round/>
+                      <a:headEnd type="none" w="med" len="med"/>
+                      <a:tailEnd type="none" w="med" len="med"/>
+                    </a:lnR>
+                    <a:lnT w="12700" cap="flat" cmpd="sng" algn="ctr">
+                      <a:solidFill>
+                        <a:srgbClr val="E5E7EB"/>
+                      </a:solidFill>
+                      <a:prstDash val="solid"/>
+                      <a:round/>
+                      <a:headEnd type="none" w="med" len="med"/>
+                      <a:tailEnd type="none" w="med" len="med"/>
+                    </a:lnT>
+                    <a:lnB w="12700" cap="flat" cmpd="sng" algn="ctr">
+                      <a:solidFill>
+                        <a:srgbClr val="E5E7EB"/>
+                      </a:solidFill>
+                      <a:prstDash val="solid"/>
+                      <a:round/>
+                      <a:headEnd type="none" w="med" len="med"/>
+                      <a:tailEnd type="none" w="med" len="med"/>
+                    </a:lnB>
+                    <a:solidFill>
+                      <a:srgbClr val="FFFFFF"/>
+                    </a:solidFill>
+                  </a:tcPr>
+                </a:tc>
+                <a:tc>
+                  <a:txBody>
+                    <a:bodyPr/>
+                    <a:lstStyle/>
+                    <a:p>
+                      <a:pPr algn="ctr" indent="0" marL="0">
+                        <a:buNone/>
+                      </a:pPr>
+                      <a:r>
+                        <a:rPr lang="en-US" sz="1000" b="1" dirty="0">
+                          <a:solidFill>
+                            <a:srgbClr val="4338CA"/>
+                          </a:solidFill>
+                          <a:latin typeface="맑은 고딕" pitchFamily="34" charset="0"/>
+                          <a:ea typeface="맑은 고딕" pitchFamily="34" charset="-122"/>
+                          <a:cs typeface="맑은 고딕" pitchFamily="34" charset="-120"/>
+                        </a:rPr>
+                        <a:t>AI 초안</a:t>
+                      </a:r>
+                      <a:endParaRPr lang="en-US" sz="1000" dirty="0">
+                        <a:latin typeface="맑은 고딕" charset="0"/>
+                        <a:ea typeface="맑은 고딕" charset="0"/>
+                        <a:cs typeface="맑은 고딕" charset="0"/>
+                      </a:endParaRPr>
+                    </a:p>
+                  </a:txBody>
+                  <a:tcPr marL="101600" marR="101600" marT="25400" marB="25400" anchor="ctr">
+                    <a:lnL w="12700" cap="flat" cmpd="sng" algn="ctr">
+                      <a:solidFill>
+                        <a:srgbClr val="E5E7EB"/>
+                      </a:solidFill>
+                      <a:prstDash val="solid"/>
+                      <a:round/>
+                      <a:headEnd type="none" w="med" len="med"/>
+                      <a:tailEnd type="none" w="med" len="med"/>
+                    </a:lnL>
+                    <a:lnR w="12700" cap="flat" cmpd="sng" algn="ctr">
+                      <a:solidFill>
+                        <a:srgbClr val="E5E7EB"/>
+                      </a:solidFill>
+                      <a:prstDash val="solid"/>
+                      <a:round/>
+                      <a:headEnd type="none" w="med" len="med"/>
+                      <a:tailEnd type="none" w="med" len="med"/>
+                    </a:lnR>
+                    <a:lnT w="12700" cap="flat" cmpd="sng" algn="ctr">
+                      <a:solidFill>
+                        <a:srgbClr val="E5E7EB"/>
+                      </a:solidFill>
+                      <a:prstDash val="solid"/>
+                      <a:round/>
+                      <a:headEnd type="none" w="med" len="med"/>
+                      <a:tailEnd type="none" w="med" len="med"/>
+                    </a:lnT>
+                    <a:lnB w="12700" cap="flat" cmpd="sng" algn="ctr">
+                      <a:solidFill>
+                        <a:srgbClr val="E5E7EB"/>
+                      </a:solidFill>
+                      <a:prstDash val="solid"/>
+                      <a:round/>
+                      <a:headEnd type="none" w="med" len="med"/>
+                      <a:tailEnd type="none" w="med" len="med"/>
+                    </a:lnB>
+                    <a:solidFill>
+                      <a:srgbClr val="FFFFFF"/>
+                    </a:solidFill>
+                  </a:tcPr>
+                </a:tc>
+              </a:tr>
+              <a:tr h="196596">
+                <a:tc vMerge="1">
+                  <a:tcPr/>
+                </a:tc>
+                <a:tc>
+                  <a:txBody>
+                    <a:bodyPr/>
+                    <a:lstStyle/>
+                    <a:p>
+                      <a:pPr indent="0" marL="0">
+                        <a:buNone/>
+                      </a:pPr>
+                      <a:r>
+                        <a:rPr lang="en-US" sz="1000" b="1" dirty="0">
+                          <a:solidFill>
+                            <a:srgbClr val="1F2937"/>
+                          </a:solidFill>
+                          <a:latin typeface="맑은 고딕" pitchFamily="34" charset="0"/>
+                          <a:ea typeface="맑은 고딕" pitchFamily="34" charset="-122"/>
+                          <a:cs typeface="맑은 고딕" pitchFamily="34" charset="-120"/>
+                        </a:rPr>
+                        <a:t>제약사항 </a:t>
+                      </a:r>
+                      <a:pPr indent="0" marL="0">
+                        <a:buNone/>
+                      </a:pPr>
+                      <a:r>
+                        <a:rPr lang="en-US" sz="1000" dirty="0">
+                          <a:solidFill>
+                            <a:srgbClr val="475569"/>
+                          </a:solidFill>
+                          <a:latin typeface="맑은 고딕" pitchFamily="34" charset="0"/>
+                          <a:ea typeface="맑은 고딕" pitchFamily="34" charset="-122"/>
+                          <a:cs typeface="맑은 고딕" pitchFamily="34" charset="-120"/>
+                        </a:rPr>
+                        <a:t>— 성능·환경·인터페이스</a:t>
+                      </a:r>
+                      <a:endParaRPr lang="en-US" sz="1200" dirty="0">
+                        <a:latin typeface="맑은 고딕" charset="0"/>
+                        <a:ea typeface="맑은 고딕" charset="0"/>
+                        <a:cs typeface="맑은 고딕" charset="0"/>
+                      </a:endParaRPr>
+                    </a:p>
+                  </a:txBody>
+                  <a:tcPr marL="101600" marR="101600" marT="25400" marB="25400" anchor="ctr">
+                    <a:lnL w="12700" cap="flat" cmpd="sng" algn="ctr">
+                      <a:solidFill>
+                        <a:srgbClr val="E5E7EB"/>
+                      </a:solidFill>
+                      <a:prstDash val="solid"/>
+                      <a:round/>
+                      <a:headEnd type="none" w="med" len="med"/>
+                      <a:tailEnd type="none" w="med" len="med"/>
+                    </a:lnL>
+                    <a:lnR w="12700" cap="flat" cmpd="sng" algn="ctr">
+                      <a:solidFill>
+                        <a:srgbClr val="E5E7EB"/>
+                      </a:solidFill>
+                      <a:prstDash val="solid"/>
+                      <a:round/>
+                      <a:headEnd type="none" w="med" len="med"/>
+                      <a:tailEnd type="none" w="med" len="med"/>
+                    </a:lnR>
+                    <a:lnT w="12700" cap="flat" cmpd="sng" algn="ctr">
+                      <a:solidFill>
+                        <a:srgbClr val="E5E7EB"/>
+                      </a:solidFill>
+                      <a:prstDash val="solid"/>
+                      <a:round/>
+                      <a:headEnd type="none" w="med" len="med"/>
+                      <a:tailEnd type="none" w="med" len="med"/>
+                    </a:lnT>
+                    <a:lnB w="12700" cap="flat" cmpd="sng" algn="ctr">
+                      <a:solidFill>
+                        <a:srgbClr val="E5E7EB"/>
+                      </a:solidFill>
+                      <a:prstDash val="solid"/>
+                      <a:round/>
+                      <a:headEnd type="none" w="med" len="med"/>
+                      <a:tailEnd type="none" w="med" len="med"/>
+                    </a:lnB>
+                    <a:solidFill>
+                      <a:srgbClr val="FFFFFF"/>
+                    </a:solidFill>
+                  </a:tcPr>
+                </a:tc>
+                <a:tc>
+                  <a:txBody>
+                    <a:bodyPr/>
+                    <a:lstStyle/>
+                    <a:p>
+                      <a:pPr algn="ctr" indent="0" marL="0">
+                        <a:buNone/>
+                      </a:pPr>
+                      <a:r>
+                        <a:rPr lang="en-US" sz="1000" b="1" dirty="0">
+                          <a:solidFill>
+                            <a:srgbClr val="4338CA"/>
+                          </a:solidFill>
+                          <a:latin typeface="맑은 고딕" pitchFamily="34" charset="0"/>
+                          <a:ea typeface="맑은 고딕" pitchFamily="34" charset="-122"/>
+                          <a:cs typeface="맑은 고딕" pitchFamily="34" charset="-120"/>
+                        </a:rPr>
+                        <a:t>AI 초안</a:t>
+                      </a:r>
+                      <a:endParaRPr lang="en-US" sz="1000" dirty="0">
+                        <a:latin typeface="맑은 고딕" charset="0"/>
+                        <a:ea typeface="맑은 고딕" charset="0"/>
+                        <a:cs typeface="맑은 고딕" charset="0"/>
+                      </a:endParaRPr>
+                    </a:p>
+                  </a:txBody>
+                  <a:tcPr marL="101600" marR="101600" marT="25400" marB="25400" anchor="ctr">
+                    <a:lnL w="12700" cap="flat" cmpd="sng" algn="ctr">
+                      <a:solidFill>
+                        <a:srgbClr val="E5E7EB"/>
+                      </a:solidFill>
+                      <a:prstDash val="solid"/>
+                      <a:round/>
+                      <a:headEnd type="none" w="med" len="med"/>
+                      <a:tailEnd type="none" w="med" len="med"/>
+                    </a:lnL>
+                    <a:lnR w="12700" cap="flat" cmpd="sng" algn="ctr">
+                      <a:solidFill>
+                        <a:srgbClr val="E5E7EB"/>
+                      </a:solidFill>
+                      <a:prstDash val="solid"/>
+                      <a:round/>
+                      <a:headEnd type="none" w="med" len="med"/>
+                      <a:tailEnd type="none" w="med" len="med"/>
+                    </a:lnR>
+                    <a:lnT w="12700" cap="flat" cmpd="sng" algn="ctr">
+                      <a:solidFill>
+                        <a:srgbClr val="E5E7EB"/>
+                      </a:solidFill>
+                      <a:prstDash val="solid"/>
+                      <a:round/>
+                      <a:headEnd type="none" w="med" len="med"/>
+                      <a:tailEnd type="none" w="med" len="med"/>
+                    </a:lnT>
+                    <a:lnB w="12700" cap="flat" cmpd="sng" algn="ctr">
+                      <a:solidFill>
+                        <a:srgbClr val="E5E7EB"/>
+                      </a:solidFill>
+                      <a:prstDash val="solid"/>
+                      <a:round/>
+                      <a:headEnd type="none" w="med" len="med"/>
+                      <a:tailEnd type="none" w="med" len="med"/>
+                    </a:lnB>
+                    <a:solidFill>
+                      <a:srgbClr val="FFFFFF"/>
+                    </a:solidFill>
+                  </a:tcPr>
+                </a:tc>
+              </a:tr>
+              <a:tr h="196596">
+                <a:tc rowSpan="3">
+                  <a:txBody>
+                    <a:bodyPr/>
+                    <a:lstStyle/>
+                    <a:p>
+                      <a:pPr indent="0" marL="0">
+                        <a:buNone/>
+                      </a:pPr>
+                      <a:r>
+                        <a:rPr lang="en-US" sz="1050" b="1" dirty="0">
+                          <a:solidFill>
+                            <a:srgbClr val="6B7280"/>
+                          </a:solidFill>
+                          <a:latin typeface="맑은 고딕" pitchFamily="34" charset="0"/>
+                          <a:ea typeface="맑은 고딕" pitchFamily="34" charset="-122"/>
+                          <a:cs typeface="맑은 고딕" pitchFamily="34" charset="-120"/>
+                        </a:rPr>
+                        <a:t>4  </a:t>
+                      </a:r>
+                      <a:pPr indent="0" marL="0">
+                        <a:buNone/>
+                      </a:pPr>
+                      <a:r>
+                        <a:rPr lang="en-US" sz="1250" b="1" dirty="0">
+                          <a:solidFill>
+                            <a:srgbClr val="1F2937"/>
+                          </a:solidFill>
+                          <a:latin typeface="맑은 고딕" pitchFamily="34" charset="0"/>
+                          <a:ea typeface="맑은 고딕" pitchFamily="34" charset="-122"/>
+                          <a:cs typeface="맑은 고딕" pitchFamily="34" charset="-120"/>
+                        </a:rPr>
+                        <a:t>비기능 요구사항</a:t>
+                      </a:r>
+                      <a:endParaRPr lang="en-US" sz="1200" dirty="0">
+                        <a:latin typeface="맑은 고딕" charset="0"/>
+                        <a:ea typeface="맑은 고딕" charset="0"/>
+                        <a:cs typeface="맑은 고딕" charset="0"/>
+                      </a:endParaRPr>
+                    </a:p>
+                    <a:p>
+                      <a:pPr indent="0" marL="0">
+                        <a:buNone/>
+                      </a:pPr>
+                      <a:r>
+                        <a:rPr lang="en-US" sz="800" dirty="0">
+                          <a:solidFill>
+                            <a:srgbClr val="A5AEC0"/>
+                          </a:solidFill>
+                          <a:latin typeface="맑은 고딕" pitchFamily="34" charset="0"/>
+                          <a:ea typeface="맑은 고딕" pitchFamily="34" charset="-122"/>
+                          <a:cs typeface="맑은 고딕" pitchFamily="34" charset="-120"/>
+                        </a:rPr>
+                        <a:t>Non-functional</a:t>
+                      </a:r>
+                      <a:endParaRPr lang="en-US" sz="1200" dirty="0">
+                        <a:latin typeface="맑은 고딕" charset="0"/>
+                        <a:ea typeface="맑은 고딕" charset="0"/>
+                        <a:cs typeface="맑은 고딕" charset="0"/>
+                      </a:endParaRPr>
+                    </a:p>
+                  </a:txBody>
+                  <a:tcPr marL="101600" marR="101600" marT="25400" marB="25400" anchor="ctr">
+                    <a:lnL w="12700" cap="flat" cmpd="sng" algn="ctr">
+                      <a:solidFill>
+                        <a:srgbClr val="E5E7EB"/>
+                      </a:solidFill>
+                      <a:prstDash val="solid"/>
+                      <a:round/>
+                      <a:headEnd type="none" w="med" len="med"/>
+                      <a:tailEnd type="none" w="med" len="med"/>
+                    </a:lnL>
+                    <a:lnR w="12700" cap="flat" cmpd="sng" algn="ctr">
+                      <a:solidFill>
+                        <a:srgbClr val="E5E7EB"/>
+                      </a:solidFill>
+                      <a:prstDash val="solid"/>
+                      <a:round/>
+                      <a:headEnd type="none" w="med" len="med"/>
+                      <a:tailEnd type="none" w="med" len="med"/>
+                    </a:lnR>
+                    <a:lnT w="12700" cap="flat" cmpd="sng" algn="ctr">
+                      <a:solidFill>
+                        <a:srgbClr val="E5E7EB"/>
+                      </a:solidFill>
+                      <a:prstDash val="solid"/>
+                      <a:round/>
+                      <a:headEnd type="none" w="med" len="med"/>
+                      <a:tailEnd type="none" w="med" len="med"/>
+                    </a:lnT>
+                    <a:lnB w="12700" cap="flat" cmpd="sng" algn="ctr">
+                      <a:solidFill>
+                        <a:srgbClr val="E5E7EB"/>
+                      </a:solidFill>
+                      <a:prstDash val="solid"/>
+                      <a:round/>
+                      <a:headEnd type="none" w="med" len="med"/>
+                      <a:tailEnd type="none" w="med" len="med"/>
+                    </a:lnB>
+                    <a:solidFill>
+                      <a:srgbClr val="F7F9FC"/>
+                    </a:solidFill>
+                  </a:tcPr>
+                </a:tc>
+                <a:tc>
+                  <a:txBody>
+                    <a:bodyPr/>
+                    <a:lstStyle/>
+                    <a:p>
+                      <a:pPr indent="0" marL="0">
+                        <a:buNone/>
+                      </a:pPr>
+                      <a:r>
+                        <a:rPr lang="en-US" sz="1000" b="1" dirty="0">
+                          <a:solidFill>
+                            <a:srgbClr val="1F2937"/>
+                          </a:solidFill>
+                          <a:latin typeface="맑은 고딕" pitchFamily="34" charset="0"/>
+                          <a:ea typeface="맑은 고딕" pitchFamily="34" charset="-122"/>
+                          <a:cs typeface="맑은 고딕" pitchFamily="34" charset="-120"/>
+                        </a:rPr>
+                        <a:t>개요 </a:t>
+                      </a:r>
+                      <a:pPr indent="0" marL="0">
+                        <a:buNone/>
+                      </a:pPr>
+                      <a:r>
+                        <a:rPr lang="en-US" sz="1000" dirty="0">
+                          <a:solidFill>
+                            <a:srgbClr val="475569"/>
+                          </a:solidFill>
+                          <a:latin typeface="맑은 고딕" pitchFamily="34" charset="0"/>
+                          <a:ea typeface="맑은 고딕" pitchFamily="34" charset="-122"/>
+                          <a:cs typeface="맑은 고딕" pitchFamily="34" charset="-120"/>
+                        </a:rPr>
+                        <a:t>— 품질 속성(성능·신뢰성·가용성)의 역할·목적</a:t>
+                      </a:r>
+                      <a:endParaRPr lang="en-US" sz="1200" dirty="0">
+                        <a:latin typeface="맑은 고딕" charset="0"/>
+                        <a:ea typeface="맑은 고딕" charset="0"/>
+                        <a:cs typeface="맑은 고딕" charset="0"/>
+                      </a:endParaRPr>
+                    </a:p>
+                  </a:txBody>
+                  <a:tcPr marL="101600" marR="101600" marT="25400" marB="25400" anchor="ctr">
+                    <a:lnL w="12700" cap="flat" cmpd="sng" algn="ctr">
+                      <a:solidFill>
+                        <a:srgbClr val="E5E7EB"/>
+                      </a:solidFill>
+                      <a:prstDash val="solid"/>
+                      <a:round/>
+                      <a:headEnd type="none" w="med" len="med"/>
+                      <a:tailEnd type="none" w="med" len="med"/>
+                    </a:lnL>
+                    <a:lnR w="12700" cap="flat" cmpd="sng" algn="ctr">
+                      <a:solidFill>
+                        <a:srgbClr val="E5E7EB"/>
+                      </a:solidFill>
+                      <a:prstDash val="solid"/>
+                      <a:round/>
+                      <a:headEnd type="none" w="med" len="med"/>
+                      <a:tailEnd type="none" w="med" len="med"/>
+                    </a:lnR>
+                    <a:lnT w="12700" cap="flat" cmpd="sng" algn="ctr">
+                      <a:solidFill>
+                        <a:srgbClr val="E5E7EB"/>
+                      </a:solidFill>
+                      <a:prstDash val="solid"/>
+                      <a:round/>
+                      <a:headEnd type="none" w="med" len="med"/>
+                      <a:tailEnd type="none" w="med" len="med"/>
+                    </a:lnT>
+                    <a:lnB w="12700" cap="flat" cmpd="sng" algn="ctr">
+                      <a:solidFill>
+                        <a:srgbClr val="E5E7EB"/>
+                      </a:solidFill>
+                      <a:prstDash val="solid"/>
+                      <a:round/>
+                      <a:headEnd type="none" w="med" len="med"/>
+                      <a:tailEnd type="none" w="med" len="med"/>
+                    </a:lnB>
+                    <a:solidFill>
+                      <a:srgbClr val="F7F9FC"/>
+                    </a:solidFill>
+                  </a:tcPr>
+                </a:tc>
+                <a:tc>
+                  <a:txBody>
+                    <a:bodyPr/>
+                    <a:lstStyle/>
+                    <a:p>
+                      <a:pPr algn="ctr" indent="0" marL="0">
+                        <a:buNone/>
+                      </a:pPr>
+                      <a:r>
+                        <a:rPr lang="en-US" sz="1000" b="1" dirty="0">
+                          <a:solidFill>
+                            <a:srgbClr val="4338CA"/>
+                          </a:solidFill>
+                          <a:latin typeface="맑은 고딕" pitchFamily="34" charset="0"/>
+                          <a:ea typeface="맑은 고딕" pitchFamily="34" charset="-122"/>
+                          <a:cs typeface="맑은 고딕" pitchFamily="34" charset="-120"/>
+                        </a:rPr>
+                        <a:t>AI 초안</a:t>
+                      </a:r>
+                      <a:endParaRPr lang="en-US" sz="1000" dirty="0">
+                        <a:latin typeface="맑은 고딕" charset="0"/>
+                        <a:ea typeface="맑은 고딕" charset="0"/>
+                        <a:cs typeface="맑은 고딕" charset="0"/>
+                      </a:endParaRPr>
+                    </a:p>
+                  </a:txBody>
+                  <a:tcPr marL="101600" marR="101600" marT="25400" marB="25400" anchor="ctr">
+                    <a:lnL w="12700" cap="flat" cmpd="sng" algn="ctr">
+                      <a:solidFill>
+                        <a:srgbClr val="E5E7EB"/>
+                      </a:solidFill>
+                      <a:prstDash val="solid"/>
+                      <a:round/>
+                      <a:headEnd type="none" w="med" len="med"/>
+                      <a:tailEnd type="none" w="med" len="med"/>
+                    </a:lnL>
+                    <a:lnR w="12700" cap="flat" cmpd="sng" algn="ctr">
+                      <a:solidFill>
+                        <a:srgbClr val="E5E7EB"/>
+                      </a:solidFill>
+                      <a:prstDash val="solid"/>
+                      <a:round/>
+                      <a:headEnd type="none" w="med" len="med"/>
+                      <a:tailEnd type="none" w="med" len="med"/>
+                    </a:lnR>
+                    <a:lnT w="12700" cap="flat" cmpd="sng" algn="ctr">
+                      <a:solidFill>
+                        <a:srgbClr val="E5E7EB"/>
+                      </a:solidFill>
+                      <a:prstDash val="solid"/>
+                      <a:round/>
+                      <a:headEnd type="none" w="med" len="med"/>
+                      <a:tailEnd type="none" w="med" len="med"/>
+                    </a:lnT>
+                    <a:lnB w="12700" cap="flat" cmpd="sng" algn="ctr">
+                      <a:solidFill>
+                        <a:srgbClr val="E5E7EB"/>
+                      </a:solidFill>
+                      <a:prstDash val="solid"/>
+                      <a:round/>
+                      <a:headEnd type="none" w="med" len="med"/>
+                      <a:tailEnd type="none" w="med" len="med"/>
+                    </a:lnB>
+                    <a:solidFill>
+                      <a:srgbClr val="F7F9FC"/>
+                    </a:solidFill>
+                  </a:tcPr>
+                </a:tc>
+              </a:tr>
+              <a:tr h="196596">
+                <a:tc vMerge="1">
+                  <a:tcPr/>
+                </a:tc>
+                <a:tc>
+                  <a:txBody>
+                    <a:bodyPr/>
+                    <a:lstStyle/>
+                    <a:p>
+                      <a:pPr indent="0" marL="0">
+                        <a:buNone/>
+                      </a:pPr>
+                      <a:r>
+                        <a:rPr lang="en-US" sz="1000" b="1" dirty="0">
+                          <a:solidFill>
+                            <a:srgbClr val="1F2937"/>
+                          </a:solidFill>
+                          <a:latin typeface="맑은 고딕" pitchFamily="34" charset="0"/>
+                          <a:ea typeface="맑은 고딕" pitchFamily="34" charset="-122"/>
+                          <a:cs typeface="맑은 고딕" pitchFamily="34" charset="-120"/>
+                        </a:rPr>
+                        <a:t>동작 정의 </a:t>
+                      </a:r>
+                      <a:pPr indent="0" marL="0">
+                        <a:buNone/>
+                      </a:pPr>
+                      <a:r>
+                        <a:rPr lang="en-US" sz="1000" dirty="0">
+                          <a:solidFill>
+                            <a:srgbClr val="475569"/>
+                          </a:solidFill>
+                          <a:latin typeface="맑은 고딕" pitchFamily="34" charset="0"/>
+                          <a:ea typeface="맑은 고딕" pitchFamily="34" charset="-122"/>
+                          <a:cs typeface="맑은 고딕" pitchFamily="34" charset="-120"/>
+                        </a:rPr>
+                        <a:t>— 품질 항목마다 선행·후행·시나리오 (기능과 동일 9행)</a:t>
+                      </a:r>
+                      <a:endParaRPr lang="en-US" sz="1200" dirty="0">
+                        <a:latin typeface="맑은 고딕" charset="0"/>
+                        <a:ea typeface="맑은 고딕" charset="0"/>
+                        <a:cs typeface="맑은 고딕" charset="0"/>
+                      </a:endParaRPr>
+                    </a:p>
+                  </a:txBody>
+                  <a:tcPr marL="101600" marR="101600" marT="25400" marB="25400" anchor="ctr">
+                    <a:lnL w="12700" cap="flat" cmpd="sng" algn="ctr">
+                      <a:solidFill>
+                        <a:srgbClr val="E5E7EB"/>
+                      </a:solidFill>
+                      <a:prstDash val="solid"/>
+                      <a:round/>
+                      <a:headEnd type="none" w="med" len="med"/>
+                      <a:tailEnd type="none" w="med" len="med"/>
+                    </a:lnL>
+                    <a:lnR w="12700" cap="flat" cmpd="sng" algn="ctr">
+                      <a:solidFill>
+                        <a:srgbClr val="E5E7EB"/>
+                      </a:solidFill>
+                      <a:prstDash val="solid"/>
+                      <a:round/>
+                      <a:headEnd type="none" w="med" len="med"/>
+                      <a:tailEnd type="none" w="med" len="med"/>
+                    </a:lnR>
+                    <a:lnT w="12700" cap="flat" cmpd="sng" algn="ctr">
+                      <a:solidFill>
+                        <a:srgbClr val="E5E7EB"/>
+                      </a:solidFill>
+                      <a:prstDash val="solid"/>
+                      <a:round/>
+                      <a:headEnd type="none" w="med" len="med"/>
+                      <a:tailEnd type="none" w="med" len="med"/>
+                    </a:lnT>
+                    <a:lnB w="12700" cap="flat" cmpd="sng" algn="ctr">
+                      <a:solidFill>
+                        <a:srgbClr val="E5E7EB"/>
+                      </a:solidFill>
+                      <a:prstDash val="solid"/>
+                      <a:round/>
+                      <a:headEnd type="none" w="med" len="med"/>
+                      <a:tailEnd type="none" w="med" len="med"/>
+                    </a:lnB>
+                    <a:solidFill>
+                      <a:srgbClr val="F7F9FC"/>
+                    </a:solidFill>
+                  </a:tcPr>
+                </a:tc>
+                <a:tc>
+                  <a:txBody>
+                    <a:bodyPr/>
+                    <a:lstStyle/>
+                    <a:p>
+                      <a:pPr algn="ctr" indent="0" marL="0">
+                        <a:buNone/>
+                      </a:pPr>
+                      <a:r>
+                        <a:rPr lang="en-US" sz="1000" b="1" dirty="0">
+                          <a:solidFill>
+                            <a:srgbClr val="4338CA"/>
+                          </a:solidFill>
+                          <a:latin typeface="맑은 고딕" pitchFamily="34" charset="0"/>
+                          <a:ea typeface="맑은 고딕" pitchFamily="34" charset="-122"/>
+                          <a:cs typeface="맑은 고딕" pitchFamily="34" charset="-120"/>
+                        </a:rPr>
+                        <a:t>AI 초안</a:t>
+                      </a:r>
+                      <a:endParaRPr lang="en-US" sz="1000" dirty="0">
+                        <a:latin typeface="맑은 고딕" charset="0"/>
+                        <a:ea typeface="맑은 고딕" charset="0"/>
+                        <a:cs typeface="맑은 고딕" charset="0"/>
+                      </a:endParaRPr>
+                    </a:p>
+                  </a:txBody>
+                  <a:tcPr marL="101600" marR="101600" marT="25400" marB="25400" anchor="ctr">
+                    <a:lnL w="12700" cap="flat" cmpd="sng" algn="ctr">
+                      <a:solidFill>
+                        <a:srgbClr val="E5E7EB"/>
+                      </a:solidFill>
+                      <a:prstDash val="solid"/>
+                      <a:round/>
+                      <a:headEnd type="none" w="med" len="med"/>
+                      <a:tailEnd type="none" w="med" len="med"/>
+                    </a:lnL>
+                    <a:lnR w="12700" cap="flat" cmpd="sng" algn="ctr">
+                      <a:solidFill>
+                        <a:srgbClr val="E5E7EB"/>
+                      </a:solidFill>
+                      <a:prstDash val="solid"/>
+                      <a:round/>
+                      <a:headEnd type="none" w="med" len="med"/>
+                      <a:tailEnd type="none" w="med" len="med"/>
+                    </a:lnR>
+                    <a:lnT w="12700" cap="flat" cmpd="sng" algn="ctr">
+                      <a:solidFill>
+                        <a:srgbClr val="E5E7EB"/>
+                      </a:solidFill>
+                      <a:prstDash val="solid"/>
+                      <a:round/>
+                      <a:headEnd type="none" w="med" len="med"/>
+                      <a:tailEnd type="none" w="med" len="med"/>
+                    </a:lnT>
+                    <a:lnB w="12700" cap="flat" cmpd="sng" algn="ctr">
+                      <a:solidFill>
+                        <a:srgbClr val="E5E7EB"/>
+                      </a:solidFill>
+                      <a:prstDash val="solid"/>
+                      <a:round/>
+                      <a:headEnd type="none" w="med" len="med"/>
+                      <a:tailEnd type="none" w="med" len="med"/>
+                    </a:lnB>
+                    <a:solidFill>
+                      <a:srgbClr val="F7F9FC"/>
+                    </a:solidFill>
+                  </a:tcPr>
+                </a:tc>
+              </a:tr>
+              <a:tr h="196596">
+                <a:tc vMerge="1">
+                  <a:tcPr/>
+                </a:tc>
+                <a:tc>
+                  <a:txBody>
+                    <a:bodyPr/>
+                    <a:lstStyle/>
+                    <a:p>
+                      <a:pPr indent="0" marL="0">
+                        <a:buNone/>
+                      </a:pPr>
+                      <a:r>
+                        <a:rPr lang="en-US" sz="1000" b="1" dirty="0">
+                          <a:solidFill>
+                            <a:srgbClr val="1F2937"/>
+                          </a:solidFill>
+                          <a:latin typeface="맑은 고딕" pitchFamily="34" charset="0"/>
+                          <a:ea typeface="맑은 고딕" pitchFamily="34" charset="-122"/>
+                          <a:cs typeface="맑은 고딕" pitchFamily="34" charset="-120"/>
+                        </a:rPr>
+                        <a:t>제약사항 </a:t>
+                      </a:r>
+                      <a:pPr indent="0" marL="0">
+                        <a:buNone/>
+                      </a:pPr>
+                      <a:r>
+                        <a:rPr lang="en-US" sz="1000" dirty="0">
+                          <a:solidFill>
+                            <a:srgbClr val="475569"/>
+                          </a:solidFill>
+                          <a:latin typeface="맑은 고딕" pitchFamily="34" charset="0"/>
+                          <a:ea typeface="맑은 고딕" pitchFamily="34" charset="-122"/>
+                          <a:cs typeface="맑은 고딕" pitchFamily="34" charset="-120"/>
+                        </a:rPr>
+                        <a:t>— 측정 기준·목표치</a:t>
+                      </a:r>
+                      <a:endParaRPr lang="en-US" sz="1200" dirty="0">
+                        <a:latin typeface="맑은 고딕" charset="0"/>
+                        <a:ea typeface="맑은 고딕" charset="0"/>
+                        <a:cs typeface="맑은 고딕" charset="0"/>
+                      </a:endParaRPr>
+                    </a:p>
+                  </a:txBody>
+                  <a:tcPr marL="101600" marR="101600" marT="25400" marB="25400" anchor="ctr">
+                    <a:lnL w="12700" cap="flat" cmpd="sng" algn="ctr">
+                      <a:solidFill>
+                        <a:srgbClr val="E5E7EB"/>
+                      </a:solidFill>
+                      <a:prstDash val="solid"/>
+                      <a:round/>
+                      <a:headEnd type="none" w="med" len="med"/>
+                      <a:tailEnd type="none" w="med" len="med"/>
+                    </a:lnL>
+                    <a:lnR w="12700" cap="flat" cmpd="sng" algn="ctr">
+                      <a:solidFill>
+                        <a:srgbClr val="E5E7EB"/>
+                      </a:solidFill>
+                      <a:prstDash val="solid"/>
+                      <a:round/>
+                      <a:headEnd type="none" w="med" len="med"/>
+                      <a:tailEnd type="none" w="med" len="med"/>
+                    </a:lnR>
+                    <a:lnT w="12700" cap="flat" cmpd="sng" algn="ctr">
+                      <a:solidFill>
+                        <a:srgbClr val="E5E7EB"/>
+                      </a:solidFill>
+                      <a:prstDash val="solid"/>
+                      <a:round/>
+                      <a:headEnd type="none" w="med" len="med"/>
+                      <a:tailEnd type="none" w="med" len="med"/>
+                    </a:lnT>
+                    <a:lnB w="12700" cap="flat" cmpd="sng" algn="ctr">
+                      <a:solidFill>
+                        <a:srgbClr val="E5E7EB"/>
+                      </a:solidFill>
+                      <a:prstDash val="solid"/>
+                      <a:round/>
+                      <a:headEnd type="none" w="med" len="med"/>
+                      <a:tailEnd type="none" w="med" len="med"/>
+                    </a:lnB>
+                    <a:solidFill>
+                      <a:srgbClr val="F7F9FC"/>
+                    </a:solidFill>
+                  </a:tcPr>
+                </a:tc>
+                <a:tc>
+                  <a:txBody>
+                    <a:bodyPr/>
+                    <a:lstStyle/>
+                    <a:p>
+                      <a:pPr algn="ctr" indent="0" marL="0">
+                        <a:buNone/>
+                      </a:pPr>
+                      <a:r>
+                        <a:rPr lang="en-US" sz="1000" b="1" dirty="0">
+                          <a:solidFill>
+                            <a:srgbClr val="4338CA"/>
+                          </a:solidFill>
+                          <a:latin typeface="맑은 고딕" pitchFamily="34" charset="0"/>
+                          <a:ea typeface="맑은 고딕" pitchFamily="34" charset="-122"/>
+                          <a:cs typeface="맑은 고딕" pitchFamily="34" charset="-120"/>
+                        </a:rPr>
+                        <a:t>AI 초안</a:t>
+                      </a:r>
+                      <a:endParaRPr lang="en-US" sz="1000" dirty="0">
+                        <a:latin typeface="맑은 고딕" charset="0"/>
+                        <a:ea typeface="맑은 고딕" charset="0"/>
+                        <a:cs typeface="맑은 고딕" charset="0"/>
+                      </a:endParaRPr>
+                    </a:p>
+                  </a:txBody>
+                  <a:tcPr marL="101600" marR="101600" marT="25400" marB="25400" anchor="ctr">
+                    <a:lnL w="12700" cap="flat" cmpd="sng" algn="ctr">
+                      <a:solidFill>
+                        <a:srgbClr val="E5E7EB"/>
+                      </a:solidFill>
+                      <a:prstDash val="solid"/>
+                      <a:round/>
+                      <a:headEnd type="none" w="med" len="med"/>
+                      <a:tailEnd type="none" w="med" len="med"/>
+                    </a:lnL>
+                    <a:lnR w="12700" cap="flat" cmpd="sng" algn="ctr">
+                      <a:solidFill>
+                        <a:srgbClr val="E5E7EB"/>
+                      </a:solidFill>
+                      <a:prstDash val="solid"/>
+                      <a:round/>
+                      <a:headEnd type="none" w="med" len="med"/>
+                      <a:tailEnd type="none" w="med" len="med"/>
+                    </a:lnR>
+                    <a:lnT w="12700" cap="flat" cmpd="sng" algn="ctr">
+                      <a:solidFill>
+                        <a:srgbClr val="E5E7EB"/>
+                      </a:solidFill>
+                      <a:prstDash val="solid"/>
+                      <a:round/>
+                      <a:headEnd type="none" w="med" len="med"/>
+                      <a:tailEnd type="none" w="med" len="med"/>
+                    </a:lnT>
+                    <a:lnB w="12700" cap="flat" cmpd="sng" algn="ctr">
+                      <a:solidFill>
+                        <a:srgbClr val="E5E7EB"/>
+                      </a:solidFill>
+                      <a:prstDash val="solid"/>
+                      <a:round/>
+                      <a:headEnd type="none" w="med" len="med"/>
+                      <a:tailEnd type="none" w="med" len="med"/>
+                    </a:lnB>
+                    <a:solidFill>
+                      <a:srgbClr val="F7F9FC"/>
+                    </a:solidFill>
+                  </a:tcPr>
+                </a:tc>
+              </a:tr>
+              <a:tr h="196596">
+                <a:tc rowSpan="3">
+                  <a:txBody>
+                    <a:bodyPr/>
+                    <a:lstStyle/>
+                    <a:p>
+                      <a:pPr indent="0" marL="0">
+                        <a:buNone/>
+                      </a:pPr>
+                      <a:r>
+                        <a:rPr lang="en-US" sz="1050" b="1" dirty="0">
+                          <a:solidFill>
+                            <a:srgbClr val="6B7280"/>
+                          </a:solidFill>
+                          <a:latin typeface="맑은 고딕" pitchFamily="34" charset="0"/>
+                          <a:ea typeface="맑은 고딕" pitchFamily="34" charset="-122"/>
+                          <a:cs typeface="맑은 고딕" pitchFamily="34" charset="-120"/>
+                        </a:rPr>
+                        <a:t>5  </a:t>
                       </a:r>
                       <a:pPr indent="0" marL="0">
                         <a:buNone/>
@@ -4442,7 +6376,7 @@
                       <a:tailEnd type="none" w="med" len="med"/>
                     </a:lnB>
                     <a:solidFill>
-                      <a:srgbClr val="F7F9FC"/>
+                      <a:srgbClr val="FFFFFF"/>
                     </a:solidFill>
                   </a:tcPr>
                 </a:tc>
@@ -4455,7 +6389,7 @@
                         <a:buNone/>
                       </a:pPr>
                       <a:r>
-                        <a:rPr lang="en-US" sz="950" b="1" dirty="0">
+                        <a:rPr lang="en-US" sz="1000" b="1" dirty="0">
                           <a:solidFill>
                             <a:srgbClr val="1F2937"/>
                           </a:solidFill>
@@ -4469,7 +6403,7 @@
                         <a:buNone/>
                       </a:pPr>
                       <a:r>
-                        <a:rPr lang="en-US" sz="950" dirty="0">
+                        <a:rPr lang="en-US" sz="1000" dirty="0">
                           <a:solidFill>
                             <a:srgbClr val="475569"/>
                           </a:solidFill>
@@ -4524,7 +6458,7 @@
                       <a:tailEnd type="none" w="med" len="med"/>
                     </a:lnB>
                     <a:solidFill>
-                      <a:srgbClr val="F7F9FC"/>
+                      <a:srgbClr val="FFFFFF"/>
                     </a:solidFill>
                   </a:tcPr>
                 </a:tc>
@@ -4537,7 +6471,7 @@
                         <a:buNone/>
                       </a:pPr>
                       <a:r>
-                        <a:rPr lang="en-US" sz="950" b="1" dirty="0">
+                        <a:rPr lang="en-US" sz="1000" b="1" dirty="0">
                           <a:solidFill>
                             <a:srgbClr val="4338CA"/>
                           </a:solidFill>
@@ -4547,7 +6481,7 @@
                         </a:rPr>
                         <a:t>AI 초안</a:t>
                       </a:r>
-                      <a:endParaRPr lang="en-US" sz="950" dirty="0">
+                      <a:endParaRPr lang="en-US" sz="1000" dirty="0">
                         <a:latin typeface="맑은 고딕" charset="0"/>
                         <a:ea typeface="맑은 고딕" charset="0"/>
                         <a:cs typeface="맑은 고딕" charset="0"/>
@@ -4592,12 +6526,12 @@
                       <a:tailEnd type="none" w="med" len="med"/>
                     </a:lnB>
                     <a:solidFill>
-                      <a:srgbClr val="F7F9FC"/>
+                      <a:srgbClr val="FFFFFF"/>
                     </a:solidFill>
                   </a:tcPr>
                 </a:tc>
               </a:tr>
-              <a:tr h="201168">
+              <a:tr h="196596">
                 <a:tc vMerge="1">
                   <a:tcPr/>
                 </a:tc>
@@ -4610,7 +6544,7 @@
                         <a:buNone/>
                       </a:pPr>
                       <a:r>
-                        <a:rPr lang="en-US" sz="950" b="1" dirty="0">
+                        <a:rPr lang="en-US" sz="1000" b="1" dirty="0">
                           <a:solidFill>
                             <a:srgbClr val="1F2937"/>
                           </a:solidFill>
@@ -4624,7 +6558,7 @@
                         <a:buNone/>
                       </a:pPr>
                       <a:r>
-                        <a:rPr lang="en-US" sz="950" dirty="0">
+                        <a:rPr lang="en-US" sz="1000" dirty="0">
                           <a:solidFill>
                             <a:srgbClr val="475569"/>
                           </a:solidFill>
@@ -4679,7 +6613,7 @@
                       <a:tailEnd type="none" w="med" len="med"/>
                     </a:lnB>
                     <a:solidFill>
-                      <a:srgbClr val="F7F9FC"/>
+                      <a:srgbClr val="FFFFFF"/>
                     </a:solidFill>
                   </a:tcPr>
                 </a:tc>
@@ -4692,7 +6626,7 @@
                         <a:buNone/>
                       </a:pPr>
                       <a:r>
-                        <a:rPr lang="en-US" sz="950" b="1" dirty="0">
+                        <a:rPr lang="en-US" sz="1000" b="1" dirty="0">
                           <a:solidFill>
                             <a:srgbClr val="C2410C"/>
                           </a:solidFill>
@@ -4700,9 +6634,9 @@
                           <a:ea typeface="맑은 고딕" pitchFamily="34" charset="-122"/>
                           <a:cs typeface="맑은 고딕" pitchFamily="34" charset="-120"/>
                         </a:rPr>
-                        <a:t>사람</a:t>
+                        <a:t>사람 초벌</a:t>
                       </a:r>
-                      <a:endParaRPr lang="en-US" sz="950" dirty="0">
+                      <a:endParaRPr lang="en-US" sz="1000" dirty="0">
                         <a:latin typeface="맑은 고딕" charset="0"/>
                         <a:ea typeface="맑은 고딕" charset="0"/>
                         <a:cs typeface="맑은 고딕" charset="0"/>
@@ -4747,12 +6681,12 @@
                       <a:tailEnd type="none" w="med" len="med"/>
                     </a:lnB>
                     <a:solidFill>
-                      <a:srgbClr val="F7F9FC"/>
+                      <a:srgbClr val="FFFFFF"/>
                     </a:solidFill>
                   </a:tcPr>
                 </a:tc>
               </a:tr>
-              <a:tr h="201168">
+              <a:tr h="196596">
                 <a:tc vMerge="1">
                   <a:tcPr/>
                 </a:tc>
@@ -4765,7 +6699,7 @@
                         <a:buNone/>
                       </a:pPr>
                       <a:r>
-                        <a:rPr lang="en-US" sz="950" b="1" dirty="0">
+                        <a:rPr lang="en-US" sz="1000" b="1" dirty="0">
                           <a:solidFill>
                             <a:srgbClr val="1F2937"/>
                           </a:solidFill>
@@ -4779,7 +6713,7 @@
                         <a:buNone/>
                       </a:pPr>
                       <a:r>
-                        <a:rPr lang="en-US" sz="950" dirty="0">
+                        <a:rPr lang="en-US" sz="1000" dirty="0">
                           <a:solidFill>
                             <a:srgbClr val="475569"/>
                           </a:solidFill>
@@ -4834,261 +6768,6 @@
                       <a:tailEnd type="none" w="med" len="med"/>
                     </a:lnB>
                     <a:solidFill>
-                      <a:srgbClr val="F7F9FC"/>
-                    </a:solidFill>
-                  </a:tcPr>
-                </a:tc>
-                <a:tc>
-                  <a:txBody>
-                    <a:bodyPr/>
-                    <a:lstStyle/>
-                    <a:p>
-                      <a:pPr algn="ctr" indent="0" marL="0">
-                        <a:buNone/>
-                      </a:pPr>
-                      <a:r>
-                        <a:rPr lang="en-US" sz="950" b="1" dirty="0">
-                          <a:solidFill>
-                            <a:srgbClr val="C2410C"/>
-                          </a:solidFill>
-                          <a:latin typeface="맑은 고딕" pitchFamily="34" charset="0"/>
-                          <a:ea typeface="맑은 고딕" pitchFamily="34" charset="-122"/>
-                          <a:cs typeface="맑은 고딕" pitchFamily="34" charset="-120"/>
-                        </a:rPr>
-                        <a:t>사람</a:t>
-                      </a:r>
-                      <a:endParaRPr lang="en-US" sz="950" dirty="0">
-                        <a:latin typeface="맑은 고딕" charset="0"/>
-                        <a:ea typeface="맑은 고딕" charset="0"/>
-                        <a:cs typeface="맑은 고딕" charset="0"/>
-                      </a:endParaRPr>
-                    </a:p>
-                  </a:txBody>
-                  <a:tcPr marL="101600" marR="101600" marT="25400" marB="25400" anchor="ctr">
-                    <a:lnL w="12700" cap="flat" cmpd="sng" algn="ctr">
-                      <a:solidFill>
-                        <a:srgbClr val="E5E7EB"/>
-                      </a:solidFill>
-                      <a:prstDash val="solid"/>
-                      <a:round/>
-                      <a:headEnd type="none" w="med" len="med"/>
-                      <a:tailEnd type="none" w="med" len="med"/>
-                    </a:lnL>
-                    <a:lnR w="12700" cap="flat" cmpd="sng" algn="ctr">
-                      <a:solidFill>
-                        <a:srgbClr val="E5E7EB"/>
-                      </a:solidFill>
-                      <a:prstDash val="solid"/>
-                      <a:round/>
-                      <a:headEnd type="none" w="med" len="med"/>
-                      <a:tailEnd type="none" w="med" len="med"/>
-                    </a:lnR>
-                    <a:lnT w="12700" cap="flat" cmpd="sng" algn="ctr">
-                      <a:solidFill>
-                        <a:srgbClr val="E5E7EB"/>
-                      </a:solidFill>
-                      <a:prstDash val="solid"/>
-                      <a:round/>
-                      <a:headEnd type="none" w="med" len="med"/>
-                      <a:tailEnd type="none" w="med" len="med"/>
-                    </a:lnT>
-                    <a:lnB w="12700" cap="flat" cmpd="sng" algn="ctr">
-                      <a:solidFill>
-                        <a:srgbClr val="E5E7EB"/>
-                      </a:solidFill>
-                      <a:prstDash val="solid"/>
-                      <a:round/>
-                      <a:headEnd type="none" w="med" len="med"/>
-                      <a:tailEnd type="none" w="med" len="med"/>
-                    </a:lnB>
-                    <a:solidFill>
-                      <a:srgbClr val="F7F9FC"/>
-                    </a:solidFill>
-                  </a:tcPr>
-                </a:tc>
-              </a:tr>
-              <a:tr h="201168">
-                <a:tc rowSpan="3">
-                  <a:txBody>
-                    <a:bodyPr/>
-                    <a:lstStyle/>
-                    <a:p>
-                      <a:pPr indent="0" marL="0">
-                        <a:buNone/>
-                      </a:pPr>
-                      <a:r>
-                        <a:rPr lang="en-US" sz="1050" b="1" dirty="0">
-                          <a:solidFill>
-                            <a:srgbClr val="6B7280"/>
-                          </a:solidFill>
-                          <a:latin typeface="맑은 고딕" pitchFamily="34" charset="0"/>
-                          <a:ea typeface="맑은 고딕" pitchFamily="34" charset="-122"/>
-                          <a:cs typeface="맑은 고딕" pitchFamily="34" charset="-120"/>
-                        </a:rPr>
-                        <a:t>3  </a:t>
-                      </a:r>
-                      <a:pPr indent="0" marL="0">
-                        <a:buNone/>
-                      </a:pPr>
-                      <a:r>
-                        <a:rPr lang="en-US" sz="1250" b="1" dirty="0">
-                          <a:solidFill>
-                            <a:srgbClr val="1F2937"/>
-                          </a:solidFill>
-                          <a:latin typeface="맑은 고딕" pitchFamily="34" charset="0"/>
-                          <a:ea typeface="맑은 고딕" pitchFamily="34" charset="-122"/>
-                          <a:cs typeface="맑은 고딕" pitchFamily="34" charset="-120"/>
-                        </a:rPr>
-                        <a:t>SWVOC</a:t>
-                      </a:r>
-                      <a:endParaRPr lang="en-US" sz="1200" dirty="0">
-                        <a:latin typeface="맑은 고딕" charset="0"/>
-                        <a:ea typeface="맑은 고딕" charset="0"/>
-                        <a:cs typeface="맑은 고딕" charset="0"/>
-                      </a:endParaRPr>
-                    </a:p>
-                    <a:p>
-                      <a:pPr indent="0" marL="0">
-                        <a:buNone/>
-                      </a:pPr>
-                      <a:r>
-                        <a:rPr lang="en-US" sz="800" dirty="0">
-                          <a:solidFill>
-                            <a:srgbClr val="A5AEC0"/>
-                          </a:solidFill>
-                          <a:latin typeface="맑은 고딕" pitchFamily="34" charset="0"/>
-                          <a:ea typeface="맑은 고딕" pitchFamily="34" charset="-122"/>
-                          <a:cs typeface="맑은 고딕" pitchFamily="34" charset="-120"/>
-                        </a:rPr>
-                        <a:t>고객 요청 원문</a:t>
-                      </a:r>
-                      <a:endParaRPr lang="en-US" sz="1200" dirty="0">
-                        <a:latin typeface="맑은 고딕" charset="0"/>
-                        <a:ea typeface="맑은 고딕" charset="0"/>
-                        <a:cs typeface="맑은 고딕" charset="0"/>
-                      </a:endParaRPr>
-                    </a:p>
-                  </a:txBody>
-                  <a:tcPr marL="101600" marR="101600" marT="25400" marB="25400" anchor="ctr">
-                    <a:lnL w="12700" cap="flat" cmpd="sng" algn="ctr">
-                      <a:solidFill>
-                        <a:srgbClr val="E5E7EB"/>
-                      </a:solidFill>
-                      <a:prstDash val="solid"/>
-                      <a:round/>
-                      <a:headEnd type="none" w="med" len="med"/>
-                      <a:tailEnd type="none" w="med" len="med"/>
-                    </a:lnL>
-                    <a:lnR w="12700" cap="flat" cmpd="sng" algn="ctr">
-                      <a:solidFill>
-                        <a:srgbClr val="E5E7EB"/>
-                      </a:solidFill>
-                      <a:prstDash val="solid"/>
-                      <a:round/>
-                      <a:headEnd type="none" w="med" len="med"/>
-                      <a:tailEnd type="none" w="med" len="med"/>
-                    </a:lnR>
-                    <a:lnT w="12700" cap="flat" cmpd="sng" algn="ctr">
-                      <a:solidFill>
-                        <a:srgbClr val="E5E7EB"/>
-                      </a:solidFill>
-                      <a:prstDash val="solid"/>
-                      <a:round/>
-                      <a:headEnd type="none" w="med" len="med"/>
-                      <a:tailEnd type="none" w="med" len="med"/>
-                    </a:lnT>
-                    <a:lnB w="12700" cap="flat" cmpd="sng" algn="ctr">
-                      <a:solidFill>
-                        <a:srgbClr val="E5E7EB"/>
-                      </a:solidFill>
-                      <a:prstDash val="solid"/>
-                      <a:round/>
-                      <a:headEnd type="none" w="med" len="med"/>
-                      <a:tailEnd type="none" w="med" len="med"/>
-                    </a:lnB>
-                    <a:solidFill>
-                      <a:srgbClr val="FFFFFF"/>
-                    </a:solidFill>
-                  </a:tcPr>
-                </a:tc>
-                <a:tc>
-                  <a:txBody>
-                    <a:bodyPr/>
-                    <a:lstStyle/>
-                    <a:p>
-                      <a:pPr indent="0" marL="0">
-                        <a:buNone/>
-                      </a:pPr>
-                      <a:r>
-                        <a:rPr lang="en-US" sz="950" b="1" dirty="0">
-                          <a:solidFill>
-                            <a:srgbClr val="1F2937"/>
-                          </a:solidFill>
-                          <a:latin typeface="맑은 고딕" pitchFamily="34" charset="0"/>
-                          <a:ea typeface="맑은 고딕" pitchFamily="34" charset="-122"/>
-                          <a:cs typeface="맑은 고딕" pitchFamily="34" charset="-120"/>
-                        </a:rPr>
-                        <a:t>요청자 </a:t>
-                      </a:r>
-                      <a:pPr indent="0" marL="0">
-                        <a:buNone/>
-                      </a:pPr>
-                      <a:r>
-                        <a:rPr lang="en-US" sz="950" dirty="0">
-                          <a:solidFill>
-                            <a:srgbClr val="475569"/>
-                          </a:solidFill>
-                          <a:latin typeface="맑은 고딕" pitchFamily="34" charset="0"/>
-                          <a:ea typeface="맑은 고딕" pitchFamily="34" charset="-122"/>
-                          <a:cs typeface="맑은 고딕" pitchFamily="34" charset="-120"/>
-                        </a:rPr>
-                        <a:t>— 요청 부서·담당·대상 기능</a:t>
-                      </a:r>
-                      <a:endParaRPr lang="en-US" sz="1200" dirty="0">
-                        <a:latin typeface="맑은 고딕" charset="0"/>
-                        <a:ea typeface="맑은 고딕" charset="0"/>
-                        <a:cs typeface="맑은 고딕" charset="0"/>
-                      </a:endParaRPr>
-                    </a:p>
-                  </a:txBody>
-                  <a:tcPr marL="101600" marR="101600" marT="25400" marB="25400" anchor="ctr">
-                    <a:lnL w="12700" cap="flat" cmpd="sng" algn="ctr">
-                      <a:solidFill>
-                        <a:srgbClr val="E5E7EB"/>
-                      </a:solidFill>
-                      <a:prstDash val="solid"/>
-                      <a:round/>
-                      <a:headEnd type="none" w="med" len="med"/>
-                      <a:tailEnd type="none" w="med" len="med"/>
-                    </a:lnL>
-                    <a:lnR w="12700" cap="flat" cmpd="sng" algn="ctr">
-                      <a:solidFill>
-                        <a:srgbClr val="E5E7EB"/>
-                      </a:solidFill>
-                      <a:prstDash val="solid"/>
-                      <a:round/>
-                      <a:headEnd type="none" w="med" len="med"/>
-                      <a:tailEnd type="none" w="med" len="med"/>
-                    </a:lnR>
-                    <a:lnT w="12700" cap="flat" cmpd="sng" algn="ctr">
-                      <a:solidFill>
-                        <a:srgbClr val="E5E7EB"/>
-                      </a:solidFill>
-                      <a:prstDash val="solid"/>
-                      <a:round/>
-                      <a:headEnd type="none" w="med" len="med"/>
-                      <a:tailEnd type="none" w="med" len="med"/>
-                    </a:lnT>
-                    <a:lnB w="12700" cap="flat" cmpd="sng" algn="ctr">
-                      <a:solidFill>
-                        <a:srgbClr val="E5E7EB"/>
-                      </a:solidFill>
-                      <a:prstDash val="solid"/>
-                      <a:round/>
-                      <a:headEnd type="none" w="med" len="med"/>
-                      <a:tailEnd type="none" w="med" len="med"/>
-                    </a:lnB>
-                    <a:solidFill>
                       <a:srgbClr val="FFFFFF"/>
                     </a:solidFill>
                   </a:tcPr>
@@ -5102,7 +6781,7 @@
                         <a:buNone/>
                       </a:pPr>
                       <a:r>
-                        <a:rPr lang="en-US" sz="950" b="1" dirty="0">
+                        <a:rPr lang="en-US" sz="1000" b="1" dirty="0">
                           <a:solidFill>
                             <a:srgbClr val="C2410C"/>
                           </a:solidFill>
@@ -5110,1449 +6789,9 @@
                           <a:ea typeface="맑은 고딕" pitchFamily="34" charset="-122"/>
                           <a:cs typeface="맑은 고딕" pitchFamily="34" charset="-120"/>
                         </a:rPr>
-                        <a:t>사람</a:t>
+                        <a:t>사람 초벌</a:t>
                       </a:r>
-                      <a:endParaRPr lang="en-US" sz="950" dirty="0">
-                        <a:latin typeface="맑은 고딕" charset="0"/>
-                        <a:ea typeface="맑은 고딕" charset="0"/>
-                        <a:cs typeface="맑은 고딕" charset="0"/>
-                      </a:endParaRPr>
-                    </a:p>
-                  </a:txBody>
-                  <a:tcPr marL="101600" marR="101600" marT="25400" marB="25400" anchor="ctr">
-                    <a:lnL w="12700" cap="flat" cmpd="sng" algn="ctr">
-                      <a:solidFill>
-                        <a:srgbClr val="E5E7EB"/>
-                      </a:solidFill>
-                      <a:prstDash val="solid"/>
-                      <a:round/>
-                      <a:headEnd type="none" w="med" len="med"/>
-                      <a:tailEnd type="none" w="med" len="med"/>
-                    </a:lnL>
-                    <a:lnR w="12700" cap="flat" cmpd="sng" algn="ctr">
-                      <a:solidFill>
-                        <a:srgbClr val="E5E7EB"/>
-                      </a:solidFill>
-                      <a:prstDash val="solid"/>
-                      <a:round/>
-                      <a:headEnd type="none" w="med" len="med"/>
-                      <a:tailEnd type="none" w="med" len="med"/>
-                    </a:lnR>
-                    <a:lnT w="12700" cap="flat" cmpd="sng" algn="ctr">
-                      <a:solidFill>
-                        <a:srgbClr val="E5E7EB"/>
-                      </a:solidFill>
-                      <a:prstDash val="solid"/>
-                      <a:round/>
-                      <a:headEnd type="none" w="med" len="med"/>
-                      <a:tailEnd type="none" w="med" len="med"/>
-                    </a:lnT>
-                    <a:lnB w="12700" cap="flat" cmpd="sng" algn="ctr">
-                      <a:solidFill>
-                        <a:srgbClr val="E5E7EB"/>
-                      </a:solidFill>
-                      <a:prstDash val="solid"/>
-                      <a:round/>
-                      <a:headEnd type="none" w="med" len="med"/>
-                      <a:tailEnd type="none" w="med" len="med"/>
-                    </a:lnB>
-                    <a:solidFill>
-                      <a:srgbClr val="FFFFFF"/>
-                    </a:solidFill>
-                  </a:tcPr>
-                </a:tc>
-              </a:tr>
-              <a:tr h="201168">
-                <a:tc vMerge="1">
-                  <a:tcPr/>
-                </a:tc>
-                <a:tc>
-                  <a:txBody>
-                    <a:bodyPr/>
-                    <a:lstStyle/>
-                    <a:p>
-                      <a:pPr indent="0" marL="0">
-                        <a:buNone/>
-                      </a:pPr>
-                      <a:r>
-                        <a:rPr lang="en-US" sz="950" b="1" dirty="0">
-                          <a:solidFill>
-                            <a:srgbClr val="1F2937"/>
-                          </a:solidFill>
-                          <a:latin typeface="맑은 고딕" pitchFamily="34" charset="0"/>
-                          <a:ea typeface="맑은 고딕" pitchFamily="34" charset="-122"/>
-                          <a:cs typeface="맑은 고딕" pitchFamily="34" charset="-120"/>
-                        </a:rPr>
-                        <a:t>요청사항 </a:t>
-                      </a:r>
-                      <a:pPr indent="0" marL="0">
-                        <a:buNone/>
-                      </a:pPr>
-                      <a:r>
-                        <a:rPr lang="en-US" sz="950" dirty="0">
-                          <a:solidFill>
-                            <a:srgbClr val="475569"/>
-                          </a:solidFill>
-                          <a:latin typeface="맑은 고딕" pitchFamily="34" charset="0"/>
-                          <a:ea typeface="맑은 고딕" pitchFamily="34" charset="-122"/>
-                          <a:cs typeface="맑은 고딕" pitchFamily="34" charset="-120"/>
-                        </a:rPr>
-                        <a:t>— 고객 요구를 양식에 맞춰 정리</a:t>
-                      </a:r>
-                      <a:endParaRPr lang="en-US" sz="1200" dirty="0">
-                        <a:latin typeface="맑은 고딕" charset="0"/>
-                        <a:ea typeface="맑은 고딕" charset="0"/>
-                        <a:cs typeface="맑은 고딕" charset="0"/>
-                      </a:endParaRPr>
-                    </a:p>
-                  </a:txBody>
-                  <a:tcPr marL="101600" marR="101600" marT="25400" marB="25400" anchor="ctr">
-                    <a:lnL w="12700" cap="flat" cmpd="sng" algn="ctr">
-                      <a:solidFill>
-                        <a:srgbClr val="E5E7EB"/>
-                      </a:solidFill>
-                      <a:prstDash val="solid"/>
-                      <a:round/>
-                      <a:headEnd type="none" w="med" len="med"/>
-                      <a:tailEnd type="none" w="med" len="med"/>
-                    </a:lnL>
-                    <a:lnR w="12700" cap="flat" cmpd="sng" algn="ctr">
-                      <a:solidFill>
-                        <a:srgbClr val="E5E7EB"/>
-                      </a:solidFill>
-                      <a:prstDash val="solid"/>
-                      <a:round/>
-                      <a:headEnd type="none" w="med" len="med"/>
-                      <a:tailEnd type="none" w="med" len="med"/>
-                    </a:lnR>
-                    <a:lnT w="12700" cap="flat" cmpd="sng" algn="ctr">
-                      <a:solidFill>
-                        <a:srgbClr val="E5E7EB"/>
-                      </a:solidFill>
-                      <a:prstDash val="solid"/>
-                      <a:round/>
-                      <a:headEnd type="none" w="med" len="med"/>
-                      <a:tailEnd type="none" w="med" len="med"/>
-                    </a:lnT>
-                    <a:lnB w="12700" cap="flat" cmpd="sng" algn="ctr">
-                      <a:solidFill>
-                        <a:srgbClr val="E5E7EB"/>
-                      </a:solidFill>
-                      <a:prstDash val="solid"/>
-                      <a:round/>
-                      <a:headEnd type="none" w="med" len="med"/>
-                      <a:tailEnd type="none" w="med" len="med"/>
-                    </a:lnB>
-                    <a:solidFill>
-                      <a:srgbClr val="FFFFFF"/>
-                    </a:solidFill>
-                  </a:tcPr>
-                </a:tc>
-                <a:tc>
-                  <a:txBody>
-                    <a:bodyPr/>
-                    <a:lstStyle/>
-                    <a:p>
-                      <a:pPr algn="ctr" indent="0" marL="0">
-                        <a:buNone/>
-                      </a:pPr>
-                      <a:r>
-                        <a:rPr lang="en-US" sz="950" b="1" dirty="0">
-                          <a:solidFill>
-                            <a:srgbClr val="4338CA"/>
-                          </a:solidFill>
-                          <a:latin typeface="맑은 고딕" pitchFamily="34" charset="0"/>
-                          <a:ea typeface="맑은 고딕" pitchFamily="34" charset="-122"/>
-                          <a:cs typeface="맑은 고딕" pitchFamily="34" charset="-120"/>
-                        </a:rPr>
-                        <a:t>AI 초안</a:t>
-                      </a:r>
-                      <a:endParaRPr lang="en-US" sz="950" dirty="0">
-                        <a:latin typeface="맑은 고딕" charset="0"/>
-                        <a:ea typeface="맑은 고딕" charset="0"/>
-                        <a:cs typeface="맑은 고딕" charset="0"/>
-                      </a:endParaRPr>
-                    </a:p>
-                  </a:txBody>
-                  <a:tcPr marL="101600" marR="101600" marT="25400" marB="25400" anchor="ctr">
-                    <a:lnL w="12700" cap="flat" cmpd="sng" algn="ctr">
-                      <a:solidFill>
-                        <a:srgbClr val="E5E7EB"/>
-                      </a:solidFill>
-                      <a:prstDash val="solid"/>
-                      <a:round/>
-                      <a:headEnd type="none" w="med" len="med"/>
-                      <a:tailEnd type="none" w="med" len="med"/>
-                    </a:lnL>
-                    <a:lnR w="12700" cap="flat" cmpd="sng" algn="ctr">
-                      <a:solidFill>
-                        <a:srgbClr val="E5E7EB"/>
-                      </a:solidFill>
-                      <a:prstDash val="solid"/>
-                      <a:round/>
-                      <a:headEnd type="none" w="med" len="med"/>
-                      <a:tailEnd type="none" w="med" len="med"/>
-                    </a:lnR>
-                    <a:lnT w="12700" cap="flat" cmpd="sng" algn="ctr">
-                      <a:solidFill>
-                        <a:srgbClr val="E5E7EB"/>
-                      </a:solidFill>
-                      <a:prstDash val="solid"/>
-                      <a:round/>
-                      <a:headEnd type="none" w="med" len="med"/>
-                      <a:tailEnd type="none" w="med" len="med"/>
-                    </a:lnT>
-                    <a:lnB w="12700" cap="flat" cmpd="sng" algn="ctr">
-                      <a:solidFill>
-                        <a:srgbClr val="E5E7EB"/>
-                      </a:solidFill>
-                      <a:prstDash val="solid"/>
-                      <a:round/>
-                      <a:headEnd type="none" w="med" len="med"/>
-                      <a:tailEnd type="none" w="med" len="med"/>
-                    </a:lnB>
-                    <a:solidFill>
-                      <a:srgbClr val="FFFFFF"/>
-                    </a:solidFill>
-                  </a:tcPr>
-                </a:tc>
-              </a:tr>
-              <a:tr h="201168">
-                <a:tc vMerge="1">
-                  <a:tcPr/>
-                </a:tc>
-                <a:tc>
-                  <a:txBody>
-                    <a:bodyPr/>
-                    <a:lstStyle/>
-                    <a:p>
-                      <a:pPr indent="0" marL="0">
-                        <a:buNone/>
-                      </a:pPr>
-                      <a:r>
-                        <a:rPr lang="en-US" sz="950" b="1" dirty="0">
-                          <a:solidFill>
-                            <a:srgbClr val="1F2937"/>
-                          </a:solidFill>
-                          <a:latin typeface="맑은 고딕" pitchFamily="34" charset="0"/>
-                          <a:ea typeface="맑은 고딕" pitchFamily="34" charset="-122"/>
-                          <a:cs typeface="맑은 고딕" pitchFamily="34" charset="-120"/>
-                        </a:rPr>
-                        <a:t>특이사항 </a:t>
-                      </a:r>
-                      <a:pPr indent="0" marL="0">
-                        <a:buNone/>
-                      </a:pPr>
-                      <a:r>
-                        <a:rPr lang="en-US" sz="950" dirty="0">
-                          <a:solidFill>
-                            <a:srgbClr val="475569"/>
-                          </a:solidFill>
-                          <a:latin typeface="맑은 고딕" pitchFamily="34" charset="0"/>
-                          <a:ea typeface="맑은 고딕" pitchFamily="34" charset="-122"/>
-                          <a:cs typeface="맑은 고딕" pitchFamily="34" charset="-120"/>
-                        </a:rPr>
-                        <a:t>— 제약·주의·이력</a:t>
-                      </a:r>
-                      <a:endParaRPr lang="en-US" sz="1200" dirty="0">
-                        <a:latin typeface="맑은 고딕" charset="0"/>
-                        <a:ea typeface="맑은 고딕" charset="0"/>
-                        <a:cs typeface="맑은 고딕" charset="0"/>
-                      </a:endParaRPr>
-                    </a:p>
-                  </a:txBody>
-                  <a:tcPr marL="101600" marR="101600" marT="25400" marB="25400" anchor="ctr">
-                    <a:lnL w="12700" cap="flat" cmpd="sng" algn="ctr">
-                      <a:solidFill>
-                        <a:srgbClr val="E5E7EB"/>
-                      </a:solidFill>
-                      <a:prstDash val="solid"/>
-                      <a:round/>
-                      <a:headEnd type="none" w="med" len="med"/>
-                      <a:tailEnd type="none" w="med" len="med"/>
-                    </a:lnL>
-                    <a:lnR w="12700" cap="flat" cmpd="sng" algn="ctr">
-                      <a:solidFill>
-                        <a:srgbClr val="E5E7EB"/>
-                      </a:solidFill>
-                      <a:prstDash val="solid"/>
-                      <a:round/>
-                      <a:headEnd type="none" w="med" len="med"/>
-                      <a:tailEnd type="none" w="med" len="med"/>
-                    </a:lnR>
-                    <a:lnT w="12700" cap="flat" cmpd="sng" algn="ctr">
-                      <a:solidFill>
-                        <a:srgbClr val="E5E7EB"/>
-                      </a:solidFill>
-                      <a:prstDash val="solid"/>
-                      <a:round/>
-                      <a:headEnd type="none" w="med" len="med"/>
-                      <a:tailEnd type="none" w="med" len="med"/>
-                    </a:lnT>
-                    <a:lnB w="12700" cap="flat" cmpd="sng" algn="ctr">
-                      <a:solidFill>
-                        <a:srgbClr val="E5E7EB"/>
-                      </a:solidFill>
-                      <a:prstDash val="solid"/>
-                      <a:round/>
-                      <a:headEnd type="none" w="med" len="med"/>
-                      <a:tailEnd type="none" w="med" len="med"/>
-                    </a:lnB>
-                    <a:solidFill>
-                      <a:srgbClr val="FFFFFF"/>
-                    </a:solidFill>
-                  </a:tcPr>
-                </a:tc>
-                <a:tc>
-                  <a:txBody>
-                    <a:bodyPr/>
-                    <a:lstStyle/>
-                    <a:p>
-                      <a:pPr algn="ctr" indent="0" marL="0">
-                        <a:buNone/>
-                      </a:pPr>
-                      <a:r>
-                        <a:rPr lang="en-US" sz="950" b="1" dirty="0">
-                          <a:solidFill>
-                            <a:srgbClr val="C2410C"/>
-                          </a:solidFill>
-                          <a:latin typeface="맑은 고딕" pitchFamily="34" charset="0"/>
-                          <a:ea typeface="맑은 고딕" pitchFamily="34" charset="-122"/>
-                          <a:cs typeface="맑은 고딕" pitchFamily="34" charset="-120"/>
-                        </a:rPr>
-                        <a:t>사람</a:t>
-                      </a:r>
-                      <a:endParaRPr lang="en-US" sz="950" dirty="0">
-                        <a:latin typeface="맑은 고딕" charset="0"/>
-                        <a:ea typeface="맑은 고딕" charset="0"/>
-                        <a:cs typeface="맑은 고딕" charset="0"/>
-                      </a:endParaRPr>
-                    </a:p>
-                  </a:txBody>
-                  <a:tcPr marL="101600" marR="101600" marT="25400" marB="25400" anchor="ctr">
-                    <a:lnL w="12700" cap="flat" cmpd="sng" algn="ctr">
-                      <a:solidFill>
-                        <a:srgbClr val="E5E7EB"/>
-                      </a:solidFill>
-                      <a:prstDash val="solid"/>
-                      <a:round/>
-                      <a:headEnd type="none" w="med" len="med"/>
-                      <a:tailEnd type="none" w="med" len="med"/>
-                    </a:lnL>
-                    <a:lnR w="12700" cap="flat" cmpd="sng" algn="ctr">
-                      <a:solidFill>
-                        <a:srgbClr val="E5E7EB"/>
-                      </a:solidFill>
-                      <a:prstDash val="solid"/>
-                      <a:round/>
-                      <a:headEnd type="none" w="med" len="med"/>
-                      <a:tailEnd type="none" w="med" len="med"/>
-                    </a:lnR>
-                    <a:lnT w="12700" cap="flat" cmpd="sng" algn="ctr">
-                      <a:solidFill>
-                        <a:srgbClr val="E5E7EB"/>
-                      </a:solidFill>
-                      <a:prstDash val="solid"/>
-                      <a:round/>
-                      <a:headEnd type="none" w="med" len="med"/>
-                      <a:tailEnd type="none" w="med" len="med"/>
-                    </a:lnT>
-                    <a:lnB w="12700" cap="flat" cmpd="sng" algn="ctr">
-                      <a:solidFill>
-                        <a:srgbClr val="E5E7EB"/>
-                      </a:solidFill>
-                      <a:prstDash val="solid"/>
-                      <a:round/>
-                      <a:headEnd type="none" w="med" len="med"/>
-                      <a:tailEnd type="none" w="med" len="med"/>
-                    </a:lnB>
-                    <a:solidFill>
-                      <a:srgbClr val="FFFFFF"/>
-                    </a:solidFill>
-                  </a:tcPr>
-                </a:tc>
-              </a:tr>
-              <a:tr h="201168">
-                <a:tc rowSpan="3">
-                  <a:txBody>
-                    <a:bodyPr/>
-                    <a:lstStyle/>
-                    <a:p>
-                      <a:pPr indent="0" marL="0">
-                        <a:buNone/>
-                      </a:pPr>
-                      <a:r>
-                        <a:rPr lang="en-US" sz="1050" b="1" dirty="0">
-                          <a:solidFill>
-                            <a:srgbClr val="6B7280"/>
-                          </a:solidFill>
-                          <a:latin typeface="맑은 고딕" pitchFamily="34" charset="0"/>
-                          <a:ea typeface="맑은 고딕" pitchFamily="34" charset="-122"/>
-                          <a:cs typeface="맑은 고딕" pitchFamily="34" charset="-120"/>
-                        </a:rPr>
-                        <a:t>4  </a:t>
-                      </a:r>
-                      <a:pPr indent="0" marL="0">
-                        <a:buNone/>
-                      </a:pPr>
-                      <a:r>
-                        <a:rPr lang="en-US" sz="1250" b="1" dirty="0">
-                          <a:solidFill>
-                            <a:srgbClr val="1F2937"/>
-                          </a:solidFill>
-                          <a:latin typeface="맑은 고딕" pitchFamily="34" charset="0"/>
-                          <a:ea typeface="맑은 고딕" pitchFamily="34" charset="-122"/>
-                          <a:cs typeface="맑은 고딕" pitchFamily="34" charset="-120"/>
-                        </a:rPr>
-                        <a:t>기능 요구사항</a:t>
-                      </a:r>
-                      <a:endParaRPr lang="en-US" sz="1200" dirty="0">
-                        <a:latin typeface="맑은 고딕" charset="0"/>
-                        <a:ea typeface="맑은 고딕" charset="0"/>
-                        <a:cs typeface="맑은 고딕" charset="0"/>
-                      </a:endParaRPr>
-                    </a:p>
-                    <a:p>
-                      <a:pPr indent="0" marL="0">
-                        <a:buNone/>
-                      </a:pPr>
-                      <a:r>
-                        <a:rPr lang="en-US" sz="800" dirty="0">
-                          <a:solidFill>
-                            <a:srgbClr val="A5AEC0"/>
-                          </a:solidFill>
-                          <a:latin typeface="맑은 고딕" pitchFamily="34" charset="0"/>
-                          <a:ea typeface="맑은 고딕" pitchFamily="34" charset="-122"/>
-                          <a:cs typeface="맑은 고딕" pitchFamily="34" charset="-120"/>
-                        </a:rPr>
-                        <a:t>Function Requirement</a:t>
-                      </a:r>
-                      <a:endParaRPr lang="en-US" sz="1200" dirty="0">
-                        <a:latin typeface="맑은 고딕" charset="0"/>
-                        <a:ea typeface="맑은 고딕" charset="0"/>
-                        <a:cs typeface="맑은 고딕" charset="0"/>
-                      </a:endParaRPr>
-                    </a:p>
-                  </a:txBody>
-                  <a:tcPr marL="101600" marR="101600" marT="25400" marB="25400" anchor="ctr">
-                    <a:lnL w="12700" cap="flat" cmpd="sng" algn="ctr">
-                      <a:solidFill>
-                        <a:srgbClr val="E5E7EB"/>
-                      </a:solidFill>
-                      <a:prstDash val="solid"/>
-                      <a:round/>
-                      <a:headEnd type="none" w="med" len="med"/>
-                      <a:tailEnd type="none" w="med" len="med"/>
-                    </a:lnL>
-                    <a:lnR w="12700" cap="flat" cmpd="sng" algn="ctr">
-                      <a:solidFill>
-                        <a:srgbClr val="E5E7EB"/>
-                      </a:solidFill>
-                      <a:prstDash val="solid"/>
-                      <a:round/>
-                      <a:headEnd type="none" w="med" len="med"/>
-                      <a:tailEnd type="none" w="med" len="med"/>
-                    </a:lnR>
-                    <a:lnT w="12700" cap="flat" cmpd="sng" algn="ctr">
-                      <a:solidFill>
-                        <a:srgbClr val="E5E7EB"/>
-                      </a:solidFill>
-                      <a:prstDash val="solid"/>
-                      <a:round/>
-                      <a:headEnd type="none" w="med" len="med"/>
-                      <a:tailEnd type="none" w="med" len="med"/>
-                    </a:lnT>
-                    <a:lnB w="12700" cap="flat" cmpd="sng" algn="ctr">
-                      <a:solidFill>
-                        <a:srgbClr val="E5E7EB"/>
-                      </a:solidFill>
-                      <a:prstDash val="solid"/>
-                      <a:round/>
-                      <a:headEnd type="none" w="med" len="med"/>
-                      <a:tailEnd type="none" w="med" len="med"/>
-                    </a:lnB>
-                    <a:solidFill>
-                      <a:srgbClr val="F7F9FC"/>
-                    </a:solidFill>
-                  </a:tcPr>
-                </a:tc>
-                <a:tc>
-                  <a:txBody>
-                    <a:bodyPr/>
-                    <a:lstStyle/>
-                    <a:p>
-                      <a:pPr indent="0" marL="0">
-                        <a:buNone/>
-                      </a:pPr>
-                      <a:r>
-                        <a:rPr lang="en-US" sz="950" b="1" dirty="0">
-                          <a:solidFill>
-                            <a:srgbClr val="1F2937"/>
-                          </a:solidFill>
-                          <a:latin typeface="맑은 고딕" pitchFamily="34" charset="0"/>
-                          <a:ea typeface="맑은 고딕" pitchFamily="34" charset="-122"/>
-                          <a:cs typeface="맑은 고딕" pitchFamily="34" charset="-120"/>
-                        </a:rPr>
-                        <a:t>개요 </a:t>
-                      </a:r>
-                      <a:pPr indent="0" marL="0">
-                        <a:buNone/>
-                      </a:pPr>
-                      <a:r>
-                        <a:rPr lang="en-US" sz="950" dirty="0">
-                          <a:solidFill>
-                            <a:srgbClr val="475569"/>
-                          </a:solidFill>
-                          <a:latin typeface="맑은 고딕" pitchFamily="34" charset="0"/>
-                          <a:ea typeface="맑은 고딕" pitchFamily="34" charset="-122"/>
-                          <a:cs typeface="맑은 고딕" pitchFamily="34" charset="-120"/>
-                        </a:rPr>
-                        <a:t>— 역할(시스템 내 책임)·목적</a:t>
-                      </a:r>
-                      <a:endParaRPr lang="en-US" sz="1200" dirty="0">
-                        <a:latin typeface="맑은 고딕" charset="0"/>
-                        <a:ea typeface="맑은 고딕" charset="0"/>
-                        <a:cs typeface="맑은 고딕" charset="0"/>
-                      </a:endParaRPr>
-                    </a:p>
-                  </a:txBody>
-                  <a:tcPr marL="101600" marR="101600" marT="25400" marB="25400" anchor="ctr">
-                    <a:lnL w="12700" cap="flat" cmpd="sng" algn="ctr">
-                      <a:solidFill>
-                        <a:srgbClr val="E5E7EB"/>
-                      </a:solidFill>
-                      <a:prstDash val="solid"/>
-                      <a:round/>
-                      <a:headEnd type="none" w="med" len="med"/>
-                      <a:tailEnd type="none" w="med" len="med"/>
-                    </a:lnL>
-                    <a:lnR w="12700" cap="flat" cmpd="sng" algn="ctr">
-                      <a:solidFill>
-                        <a:srgbClr val="E5E7EB"/>
-                      </a:solidFill>
-                      <a:prstDash val="solid"/>
-                      <a:round/>
-                      <a:headEnd type="none" w="med" len="med"/>
-                      <a:tailEnd type="none" w="med" len="med"/>
-                    </a:lnR>
-                    <a:lnT w="12700" cap="flat" cmpd="sng" algn="ctr">
-                      <a:solidFill>
-                        <a:srgbClr val="E5E7EB"/>
-                      </a:solidFill>
-                      <a:prstDash val="solid"/>
-                      <a:round/>
-                      <a:headEnd type="none" w="med" len="med"/>
-                      <a:tailEnd type="none" w="med" len="med"/>
-                    </a:lnT>
-                    <a:lnB w="12700" cap="flat" cmpd="sng" algn="ctr">
-                      <a:solidFill>
-                        <a:srgbClr val="E5E7EB"/>
-                      </a:solidFill>
-                      <a:prstDash val="solid"/>
-                      <a:round/>
-                      <a:headEnd type="none" w="med" len="med"/>
-                      <a:tailEnd type="none" w="med" len="med"/>
-                    </a:lnB>
-                    <a:solidFill>
-                      <a:srgbClr val="F7F9FC"/>
-                    </a:solidFill>
-                  </a:tcPr>
-                </a:tc>
-                <a:tc>
-                  <a:txBody>
-                    <a:bodyPr/>
-                    <a:lstStyle/>
-                    <a:p>
-                      <a:pPr algn="ctr" indent="0" marL="0">
-                        <a:buNone/>
-                      </a:pPr>
-                      <a:r>
-                        <a:rPr lang="en-US" sz="950" b="1" dirty="0">
-                          <a:solidFill>
-                            <a:srgbClr val="4338CA"/>
-                          </a:solidFill>
-                          <a:latin typeface="맑은 고딕" pitchFamily="34" charset="0"/>
-                          <a:ea typeface="맑은 고딕" pitchFamily="34" charset="-122"/>
-                          <a:cs typeface="맑은 고딕" pitchFamily="34" charset="-120"/>
-                        </a:rPr>
-                        <a:t>AI 초안</a:t>
-                      </a:r>
-                      <a:endParaRPr lang="en-US" sz="950" dirty="0">
-                        <a:latin typeface="맑은 고딕" charset="0"/>
-                        <a:ea typeface="맑은 고딕" charset="0"/>
-                        <a:cs typeface="맑은 고딕" charset="0"/>
-                      </a:endParaRPr>
-                    </a:p>
-                  </a:txBody>
-                  <a:tcPr marL="101600" marR="101600" marT="25400" marB="25400" anchor="ctr">
-                    <a:lnL w="12700" cap="flat" cmpd="sng" algn="ctr">
-                      <a:solidFill>
-                        <a:srgbClr val="E5E7EB"/>
-                      </a:solidFill>
-                      <a:prstDash val="solid"/>
-                      <a:round/>
-                      <a:headEnd type="none" w="med" len="med"/>
-                      <a:tailEnd type="none" w="med" len="med"/>
-                    </a:lnL>
-                    <a:lnR w="12700" cap="flat" cmpd="sng" algn="ctr">
-                      <a:solidFill>
-                        <a:srgbClr val="E5E7EB"/>
-                      </a:solidFill>
-                      <a:prstDash val="solid"/>
-                      <a:round/>
-                      <a:headEnd type="none" w="med" len="med"/>
-                      <a:tailEnd type="none" w="med" len="med"/>
-                    </a:lnR>
-                    <a:lnT w="12700" cap="flat" cmpd="sng" algn="ctr">
-                      <a:solidFill>
-                        <a:srgbClr val="E5E7EB"/>
-                      </a:solidFill>
-                      <a:prstDash val="solid"/>
-                      <a:round/>
-                      <a:headEnd type="none" w="med" len="med"/>
-                      <a:tailEnd type="none" w="med" len="med"/>
-                    </a:lnT>
-                    <a:lnB w="12700" cap="flat" cmpd="sng" algn="ctr">
-                      <a:solidFill>
-                        <a:srgbClr val="E5E7EB"/>
-                      </a:solidFill>
-                      <a:prstDash val="solid"/>
-                      <a:round/>
-                      <a:headEnd type="none" w="med" len="med"/>
-                      <a:tailEnd type="none" w="med" len="med"/>
-                    </a:lnB>
-                    <a:solidFill>
-                      <a:srgbClr val="F7F9FC"/>
-                    </a:solidFill>
-                  </a:tcPr>
-                </a:tc>
-              </a:tr>
-              <a:tr h="201168">
-                <a:tc vMerge="1">
-                  <a:tcPr/>
-                </a:tc>
-                <a:tc>
-                  <a:txBody>
-                    <a:bodyPr/>
-                    <a:lstStyle/>
-                    <a:p>
-                      <a:pPr indent="0" marL="0">
-                        <a:buNone/>
-                      </a:pPr>
-                      <a:r>
-                        <a:rPr lang="en-US" sz="950" b="1" dirty="0">
-                          <a:solidFill>
-                            <a:srgbClr val="1F2937"/>
-                          </a:solidFill>
-                          <a:latin typeface="맑은 고딕" pitchFamily="34" charset="0"/>
-                          <a:ea typeface="맑은 고딕" pitchFamily="34" charset="-122"/>
-                          <a:cs typeface="맑은 고딕" pitchFamily="34" charset="-120"/>
-                        </a:rPr>
-                        <a:t>동작 정의 </a:t>
-                      </a:r>
-                      <a:pPr indent="0" marL="0">
-                        <a:buNone/>
-                      </a:pPr>
-                      <a:r>
-                        <a:rPr lang="en-US" sz="950" dirty="0">
-                          <a:solidFill>
-                            <a:srgbClr val="475569"/>
-                          </a:solidFill>
-                          <a:latin typeface="맑은 고딕" pitchFamily="34" charset="0"/>
-                          <a:ea typeface="맑은 고딕" pitchFamily="34" charset="-122"/>
-                          <a:cs typeface="맑은 고딕" pitchFamily="34" charset="-120"/>
-                        </a:rPr>
-                        <a:t>— 기본·변형·예외 유형마다 선행·후행·시나리오 (총 9행)</a:t>
-                      </a:r>
-                      <a:endParaRPr lang="en-US" sz="1200" dirty="0">
-                        <a:latin typeface="맑은 고딕" charset="0"/>
-                        <a:ea typeface="맑은 고딕" charset="0"/>
-                        <a:cs typeface="맑은 고딕" charset="0"/>
-                      </a:endParaRPr>
-                    </a:p>
-                  </a:txBody>
-                  <a:tcPr marL="101600" marR="101600" marT="25400" marB="25400" anchor="ctr">
-                    <a:lnL w="12700" cap="flat" cmpd="sng" algn="ctr">
-                      <a:solidFill>
-                        <a:srgbClr val="E5E7EB"/>
-                      </a:solidFill>
-                      <a:prstDash val="solid"/>
-                      <a:round/>
-                      <a:headEnd type="none" w="med" len="med"/>
-                      <a:tailEnd type="none" w="med" len="med"/>
-                    </a:lnL>
-                    <a:lnR w="12700" cap="flat" cmpd="sng" algn="ctr">
-                      <a:solidFill>
-                        <a:srgbClr val="E5E7EB"/>
-                      </a:solidFill>
-                      <a:prstDash val="solid"/>
-                      <a:round/>
-                      <a:headEnd type="none" w="med" len="med"/>
-                      <a:tailEnd type="none" w="med" len="med"/>
-                    </a:lnR>
-                    <a:lnT w="12700" cap="flat" cmpd="sng" algn="ctr">
-                      <a:solidFill>
-                        <a:srgbClr val="E5E7EB"/>
-                      </a:solidFill>
-                      <a:prstDash val="solid"/>
-                      <a:round/>
-                      <a:headEnd type="none" w="med" len="med"/>
-                      <a:tailEnd type="none" w="med" len="med"/>
-                    </a:lnT>
-                    <a:lnB w="12700" cap="flat" cmpd="sng" algn="ctr">
-                      <a:solidFill>
-                        <a:srgbClr val="E5E7EB"/>
-                      </a:solidFill>
-                      <a:prstDash val="solid"/>
-                      <a:round/>
-                      <a:headEnd type="none" w="med" len="med"/>
-                      <a:tailEnd type="none" w="med" len="med"/>
-                    </a:lnB>
-                    <a:solidFill>
-                      <a:srgbClr val="F7F9FC"/>
-                    </a:solidFill>
-                  </a:tcPr>
-                </a:tc>
-                <a:tc>
-                  <a:txBody>
-                    <a:bodyPr/>
-                    <a:lstStyle/>
-                    <a:p>
-                      <a:pPr algn="ctr" indent="0" marL="0">
-                        <a:buNone/>
-                      </a:pPr>
-                      <a:r>
-                        <a:rPr lang="en-US" sz="950" b="1" dirty="0">
-                          <a:solidFill>
-                            <a:srgbClr val="4338CA"/>
-                          </a:solidFill>
-                          <a:latin typeface="맑은 고딕" pitchFamily="34" charset="0"/>
-                          <a:ea typeface="맑은 고딕" pitchFamily="34" charset="-122"/>
-                          <a:cs typeface="맑은 고딕" pitchFamily="34" charset="-120"/>
-                        </a:rPr>
-                        <a:t>AI 초안</a:t>
-                      </a:r>
-                      <a:endParaRPr lang="en-US" sz="950" dirty="0">
-                        <a:latin typeface="맑은 고딕" charset="0"/>
-                        <a:ea typeface="맑은 고딕" charset="0"/>
-                        <a:cs typeface="맑은 고딕" charset="0"/>
-                      </a:endParaRPr>
-                    </a:p>
-                  </a:txBody>
-                  <a:tcPr marL="101600" marR="101600" marT="25400" marB="25400" anchor="ctr">
-                    <a:lnL w="12700" cap="flat" cmpd="sng" algn="ctr">
-                      <a:solidFill>
-                        <a:srgbClr val="E5E7EB"/>
-                      </a:solidFill>
-                      <a:prstDash val="solid"/>
-                      <a:round/>
-                      <a:headEnd type="none" w="med" len="med"/>
-                      <a:tailEnd type="none" w="med" len="med"/>
-                    </a:lnL>
-                    <a:lnR w="12700" cap="flat" cmpd="sng" algn="ctr">
-                      <a:solidFill>
-                        <a:srgbClr val="E5E7EB"/>
-                      </a:solidFill>
-                      <a:prstDash val="solid"/>
-                      <a:round/>
-                      <a:headEnd type="none" w="med" len="med"/>
-                      <a:tailEnd type="none" w="med" len="med"/>
-                    </a:lnR>
-                    <a:lnT w="12700" cap="flat" cmpd="sng" algn="ctr">
-                      <a:solidFill>
-                        <a:srgbClr val="E5E7EB"/>
-                      </a:solidFill>
-                      <a:prstDash val="solid"/>
-                      <a:round/>
-                      <a:headEnd type="none" w="med" len="med"/>
-                      <a:tailEnd type="none" w="med" len="med"/>
-                    </a:lnT>
-                    <a:lnB w="12700" cap="flat" cmpd="sng" algn="ctr">
-                      <a:solidFill>
-                        <a:srgbClr val="E5E7EB"/>
-                      </a:solidFill>
-                      <a:prstDash val="solid"/>
-                      <a:round/>
-                      <a:headEnd type="none" w="med" len="med"/>
-                      <a:tailEnd type="none" w="med" len="med"/>
-                    </a:lnB>
-                    <a:solidFill>
-                      <a:srgbClr val="F7F9FC"/>
-                    </a:solidFill>
-                  </a:tcPr>
-                </a:tc>
-              </a:tr>
-              <a:tr h="201168">
-                <a:tc vMerge="1">
-                  <a:tcPr/>
-                </a:tc>
-                <a:tc>
-                  <a:txBody>
-                    <a:bodyPr/>
-                    <a:lstStyle/>
-                    <a:p>
-                      <a:pPr indent="0" marL="0">
-                        <a:buNone/>
-                      </a:pPr>
-                      <a:r>
-                        <a:rPr lang="en-US" sz="950" b="1" dirty="0">
-                          <a:solidFill>
-                            <a:srgbClr val="1F2937"/>
-                          </a:solidFill>
-                          <a:latin typeface="맑은 고딕" pitchFamily="34" charset="0"/>
-                          <a:ea typeface="맑은 고딕" pitchFamily="34" charset="-122"/>
-                          <a:cs typeface="맑은 고딕" pitchFamily="34" charset="-120"/>
-                        </a:rPr>
-                        <a:t>제약사항 </a:t>
-                      </a:r>
-                      <a:pPr indent="0" marL="0">
-                        <a:buNone/>
-                      </a:pPr>
-                      <a:r>
-                        <a:rPr lang="en-US" sz="950" dirty="0">
-                          <a:solidFill>
-                            <a:srgbClr val="475569"/>
-                          </a:solidFill>
-                          <a:latin typeface="맑은 고딕" pitchFamily="34" charset="0"/>
-                          <a:ea typeface="맑은 고딕" pitchFamily="34" charset="-122"/>
-                          <a:cs typeface="맑은 고딕" pitchFamily="34" charset="-120"/>
-                        </a:rPr>
-                        <a:t>— 성능·환경·인터페이스</a:t>
-                      </a:r>
-                      <a:endParaRPr lang="en-US" sz="1200" dirty="0">
-                        <a:latin typeface="맑은 고딕" charset="0"/>
-                        <a:ea typeface="맑은 고딕" charset="0"/>
-                        <a:cs typeface="맑은 고딕" charset="0"/>
-                      </a:endParaRPr>
-                    </a:p>
-                  </a:txBody>
-                  <a:tcPr marL="101600" marR="101600" marT="25400" marB="25400" anchor="ctr">
-                    <a:lnL w="12700" cap="flat" cmpd="sng" algn="ctr">
-                      <a:solidFill>
-                        <a:srgbClr val="E5E7EB"/>
-                      </a:solidFill>
-                      <a:prstDash val="solid"/>
-                      <a:round/>
-                      <a:headEnd type="none" w="med" len="med"/>
-                      <a:tailEnd type="none" w="med" len="med"/>
-                    </a:lnL>
-                    <a:lnR w="12700" cap="flat" cmpd="sng" algn="ctr">
-                      <a:solidFill>
-                        <a:srgbClr val="E5E7EB"/>
-                      </a:solidFill>
-                      <a:prstDash val="solid"/>
-                      <a:round/>
-                      <a:headEnd type="none" w="med" len="med"/>
-                      <a:tailEnd type="none" w="med" len="med"/>
-                    </a:lnR>
-                    <a:lnT w="12700" cap="flat" cmpd="sng" algn="ctr">
-                      <a:solidFill>
-                        <a:srgbClr val="E5E7EB"/>
-                      </a:solidFill>
-                      <a:prstDash val="solid"/>
-                      <a:round/>
-                      <a:headEnd type="none" w="med" len="med"/>
-                      <a:tailEnd type="none" w="med" len="med"/>
-                    </a:lnT>
-                    <a:lnB w="12700" cap="flat" cmpd="sng" algn="ctr">
-                      <a:solidFill>
-                        <a:srgbClr val="E5E7EB"/>
-                      </a:solidFill>
-                      <a:prstDash val="solid"/>
-                      <a:round/>
-                      <a:headEnd type="none" w="med" len="med"/>
-                      <a:tailEnd type="none" w="med" len="med"/>
-                    </a:lnB>
-                    <a:solidFill>
-                      <a:srgbClr val="F7F9FC"/>
-                    </a:solidFill>
-                  </a:tcPr>
-                </a:tc>
-                <a:tc>
-                  <a:txBody>
-                    <a:bodyPr/>
-                    <a:lstStyle/>
-                    <a:p>
-                      <a:pPr algn="ctr" indent="0" marL="0">
-                        <a:buNone/>
-                      </a:pPr>
-                      <a:r>
-                        <a:rPr lang="en-US" sz="950" b="1" dirty="0">
-                          <a:solidFill>
-                            <a:srgbClr val="4338CA"/>
-                          </a:solidFill>
-                          <a:latin typeface="맑은 고딕" pitchFamily="34" charset="0"/>
-                          <a:ea typeface="맑은 고딕" pitchFamily="34" charset="-122"/>
-                          <a:cs typeface="맑은 고딕" pitchFamily="34" charset="-120"/>
-                        </a:rPr>
-                        <a:t>AI 초안</a:t>
-                      </a:r>
-                      <a:endParaRPr lang="en-US" sz="950" dirty="0">
-                        <a:latin typeface="맑은 고딕" charset="0"/>
-                        <a:ea typeface="맑은 고딕" charset="0"/>
-                        <a:cs typeface="맑은 고딕" charset="0"/>
-                      </a:endParaRPr>
-                    </a:p>
-                  </a:txBody>
-                  <a:tcPr marL="101600" marR="101600" marT="25400" marB="25400" anchor="ctr">
-                    <a:lnL w="12700" cap="flat" cmpd="sng" algn="ctr">
-                      <a:solidFill>
-                        <a:srgbClr val="E5E7EB"/>
-                      </a:solidFill>
-                      <a:prstDash val="solid"/>
-                      <a:round/>
-                      <a:headEnd type="none" w="med" len="med"/>
-                      <a:tailEnd type="none" w="med" len="med"/>
-                    </a:lnL>
-                    <a:lnR w="12700" cap="flat" cmpd="sng" algn="ctr">
-                      <a:solidFill>
-                        <a:srgbClr val="E5E7EB"/>
-                      </a:solidFill>
-                      <a:prstDash val="solid"/>
-                      <a:round/>
-                      <a:headEnd type="none" w="med" len="med"/>
-                      <a:tailEnd type="none" w="med" len="med"/>
-                    </a:lnR>
-                    <a:lnT w="12700" cap="flat" cmpd="sng" algn="ctr">
-                      <a:solidFill>
-                        <a:srgbClr val="E5E7EB"/>
-                      </a:solidFill>
-                      <a:prstDash val="solid"/>
-                      <a:round/>
-                      <a:headEnd type="none" w="med" len="med"/>
-                      <a:tailEnd type="none" w="med" len="med"/>
-                    </a:lnT>
-                    <a:lnB w="12700" cap="flat" cmpd="sng" algn="ctr">
-                      <a:solidFill>
-                        <a:srgbClr val="E5E7EB"/>
-                      </a:solidFill>
-                      <a:prstDash val="solid"/>
-                      <a:round/>
-                      <a:headEnd type="none" w="med" len="med"/>
-                      <a:tailEnd type="none" w="med" len="med"/>
-                    </a:lnB>
-                    <a:solidFill>
-                      <a:srgbClr val="F7F9FC"/>
-                    </a:solidFill>
-                  </a:tcPr>
-                </a:tc>
-              </a:tr>
-              <a:tr h="201168">
-                <a:tc rowSpan="3">
-                  <a:txBody>
-                    <a:bodyPr/>
-                    <a:lstStyle/>
-                    <a:p>
-                      <a:pPr indent="0" marL="0">
-                        <a:buNone/>
-                      </a:pPr>
-                      <a:r>
-                        <a:rPr lang="en-US" sz="1050" b="1" dirty="0">
-                          <a:solidFill>
-                            <a:srgbClr val="6B7280"/>
-                          </a:solidFill>
-                          <a:latin typeface="맑은 고딕" pitchFamily="34" charset="0"/>
-                          <a:ea typeface="맑은 고딕" pitchFamily="34" charset="-122"/>
-                          <a:cs typeface="맑은 고딕" pitchFamily="34" charset="-120"/>
-                        </a:rPr>
-                        <a:t>5  </a:t>
-                      </a:r>
-                      <a:pPr indent="0" marL="0">
-                        <a:buNone/>
-                      </a:pPr>
-                      <a:r>
-                        <a:rPr lang="en-US" sz="1250" b="1" dirty="0">
-                          <a:solidFill>
-                            <a:srgbClr val="1F2937"/>
-                          </a:solidFill>
-                          <a:latin typeface="맑은 고딕" pitchFamily="34" charset="0"/>
-                          <a:ea typeface="맑은 고딕" pitchFamily="34" charset="-122"/>
-                          <a:cs typeface="맑은 고딕" pitchFamily="34" charset="-120"/>
-                        </a:rPr>
-                        <a:t>비기능 요구사항</a:t>
-                      </a:r>
-                      <a:endParaRPr lang="en-US" sz="1200" dirty="0">
-                        <a:latin typeface="맑은 고딕" charset="0"/>
-                        <a:ea typeface="맑은 고딕" charset="0"/>
-                        <a:cs typeface="맑은 고딕" charset="0"/>
-                      </a:endParaRPr>
-                    </a:p>
-                    <a:p>
-                      <a:pPr indent="0" marL="0">
-                        <a:buNone/>
-                      </a:pPr>
-                      <a:r>
-                        <a:rPr lang="en-US" sz="800" dirty="0">
-                          <a:solidFill>
-                            <a:srgbClr val="A5AEC0"/>
-                          </a:solidFill>
-                          <a:latin typeface="맑은 고딕" pitchFamily="34" charset="0"/>
-                          <a:ea typeface="맑은 고딕" pitchFamily="34" charset="-122"/>
-                          <a:cs typeface="맑은 고딕" pitchFamily="34" charset="-120"/>
-                        </a:rPr>
-                        <a:t>Non-functional</a:t>
-                      </a:r>
-                      <a:endParaRPr lang="en-US" sz="1200" dirty="0">
-                        <a:latin typeface="맑은 고딕" charset="0"/>
-                        <a:ea typeface="맑은 고딕" charset="0"/>
-                        <a:cs typeface="맑은 고딕" charset="0"/>
-                      </a:endParaRPr>
-                    </a:p>
-                  </a:txBody>
-                  <a:tcPr marL="101600" marR="101600" marT="25400" marB="25400" anchor="ctr">
-                    <a:lnL w="12700" cap="flat" cmpd="sng" algn="ctr">
-                      <a:solidFill>
-                        <a:srgbClr val="E5E7EB"/>
-                      </a:solidFill>
-                      <a:prstDash val="solid"/>
-                      <a:round/>
-                      <a:headEnd type="none" w="med" len="med"/>
-                      <a:tailEnd type="none" w="med" len="med"/>
-                    </a:lnL>
-                    <a:lnR w="12700" cap="flat" cmpd="sng" algn="ctr">
-                      <a:solidFill>
-                        <a:srgbClr val="E5E7EB"/>
-                      </a:solidFill>
-                      <a:prstDash val="solid"/>
-                      <a:round/>
-                      <a:headEnd type="none" w="med" len="med"/>
-                      <a:tailEnd type="none" w="med" len="med"/>
-                    </a:lnR>
-                    <a:lnT w="12700" cap="flat" cmpd="sng" algn="ctr">
-                      <a:solidFill>
-                        <a:srgbClr val="E5E7EB"/>
-                      </a:solidFill>
-                      <a:prstDash val="solid"/>
-                      <a:round/>
-                      <a:headEnd type="none" w="med" len="med"/>
-                      <a:tailEnd type="none" w="med" len="med"/>
-                    </a:lnT>
-                    <a:lnB w="12700" cap="flat" cmpd="sng" algn="ctr">
-                      <a:solidFill>
-                        <a:srgbClr val="E5E7EB"/>
-                      </a:solidFill>
-                      <a:prstDash val="solid"/>
-                      <a:round/>
-                      <a:headEnd type="none" w="med" len="med"/>
-                      <a:tailEnd type="none" w="med" len="med"/>
-                    </a:lnB>
-                    <a:solidFill>
-                      <a:srgbClr val="FFFFFF"/>
-                    </a:solidFill>
-                  </a:tcPr>
-                </a:tc>
-                <a:tc>
-                  <a:txBody>
-                    <a:bodyPr/>
-                    <a:lstStyle/>
-                    <a:p>
-                      <a:pPr indent="0" marL="0">
-                        <a:buNone/>
-                      </a:pPr>
-                      <a:r>
-                        <a:rPr lang="en-US" sz="950" b="1" dirty="0">
-                          <a:solidFill>
-                            <a:srgbClr val="1F2937"/>
-                          </a:solidFill>
-                          <a:latin typeface="맑은 고딕" pitchFamily="34" charset="0"/>
-                          <a:ea typeface="맑은 고딕" pitchFamily="34" charset="-122"/>
-                          <a:cs typeface="맑은 고딕" pitchFamily="34" charset="-120"/>
-                        </a:rPr>
-                        <a:t>개요 </a:t>
-                      </a:r>
-                      <a:pPr indent="0" marL="0">
-                        <a:buNone/>
-                      </a:pPr>
-                      <a:r>
-                        <a:rPr lang="en-US" sz="950" dirty="0">
-                          <a:solidFill>
-                            <a:srgbClr val="475569"/>
-                          </a:solidFill>
-                          <a:latin typeface="맑은 고딕" pitchFamily="34" charset="0"/>
-                          <a:ea typeface="맑은 고딕" pitchFamily="34" charset="-122"/>
-                          <a:cs typeface="맑은 고딕" pitchFamily="34" charset="-120"/>
-                        </a:rPr>
-                        <a:t>— 품질 속성(성능·신뢰성·가용성)의 역할·목적</a:t>
-                      </a:r>
-                      <a:endParaRPr lang="en-US" sz="1200" dirty="0">
-                        <a:latin typeface="맑은 고딕" charset="0"/>
-                        <a:ea typeface="맑은 고딕" charset="0"/>
-                        <a:cs typeface="맑은 고딕" charset="0"/>
-                      </a:endParaRPr>
-                    </a:p>
-                  </a:txBody>
-                  <a:tcPr marL="101600" marR="101600" marT="25400" marB="25400" anchor="ctr">
-                    <a:lnL w="12700" cap="flat" cmpd="sng" algn="ctr">
-                      <a:solidFill>
-                        <a:srgbClr val="E5E7EB"/>
-                      </a:solidFill>
-                      <a:prstDash val="solid"/>
-                      <a:round/>
-                      <a:headEnd type="none" w="med" len="med"/>
-                      <a:tailEnd type="none" w="med" len="med"/>
-                    </a:lnL>
-                    <a:lnR w="12700" cap="flat" cmpd="sng" algn="ctr">
-                      <a:solidFill>
-                        <a:srgbClr val="E5E7EB"/>
-                      </a:solidFill>
-                      <a:prstDash val="solid"/>
-                      <a:round/>
-                      <a:headEnd type="none" w="med" len="med"/>
-                      <a:tailEnd type="none" w="med" len="med"/>
-                    </a:lnR>
-                    <a:lnT w="12700" cap="flat" cmpd="sng" algn="ctr">
-                      <a:solidFill>
-                        <a:srgbClr val="E5E7EB"/>
-                      </a:solidFill>
-                      <a:prstDash val="solid"/>
-                      <a:round/>
-                      <a:headEnd type="none" w="med" len="med"/>
-                      <a:tailEnd type="none" w="med" len="med"/>
-                    </a:lnT>
-                    <a:lnB w="12700" cap="flat" cmpd="sng" algn="ctr">
-                      <a:solidFill>
-                        <a:srgbClr val="E5E7EB"/>
-                      </a:solidFill>
-                      <a:prstDash val="solid"/>
-                      <a:round/>
-                      <a:headEnd type="none" w="med" len="med"/>
-                      <a:tailEnd type="none" w="med" len="med"/>
-                    </a:lnB>
-                    <a:solidFill>
-                      <a:srgbClr val="FFFFFF"/>
-                    </a:solidFill>
-                  </a:tcPr>
-                </a:tc>
-                <a:tc>
-                  <a:txBody>
-                    <a:bodyPr/>
-                    <a:lstStyle/>
-                    <a:p>
-                      <a:pPr algn="ctr" indent="0" marL="0">
-                        <a:buNone/>
-                      </a:pPr>
-                      <a:r>
-                        <a:rPr lang="en-US" sz="950" b="1" dirty="0">
-                          <a:solidFill>
-                            <a:srgbClr val="4338CA"/>
-                          </a:solidFill>
-                          <a:latin typeface="맑은 고딕" pitchFamily="34" charset="0"/>
-                          <a:ea typeface="맑은 고딕" pitchFamily="34" charset="-122"/>
-                          <a:cs typeface="맑은 고딕" pitchFamily="34" charset="-120"/>
-                        </a:rPr>
-                        <a:t>AI 초안</a:t>
-                      </a:r>
-                      <a:endParaRPr lang="en-US" sz="950" dirty="0">
-                        <a:latin typeface="맑은 고딕" charset="0"/>
-                        <a:ea typeface="맑은 고딕" charset="0"/>
-                        <a:cs typeface="맑은 고딕" charset="0"/>
-                      </a:endParaRPr>
-                    </a:p>
-                  </a:txBody>
-                  <a:tcPr marL="101600" marR="101600" marT="25400" marB="25400" anchor="ctr">
-                    <a:lnL w="12700" cap="flat" cmpd="sng" algn="ctr">
-                      <a:solidFill>
-                        <a:srgbClr val="E5E7EB"/>
-                      </a:solidFill>
-                      <a:prstDash val="solid"/>
-                      <a:round/>
-                      <a:headEnd type="none" w="med" len="med"/>
-                      <a:tailEnd type="none" w="med" len="med"/>
-                    </a:lnL>
-                    <a:lnR w="12700" cap="flat" cmpd="sng" algn="ctr">
-                      <a:solidFill>
-                        <a:srgbClr val="E5E7EB"/>
-                      </a:solidFill>
-                      <a:prstDash val="solid"/>
-                      <a:round/>
-                      <a:headEnd type="none" w="med" len="med"/>
-                      <a:tailEnd type="none" w="med" len="med"/>
-                    </a:lnR>
-                    <a:lnT w="12700" cap="flat" cmpd="sng" algn="ctr">
-                      <a:solidFill>
-                        <a:srgbClr val="E5E7EB"/>
-                      </a:solidFill>
-                      <a:prstDash val="solid"/>
-                      <a:round/>
-                      <a:headEnd type="none" w="med" len="med"/>
-                      <a:tailEnd type="none" w="med" len="med"/>
-                    </a:lnT>
-                    <a:lnB w="12700" cap="flat" cmpd="sng" algn="ctr">
-                      <a:solidFill>
-                        <a:srgbClr val="E5E7EB"/>
-                      </a:solidFill>
-                      <a:prstDash val="solid"/>
-                      <a:round/>
-                      <a:headEnd type="none" w="med" len="med"/>
-                      <a:tailEnd type="none" w="med" len="med"/>
-                    </a:lnB>
-                    <a:solidFill>
-                      <a:srgbClr val="FFFFFF"/>
-                    </a:solidFill>
-                  </a:tcPr>
-                </a:tc>
-              </a:tr>
-              <a:tr h="201168">
-                <a:tc vMerge="1">
-                  <a:tcPr/>
-                </a:tc>
-                <a:tc>
-                  <a:txBody>
-                    <a:bodyPr/>
-                    <a:lstStyle/>
-                    <a:p>
-                      <a:pPr indent="0" marL="0">
-                        <a:buNone/>
-                      </a:pPr>
-                      <a:r>
-                        <a:rPr lang="en-US" sz="950" b="1" dirty="0">
-                          <a:solidFill>
-                            <a:srgbClr val="1F2937"/>
-                          </a:solidFill>
-                          <a:latin typeface="맑은 고딕" pitchFamily="34" charset="0"/>
-                          <a:ea typeface="맑은 고딕" pitchFamily="34" charset="-122"/>
-                          <a:cs typeface="맑은 고딕" pitchFamily="34" charset="-120"/>
-                        </a:rPr>
-                        <a:t>동작 정의 </a:t>
-                      </a:r>
-                      <a:pPr indent="0" marL="0">
-                        <a:buNone/>
-                      </a:pPr>
-                      <a:r>
-                        <a:rPr lang="en-US" sz="950" dirty="0">
-                          <a:solidFill>
-                            <a:srgbClr val="475569"/>
-                          </a:solidFill>
-                          <a:latin typeface="맑은 고딕" pitchFamily="34" charset="0"/>
-                          <a:ea typeface="맑은 고딕" pitchFamily="34" charset="-122"/>
-                          <a:cs typeface="맑은 고딕" pitchFamily="34" charset="-120"/>
-                        </a:rPr>
-                        <a:t>— 품질 항목마다 선행·후행·시나리오 (기능과 동일 9행)</a:t>
-                      </a:r>
-                      <a:endParaRPr lang="en-US" sz="1200" dirty="0">
-                        <a:latin typeface="맑은 고딕" charset="0"/>
-                        <a:ea typeface="맑은 고딕" charset="0"/>
-                        <a:cs typeface="맑은 고딕" charset="0"/>
-                      </a:endParaRPr>
-                    </a:p>
-                  </a:txBody>
-                  <a:tcPr marL="101600" marR="101600" marT="25400" marB="25400" anchor="ctr">
-                    <a:lnL w="12700" cap="flat" cmpd="sng" algn="ctr">
-                      <a:solidFill>
-                        <a:srgbClr val="E5E7EB"/>
-                      </a:solidFill>
-                      <a:prstDash val="solid"/>
-                      <a:round/>
-                      <a:headEnd type="none" w="med" len="med"/>
-                      <a:tailEnd type="none" w="med" len="med"/>
-                    </a:lnL>
-                    <a:lnR w="12700" cap="flat" cmpd="sng" algn="ctr">
-                      <a:solidFill>
-                        <a:srgbClr val="E5E7EB"/>
-                      </a:solidFill>
-                      <a:prstDash val="solid"/>
-                      <a:round/>
-                      <a:headEnd type="none" w="med" len="med"/>
-                      <a:tailEnd type="none" w="med" len="med"/>
-                    </a:lnR>
-                    <a:lnT w="12700" cap="flat" cmpd="sng" algn="ctr">
-                      <a:solidFill>
-                        <a:srgbClr val="E5E7EB"/>
-                      </a:solidFill>
-                      <a:prstDash val="solid"/>
-                      <a:round/>
-                      <a:headEnd type="none" w="med" len="med"/>
-                      <a:tailEnd type="none" w="med" len="med"/>
-                    </a:lnT>
-                    <a:lnB w="12700" cap="flat" cmpd="sng" algn="ctr">
-                      <a:solidFill>
-                        <a:srgbClr val="E5E7EB"/>
-                      </a:solidFill>
-                      <a:prstDash val="solid"/>
-                      <a:round/>
-                      <a:headEnd type="none" w="med" len="med"/>
-                      <a:tailEnd type="none" w="med" len="med"/>
-                    </a:lnB>
-                    <a:solidFill>
-                      <a:srgbClr val="FFFFFF"/>
-                    </a:solidFill>
-                  </a:tcPr>
-                </a:tc>
-                <a:tc>
-                  <a:txBody>
-                    <a:bodyPr/>
-                    <a:lstStyle/>
-                    <a:p>
-                      <a:pPr algn="ctr" indent="0" marL="0">
-                        <a:buNone/>
-                      </a:pPr>
-                      <a:r>
-                        <a:rPr lang="en-US" sz="950" b="1" dirty="0">
-                          <a:solidFill>
-                            <a:srgbClr val="4338CA"/>
-                          </a:solidFill>
-                          <a:latin typeface="맑은 고딕" pitchFamily="34" charset="0"/>
-                          <a:ea typeface="맑은 고딕" pitchFamily="34" charset="-122"/>
-                          <a:cs typeface="맑은 고딕" pitchFamily="34" charset="-120"/>
-                        </a:rPr>
-                        <a:t>AI 초안</a:t>
-                      </a:r>
-                      <a:endParaRPr lang="en-US" sz="950" dirty="0">
-                        <a:latin typeface="맑은 고딕" charset="0"/>
-                        <a:ea typeface="맑은 고딕" charset="0"/>
-                        <a:cs typeface="맑은 고딕" charset="0"/>
-                      </a:endParaRPr>
-                    </a:p>
-                  </a:txBody>
-                  <a:tcPr marL="101600" marR="101600" marT="25400" marB="25400" anchor="ctr">
-                    <a:lnL w="12700" cap="flat" cmpd="sng" algn="ctr">
-                      <a:solidFill>
-                        <a:srgbClr val="E5E7EB"/>
-                      </a:solidFill>
-                      <a:prstDash val="solid"/>
-                      <a:round/>
-                      <a:headEnd type="none" w="med" len="med"/>
-                      <a:tailEnd type="none" w="med" len="med"/>
-                    </a:lnL>
-                    <a:lnR w="12700" cap="flat" cmpd="sng" algn="ctr">
-                      <a:solidFill>
-                        <a:srgbClr val="E5E7EB"/>
-                      </a:solidFill>
-                      <a:prstDash val="solid"/>
-                      <a:round/>
-                      <a:headEnd type="none" w="med" len="med"/>
-                      <a:tailEnd type="none" w="med" len="med"/>
-                    </a:lnR>
-                    <a:lnT w="12700" cap="flat" cmpd="sng" algn="ctr">
-                      <a:solidFill>
-                        <a:srgbClr val="E5E7EB"/>
-                      </a:solidFill>
-                      <a:prstDash val="solid"/>
-                      <a:round/>
-                      <a:headEnd type="none" w="med" len="med"/>
-                      <a:tailEnd type="none" w="med" len="med"/>
-                    </a:lnT>
-                    <a:lnB w="12700" cap="flat" cmpd="sng" algn="ctr">
-                      <a:solidFill>
-                        <a:srgbClr val="E5E7EB"/>
-                      </a:solidFill>
-                      <a:prstDash val="solid"/>
-                      <a:round/>
-                      <a:headEnd type="none" w="med" len="med"/>
-                      <a:tailEnd type="none" w="med" len="med"/>
-                    </a:lnB>
-                    <a:solidFill>
-                      <a:srgbClr val="FFFFFF"/>
-                    </a:solidFill>
-                  </a:tcPr>
-                </a:tc>
-              </a:tr>
-              <a:tr h="201168">
-                <a:tc vMerge="1">
-                  <a:tcPr/>
-                </a:tc>
-                <a:tc>
-                  <a:txBody>
-                    <a:bodyPr/>
-                    <a:lstStyle/>
-                    <a:p>
-                      <a:pPr indent="0" marL="0">
-                        <a:buNone/>
-                      </a:pPr>
-                      <a:r>
-                        <a:rPr lang="en-US" sz="950" b="1" dirty="0">
-                          <a:solidFill>
-                            <a:srgbClr val="1F2937"/>
-                          </a:solidFill>
-                          <a:latin typeface="맑은 고딕" pitchFamily="34" charset="0"/>
-                          <a:ea typeface="맑은 고딕" pitchFamily="34" charset="-122"/>
-                          <a:cs typeface="맑은 고딕" pitchFamily="34" charset="-120"/>
-                        </a:rPr>
-                        <a:t>제약사항 </a:t>
-                      </a:r>
-                      <a:pPr indent="0" marL="0">
-                        <a:buNone/>
-                      </a:pPr>
-                      <a:r>
-                        <a:rPr lang="en-US" sz="950" dirty="0">
-                          <a:solidFill>
-                            <a:srgbClr val="475569"/>
-                          </a:solidFill>
-                          <a:latin typeface="맑은 고딕" pitchFamily="34" charset="0"/>
-                          <a:ea typeface="맑은 고딕" pitchFamily="34" charset="-122"/>
-                          <a:cs typeface="맑은 고딕" pitchFamily="34" charset="-120"/>
-                        </a:rPr>
-                        <a:t>— 측정 기준·목표치</a:t>
-                      </a:r>
-                      <a:endParaRPr lang="en-US" sz="1200" dirty="0">
-                        <a:latin typeface="맑은 고딕" charset="0"/>
-                        <a:ea typeface="맑은 고딕" charset="0"/>
-                        <a:cs typeface="맑은 고딕" charset="0"/>
-                      </a:endParaRPr>
-                    </a:p>
-                  </a:txBody>
-                  <a:tcPr marL="101600" marR="101600" marT="25400" marB="25400" anchor="ctr">
-                    <a:lnL w="12700" cap="flat" cmpd="sng" algn="ctr">
-                      <a:solidFill>
-                        <a:srgbClr val="E5E7EB"/>
-                      </a:solidFill>
-                      <a:prstDash val="solid"/>
-                      <a:round/>
-                      <a:headEnd type="none" w="med" len="med"/>
-                      <a:tailEnd type="none" w="med" len="med"/>
-                    </a:lnL>
-                    <a:lnR w="12700" cap="flat" cmpd="sng" algn="ctr">
-                      <a:solidFill>
-                        <a:srgbClr val="E5E7EB"/>
-                      </a:solidFill>
-                      <a:prstDash val="solid"/>
-                      <a:round/>
-                      <a:headEnd type="none" w="med" len="med"/>
-                      <a:tailEnd type="none" w="med" len="med"/>
-                    </a:lnR>
-                    <a:lnT w="12700" cap="flat" cmpd="sng" algn="ctr">
-                      <a:solidFill>
-                        <a:srgbClr val="E5E7EB"/>
-                      </a:solidFill>
-                      <a:prstDash val="solid"/>
-                      <a:round/>
-                      <a:headEnd type="none" w="med" len="med"/>
-                      <a:tailEnd type="none" w="med" len="med"/>
-                    </a:lnT>
-                    <a:lnB w="12700" cap="flat" cmpd="sng" algn="ctr">
-                      <a:solidFill>
-                        <a:srgbClr val="E5E7EB"/>
-                      </a:solidFill>
-                      <a:prstDash val="solid"/>
-                      <a:round/>
-                      <a:headEnd type="none" w="med" len="med"/>
-                      <a:tailEnd type="none" w="med" len="med"/>
-                    </a:lnB>
-                    <a:solidFill>
-                      <a:srgbClr val="FFFFFF"/>
-                    </a:solidFill>
-                  </a:tcPr>
-                </a:tc>
-                <a:tc>
-                  <a:txBody>
-                    <a:bodyPr/>
-                    <a:lstStyle/>
-                    <a:p>
-                      <a:pPr algn="ctr" indent="0" marL="0">
-                        <a:buNone/>
-                      </a:pPr>
-                      <a:r>
-                        <a:rPr lang="en-US" sz="950" b="1" dirty="0">
-                          <a:solidFill>
-                            <a:srgbClr val="4338CA"/>
-                          </a:solidFill>
-                          <a:latin typeface="맑은 고딕" pitchFamily="34" charset="0"/>
-                          <a:ea typeface="맑은 고딕" pitchFamily="34" charset="-122"/>
-                          <a:cs typeface="맑은 고딕" pitchFamily="34" charset="-120"/>
-                        </a:rPr>
-                        <a:t>AI 초안</a:t>
-                      </a:r>
-                      <a:endParaRPr lang="en-US" sz="950" dirty="0">
+                      <a:endParaRPr lang="en-US" sz="1000" dirty="0">
                         <a:latin typeface="맑은 고딕" charset="0"/>
                         <a:ea typeface="맑은 고딕" charset="0"/>
                         <a:cs typeface="맑은 고딕" charset="0"/>
@@ -6710,7 +6949,7 @@
                 <a:ea typeface="맑은 고딕" pitchFamily="34" charset="-122"/>
                 <a:cs typeface="맑은 고딕" pitchFamily="34" charset="-120"/>
               </a:rPr>
-              <a:t>산출물 5종 구조 한눈에</a:t>
+              <a:t>협업 방식 · 사람 초벌 → AI 완성</a:t>
             </a:r>
             <a:endParaRPr lang="en-US" sz="3000" dirty="0"/>
           </a:p>
@@ -6759,9 +6998,62 @@
           </a:p>
         </p:txBody>
       </p:sp>
+      <p:sp>
+        <p:nvSpPr>
+          <p:cNvPr id="5" name="Text 3"/>
+          <p:cNvSpPr/>
+          <p:nvPr/>
+        </p:nvSpPr>
+        <p:spPr>
+          <a:xfrm>
+            <a:off x="566928" y="1719072"/>
+            <a:ext cx="11064240" cy="365760"/>
+          </a:xfrm>
+          <a:prstGeom prst="rect">
+            <a:avLst/>
+          </a:prstGeom>
+          <a:noFill/>
+          <a:ln/>
+        </p:spPr>
+        <p:txBody>
+          <a:bodyPr wrap="square" lIns="0" tIns="0" rIns="0" bIns="0" rtlCol="0" anchor="ctr"/>
+          <a:lstStyle/>
+          <a:p>
+            <a:pPr indent="0" marL="0">
+              <a:buNone/>
+            </a:pPr>
+            <a:r>
+              <a:rPr lang="en-US" sz="1400" b="1" dirty="0">
+                <a:solidFill>
+                  <a:srgbClr val="1F2937"/>
+                </a:solidFill>
+                <a:latin typeface="맑은 고딕" pitchFamily="34" charset="0"/>
+                <a:ea typeface="맑은 고딕" pitchFamily="34" charset="-122"/>
+                <a:cs typeface="맑은 고딕" pitchFamily="34" charset="-120"/>
+              </a:rPr>
+              <a:t>AI가 모르는 “현재 시스템 상태”가 필요한 항목</a:t>
+            </a:r>
+            <a:pPr indent="0" marL="0">
+              <a:buNone/>
+            </a:pPr>
+            <a:r>
+              <a:rPr lang="en-US" sz="1400" dirty="0">
+                <a:solidFill>
+                  <a:srgbClr val="6B7280"/>
+                </a:solidFill>
+                <a:latin typeface="맑은 고딕" pitchFamily="34" charset="0"/>
+                <a:ea typeface="맑은 고딕" pitchFamily="34" charset="-122"/>
+                <a:cs typeface="맑은 고딕" pitchFamily="34" charset="-120"/>
+              </a:rPr>
+              <a:t> — 사람이 아는 사실을 대충 메모하면, AI가 그 초벌을 근거로 문서 양식에 맞춰 완성한다.</a:t>
+            </a:r>
+            <a:endParaRPr lang="en-US" sz="1400" dirty="0"/>
+          </a:p>
+        </p:txBody>
+      </p:sp>
       <p:pic>
         <p:nvPicPr>
-          <p:cNvPr id="5" name="Image 0" descr="/home/user/semes-superrookie/docs/img/ppt-derive-struct.png">    </p:cNvPr>
+          <p:cNvPr id="6" name="Image 0" descr="/home/user/semes-superrookie/docs/img/ppt-collab-human.png">    </p:cNvPr>
           <p:cNvPicPr>
             <a:picLocks noChangeAspect="1"/>
           </p:cNvPicPr>
@@ -6775,53 +7067,14 @@
         </p:blipFill>
         <p:spPr>
           <a:xfrm>
-            <a:off x="196596" y="2057400"/>
-            <a:ext cx="11795760" cy="3341218"/>
+            <a:off x="475488" y="2331720"/>
+            <a:ext cx="11247120" cy="3535985"/>
           </a:xfrm>
           <a:prstGeom prst="rect">
             <a:avLst/>
           </a:prstGeom>
         </p:spPr>
       </p:pic>
-      <p:sp>
-        <p:nvSpPr>
-          <p:cNvPr id="6" name="Text 3"/>
-          <p:cNvSpPr/>
-          <p:nvPr/>
-        </p:nvSpPr>
-        <p:spPr>
-          <a:xfrm>
-            <a:off x="566928" y="5806440"/>
-            <a:ext cx="11064240" cy="365760"/>
-          </a:xfrm>
-          <a:prstGeom prst="rect">
-            <a:avLst/>
-          </a:prstGeom>
-          <a:noFill/>
-          <a:ln/>
-        </p:spPr>
-        <p:txBody>
-          <a:bodyPr wrap="square" lIns="0" tIns="0" rIns="0" bIns="0" rtlCol="0" anchor="ctr"/>
-          <a:lstStyle/>
-          <a:p>
-            <a:pPr algn="ctr" indent="0" marL="0">
-              <a:buNone/>
-            </a:pPr>
-            <a:r>
-              <a:rPr lang="en-US" sz="1250" dirty="0">
-                <a:solidFill>
-                  <a:srgbClr val="6B7280"/>
-                </a:solidFill>
-                <a:latin typeface="맑은 고딕" pitchFamily="34" charset="0"/>
-                <a:ea typeface="맑은 고딕" pitchFamily="34" charset="-122"/>
-                <a:cs typeface="맑은 고딕" pitchFamily="34" charset="-120"/>
-              </a:rPr>
-              <a:t>기능·비기능 요구사항의 “동작 정의”(기본·변형·예외 × 선행·후행·시나리오, 9행)가 AI 도출의 핵심</a:t>
-            </a:r>
-            <a:endParaRPr lang="en-US" sz="1250" dirty="0"/>
-          </a:p>
-        </p:txBody>
-      </p:sp>
     </p:spTree>
   </p:cSld>
   <p:clrMapOvr>
@@ -6887,7 +7140,7 @@
                 <a:ea typeface="맑은 고딕" pitchFamily="34" charset="-122"/>
                 <a:cs typeface="맑은 고딕" pitchFamily="34" charset="-120"/>
               </a:rPr>
-              <a:t>핵심 기능 3 · 산출물 관리 ①</a:t>
+              <a:t>핵심 기능 2 · 산출물 도출</a:t>
             </a:r>
             <a:endParaRPr lang="en-US" sz="1200" dirty="0"/>
           </a:p>
@@ -6926,7 +7179,7 @@
                 <a:ea typeface="맑은 고딕" pitchFamily="34" charset="-122"/>
                 <a:cs typeface="맑은 고딕" pitchFamily="34" charset="-120"/>
               </a:rPr>
-              <a:t>연결 관리 (추적성)</a:t>
+              <a:t>협업 방식 · AI 초안 → 사람 확정</a:t>
             </a:r>
             <a:endParaRPr lang="en-US" sz="3000" dirty="0"/>
           </a:p>
@@ -6983,8 +7236,8 @@
         </p:nvSpPr>
         <p:spPr>
           <a:xfrm>
-            <a:off x="566928" y="1627632"/>
-            <a:ext cx="11064240" cy="320040"/>
+            <a:off x="566928" y="1719072"/>
+            <a:ext cx="11064240" cy="365760"/>
           </a:xfrm>
           <a:prstGeom prst="rect">
             <a:avLst/>
@@ -7008,7 +7261,7 @@
                 <a:ea typeface="맑은 고딕" pitchFamily="34" charset="-122"/>
                 <a:cs typeface="맑은 고딕" pitchFamily="34" charset="-120"/>
               </a:rPr>
-              <a:t>① 연결 관리 </a:t>
+              <a:t>고객 요구서만으로 채울 수 있는 항목</a:t>
             </a:r>
             <a:pPr indent="0" marL="0">
               <a:buNone/>
@@ -7022,7 +7275,7 @@
                 <a:ea typeface="맑은 고딕" pitchFamily="34" charset="-122"/>
                 <a:cs typeface="맑은 고딕" pitchFamily="34" charset="-120"/>
               </a:rPr>
-              <a:t>— 요구사항 하나에 어떤 산출물(티켓·SWVOC·Function Requirement·Detail Design)이 물려 있는지 한눈에 (양방향 조회)</a:t>
+              <a:t> — AI가 요구사항 기반으로 초안을 완성하면, 사람은 판단이 필요한 값만 수정해 확정한다.</a:t>
             </a:r>
             <a:endParaRPr lang="en-US" sz="1400" dirty="0"/>
           </a:p>
@@ -7030,7 +7283,7 @@
       </p:sp>
       <p:pic>
         <p:nvPicPr>
-          <p:cNvPr id="6" name="Image 0" descr="/home/user/semes-superrookie/docs/img/ppt-trace-1.png">    </p:cNvPr>
+          <p:cNvPr id="6" name="Image 0" descr="/home/user/semes-superrookie/docs/img/ppt-collab-ai.png">    </p:cNvPr>
           <p:cNvPicPr>
             <a:picLocks noChangeAspect="1"/>
           </p:cNvPicPr>
@@ -7044,53 +7297,14 @@
         </p:blipFill>
         <p:spPr>
           <a:xfrm>
-            <a:off x="379476" y="2468880"/>
-            <a:ext cx="11430000" cy="2988259"/>
+            <a:off x="475488" y="2331720"/>
+            <a:ext cx="11247120" cy="3444545"/>
           </a:xfrm>
           <a:prstGeom prst="rect">
             <a:avLst/>
           </a:prstGeom>
         </p:spPr>
       </p:pic>
-      <p:sp>
-        <p:nvSpPr>
-          <p:cNvPr id="7" name="Text 4"/>
-          <p:cNvSpPr/>
-          <p:nvPr/>
-        </p:nvSpPr>
-        <p:spPr>
-          <a:xfrm>
-            <a:off x="566928" y="5806440"/>
-            <a:ext cx="11064240" cy="365760"/>
-          </a:xfrm>
-          <a:prstGeom prst="rect">
-            <a:avLst/>
-          </a:prstGeom>
-          <a:noFill/>
-          <a:ln/>
-        </p:spPr>
-        <p:txBody>
-          <a:bodyPr wrap="square" lIns="0" tIns="0" rIns="0" bIns="0" rtlCol="0" anchor="ctr"/>
-          <a:lstStyle/>
-          <a:p>
-            <a:pPr algn="ctr" indent="0" marL="0">
-              <a:buNone/>
-            </a:pPr>
-            <a:r>
-              <a:rPr lang="en-US" sz="1250" dirty="0">
-                <a:solidFill>
-                  <a:srgbClr val="6B7280"/>
-                </a:solidFill>
-                <a:latin typeface="맑은 고딕" pitchFamily="34" charset="0"/>
-                <a:ea typeface="맑은 고딕" pitchFamily="34" charset="-122"/>
-                <a:cs typeface="맑은 고딕" pitchFamily="34" charset="-120"/>
-              </a:rPr>
-              <a:t>요구사항 1건 ↔ 기능별 티켓 3개, 각 티켓 아래 산출물 3종을 실제 Jira ID로 연결</a:t>
-            </a:r>
-            <a:endParaRPr lang="en-US" sz="1250" dirty="0"/>
-          </a:p>
-        </p:txBody>
-      </p:sp>
     </p:spTree>
   </p:cSld>
   <p:clrMapOvr>
@@ -7156,7 +7370,7 @@
                 <a:ea typeface="맑은 고딕" pitchFamily="34" charset="-122"/>
                 <a:cs typeface="맑은 고딕" pitchFamily="34" charset="-120"/>
               </a:rPr>
-              <a:t>핵심 기능 3 · 산출물 관리 ②</a:t>
+              <a:t>핵심 기능 2 · 산출물 도출</a:t>
             </a:r>
             <a:endParaRPr lang="en-US" sz="1200" dirty="0"/>
           </a:p>
@@ -7195,7 +7409,7 @@
                 <a:ea typeface="맑은 고딕" pitchFamily="34" charset="-122"/>
                 <a:cs typeface="맑은 고딕" pitchFamily="34" charset="-120"/>
               </a:rPr>
-              <a:t>변경 추적 (변경 영향 분석)</a:t>
+              <a:t>산출물 5종 구조 한눈에</a:t>
             </a:r>
             <a:endParaRPr lang="en-US" sz="3000" dirty="0"/>
           </a:p>
@@ -7244,62 +7458,9 @@
           </a:p>
         </p:txBody>
       </p:sp>
-      <p:sp>
-        <p:nvSpPr>
-          <p:cNvPr id="5" name="Text 3"/>
-          <p:cNvSpPr/>
-          <p:nvPr/>
-        </p:nvSpPr>
-        <p:spPr>
-          <a:xfrm>
-            <a:off x="566928" y="1371600"/>
-            <a:ext cx="11064240" cy="320040"/>
-          </a:xfrm>
-          <a:prstGeom prst="rect">
-            <a:avLst/>
-          </a:prstGeom>
-          <a:noFill/>
-          <a:ln/>
-        </p:spPr>
-        <p:txBody>
-          <a:bodyPr wrap="square" lIns="0" tIns="0" rIns="0" bIns="0" rtlCol="0" anchor="ctr"/>
-          <a:lstStyle/>
-          <a:p>
-            <a:pPr indent="0" marL="0">
-              <a:buNone/>
-            </a:pPr>
-            <a:r>
-              <a:rPr lang="en-US" sz="1400" b="1" dirty="0">
-                <a:solidFill>
-                  <a:srgbClr val="1F2937"/>
-                </a:solidFill>
-                <a:latin typeface="맑은 고딕" pitchFamily="34" charset="0"/>
-                <a:ea typeface="맑은 고딕" pitchFamily="34" charset="-122"/>
-                <a:cs typeface="맑은 고딕" pitchFamily="34" charset="-120"/>
-              </a:rPr>
-              <a:t>② 변경 추적 </a:t>
-            </a:r>
-            <a:pPr indent="0" marL="0">
-              <a:buNone/>
-            </a:pPr>
-            <a:r>
-              <a:rPr lang="en-US" sz="1400" dirty="0">
-                <a:solidFill>
-                  <a:srgbClr val="6B7280"/>
-                </a:solidFill>
-                <a:latin typeface="맑은 고딕" pitchFamily="34" charset="0"/>
-                <a:ea typeface="맑은 고딕" pitchFamily="34" charset="-122"/>
-                <a:cs typeface="맑은 고딕" pitchFamily="34" charset="-120"/>
-              </a:rPr>
-              <a:t>— 요구사항을 수정하면, 그 문장을 근거로 만든 산출물을 자동으로 찾아 알림</a:t>
-            </a:r>
-            <a:endParaRPr lang="en-US" sz="1400" dirty="0"/>
-          </a:p>
-        </p:txBody>
-      </p:sp>
       <p:pic>
         <p:nvPicPr>
-          <p:cNvPr id="6" name="Image 0" descr="/home/user/semes-superrookie/docs/img/ppt-trace-edit.png">    </p:cNvPr>
+          <p:cNvPr id="5" name="Image 0" descr="/home/user/semes-superrookie/docs/img/ppt-derive-struct.png">    </p:cNvPr>
           <p:cNvPicPr>
             <a:picLocks noChangeAspect="1"/>
           </p:cNvPicPr>
@@ -7313,8 +7474,8 @@
         </p:blipFill>
         <p:spPr>
           <a:xfrm>
-            <a:off x="1065276" y="1737360"/>
-            <a:ext cx="10058400" cy="2779776"/>
+            <a:off x="196596" y="2057400"/>
+            <a:ext cx="11795760" cy="3341218"/>
           </a:xfrm>
           <a:prstGeom prst="rect">
             <a:avLst/>
@@ -7323,14 +7484,14 @@
       </p:pic>
       <p:sp>
         <p:nvSpPr>
-          <p:cNvPr id="7" name="Text 4"/>
-          <p:cNvSpPr/>
-          <p:nvPr/>
-        </p:nvSpPr>
-        <p:spPr>
-          <a:xfrm>
-            <a:off x="566928" y="4535424"/>
-            <a:ext cx="11064240" cy="292608"/>
+          <p:cNvPr id="6" name="Text 3"/>
+          <p:cNvSpPr/>
+          <p:nvPr/>
+        </p:nvSpPr>
+        <p:spPr>
+          <a:xfrm>
+            <a:off x="566928" y="5806440"/>
+            <a:ext cx="11064240" cy="365760"/>
           </a:xfrm>
           <a:prstGeom prst="rect">
             <a:avLst/>
@@ -7346,44 +7507,20 @@
               <a:buNone/>
             </a:pPr>
             <a:r>
-              <a:rPr lang="en-US" sz="1300" b="1" dirty="0">
-                <a:solidFill>
-                  <a:srgbClr val="6366F1"/>
-                </a:solidFill>
-                <a:latin typeface="맑은 고딕" pitchFamily="34" charset="0"/>
-                <a:ea typeface="맑은 고딕" pitchFamily="34" charset="-122"/>
-                <a:cs typeface="맑은 고딕" pitchFamily="34" charset="-120"/>
-              </a:rPr>
-              <a:t>↓  저장 시 자동 추적</a:t>
-            </a:r>
-            <a:endParaRPr lang="en-US" sz="1300" dirty="0"/>
-          </a:p>
-        </p:txBody>
-      </p:sp>
-      <p:pic>
-        <p:nvPicPr>
-          <p:cNvPr id="8" name="Image 1" descr="/home/user/semes-superrookie/docs/img/ppt-trace-2.png">    </p:cNvPr>
-          <p:cNvPicPr>
-            <a:picLocks noChangeAspect="1"/>
-          </p:cNvPicPr>
-          <p:nvPr/>
-        </p:nvPicPr>
-        <p:blipFill>
-          <a:blip r:embed="rId2"/>
-          <a:stretch>
-            <a:fillRect/>
-          </a:stretch>
-        </p:blipFill>
-        <p:spPr>
-          <a:xfrm>
-            <a:off x="1065276" y="4882896"/>
-            <a:ext cx="10058400" cy="1559052"/>
-          </a:xfrm>
-          <a:prstGeom prst="rect">
-            <a:avLst/>
-          </a:prstGeom>
-        </p:spPr>
-      </p:pic>
+              <a:rPr lang="en-US" sz="1250" dirty="0">
+                <a:solidFill>
+                  <a:srgbClr val="6B7280"/>
+                </a:solidFill>
+                <a:latin typeface="맑은 고딕" pitchFamily="34" charset="0"/>
+                <a:ea typeface="맑은 고딕" pitchFamily="34" charset="-122"/>
+                <a:cs typeface="맑은 고딕" pitchFamily="34" charset="-120"/>
+              </a:rPr>
+              <a:t>기능·비기능 요구사항의 “동작 정의”(기본·변형·예외 × 선행·후행·시나리오, 9행)가 AI 도출의 핵심</a:t>
+            </a:r>
+            <a:endParaRPr lang="en-US" sz="1250" dirty="0"/>
+          </a:p>
+        </p:txBody>
+      </p:sp>
     </p:spTree>
   </p:cSld>
   <p:clrMapOvr>
@@ -7449,7 +7586,7 @@
                 <a:ea typeface="맑은 고딕" pitchFamily="34" charset="-122"/>
                 <a:cs typeface="맑은 고딕" pitchFamily="34" charset="-120"/>
               </a:rPr>
-              <a:t>AI</a:t>
+              <a:t>핵심 기능 3 · 산출물 관리 ①</a:t>
             </a:r>
             <a:endParaRPr lang="en-US" sz="1200" dirty="0"/>
           </a:p>
@@ -7488,7 +7625,7 @@
                 <a:ea typeface="맑은 고딕" pitchFamily="34" charset="-122"/>
                 <a:cs typeface="맑은 고딕" pitchFamily="34" charset="-120"/>
               </a:rPr>
-              <a:t>AI — 두 엔진 비교</a:t>
+              <a:t>연결 관리 (추적성)</a:t>
             </a:r>
             <a:endParaRPr lang="en-US" sz="3000" dirty="0"/>
           </a:p>
@@ -7496,30 +7633,46 @@
       </p:sp>
       <p:sp>
         <p:nvSpPr>
-          <p:cNvPr id="4" name="Shape 2"/>
-          <p:cNvSpPr/>
-          <p:nvPr/>
-        </p:nvSpPr>
-        <p:spPr>
-          <a:xfrm>
-            <a:off x="566928" y="1783080"/>
-            <a:ext cx="5440680" cy="2697480"/>
+          <p:cNvPr id="4" name="Text 2"/>
+          <p:cNvSpPr/>
+          <p:nvPr/>
+        </p:nvSpPr>
+        <p:spPr>
+          <a:xfrm>
+            <a:off x="10424160" y="822960"/>
+            <a:ext cx="1737360" cy="310896"/>
           </a:xfrm>
           <a:prstGeom prst="roundRect">
             <a:avLst>
-              <a:gd name="adj" fmla="val 3390"/>
+              <a:gd name="adj" fmla="val 47059"/>
             </a:avLst>
           </a:prstGeom>
           <a:solidFill>
-            <a:srgbClr val="EEF2FF"/>
+            <a:srgbClr val="FEF3C7"/>
           </a:solidFill>
-          <a:ln w="12700">
-            <a:solidFill>
-              <a:srgbClr val="C7D2FE"/>
-            </a:solidFill>
-            <a:prstDash val="solid"/>
-          </a:ln>
-        </p:spPr>
+          <a:ln/>
+        </p:spPr>
+        <p:txBody>
+          <a:bodyPr wrap="square" lIns="0" tIns="0" rIns="0" bIns="0" rtlCol="0" anchor="ctr"/>
+          <a:lstStyle/>
+          <a:p>
+            <a:pPr algn="ctr" indent="0" marL="0">
+              <a:buNone/>
+            </a:pPr>
+            <a:r>
+              <a:rPr lang="en-US" sz="1100" b="1" dirty="0">
+                <a:solidFill>
+                  <a:srgbClr val="B45309"/>
+                </a:solidFill>
+                <a:latin typeface="맑은 고딕" pitchFamily="34" charset="0"/>
+                <a:ea typeface="맑은 고딕" pitchFamily="34" charset="-122"/>
+                <a:cs typeface="맑은 고딕" pitchFamily="34" charset="-120"/>
+              </a:rPr>
+              <a:t>개발 예정</a:t>
+            </a:r>
+            <a:endParaRPr lang="en-US" sz="1100" dirty="0"/>
+          </a:p>
+        </p:txBody>
       </p:sp>
       <p:sp>
         <p:nvSpPr>
@@ -7529,8 +7682,8 @@
         </p:nvSpPr>
         <p:spPr>
           <a:xfrm>
-            <a:off x="886968" y="2011680"/>
-            <a:ext cx="4846320" cy="457200"/>
+            <a:off x="566928" y="1627632"/>
+            <a:ext cx="11064240" cy="320040"/>
           </a:xfrm>
           <a:prstGeom prst="rect">
             <a:avLst/>
@@ -7546,30 +7699,68 @@
               <a:buNone/>
             </a:pPr>
             <a:r>
-              <a:rPr lang="en-US" sz="1900" b="1" dirty="0">
-                <a:solidFill>
-                  <a:srgbClr val="6366F1"/>
-                </a:solidFill>
-                <a:latin typeface="맑은 고딕" pitchFamily="34" charset="0"/>
-                <a:ea typeface="맑은 고딕" pitchFamily="34" charset="-122"/>
-                <a:cs typeface="맑은 고딕" pitchFamily="34" charset="-120"/>
-              </a:rPr>
-              <a:t>로컬 Qwen3-8B</a:t>
-            </a:r>
-            <a:endParaRPr lang="en-US" sz="1900" dirty="0"/>
-          </a:p>
-        </p:txBody>
-      </p:sp>
-      <p:sp>
-        <p:nvSpPr>
-          <p:cNvPr id="6" name="Text 4"/>
-          <p:cNvSpPr/>
-          <p:nvPr/>
-        </p:nvSpPr>
-        <p:spPr>
-          <a:xfrm>
-            <a:off x="932688" y="2606040"/>
-            <a:ext cx="4754880" cy="1737360"/>
+              <a:rPr lang="en-US" sz="1400" b="1" dirty="0">
+                <a:solidFill>
+                  <a:srgbClr val="1F2937"/>
+                </a:solidFill>
+                <a:latin typeface="맑은 고딕" pitchFamily="34" charset="0"/>
+                <a:ea typeface="맑은 고딕" pitchFamily="34" charset="-122"/>
+                <a:cs typeface="맑은 고딕" pitchFamily="34" charset="-120"/>
+              </a:rPr>
+              <a:t>① 연결 관리 </a:t>
+            </a:r>
+            <a:pPr indent="0" marL="0">
+              <a:buNone/>
+            </a:pPr>
+            <a:r>
+              <a:rPr lang="en-US" sz="1400" dirty="0">
+                <a:solidFill>
+                  <a:srgbClr val="6B7280"/>
+                </a:solidFill>
+                <a:latin typeface="맑은 고딕" pitchFamily="34" charset="0"/>
+                <a:ea typeface="맑은 고딕" pitchFamily="34" charset="-122"/>
+                <a:cs typeface="맑은 고딕" pitchFamily="34" charset="-120"/>
+              </a:rPr>
+              <a:t>— 요구사항 하나에 어떤 산출물(티켓·SWVOC·Function Requirement·Detail Design)이 물려 있는지 한눈에 (양방향 조회)</a:t>
+            </a:r>
+            <a:endParaRPr lang="en-US" sz="1400" dirty="0"/>
+          </a:p>
+        </p:txBody>
+      </p:sp>
+      <p:pic>
+        <p:nvPicPr>
+          <p:cNvPr id="6" name="Image 0" descr="/home/user/semes-superrookie/docs/img/ppt-trace-1.png">    </p:cNvPr>
+          <p:cNvPicPr>
+            <a:picLocks noChangeAspect="1"/>
+          </p:cNvPicPr>
+          <p:nvPr/>
+        </p:nvPicPr>
+        <p:blipFill>
+          <a:blip r:embed="rId1"/>
+          <a:stretch>
+            <a:fillRect/>
+          </a:stretch>
+        </p:blipFill>
+        <p:spPr>
+          <a:xfrm>
+            <a:off x="379476" y="2468880"/>
+            <a:ext cx="11430000" cy="2988259"/>
+          </a:xfrm>
+          <a:prstGeom prst="rect">
+            <a:avLst/>
+          </a:prstGeom>
+        </p:spPr>
+      </p:pic>
+      <p:sp>
+        <p:nvSpPr>
+          <p:cNvPr id="7" name="Text 4"/>
+          <p:cNvSpPr/>
+          <p:nvPr/>
+        </p:nvSpPr>
+        <p:spPr>
+          <a:xfrm>
+            <a:off x="566928" y="5806440"/>
+            <a:ext cx="11064240" cy="365760"/>
           </a:xfrm>
           <a:prstGeom prst="rect">
             <a:avLst/>
@@ -7581,357 +7772,19 @@
           <a:bodyPr wrap="square" lIns="0" tIns="0" rIns="0" bIns="0" rtlCol="0" anchor="ctr"/>
           <a:lstStyle/>
           <a:p>
-            <a:pPr marL="342900" indent="-342900">
-              <a:spcAft>
-                <a:spcPts val="700"/>
-              </a:spcAft>
-              <a:buSzPct val="100000"/>
-              <a:buChar char="•"/>
-            </a:pPr>
-            <a:r>
-              <a:rPr lang="en-US" sz="1300" dirty="0">
-                <a:solidFill>
-                  <a:srgbClr val="1F2937"/>
-                </a:solidFill>
-                <a:latin typeface="맑은 고딕" pitchFamily="34" charset="0"/>
-                <a:ea typeface="맑은 고딕" pitchFamily="34" charset="-122"/>
-                <a:cs typeface="맑은 고딕" pitchFamily="34" charset="-120"/>
-              </a:rPr>
-              <a:t>내 워크스테이션(P4000 8GB)에서 직접</a:t>
-            </a:r>
-            <a:endParaRPr lang="en-US" sz="1300" dirty="0"/>
-          </a:p>
-          <a:p>
-            <a:pPr marL="342900" indent="-342900">
-              <a:spcAft>
-                <a:spcPts val="700"/>
-              </a:spcAft>
-              <a:buSzPct val="100000"/>
-              <a:buChar char="•"/>
-            </a:pPr>
-            <a:r>
-              <a:rPr lang="en-US" sz="1300" dirty="0">
-                <a:solidFill>
-                  <a:srgbClr val="1F2937"/>
-                </a:solidFill>
-                <a:latin typeface="맑은 고딕" pitchFamily="34" charset="0"/>
-                <a:ea typeface="맑은 고딕" pitchFamily="34" charset="-122"/>
-                <a:cs typeface="맑은 고딕" pitchFamily="34" charset="-120"/>
-              </a:rPr>
-              <a:t>8B 모델 · GGUF 양자화 Q5_K_M(≈5.85GB)</a:t>
-            </a:r>
-            <a:endParaRPr lang="en-US" sz="1300" dirty="0"/>
-          </a:p>
-          <a:p>
-            <a:pPr marL="342900" indent="-342900">
-              <a:spcAft>
-                <a:spcPts val="700"/>
-              </a:spcAft>
-              <a:buSzPct val="100000"/>
-              <a:buChar char="•"/>
-            </a:pPr>
-            <a:r>
-              <a:rPr lang="en-US" sz="1300" dirty="0">
-                <a:solidFill>
-                  <a:srgbClr val="1F2937"/>
-                </a:solidFill>
-                <a:latin typeface="맑은 고딕" pitchFamily="34" charset="0"/>
-                <a:ea typeface="맑은 고딕" pitchFamily="34" charset="-122"/>
-                <a:cs typeface="맑은 고딕" pitchFamily="34" charset="-120"/>
-              </a:rPr>
-              <a:t>오프라인 자립 · 한국어 강점</a:t>
-            </a:r>
-            <a:endParaRPr lang="en-US" sz="1300" dirty="0"/>
-          </a:p>
-        </p:txBody>
-      </p:sp>
-      <p:sp>
-        <p:nvSpPr>
-          <p:cNvPr id="7" name="Shape 5"/>
-          <p:cNvSpPr/>
-          <p:nvPr/>
-        </p:nvSpPr>
-        <p:spPr>
-          <a:xfrm>
-            <a:off x="6327648" y="1783080"/>
-            <a:ext cx="5440680" cy="2697480"/>
-          </a:xfrm>
-          <a:prstGeom prst="roundRect">
-            <a:avLst>
-              <a:gd name="adj" fmla="val 3390"/>
-            </a:avLst>
-          </a:prstGeom>
-          <a:solidFill>
-            <a:srgbClr val="F5F3FF"/>
-          </a:solidFill>
-          <a:ln w="12700">
-            <a:solidFill>
-              <a:srgbClr val="DDD6FE"/>
-            </a:solidFill>
-            <a:prstDash val="solid"/>
-          </a:ln>
-        </p:spPr>
-      </p:sp>
-      <p:sp>
-        <p:nvSpPr>
-          <p:cNvPr id="8" name="Text 6"/>
-          <p:cNvSpPr/>
-          <p:nvPr/>
-        </p:nvSpPr>
-        <p:spPr>
-          <a:xfrm>
-            <a:off x="6647688" y="2011680"/>
-            <a:ext cx="4846320" cy="457200"/>
-          </a:xfrm>
-          <a:prstGeom prst="rect">
-            <a:avLst/>
-          </a:prstGeom>
-          <a:noFill/>
-          <a:ln/>
-        </p:spPr>
-        <p:txBody>
-          <a:bodyPr wrap="square" lIns="0" tIns="0" rIns="0" bIns="0" rtlCol="0" anchor="ctr"/>
-          <a:lstStyle/>
-          <a:p>
-            <a:pPr indent="0" marL="0">
-              <a:buNone/>
-            </a:pPr>
-            <a:r>
-              <a:rPr lang="en-US" sz="1900" b="1" dirty="0">
-                <a:solidFill>
-                  <a:srgbClr val="8B5CF6"/>
-                </a:solidFill>
-                <a:latin typeface="맑은 고딕" pitchFamily="34" charset="0"/>
-                <a:ea typeface="맑은 고딕" pitchFamily="34" charset="-122"/>
-                <a:cs typeface="맑은 고딕" pitchFamily="34" charset="-120"/>
-              </a:rPr>
-              <a:t>사내 GPT-OSS-120B</a:t>
-            </a:r>
-            <a:endParaRPr lang="en-US" sz="1900" dirty="0"/>
-          </a:p>
-        </p:txBody>
-      </p:sp>
-      <p:sp>
-        <p:nvSpPr>
-          <p:cNvPr id="9" name="Text 7"/>
-          <p:cNvSpPr/>
-          <p:nvPr/>
-        </p:nvSpPr>
-        <p:spPr>
-          <a:xfrm>
-            <a:off x="6693408" y="2606040"/>
-            <a:ext cx="4754880" cy="1737360"/>
-          </a:xfrm>
-          <a:prstGeom prst="rect">
-            <a:avLst/>
-          </a:prstGeom>
-          <a:noFill/>
-          <a:ln/>
-        </p:spPr>
-        <p:txBody>
-          <a:bodyPr wrap="square" lIns="0" tIns="0" rIns="0" bIns="0" rtlCol="0" anchor="ctr"/>
-          <a:lstStyle/>
-          <a:p>
-            <a:pPr marL="342900" indent="-342900">
-              <a:spcAft>
-                <a:spcPts val="700"/>
-              </a:spcAft>
-              <a:buSzPct val="100000"/>
-              <a:buChar char="•"/>
-            </a:pPr>
-            <a:r>
-              <a:rPr lang="en-US" sz="1300" dirty="0">
-                <a:solidFill>
-                  <a:srgbClr val="1F2937"/>
-                </a:solidFill>
-                <a:latin typeface="맑은 고딕" pitchFamily="34" charset="0"/>
-                <a:ea typeface="맑은 고딕" pitchFamily="34" charset="-122"/>
-                <a:cs typeface="맑은 고딕" pitchFamily="34" charset="-120"/>
-              </a:rPr>
-              <a:t>사내 LLM API 서비스(OpenAI 호환)</a:t>
-            </a:r>
-            <a:endParaRPr lang="en-US" sz="1300" dirty="0"/>
-          </a:p>
-          <a:p>
-            <a:pPr marL="342900" indent="-342900">
-              <a:spcAft>
-                <a:spcPts val="700"/>
-              </a:spcAft>
-              <a:buSzPct val="100000"/>
-              <a:buChar char="•"/>
-            </a:pPr>
-            <a:r>
-              <a:rPr lang="en-US" sz="1300" dirty="0">
-                <a:solidFill>
-                  <a:srgbClr val="1F2937"/>
-                </a:solidFill>
-                <a:latin typeface="맑은 고딕" pitchFamily="34" charset="0"/>
-                <a:ea typeface="맑은 고딕" pitchFamily="34" charset="-122"/>
-                <a:cs typeface="맑은 고딕" pitchFamily="34" charset="-120"/>
-              </a:rPr>
-              <a:t>훨씬 큰 모델 → 어려운 판단 정확도 유리</a:t>
-            </a:r>
-            <a:endParaRPr lang="en-US" sz="1300" dirty="0"/>
-          </a:p>
-          <a:p>
-            <a:pPr marL="342900" indent="-342900">
-              <a:spcAft>
-                <a:spcPts val="700"/>
-              </a:spcAft>
-              <a:buSzPct val="100000"/>
-              <a:buChar char="•"/>
-            </a:pPr>
-            <a:r>
-              <a:rPr lang="en-US" sz="1300" dirty="0">
-                <a:solidFill>
-                  <a:srgbClr val="1F2937"/>
-                </a:solidFill>
-                <a:latin typeface="맑은 고딕" pitchFamily="34" charset="0"/>
-                <a:ea typeface="맑은 고딕" pitchFamily="34" charset="-122"/>
-                <a:cs typeface="맑은 고딕" pitchFamily="34" charset="-120"/>
-              </a:rPr>
-              <a:t>공용 서버 의존</a:t>
-            </a:r>
-            <a:endParaRPr lang="en-US" sz="1300" dirty="0"/>
-          </a:p>
-        </p:txBody>
-      </p:sp>
-      <p:sp>
-        <p:nvSpPr>
-          <p:cNvPr id="10" name="Shape 8"/>
-          <p:cNvSpPr/>
-          <p:nvPr/>
-        </p:nvSpPr>
-        <p:spPr>
-          <a:xfrm>
-            <a:off x="566928" y="4709160"/>
-            <a:ext cx="11064240" cy="1463040"/>
-          </a:xfrm>
-          <a:prstGeom prst="roundRect">
-            <a:avLst>
-              <a:gd name="adj" fmla="val 6250"/>
-            </a:avLst>
-          </a:prstGeom>
-          <a:solidFill>
-            <a:srgbClr val="1E1B4B"/>
-          </a:solidFill>
-          <a:ln/>
-          <a:effectLst>
-            <a:outerShdw sx="100000" sy="100000" kx="0" ky="0" algn="bl" rotWithShape="0" blurRad="127000" dist="50800" dir="5400000">
-              <a:srgbClr val="1E1B4B">
-                <a:alpha val="18000"/>
-              </a:srgbClr>
-            </a:outerShdw>
-          </a:effectLst>
-        </p:spPr>
-      </p:sp>
-      <p:sp>
-        <p:nvSpPr>
-          <p:cNvPr id="11" name="Text 9"/>
-          <p:cNvSpPr/>
-          <p:nvPr/>
-        </p:nvSpPr>
-        <p:spPr>
-          <a:xfrm>
-            <a:off x="886968" y="4892040"/>
-            <a:ext cx="10424160" cy="457200"/>
-          </a:xfrm>
-          <a:prstGeom prst="rect">
-            <a:avLst/>
-          </a:prstGeom>
-          <a:noFill/>
-          <a:ln/>
-        </p:spPr>
-        <p:txBody>
-          <a:bodyPr wrap="square" lIns="0" tIns="0" rIns="0" bIns="0" rtlCol="0" anchor="ctr"/>
-          <a:lstStyle/>
-          <a:p>
-            <a:pPr indent="0" marL="0">
-              <a:buNone/>
-            </a:pPr>
-            <a:r>
-              <a:rPr lang="en-US" sz="1350" b="1" dirty="0">
-                <a:solidFill>
-                  <a:srgbClr val="FFFFFF"/>
-                </a:solidFill>
-                <a:latin typeface="맑은 고딕" pitchFamily="34" charset="0"/>
-                <a:ea typeface="맑은 고딕" pitchFamily="34" charset="-122"/>
-                <a:cs typeface="맑은 고딕" pitchFamily="34" charset="-120"/>
-              </a:rPr>
-              <a:t>응답 시간은 둘 다 3~5초로 비슷</a:t>
-            </a:r>
-            <a:pPr indent="0" marL="0">
-              <a:buNone/>
-            </a:pPr>
-            <a:r>
-              <a:rPr lang="en-US" sz="1350" dirty="0">
-                <a:solidFill>
-                  <a:srgbClr val="C7D2FE"/>
-                </a:solidFill>
-                <a:latin typeface="맑은 고딕" pitchFamily="34" charset="0"/>
-                <a:ea typeface="맑은 고딕" pitchFamily="34" charset="-122"/>
-                <a:cs typeface="맑은 고딕" pitchFamily="34" charset="-120"/>
-              </a:rPr>
-              <a:t> → 속도가 아니라 정확도·자립성으로 선택. 동일 요구사항 세트로 실측 후 확정.</a:t>
-            </a:r>
-            <a:endParaRPr lang="en-US" sz="1350" dirty="0"/>
-          </a:p>
-        </p:txBody>
-      </p:sp>
-      <p:sp>
-        <p:nvSpPr>
-          <p:cNvPr id="12" name="Text 10"/>
-          <p:cNvSpPr/>
-          <p:nvPr/>
-        </p:nvSpPr>
-        <p:spPr>
-          <a:xfrm>
-            <a:off x="886968" y="5440680"/>
-            <a:ext cx="10424160" cy="640080"/>
-          </a:xfrm>
-          <a:prstGeom prst="rect">
-            <a:avLst/>
-          </a:prstGeom>
-          <a:noFill/>
-          <a:ln/>
-        </p:spPr>
-        <p:txBody>
-          <a:bodyPr wrap="square" lIns="0" tIns="0" rIns="0" bIns="0" rtlCol="0" anchor="ctr"/>
-          <a:lstStyle/>
-          <a:p>
-            <a:pPr indent="0" marL="0">
-              <a:lnSpc>
-                <a:spcPct val="105000"/>
-              </a:lnSpc>
-              <a:buNone/>
-            </a:pPr>
-            <a:r>
-              <a:rPr lang="en-US" sz="1250" b="1" dirty="0">
-                <a:solidFill>
-                  <a:srgbClr val="A5B4FC"/>
-                </a:solidFill>
-                <a:latin typeface="맑은 고딕" pitchFamily="34" charset="0"/>
-                <a:ea typeface="맑은 고딕" pitchFamily="34" charset="-122"/>
-                <a:cs typeface="맑은 고딕" pitchFamily="34" charset="-120"/>
-              </a:rPr>
-              <a:t>양자화란?</a:t>
-            </a:r>
-            <a:pPr indent="0" marL="0">
-              <a:lnSpc>
-                <a:spcPct val="105000"/>
-              </a:lnSpc>
+            <a:pPr algn="ctr" indent="0" marL="0">
               <a:buNone/>
             </a:pPr>
             <a:r>
               <a:rPr lang="en-US" sz="1250" dirty="0">
                 <a:solidFill>
-                  <a:srgbClr val="C7D2FE"/>
-                </a:solidFill>
-                <a:latin typeface="맑은 고딕" pitchFamily="34" charset="0"/>
-                <a:ea typeface="맑은 고딕" pitchFamily="34" charset="-122"/>
-                <a:cs typeface="맑은 고딕" pitchFamily="34" charset="-120"/>
-              </a:rPr>
-              <a:t>  사진을 JPG로 압축하듯 용량↓·품질 소폭↓. 8B 원본(≈16GB)은 8GB GPU에 못 올라가 5.85GB로 압축해 사용.</a:t>
+                  <a:srgbClr val="6B7280"/>
+                </a:solidFill>
+                <a:latin typeface="맑은 고딕" pitchFamily="34" charset="0"/>
+                <a:ea typeface="맑은 고딕" pitchFamily="34" charset="-122"/>
+                <a:cs typeface="맑은 고딕" pitchFamily="34" charset="-120"/>
+              </a:rPr>
+              <a:t>요구사항 1건 ↔ 기능별 티켓 3개, 각 티켓 아래 산출물 3종을 실제 Jira ID로 연결</a:t>
             </a:r>
             <a:endParaRPr lang="en-US" sz="1250" dirty="0"/>
           </a:p>
@@ -8002,7 +7855,7 @@
                 <a:ea typeface="맑은 고딕" pitchFamily="34" charset="-122"/>
                 <a:cs typeface="맑은 고딕" pitchFamily="34" charset="-120"/>
               </a:rPr>
-              <a:t>일정</a:t>
+              <a:t>핵심 기능 3 · 산출물 관리 ②</a:t>
             </a:r>
             <a:endParaRPr lang="en-US" sz="1200" dirty="0"/>
           </a:p>
@@ -8041,15 +7894,111 @@
                 <a:ea typeface="맑은 고딕" pitchFamily="34" charset="-122"/>
                 <a:cs typeface="맑은 고딕" pitchFamily="34" charset="-120"/>
               </a:rPr>
-              <a:t>개발 로드맵 · 마일스톤 (8 ~ 11월)</a:t>
+              <a:t>변경 추적 (변경 영향 분석)</a:t>
             </a:r>
             <a:endParaRPr lang="en-US" sz="3000" dirty="0"/>
+          </a:p>
+        </p:txBody>
+      </p:sp>
+      <p:sp>
+        <p:nvSpPr>
+          <p:cNvPr id="4" name="Text 2"/>
+          <p:cNvSpPr/>
+          <p:nvPr/>
+        </p:nvSpPr>
+        <p:spPr>
+          <a:xfrm>
+            <a:off x="10424160" y="822960"/>
+            <a:ext cx="1737360" cy="310896"/>
+          </a:xfrm>
+          <a:prstGeom prst="roundRect">
+            <a:avLst>
+              <a:gd name="adj" fmla="val 47059"/>
+            </a:avLst>
+          </a:prstGeom>
+          <a:solidFill>
+            <a:srgbClr val="FEF3C7"/>
+          </a:solidFill>
+          <a:ln/>
+        </p:spPr>
+        <p:txBody>
+          <a:bodyPr wrap="square" lIns="0" tIns="0" rIns="0" bIns="0" rtlCol="0" anchor="ctr"/>
+          <a:lstStyle/>
+          <a:p>
+            <a:pPr algn="ctr" indent="0" marL="0">
+              <a:buNone/>
+            </a:pPr>
+            <a:r>
+              <a:rPr lang="en-US" sz="1100" b="1" dirty="0">
+                <a:solidFill>
+                  <a:srgbClr val="B45309"/>
+                </a:solidFill>
+                <a:latin typeface="맑은 고딕" pitchFamily="34" charset="0"/>
+                <a:ea typeface="맑은 고딕" pitchFamily="34" charset="-122"/>
+                <a:cs typeface="맑은 고딕" pitchFamily="34" charset="-120"/>
+              </a:rPr>
+              <a:t>개발 예정</a:t>
+            </a:r>
+            <a:endParaRPr lang="en-US" sz="1100" dirty="0"/>
+          </a:p>
+        </p:txBody>
+      </p:sp>
+      <p:sp>
+        <p:nvSpPr>
+          <p:cNvPr id="5" name="Text 3"/>
+          <p:cNvSpPr/>
+          <p:nvPr/>
+        </p:nvSpPr>
+        <p:spPr>
+          <a:xfrm>
+            <a:off x="566928" y="1371600"/>
+            <a:ext cx="11064240" cy="320040"/>
+          </a:xfrm>
+          <a:prstGeom prst="rect">
+            <a:avLst/>
+          </a:prstGeom>
+          <a:noFill/>
+          <a:ln/>
+        </p:spPr>
+        <p:txBody>
+          <a:bodyPr wrap="square" lIns="0" tIns="0" rIns="0" bIns="0" rtlCol="0" anchor="ctr"/>
+          <a:lstStyle/>
+          <a:p>
+            <a:pPr indent="0" marL="0">
+              <a:buNone/>
+            </a:pPr>
+            <a:r>
+              <a:rPr lang="en-US" sz="1400" b="1" dirty="0">
+                <a:solidFill>
+                  <a:srgbClr val="1F2937"/>
+                </a:solidFill>
+                <a:latin typeface="맑은 고딕" pitchFamily="34" charset="0"/>
+                <a:ea typeface="맑은 고딕" pitchFamily="34" charset="-122"/>
+                <a:cs typeface="맑은 고딕" pitchFamily="34" charset="-120"/>
+              </a:rPr>
+              <a:t>② 변경 추적 </a:t>
+            </a:r>
+            <a:pPr indent="0" marL="0">
+              <a:buNone/>
+            </a:pPr>
+            <a:r>
+              <a:rPr lang="en-US" sz="1400" dirty="0">
+                <a:solidFill>
+                  <a:srgbClr val="6B7280"/>
+                </a:solidFill>
+                <a:latin typeface="맑은 고딕" pitchFamily="34" charset="0"/>
+                <a:ea typeface="맑은 고딕" pitchFamily="34" charset="-122"/>
+                <a:cs typeface="맑은 고딕" pitchFamily="34" charset="-120"/>
+              </a:rPr>
+              <a:t>— 요구사항을 수정하면, 그 문장을 근거로 만든 산출물을 자동으로 찾아 알림</a:t>
+            </a:r>
+            <a:endParaRPr lang="en-US" sz="1400" dirty="0"/>
           </a:p>
         </p:txBody>
       </p:sp>
       <p:pic>
         <p:nvPicPr>
-          <p:cNvPr id="4" name="Image 0" descr="/home/user/semes-superrookie/docs/img/ppt-roadmap.png">    </p:cNvPr>
+          <p:cNvPr id="6" name="Image 0" descr="/home/user/semes-superrookie/docs/img/ppt-trace-edit.png">    </p:cNvPr>
           <p:cNvPicPr>
             <a:picLocks noChangeAspect="1"/>
           </p:cNvPicPr>
@@ -8063,8 +8012,8 @@
         </p:blipFill>
         <p:spPr>
           <a:xfrm>
-            <a:off x="196596" y="2148840"/>
-            <a:ext cx="11795760" cy="3289097"/>
+            <a:off x="1065276" y="1737360"/>
+            <a:ext cx="10058400" cy="2779776"/>
           </a:xfrm>
           <a:prstGeom prst="rect">
             <a:avLst/>
@@ -8073,14 +8022,14 @@
       </p:pic>
       <p:sp>
         <p:nvSpPr>
-          <p:cNvPr id="5" name="Text 2"/>
-          <p:cNvSpPr/>
-          <p:nvPr/>
-        </p:nvSpPr>
-        <p:spPr>
-          <a:xfrm>
-            <a:off x="566928" y="5806440"/>
-            <a:ext cx="11064240" cy="457200"/>
+          <p:cNvPr id="7" name="Text 4"/>
+          <p:cNvSpPr/>
+          <p:nvPr/>
+        </p:nvSpPr>
+        <p:spPr>
+          <a:xfrm>
+            <a:off x="566928" y="4535424"/>
+            <a:ext cx="11064240" cy="292608"/>
           </a:xfrm>
           <a:prstGeom prst="rect">
             <a:avLst/>
@@ -8096,20 +8045,44 @@
               <a:buNone/>
             </a:pPr>
             <a:r>
-              <a:rPr lang="en-US" sz="1250" dirty="0">
-                <a:solidFill>
-                  <a:srgbClr val="6B7280"/>
-                </a:solidFill>
-                <a:latin typeface="맑은 고딕" pitchFamily="34" charset="0"/>
-                <a:ea typeface="맑은 고딕" pitchFamily="34" charset="-122"/>
-                <a:cs typeface="맑은 고딕" pitchFamily="34" charset="-120"/>
-              </a:rPr>
-              <a:t>과제 공식일정(◆ 8/10 계획 · 9/29 중간보고 · 11월 말 최종보고) 사이사이에 개발을 2단계씩, 총 4단계로 진행</a:t>
-            </a:r>
-            <a:endParaRPr lang="en-US" sz="1250" dirty="0"/>
-          </a:p>
-        </p:txBody>
-      </p:sp>
+              <a:rPr lang="en-US" sz="1300" b="1" dirty="0">
+                <a:solidFill>
+                  <a:srgbClr val="6366F1"/>
+                </a:solidFill>
+                <a:latin typeface="맑은 고딕" pitchFamily="34" charset="0"/>
+                <a:ea typeface="맑은 고딕" pitchFamily="34" charset="-122"/>
+                <a:cs typeface="맑은 고딕" pitchFamily="34" charset="-120"/>
+              </a:rPr>
+              <a:t>↓  저장 시 자동 추적</a:t>
+            </a:r>
+            <a:endParaRPr lang="en-US" sz="1300" dirty="0"/>
+          </a:p>
+        </p:txBody>
+      </p:sp>
+      <p:pic>
+        <p:nvPicPr>
+          <p:cNvPr id="8" name="Image 1" descr="/home/user/semes-superrookie/docs/img/ppt-trace-2.png">    </p:cNvPr>
+          <p:cNvPicPr>
+            <a:picLocks noChangeAspect="1"/>
+          </p:cNvPicPr>
+          <p:nvPr/>
+        </p:nvPicPr>
+        <p:blipFill>
+          <a:blip r:embed="rId2"/>
+          <a:stretch>
+            <a:fillRect/>
+          </a:stretch>
+        </p:blipFill>
+        <p:spPr>
+          <a:xfrm>
+            <a:off x="1065276" y="4882896"/>
+            <a:ext cx="10058400" cy="1559052"/>
+          </a:xfrm>
+          <a:prstGeom prst="rect">
+            <a:avLst/>
+          </a:prstGeom>
+        </p:spPr>
+      </p:pic>
     </p:spTree>
   </p:cSld>
   <p:clrMapOvr>
@@ -8124,7 +8097,7 @@
     <p:bg>
       <p:bgPr>
         <a:solidFill>
-          <a:srgbClr val="1E1B4B"/>
+          <a:srgbClr val="FFFFFF"/>
         </a:solidFill>
       </p:bgPr>
     </p:bg>
@@ -8150,7 +8123,7 @@
         </p:nvSpPr>
         <p:spPr>
           <a:xfrm>
-            <a:off x="566928" y="502920"/>
+            <a:off x="566928" y="457200"/>
             <a:ext cx="10058400" cy="274320"/>
           </a:xfrm>
           <a:prstGeom prst="rect">
@@ -8169,13 +8142,13 @@
             <a:r>
               <a:rPr lang="en-US" sz="1200" b="1" spc="100" kern="0" dirty="0">
                 <a:solidFill>
-                  <a:srgbClr val="A5B4FC"/>
-                </a:solidFill>
-                <a:latin typeface="맑은 고딕" pitchFamily="34" charset="0"/>
-                <a:ea typeface="맑은 고딕" pitchFamily="34" charset="-122"/>
-                <a:cs typeface="맑은 고딕" pitchFamily="34" charset="-120"/>
-              </a:rPr>
-              <a:t>기대 효과</a:t>
+                  <a:srgbClr val="6366F1"/>
+                </a:solidFill>
+                <a:latin typeface="맑은 고딕" pitchFamily="34" charset="0"/>
+                <a:ea typeface="맑은 고딕" pitchFamily="34" charset="-122"/>
+                <a:cs typeface="맑은 고딕" pitchFamily="34" charset="-120"/>
+              </a:rPr>
+              <a:t>AI</a:t>
             </a:r>
             <a:endParaRPr lang="en-US" sz="1200" dirty="0"/>
           </a:p>
@@ -8189,7 +8162,7 @@
         </p:nvSpPr>
         <p:spPr>
           <a:xfrm>
-            <a:off x="566928" y="804672"/>
+            <a:off x="566928" y="749808"/>
             <a:ext cx="10515600" cy="640080"/>
           </a:xfrm>
           <a:prstGeom prst="rect">
@@ -8208,13 +8181,13 @@
             <a:r>
               <a:rPr lang="en-US" sz="3000" b="1" dirty="0">
                 <a:solidFill>
-                  <a:srgbClr val="FFFFFF"/>
-                </a:solidFill>
-                <a:latin typeface="맑은 고딕" pitchFamily="34" charset="0"/>
-                <a:ea typeface="맑은 고딕" pitchFamily="34" charset="-122"/>
-                <a:cs typeface="맑은 고딕" pitchFamily="34" charset="-120"/>
-              </a:rPr>
-              <a:t>수작업 문서화 공수를 크게 줄인다</a:t>
+                  <a:srgbClr val="1F2937"/>
+                </a:solidFill>
+                <a:latin typeface="맑은 고딕" pitchFamily="34" charset="0"/>
+                <a:ea typeface="맑은 고딕" pitchFamily="34" charset="-122"/>
+                <a:cs typeface="맑은 고딕" pitchFamily="34" charset="-120"/>
+              </a:rPr>
+              <a:t>AI — 두 엔진 비교</a:t>
             </a:r>
             <a:endParaRPr lang="en-US" sz="3000" dirty="0"/>
           </a:p>
@@ -8228,20 +8201,20 @@
         </p:nvSpPr>
         <p:spPr>
           <a:xfrm>
-            <a:off x="566928" y="1920240"/>
-            <a:ext cx="3529584" cy="3200400"/>
+            <a:off x="566928" y="1783080"/>
+            <a:ext cx="5440680" cy="2697480"/>
           </a:xfrm>
           <a:prstGeom prst="roundRect">
             <a:avLst>
-              <a:gd name="adj" fmla="val 2857"/>
+              <a:gd name="adj" fmla="val 3390"/>
             </a:avLst>
           </a:prstGeom>
           <a:solidFill>
-            <a:srgbClr val="312E81"/>
+            <a:srgbClr val="EEF2FF"/>
           </a:solidFill>
           <a:ln w="12700">
             <a:solidFill>
-              <a:srgbClr val="4338CA"/>
+              <a:srgbClr val="C7D2FE"/>
             </a:solidFill>
             <a:prstDash val="solid"/>
           </a:ln>
@@ -8255,8 +8228,8 @@
         </p:nvSpPr>
         <p:spPr>
           <a:xfrm>
-            <a:off x="841248" y="2331720"/>
-            <a:ext cx="2980944" cy="548640"/>
+            <a:off x="886968" y="2011680"/>
+            <a:ext cx="4846320" cy="457200"/>
           </a:xfrm>
           <a:prstGeom prst="rect">
             <a:avLst/>
@@ -8272,17 +8245,17 @@
               <a:buNone/>
             </a:pPr>
             <a:r>
-              <a:rPr lang="en-US" sz="2000" b="1" dirty="0">
-                <a:solidFill>
-                  <a:srgbClr val="C7D2FE"/>
-                </a:solidFill>
-                <a:latin typeface="맑은 고딕" pitchFamily="34" charset="0"/>
-                <a:ea typeface="맑은 고딕" pitchFamily="34" charset="-122"/>
-                <a:cs typeface="맑은 고딕" pitchFamily="34" charset="-120"/>
-              </a:rPr>
-              <a:t>평균 3시간</a:t>
-            </a:r>
-            <a:endParaRPr lang="en-US" sz="2000" dirty="0"/>
+              <a:rPr lang="en-US" sz="1900" b="1" dirty="0">
+                <a:solidFill>
+                  <a:srgbClr val="6366F1"/>
+                </a:solidFill>
+                <a:latin typeface="맑은 고딕" pitchFamily="34" charset="0"/>
+                <a:ea typeface="맑은 고딕" pitchFamily="34" charset="-122"/>
+                <a:cs typeface="맑은 고딕" pitchFamily="34" charset="-120"/>
+              </a:rPr>
+              <a:t>로컬 Qwen3-8B</a:t>
+            </a:r>
+            <a:endParaRPr lang="en-US" sz="1900" dirty="0"/>
           </a:p>
         </p:txBody>
       </p:sp>
@@ -8294,8 +8267,8 @@
         </p:nvSpPr>
         <p:spPr>
           <a:xfrm>
-            <a:off x="841248" y="2926080"/>
-            <a:ext cx="2980944" cy="822960"/>
+            <a:off x="932688" y="2606040"/>
+            <a:ext cx="4754880" cy="1737360"/>
           </a:xfrm>
           <a:prstGeom prst="rect">
             <a:avLst/>
@@ -8307,88 +8280,92 @@
           <a:bodyPr wrap="square" lIns="0" tIns="0" rIns="0" bIns="0" rtlCol="0" anchor="ctr"/>
           <a:lstStyle/>
           <a:p>
-            <a:pPr indent="0" marL="0">
-              <a:buNone/>
-            </a:pPr>
-            <a:r>
-              <a:rPr lang="en-US" sz="3200" b="1" dirty="0">
-                <a:solidFill>
-                  <a:srgbClr val="FFFFFF"/>
-                </a:solidFill>
-                <a:latin typeface="맑은 고딕" pitchFamily="34" charset="0"/>
-                <a:ea typeface="맑은 고딕" pitchFamily="34" charset="-122"/>
-                <a:cs typeface="맑은 고딕" pitchFamily="34" charset="-120"/>
-              </a:rPr>
-              <a:t>→ 5분 이내</a:t>
-            </a:r>
-            <a:endParaRPr lang="en-US" sz="3200" dirty="0"/>
-          </a:p>
-        </p:txBody>
-      </p:sp>
-      <p:sp>
-        <p:nvSpPr>
-          <p:cNvPr id="7" name="Text 5"/>
-          <p:cNvSpPr/>
-          <p:nvPr/>
-        </p:nvSpPr>
-        <p:spPr>
-          <a:xfrm>
-            <a:off x="841248" y="4114800"/>
-            <a:ext cx="2980944" cy="822960"/>
-          </a:xfrm>
-          <a:prstGeom prst="rect">
-            <a:avLst/>
-          </a:prstGeom>
-          <a:noFill/>
-          <a:ln/>
-        </p:spPr>
-        <p:txBody>
-          <a:bodyPr wrap="square" lIns="0" tIns="0" rIns="0" bIns="0" rtlCol="0" anchor="ctr"/>
-          <a:lstStyle/>
-          <a:p>
-            <a:pPr indent="0" marL="0">
-              <a:lnSpc>
-                <a:spcPct val="110000"/>
-              </a:lnSpc>
-              <a:buNone/>
+            <a:pPr marL="342900" indent="-342900">
+              <a:spcAft>
+                <a:spcPts val="700"/>
+              </a:spcAft>
+              <a:buSzPct val="100000"/>
+              <a:buChar char="•"/>
             </a:pPr>
             <a:r>
               <a:rPr lang="en-US" sz="1300" dirty="0">
                 <a:solidFill>
-                  <a:srgbClr val="A5B4FC"/>
-                </a:solidFill>
-                <a:latin typeface="맑은 고딕" pitchFamily="34" charset="0"/>
-                <a:ea typeface="맑은 고딕" pitchFamily="34" charset="-122"/>
-                <a:cs typeface="맑은 고딕" pitchFamily="34" charset="-120"/>
-              </a:rPr>
-              <a:t>하나의 기능에 대한 산출물 작성</a:t>
+                  <a:srgbClr val="1F2937"/>
+                </a:solidFill>
+                <a:latin typeface="맑은 고딕" pitchFamily="34" charset="0"/>
+                <a:ea typeface="맑은 고딕" pitchFamily="34" charset="-122"/>
+                <a:cs typeface="맑은 고딕" pitchFamily="34" charset="-120"/>
+              </a:rPr>
+              <a:t>내 워크스테이션(P4000 8GB)에서 직접</a:t>
             </a:r>
             <a:endParaRPr lang="en-US" sz="1300" dirty="0"/>
           </a:p>
-        </p:txBody>
-      </p:sp>
-      <p:sp>
-        <p:nvSpPr>
-          <p:cNvPr id="8" name="Shape 6"/>
-          <p:cNvSpPr/>
-          <p:nvPr/>
-        </p:nvSpPr>
-        <p:spPr>
-          <a:xfrm>
-            <a:off x="4407408" y="1920240"/>
-            <a:ext cx="3529584" cy="3200400"/>
+          <a:p>
+            <a:pPr marL="342900" indent="-342900">
+              <a:spcAft>
+                <a:spcPts val="700"/>
+              </a:spcAft>
+              <a:buSzPct val="100000"/>
+              <a:buChar char="•"/>
+            </a:pPr>
+            <a:r>
+              <a:rPr lang="en-US" sz="1300" dirty="0">
+                <a:solidFill>
+                  <a:srgbClr val="1F2937"/>
+                </a:solidFill>
+                <a:latin typeface="맑은 고딕" pitchFamily="34" charset="0"/>
+                <a:ea typeface="맑은 고딕" pitchFamily="34" charset="-122"/>
+                <a:cs typeface="맑은 고딕" pitchFamily="34" charset="-120"/>
+              </a:rPr>
+              <a:t>8B 모델 · GGUF 양자화 Q5_K_M(≈5.85GB)</a:t>
+            </a:r>
+            <a:endParaRPr lang="en-US" sz="1300" dirty="0"/>
+          </a:p>
+          <a:p>
+            <a:pPr marL="342900" indent="-342900">
+              <a:spcAft>
+                <a:spcPts val="700"/>
+              </a:spcAft>
+              <a:buSzPct val="100000"/>
+              <a:buChar char="•"/>
+            </a:pPr>
+            <a:r>
+              <a:rPr lang="en-US" sz="1300" dirty="0">
+                <a:solidFill>
+                  <a:srgbClr val="1F2937"/>
+                </a:solidFill>
+                <a:latin typeface="맑은 고딕" pitchFamily="34" charset="0"/>
+                <a:ea typeface="맑은 고딕" pitchFamily="34" charset="-122"/>
+                <a:cs typeface="맑은 고딕" pitchFamily="34" charset="-120"/>
+              </a:rPr>
+              <a:t>오프라인 자립 · 한국어 강점</a:t>
+            </a:r>
+            <a:endParaRPr lang="en-US" sz="1300" dirty="0"/>
+          </a:p>
+        </p:txBody>
+      </p:sp>
+      <p:sp>
+        <p:nvSpPr>
+          <p:cNvPr id="7" name="Shape 5"/>
+          <p:cNvSpPr/>
+          <p:nvPr/>
+        </p:nvSpPr>
+        <p:spPr>
+          <a:xfrm>
+            <a:off x="6327648" y="1783080"/>
+            <a:ext cx="5440680" cy="2697480"/>
           </a:xfrm>
           <a:prstGeom prst="roundRect">
             <a:avLst>
-              <a:gd name="adj" fmla="val 2857"/>
+              <a:gd name="adj" fmla="val 3390"/>
             </a:avLst>
           </a:prstGeom>
           <a:solidFill>
-            <a:srgbClr val="312E81"/>
+            <a:srgbClr val="F5F3FF"/>
           </a:solidFill>
           <a:ln w="12700">
             <a:solidFill>
-              <a:srgbClr val="4338CA"/>
+              <a:srgbClr val="DDD6FE"/>
             </a:solidFill>
             <a:prstDash val="solid"/>
           </a:ln>
@@ -8396,14 +8373,14 @@
       </p:sp>
       <p:sp>
         <p:nvSpPr>
-          <p:cNvPr id="9" name="Text 7"/>
-          <p:cNvSpPr/>
-          <p:nvPr/>
-        </p:nvSpPr>
-        <p:spPr>
-          <a:xfrm>
-            <a:off x="4681728" y="2331720"/>
-            <a:ext cx="2980944" cy="548640"/>
+          <p:cNvPr id="8" name="Text 6"/>
+          <p:cNvSpPr/>
+          <p:nvPr/>
+        </p:nvSpPr>
+        <p:spPr>
+          <a:xfrm>
+            <a:off x="6647688" y="2011680"/>
+            <a:ext cx="4846320" cy="457200"/>
           </a:xfrm>
           <a:prstGeom prst="rect">
             <a:avLst/>
@@ -8419,30 +8396,30 @@
               <a:buNone/>
             </a:pPr>
             <a:r>
-              <a:rPr lang="en-US" sz="2000" b="1" dirty="0">
-                <a:solidFill>
-                  <a:srgbClr val="C7D2FE"/>
-                </a:solidFill>
-                <a:latin typeface="맑은 고딕" pitchFamily="34" charset="0"/>
-                <a:ea typeface="맑은 고딕" pitchFamily="34" charset="-122"/>
-                <a:cs typeface="맑은 고딕" pitchFamily="34" charset="-120"/>
-              </a:rPr>
-              <a:t>수동 확인</a:t>
-            </a:r>
-            <a:endParaRPr lang="en-US" sz="2000" dirty="0"/>
-          </a:p>
-        </p:txBody>
-      </p:sp>
-      <p:sp>
-        <p:nvSpPr>
-          <p:cNvPr id="10" name="Text 8"/>
-          <p:cNvSpPr/>
-          <p:nvPr/>
-        </p:nvSpPr>
-        <p:spPr>
-          <a:xfrm>
-            <a:off x="4681728" y="2926080"/>
-            <a:ext cx="2980944" cy="822960"/>
+              <a:rPr lang="en-US" sz="1900" b="1" dirty="0">
+                <a:solidFill>
+                  <a:srgbClr val="8B5CF6"/>
+                </a:solidFill>
+                <a:latin typeface="맑은 고딕" pitchFamily="34" charset="0"/>
+                <a:ea typeface="맑은 고딕" pitchFamily="34" charset="-122"/>
+                <a:cs typeface="맑은 고딕" pitchFamily="34" charset="-120"/>
+              </a:rPr>
+              <a:t>사내 GPT-OSS-120B</a:t>
+            </a:r>
+            <a:endParaRPr lang="en-US" sz="1900" dirty="0"/>
+          </a:p>
+        </p:txBody>
+      </p:sp>
+      <p:sp>
+        <p:nvSpPr>
+          <p:cNvPr id="9" name="Text 7"/>
+          <p:cNvSpPr/>
+          <p:nvPr/>
+        </p:nvSpPr>
+        <p:spPr>
+          <a:xfrm>
+            <a:off x="6693408" y="2606040"/>
+            <a:ext cx="4754880" cy="1737360"/>
           </a:xfrm>
           <a:prstGeom prst="rect">
             <a:avLst/>
@@ -8454,23 +8431,98 @@
           <a:bodyPr wrap="square" lIns="0" tIns="0" rIns="0" bIns="0" rtlCol="0" anchor="ctr"/>
           <a:lstStyle/>
           <a:p>
-            <a:pPr indent="0" marL="0">
-              <a:buNone/>
-            </a:pPr>
-            <a:r>
-              <a:rPr lang="en-US" sz="3200" b="1" dirty="0">
-                <a:solidFill>
-                  <a:srgbClr val="FFFFFF"/>
-                </a:solidFill>
-                <a:latin typeface="맑은 고딕" pitchFamily="34" charset="0"/>
-                <a:ea typeface="맑은 고딕" pitchFamily="34" charset="-122"/>
-                <a:cs typeface="맑은 고딕" pitchFamily="34" charset="-120"/>
-              </a:rPr>
-              <a:t>→ 자동 표시</a:t>
-            </a:r>
-            <a:endParaRPr lang="en-US" sz="3200" dirty="0"/>
-          </a:p>
-        </p:txBody>
+            <a:pPr marL="342900" indent="-342900">
+              <a:spcAft>
+                <a:spcPts val="700"/>
+              </a:spcAft>
+              <a:buSzPct val="100000"/>
+              <a:buChar char="•"/>
+            </a:pPr>
+            <a:r>
+              <a:rPr lang="en-US" sz="1300" dirty="0">
+                <a:solidFill>
+                  <a:srgbClr val="1F2937"/>
+                </a:solidFill>
+                <a:latin typeface="맑은 고딕" pitchFamily="34" charset="0"/>
+                <a:ea typeface="맑은 고딕" pitchFamily="34" charset="-122"/>
+                <a:cs typeface="맑은 고딕" pitchFamily="34" charset="-120"/>
+              </a:rPr>
+              <a:t>사내 LLM API 서비스(OpenAI 호환)</a:t>
+            </a:r>
+            <a:endParaRPr lang="en-US" sz="1300" dirty="0"/>
+          </a:p>
+          <a:p>
+            <a:pPr marL="342900" indent="-342900">
+              <a:spcAft>
+                <a:spcPts val="700"/>
+              </a:spcAft>
+              <a:buSzPct val="100000"/>
+              <a:buChar char="•"/>
+            </a:pPr>
+            <a:r>
+              <a:rPr lang="en-US" sz="1300" dirty="0">
+                <a:solidFill>
+                  <a:srgbClr val="1F2937"/>
+                </a:solidFill>
+                <a:latin typeface="맑은 고딕" pitchFamily="34" charset="0"/>
+                <a:ea typeface="맑은 고딕" pitchFamily="34" charset="-122"/>
+                <a:cs typeface="맑은 고딕" pitchFamily="34" charset="-120"/>
+              </a:rPr>
+              <a:t>훨씬 큰 모델 → 어려운 판단 정확도 유리</a:t>
+            </a:r>
+            <a:endParaRPr lang="en-US" sz="1300" dirty="0"/>
+          </a:p>
+          <a:p>
+            <a:pPr marL="342900" indent="-342900">
+              <a:spcAft>
+                <a:spcPts val="700"/>
+              </a:spcAft>
+              <a:buSzPct val="100000"/>
+              <a:buChar char="•"/>
+            </a:pPr>
+            <a:r>
+              <a:rPr lang="en-US" sz="1300" dirty="0">
+                <a:solidFill>
+                  <a:srgbClr val="1F2937"/>
+                </a:solidFill>
+                <a:latin typeface="맑은 고딕" pitchFamily="34" charset="0"/>
+                <a:ea typeface="맑은 고딕" pitchFamily="34" charset="-122"/>
+                <a:cs typeface="맑은 고딕" pitchFamily="34" charset="-120"/>
+              </a:rPr>
+              <a:t>공용 서버 의존</a:t>
+            </a:r>
+            <a:endParaRPr lang="en-US" sz="1300" dirty="0"/>
+          </a:p>
+        </p:txBody>
+      </p:sp>
+      <p:sp>
+        <p:nvSpPr>
+          <p:cNvPr id="10" name="Shape 8"/>
+          <p:cNvSpPr/>
+          <p:nvPr/>
+        </p:nvSpPr>
+        <p:spPr>
+          <a:xfrm>
+            <a:off x="566928" y="4709160"/>
+            <a:ext cx="11064240" cy="1463040"/>
+          </a:xfrm>
+          <a:prstGeom prst="roundRect">
+            <a:avLst>
+              <a:gd name="adj" fmla="val 6250"/>
+            </a:avLst>
+          </a:prstGeom>
+          <a:solidFill>
+            <a:srgbClr val="1E1B4B"/>
+          </a:solidFill>
+          <a:ln/>
+          <a:effectLst>
+            <a:outerShdw sx="100000" sy="100000" kx="0" ky="0" algn="bl" rotWithShape="0" blurRad="127000" dist="50800" dir="5400000">
+              <a:srgbClr val="1E1B4B">
+                <a:alpha val="18000"/>
+              </a:srgbClr>
+            </a:outerShdw>
+          </a:effectLst>
+        </p:spPr>
       </p:sp>
       <p:sp>
         <p:nvSpPr>
@@ -8480,8 +8532,8 @@
         </p:nvSpPr>
         <p:spPr>
           <a:xfrm>
-            <a:off x="4681728" y="4114800"/>
-            <a:ext cx="2980944" cy="822960"/>
+            <a:off x="886968" y="4892040"/>
+            <a:ext cx="10424160" cy="457200"/>
           </a:xfrm>
           <a:prstGeom prst="rect">
             <a:avLst/>
@@ -8494,63 +8546,47 @@
           <a:lstStyle/>
           <a:p>
             <a:pPr indent="0" marL="0">
-              <a:lnSpc>
-                <a:spcPct val="110000"/>
-              </a:lnSpc>
-              <a:buNone/>
-            </a:pPr>
-            <a:r>
-              <a:rPr lang="en-US" sz="1300" dirty="0">
-                <a:solidFill>
-                  <a:srgbClr val="A5B4FC"/>
-                </a:solidFill>
-                <a:latin typeface="맑은 고딕" pitchFamily="34" charset="0"/>
-                <a:ea typeface="맑은 고딕" pitchFamily="34" charset="-122"/>
-                <a:cs typeface="맑은 고딕" pitchFamily="34" charset="-120"/>
-              </a:rPr>
-              <a:t>요구사항 변경 시 영향받는 문서 파악</a:t>
-            </a:r>
-            <a:endParaRPr lang="en-US" sz="1300" dirty="0"/>
-          </a:p>
-        </p:txBody>
-      </p:sp>
-      <p:sp>
-        <p:nvSpPr>
-          <p:cNvPr id="12" name="Shape 10"/>
-          <p:cNvSpPr/>
-          <p:nvPr/>
-        </p:nvSpPr>
-        <p:spPr>
-          <a:xfrm>
-            <a:off x="8247888" y="1920240"/>
-            <a:ext cx="3529584" cy="3200400"/>
-          </a:xfrm>
-          <a:prstGeom prst="roundRect">
-            <a:avLst>
-              <a:gd name="adj" fmla="val 2857"/>
-            </a:avLst>
-          </a:prstGeom>
-          <a:solidFill>
-            <a:srgbClr val="312E81"/>
-          </a:solidFill>
-          <a:ln w="12700">
-            <a:solidFill>
-              <a:srgbClr val="4338CA"/>
-            </a:solidFill>
-            <a:prstDash val="solid"/>
-          </a:ln>
-        </p:spPr>
-      </p:sp>
-      <p:sp>
-        <p:nvSpPr>
-          <p:cNvPr id="13" name="Text 11"/>
-          <p:cNvSpPr/>
-          <p:nvPr/>
-        </p:nvSpPr>
-        <p:spPr>
-          <a:xfrm>
-            <a:off x="8522208" y="2331720"/>
-            <a:ext cx="2980944" cy="548640"/>
+              <a:buNone/>
+            </a:pPr>
+            <a:r>
+              <a:rPr lang="en-US" sz="1350" b="1" dirty="0">
+                <a:solidFill>
+                  <a:srgbClr val="FFFFFF"/>
+                </a:solidFill>
+                <a:latin typeface="맑은 고딕" pitchFamily="34" charset="0"/>
+                <a:ea typeface="맑은 고딕" pitchFamily="34" charset="-122"/>
+                <a:cs typeface="맑은 고딕" pitchFamily="34" charset="-120"/>
+              </a:rPr>
+              <a:t>응답 시간은 둘 다 3~5초로 비슷</a:t>
+            </a:r>
+            <a:pPr indent="0" marL="0">
+              <a:buNone/>
+            </a:pPr>
+            <a:r>
+              <a:rPr lang="en-US" sz="1350" dirty="0">
+                <a:solidFill>
+                  <a:srgbClr val="C7D2FE"/>
+                </a:solidFill>
+                <a:latin typeface="맑은 고딕" pitchFamily="34" charset="0"/>
+                <a:ea typeface="맑은 고딕" pitchFamily="34" charset="-122"/>
+                <a:cs typeface="맑은 고딕" pitchFamily="34" charset="-120"/>
+              </a:rPr>
+              <a:t> → 속도가 아니라 정확도·자립성으로 선택. 동일 요구사항 세트로 실측 후 확정.</a:t>
+            </a:r>
+            <a:endParaRPr lang="en-US" sz="1350" dirty="0"/>
+          </a:p>
+        </p:txBody>
+      </p:sp>
+      <p:sp>
+        <p:nvSpPr>
+          <p:cNvPr id="12" name="Text 10"/>
+          <p:cNvSpPr/>
+          <p:nvPr/>
+        </p:nvSpPr>
+        <p:spPr>
+          <a:xfrm>
+            <a:off x="886968" y="5440680"/>
+            <a:ext cx="10424160" cy="640080"/>
           </a:xfrm>
           <a:prstGeom prst="rect">
             <a:avLst/>
@@ -8563,140 +8599,40 @@
           <a:lstStyle/>
           <a:p>
             <a:pPr indent="0" marL="0">
-              <a:buNone/>
-            </a:pPr>
-            <a:r>
-              <a:rPr lang="en-US" sz="2000" b="1" dirty="0">
-                <a:solidFill>
-                  <a:srgbClr val="C7D2FE"/>
-                </a:solidFill>
-                <a:latin typeface="맑은 고딕" pitchFamily="34" charset="0"/>
-                <a:ea typeface="맑은 고딕" pitchFamily="34" charset="-122"/>
-                <a:cs typeface="맑은 고딕" pitchFamily="34" charset="-120"/>
-              </a:rPr>
-              <a:t>개발 중 발견</a:t>
-            </a:r>
-            <a:endParaRPr lang="en-US" sz="2000" dirty="0"/>
-          </a:p>
-        </p:txBody>
-      </p:sp>
-      <p:sp>
-        <p:nvSpPr>
-          <p:cNvPr id="14" name="Text 12"/>
-          <p:cNvSpPr/>
-          <p:nvPr/>
-        </p:nvSpPr>
-        <p:spPr>
-          <a:xfrm>
-            <a:off x="8522208" y="2926080"/>
-            <a:ext cx="2980944" cy="822960"/>
-          </a:xfrm>
-          <a:prstGeom prst="rect">
-            <a:avLst/>
-          </a:prstGeom>
-          <a:noFill/>
-          <a:ln/>
-        </p:spPr>
-        <p:txBody>
-          <a:bodyPr wrap="square" lIns="0" tIns="0" rIns="0" bIns="0" rtlCol="0" anchor="ctr"/>
-          <a:lstStyle/>
-          <a:p>
-            <a:pPr indent="0" marL="0">
-              <a:buNone/>
-            </a:pPr>
-            <a:r>
-              <a:rPr lang="en-US" sz="3200" b="1" dirty="0">
-                <a:solidFill>
-                  <a:srgbClr val="FFFFFF"/>
-                </a:solidFill>
-                <a:latin typeface="맑은 고딕" pitchFamily="34" charset="0"/>
-                <a:ea typeface="맑은 고딕" pitchFamily="34" charset="-122"/>
-                <a:cs typeface="맑은 고딕" pitchFamily="34" charset="-120"/>
-              </a:rPr>
-              <a:t>→ 착수 전 발견</a:t>
-            </a:r>
-            <a:endParaRPr lang="en-US" sz="3200" dirty="0"/>
-          </a:p>
-        </p:txBody>
-      </p:sp>
-      <p:sp>
-        <p:nvSpPr>
-          <p:cNvPr id="15" name="Text 13"/>
-          <p:cNvSpPr/>
-          <p:nvPr/>
-        </p:nvSpPr>
-        <p:spPr>
-          <a:xfrm>
-            <a:off x="8522208" y="4114800"/>
-            <a:ext cx="2980944" cy="822960"/>
-          </a:xfrm>
-          <a:prstGeom prst="rect">
-            <a:avLst/>
-          </a:prstGeom>
-          <a:noFill/>
-          <a:ln/>
-        </p:spPr>
-        <p:txBody>
-          <a:bodyPr wrap="square" lIns="0" tIns="0" rIns="0" bIns="0" rtlCol="0" anchor="ctr"/>
-          <a:lstStyle/>
-          <a:p>
+              <a:lnSpc>
+                <a:spcPct val="105000"/>
+              </a:lnSpc>
+              <a:buNone/>
+            </a:pPr>
+            <a:r>
+              <a:rPr lang="en-US" sz="1250" b="1" dirty="0">
+                <a:solidFill>
+                  <a:srgbClr val="A5B4FC"/>
+                </a:solidFill>
+                <a:latin typeface="맑은 고딕" pitchFamily="34" charset="0"/>
+                <a:ea typeface="맑은 고딕" pitchFamily="34" charset="-122"/>
+                <a:cs typeface="맑은 고딕" pitchFamily="34" charset="-120"/>
+              </a:rPr>
+              <a:t>양자화란?</a:t>
+            </a:r>
             <a:pPr indent="0" marL="0">
               <a:lnSpc>
-                <a:spcPct val="110000"/>
+                <a:spcPct val="105000"/>
               </a:lnSpc>
               <a:buNone/>
             </a:pPr>
             <a:r>
-              <a:rPr lang="en-US" sz="1300" dirty="0">
-                <a:solidFill>
-                  <a:srgbClr val="A5B4FC"/>
-                </a:solidFill>
-                <a:latin typeface="맑은 고딕" pitchFamily="34" charset="0"/>
-                <a:ea typeface="맑은 고딕" pitchFamily="34" charset="-122"/>
-                <a:cs typeface="맑은 고딕" pitchFamily="34" charset="-120"/>
-              </a:rPr>
-              <a:t>불명확·상충으로 인한 재작업</a:t>
-            </a:r>
-            <a:endParaRPr lang="en-US" sz="1300" dirty="0"/>
-          </a:p>
-        </p:txBody>
-      </p:sp>
-      <p:sp>
-        <p:nvSpPr>
-          <p:cNvPr id="16" name="Text 14"/>
-          <p:cNvSpPr/>
-          <p:nvPr/>
-        </p:nvSpPr>
-        <p:spPr>
-          <a:xfrm>
-            <a:off x="566928" y="5852160"/>
-            <a:ext cx="10058400" cy="365760"/>
-          </a:xfrm>
-          <a:prstGeom prst="rect">
-            <a:avLst/>
-          </a:prstGeom>
-          <a:noFill/>
-          <a:ln/>
-        </p:spPr>
-        <p:txBody>
-          <a:bodyPr wrap="square" lIns="0" tIns="0" rIns="0" bIns="0" rtlCol="0" anchor="ctr"/>
-          <a:lstStyle/>
-          <a:p>
-            <a:pPr indent="0" marL="0">
-              <a:buNone/>
-            </a:pPr>
-            <a:r>
-              <a:rPr lang="en-US" sz="1200" i="1" dirty="0">
-                <a:solidFill>
-                  <a:srgbClr val="818CF8"/>
-                </a:solidFill>
-                <a:latin typeface="맑은 고딕" pitchFamily="34" charset="0"/>
-                <a:ea typeface="맑은 고딕" pitchFamily="34" charset="-122"/>
-                <a:cs typeface="맑은 고딕" pitchFamily="34" charset="-120"/>
-              </a:rPr>
-              <a:t>※ 목표/예시 수치 — 실측으로 확정</a:t>
-            </a:r>
-            <a:endParaRPr lang="en-US" sz="1200" dirty="0"/>
+              <a:rPr lang="en-US" sz="1250" dirty="0">
+                <a:solidFill>
+                  <a:srgbClr val="C7D2FE"/>
+                </a:solidFill>
+                <a:latin typeface="맑은 고딕" pitchFamily="34" charset="0"/>
+                <a:ea typeface="맑은 고딕" pitchFamily="34" charset="-122"/>
+                <a:cs typeface="맑은 고딕" pitchFamily="34" charset="-120"/>
+              </a:rPr>
+              <a:t>  사진을 JPG로 압축하듯 용량↓·품질 소폭↓. 8B 원본(≈16GB)은 8GB GPU에 못 올라가 5.85GB로 압축해 사용.</a:t>
+            </a:r>
+            <a:endParaRPr lang="en-US" sz="1250" dirty="0"/>
           </a:p>
         </p:txBody>
       </p:sp>
@@ -8765,7 +8701,7 @@
                 <a:ea typeface="맑은 고딕" pitchFamily="34" charset="-122"/>
                 <a:cs typeface="맑은 고딕" pitchFamily="34" charset="-120"/>
               </a:rPr>
-              <a:t>정리</a:t>
+              <a:t>일정</a:t>
             </a:r>
             <a:endParaRPr lang="en-US" sz="1200" dirty="0"/>
           </a:p>
@@ -8804,12 +8740,185 @@
                 <a:ea typeface="맑은 고딕" pitchFamily="34" charset="-122"/>
                 <a:cs typeface="맑은 고딕" pitchFamily="34" charset="-120"/>
               </a:rPr>
-              <a:t>이슈 &amp; 다음 계획</a:t>
+              <a:t>개발 로드맵 · 마일스톤 (8 ~ 11월)</a:t>
             </a:r>
             <a:endParaRPr lang="en-US" sz="3000" dirty="0"/>
           </a:p>
         </p:txBody>
       </p:sp>
+      <p:pic>
+        <p:nvPicPr>
+          <p:cNvPr id="4" name="Image 0" descr="/home/user/semes-superrookie/docs/img/ppt-roadmap.png">    </p:cNvPr>
+          <p:cNvPicPr>
+            <a:picLocks noChangeAspect="1"/>
+          </p:cNvPicPr>
+          <p:nvPr/>
+        </p:nvPicPr>
+        <p:blipFill>
+          <a:blip r:embed="rId1"/>
+          <a:stretch>
+            <a:fillRect/>
+          </a:stretch>
+        </p:blipFill>
+        <p:spPr>
+          <a:xfrm>
+            <a:off x="196596" y="2148840"/>
+            <a:ext cx="11795760" cy="3289097"/>
+          </a:xfrm>
+          <a:prstGeom prst="rect">
+            <a:avLst/>
+          </a:prstGeom>
+        </p:spPr>
+      </p:pic>
+      <p:sp>
+        <p:nvSpPr>
+          <p:cNvPr id="5" name="Text 2"/>
+          <p:cNvSpPr/>
+          <p:nvPr/>
+        </p:nvSpPr>
+        <p:spPr>
+          <a:xfrm>
+            <a:off x="566928" y="5806440"/>
+            <a:ext cx="11064240" cy="457200"/>
+          </a:xfrm>
+          <a:prstGeom prst="rect">
+            <a:avLst/>
+          </a:prstGeom>
+          <a:noFill/>
+          <a:ln/>
+        </p:spPr>
+        <p:txBody>
+          <a:bodyPr wrap="square" lIns="0" tIns="0" rIns="0" bIns="0" rtlCol="0" anchor="ctr"/>
+          <a:lstStyle/>
+          <a:p>
+            <a:pPr algn="ctr" indent="0" marL="0">
+              <a:buNone/>
+            </a:pPr>
+            <a:r>
+              <a:rPr lang="en-US" sz="1250" dirty="0">
+                <a:solidFill>
+                  <a:srgbClr val="6B7280"/>
+                </a:solidFill>
+                <a:latin typeface="맑은 고딕" pitchFamily="34" charset="0"/>
+                <a:ea typeface="맑은 고딕" pitchFamily="34" charset="-122"/>
+                <a:cs typeface="맑은 고딕" pitchFamily="34" charset="-120"/>
+              </a:rPr>
+              <a:t>과제 공식일정(◆ 8/10 계획 · 9/29 중간보고 · 11월 말 최종보고) 사이사이에 개발을 2단계씩, 총 4단계로 진행</a:t>
+            </a:r>
+            <a:endParaRPr lang="en-US" sz="1250" dirty="0"/>
+          </a:p>
+        </p:txBody>
+      </p:sp>
+    </p:spTree>
+  </p:cSld>
+  <p:clrMapOvr>
+    <a:masterClrMapping/>
+  </p:clrMapOvr>
+</p:sld>
+</file>
+
+<file path=ppt/slides/slide19.xml><?xml version="1.0" encoding="utf-8"?>
+<p:sld xmlns:a="http://schemas.openxmlformats.org/drawingml/2006/main" xmlns:r="http://schemas.openxmlformats.org/officeDocument/2006/relationships" xmlns:p="http://schemas.openxmlformats.org/presentationml/2006/main">
+  <p:cSld name="Slide 19">
+    <p:bg>
+      <p:bgPr>
+        <a:solidFill>
+          <a:srgbClr val="1E1B4B"/>
+        </a:solidFill>
+      </p:bgPr>
+    </p:bg>
+    <p:spTree>
+      <p:nvGrpSpPr>
+        <p:cNvPr id="1" name=""/>
+        <p:cNvGrpSpPr/>
+        <p:nvPr/>
+      </p:nvGrpSpPr>
+      <p:grpSpPr>
+        <a:xfrm>
+          <a:off x="0" y="0"/>
+          <a:ext cx="0" cy="0"/>
+          <a:chOff x="0" y="0"/>
+          <a:chExt cx="0" cy="0"/>
+        </a:xfrm>
+      </p:grpSpPr>
+      <p:sp>
+        <p:nvSpPr>
+          <p:cNvPr id="2" name="Text 0"/>
+          <p:cNvSpPr/>
+          <p:nvPr/>
+        </p:nvSpPr>
+        <p:spPr>
+          <a:xfrm>
+            <a:off x="566928" y="502920"/>
+            <a:ext cx="10058400" cy="274320"/>
+          </a:xfrm>
+          <a:prstGeom prst="rect">
+            <a:avLst/>
+          </a:prstGeom>
+          <a:noFill/>
+          <a:ln/>
+        </p:spPr>
+        <p:txBody>
+          <a:bodyPr wrap="square" lIns="0" tIns="0" rIns="0" bIns="0" rtlCol="0" anchor="ctr"/>
+          <a:lstStyle/>
+          <a:p>
+            <a:pPr indent="0" marL="0">
+              <a:buNone/>
+            </a:pPr>
+            <a:r>
+              <a:rPr lang="en-US" sz="1200" b="1" spc="100" kern="0" dirty="0">
+                <a:solidFill>
+                  <a:srgbClr val="A5B4FC"/>
+                </a:solidFill>
+                <a:latin typeface="맑은 고딕" pitchFamily="34" charset="0"/>
+                <a:ea typeface="맑은 고딕" pitchFamily="34" charset="-122"/>
+                <a:cs typeface="맑은 고딕" pitchFamily="34" charset="-120"/>
+              </a:rPr>
+              <a:t>기대 효과</a:t>
+            </a:r>
+            <a:endParaRPr lang="en-US" sz="1200" dirty="0"/>
+          </a:p>
+        </p:txBody>
+      </p:sp>
+      <p:sp>
+        <p:nvSpPr>
+          <p:cNvPr id="3" name="Text 1"/>
+          <p:cNvSpPr/>
+          <p:nvPr/>
+        </p:nvSpPr>
+        <p:spPr>
+          <a:xfrm>
+            <a:off x="566928" y="804672"/>
+            <a:ext cx="10515600" cy="640080"/>
+          </a:xfrm>
+          <a:prstGeom prst="rect">
+            <a:avLst/>
+          </a:prstGeom>
+          <a:noFill/>
+          <a:ln/>
+        </p:spPr>
+        <p:txBody>
+          <a:bodyPr wrap="square" lIns="0" tIns="0" rIns="0" bIns="0" rtlCol="0" anchor="ctr"/>
+          <a:lstStyle/>
+          <a:p>
+            <a:pPr indent="0" marL="0">
+              <a:buNone/>
+            </a:pPr>
+            <a:r>
+              <a:rPr lang="en-US" sz="3000" b="1" dirty="0">
+                <a:solidFill>
+                  <a:srgbClr val="FFFFFF"/>
+                </a:solidFill>
+                <a:latin typeface="맑은 고딕" pitchFamily="34" charset="0"/>
+                <a:ea typeface="맑은 고딕" pitchFamily="34" charset="-122"/>
+                <a:cs typeface="맑은 고딕" pitchFamily="34" charset="-120"/>
+              </a:rPr>
+              <a:t>수작업 문서화 공수를 크게 줄인다</a:t>
+            </a:r>
+            <a:endParaRPr lang="en-US" sz="3000" dirty="0"/>
+          </a:p>
+        </p:txBody>
+      </p:sp>
       <p:sp>
         <p:nvSpPr>
           <p:cNvPr id="4" name="Shape 2"/>
@@ -8818,30 +8927,23 @@
         </p:nvSpPr>
         <p:spPr>
           <a:xfrm>
-            <a:off x="566928" y="1783080"/>
-            <a:ext cx="5349240" cy="3977640"/>
+            <a:off x="566928" y="1920240"/>
+            <a:ext cx="3529584" cy="3200400"/>
           </a:xfrm>
           <a:prstGeom prst="roundRect">
             <a:avLst>
-              <a:gd name="adj" fmla="val 2299"/>
+              <a:gd name="adj" fmla="val 2857"/>
             </a:avLst>
           </a:prstGeom>
           <a:solidFill>
-            <a:srgbClr val="FFFFFF"/>
+            <a:srgbClr val="312E81"/>
           </a:solidFill>
           <a:ln w="12700">
             <a:solidFill>
-              <a:srgbClr val="E5E7EB"/>
+              <a:srgbClr val="4338CA"/>
             </a:solidFill>
             <a:prstDash val="solid"/>
           </a:ln>
-          <a:effectLst>
-            <a:outerShdw sx="100000" sy="100000" kx="0" ky="0" algn="bl" rotWithShape="0" blurRad="127000" dist="50800" dir="5400000">
-              <a:srgbClr val="1E1B4B">
-                <a:alpha val="18000"/>
-              </a:srgbClr>
-            </a:outerShdw>
-          </a:effectLst>
         </p:spPr>
       </p:sp>
       <p:sp>
@@ -8852,8 +8954,8 @@
         </p:nvSpPr>
         <p:spPr>
           <a:xfrm>
-            <a:off x="886968" y="2011680"/>
-            <a:ext cx="4572000" cy="365760"/>
+            <a:off x="841248" y="2331720"/>
+            <a:ext cx="2980944" cy="548640"/>
           </a:xfrm>
           <a:prstGeom prst="rect">
             <a:avLst/>
@@ -8869,17 +8971,17 @@
               <a:buNone/>
             </a:pPr>
             <a:r>
-              <a:rPr lang="en-US" sz="1600" b="1" dirty="0">
-                <a:solidFill>
-                  <a:srgbClr val="059669"/>
-                </a:solidFill>
-                <a:latin typeface="맑은 고딕" pitchFamily="34" charset="0"/>
-                <a:ea typeface="맑은 고딕" pitchFamily="34" charset="-122"/>
-                <a:cs typeface="맑은 고딕" pitchFamily="34" charset="-120"/>
-              </a:rPr>
-              <a:t>해결한 이슈</a:t>
-            </a:r>
-            <a:endParaRPr lang="en-US" sz="1600" dirty="0"/>
+              <a:rPr lang="en-US" sz="2000" b="1" dirty="0">
+                <a:solidFill>
+                  <a:srgbClr val="C7D2FE"/>
+                </a:solidFill>
+                <a:latin typeface="맑은 고딕" pitchFamily="34" charset="0"/>
+                <a:ea typeface="맑은 고딕" pitchFamily="34" charset="-122"/>
+                <a:cs typeface="맑은 고딕" pitchFamily="34" charset="-120"/>
+              </a:rPr>
+              <a:t>평균 3시간</a:t>
+            </a:r>
+            <a:endParaRPr lang="en-US" sz="2000" dirty="0"/>
           </a:p>
         </p:txBody>
       </p:sp>
@@ -8891,8 +8993,47 @@
         </p:nvSpPr>
         <p:spPr>
           <a:xfrm>
-            <a:off x="886968" y="2514600"/>
-            <a:ext cx="4709160" cy="1463040"/>
+            <a:off x="841248" y="2926080"/>
+            <a:ext cx="2980944" cy="822960"/>
+          </a:xfrm>
+          <a:prstGeom prst="rect">
+            <a:avLst/>
+          </a:prstGeom>
+          <a:noFill/>
+          <a:ln/>
+        </p:spPr>
+        <p:txBody>
+          <a:bodyPr wrap="square" lIns="0" tIns="0" rIns="0" bIns="0" rtlCol="0" anchor="ctr"/>
+          <a:lstStyle/>
+          <a:p>
+            <a:pPr indent="0" marL="0">
+              <a:buNone/>
+            </a:pPr>
+            <a:r>
+              <a:rPr lang="en-US" sz="3200" b="1" dirty="0">
+                <a:solidFill>
+                  <a:srgbClr val="FFFFFF"/>
+                </a:solidFill>
+                <a:latin typeface="맑은 고딕" pitchFamily="34" charset="0"/>
+                <a:ea typeface="맑은 고딕" pitchFamily="34" charset="-122"/>
+                <a:cs typeface="맑은 고딕" pitchFamily="34" charset="-120"/>
+              </a:rPr>
+              <a:t>→ 5분 이내</a:t>
+            </a:r>
+            <a:endParaRPr lang="en-US" sz="3200" dirty="0"/>
+          </a:p>
+        </p:txBody>
+      </p:sp>
+      <p:sp>
+        <p:nvSpPr>
+          <p:cNvPr id="7" name="Text 5"/>
+          <p:cNvSpPr/>
+          <p:nvPr/>
+        </p:nvSpPr>
+        <p:spPr>
+          <a:xfrm>
+            <a:off x="841248" y="4114800"/>
+            <a:ext cx="2980944" cy="822960"/>
           </a:xfrm>
           <a:prstGeom prst="rect">
             <a:avLst/>
@@ -8908,47 +9049,295 @@
               <a:lnSpc>
                 <a:spcPct val="110000"/>
               </a:lnSpc>
-              <a:spcAft>
-                <a:spcPts val="400"/>
-              </a:spcAft>
-              <a:buNone/>
-            </a:pPr>
-            <a:r>
-              <a:rPr lang="en-US" sz="1400" b="1" dirty="0">
-                <a:solidFill>
-                  <a:srgbClr val="1F2937"/>
-                </a:solidFill>
-                <a:latin typeface="맑은 고딕" pitchFamily="34" charset="0"/>
-                <a:ea typeface="맑은 고딕" pitchFamily="34" charset="-122"/>
-                <a:cs typeface="맑은 고딕" pitchFamily="34" charset="-120"/>
-              </a:rPr>
-              <a:t>NPM 빌드 실패</a:t>
-            </a:r>
-            <a:endParaRPr lang="en-US" sz="1400" dirty="0"/>
-          </a:p>
+              <a:buNone/>
+            </a:pPr>
+            <a:r>
+              <a:rPr lang="en-US" sz="1300" dirty="0">
+                <a:solidFill>
+                  <a:srgbClr val="A5B4FC"/>
+                </a:solidFill>
+                <a:latin typeface="맑은 고딕" pitchFamily="34" charset="0"/>
+                <a:ea typeface="맑은 고딕" pitchFamily="34" charset="-122"/>
+                <a:cs typeface="맑은 고딕" pitchFamily="34" charset="-120"/>
+              </a:rPr>
+              <a:t>하나의 기능에 대한 산출물 작성</a:t>
+            </a:r>
+            <a:endParaRPr lang="en-US" sz="1300" dirty="0"/>
+          </a:p>
+        </p:txBody>
+      </p:sp>
+      <p:sp>
+        <p:nvSpPr>
+          <p:cNvPr id="8" name="Shape 6"/>
+          <p:cNvSpPr/>
+          <p:nvPr/>
+        </p:nvSpPr>
+        <p:spPr>
+          <a:xfrm>
+            <a:off x="4407408" y="1920240"/>
+            <a:ext cx="3529584" cy="3200400"/>
+          </a:xfrm>
+          <a:prstGeom prst="roundRect">
+            <a:avLst>
+              <a:gd name="adj" fmla="val 2857"/>
+            </a:avLst>
+          </a:prstGeom>
+          <a:solidFill>
+            <a:srgbClr val="312E81"/>
+          </a:solidFill>
+          <a:ln w="12700">
+            <a:solidFill>
+              <a:srgbClr val="4338CA"/>
+            </a:solidFill>
+            <a:prstDash val="solid"/>
+          </a:ln>
+        </p:spPr>
+      </p:sp>
+      <p:sp>
+        <p:nvSpPr>
+          <p:cNvPr id="9" name="Text 7"/>
+          <p:cNvSpPr/>
+          <p:nvPr/>
+        </p:nvSpPr>
+        <p:spPr>
+          <a:xfrm>
+            <a:off x="4681728" y="2331720"/>
+            <a:ext cx="2980944" cy="548640"/>
+          </a:xfrm>
+          <a:prstGeom prst="rect">
+            <a:avLst/>
+          </a:prstGeom>
+          <a:noFill/>
+          <a:ln/>
+        </p:spPr>
+        <p:txBody>
+          <a:bodyPr wrap="square" lIns="0" tIns="0" rIns="0" bIns="0" rtlCol="0" anchor="ctr"/>
+          <a:lstStyle/>
+          <a:p>
+            <a:pPr indent="0" marL="0">
+              <a:buNone/>
+            </a:pPr>
+            <a:r>
+              <a:rPr lang="en-US" sz="2000" b="1" dirty="0">
+                <a:solidFill>
+                  <a:srgbClr val="C7D2FE"/>
+                </a:solidFill>
+                <a:latin typeface="맑은 고딕" pitchFamily="34" charset="0"/>
+                <a:ea typeface="맑은 고딕" pitchFamily="34" charset="-122"/>
+                <a:cs typeface="맑은 고딕" pitchFamily="34" charset="-120"/>
+              </a:rPr>
+              <a:t>수동 확인</a:t>
+            </a:r>
+            <a:endParaRPr lang="en-US" sz="2000" dirty="0"/>
+          </a:p>
+        </p:txBody>
+      </p:sp>
+      <p:sp>
+        <p:nvSpPr>
+          <p:cNvPr id="10" name="Text 8"/>
+          <p:cNvSpPr/>
+          <p:nvPr/>
+        </p:nvSpPr>
+        <p:spPr>
+          <a:xfrm>
+            <a:off x="4681728" y="2926080"/>
+            <a:ext cx="2980944" cy="822960"/>
+          </a:xfrm>
+          <a:prstGeom prst="rect">
+            <a:avLst/>
+          </a:prstGeom>
+          <a:noFill/>
+          <a:ln/>
+        </p:spPr>
+        <p:txBody>
+          <a:bodyPr wrap="square" lIns="0" tIns="0" rIns="0" bIns="0" rtlCol="0" anchor="ctr"/>
+          <a:lstStyle/>
+          <a:p>
+            <a:pPr indent="0" marL="0">
+              <a:buNone/>
+            </a:pPr>
+            <a:r>
+              <a:rPr lang="en-US" sz="3200" b="1" dirty="0">
+                <a:solidFill>
+                  <a:srgbClr val="FFFFFF"/>
+                </a:solidFill>
+                <a:latin typeface="맑은 고딕" pitchFamily="34" charset="0"/>
+                <a:ea typeface="맑은 고딕" pitchFamily="34" charset="-122"/>
+                <a:cs typeface="맑은 고딕" pitchFamily="34" charset="-120"/>
+              </a:rPr>
+              <a:t>→ 자동 표시</a:t>
+            </a:r>
+            <a:endParaRPr lang="en-US" sz="3200" dirty="0"/>
+          </a:p>
+        </p:txBody>
+      </p:sp>
+      <p:sp>
+        <p:nvSpPr>
+          <p:cNvPr id="11" name="Text 9"/>
+          <p:cNvSpPr/>
+          <p:nvPr/>
+        </p:nvSpPr>
+        <p:spPr>
+          <a:xfrm>
+            <a:off x="4681728" y="4114800"/>
+            <a:ext cx="2980944" cy="822960"/>
+          </a:xfrm>
+          <a:prstGeom prst="rect">
+            <a:avLst/>
+          </a:prstGeom>
+          <a:noFill/>
+          <a:ln/>
+        </p:spPr>
+        <p:txBody>
+          <a:bodyPr wrap="square" lIns="0" tIns="0" rIns="0" bIns="0" rtlCol="0" anchor="ctr"/>
+          <a:lstStyle/>
           <a:p>
             <a:pPr indent="0" marL="0">
               <a:lnSpc>
                 <a:spcPct val="110000"/>
               </a:lnSpc>
-              <a:spcAft>
-                <a:spcPts val="400"/>
-              </a:spcAft>
-              <a:buNone/>
-            </a:pPr>
-            <a:r>
-              <a:rPr lang="en-US" sz="1250" dirty="0">
-                <a:solidFill>
-                  <a:srgbClr val="6B7280"/>
-                </a:solidFill>
-                <a:latin typeface="맑은 고딕" pitchFamily="34" charset="0"/>
-                <a:ea typeface="맑은 고딕" pitchFamily="34" charset="-122"/>
-                <a:cs typeface="맑은 고딕" pitchFamily="34" charset="-120"/>
-              </a:rPr>
-              <a:t>사내 프록시 SSL 검사로 npm/빌드가 인증서 오류</a:t>
-            </a:r>
-            <a:endParaRPr lang="en-US" sz="1400" dirty="0"/>
-          </a:p>
+              <a:buNone/>
+            </a:pPr>
+            <a:r>
+              <a:rPr lang="en-US" sz="1300" dirty="0">
+                <a:solidFill>
+                  <a:srgbClr val="A5B4FC"/>
+                </a:solidFill>
+                <a:latin typeface="맑은 고딕" pitchFamily="34" charset="0"/>
+                <a:ea typeface="맑은 고딕" pitchFamily="34" charset="-122"/>
+                <a:cs typeface="맑은 고딕" pitchFamily="34" charset="-120"/>
+              </a:rPr>
+              <a:t>요구사항 변경 시 영향받는 문서 파악</a:t>
+            </a:r>
+            <a:endParaRPr lang="en-US" sz="1300" dirty="0"/>
+          </a:p>
+        </p:txBody>
+      </p:sp>
+      <p:sp>
+        <p:nvSpPr>
+          <p:cNvPr id="12" name="Shape 10"/>
+          <p:cNvSpPr/>
+          <p:nvPr/>
+        </p:nvSpPr>
+        <p:spPr>
+          <a:xfrm>
+            <a:off x="8247888" y="1920240"/>
+            <a:ext cx="3529584" cy="3200400"/>
+          </a:xfrm>
+          <a:prstGeom prst="roundRect">
+            <a:avLst>
+              <a:gd name="adj" fmla="val 2857"/>
+            </a:avLst>
+          </a:prstGeom>
+          <a:solidFill>
+            <a:srgbClr val="312E81"/>
+          </a:solidFill>
+          <a:ln w="12700">
+            <a:solidFill>
+              <a:srgbClr val="4338CA"/>
+            </a:solidFill>
+            <a:prstDash val="solid"/>
+          </a:ln>
+        </p:spPr>
+      </p:sp>
+      <p:sp>
+        <p:nvSpPr>
+          <p:cNvPr id="13" name="Text 11"/>
+          <p:cNvSpPr/>
+          <p:nvPr/>
+        </p:nvSpPr>
+        <p:spPr>
+          <a:xfrm